--- a/operator_hypothesis_lab/presentations/nvda_microscope_evidence.pptx
+++ b/operator_hypothesis_lab/presentations/nvda_microscope_evidence.pptx
@@ -2,26 +2,34 @@
 <file path=ppt/presentation.xml><?xml version="1.0" encoding="utf-8"?>
 <p:presentation xmlns:p="http://schemas.openxmlformats.org/presentationml/2006/main">
   <p:sldMasterIdLst>
-    <p:sldMasterId xmlns:r="http://schemas.openxmlformats.org/officeDocument/2006/relationships" id="2147483648" r:id="Ra42a1f042e8747db"/>
+    <p:sldMasterId xmlns:r="http://schemas.openxmlformats.org/officeDocument/2006/relationships" id="2147483648" r:id="Rfe586dd9ca844771"/>
   </p:sldMasterIdLst>
   <p:notesMasterIdLst>
-    <p:notesMasterId xmlns:r="http://schemas.openxmlformats.org/officeDocument/2006/relationships" r:id="Rf2ba8d9871b743d6"/>
+    <p:notesMasterId xmlns:r="http://schemas.openxmlformats.org/officeDocument/2006/relationships" r:id="R03c871664f1542bd"/>
   </p:notesMasterIdLst>
   <p:sldIdLst>
-    <p:sldId xmlns:r="http://schemas.openxmlformats.org/officeDocument/2006/relationships" id="256" r:id="R010dfcbeaf594ee6"/>
-    <p:sldId xmlns:r="http://schemas.openxmlformats.org/officeDocument/2006/relationships" id="257" r:id="Rda76ddd20ef84fca"/>
-    <p:sldId xmlns:r="http://schemas.openxmlformats.org/officeDocument/2006/relationships" id="258" r:id="Rdebf79f1740d481d"/>
-    <p:sldId xmlns:r="http://schemas.openxmlformats.org/officeDocument/2006/relationships" id="259" r:id="R21645bbadf6c4894"/>
-    <p:sldId xmlns:r="http://schemas.openxmlformats.org/officeDocument/2006/relationships" id="260" r:id="Rb5f29b91e6914479"/>
-    <p:sldId xmlns:r="http://schemas.openxmlformats.org/officeDocument/2006/relationships" id="261" r:id="Rea5397a9804d4762"/>
-    <p:sldId xmlns:r="http://schemas.openxmlformats.org/officeDocument/2006/relationships" id="262" r:id="R17a83a432d644d51"/>
-    <p:sldId xmlns:r="http://schemas.openxmlformats.org/officeDocument/2006/relationships" id="263" r:id="Rd2c16c67f0204fda"/>
-    <p:sldId xmlns:r="http://schemas.openxmlformats.org/officeDocument/2006/relationships" id="264" r:id="R2b49ca32352741c8"/>
-    <p:sldId xmlns:r="http://schemas.openxmlformats.org/officeDocument/2006/relationships" id="265" r:id="Rfb216d6b709049eb"/>
-    <p:sldId xmlns:r="http://schemas.openxmlformats.org/officeDocument/2006/relationships" id="266" r:id="R02f83329e1064d52"/>
-    <p:sldId xmlns:r="http://schemas.openxmlformats.org/officeDocument/2006/relationships" id="267" r:id="R6094c865f1f64988"/>
-    <p:sldId xmlns:r="http://schemas.openxmlformats.org/officeDocument/2006/relationships" id="268" r:id="R984840305f15465d"/>
-    <p:sldId xmlns:r="http://schemas.openxmlformats.org/officeDocument/2006/relationships" id="269" r:id="R7313c805e04a4c32"/>
+    <p:sldId xmlns:r="http://schemas.openxmlformats.org/officeDocument/2006/relationships" id="256" r:id="R27a768263ed14159"/>
+    <p:sldId xmlns:r="http://schemas.openxmlformats.org/officeDocument/2006/relationships" id="257" r:id="Rdb1f0174473a4193"/>
+    <p:sldId xmlns:r="http://schemas.openxmlformats.org/officeDocument/2006/relationships" id="258" r:id="R619cc5e9e32144cb"/>
+    <p:sldId xmlns:r="http://schemas.openxmlformats.org/officeDocument/2006/relationships" id="259" r:id="R23696ec42b614fcc"/>
+    <p:sldId xmlns:r="http://schemas.openxmlformats.org/officeDocument/2006/relationships" id="260" r:id="R78883b1937cb4d39"/>
+    <p:sldId xmlns:r="http://schemas.openxmlformats.org/officeDocument/2006/relationships" id="261" r:id="Rb9db9180c36c43a2"/>
+    <p:sldId xmlns:r="http://schemas.openxmlformats.org/officeDocument/2006/relationships" id="262" r:id="Rb915d32fc2dc47a6"/>
+    <p:sldId xmlns:r="http://schemas.openxmlformats.org/officeDocument/2006/relationships" id="263" r:id="Raa6cb380633a4703"/>
+    <p:sldId xmlns:r="http://schemas.openxmlformats.org/officeDocument/2006/relationships" id="264" r:id="Rd2c3df8c30d64ef8"/>
+    <p:sldId xmlns:r="http://schemas.openxmlformats.org/officeDocument/2006/relationships" id="265" r:id="R4a798ffdb6854728"/>
+    <p:sldId xmlns:r="http://schemas.openxmlformats.org/officeDocument/2006/relationships" id="266" r:id="R1eceb7d56f6b46fc"/>
+    <p:sldId xmlns:r="http://schemas.openxmlformats.org/officeDocument/2006/relationships" id="267" r:id="Rd19e27a3e5a941e7"/>
+    <p:sldId xmlns:r="http://schemas.openxmlformats.org/officeDocument/2006/relationships" id="268" r:id="R01c98fe7c7ca4704"/>
+    <p:sldId xmlns:r="http://schemas.openxmlformats.org/officeDocument/2006/relationships" id="269" r:id="R12f1e492880b495a"/>
+    <p:sldId xmlns:r="http://schemas.openxmlformats.org/officeDocument/2006/relationships" id="270" r:id="R91e3030376b747c4"/>
+    <p:sldId xmlns:r="http://schemas.openxmlformats.org/officeDocument/2006/relationships" id="271" r:id="Rf09472a87e0f4f93"/>
+    <p:sldId xmlns:r="http://schemas.openxmlformats.org/officeDocument/2006/relationships" id="272" r:id="R8f4e885be3784f2f"/>
+    <p:sldId xmlns:r="http://schemas.openxmlformats.org/officeDocument/2006/relationships" id="273" r:id="R103b415cd7844a21"/>
+    <p:sldId xmlns:r="http://schemas.openxmlformats.org/officeDocument/2006/relationships" id="274" r:id="R63879e09e8b248d1"/>
+    <p:sldId xmlns:r="http://schemas.openxmlformats.org/officeDocument/2006/relationships" id="275" r:id="R73cfd732817f4146"/>
+    <p:sldId xmlns:r="http://schemas.openxmlformats.org/officeDocument/2006/relationships" id="276" r:id="Rd4ce9357822741f8"/>
+    <p:sldId xmlns:r="http://schemas.openxmlformats.org/officeDocument/2006/relationships" id="277" r:id="Ra34e6c1303024106"/>
   </p:sldIdLst>
   <p:sldSz cx="12192000" cy="6858000"/>
   <p:notesSz cx="6858000" cy="9144000"/>
@@ -990,6 +998,481 @@
 </p:notes>
 </file>
 
+<file path=ppt/notesSlides/notesSlide15.xml><?xml version="1.0" encoding="utf-8"?>
+<p:notes xmlns:p="http://schemas.openxmlformats.org/presentationml/2006/main">
+  <p:cSld>
+    <p:spTree>
+      <p:nvGrpSpPr>
+        <p:cNvPr id="1" name=""/>
+        <p:cNvGrpSpPr/>
+        <p:nvPr/>
+      </p:nvGrpSpPr>
+      <p:grpSpPr>
+        <a:xfrm xmlns:a="http://schemas.openxmlformats.org/drawingml/2006/main"/>
+      </p:grpSpPr>
+      <p:sp>
+        <p:nvSpPr>
+          <p:cNvPr id="2" name="Slide Image Placeholder 1"/>
+          <p:cNvSpPr>
+            <a:spLocks xmlns:a="http://schemas.openxmlformats.org/drawingml/2006/main" noGrp="1"/>
+          </p:cNvSpPr>
+          <p:nvPr>
+            <p:ph type="sldImg" idx="0"/>
+          </p:nvPr>
+        </p:nvSpPr>
+        <p:spPr/>
+      </p:sp>
+      <p:sp>
+        <p:nvSpPr>
+          <p:cNvPr id="3" name="Notes Placeholder 2"/>
+          <p:cNvSpPr>
+            <a:spLocks xmlns:a="http://schemas.openxmlformats.org/drawingml/2006/main" noGrp="1"/>
+          </p:cNvSpPr>
+          <p:nvPr>
+            <p:ph type="body" idx="1"/>
+          </p:nvPr>
+        </p:nvSpPr>
+        <p:spPr/>
+        <p:txBody>
+          <a:bodyPr xmlns:a="http://schemas.openxmlformats.org/drawingml/2006/main"/>
+          <a:lstStyle xmlns:a="http://schemas.openxmlformats.org/drawingml/2006/main"/>
+          <a:p xmlns:a="http://schemas.openxmlformats.org/drawingml/2006/main">
+            <a:r>
+              <a:t>This section translates two already-observed NVDA 20/20 geometry clues into executable rules without changing the horizon or searching thresholds. It is a TRAIN construction test, not confirmation.</a:t>
+            </a:r>
+          </a:p>
+          <a:p xmlns:a="http://schemas.openxmlformats.org/drawingml/2006/main">
+            <a:r>
+              <a:t/>
+            </a:r>
+          </a:p>
+          <a:p xmlns:a="http://schemas.openxmlformats.org/drawingml/2006/main">
+            <a:r>
+              <a:t>[Sources]</a:t>
+            </a:r>
+          </a:p>
+          <a:p xmlns:a="http://schemas.openxmlformats.org/drawingml/2006/main">
+            <a:r>
+              <a:t>- Local executable proto-rule packet: runs/research_workbench/operator_hypothesis_lab/nvda_daily_proto_rules_20260831/report.md</a:t>
+            </a:r>
+          </a:p>
+          <a:p xmlns:a="http://schemas.openxmlformats.org/drawingml/2006/main">
+            <a:r>
+              <a:t>- Local proto-rule summary: runs/research_workbench/operator_hypothesis_lab/nvda_daily_proto_rules_20260831/rule_summary.csv</a:t>
+            </a:r>
+          </a:p>
+          <a:p xmlns:a="http://schemas.openxmlformats.org/drawingml/2006/main">
+            <a:r>
+              <a:t>[/Sources]</a:t>
+            </a:r>
+          </a:p>
+        </p:txBody>
+      </p:sp>
+      <p:sp>
+        <p:nvSpPr>
+          <p:cNvPr id="4" name="Slide Number Placeholder 3"/>
+          <p:cNvSpPr>
+            <a:spLocks xmlns:a="http://schemas.openxmlformats.org/drawingml/2006/main" noGrp="1"/>
+          </p:cNvSpPr>
+          <p:nvPr>
+            <p:ph type="sldNum" idx="5"/>
+          </p:nvPr>
+        </p:nvSpPr>
+        <p:spPr/>
+        <p:txBody>
+          <a:bodyPr xmlns:a="http://schemas.openxmlformats.org/drawingml/2006/main"/>
+          <a:lstStyle xmlns:a="http://schemas.openxmlformats.org/drawingml/2006/main"/>
+          <a:p xmlns:a="http://schemas.openxmlformats.org/drawingml/2006/main"/>
+        </p:txBody>
+      </p:sp>
+    </p:spTree>
+  </p:cSld>
+  <p:clrMapOvr>
+    <a:masterClrMapping xmlns:a="http://schemas.openxmlformats.org/drawingml/2006/main"/>
+  </p:clrMapOvr>
+</p:notes>
+</file>
+
+<file path=ppt/notesSlides/notesSlide16.xml><?xml version="1.0" encoding="utf-8"?>
+<p:notes xmlns:p="http://schemas.openxmlformats.org/presentationml/2006/main">
+  <p:cSld>
+    <p:spTree>
+      <p:nvGrpSpPr>
+        <p:cNvPr id="1" name=""/>
+        <p:cNvGrpSpPr/>
+        <p:nvPr/>
+      </p:nvGrpSpPr>
+      <p:grpSpPr>
+        <a:xfrm xmlns:a="http://schemas.openxmlformats.org/drawingml/2006/main"/>
+      </p:grpSpPr>
+      <p:sp>
+        <p:nvSpPr>
+          <p:cNvPr id="2" name="Slide Image Placeholder 1"/>
+          <p:cNvSpPr>
+            <a:spLocks xmlns:a="http://schemas.openxmlformats.org/drawingml/2006/main" noGrp="1"/>
+          </p:cNvSpPr>
+          <p:nvPr>
+            <p:ph type="sldImg" idx="0"/>
+          </p:nvPr>
+        </p:nvSpPr>
+        <p:spPr/>
+      </p:sp>
+      <p:sp>
+        <p:nvSpPr>
+          <p:cNvPr id="3" name="Notes Placeholder 2"/>
+          <p:cNvSpPr>
+            <a:spLocks xmlns:a="http://schemas.openxmlformats.org/drawingml/2006/main" noGrp="1"/>
+          </p:cNvSpPr>
+          <p:nvPr>
+            <p:ph type="body" idx="1"/>
+          </p:nvPr>
+        </p:nvSpPr>
+        <p:spPr/>
+        <p:txBody>
+          <a:bodyPr xmlns:a="http://schemas.openxmlformats.org/drawingml/2006/main"/>
+          <a:lstStyle xmlns:a="http://schemas.openxmlformats.org/drawingml/2006/main"/>
+          <a:p xmlns:a="http://schemas.openxmlformats.org/drawingml/2006/main">
+            <a:r>
+              <a:t>The rules differ only in their causal entry condition. Timing, holding period, overlap policy, and cost are held fixed so the translation comparison remains intelligible.</a:t>
+            </a:r>
+          </a:p>
+          <a:p xmlns:a="http://schemas.openxmlformats.org/drawingml/2006/main">
+            <a:r>
+              <a:t/>
+            </a:r>
+          </a:p>
+          <a:p xmlns:a="http://schemas.openxmlformats.org/drawingml/2006/main">
+            <a:r>
+              <a:t>[Sources]</a:t>
+            </a:r>
+          </a:p>
+          <a:p xmlns:a="http://schemas.openxmlformats.org/drawingml/2006/main">
+            <a:r>
+              <a:t>- Local executable proto-rule packet: runs/research_workbench/operator_hypothesis_lab/nvda_daily_proto_rules_20260831/report.md</a:t>
+            </a:r>
+          </a:p>
+          <a:p xmlns:a="http://schemas.openxmlformats.org/drawingml/2006/main">
+            <a:r>
+              <a:t>- Local proto-rule summary: runs/research_workbench/operator_hypothesis_lab/nvda_daily_proto_rules_20260831/rule_summary.csv</a:t>
+            </a:r>
+          </a:p>
+          <a:p xmlns:a="http://schemas.openxmlformats.org/drawingml/2006/main">
+            <a:r>
+              <a:t>[/Sources]</a:t>
+            </a:r>
+          </a:p>
+        </p:txBody>
+      </p:sp>
+      <p:sp>
+        <p:nvSpPr>
+          <p:cNvPr id="4" name="Slide Number Placeholder 3"/>
+          <p:cNvSpPr>
+            <a:spLocks xmlns:a="http://schemas.openxmlformats.org/drawingml/2006/main" noGrp="1"/>
+          </p:cNvSpPr>
+          <p:nvPr>
+            <p:ph type="sldNum" idx="5"/>
+          </p:nvPr>
+        </p:nvSpPr>
+        <p:spPr/>
+        <p:txBody>
+          <a:bodyPr xmlns:a="http://schemas.openxmlformats.org/drawingml/2006/main"/>
+          <a:lstStyle xmlns:a="http://schemas.openxmlformats.org/drawingml/2006/main"/>
+          <a:p xmlns:a="http://schemas.openxmlformats.org/drawingml/2006/main"/>
+        </p:txBody>
+      </p:sp>
+    </p:spTree>
+  </p:cSld>
+  <p:clrMapOvr>
+    <a:masterClrMapping xmlns:a="http://schemas.openxmlformats.org/drawingml/2006/main"/>
+  </p:clrMapOvr>
+</p:notes>
+</file>
+
+<file path=ppt/notesSlides/notesSlide17.xml><?xml version="1.0" encoding="utf-8"?>
+<p:notes xmlns:p="http://schemas.openxmlformats.org/presentationml/2006/main">
+  <p:cSld>
+    <p:spTree>
+      <p:nvGrpSpPr>
+        <p:cNvPr id="1" name=""/>
+        <p:cNvGrpSpPr/>
+        <p:nvPr/>
+      </p:nvGrpSpPr>
+      <p:grpSpPr>
+        <a:xfrm xmlns:a="http://schemas.openxmlformats.org/drawingml/2006/main"/>
+      </p:grpSpPr>
+      <p:sp>
+        <p:nvSpPr>
+          <p:cNvPr id="2" name="Slide Image Placeholder 1"/>
+          <p:cNvSpPr>
+            <a:spLocks xmlns:a="http://schemas.openxmlformats.org/drawingml/2006/main" noGrp="1"/>
+          </p:cNvSpPr>
+          <p:nvPr>
+            <p:ph type="sldImg" idx="0"/>
+          </p:nvPr>
+        </p:nvSpPr>
+        <p:spPr/>
+      </p:sp>
+      <p:sp>
+        <p:nvSpPr>
+          <p:cNvPr id="3" name="Notes Placeholder 2"/>
+          <p:cNvSpPr>
+            <a:spLocks xmlns:a="http://schemas.openxmlformats.org/drawingml/2006/main" noGrp="1"/>
+          </p:cNvSpPr>
+          <p:nvPr>
+            <p:ph type="body" idx="1"/>
+          </p:nvPr>
+        </p:nvSpPr>
+        <p:spPr/>
+        <p:txBody>
+          <a:bodyPr xmlns:a="http://schemas.openxmlformats.org/drawingml/2006/main"/>
+          <a:lstStyle xmlns:a="http://schemas.openxmlformats.org/drawingml/2006/main"/>
+          <a:p xmlns:a="http://schemas.openxmlformats.org/drawingml/2006/main">
+            <a:r>
+              <a:t>The price overlays are a sanity check on participation. Efficient-up continuation is active during many rising paths but also remains exposed to the 2022 breakdown. Calm-pullback rebound fires after losses only when the prior ATR-percent state is not high.</a:t>
+            </a:r>
+          </a:p>
+          <a:p xmlns:a="http://schemas.openxmlformats.org/drawingml/2006/main">
+            <a:r>
+              <a:t/>
+            </a:r>
+          </a:p>
+          <a:p xmlns:a="http://schemas.openxmlformats.org/drawingml/2006/main">
+            <a:r>
+              <a:t>[Sources]</a:t>
+            </a:r>
+          </a:p>
+          <a:p xmlns:a="http://schemas.openxmlformats.org/drawingml/2006/main">
+            <a:r>
+              <a:t>- Local executable proto-rule packet: runs/research_workbench/operator_hypothesis_lab/nvda_daily_proto_rules_20260831/report.md</a:t>
+            </a:r>
+          </a:p>
+          <a:p xmlns:a="http://schemas.openxmlformats.org/drawingml/2006/main">
+            <a:r>
+              <a:t>- Local non-overlapping trade ledger: runs/research_workbench/operator_hypothesis_lab/nvda_daily_proto_rules_20260831/trade_ledger.csv</a:t>
+            </a:r>
+          </a:p>
+          <a:p xmlns:a="http://schemas.openxmlformats.org/drawingml/2006/main">
+            <a:r>
+              <a:t>[/Sources]</a:t>
+            </a:r>
+          </a:p>
+        </p:txBody>
+      </p:sp>
+      <p:sp>
+        <p:nvSpPr>
+          <p:cNvPr id="4" name="Slide Number Placeholder 3"/>
+          <p:cNvSpPr>
+            <a:spLocks xmlns:a="http://schemas.openxmlformats.org/drawingml/2006/main" noGrp="1"/>
+          </p:cNvSpPr>
+          <p:nvPr>
+            <p:ph type="sldNum" idx="5"/>
+          </p:nvPr>
+        </p:nvSpPr>
+        <p:spPr/>
+        <p:txBody>
+          <a:bodyPr xmlns:a="http://schemas.openxmlformats.org/drawingml/2006/main"/>
+          <a:lstStyle xmlns:a="http://schemas.openxmlformats.org/drawingml/2006/main"/>
+          <a:p xmlns:a="http://schemas.openxmlformats.org/drawingml/2006/main"/>
+        </p:txBody>
+      </p:sp>
+    </p:spTree>
+  </p:cSld>
+  <p:clrMapOvr>
+    <a:masterClrMapping xmlns:a="http://schemas.openxmlformats.org/drawingml/2006/main"/>
+  </p:clrMapOvr>
+</p:notes>
+</file>
+
+<file path=ppt/notesSlides/notesSlide18.xml><?xml version="1.0" encoding="utf-8"?>
+<p:notes xmlns:p="http://schemas.openxmlformats.org/presentationml/2006/main">
+  <p:cSld>
+    <p:spTree>
+      <p:nvGrpSpPr>
+        <p:cNvPr id="1" name=""/>
+        <p:cNvGrpSpPr/>
+        <p:nvPr/>
+      </p:nvGrpSpPr>
+      <p:grpSpPr>
+        <a:xfrm xmlns:a="http://schemas.openxmlformats.org/drawingml/2006/main"/>
+      </p:grpSpPr>
+      <p:sp>
+        <p:nvSpPr>
+          <p:cNvPr id="2" name="Slide Image Placeholder 1"/>
+          <p:cNvSpPr>
+            <a:spLocks xmlns:a="http://schemas.openxmlformats.org/drawingml/2006/main" noGrp="1"/>
+          </p:cNvSpPr>
+          <p:nvPr>
+            <p:ph type="sldImg" idx="0"/>
+          </p:nvPr>
+        </p:nvSpPr>
+        <p:spPr/>
+      </p:sp>
+      <p:sp>
+        <p:nvSpPr>
+          <p:cNvPr id="3" name="Notes Placeholder 2"/>
+          <p:cNvSpPr>
+            <a:spLocks xmlns:a="http://schemas.openxmlformats.org/drawingml/2006/main" noGrp="1"/>
+          </p:cNvSpPr>
+          <p:nvPr>
+            <p:ph type="body" idx="1"/>
+          </p:nvPr>
+        </p:nvSpPr>
+        <p:spPr/>
+        <p:txBody>
+          <a:bodyPr xmlns:a="http://schemas.openxmlformats.org/drawingml/2006/main"/>
+          <a:lstStyle xmlns:a="http://schemas.openxmlformats.org/drawingml/2006/main"/>
+          <a:p xmlns:a="http://schemas.openxmlformats.org/drawingml/2006/main">
+            <a:r>
+              <a:t>The continuation rule averages 2.59% net versus 2.88% unconditional gross drift. The rebound rule averages 6.33% net and exceeds drift by 3.45 percentage points. Realized equity is shown only when trades exit; the dotted buy-and-hold line uses a separate right axis and is a visual context reference, not a matched-risk baseline.</a:t>
+            </a:r>
+          </a:p>
+          <a:p xmlns:a="http://schemas.openxmlformats.org/drawingml/2006/main">
+            <a:r>
+              <a:t/>
+            </a:r>
+          </a:p>
+          <a:p xmlns:a="http://schemas.openxmlformats.org/drawingml/2006/main">
+            <a:r>
+              <a:t>[Sources]</a:t>
+            </a:r>
+          </a:p>
+          <a:p xmlns:a="http://schemas.openxmlformats.org/drawingml/2006/main">
+            <a:r>
+              <a:t>- Local proto-rule summary: runs/research_workbench/operator_hypothesis_lab/nvda_daily_proto_rules_20260831/rule_summary.csv</a:t>
+            </a:r>
+          </a:p>
+          <a:p xmlns:a="http://schemas.openxmlformats.org/drawingml/2006/main">
+            <a:r>
+              <a:t>- Local executable proto-rule packet: runs/research_workbench/operator_hypothesis_lab/nvda_daily_proto_rules_20260831/report.md</a:t>
+            </a:r>
+          </a:p>
+          <a:p xmlns:a="http://schemas.openxmlformats.org/drawingml/2006/main">
+            <a:r>
+              <a:t>[/Sources]</a:t>
+            </a:r>
+          </a:p>
+        </p:txBody>
+      </p:sp>
+      <p:sp>
+        <p:nvSpPr>
+          <p:cNvPr id="4" name="Slide Number Placeholder 3"/>
+          <p:cNvSpPr>
+            <a:spLocks xmlns:a="http://schemas.openxmlformats.org/drawingml/2006/main" noGrp="1"/>
+          </p:cNvSpPr>
+          <p:nvPr>
+            <p:ph type="sldNum" idx="5"/>
+          </p:nvPr>
+        </p:nvSpPr>
+        <p:spPr/>
+        <p:txBody>
+          <a:bodyPr xmlns:a="http://schemas.openxmlformats.org/drawingml/2006/main"/>
+          <a:lstStyle xmlns:a="http://schemas.openxmlformats.org/drawingml/2006/main"/>
+          <a:p xmlns:a="http://schemas.openxmlformats.org/drawingml/2006/main"/>
+        </p:txBody>
+      </p:sp>
+    </p:spTree>
+  </p:cSld>
+  <p:clrMapOvr>
+    <a:masterClrMapping xmlns:a="http://schemas.openxmlformats.org/drawingml/2006/main"/>
+  </p:clrMapOvr>
+</p:notes>
+</file>
+
+<file path=ppt/notesSlides/notesSlide19.xml><?xml version="1.0" encoding="utf-8"?>
+<p:notes xmlns:p="http://schemas.openxmlformats.org/presentationml/2006/main">
+  <p:cSld>
+    <p:spTree>
+      <p:nvGrpSpPr>
+        <p:cNvPr id="1" name=""/>
+        <p:cNvGrpSpPr/>
+        <p:nvPr/>
+      </p:nvGrpSpPr>
+      <p:grpSpPr>
+        <a:xfrm xmlns:a="http://schemas.openxmlformats.org/drawingml/2006/main"/>
+      </p:grpSpPr>
+      <p:sp>
+        <p:nvSpPr>
+          <p:cNvPr id="2" name="Slide Image Placeholder 1"/>
+          <p:cNvSpPr>
+            <a:spLocks xmlns:a="http://schemas.openxmlformats.org/drawingml/2006/main" noGrp="1"/>
+          </p:cNvSpPr>
+          <p:nvPr>
+            <p:ph type="sldImg" idx="0"/>
+          </p:nvPr>
+        </p:nvSpPr>
+        <p:spPr/>
+      </p:sp>
+      <p:sp>
+        <p:nvSpPr>
+          <p:cNvPr id="3" name="Notes Placeholder 2"/>
+          <p:cNvSpPr>
+            <a:spLocks xmlns:a="http://schemas.openxmlformats.org/drawingml/2006/main" noGrp="1"/>
+          </p:cNvSpPr>
+          <p:nvPr>
+            <p:ph type="body" idx="1"/>
+          </p:nvPr>
+        </p:nvSpPr>
+        <p:spPr/>
+        <p:txBody>
+          <a:bodyPr xmlns:a="http://schemas.openxmlformats.org/drawingml/2006/main"/>
+          <a:lstStyle xmlns:a="http://schemas.openxmlformats.org/drawingml/2006/main"/>
+          <a:p xmlns:a="http://schemas.openxmlformats.org/drawingml/2006/main">
+            <a:r>
+              <a:t>The primary rebound rule has a higher mean and median than negative-R20-only, low/medium-ATR-only, and the positive-R20 opposite inside the same ATR states. This is the strongest reason to retain it as a confirmation candidate, while recognizing that all comparisons come from the discovery sample.</a:t>
+            </a:r>
+          </a:p>
+          <a:p xmlns:a="http://schemas.openxmlformats.org/drawingml/2006/main">
+            <a:r>
+              <a:t/>
+            </a:r>
+          </a:p>
+          <a:p xmlns:a="http://schemas.openxmlformats.org/drawingml/2006/main">
+            <a:r>
+              <a:t>[Sources]</a:t>
+            </a:r>
+          </a:p>
+          <a:p xmlns:a="http://schemas.openxmlformats.org/drawingml/2006/main">
+            <a:r>
+              <a:t>- Local proto-rule summary: runs/research_workbench/operator_hypothesis_lab/nvda_daily_proto_rules_20260831/rule_summary.csv</a:t>
+            </a:r>
+          </a:p>
+          <a:p xmlns:a="http://schemas.openxmlformats.org/drawingml/2006/main">
+            <a:r>
+              <a:t>- Local non-overlapping trade ledger: runs/research_workbench/operator_hypothesis_lab/nvda_daily_proto_rules_20260831/trade_ledger.csv</a:t>
+            </a:r>
+          </a:p>
+          <a:p xmlns:a="http://schemas.openxmlformats.org/drawingml/2006/main">
+            <a:r>
+              <a:t>[/Sources]</a:t>
+            </a:r>
+          </a:p>
+        </p:txBody>
+      </p:sp>
+      <p:sp>
+        <p:nvSpPr>
+          <p:cNvPr id="4" name="Slide Number Placeholder 3"/>
+          <p:cNvSpPr>
+            <a:spLocks xmlns:a="http://schemas.openxmlformats.org/drawingml/2006/main" noGrp="1"/>
+          </p:cNvSpPr>
+          <p:nvPr>
+            <p:ph type="sldNum" idx="5"/>
+          </p:nvPr>
+        </p:nvSpPr>
+        <p:spPr/>
+        <p:txBody>
+          <a:bodyPr xmlns:a="http://schemas.openxmlformats.org/drawingml/2006/main"/>
+          <a:lstStyle xmlns:a="http://schemas.openxmlformats.org/drawingml/2006/main"/>
+          <a:p xmlns:a="http://schemas.openxmlformats.org/drawingml/2006/main"/>
+        </p:txBody>
+      </p:sp>
+    </p:spTree>
+  </p:cSld>
+  <p:clrMapOvr>
+    <a:masterClrMapping xmlns:a="http://schemas.openxmlformats.org/drawingml/2006/main"/>
+  </p:clrMapOvr>
+</p:notes>
+</file>
+
 <file path=ppt/notesSlides/notesSlide2.xml><?xml version="1.0" encoding="utf-8"?>
 <p:notes xmlns:p="http://schemas.openxmlformats.org/presentationml/2006/main">
   <p:cSld>
@@ -1051,6 +1534,296 @@
           <a:p xmlns:a="http://schemas.openxmlformats.org/drawingml/2006/main">
             <a:r>
               <a:t>- Local daily microscope packet: runs/research_workbench/operator_hypothesis_lab/nvda_daily_return_microscope_20260831/report.md</a:t>
+            </a:r>
+          </a:p>
+          <a:p xmlns:a="http://schemas.openxmlformats.org/drawingml/2006/main">
+            <a:r>
+              <a:t>[/Sources]</a:t>
+            </a:r>
+          </a:p>
+        </p:txBody>
+      </p:sp>
+      <p:sp>
+        <p:nvSpPr>
+          <p:cNvPr id="4" name="Slide Number Placeholder 3"/>
+          <p:cNvSpPr>
+            <a:spLocks xmlns:a="http://schemas.openxmlformats.org/drawingml/2006/main" noGrp="1"/>
+          </p:cNvSpPr>
+          <p:nvPr>
+            <p:ph type="sldNum" idx="5"/>
+          </p:nvPr>
+        </p:nvSpPr>
+        <p:spPr/>
+        <p:txBody>
+          <a:bodyPr xmlns:a="http://schemas.openxmlformats.org/drawingml/2006/main"/>
+          <a:lstStyle xmlns:a="http://schemas.openxmlformats.org/drawingml/2006/main"/>
+          <a:p xmlns:a="http://schemas.openxmlformats.org/drawingml/2006/main"/>
+        </p:txBody>
+      </p:sp>
+    </p:spTree>
+  </p:cSld>
+  <p:clrMapOvr>
+    <a:masterClrMapping xmlns:a="http://schemas.openxmlformats.org/drawingml/2006/main"/>
+  </p:clrMapOvr>
+</p:notes>
+</file>
+
+<file path=ppt/notesSlides/notesSlide20.xml><?xml version="1.0" encoding="utf-8"?>
+<p:notes xmlns:p="http://schemas.openxmlformats.org/presentationml/2006/main">
+  <p:cSld>
+    <p:spTree>
+      <p:nvGrpSpPr>
+        <p:cNvPr id="1" name=""/>
+        <p:cNvGrpSpPr/>
+        <p:nvPr/>
+      </p:nvGrpSpPr>
+      <p:grpSpPr>
+        <a:xfrm xmlns:a="http://schemas.openxmlformats.org/drawingml/2006/main"/>
+      </p:grpSpPr>
+      <p:sp>
+        <p:nvSpPr>
+          <p:cNvPr id="2" name="Slide Image Placeholder 1"/>
+          <p:cNvSpPr>
+            <a:spLocks xmlns:a="http://schemas.openxmlformats.org/drawingml/2006/main" noGrp="1"/>
+          </p:cNvSpPr>
+          <p:nvPr>
+            <p:ph type="sldImg" idx="0"/>
+          </p:nvPr>
+        </p:nvSpPr>
+        <p:spPr/>
+      </p:sp>
+      <p:sp>
+        <p:nvSpPr>
+          <p:cNvPr id="3" name="Notes Placeholder 2"/>
+          <p:cNvSpPr>
+            <a:spLocks xmlns:a="http://schemas.openxmlformats.org/drawingml/2006/main" noGrp="1"/>
+          </p:cNvSpPr>
+          <p:nvPr>
+            <p:ph type="body" idx="1"/>
+          </p:nvPr>
+        </p:nvSpPr>
+        <p:spPr/>
+        <p:txBody>
+          <a:bodyPr xmlns:a="http://schemas.openxmlformats.org/drawingml/2006/main"/>
+          <a:lstStyle xmlns:a="http://schemas.openxmlformats.org/drawingml/2006/main"/>
+          <a:p xmlns:a="http://schemas.openxmlformats.org/drawingml/2006/main">
+            <a:r>
+              <a:t>The annual view helps detect whether a full-period mean is carried by one isolated episode. Rebound is not purely a single-year artifact, but the yearly samples are tiny and correlated; they do not replace OOS confirmation.</a:t>
+            </a:r>
+          </a:p>
+          <a:p xmlns:a="http://schemas.openxmlformats.org/drawingml/2006/main">
+            <a:r>
+              <a:t/>
+            </a:r>
+          </a:p>
+          <a:p xmlns:a="http://schemas.openxmlformats.org/drawingml/2006/main">
+            <a:r>
+              <a:t>[Sources]</a:t>
+            </a:r>
+          </a:p>
+          <a:p xmlns:a="http://schemas.openxmlformats.org/drawingml/2006/main">
+            <a:r>
+              <a:t>- Local proto-rule annual context: runs/research_workbench/operator_hypothesis_lab/nvda_daily_proto_rules_20260831/calendar_summary.csv</a:t>
+            </a:r>
+          </a:p>
+          <a:p xmlns:a="http://schemas.openxmlformats.org/drawingml/2006/main">
+            <a:r>
+              <a:t>- Local proto-rule summary: runs/research_workbench/operator_hypothesis_lab/nvda_daily_proto_rules_20260831/rule_summary.csv</a:t>
+            </a:r>
+          </a:p>
+          <a:p xmlns:a="http://schemas.openxmlformats.org/drawingml/2006/main">
+            <a:r>
+              <a:t>[/Sources]</a:t>
+            </a:r>
+          </a:p>
+        </p:txBody>
+      </p:sp>
+      <p:sp>
+        <p:nvSpPr>
+          <p:cNvPr id="4" name="Slide Number Placeholder 3"/>
+          <p:cNvSpPr>
+            <a:spLocks xmlns:a="http://schemas.openxmlformats.org/drawingml/2006/main" noGrp="1"/>
+          </p:cNvSpPr>
+          <p:nvPr>
+            <p:ph type="sldNum" idx="5"/>
+          </p:nvPr>
+        </p:nvSpPr>
+        <p:spPr/>
+        <p:txBody>
+          <a:bodyPr xmlns:a="http://schemas.openxmlformats.org/drawingml/2006/main"/>
+          <a:lstStyle xmlns:a="http://schemas.openxmlformats.org/drawingml/2006/main"/>
+          <a:p xmlns:a="http://schemas.openxmlformats.org/drawingml/2006/main"/>
+        </p:txBody>
+      </p:sp>
+    </p:spTree>
+  </p:cSld>
+  <p:clrMapOvr>
+    <a:masterClrMapping xmlns:a="http://schemas.openxmlformats.org/drawingml/2006/main"/>
+  </p:clrMapOvr>
+</p:notes>
+</file>
+
+<file path=ppt/notesSlides/notesSlide21.xml><?xml version="1.0" encoding="utf-8"?>
+<p:notes xmlns:p="http://schemas.openxmlformats.org/presentationml/2006/main">
+  <p:cSld>
+    <p:spTree>
+      <p:nvGrpSpPr>
+        <p:cNvPr id="1" name=""/>
+        <p:cNvGrpSpPr/>
+        <p:nvPr/>
+      </p:nvGrpSpPr>
+      <p:grpSpPr>
+        <a:xfrm xmlns:a="http://schemas.openxmlformats.org/drawingml/2006/main"/>
+      </p:grpSpPr>
+      <p:sp>
+        <p:nvSpPr>
+          <p:cNvPr id="2" name="Slide Image Placeholder 1"/>
+          <p:cNvSpPr>
+            <a:spLocks xmlns:a="http://schemas.openxmlformats.org/drawingml/2006/main" noGrp="1"/>
+          </p:cNvSpPr>
+          <p:nvPr>
+            <p:ph type="sldImg" idx="0"/>
+          </p:nvPr>
+        </p:nvSpPr>
+        <p:spPr/>
+      </p:sp>
+      <p:sp>
+        <p:nvSpPr>
+          <p:cNvPr id="3" name="Notes Placeholder 2"/>
+          <p:cNvSpPr>
+            <a:spLocks xmlns:a="http://schemas.openxmlformats.org/drawingml/2006/main" noGrp="1"/>
+          </p:cNvSpPr>
+          <p:nvPr>
+            <p:ph type="body" idx="1"/>
+          </p:nvPr>
+        </p:nvSpPr>
+        <p:spPr/>
+        <p:txBody>
+          <a:bodyPr xmlns:a="http://schemas.openxmlformats.org/drawingml/2006/main"/>
+          <a:lstStyle xmlns:a="http://schemas.openxmlformats.org/drawingml/2006/main"/>
+          <a:p xmlns:a="http://schemas.openxmlformats.org/drawingml/2006/main">
+            <a:r>
+              <a:t>The representative tapes show that neither rule creates a smooth conditional path. The continuation worst case loses roughly 41%, and the rebound worst case loses roughly 31%. The median rebound path is more consistent with the original thesis: an initially quiet path that develops into a recovery across the holding window.</a:t>
+            </a:r>
+          </a:p>
+          <a:p xmlns:a="http://schemas.openxmlformats.org/drawingml/2006/main">
+            <a:r>
+              <a:t/>
+            </a:r>
+          </a:p>
+          <a:p xmlns:a="http://schemas.openxmlformats.org/drawingml/2006/main">
+            <a:r>
+              <a:t>[Sources]</a:t>
+            </a:r>
+          </a:p>
+          <a:p xmlns:a="http://schemas.openxmlformats.org/drawingml/2006/main">
+            <a:r>
+              <a:t>- Local non-overlapping trade ledger: runs/research_workbench/operator_hypothesis_lab/nvda_daily_proto_rules_20260831/trade_ledger.csv</a:t>
+            </a:r>
+          </a:p>
+          <a:p xmlns:a="http://schemas.openxmlformats.org/drawingml/2006/main">
+            <a:r>
+              <a:t>- Local executable proto-rule packet: runs/research_workbench/operator_hypothesis_lab/nvda_daily_proto_rules_20260831/report.md</a:t>
+            </a:r>
+          </a:p>
+          <a:p xmlns:a="http://schemas.openxmlformats.org/drawingml/2006/main">
+            <a:r>
+              <a:t>[/Sources]</a:t>
+            </a:r>
+          </a:p>
+        </p:txBody>
+      </p:sp>
+      <p:sp>
+        <p:nvSpPr>
+          <p:cNvPr id="4" name="Slide Number Placeholder 3"/>
+          <p:cNvSpPr>
+            <a:spLocks xmlns:a="http://schemas.openxmlformats.org/drawingml/2006/main" noGrp="1"/>
+          </p:cNvSpPr>
+          <p:nvPr>
+            <p:ph type="sldNum" idx="5"/>
+          </p:nvPr>
+        </p:nvSpPr>
+        <p:spPr/>
+        <p:txBody>
+          <a:bodyPr xmlns:a="http://schemas.openxmlformats.org/drawingml/2006/main"/>
+          <a:lstStyle xmlns:a="http://schemas.openxmlformats.org/drawingml/2006/main"/>
+          <a:p xmlns:a="http://schemas.openxmlformats.org/drawingml/2006/main"/>
+        </p:txBody>
+      </p:sp>
+    </p:spTree>
+  </p:cSld>
+  <p:clrMapOvr>
+    <a:masterClrMapping xmlns:a="http://schemas.openxmlformats.org/drawingml/2006/main"/>
+  </p:clrMapOvr>
+</p:notes>
+</file>
+
+<file path=ppt/notesSlides/notesSlide22.xml><?xml version="1.0" encoding="utf-8"?>
+<p:notes xmlns:p="http://schemas.openxmlformats.org/presentationml/2006/main">
+  <p:cSld>
+    <p:spTree>
+      <p:nvGrpSpPr>
+        <p:cNvPr id="1" name=""/>
+        <p:cNvGrpSpPr/>
+        <p:nvPr/>
+      </p:nvGrpSpPr>
+      <p:grpSpPr>
+        <a:xfrm xmlns:a="http://schemas.openxmlformats.org/drawingml/2006/main"/>
+      </p:grpSpPr>
+      <p:sp>
+        <p:nvSpPr>
+          <p:cNvPr id="2" name="Slide Image Placeholder 1"/>
+          <p:cNvSpPr>
+            <a:spLocks xmlns:a="http://schemas.openxmlformats.org/drawingml/2006/main" noGrp="1"/>
+          </p:cNvSpPr>
+          <p:nvPr>
+            <p:ph type="sldImg" idx="0"/>
+          </p:nvPr>
+        </p:nvSpPr>
+        <p:spPr/>
+      </p:sp>
+      <p:sp>
+        <p:nvSpPr>
+          <p:cNvPr id="3" name="Notes Placeholder 2"/>
+          <p:cNvSpPr>
+            <a:spLocks xmlns:a="http://schemas.openxmlformats.org/drawingml/2006/main" noGrp="1"/>
+          </p:cNvSpPr>
+          <p:nvPr>
+            <p:ph type="body" idx="1"/>
+          </p:nvPr>
+        </p:nvSpPr>
+        <p:spPr/>
+        <p:txBody>
+          <a:bodyPr xmlns:a="http://schemas.openxmlformats.org/drawingml/2006/main"/>
+          <a:lstStyle xmlns:a="http://schemas.openxmlformats.org/drawingml/2006/main"/>
+          <a:p xmlns:a="http://schemas.openxmlformats.org/drawingml/2006/main">
+            <a:r>
+              <a:t>The next methodological gate is a one-shot confirmation of the frozen calm-pullback rebound rule on untouched 2024+ data. Any later robustness or neighboring-definition work must be declared separately and cannot rewrite the original confirmation result.</a:t>
+            </a:r>
+          </a:p>
+          <a:p xmlns:a="http://schemas.openxmlformats.org/drawingml/2006/main">
+            <a:r>
+              <a:t/>
+            </a:r>
+          </a:p>
+          <a:p xmlns:a="http://schemas.openxmlformats.org/drawingml/2006/main">
+            <a:r>
+              <a:t>[Sources]</a:t>
+            </a:r>
+          </a:p>
+          <a:p xmlns:a="http://schemas.openxmlformats.org/drawingml/2006/main">
+            <a:r>
+              <a:t>- Local executable proto-rule packet: runs/research_workbench/operator_hypothesis_lab/nvda_daily_proto_rules_20260831/report.md</a:t>
+            </a:r>
+          </a:p>
+          <a:p xmlns:a="http://schemas.openxmlformats.org/drawingml/2006/main">
+            <a:r>
+              <a:t>- Local proto-rule summary: runs/research_workbench/operator_hypothesis_lab/nvda_daily_proto_rules_20260831/rule_summary.csv</a:t>
+            </a:r>
+          </a:p>
+          <a:p xmlns:a="http://schemas.openxmlformats.org/drawingml/2006/main">
+            <a:r>
+              <a:t>- Local non-overlapping trade ledger: runs/research_workbench/operator_hypothesis_lab/nvda_daily_proto_rules_20260831/trade_ledger.csv</a:t>
             </a:r>
           </a:p>
           <a:p xmlns:a="http://schemas.openxmlformats.org/drawingml/2006/main">
@@ -1788,7 +2561,7 @@
   </p:cSld>
   <p:clrMap bg1="lt1" tx1="dk1" bg2="lt2" tx2="dk2" accent1="accent1" accent2="accent2" accent3="accent3" accent4="accent4" accent5="accent5" accent6="accent6" hlink="hlink" folHlink="folHlink"/>
   <p:sldLayoutIdLst>
-    <p:sldLayoutId xmlns:r="http://schemas.openxmlformats.org/officeDocument/2006/relationships" id="2147483649" r:id="R3afe57855dbf4cea"/>
+    <p:sldLayoutId xmlns:r="http://schemas.openxmlformats.org/officeDocument/2006/relationships" id="2147483649" r:id="R50e6237f20d4458b"/>
   </p:sldLayoutIdLst>
   <p:txStyles>
     <p:titleStyle>
@@ -2339,7 +3112,7 @@
           <p:cNvPr id="13" name="">
             <a:extLst xmlns:a="http://schemas.openxmlformats.org/drawingml/2006/main">
               <a:ext uri="{FF2B5EF4-FFF2-40B4-BE49-F238E27FC236}">
-                <a16:creationId xmlns:a16="http://schemas.microsoft.com/office/drawing/2014/main" id="{A68CF14B-5459-44C3-A496-9E8979B7F960}"/>
+                <a16:creationId xmlns:a16="http://schemas.microsoft.com/office/drawing/2014/main" id="{1ADE7CEE-FAC7-44A3-8D23-79C6F28E9A67}"/>
               </a:ext>
             </a:extLst>
           </p:cNvPr>
@@ -2372,7 +3145,7 @@
           <p:cNvPr id="2" name="">
             <a:extLst xmlns:a="http://schemas.openxmlformats.org/drawingml/2006/main">
               <a:ext uri="{FF2B5EF4-FFF2-40B4-BE49-F238E27FC236}">
-                <a16:creationId xmlns:a16="http://schemas.microsoft.com/office/drawing/2014/main" id="{BE4A5A42-4C13-4EB7-B3B4-2D9EAFAABF10}"/>
+                <a16:creationId xmlns:a16="http://schemas.microsoft.com/office/drawing/2014/main" id="{B38EE946-69F8-420B-A993-8A8177F7B075}"/>
               </a:ext>
             </a:extLst>
           </p:cNvPr>
@@ -2422,7 +3195,7 @@
           <p:cNvPr id="3" name="">
             <a:extLst xmlns:a="http://schemas.openxmlformats.org/drawingml/2006/main">
               <a:ext uri="{FF2B5EF4-FFF2-40B4-BE49-F238E27FC236}">
-                <a16:creationId xmlns:a16="http://schemas.microsoft.com/office/drawing/2014/main" id="{167019B0-F9D0-4F9F-8230-B1ADAA492CA7}"/>
+                <a16:creationId xmlns:a16="http://schemas.microsoft.com/office/drawing/2014/main" id="{BB9128D0-38A2-4CF0-B23A-5A7F770083D6}"/>
               </a:ext>
             </a:extLst>
           </p:cNvPr>
@@ -2489,7 +3262,7 @@
           <p:cNvPr id="4" name="">
             <a:extLst xmlns:a="http://schemas.openxmlformats.org/drawingml/2006/main">
               <a:ext uri="{FF2B5EF4-FFF2-40B4-BE49-F238E27FC236}">
-                <a16:creationId xmlns:a16="http://schemas.microsoft.com/office/drawing/2014/main" id="{1DA14EFF-81B2-44F0-9CB4-03466B73A979}"/>
+                <a16:creationId xmlns:a16="http://schemas.microsoft.com/office/drawing/2014/main" id="{B197C271-D780-4B28-AC9C-AC4BE919C53C}"/>
               </a:ext>
             </a:extLst>
           </p:cNvPr>
@@ -2539,7 +3312,7 @@
           <p:cNvPr id="5" name="">
             <a:extLst xmlns:a="http://schemas.openxmlformats.org/drawingml/2006/main">
               <a:ext uri="{FF2B5EF4-FFF2-40B4-BE49-F238E27FC236}">
-                <a16:creationId xmlns:a16="http://schemas.microsoft.com/office/drawing/2014/main" id="{0D45CEF5-3EBF-413E-82C8-61AC51E6E335}"/>
+                <a16:creationId xmlns:a16="http://schemas.microsoft.com/office/drawing/2014/main" id="{7886FA6B-6781-4B5A-9C39-6483B4C7B0BA}"/>
               </a:ext>
             </a:extLst>
           </p:cNvPr>
@@ -2572,7 +3345,7 @@
           <p:cNvPr id="6" name="">
             <a:extLst xmlns:a="http://schemas.openxmlformats.org/drawingml/2006/main">
               <a:ext uri="{FF2B5EF4-FFF2-40B4-BE49-F238E27FC236}">
-                <a16:creationId xmlns:a16="http://schemas.microsoft.com/office/drawing/2014/main" id="{A7B12AE5-4D45-4274-B928-628E05233BB4}"/>
+                <a16:creationId xmlns:a16="http://schemas.microsoft.com/office/drawing/2014/main" id="{547DF32A-E48A-4A3C-A5B4-4EB60CCA54FB}"/>
               </a:ext>
             </a:extLst>
           </p:cNvPr>
@@ -2622,7 +3395,7 @@
           <p:cNvPr id="7" name="">
             <a:extLst xmlns:a="http://schemas.openxmlformats.org/drawingml/2006/main">
               <a:ext uri="{FF2B5EF4-FFF2-40B4-BE49-F238E27FC236}">
-                <a16:creationId xmlns:a16="http://schemas.microsoft.com/office/drawing/2014/main" id="{3A6D60E9-8492-4D7B-9446-876374924235}"/>
+                <a16:creationId xmlns:a16="http://schemas.microsoft.com/office/drawing/2014/main" id="{E1CF9959-39A1-42DA-945F-59EAA06877CC}"/>
               </a:ext>
             </a:extLst>
           </p:cNvPr>
@@ -2672,7 +3445,7 @@
           <p:cNvPr id="8" name="">
             <a:extLst xmlns:a="http://schemas.openxmlformats.org/drawingml/2006/main">
               <a:ext uri="{FF2B5EF4-FFF2-40B4-BE49-F238E27FC236}">
-                <a16:creationId xmlns:a16="http://schemas.microsoft.com/office/drawing/2014/main" id="{2364C21A-F442-4504-BFED-83254BCCFCED}"/>
+                <a16:creationId xmlns:a16="http://schemas.microsoft.com/office/drawing/2014/main" id="{29D37C27-8BBE-4085-B78B-7112C443E95C}"/>
               </a:ext>
             </a:extLst>
           </p:cNvPr>
@@ -2722,7 +3495,7 @@
           <p:cNvPr id="9" name="">
             <a:extLst xmlns:a="http://schemas.openxmlformats.org/drawingml/2006/main">
               <a:ext uri="{FF2B5EF4-FFF2-40B4-BE49-F238E27FC236}">
-                <a16:creationId xmlns:a16="http://schemas.microsoft.com/office/drawing/2014/main" id="{66A8F329-A61D-4FC5-A2C3-3F7F7A3AD200}"/>
+                <a16:creationId xmlns:a16="http://schemas.microsoft.com/office/drawing/2014/main" id="{3F406258-3050-471E-94EB-E6C188F39B09}"/>
               </a:ext>
             </a:extLst>
           </p:cNvPr>
@@ -2755,7 +3528,7 @@
           <p:cNvPr id="10" name="">
             <a:extLst xmlns:a="http://schemas.openxmlformats.org/drawingml/2006/main">
               <a:ext uri="{FF2B5EF4-FFF2-40B4-BE49-F238E27FC236}">
-                <a16:creationId xmlns:a16="http://schemas.microsoft.com/office/drawing/2014/main" id="{8A0619F6-EF97-471F-A897-971DDD3FE831}"/>
+                <a16:creationId xmlns:a16="http://schemas.microsoft.com/office/drawing/2014/main" id="{8EA6EC05-0B2A-47CF-A690-B3B577A85E31}"/>
               </a:ext>
             </a:extLst>
           </p:cNvPr>
@@ -2805,7 +3578,7 @@
           <p:cNvPr id="11" name="">
             <a:extLst xmlns:a="http://schemas.openxmlformats.org/drawingml/2006/main">
               <a:ext uri="{FF2B5EF4-FFF2-40B4-BE49-F238E27FC236}">
-                <a16:creationId xmlns:a16="http://schemas.microsoft.com/office/drawing/2014/main" id="{7ED5C973-3F69-4136-9A55-4A13C51082A2}"/>
+                <a16:creationId xmlns:a16="http://schemas.microsoft.com/office/drawing/2014/main" id="{602AC1FA-AD97-41FD-BC97-917FB9554CC2}"/>
               </a:ext>
             </a:extLst>
           </p:cNvPr>
@@ -2855,7 +3628,7 @@
           <p:cNvPr id="12" name="">
             <a:extLst xmlns:a="http://schemas.openxmlformats.org/drawingml/2006/main">
               <a:ext uri="{FF2B5EF4-FFF2-40B4-BE49-F238E27FC236}">
-                <a16:creationId xmlns:a16="http://schemas.microsoft.com/office/drawing/2014/main" id="{909685E2-D14E-4E6A-BCD0-21C5937C6ED7}"/>
+                <a16:creationId xmlns:a16="http://schemas.microsoft.com/office/drawing/2014/main" id="{EB18B1E0-FA3D-4D5A-947B-C8D72D32F068}"/>
               </a:ext>
             </a:extLst>
           </p:cNvPr>
@@ -2903,7 +3676,7 @@
     </p:spTree>
     <p:extLst>
       <p:ext uri="{BB962C8B-B14F-4D97-AF65-F5344CB8AC3E}">
-        <p14:creationId xmlns:p14="http://schemas.microsoft.com/office/powerpoint/2010/main" val="1618085769"/>
+        <p14:creationId xmlns:p14="http://schemas.microsoft.com/office/powerpoint/2010/main" val="112234099"/>
       </p:ext>
     </p:extLst>
   </p:cSld>
@@ -2934,7 +3707,7 @@
           <p:cNvPr id="18" name="">
             <a:extLst xmlns:a="http://schemas.openxmlformats.org/drawingml/2006/main">
               <a:ext uri="{FF2B5EF4-FFF2-40B4-BE49-F238E27FC236}">
-                <a16:creationId xmlns:a16="http://schemas.microsoft.com/office/drawing/2014/main" id="{12735FB3-3817-4264-AEB3-42147881DA3C}"/>
+                <a16:creationId xmlns:a16="http://schemas.microsoft.com/office/drawing/2014/main" id="{BC75F8F9-99C0-41AE-9694-F57142499CE8}"/>
               </a:ext>
             </a:extLst>
           </p:cNvPr>
@@ -2984,7 +3757,7 @@
           <p:cNvPr id="2" name="">
             <a:extLst xmlns:a="http://schemas.openxmlformats.org/drawingml/2006/main">
               <a:ext uri="{FF2B5EF4-FFF2-40B4-BE49-F238E27FC236}">
-                <a16:creationId xmlns:a16="http://schemas.microsoft.com/office/drawing/2014/main" id="{18E35F39-3FA4-4E32-899C-81A61229CBF2}"/>
+                <a16:creationId xmlns:a16="http://schemas.microsoft.com/office/drawing/2014/main" id="{B8624F4F-84D9-4F54-9835-4BE22A3EE5B4}"/>
               </a:ext>
             </a:extLst>
           </p:cNvPr>
@@ -3034,7 +3807,7 @@
           <p:cNvPr id="3" name="">
             <a:extLst xmlns:a="http://schemas.openxmlformats.org/drawingml/2006/main">
               <a:ext uri="{FF2B5EF4-FFF2-40B4-BE49-F238E27FC236}">
-                <a16:creationId xmlns:a16="http://schemas.microsoft.com/office/drawing/2014/main" id="{A3963B92-6079-4FCE-A242-B3078975CDA3}"/>
+                <a16:creationId xmlns:a16="http://schemas.microsoft.com/office/drawing/2014/main" id="{FAB1C48D-D9C6-4468-9B75-AAE955878D26}"/>
               </a:ext>
             </a:extLst>
           </p:cNvPr>
@@ -3067,7 +3840,7 @@
           <p:cNvPr id="4" name="">
             <a:extLst xmlns:a="http://schemas.openxmlformats.org/drawingml/2006/main">
               <a:ext uri="{FF2B5EF4-FFF2-40B4-BE49-F238E27FC236}">
-                <a16:creationId xmlns:a16="http://schemas.microsoft.com/office/drawing/2014/main" id="{5E24149A-5CD6-4319-AA66-C6BBB7C8A5EA}"/>
+                <a16:creationId xmlns:a16="http://schemas.microsoft.com/office/drawing/2014/main" id="{2AC16B9C-7BE9-4528-A546-AE0ADD6205FD}"/>
               </a:ext>
             </a:extLst>
           </p:cNvPr>
@@ -3117,7 +3890,7 @@
           <p:cNvPr id="5" name="">
             <a:extLst xmlns:a="http://schemas.openxmlformats.org/drawingml/2006/main">
               <a:ext uri="{FF2B5EF4-FFF2-40B4-BE49-F238E27FC236}">
-                <a16:creationId xmlns:a16="http://schemas.microsoft.com/office/drawing/2014/main" id="{66097803-4070-446D-B6B0-DE6F28CF5072}"/>
+                <a16:creationId xmlns:a16="http://schemas.microsoft.com/office/drawing/2014/main" id="{7558824D-1182-4D65-8731-C769C6E5621E}"/>
               </a:ext>
             </a:extLst>
           </p:cNvPr>
@@ -3171,7 +3944,7 @@
           <p:nvPr/>
         </p:nvPicPr>
         <p:blipFill>
-          <a:blip xmlns:r="http://schemas.openxmlformats.org/officeDocument/2006/relationships" xmlns:a="http://schemas.openxmlformats.org/drawingml/2006/main" r:embed="Rd8df05cd18514266"/>
+          <a:blip xmlns:r="http://schemas.openxmlformats.org/officeDocument/2006/relationships" xmlns:a="http://schemas.openxmlformats.org/drawingml/2006/main" r:embed="R984476946bbd4ecf"/>
           <a:stretch xmlns:a="http://schemas.openxmlformats.org/drawingml/2006/main"/>
         </p:blipFill>
         <p:spPr>
@@ -3189,7 +3962,7 @@
           <p:cNvPr id="7" name="">
             <a:extLst xmlns:a="http://schemas.openxmlformats.org/drawingml/2006/main">
               <a:ext uri="{FF2B5EF4-FFF2-40B4-BE49-F238E27FC236}">
-                <a16:creationId xmlns:a16="http://schemas.microsoft.com/office/drawing/2014/main" id="{0283659C-FC0F-4B09-905E-8D7DAD80D93E}"/>
+                <a16:creationId xmlns:a16="http://schemas.microsoft.com/office/drawing/2014/main" id="{853D6BCC-D44B-43EC-BEA3-A31CB98C76F8}"/>
               </a:ext>
             </a:extLst>
           </p:cNvPr>
@@ -3222,7 +3995,7 @@
           <p:cNvPr id="8" name="">
             <a:extLst xmlns:a="http://schemas.openxmlformats.org/drawingml/2006/main">
               <a:ext uri="{FF2B5EF4-FFF2-40B4-BE49-F238E27FC236}">
-                <a16:creationId xmlns:a16="http://schemas.microsoft.com/office/drawing/2014/main" id="{94FED620-1546-4D88-A032-B572B1362B3C}"/>
+                <a16:creationId xmlns:a16="http://schemas.microsoft.com/office/drawing/2014/main" id="{88616C87-18A9-4962-B3EA-E331A81B7E5C}"/>
               </a:ext>
             </a:extLst>
           </p:cNvPr>
@@ -3272,7 +4045,7 @@
           <p:cNvPr id="9" name="">
             <a:extLst xmlns:a="http://schemas.openxmlformats.org/drawingml/2006/main">
               <a:ext uri="{FF2B5EF4-FFF2-40B4-BE49-F238E27FC236}">
-                <a16:creationId xmlns:a16="http://schemas.microsoft.com/office/drawing/2014/main" id="{C07311AF-1543-4AEE-88EF-319916B4C9E0}"/>
+                <a16:creationId xmlns:a16="http://schemas.microsoft.com/office/drawing/2014/main" id="{A3B4740B-5CD3-4738-B718-3DA59454F850}"/>
               </a:ext>
             </a:extLst>
           </p:cNvPr>
@@ -3322,7 +4095,7 @@
           <p:cNvPr id="10" name="">
             <a:extLst xmlns:a="http://schemas.openxmlformats.org/drawingml/2006/main">
               <a:ext uri="{FF2B5EF4-FFF2-40B4-BE49-F238E27FC236}">
-                <a16:creationId xmlns:a16="http://schemas.microsoft.com/office/drawing/2014/main" id="{701FD09A-9A68-4F8D-88E8-AA3E7CCEE3CD}"/>
+                <a16:creationId xmlns:a16="http://schemas.microsoft.com/office/drawing/2014/main" id="{1EDDE925-FCF4-4E42-9EF7-1BFC6942EE9D}"/>
               </a:ext>
             </a:extLst>
           </p:cNvPr>
@@ -3372,7 +4145,7 @@
           <p:cNvPr id="11" name="">
             <a:extLst xmlns:a="http://schemas.openxmlformats.org/drawingml/2006/main">
               <a:ext uri="{FF2B5EF4-FFF2-40B4-BE49-F238E27FC236}">
-                <a16:creationId xmlns:a16="http://schemas.microsoft.com/office/drawing/2014/main" id="{CC6B0B99-30A9-4325-B4D5-88E67452E7DB}"/>
+                <a16:creationId xmlns:a16="http://schemas.microsoft.com/office/drawing/2014/main" id="{0C3C2580-BF8B-4799-98B4-CA16317DA634}"/>
               </a:ext>
             </a:extLst>
           </p:cNvPr>
@@ -3422,7 +4195,7 @@
           <p:cNvPr id="12" name="">
             <a:extLst xmlns:a="http://schemas.openxmlformats.org/drawingml/2006/main">
               <a:ext uri="{FF2B5EF4-FFF2-40B4-BE49-F238E27FC236}">
-                <a16:creationId xmlns:a16="http://schemas.microsoft.com/office/drawing/2014/main" id="{2CC8771E-3C5C-4F8A-A7FD-A8542FB649EC}"/>
+                <a16:creationId xmlns:a16="http://schemas.microsoft.com/office/drawing/2014/main" id="{4B6928B1-1059-4C4C-9871-A0534E3CBABC}"/>
               </a:ext>
             </a:extLst>
           </p:cNvPr>
@@ -3472,7 +4245,7 @@
           <p:cNvPr id="13" name="">
             <a:extLst xmlns:a="http://schemas.openxmlformats.org/drawingml/2006/main">
               <a:ext uri="{FF2B5EF4-FFF2-40B4-BE49-F238E27FC236}">
-                <a16:creationId xmlns:a16="http://schemas.microsoft.com/office/drawing/2014/main" id="{09F9A46D-FAC6-4FB8-8E14-39B7FBEEFEAA}"/>
+                <a16:creationId xmlns:a16="http://schemas.microsoft.com/office/drawing/2014/main" id="{5045DE74-5453-4BFA-839D-76C115194438}"/>
               </a:ext>
             </a:extLst>
           </p:cNvPr>
@@ -3522,7 +4295,7 @@
           <p:cNvPr id="14" name="">
             <a:extLst xmlns:a="http://schemas.openxmlformats.org/drawingml/2006/main">
               <a:ext uri="{FF2B5EF4-FFF2-40B4-BE49-F238E27FC236}">
-                <a16:creationId xmlns:a16="http://schemas.microsoft.com/office/drawing/2014/main" id="{33502C21-4025-4352-821F-F3898B7B7F2C}"/>
+                <a16:creationId xmlns:a16="http://schemas.microsoft.com/office/drawing/2014/main" id="{79AA97C0-A87E-4844-8540-50D8C9815E20}"/>
               </a:ext>
             </a:extLst>
           </p:cNvPr>
@@ -3572,7 +4345,7 @@
           <p:cNvPr id="15" name="">
             <a:extLst xmlns:a="http://schemas.openxmlformats.org/drawingml/2006/main">
               <a:ext uri="{FF2B5EF4-FFF2-40B4-BE49-F238E27FC236}">
-                <a16:creationId xmlns:a16="http://schemas.microsoft.com/office/drawing/2014/main" id="{978E47DE-09FD-47C8-9994-92C5E60C9B5A}"/>
+                <a16:creationId xmlns:a16="http://schemas.microsoft.com/office/drawing/2014/main" id="{9CC9D26B-7D7F-4B5F-B031-DE39E592B6D3}"/>
               </a:ext>
             </a:extLst>
           </p:cNvPr>
@@ -3605,7 +4378,7 @@
           <p:cNvPr id="16" name="">
             <a:extLst xmlns:a="http://schemas.openxmlformats.org/drawingml/2006/main">
               <a:ext uri="{FF2B5EF4-FFF2-40B4-BE49-F238E27FC236}">
-                <a16:creationId xmlns:a16="http://schemas.microsoft.com/office/drawing/2014/main" id="{2B57296F-5B89-4A15-BEDF-F7B3C020FA3B}"/>
+                <a16:creationId xmlns:a16="http://schemas.microsoft.com/office/drawing/2014/main" id="{2E984EF5-02B1-4C78-B6FA-208DB4E6C7DF}"/>
               </a:ext>
             </a:extLst>
           </p:cNvPr>
@@ -3655,7 +4428,7 @@
           <p:cNvPr id="17" name="">
             <a:extLst xmlns:a="http://schemas.openxmlformats.org/drawingml/2006/main">
               <a:ext uri="{FF2B5EF4-FFF2-40B4-BE49-F238E27FC236}">
-                <a16:creationId xmlns:a16="http://schemas.microsoft.com/office/drawing/2014/main" id="{AB238FD5-3B1E-4ABB-8039-F72E97CE5335}"/>
+                <a16:creationId xmlns:a16="http://schemas.microsoft.com/office/drawing/2014/main" id="{EB9FEB8E-3206-474F-8670-2F66C43E3675}"/>
               </a:ext>
             </a:extLst>
           </p:cNvPr>
@@ -3703,7 +4476,7 @@
     </p:spTree>
     <p:extLst>
       <p:ext uri="{BB962C8B-B14F-4D97-AF65-F5344CB8AC3E}">
-        <p14:creationId xmlns:p14="http://schemas.microsoft.com/office/powerpoint/2010/main" val="2082444211"/>
+        <p14:creationId xmlns:p14="http://schemas.microsoft.com/office/powerpoint/2010/main" val="1761246154"/>
       </p:ext>
     </p:extLst>
   </p:cSld>
@@ -3734,7 +4507,7 @@
           <p:cNvPr id="16" name="">
             <a:extLst xmlns:a="http://schemas.openxmlformats.org/drawingml/2006/main">
               <a:ext uri="{FF2B5EF4-FFF2-40B4-BE49-F238E27FC236}">
-                <a16:creationId xmlns:a16="http://schemas.microsoft.com/office/drawing/2014/main" id="{10BE2FB0-3B1E-45E0-AA73-2456A31337BC}"/>
+                <a16:creationId xmlns:a16="http://schemas.microsoft.com/office/drawing/2014/main" id="{C997BBAA-502C-46A2-AD26-4C20FDA3712B}"/>
               </a:ext>
             </a:extLst>
           </p:cNvPr>
@@ -3784,7 +4557,7 @@
           <p:cNvPr id="2" name="">
             <a:extLst xmlns:a="http://schemas.openxmlformats.org/drawingml/2006/main">
               <a:ext uri="{FF2B5EF4-FFF2-40B4-BE49-F238E27FC236}">
-                <a16:creationId xmlns:a16="http://schemas.microsoft.com/office/drawing/2014/main" id="{486C781D-7AF1-4264-A1DC-715BA869DB3C}"/>
+                <a16:creationId xmlns:a16="http://schemas.microsoft.com/office/drawing/2014/main" id="{FE6C1FB6-4258-4BC2-A44E-D029EBE74D39}"/>
               </a:ext>
             </a:extLst>
           </p:cNvPr>
@@ -3834,7 +4607,7 @@
           <p:cNvPr id="3" name="">
             <a:extLst xmlns:a="http://schemas.openxmlformats.org/drawingml/2006/main">
               <a:ext uri="{FF2B5EF4-FFF2-40B4-BE49-F238E27FC236}">
-                <a16:creationId xmlns:a16="http://schemas.microsoft.com/office/drawing/2014/main" id="{BA42B323-914B-44C4-A718-CE78F2D466A0}"/>
+                <a16:creationId xmlns:a16="http://schemas.microsoft.com/office/drawing/2014/main" id="{F47E0F99-A536-48ED-94AC-21D3A739FAD8}"/>
               </a:ext>
             </a:extLst>
           </p:cNvPr>
@@ -3867,7 +4640,7 @@
           <p:cNvPr id="4" name="">
             <a:extLst xmlns:a="http://schemas.openxmlformats.org/drawingml/2006/main">
               <a:ext uri="{FF2B5EF4-FFF2-40B4-BE49-F238E27FC236}">
-                <a16:creationId xmlns:a16="http://schemas.microsoft.com/office/drawing/2014/main" id="{A446A219-63EC-4BC7-85F9-A4643716EA21}"/>
+                <a16:creationId xmlns:a16="http://schemas.microsoft.com/office/drawing/2014/main" id="{3EC76BEA-2F5B-4707-ACA3-980D45F62841}"/>
               </a:ext>
             </a:extLst>
           </p:cNvPr>
@@ -3917,7 +4690,7 @@
           <p:cNvPr id="5" name="">
             <a:extLst xmlns:a="http://schemas.openxmlformats.org/drawingml/2006/main">
               <a:ext uri="{FF2B5EF4-FFF2-40B4-BE49-F238E27FC236}">
-                <a16:creationId xmlns:a16="http://schemas.microsoft.com/office/drawing/2014/main" id="{F29CF9D9-B3FB-48C7-982E-160B82039B33}"/>
+                <a16:creationId xmlns:a16="http://schemas.microsoft.com/office/drawing/2014/main" id="{E746DEEA-319A-4AB3-908A-DCE4EF1C5EBF}"/>
               </a:ext>
             </a:extLst>
           </p:cNvPr>
@@ -3971,7 +4744,7 @@
           <p:nvPr/>
         </p:nvPicPr>
         <p:blipFill>
-          <a:blip xmlns:r="http://schemas.openxmlformats.org/officeDocument/2006/relationships" xmlns:a="http://schemas.openxmlformats.org/drawingml/2006/main" r:embed="Rfa39248d03014682"/>
+          <a:blip xmlns:r="http://schemas.openxmlformats.org/officeDocument/2006/relationships" xmlns:a="http://schemas.openxmlformats.org/drawingml/2006/main" r:embed="Rcb240bb657ca4451"/>
           <a:stretch xmlns:a="http://schemas.openxmlformats.org/drawingml/2006/main"/>
         </p:blipFill>
         <p:spPr>
@@ -3989,7 +4762,7 @@
           <p:cNvPr id="7" name="">
             <a:extLst xmlns:a="http://schemas.openxmlformats.org/drawingml/2006/main">
               <a:ext uri="{FF2B5EF4-FFF2-40B4-BE49-F238E27FC236}">
-                <a16:creationId xmlns:a16="http://schemas.microsoft.com/office/drawing/2014/main" id="{FBED19B0-F2C2-4B89-919C-CBE4FA0677B9}"/>
+                <a16:creationId xmlns:a16="http://schemas.microsoft.com/office/drawing/2014/main" id="{A53BC5D8-223F-43B3-AFC4-3C489124C07E}"/>
               </a:ext>
             </a:extLst>
           </p:cNvPr>
@@ -4022,7 +4795,7 @@
           <p:cNvPr id="8" name="">
             <a:extLst xmlns:a="http://schemas.openxmlformats.org/drawingml/2006/main">
               <a:ext uri="{FF2B5EF4-FFF2-40B4-BE49-F238E27FC236}">
-                <a16:creationId xmlns:a16="http://schemas.microsoft.com/office/drawing/2014/main" id="{152AB629-5E7E-45B4-AB47-0EB5D9906016}"/>
+                <a16:creationId xmlns:a16="http://schemas.microsoft.com/office/drawing/2014/main" id="{0EB927ED-5B70-4465-85AC-2F1816C323F9}"/>
               </a:ext>
             </a:extLst>
           </p:cNvPr>
@@ -4072,7 +4845,7 @@
           <p:cNvPr id="9" name="">
             <a:extLst xmlns:a="http://schemas.openxmlformats.org/drawingml/2006/main">
               <a:ext uri="{FF2B5EF4-FFF2-40B4-BE49-F238E27FC236}">
-                <a16:creationId xmlns:a16="http://schemas.microsoft.com/office/drawing/2014/main" id="{5DCCCBAD-E1C5-45D6-8521-8763D571C988}"/>
+                <a16:creationId xmlns:a16="http://schemas.microsoft.com/office/drawing/2014/main" id="{A7CFF5B0-0BA6-452B-A85B-B7FE887CC3C6}"/>
               </a:ext>
             </a:extLst>
           </p:cNvPr>
@@ -4105,7 +4878,7 @@
           <p:cNvPr id="10" name="">
             <a:extLst xmlns:a="http://schemas.openxmlformats.org/drawingml/2006/main">
               <a:ext uri="{FF2B5EF4-FFF2-40B4-BE49-F238E27FC236}">
-                <a16:creationId xmlns:a16="http://schemas.microsoft.com/office/drawing/2014/main" id="{822C8E6A-8229-47C8-8F57-67398161CE9A}"/>
+                <a16:creationId xmlns:a16="http://schemas.microsoft.com/office/drawing/2014/main" id="{84AE0746-5299-4A18-9804-DA776C5A7308}"/>
               </a:ext>
             </a:extLst>
           </p:cNvPr>
@@ -4155,7 +4928,7 @@
           <p:cNvPr id="11" name="">
             <a:extLst xmlns:a="http://schemas.openxmlformats.org/drawingml/2006/main">
               <a:ext uri="{FF2B5EF4-FFF2-40B4-BE49-F238E27FC236}">
-                <a16:creationId xmlns:a16="http://schemas.microsoft.com/office/drawing/2014/main" id="{13E4E5FD-BBFB-4C47-88A5-7D50E306545A}"/>
+                <a16:creationId xmlns:a16="http://schemas.microsoft.com/office/drawing/2014/main" id="{06F3C2E7-9C37-4985-A6EB-C94E99F944D8}"/>
               </a:ext>
             </a:extLst>
           </p:cNvPr>
@@ -4188,7 +4961,7 @@
           <p:cNvPr id="12" name="">
             <a:extLst xmlns:a="http://schemas.openxmlformats.org/drawingml/2006/main">
               <a:ext uri="{FF2B5EF4-FFF2-40B4-BE49-F238E27FC236}">
-                <a16:creationId xmlns:a16="http://schemas.microsoft.com/office/drawing/2014/main" id="{1BEFDD24-03F8-445A-B512-25B6FFA00768}"/>
+                <a16:creationId xmlns:a16="http://schemas.microsoft.com/office/drawing/2014/main" id="{F85E6C94-22CC-4993-AFE6-9B238378BE3B}"/>
               </a:ext>
             </a:extLst>
           </p:cNvPr>
@@ -4238,7 +5011,7 @@
           <p:cNvPr id="13" name="">
             <a:extLst xmlns:a="http://schemas.openxmlformats.org/drawingml/2006/main">
               <a:ext uri="{FF2B5EF4-FFF2-40B4-BE49-F238E27FC236}">
-                <a16:creationId xmlns:a16="http://schemas.microsoft.com/office/drawing/2014/main" id="{63019045-0940-4024-B8D9-B6A1CF058967}"/>
+                <a16:creationId xmlns:a16="http://schemas.microsoft.com/office/drawing/2014/main" id="{0FB89328-BD9F-4633-9639-96EE5822667E}"/>
               </a:ext>
             </a:extLst>
           </p:cNvPr>
@@ -4288,7 +5061,7 @@
           <p:cNvPr id="14" name="">
             <a:extLst xmlns:a="http://schemas.openxmlformats.org/drawingml/2006/main">
               <a:ext uri="{FF2B5EF4-FFF2-40B4-BE49-F238E27FC236}">
-                <a16:creationId xmlns:a16="http://schemas.microsoft.com/office/drawing/2014/main" id="{A190AFF3-7F30-4CB5-9FD3-63EA0ED63CEE}"/>
+                <a16:creationId xmlns:a16="http://schemas.microsoft.com/office/drawing/2014/main" id="{386B4EB3-98FE-49FD-852A-1D7E97DD3D94}"/>
               </a:ext>
             </a:extLst>
           </p:cNvPr>
@@ -4321,7 +5094,7 @@
           <p:cNvPr id="15" name="">
             <a:extLst xmlns:a="http://schemas.openxmlformats.org/drawingml/2006/main">
               <a:ext uri="{FF2B5EF4-FFF2-40B4-BE49-F238E27FC236}">
-                <a16:creationId xmlns:a16="http://schemas.microsoft.com/office/drawing/2014/main" id="{7FF8F25C-CC57-44EA-9496-FF5B3A73BF59}"/>
+                <a16:creationId xmlns:a16="http://schemas.microsoft.com/office/drawing/2014/main" id="{B05C010A-D3AC-4558-B464-3BC006E4C54E}"/>
               </a:ext>
             </a:extLst>
           </p:cNvPr>
@@ -4369,7 +5142,7 @@
     </p:spTree>
     <p:extLst>
       <p:ext uri="{BB962C8B-B14F-4D97-AF65-F5344CB8AC3E}">
-        <p14:creationId xmlns:p14="http://schemas.microsoft.com/office/powerpoint/2010/main" val="710557786"/>
+        <p14:creationId xmlns:p14="http://schemas.microsoft.com/office/powerpoint/2010/main" val="1118580256"/>
       </p:ext>
     </p:extLst>
   </p:cSld>
@@ -4400,7 +5173,7 @@
           <p:cNvPr id="14" name="">
             <a:extLst xmlns:a="http://schemas.openxmlformats.org/drawingml/2006/main">
               <a:ext uri="{FF2B5EF4-FFF2-40B4-BE49-F238E27FC236}">
-                <a16:creationId xmlns:a16="http://schemas.microsoft.com/office/drawing/2014/main" id="{0A7599C0-DB39-4CDA-A8D8-E324785D8413}"/>
+                <a16:creationId xmlns:a16="http://schemas.microsoft.com/office/drawing/2014/main" id="{4D02B83F-2D08-4D23-846F-0D43875D4D5B}"/>
               </a:ext>
             </a:extLst>
           </p:cNvPr>
@@ -4450,7 +5223,7 @@
           <p:cNvPr id="2" name="">
             <a:extLst xmlns:a="http://schemas.openxmlformats.org/drawingml/2006/main">
               <a:ext uri="{FF2B5EF4-FFF2-40B4-BE49-F238E27FC236}">
-                <a16:creationId xmlns:a16="http://schemas.microsoft.com/office/drawing/2014/main" id="{F94A98E8-3614-46E2-9017-D63C414AC227}"/>
+                <a16:creationId xmlns:a16="http://schemas.microsoft.com/office/drawing/2014/main" id="{BCE602C7-A8D3-4A22-A5EC-F42463222FE2}"/>
               </a:ext>
             </a:extLst>
           </p:cNvPr>
@@ -4500,7 +5273,7 @@
           <p:cNvPr id="3" name="">
             <a:extLst xmlns:a="http://schemas.openxmlformats.org/drawingml/2006/main">
               <a:ext uri="{FF2B5EF4-FFF2-40B4-BE49-F238E27FC236}">
-                <a16:creationId xmlns:a16="http://schemas.microsoft.com/office/drawing/2014/main" id="{3015718F-6110-48E7-83FE-2B73131F0794}"/>
+                <a16:creationId xmlns:a16="http://schemas.microsoft.com/office/drawing/2014/main" id="{D5375293-FEC8-4BDA-BF51-1554DA97C850}"/>
               </a:ext>
             </a:extLst>
           </p:cNvPr>
@@ -4533,7 +5306,7 @@
           <p:cNvPr id="4" name="">
             <a:extLst xmlns:a="http://schemas.openxmlformats.org/drawingml/2006/main">
               <a:ext uri="{FF2B5EF4-FFF2-40B4-BE49-F238E27FC236}">
-                <a16:creationId xmlns:a16="http://schemas.microsoft.com/office/drawing/2014/main" id="{8EC99716-A0CE-4B4A-853D-178288B601FC}"/>
+                <a16:creationId xmlns:a16="http://schemas.microsoft.com/office/drawing/2014/main" id="{3BD6B111-F0FD-46C7-9329-ACE386A25E86}"/>
               </a:ext>
             </a:extLst>
           </p:cNvPr>
@@ -4583,7 +5356,7 @@
           <p:cNvPr id="5" name="">
             <a:extLst xmlns:a="http://schemas.openxmlformats.org/drawingml/2006/main">
               <a:ext uri="{FF2B5EF4-FFF2-40B4-BE49-F238E27FC236}">
-                <a16:creationId xmlns:a16="http://schemas.microsoft.com/office/drawing/2014/main" id="{2B3C0A98-D9C1-4AFA-B897-0E8308B3AB51}"/>
+                <a16:creationId xmlns:a16="http://schemas.microsoft.com/office/drawing/2014/main" id="{12DAD76B-071B-4CB4-8B54-B71989675A65}"/>
               </a:ext>
             </a:extLst>
           </p:cNvPr>
@@ -4637,7 +5410,7 @@
           <p:nvPr/>
         </p:nvPicPr>
         <p:blipFill>
-          <a:blip xmlns:r="http://schemas.openxmlformats.org/officeDocument/2006/relationships" xmlns:a="http://schemas.openxmlformats.org/drawingml/2006/main" r:embed="R4d59743dd66c4a03"/>
+          <a:blip xmlns:r="http://schemas.openxmlformats.org/officeDocument/2006/relationships" xmlns:a="http://schemas.openxmlformats.org/drawingml/2006/main" r:embed="R3b923efff5674e88"/>
           <a:stretch xmlns:a="http://schemas.openxmlformats.org/drawingml/2006/main"/>
         </p:blipFill>
         <p:spPr>
@@ -4655,7 +5428,7 @@
           <p:cNvPr id="7" name="">
             <a:extLst xmlns:a="http://schemas.openxmlformats.org/drawingml/2006/main">
               <a:ext uri="{FF2B5EF4-FFF2-40B4-BE49-F238E27FC236}">
-                <a16:creationId xmlns:a16="http://schemas.microsoft.com/office/drawing/2014/main" id="{337A5570-56A4-4F66-9D1E-9A2436F2C153}"/>
+                <a16:creationId xmlns:a16="http://schemas.microsoft.com/office/drawing/2014/main" id="{A4B09F91-1260-4E73-A939-3820150A71D1}"/>
               </a:ext>
             </a:extLst>
           </p:cNvPr>
@@ -4688,7 +5461,7 @@
           <p:cNvPr id="8" name="">
             <a:extLst xmlns:a="http://schemas.openxmlformats.org/drawingml/2006/main">
               <a:ext uri="{FF2B5EF4-FFF2-40B4-BE49-F238E27FC236}">
-                <a16:creationId xmlns:a16="http://schemas.microsoft.com/office/drawing/2014/main" id="{5239BA2D-DA4D-47B3-AC92-5A075C83D6F0}"/>
+                <a16:creationId xmlns:a16="http://schemas.microsoft.com/office/drawing/2014/main" id="{584495EC-7B6E-47B2-AFCD-FEB8615E9327}"/>
               </a:ext>
             </a:extLst>
           </p:cNvPr>
@@ -4738,7 +5511,7 @@
           <p:cNvPr id="9" name="">
             <a:extLst xmlns:a="http://schemas.openxmlformats.org/drawingml/2006/main">
               <a:ext uri="{FF2B5EF4-FFF2-40B4-BE49-F238E27FC236}">
-                <a16:creationId xmlns:a16="http://schemas.microsoft.com/office/drawing/2014/main" id="{3AE64484-DA4B-471E-86D2-508315A46EE6}"/>
+                <a16:creationId xmlns:a16="http://schemas.microsoft.com/office/drawing/2014/main" id="{1D75E33E-F2BC-48A2-8B3D-7CF178F1E1DF}"/>
               </a:ext>
             </a:extLst>
           </p:cNvPr>
@@ -4771,7 +5544,7 @@
           <p:cNvPr id="10" name="">
             <a:extLst xmlns:a="http://schemas.openxmlformats.org/drawingml/2006/main">
               <a:ext uri="{FF2B5EF4-FFF2-40B4-BE49-F238E27FC236}">
-                <a16:creationId xmlns:a16="http://schemas.microsoft.com/office/drawing/2014/main" id="{060EC9C8-E5C8-4C84-8662-BFB19FFF7102}"/>
+                <a16:creationId xmlns:a16="http://schemas.microsoft.com/office/drawing/2014/main" id="{6B47E4E2-AAD8-4BA5-BBEA-F7240614AE5F}"/>
               </a:ext>
             </a:extLst>
           </p:cNvPr>
@@ -4821,7 +5594,7 @@
           <p:cNvPr id="11" name="">
             <a:extLst xmlns:a="http://schemas.openxmlformats.org/drawingml/2006/main">
               <a:ext uri="{FF2B5EF4-FFF2-40B4-BE49-F238E27FC236}">
-                <a16:creationId xmlns:a16="http://schemas.microsoft.com/office/drawing/2014/main" id="{01733110-9FCF-4ABD-8470-8312944579DF}"/>
+                <a16:creationId xmlns:a16="http://schemas.microsoft.com/office/drawing/2014/main" id="{325AADB0-1EC1-417F-984A-E283680B59A2}"/>
               </a:ext>
             </a:extLst>
           </p:cNvPr>
@@ -4854,7 +5627,7 @@
           <p:cNvPr id="12" name="">
             <a:extLst xmlns:a="http://schemas.openxmlformats.org/drawingml/2006/main">
               <a:ext uri="{FF2B5EF4-FFF2-40B4-BE49-F238E27FC236}">
-                <a16:creationId xmlns:a16="http://schemas.microsoft.com/office/drawing/2014/main" id="{4350BCC9-5F10-48D6-94D2-006B11A7037A}"/>
+                <a16:creationId xmlns:a16="http://schemas.microsoft.com/office/drawing/2014/main" id="{69F8BD37-87E7-4820-A923-1582FA23635D}"/>
               </a:ext>
             </a:extLst>
           </p:cNvPr>
@@ -4904,7 +5677,7 @@
           <p:cNvPr id="13" name="">
             <a:extLst xmlns:a="http://schemas.openxmlformats.org/drawingml/2006/main">
               <a:ext uri="{FF2B5EF4-FFF2-40B4-BE49-F238E27FC236}">
-                <a16:creationId xmlns:a16="http://schemas.microsoft.com/office/drawing/2014/main" id="{5A59717E-9AF1-4E98-ADE9-9A58DD237F4A}"/>
+                <a16:creationId xmlns:a16="http://schemas.microsoft.com/office/drawing/2014/main" id="{A55C44BD-CF37-4794-8E47-FBFC4A8BC73D}"/>
               </a:ext>
             </a:extLst>
           </p:cNvPr>
@@ -4952,7 +5725,7 @@
     </p:spTree>
     <p:extLst>
       <p:ext uri="{BB962C8B-B14F-4D97-AF65-F5344CB8AC3E}">
-        <p14:creationId xmlns:p14="http://schemas.microsoft.com/office/powerpoint/2010/main" val="821040589"/>
+        <p14:creationId xmlns:p14="http://schemas.microsoft.com/office/powerpoint/2010/main" val="115997785"/>
       </p:ext>
     </p:extLst>
   </p:cSld>
@@ -4983,7 +5756,7 @@
           <p:cNvPr id="24" name="">
             <a:extLst xmlns:a="http://schemas.openxmlformats.org/drawingml/2006/main">
               <a:ext uri="{FF2B5EF4-FFF2-40B4-BE49-F238E27FC236}">
-                <a16:creationId xmlns:a16="http://schemas.microsoft.com/office/drawing/2014/main" id="{710351EE-2DFC-484F-A275-C8E6FD180171}"/>
+                <a16:creationId xmlns:a16="http://schemas.microsoft.com/office/drawing/2014/main" id="{1E59477D-EFAD-4449-8B4E-C065A7385203}"/>
               </a:ext>
             </a:extLst>
           </p:cNvPr>
@@ -5033,7 +5806,7 @@
           <p:cNvPr id="2" name="">
             <a:extLst xmlns:a="http://schemas.openxmlformats.org/drawingml/2006/main">
               <a:ext uri="{FF2B5EF4-FFF2-40B4-BE49-F238E27FC236}">
-                <a16:creationId xmlns:a16="http://schemas.microsoft.com/office/drawing/2014/main" id="{D8A1E9F4-E79A-4A05-9DB1-5F0A307F3E4F}"/>
+                <a16:creationId xmlns:a16="http://schemas.microsoft.com/office/drawing/2014/main" id="{0209DFF3-3AEA-4372-AB50-36BFD0C1F86A}"/>
               </a:ext>
             </a:extLst>
           </p:cNvPr>
@@ -5083,7 +5856,7 @@
           <p:cNvPr id="3" name="">
             <a:extLst xmlns:a="http://schemas.openxmlformats.org/drawingml/2006/main">
               <a:ext uri="{FF2B5EF4-FFF2-40B4-BE49-F238E27FC236}">
-                <a16:creationId xmlns:a16="http://schemas.microsoft.com/office/drawing/2014/main" id="{3FA5AA69-9334-4064-B420-8D25C58AA186}"/>
+                <a16:creationId xmlns:a16="http://schemas.microsoft.com/office/drawing/2014/main" id="{9C718B18-D236-4BCC-99C2-05700117A7EA}"/>
               </a:ext>
             </a:extLst>
           </p:cNvPr>
@@ -5116,7 +5889,7 @@
           <p:cNvPr id="4" name="">
             <a:extLst xmlns:a="http://schemas.openxmlformats.org/drawingml/2006/main">
               <a:ext uri="{FF2B5EF4-FFF2-40B4-BE49-F238E27FC236}">
-                <a16:creationId xmlns:a16="http://schemas.microsoft.com/office/drawing/2014/main" id="{4C6E1990-3CF2-432A-B9E3-C6E63E62D920}"/>
+                <a16:creationId xmlns:a16="http://schemas.microsoft.com/office/drawing/2014/main" id="{1BEF5DAB-EF74-43FA-A6C9-80A6BA268660}"/>
               </a:ext>
             </a:extLst>
           </p:cNvPr>
@@ -5166,7 +5939,7 @@
           <p:cNvPr id="5" name="">
             <a:extLst xmlns:a="http://schemas.openxmlformats.org/drawingml/2006/main">
               <a:ext uri="{FF2B5EF4-FFF2-40B4-BE49-F238E27FC236}">
-                <a16:creationId xmlns:a16="http://schemas.microsoft.com/office/drawing/2014/main" id="{930CA4B5-4802-481B-8259-0FA7464174A6}"/>
+                <a16:creationId xmlns:a16="http://schemas.microsoft.com/office/drawing/2014/main" id="{4997E050-1205-4B37-8F1B-C48299EBC45A}"/>
               </a:ext>
             </a:extLst>
           </p:cNvPr>
@@ -5216,7 +5989,7 @@
           <p:cNvPr id="6" name="">
             <a:extLst xmlns:a="http://schemas.openxmlformats.org/drawingml/2006/main">
               <a:ext uri="{FF2B5EF4-FFF2-40B4-BE49-F238E27FC236}">
-                <a16:creationId xmlns:a16="http://schemas.microsoft.com/office/drawing/2014/main" id="{EC58368A-11B5-471E-B037-5391D9693E9F}"/>
+                <a16:creationId xmlns:a16="http://schemas.microsoft.com/office/drawing/2014/main" id="{5C23D1E6-D29F-4615-BC8B-CC16136FF682}"/>
               </a:ext>
             </a:extLst>
           </p:cNvPr>
@@ -5249,7 +6022,7 @@
           <p:cNvPr id="7" name="">
             <a:extLst xmlns:a="http://schemas.openxmlformats.org/drawingml/2006/main">
               <a:ext uri="{FF2B5EF4-FFF2-40B4-BE49-F238E27FC236}">
-                <a16:creationId xmlns:a16="http://schemas.microsoft.com/office/drawing/2014/main" id="{E4531C7F-4E80-4282-BCA5-75D113D39BA6}"/>
+                <a16:creationId xmlns:a16="http://schemas.microsoft.com/office/drawing/2014/main" id="{E7D171F8-C5A2-46F8-8DCF-4C0899DCEF95}"/>
               </a:ext>
             </a:extLst>
           </p:cNvPr>
@@ -5299,7 +6072,7 @@
           <p:cNvPr id="8" name="">
             <a:extLst xmlns:a="http://schemas.openxmlformats.org/drawingml/2006/main">
               <a:ext uri="{FF2B5EF4-FFF2-40B4-BE49-F238E27FC236}">
-                <a16:creationId xmlns:a16="http://schemas.microsoft.com/office/drawing/2014/main" id="{B9387AAA-AE99-45E5-8D40-A7E4BB3FBC80}"/>
+                <a16:creationId xmlns:a16="http://schemas.microsoft.com/office/drawing/2014/main" id="{EB86FA45-E205-443C-AB3A-343A9BC6E0D8}"/>
               </a:ext>
             </a:extLst>
           </p:cNvPr>
@@ -5349,7 +6122,7 @@
           <p:cNvPr id="9" name="">
             <a:extLst xmlns:a="http://schemas.openxmlformats.org/drawingml/2006/main">
               <a:ext uri="{FF2B5EF4-FFF2-40B4-BE49-F238E27FC236}">
-                <a16:creationId xmlns:a16="http://schemas.microsoft.com/office/drawing/2014/main" id="{6D480443-4547-42F3-867E-271A0AE39AE4}"/>
+                <a16:creationId xmlns:a16="http://schemas.microsoft.com/office/drawing/2014/main" id="{B9430BB2-C057-4764-B384-A48470EFD2A8}"/>
               </a:ext>
             </a:extLst>
           </p:cNvPr>
@@ -5399,7 +6172,7 @@
           <p:cNvPr id="10" name="">
             <a:extLst xmlns:a="http://schemas.openxmlformats.org/drawingml/2006/main">
               <a:ext uri="{FF2B5EF4-FFF2-40B4-BE49-F238E27FC236}">
-                <a16:creationId xmlns:a16="http://schemas.microsoft.com/office/drawing/2014/main" id="{4E18C376-4FCE-4CAB-8589-FB0301504689}"/>
+                <a16:creationId xmlns:a16="http://schemas.microsoft.com/office/drawing/2014/main" id="{6DE0451A-E757-4909-AB03-2C6E2ACCDC2F}"/>
               </a:ext>
             </a:extLst>
           </p:cNvPr>
@@ -5449,7 +6222,7 @@
           <p:cNvPr id="11" name="">
             <a:extLst xmlns:a="http://schemas.openxmlformats.org/drawingml/2006/main">
               <a:ext uri="{FF2B5EF4-FFF2-40B4-BE49-F238E27FC236}">
-                <a16:creationId xmlns:a16="http://schemas.microsoft.com/office/drawing/2014/main" id="{3526A1F8-19D3-4879-966D-8501C0384906}"/>
+                <a16:creationId xmlns:a16="http://schemas.microsoft.com/office/drawing/2014/main" id="{DD6A8D52-AB4A-47C3-BCAD-542402D48BF0}"/>
               </a:ext>
             </a:extLst>
           </p:cNvPr>
@@ -5482,7 +6255,7 @@
           <p:cNvPr id="12" name="">
             <a:extLst xmlns:a="http://schemas.openxmlformats.org/drawingml/2006/main">
               <a:ext uri="{FF2B5EF4-FFF2-40B4-BE49-F238E27FC236}">
-                <a16:creationId xmlns:a16="http://schemas.microsoft.com/office/drawing/2014/main" id="{A6EE78DD-0CEE-4CFF-8EBC-ED4654DC8157}"/>
+                <a16:creationId xmlns:a16="http://schemas.microsoft.com/office/drawing/2014/main" id="{DFC3FBFB-B4C1-4D19-B006-9B42D06A09EF}"/>
               </a:ext>
             </a:extLst>
           </p:cNvPr>
@@ -5532,7 +6305,7 @@
           <p:cNvPr id="13" name="">
             <a:extLst xmlns:a="http://schemas.openxmlformats.org/drawingml/2006/main">
               <a:ext uri="{FF2B5EF4-FFF2-40B4-BE49-F238E27FC236}">
-                <a16:creationId xmlns:a16="http://schemas.microsoft.com/office/drawing/2014/main" id="{F070848A-95C6-4C04-BD85-DA0D2E4AD411}"/>
+                <a16:creationId xmlns:a16="http://schemas.microsoft.com/office/drawing/2014/main" id="{1A7B159B-7B33-4F89-A750-B812C8EC2614}"/>
               </a:ext>
             </a:extLst>
           </p:cNvPr>
@@ -5565,7 +6338,7 @@
           <p:cNvPr id="14" name="">
             <a:extLst xmlns:a="http://schemas.openxmlformats.org/drawingml/2006/main">
               <a:ext uri="{FF2B5EF4-FFF2-40B4-BE49-F238E27FC236}">
-                <a16:creationId xmlns:a16="http://schemas.microsoft.com/office/drawing/2014/main" id="{AB9FC60C-D30C-4199-A9CF-5CEA57CA6EA5}"/>
+                <a16:creationId xmlns:a16="http://schemas.microsoft.com/office/drawing/2014/main" id="{9AF5ED5F-0476-427F-B2E7-CBAFD9ED9759}"/>
               </a:ext>
             </a:extLst>
           </p:cNvPr>
@@ -5615,7 +6388,7 @@
           <p:cNvPr id="15" name="">
             <a:extLst xmlns:a="http://schemas.openxmlformats.org/drawingml/2006/main">
               <a:ext uri="{FF2B5EF4-FFF2-40B4-BE49-F238E27FC236}">
-                <a16:creationId xmlns:a16="http://schemas.microsoft.com/office/drawing/2014/main" id="{AD54A731-1960-459C-916D-54EF5283E66E}"/>
+                <a16:creationId xmlns:a16="http://schemas.microsoft.com/office/drawing/2014/main" id="{2DC64934-ABC1-4E3D-82C0-72465AFC45DE}"/>
               </a:ext>
             </a:extLst>
           </p:cNvPr>
@@ -5648,7 +6421,7 @@
           <p:cNvPr id="16" name="">
             <a:extLst xmlns:a="http://schemas.openxmlformats.org/drawingml/2006/main">
               <a:ext uri="{FF2B5EF4-FFF2-40B4-BE49-F238E27FC236}">
-                <a16:creationId xmlns:a16="http://schemas.microsoft.com/office/drawing/2014/main" id="{F430964E-D6F7-48C7-8031-C1DA49E27C3D}"/>
+                <a16:creationId xmlns:a16="http://schemas.microsoft.com/office/drawing/2014/main" id="{0963018F-144C-4DA7-924E-D1AC813F597D}"/>
               </a:ext>
             </a:extLst>
           </p:cNvPr>
@@ -5698,7 +6471,7 @@
           <p:cNvPr id="17" name="">
             <a:extLst xmlns:a="http://schemas.openxmlformats.org/drawingml/2006/main">
               <a:ext uri="{FF2B5EF4-FFF2-40B4-BE49-F238E27FC236}">
-                <a16:creationId xmlns:a16="http://schemas.microsoft.com/office/drawing/2014/main" id="{D7536C37-4A23-4B81-8703-9479428B4EE2}"/>
+                <a16:creationId xmlns:a16="http://schemas.microsoft.com/office/drawing/2014/main" id="{391FABA6-97AE-4F80-97BA-AFFFDA6F1081}"/>
               </a:ext>
             </a:extLst>
           </p:cNvPr>
@@ -5748,7 +6521,7 @@
           <p:cNvPr id="18" name="">
             <a:extLst xmlns:a="http://schemas.openxmlformats.org/drawingml/2006/main">
               <a:ext uri="{FF2B5EF4-FFF2-40B4-BE49-F238E27FC236}">
-                <a16:creationId xmlns:a16="http://schemas.microsoft.com/office/drawing/2014/main" id="{87FA05E7-1B83-4CBA-A940-2AFA8FCCAFA4}"/>
+                <a16:creationId xmlns:a16="http://schemas.microsoft.com/office/drawing/2014/main" id="{9E375C8F-5143-4797-9FA3-207557781278}"/>
               </a:ext>
             </a:extLst>
           </p:cNvPr>
@@ -5798,7 +6571,7 @@
           <p:cNvPr id="19" name="">
             <a:extLst xmlns:a="http://schemas.openxmlformats.org/drawingml/2006/main">
               <a:ext uri="{FF2B5EF4-FFF2-40B4-BE49-F238E27FC236}">
-                <a16:creationId xmlns:a16="http://schemas.microsoft.com/office/drawing/2014/main" id="{5AE72407-342B-40F7-BFC8-93574EC6CDC7}"/>
+                <a16:creationId xmlns:a16="http://schemas.microsoft.com/office/drawing/2014/main" id="{BCE389E8-FA2F-46E8-BA0C-7A534EF6EAC6}"/>
               </a:ext>
             </a:extLst>
           </p:cNvPr>
@@ -5848,7 +6621,7 @@
           <p:cNvPr id="20" name="">
             <a:extLst xmlns:a="http://schemas.openxmlformats.org/drawingml/2006/main">
               <a:ext uri="{FF2B5EF4-FFF2-40B4-BE49-F238E27FC236}">
-                <a16:creationId xmlns:a16="http://schemas.microsoft.com/office/drawing/2014/main" id="{8D386196-F1CC-48CC-BD92-CD53C7412938}"/>
+                <a16:creationId xmlns:a16="http://schemas.microsoft.com/office/drawing/2014/main" id="{39492F91-5FD5-490D-B10B-043C2E004A43}"/>
               </a:ext>
             </a:extLst>
           </p:cNvPr>
@@ -5881,7 +6654,7 @@
           <p:cNvPr id="21" name="">
             <a:extLst xmlns:a="http://schemas.openxmlformats.org/drawingml/2006/main">
               <a:ext uri="{FF2B5EF4-FFF2-40B4-BE49-F238E27FC236}">
-                <a16:creationId xmlns:a16="http://schemas.microsoft.com/office/drawing/2014/main" id="{1B18CEEA-5623-43AF-B80F-363DDA66E781}"/>
+                <a16:creationId xmlns:a16="http://schemas.microsoft.com/office/drawing/2014/main" id="{60ABC69E-BBD1-4440-98D1-C2627D874626}"/>
               </a:ext>
             </a:extLst>
           </p:cNvPr>
@@ -5931,7 +6704,7 @@
           <p:cNvPr id="22" name="">
             <a:extLst xmlns:a="http://schemas.openxmlformats.org/drawingml/2006/main">
               <a:ext uri="{FF2B5EF4-FFF2-40B4-BE49-F238E27FC236}">
-                <a16:creationId xmlns:a16="http://schemas.microsoft.com/office/drawing/2014/main" id="{EB6C7DC0-6205-4EC1-AC8D-7C3020CB2202}"/>
+                <a16:creationId xmlns:a16="http://schemas.microsoft.com/office/drawing/2014/main" id="{0BCDB58F-D7C0-4A56-9AFC-5D5EBD85D867}"/>
               </a:ext>
             </a:extLst>
           </p:cNvPr>
@@ -5964,7 +6737,7 @@
           <p:cNvPr id="23" name="">
             <a:extLst xmlns:a="http://schemas.openxmlformats.org/drawingml/2006/main">
               <a:ext uri="{FF2B5EF4-FFF2-40B4-BE49-F238E27FC236}">
-                <a16:creationId xmlns:a16="http://schemas.microsoft.com/office/drawing/2014/main" id="{AC6E8925-C764-4102-AE8A-0B0D60EE8E95}"/>
+                <a16:creationId xmlns:a16="http://schemas.microsoft.com/office/drawing/2014/main" id="{01D2AE39-400E-4915-A11A-AEC70423A611}"/>
               </a:ext>
             </a:extLst>
           </p:cNvPr>
@@ -6012,7 +6785,7 @@
     </p:spTree>
     <p:extLst>
       <p:ext uri="{BB962C8B-B14F-4D97-AF65-F5344CB8AC3E}">
-        <p14:creationId xmlns:p14="http://schemas.microsoft.com/office/powerpoint/2010/main" val="2049721280"/>
+        <p14:creationId xmlns:p14="http://schemas.microsoft.com/office/powerpoint/2010/main" val="1670244430"/>
       </p:ext>
     </p:extLst>
   </p:cSld>
@@ -6043,7 +6816,7 @@
           <p:cNvPr id="16" name="">
             <a:extLst xmlns:a="http://schemas.openxmlformats.org/drawingml/2006/main">
               <a:ext uri="{FF2B5EF4-FFF2-40B4-BE49-F238E27FC236}">
-                <a16:creationId xmlns:a16="http://schemas.microsoft.com/office/drawing/2014/main" id="{4ED008CB-A9CF-498A-9A7E-6ADCC5E403A4}"/>
+                <a16:creationId xmlns:a16="http://schemas.microsoft.com/office/drawing/2014/main" id="{DFDC671E-8AD6-4A91-8CAB-674691E86586}"/>
               </a:ext>
             </a:extLst>
           </p:cNvPr>
@@ -6093,7 +6866,7 @@
           <p:cNvPr id="2" name="">
             <a:extLst xmlns:a="http://schemas.openxmlformats.org/drawingml/2006/main">
               <a:ext uri="{FF2B5EF4-FFF2-40B4-BE49-F238E27FC236}">
-                <a16:creationId xmlns:a16="http://schemas.microsoft.com/office/drawing/2014/main" id="{9F63E752-9FD3-43D6-A995-A3D872288D7C}"/>
+                <a16:creationId xmlns:a16="http://schemas.microsoft.com/office/drawing/2014/main" id="{F4358764-601F-4520-905D-A74C3AECB286}"/>
               </a:ext>
             </a:extLst>
           </p:cNvPr>
@@ -6143,7 +6916,7 @@
           <p:cNvPr id="3" name="">
             <a:extLst xmlns:a="http://schemas.openxmlformats.org/drawingml/2006/main">
               <a:ext uri="{FF2B5EF4-FFF2-40B4-BE49-F238E27FC236}">
-                <a16:creationId xmlns:a16="http://schemas.microsoft.com/office/drawing/2014/main" id="{62409FD0-56AA-4D7B-ABC7-CB217F1B5C62}"/>
+                <a16:creationId xmlns:a16="http://schemas.microsoft.com/office/drawing/2014/main" id="{D5F741CE-21A1-4951-8022-9BB4154BAF9A}"/>
               </a:ext>
             </a:extLst>
           </p:cNvPr>
@@ -6176,7 +6949,7 @@
           <p:cNvPr id="4" name="">
             <a:extLst xmlns:a="http://schemas.openxmlformats.org/drawingml/2006/main">
               <a:ext uri="{FF2B5EF4-FFF2-40B4-BE49-F238E27FC236}">
-                <a16:creationId xmlns:a16="http://schemas.microsoft.com/office/drawing/2014/main" id="{74154108-A17E-48B8-8E7E-89D2FF2BF1FF}"/>
+                <a16:creationId xmlns:a16="http://schemas.microsoft.com/office/drawing/2014/main" id="{E51155EF-A693-4FDF-A499-D90E299C88C7}"/>
               </a:ext>
             </a:extLst>
           </p:cNvPr>
@@ -6226,7 +6999,7 @@
           <p:cNvPr id="5" name="">
             <a:extLst xmlns:a="http://schemas.openxmlformats.org/drawingml/2006/main">
               <a:ext uri="{FF2B5EF4-FFF2-40B4-BE49-F238E27FC236}">
-                <a16:creationId xmlns:a16="http://schemas.microsoft.com/office/drawing/2014/main" id="{4BEDD09D-451B-4515-9454-F6FDA647329E}"/>
+                <a16:creationId xmlns:a16="http://schemas.microsoft.com/office/drawing/2014/main" id="{02369E22-B7FB-4FBF-92A3-02421941CB74}"/>
               </a:ext>
             </a:extLst>
           </p:cNvPr>
@@ -6276,7 +7049,7 @@
           <p:cNvPr id="6" name="">
             <a:extLst xmlns:a="http://schemas.openxmlformats.org/drawingml/2006/main">
               <a:ext uri="{FF2B5EF4-FFF2-40B4-BE49-F238E27FC236}">
-                <a16:creationId xmlns:a16="http://schemas.microsoft.com/office/drawing/2014/main" id="{3F2A7728-A0BA-4AFB-BA35-3F63EDD9A5DD}"/>
+                <a16:creationId xmlns:a16="http://schemas.microsoft.com/office/drawing/2014/main" id="{9D9F8A5F-5C16-4600-828D-105F5D2B3A84}"/>
               </a:ext>
             </a:extLst>
           </p:cNvPr>
@@ -6309,7 +7082,7 @@
           <p:cNvPr id="7" name="">
             <a:extLst xmlns:a="http://schemas.openxmlformats.org/drawingml/2006/main">
               <a:ext uri="{FF2B5EF4-FFF2-40B4-BE49-F238E27FC236}">
-                <a16:creationId xmlns:a16="http://schemas.microsoft.com/office/drawing/2014/main" id="{E6B5869A-AD38-457C-BC67-0801B69DA832}"/>
+                <a16:creationId xmlns:a16="http://schemas.microsoft.com/office/drawing/2014/main" id="{8B4490C1-C51E-4FE8-A9D9-53A2BA3A9104}"/>
               </a:ext>
             </a:extLst>
           </p:cNvPr>
@@ -6359,7 +7132,7 @@
           <p:cNvPr id="8" name="">
             <a:extLst xmlns:a="http://schemas.openxmlformats.org/drawingml/2006/main">
               <a:ext uri="{FF2B5EF4-FFF2-40B4-BE49-F238E27FC236}">
-                <a16:creationId xmlns:a16="http://schemas.microsoft.com/office/drawing/2014/main" id="{C284AA44-D0CF-4764-9EA4-199F0288B603}"/>
+                <a16:creationId xmlns:a16="http://schemas.microsoft.com/office/drawing/2014/main" id="{0BA95983-66E2-4F54-8D07-8E417629BBCF}"/>
               </a:ext>
             </a:extLst>
           </p:cNvPr>
@@ -6409,7 +7182,7 @@
           <p:cNvPr id="9" name="">
             <a:extLst xmlns:a="http://schemas.openxmlformats.org/drawingml/2006/main">
               <a:ext uri="{FF2B5EF4-FFF2-40B4-BE49-F238E27FC236}">
-                <a16:creationId xmlns:a16="http://schemas.microsoft.com/office/drawing/2014/main" id="{93678FEE-15F5-424D-9621-3EC4EA4973FD}"/>
+                <a16:creationId xmlns:a16="http://schemas.microsoft.com/office/drawing/2014/main" id="{9748AC5C-49EC-4077-9BA5-A624787D2C26}"/>
               </a:ext>
             </a:extLst>
           </p:cNvPr>
@@ -6459,7 +7232,7 @@
           <p:cNvPr id="10" name="">
             <a:extLst xmlns:a="http://schemas.openxmlformats.org/drawingml/2006/main">
               <a:ext uri="{FF2B5EF4-FFF2-40B4-BE49-F238E27FC236}">
-                <a16:creationId xmlns:a16="http://schemas.microsoft.com/office/drawing/2014/main" id="{76BDD1BC-8413-46B1-96AF-237B4899D78B}"/>
+                <a16:creationId xmlns:a16="http://schemas.microsoft.com/office/drawing/2014/main" id="{F1D1EE4B-F246-4212-BEE6-B090D38684CA}"/>
               </a:ext>
             </a:extLst>
           </p:cNvPr>
@@ -6509,7 +7282,7 @@
           <p:cNvPr id="11" name="">
             <a:extLst xmlns:a="http://schemas.openxmlformats.org/drawingml/2006/main">
               <a:ext uri="{FF2B5EF4-FFF2-40B4-BE49-F238E27FC236}">
-                <a16:creationId xmlns:a16="http://schemas.microsoft.com/office/drawing/2014/main" id="{42D098F1-5BEA-4ECC-A32D-27EF4A0CB92C}"/>
+                <a16:creationId xmlns:a16="http://schemas.microsoft.com/office/drawing/2014/main" id="{72316C2C-5BF3-49CB-B0C1-E7B05E41D1F6}"/>
               </a:ext>
             </a:extLst>
           </p:cNvPr>
@@ -6559,7 +7332,7 @@
           <p:cNvPr id="12" name="">
             <a:extLst xmlns:a="http://schemas.openxmlformats.org/drawingml/2006/main">
               <a:ext uri="{FF2B5EF4-FFF2-40B4-BE49-F238E27FC236}">
-                <a16:creationId xmlns:a16="http://schemas.microsoft.com/office/drawing/2014/main" id="{20D80587-4762-4599-80B6-81E6CF6FEC71}"/>
+                <a16:creationId xmlns:a16="http://schemas.microsoft.com/office/drawing/2014/main" id="{0B485697-623F-4FDB-9801-AB1D81CCFEF1}"/>
               </a:ext>
             </a:extLst>
           </p:cNvPr>
@@ -6609,7 +7382,7 @@
           <p:cNvPr id="13" name="">
             <a:extLst xmlns:a="http://schemas.openxmlformats.org/drawingml/2006/main">
               <a:ext uri="{FF2B5EF4-FFF2-40B4-BE49-F238E27FC236}">
-                <a16:creationId xmlns:a16="http://schemas.microsoft.com/office/drawing/2014/main" id="{D6D799DA-1F97-4440-936F-4B66FB3C77F3}"/>
+                <a16:creationId xmlns:a16="http://schemas.microsoft.com/office/drawing/2014/main" id="{33C5E5EF-67E4-4024-8C49-9D847C78439D}"/>
               </a:ext>
             </a:extLst>
           </p:cNvPr>
@@ -6659,7 +7432,7 @@
           <p:cNvPr id="14" name="">
             <a:extLst xmlns:a="http://schemas.openxmlformats.org/drawingml/2006/main">
               <a:ext uri="{FF2B5EF4-FFF2-40B4-BE49-F238E27FC236}">
-                <a16:creationId xmlns:a16="http://schemas.microsoft.com/office/drawing/2014/main" id="{2675EA2C-5CA5-4653-BF18-2400F14A6D42}"/>
+                <a16:creationId xmlns:a16="http://schemas.microsoft.com/office/drawing/2014/main" id="{93BE82A8-3D27-478A-BBA7-7D477A1739CB}"/>
               </a:ext>
             </a:extLst>
           </p:cNvPr>
@@ -6709,7 +7482,7 @@
           <p:cNvPr id="15" name="">
             <a:extLst xmlns:a="http://schemas.openxmlformats.org/drawingml/2006/main">
               <a:ext uri="{FF2B5EF4-FFF2-40B4-BE49-F238E27FC236}">
-                <a16:creationId xmlns:a16="http://schemas.microsoft.com/office/drawing/2014/main" id="{FE867409-F744-4430-BE3B-6A94DD445DBC}"/>
+                <a16:creationId xmlns:a16="http://schemas.microsoft.com/office/drawing/2014/main" id="{E87962FD-CC87-4475-A981-D630DB1AF6F6}"/>
               </a:ext>
             </a:extLst>
           </p:cNvPr>
@@ -6757,7 +7530,3165 @@
     </p:spTree>
     <p:extLst>
       <p:ext uri="{BB962C8B-B14F-4D97-AF65-F5344CB8AC3E}">
-        <p14:creationId xmlns:p14="http://schemas.microsoft.com/office/powerpoint/2010/main" val="1348203060"/>
+        <p14:creationId xmlns:p14="http://schemas.microsoft.com/office/powerpoint/2010/main" val="1917300781"/>
+      </p:ext>
+    </p:extLst>
+  </p:cSld>
+</p:sld>
+</file>
+
+<file path=ppt/slides/slide15.xml><?xml version="1.0" encoding="utf-8"?>
+<p:sld xmlns:p="http://schemas.openxmlformats.org/presentationml/2006/main">
+  <p:cSld>
+    <p:bg>
+      <p:bgPr>
+        <a:solidFill xmlns:a="http://schemas.openxmlformats.org/drawingml/2006/main">
+          <a:srgbClr val="24364B"/>
+        </a:solidFill>
+      </p:bgPr>
+    </p:bg>
+    <p:spTree>
+      <p:nvGrpSpPr>
+        <p:cNvPr id="1" name=""/>
+        <p:cNvGrpSpPr/>
+        <p:nvPr/>
+      </p:nvGrpSpPr>
+      <p:grpSpPr>
+        <a:xfrm xmlns:a="http://schemas.openxmlformats.org/drawingml/2006/main"/>
+      </p:grpSpPr>
+      <p:sp>
+        <p:nvSpPr>
+          <p:cNvPr id="6" name="">
+            <a:extLst xmlns:a="http://schemas.openxmlformats.org/drawingml/2006/main">
+              <a:ext uri="{FF2B5EF4-FFF2-40B4-BE49-F238E27FC236}">
+                <a16:creationId xmlns:a16="http://schemas.microsoft.com/office/drawing/2014/main" id="{B4914183-3DD3-49D5-836E-FBF648E3F086}"/>
+              </a:ext>
+            </a:extLst>
+          </p:cNvPr>
+          <p:cNvSpPr>
+            <a:spLocks xmlns:a="http://schemas.openxmlformats.org/drawingml/2006/main" noGrp="1"/>
+          </p:cNvSpPr>
+          <p:nvPr/>
+        </p:nvSpPr>
+        <p:spPr>
+          <a:xfrm xmlns:a="http://schemas.openxmlformats.org/drawingml/2006/main">
+            <a:off x="685800" y="895350"/>
+            <a:ext cx="4000500" cy="285750"/>
+          </a:xfrm>
+          <a:prstGeom xmlns:a="http://schemas.openxmlformats.org/drawingml/2006/main" prst="rect">
+            <a:avLst/>
+          </a:prstGeom>
+          <a:noFill xmlns:a="http://schemas.openxmlformats.org/drawingml/2006/main"/>
+          <a:ln xmlns:a="http://schemas.openxmlformats.org/drawingml/2006/main" w="0">
+            <a:noFill/>
+            <a:prstDash val="solid"/>
+          </a:ln>
+        </p:spPr>
+        <p:txBody>
+          <a:bodyPr xmlns:a="http://schemas.openxmlformats.org/drawingml/2006/main" anchor="t"/>
+          <a:lstStyle xmlns:a="http://schemas.openxmlformats.org/drawingml/2006/main"/>
+          <a:p xmlns:a="http://schemas.openxmlformats.org/drawingml/2006/main">
+            <a:pPr algn="l">
+              <a:defRPr sz="1275" b="1">
+                <a:solidFill>
+                  <a:srgbClr val="D0EDFA"/>
+                </a:solidFill>
+              </a:defRPr>
+            </a:pPr>
+            <a:r>
+              <a:rPr sz="1275" b="1">
+                <a:solidFill>
+                  <a:srgbClr val="D0EDFA"/>
+                </a:solidFill>
+              </a:rPr>
+              <a:t>THIRD MICROSCOPE</a:t>
+            </a:r>
+          </a:p>
+        </p:txBody>
+      </p:sp>
+      <p:sp>
+        <p:nvSpPr>
+          <p:cNvPr id="2" name="">
+            <a:extLst xmlns:a="http://schemas.openxmlformats.org/drawingml/2006/main">
+              <a:ext uri="{FF2B5EF4-FFF2-40B4-BE49-F238E27FC236}">
+                <a16:creationId xmlns:a16="http://schemas.microsoft.com/office/drawing/2014/main" id="{C76CF9CE-BA68-4046-B100-728C3BB1EE4B}"/>
+              </a:ext>
+            </a:extLst>
+          </p:cNvPr>
+          <p:cNvSpPr>
+            <a:spLocks xmlns:a="http://schemas.openxmlformats.org/drawingml/2006/main" noGrp="1"/>
+          </p:cNvSpPr>
+          <p:nvPr/>
+        </p:nvSpPr>
+        <p:spPr>
+          <a:xfrm xmlns:a="http://schemas.openxmlformats.org/drawingml/2006/main">
+            <a:off x="685800" y="1619250"/>
+            <a:ext cx="9144000" cy="1619250"/>
+          </a:xfrm>
+          <a:prstGeom xmlns:a="http://schemas.openxmlformats.org/drawingml/2006/main" prst="rect">
+            <a:avLst/>
+          </a:prstGeom>
+          <a:noFill xmlns:a="http://schemas.openxmlformats.org/drawingml/2006/main"/>
+          <a:ln xmlns:a="http://schemas.openxmlformats.org/drawingml/2006/main" w="0">
+            <a:noFill/>
+            <a:prstDash val="solid"/>
+          </a:ln>
+        </p:spPr>
+        <p:txBody>
+          <a:bodyPr xmlns:a="http://schemas.openxmlformats.org/drawingml/2006/main" anchor="t"/>
+          <a:lstStyle xmlns:a="http://schemas.openxmlformats.org/drawingml/2006/main"/>
+          <a:p xmlns:a="http://schemas.openxmlformats.org/drawingml/2006/main">
+            <a:pPr algn="l">
+              <a:defRPr sz="4800" b="1">
+                <a:solidFill>
+                  <a:srgbClr val="FFFFFF"/>
+                </a:solidFill>
+              </a:defRPr>
+            </a:pPr>
+            <a:r>
+              <a:rPr sz="4800" b="1">
+                <a:solidFill>
+                  <a:srgbClr val="FFFFFF"/>
+                </a:solidFill>
+              </a:rPr>
+              <a:t>Can the geometry survive</a:t>
+            </a:r>
+          </a:p>
+          <a:p xmlns:a="http://schemas.openxmlformats.org/drawingml/2006/main">
+            <a:pPr algn="l">
+              <a:defRPr sz="4800" b="1">
+                <a:solidFill>
+                  <a:srgbClr val="FFFFFF"/>
+                </a:solidFill>
+              </a:defRPr>
+            </a:pPr>
+            <a:r>
+              <a:rPr sz="4800" b="1">
+                <a:solidFill>
+                  <a:srgbClr val="FFFFFF"/>
+                </a:solidFill>
+              </a:rPr>
+              <a:t>executable timing?</a:t>
+            </a:r>
+          </a:p>
+        </p:txBody>
+      </p:sp>
+      <p:sp>
+        <p:nvSpPr>
+          <p:cNvPr id="3" name="">
+            <a:extLst xmlns:a="http://schemas.openxmlformats.org/drawingml/2006/main">
+              <a:ext uri="{FF2B5EF4-FFF2-40B4-BE49-F238E27FC236}">
+                <a16:creationId xmlns:a16="http://schemas.microsoft.com/office/drawing/2014/main" id="{C04AE9E5-4E42-440E-8889-4F6D009CF3CF}"/>
+              </a:ext>
+            </a:extLst>
+          </p:cNvPr>
+          <p:cNvSpPr>
+            <a:spLocks xmlns:a="http://schemas.openxmlformats.org/drawingml/2006/main" noGrp="1"/>
+          </p:cNvSpPr>
+          <p:nvPr/>
+        </p:nvSpPr>
+        <p:spPr>
+          <a:xfrm xmlns:a="http://schemas.openxmlformats.org/drawingml/2006/main">
+            <a:off x="723900" y="3886200"/>
+            <a:ext cx="10287000" cy="1200150"/>
+          </a:xfrm>
+          <a:prstGeom xmlns:a="http://schemas.openxmlformats.org/drawingml/2006/main" prst="rect">
+            <a:avLst/>
+          </a:prstGeom>
+          <a:noFill xmlns:a="http://schemas.openxmlformats.org/drawingml/2006/main"/>
+          <a:ln xmlns:a="http://schemas.openxmlformats.org/drawingml/2006/main" w="0">
+            <a:noFill/>
+            <a:prstDash val="solid"/>
+          </a:ln>
+        </p:spPr>
+        <p:txBody>
+          <a:bodyPr xmlns:a="http://schemas.openxmlformats.org/drawingml/2006/main" anchor="t"/>
+          <a:lstStyle xmlns:a="http://schemas.openxmlformats.org/drawingml/2006/main"/>
+          <a:p xmlns:a="http://schemas.openxmlformats.org/drawingml/2006/main">
+            <a:pPr algn="l">
+              <a:defRPr sz="2025" b="0">
+                <a:solidFill>
+                  <a:srgbClr val="D0EDFA"/>
+                </a:solidFill>
+              </a:defRPr>
+            </a:pPr>
+            <a:r>
+              <a:rPr sz="2025" b="0">
+                <a:solidFill>
+                  <a:srgbClr val="D0EDFA"/>
+                </a:solidFill>
+              </a:rPr>
+              <a:t>Two fixed 20/20 clues are converted into next-open, open-to-open rules. The purpose is not to optimize them; it is to see which descriptive pattern remains visible after causal timing, no-overlap, costs, and simple controls.</a:t>
+            </a:r>
+          </a:p>
+        </p:txBody>
+      </p:sp>
+      <p:sp>
+        <p:nvSpPr>
+          <p:cNvPr id="4" name="">
+            <a:extLst xmlns:a="http://schemas.openxmlformats.org/drawingml/2006/main">
+              <a:ext uri="{FF2B5EF4-FFF2-40B4-BE49-F238E27FC236}">
+                <a16:creationId xmlns:a16="http://schemas.microsoft.com/office/drawing/2014/main" id="{826D6EDF-F5E4-4FC1-9D5A-53F8401C6891}"/>
+              </a:ext>
+            </a:extLst>
+          </p:cNvPr>
+          <p:cNvSpPr>
+            <a:spLocks xmlns:a="http://schemas.openxmlformats.org/drawingml/2006/main" noGrp="1"/>
+          </p:cNvSpPr>
+          <p:nvPr/>
+        </p:nvSpPr>
+        <p:spPr>
+          <a:xfrm xmlns:a="http://schemas.openxmlformats.org/drawingml/2006/main">
+            <a:off x="723900" y="5734050"/>
+            <a:ext cx="8572500" cy="304800"/>
+          </a:xfrm>
+          <a:prstGeom xmlns:a="http://schemas.openxmlformats.org/drawingml/2006/main" prst="rect">
+            <a:avLst/>
+          </a:prstGeom>
+          <a:noFill xmlns:a="http://schemas.openxmlformats.org/drawingml/2006/main"/>
+          <a:ln xmlns:a="http://schemas.openxmlformats.org/drawingml/2006/main" w="0">
+            <a:noFill/>
+            <a:prstDash val="solid"/>
+          </a:ln>
+        </p:spPr>
+        <p:txBody>
+          <a:bodyPr xmlns:a="http://schemas.openxmlformats.org/drawingml/2006/main" anchor="t"/>
+          <a:lstStyle xmlns:a="http://schemas.openxmlformats.org/drawingml/2006/main"/>
+          <a:p xmlns:a="http://schemas.openxmlformats.org/drawingml/2006/main">
+            <a:pPr algn="l">
+              <a:defRPr sz="1500" b="1">
+                <a:solidFill>
+                  <a:srgbClr val="FFFFFF"/>
+                </a:solidFill>
+              </a:defRPr>
+            </a:pPr>
+            <a:r>
+              <a:rPr sz="1500" b="1">
+                <a:solidFill>
+                  <a:srgbClr val="FFFFFF"/>
+                </a:solidFill>
+              </a:rPr>
+              <a:t>2018–2023 TRAIN only · 2024+ remains sealed</a:t>
+            </a:r>
+          </a:p>
+        </p:txBody>
+      </p:sp>
+      <p:sp>
+        <p:nvSpPr>
+          <p:cNvPr id="5" name="">
+            <a:extLst xmlns:a="http://schemas.openxmlformats.org/drawingml/2006/main">
+              <a:ext uri="{FF2B5EF4-FFF2-40B4-BE49-F238E27FC236}">
+                <a16:creationId xmlns:a16="http://schemas.microsoft.com/office/drawing/2014/main" id="{F7C7FCD3-6690-49CB-A64F-38876F0F2767}"/>
+              </a:ext>
+            </a:extLst>
+          </p:cNvPr>
+          <p:cNvSpPr>
+            <a:spLocks xmlns:a="http://schemas.openxmlformats.org/drawingml/2006/main" noGrp="1"/>
+          </p:cNvSpPr>
+          <p:nvPr/>
+        </p:nvSpPr>
+        <p:spPr>
+          <a:xfrm xmlns:a="http://schemas.openxmlformats.org/drawingml/2006/main">
+            <a:off x="10801350" y="6400800"/>
+            <a:ext cx="857250" cy="190500"/>
+          </a:xfrm>
+          <a:prstGeom xmlns:a="http://schemas.openxmlformats.org/drawingml/2006/main" prst="rect">
+            <a:avLst/>
+          </a:prstGeom>
+          <a:noFill xmlns:a="http://schemas.openxmlformats.org/drawingml/2006/main"/>
+          <a:ln xmlns:a="http://schemas.openxmlformats.org/drawingml/2006/main" w="0">
+            <a:noFill/>
+            <a:prstDash val="solid"/>
+          </a:ln>
+        </p:spPr>
+        <p:txBody>
+          <a:bodyPr xmlns:a="http://schemas.openxmlformats.org/drawingml/2006/main" anchor="t"/>
+          <a:lstStyle xmlns:a="http://schemas.openxmlformats.org/drawingml/2006/main"/>
+          <a:p xmlns:a="http://schemas.openxmlformats.org/drawingml/2006/main">
+            <a:pPr algn="r">
+              <a:defRPr sz="900" b="0">
+                <a:solidFill>
+                  <a:srgbClr val="D0EDFA"/>
+                </a:solidFill>
+              </a:defRPr>
+            </a:pPr>
+            <a:r>
+              <a:rPr sz="900" b="0">
+                <a:solidFill>
+                  <a:srgbClr val="D0EDFA"/>
+                </a:solidFill>
+              </a:rPr>
+              <a:t>15</a:t>
+            </a:r>
+          </a:p>
+        </p:txBody>
+      </p:sp>
+    </p:spTree>
+    <p:extLst>
+      <p:ext uri="{BB962C8B-B14F-4D97-AF65-F5344CB8AC3E}">
+        <p14:creationId xmlns:p14="http://schemas.microsoft.com/office/powerpoint/2010/main" val="297651712"/>
+      </p:ext>
+    </p:extLst>
+  </p:cSld>
+</p:sld>
+</file>
+
+<file path=ppt/slides/slide16.xml><?xml version="1.0" encoding="utf-8"?>
+<p:sld xmlns:p="http://schemas.openxmlformats.org/presentationml/2006/main">
+  <p:cSld>
+    <p:bg>
+      <p:bgPr>
+        <a:solidFill xmlns:a="http://schemas.openxmlformats.org/drawingml/2006/main">
+          <a:srgbClr val="FFFFFF"/>
+        </a:solidFill>
+      </p:bgPr>
+    </p:bg>
+    <p:spTree>
+      <p:nvGrpSpPr>
+        <p:cNvPr id="1" name=""/>
+        <p:cNvGrpSpPr/>
+        <p:nvPr/>
+      </p:nvGrpSpPr>
+      <p:grpSpPr>
+        <a:xfrm xmlns:a="http://schemas.openxmlformats.org/drawingml/2006/main"/>
+      </p:grpSpPr>
+      <p:sp>
+        <p:nvSpPr>
+          <p:cNvPr id="20" name="">
+            <a:extLst xmlns:a="http://schemas.openxmlformats.org/drawingml/2006/main">
+              <a:ext uri="{FF2B5EF4-FFF2-40B4-BE49-F238E27FC236}">
+                <a16:creationId xmlns:a16="http://schemas.microsoft.com/office/drawing/2014/main" id="{2B79A190-48F6-45C1-A151-32D651499934}"/>
+              </a:ext>
+            </a:extLst>
+          </p:cNvPr>
+          <p:cNvSpPr>
+            <a:spLocks xmlns:a="http://schemas.openxmlformats.org/drawingml/2006/main" noGrp="1"/>
+          </p:cNvSpPr>
+          <p:nvPr/>
+        </p:nvSpPr>
+        <p:spPr>
+          <a:xfrm xmlns:a="http://schemas.openxmlformats.org/drawingml/2006/main">
+            <a:off x="457200" y="238125"/>
+            <a:ext cx="6191250" cy="190500"/>
+          </a:xfrm>
+          <a:prstGeom xmlns:a="http://schemas.openxmlformats.org/drawingml/2006/main" prst="rect">
+            <a:avLst/>
+          </a:prstGeom>
+          <a:noFill xmlns:a="http://schemas.openxmlformats.org/drawingml/2006/main"/>
+          <a:ln xmlns:a="http://schemas.openxmlformats.org/drawingml/2006/main" w="0">
+            <a:noFill/>
+            <a:prstDash val="solid"/>
+          </a:ln>
+        </p:spPr>
+        <p:txBody>
+          <a:bodyPr xmlns:a="http://schemas.openxmlformats.org/drawingml/2006/main" anchor="t"/>
+          <a:lstStyle xmlns:a="http://schemas.openxmlformats.org/drawingml/2006/main"/>
+          <a:p xmlns:a="http://schemas.openxmlformats.org/drawingml/2006/main">
+            <a:pPr algn="l">
+              <a:defRPr sz="1050" b="1">
+                <a:solidFill>
+                  <a:srgbClr val="667386"/>
+                </a:solidFill>
+              </a:defRPr>
+            </a:pPr>
+            <a:r>
+              <a:rPr sz="1050" b="1">
+                <a:solidFill>
+                  <a:srgbClr val="667386"/>
+                </a:solidFill>
+              </a:rPr>
+              <a:t>OPERATOR HYPOTHESIS LAB · NVDA PROTO-RULES</a:t>
+            </a:r>
+          </a:p>
+        </p:txBody>
+      </p:sp>
+      <p:sp>
+        <p:nvSpPr>
+          <p:cNvPr id="2" name="">
+            <a:extLst xmlns:a="http://schemas.openxmlformats.org/drawingml/2006/main">
+              <a:ext uri="{FF2B5EF4-FFF2-40B4-BE49-F238E27FC236}">
+                <a16:creationId xmlns:a16="http://schemas.microsoft.com/office/drawing/2014/main" id="{E313ED1D-C1AF-48F3-A731-0CCDCE4CC621}"/>
+              </a:ext>
+            </a:extLst>
+          </p:cNvPr>
+          <p:cNvSpPr>
+            <a:spLocks xmlns:a="http://schemas.openxmlformats.org/drawingml/2006/main" noGrp="1"/>
+          </p:cNvSpPr>
+          <p:nvPr/>
+        </p:nvSpPr>
+        <p:spPr>
+          <a:xfrm xmlns:a="http://schemas.openxmlformats.org/drawingml/2006/main">
+            <a:off x="457200" y="523875"/>
+            <a:ext cx="11049000" cy="590550"/>
+          </a:xfrm>
+          <a:prstGeom xmlns:a="http://schemas.openxmlformats.org/drawingml/2006/main" prst="rect">
+            <a:avLst/>
+          </a:prstGeom>
+          <a:noFill xmlns:a="http://schemas.openxmlformats.org/drawingml/2006/main"/>
+          <a:ln xmlns:a="http://schemas.openxmlformats.org/drawingml/2006/main" w="0">
+            <a:noFill/>
+            <a:prstDash val="solid"/>
+          </a:ln>
+        </p:spPr>
+        <p:txBody>
+          <a:bodyPr xmlns:a="http://schemas.openxmlformats.org/drawingml/2006/main" anchor="t"/>
+          <a:lstStyle xmlns:a="http://schemas.openxmlformats.org/drawingml/2006/main"/>
+          <a:p xmlns:a="http://schemas.openxmlformats.org/drawingml/2006/main">
+            <a:pPr algn="l">
+              <a:defRPr sz="2925" b="1">
+                <a:solidFill>
+                  <a:srgbClr val="000000"/>
+                </a:solidFill>
+              </a:defRPr>
+            </a:pPr>
+            <a:r>
+              <a:rPr sz="2925" b="1">
+                <a:solidFill>
+                  <a:srgbClr val="000000"/>
+                </a:solidFill>
+              </a:rPr>
+              <a:t>Two clues, two frozen rule translations</a:t>
+            </a:r>
+          </a:p>
+        </p:txBody>
+      </p:sp>
+      <p:sp>
+        <p:nvSpPr>
+          <p:cNvPr id="3" name="">
+            <a:extLst xmlns:a="http://schemas.openxmlformats.org/drawingml/2006/main">
+              <a:ext uri="{FF2B5EF4-FFF2-40B4-BE49-F238E27FC236}">
+                <a16:creationId xmlns:a16="http://schemas.microsoft.com/office/drawing/2014/main" id="{93FA6F6F-C2CA-4F17-AFA0-A0394B3C5F1B}"/>
+              </a:ext>
+            </a:extLst>
+          </p:cNvPr>
+          <p:cNvSpPr>
+            <a:spLocks xmlns:a="http://schemas.openxmlformats.org/drawingml/2006/main" noGrp="1"/>
+          </p:cNvSpPr>
+          <p:nvPr/>
+        </p:nvSpPr>
+        <p:spPr>
+          <a:xfrm xmlns:a="http://schemas.openxmlformats.org/drawingml/2006/main">
+            <a:off x="457200" y="1219200"/>
+            <a:ext cx="11277600" cy="19050"/>
+          </a:xfrm>
+          <a:prstGeom xmlns:a="http://schemas.openxmlformats.org/drawingml/2006/main" prst="rect">
+            <a:avLst/>
+          </a:prstGeom>
+          <a:solidFill xmlns:a="http://schemas.openxmlformats.org/drawingml/2006/main">
+            <a:srgbClr val="B8BCC4"/>
+          </a:solidFill>
+          <a:ln xmlns:a="http://schemas.openxmlformats.org/drawingml/2006/main" w="0">
+            <a:solidFill>
+              <a:srgbClr val="B8BCC4"/>
+            </a:solidFill>
+            <a:prstDash val="solid"/>
+          </a:ln>
+        </p:spPr>
+      </p:sp>
+      <p:sp>
+        <p:nvSpPr>
+          <p:cNvPr id="4" name="">
+            <a:extLst xmlns:a="http://schemas.openxmlformats.org/drawingml/2006/main">
+              <a:ext uri="{FF2B5EF4-FFF2-40B4-BE49-F238E27FC236}">
+                <a16:creationId xmlns:a16="http://schemas.microsoft.com/office/drawing/2014/main" id="{A9B197D2-82A8-46A1-A15F-E27AFF487D89}"/>
+              </a:ext>
+            </a:extLst>
+          </p:cNvPr>
+          <p:cNvSpPr>
+            <a:spLocks xmlns:a="http://schemas.openxmlformats.org/drawingml/2006/main" noGrp="1"/>
+          </p:cNvSpPr>
+          <p:nvPr/>
+        </p:nvSpPr>
+        <p:spPr>
+          <a:xfrm xmlns:a="http://schemas.openxmlformats.org/drawingml/2006/main">
+            <a:off x="457200" y="6515100"/>
+            <a:ext cx="7048500" cy="161925"/>
+          </a:xfrm>
+          <a:prstGeom xmlns:a="http://schemas.openxmlformats.org/drawingml/2006/main" prst="rect">
+            <a:avLst/>
+          </a:prstGeom>
+          <a:noFill xmlns:a="http://schemas.openxmlformats.org/drawingml/2006/main"/>
+          <a:ln xmlns:a="http://schemas.openxmlformats.org/drawingml/2006/main" w="0">
+            <a:noFill/>
+            <a:prstDash val="solid"/>
+          </a:ln>
+        </p:spPr>
+        <p:txBody>
+          <a:bodyPr xmlns:a="http://schemas.openxmlformats.org/drawingml/2006/main" anchor="t"/>
+          <a:lstStyle xmlns:a="http://schemas.openxmlformats.org/drawingml/2006/main"/>
+          <a:p xmlns:a="http://schemas.openxmlformats.org/drawingml/2006/main">
+            <a:pPr algn="l">
+              <a:defRPr sz="900" b="0">
+                <a:solidFill>
+                  <a:srgbClr val="667386"/>
+                </a:solidFill>
+              </a:defRPr>
+            </a:pPr>
+            <a:r>
+              <a:rPr sz="900" b="0">
+                <a:solidFill>
+                  <a:srgbClr val="667386"/>
+                </a:solidFill>
+              </a:rPr>
+              <a:t>Descriptive research · adjusted bars · frozen 2018–2023 window</a:t>
+            </a:r>
+          </a:p>
+        </p:txBody>
+      </p:sp>
+      <p:sp>
+        <p:nvSpPr>
+          <p:cNvPr id="5" name="">
+            <a:extLst xmlns:a="http://schemas.openxmlformats.org/drawingml/2006/main">
+              <a:ext uri="{FF2B5EF4-FFF2-40B4-BE49-F238E27FC236}">
+                <a16:creationId xmlns:a16="http://schemas.microsoft.com/office/drawing/2014/main" id="{06D29A5F-C621-4FF8-883E-487DDDB881CD}"/>
+              </a:ext>
+            </a:extLst>
+          </p:cNvPr>
+          <p:cNvSpPr>
+            <a:spLocks xmlns:a="http://schemas.openxmlformats.org/drawingml/2006/main" noGrp="1"/>
+          </p:cNvSpPr>
+          <p:nvPr/>
+        </p:nvSpPr>
+        <p:spPr>
+          <a:xfrm xmlns:a="http://schemas.openxmlformats.org/drawingml/2006/main">
+            <a:off x="10858500" y="6496050"/>
+            <a:ext cx="876300" cy="171450"/>
+          </a:xfrm>
+          <a:prstGeom xmlns:a="http://schemas.openxmlformats.org/drawingml/2006/main" prst="rect">
+            <a:avLst/>
+          </a:prstGeom>
+          <a:noFill xmlns:a="http://schemas.openxmlformats.org/drawingml/2006/main"/>
+          <a:ln xmlns:a="http://schemas.openxmlformats.org/drawingml/2006/main" w="0">
+            <a:noFill/>
+            <a:prstDash val="solid"/>
+          </a:ln>
+        </p:spPr>
+        <p:txBody>
+          <a:bodyPr xmlns:a="http://schemas.openxmlformats.org/drawingml/2006/main" anchor="t"/>
+          <a:lstStyle xmlns:a="http://schemas.openxmlformats.org/drawingml/2006/main"/>
+          <a:p xmlns:a="http://schemas.openxmlformats.org/drawingml/2006/main">
+            <a:pPr algn="r">
+              <a:defRPr sz="900" b="0">
+                <a:solidFill>
+                  <a:srgbClr val="667386"/>
+                </a:solidFill>
+              </a:defRPr>
+            </a:pPr>
+            <a:r>
+              <a:rPr sz="900" b="0">
+                <a:solidFill>
+                  <a:srgbClr val="667386"/>
+                </a:solidFill>
+              </a:rPr>
+              <a:t>16</a:t>
+            </a:r>
+          </a:p>
+        </p:txBody>
+      </p:sp>
+      <p:sp>
+        <p:nvSpPr>
+          <p:cNvPr id="6" name="">
+            <a:extLst xmlns:a="http://schemas.openxmlformats.org/drawingml/2006/main">
+              <a:ext uri="{FF2B5EF4-FFF2-40B4-BE49-F238E27FC236}">
+                <a16:creationId xmlns:a16="http://schemas.microsoft.com/office/drawing/2014/main" id="{4CCC06B5-1622-4501-A1FC-DA731A251EB9}"/>
+              </a:ext>
+            </a:extLst>
+          </p:cNvPr>
+          <p:cNvSpPr>
+            <a:spLocks xmlns:a="http://schemas.openxmlformats.org/drawingml/2006/main" noGrp="1"/>
+          </p:cNvSpPr>
+          <p:nvPr/>
+        </p:nvSpPr>
+        <p:spPr>
+          <a:xfrm xmlns:a="http://schemas.openxmlformats.org/drawingml/2006/main">
+            <a:off x="552450" y="1562100"/>
+            <a:ext cx="5238750" cy="3352800"/>
+          </a:xfrm>
+          <a:prstGeom xmlns:a="http://schemas.openxmlformats.org/drawingml/2006/main" prst="rect">
+            <a:avLst/>
+          </a:prstGeom>
+          <a:solidFill xmlns:a="http://schemas.openxmlformats.org/drawingml/2006/main">
+            <a:srgbClr val="D0EDFA"/>
+          </a:solidFill>
+          <a:ln xmlns:a="http://schemas.openxmlformats.org/drawingml/2006/main" w="0">
+            <a:solidFill>
+              <a:srgbClr val="D0EDFA"/>
+            </a:solidFill>
+            <a:prstDash val="solid"/>
+          </a:ln>
+        </p:spPr>
+      </p:sp>
+      <p:sp>
+        <p:nvSpPr>
+          <p:cNvPr id="7" name="">
+            <a:extLst xmlns:a="http://schemas.openxmlformats.org/drawingml/2006/main">
+              <a:ext uri="{FF2B5EF4-FFF2-40B4-BE49-F238E27FC236}">
+                <a16:creationId xmlns:a16="http://schemas.microsoft.com/office/drawing/2014/main" id="{6737FD43-6A7E-4446-958A-935000EF0605}"/>
+              </a:ext>
+            </a:extLst>
+          </p:cNvPr>
+          <p:cNvSpPr>
+            <a:spLocks xmlns:a="http://schemas.openxmlformats.org/drawingml/2006/main" noGrp="1"/>
+          </p:cNvSpPr>
+          <p:nvPr/>
+        </p:nvSpPr>
+        <p:spPr>
+          <a:xfrm xmlns:a="http://schemas.openxmlformats.org/drawingml/2006/main">
+            <a:off x="819150" y="1828800"/>
+            <a:ext cx="4572000" cy="361950"/>
+          </a:xfrm>
+          <a:prstGeom xmlns:a="http://schemas.openxmlformats.org/drawingml/2006/main" prst="rect">
+            <a:avLst/>
+          </a:prstGeom>
+          <a:noFill xmlns:a="http://schemas.openxmlformats.org/drawingml/2006/main"/>
+          <a:ln xmlns:a="http://schemas.openxmlformats.org/drawingml/2006/main" w="0">
+            <a:noFill/>
+            <a:prstDash val="solid"/>
+          </a:ln>
+        </p:spPr>
+        <p:txBody>
+          <a:bodyPr xmlns:a="http://schemas.openxmlformats.org/drawingml/2006/main" anchor="t"/>
+          <a:lstStyle xmlns:a="http://schemas.openxmlformats.org/drawingml/2006/main"/>
+          <a:p xmlns:a="http://schemas.openxmlformats.org/drawingml/2006/main">
+            <a:pPr algn="l">
+              <a:defRPr sz="2175" b="1">
+                <a:solidFill>
+                  <a:srgbClr val="3D8DFF"/>
+                </a:solidFill>
+              </a:defRPr>
+            </a:pPr>
+            <a:r>
+              <a:rPr sz="2175" b="1">
+                <a:solidFill>
+                  <a:srgbClr val="3D8DFF"/>
+                </a:solidFill>
+              </a:rPr>
+              <a:t>Efficient-up continuation</a:t>
+            </a:r>
+          </a:p>
+        </p:txBody>
+      </p:sp>
+      <p:sp>
+        <p:nvSpPr>
+          <p:cNvPr id="8" name="">
+            <a:extLst xmlns:a="http://schemas.openxmlformats.org/drawingml/2006/main">
+              <a:ext uri="{FF2B5EF4-FFF2-40B4-BE49-F238E27FC236}">
+                <a16:creationId xmlns:a16="http://schemas.microsoft.com/office/drawing/2014/main" id="{A801BBEC-89FA-4B53-A3A4-1C1A9FD9A755}"/>
+              </a:ext>
+            </a:extLst>
+          </p:cNvPr>
+          <p:cNvSpPr>
+            <a:spLocks xmlns:a="http://schemas.openxmlformats.org/drawingml/2006/main" noGrp="1"/>
+          </p:cNvSpPr>
+          <p:nvPr/>
+        </p:nvSpPr>
+        <p:spPr>
+          <a:xfrm xmlns:a="http://schemas.openxmlformats.org/drawingml/2006/main">
+            <a:off x="838200" y="2457450"/>
+            <a:ext cx="1238250" cy="266700"/>
+          </a:xfrm>
+          <a:prstGeom xmlns:a="http://schemas.openxmlformats.org/drawingml/2006/main" prst="rect">
+            <a:avLst/>
+          </a:prstGeom>
+          <a:noFill xmlns:a="http://schemas.openxmlformats.org/drawingml/2006/main"/>
+          <a:ln xmlns:a="http://schemas.openxmlformats.org/drawingml/2006/main" w="0">
+            <a:noFill/>
+            <a:prstDash val="solid"/>
+          </a:ln>
+        </p:spPr>
+        <p:txBody>
+          <a:bodyPr xmlns:a="http://schemas.openxmlformats.org/drawingml/2006/main" anchor="t"/>
+          <a:lstStyle xmlns:a="http://schemas.openxmlformats.org/drawingml/2006/main"/>
+          <a:p xmlns:a="http://schemas.openxmlformats.org/drawingml/2006/main">
+            <a:pPr algn="l">
+              <a:defRPr sz="1350" b="1">
+                <a:solidFill>
+                  <a:srgbClr val="667386"/>
+                </a:solidFill>
+              </a:defRPr>
+            </a:pPr>
+            <a:r>
+              <a:rPr sz="1350" b="1">
+                <a:solidFill>
+                  <a:srgbClr val="667386"/>
+                </a:solidFill>
+              </a:rPr>
+              <a:t>At close t</a:t>
+            </a:r>
+          </a:p>
+        </p:txBody>
+      </p:sp>
+      <p:sp>
+        <p:nvSpPr>
+          <p:cNvPr id="9" name="">
+            <a:extLst xmlns:a="http://schemas.openxmlformats.org/drawingml/2006/main">
+              <a:ext uri="{FF2B5EF4-FFF2-40B4-BE49-F238E27FC236}">
+                <a16:creationId xmlns:a16="http://schemas.microsoft.com/office/drawing/2014/main" id="{11DD4A81-B6E7-4AB8-81AF-53F74D1B8CDE}"/>
+              </a:ext>
+            </a:extLst>
+          </p:cNvPr>
+          <p:cNvSpPr>
+            <a:spLocks xmlns:a="http://schemas.openxmlformats.org/drawingml/2006/main" noGrp="1"/>
+          </p:cNvSpPr>
+          <p:nvPr/>
+        </p:nvSpPr>
+        <p:spPr>
+          <a:xfrm xmlns:a="http://schemas.openxmlformats.org/drawingml/2006/main">
+            <a:off x="838200" y="2800350"/>
+            <a:ext cx="4476750" cy="419100"/>
+          </a:xfrm>
+          <a:prstGeom xmlns:a="http://schemas.openxmlformats.org/drawingml/2006/main" prst="rect">
+            <a:avLst/>
+          </a:prstGeom>
+          <a:noFill xmlns:a="http://schemas.openxmlformats.org/drawingml/2006/main"/>
+          <a:ln xmlns:a="http://schemas.openxmlformats.org/drawingml/2006/main" w="0">
+            <a:noFill/>
+            <a:prstDash val="solid"/>
+          </a:ln>
+        </p:spPr>
+        <p:txBody>
+          <a:bodyPr xmlns:a="http://schemas.openxmlformats.org/drawingml/2006/main" anchor="t"/>
+          <a:lstStyle xmlns:a="http://schemas.openxmlformats.org/drawingml/2006/main"/>
+          <a:p xmlns:a="http://schemas.openxmlformats.org/drawingml/2006/main">
+            <a:pPr algn="l">
+              <a:defRPr sz="2100" b="1">
+                <a:solidFill>
+                  <a:srgbClr val="24364B"/>
+                </a:solidFill>
+              </a:defRPr>
+            </a:pPr>
+            <a:r>
+              <a:rPr sz="2100" b="1">
+                <a:solidFill>
+                  <a:srgbClr val="24364B"/>
+                </a:solidFill>
+              </a:rPr>
+              <a:t>R20 &gt; 0  AND  ER20 ≥ 0.30</a:t>
+            </a:r>
+          </a:p>
+        </p:txBody>
+      </p:sp>
+      <p:sp>
+        <p:nvSpPr>
+          <p:cNvPr id="10" name="">
+            <a:extLst xmlns:a="http://schemas.openxmlformats.org/drawingml/2006/main">
+              <a:ext uri="{FF2B5EF4-FFF2-40B4-BE49-F238E27FC236}">
+                <a16:creationId xmlns:a16="http://schemas.microsoft.com/office/drawing/2014/main" id="{F71B7E33-217D-4488-BE44-43695982E3E3}"/>
+              </a:ext>
+            </a:extLst>
+          </p:cNvPr>
+          <p:cNvSpPr>
+            <a:spLocks xmlns:a="http://schemas.openxmlformats.org/drawingml/2006/main" noGrp="1"/>
+          </p:cNvSpPr>
+          <p:nvPr/>
+        </p:nvSpPr>
+        <p:spPr>
+          <a:xfrm xmlns:a="http://schemas.openxmlformats.org/drawingml/2006/main">
+            <a:off x="838200" y="3543300"/>
+            <a:ext cx="1238250" cy="266700"/>
+          </a:xfrm>
+          <a:prstGeom xmlns:a="http://schemas.openxmlformats.org/drawingml/2006/main" prst="rect">
+            <a:avLst/>
+          </a:prstGeom>
+          <a:noFill xmlns:a="http://schemas.openxmlformats.org/drawingml/2006/main"/>
+          <a:ln xmlns:a="http://schemas.openxmlformats.org/drawingml/2006/main" w="0">
+            <a:noFill/>
+            <a:prstDash val="solid"/>
+          </a:ln>
+        </p:spPr>
+        <p:txBody>
+          <a:bodyPr xmlns:a="http://schemas.openxmlformats.org/drawingml/2006/main" anchor="t"/>
+          <a:lstStyle xmlns:a="http://schemas.openxmlformats.org/drawingml/2006/main"/>
+          <a:p xmlns:a="http://schemas.openxmlformats.org/drawingml/2006/main">
+            <a:pPr algn="l">
+              <a:defRPr sz="1350" b="1">
+                <a:solidFill>
+                  <a:srgbClr val="667386"/>
+                </a:solidFill>
+              </a:defRPr>
+            </a:pPr>
+            <a:r>
+              <a:rPr sz="1350" b="1">
+                <a:solidFill>
+                  <a:srgbClr val="667386"/>
+                </a:solidFill>
+              </a:rPr>
+              <a:t>Thesis</a:t>
+            </a:r>
+          </a:p>
+        </p:txBody>
+      </p:sp>
+      <p:sp>
+        <p:nvSpPr>
+          <p:cNvPr id="11" name="">
+            <a:extLst xmlns:a="http://schemas.openxmlformats.org/drawingml/2006/main">
+              <a:ext uri="{FF2B5EF4-FFF2-40B4-BE49-F238E27FC236}">
+                <a16:creationId xmlns:a16="http://schemas.microsoft.com/office/drawing/2014/main" id="{6E0747B8-49BD-4ED5-A340-3DF70FD87A36}"/>
+              </a:ext>
+            </a:extLst>
+          </p:cNvPr>
+          <p:cNvSpPr>
+            <a:spLocks xmlns:a="http://schemas.openxmlformats.org/drawingml/2006/main" noGrp="1"/>
+          </p:cNvSpPr>
+          <p:nvPr/>
+        </p:nvSpPr>
+        <p:spPr>
+          <a:xfrm xmlns:a="http://schemas.openxmlformats.org/drawingml/2006/main">
+            <a:off x="838200" y="3886200"/>
+            <a:ext cx="4476750" cy="723900"/>
+          </a:xfrm>
+          <a:prstGeom xmlns:a="http://schemas.openxmlformats.org/drawingml/2006/main" prst="rect">
+            <a:avLst/>
+          </a:prstGeom>
+          <a:noFill xmlns:a="http://schemas.openxmlformats.org/drawingml/2006/main"/>
+          <a:ln xmlns:a="http://schemas.openxmlformats.org/drawingml/2006/main" w="0">
+            <a:noFill/>
+            <a:prstDash val="solid"/>
+          </a:ln>
+        </p:spPr>
+        <p:txBody>
+          <a:bodyPr xmlns:a="http://schemas.openxmlformats.org/drawingml/2006/main" anchor="t"/>
+          <a:lstStyle xmlns:a="http://schemas.openxmlformats.org/drawingml/2006/main"/>
+          <a:p xmlns:a="http://schemas.openxmlformats.org/drawingml/2006/main">
+            <a:pPr algn="l">
+              <a:defRPr sz="1725" b="0">
+                <a:solidFill>
+                  <a:srgbClr val="24364B"/>
+                </a:solidFill>
+              </a:defRPr>
+            </a:pPr>
+            <a:r>
+              <a:rPr sz="1725" b="0">
+                <a:solidFill>
+                  <a:srgbClr val="24364B"/>
+                </a:solidFill>
+              </a:rPr>
+              <a:t>An efficient upward path may continue after the signal is observable.</a:t>
+            </a:r>
+          </a:p>
+        </p:txBody>
+      </p:sp>
+      <p:sp>
+        <p:nvSpPr>
+          <p:cNvPr id="12" name="">
+            <a:extLst xmlns:a="http://schemas.openxmlformats.org/drawingml/2006/main">
+              <a:ext uri="{FF2B5EF4-FFF2-40B4-BE49-F238E27FC236}">
+                <a16:creationId xmlns:a16="http://schemas.microsoft.com/office/drawing/2014/main" id="{770FE7CC-2D17-4684-87E6-32591B697F2F}"/>
+              </a:ext>
+            </a:extLst>
+          </p:cNvPr>
+          <p:cNvSpPr>
+            <a:spLocks xmlns:a="http://schemas.openxmlformats.org/drawingml/2006/main" noGrp="1"/>
+          </p:cNvSpPr>
+          <p:nvPr/>
+        </p:nvSpPr>
+        <p:spPr>
+          <a:xfrm xmlns:a="http://schemas.openxmlformats.org/drawingml/2006/main">
+            <a:off x="6096000" y="1562100"/>
+            <a:ext cx="5543550" cy="3352800"/>
+          </a:xfrm>
+          <a:prstGeom xmlns:a="http://schemas.openxmlformats.org/drawingml/2006/main" prst="rect">
+            <a:avLst/>
+          </a:prstGeom>
+          <a:solidFill xmlns:a="http://schemas.openxmlformats.org/drawingml/2006/main">
+            <a:srgbClr val="E2F1EC"/>
+          </a:solidFill>
+          <a:ln xmlns:a="http://schemas.openxmlformats.org/drawingml/2006/main" w="0">
+            <a:solidFill>
+              <a:srgbClr val="E2F1EC"/>
+            </a:solidFill>
+            <a:prstDash val="solid"/>
+          </a:ln>
+        </p:spPr>
+      </p:sp>
+      <p:sp>
+        <p:nvSpPr>
+          <p:cNvPr id="13" name="">
+            <a:extLst xmlns:a="http://schemas.openxmlformats.org/drawingml/2006/main">
+              <a:ext uri="{FF2B5EF4-FFF2-40B4-BE49-F238E27FC236}">
+                <a16:creationId xmlns:a16="http://schemas.microsoft.com/office/drawing/2014/main" id="{7A9A91FA-427D-42D5-9519-BA43863CFD7B}"/>
+              </a:ext>
+            </a:extLst>
+          </p:cNvPr>
+          <p:cNvSpPr>
+            <a:spLocks xmlns:a="http://schemas.openxmlformats.org/drawingml/2006/main" noGrp="1"/>
+          </p:cNvSpPr>
+          <p:nvPr/>
+        </p:nvSpPr>
+        <p:spPr>
+          <a:xfrm xmlns:a="http://schemas.openxmlformats.org/drawingml/2006/main">
+            <a:off x="6381750" y="1828800"/>
+            <a:ext cx="4762500" cy="361950"/>
+          </a:xfrm>
+          <a:prstGeom xmlns:a="http://schemas.openxmlformats.org/drawingml/2006/main" prst="rect">
+            <a:avLst/>
+          </a:prstGeom>
+          <a:noFill xmlns:a="http://schemas.openxmlformats.org/drawingml/2006/main"/>
+          <a:ln xmlns:a="http://schemas.openxmlformats.org/drawingml/2006/main" w="0">
+            <a:noFill/>
+            <a:prstDash val="solid"/>
+          </a:ln>
+        </p:spPr>
+        <p:txBody>
+          <a:bodyPr xmlns:a="http://schemas.openxmlformats.org/drawingml/2006/main" anchor="t"/>
+          <a:lstStyle xmlns:a="http://schemas.openxmlformats.org/drawingml/2006/main"/>
+          <a:p xmlns:a="http://schemas.openxmlformats.org/drawingml/2006/main">
+            <a:pPr algn="l">
+              <a:defRPr sz="2175" b="1">
+                <a:solidFill>
+                  <a:srgbClr val="14866D"/>
+                </a:solidFill>
+              </a:defRPr>
+            </a:pPr>
+            <a:r>
+              <a:rPr sz="2175" b="1">
+                <a:solidFill>
+                  <a:srgbClr val="14866D"/>
+                </a:solidFill>
+              </a:rPr>
+              <a:t>Calm-pullback rebound</a:t>
+            </a:r>
+          </a:p>
+        </p:txBody>
+      </p:sp>
+      <p:sp>
+        <p:nvSpPr>
+          <p:cNvPr id="14" name="">
+            <a:extLst xmlns:a="http://schemas.openxmlformats.org/drawingml/2006/main">
+              <a:ext uri="{FF2B5EF4-FFF2-40B4-BE49-F238E27FC236}">
+                <a16:creationId xmlns:a16="http://schemas.microsoft.com/office/drawing/2014/main" id="{D6817E95-205C-4B1C-B76F-196E04A47256}"/>
+              </a:ext>
+            </a:extLst>
+          </p:cNvPr>
+          <p:cNvSpPr>
+            <a:spLocks xmlns:a="http://schemas.openxmlformats.org/drawingml/2006/main" noGrp="1"/>
+          </p:cNvSpPr>
+          <p:nvPr/>
+        </p:nvSpPr>
+        <p:spPr>
+          <a:xfrm xmlns:a="http://schemas.openxmlformats.org/drawingml/2006/main">
+            <a:off x="6400800" y="2457450"/>
+            <a:ext cx="1238250" cy="266700"/>
+          </a:xfrm>
+          <a:prstGeom xmlns:a="http://schemas.openxmlformats.org/drawingml/2006/main" prst="rect">
+            <a:avLst/>
+          </a:prstGeom>
+          <a:noFill xmlns:a="http://schemas.openxmlformats.org/drawingml/2006/main"/>
+          <a:ln xmlns:a="http://schemas.openxmlformats.org/drawingml/2006/main" w="0">
+            <a:noFill/>
+            <a:prstDash val="solid"/>
+          </a:ln>
+        </p:spPr>
+        <p:txBody>
+          <a:bodyPr xmlns:a="http://schemas.openxmlformats.org/drawingml/2006/main" anchor="t"/>
+          <a:lstStyle xmlns:a="http://schemas.openxmlformats.org/drawingml/2006/main"/>
+          <a:p xmlns:a="http://schemas.openxmlformats.org/drawingml/2006/main">
+            <a:pPr algn="l">
+              <a:defRPr sz="1350" b="1">
+                <a:solidFill>
+                  <a:srgbClr val="667386"/>
+                </a:solidFill>
+              </a:defRPr>
+            </a:pPr>
+            <a:r>
+              <a:rPr sz="1350" b="1">
+                <a:solidFill>
+                  <a:srgbClr val="667386"/>
+                </a:solidFill>
+              </a:rPr>
+              <a:t>At close t</a:t>
+            </a:r>
+          </a:p>
+        </p:txBody>
+      </p:sp>
+      <p:sp>
+        <p:nvSpPr>
+          <p:cNvPr id="15" name="">
+            <a:extLst xmlns:a="http://schemas.openxmlformats.org/drawingml/2006/main">
+              <a:ext uri="{FF2B5EF4-FFF2-40B4-BE49-F238E27FC236}">
+                <a16:creationId xmlns:a16="http://schemas.microsoft.com/office/drawing/2014/main" id="{D8221FE0-DAE1-4DD3-9FDA-11E5D6D215A5}"/>
+              </a:ext>
+            </a:extLst>
+          </p:cNvPr>
+          <p:cNvSpPr>
+            <a:spLocks xmlns:a="http://schemas.openxmlformats.org/drawingml/2006/main" noGrp="1"/>
+          </p:cNvSpPr>
+          <p:nvPr/>
+        </p:nvSpPr>
+        <p:spPr>
+          <a:xfrm xmlns:a="http://schemas.openxmlformats.org/drawingml/2006/main">
+            <a:off x="6400800" y="2800350"/>
+            <a:ext cx="4762500" cy="666750"/>
+          </a:xfrm>
+          <a:prstGeom xmlns:a="http://schemas.openxmlformats.org/drawingml/2006/main" prst="rect">
+            <a:avLst/>
+          </a:prstGeom>
+          <a:noFill xmlns:a="http://schemas.openxmlformats.org/drawingml/2006/main"/>
+          <a:ln xmlns:a="http://schemas.openxmlformats.org/drawingml/2006/main" w="0">
+            <a:noFill/>
+            <a:prstDash val="solid"/>
+          </a:ln>
+        </p:spPr>
+        <p:txBody>
+          <a:bodyPr xmlns:a="http://schemas.openxmlformats.org/drawingml/2006/main" anchor="t"/>
+          <a:lstStyle xmlns:a="http://schemas.openxmlformats.org/drawingml/2006/main"/>
+          <a:p xmlns:a="http://schemas.openxmlformats.org/drawingml/2006/main">
+            <a:pPr algn="l">
+              <a:defRPr sz="1950" b="1">
+                <a:solidFill>
+                  <a:srgbClr val="24364B"/>
+                </a:solidFill>
+              </a:defRPr>
+            </a:pPr>
+            <a:r>
+              <a:rPr sz="1950" b="1">
+                <a:solidFill>
+                  <a:srgbClr val="24364B"/>
+                </a:solidFill>
+              </a:rPr>
+              <a:t>R20 &lt; 0  AND  ATR% state = LOW or MEDIUM</a:t>
+            </a:r>
+          </a:p>
+        </p:txBody>
+      </p:sp>
+      <p:sp>
+        <p:nvSpPr>
+          <p:cNvPr id="16" name="">
+            <a:extLst xmlns:a="http://schemas.openxmlformats.org/drawingml/2006/main">
+              <a:ext uri="{FF2B5EF4-FFF2-40B4-BE49-F238E27FC236}">
+                <a16:creationId xmlns:a16="http://schemas.microsoft.com/office/drawing/2014/main" id="{D7AA7442-715A-464F-83CA-EF2E3F7F6C49}"/>
+              </a:ext>
+            </a:extLst>
+          </p:cNvPr>
+          <p:cNvSpPr>
+            <a:spLocks xmlns:a="http://schemas.openxmlformats.org/drawingml/2006/main" noGrp="1"/>
+          </p:cNvSpPr>
+          <p:nvPr/>
+        </p:nvSpPr>
+        <p:spPr>
+          <a:xfrm xmlns:a="http://schemas.openxmlformats.org/drawingml/2006/main">
+            <a:off x="6400800" y="3543300"/>
+            <a:ext cx="1238250" cy="266700"/>
+          </a:xfrm>
+          <a:prstGeom xmlns:a="http://schemas.openxmlformats.org/drawingml/2006/main" prst="rect">
+            <a:avLst/>
+          </a:prstGeom>
+          <a:noFill xmlns:a="http://schemas.openxmlformats.org/drawingml/2006/main"/>
+          <a:ln xmlns:a="http://schemas.openxmlformats.org/drawingml/2006/main" w="0">
+            <a:noFill/>
+            <a:prstDash val="solid"/>
+          </a:ln>
+        </p:spPr>
+        <p:txBody>
+          <a:bodyPr xmlns:a="http://schemas.openxmlformats.org/drawingml/2006/main" anchor="t"/>
+          <a:lstStyle xmlns:a="http://schemas.openxmlformats.org/drawingml/2006/main"/>
+          <a:p xmlns:a="http://schemas.openxmlformats.org/drawingml/2006/main">
+            <a:pPr algn="l">
+              <a:defRPr sz="1350" b="1">
+                <a:solidFill>
+                  <a:srgbClr val="667386"/>
+                </a:solidFill>
+              </a:defRPr>
+            </a:pPr>
+            <a:r>
+              <a:rPr sz="1350" b="1">
+                <a:solidFill>
+                  <a:srgbClr val="667386"/>
+                </a:solidFill>
+              </a:rPr>
+              <a:t>Thesis</a:t>
+            </a:r>
+          </a:p>
+        </p:txBody>
+      </p:sp>
+      <p:sp>
+        <p:nvSpPr>
+          <p:cNvPr id="17" name="">
+            <a:extLst xmlns:a="http://schemas.openxmlformats.org/drawingml/2006/main">
+              <a:ext uri="{FF2B5EF4-FFF2-40B4-BE49-F238E27FC236}">
+                <a16:creationId xmlns:a16="http://schemas.microsoft.com/office/drawing/2014/main" id="{6DCF643C-9ECC-481C-8B13-F1E228972A32}"/>
+              </a:ext>
+            </a:extLst>
+          </p:cNvPr>
+          <p:cNvSpPr>
+            <a:spLocks xmlns:a="http://schemas.openxmlformats.org/drawingml/2006/main" noGrp="1"/>
+          </p:cNvSpPr>
+          <p:nvPr/>
+        </p:nvSpPr>
+        <p:spPr>
+          <a:xfrm xmlns:a="http://schemas.openxmlformats.org/drawingml/2006/main">
+            <a:off x="6400800" y="3886200"/>
+            <a:ext cx="4762500" cy="819150"/>
+          </a:xfrm>
+          <a:prstGeom xmlns:a="http://schemas.openxmlformats.org/drawingml/2006/main" prst="rect">
+            <a:avLst/>
+          </a:prstGeom>
+          <a:noFill xmlns:a="http://schemas.openxmlformats.org/drawingml/2006/main"/>
+          <a:ln xmlns:a="http://schemas.openxmlformats.org/drawingml/2006/main" w="0">
+            <a:noFill/>
+            <a:prstDash val="solid"/>
+          </a:ln>
+        </p:spPr>
+        <p:txBody>
+          <a:bodyPr xmlns:a="http://schemas.openxmlformats.org/drawingml/2006/main" anchor="t"/>
+          <a:lstStyle xmlns:a="http://schemas.openxmlformats.org/drawingml/2006/main"/>
+          <a:p xmlns:a="http://schemas.openxmlformats.org/drawingml/2006/main">
+            <a:pPr algn="l">
+              <a:defRPr sz="1650" b="0">
+                <a:solidFill>
+                  <a:srgbClr val="24364B"/>
+                </a:solidFill>
+              </a:defRPr>
+            </a:pPr>
+            <a:r>
+              <a:rPr sz="1650" b="0">
+                <a:solidFill>
+                  <a:srgbClr val="24364B"/>
+                </a:solidFill>
+              </a:rPr>
+              <a:t>A loss in a non-high-volatility environment may be more recoverable than one inside a volatility shock.</a:t>
+            </a:r>
+          </a:p>
+        </p:txBody>
+      </p:sp>
+      <p:sp>
+        <p:nvSpPr>
+          <p:cNvPr id="18" name="">
+            <a:extLst xmlns:a="http://schemas.openxmlformats.org/drawingml/2006/main">
+              <a:ext uri="{FF2B5EF4-FFF2-40B4-BE49-F238E27FC236}">
+                <a16:creationId xmlns:a16="http://schemas.microsoft.com/office/drawing/2014/main" id="{64D10813-79F2-4BAA-A380-DADC6F41C338}"/>
+              </a:ext>
+            </a:extLst>
+          </p:cNvPr>
+          <p:cNvSpPr>
+            <a:spLocks xmlns:a="http://schemas.openxmlformats.org/drawingml/2006/main" noGrp="1"/>
+          </p:cNvSpPr>
+          <p:nvPr/>
+        </p:nvSpPr>
+        <p:spPr>
+          <a:xfrm xmlns:a="http://schemas.openxmlformats.org/drawingml/2006/main">
+            <a:off x="552450" y="5219700"/>
+            <a:ext cx="11087100" cy="781050"/>
+          </a:xfrm>
+          <a:prstGeom xmlns:a="http://schemas.openxmlformats.org/drawingml/2006/main" prst="rect">
+            <a:avLst/>
+          </a:prstGeom>
+          <a:solidFill xmlns:a="http://schemas.openxmlformats.org/drawingml/2006/main">
+            <a:srgbClr val="F3F5F7"/>
+          </a:solidFill>
+          <a:ln xmlns:a="http://schemas.openxmlformats.org/drawingml/2006/main" w="0">
+            <a:solidFill>
+              <a:srgbClr val="F3F5F7"/>
+            </a:solidFill>
+            <a:prstDash val="solid"/>
+          </a:ln>
+        </p:spPr>
+      </p:sp>
+      <p:sp>
+        <p:nvSpPr>
+          <p:cNvPr id="19" name="">
+            <a:extLst xmlns:a="http://schemas.openxmlformats.org/drawingml/2006/main">
+              <a:ext uri="{FF2B5EF4-FFF2-40B4-BE49-F238E27FC236}">
+                <a16:creationId xmlns:a16="http://schemas.microsoft.com/office/drawing/2014/main" id="{89991146-1B6E-4831-A44B-56E7FF71269E}"/>
+              </a:ext>
+            </a:extLst>
+          </p:cNvPr>
+          <p:cNvSpPr>
+            <a:spLocks xmlns:a="http://schemas.openxmlformats.org/drawingml/2006/main" noGrp="1"/>
+          </p:cNvSpPr>
+          <p:nvPr/>
+        </p:nvSpPr>
+        <p:spPr>
+          <a:xfrm xmlns:a="http://schemas.openxmlformats.org/drawingml/2006/main">
+            <a:off x="762000" y="5448300"/>
+            <a:ext cx="10668000" cy="361950"/>
+          </a:xfrm>
+          <a:prstGeom xmlns:a="http://schemas.openxmlformats.org/drawingml/2006/main" prst="rect">
+            <a:avLst/>
+          </a:prstGeom>
+          <a:noFill xmlns:a="http://schemas.openxmlformats.org/drawingml/2006/main"/>
+          <a:ln xmlns:a="http://schemas.openxmlformats.org/drawingml/2006/main" w="0">
+            <a:noFill/>
+            <a:prstDash val="solid"/>
+          </a:ln>
+        </p:spPr>
+        <p:txBody>
+          <a:bodyPr xmlns:a="http://schemas.openxmlformats.org/drawingml/2006/main" anchor="t"/>
+          <a:lstStyle xmlns:a="http://schemas.openxmlformats.org/drawingml/2006/main"/>
+          <a:p xmlns:a="http://schemas.openxmlformats.org/drawingml/2006/main">
+            <a:pPr algn="ctr">
+              <a:defRPr sz="1650" b="1">
+                <a:solidFill>
+                  <a:srgbClr val="24364B"/>
+                </a:solidFill>
+              </a:defRPr>
+            </a:pPr>
+            <a:r>
+              <a:rPr sz="1650" b="1">
+                <a:solidFill>
+                  <a:srgbClr val="24364B"/>
+                </a:solidFill>
+              </a:rPr>
+              <a:t>Both: enter next open · exit open t+21 · 20 open-to-open intervals · no overlapping positions · 10 bps round trip</a:t>
+            </a:r>
+          </a:p>
+        </p:txBody>
+      </p:sp>
+    </p:spTree>
+    <p:extLst>
+      <p:ext uri="{BB962C8B-B14F-4D97-AF65-F5344CB8AC3E}">
+        <p14:creationId xmlns:p14="http://schemas.microsoft.com/office/powerpoint/2010/main" val="1457286895"/>
+      </p:ext>
+    </p:extLst>
+  </p:cSld>
+</p:sld>
+</file>
+
+<file path=ppt/slides/slide17.xml><?xml version="1.0" encoding="utf-8"?>
+<p:sld xmlns:p="http://schemas.openxmlformats.org/presentationml/2006/main">
+  <p:cSld>
+    <p:bg>
+      <p:bgPr>
+        <a:solidFill xmlns:a="http://schemas.openxmlformats.org/drawingml/2006/main">
+          <a:srgbClr val="FFFFFF"/>
+        </a:solidFill>
+      </p:bgPr>
+    </p:bg>
+    <p:spTree>
+      <p:nvGrpSpPr>
+        <p:cNvPr id="1" name=""/>
+        <p:cNvGrpSpPr/>
+        <p:nvPr/>
+      </p:nvGrpSpPr>
+      <p:grpSpPr>
+        <a:xfrm xmlns:a="http://schemas.openxmlformats.org/drawingml/2006/main"/>
+      </p:grpSpPr>
+      <p:sp>
+        <p:nvSpPr>
+          <p:cNvPr id="7" name="">
+            <a:extLst xmlns:a="http://schemas.openxmlformats.org/drawingml/2006/main">
+              <a:ext uri="{FF2B5EF4-FFF2-40B4-BE49-F238E27FC236}">
+                <a16:creationId xmlns:a16="http://schemas.microsoft.com/office/drawing/2014/main" id="{42AA7EAE-AFBB-4E97-A938-2AB86A960A74}"/>
+              </a:ext>
+            </a:extLst>
+          </p:cNvPr>
+          <p:cNvSpPr>
+            <a:spLocks xmlns:a="http://schemas.openxmlformats.org/drawingml/2006/main" noGrp="1"/>
+          </p:cNvSpPr>
+          <p:nvPr/>
+        </p:nvSpPr>
+        <p:spPr>
+          <a:xfrm xmlns:a="http://schemas.openxmlformats.org/drawingml/2006/main">
+            <a:off x="457200" y="238125"/>
+            <a:ext cx="6191250" cy="190500"/>
+          </a:xfrm>
+          <a:prstGeom xmlns:a="http://schemas.openxmlformats.org/drawingml/2006/main" prst="rect">
+            <a:avLst/>
+          </a:prstGeom>
+          <a:noFill xmlns:a="http://schemas.openxmlformats.org/drawingml/2006/main"/>
+          <a:ln xmlns:a="http://schemas.openxmlformats.org/drawingml/2006/main" w="0">
+            <a:noFill/>
+            <a:prstDash val="solid"/>
+          </a:ln>
+        </p:spPr>
+        <p:txBody>
+          <a:bodyPr xmlns:a="http://schemas.openxmlformats.org/drawingml/2006/main" anchor="t"/>
+          <a:lstStyle xmlns:a="http://schemas.openxmlformats.org/drawingml/2006/main"/>
+          <a:p xmlns:a="http://schemas.openxmlformats.org/drawingml/2006/main">
+            <a:pPr algn="l">
+              <a:defRPr sz="1050" b="1">
+                <a:solidFill>
+                  <a:srgbClr val="667386"/>
+                </a:solidFill>
+              </a:defRPr>
+            </a:pPr>
+            <a:r>
+              <a:rPr sz="1050" b="1">
+                <a:solidFill>
+                  <a:srgbClr val="667386"/>
+                </a:solidFill>
+              </a:rPr>
+              <a:t>OPERATOR HYPOTHESIS LAB · NVDA PROTO-RULES</a:t>
+            </a:r>
+          </a:p>
+        </p:txBody>
+      </p:sp>
+      <p:sp>
+        <p:nvSpPr>
+          <p:cNvPr id="2" name="">
+            <a:extLst xmlns:a="http://schemas.openxmlformats.org/drawingml/2006/main">
+              <a:ext uri="{FF2B5EF4-FFF2-40B4-BE49-F238E27FC236}">
+                <a16:creationId xmlns:a16="http://schemas.microsoft.com/office/drawing/2014/main" id="{FF66EFCD-FA69-48BC-BB28-48B7C6FBB838}"/>
+              </a:ext>
+            </a:extLst>
+          </p:cNvPr>
+          <p:cNvSpPr>
+            <a:spLocks xmlns:a="http://schemas.openxmlformats.org/drawingml/2006/main" noGrp="1"/>
+          </p:cNvSpPr>
+          <p:nvPr/>
+        </p:nvSpPr>
+        <p:spPr>
+          <a:xfrm xmlns:a="http://schemas.openxmlformats.org/drawingml/2006/main">
+            <a:off x="457200" y="523875"/>
+            <a:ext cx="11049000" cy="590550"/>
+          </a:xfrm>
+          <a:prstGeom xmlns:a="http://schemas.openxmlformats.org/drawingml/2006/main" prst="rect">
+            <a:avLst/>
+          </a:prstGeom>
+          <a:noFill xmlns:a="http://schemas.openxmlformats.org/drawingml/2006/main"/>
+          <a:ln xmlns:a="http://schemas.openxmlformats.org/drawingml/2006/main" w="0">
+            <a:noFill/>
+            <a:prstDash val="solid"/>
+          </a:ln>
+        </p:spPr>
+        <p:txBody>
+          <a:bodyPr xmlns:a="http://schemas.openxmlformats.org/drawingml/2006/main" anchor="t"/>
+          <a:lstStyle xmlns:a="http://schemas.openxmlformats.org/drawingml/2006/main"/>
+          <a:p xmlns:a="http://schemas.openxmlformats.org/drawingml/2006/main">
+            <a:pPr algn="l">
+              <a:defRPr sz="2925" b="1">
+                <a:solidFill>
+                  <a:srgbClr val="000000"/>
+                </a:solidFill>
+              </a:defRPr>
+            </a:pPr>
+            <a:r>
+              <a:rPr sz="2925" b="1">
+                <a:solidFill>
+                  <a:srgbClr val="000000"/>
+                </a:solidFill>
+              </a:rPr>
+              <a:t>The rules select visibly different parts of NVDA history</a:t>
+            </a:r>
+          </a:p>
+        </p:txBody>
+      </p:sp>
+      <p:sp>
+        <p:nvSpPr>
+          <p:cNvPr id="3" name="">
+            <a:extLst xmlns:a="http://schemas.openxmlformats.org/drawingml/2006/main">
+              <a:ext uri="{FF2B5EF4-FFF2-40B4-BE49-F238E27FC236}">
+                <a16:creationId xmlns:a16="http://schemas.microsoft.com/office/drawing/2014/main" id="{9B28DC83-997F-436B-A8A8-426E57E75475}"/>
+              </a:ext>
+            </a:extLst>
+          </p:cNvPr>
+          <p:cNvSpPr>
+            <a:spLocks xmlns:a="http://schemas.openxmlformats.org/drawingml/2006/main" noGrp="1"/>
+          </p:cNvSpPr>
+          <p:nvPr/>
+        </p:nvSpPr>
+        <p:spPr>
+          <a:xfrm xmlns:a="http://schemas.openxmlformats.org/drawingml/2006/main">
+            <a:off x="457200" y="1219200"/>
+            <a:ext cx="11277600" cy="19050"/>
+          </a:xfrm>
+          <a:prstGeom xmlns:a="http://schemas.openxmlformats.org/drawingml/2006/main" prst="rect">
+            <a:avLst/>
+          </a:prstGeom>
+          <a:solidFill xmlns:a="http://schemas.openxmlformats.org/drawingml/2006/main">
+            <a:srgbClr val="B8BCC4"/>
+          </a:solidFill>
+          <a:ln xmlns:a="http://schemas.openxmlformats.org/drawingml/2006/main" w="0">
+            <a:solidFill>
+              <a:srgbClr val="B8BCC4"/>
+            </a:solidFill>
+            <a:prstDash val="solid"/>
+          </a:ln>
+        </p:spPr>
+      </p:sp>
+      <p:sp>
+        <p:nvSpPr>
+          <p:cNvPr id="4" name="">
+            <a:extLst xmlns:a="http://schemas.openxmlformats.org/drawingml/2006/main">
+              <a:ext uri="{FF2B5EF4-FFF2-40B4-BE49-F238E27FC236}">
+                <a16:creationId xmlns:a16="http://schemas.microsoft.com/office/drawing/2014/main" id="{6E9BF8C8-AC7A-4837-AA91-9586E6A5756D}"/>
+              </a:ext>
+            </a:extLst>
+          </p:cNvPr>
+          <p:cNvSpPr>
+            <a:spLocks xmlns:a="http://schemas.openxmlformats.org/drawingml/2006/main" noGrp="1"/>
+          </p:cNvSpPr>
+          <p:nvPr/>
+        </p:nvSpPr>
+        <p:spPr>
+          <a:xfrm xmlns:a="http://schemas.openxmlformats.org/drawingml/2006/main">
+            <a:off x="457200" y="6515100"/>
+            <a:ext cx="7048500" cy="161925"/>
+          </a:xfrm>
+          <a:prstGeom xmlns:a="http://schemas.openxmlformats.org/drawingml/2006/main" prst="rect">
+            <a:avLst/>
+          </a:prstGeom>
+          <a:noFill xmlns:a="http://schemas.openxmlformats.org/drawingml/2006/main"/>
+          <a:ln xmlns:a="http://schemas.openxmlformats.org/drawingml/2006/main" w="0">
+            <a:noFill/>
+            <a:prstDash val="solid"/>
+          </a:ln>
+        </p:spPr>
+        <p:txBody>
+          <a:bodyPr xmlns:a="http://schemas.openxmlformats.org/drawingml/2006/main" anchor="t"/>
+          <a:lstStyle xmlns:a="http://schemas.openxmlformats.org/drawingml/2006/main"/>
+          <a:p xmlns:a="http://schemas.openxmlformats.org/drawingml/2006/main">
+            <a:pPr algn="l">
+              <a:defRPr sz="900" b="0">
+                <a:solidFill>
+                  <a:srgbClr val="667386"/>
+                </a:solidFill>
+              </a:defRPr>
+            </a:pPr>
+            <a:r>
+              <a:rPr sz="900" b="0">
+                <a:solidFill>
+                  <a:srgbClr val="667386"/>
+                </a:solidFill>
+              </a:rPr>
+              <a:t>Descriptive research · adjusted bars · frozen 2018–2023 window</a:t>
+            </a:r>
+          </a:p>
+        </p:txBody>
+      </p:sp>
+      <p:sp>
+        <p:nvSpPr>
+          <p:cNvPr id="5" name="">
+            <a:extLst xmlns:a="http://schemas.openxmlformats.org/drawingml/2006/main">
+              <a:ext uri="{FF2B5EF4-FFF2-40B4-BE49-F238E27FC236}">
+                <a16:creationId xmlns:a16="http://schemas.microsoft.com/office/drawing/2014/main" id="{356D5FAD-4BF3-4A31-B004-D1DB535290AD}"/>
+              </a:ext>
+            </a:extLst>
+          </p:cNvPr>
+          <p:cNvSpPr>
+            <a:spLocks xmlns:a="http://schemas.openxmlformats.org/drawingml/2006/main" noGrp="1"/>
+          </p:cNvSpPr>
+          <p:nvPr/>
+        </p:nvSpPr>
+        <p:spPr>
+          <a:xfrm xmlns:a="http://schemas.openxmlformats.org/drawingml/2006/main">
+            <a:off x="10858500" y="6496050"/>
+            <a:ext cx="876300" cy="171450"/>
+          </a:xfrm>
+          <a:prstGeom xmlns:a="http://schemas.openxmlformats.org/drawingml/2006/main" prst="rect">
+            <a:avLst/>
+          </a:prstGeom>
+          <a:noFill xmlns:a="http://schemas.openxmlformats.org/drawingml/2006/main"/>
+          <a:ln xmlns:a="http://schemas.openxmlformats.org/drawingml/2006/main" w="0">
+            <a:noFill/>
+            <a:prstDash val="solid"/>
+          </a:ln>
+        </p:spPr>
+        <p:txBody>
+          <a:bodyPr xmlns:a="http://schemas.openxmlformats.org/drawingml/2006/main" anchor="t"/>
+          <a:lstStyle xmlns:a="http://schemas.openxmlformats.org/drawingml/2006/main"/>
+          <a:p xmlns:a="http://schemas.openxmlformats.org/drawingml/2006/main">
+            <a:pPr algn="r">
+              <a:defRPr sz="900" b="0">
+                <a:solidFill>
+                  <a:srgbClr val="667386"/>
+                </a:solidFill>
+              </a:defRPr>
+            </a:pPr>
+            <a:r>
+              <a:rPr sz="900" b="0">
+                <a:solidFill>
+                  <a:srgbClr val="667386"/>
+                </a:solidFill>
+              </a:rPr>
+              <a:t>17</a:t>
+            </a:r>
+          </a:p>
+        </p:txBody>
+      </p:sp>
+      <p:pic>
+        <p:nvPicPr>
+          <p:cNvPr id="12" name=""/>
+          <p:cNvPicPr>
+            <a:picLocks xmlns:a="http://schemas.openxmlformats.org/drawingml/2006/main" noChangeAspect="1"/>
+          </p:cNvPicPr>
+          <p:nvPr/>
+        </p:nvPicPr>
+        <p:blipFill>
+          <a:blip xmlns:r="http://schemas.openxmlformats.org/officeDocument/2006/relationships" xmlns:a="http://schemas.openxmlformats.org/drawingml/2006/main" r:embed="R591dab0a93be40d5"/>
+          <a:stretch xmlns:a="http://schemas.openxmlformats.org/drawingml/2006/main"/>
+        </p:blipFill>
+        <p:spPr>
+          <a:xfrm xmlns:a="http://schemas.openxmlformats.org/drawingml/2006/main">
+            <a:off x="2448560" y="1371600"/>
+            <a:ext cx="7180580" cy="4895850"/>
+          </a:xfrm>
+          <a:prstGeom xmlns:a="http://schemas.openxmlformats.org/drawingml/2006/main" prst="rect">
+            <a:avLst/>
+          </a:prstGeom>
+        </p:spPr>
+      </p:pic>
+    </p:spTree>
+    <p:extLst>
+      <p:ext uri="{BB962C8B-B14F-4D97-AF65-F5344CB8AC3E}">
+        <p14:creationId xmlns:p14="http://schemas.microsoft.com/office/powerpoint/2010/main" val="2027813797"/>
+      </p:ext>
+    </p:extLst>
+  </p:cSld>
+</p:sld>
+</file>
+
+<file path=ppt/slides/slide18.xml><?xml version="1.0" encoding="utf-8"?>
+<p:sld xmlns:p="http://schemas.openxmlformats.org/presentationml/2006/main">
+  <p:cSld>
+    <p:bg>
+      <p:bgPr>
+        <a:solidFill xmlns:a="http://schemas.openxmlformats.org/drawingml/2006/main">
+          <a:srgbClr val="FFFFFF"/>
+        </a:solidFill>
+      </p:bgPr>
+    </p:bg>
+    <p:spTree>
+      <p:nvGrpSpPr>
+        <p:cNvPr id="1" name=""/>
+        <p:cNvGrpSpPr/>
+        <p:nvPr/>
+      </p:nvGrpSpPr>
+      <p:grpSpPr>
+        <a:xfrm xmlns:a="http://schemas.openxmlformats.org/drawingml/2006/main"/>
+      </p:grpSpPr>
+      <p:sp>
+        <p:nvSpPr>
+          <p:cNvPr id="19" name="">
+            <a:extLst xmlns:a="http://schemas.openxmlformats.org/drawingml/2006/main">
+              <a:ext uri="{FF2B5EF4-FFF2-40B4-BE49-F238E27FC236}">
+                <a16:creationId xmlns:a16="http://schemas.microsoft.com/office/drawing/2014/main" id="{E0F9AB40-E88E-4D01-9D8D-77E6299150B7}"/>
+              </a:ext>
+            </a:extLst>
+          </p:cNvPr>
+          <p:cNvSpPr>
+            <a:spLocks xmlns:a="http://schemas.openxmlformats.org/drawingml/2006/main" noGrp="1"/>
+          </p:cNvSpPr>
+          <p:nvPr/>
+        </p:nvSpPr>
+        <p:spPr>
+          <a:xfrm xmlns:a="http://schemas.openxmlformats.org/drawingml/2006/main">
+            <a:off x="457200" y="238125"/>
+            <a:ext cx="6191250" cy="190500"/>
+          </a:xfrm>
+          <a:prstGeom xmlns:a="http://schemas.openxmlformats.org/drawingml/2006/main" prst="rect">
+            <a:avLst/>
+          </a:prstGeom>
+          <a:noFill xmlns:a="http://schemas.openxmlformats.org/drawingml/2006/main"/>
+          <a:ln xmlns:a="http://schemas.openxmlformats.org/drawingml/2006/main" w="0">
+            <a:noFill/>
+            <a:prstDash val="solid"/>
+          </a:ln>
+        </p:spPr>
+        <p:txBody>
+          <a:bodyPr xmlns:a="http://schemas.openxmlformats.org/drawingml/2006/main" anchor="t"/>
+          <a:lstStyle xmlns:a="http://schemas.openxmlformats.org/drawingml/2006/main"/>
+          <a:p xmlns:a="http://schemas.openxmlformats.org/drawingml/2006/main">
+            <a:pPr algn="l">
+              <a:defRPr sz="1050" b="1">
+                <a:solidFill>
+                  <a:srgbClr val="667386"/>
+                </a:solidFill>
+              </a:defRPr>
+            </a:pPr>
+            <a:r>
+              <a:rPr sz="1050" b="1">
+                <a:solidFill>
+                  <a:srgbClr val="667386"/>
+                </a:solidFill>
+              </a:rPr>
+              <a:t>OPERATOR HYPOTHESIS LAB · NVDA PROTO-RULES</a:t>
+            </a:r>
+          </a:p>
+        </p:txBody>
+      </p:sp>
+      <p:sp>
+        <p:nvSpPr>
+          <p:cNvPr id="2" name="">
+            <a:extLst xmlns:a="http://schemas.openxmlformats.org/drawingml/2006/main">
+              <a:ext uri="{FF2B5EF4-FFF2-40B4-BE49-F238E27FC236}">
+                <a16:creationId xmlns:a16="http://schemas.microsoft.com/office/drawing/2014/main" id="{A1C766B3-3368-4FA8-AE8D-D3CE0C9A4C1E}"/>
+              </a:ext>
+            </a:extLst>
+          </p:cNvPr>
+          <p:cNvSpPr>
+            <a:spLocks xmlns:a="http://schemas.openxmlformats.org/drawingml/2006/main" noGrp="1"/>
+          </p:cNvSpPr>
+          <p:nvPr/>
+        </p:nvSpPr>
+        <p:spPr>
+          <a:xfrm xmlns:a="http://schemas.openxmlformats.org/drawingml/2006/main">
+            <a:off x="457200" y="523875"/>
+            <a:ext cx="11049000" cy="590550"/>
+          </a:xfrm>
+          <a:prstGeom xmlns:a="http://schemas.openxmlformats.org/drawingml/2006/main" prst="rect">
+            <a:avLst/>
+          </a:prstGeom>
+          <a:noFill xmlns:a="http://schemas.openxmlformats.org/drawingml/2006/main"/>
+          <a:ln xmlns:a="http://schemas.openxmlformats.org/drawingml/2006/main" w="0">
+            <a:noFill/>
+            <a:prstDash val="solid"/>
+          </a:ln>
+        </p:spPr>
+        <p:txBody>
+          <a:bodyPr xmlns:a="http://schemas.openxmlformats.org/drawingml/2006/main" anchor="t"/>
+          <a:lstStyle xmlns:a="http://schemas.openxmlformats.org/drawingml/2006/main"/>
+          <a:p xmlns:a="http://schemas.openxmlformats.org/drawingml/2006/main">
+            <a:pPr algn="l">
+              <a:defRPr sz="2925" b="1">
+                <a:solidFill>
+                  <a:srgbClr val="000000"/>
+                </a:solidFill>
+              </a:defRPr>
+            </a:pPr>
+            <a:r>
+              <a:rPr sz="2925" b="1">
+                <a:solidFill>
+                  <a:srgbClr val="000000"/>
+                </a:solidFill>
+              </a:rPr>
+              <a:t>Only the rebound clears the narrow TRAIN translation gate</a:t>
+            </a:r>
+          </a:p>
+        </p:txBody>
+      </p:sp>
+      <p:sp>
+        <p:nvSpPr>
+          <p:cNvPr id="3" name="">
+            <a:extLst xmlns:a="http://schemas.openxmlformats.org/drawingml/2006/main">
+              <a:ext uri="{FF2B5EF4-FFF2-40B4-BE49-F238E27FC236}">
+                <a16:creationId xmlns:a16="http://schemas.microsoft.com/office/drawing/2014/main" id="{6B0F6276-AAD0-4919-93D5-5E448D513FE5}"/>
+              </a:ext>
+            </a:extLst>
+          </p:cNvPr>
+          <p:cNvSpPr>
+            <a:spLocks xmlns:a="http://schemas.openxmlformats.org/drawingml/2006/main" noGrp="1"/>
+          </p:cNvSpPr>
+          <p:nvPr/>
+        </p:nvSpPr>
+        <p:spPr>
+          <a:xfrm xmlns:a="http://schemas.openxmlformats.org/drawingml/2006/main">
+            <a:off x="457200" y="1219200"/>
+            <a:ext cx="11277600" cy="19050"/>
+          </a:xfrm>
+          <a:prstGeom xmlns:a="http://schemas.openxmlformats.org/drawingml/2006/main" prst="rect">
+            <a:avLst/>
+          </a:prstGeom>
+          <a:solidFill xmlns:a="http://schemas.openxmlformats.org/drawingml/2006/main">
+            <a:srgbClr val="B8BCC4"/>
+          </a:solidFill>
+          <a:ln xmlns:a="http://schemas.openxmlformats.org/drawingml/2006/main" w="0">
+            <a:solidFill>
+              <a:srgbClr val="B8BCC4"/>
+            </a:solidFill>
+            <a:prstDash val="solid"/>
+          </a:ln>
+        </p:spPr>
+      </p:sp>
+      <p:sp>
+        <p:nvSpPr>
+          <p:cNvPr id="4" name="">
+            <a:extLst xmlns:a="http://schemas.openxmlformats.org/drawingml/2006/main">
+              <a:ext uri="{FF2B5EF4-FFF2-40B4-BE49-F238E27FC236}">
+                <a16:creationId xmlns:a16="http://schemas.microsoft.com/office/drawing/2014/main" id="{69ABEB22-124C-49A3-A49A-280139F92414}"/>
+              </a:ext>
+            </a:extLst>
+          </p:cNvPr>
+          <p:cNvSpPr>
+            <a:spLocks xmlns:a="http://schemas.openxmlformats.org/drawingml/2006/main" noGrp="1"/>
+          </p:cNvSpPr>
+          <p:nvPr/>
+        </p:nvSpPr>
+        <p:spPr>
+          <a:xfrm xmlns:a="http://schemas.openxmlformats.org/drawingml/2006/main">
+            <a:off x="457200" y="6515100"/>
+            <a:ext cx="7048500" cy="161925"/>
+          </a:xfrm>
+          <a:prstGeom xmlns:a="http://schemas.openxmlformats.org/drawingml/2006/main" prst="rect">
+            <a:avLst/>
+          </a:prstGeom>
+          <a:noFill xmlns:a="http://schemas.openxmlformats.org/drawingml/2006/main"/>
+          <a:ln xmlns:a="http://schemas.openxmlformats.org/drawingml/2006/main" w="0">
+            <a:noFill/>
+            <a:prstDash val="solid"/>
+          </a:ln>
+        </p:spPr>
+        <p:txBody>
+          <a:bodyPr xmlns:a="http://schemas.openxmlformats.org/drawingml/2006/main" anchor="t"/>
+          <a:lstStyle xmlns:a="http://schemas.openxmlformats.org/drawingml/2006/main"/>
+          <a:p xmlns:a="http://schemas.openxmlformats.org/drawingml/2006/main">
+            <a:pPr algn="l">
+              <a:defRPr sz="900" b="0">
+                <a:solidFill>
+                  <a:srgbClr val="667386"/>
+                </a:solidFill>
+              </a:defRPr>
+            </a:pPr>
+            <a:r>
+              <a:rPr sz="900" b="0">
+                <a:solidFill>
+                  <a:srgbClr val="667386"/>
+                </a:solidFill>
+              </a:rPr>
+              <a:t>Descriptive research · adjusted bars · frozen 2018–2023 window</a:t>
+            </a:r>
+          </a:p>
+        </p:txBody>
+      </p:sp>
+      <p:sp>
+        <p:nvSpPr>
+          <p:cNvPr id="5" name="">
+            <a:extLst xmlns:a="http://schemas.openxmlformats.org/drawingml/2006/main">
+              <a:ext uri="{FF2B5EF4-FFF2-40B4-BE49-F238E27FC236}">
+                <a16:creationId xmlns:a16="http://schemas.microsoft.com/office/drawing/2014/main" id="{002F8EFB-A1B6-4135-BDCC-B288F1ABFC37}"/>
+              </a:ext>
+            </a:extLst>
+          </p:cNvPr>
+          <p:cNvSpPr>
+            <a:spLocks xmlns:a="http://schemas.openxmlformats.org/drawingml/2006/main" noGrp="1"/>
+          </p:cNvSpPr>
+          <p:nvPr/>
+        </p:nvSpPr>
+        <p:spPr>
+          <a:xfrm xmlns:a="http://schemas.openxmlformats.org/drawingml/2006/main">
+            <a:off x="10858500" y="6496050"/>
+            <a:ext cx="876300" cy="171450"/>
+          </a:xfrm>
+          <a:prstGeom xmlns:a="http://schemas.openxmlformats.org/drawingml/2006/main" prst="rect">
+            <a:avLst/>
+          </a:prstGeom>
+          <a:noFill xmlns:a="http://schemas.openxmlformats.org/drawingml/2006/main"/>
+          <a:ln xmlns:a="http://schemas.openxmlformats.org/drawingml/2006/main" w="0">
+            <a:noFill/>
+            <a:prstDash val="solid"/>
+          </a:ln>
+        </p:spPr>
+        <p:txBody>
+          <a:bodyPr xmlns:a="http://schemas.openxmlformats.org/drawingml/2006/main" anchor="t"/>
+          <a:lstStyle xmlns:a="http://schemas.openxmlformats.org/drawingml/2006/main"/>
+          <a:p xmlns:a="http://schemas.openxmlformats.org/drawingml/2006/main">
+            <a:pPr algn="r">
+              <a:defRPr sz="900" b="0">
+                <a:solidFill>
+                  <a:srgbClr val="667386"/>
+                </a:solidFill>
+              </a:defRPr>
+            </a:pPr>
+            <a:r>
+              <a:rPr sz="900" b="0">
+                <a:solidFill>
+                  <a:srgbClr val="667386"/>
+                </a:solidFill>
+              </a:rPr>
+              <a:t>18</a:t>
+            </a:r>
+          </a:p>
+        </p:txBody>
+      </p:sp>
+      <p:pic>
+        <p:nvPicPr>
+          <p:cNvPr id="24" name=""/>
+          <p:cNvPicPr>
+            <a:picLocks xmlns:a="http://schemas.openxmlformats.org/drawingml/2006/main" noChangeAspect="1"/>
+          </p:cNvPicPr>
+          <p:nvPr/>
+        </p:nvPicPr>
+        <p:blipFill>
+          <a:blip xmlns:r="http://schemas.openxmlformats.org/officeDocument/2006/relationships" xmlns:a="http://schemas.openxmlformats.org/drawingml/2006/main" r:embed="R38d5c864d551496a"/>
+          <a:stretch xmlns:a="http://schemas.openxmlformats.org/drawingml/2006/main"/>
+        </p:blipFill>
+        <p:spPr>
+          <a:xfrm xmlns:a="http://schemas.openxmlformats.org/drawingml/2006/main">
+            <a:off x="545973" y="1466850"/>
+            <a:ext cx="7232904" cy="4305300"/>
+          </a:xfrm>
+          <a:prstGeom xmlns:a="http://schemas.openxmlformats.org/drawingml/2006/main" prst="rect">
+            <a:avLst/>
+          </a:prstGeom>
+        </p:spPr>
+      </p:pic>
+      <p:sp>
+        <p:nvSpPr>
+          <p:cNvPr id="7" name="">
+            <a:extLst xmlns:a="http://schemas.openxmlformats.org/drawingml/2006/main">
+              <a:ext uri="{FF2B5EF4-FFF2-40B4-BE49-F238E27FC236}">
+                <a16:creationId xmlns:a16="http://schemas.microsoft.com/office/drawing/2014/main" id="{B1681A90-AF93-47AD-A8B5-CCC5AAA66BA8}"/>
+              </a:ext>
+            </a:extLst>
+          </p:cNvPr>
+          <p:cNvSpPr>
+            <a:spLocks xmlns:a="http://schemas.openxmlformats.org/drawingml/2006/main" noGrp="1"/>
+          </p:cNvSpPr>
+          <p:nvPr/>
+        </p:nvSpPr>
+        <p:spPr>
+          <a:xfrm xmlns:a="http://schemas.openxmlformats.org/drawingml/2006/main">
+            <a:off x="8153400" y="1524000"/>
+            <a:ext cx="3486150" cy="2038350"/>
+          </a:xfrm>
+          <a:prstGeom xmlns:a="http://schemas.openxmlformats.org/drawingml/2006/main" prst="rect">
+            <a:avLst/>
+          </a:prstGeom>
+          <a:solidFill xmlns:a="http://schemas.openxmlformats.org/drawingml/2006/main">
+            <a:srgbClr val="F3F5F7"/>
+          </a:solidFill>
+          <a:ln xmlns:a="http://schemas.openxmlformats.org/drawingml/2006/main" w="0">
+            <a:solidFill>
+              <a:srgbClr val="F3F5F7"/>
+            </a:solidFill>
+            <a:prstDash val="solid"/>
+          </a:ln>
+        </p:spPr>
+      </p:sp>
+      <p:sp>
+        <p:nvSpPr>
+          <p:cNvPr id="8" name="">
+            <a:extLst xmlns:a="http://schemas.openxmlformats.org/drawingml/2006/main">
+              <a:ext uri="{FF2B5EF4-FFF2-40B4-BE49-F238E27FC236}">
+                <a16:creationId xmlns:a16="http://schemas.microsoft.com/office/drawing/2014/main" id="{AF959B4F-35D0-4B91-915F-1FC280233DD8}"/>
+              </a:ext>
+            </a:extLst>
+          </p:cNvPr>
+          <p:cNvSpPr>
+            <a:spLocks xmlns:a="http://schemas.openxmlformats.org/drawingml/2006/main" noGrp="1"/>
+          </p:cNvSpPr>
+          <p:nvPr/>
+        </p:nvSpPr>
+        <p:spPr>
+          <a:xfrm xmlns:a="http://schemas.openxmlformats.org/drawingml/2006/main">
+            <a:off x="8401050" y="1752600"/>
+            <a:ext cx="2990850" cy="304800"/>
+          </a:xfrm>
+          <a:prstGeom xmlns:a="http://schemas.openxmlformats.org/drawingml/2006/main" prst="rect">
+            <a:avLst/>
+          </a:prstGeom>
+          <a:noFill xmlns:a="http://schemas.openxmlformats.org/drawingml/2006/main"/>
+          <a:ln xmlns:a="http://schemas.openxmlformats.org/drawingml/2006/main" w="0">
+            <a:noFill/>
+            <a:prstDash val="solid"/>
+          </a:ln>
+        </p:spPr>
+        <p:txBody>
+          <a:bodyPr xmlns:a="http://schemas.openxmlformats.org/drawingml/2006/main" anchor="t"/>
+          <a:lstStyle xmlns:a="http://schemas.openxmlformats.org/drawingml/2006/main"/>
+          <a:p xmlns:a="http://schemas.openxmlformats.org/drawingml/2006/main">
+            <a:pPr algn="l">
+              <a:defRPr sz="1725" b="1">
+                <a:solidFill>
+                  <a:srgbClr val="3D8DFF"/>
+                </a:solidFill>
+              </a:defRPr>
+            </a:pPr>
+            <a:r>
+              <a:rPr sz="1725" b="1">
+                <a:solidFill>
+                  <a:srgbClr val="3D8DFF"/>
+                </a:solidFill>
+              </a:rPr>
+              <a:t>Efficient-up continuation</a:t>
+            </a:r>
+          </a:p>
+        </p:txBody>
+      </p:sp>
+      <p:sp>
+        <p:nvSpPr>
+          <p:cNvPr id="9" name="">
+            <a:extLst xmlns:a="http://schemas.openxmlformats.org/drawingml/2006/main">
+              <a:ext uri="{FF2B5EF4-FFF2-40B4-BE49-F238E27FC236}">
+                <a16:creationId xmlns:a16="http://schemas.microsoft.com/office/drawing/2014/main" id="{3813CC23-DE7E-45C1-9271-FF89C96FD41C}"/>
+              </a:ext>
+            </a:extLst>
+          </p:cNvPr>
+          <p:cNvSpPr>
+            <a:spLocks xmlns:a="http://schemas.openxmlformats.org/drawingml/2006/main" noGrp="1"/>
+          </p:cNvSpPr>
+          <p:nvPr/>
+        </p:nvSpPr>
+        <p:spPr>
+          <a:xfrm xmlns:a="http://schemas.openxmlformats.org/drawingml/2006/main">
+            <a:off x="8401050" y="2247900"/>
+            <a:ext cx="1314450" cy="381000"/>
+          </a:xfrm>
+          <a:prstGeom xmlns:a="http://schemas.openxmlformats.org/drawingml/2006/main" prst="rect">
+            <a:avLst/>
+          </a:prstGeom>
+          <a:noFill xmlns:a="http://schemas.openxmlformats.org/drawingml/2006/main"/>
+          <a:ln xmlns:a="http://schemas.openxmlformats.org/drawingml/2006/main" w="0">
+            <a:noFill/>
+            <a:prstDash val="solid"/>
+          </a:ln>
+        </p:spPr>
+        <p:txBody>
+          <a:bodyPr xmlns:a="http://schemas.openxmlformats.org/drawingml/2006/main" anchor="t"/>
+          <a:lstStyle xmlns:a="http://schemas.openxmlformats.org/drawingml/2006/main"/>
+          <a:p xmlns:a="http://schemas.openxmlformats.org/drawingml/2006/main">
+            <a:pPr algn="l">
+              <a:defRPr sz="2175" b="1">
+                <a:solidFill>
+                  <a:srgbClr val="000000"/>
+                </a:solidFill>
+              </a:defRPr>
+            </a:pPr>
+            <a:r>
+              <a:rPr sz="2175" b="1">
+                <a:solidFill>
+                  <a:srgbClr val="000000"/>
+                </a:solidFill>
+              </a:rPr>
+              <a:t>39 trades</a:t>
+            </a:r>
+          </a:p>
+        </p:txBody>
+      </p:sp>
+      <p:sp>
+        <p:nvSpPr>
+          <p:cNvPr id="10" name="">
+            <a:extLst xmlns:a="http://schemas.openxmlformats.org/drawingml/2006/main">
+              <a:ext uri="{FF2B5EF4-FFF2-40B4-BE49-F238E27FC236}">
+                <a16:creationId xmlns:a16="http://schemas.microsoft.com/office/drawing/2014/main" id="{F5BEFD9D-5B35-4561-AC31-ADD6C4D89435}"/>
+              </a:ext>
+            </a:extLst>
+          </p:cNvPr>
+          <p:cNvSpPr>
+            <a:spLocks xmlns:a="http://schemas.openxmlformats.org/drawingml/2006/main" noGrp="1"/>
+          </p:cNvSpPr>
+          <p:nvPr/>
+        </p:nvSpPr>
+        <p:spPr>
+          <a:xfrm xmlns:a="http://schemas.openxmlformats.org/drawingml/2006/main">
+            <a:off x="9810750" y="2247900"/>
+            <a:ext cx="1581150" cy="381000"/>
+          </a:xfrm>
+          <a:prstGeom xmlns:a="http://schemas.openxmlformats.org/drawingml/2006/main" prst="rect">
+            <a:avLst/>
+          </a:prstGeom>
+          <a:noFill xmlns:a="http://schemas.openxmlformats.org/drawingml/2006/main"/>
+          <a:ln xmlns:a="http://schemas.openxmlformats.org/drawingml/2006/main" w="0">
+            <a:noFill/>
+            <a:prstDash val="solid"/>
+          </a:ln>
+        </p:spPr>
+        <p:txBody>
+          <a:bodyPr xmlns:a="http://schemas.openxmlformats.org/drawingml/2006/main" anchor="t"/>
+          <a:lstStyle xmlns:a="http://schemas.openxmlformats.org/drawingml/2006/main"/>
+          <a:p xmlns:a="http://schemas.openxmlformats.org/drawingml/2006/main">
+            <a:pPr algn="l">
+              <a:defRPr sz="1800" b="1">
+                <a:solidFill>
+                  <a:srgbClr val="000000"/>
+                </a:solidFill>
+              </a:defRPr>
+            </a:pPr>
+            <a:r>
+              <a:rPr sz="1800" b="1">
+                <a:solidFill>
+                  <a:srgbClr val="000000"/>
+                </a:solidFill>
+              </a:rPr>
+              <a:t>2.59% mean net</a:t>
+            </a:r>
+          </a:p>
+        </p:txBody>
+      </p:sp>
+      <p:sp>
+        <p:nvSpPr>
+          <p:cNvPr id="11" name="">
+            <a:extLst xmlns:a="http://schemas.openxmlformats.org/drawingml/2006/main">
+              <a:ext uri="{FF2B5EF4-FFF2-40B4-BE49-F238E27FC236}">
+                <a16:creationId xmlns:a16="http://schemas.microsoft.com/office/drawing/2014/main" id="{70BEB982-1080-4A4D-8432-7EDD277FD6FB}"/>
+              </a:ext>
+            </a:extLst>
+          </p:cNvPr>
+          <p:cNvSpPr>
+            <a:spLocks xmlns:a="http://schemas.openxmlformats.org/drawingml/2006/main" noGrp="1"/>
+          </p:cNvSpPr>
+          <p:nvPr/>
+        </p:nvSpPr>
+        <p:spPr>
+          <a:xfrm xmlns:a="http://schemas.openxmlformats.org/drawingml/2006/main">
+            <a:off x="8401050" y="2838450"/>
+            <a:ext cx="2990850" cy="323850"/>
+          </a:xfrm>
+          <a:prstGeom xmlns:a="http://schemas.openxmlformats.org/drawingml/2006/main" prst="rect">
+            <a:avLst/>
+          </a:prstGeom>
+          <a:noFill xmlns:a="http://schemas.openxmlformats.org/drawingml/2006/main"/>
+          <a:ln xmlns:a="http://schemas.openxmlformats.org/drawingml/2006/main" w="0">
+            <a:noFill/>
+            <a:prstDash val="solid"/>
+          </a:ln>
+        </p:spPr>
+        <p:txBody>
+          <a:bodyPr xmlns:a="http://schemas.openxmlformats.org/drawingml/2006/main" anchor="t"/>
+          <a:lstStyle xmlns:a="http://schemas.openxmlformats.org/drawingml/2006/main"/>
+          <a:p xmlns:a="http://schemas.openxmlformats.org/drawingml/2006/main">
+            <a:pPr algn="l">
+              <a:defRPr sz="1350" b="1">
+                <a:solidFill>
+                  <a:srgbClr val="B44738"/>
+                </a:solidFill>
+              </a:defRPr>
+            </a:pPr>
+            <a:r>
+              <a:rPr sz="1350" b="1">
+                <a:solidFill>
+                  <a:srgbClr val="B44738"/>
+                </a:solidFill>
+              </a:rPr>
+              <a:t>61.5% profitable · −0.29 pp vs drift</a:t>
+            </a:r>
+          </a:p>
+        </p:txBody>
+      </p:sp>
+      <p:sp>
+        <p:nvSpPr>
+          <p:cNvPr id="12" name="">
+            <a:extLst xmlns:a="http://schemas.openxmlformats.org/drawingml/2006/main">
+              <a:ext uri="{FF2B5EF4-FFF2-40B4-BE49-F238E27FC236}">
+                <a16:creationId xmlns:a16="http://schemas.microsoft.com/office/drawing/2014/main" id="{CA2CF93F-3150-42A8-A515-C48F270D63BE}"/>
+              </a:ext>
+            </a:extLst>
+          </p:cNvPr>
+          <p:cNvSpPr>
+            <a:spLocks xmlns:a="http://schemas.openxmlformats.org/drawingml/2006/main" noGrp="1"/>
+          </p:cNvSpPr>
+          <p:nvPr/>
+        </p:nvSpPr>
+        <p:spPr>
+          <a:xfrm xmlns:a="http://schemas.openxmlformats.org/drawingml/2006/main">
+            <a:off x="8401050" y="3219450"/>
+            <a:ext cx="2990850" cy="266700"/>
+          </a:xfrm>
+          <a:prstGeom xmlns:a="http://schemas.openxmlformats.org/drawingml/2006/main" prst="rect">
+            <a:avLst/>
+          </a:prstGeom>
+          <a:noFill xmlns:a="http://schemas.openxmlformats.org/drawingml/2006/main"/>
+          <a:ln xmlns:a="http://schemas.openxmlformats.org/drawingml/2006/main" w="0">
+            <a:noFill/>
+            <a:prstDash val="solid"/>
+          </a:ln>
+        </p:spPr>
+        <p:txBody>
+          <a:bodyPr xmlns:a="http://schemas.openxmlformats.org/drawingml/2006/main" anchor="t"/>
+          <a:lstStyle xmlns:a="http://schemas.openxmlformats.org/drawingml/2006/main"/>
+          <a:p xmlns:a="http://schemas.openxmlformats.org/drawingml/2006/main">
+            <a:pPr algn="l">
+              <a:defRPr sz="1125" b="0">
+                <a:solidFill>
+                  <a:srgbClr val="24364B"/>
+                </a:solidFill>
+              </a:defRPr>
+            </a:pPr>
+            <a:r>
+              <a:rPr sz="1125" b="0">
+                <a:solidFill>
+                  <a:srgbClr val="24364B"/>
+                </a:solidFill>
+              </a:rPr>
+              <a:t>STOP: weaker than unconditional drift and all three simple controls.</a:t>
+            </a:r>
+          </a:p>
+        </p:txBody>
+      </p:sp>
+      <p:sp>
+        <p:nvSpPr>
+          <p:cNvPr id="13" name="">
+            <a:extLst xmlns:a="http://schemas.openxmlformats.org/drawingml/2006/main">
+              <a:ext uri="{FF2B5EF4-FFF2-40B4-BE49-F238E27FC236}">
+                <a16:creationId xmlns:a16="http://schemas.microsoft.com/office/drawing/2014/main" id="{D911B03F-489C-4828-947A-C5BE0B29D682}"/>
+              </a:ext>
+            </a:extLst>
+          </p:cNvPr>
+          <p:cNvSpPr>
+            <a:spLocks xmlns:a="http://schemas.openxmlformats.org/drawingml/2006/main" noGrp="1"/>
+          </p:cNvSpPr>
+          <p:nvPr/>
+        </p:nvSpPr>
+        <p:spPr>
+          <a:xfrm xmlns:a="http://schemas.openxmlformats.org/drawingml/2006/main">
+            <a:off x="8153400" y="3771900"/>
+            <a:ext cx="3486150" cy="2190750"/>
+          </a:xfrm>
+          <a:prstGeom xmlns:a="http://schemas.openxmlformats.org/drawingml/2006/main" prst="rect">
+            <a:avLst/>
+          </a:prstGeom>
+          <a:solidFill xmlns:a="http://schemas.openxmlformats.org/drawingml/2006/main">
+            <a:srgbClr val="E2F1EC"/>
+          </a:solidFill>
+          <a:ln xmlns:a="http://schemas.openxmlformats.org/drawingml/2006/main" w="0">
+            <a:solidFill>
+              <a:srgbClr val="E2F1EC"/>
+            </a:solidFill>
+            <a:prstDash val="solid"/>
+          </a:ln>
+        </p:spPr>
+      </p:sp>
+      <p:sp>
+        <p:nvSpPr>
+          <p:cNvPr id="14" name="">
+            <a:extLst xmlns:a="http://schemas.openxmlformats.org/drawingml/2006/main">
+              <a:ext uri="{FF2B5EF4-FFF2-40B4-BE49-F238E27FC236}">
+                <a16:creationId xmlns:a16="http://schemas.microsoft.com/office/drawing/2014/main" id="{817849DA-13D6-4F96-A39A-3E6A285171A2}"/>
+              </a:ext>
+            </a:extLst>
+          </p:cNvPr>
+          <p:cNvSpPr>
+            <a:spLocks xmlns:a="http://schemas.openxmlformats.org/drawingml/2006/main" noGrp="1"/>
+          </p:cNvSpPr>
+          <p:nvPr/>
+        </p:nvSpPr>
+        <p:spPr>
+          <a:xfrm xmlns:a="http://schemas.openxmlformats.org/drawingml/2006/main">
+            <a:off x="8401050" y="4000500"/>
+            <a:ext cx="2990850" cy="304800"/>
+          </a:xfrm>
+          <a:prstGeom xmlns:a="http://schemas.openxmlformats.org/drawingml/2006/main" prst="rect">
+            <a:avLst/>
+          </a:prstGeom>
+          <a:noFill xmlns:a="http://schemas.openxmlformats.org/drawingml/2006/main"/>
+          <a:ln xmlns:a="http://schemas.openxmlformats.org/drawingml/2006/main" w="0">
+            <a:noFill/>
+            <a:prstDash val="solid"/>
+          </a:ln>
+        </p:spPr>
+        <p:txBody>
+          <a:bodyPr xmlns:a="http://schemas.openxmlformats.org/drawingml/2006/main" anchor="t"/>
+          <a:lstStyle xmlns:a="http://schemas.openxmlformats.org/drawingml/2006/main"/>
+          <a:p xmlns:a="http://schemas.openxmlformats.org/drawingml/2006/main">
+            <a:pPr algn="l">
+              <a:defRPr sz="1725" b="1">
+                <a:solidFill>
+                  <a:srgbClr val="14866D"/>
+                </a:solidFill>
+              </a:defRPr>
+            </a:pPr>
+            <a:r>
+              <a:rPr sz="1725" b="1">
+                <a:solidFill>
+                  <a:srgbClr val="14866D"/>
+                </a:solidFill>
+              </a:rPr>
+              <a:t>Calm-pullback rebound</a:t>
+            </a:r>
+          </a:p>
+        </p:txBody>
+      </p:sp>
+      <p:sp>
+        <p:nvSpPr>
+          <p:cNvPr id="15" name="">
+            <a:extLst xmlns:a="http://schemas.openxmlformats.org/drawingml/2006/main">
+              <a:ext uri="{FF2B5EF4-FFF2-40B4-BE49-F238E27FC236}">
+                <a16:creationId xmlns:a16="http://schemas.microsoft.com/office/drawing/2014/main" id="{37A79A76-63D6-4A43-A403-10C63BB2C373}"/>
+              </a:ext>
+            </a:extLst>
+          </p:cNvPr>
+          <p:cNvSpPr>
+            <a:spLocks xmlns:a="http://schemas.openxmlformats.org/drawingml/2006/main" noGrp="1"/>
+          </p:cNvSpPr>
+          <p:nvPr/>
+        </p:nvSpPr>
+        <p:spPr>
+          <a:xfrm xmlns:a="http://schemas.openxmlformats.org/drawingml/2006/main">
+            <a:off x="8401050" y="4495800"/>
+            <a:ext cx="1314450" cy="381000"/>
+          </a:xfrm>
+          <a:prstGeom xmlns:a="http://schemas.openxmlformats.org/drawingml/2006/main" prst="rect">
+            <a:avLst/>
+          </a:prstGeom>
+          <a:noFill xmlns:a="http://schemas.openxmlformats.org/drawingml/2006/main"/>
+          <a:ln xmlns:a="http://schemas.openxmlformats.org/drawingml/2006/main" w="0">
+            <a:noFill/>
+            <a:prstDash val="solid"/>
+          </a:ln>
+        </p:spPr>
+        <p:txBody>
+          <a:bodyPr xmlns:a="http://schemas.openxmlformats.org/drawingml/2006/main" anchor="t"/>
+          <a:lstStyle xmlns:a="http://schemas.openxmlformats.org/drawingml/2006/main"/>
+          <a:p xmlns:a="http://schemas.openxmlformats.org/drawingml/2006/main">
+            <a:pPr algn="l">
+              <a:defRPr sz="2175" b="1">
+                <a:solidFill>
+                  <a:srgbClr val="000000"/>
+                </a:solidFill>
+              </a:defRPr>
+            </a:pPr>
+            <a:r>
+              <a:rPr sz="2175" b="1">
+                <a:solidFill>
+                  <a:srgbClr val="000000"/>
+                </a:solidFill>
+              </a:rPr>
+              <a:t>27 trades</a:t>
+            </a:r>
+          </a:p>
+        </p:txBody>
+      </p:sp>
+      <p:sp>
+        <p:nvSpPr>
+          <p:cNvPr id="16" name="">
+            <a:extLst xmlns:a="http://schemas.openxmlformats.org/drawingml/2006/main">
+              <a:ext uri="{FF2B5EF4-FFF2-40B4-BE49-F238E27FC236}">
+                <a16:creationId xmlns:a16="http://schemas.microsoft.com/office/drawing/2014/main" id="{EB80F513-AAED-4F4C-AC48-D00241B34EFD}"/>
+              </a:ext>
+            </a:extLst>
+          </p:cNvPr>
+          <p:cNvSpPr>
+            <a:spLocks xmlns:a="http://schemas.openxmlformats.org/drawingml/2006/main" noGrp="1"/>
+          </p:cNvSpPr>
+          <p:nvPr/>
+        </p:nvSpPr>
+        <p:spPr>
+          <a:xfrm xmlns:a="http://schemas.openxmlformats.org/drawingml/2006/main">
+            <a:off x="9810750" y="4495800"/>
+            <a:ext cx="1581150" cy="381000"/>
+          </a:xfrm>
+          <a:prstGeom xmlns:a="http://schemas.openxmlformats.org/drawingml/2006/main" prst="rect">
+            <a:avLst/>
+          </a:prstGeom>
+          <a:noFill xmlns:a="http://schemas.openxmlformats.org/drawingml/2006/main"/>
+          <a:ln xmlns:a="http://schemas.openxmlformats.org/drawingml/2006/main" w="0">
+            <a:noFill/>
+            <a:prstDash val="solid"/>
+          </a:ln>
+        </p:spPr>
+        <p:txBody>
+          <a:bodyPr xmlns:a="http://schemas.openxmlformats.org/drawingml/2006/main" anchor="t"/>
+          <a:lstStyle xmlns:a="http://schemas.openxmlformats.org/drawingml/2006/main"/>
+          <a:p xmlns:a="http://schemas.openxmlformats.org/drawingml/2006/main">
+            <a:pPr algn="l">
+              <a:defRPr sz="1800" b="1">
+                <a:solidFill>
+                  <a:srgbClr val="000000"/>
+                </a:solidFill>
+              </a:defRPr>
+            </a:pPr>
+            <a:r>
+              <a:rPr sz="1800" b="1">
+                <a:solidFill>
+                  <a:srgbClr val="000000"/>
+                </a:solidFill>
+              </a:rPr>
+              <a:t>6.33% mean net</a:t>
+            </a:r>
+          </a:p>
+        </p:txBody>
+      </p:sp>
+      <p:sp>
+        <p:nvSpPr>
+          <p:cNvPr id="17" name="">
+            <a:extLst xmlns:a="http://schemas.openxmlformats.org/drawingml/2006/main">
+              <a:ext uri="{FF2B5EF4-FFF2-40B4-BE49-F238E27FC236}">
+                <a16:creationId xmlns:a16="http://schemas.microsoft.com/office/drawing/2014/main" id="{4184DE6A-8897-40F8-A072-623E7C4B5931}"/>
+              </a:ext>
+            </a:extLst>
+          </p:cNvPr>
+          <p:cNvSpPr>
+            <a:spLocks xmlns:a="http://schemas.openxmlformats.org/drawingml/2006/main" noGrp="1"/>
+          </p:cNvSpPr>
+          <p:nvPr/>
+        </p:nvSpPr>
+        <p:spPr>
+          <a:xfrm xmlns:a="http://schemas.openxmlformats.org/drawingml/2006/main">
+            <a:off x="8401050" y="5086350"/>
+            <a:ext cx="2990850" cy="323850"/>
+          </a:xfrm>
+          <a:prstGeom xmlns:a="http://schemas.openxmlformats.org/drawingml/2006/main" prst="rect">
+            <a:avLst/>
+          </a:prstGeom>
+          <a:noFill xmlns:a="http://schemas.openxmlformats.org/drawingml/2006/main"/>
+          <a:ln xmlns:a="http://schemas.openxmlformats.org/drawingml/2006/main" w="0">
+            <a:noFill/>
+            <a:prstDash val="solid"/>
+          </a:ln>
+        </p:spPr>
+        <p:txBody>
+          <a:bodyPr xmlns:a="http://schemas.openxmlformats.org/drawingml/2006/main" anchor="t"/>
+          <a:lstStyle xmlns:a="http://schemas.openxmlformats.org/drawingml/2006/main"/>
+          <a:p xmlns:a="http://schemas.openxmlformats.org/drawingml/2006/main">
+            <a:pPr algn="l">
+              <a:defRPr sz="1350" b="1">
+                <a:solidFill>
+                  <a:srgbClr val="14866D"/>
+                </a:solidFill>
+              </a:defRPr>
+            </a:pPr>
+            <a:r>
+              <a:rPr sz="1350" b="1">
+                <a:solidFill>
+                  <a:srgbClr val="14866D"/>
+                </a:solidFill>
+              </a:rPr>
+              <a:t>74.1% profitable · +3.45 pp vs drift</a:t>
+            </a:r>
+          </a:p>
+        </p:txBody>
+      </p:sp>
+      <p:sp>
+        <p:nvSpPr>
+          <p:cNvPr id="18" name="">
+            <a:extLst xmlns:a="http://schemas.openxmlformats.org/drawingml/2006/main">
+              <a:ext uri="{FF2B5EF4-FFF2-40B4-BE49-F238E27FC236}">
+                <a16:creationId xmlns:a16="http://schemas.microsoft.com/office/drawing/2014/main" id="{20AD97B1-8BAA-49CD-8DBB-EE6EF87D1A28}"/>
+              </a:ext>
+            </a:extLst>
+          </p:cNvPr>
+          <p:cNvSpPr>
+            <a:spLocks xmlns:a="http://schemas.openxmlformats.org/drawingml/2006/main" noGrp="1"/>
+          </p:cNvSpPr>
+          <p:nvPr/>
+        </p:nvSpPr>
+        <p:spPr>
+          <a:xfrm xmlns:a="http://schemas.openxmlformats.org/drawingml/2006/main">
+            <a:off x="8401050" y="5486400"/>
+            <a:ext cx="2990850" cy="381000"/>
+          </a:xfrm>
+          <a:prstGeom xmlns:a="http://schemas.openxmlformats.org/drawingml/2006/main" prst="rect">
+            <a:avLst/>
+          </a:prstGeom>
+          <a:noFill xmlns:a="http://schemas.openxmlformats.org/drawingml/2006/main"/>
+          <a:ln xmlns:a="http://schemas.openxmlformats.org/drawingml/2006/main" w="0">
+            <a:noFill/>
+            <a:prstDash val="solid"/>
+          </a:ln>
+        </p:spPr>
+        <p:txBody>
+          <a:bodyPr xmlns:a="http://schemas.openxmlformats.org/drawingml/2006/main" anchor="t"/>
+          <a:lstStyle xmlns:a="http://schemas.openxmlformats.org/drawingml/2006/main"/>
+          <a:p xmlns:a="http://schemas.openxmlformats.org/drawingml/2006/main">
+            <a:pPr algn="l">
+              <a:defRPr sz="1125" b="1">
+                <a:solidFill>
+                  <a:srgbClr val="24364B"/>
+                </a:solidFill>
+              </a:defRPr>
+            </a:pPr>
+            <a:r>
+              <a:rPr sz="1125" b="1">
+                <a:solidFill>
+                  <a:srgbClr val="24364B"/>
+                </a:solidFill>
+              </a:rPr>
+              <a:t>PASS TRAIN translation only—not confirmation and not edge authority.</a:t>
+            </a:r>
+          </a:p>
+        </p:txBody>
+      </p:sp>
+    </p:spTree>
+    <p:extLst>
+      <p:ext uri="{BB962C8B-B14F-4D97-AF65-F5344CB8AC3E}">
+        <p14:creationId xmlns:p14="http://schemas.microsoft.com/office/powerpoint/2010/main" val="2072276394"/>
+      </p:ext>
+    </p:extLst>
+  </p:cSld>
+</p:sld>
+</file>
+
+<file path=ppt/slides/slide19.xml><?xml version="1.0" encoding="utf-8"?>
+<p:sld xmlns:p="http://schemas.openxmlformats.org/presentationml/2006/main">
+  <p:cSld>
+    <p:bg>
+      <p:bgPr>
+        <a:solidFill xmlns:a="http://schemas.openxmlformats.org/drawingml/2006/main">
+          <a:srgbClr val="FFFFFF"/>
+        </a:solidFill>
+      </p:bgPr>
+    </p:bg>
+    <p:spTree>
+      <p:nvGrpSpPr>
+        <p:cNvPr id="1" name=""/>
+        <p:cNvGrpSpPr/>
+        <p:nvPr/>
+      </p:nvGrpSpPr>
+      <p:grpSpPr>
+        <a:xfrm xmlns:a="http://schemas.openxmlformats.org/drawingml/2006/main"/>
+      </p:grpSpPr>
+      <p:sp>
+        <p:nvSpPr>
+          <p:cNvPr id="18" name="">
+            <a:extLst xmlns:a="http://schemas.openxmlformats.org/drawingml/2006/main">
+              <a:ext uri="{FF2B5EF4-FFF2-40B4-BE49-F238E27FC236}">
+                <a16:creationId xmlns:a16="http://schemas.microsoft.com/office/drawing/2014/main" id="{8123068C-C61E-47DE-843F-851424CC1F55}"/>
+              </a:ext>
+            </a:extLst>
+          </p:cNvPr>
+          <p:cNvSpPr>
+            <a:spLocks xmlns:a="http://schemas.openxmlformats.org/drawingml/2006/main" noGrp="1"/>
+          </p:cNvSpPr>
+          <p:nvPr/>
+        </p:nvSpPr>
+        <p:spPr>
+          <a:xfrm xmlns:a="http://schemas.openxmlformats.org/drawingml/2006/main">
+            <a:off x="457200" y="238125"/>
+            <a:ext cx="6191250" cy="190500"/>
+          </a:xfrm>
+          <a:prstGeom xmlns:a="http://schemas.openxmlformats.org/drawingml/2006/main" prst="rect">
+            <a:avLst/>
+          </a:prstGeom>
+          <a:noFill xmlns:a="http://schemas.openxmlformats.org/drawingml/2006/main"/>
+          <a:ln xmlns:a="http://schemas.openxmlformats.org/drawingml/2006/main" w="0">
+            <a:noFill/>
+            <a:prstDash val="solid"/>
+          </a:ln>
+        </p:spPr>
+        <p:txBody>
+          <a:bodyPr xmlns:a="http://schemas.openxmlformats.org/drawingml/2006/main" anchor="t"/>
+          <a:lstStyle xmlns:a="http://schemas.openxmlformats.org/drawingml/2006/main"/>
+          <a:p xmlns:a="http://schemas.openxmlformats.org/drawingml/2006/main">
+            <a:pPr algn="l">
+              <a:defRPr sz="1050" b="1">
+                <a:solidFill>
+                  <a:srgbClr val="667386"/>
+                </a:solidFill>
+              </a:defRPr>
+            </a:pPr>
+            <a:r>
+              <a:rPr sz="1050" b="1">
+                <a:solidFill>
+                  <a:srgbClr val="667386"/>
+                </a:solidFill>
+              </a:rPr>
+              <a:t>OPERATOR HYPOTHESIS LAB · NVDA PROTO-RULES</a:t>
+            </a:r>
+          </a:p>
+        </p:txBody>
+      </p:sp>
+      <p:sp>
+        <p:nvSpPr>
+          <p:cNvPr id="2" name="">
+            <a:extLst xmlns:a="http://schemas.openxmlformats.org/drawingml/2006/main">
+              <a:ext uri="{FF2B5EF4-FFF2-40B4-BE49-F238E27FC236}">
+                <a16:creationId xmlns:a16="http://schemas.microsoft.com/office/drawing/2014/main" id="{C228BFAC-D986-46E2-A038-FE1E97BC06CF}"/>
+              </a:ext>
+            </a:extLst>
+          </p:cNvPr>
+          <p:cNvSpPr>
+            <a:spLocks xmlns:a="http://schemas.openxmlformats.org/drawingml/2006/main" noGrp="1"/>
+          </p:cNvSpPr>
+          <p:nvPr/>
+        </p:nvSpPr>
+        <p:spPr>
+          <a:xfrm xmlns:a="http://schemas.openxmlformats.org/drawingml/2006/main">
+            <a:off x="457200" y="523875"/>
+            <a:ext cx="11049000" cy="590550"/>
+          </a:xfrm>
+          <a:prstGeom xmlns:a="http://schemas.openxmlformats.org/drawingml/2006/main" prst="rect">
+            <a:avLst/>
+          </a:prstGeom>
+          <a:noFill xmlns:a="http://schemas.openxmlformats.org/drawingml/2006/main"/>
+          <a:ln xmlns:a="http://schemas.openxmlformats.org/drawingml/2006/main" w="0">
+            <a:noFill/>
+            <a:prstDash val="solid"/>
+          </a:ln>
+        </p:spPr>
+        <p:txBody>
+          <a:bodyPr xmlns:a="http://schemas.openxmlformats.org/drawingml/2006/main" anchor="t"/>
+          <a:lstStyle xmlns:a="http://schemas.openxmlformats.org/drawingml/2006/main"/>
+          <a:p xmlns:a="http://schemas.openxmlformats.org/drawingml/2006/main">
+            <a:pPr algn="l">
+              <a:defRPr sz="2925" b="1">
+                <a:solidFill>
+                  <a:srgbClr val="000000"/>
+                </a:solidFill>
+              </a:defRPr>
+            </a:pPr>
+            <a:r>
+              <a:rPr sz="2925" b="1">
+                <a:solidFill>
+                  <a:srgbClr val="000000"/>
+                </a:solidFill>
+              </a:rPr>
+              <a:t>The joint rebound condition adds discrimination</a:t>
+            </a:r>
+          </a:p>
+        </p:txBody>
+      </p:sp>
+      <p:sp>
+        <p:nvSpPr>
+          <p:cNvPr id="3" name="">
+            <a:extLst xmlns:a="http://schemas.openxmlformats.org/drawingml/2006/main">
+              <a:ext uri="{FF2B5EF4-FFF2-40B4-BE49-F238E27FC236}">
+                <a16:creationId xmlns:a16="http://schemas.microsoft.com/office/drawing/2014/main" id="{A36625B1-8230-4A2D-959C-FB199C7E8034}"/>
+              </a:ext>
+            </a:extLst>
+          </p:cNvPr>
+          <p:cNvSpPr>
+            <a:spLocks xmlns:a="http://schemas.openxmlformats.org/drawingml/2006/main" noGrp="1"/>
+          </p:cNvSpPr>
+          <p:nvPr/>
+        </p:nvSpPr>
+        <p:spPr>
+          <a:xfrm xmlns:a="http://schemas.openxmlformats.org/drawingml/2006/main">
+            <a:off x="457200" y="1219200"/>
+            <a:ext cx="11277600" cy="19050"/>
+          </a:xfrm>
+          <a:prstGeom xmlns:a="http://schemas.openxmlformats.org/drawingml/2006/main" prst="rect">
+            <a:avLst/>
+          </a:prstGeom>
+          <a:solidFill xmlns:a="http://schemas.openxmlformats.org/drawingml/2006/main">
+            <a:srgbClr val="B8BCC4"/>
+          </a:solidFill>
+          <a:ln xmlns:a="http://schemas.openxmlformats.org/drawingml/2006/main" w="0">
+            <a:solidFill>
+              <a:srgbClr val="B8BCC4"/>
+            </a:solidFill>
+            <a:prstDash val="solid"/>
+          </a:ln>
+        </p:spPr>
+      </p:sp>
+      <p:sp>
+        <p:nvSpPr>
+          <p:cNvPr id="4" name="">
+            <a:extLst xmlns:a="http://schemas.openxmlformats.org/drawingml/2006/main">
+              <a:ext uri="{FF2B5EF4-FFF2-40B4-BE49-F238E27FC236}">
+                <a16:creationId xmlns:a16="http://schemas.microsoft.com/office/drawing/2014/main" id="{2A47CF0C-C24D-47C5-B61B-B2D2CE03A9AD}"/>
+              </a:ext>
+            </a:extLst>
+          </p:cNvPr>
+          <p:cNvSpPr>
+            <a:spLocks xmlns:a="http://schemas.openxmlformats.org/drawingml/2006/main" noGrp="1"/>
+          </p:cNvSpPr>
+          <p:nvPr/>
+        </p:nvSpPr>
+        <p:spPr>
+          <a:xfrm xmlns:a="http://schemas.openxmlformats.org/drawingml/2006/main">
+            <a:off x="457200" y="6515100"/>
+            <a:ext cx="7048500" cy="161925"/>
+          </a:xfrm>
+          <a:prstGeom xmlns:a="http://schemas.openxmlformats.org/drawingml/2006/main" prst="rect">
+            <a:avLst/>
+          </a:prstGeom>
+          <a:noFill xmlns:a="http://schemas.openxmlformats.org/drawingml/2006/main"/>
+          <a:ln xmlns:a="http://schemas.openxmlformats.org/drawingml/2006/main" w="0">
+            <a:noFill/>
+            <a:prstDash val="solid"/>
+          </a:ln>
+        </p:spPr>
+        <p:txBody>
+          <a:bodyPr xmlns:a="http://schemas.openxmlformats.org/drawingml/2006/main" anchor="t"/>
+          <a:lstStyle xmlns:a="http://schemas.openxmlformats.org/drawingml/2006/main"/>
+          <a:p xmlns:a="http://schemas.openxmlformats.org/drawingml/2006/main">
+            <a:pPr algn="l">
+              <a:defRPr sz="900" b="0">
+                <a:solidFill>
+                  <a:srgbClr val="667386"/>
+                </a:solidFill>
+              </a:defRPr>
+            </a:pPr>
+            <a:r>
+              <a:rPr sz="900" b="0">
+                <a:solidFill>
+                  <a:srgbClr val="667386"/>
+                </a:solidFill>
+              </a:rPr>
+              <a:t>Descriptive research · adjusted bars · frozen 2018–2023 window</a:t>
+            </a:r>
+          </a:p>
+        </p:txBody>
+      </p:sp>
+      <p:sp>
+        <p:nvSpPr>
+          <p:cNvPr id="5" name="">
+            <a:extLst xmlns:a="http://schemas.openxmlformats.org/drawingml/2006/main">
+              <a:ext uri="{FF2B5EF4-FFF2-40B4-BE49-F238E27FC236}">
+                <a16:creationId xmlns:a16="http://schemas.microsoft.com/office/drawing/2014/main" id="{9E069B7A-E4DD-466D-976B-96ADAB58E3BC}"/>
+              </a:ext>
+            </a:extLst>
+          </p:cNvPr>
+          <p:cNvSpPr>
+            <a:spLocks xmlns:a="http://schemas.openxmlformats.org/drawingml/2006/main" noGrp="1"/>
+          </p:cNvSpPr>
+          <p:nvPr/>
+        </p:nvSpPr>
+        <p:spPr>
+          <a:xfrm xmlns:a="http://schemas.openxmlformats.org/drawingml/2006/main">
+            <a:off x="10858500" y="6496050"/>
+            <a:ext cx="876300" cy="171450"/>
+          </a:xfrm>
+          <a:prstGeom xmlns:a="http://schemas.openxmlformats.org/drawingml/2006/main" prst="rect">
+            <a:avLst/>
+          </a:prstGeom>
+          <a:noFill xmlns:a="http://schemas.openxmlformats.org/drawingml/2006/main"/>
+          <a:ln xmlns:a="http://schemas.openxmlformats.org/drawingml/2006/main" w="0">
+            <a:noFill/>
+            <a:prstDash val="solid"/>
+          </a:ln>
+        </p:spPr>
+        <p:txBody>
+          <a:bodyPr xmlns:a="http://schemas.openxmlformats.org/drawingml/2006/main" anchor="t"/>
+          <a:lstStyle xmlns:a="http://schemas.openxmlformats.org/drawingml/2006/main"/>
+          <a:p xmlns:a="http://schemas.openxmlformats.org/drawingml/2006/main">
+            <a:pPr algn="r">
+              <a:defRPr sz="900" b="0">
+                <a:solidFill>
+                  <a:srgbClr val="667386"/>
+                </a:solidFill>
+              </a:defRPr>
+            </a:pPr>
+            <a:r>
+              <a:rPr sz="900" b="0">
+                <a:solidFill>
+                  <a:srgbClr val="667386"/>
+                </a:solidFill>
+              </a:rPr>
+              <a:t>19</a:t>
+            </a:r>
+          </a:p>
+        </p:txBody>
+      </p:sp>
+      <p:pic>
+        <p:nvPicPr>
+          <p:cNvPr id="23" name=""/>
+          <p:cNvPicPr>
+            <a:picLocks xmlns:a="http://schemas.openxmlformats.org/drawingml/2006/main" noChangeAspect="1"/>
+          </p:cNvPicPr>
+          <p:nvPr/>
+        </p:nvPicPr>
+        <p:blipFill>
+          <a:blip xmlns:r="http://schemas.openxmlformats.org/officeDocument/2006/relationships" xmlns:a="http://schemas.openxmlformats.org/drawingml/2006/main" r:embed="R5891d2e252424a03"/>
+          <a:stretch xmlns:a="http://schemas.openxmlformats.org/drawingml/2006/main"/>
+        </p:blipFill>
+        <p:spPr>
+          <a:xfrm xmlns:a="http://schemas.openxmlformats.org/drawingml/2006/main">
+            <a:off x="717197" y="1352550"/>
+            <a:ext cx="8071556" cy="4953000"/>
+          </a:xfrm>
+          <a:prstGeom xmlns:a="http://schemas.openxmlformats.org/drawingml/2006/main" prst="rect">
+            <a:avLst/>
+          </a:prstGeom>
+        </p:spPr>
+      </p:pic>
+      <p:sp>
+        <p:nvSpPr>
+          <p:cNvPr id="7" name="">
+            <a:extLst xmlns:a="http://schemas.openxmlformats.org/drawingml/2006/main">
+              <a:ext uri="{FF2B5EF4-FFF2-40B4-BE49-F238E27FC236}">
+                <a16:creationId xmlns:a16="http://schemas.microsoft.com/office/drawing/2014/main" id="{964C168B-E480-4E34-9915-57B7BA8A8226}"/>
+              </a:ext>
+            </a:extLst>
+          </p:cNvPr>
+          <p:cNvSpPr>
+            <a:spLocks xmlns:a="http://schemas.openxmlformats.org/drawingml/2006/main" noGrp="1"/>
+          </p:cNvSpPr>
+          <p:nvPr/>
+        </p:nvSpPr>
+        <p:spPr>
+          <a:xfrm xmlns:a="http://schemas.openxmlformats.org/drawingml/2006/main">
+            <a:off x="9391650" y="1524000"/>
+            <a:ext cx="2247900" cy="4362450"/>
+          </a:xfrm>
+          <a:prstGeom xmlns:a="http://schemas.openxmlformats.org/drawingml/2006/main" prst="rect">
+            <a:avLst/>
+          </a:prstGeom>
+          <a:solidFill xmlns:a="http://schemas.openxmlformats.org/drawingml/2006/main">
+            <a:srgbClr val="F3F5F7"/>
+          </a:solidFill>
+          <a:ln xmlns:a="http://schemas.openxmlformats.org/drawingml/2006/main" w="0">
+            <a:solidFill>
+              <a:srgbClr val="F3F5F7"/>
+            </a:solidFill>
+            <a:prstDash val="solid"/>
+          </a:ln>
+        </p:spPr>
+      </p:sp>
+      <p:sp>
+        <p:nvSpPr>
+          <p:cNvPr id="8" name="">
+            <a:extLst xmlns:a="http://schemas.openxmlformats.org/drawingml/2006/main">
+              <a:ext uri="{FF2B5EF4-FFF2-40B4-BE49-F238E27FC236}">
+                <a16:creationId xmlns:a16="http://schemas.microsoft.com/office/drawing/2014/main" id="{798FE01F-DF96-43D8-BA99-D96C58534009}"/>
+              </a:ext>
+            </a:extLst>
+          </p:cNvPr>
+          <p:cNvSpPr>
+            <a:spLocks xmlns:a="http://schemas.openxmlformats.org/drawingml/2006/main" noGrp="1"/>
+          </p:cNvSpPr>
+          <p:nvPr/>
+        </p:nvSpPr>
+        <p:spPr>
+          <a:xfrm xmlns:a="http://schemas.openxmlformats.org/drawingml/2006/main">
+            <a:off x="9601200" y="1752600"/>
+            <a:ext cx="1828800" cy="266700"/>
+          </a:xfrm>
+          <a:prstGeom xmlns:a="http://schemas.openxmlformats.org/drawingml/2006/main" prst="rect">
+            <a:avLst/>
+          </a:prstGeom>
+          <a:noFill xmlns:a="http://schemas.openxmlformats.org/drawingml/2006/main"/>
+          <a:ln xmlns:a="http://schemas.openxmlformats.org/drawingml/2006/main" w="0">
+            <a:noFill/>
+            <a:prstDash val="solid"/>
+          </a:ln>
+        </p:spPr>
+        <p:txBody>
+          <a:bodyPr xmlns:a="http://schemas.openxmlformats.org/drawingml/2006/main" anchor="t"/>
+          <a:lstStyle xmlns:a="http://schemas.openxmlformats.org/drawingml/2006/main"/>
+          <a:p xmlns:a="http://schemas.openxmlformats.org/drawingml/2006/main">
+            <a:pPr algn="l">
+              <a:defRPr sz="1575" b="1">
+                <a:solidFill>
+                  <a:srgbClr val="000000"/>
+                </a:solidFill>
+              </a:defRPr>
+            </a:pPr>
+            <a:r>
+              <a:rPr sz="1575" b="1">
+                <a:solidFill>
+                  <a:srgbClr val="000000"/>
+                </a:solidFill>
+              </a:rPr>
+              <a:t>Mean net return</a:t>
+            </a:r>
+          </a:p>
+        </p:txBody>
+      </p:sp>
+      <p:sp>
+        <p:nvSpPr>
+          <p:cNvPr id="9" name="">
+            <a:extLst xmlns:a="http://schemas.openxmlformats.org/drawingml/2006/main">
+              <a:ext uri="{FF2B5EF4-FFF2-40B4-BE49-F238E27FC236}">
+                <a16:creationId xmlns:a16="http://schemas.microsoft.com/office/drawing/2014/main" id="{6BA002F3-25E8-44BD-A2F0-C95BC8F54590}"/>
+              </a:ext>
+            </a:extLst>
+          </p:cNvPr>
+          <p:cNvSpPr>
+            <a:spLocks xmlns:a="http://schemas.openxmlformats.org/drawingml/2006/main" noGrp="1"/>
+          </p:cNvSpPr>
+          <p:nvPr/>
+        </p:nvSpPr>
+        <p:spPr>
+          <a:xfrm xmlns:a="http://schemas.openxmlformats.org/drawingml/2006/main">
+            <a:off x="9601200" y="2266950"/>
+            <a:ext cx="1828800" cy="438150"/>
+          </a:xfrm>
+          <a:prstGeom xmlns:a="http://schemas.openxmlformats.org/drawingml/2006/main" prst="rect">
+            <a:avLst/>
+          </a:prstGeom>
+          <a:noFill xmlns:a="http://schemas.openxmlformats.org/drawingml/2006/main"/>
+          <a:ln xmlns:a="http://schemas.openxmlformats.org/drawingml/2006/main" w="0">
+            <a:noFill/>
+            <a:prstDash val="solid"/>
+          </a:ln>
+        </p:spPr>
+        <p:txBody>
+          <a:bodyPr xmlns:a="http://schemas.openxmlformats.org/drawingml/2006/main" anchor="t"/>
+          <a:lstStyle xmlns:a="http://schemas.openxmlformats.org/drawingml/2006/main"/>
+          <a:p xmlns:a="http://schemas.openxmlformats.org/drawingml/2006/main">
+            <a:pPr algn="l">
+              <a:defRPr sz="2700" b="1">
+                <a:solidFill>
+                  <a:srgbClr val="14866D"/>
+                </a:solidFill>
+              </a:defRPr>
+            </a:pPr>
+            <a:r>
+              <a:rPr sz="2700" b="1">
+                <a:solidFill>
+                  <a:srgbClr val="14866D"/>
+                </a:solidFill>
+              </a:rPr>
+              <a:t>6.33%</a:t>
+            </a:r>
+          </a:p>
+        </p:txBody>
+      </p:sp>
+      <p:sp>
+        <p:nvSpPr>
+          <p:cNvPr id="10" name="">
+            <a:extLst xmlns:a="http://schemas.openxmlformats.org/drawingml/2006/main">
+              <a:ext uri="{FF2B5EF4-FFF2-40B4-BE49-F238E27FC236}">
+                <a16:creationId xmlns:a16="http://schemas.microsoft.com/office/drawing/2014/main" id="{BC640B62-10DF-4E31-8465-46B8A2F4B791}"/>
+              </a:ext>
+            </a:extLst>
+          </p:cNvPr>
+          <p:cNvSpPr>
+            <a:spLocks xmlns:a="http://schemas.openxmlformats.org/drawingml/2006/main" noGrp="1"/>
+          </p:cNvSpPr>
+          <p:nvPr/>
+        </p:nvSpPr>
+        <p:spPr>
+          <a:xfrm xmlns:a="http://schemas.openxmlformats.org/drawingml/2006/main">
+            <a:off x="9601200" y="2686050"/>
+            <a:ext cx="1828800" cy="228600"/>
+          </a:xfrm>
+          <a:prstGeom xmlns:a="http://schemas.openxmlformats.org/drawingml/2006/main" prst="rect">
+            <a:avLst/>
+          </a:prstGeom>
+          <a:noFill xmlns:a="http://schemas.openxmlformats.org/drawingml/2006/main"/>
+          <a:ln xmlns:a="http://schemas.openxmlformats.org/drawingml/2006/main" w="0">
+            <a:noFill/>
+            <a:prstDash val="solid"/>
+          </a:ln>
+        </p:spPr>
+        <p:txBody>
+          <a:bodyPr xmlns:a="http://schemas.openxmlformats.org/drawingml/2006/main" anchor="t"/>
+          <a:lstStyle xmlns:a="http://schemas.openxmlformats.org/drawingml/2006/main"/>
+          <a:p xmlns:a="http://schemas.openxmlformats.org/drawingml/2006/main">
+            <a:pPr algn="l">
+              <a:defRPr sz="1200" b="0">
+                <a:solidFill>
+                  <a:srgbClr val="667386"/>
+                </a:solidFill>
+              </a:defRPr>
+            </a:pPr>
+            <a:r>
+              <a:rPr sz="1200" b="0">
+                <a:solidFill>
+                  <a:srgbClr val="667386"/>
+                </a:solidFill>
+              </a:rPr>
+              <a:t>joint rebound</a:t>
+            </a:r>
+          </a:p>
+        </p:txBody>
+      </p:sp>
+      <p:sp>
+        <p:nvSpPr>
+          <p:cNvPr id="11" name="">
+            <a:extLst xmlns:a="http://schemas.openxmlformats.org/drawingml/2006/main">
+              <a:ext uri="{FF2B5EF4-FFF2-40B4-BE49-F238E27FC236}">
+                <a16:creationId xmlns:a16="http://schemas.microsoft.com/office/drawing/2014/main" id="{41CE3B10-D835-477F-8E7D-8EA88ABA23D7}"/>
+              </a:ext>
+            </a:extLst>
+          </p:cNvPr>
+          <p:cNvSpPr>
+            <a:spLocks xmlns:a="http://schemas.openxmlformats.org/drawingml/2006/main" noGrp="1"/>
+          </p:cNvSpPr>
+          <p:nvPr/>
+        </p:nvSpPr>
+        <p:spPr>
+          <a:xfrm xmlns:a="http://schemas.openxmlformats.org/drawingml/2006/main">
+            <a:off x="9601200" y="3181350"/>
+            <a:ext cx="1828800" cy="361950"/>
+          </a:xfrm>
+          <a:prstGeom xmlns:a="http://schemas.openxmlformats.org/drawingml/2006/main" prst="rect">
+            <a:avLst/>
+          </a:prstGeom>
+          <a:noFill xmlns:a="http://schemas.openxmlformats.org/drawingml/2006/main"/>
+          <a:ln xmlns:a="http://schemas.openxmlformats.org/drawingml/2006/main" w="0">
+            <a:noFill/>
+            <a:prstDash val="solid"/>
+          </a:ln>
+        </p:spPr>
+        <p:txBody>
+          <a:bodyPr xmlns:a="http://schemas.openxmlformats.org/drawingml/2006/main" anchor="t"/>
+          <a:lstStyle xmlns:a="http://schemas.openxmlformats.org/drawingml/2006/main"/>
+          <a:p xmlns:a="http://schemas.openxmlformats.org/drawingml/2006/main">
+            <a:pPr algn="l">
+              <a:defRPr sz="2175" b="1">
+                <a:solidFill>
+                  <a:srgbClr val="000000"/>
+                </a:solidFill>
+              </a:defRPr>
+            </a:pPr>
+            <a:r>
+              <a:rPr sz="2175" b="1">
+                <a:solidFill>
+                  <a:srgbClr val="000000"/>
+                </a:solidFill>
+              </a:rPr>
+              <a:t>4.53%</a:t>
+            </a:r>
+          </a:p>
+        </p:txBody>
+      </p:sp>
+      <p:sp>
+        <p:nvSpPr>
+          <p:cNvPr id="12" name="">
+            <a:extLst xmlns:a="http://schemas.openxmlformats.org/drawingml/2006/main">
+              <a:ext uri="{FF2B5EF4-FFF2-40B4-BE49-F238E27FC236}">
+                <a16:creationId xmlns:a16="http://schemas.microsoft.com/office/drawing/2014/main" id="{52E8D97D-6829-44DD-9F71-7A0CEC8C734C}"/>
+              </a:ext>
+            </a:extLst>
+          </p:cNvPr>
+          <p:cNvSpPr>
+            <a:spLocks xmlns:a="http://schemas.openxmlformats.org/drawingml/2006/main" noGrp="1"/>
+          </p:cNvSpPr>
+          <p:nvPr/>
+        </p:nvSpPr>
+        <p:spPr>
+          <a:xfrm xmlns:a="http://schemas.openxmlformats.org/drawingml/2006/main">
+            <a:off x="9601200" y="3543300"/>
+            <a:ext cx="1828800" cy="228600"/>
+          </a:xfrm>
+          <a:prstGeom xmlns:a="http://schemas.openxmlformats.org/drawingml/2006/main" prst="rect">
+            <a:avLst/>
+          </a:prstGeom>
+          <a:noFill xmlns:a="http://schemas.openxmlformats.org/drawingml/2006/main"/>
+          <a:ln xmlns:a="http://schemas.openxmlformats.org/drawingml/2006/main" w="0">
+            <a:noFill/>
+            <a:prstDash val="solid"/>
+          </a:ln>
+        </p:spPr>
+        <p:txBody>
+          <a:bodyPr xmlns:a="http://schemas.openxmlformats.org/drawingml/2006/main" anchor="t"/>
+          <a:lstStyle xmlns:a="http://schemas.openxmlformats.org/drawingml/2006/main"/>
+          <a:p xmlns:a="http://schemas.openxmlformats.org/drawingml/2006/main">
+            <a:pPr algn="l">
+              <a:defRPr sz="1200" b="0">
+                <a:solidFill>
+                  <a:srgbClr val="667386"/>
+                </a:solidFill>
+              </a:defRPr>
+            </a:pPr>
+            <a:r>
+              <a:rPr sz="1200" b="0">
+                <a:solidFill>
+                  <a:srgbClr val="667386"/>
+                </a:solidFill>
+              </a:rPr>
+              <a:t>ATR state only</a:t>
+            </a:r>
+          </a:p>
+        </p:txBody>
+      </p:sp>
+      <p:sp>
+        <p:nvSpPr>
+          <p:cNvPr id="13" name="">
+            <a:extLst xmlns:a="http://schemas.openxmlformats.org/drawingml/2006/main">
+              <a:ext uri="{FF2B5EF4-FFF2-40B4-BE49-F238E27FC236}">
+                <a16:creationId xmlns:a16="http://schemas.microsoft.com/office/drawing/2014/main" id="{C2469825-9590-4B08-8CD4-0E0FF9F45054}"/>
+              </a:ext>
+            </a:extLst>
+          </p:cNvPr>
+          <p:cNvSpPr>
+            <a:spLocks xmlns:a="http://schemas.openxmlformats.org/drawingml/2006/main" noGrp="1"/>
+          </p:cNvSpPr>
+          <p:nvPr/>
+        </p:nvSpPr>
+        <p:spPr>
+          <a:xfrm xmlns:a="http://schemas.openxmlformats.org/drawingml/2006/main">
+            <a:off x="9601200" y="3981450"/>
+            <a:ext cx="1828800" cy="361950"/>
+          </a:xfrm>
+          <a:prstGeom xmlns:a="http://schemas.openxmlformats.org/drawingml/2006/main" prst="rect">
+            <a:avLst/>
+          </a:prstGeom>
+          <a:noFill xmlns:a="http://schemas.openxmlformats.org/drawingml/2006/main"/>
+          <a:ln xmlns:a="http://schemas.openxmlformats.org/drawingml/2006/main" w="0">
+            <a:noFill/>
+            <a:prstDash val="solid"/>
+          </a:ln>
+        </p:spPr>
+        <p:txBody>
+          <a:bodyPr xmlns:a="http://schemas.openxmlformats.org/drawingml/2006/main" anchor="t"/>
+          <a:lstStyle xmlns:a="http://schemas.openxmlformats.org/drawingml/2006/main"/>
+          <a:p xmlns:a="http://schemas.openxmlformats.org/drawingml/2006/main">
+            <a:pPr algn="l">
+              <a:defRPr sz="2175" b="1">
+                <a:solidFill>
+                  <a:srgbClr val="000000"/>
+                </a:solidFill>
+              </a:defRPr>
+            </a:pPr>
+            <a:r>
+              <a:rPr sz="2175" b="1">
+                <a:solidFill>
+                  <a:srgbClr val="000000"/>
+                </a:solidFill>
+              </a:rPr>
+              <a:t>3.85%</a:t>
+            </a:r>
+          </a:p>
+        </p:txBody>
+      </p:sp>
+      <p:sp>
+        <p:nvSpPr>
+          <p:cNvPr id="14" name="">
+            <a:extLst xmlns:a="http://schemas.openxmlformats.org/drawingml/2006/main">
+              <a:ext uri="{FF2B5EF4-FFF2-40B4-BE49-F238E27FC236}">
+                <a16:creationId xmlns:a16="http://schemas.microsoft.com/office/drawing/2014/main" id="{4DF8196E-D99F-4843-A54B-3D09BA8050A3}"/>
+              </a:ext>
+            </a:extLst>
+          </p:cNvPr>
+          <p:cNvSpPr>
+            <a:spLocks xmlns:a="http://schemas.openxmlformats.org/drawingml/2006/main" noGrp="1"/>
+          </p:cNvSpPr>
+          <p:nvPr/>
+        </p:nvSpPr>
+        <p:spPr>
+          <a:xfrm xmlns:a="http://schemas.openxmlformats.org/drawingml/2006/main">
+            <a:off x="9601200" y="4343400"/>
+            <a:ext cx="1828800" cy="457200"/>
+          </a:xfrm>
+          <a:prstGeom xmlns:a="http://schemas.openxmlformats.org/drawingml/2006/main" prst="rect">
+            <a:avLst/>
+          </a:prstGeom>
+          <a:noFill xmlns:a="http://schemas.openxmlformats.org/drawingml/2006/main"/>
+          <a:ln xmlns:a="http://schemas.openxmlformats.org/drawingml/2006/main" w="0">
+            <a:noFill/>
+            <a:prstDash val="solid"/>
+          </a:ln>
+        </p:spPr>
+        <p:txBody>
+          <a:bodyPr xmlns:a="http://schemas.openxmlformats.org/drawingml/2006/main" anchor="t"/>
+          <a:lstStyle xmlns:a="http://schemas.openxmlformats.org/drawingml/2006/main"/>
+          <a:p xmlns:a="http://schemas.openxmlformats.org/drawingml/2006/main">
+            <a:pPr algn="l">
+              <a:defRPr sz="1125" b="0">
+                <a:solidFill>
+                  <a:srgbClr val="667386"/>
+                </a:solidFill>
+              </a:defRPr>
+            </a:pPr>
+            <a:r>
+              <a:rPr sz="1125" b="0">
+                <a:solidFill>
+                  <a:srgbClr val="667386"/>
+                </a:solidFill>
+              </a:rPr>
+              <a:t>same calm state after gains</a:t>
+            </a:r>
+          </a:p>
+        </p:txBody>
+      </p:sp>
+      <p:sp>
+        <p:nvSpPr>
+          <p:cNvPr id="15" name="">
+            <a:extLst xmlns:a="http://schemas.openxmlformats.org/drawingml/2006/main">
+              <a:ext uri="{FF2B5EF4-FFF2-40B4-BE49-F238E27FC236}">
+                <a16:creationId xmlns:a16="http://schemas.microsoft.com/office/drawing/2014/main" id="{FD9C53D8-BE64-45AF-BAC0-1D674BBCF508}"/>
+              </a:ext>
+            </a:extLst>
+          </p:cNvPr>
+          <p:cNvSpPr>
+            <a:spLocks xmlns:a="http://schemas.openxmlformats.org/drawingml/2006/main" noGrp="1"/>
+          </p:cNvSpPr>
+          <p:nvPr/>
+        </p:nvSpPr>
+        <p:spPr>
+          <a:xfrm xmlns:a="http://schemas.openxmlformats.org/drawingml/2006/main">
+            <a:off x="9601200" y="4991100"/>
+            <a:ext cx="1828800" cy="361950"/>
+          </a:xfrm>
+          <a:prstGeom xmlns:a="http://schemas.openxmlformats.org/drawingml/2006/main" prst="rect">
+            <a:avLst/>
+          </a:prstGeom>
+          <a:noFill xmlns:a="http://schemas.openxmlformats.org/drawingml/2006/main"/>
+          <a:ln xmlns:a="http://schemas.openxmlformats.org/drawingml/2006/main" w="0">
+            <a:noFill/>
+            <a:prstDash val="solid"/>
+          </a:ln>
+        </p:spPr>
+        <p:txBody>
+          <a:bodyPr xmlns:a="http://schemas.openxmlformats.org/drawingml/2006/main" anchor="t"/>
+          <a:lstStyle xmlns:a="http://schemas.openxmlformats.org/drawingml/2006/main"/>
+          <a:p xmlns:a="http://schemas.openxmlformats.org/drawingml/2006/main">
+            <a:pPr algn="l">
+              <a:defRPr sz="2175" b="1">
+                <a:solidFill>
+                  <a:srgbClr val="000000"/>
+                </a:solidFill>
+              </a:defRPr>
+            </a:pPr>
+            <a:r>
+              <a:rPr sz="2175" b="1">
+                <a:solidFill>
+                  <a:srgbClr val="000000"/>
+                </a:solidFill>
+              </a:rPr>
+              <a:t>2.77%</a:t>
+            </a:r>
+          </a:p>
+        </p:txBody>
+      </p:sp>
+      <p:sp>
+        <p:nvSpPr>
+          <p:cNvPr id="16" name="">
+            <a:extLst xmlns:a="http://schemas.openxmlformats.org/drawingml/2006/main">
+              <a:ext uri="{FF2B5EF4-FFF2-40B4-BE49-F238E27FC236}">
+                <a16:creationId xmlns:a16="http://schemas.microsoft.com/office/drawing/2014/main" id="{97704677-7FDD-47F6-8354-2DEEB92F5BD7}"/>
+              </a:ext>
+            </a:extLst>
+          </p:cNvPr>
+          <p:cNvSpPr>
+            <a:spLocks xmlns:a="http://schemas.openxmlformats.org/drawingml/2006/main" noGrp="1"/>
+          </p:cNvSpPr>
+          <p:nvPr/>
+        </p:nvSpPr>
+        <p:spPr>
+          <a:xfrm xmlns:a="http://schemas.openxmlformats.org/drawingml/2006/main">
+            <a:off x="9601200" y="5353050"/>
+            <a:ext cx="1828800" cy="228600"/>
+          </a:xfrm>
+          <a:prstGeom xmlns:a="http://schemas.openxmlformats.org/drawingml/2006/main" prst="rect">
+            <a:avLst/>
+          </a:prstGeom>
+          <a:noFill xmlns:a="http://schemas.openxmlformats.org/drawingml/2006/main"/>
+          <a:ln xmlns:a="http://schemas.openxmlformats.org/drawingml/2006/main" w="0">
+            <a:noFill/>
+            <a:prstDash val="solid"/>
+          </a:ln>
+        </p:spPr>
+        <p:txBody>
+          <a:bodyPr xmlns:a="http://schemas.openxmlformats.org/drawingml/2006/main" anchor="t"/>
+          <a:lstStyle xmlns:a="http://schemas.openxmlformats.org/drawingml/2006/main"/>
+          <a:p xmlns:a="http://schemas.openxmlformats.org/drawingml/2006/main">
+            <a:pPr algn="l">
+              <a:defRPr sz="1200" b="0">
+                <a:solidFill>
+                  <a:srgbClr val="667386"/>
+                </a:solidFill>
+              </a:defRPr>
+            </a:pPr>
+            <a:r>
+              <a:rPr sz="1200" b="0">
+                <a:solidFill>
+                  <a:srgbClr val="667386"/>
+                </a:solidFill>
+              </a:rPr>
+              <a:t>negative R20 only</a:t>
+            </a:r>
+          </a:p>
+        </p:txBody>
+      </p:sp>
+      <p:sp>
+        <p:nvSpPr>
+          <p:cNvPr id="17" name="">
+            <a:extLst xmlns:a="http://schemas.openxmlformats.org/drawingml/2006/main">
+              <a:ext uri="{FF2B5EF4-FFF2-40B4-BE49-F238E27FC236}">
+                <a16:creationId xmlns:a16="http://schemas.microsoft.com/office/drawing/2014/main" id="{9EAD49E1-1F82-4721-ABE6-F9E34D968F48}"/>
+              </a:ext>
+            </a:extLst>
+          </p:cNvPr>
+          <p:cNvSpPr>
+            <a:spLocks xmlns:a="http://schemas.openxmlformats.org/drawingml/2006/main" noGrp="1"/>
+          </p:cNvSpPr>
+          <p:nvPr/>
+        </p:nvSpPr>
+        <p:spPr>
+          <a:xfrm xmlns:a="http://schemas.openxmlformats.org/drawingml/2006/main">
+            <a:off x="9391650" y="6000750"/>
+            <a:ext cx="2247900" cy="381000"/>
+          </a:xfrm>
+          <a:prstGeom xmlns:a="http://schemas.openxmlformats.org/drawingml/2006/main" prst="rect">
+            <a:avLst/>
+          </a:prstGeom>
+          <a:noFill xmlns:a="http://schemas.openxmlformats.org/drawingml/2006/main"/>
+          <a:ln xmlns:a="http://schemas.openxmlformats.org/drawingml/2006/main" w="0">
+            <a:noFill/>
+            <a:prstDash val="solid"/>
+          </a:ln>
+        </p:spPr>
+        <p:txBody>
+          <a:bodyPr xmlns:a="http://schemas.openxmlformats.org/drawingml/2006/main" anchor="t"/>
+          <a:lstStyle xmlns:a="http://schemas.openxmlformats.org/drawingml/2006/main"/>
+          <a:p xmlns:a="http://schemas.openxmlformats.org/drawingml/2006/main">
+            <a:pPr algn="ctr">
+              <a:defRPr sz="1050" b="1">
+                <a:solidFill>
+                  <a:srgbClr val="24364B"/>
+                </a:solidFill>
+              </a:defRPr>
+            </a:pPr>
+            <a:r>
+              <a:rPr sz="1050" b="1">
+                <a:solidFill>
+                  <a:srgbClr val="24364B"/>
+                </a:solidFill>
+              </a:rPr>
+              <a:t>The sign and volatility state work better together than either alone in TRAIN.</a:t>
+            </a:r>
+          </a:p>
+        </p:txBody>
+      </p:sp>
+    </p:spTree>
+    <p:extLst>
+      <p:ext uri="{BB962C8B-B14F-4D97-AF65-F5344CB8AC3E}">
+        <p14:creationId xmlns:p14="http://schemas.microsoft.com/office/powerpoint/2010/main" val="758190428"/>
       </p:ext>
     </p:extLst>
   </p:cSld>
@@ -6788,7 +10719,7 @@
           <p:cNvPr id="23" name="">
             <a:extLst xmlns:a="http://schemas.openxmlformats.org/drawingml/2006/main">
               <a:ext uri="{FF2B5EF4-FFF2-40B4-BE49-F238E27FC236}">
-                <a16:creationId xmlns:a16="http://schemas.microsoft.com/office/drawing/2014/main" id="{F7A1BE34-DBAE-4F78-91AF-5B21DDCED7E5}"/>
+                <a16:creationId xmlns:a16="http://schemas.microsoft.com/office/drawing/2014/main" id="{021B8F3D-8E49-4497-B87B-65E25198C509}"/>
               </a:ext>
             </a:extLst>
           </p:cNvPr>
@@ -6838,7 +10769,7 @@
           <p:cNvPr id="2" name="">
             <a:extLst xmlns:a="http://schemas.openxmlformats.org/drawingml/2006/main">
               <a:ext uri="{FF2B5EF4-FFF2-40B4-BE49-F238E27FC236}">
-                <a16:creationId xmlns:a16="http://schemas.microsoft.com/office/drawing/2014/main" id="{744A6DDF-16A9-4915-B232-D7A935DA57E0}"/>
+                <a16:creationId xmlns:a16="http://schemas.microsoft.com/office/drawing/2014/main" id="{7A68878E-E243-4308-A905-798FCD38BBF6}"/>
               </a:ext>
             </a:extLst>
           </p:cNvPr>
@@ -6888,7 +10819,7 @@
           <p:cNvPr id="3" name="">
             <a:extLst xmlns:a="http://schemas.openxmlformats.org/drawingml/2006/main">
               <a:ext uri="{FF2B5EF4-FFF2-40B4-BE49-F238E27FC236}">
-                <a16:creationId xmlns:a16="http://schemas.microsoft.com/office/drawing/2014/main" id="{E25DF2F7-F7CA-4272-8F0E-35EF5776CA10}"/>
+                <a16:creationId xmlns:a16="http://schemas.microsoft.com/office/drawing/2014/main" id="{7FFC82AA-CF59-43BF-B59A-1D2446AD5CB0}"/>
               </a:ext>
             </a:extLst>
           </p:cNvPr>
@@ -6921,7 +10852,7 @@
           <p:cNvPr id="4" name="">
             <a:extLst xmlns:a="http://schemas.openxmlformats.org/drawingml/2006/main">
               <a:ext uri="{FF2B5EF4-FFF2-40B4-BE49-F238E27FC236}">
-                <a16:creationId xmlns:a16="http://schemas.microsoft.com/office/drawing/2014/main" id="{77EA3093-4569-43F2-9A3D-8C1325A10ECC}"/>
+                <a16:creationId xmlns:a16="http://schemas.microsoft.com/office/drawing/2014/main" id="{1E2AEB22-FF7C-4E27-A25C-1080081F36C7}"/>
               </a:ext>
             </a:extLst>
           </p:cNvPr>
@@ -6971,7 +10902,7 @@
           <p:cNvPr id="5" name="">
             <a:extLst xmlns:a="http://schemas.openxmlformats.org/drawingml/2006/main">
               <a:ext uri="{FF2B5EF4-FFF2-40B4-BE49-F238E27FC236}">
-                <a16:creationId xmlns:a16="http://schemas.microsoft.com/office/drawing/2014/main" id="{715E0A9A-E68F-4CCB-8B35-53DED3CDB794}"/>
+                <a16:creationId xmlns:a16="http://schemas.microsoft.com/office/drawing/2014/main" id="{46B46644-B0F4-42BB-9338-9CE0CFF8FB92}"/>
               </a:ext>
             </a:extLst>
           </p:cNvPr>
@@ -7021,7 +10952,7 @@
           <p:cNvPr id="6" name="">
             <a:extLst xmlns:a="http://schemas.openxmlformats.org/drawingml/2006/main">
               <a:ext uri="{FF2B5EF4-FFF2-40B4-BE49-F238E27FC236}">
-                <a16:creationId xmlns:a16="http://schemas.microsoft.com/office/drawing/2014/main" id="{94DA2192-3820-4387-8B34-78EDF1AC9EC0}"/>
+                <a16:creationId xmlns:a16="http://schemas.microsoft.com/office/drawing/2014/main" id="{72747313-3B64-4B81-BF15-E4B8167B272B}"/>
               </a:ext>
             </a:extLst>
           </p:cNvPr>
@@ -7054,7 +10985,7 @@
           <p:cNvPr id="7" name="">
             <a:extLst xmlns:a="http://schemas.openxmlformats.org/drawingml/2006/main">
               <a:ext uri="{FF2B5EF4-FFF2-40B4-BE49-F238E27FC236}">
-                <a16:creationId xmlns:a16="http://schemas.microsoft.com/office/drawing/2014/main" id="{16BC4A51-609F-4BFF-92FE-84C3BBE3B29F}"/>
+                <a16:creationId xmlns:a16="http://schemas.microsoft.com/office/drawing/2014/main" id="{23A648D8-D186-4856-85FF-48F4DFD00E75}"/>
               </a:ext>
             </a:extLst>
           </p:cNvPr>
@@ -7104,7 +11035,7 @@
           <p:cNvPr id="8" name="">
             <a:extLst xmlns:a="http://schemas.openxmlformats.org/drawingml/2006/main">
               <a:ext uri="{FF2B5EF4-FFF2-40B4-BE49-F238E27FC236}">
-                <a16:creationId xmlns:a16="http://schemas.microsoft.com/office/drawing/2014/main" id="{E1DCE793-A58F-423A-901B-2C22EA1084CF}"/>
+                <a16:creationId xmlns:a16="http://schemas.microsoft.com/office/drawing/2014/main" id="{C7125655-CA33-4480-BAD7-0642B2686728}"/>
               </a:ext>
             </a:extLst>
           </p:cNvPr>
@@ -7137,7 +11068,7 @@
           <p:cNvPr id="9" name="">
             <a:extLst xmlns:a="http://schemas.openxmlformats.org/drawingml/2006/main">
               <a:ext uri="{FF2B5EF4-FFF2-40B4-BE49-F238E27FC236}">
-                <a16:creationId xmlns:a16="http://schemas.microsoft.com/office/drawing/2014/main" id="{172FD48F-CE17-4325-81A7-75B2D59764A4}"/>
+                <a16:creationId xmlns:a16="http://schemas.microsoft.com/office/drawing/2014/main" id="{7BFF0B6F-E60F-41D3-B876-B83AB132548F}"/>
               </a:ext>
             </a:extLst>
           </p:cNvPr>
@@ -7187,7 +11118,7 @@
           <p:cNvPr id="10" name="">
             <a:extLst xmlns:a="http://schemas.openxmlformats.org/drawingml/2006/main">
               <a:ext uri="{FF2B5EF4-FFF2-40B4-BE49-F238E27FC236}">
-                <a16:creationId xmlns:a16="http://schemas.microsoft.com/office/drawing/2014/main" id="{123BAAE4-9A95-40E2-966C-B70698576F83}"/>
+                <a16:creationId xmlns:a16="http://schemas.microsoft.com/office/drawing/2014/main" id="{6A520738-1644-4440-91CC-32A7200A8F6A}"/>
               </a:ext>
             </a:extLst>
           </p:cNvPr>
@@ -7220,7 +11151,7 @@
           <p:cNvPr id="11" name="">
             <a:extLst xmlns:a="http://schemas.openxmlformats.org/drawingml/2006/main">
               <a:ext uri="{FF2B5EF4-FFF2-40B4-BE49-F238E27FC236}">
-                <a16:creationId xmlns:a16="http://schemas.microsoft.com/office/drawing/2014/main" id="{E849DB76-A833-4346-81C2-D1B3E02BD03D}"/>
+                <a16:creationId xmlns:a16="http://schemas.microsoft.com/office/drawing/2014/main" id="{6C75B32B-A217-4FF5-8422-12C788A70DBD}"/>
               </a:ext>
             </a:extLst>
           </p:cNvPr>
@@ -7270,7 +11201,7 @@
           <p:cNvPr id="12" name="">
             <a:extLst xmlns:a="http://schemas.openxmlformats.org/drawingml/2006/main">
               <a:ext uri="{FF2B5EF4-FFF2-40B4-BE49-F238E27FC236}">
-                <a16:creationId xmlns:a16="http://schemas.microsoft.com/office/drawing/2014/main" id="{5193A033-C211-4179-A432-F5C0B9D51D03}"/>
+                <a16:creationId xmlns:a16="http://schemas.microsoft.com/office/drawing/2014/main" id="{D0C64286-5E9D-4150-BD39-87EFD4D94615}"/>
               </a:ext>
             </a:extLst>
           </p:cNvPr>
@@ -7303,7 +11234,7 @@
           <p:cNvPr id="13" name="">
             <a:extLst xmlns:a="http://schemas.openxmlformats.org/drawingml/2006/main">
               <a:ext uri="{FF2B5EF4-FFF2-40B4-BE49-F238E27FC236}">
-                <a16:creationId xmlns:a16="http://schemas.microsoft.com/office/drawing/2014/main" id="{290D27D3-AB59-4673-BB19-27AD5EAA3EC7}"/>
+                <a16:creationId xmlns:a16="http://schemas.microsoft.com/office/drawing/2014/main" id="{6F79BE62-DF49-4686-9A7E-4588084093B5}"/>
               </a:ext>
             </a:extLst>
           </p:cNvPr>
@@ -7353,7 +11284,7 @@
           <p:cNvPr id="14" name="">
             <a:extLst xmlns:a="http://schemas.openxmlformats.org/drawingml/2006/main">
               <a:ext uri="{FF2B5EF4-FFF2-40B4-BE49-F238E27FC236}">
-                <a16:creationId xmlns:a16="http://schemas.microsoft.com/office/drawing/2014/main" id="{44D43661-0CB0-4DC8-9241-BCBE1066101B}"/>
+                <a16:creationId xmlns:a16="http://schemas.microsoft.com/office/drawing/2014/main" id="{C28F4AAF-8769-44C9-81A7-229CBE9BE5A3}"/>
               </a:ext>
             </a:extLst>
           </p:cNvPr>
@@ -7386,7 +11317,7 @@
           <p:cNvPr id="15" name="">
             <a:extLst xmlns:a="http://schemas.openxmlformats.org/drawingml/2006/main">
               <a:ext uri="{FF2B5EF4-FFF2-40B4-BE49-F238E27FC236}">
-                <a16:creationId xmlns:a16="http://schemas.microsoft.com/office/drawing/2014/main" id="{D1DE8196-FDA5-44D5-8517-CF6D1A70E13F}"/>
+                <a16:creationId xmlns:a16="http://schemas.microsoft.com/office/drawing/2014/main" id="{BE6041C7-0ACF-4544-924F-15AC20645B41}"/>
               </a:ext>
             </a:extLst>
           </p:cNvPr>
@@ -7436,7 +11367,7 @@
           <p:cNvPr id="16" name="">
             <a:extLst xmlns:a="http://schemas.openxmlformats.org/drawingml/2006/main">
               <a:ext uri="{FF2B5EF4-FFF2-40B4-BE49-F238E27FC236}">
-                <a16:creationId xmlns:a16="http://schemas.microsoft.com/office/drawing/2014/main" id="{BE0D75EA-2C00-4DCE-8B0B-28E13604B7D1}"/>
+                <a16:creationId xmlns:a16="http://schemas.microsoft.com/office/drawing/2014/main" id="{3E3CE7AF-A30B-4CAB-9E12-C2BCA595F603}"/>
               </a:ext>
             </a:extLst>
           </p:cNvPr>
@@ -7469,7 +11400,7 @@
           <p:cNvPr id="17" name="">
             <a:extLst xmlns:a="http://schemas.openxmlformats.org/drawingml/2006/main">
               <a:ext uri="{FF2B5EF4-FFF2-40B4-BE49-F238E27FC236}">
-                <a16:creationId xmlns:a16="http://schemas.microsoft.com/office/drawing/2014/main" id="{93C35575-5DD7-44A7-8751-64A231B50B64}"/>
+                <a16:creationId xmlns:a16="http://schemas.microsoft.com/office/drawing/2014/main" id="{792871F1-EBFA-43FC-80BA-24A18E5BEB5A}"/>
               </a:ext>
             </a:extLst>
           </p:cNvPr>
@@ -7519,7 +11450,7 @@
           <p:cNvPr id="18" name="">
             <a:extLst xmlns:a="http://schemas.openxmlformats.org/drawingml/2006/main">
               <a:ext uri="{FF2B5EF4-FFF2-40B4-BE49-F238E27FC236}">
-                <a16:creationId xmlns:a16="http://schemas.microsoft.com/office/drawing/2014/main" id="{F618C222-F143-4D59-B387-F7C573138AF4}"/>
+                <a16:creationId xmlns:a16="http://schemas.microsoft.com/office/drawing/2014/main" id="{8044997F-2A06-4C75-B06B-4D9EC5D150DE}"/>
               </a:ext>
             </a:extLst>
           </p:cNvPr>
@@ -7552,7 +11483,7 @@
           <p:cNvPr id="19" name="">
             <a:extLst xmlns:a="http://schemas.openxmlformats.org/drawingml/2006/main">
               <a:ext uri="{FF2B5EF4-FFF2-40B4-BE49-F238E27FC236}">
-                <a16:creationId xmlns:a16="http://schemas.microsoft.com/office/drawing/2014/main" id="{4760DAA6-6605-4138-9582-747774B21FAF}"/>
+                <a16:creationId xmlns:a16="http://schemas.microsoft.com/office/drawing/2014/main" id="{6BE0BE4E-4850-4C8C-A8ED-6BCDDE633E01}"/>
               </a:ext>
             </a:extLst>
           </p:cNvPr>
@@ -7602,7 +11533,7 @@
           <p:cNvPr id="20" name="">
             <a:extLst xmlns:a="http://schemas.openxmlformats.org/drawingml/2006/main">
               <a:ext uri="{FF2B5EF4-FFF2-40B4-BE49-F238E27FC236}">
-                <a16:creationId xmlns:a16="http://schemas.microsoft.com/office/drawing/2014/main" id="{20E3804D-4CA3-43E8-8541-46281445CB80}"/>
+                <a16:creationId xmlns:a16="http://schemas.microsoft.com/office/drawing/2014/main" id="{E27DE615-6FBA-48AB-8B05-14A09B6E8AA8}"/>
               </a:ext>
             </a:extLst>
           </p:cNvPr>
@@ -7635,7 +11566,7 @@
           <p:cNvPr id="21" name="">
             <a:extLst xmlns:a="http://schemas.openxmlformats.org/drawingml/2006/main">
               <a:ext uri="{FF2B5EF4-FFF2-40B4-BE49-F238E27FC236}">
-                <a16:creationId xmlns:a16="http://schemas.microsoft.com/office/drawing/2014/main" id="{AD796074-64EC-4796-BECD-6CE35C935945}"/>
+                <a16:creationId xmlns:a16="http://schemas.microsoft.com/office/drawing/2014/main" id="{E66DC162-A318-4DBC-94A3-D8896F58277D}"/>
               </a:ext>
             </a:extLst>
           </p:cNvPr>
@@ -7685,7 +11616,7 @@
           <p:cNvPr id="22" name="">
             <a:extLst xmlns:a="http://schemas.openxmlformats.org/drawingml/2006/main">
               <a:ext uri="{FF2B5EF4-FFF2-40B4-BE49-F238E27FC236}">
-                <a16:creationId xmlns:a16="http://schemas.microsoft.com/office/drawing/2014/main" id="{9F6236A9-2BEC-44FF-B778-91DAE11C9B44}"/>
+                <a16:creationId xmlns:a16="http://schemas.microsoft.com/office/drawing/2014/main" id="{E54ED22F-D085-40A5-BD49-1B5FD8AB24CC}"/>
               </a:ext>
             </a:extLst>
           </p:cNvPr>
@@ -7733,7 +11664,1851 @@
     </p:spTree>
     <p:extLst>
       <p:ext uri="{BB962C8B-B14F-4D97-AF65-F5344CB8AC3E}">
-        <p14:creationId xmlns:p14="http://schemas.microsoft.com/office/powerpoint/2010/main" val="1960002068"/>
+        <p14:creationId xmlns:p14="http://schemas.microsoft.com/office/powerpoint/2010/main" val="40756242"/>
+      </p:ext>
+    </p:extLst>
+  </p:cSld>
+</p:sld>
+</file>
+
+<file path=ppt/slides/slide20.xml><?xml version="1.0" encoding="utf-8"?>
+<p:sld xmlns:p="http://schemas.openxmlformats.org/presentationml/2006/main">
+  <p:cSld>
+    <p:bg>
+      <p:bgPr>
+        <a:solidFill xmlns:a="http://schemas.openxmlformats.org/drawingml/2006/main">
+          <a:srgbClr val="FFFFFF"/>
+        </a:solidFill>
+      </p:bgPr>
+    </p:bg>
+    <p:spTree>
+      <p:nvGrpSpPr>
+        <p:cNvPr id="1" name=""/>
+        <p:cNvGrpSpPr/>
+        <p:nvPr/>
+      </p:nvGrpSpPr>
+      <p:grpSpPr>
+        <a:xfrm xmlns:a="http://schemas.openxmlformats.org/drawingml/2006/main"/>
+      </p:grpSpPr>
+      <p:sp>
+        <p:nvSpPr>
+          <p:cNvPr id="16" name="">
+            <a:extLst xmlns:a="http://schemas.openxmlformats.org/drawingml/2006/main">
+              <a:ext uri="{FF2B5EF4-FFF2-40B4-BE49-F238E27FC236}">
+                <a16:creationId xmlns:a16="http://schemas.microsoft.com/office/drawing/2014/main" id="{5E1EE232-90C3-4385-A82D-58E6BE026FC4}"/>
+              </a:ext>
+            </a:extLst>
+          </p:cNvPr>
+          <p:cNvSpPr>
+            <a:spLocks xmlns:a="http://schemas.openxmlformats.org/drawingml/2006/main" noGrp="1"/>
+          </p:cNvSpPr>
+          <p:nvPr/>
+        </p:nvSpPr>
+        <p:spPr>
+          <a:xfrm xmlns:a="http://schemas.openxmlformats.org/drawingml/2006/main">
+            <a:off x="457200" y="238125"/>
+            <a:ext cx="6191250" cy="190500"/>
+          </a:xfrm>
+          <a:prstGeom xmlns:a="http://schemas.openxmlformats.org/drawingml/2006/main" prst="rect">
+            <a:avLst/>
+          </a:prstGeom>
+          <a:noFill xmlns:a="http://schemas.openxmlformats.org/drawingml/2006/main"/>
+          <a:ln xmlns:a="http://schemas.openxmlformats.org/drawingml/2006/main" w="0">
+            <a:noFill/>
+            <a:prstDash val="solid"/>
+          </a:ln>
+        </p:spPr>
+        <p:txBody>
+          <a:bodyPr xmlns:a="http://schemas.openxmlformats.org/drawingml/2006/main" anchor="t"/>
+          <a:lstStyle xmlns:a="http://schemas.openxmlformats.org/drawingml/2006/main"/>
+          <a:p xmlns:a="http://schemas.openxmlformats.org/drawingml/2006/main">
+            <a:pPr algn="l">
+              <a:defRPr sz="1050" b="1">
+                <a:solidFill>
+                  <a:srgbClr val="667386"/>
+                </a:solidFill>
+              </a:defRPr>
+            </a:pPr>
+            <a:r>
+              <a:rPr sz="1050" b="1">
+                <a:solidFill>
+                  <a:srgbClr val="667386"/>
+                </a:solidFill>
+              </a:rPr>
+              <a:t>OPERATOR HYPOTHESIS LAB · NVDA PROTO-RULES</a:t>
+            </a:r>
+          </a:p>
+        </p:txBody>
+      </p:sp>
+      <p:sp>
+        <p:nvSpPr>
+          <p:cNvPr id="2" name="">
+            <a:extLst xmlns:a="http://schemas.openxmlformats.org/drawingml/2006/main">
+              <a:ext uri="{FF2B5EF4-FFF2-40B4-BE49-F238E27FC236}">
+                <a16:creationId xmlns:a16="http://schemas.microsoft.com/office/drawing/2014/main" id="{929738F4-2966-4AB6-9B0B-A7AF8CC6A89C}"/>
+              </a:ext>
+            </a:extLst>
+          </p:cNvPr>
+          <p:cNvSpPr>
+            <a:spLocks xmlns:a="http://schemas.openxmlformats.org/drawingml/2006/main" noGrp="1"/>
+          </p:cNvSpPr>
+          <p:nvPr/>
+        </p:nvSpPr>
+        <p:spPr>
+          <a:xfrm xmlns:a="http://schemas.openxmlformats.org/drawingml/2006/main">
+            <a:off x="457200" y="523875"/>
+            <a:ext cx="11049000" cy="590550"/>
+          </a:xfrm>
+          <a:prstGeom xmlns:a="http://schemas.openxmlformats.org/drawingml/2006/main" prst="rect">
+            <a:avLst/>
+          </a:prstGeom>
+          <a:noFill xmlns:a="http://schemas.openxmlformats.org/drawingml/2006/main"/>
+          <a:ln xmlns:a="http://schemas.openxmlformats.org/drawingml/2006/main" w="0">
+            <a:noFill/>
+            <a:prstDash val="solid"/>
+          </a:ln>
+        </p:spPr>
+        <p:txBody>
+          <a:bodyPr xmlns:a="http://schemas.openxmlformats.org/drawingml/2006/main" anchor="t"/>
+          <a:lstStyle xmlns:a="http://schemas.openxmlformats.org/drawingml/2006/main"/>
+          <a:p xmlns:a="http://schemas.openxmlformats.org/drawingml/2006/main">
+            <a:pPr algn="l">
+              <a:defRPr sz="2925" b="1">
+                <a:solidFill>
+                  <a:srgbClr val="000000"/>
+                </a:solidFill>
+              </a:defRPr>
+            </a:pPr>
+            <a:r>
+              <a:rPr sz="2925" b="1">
+                <a:solidFill>
+                  <a:srgbClr val="000000"/>
+                </a:solidFill>
+              </a:rPr>
+              <a:t>Calendar slices reveal the burden of one-asset evidence</a:t>
+            </a:r>
+          </a:p>
+        </p:txBody>
+      </p:sp>
+      <p:sp>
+        <p:nvSpPr>
+          <p:cNvPr id="3" name="">
+            <a:extLst xmlns:a="http://schemas.openxmlformats.org/drawingml/2006/main">
+              <a:ext uri="{FF2B5EF4-FFF2-40B4-BE49-F238E27FC236}">
+                <a16:creationId xmlns:a16="http://schemas.microsoft.com/office/drawing/2014/main" id="{61291F25-F84B-4875-8B12-5052D881BC70}"/>
+              </a:ext>
+            </a:extLst>
+          </p:cNvPr>
+          <p:cNvSpPr>
+            <a:spLocks xmlns:a="http://schemas.openxmlformats.org/drawingml/2006/main" noGrp="1"/>
+          </p:cNvSpPr>
+          <p:nvPr/>
+        </p:nvSpPr>
+        <p:spPr>
+          <a:xfrm xmlns:a="http://schemas.openxmlformats.org/drawingml/2006/main">
+            <a:off x="457200" y="1219200"/>
+            <a:ext cx="11277600" cy="19050"/>
+          </a:xfrm>
+          <a:prstGeom xmlns:a="http://schemas.openxmlformats.org/drawingml/2006/main" prst="rect">
+            <a:avLst/>
+          </a:prstGeom>
+          <a:solidFill xmlns:a="http://schemas.openxmlformats.org/drawingml/2006/main">
+            <a:srgbClr val="B8BCC4"/>
+          </a:solidFill>
+          <a:ln xmlns:a="http://schemas.openxmlformats.org/drawingml/2006/main" w="0">
+            <a:solidFill>
+              <a:srgbClr val="B8BCC4"/>
+            </a:solidFill>
+            <a:prstDash val="solid"/>
+          </a:ln>
+        </p:spPr>
+      </p:sp>
+      <p:sp>
+        <p:nvSpPr>
+          <p:cNvPr id="4" name="">
+            <a:extLst xmlns:a="http://schemas.openxmlformats.org/drawingml/2006/main">
+              <a:ext uri="{FF2B5EF4-FFF2-40B4-BE49-F238E27FC236}">
+                <a16:creationId xmlns:a16="http://schemas.microsoft.com/office/drawing/2014/main" id="{587344A4-969D-47E0-8EB6-E9C8BB77B88D}"/>
+              </a:ext>
+            </a:extLst>
+          </p:cNvPr>
+          <p:cNvSpPr>
+            <a:spLocks xmlns:a="http://schemas.openxmlformats.org/drawingml/2006/main" noGrp="1"/>
+          </p:cNvSpPr>
+          <p:nvPr/>
+        </p:nvSpPr>
+        <p:spPr>
+          <a:xfrm xmlns:a="http://schemas.openxmlformats.org/drawingml/2006/main">
+            <a:off x="457200" y="6515100"/>
+            <a:ext cx="7048500" cy="161925"/>
+          </a:xfrm>
+          <a:prstGeom xmlns:a="http://schemas.openxmlformats.org/drawingml/2006/main" prst="rect">
+            <a:avLst/>
+          </a:prstGeom>
+          <a:noFill xmlns:a="http://schemas.openxmlformats.org/drawingml/2006/main"/>
+          <a:ln xmlns:a="http://schemas.openxmlformats.org/drawingml/2006/main" w="0">
+            <a:noFill/>
+            <a:prstDash val="solid"/>
+          </a:ln>
+        </p:spPr>
+        <p:txBody>
+          <a:bodyPr xmlns:a="http://schemas.openxmlformats.org/drawingml/2006/main" anchor="t"/>
+          <a:lstStyle xmlns:a="http://schemas.openxmlformats.org/drawingml/2006/main"/>
+          <a:p xmlns:a="http://schemas.openxmlformats.org/drawingml/2006/main">
+            <a:pPr algn="l">
+              <a:defRPr sz="900" b="0">
+                <a:solidFill>
+                  <a:srgbClr val="667386"/>
+                </a:solidFill>
+              </a:defRPr>
+            </a:pPr>
+            <a:r>
+              <a:rPr sz="900" b="0">
+                <a:solidFill>
+                  <a:srgbClr val="667386"/>
+                </a:solidFill>
+              </a:rPr>
+              <a:t>Descriptive research · adjusted bars · frozen 2018–2023 window</a:t>
+            </a:r>
+          </a:p>
+        </p:txBody>
+      </p:sp>
+      <p:sp>
+        <p:nvSpPr>
+          <p:cNvPr id="5" name="">
+            <a:extLst xmlns:a="http://schemas.openxmlformats.org/drawingml/2006/main">
+              <a:ext uri="{FF2B5EF4-FFF2-40B4-BE49-F238E27FC236}">
+                <a16:creationId xmlns:a16="http://schemas.microsoft.com/office/drawing/2014/main" id="{9C377BF4-2ECF-44DD-B7EA-30A908C67143}"/>
+              </a:ext>
+            </a:extLst>
+          </p:cNvPr>
+          <p:cNvSpPr>
+            <a:spLocks xmlns:a="http://schemas.openxmlformats.org/drawingml/2006/main" noGrp="1"/>
+          </p:cNvSpPr>
+          <p:nvPr/>
+        </p:nvSpPr>
+        <p:spPr>
+          <a:xfrm xmlns:a="http://schemas.openxmlformats.org/drawingml/2006/main">
+            <a:off x="10858500" y="6496050"/>
+            <a:ext cx="876300" cy="171450"/>
+          </a:xfrm>
+          <a:prstGeom xmlns:a="http://schemas.openxmlformats.org/drawingml/2006/main" prst="rect">
+            <a:avLst/>
+          </a:prstGeom>
+          <a:noFill xmlns:a="http://schemas.openxmlformats.org/drawingml/2006/main"/>
+          <a:ln xmlns:a="http://schemas.openxmlformats.org/drawingml/2006/main" w="0">
+            <a:noFill/>
+            <a:prstDash val="solid"/>
+          </a:ln>
+        </p:spPr>
+        <p:txBody>
+          <a:bodyPr xmlns:a="http://schemas.openxmlformats.org/drawingml/2006/main" anchor="t"/>
+          <a:lstStyle xmlns:a="http://schemas.openxmlformats.org/drawingml/2006/main"/>
+          <a:p xmlns:a="http://schemas.openxmlformats.org/drawingml/2006/main">
+            <a:pPr algn="r">
+              <a:defRPr sz="900" b="0">
+                <a:solidFill>
+                  <a:srgbClr val="667386"/>
+                </a:solidFill>
+              </a:defRPr>
+            </a:pPr>
+            <a:r>
+              <a:rPr sz="900" b="0">
+                <a:solidFill>
+                  <a:srgbClr val="667386"/>
+                </a:solidFill>
+              </a:rPr>
+              <a:t>20</a:t>
+            </a:r>
+          </a:p>
+        </p:txBody>
+      </p:sp>
+      <p:pic>
+        <p:nvPicPr>
+          <p:cNvPr id="21" name=""/>
+          <p:cNvPicPr>
+            <a:picLocks xmlns:a="http://schemas.openxmlformats.org/drawingml/2006/main" noChangeAspect="1"/>
+          </p:cNvPicPr>
+          <p:nvPr/>
+        </p:nvPicPr>
+        <p:blipFill>
+          <a:blip xmlns:r="http://schemas.openxmlformats.org/officeDocument/2006/relationships" xmlns:a="http://schemas.openxmlformats.org/drawingml/2006/main" r:embed="R4ea7f42a2d2e4361"/>
+          <a:stretch xmlns:a="http://schemas.openxmlformats.org/drawingml/2006/main"/>
+        </p:blipFill>
+        <p:spPr>
+          <a:xfrm xmlns:a="http://schemas.openxmlformats.org/drawingml/2006/main">
+            <a:off x="488950" y="1390650"/>
+            <a:ext cx="7937500" cy="4762500"/>
+          </a:xfrm>
+          <a:prstGeom xmlns:a="http://schemas.openxmlformats.org/drawingml/2006/main" prst="rect">
+            <a:avLst/>
+          </a:prstGeom>
+        </p:spPr>
+      </p:pic>
+      <p:sp>
+        <p:nvSpPr>
+          <p:cNvPr id="7" name="">
+            <a:extLst xmlns:a="http://schemas.openxmlformats.org/drawingml/2006/main">
+              <a:ext uri="{FF2B5EF4-FFF2-40B4-BE49-F238E27FC236}">
+                <a16:creationId xmlns:a16="http://schemas.microsoft.com/office/drawing/2014/main" id="{996735B2-F4FF-4925-93F4-F5FD2734DE7C}"/>
+              </a:ext>
+            </a:extLst>
+          </p:cNvPr>
+          <p:cNvSpPr>
+            <a:spLocks xmlns:a="http://schemas.openxmlformats.org/drawingml/2006/main" noGrp="1"/>
+          </p:cNvSpPr>
+          <p:nvPr/>
+        </p:nvSpPr>
+        <p:spPr>
+          <a:xfrm xmlns:a="http://schemas.openxmlformats.org/drawingml/2006/main">
+            <a:off x="8724900" y="1543050"/>
+            <a:ext cx="2914650" cy="4248150"/>
+          </a:xfrm>
+          <a:prstGeom xmlns:a="http://schemas.openxmlformats.org/drawingml/2006/main" prst="rect">
+            <a:avLst/>
+          </a:prstGeom>
+          <a:solidFill xmlns:a="http://schemas.openxmlformats.org/drawingml/2006/main">
+            <a:srgbClr val="F3F5F7"/>
+          </a:solidFill>
+          <a:ln xmlns:a="http://schemas.openxmlformats.org/drawingml/2006/main" w="0">
+            <a:solidFill>
+              <a:srgbClr val="F3F5F7"/>
+            </a:solidFill>
+            <a:prstDash val="solid"/>
+          </a:ln>
+        </p:spPr>
+      </p:sp>
+      <p:sp>
+        <p:nvSpPr>
+          <p:cNvPr id="8" name="">
+            <a:extLst xmlns:a="http://schemas.openxmlformats.org/drawingml/2006/main">
+              <a:ext uri="{FF2B5EF4-FFF2-40B4-BE49-F238E27FC236}">
+                <a16:creationId xmlns:a16="http://schemas.microsoft.com/office/drawing/2014/main" id="{CEFACA60-0F4C-40F2-B1F6-0E8B9A613D61}"/>
+              </a:ext>
+            </a:extLst>
+          </p:cNvPr>
+          <p:cNvSpPr>
+            <a:spLocks xmlns:a="http://schemas.openxmlformats.org/drawingml/2006/main" noGrp="1"/>
+          </p:cNvSpPr>
+          <p:nvPr/>
+        </p:nvSpPr>
+        <p:spPr>
+          <a:xfrm xmlns:a="http://schemas.openxmlformats.org/drawingml/2006/main">
+            <a:off x="8991600" y="1809750"/>
+            <a:ext cx="2381250" cy="285750"/>
+          </a:xfrm>
+          <a:prstGeom xmlns:a="http://schemas.openxmlformats.org/drawingml/2006/main" prst="rect">
+            <a:avLst/>
+          </a:prstGeom>
+          <a:noFill xmlns:a="http://schemas.openxmlformats.org/drawingml/2006/main"/>
+          <a:ln xmlns:a="http://schemas.openxmlformats.org/drawingml/2006/main" w="0">
+            <a:noFill/>
+            <a:prstDash val="solid"/>
+          </a:ln>
+        </p:spPr>
+        <p:txBody>
+          <a:bodyPr xmlns:a="http://schemas.openxmlformats.org/drawingml/2006/main" anchor="t"/>
+          <a:lstStyle xmlns:a="http://schemas.openxmlformats.org/drawingml/2006/main"/>
+          <a:p xmlns:a="http://schemas.openxmlformats.org/drawingml/2006/main">
+            <a:pPr algn="l">
+              <a:defRPr sz="1800" b="1">
+                <a:solidFill>
+                  <a:srgbClr val="000000"/>
+                </a:solidFill>
+              </a:defRPr>
+            </a:pPr>
+            <a:r>
+              <a:rPr sz="1800" b="1">
+                <a:solidFill>
+                  <a:srgbClr val="000000"/>
+                </a:solidFill>
+              </a:rPr>
+              <a:t>What matters</a:t>
+            </a:r>
+          </a:p>
+        </p:txBody>
+      </p:sp>
+      <p:sp>
+        <p:nvSpPr>
+          <p:cNvPr id="9" name="">
+            <a:extLst xmlns:a="http://schemas.openxmlformats.org/drawingml/2006/main">
+              <a:ext uri="{FF2B5EF4-FFF2-40B4-BE49-F238E27FC236}">
+                <a16:creationId xmlns:a16="http://schemas.microsoft.com/office/drawing/2014/main" id="{75EC3075-2EFF-45C4-AB53-01F344BBA516}"/>
+              </a:ext>
+            </a:extLst>
+          </p:cNvPr>
+          <p:cNvSpPr>
+            <a:spLocks xmlns:a="http://schemas.openxmlformats.org/drawingml/2006/main" noGrp="1"/>
+          </p:cNvSpPr>
+          <p:nvPr/>
+        </p:nvSpPr>
+        <p:spPr>
+          <a:xfrm xmlns:a="http://schemas.openxmlformats.org/drawingml/2006/main">
+            <a:off x="8991600" y="2486025"/>
+            <a:ext cx="85725" cy="85725"/>
+          </a:xfrm>
+          <a:prstGeom xmlns:a="http://schemas.openxmlformats.org/drawingml/2006/main" prst="rect">
+            <a:avLst/>
+          </a:prstGeom>
+          <a:solidFill xmlns:a="http://schemas.openxmlformats.org/drawingml/2006/main">
+            <a:srgbClr val="B44738"/>
+          </a:solidFill>
+          <a:ln xmlns:a="http://schemas.openxmlformats.org/drawingml/2006/main" w="0">
+            <a:solidFill>
+              <a:srgbClr val="B44738"/>
+            </a:solidFill>
+            <a:prstDash val="solid"/>
+          </a:ln>
+        </p:spPr>
+      </p:sp>
+      <p:sp>
+        <p:nvSpPr>
+          <p:cNvPr id="10" name="">
+            <a:extLst xmlns:a="http://schemas.openxmlformats.org/drawingml/2006/main">
+              <a:ext uri="{FF2B5EF4-FFF2-40B4-BE49-F238E27FC236}">
+                <a16:creationId xmlns:a16="http://schemas.microsoft.com/office/drawing/2014/main" id="{76908B80-A2C9-4E0D-824E-E6BBE70BEF69}"/>
+              </a:ext>
+            </a:extLst>
+          </p:cNvPr>
+          <p:cNvSpPr>
+            <a:spLocks xmlns:a="http://schemas.openxmlformats.org/drawingml/2006/main" noGrp="1"/>
+          </p:cNvSpPr>
+          <p:nvPr/>
+        </p:nvSpPr>
+        <p:spPr>
+          <a:xfrm xmlns:a="http://schemas.openxmlformats.org/drawingml/2006/main">
+            <a:off x="9220200" y="2400300"/>
+            <a:ext cx="2152650" cy="723900"/>
+          </a:xfrm>
+          <a:prstGeom xmlns:a="http://schemas.openxmlformats.org/drawingml/2006/main" prst="rect">
+            <a:avLst/>
+          </a:prstGeom>
+          <a:noFill xmlns:a="http://schemas.openxmlformats.org/drawingml/2006/main"/>
+          <a:ln xmlns:a="http://schemas.openxmlformats.org/drawingml/2006/main" w="0">
+            <a:noFill/>
+            <a:prstDash val="solid"/>
+          </a:ln>
+        </p:spPr>
+        <p:txBody>
+          <a:bodyPr xmlns:a="http://schemas.openxmlformats.org/drawingml/2006/main" anchor="t"/>
+          <a:lstStyle xmlns:a="http://schemas.openxmlformats.org/drawingml/2006/main"/>
+          <a:p xmlns:a="http://schemas.openxmlformats.org/drawingml/2006/main">
+            <a:pPr algn="l">
+              <a:defRPr sz="1425" b="0">
+                <a:solidFill>
+                  <a:srgbClr val="24364B"/>
+                </a:solidFill>
+              </a:defRPr>
+            </a:pPr>
+            <a:r>
+              <a:rPr sz="1425" b="0">
+                <a:solidFill>
+                  <a:srgbClr val="24364B"/>
+                </a:solidFill>
+              </a:rPr>
+              <a:t>Continuation suffers a concentrated 2022 failure.</a:t>
+            </a:r>
+          </a:p>
+        </p:txBody>
+      </p:sp>
+      <p:sp>
+        <p:nvSpPr>
+          <p:cNvPr id="11" name="">
+            <a:extLst xmlns:a="http://schemas.openxmlformats.org/drawingml/2006/main">
+              <a:ext uri="{FF2B5EF4-FFF2-40B4-BE49-F238E27FC236}">
+                <a16:creationId xmlns:a16="http://schemas.microsoft.com/office/drawing/2014/main" id="{88B60C8C-C634-4673-B8B3-819391B35A62}"/>
+              </a:ext>
+            </a:extLst>
+          </p:cNvPr>
+          <p:cNvSpPr>
+            <a:spLocks xmlns:a="http://schemas.openxmlformats.org/drawingml/2006/main" noGrp="1"/>
+          </p:cNvSpPr>
+          <p:nvPr/>
+        </p:nvSpPr>
+        <p:spPr>
+          <a:xfrm xmlns:a="http://schemas.openxmlformats.org/drawingml/2006/main">
+            <a:off x="8991600" y="3381375"/>
+            <a:ext cx="85725" cy="85725"/>
+          </a:xfrm>
+          <a:prstGeom xmlns:a="http://schemas.openxmlformats.org/drawingml/2006/main" prst="rect">
+            <a:avLst/>
+          </a:prstGeom>
+          <a:solidFill xmlns:a="http://schemas.openxmlformats.org/drawingml/2006/main">
+            <a:srgbClr val="14866D"/>
+          </a:solidFill>
+          <a:ln xmlns:a="http://schemas.openxmlformats.org/drawingml/2006/main" w="0">
+            <a:solidFill>
+              <a:srgbClr val="14866D"/>
+            </a:solidFill>
+            <a:prstDash val="solid"/>
+          </a:ln>
+        </p:spPr>
+      </p:sp>
+      <p:sp>
+        <p:nvSpPr>
+          <p:cNvPr id="12" name="">
+            <a:extLst xmlns:a="http://schemas.openxmlformats.org/drawingml/2006/main">
+              <a:ext uri="{FF2B5EF4-FFF2-40B4-BE49-F238E27FC236}">
+                <a16:creationId xmlns:a16="http://schemas.microsoft.com/office/drawing/2014/main" id="{6B47EB92-40A6-4DC5-B3EF-89CAD5A30BB5}"/>
+              </a:ext>
+            </a:extLst>
+          </p:cNvPr>
+          <p:cNvSpPr>
+            <a:spLocks xmlns:a="http://schemas.openxmlformats.org/drawingml/2006/main" noGrp="1"/>
+          </p:cNvSpPr>
+          <p:nvPr/>
+        </p:nvSpPr>
+        <p:spPr>
+          <a:xfrm xmlns:a="http://schemas.openxmlformats.org/drawingml/2006/main">
+            <a:off x="9220200" y="3295650"/>
+            <a:ext cx="2152650" cy="914400"/>
+          </a:xfrm>
+          <a:prstGeom xmlns:a="http://schemas.openxmlformats.org/drawingml/2006/main" prst="rect">
+            <a:avLst/>
+          </a:prstGeom>
+          <a:noFill xmlns:a="http://schemas.openxmlformats.org/drawingml/2006/main"/>
+          <a:ln xmlns:a="http://schemas.openxmlformats.org/drawingml/2006/main" w="0">
+            <a:noFill/>
+            <a:prstDash val="solid"/>
+          </a:ln>
+        </p:spPr>
+        <p:txBody>
+          <a:bodyPr xmlns:a="http://schemas.openxmlformats.org/drawingml/2006/main" anchor="t"/>
+          <a:lstStyle xmlns:a="http://schemas.openxmlformats.org/drawingml/2006/main"/>
+          <a:p xmlns:a="http://schemas.openxmlformats.org/drawingml/2006/main">
+            <a:pPr algn="l">
+              <a:defRPr sz="1425" b="0">
+                <a:solidFill>
+                  <a:srgbClr val="24364B"/>
+                </a:solidFill>
+              </a:defRPr>
+            </a:pPr>
+            <a:r>
+              <a:rPr sz="1425" b="0">
+                <a:solidFill>
+                  <a:srgbClr val="24364B"/>
+                </a:solidFill>
+              </a:rPr>
+              <a:t>Rebound is positive in five of six years, but 2018 is approximately flat.</a:t>
+            </a:r>
+          </a:p>
+        </p:txBody>
+      </p:sp>
+      <p:sp>
+        <p:nvSpPr>
+          <p:cNvPr id="13" name="">
+            <a:extLst xmlns:a="http://schemas.openxmlformats.org/drawingml/2006/main">
+              <a:ext uri="{FF2B5EF4-FFF2-40B4-BE49-F238E27FC236}">
+                <a16:creationId xmlns:a16="http://schemas.microsoft.com/office/drawing/2014/main" id="{9BA06AC8-A9EF-41D6-BF9B-93CD3B4F4F34}"/>
+              </a:ext>
+            </a:extLst>
+          </p:cNvPr>
+          <p:cNvSpPr>
+            <a:spLocks xmlns:a="http://schemas.openxmlformats.org/drawingml/2006/main" noGrp="1"/>
+          </p:cNvSpPr>
+          <p:nvPr/>
+        </p:nvSpPr>
+        <p:spPr>
+          <a:xfrm xmlns:a="http://schemas.openxmlformats.org/drawingml/2006/main">
+            <a:off x="8991600" y="4486275"/>
+            <a:ext cx="85725" cy="85725"/>
+          </a:xfrm>
+          <a:prstGeom xmlns:a="http://schemas.openxmlformats.org/drawingml/2006/main" prst="rect">
+            <a:avLst/>
+          </a:prstGeom>
+          <a:solidFill xmlns:a="http://schemas.openxmlformats.org/drawingml/2006/main">
+            <a:srgbClr val="A86B00"/>
+          </a:solidFill>
+          <a:ln xmlns:a="http://schemas.openxmlformats.org/drawingml/2006/main" w="0">
+            <a:solidFill>
+              <a:srgbClr val="A86B00"/>
+            </a:solidFill>
+            <a:prstDash val="solid"/>
+          </a:ln>
+        </p:spPr>
+      </p:sp>
+      <p:sp>
+        <p:nvSpPr>
+          <p:cNvPr id="14" name="">
+            <a:extLst xmlns:a="http://schemas.openxmlformats.org/drawingml/2006/main">
+              <a:ext uri="{FF2B5EF4-FFF2-40B4-BE49-F238E27FC236}">
+                <a16:creationId xmlns:a16="http://schemas.microsoft.com/office/drawing/2014/main" id="{2D70C128-0687-48B9-8A31-11B155AA4E09}"/>
+              </a:ext>
+            </a:extLst>
+          </p:cNvPr>
+          <p:cNvSpPr>
+            <a:spLocks xmlns:a="http://schemas.openxmlformats.org/drawingml/2006/main" noGrp="1"/>
+          </p:cNvSpPr>
+          <p:nvPr/>
+        </p:nvSpPr>
+        <p:spPr>
+          <a:xfrm xmlns:a="http://schemas.openxmlformats.org/drawingml/2006/main">
+            <a:off x="9220200" y="4400550"/>
+            <a:ext cx="2152650" cy="723900"/>
+          </a:xfrm>
+          <a:prstGeom xmlns:a="http://schemas.openxmlformats.org/drawingml/2006/main" prst="rect">
+            <a:avLst/>
+          </a:prstGeom>
+          <a:noFill xmlns:a="http://schemas.openxmlformats.org/drawingml/2006/main"/>
+          <a:ln xmlns:a="http://schemas.openxmlformats.org/drawingml/2006/main" w="0">
+            <a:noFill/>
+            <a:prstDash val="solid"/>
+          </a:ln>
+        </p:spPr>
+        <p:txBody>
+          <a:bodyPr xmlns:a="http://schemas.openxmlformats.org/drawingml/2006/main" anchor="t"/>
+          <a:lstStyle xmlns:a="http://schemas.openxmlformats.org/drawingml/2006/main"/>
+          <a:p xmlns:a="http://schemas.openxmlformats.org/drawingml/2006/main">
+            <a:pPr algn="l">
+              <a:defRPr sz="1425" b="0">
+                <a:solidFill>
+                  <a:srgbClr val="24364B"/>
+                </a:solidFill>
+              </a:defRPr>
+            </a:pPr>
+            <a:r>
+              <a:rPr sz="1425" b="0">
+                <a:solidFill>
+                  <a:srgbClr val="24364B"/>
+                </a:solidFill>
+              </a:rPr>
+              <a:t>Only 3–6 rebound trades appear in any year.</a:t>
+            </a:r>
+          </a:p>
+        </p:txBody>
+      </p:sp>
+      <p:sp>
+        <p:nvSpPr>
+          <p:cNvPr id="15" name="">
+            <a:extLst xmlns:a="http://schemas.openxmlformats.org/drawingml/2006/main">
+              <a:ext uri="{FF2B5EF4-FFF2-40B4-BE49-F238E27FC236}">
+                <a16:creationId xmlns:a16="http://schemas.microsoft.com/office/drawing/2014/main" id="{8C6E332A-F7D2-4107-A297-82F8F6CBD1D8}"/>
+              </a:ext>
+            </a:extLst>
+          </p:cNvPr>
+          <p:cNvSpPr>
+            <a:spLocks xmlns:a="http://schemas.openxmlformats.org/drawingml/2006/main" noGrp="1"/>
+          </p:cNvSpPr>
+          <p:nvPr/>
+        </p:nvSpPr>
+        <p:spPr>
+          <a:xfrm xmlns:a="http://schemas.openxmlformats.org/drawingml/2006/main">
+            <a:off x="8991600" y="5276850"/>
+            <a:ext cx="2381250" cy="552450"/>
+          </a:xfrm>
+          <a:prstGeom xmlns:a="http://schemas.openxmlformats.org/drawingml/2006/main" prst="rect">
+            <a:avLst/>
+          </a:prstGeom>
+          <a:noFill xmlns:a="http://schemas.openxmlformats.org/drawingml/2006/main"/>
+          <a:ln xmlns:a="http://schemas.openxmlformats.org/drawingml/2006/main" w="0">
+            <a:noFill/>
+            <a:prstDash val="solid"/>
+          </a:ln>
+        </p:spPr>
+        <p:txBody>
+          <a:bodyPr xmlns:a="http://schemas.openxmlformats.org/drawingml/2006/main" anchor="t"/>
+          <a:lstStyle xmlns:a="http://schemas.openxmlformats.org/drawingml/2006/main"/>
+          <a:p xmlns:a="http://schemas.openxmlformats.org/drawingml/2006/main">
+            <a:pPr algn="l">
+              <a:defRPr sz="1125" b="1">
+                <a:solidFill>
+                  <a:srgbClr val="24364B"/>
+                </a:solidFill>
+              </a:defRPr>
+            </a:pPr>
+            <a:r>
+              <a:rPr sz="1125" b="1">
+                <a:solidFill>
+                  <a:srgbClr val="24364B"/>
+                </a:solidFill>
+              </a:rPr>
+              <a:t>Years are context, not independent replications. The next honest evidence must come from untouched time.</a:t>
+            </a:r>
+          </a:p>
+        </p:txBody>
+      </p:sp>
+    </p:spTree>
+    <p:extLst>
+      <p:ext uri="{BB962C8B-B14F-4D97-AF65-F5344CB8AC3E}">
+        <p14:creationId xmlns:p14="http://schemas.microsoft.com/office/powerpoint/2010/main" val="1468126465"/>
+      </p:ext>
+    </p:extLst>
+  </p:cSld>
+</p:sld>
+</file>
+
+<file path=ppt/slides/slide21.xml><?xml version="1.0" encoding="utf-8"?>
+<p:sld xmlns:p="http://schemas.openxmlformats.org/presentationml/2006/main">
+  <p:cSld>
+    <p:bg>
+      <p:bgPr>
+        <a:solidFill xmlns:a="http://schemas.openxmlformats.org/drawingml/2006/main">
+          <a:srgbClr val="FFFFFF"/>
+        </a:solidFill>
+      </p:bgPr>
+    </p:bg>
+    <p:spTree>
+      <p:nvGrpSpPr>
+        <p:cNvPr id="1" name=""/>
+        <p:cNvGrpSpPr/>
+        <p:nvPr/>
+      </p:nvGrpSpPr>
+      <p:grpSpPr>
+        <a:xfrm xmlns:a="http://schemas.openxmlformats.org/drawingml/2006/main"/>
+      </p:grpSpPr>
+      <p:sp>
+        <p:nvSpPr>
+          <p:cNvPr id="7" name="">
+            <a:extLst xmlns:a="http://schemas.openxmlformats.org/drawingml/2006/main">
+              <a:ext uri="{FF2B5EF4-FFF2-40B4-BE49-F238E27FC236}">
+                <a16:creationId xmlns:a16="http://schemas.microsoft.com/office/drawing/2014/main" id="{936EE24E-BDE6-4629-A492-BD0AC5C027E7}"/>
+              </a:ext>
+            </a:extLst>
+          </p:cNvPr>
+          <p:cNvSpPr>
+            <a:spLocks xmlns:a="http://schemas.openxmlformats.org/drawingml/2006/main" noGrp="1"/>
+          </p:cNvSpPr>
+          <p:nvPr/>
+        </p:nvSpPr>
+        <p:spPr>
+          <a:xfrm xmlns:a="http://schemas.openxmlformats.org/drawingml/2006/main">
+            <a:off x="457200" y="238125"/>
+            <a:ext cx="6191250" cy="190500"/>
+          </a:xfrm>
+          <a:prstGeom xmlns:a="http://schemas.openxmlformats.org/drawingml/2006/main" prst="rect">
+            <a:avLst/>
+          </a:prstGeom>
+          <a:noFill xmlns:a="http://schemas.openxmlformats.org/drawingml/2006/main"/>
+          <a:ln xmlns:a="http://schemas.openxmlformats.org/drawingml/2006/main" w="0">
+            <a:noFill/>
+            <a:prstDash val="solid"/>
+          </a:ln>
+        </p:spPr>
+        <p:txBody>
+          <a:bodyPr xmlns:a="http://schemas.openxmlformats.org/drawingml/2006/main" anchor="t"/>
+          <a:lstStyle xmlns:a="http://schemas.openxmlformats.org/drawingml/2006/main"/>
+          <a:p xmlns:a="http://schemas.openxmlformats.org/drawingml/2006/main">
+            <a:pPr algn="l">
+              <a:defRPr sz="1050" b="1">
+                <a:solidFill>
+                  <a:srgbClr val="667386"/>
+                </a:solidFill>
+              </a:defRPr>
+            </a:pPr>
+            <a:r>
+              <a:rPr sz="1050" b="1">
+                <a:solidFill>
+                  <a:srgbClr val="667386"/>
+                </a:solidFill>
+              </a:rPr>
+              <a:t>OPERATOR HYPOTHESIS LAB · NVDA PROTO-RULES</a:t>
+            </a:r>
+          </a:p>
+        </p:txBody>
+      </p:sp>
+      <p:sp>
+        <p:nvSpPr>
+          <p:cNvPr id="2" name="">
+            <a:extLst xmlns:a="http://schemas.openxmlformats.org/drawingml/2006/main">
+              <a:ext uri="{FF2B5EF4-FFF2-40B4-BE49-F238E27FC236}">
+                <a16:creationId xmlns:a16="http://schemas.microsoft.com/office/drawing/2014/main" id="{36B24E1A-6836-446D-B97D-33FB2E095616}"/>
+              </a:ext>
+            </a:extLst>
+          </p:cNvPr>
+          <p:cNvSpPr>
+            <a:spLocks xmlns:a="http://schemas.openxmlformats.org/drawingml/2006/main" noGrp="1"/>
+          </p:cNvSpPr>
+          <p:nvPr/>
+        </p:nvSpPr>
+        <p:spPr>
+          <a:xfrm xmlns:a="http://schemas.openxmlformats.org/drawingml/2006/main">
+            <a:off x="457200" y="523875"/>
+            <a:ext cx="11049000" cy="590550"/>
+          </a:xfrm>
+          <a:prstGeom xmlns:a="http://schemas.openxmlformats.org/drawingml/2006/main" prst="rect">
+            <a:avLst/>
+          </a:prstGeom>
+          <a:noFill xmlns:a="http://schemas.openxmlformats.org/drawingml/2006/main"/>
+          <a:ln xmlns:a="http://schemas.openxmlformats.org/drawingml/2006/main" w="0">
+            <a:noFill/>
+            <a:prstDash val="solid"/>
+          </a:ln>
+        </p:spPr>
+        <p:txBody>
+          <a:bodyPr xmlns:a="http://schemas.openxmlformats.org/drawingml/2006/main" anchor="t"/>
+          <a:lstStyle xmlns:a="http://schemas.openxmlformats.org/drawingml/2006/main"/>
+          <a:p xmlns:a="http://schemas.openxmlformats.org/drawingml/2006/main">
+            <a:pPr algn="l">
+              <a:defRPr sz="2925" b="1">
+                <a:solidFill>
+                  <a:srgbClr val="000000"/>
+                </a:solidFill>
+              </a:defRPr>
+            </a:pPr>
+            <a:r>
+              <a:rPr sz="2925" b="1">
+                <a:solidFill>
+                  <a:srgbClr val="000000"/>
+                </a:solidFill>
+              </a:rPr>
+              <a:t>Representative paths keep the trade-level reality visible</a:t>
+            </a:r>
+          </a:p>
+        </p:txBody>
+      </p:sp>
+      <p:sp>
+        <p:nvSpPr>
+          <p:cNvPr id="3" name="">
+            <a:extLst xmlns:a="http://schemas.openxmlformats.org/drawingml/2006/main">
+              <a:ext uri="{FF2B5EF4-FFF2-40B4-BE49-F238E27FC236}">
+                <a16:creationId xmlns:a16="http://schemas.microsoft.com/office/drawing/2014/main" id="{275B38CB-5A5B-4D70-92E2-99435B341AE3}"/>
+              </a:ext>
+            </a:extLst>
+          </p:cNvPr>
+          <p:cNvSpPr>
+            <a:spLocks xmlns:a="http://schemas.openxmlformats.org/drawingml/2006/main" noGrp="1"/>
+          </p:cNvSpPr>
+          <p:nvPr/>
+        </p:nvSpPr>
+        <p:spPr>
+          <a:xfrm xmlns:a="http://schemas.openxmlformats.org/drawingml/2006/main">
+            <a:off x="457200" y="1219200"/>
+            <a:ext cx="11277600" cy="19050"/>
+          </a:xfrm>
+          <a:prstGeom xmlns:a="http://schemas.openxmlformats.org/drawingml/2006/main" prst="rect">
+            <a:avLst/>
+          </a:prstGeom>
+          <a:solidFill xmlns:a="http://schemas.openxmlformats.org/drawingml/2006/main">
+            <a:srgbClr val="B8BCC4"/>
+          </a:solidFill>
+          <a:ln xmlns:a="http://schemas.openxmlformats.org/drawingml/2006/main" w="0">
+            <a:solidFill>
+              <a:srgbClr val="B8BCC4"/>
+            </a:solidFill>
+            <a:prstDash val="solid"/>
+          </a:ln>
+        </p:spPr>
+      </p:sp>
+      <p:sp>
+        <p:nvSpPr>
+          <p:cNvPr id="4" name="">
+            <a:extLst xmlns:a="http://schemas.openxmlformats.org/drawingml/2006/main">
+              <a:ext uri="{FF2B5EF4-FFF2-40B4-BE49-F238E27FC236}">
+                <a16:creationId xmlns:a16="http://schemas.microsoft.com/office/drawing/2014/main" id="{66FED9A0-CF65-4B5A-B442-7A15BA9B1223}"/>
+              </a:ext>
+            </a:extLst>
+          </p:cNvPr>
+          <p:cNvSpPr>
+            <a:spLocks xmlns:a="http://schemas.openxmlformats.org/drawingml/2006/main" noGrp="1"/>
+          </p:cNvSpPr>
+          <p:nvPr/>
+        </p:nvSpPr>
+        <p:spPr>
+          <a:xfrm xmlns:a="http://schemas.openxmlformats.org/drawingml/2006/main">
+            <a:off x="457200" y="6515100"/>
+            <a:ext cx="7048500" cy="161925"/>
+          </a:xfrm>
+          <a:prstGeom xmlns:a="http://schemas.openxmlformats.org/drawingml/2006/main" prst="rect">
+            <a:avLst/>
+          </a:prstGeom>
+          <a:noFill xmlns:a="http://schemas.openxmlformats.org/drawingml/2006/main"/>
+          <a:ln xmlns:a="http://schemas.openxmlformats.org/drawingml/2006/main" w="0">
+            <a:noFill/>
+            <a:prstDash val="solid"/>
+          </a:ln>
+        </p:spPr>
+        <p:txBody>
+          <a:bodyPr xmlns:a="http://schemas.openxmlformats.org/drawingml/2006/main" anchor="t"/>
+          <a:lstStyle xmlns:a="http://schemas.openxmlformats.org/drawingml/2006/main"/>
+          <a:p xmlns:a="http://schemas.openxmlformats.org/drawingml/2006/main">
+            <a:pPr algn="l">
+              <a:defRPr sz="900" b="0">
+                <a:solidFill>
+                  <a:srgbClr val="667386"/>
+                </a:solidFill>
+              </a:defRPr>
+            </a:pPr>
+            <a:r>
+              <a:rPr sz="900" b="0">
+                <a:solidFill>
+                  <a:srgbClr val="667386"/>
+                </a:solidFill>
+              </a:rPr>
+              <a:t>Descriptive research · adjusted bars · frozen 2018–2023 window</a:t>
+            </a:r>
+          </a:p>
+        </p:txBody>
+      </p:sp>
+      <p:sp>
+        <p:nvSpPr>
+          <p:cNvPr id="5" name="">
+            <a:extLst xmlns:a="http://schemas.openxmlformats.org/drawingml/2006/main">
+              <a:ext uri="{FF2B5EF4-FFF2-40B4-BE49-F238E27FC236}">
+                <a16:creationId xmlns:a16="http://schemas.microsoft.com/office/drawing/2014/main" id="{EAEFEDB3-B31B-49C7-ACD4-8226B719EA28}"/>
+              </a:ext>
+            </a:extLst>
+          </p:cNvPr>
+          <p:cNvSpPr>
+            <a:spLocks xmlns:a="http://schemas.openxmlformats.org/drawingml/2006/main" noGrp="1"/>
+          </p:cNvSpPr>
+          <p:nvPr/>
+        </p:nvSpPr>
+        <p:spPr>
+          <a:xfrm xmlns:a="http://schemas.openxmlformats.org/drawingml/2006/main">
+            <a:off x="10858500" y="6496050"/>
+            <a:ext cx="876300" cy="171450"/>
+          </a:xfrm>
+          <a:prstGeom xmlns:a="http://schemas.openxmlformats.org/drawingml/2006/main" prst="rect">
+            <a:avLst/>
+          </a:prstGeom>
+          <a:noFill xmlns:a="http://schemas.openxmlformats.org/drawingml/2006/main"/>
+          <a:ln xmlns:a="http://schemas.openxmlformats.org/drawingml/2006/main" w="0">
+            <a:noFill/>
+            <a:prstDash val="solid"/>
+          </a:ln>
+        </p:spPr>
+        <p:txBody>
+          <a:bodyPr xmlns:a="http://schemas.openxmlformats.org/drawingml/2006/main" anchor="t"/>
+          <a:lstStyle xmlns:a="http://schemas.openxmlformats.org/drawingml/2006/main"/>
+          <a:p xmlns:a="http://schemas.openxmlformats.org/drawingml/2006/main">
+            <a:pPr algn="r">
+              <a:defRPr sz="900" b="0">
+                <a:solidFill>
+                  <a:srgbClr val="667386"/>
+                </a:solidFill>
+              </a:defRPr>
+            </a:pPr>
+            <a:r>
+              <a:rPr sz="900" b="0">
+                <a:solidFill>
+                  <a:srgbClr val="667386"/>
+                </a:solidFill>
+              </a:rPr>
+              <a:t>21</a:t>
+            </a:r>
+          </a:p>
+        </p:txBody>
+      </p:sp>
+      <p:pic>
+        <p:nvPicPr>
+          <p:cNvPr id="12" name=""/>
+          <p:cNvPicPr>
+            <a:picLocks xmlns:a="http://schemas.openxmlformats.org/drawingml/2006/main" noChangeAspect="1"/>
+          </p:cNvPicPr>
+          <p:nvPr/>
+        </p:nvPicPr>
+        <p:blipFill>
+          <a:blip xmlns:r="http://schemas.openxmlformats.org/officeDocument/2006/relationships" xmlns:a="http://schemas.openxmlformats.org/drawingml/2006/main" r:embed="R211a4ca5b35341ed"/>
+          <a:stretch xmlns:a="http://schemas.openxmlformats.org/drawingml/2006/main"/>
+        </p:blipFill>
+        <p:spPr>
+          <a:xfrm xmlns:a="http://schemas.openxmlformats.org/drawingml/2006/main">
+            <a:off x="2162175" y="1352550"/>
+            <a:ext cx="7753350" cy="4933950"/>
+          </a:xfrm>
+          <a:prstGeom xmlns:a="http://schemas.openxmlformats.org/drawingml/2006/main" prst="rect">
+            <a:avLst/>
+          </a:prstGeom>
+        </p:spPr>
+      </p:pic>
+    </p:spTree>
+    <p:extLst>
+      <p:ext uri="{BB962C8B-B14F-4D97-AF65-F5344CB8AC3E}">
+        <p14:creationId xmlns:p14="http://schemas.microsoft.com/office/powerpoint/2010/main" val="1683071804"/>
+      </p:ext>
+    </p:extLst>
+  </p:cSld>
+</p:sld>
+</file>
+
+<file path=ppt/slides/slide22.xml><?xml version="1.0" encoding="utf-8"?>
+<p:sld xmlns:p="http://schemas.openxmlformats.org/presentationml/2006/main">
+  <p:cSld>
+    <p:bg>
+      <p:bgPr>
+        <a:solidFill xmlns:a="http://schemas.openxmlformats.org/drawingml/2006/main">
+          <a:srgbClr val="FFFFFF"/>
+        </a:solidFill>
+      </p:bgPr>
+    </p:bg>
+    <p:spTree>
+      <p:nvGrpSpPr>
+        <p:cNvPr id="1" name=""/>
+        <p:cNvGrpSpPr/>
+        <p:nvPr/>
+      </p:nvGrpSpPr>
+      <p:grpSpPr>
+        <a:xfrm xmlns:a="http://schemas.openxmlformats.org/drawingml/2006/main"/>
+      </p:grpSpPr>
+      <p:sp>
+        <p:nvSpPr>
+          <p:cNvPr id="20" name="">
+            <a:extLst xmlns:a="http://schemas.openxmlformats.org/drawingml/2006/main">
+              <a:ext uri="{FF2B5EF4-FFF2-40B4-BE49-F238E27FC236}">
+                <a16:creationId xmlns:a16="http://schemas.microsoft.com/office/drawing/2014/main" id="{33435AD2-E5C8-4405-AFA4-EDDBC7E31779}"/>
+              </a:ext>
+            </a:extLst>
+          </p:cNvPr>
+          <p:cNvSpPr>
+            <a:spLocks xmlns:a="http://schemas.openxmlformats.org/drawingml/2006/main" noGrp="1"/>
+          </p:cNvSpPr>
+          <p:nvPr/>
+        </p:nvSpPr>
+        <p:spPr>
+          <a:xfrm xmlns:a="http://schemas.openxmlformats.org/drawingml/2006/main">
+            <a:off x="457200" y="238125"/>
+            <a:ext cx="6191250" cy="190500"/>
+          </a:xfrm>
+          <a:prstGeom xmlns:a="http://schemas.openxmlformats.org/drawingml/2006/main" prst="rect">
+            <a:avLst/>
+          </a:prstGeom>
+          <a:noFill xmlns:a="http://schemas.openxmlformats.org/drawingml/2006/main"/>
+          <a:ln xmlns:a="http://schemas.openxmlformats.org/drawingml/2006/main" w="0">
+            <a:noFill/>
+            <a:prstDash val="solid"/>
+          </a:ln>
+        </p:spPr>
+        <p:txBody>
+          <a:bodyPr xmlns:a="http://schemas.openxmlformats.org/drawingml/2006/main" anchor="t"/>
+          <a:lstStyle xmlns:a="http://schemas.openxmlformats.org/drawingml/2006/main"/>
+          <a:p xmlns:a="http://schemas.openxmlformats.org/drawingml/2006/main">
+            <a:pPr algn="l">
+              <a:defRPr sz="1050" b="1">
+                <a:solidFill>
+                  <a:srgbClr val="667386"/>
+                </a:solidFill>
+              </a:defRPr>
+            </a:pPr>
+            <a:r>
+              <a:rPr sz="1050" b="1">
+                <a:solidFill>
+                  <a:srgbClr val="667386"/>
+                </a:solidFill>
+              </a:rPr>
+              <a:t>OPERATOR HYPOTHESIS LAB · NVDA PROTO-RULES</a:t>
+            </a:r>
+          </a:p>
+        </p:txBody>
+      </p:sp>
+      <p:sp>
+        <p:nvSpPr>
+          <p:cNvPr id="2" name="">
+            <a:extLst xmlns:a="http://schemas.openxmlformats.org/drawingml/2006/main">
+              <a:ext uri="{FF2B5EF4-FFF2-40B4-BE49-F238E27FC236}">
+                <a16:creationId xmlns:a16="http://schemas.microsoft.com/office/drawing/2014/main" id="{2BE05053-D177-447E-B8A1-79C114FE479D}"/>
+              </a:ext>
+            </a:extLst>
+          </p:cNvPr>
+          <p:cNvSpPr>
+            <a:spLocks xmlns:a="http://schemas.openxmlformats.org/drawingml/2006/main" noGrp="1"/>
+          </p:cNvSpPr>
+          <p:nvPr/>
+        </p:nvSpPr>
+        <p:spPr>
+          <a:xfrm xmlns:a="http://schemas.openxmlformats.org/drawingml/2006/main">
+            <a:off x="457200" y="523875"/>
+            <a:ext cx="11049000" cy="590550"/>
+          </a:xfrm>
+          <a:prstGeom xmlns:a="http://schemas.openxmlformats.org/drawingml/2006/main" prst="rect">
+            <a:avLst/>
+          </a:prstGeom>
+          <a:noFill xmlns:a="http://schemas.openxmlformats.org/drawingml/2006/main"/>
+          <a:ln xmlns:a="http://schemas.openxmlformats.org/drawingml/2006/main" w="0">
+            <a:noFill/>
+            <a:prstDash val="solid"/>
+          </a:ln>
+        </p:spPr>
+        <p:txBody>
+          <a:bodyPr xmlns:a="http://schemas.openxmlformats.org/drawingml/2006/main" anchor="t"/>
+          <a:lstStyle xmlns:a="http://schemas.openxmlformats.org/drawingml/2006/main"/>
+          <a:p xmlns:a="http://schemas.openxmlformats.org/drawingml/2006/main">
+            <a:pPr algn="l">
+              <a:defRPr sz="2925" b="1">
+                <a:solidFill>
+                  <a:srgbClr val="000000"/>
+                </a:solidFill>
+              </a:defRPr>
+            </a:pPr>
+            <a:r>
+              <a:rPr sz="2925" b="1">
+                <a:solidFill>
+                  <a:srgbClr val="000000"/>
+                </a:solidFill>
+              </a:rPr>
+              <a:t>One rule stops; one earns untouched confirmation</a:t>
+            </a:r>
+          </a:p>
+        </p:txBody>
+      </p:sp>
+      <p:sp>
+        <p:nvSpPr>
+          <p:cNvPr id="3" name="">
+            <a:extLst xmlns:a="http://schemas.openxmlformats.org/drawingml/2006/main">
+              <a:ext uri="{FF2B5EF4-FFF2-40B4-BE49-F238E27FC236}">
+                <a16:creationId xmlns:a16="http://schemas.microsoft.com/office/drawing/2014/main" id="{833B56B8-2DA7-4B71-8B7E-A90C5CE85EE2}"/>
+              </a:ext>
+            </a:extLst>
+          </p:cNvPr>
+          <p:cNvSpPr>
+            <a:spLocks xmlns:a="http://schemas.openxmlformats.org/drawingml/2006/main" noGrp="1"/>
+          </p:cNvSpPr>
+          <p:nvPr/>
+        </p:nvSpPr>
+        <p:spPr>
+          <a:xfrm xmlns:a="http://schemas.openxmlformats.org/drawingml/2006/main">
+            <a:off x="457200" y="1219200"/>
+            <a:ext cx="11277600" cy="19050"/>
+          </a:xfrm>
+          <a:prstGeom xmlns:a="http://schemas.openxmlformats.org/drawingml/2006/main" prst="rect">
+            <a:avLst/>
+          </a:prstGeom>
+          <a:solidFill xmlns:a="http://schemas.openxmlformats.org/drawingml/2006/main">
+            <a:srgbClr val="B8BCC4"/>
+          </a:solidFill>
+          <a:ln xmlns:a="http://schemas.openxmlformats.org/drawingml/2006/main" w="0">
+            <a:solidFill>
+              <a:srgbClr val="B8BCC4"/>
+            </a:solidFill>
+            <a:prstDash val="solid"/>
+          </a:ln>
+        </p:spPr>
+      </p:sp>
+      <p:sp>
+        <p:nvSpPr>
+          <p:cNvPr id="4" name="">
+            <a:extLst xmlns:a="http://schemas.openxmlformats.org/drawingml/2006/main">
+              <a:ext uri="{FF2B5EF4-FFF2-40B4-BE49-F238E27FC236}">
+                <a16:creationId xmlns:a16="http://schemas.microsoft.com/office/drawing/2014/main" id="{E9EC5A30-E8F2-4AC4-96DE-76AA0B211C94}"/>
+              </a:ext>
+            </a:extLst>
+          </p:cNvPr>
+          <p:cNvSpPr>
+            <a:spLocks xmlns:a="http://schemas.openxmlformats.org/drawingml/2006/main" noGrp="1"/>
+          </p:cNvSpPr>
+          <p:nvPr/>
+        </p:nvSpPr>
+        <p:spPr>
+          <a:xfrm xmlns:a="http://schemas.openxmlformats.org/drawingml/2006/main">
+            <a:off x="457200" y="6515100"/>
+            <a:ext cx="7048500" cy="161925"/>
+          </a:xfrm>
+          <a:prstGeom xmlns:a="http://schemas.openxmlformats.org/drawingml/2006/main" prst="rect">
+            <a:avLst/>
+          </a:prstGeom>
+          <a:noFill xmlns:a="http://schemas.openxmlformats.org/drawingml/2006/main"/>
+          <a:ln xmlns:a="http://schemas.openxmlformats.org/drawingml/2006/main" w="0">
+            <a:noFill/>
+            <a:prstDash val="solid"/>
+          </a:ln>
+        </p:spPr>
+        <p:txBody>
+          <a:bodyPr xmlns:a="http://schemas.openxmlformats.org/drawingml/2006/main" anchor="t"/>
+          <a:lstStyle xmlns:a="http://schemas.openxmlformats.org/drawingml/2006/main"/>
+          <a:p xmlns:a="http://schemas.openxmlformats.org/drawingml/2006/main">
+            <a:pPr algn="l">
+              <a:defRPr sz="900" b="0">
+                <a:solidFill>
+                  <a:srgbClr val="667386"/>
+                </a:solidFill>
+              </a:defRPr>
+            </a:pPr>
+            <a:r>
+              <a:rPr sz="900" b="0">
+                <a:solidFill>
+                  <a:srgbClr val="667386"/>
+                </a:solidFill>
+              </a:rPr>
+              <a:t>Descriptive research · adjusted bars · frozen 2018–2023 window</a:t>
+            </a:r>
+          </a:p>
+        </p:txBody>
+      </p:sp>
+      <p:sp>
+        <p:nvSpPr>
+          <p:cNvPr id="5" name="">
+            <a:extLst xmlns:a="http://schemas.openxmlformats.org/drawingml/2006/main">
+              <a:ext uri="{FF2B5EF4-FFF2-40B4-BE49-F238E27FC236}">
+                <a16:creationId xmlns:a16="http://schemas.microsoft.com/office/drawing/2014/main" id="{0C9AACCB-E13D-4494-948C-DDCAA6327CB8}"/>
+              </a:ext>
+            </a:extLst>
+          </p:cNvPr>
+          <p:cNvSpPr>
+            <a:spLocks xmlns:a="http://schemas.openxmlformats.org/drawingml/2006/main" noGrp="1"/>
+          </p:cNvSpPr>
+          <p:nvPr/>
+        </p:nvSpPr>
+        <p:spPr>
+          <a:xfrm xmlns:a="http://schemas.openxmlformats.org/drawingml/2006/main">
+            <a:off x="10858500" y="6496050"/>
+            <a:ext cx="876300" cy="171450"/>
+          </a:xfrm>
+          <a:prstGeom xmlns:a="http://schemas.openxmlformats.org/drawingml/2006/main" prst="rect">
+            <a:avLst/>
+          </a:prstGeom>
+          <a:noFill xmlns:a="http://schemas.openxmlformats.org/drawingml/2006/main"/>
+          <a:ln xmlns:a="http://schemas.openxmlformats.org/drawingml/2006/main" w="0">
+            <a:noFill/>
+            <a:prstDash val="solid"/>
+          </a:ln>
+        </p:spPr>
+        <p:txBody>
+          <a:bodyPr xmlns:a="http://schemas.openxmlformats.org/drawingml/2006/main" anchor="t"/>
+          <a:lstStyle xmlns:a="http://schemas.openxmlformats.org/drawingml/2006/main"/>
+          <a:p xmlns:a="http://schemas.openxmlformats.org/drawingml/2006/main">
+            <a:pPr algn="r">
+              <a:defRPr sz="900" b="0">
+                <a:solidFill>
+                  <a:srgbClr val="667386"/>
+                </a:solidFill>
+              </a:defRPr>
+            </a:pPr>
+            <a:r>
+              <a:rPr sz="900" b="0">
+                <a:solidFill>
+                  <a:srgbClr val="667386"/>
+                </a:solidFill>
+              </a:rPr>
+              <a:t>22</a:t>
+            </a:r>
+          </a:p>
+        </p:txBody>
+      </p:sp>
+      <p:sp>
+        <p:nvSpPr>
+          <p:cNvPr id="6" name="">
+            <a:extLst xmlns:a="http://schemas.openxmlformats.org/drawingml/2006/main">
+              <a:ext uri="{FF2B5EF4-FFF2-40B4-BE49-F238E27FC236}">
+                <a16:creationId xmlns:a16="http://schemas.microsoft.com/office/drawing/2014/main" id="{007C9643-E8A6-4980-9E5D-7724CB5B0075}"/>
+              </a:ext>
+            </a:extLst>
+          </p:cNvPr>
+          <p:cNvSpPr>
+            <a:spLocks xmlns:a="http://schemas.openxmlformats.org/drawingml/2006/main" noGrp="1"/>
+          </p:cNvSpPr>
+          <p:nvPr/>
+        </p:nvSpPr>
+        <p:spPr>
+          <a:xfrm xmlns:a="http://schemas.openxmlformats.org/drawingml/2006/main">
+            <a:off x="552450" y="1581150"/>
+            <a:ext cx="5143500" cy="2171700"/>
+          </a:xfrm>
+          <a:prstGeom xmlns:a="http://schemas.openxmlformats.org/drawingml/2006/main" prst="rect">
+            <a:avLst/>
+          </a:prstGeom>
+          <a:solidFill xmlns:a="http://schemas.openxmlformats.org/drawingml/2006/main">
+            <a:srgbClr val="F6E5E1"/>
+          </a:solidFill>
+          <a:ln xmlns:a="http://schemas.openxmlformats.org/drawingml/2006/main" w="0">
+            <a:solidFill>
+              <a:srgbClr val="F6E5E1"/>
+            </a:solidFill>
+            <a:prstDash val="solid"/>
+          </a:ln>
+        </p:spPr>
+      </p:sp>
+      <p:sp>
+        <p:nvSpPr>
+          <p:cNvPr id="7" name="">
+            <a:extLst xmlns:a="http://schemas.openxmlformats.org/drawingml/2006/main">
+              <a:ext uri="{FF2B5EF4-FFF2-40B4-BE49-F238E27FC236}">
+                <a16:creationId xmlns:a16="http://schemas.microsoft.com/office/drawing/2014/main" id="{A9DDA7B9-95B9-4DC9-B372-57513D39DD42}"/>
+              </a:ext>
+            </a:extLst>
+          </p:cNvPr>
+          <p:cNvSpPr>
+            <a:spLocks xmlns:a="http://schemas.openxmlformats.org/drawingml/2006/main" noGrp="1"/>
+          </p:cNvSpPr>
+          <p:nvPr/>
+        </p:nvSpPr>
+        <p:spPr>
+          <a:xfrm xmlns:a="http://schemas.openxmlformats.org/drawingml/2006/main">
+            <a:off x="819150" y="1847850"/>
+            <a:ext cx="1143000" cy="400050"/>
+          </a:xfrm>
+          <a:prstGeom xmlns:a="http://schemas.openxmlformats.org/drawingml/2006/main" prst="rect">
+            <a:avLst/>
+          </a:prstGeom>
+          <a:noFill xmlns:a="http://schemas.openxmlformats.org/drawingml/2006/main"/>
+          <a:ln xmlns:a="http://schemas.openxmlformats.org/drawingml/2006/main" w="0">
+            <a:noFill/>
+            <a:prstDash val="solid"/>
+          </a:ln>
+        </p:spPr>
+        <p:txBody>
+          <a:bodyPr xmlns:a="http://schemas.openxmlformats.org/drawingml/2006/main" anchor="t"/>
+          <a:lstStyle xmlns:a="http://schemas.openxmlformats.org/drawingml/2006/main"/>
+          <a:p xmlns:a="http://schemas.openxmlformats.org/drawingml/2006/main">
+            <a:pPr algn="l">
+              <a:defRPr sz="2325" b="1">
+                <a:solidFill>
+                  <a:srgbClr val="B44738"/>
+                </a:solidFill>
+              </a:defRPr>
+            </a:pPr>
+            <a:r>
+              <a:rPr sz="2325" b="1">
+                <a:solidFill>
+                  <a:srgbClr val="B44738"/>
+                </a:solidFill>
+              </a:rPr>
+              <a:t>STOP</a:t>
+            </a:r>
+          </a:p>
+        </p:txBody>
+      </p:sp>
+      <p:sp>
+        <p:nvSpPr>
+          <p:cNvPr id="8" name="">
+            <a:extLst xmlns:a="http://schemas.openxmlformats.org/drawingml/2006/main">
+              <a:ext uri="{FF2B5EF4-FFF2-40B4-BE49-F238E27FC236}">
+                <a16:creationId xmlns:a16="http://schemas.microsoft.com/office/drawing/2014/main" id="{DD558B22-D7C5-42BF-87D0-D8BC1603CACC}"/>
+              </a:ext>
+            </a:extLst>
+          </p:cNvPr>
+          <p:cNvSpPr>
+            <a:spLocks xmlns:a="http://schemas.openxmlformats.org/drawingml/2006/main" noGrp="1"/>
+          </p:cNvSpPr>
+          <p:nvPr/>
+        </p:nvSpPr>
+        <p:spPr>
+          <a:xfrm xmlns:a="http://schemas.openxmlformats.org/drawingml/2006/main">
+            <a:off x="819150" y="2419350"/>
+            <a:ext cx="4400550" cy="361950"/>
+          </a:xfrm>
+          <a:prstGeom xmlns:a="http://schemas.openxmlformats.org/drawingml/2006/main" prst="rect">
+            <a:avLst/>
+          </a:prstGeom>
+          <a:noFill xmlns:a="http://schemas.openxmlformats.org/drawingml/2006/main"/>
+          <a:ln xmlns:a="http://schemas.openxmlformats.org/drawingml/2006/main" w="0">
+            <a:noFill/>
+            <a:prstDash val="solid"/>
+          </a:ln>
+        </p:spPr>
+        <p:txBody>
+          <a:bodyPr xmlns:a="http://schemas.openxmlformats.org/drawingml/2006/main" anchor="t"/>
+          <a:lstStyle xmlns:a="http://schemas.openxmlformats.org/drawingml/2006/main"/>
+          <a:p xmlns:a="http://schemas.openxmlformats.org/drawingml/2006/main">
+            <a:pPr algn="l">
+              <a:defRPr sz="2100" b="1">
+                <a:solidFill>
+                  <a:srgbClr val="000000"/>
+                </a:solidFill>
+              </a:defRPr>
+            </a:pPr>
+            <a:r>
+              <a:rPr sz="2100" b="1">
+                <a:solidFill>
+                  <a:srgbClr val="000000"/>
+                </a:solidFill>
+              </a:rPr>
+              <a:t>Efficient-up continuation</a:t>
+            </a:r>
+          </a:p>
+        </p:txBody>
+      </p:sp>
+      <p:sp>
+        <p:nvSpPr>
+          <p:cNvPr id="9" name="">
+            <a:extLst xmlns:a="http://schemas.openxmlformats.org/drawingml/2006/main">
+              <a:ext uri="{FF2B5EF4-FFF2-40B4-BE49-F238E27FC236}">
+                <a16:creationId xmlns:a16="http://schemas.microsoft.com/office/drawing/2014/main" id="{FDF54F5C-6044-44B7-9E0B-A4B50E289B26}"/>
+              </a:ext>
+            </a:extLst>
+          </p:cNvPr>
+          <p:cNvSpPr>
+            <a:spLocks xmlns:a="http://schemas.openxmlformats.org/drawingml/2006/main" noGrp="1"/>
+          </p:cNvSpPr>
+          <p:nvPr/>
+        </p:nvSpPr>
+        <p:spPr>
+          <a:xfrm xmlns:a="http://schemas.openxmlformats.org/drawingml/2006/main">
+            <a:off x="819150" y="3009900"/>
+            <a:ext cx="4400550" cy="571500"/>
+          </a:xfrm>
+          <a:prstGeom xmlns:a="http://schemas.openxmlformats.org/drawingml/2006/main" prst="rect">
+            <a:avLst/>
+          </a:prstGeom>
+          <a:noFill xmlns:a="http://schemas.openxmlformats.org/drawingml/2006/main"/>
+          <a:ln xmlns:a="http://schemas.openxmlformats.org/drawingml/2006/main" w="0">
+            <a:noFill/>
+            <a:prstDash val="solid"/>
+          </a:ln>
+        </p:spPr>
+        <p:txBody>
+          <a:bodyPr xmlns:a="http://schemas.openxmlformats.org/drawingml/2006/main" anchor="t"/>
+          <a:lstStyle xmlns:a="http://schemas.openxmlformats.org/drawingml/2006/main"/>
+          <a:p xmlns:a="http://schemas.openxmlformats.org/drawingml/2006/main">
+            <a:pPr algn="l">
+              <a:defRPr sz="1575" b="0">
+                <a:solidFill>
+                  <a:srgbClr val="24364B"/>
+                </a:solidFill>
+              </a:defRPr>
+            </a:pPr>
+            <a:r>
+              <a:rPr sz="1575" b="0">
+                <a:solidFill>
+                  <a:srgbClr val="24364B"/>
+                </a:solidFill>
+              </a:rPr>
+              <a:t>The exact ER20-plus-positive-R20 translation adds no incremental value in TRAIN.</a:t>
+            </a:r>
+          </a:p>
+        </p:txBody>
+      </p:sp>
+      <p:sp>
+        <p:nvSpPr>
+          <p:cNvPr id="10" name="">
+            <a:extLst xmlns:a="http://schemas.openxmlformats.org/drawingml/2006/main">
+              <a:ext uri="{FF2B5EF4-FFF2-40B4-BE49-F238E27FC236}">
+                <a16:creationId xmlns:a16="http://schemas.microsoft.com/office/drawing/2014/main" id="{76B60127-F3A5-4F6C-8A5A-B81AF712761E}"/>
+              </a:ext>
+            </a:extLst>
+          </p:cNvPr>
+          <p:cNvSpPr>
+            <a:spLocks xmlns:a="http://schemas.openxmlformats.org/drawingml/2006/main" noGrp="1"/>
+          </p:cNvSpPr>
+          <p:nvPr/>
+        </p:nvSpPr>
+        <p:spPr>
+          <a:xfrm xmlns:a="http://schemas.openxmlformats.org/drawingml/2006/main">
+            <a:off x="6096000" y="1581150"/>
+            <a:ext cx="5543550" cy="2171700"/>
+          </a:xfrm>
+          <a:prstGeom xmlns:a="http://schemas.openxmlformats.org/drawingml/2006/main" prst="rect">
+            <a:avLst/>
+          </a:prstGeom>
+          <a:solidFill xmlns:a="http://schemas.openxmlformats.org/drawingml/2006/main">
+            <a:srgbClr val="E2F1EC"/>
+          </a:solidFill>
+          <a:ln xmlns:a="http://schemas.openxmlformats.org/drawingml/2006/main" w="0">
+            <a:solidFill>
+              <a:srgbClr val="E2F1EC"/>
+            </a:solidFill>
+            <a:prstDash val="solid"/>
+          </a:ln>
+        </p:spPr>
+      </p:sp>
+      <p:sp>
+        <p:nvSpPr>
+          <p:cNvPr id="11" name="">
+            <a:extLst xmlns:a="http://schemas.openxmlformats.org/drawingml/2006/main">
+              <a:ext uri="{FF2B5EF4-FFF2-40B4-BE49-F238E27FC236}">
+                <a16:creationId xmlns:a16="http://schemas.microsoft.com/office/drawing/2014/main" id="{A8B5FB0E-0F51-4BE1-B65A-28B66ADC1421}"/>
+              </a:ext>
+            </a:extLst>
+          </p:cNvPr>
+          <p:cNvSpPr>
+            <a:spLocks xmlns:a="http://schemas.openxmlformats.org/drawingml/2006/main" noGrp="1"/>
+          </p:cNvSpPr>
+          <p:nvPr/>
+        </p:nvSpPr>
+        <p:spPr>
+          <a:xfrm xmlns:a="http://schemas.openxmlformats.org/drawingml/2006/main">
+            <a:off x="6381750" y="1847850"/>
+            <a:ext cx="1428750" cy="400050"/>
+          </a:xfrm>
+          <a:prstGeom xmlns:a="http://schemas.openxmlformats.org/drawingml/2006/main" prst="rect">
+            <a:avLst/>
+          </a:prstGeom>
+          <a:noFill xmlns:a="http://schemas.openxmlformats.org/drawingml/2006/main"/>
+          <a:ln xmlns:a="http://schemas.openxmlformats.org/drawingml/2006/main" w="0">
+            <a:noFill/>
+            <a:prstDash val="solid"/>
+          </a:ln>
+        </p:spPr>
+        <p:txBody>
+          <a:bodyPr xmlns:a="http://schemas.openxmlformats.org/drawingml/2006/main" anchor="t"/>
+          <a:lstStyle xmlns:a="http://schemas.openxmlformats.org/drawingml/2006/main"/>
+          <a:p xmlns:a="http://schemas.openxmlformats.org/drawingml/2006/main">
+            <a:pPr algn="l">
+              <a:defRPr sz="2325" b="1">
+                <a:solidFill>
+                  <a:srgbClr val="14866D"/>
+                </a:solidFill>
+              </a:defRPr>
+            </a:pPr>
+            <a:r>
+              <a:rPr sz="2325" b="1">
+                <a:solidFill>
+                  <a:srgbClr val="14866D"/>
+                </a:solidFill>
+              </a:rPr>
+              <a:t>RETAIN</a:t>
+            </a:r>
+          </a:p>
+        </p:txBody>
+      </p:sp>
+      <p:sp>
+        <p:nvSpPr>
+          <p:cNvPr id="12" name="">
+            <a:extLst xmlns:a="http://schemas.openxmlformats.org/drawingml/2006/main">
+              <a:ext uri="{FF2B5EF4-FFF2-40B4-BE49-F238E27FC236}">
+                <a16:creationId xmlns:a16="http://schemas.microsoft.com/office/drawing/2014/main" id="{53821CE0-1B09-4B86-A676-C0BB6E8015BC}"/>
+              </a:ext>
+            </a:extLst>
+          </p:cNvPr>
+          <p:cNvSpPr>
+            <a:spLocks xmlns:a="http://schemas.openxmlformats.org/drawingml/2006/main" noGrp="1"/>
+          </p:cNvSpPr>
+          <p:nvPr/>
+        </p:nvSpPr>
+        <p:spPr>
+          <a:xfrm xmlns:a="http://schemas.openxmlformats.org/drawingml/2006/main">
+            <a:off x="6381750" y="2419350"/>
+            <a:ext cx="4762500" cy="361950"/>
+          </a:xfrm>
+          <a:prstGeom xmlns:a="http://schemas.openxmlformats.org/drawingml/2006/main" prst="rect">
+            <a:avLst/>
+          </a:prstGeom>
+          <a:noFill xmlns:a="http://schemas.openxmlformats.org/drawingml/2006/main"/>
+          <a:ln xmlns:a="http://schemas.openxmlformats.org/drawingml/2006/main" w="0">
+            <a:noFill/>
+            <a:prstDash val="solid"/>
+          </a:ln>
+        </p:spPr>
+        <p:txBody>
+          <a:bodyPr xmlns:a="http://schemas.openxmlformats.org/drawingml/2006/main" anchor="t"/>
+          <a:lstStyle xmlns:a="http://schemas.openxmlformats.org/drawingml/2006/main"/>
+          <a:p xmlns:a="http://schemas.openxmlformats.org/drawingml/2006/main">
+            <a:pPr algn="l">
+              <a:defRPr sz="2100" b="1">
+                <a:solidFill>
+                  <a:srgbClr val="000000"/>
+                </a:solidFill>
+              </a:defRPr>
+            </a:pPr>
+            <a:r>
+              <a:rPr sz="2100" b="1">
+                <a:solidFill>
+                  <a:srgbClr val="000000"/>
+                </a:solidFill>
+              </a:rPr>
+              <a:t>Calm-pullback rebound</a:t>
+            </a:r>
+          </a:p>
+        </p:txBody>
+      </p:sp>
+      <p:sp>
+        <p:nvSpPr>
+          <p:cNvPr id="13" name="">
+            <a:extLst xmlns:a="http://schemas.openxmlformats.org/drawingml/2006/main">
+              <a:ext uri="{FF2B5EF4-FFF2-40B4-BE49-F238E27FC236}">
+                <a16:creationId xmlns:a16="http://schemas.microsoft.com/office/drawing/2014/main" id="{0F4910B5-B669-4791-AA8E-2D13AE8A38F6}"/>
+              </a:ext>
+            </a:extLst>
+          </p:cNvPr>
+          <p:cNvSpPr>
+            <a:spLocks xmlns:a="http://schemas.openxmlformats.org/drawingml/2006/main" noGrp="1"/>
+          </p:cNvSpPr>
+          <p:nvPr/>
+        </p:nvSpPr>
+        <p:spPr>
+          <a:xfrm xmlns:a="http://schemas.openxmlformats.org/drawingml/2006/main">
+            <a:off x="6381750" y="3009900"/>
+            <a:ext cx="4762500" cy="571500"/>
+          </a:xfrm>
+          <a:prstGeom xmlns:a="http://schemas.openxmlformats.org/drawingml/2006/main" prst="rect">
+            <a:avLst/>
+          </a:prstGeom>
+          <a:noFill xmlns:a="http://schemas.openxmlformats.org/drawingml/2006/main"/>
+          <a:ln xmlns:a="http://schemas.openxmlformats.org/drawingml/2006/main" w="0">
+            <a:noFill/>
+            <a:prstDash val="solid"/>
+          </a:ln>
+        </p:spPr>
+        <p:txBody>
+          <a:bodyPr xmlns:a="http://schemas.openxmlformats.org/drawingml/2006/main" anchor="t"/>
+          <a:lstStyle xmlns:a="http://schemas.openxmlformats.org/drawingml/2006/main"/>
+          <a:p xmlns:a="http://schemas.openxmlformats.org/drawingml/2006/main">
+            <a:pPr algn="l">
+              <a:defRPr sz="1575" b="0">
+                <a:solidFill>
+                  <a:srgbClr val="24364B"/>
+                </a:solidFill>
+              </a:defRPr>
+            </a:pPr>
+            <a:r>
+              <a:rPr sz="1575" b="0">
+                <a:solidFill>
+                  <a:srgbClr val="24364B"/>
+                </a:solidFill>
+              </a:rPr>
+              <a:t>The joint loss-plus-not-high-ATR rule clears drift and its simple controls in TRAIN.</a:t>
+            </a:r>
+          </a:p>
+        </p:txBody>
+      </p:sp>
+      <p:sp>
+        <p:nvSpPr>
+          <p:cNvPr id="14" name="">
+            <a:extLst xmlns:a="http://schemas.openxmlformats.org/drawingml/2006/main">
+              <a:ext uri="{FF2B5EF4-FFF2-40B4-BE49-F238E27FC236}">
+                <a16:creationId xmlns:a16="http://schemas.microsoft.com/office/drawing/2014/main" id="{29841346-7737-45BB-8F36-05318E79FEE6}"/>
+              </a:ext>
+            </a:extLst>
+          </p:cNvPr>
+          <p:cNvSpPr>
+            <a:spLocks xmlns:a="http://schemas.openxmlformats.org/drawingml/2006/main" noGrp="1"/>
+          </p:cNvSpPr>
+          <p:nvPr/>
+        </p:nvSpPr>
+        <p:spPr>
+          <a:xfrm xmlns:a="http://schemas.openxmlformats.org/drawingml/2006/main">
+            <a:off x="552450" y="4248150"/>
+            <a:ext cx="5048250" cy="361950"/>
+          </a:xfrm>
+          <a:prstGeom xmlns:a="http://schemas.openxmlformats.org/drawingml/2006/main" prst="rect">
+            <a:avLst/>
+          </a:prstGeom>
+          <a:noFill xmlns:a="http://schemas.openxmlformats.org/drawingml/2006/main"/>
+          <a:ln xmlns:a="http://schemas.openxmlformats.org/drawingml/2006/main" w="0">
+            <a:noFill/>
+            <a:prstDash val="solid"/>
+          </a:ln>
+        </p:spPr>
+        <p:txBody>
+          <a:bodyPr xmlns:a="http://schemas.openxmlformats.org/drawingml/2006/main" anchor="t"/>
+          <a:lstStyle xmlns:a="http://schemas.openxmlformats.org/drawingml/2006/main"/>
+          <a:p xmlns:a="http://schemas.openxmlformats.org/drawingml/2006/main">
+            <a:pPr algn="l">
+              <a:defRPr sz="2100" b="1">
+                <a:solidFill>
+                  <a:srgbClr val="000000"/>
+                </a:solidFill>
+              </a:defRPr>
+            </a:pPr>
+            <a:r>
+              <a:rPr sz="2100" b="1">
+                <a:solidFill>
+                  <a:srgbClr val="000000"/>
+                </a:solidFill>
+              </a:rPr>
+              <a:t>What this does—and does not—mean</a:t>
+            </a:r>
+          </a:p>
+        </p:txBody>
+      </p:sp>
+      <p:sp>
+        <p:nvSpPr>
+          <p:cNvPr id="15" name="">
+            <a:extLst xmlns:a="http://schemas.openxmlformats.org/drawingml/2006/main">
+              <a:ext uri="{FF2B5EF4-FFF2-40B4-BE49-F238E27FC236}">
+                <a16:creationId xmlns:a16="http://schemas.microsoft.com/office/drawing/2014/main" id="{AE56921B-04C4-4EE0-8BDD-7390D30DA1AC}"/>
+              </a:ext>
+            </a:extLst>
+          </p:cNvPr>
+          <p:cNvSpPr>
+            <a:spLocks xmlns:a="http://schemas.openxmlformats.org/drawingml/2006/main" noGrp="1"/>
+          </p:cNvSpPr>
+          <p:nvPr/>
+        </p:nvSpPr>
+        <p:spPr>
+          <a:xfrm xmlns:a="http://schemas.openxmlformats.org/drawingml/2006/main">
+            <a:off x="685800" y="4943475"/>
+            <a:ext cx="85725" cy="85725"/>
+          </a:xfrm>
+          <a:prstGeom xmlns:a="http://schemas.openxmlformats.org/drawingml/2006/main" prst="rect">
+            <a:avLst/>
+          </a:prstGeom>
+          <a:solidFill xmlns:a="http://schemas.openxmlformats.org/drawingml/2006/main">
+            <a:srgbClr val="14866D"/>
+          </a:solidFill>
+          <a:ln xmlns:a="http://schemas.openxmlformats.org/drawingml/2006/main" w="0">
+            <a:solidFill>
+              <a:srgbClr val="14866D"/>
+            </a:solidFill>
+            <a:prstDash val="solid"/>
+          </a:ln>
+        </p:spPr>
+      </p:sp>
+      <p:sp>
+        <p:nvSpPr>
+          <p:cNvPr id="16" name="">
+            <a:extLst xmlns:a="http://schemas.openxmlformats.org/drawingml/2006/main">
+              <a:ext uri="{FF2B5EF4-FFF2-40B4-BE49-F238E27FC236}">
+                <a16:creationId xmlns:a16="http://schemas.microsoft.com/office/drawing/2014/main" id="{169D789F-BD4B-40D8-AF8E-AA923F98C523}"/>
+              </a:ext>
+            </a:extLst>
+          </p:cNvPr>
+          <p:cNvSpPr>
+            <a:spLocks xmlns:a="http://schemas.openxmlformats.org/drawingml/2006/main" noGrp="1"/>
+          </p:cNvSpPr>
+          <p:nvPr/>
+        </p:nvSpPr>
+        <p:spPr>
+          <a:xfrm xmlns:a="http://schemas.openxmlformats.org/drawingml/2006/main">
+            <a:off x="914400" y="4857750"/>
+            <a:ext cx="10248900" cy="590550"/>
+          </a:xfrm>
+          <a:prstGeom xmlns:a="http://schemas.openxmlformats.org/drawingml/2006/main" prst="rect">
+            <a:avLst/>
+          </a:prstGeom>
+          <a:noFill xmlns:a="http://schemas.openxmlformats.org/drawingml/2006/main"/>
+          <a:ln xmlns:a="http://schemas.openxmlformats.org/drawingml/2006/main" w="0">
+            <a:noFill/>
+            <a:prstDash val="solid"/>
+          </a:ln>
+        </p:spPr>
+        <p:txBody>
+          <a:bodyPr xmlns:a="http://schemas.openxmlformats.org/drawingml/2006/main" anchor="t"/>
+          <a:lstStyle xmlns:a="http://schemas.openxmlformats.org/drawingml/2006/main"/>
+          <a:p xmlns:a="http://schemas.openxmlformats.org/drawingml/2006/main">
+            <a:pPr algn="l">
+              <a:defRPr sz="1575" b="0">
+                <a:solidFill>
+                  <a:srgbClr val="24364B"/>
+                </a:solidFill>
+              </a:defRPr>
+            </a:pPr>
+            <a:r>
+              <a:rPr sz="1575" b="0">
+                <a:solidFill>
+                  <a:srgbClr val="24364B"/>
+                </a:solidFill>
+              </a:rPr>
+              <a:t>It proves the descriptive rebound clue can survive next-open timing, costs, and no-overlap construction.</a:t>
+            </a:r>
+          </a:p>
+        </p:txBody>
+      </p:sp>
+      <p:sp>
+        <p:nvSpPr>
+          <p:cNvPr id="17" name="">
+            <a:extLst xmlns:a="http://schemas.openxmlformats.org/drawingml/2006/main">
+              <a:ext uri="{FF2B5EF4-FFF2-40B4-BE49-F238E27FC236}">
+                <a16:creationId xmlns:a16="http://schemas.microsoft.com/office/drawing/2014/main" id="{DCF6F615-7659-4F57-808B-3BFE55050F05}"/>
+              </a:ext>
+            </a:extLst>
+          </p:cNvPr>
+          <p:cNvSpPr>
+            <a:spLocks xmlns:a="http://schemas.openxmlformats.org/drawingml/2006/main" noGrp="1"/>
+          </p:cNvSpPr>
+          <p:nvPr/>
+        </p:nvSpPr>
+        <p:spPr>
+          <a:xfrm xmlns:a="http://schemas.openxmlformats.org/drawingml/2006/main">
+            <a:off x="685800" y="5629275"/>
+            <a:ext cx="85725" cy="85725"/>
+          </a:xfrm>
+          <a:prstGeom xmlns:a="http://schemas.openxmlformats.org/drawingml/2006/main" prst="rect">
+            <a:avLst/>
+          </a:prstGeom>
+          <a:solidFill xmlns:a="http://schemas.openxmlformats.org/drawingml/2006/main">
+            <a:srgbClr val="B44738"/>
+          </a:solidFill>
+          <a:ln xmlns:a="http://schemas.openxmlformats.org/drawingml/2006/main" w="0">
+            <a:solidFill>
+              <a:srgbClr val="B44738"/>
+            </a:solidFill>
+            <a:prstDash val="solid"/>
+          </a:ln>
+        </p:spPr>
+      </p:sp>
+      <p:sp>
+        <p:nvSpPr>
+          <p:cNvPr id="18" name="">
+            <a:extLst xmlns:a="http://schemas.openxmlformats.org/drawingml/2006/main">
+              <a:ext uri="{FF2B5EF4-FFF2-40B4-BE49-F238E27FC236}">
+                <a16:creationId xmlns:a16="http://schemas.microsoft.com/office/drawing/2014/main" id="{4344FC97-1CD0-4B51-99E7-6708FE86C400}"/>
+              </a:ext>
+            </a:extLst>
+          </p:cNvPr>
+          <p:cNvSpPr>
+            <a:spLocks xmlns:a="http://schemas.openxmlformats.org/drawingml/2006/main" noGrp="1"/>
+          </p:cNvSpPr>
+          <p:nvPr/>
+        </p:nvSpPr>
+        <p:spPr>
+          <a:xfrm xmlns:a="http://schemas.openxmlformats.org/drawingml/2006/main">
+            <a:off x="914400" y="5543550"/>
+            <a:ext cx="10248900" cy="590550"/>
+          </a:xfrm>
+          <a:prstGeom xmlns:a="http://schemas.openxmlformats.org/drawingml/2006/main" prst="rect">
+            <a:avLst/>
+          </a:prstGeom>
+          <a:noFill xmlns:a="http://schemas.openxmlformats.org/drawingml/2006/main"/>
+          <a:ln xmlns:a="http://schemas.openxmlformats.org/drawingml/2006/main" w="0">
+            <a:noFill/>
+            <a:prstDash val="solid"/>
+          </a:ln>
+        </p:spPr>
+        <p:txBody>
+          <a:bodyPr xmlns:a="http://schemas.openxmlformats.org/drawingml/2006/main" anchor="t"/>
+          <a:lstStyle xmlns:a="http://schemas.openxmlformats.org/drawingml/2006/main"/>
+          <a:p xmlns:a="http://schemas.openxmlformats.org/drawingml/2006/main">
+            <a:pPr algn="l">
+              <a:defRPr sz="1575" b="0">
+                <a:solidFill>
+                  <a:srgbClr val="24364B"/>
+                </a:solidFill>
+              </a:defRPr>
+            </a:pPr>
+            <a:r>
+              <a:rPr sz="1575" b="0">
+                <a:solidFill>
+                  <a:srgbClr val="24364B"/>
+                </a:solidFill>
+              </a:rPr>
+              <a:t>It does not prove generalization, robustness to nearby definitions, capacity, or live edge.</a:t>
+            </a:r>
+          </a:p>
+        </p:txBody>
+      </p:sp>
+      <p:sp>
+        <p:nvSpPr>
+          <p:cNvPr id="19" name="">
+            <a:extLst xmlns:a="http://schemas.openxmlformats.org/drawingml/2006/main">
+              <a:ext uri="{FF2B5EF4-FFF2-40B4-BE49-F238E27FC236}">
+                <a16:creationId xmlns:a16="http://schemas.microsoft.com/office/drawing/2014/main" id="{8458DE03-83F1-4C1B-98F7-AC7386AF6CFB}"/>
+              </a:ext>
+            </a:extLst>
+          </p:cNvPr>
+          <p:cNvSpPr>
+            <a:spLocks xmlns:a="http://schemas.openxmlformats.org/drawingml/2006/main" noGrp="1"/>
+          </p:cNvSpPr>
+          <p:nvPr/>
+        </p:nvSpPr>
+        <p:spPr>
+          <a:xfrm xmlns:a="http://schemas.openxmlformats.org/drawingml/2006/main">
+            <a:off x="552450" y="6210300"/>
+            <a:ext cx="11087100" cy="247650"/>
+          </a:xfrm>
+          <a:prstGeom xmlns:a="http://schemas.openxmlformats.org/drawingml/2006/main" prst="rect">
+            <a:avLst/>
+          </a:prstGeom>
+          <a:noFill xmlns:a="http://schemas.openxmlformats.org/drawingml/2006/main"/>
+          <a:ln xmlns:a="http://schemas.openxmlformats.org/drawingml/2006/main" w="0">
+            <a:noFill/>
+            <a:prstDash val="solid"/>
+          </a:ln>
+        </p:spPr>
+        <p:txBody>
+          <a:bodyPr xmlns:a="http://schemas.openxmlformats.org/drawingml/2006/main" anchor="t"/>
+          <a:lstStyle xmlns:a="http://schemas.openxmlformats.org/drawingml/2006/main"/>
+          <a:p xmlns:a="http://schemas.openxmlformats.org/drawingml/2006/main">
+            <a:pPr algn="ctr">
+              <a:defRPr sz="1275" b="1">
+                <a:solidFill>
+                  <a:srgbClr val="24364B"/>
+                </a:solidFill>
+              </a:defRPr>
+            </a:pPr>
+            <a:r>
+              <a:rPr sz="1275" b="1">
+                <a:solidFill>
+                  <a:srgbClr val="24364B"/>
+                </a:solidFill>
+              </a:rPr>
+              <a:t>NEXT GATE: freeze this exact rule, then read the untouched 2024+ period once—without rescue tuning.</a:t>
+            </a:r>
+          </a:p>
+        </p:txBody>
+      </p:sp>
+    </p:spTree>
+    <p:extLst>
+      <p:ext uri="{BB962C8B-B14F-4D97-AF65-F5344CB8AC3E}">
+        <p14:creationId xmlns:p14="http://schemas.microsoft.com/office/powerpoint/2010/main" val="1930858624"/>
       </p:ext>
     </p:extLst>
   </p:cSld>
@@ -7764,7 +13539,7 @@
           <p:cNvPr id="17" name="">
             <a:extLst xmlns:a="http://schemas.openxmlformats.org/drawingml/2006/main">
               <a:ext uri="{FF2B5EF4-FFF2-40B4-BE49-F238E27FC236}">
-                <a16:creationId xmlns:a16="http://schemas.microsoft.com/office/drawing/2014/main" id="{16728126-07A1-4A95-9C5C-304402EAC113}"/>
+                <a16:creationId xmlns:a16="http://schemas.microsoft.com/office/drawing/2014/main" id="{644C1EA6-653F-4287-ACD8-11447BEB8868}"/>
               </a:ext>
             </a:extLst>
           </p:cNvPr>
@@ -7814,7 +13589,7 @@
           <p:cNvPr id="2" name="">
             <a:extLst xmlns:a="http://schemas.openxmlformats.org/drawingml/2006/main">
               <a:ext uri="{FF2B5EF4-FFF2-40B4-BE49-F238E27FC236}">
-                <a16:creationId xmlns:a16="http://schemas.microsoft.com/office/drawing/2014/main" id="{5BCA945F-EE12-4679-8F14-5042BCF0B8CB}"/>
+                <a16:creationId xmlns:a16="http://schemas.microsoft.com/office/drawing/2014/main" id="{8DAE3C0E-6B5C-4EFB-B796-94B5DC321A68}"/>
               </a:ext>
             </a:extLst>
           </p:cNvPr>
@@ -7864,7 +13639,7 @@
           <p:cNvPr id="3" name="">
             <a:extLst xmlns:a="http://schemas.openxmlformats.org/drawingml/2006/main">
               <a:ext uri="{FF2B5EF4-FFF2-40B4-BE49-F238E27FC236}">
-                <a16:creationId xmlns:a16="http://schemas.microsoft.com/office/drawing/2014/main" id="{68297377-2514-4753-9001-F0E4BFE8269F}"/>
+                <a16:creationId xmlns:a16="http://schemas.microsoft.com/office/drawing/2014/main" id="{D272C0F0-DE67-4EA7-9093-8EB5AFA1A6BF}"/>
               </a:ext>
             </a:extLst>
           </p:cNvPr>
@@ -7897,7 +13672,7 @@
           <p:cNvPr id="4" name="">
             <a:extLst xmlns:a="http://schemas.openxmlformats.org/drawingml/2006/main">
               <a:ext uri="{FF2B5EF4-FFF2-40B4-BE49-F238E27FC236}">
-                <a16:creationId xmlns:a16="http://schemas.microsoft.com/office/drawing/2014/main" id="{1865995C-CE79-4466-9694-B4FE6DD9CFB7}"/>
+                <a16:creationId xmlns:a16="http://schemas.microsoft.com/office/drawing/2014/main" id="{33BF234A-8521-429F-BF10-7717D9FAA33A}"/>
               </a:ext>
             </a:extLst>
           </p:cNvPr>
@@ -7947,7 +13722,7 @@
           <p:cNvPr id="5" name="">
             <a:extLst xmlns:a="http://schemas.openxmlformats.org/drawingml/2006/main">
               <a:ext uri="{FF2B5EF4-FFF2-40B4-BE49-F238E27FC236}">
-                <a16:creationId xmlns:a16="http://schemas.microsoft.com/office/drawing/2014/main" id="{A24F33E8-E3C9-4474-8B36-3EE46DBBFCB8}"/>
+                <a16:creationId xmlns:a16="http://schemas.microsoft.com/office/drawing/2014/main" id="{00445E29-071C-44AC-9A05-0A0730D1B9DD}"/>
               </a:ext>
             </a:extLst>
           </p:cNvPr>
@@ -8001,7 +13776,7 @@
           <p:nvPr/>
         </p:nvPicPr>
         <p:blipFill>
-          <a:blip xmlns:r="http://schemas.openxmlformats.org/officeDocument/2006/relationships" xmlns:a="http://schemas.openxmlformats.org/drawingml/2006/main" r:embed="R585b7cb9a7804a2d"/>
+          <a:blip xmlns:r="http://schemas.openxmlformats.org/officeDocument/2006/relationships" xmlns:a="http://schemas.openxmlformats.org/drawingml/2006/main" r:embed="R4f6df5fecc0049ac"/>
           <a:stretch xmlns:a="http://schemas.openxmlformats.org/drawingml/2006/main"/>
         </p:blipFill>
         <p:spPr>
@@ -8019,7 +13794,7 @@
           <p:cNvPr id="7" name="">
             <a:extLst xmlns:a="http://schemas.openxmlformats.org/drawingml/2006/main">
               <a:ext uri="{FF2B5EF4-FFF2-40B4-BE49-F238E27FC236}">
-                <a16:creationId xmlns:a16="http://schemas.microsoft.com/office/drawing/2014/main" id="{6E4C8805-94E2-4092-80DD-F5B8B96C79AD}"/>
+                <a16:creationId xmlns:a16="http://schemas.microsoft.com/office/drawing/2014/main" id="{65E20CB8-F753-42ED-B2B1-CC1B09CC8469}"/>
               </a:ext>
             </a:extLst>
           </p:cNvPr>
@@ -8052,7 +13827,7 @@
           <p:cNvPr id="8" name="">
             <a:extLst xmlns:a="http://schemas.openxmlformats.org/drawingml/2006/main">
               <a:ext uri="{FF2B5EF4-FFF2-40B4-BE49-F238E27FC236}">
-                <a16:creationId xmlns:a16="http://schemas.microsoft.com/office/drawing/2014/main" id="{5B4B8586-E25C-415D-9649-6568C54B4C64}"/>
+                <a16:creationId xmlns:a16="http://schemas.microsoft.com/office/drawing/2014/main" id="{C7A5219E-B9A7-4EC0-A573-382B927CF3D3}"/>
               </a:ext>
             </a:extLst>
           </p:cNvPr>
@@ -8102,7 +13877,7 @@
           <p:cNvPr id="9" name="">
             <a:extLst xmlns:a="http://schemas.openxmlformats.org/drawingml/2006/main">
               <a:ext uri="{FF2B5EF4-FFF2-40B4-BE49-F238E27FC236}">
-                <a16:creationId xmlns:a16="http://schemas.microsoft.com/office/drawing/2014/main" id="{13FE671A-C1BA-43BC-B1CC-F60AD1C6DC4D}"/>
+                <a16:creationId xmlns:a16="http://schemas.microsoft.com/office/drawing/2014/main" id="{3EEC2D2D-0DE5-4FB6-84A6-EEA3F37ABB0E}"/>
               </a:ext>
             </a:extLst>
           </p:cNvPr>
@@ -8135,7 +13910,7 @@
           <p:cNvPr id="10" name="">
             <a:extLst xmlns:a="http://schemas.openxmlformats.org/drawingml/2006/main">
               <a:ext uri="{FF2B5EF4-FFF2-40B4-BE49-F238E27FC236}">
-                <a16:creationId xmlns:a16="http://schemas.microsoft.com/office/drawing/2014/main" id="{2FA4B6A5-49D0-4D48-A073-4A666836C6B9}"/>
+                <a16:creationId xmlns:a16="http://schemas.microsoft.com/office/drawing/2014/main" id="{6A13733E-9F2C-44E9-8329-4D453A2381CD}"/>
               </a:ext>
             </a:extLst>
           </p:cNvPr>
@@ -8185,7 +13960,7 @@
           <p:cNvPr id="11" name="">
             <a:extLst xmlns:a="http://schemas.openxmlformats.org/drawingml/2006/main">
               <a:ext uri="{FF2B5EF4-FFF2-40B4-BE49-F238E27FC236}">
-                <a16:creationId xmlns:a16="http://schemas.microsoft.com/office/drawing/2014/main" id="{267DBA9D-54AC-462A-A027-B5AC9541B3A8}"/>
+                <a16:creationId xmlns:a16="http://schemas.microsoft.com/office/drawing/2014/main" id="{C127FF7A-5A7E-4AE3-9148-A95BC61DCBA9}"/>
               </a:ext>
             </a:extLst>
           </p:cNvPr>
@@ -8218,7 +13993,7 @@
           <p:cNvPr id="12" name="">
             <a:extLst xmlns:a="http://schemas.openxmlformats.org/drawingml/2006/main">
               <a:ext uri="{FF2B5EF4-FFF2-40B4-BE49-F238E27FC236}">
-                <a16:creationId xmlns:a16="http://schemas.microsoft.com/office/drawing/2014/main" id="{8BAA9687-DE26-47BC-8393-7F20690EBB42}"/>
+                <a16:creationId xmlns:a16="http://schemas.microsoft.com/office/drawing/2014/main" id="{E7D7C71E-03DB-4E75-BBD8-B0EE408EE1EE}"/>
               </a:ext>
             </a:extLst>
           </p:cNvPr>
@@ -8268,7 +14043,7 @@
           <p:cNvPr id="13" name="">
             <a:extLst xmlns:a="http://schemas.openxmlformats.org/drawingml/2006/main">
               <a:ext uri="{FF2B5EF4-FFF2-40B4-BE49-F238E27FC236}">
-                <a16:creationId xmlns:a16="http://schemas.microsoft.com/office/drawing/2014/main" id="{841CF7A0-A235-441B-BDC2-D023BD24D788}"/>
+                <a16:creationId xmlns:a16="http://schemas.microsoft.com/office/drawing/2014/main" id="{C118B84D-912C-4736-9233-393E260A1918}"/>
               </a:ext>
             </a:extLst>
           </p:cNvPr>
@@ -8301,7 +14076,7 @@
           <p:cNvPr id="14" name="">
             <a:extLst xmlns:a="http://schemas.openxmlformats.org/drawingml/2006/main">
               <a:ext uri="{FF2B5EF4-FFF2-40B4-BE49-F238E27FC236}">
-                <a16:creationId xmlns:a16="http://schemas.microsoft.com/office/drawing/2014/main" id="{B89B80EC-1C2A-4405-AE25-E0C8B4B6B8BE}"/>
+                <a16:creationId xmlns:a16="http://schemas.microsoft.com/office/drawing/2014/main" id="{F09B2D7A-09BE-48AF-A049-4EAF0CBCCC2A}"/>
               </a:ext>
             </a:extLst>
           </p:cNvPr>
@@ -8351,7 +14126,7 @@
           <p:cNvPr id="15" name="">
             <a:extLst xmlns:a="http://schemas.openxmlformats.org/drawingml/2006/main">
               <a:ext uri="{FF2B5EF4-FFF2-40B4-BE49-F238E27FC236}">
-                <a16:creationId xmlns:a16="http://schemas.microsoft.com/office/drawing/2014/main" id="{05575A11-D66E-4931-9922-5E9AD5C80E6F}"/>
+                <a16:creationId xmlns:a16="http://schemas.microsoft.com/office/drawing/2014/main" id="{E1DD745E-2E8B-41A9-97E7-B6F4A5C622E9}"/>
               </a:ext>
             </a:extLst>
           </p:cNvPr>
@@ -8384,7 +14159,7 @@
           <p:cNvPr id="16" name="">
             <a:extLst xmlns:a="http://schemas.openxmlformats.org/drawingml/2006/main">
               <a:ext uri="{FF2B5EF4-FFF2-40B4-BE49-F238E27FC236}">
-                <a16:creationId xmlns:a16="http://schemas.microsoft.com/office/drawing/2014/main" id="{D1822A61-DBB0-40A0-9D65-9F6A87A62659}"/>
+                <a16:creationId xmlns:a16="http://schemas.microsoft.com/office/drawing/2014/main" id="{B2A34EC4-1588-47F8-AFD4-C9E4090B79F4}"/>
               </a:ext>
             </a:extLst>
           </p:cNvPr>
@@ -8432,7 +14207,7 @@
     </p:spTree>
     <p:extLst>
       <p:ext uri="{BB962C8B-B14F-4D97-AF65-F5344CB8AC3E}">
-        <p14:creationId xmlns:p14="http://schemas.microsoft.com/office/powerpoint/2010/main" val="28254506"/>
+        <p14:creationId xmlns:p14="http://schemas.microsoft.com/office/powerpoint/2010/main" val="1763957723"/>
       </p:ext>
     </p:extLst>
   </p:cSld>
@@ -8463,7 +14238,7 @@
           <p:cNvPr id="37" name="">
             <a:extLst xmlns:a="http://schemas.openxmlformats.org/drawingml/2006/main">
               <a:ext uri="{FF2B5EF4-FFF2-40B4-BE49-F238E27FC236}">
-                <a16:creationId xmlns:a16="http://schemas.microsoft.com/office/drawing/2014/main" id="{D5F3374B-BA98-4505-B8E7-40137CBE58FE}"/>
+                <a16:creationId xmlns:a16="http://schemas.microsoft.com/office/drawing/2014/main" id="{AD3A92A5-957B-42CF-9C3E-E574587135EA}"/>
               </a:ext>
             </a:extLst>
           </p:cNvPr>
@@ -8513,7 +14288,7 @@
           <p:cNvPr id="2" name="">
             <a:extLst xmlns:a="http://schemas.openxmlformats.org/drawingml/2006/main">
               <a:ext uri="{FF2B5EF4-FFF2-40B4-BE49-F238E27FC236}">
-                <a16:creationId xmlns:a16="http://schemas.microsoft.com/office/drawing/2014/main" id="{2EBAFA53-9F22-4EEC-983D-16AC8626D6DA}"/>
+                <a16:creationId xmlns:a16="http://schemas.microsoft.com/office/drawing/2014/main" id="{D30EAFA0-0203-4C66-B5BB-A818B62CCB73}"/>
               </a:ext>
             </a:extLst>
           </p:cNvPr>
@@ -8563,7 +14338,7 @@
           <p:cNvPr id="3" name="">
             <a:extLst xmlns:a="http://schemas.openxmlformats.org/drawingml/2006/main">
               <a:ext uri="{FF2B5EF4-FFF2-40B4-BE49-F238E27FC236}">
-                <a16:creationId xmlns:a16="http://schemas.microsoft.com/office/drawing/2014/main" id="{6C5CC1E3-B73E-4BF1-A74F-38BB84055140}"/>
+                <a16:creationId xmlns:a16="http://schemas.microsoft.com/office/drawing/2014/main" id="{CD041A14-579D-4F90-A310-09E3D886037D}"/>
               </a:ext>
             </a:extLst>
           </p:cNvPr>
@@ -8596,7 +14371,7 @@
           <p:cNvPr id="4" name="">
             <a:extLst xmlns:a="http://schemas.openxmlformats.org/drawingml/2006/main">
               <a:ext uri="{FF2B5EF4-FFF2-40B4-BE49-F238E27FC236}">
-                <a16:creationId xmlns:a16="http://schemas.microsoft.com/office/drawing/2014/main" id="{9CF809FF-BAD6-463A-8D55-C42326FE6D9B}"/>
+                <a16:creationId xmlns:a16="http://schemas.microsoft.com/office/drawing/2014/main" id="{B52EE072-E03C-4295-AD67-EF392579B091}"/>
               </a:ext>
             </a:extLst>
           </p:cNvPr>
@@ -8646,7 +14421,7 @@
           <p:cNvPr id="5" name="">
             <a:extLst xmlns:a="http://schemas.openxmlformats.org/drawingml/2006/main">
               <a:ext uri="{FF2B5EF4-FFF2-40B4-BE49-F238E27FC236}">
-                <a16:creationId xmlns:a16="http://schemas.microsoft.com/office/drawing/2014/main" id="{685024D1-AABF-4DF3-ACC2-67D6DCDB2502}"/>
+                <a16:creationId xmlns:a16="http://schemas.microsoft.com/office/drawing/2014/main" id="{6995E440-2B24-456F-B076-47DA09752CEA}"/>
               </a:ext>
             </a:extLst>
           </p:cNvPr>
@@ -8696,7 +14471,7 @@
           <p:cNvPr id="6" name="">
             <a:extLst xmlns:a="http://schemas.openxmlformats.org/drawingml/2006/main">
               <a:ext uri="{FF2B5EF4-FFF2-40B4-BE49-F238E27FC236}">
-                <a16:creationId xmlns:a16="http://schemas.microsoft.com/office/drawing/2014/main" id="{BF3556EE-3EF6-4287-A7D9-C11E5B2DFD94}"/>
+                <a16:creationId xmlns:a16="http://schemas.microsoft.com/office/drawing/2014/main" id="{02E2F2D5-DCB7-42D8-9BFC-37CBA8BEBF52}"/>
               </a:ext>
             </a:extLst>
           </p:cNvPr>
@@ -8729,7 +14504,7 @@
           <p:cNvPr id="7" name="">
             <a:extLst xmlns:a="http://schemas.openxmlformats.org/drawingml/2006/main">
               <a:ext uri="{FF2B5EF4-FFF2-40B4-BE49-F238E27FC236}">
-                <a16:creationId xmlns:a16="http://schemas.microsoft.com/office/drawing/2014/main" id="{283C9789-C812-40C8-B89E-A921A546BFFB}"/>
+                <a16:creationId xmlns:a16="http://schemas.microsoft.com/office/drawing/2014/main" id="{630C950B-2782-4047-9B86-7DFB691EDAC9}"/>
               </a:ext>
             </a:extLst>
           </p:cNvPr>
@@ -8762,7 +14537,7 @@
           <p:cNvPr id="8" name="">
             <a:extLst xmlns:a="http://schemas.openxmlformats.org/drawingml/2006/main">
               <a:ext uri="{FF2B5EF4-FFF2-40B4-BE49-F238E27FC236}">
-                <a16:creationId xmlns:a16="http://schemas.microsoft.com/office/drawing/2014/main" id="{329B0DB9-2D9D-4EED-8751-AFF54B34ADA8}"/>
+                <a16:creationId xmlns:a16="http://schemas.microsoft.com/office/drawing/2014/main" id="{4721911E-B150-4576-B617-631F7AC8B771}"/>
               </a:ext>
             </a:extLst>
           </p:cNvPr>
@@ -8812,7 +14587,7 @@
           <p:cNvPr id="9" name="">
             <a:extLst xmlns:a="http://schemas.openxmlformats.org/drawingml/2006/main">
               <a:ext uri="{FF2B5EF4-FFF2-40B4-BE49-F238E27FC236}">
-                <a16:creationId xmlns:a16="http://schemas.microsoft.com/office/drawing/2014/main" id="{70FB9FE7-2CF2-42CE-9C61-E5934B82846F}"/>
+                <a16:creationId xmlns:a16="http://schemas.microsoft.com/office/drawing/2014/main" id="{12C770CC-682F-4B9F-9346-52080AA15265}"/>
               </a:ext>
             </a:extLst>
           </p:cNvPr>
@@ -8862,7 +14637,7 @@
           <p:cNvPr id="10" name="">
             <a:extLst xmlns:a="http://schemas.openxmlformats.org/drawingml/2006/main">
               <a:ext uri="{FF2B5EF4-FFF2-40B4-BE49-F238E27FC236}">
-                <a16:creationId xmlns:a16="http://schemas.microsoft.com/office/drawing/2014/main" id="{17703E08-5542-44B7-9291-1749F6F8BB74}"/>
+                <a16:creationId xmlns:a16="http://schemas.microsoft.com/office/drawing/2014/main" id="{2EFB318B-3EE5-4824-87D7-418BBF5E31B6}"/>
               </a:ext>
             </a:extLst>
           </p:cNvPr>
@@ -8912,7 +14687,7 @@
           <p:cNvPr id="11" name="">
             <a:extLst xmlns:a="http://schemas.openxmlformats.org/drawingml/2006/main">
               <a:ext uri="{FF2B5EF4-FFF2-40B4-BE49-F238E27FC236}">
-                <a16:creationId xmlns:a16="http://schemas.microsoft.com/office/drawing/2014/main" id="{44B483C0-2A82-49D4-A7A5-FC441E79913E}"/>
+                <a16:creationId xmlns:a16="http://schemas.microsoft.com/office/drawing/2014/main" id="{EE3C9639-B813-4BA2-B1F8-5A030CABB714}"/>
               </a:ext>
             </a:extLst>
           </p:cNvPr>
@@ -8945,7 +14720,7 @@
           <p:cNvPr id="12" name="">
             <a:extLst xmlns:a="http://schemas.openxmlformats.org/drawingml/2006/main">
               <a:ext uri="{FF2B5EF4-FFF2-40B4-BE49-F238E27FC236}">
-                <a16:creationId xmlns:a16="http://schemas.microsoft.com/office/drawing/2014/main" id="{6B8BFB5C-2ABE-4F15-8BCB-BD6E389DC869}"/>
+                <a16:creationId xmlns:a16="http://schemas.microsoft.com/office/drawing/2014/main" id="{775DE12E-41B8-442E-9458-FE759AF0501F}"/>
               </a:ext>
             </a:extLst>
           </p:cNvPr>
@@ -8978,7 +14753,7 @@
           <p:cNvPr id="13" name="">
             <a:extLst xmlns:a="http://schemas.openxmlformats.org/drawingml/2006/main">
               <a:ext uri="{FF2B5EF4-FFF2-40B4-BE49-F238E27FC236}">
-                <a16:creationId xmlns:a16="http://schemas.microsoft.com/office/drawing/2014/main" id="{FA886450-6F34-4C2D-9247-B6C03D341E8B}"/>
+                <a16:creationId xmlns:a16="http://schemas.microsoft.com/office/drawing/2014/main" id="{8C3860BC-26EF-4C39-B3D6-4DEFA8EB3440}"/>
               </a:ext>
             </a:extLst>
           </p:cNvPr>
@@ -9028,7 +14803,7 @@
           <p:cNvPr id="14" name="">
             <a:extLst xmlns:a="http://schemas.openxmlformats.org/drawingml/2006/main">
               <a:ext uri="{FF2B5EF4-FFF2-40B4-BE49-F238E27FC236}">
-                <a16:creationId xmlns:a16="http://schemas.microsoft.com/office/drawing/2014/main" id="{9B8889E0-7E3C-46E0-9E39-B9C272EE457A}"/>
+                <a16:creationId xmlns:a16="http://schemas.microsoft.com/office/drawing/2014/main" id="{B12C8CEA-508B-4A72-BBC6-5457562A305C}"/>
               </a:ext>
             </a:extLst>
           </p:cNvPr>
@@ -9078,7 +14853,7 @@
           <p:cNvPr id="15" name="">
             <a:extLst xmlns:a="http://schemas.openxmlformats.org/drawingml/2006/main">
               <a:ext uri="{FF2B5EF4-FFF2-40B4-BE49-F238E27FC236}">
-                <a16:creationId xmlns:a16="http://schemas.microsoft.com/office/drawing/2014/main" id="{5B4A499A-9654-44F5-939E-D78FA7D58DDA}"/>
+                <a16:creationId xmlns:a16="http://schemas.microsoft.com/office/drawing/2014/main" id="{1857FF76-8347-4E26-91D3-4E84494A813C}"/>
               </a:ext>
             </a:extLst>
           </p:cNvPr>
@@ -9128,7 +14903,7 @@
           <p:cNvPr id="16" name="">
             <a:extLst xmlns:a="http://schemas.openxmlformats.org/drawingml/2006/main">
               <a:ext uri="{FF2B5EF4-FFF2-40B4-BE49-F238E27FC236}">
-                <a16:creationId xmlns:a16="http://schemas.microsoft.com/office/drawing/2014/main" id="{7E1EF759-1C02-4E22-B40F-70E55155E74E}"/>
+                <a16:creationId xmlns:a16="http://schemas.microsoft.com/office/drawing/2014/main" id="{07E0B914-DD75-4760-84FD-32267C914815}"/>
               </a:ext>
             </a:extLst>
           </p:cNvPr>
@@ -9161,7 +14936,7 @@
           <p:cNvPr id="17" name="">
             <a:extLst xmlns:a="http://schemas.openxmlformats.org/drawingml/2006/main">
               <a:ext uri="{FF2B5EF4-FFF2-40B4-BE49-F238E27FC236}">
-                <a16:creationId xmlns:a16="http://schemas.microsoft.com/office/drawing/2014/main" id="{F249507F-15DD-4388-B009-25EF6AF1A8CE}"/>
+                <a16:creationId xmlns:a16="http://schemas.microsoft.com/office/drawing/2014/main" id="{34544C52-C1AC-4828-A4F4-613256132EC7}"/>
               </a:ext>
             </a:extLst>
           </p:cNvPr>
@@ -9194,7 +14969,7 @@
           <p:cNvPr id="18" name="">
             <a:extLst xmlns:a="http://schemas.openxmlformats.org/drawingml/2006/main">
               <a:ext uri="{FF2B5EF4-FFF2-40B4-BE49-F238E27FC236}">
-                <a16:creationId xmlns:a16="http://schemas.microsoft.com/office/drawing/2014/main" id="{07F5E4FB-FF39-4581-B05A-3D48ADE8521B}"/>
+                <a16:creationId xmlns:a16="http://schemas.microsoft.com/office/drawing/2014/main" id="{5EFE59B2-39B7-4E9C-94E4-E7217B60BC35}"/>
               </a:ext>
             </a:extLst>
           </p:cNvPr>
@@ -9244,7 +15019,7 @@
           <p:cNvPr id="19" name="">
             <a:extLst xmlns:a="http://schemas.openxmlformats.org/drawingml/2006/main">
               <a:ext uri="{FF2B5EF4-FFF2-40B4-BE49-F238E27FC236}">
-                <a16:creationId xmlns:a16="http://schemas.microsoft.com/office/drawing/2014/main" id="{D2546408-9956-4BA9-B2C7-5E5D48E6B544}"/>
+                <a16:creationId xmlns:a16="http://schemas.microsoft.com/office/drawing/2014/main" id="{87FBF508-4852-405F-A928-4ABC193BD008}"/>
               </a:ext>
             </a:extLst>
           </p:cNvPr>
@@ -9294,7 +15069,7 @@
           <p:cNvPr id="20" name="">
             <a:extLst xmlns:a="http://schemas.openxmlformats.org/drawingml/2006/main">
               <a:ext uri="{FF2B5EF4-FFF2-40B4-BE49-F238E27FC236}">
-                <a16:creationId xmlns:a16="http://schemas.microsoft.com/office/drawing/2014/main" id="{65A17581-36D2-45D6-B2B5-7A45B3085F48}"/>
+                <a16:creationId xmlns:a16="http://schemas.microsoft.com/office/drawing/2014/main" id="{B7773EC9-5048-4966-AF62-076D53F40B4D}"/>
               </a:ext>
             </a:extLst>
           </p:cNvPr>
@@ -9344,7 +15119,7 @@
           <p:cNvPr id="21" name="">
             <a:extLst xmlns:a="http://schemas.openxmlformats.org/drawingml/2006/main">
               <a:ext uri="{FF2B5EF4-FFF2-40B4-BE49-F238E27FC236}">
-                <a16:creationId xmlns:a16="http://schemas.microsoft.com/office/drawing/2014/main" id="{FE89DD88-A090-4430-B2A1-DD86164F745A}"/>
+                <a16:creationId xmlns:a16="http://schemas.microsoft.com/office/drawing/2014/main" id="{1B48200F-6E35-4B9A-9074-46A4910F0E20}"/>
               </a:ext>
             </a:extLst>
           </p:cNvPr>
@@ -9377,7 +15152,7 @@
           <p:cNvPr id="22" name="">
             <a:extLst xmlns:a="http://schemas.openxmlformats.org/drawingml/2006/main">
               <a:ext uri="{FF2B5EF4-FFF2-40B4-BE49-F238E27FC236}">
-                <a16:creationId xmlns:a16="http://schemas.microsoft.com/office/drawing/2014/main" id="{42371E6B-5312-46E2-AB29-D20015CD5C08}"/>
+                <a16:creationId xmlns:a16="http://schemas.microsoft.com/office/drawing/2014/main" id="{047371F8-66EF-4962-BC31-E1606B2546B6}"/>
               </a:ext>
             </a:extLst>
           </p:cNvPr>
@@ -9410,7 +15185,7 @@
           <p:cNvPr id="23" name="">
             <a:extLst xmlns:a="http://schemas.openxmlformats.org/drawingml/2006/main">
               <a:ext uri="{FF2B5EF4-FFF2-40B4-BE49-F238E27FC236}">
-                <a16:creationId xmlns:a16="http://schemas.microsoft.com/office/drawing/2014/main" id="{24F5C3AA-C44E-48B0-9C55-DA09B8F077FA}"/>
+                <a16:creationId xmlns:a16="http://schemas.microsoft.com/office/drawing/2014/main" id="{E9B7D0EE-D0A8-4253-840D-5A6366880CBA}"/>
               </a:ext>
             </a:extLst>
           </p:cNvPr>
@@ -9460,7 +15235,7 @@
           <p:cNvPr id="24" name="">
             <a:extLst xmlns:a="http://schemas.openxmlformats.org/drawingml/2006/main">
               <a:ext uri="{FF2B5EF4-FFF2-40B4-BE49-F238E27FC236}">
-                <a16:creationId xmlns:a16="http://schemas.microsoft.com/office/drawing/2014/main" id="{06140E9F-1E4D-433C-A71E-A5EF19D5DD72}"/>
+                <a16:creationId xmlns:a16="http://schemas.microsoft.com/office/drawing/2014/main" id="{952EBCD5-893E-48C7-B6CD-2D8D83C95357}"/>
               </a:ext>
             </a:extLst>
           </p:cNvPr>
@@ -9510,7 +15285,7 @@
           <p:cNvPr id="25" name="">
             <a:extLst xmlns:a="http://schemas.openxmlformats.org/drawingml/2006/main">
               <a:ext uri="{FF2B5EF4-FFF2-40B4-BE49-F238E27FC236}">
-                <a16:creationId xmlns:a16="http://schemas.microsoft.com/office/drawing/2014/main" id="{314D1C8D-3951-4728-BBB7-DB3831F82BDA}"/>
+                <a16:creationId xmlns:a16="http://schemas.microsoft.com/office/drawing/2014/main" id="{13B51CA5-D812-4C99-986A-A8B0FAC5C81D}"/>
               </a:ext>
             </a:extLst>
           </p:cNvPr>
@@ -9560,7 +15335,7 @@
           <p:cNvPr id="26" name="">
             <a:extLst xmlns:a="http://schemas.openxmlformats.org/drawingml/2006/main">
               <a:ext uri="{FF2B5EF4-FFF2-40B4-BE49-F238E27FC236}">
-                <a16:creationId xmlns:a16="http://schemas.microsoft.com/office/drawing/2014/main" id="{8031E9D6-FEDF-46F2-A77D-F7069F2825C2}"/>
+                <a16:creationId xmlns:a16="http://schemas.microsoft.com/office/drawing/2014/main" id="{28DB5F35-6E82-4501-8EDB-A977F2F0AD4A}"/>
               </a:ext>
             </a:extLst>
           </p:cNvPr>
@@ -9593,7 +15368,7 @@
           <p:cNvPr id="27" name="">
             <a:extLst xmlns:a="http://schemas.openxmlformats.org/drawingml/2006/main">
               <a:ext uri="{FF2B5EF4-FFF2-40B4-BE49-F238E27FC236}">
-                <a16:creationId xmlns:a16="http://schemas.microsoft.com/office/drawing/2014/main" id="{551FB1FE-6DE0-4620-BDC3-A97C602CF381}"/>
+                <a16:creationId xmlns:a16="http://schemas.microsoft.com/office/drawing/2014/main" id="{F73E26CC-F5C6-499D-BB92-C8AAEA726426}"/>
               </a:ext>
             </a:extLst>
           </p:cNvPr>
@@ -9643,7 +15418,7 @@
           <p:cNvPr id="28" name="">
             <a:extLst xmlns:a="http://schemas.openxmlformats.org/drawingml/2006/main">
               <a:ext uri="{FF2B5EF4-FFF2-40B4-BE49-F238E27FC236}">
-                <a16:creationId xmlns:a16="http://schemas.microsoft.com/office/drawing/2014/main" id="{6FA3469F-8918-4EFA-A61B-631B9634E507}"/>
+                <a16:creationId xmlns:a16="http://schemas.microsoft.com/office/drawing/2014/main" id="{E362F7FB-26C4-4A44-858F-C84CA1D052FA}"/>
               </a:ext>
             </a:extLst>
           </p:cNvPr>
@@ -9676,7 +15451,7 @@
           <p:cNvPr id="29" name="">
             <a:extLst xmlns:a="http://schemas.openxmlformats.org/drawingml/2006/main">
               <a:ext uri="{FF2B5EF4-FFF2-40B4-BE49-F238E27FC236}">
-                <a16:creationId xmlns:a16="http://schemas.microsoft.com/office/drawing/2014/main" id="{A8E2C970-1AB2-4ECD-A8E5-F63CD10E15DF}"/>
+                <a16:creationId xmlns:a16="http://schemas.microsoft.com/office/drawing/2014/main" id="{1F2B2018-AE9A-4349-955A-5CCA515E6DBC}"/>
               </a:ext>
             </a:extLst>
           </p:cNvPr>
@@ -9726,7 +15501,7 @@
           <p:cNvPr id="30" name="">
             <a:extLst xmlns:a="http://schemas.openxmlformats.org/drawingml/2006/main">
               <a:ext uri="{FF2B5EF4-FFF2-40B4-BE49-F238E27FC236}">
-                <a16:creationId xmlns:a16="http://schemas.microsoft.com/office/drawing/2014/main" id="{BF44B856-D1AA-41CC-BDD9-0A7C704FC5BB}"/>
+                <a16:creationId xmlns:a16="http://schemas.microsoft.com/office/drawing/2014/main" id="{192D4E2D-254D-4329-9868-752F916587C7}"/>
               </a:ext>
             </a:extLst>
           </p:cNvPr>
@@ -9759,7 +15534,7 @@
           <p:cNvPr id="31" name="">
             <a:extLst xmlns:a="http://schemas.openxmlformats.org/drawingml/2006/main">
               <a:ext uri="{FF2B5EF4-FFF2-40B4-BE49-F238E27FC236}">
-                <a16:creationId xmlns:a16="http://schemas.microsoft.com/office/drawing/2014/main" id="{BF649D74-9B65-48DE-8B04-FB1308F8629F}"/>
+                <a16:creationId xmlns:a16="http://schemas.microsoft.com/office/drawing/2014/main" id="{F01FDC71-73B5-434B-A165-2450A3FD580C}"/>
               </a:ext>
             </a:extLst>
           </p:cNvPr>
@@ -9809,7 +15584,7 @@
           <p:cNvPr id="32" name="">
             <a:extLst xmlns:a="http://schemas.openxmlformats.org/drawingml/2006/main">
               <a:ext uri="{FF2B5EF4-FFF2-40B4-BE49-F238E27FC236}">
-                <a16:creationId xmlns:a16="http://schemas.microsoft.com/office/drawing/2014/main" id="{ADA24B43-EBF7-42A9-BB57-ADB57D842DFA}"/>
+                <a16:creationId xmlns:a16="http://schemas.microsoft.com/office/drawing/2014/main" id="{F9C7EE4C-DC0C-42EC-A172-54EF9ED79578}"/>
               </a:ext>
             </a:extLst>
           </p:cNvPr>
@@ -9859,7 +15634,7 @@
           <p:cNvPr id="33" name="">
             <a:extLst xmlns:a="http://schemas.openxmlformats.org/drawingml/2006/main">
               <a:ext uri="{FF2B5EF4-FFF2-40B4-BE49-F238E27FC236}">
-                <a16:creationId xmlns:a16="http://schemas.microsoft.com/office/drawing/2014/main" id="{F8278B75-69B0-4D60-A820-D2EAB6AC6A05}"/>
+                <a16:creationId xmlns:a16="http://schemas.microsoft.com/office/drawing/2014/main" id="{F2DADE52-D114-47DF-B665-F4B0A169242B}"/>
               </a:ext>
             </a:extLst>
           </p:cNvPr>
@@ -9892,7 +15667,7 @@
           <p:cNvPr id="34" name="">
             <a:extLst xmlns:a="http://schemas.openxmlformats.org/drawingml/2006/main">
               <a:ext uri="{FF2B5EF4-FFF2-40B4-BE49-F238E27FC236}">
-                <a16:creationId xmlns:a16="http://schemas.microsoft.com/office/drawing/2014/main" id="{8B6DE809-3E3F-4B65-A8E5-8442A521257E}"/>
+                <a16:creationId xmlns:a16="http://schemas.microsoft.com/office/drawing/2014/main" id="{743A17F7-3B3F-487D-A2DD-C78922C810D5}"/>
               </a:ext>
             </a:extLst>
           </p:cNvPr>
@@ -9942,7 +15717,7 @@
           <p:cNvPr id="35" name="">
             <a:extLst xmlns:a="http://schemas.openxmlformats.org/drawingml/2006/main">
               <a:ext uri="{FF2B5EF4-FFF2-40B4-BE49-F238E27FC236}">
-                <a16:creationId xmlns:a16="http://schemas.microsoft.com/office/drawing/2014/main" id="{24ABC03A-ADCE-4EB1-BAA8-3956517ED34C}"/>
+                <a16:creationId xmlns:a16="http://schemas.microsoft.com/office/drawing/2014/main" id="{66542F2E-BD53-41AB-9288-BB1A1A6B0071}"/>
               </a:ext>
             </a:extLst>
           </p:cNvPr>
@@ -9975,7 +15750,7 @@
           <p:cNvPr id="36" name="">
             <a:extLst xmlns:a="http://schemas.openxmlformats.org/drawingml/2006/main">
               <a:ext uri="{FF2B5EF4-FFF2-40B4-BE49-F238E27FC236}">
-                <a16:creationId xmlns:a16="http://schemas.microsoft.com/office/drawing/2014/main" id="{B7242692-9EF0-4847-B856-97440F34D139}"/>
+                <a16:creationId xmlns:a16="http://schemas.microsoft.com/office/drawing/2014/main" id="{D2765F62-2E59-4E98-8BE9-40A08ECE1BFC}"/>
               </a:ext>
             </a:extLst>
           </p:cNvPr>
@@ -10023,7 +15798,7 @@
     </p:spTree>
     <p:extLst>
       <p:ext uri="{BB962C8B-B14F-4D97-AF65-F5344CB8AC3E}">
-        <p14:creationId xmlns:p14="http://schemas.microsoft.com/office/powerpoint/2010/main" val="869378188"/>
+        <p14:creationId xmlns:p14="http://schemas.microsoft.com/office/powerpoint/2010/main" val="781939339"/>
       </p:ext>
     </p:extLst>
   </p:cSld>
@@ -10054,7 +15829,7 @@
           <p:cNvPr id="6" name="">
             <a:extLst xmlns:a="http://schemas.openxmlformats.org/drawingml/2006/main">
               <a:ext uri="{FF2B5EF4-FFF2-40B4-BE49-F238E27FC236}">
-                <a16:creationId xmlns:a16="http://schemas.microsoft.com/office/drawing/2014/main" id="{45693D00-4D0D-47BC-98D2-1E1182AF8F33}"/>
+                <a16:creationId xmlns:a16="http://schemas.microsoft.com/office/drawing/2014/main" id="{26748E66-322E-4DC5-9795-EC628C6EEEED}"/>
               </a:ext>
             </a:extLst>
           </p:cNvPr>
@@ -10104,7 +15879,7 @@
           <p:cNvPr id="2" name="">
             <a:extLst xmlns:a="http://schemas.openxmlformats.org/drawingml/2006/main">
               <a:ext uri="{FF2B5EF4-FFF2-40B4-BE49-F238E27FC236}">
-                <a16:creationId xmlns:a16="http://schemas.microsoft.com/office/drawing/2014/main" id="{45B4A3A0-719C-4A2E-8EAF-C7BE3FA31787}"/>
+                <a16:creationId xmlns:a16="http://schemas.microsoft.com/office/drawing/2014/main" id="{10DD2814-1B6B-41C2-BA02-63ADBD0B53AC}"/>
               </a:ext>
             </a:extLst>
           </p:cNvPr>
@@ -10171,7 +15946,7 @@
           <p:cNvPr id="3" name="">
             <a:extLst xmlns:a="http://schemas.openxmlformats.org/drawingml/2006/main">
               <a:ext uri="{FF2B5EF4-FFF2-40B4-BE49-F238E27FC236}">
-                <a16:creationId xmlns:a16="http://schemas.microsoft.com/office/drawing/2014/main" id="{C1405C48-F9F9-4061-9236-371D048C53B6}"/>
+                <a16:creationId xmlns:a16="http://schemas.microsoft.com/office/drawing/2014/main" id="{0978FAC8-619F-48A0-8B7D-D96470E37AAA}"/>
               </a:ext>
             </a:extLst>
           </p:cNvPr>
@@ -10221,7 +15996,7 @@
           <p:cNvPr id="4" name="">
             <a:extLst xmlns:a="http://schemas.openxmlformats.org/drawingml/2006/main">
               <a:ext uri="{FF2B5EF4-FFF2-40B4-BE49-F238E27FC236}">
-                <a16:creationId xmlns:a16="http://schemas.microsoft.com/office/drawing/2014/main" id="{FE4A617F-63D4-44AC-8E8C-732E716492C4}"/>
+                <a16:creationId xmlns:a16="http://schemas.microsoft.com/office/drawing/2014/main" id="{AD12F223-D1C5-4A78-ADFB-E2C711283BB8}"/>
               </a:ext>
             </a:extLst>
           </p:cNvPr>
@@ -10271,7 +16046,7 @@
           <p:cNvPr id="5" name="">
             <a:extLst xmlns:a="http://schemas.openxmlformats.org/drawingml/2006/main">
               <a:ext uri="{FF2B5EF4-FFF2-40B4-BE49-F238E27FC236}">
-                <a16:creationId xmlns:a16="http://schemas.microsoft.com/office/drawing/2014/main" id="{02246BB0-EB41-4DF5-B779-DADD17475999}"/>
+                <a16:creationId xmlns:a16="http://schemas.microsoft.com/office/drawing/2014/main" id="{EB838E8E-9159-4540-BDE4-1EEA92D663F7}"/>
               </a:ext>
             </a:extLst>
           </p:cNvPr>
@@ -10319,7 +16094,7 @@
     </p:spTree>
     <p:extLst>
       <p:ext uri="{BB962C8B-B14F-4D97-AF65-F5344CB8AC3E}">
-        <p14:creationId xmlns:p14="http://schemas.microsoft.com/office/powerpoint/2010/main" val="336944972"/>
+        <p14:creationId xmlns:p14="http://schemas.microsoft.com/office/powerpoint/2010/main" val="1335856655"/>
       </p:ext>
     </p:extLst>
   </p:cSld>
@@ -10350,7 +16125,7 @@
           <p:cNvPr id="17" name="">
             <a:extLst xmlns:a="http://schemas.openxmlformats.org/drawingml/2006/main">
               <a:ext uri="{FF2B5EF4-FFF2-40B4-BE49-F238E27FC236}">
-                <a16:creationId xmlns:a16="http://schemas.microsoft.com/office/drawing/2014/main" id="{5135C4CE-3FE6-4A15-8C49-6F15EC8EC451}"/>
+                <a16:creationId xmlns:a16="http://schemas.microsoft.com/office/drawing/2014/main" id="{2A817062-9484-4E1A-A869-ECC777D7D5FC}"/>
               </a:ext>
             </a:extLst>
           </p:cNvPr>
@@ -10400,7 +16175,7 @@
           <p:cNvPr id="2" name="">
             <a:extLst xmlns:a="http://schemas.openxmlformats.org/drawingml/2006/main">
               <a:ext uri="{FF2B5EF4-FFF2-40B4-BE49-F238E27FC236}">
-                <a16:creationId xmlns:a16="http://schemas.microsoft.com/office/drawing/2014/main" id="{7054C735-5FEA-40F4-B0D0-64FA3C37BAB6}"/>
+                <a16:creationId xmlns:a16="http://schemas.microsoft.com/office/drawing/2014/main" id="{BA9F36D2-F543-4BA7-9D86-8C2C996D0FA0}"/>
               </a:ext>
             </a:extLst>
           </p:cNvPr>
@@ -10450,7 +16225,7 @@
           <p:cNvPr id="3" name="">
             <a:extLst xmlns:a="http://schemas.openxmlformats.org/drawingml/2006/main">
               <a:ext uri="{FF2B5EF4-FFF2-40B4-BE49-F238E27FC236}">
-                <a16:creationId xmlns:a16="http://schemas.microsoft.com/office/drawing/2014/main" id="{383AD197-7A09-461A-9B46-9F6636BBDE43}"/>
+                <a16:creationId xmlns:a16="http://schemas.microsoft.com/office/drawing/2014/main" id="{C42A2D10-4E65-4401-8F9C-7AD8020C98DC}"/>
               </a:ext>
             </a:extLst>
           </p:cNvPr>
@@ -10483,7 +16258,7 @@
           <p:cNvPr id="4" name="">
             <a:extLst xmlns:a="http://schemas.openxmlformats.org/drawingml/2006/main">
               <a:ext uri="{FF2B5EF4-FFF2-40B4-BE49-F238E27FC236}">
-                <a16:creationId xmlns:a16="http://schemas.microsoft.com/office/drawing/2014/main" id="{7F6F9132-646F-4C7E-986B-946461F98A46}"/>
+                <a16:creationId xmlns:a16="http://schemas.microsoft.com/office/drawing/2014/main" id="{220A7C19-A257-4762-AC1F-4EBEFB5D2BB9}"/>
               </a:ext>
             </a:extLst>
           </p:cNvPr>
@@ -10533,7 +16308,7 @@
           <p:cNvPr id="5" name="">
             <a:extLst xmlns:a="http://schemas.openxmlformats.org/drawingml/2006/main">
               <a:ext uri="{FF2B5EF4-FFF2-40B4-BE49-F238E27FC236}">
-                <a16:creationId xmlns:a16="http://schemas.microsoft.com/office/drawing/2014/main" id="{13D3D099-585C-4F2F-857B-9E451EBEF6A3}"/>
+                <a16:creationId xmlns:a16="http://schemas.microsoft.com/office/drawing/2014/main" id="{2905D0C0-5F83-4DBD-9DFD-A154EA1744F5}"/>
               </a:ext>
             </a:extLst>
           </p:cNvPr>
@@ -10587,7 +16362,7 @@
           <p:nvPr/>
         </p:nvPicPr>
         <p:blipFill>
-          <a:blip xmlns:r="http://schemas.openxmlformats.org/officeDocument/2006/relationships" xmlns:a="http://schemas.openxmlformats.org/drawingml/2006/main" r:embed="R7802ae95f50b477d"/>
+          <a:blip xmlns:r="http://schemas.openxmlformats.org/officeDocument/2006/relationships" xmlns:a="http://schemas.openxmlformats.org/drawingml/2006/main" r:embed="R86e529d0f35a4435"/>
           <a:stretch xmlns:a="http://schemas.openxmlformats.org/drawingml/2006/main"/>
         </p:blipFill>
         <p:spPr>
@@ -10605,7 +16380,7 @@
           <p:cNvPr id="7" name="">
             <a:extLst xmlns:a="http://schemas.openxmlformats.org/drawingml/2006/main">
               <a:ext uri="{FF2B5EF4-FFF2-40B4-BE49-F238E27FC236}">
-                <a16:creationId xmlns:a16="http://schemas.microsoft.com/office/drawing/2014/main" id="{02F16FDE-A72A-46F1-B22B-048434461E61}"/>
+                <a16:creationId xmlns:a16="http://schemas.microsoft.com/office/drawing/2014/main" id="{395BBD1E-AE14-4793-82DF-9578F47D9993}"/>
               </a:ext>
             </a:extLst>
           </p:cNvPr>
@@ -10638,7 +16413,7 @@
           <p:cNvPr id="8" name="">
             <a:extLst xmlns:a="http://schemas.openxmlformats.org/drawingml/2006/main">
               <a:ext uri="{FF2B5EF4-FFF2-40B4-BE49-F238E27FC236}">
-                <a16:creationId xmlns:a16="http://schemas.microsoft.com/office/drawing/2014/main" id="{6C99EE25-8F93-45C1-A6E0-135CFC5DEF11}"/>
+                <a16:creationId xmlns:a16="http://schemas.microsoft.com/office/drawing/2014/main" id="{ADD6AC80-C729-49A3-B440-33ADC252A8CB}"/>
               </a:ext>
             </a:extLst>
           </p:cNvPr>
@@ -10688,7 +16463,7 @@
           <p:cNvPr id="9" name="">
             <a:extLst xmlns:a="http://schemas.openxmlformats.org/drawingml/2006/main">
               <a:ext uri="{FF2B5EF4-FFF2-40B4-BE49-F238E27FC236}">
-                <a16:creationId xmlns:a16="http://schemas.microsoft.com/office/drawing/2014/main" id="{30629ABE-E382-403A-B0E0-F52B7A55F90F}"/>
+                <a16:creationId xmlns:a16="http://schemas.microsoft.com/office/drawing/2014/main" id="{1661531F-0F9D-4546-AA28-7815D18035A3}"/>
               </a:ext>
             </a:extLst>
           </p:cNvPr>
@@ -10738,7 +16513,7 @@
           <p:cNvPr id="10" name="">
             <a:extLst xmlns:a="http://schemas.openxmlformats.org/drawingml/2006/main">
               <a:ext uri="{FF2B5EF4-FFF2-40B4-BE49-F238E27FC236}">
-                <a16:creationId xmlns:a16="http://schemas.microsoft.com/office/drawing/2014/main" id="{F16915E6-BB21-440D-8F59-A22FB70F07A1}"/>
+                <a16:creationId xmlns:a16="http://schemas.microsoft.com/office/drawing/2014/main" id="{4DD35D9E-3349-440F-819F-7D4706D7C356}"/>
               </a:ext>
             </a:extLst>
           </p:cNvPr>
@@ -10788,7 +16563,7 @@
           <p:cNvPr id="11" name="">
             <a:extLst xmlns:a="http://schemas.openxmlformats.org/drawingml/2006/main">
               <a:ext uri="{FF2B5EF4-FFF2-40B4-BE49-F238E27FC236}">
-                <a16:creationId xmlns:a16="http://schemas.microsoft.com/office/drawing/2014/main" id="{3302B0C2-0D7D-4277-B561-4F8E432F3553}"/>
+                <a16:creationId xmlns:a16="http://schemas.microsoft.com/office/drawing/2014/main" id="{1CC4215B-C8C6-4AD9-B9CC-C473E2132529}"/>
               </a:ext>
             </a:extLst>
           </p:cNvPr>
@@ -10821,7 +16596,7 @@
           <p:cNvPr id="12" name="">
             <a:extLst xmlns:a="http://schemas.openxmlformats.org/drawingml/2006/main">
               <a:ext uri="{FF2B5EF4-FFF2-40B4-BE49-F238E27FC236}">
-                <a16:creationId xmlns:a16="http://schemas.microsoft.com/office/drawing/2014/main" id="{B48BA483-23B5-455B-AE7B-1FD9DF3BDEA1}"/>
+                <a16:creationId xmlns:a16="http://schemas.microsoft.com/office/drawing/2014/main" id="{351562CD-5131-467C-968B-1764B5207093}"/>
               </a:ext>
             </a:extLst>
           </p:cNvPr>
@@ -10871,7 +16646,7 @@
           <p:cNvPr id="13" name="">
             <a:extLst xmlns:a="http://schemas.openxmlformats.org/drawingml/2006/main">
               <a:ext uri="{FF2B5EF4-FFF2-40B4-BE49-F238E27FC236}">
-                <a16:creationId xmlns:a16="http://schemas.microsoft.com/office/drawing/2014/main" id="{345668EA-F414-41C1-B8B2-F7AB79334B03}"/>
+                <a16:creationId xmlns:a16="http://schemas.microsoft.com/office/drawing/2014/main" id="{8BA76E00-3F42-44B6-9182-9F3E70EBB094}"/>
               </a:ext>
             </a:extLst>
           </p:cNvPr>
@@ -10904,7 +16679,7 @@
           <p:cNvPr id="14" name="">
             <a:extLst xmlns:a="http://schemas.openxmlformats.org/drawingml/2006/main">
               <a:ext uri="{FF2B5EF4-FFF2-40B4-BE49-F238E27FC236}">
-                <a16:creationId xmlns:a16="http://schemas.microsoft.com/office/drawing/2014/main" id="{DF803A07-4EAA-452D-AAAF-0D1760FA7760}"/>
+                <a16:creationId xmlns:a16="http://schemas.microsoft.com/office/drawing/2014/main" id="{18DAAA4E-42DE-472C-A33E-8FCE72AD1CEA}"/>
               </a:ext>
             </a:extLst>
           </p:cNvPr>
@@ -10954,7 +16729,7 @@
           <p:cNvPr id="15" name="">
             <a:extLst xmlns:a="http://schemas.openxmlformats.org/drawingml/2006/main">
               <a:ext uri="{FF2B5EF4-FFF2-40B4-BE49-F238E27FC236}">
-                <a16:creationId xmlns:a16="http://schemas.microsoft.com/office/drawing/2014/main" id="{28530D4F-008E-41C2-9991-3415FA835C2F}"/>
+                <a16:creationId xmlns:a16="http://schemas.microsoft.com/office/drawing/2014/main" id="{2F4137CF-F395-472C-B439-22DB77E9A61F}"/>
               </a:ext>
             </a:extLst>
           </p:cNvPr>
@@ -10987,7 +16762,7 @@
           <p:cNvPr id="16" name="">
             <a:extLst xmlns:a="http://schemas.openxmlformats.org/drawingml/2006/main">
               <a:ext uri="{FF2B5EF4-FFF2-40B4-BE49-F238E27FC236}">
-                <a16:creationId xmlns:a16="http://schemas.microsoft.com/office/drawing/2014/main" id="{C12DACA6-5559-4883-881A-E99006B10214}"/>
+                <a16:creationId xmlns:a16="http://schemas.microsoft.com/office/drawing/2014/main" id="{A791BC52-A5E7-464F-85CA-4CF2298364C7}"/>
               </a:ext>
             </a:extLst>
           </p:cNvPr>
@@ -11035,7 +16810,7 @@
     </p:spTree>
     <p:extLst>
       <p:ext uri="{BB962C8B-B14F-4D97-AF65-F5344CB8AC3E}">
-        <p14:creationId xmlns:p14="http://schemas.microsoft.com/office/powerpoint/2010/main" val="1967356068"/>
+        <p14:creationId xmlns:p14="http://schemas.microsoft.com/office/powerpoint/2010/main" val="2107507512"/>
       </p:ext>
     </p:extLst>
   </p:cSld>
@@ -11066,7 +16841,7 @@
           <p:cNvPr id="16" name="">
             <a:extLst xmlns:a="http://schemas.openxmlformats.org/drawingml/2006/main">
               <a:ext uri="{FF2B5EF4-FFF2-40B4-BE49-F238E27FC236}">
-                <a16:creationId xmlns:a16="http://schemas.microsoft.com/office/drawing/2014/main" id="{1E8B9667-C8CC-4225-83DE-CD2B3E4DA563}"/>
+                <a16:creationId xmlns:a16="http://schemas.microsoft.com/office/drawing/2014/main" id="{923C166A-0227-4719-B8D9-9693C8256746}"/>
               </a:ext>
             </a:extLst>
           </p:cNvPr>
@@ -11116,7 +16891,7 @@
           <p:cNvPr id="2" name="">
             <a:extLst xmlns:a="http://schemas.openxmlformats.org/drawingml/2006/main">
               <a:ext uri="{FF2B5EF4-FFF2-40B4-BE49-F238E27FC236}">
-                <a16:creationId xmlns:a16="http://schemas.microsoft.com/office/drawing/2014/main" id="{15465E9E-C4D2-4343-9691-810C9F1EEE1B}"/>
+                <a16:creationId xmlns:a16="http://schemas.microsoft.com/office/drawing/2014/main" id="{9E953FA3-8692-4184-BB3E-F1835E29AF08}"/>
               </a:ext>
             </a:extLst>
           </p:cNvPr>
@@ -11166,7 +16941,7 @@
           <p:cNvPr id="3" name="">
             <a:extLst xmlns:a="http://schemas.openxmlformats.org/drawingml/2006/main">
               <a:ext uri="{FF2B5EF4-FFF2-40B4-BE49-F238E27FC236}">
-                <a16:creationId xmlns:a16="http://schemas.microsoft.com/office/drawing/2014/main" id="{98C3669F-3585-4EAC-8F30-62E2604C334F}"/>
+                <a16:creationId xmlns:a16="http://schemas.microsoft.com/office/drawing/2014/main" id="{16689F05-B496-4EE5-BBF4-FDCE09A05929}"/>
               </a:ext>
             </a:extLst>
           </p:cNvPr>
@@ -11199,7 +16974,7 @@
           <p:cNvPr id="4" name="">
             <a:extLst xmlns:a="http://schemas.openxmlformats.org/drawingml/2006/main">
               <a:ext uri="{FF2B5EF4-FFF2-40B4-BE49-F238E27FC236}">
-                <a16:creationId xmlns:a16="http://schemas.microsoft.com/office/drawing/2014/main" id="{124509C4-6E36-465C-AE5E-6E593E72000F}"/>
+                <a16:creationId xmlns:a16="http://schemas.microsoft.com/office/drawing/2014/main" id="{66F79450-1E98-4FFA-A4EB-FEB1442B11E0}"/>
               </a:ext>
             </a:extLst>
           </p:cNvPr>
@@ -11249,7 +17024,7 @@
           <p:cNvPr id="5" name="">
             <a:extLst xmlns:a="http://schemas.openxmlformats.org/drawingml/2006/main">
               <a:ext uri="{FF2B5EF4-FFF2-40B4-BE49-F238E27FC236}">
-                <a16:creationId xmlns:a16="http://schemas.microsoft.com/office/drawing/2014/main" id="{F2A3AA3D-C5EC-4F25-87F8-605B67CAB9F9}"/>
+                <a16:creationId xmlns:a16="http://schemas.microsoft.com/office/drawing/2014/main" id="{F9D53B1D-5BBA-4E93-A651-1CEC9DA05E00}"/>
               </a:ext>
             </a:extLst>
           </p:cNvPr>
@@ -11303,7 +17078,7 @@
           <p:nvPr/>
         </p:nvPicPr>
         <p:blipFill>
-          <a:blip xmlns:r="http://schemas.openxmlformats.org/officeDocument/2006/relationships" xmlns:a="http://schemas.openxmlformats.org/drawingml/2006/main" r:embed="R3facd975d3c94cdd"/>
+          <a:blip xmlns:r="http://schemas.openxmlformats.org/officeDocument/2006/relationships" xmlns:a="http://schemas.openxmlformats.org/drawingml/2006/main" r:embed="R33c4b01143c44f25"/>
           <a:stretch xmlns:a="http://schemas.openxmlformats.org/drawingml/2006/main"/>
         </p:blipFill>
         <p:spPr>
@@ -11321,7 +17096,7 @@
           <p:cNvPr id="7" name="">
             <a:extLst xmlns:a="http://schemas.openxmlformats.org/drawingml/2006/main">
               <a:ext uri="{FF2B5EF4-FFF2-40B4-BE49-F238E27FC236}">
-                <a16:creationId xmlns:a16="http://schemas.microsoft.com/office/drawing/2014/main" id="{361E1C6B-FCD8-4E21-B790-31B6BD234939}"/>
+                <a16:creationId xmlns:a16="http://schemas.microsoft.com/office/drawing/2014/main" id="{3F9CB610-E52B-46D5-B793-AA5E41325675}"/>
               </a:ext>
             </a:extLst>
           </p:cNvPr>
@@ -11354,7 +17129,7 @@
           <p:cNvPr id="8" name="">
             <a:extLst xmlns:a="http://schemas.openxmlformats.org/drawingml/2006/main">
               <a:ext uri="{FF2B5EF4-FFF2-40B4-BE49-F238E27FC236}">
-                <a16:creationId xmlns:a16="http://schemas.microsoft.com/office/drawing/2014/main" id="{39F84589-F098-4E6B-AACD-4B7B5242FF42}"/>
+                <a16:creationId xmlns:a16="http://schemas.microsoft.com/office/drawing/2014/main" id="{19ED9DA3-7846-4530-9B22-70EC497135B1}"/>
               </a:ext>
             </a:extLst>
           </p:cNvPr>
@@ -11404,7 +17179,7 @@
           <p:cNvPr id="9" name="">
             <a:extLst xmlns:a="http://schemas.openxmlformats.org/drawingml/2006/main">
               <a:ext uri="{FF2B5EF4-FFF2-40B4-BE49-F238E27FC236}">
-                <a16:creationId xmlns:a16="http://schemas.microsoft.com/office/drawing/2014/main" id="{919979EF-D6B7-4F1B-B9F0-97E6653BDF1F}"/>
+                <a16:creationId xmlns:a16="http://schemas.microsoft.com/office/drawing/2014/main" id="{B0EFD475-8459-4C76-8C17-92E4C29E7A1C}"/>
               </a:ext>
             </a:extLst>
           </p:cNvPr>
@@ -11437,7 +17212,7 @@
           <p:cNvPr id="10" name="">
             <a:extLst xmlns:a="http://schemas.openxmlformats.org/drawingml/2006/main">
               <a:ext uri="{FF2B5EF4-FFF2-40B4-BE49-F238E27FC236}">
-                <a16:creationId xmlns:a16="http://schemas.microsoft.com/office/drawing/2014/main" id="{43C5628C-988B-49A6-9F1F-54863040DAC9}"/>
+                <a16:creationId xmlns:a16="http://schemas.microsoft.com/office/drawing/2014/main" id="{B3581A29-CDEC-4D52-9B25-59E9CFD93DA5}"/>
               </a:ext>
             </a:extLst>
           </p:cNvPr>
@@ -11487,7 +17262,7 @@
           <p:cNvPr id="11" name="">
             <a:extLst xmlns:a="http://schemas.openxmlformats.org/drawingml/2006/main">
               <a:ext uri="{FF2B5EF4-FFF2-40B4-BE49-F238E27FC236}">
-                <a16:creationId xmlns:a16="http://schemas.microsoft.com/office/drawing/2014/main" id="{FAE32A3C-1743-46B6-926B-7011F585CED6}"/>
+                <a16:creationId xmlns:a16="http://schemas.microsoft.com/office/drawing/2014/main" id="{FAA1CFFC-1D05-444F-9059-5D6B7C256742}"/>
               </a:ext>
             </a:extLst>
           </p:cNvPr>
@@ -11520,7 +17295,7 @@
           <p:cNvPr id="12" name="">
             <a:extLst xmlns:a="http://schemas.openxmlformats.org/drawingml/2006/main">
               <a:ext uri="{FF2B5EF4-FFF2-40B4-BE49-F238E27FC236}">
-                <a16:creationId xmlns:a16="http://schemas.microsoft.com/office/drawing/2014/main" id="{A7347560-55E6-4B6E-94E9-F13A9DBF3869}"/>
+                <a16:creationId xmlns:a16="http://schemas.microsoft.com/office/drawing/2014/main" id="{2BF4E436-F13A-460D-AE6E-D06AB9F92203}"/>
               </a:ext>
             </a:extLst>
           </p:cNvPr>
@@ -11570,7 +17345,7 @@
           <p:cNvPr id="13" name="">
             <a:extLst xmlns:a="http://schemas.openxmlformats.org/drawingml/2006/main">
               <a:ext uri="{FF2B5EF4-FFF2-40B4-BE49-F238E27FC236}">
-                <a16:creationId xmlns:a16="http://schemas.microsoft.com/office/drawing/2014/main" id="{0F9C37AD-9F8B-482F-BAA3-8F264178EAD3}"/>
+                <a16:creationId xmlns:a16="http://schemas.microsoft.com/office/drawing/2014/main" id="{0BF0C0F1-9C7C-46DA-8D88-C20E28D56B24}"/>
               </a:ext>
             </a:extLst>
           </p:cNvPr>
@@ -11603,7 +17378,7 @@
           <p:cNvPr id="14" name="">
             <a:extLst xmlns:a="http://schemas.openxmlformats.org/drawingml/2006/main">
               <a:ext uri="{FF2B5EF4-FFF2-40B4-BE49-F238E27FC236}">
-                <a16:creationId xmlns:a16="http://schemas.microsoft.com/office/drawing/2014/main" id="{AEFD22B7-2CD0-41BB-8EAB-EE3CAEBC7832}"/>
+                <a16:creationId xmlns:a16="http://schemas.microsoft.com/office/drawing/2014/main" id="{3EAE4C3B-1017-4055-A469-5B33D42B9284}"/>
               </a:ext>
             </a:extLst>
           </p:cNvPr>
@@ -11653,7 +17428,7 @@
           <p:cNvPr id="15" name="">
             <a:extLst xmlns:a="http://schemas.openxmlformats.org/drawingml/2006/main">
               <a:ext uri="{FF2B5EF4-FFF2-40B4-BE49-F238E27FC236}">
-                <a16:creationId xmlns:a16="http://schemas.microsoft.com/office/drawing/2014/main" id="{E6903AFA-5302-48DF-A10D-7FEEAAD84E47}"/>
+                <a16:creationId xmlns:a16="http://schemas.microsoft.com/office/drawing/2014/main" id="{47196D56-AF23-46C2-8E55-C0BFD0A95B8C}"/>
               </a:ext>
             </a:extLst>
           </p:cNvPr>
@@ -11701,7 +17476,7 @@
     </p:spTree>
     <p:extLst>
       <p:ext uri="{BB962C8B-B14F-4D97-AF65-F5344CB8AC3E}">
-        <p14:creationId xmlns:p14="http://schemas.microsoft.com/office/powerpoint/2010/main" val="424787183"/>
+        <p14:creationId xmlns:p14="http://schemas.microsoft.com/office/powerpoint/2010/main" val="309137984"/>
       </p:ext>
     </p:extLst>
   </p:cSld>
@@ -11732,7 +17507,7 @@
           <p:cNvPr id="16" name="">
             <a:extLst xmlns:a="http://schemas.openxmlformats.org/drawingml/2006/main">
               <a:ext uri="{FF2B5EF4-FFF2-40B4-BE49-F238E27FC236}">
-                <a16:creationId xmlns:a16="http://schemas.microsoft.com/office/drawing/2014/main" id="{3517A82F-D408-48FF-A04C-02A0973C11F6}"/>
+                <a16:creationId xmlns:a16="http://schemas.microsoft.com/office/drawing/2014/main" id="{41C205E5-767C-4DEE-88E5-08145D0E236D}"/>
               </a:ext>
             </a:extLst>
           </p:cNvPr>
@@ -11782,7 +17557,7 @@
           <p:cNvPr id="2" name="">
             <a:extLst xmlns:a="http://schemas.openxmlformats.org/drawingml/2006/main">
               <a:ext uri="{FF2B5EF4-FFF2-40B4-BE49-F238E27FC236}">
-                <a16:creationId xmlns:a16="http://schemas.microsoft.com/office/drawing/2014/main" id="{0449BA15-82B3-4AE2-89CB-48FDD02D2D4E}"/>
+                <a16:creationId xmlns:a16="http://schemas.microsoft.com/office/drawing/2014/main" id="{F43C2D82-DBD4-4771-90AC-2D35B931A958}"/>
               </a:ext>
             </a:extLst>
           </p:cNvPr>
@@ -11832,7 +17607,7 @@
           <p:cNvPr id="3" name="">
             <a:extLst xmlns:a="http://schemas.openxmlformats.org/drawingml/2006/main">
               <a:ext uri="{FF2B5EF4-FFF2-40B4-BE49-F238E27FC236}">
-                <a16:creationId xmlns:a16="http://schemas.microsoft.com/office/drawing/2014/main" id="{FB72E831-568B-44B8-B9F4-7FFDDB5D2B79}"/>
+                <a16:creationId xmlns:a16="http://schemas.microsoft.com/office/drawing/2014/main" id="{6AA719B5-1631-4BD5-875C-F536332CE361}"/>
               </a:ext>
             </a:extLst>
           </p:cNvPr>
@@ -11865,7 +17640,7 @@
           <p:cNvPr id="4" name="">
             <a:extLst xmlns:a="http://schemas.openxmlformats.org/drawingml/2006/main">
               <a:ext uri="{FF2B5EF4-FFF2-40B4-BE49-F238E27FC236}">
-                <a16:creationId xmlns:a16="http://schemas.microsoft.com/office/drawing/2014/main" id="{D13CC373-1503-414E-94EF-434CF54C64FE}"/>
+                <a16:creationId xmlns:a16="http://schemas.microsoft.com/office/drawing/2014/main" id="{39E0324E-6486-4055-8FC0-56325D66FA12}"/>
               </a:ext>
             </a:extLst>
           </p:cNvPr>
@@ -11915,7 +17690,7 @@
           <p:cNvPr id="5" name="">
             <a:extLst xmlns:a="http://schemas.openxmlformats.org/drawingml/2006/main">
               <a:ext uri="{FF2B5EF4-FFF2-40B4-BE49-F238E27FC236}">
-                <a16:creationId xmlns:a16="http://schemas.microsoft.com/office/drawing/2014/main" id="{8F8DF669-65D8-44D4-9BA2-6669EAC63592}"/>
+                <a16:creationId xmlns:a16="http://schemas.microsoft.com/office/drawing/2014/main" id="{E96162B2-A56D-4A53-94A6-945A995F9B3F}"/>
               </a:ext>
             </a:extLst>
           </p:cNvPr>
@@ -11969,7 +17744,7 @@
           <p:nvPr/>
         </p:nvPicPr>
         <p:blipFill>
-          <a:blip xmlns:r="http://schemas.openxmlformats.org/officeDocument/2006/relationships" xmlns:a="http://schemas.openxmlformats.org/drawingml/2006/main" r:embed="Re7f0466987174112"/>
+          <a:blip xmlns:r="http://schemas.openxmlformats.org/officeDocument/2006/relationships" xmlns:a="http://schemas.openxmlformats.org/drawingml/2006/main" r:embed="R7fbc7a8e70f449dc"/>
           <a:stretch xmlns:a="http://schemas.openxmlformats.org/drawingml/2006/main"/>
         </p:blipFill>
         <p:spPr>
@@ -11987,7 +17762,7 @@
           <p:cNvPr id="7" name="">
             <a:extLst xmlns:a="http://schemas.openxmlformats.org/drawingml/2006/main">
               <a:ext uri="{FF2B5EF4-FFF2-40B4-BE49-F238E27FC236}">
-                <a16:creationId xmlns:a16="http://schemas.microsoft.com/office/drawing/2014/main" id="{53177373-FAE8-4619-96E7-760475C04AAB}"/>
+                <a16:creationId xmlns:a16="http://schemas.microsoft.com/office/drawing/2014/main" id="{F51BE130-820B-4E9A-835F-761B2F5FC2EA}"/>
               </a:ext>
             </a:extLst>
           </p:cNvPr>
@@ -12020,7 +17795,7 @@
           <p:cNvPr id="8" name="">
             <a:extLst xmlns:a="http://schemas.openxmlformats.org/drawingml/2006/main">
               <a:ext uri="{FF2B5EF4-FFF2-40B4-BE49-F238E27FC236}">
-                <a16:creationId xmlns:a16="http://schemas.microsoft.com/office/drawing/2014/main" id="{3FD3DE96-308B-44AA-98F9-E78E1BE0585E}"/>
+                <a16:creationId xmlns:a16="http://schemas.microsoft.com/office/drawing/2014/main" id="{E18C3536-91E1-40EB-8E6D-D7C3D47317D0}"/>
               </a:ext>
             </a:extLst>
           </p:cNvPr>
@@ -12070,7 +17845,7 @@
           <p:cNvPr id="9" name="">
             <a:extLst xmlns:a="http://schemas.openxmlformats.org/drawingml/2006/main">
               <a:ext uri="{FF2B5EF4-FFF2-40B4-BE49-F238E27FC236}">
-                <a16:creationId xmlns:a16="http://schemas.microsoft.com/office/drawing/2014/main" id="{5D187462-AAEB-4572-AE48-0F487009372B}"/>
+                <a16:creationId xmlns:a16="http://schemas.microsoft.com/office/drawing/2014/main" id="{EDD02B87-1182-4E56-A49D-A25994886C55}"/>
               </a:ext>
             </a:extLst>
           </p:cNvPr>
@@ -12103,7 +17878,7 @@
           <p:cNvPr id="10" name="">
             <a:extLst xmlns:a="http://schemas.openxmlformats.org/drawingml/2006/main">
               <a:ext uri="{FF2B5EF4-FFF2-40B4-BE49-F238E27FC236}">
-                <a16:creationId xmlns:a16="http://schemas.microsoft.com/office/drawing/2014/main" id="{E1A4DF5D-B6F5-4198-B26B-C78AE1A446E0}"/>
+                <a16:creationId xmlns:a16="http://schemas.microsoft.com/office/drawing/2014/main" id="{BD6507DA-0BE2-45D8-BFE0-4AA093942E46}"/>
               </a:ext>
             </a:extLst>
           </p:cNvPr>
@@ -12153,7 +17928,7 @@
           <p:cNvPr id="11" name="">
             <a:extLst xmlns:a="http://schemas.openxmlformats.org/drawingml/2006/main">
               <a:ext uri="{FF2B5EF4-FFF2-40B4-BE49-F238E27FC236}">
-                <a16:creationId xmlns:a16="http://schemas.microsoft.com/office/drawing/2014/main" id="{2022BA59-22A6-4462-A323-4C69A86936A6}"/>
+                <a16:creationId xmlns:a16="http://schemas.microsoft.com/office/drawing/2014/main" id="{5EAF32C0-68C4-4ADB-B21A-BCDD7586A5C3}"/>
               </a:ext>
             </a:extLst>
           </p:cNvPr>
@@ -12186,7 +17961,7 @@
           <p:cNvPr id="12" name="">
             <a:extLst xmlns:a="http://schemas.openxmlformats.org/drawingml/2006/main">
               <a:ext uri="{FF2B5EF4-FFF2-40B4-BE49-F238E27FC236}">
-                <a16:creationId xmlns:a16="http://schemas.microsoft.com/office/drawing/2014/main" id="{65BAE3E6-C856-49BD-80AC-A4670416F77C}"/>
+                <a16:creationId xmlns:a16="http://schemas.microsoft.com/office/drawing/2014/main" id="{F996F837-E8E3-4DC0-A517-DCC464A612F0}"/>
               </a:ext>
             </a:extLst>
           </p:cNvPr>
@@ -12236,7 +18011,7 @@
           <p:cNvPr id="13" name="">
             <a:extLst xmlns:a="http://schemas.openxmlformats.org/drawingml/2006/main">
               <a:ext uri="{FF2B5EF4-FFF2-40B4-BE49-F238E27FC236}">
-                <a16:creationId xmlns:a16="http://schemas.microsoft.com/office/drawing/2014/main" id="{B8A25044-4555-44C8-9664-FF2C96E19B1E}"/>
+                <a16:creationId xmlns:a16="http://schemas.microsoft.com/office/drawing/2014/main" id="{372C483D-7CEE-4388-8306-259299427EBC}"/>
               </a:ext>
             </a:extLst>
           </p:cNvPr>
@@ -12269,7 +18044,7 @@
           <p:cNvPr id="14" name="">
             <a:extLst xmlns:a="http://schemas.openxmlformats.org/drawingml/2006/main">
               <a:ext uri="{FF2B5EF4-FFF2-40B4-BE49-F238E27FC236}">
-                <a16:creationId xmlns:a16="http://schemas.microsoft.com/office/drawing/2014/main" id="{43D38989-28AD-4063-B7B1-7E8EBF24928F}"/>
+                <a16:creationId xmlns:a16="http://schemas.microsoft.com/office/drawing/2014/main" id="{55FCF98C-833A-48D7-92C5-68C86F6BEB4E}"/>
               </a:ext>
             </a:extLst>
           </p:cNvPr>
@@ -12319,7 +18094,7 @@
           <p:cNvPr id="15" name="">
             <a:extLst xmlns:a="http://schemas.openxmlformats.org/drawingml/2006/main">
               <a:ext uri="{FF2B5EF4-FFF2-40B4-BE49-F238E27FC236}">
-                <a16:creationId xmlns:a16="http://schemas.microsoft.com/office/drawing/2014/main" id="{E8854D8F-121F-41DC-B302-B0A7023BBA15}"/>
+                <a16:creationId xmlns:a16="http://schemas.microsoft.com/office/drawing/2014/main" id="{37D38F8C-E39C-4A56-BA83-3C934E9DD5B0}"/>
               </a:ext>
             </a:extLst>
           </p:cNvPr>
@@ -12367,7 +18142,7 @@
     </p:spTree>
     <p:extLst>
       <p:ext uri="{BB962C8B-B14F-4D97-AF65-F5344CB8AC3E}">
-        <p14:creationId xmlns:p14="http://schemas.microsoft.com/office/powerpoint/2010/main" val="1570587746"/>
+        <p14:creationId xmlns:p14="http://schemas.microsoft.com/office/powerpoint/2010/main" val="934390960"/>
       </p:ext>
     </p:extLst>
   </p:cSld>
@@ -12398,7 +18173,7 @@
           <p:cNvPr id="14" name="">
             <a:extLst xmlns:a="http://schemas.openxmlformats.org/drawingml/2006/main">
               <a:ext uri="{FF2B5EF4-FFF2-40B4-BE49-F238E27FC236}">
-                <a16:creationId xmlns:a16="http://schemas.microsoft.com/office/drawing/2014/main" id="{6057799B-D9E4-4102-B9B4-16AC54F6B82F}"/>
+                <a16:creationId xmlns:a16="http://schemas.microsoft.com/office/drawing/2014/main" id="{C3A726D9-FBC6-47FF-A4AD-714859AA7F24}"/>
               </a:ext>
             </a:extLst>
           </p:cNvPr>
@@ -12448,7 +18223,7 @@
           <p:cNvPr id="2" name="">
             <a:extLst xmlns:a="http://schemas.openxmlformats.org/drawingml/2006/main">
               <a:ext uri="{FF2B5EF4-FFF2-40B4-BE49-F238E27FC236}">
-                <a16:creationId xmlns:a16="http://schemas.microsoft.com/office/drawing/2014/main" id="{C7A7B403-6678-45F9-A7DD-B961D1444CAE}"/>
+                <a16:creationId xmlns:a16="http://schemas.microsoft.com/office/drawing/2014/main" id="{83220F65-D21F-49AF-A89E-345ED69BBCB9}"/>
               </a:ext>
             </a:extLst>
           </p:cNvPr>
@@ -12498,7 +18273,7 @@
           <p:cNvPr id="3" name="">
             <a:extLst xmlns:a="http://schemas.openxmlformats.org/drawingml/2006/main">
               <a:ext uri="{FF2B5EF4-FFF2-40B4-BE49-F238E27FC236}">
-                <a16:creationId xmlns:a16="http://schemas.microsoft.com/office/drawing/2014/main" id="{6F1E5B81-24BF-4FDF-948A-8D6989FA007E}"/>
+                <a16:creationId xmlns:a16="http://schemas.microsoft.com/office/drawing/2014/main" id="{85C345AF-24B1-40DC-AC1E-E5BC0B68E374}"/>
               </a:ext>
             </a:extLst>
           </p:cNvPr>
@@ -12531,7 +18306,7 @@
           <p:cNvPr id="4" name="">
             <a:extLst xmlns:a="http://schemas.openxmlformats.org/drawingml/2006/main">
               <a:ext uri="{FF2B5EF4-FFF2-40B4-BE49-F238E27FC236}">
-                <a16:creationId xmlns:a16="http://schemas.microsoft.com/office/drawing/2014/main" id="{6EC18D0E-BD79-4648-B3CF-EF16F8FC2DEF}"/>
+                <a16:creationId xmlns:a16="http://schemas.microsoft.com/office/drawing/2014/main" id="{17C7BAC2-F85B-4F9C-928A-B08FBBDC8C8F}"/>
               </a:ext>
             </a:extLst>
           </p:cNvPr>
@@ -12581,7 +18356,7 @@
           <p:cNvPr id="5" name="">
             <a:extLst xmlns:a="http://schemas.openxmlformats.org/drawingml/2006/main">
               <a:ext uri="{FF2B5EF4-FFF2-40B4-BE49-F238E27FC236}">
-                <a16:creationId xmlns:a16="http://schemas.microsoft.com/office/drawing/2014/main" id="{99E187B9-C916-4EEE-8570-D9EEF3EFA5BE}"/>
+                <a16:creationId xmlns:a16="http://schemas.microsoft.com/office/drawing/2014/main" id="{ACA31E1C-7CE5-49E7-98F0-A304BDA29B2A}"/>
               </a:ext>
             </a:extLst>
           </p:cNvPr>
@@ -12635,7 +18410,7 @@
           <p:nvPr/>
         </p:nvPicPr>
         <p:blipFill>
-          <a:blip xmlns:r="http://schemas.openxmlformats.org/officeDocument/2006/relationships" xmlns:a="http://schemas.openxmlformats.org/drawingml/2006/main" r:embed="R2f323e02b4d94917"/>
+          <a:blip xmlns:r="http://schemas.openxmlformats.org/officeDocument/2006/relationships" xmlns:a="http://schemas.openxmlformats.org/drawingml/2006/main" r:embed="R4ee75fd225f04523"/>
           <a:stretch xmlns:a="http://schemas.openxmlformats.org/drawingml/2006/main"/>
         </p:blipFill>
         <p:spPr>
@@ -12653,7 +18428,7 @@
           <p:cNvPr id="7" name="">
             <a:extLst xmlns:a="http://schemas.openxmlformats.org/drawingml/2006/main">
               <a:ext uri="{FF2B5EF4-FFF2-40B4-BE49-F238E27FC236}">
-                <a16:creationId xmlns:a16="http://schemas.microsoft.com/office/drawing/2014/main" id="{E9027407-EAA3-441A-8B94-D46A21099C26}"/>
+                <a16:creationId xmlns:a16="http://schemas.microsoft.com/office/drawing/2014/main" id="{959A7FCC-002A-4E64-8E63-EB3C47853669}"/>
               </a:ext>
             </a:extLst>
           </p:cNvPr>
@@ -12686,7 +18461,7 @@
           <p:cNvPr id="8" name="">
             <a:extLst xmlns:a="http://schemas.openxmlformats.org/drawingml/2006/main">
               <a:ext uri="{FF2B5EF4-FFF2-40B4-BE49-F238E27FC236}">
-                <a16:creationId xmlns:a16="http://schemas.microsoft.com/office/drawing/2014/main" id="{6D9ABC9F-AF8A-4265-A423-E0BACA2C7385}"/>
+                <a16:creationId xmlns:a16="http://schemas.microsoft.com/office/drawing/2014/main" id="{938F2036-4E70-4BF0-845D-8AE1DA74B19F}"/>
               </a:ext>
             </a:extLst>
           </p:cNvPr>
@@ -12736,7 +18511,7 @@
           <p:cNvPr id="9" name="">
             <a:extLst xmlns:a="http://schemas.openxmlformats.org/drawingml/2006/main">
               <a:ext uri="{FF2B5EF4-FFF2-40B4-BE49-F238E27FC236}">
-                <a16:creationId xmlns:a16="http://schemas.microsoft.com/office/drawing/2014/main" id="{1CA889C0-0550-45C0-A7D0-6A6BCB45F5CC}"/>
+                <a16:creationId xmlns:a16="http://schemas.microsoft.com/office/drawing/2014/main" id="{981B4109-40C4-4DBE-AEB7-E45281556C1F}"/>
               </a:ext>
             </a:extLst>
           </p:cNvPr>
@@ -12769,7 +18544,7 @@
           <p:cNvPr id="10" name="">
             <a:extLst xmlns:a="http://schemas.openxmlformats.org/drawingml/2006/main">
               <a:ext uri="{FF2B5EF4-FFF2-40B4-BE49-F238E27FC236}">
-                <a16:creationId xmlns:a16="http://schemas.microsoft.com/office/drawing/2014/main" id="{F6B422FF-1FF2-44FB-99E5-8D762A160678}"/>
+                <a16:creationId xmlns:a16="http://schemas.microsoft.com/office/drawing/2014/main" id="{8FC51695-5AF5-43C5-B717-7CBD8AF192B7}"/>
               </a:ext>
             </a:extLst>
           </p:cNvPr>
@@ -12819,7 +18594,7 @@
           <p:cNvPr id="11" name="">
             <a:extLst xmlns:a="http://schemas.openxmlformats.org/drawingml/2006/main">
               <a:ext uri="{FF2B5EF4-FFF2-40B4-BE49-F238E27FC236}">
-                <a16:creationId xmlns:a16="http://schemas.microsoft.com/office/drawing/2014/main" id="{5FA1C981-50B1-4E1C-869F-5ABD01B87DAB}"/>
+                <a16:creationId xmlns:a16="http://schemas.microsoft.com/office/drawing/2014/main" id="{D7CF94F6-8E81-47EF-AE5D-6CDE9F9568EE}"/>
               </a:ext>
             </a:extLst>
           </p:cNvPr>
@@ -12852,7 +18627,7 @@
           <p:cNvPr id="12" name="">
             <a:extLst xmlns:a="http://schemas.openxmlformats.org/drawingml/2006/main">
               <a:ext uri="{FF2B5EF4-FFF2-40B4-BE49-F238E27FC236}">
-                <a16:creationId xmlns:a16="http://schemas.microsoft.com/office/drawing/2014/main" id="{E03E6662-2F33-4DCC-9545-4EC3AA4137FA}"/>
+                <a16:creationId xmlns:a16="http://schemas.microsoft.com/office/drawing/2014/main" id="{98E9C63E-5688-4C21-B5D5-971A91454A86}"/>
               </a:ext>
             </a:extLst>
           </p:cNvPr>
@@ -12902,7 +18677,7 @@
           <p:cNvPr id="13" name="">
             <a:extLst xmlns:a="http://schemas.openxmlformats.org/drawingml/2006/main">
               <a:ext uri="{FF2B5EF4-FFF2-40B4-BE49-F238E27FC236}">
-                <a16:creationId xmlns:a16="http://schemas.microsoft.com/office/drawing/2014/main" id="{08BEFDC2-406C-4C2C-8A94-F19402CBC6E3}"/>
+                <a16:creationId xmlns:a16="http://schemas.microsoft.com/office/drawing/2014/main" id="{2DB46CB7-9142-4549-BC87-5E773B2B9F3F}"/>
               </a:ext>
             </a:extLst>
           </p:cNvPr>
@@ -12950,7 +18725,7 @@
     </p:spTree>
     <p:extLst>
       <p:ext uri="{BB962C8B-B14F-4D97-AF65-F5344CB8AC3E}">
-        <p14:creationId xmlns:p14="http://schemas.microsoft.com/office/powerpoint/2010/main" val="2079078269"/>
+        <p14:creationId xmlns:p14="http://schemas.microsoft.com/office/powerpoint/2010/main" val="987746621"/>
       </p:ext>
     </p:extLst>
   </p:cSld>

--- a/operator_hypothesis_lab/presentations/nvda_microscope_evidence.pptx
+++ b/operator_hypothesis_lab/presentations/nvda_microscope_evidence.pptx
@@ -2,34 +2,40 @@
 <file path=ppt/presentation.xml><?xml version="1.0" encoding="utf-8"?>
 <p:presentation xmlns:p="http://schemas.openxmlformats.org/presentationml/2006/main">
   <p:sldMasterIdLst>
-    <p:sldMasterId xmlns:r="http://schemas.openxmlformats.org/officeDocument/2006/relationships" id="2147483648" r:id="Rfe586dd9ca844771"/>
+    <p:sldMasterId xmlns:r="http://schemas.openxmlformats.org/officeDocument/2006/relationships" id="2147483648" r:id="R0d0577b11d354120"/>
   </p:sldMasterIdLst>
   <p:notesMasterIdLst>
-    <p:notesMasterId xmlns:r="http://schemas.openxmlformats.org/officeDocument/2006/relationships" r:id="R03c871664f1542bd"/>
+    <p:notesMasterId xmlns:r="http://schemas.openxmlformats.org/officeDocument/2006/relationships" r:id="Re13cf518a5364567"/>
   </p:notesMasterIdLst>
   <p:sldIdLst>
-    <p:sldId xmlns:r="http://schemas.openxmlformats.org/officeDocument/2006/relationships" id="256" r:id="R27a768263ed14159"/>
-    <p:sldId xmlns:r="http://schemas.openxmlformats.org/officeDocument/2006/relationships" id="257" r:id="Rdb1f0174473a4193"/>
-    <p:sldId xmlns:r="http://schemas.openxmlformats.org/officeDocument/2006/relationships" id="258" r:id="R619cc5e9e32144cb"/>
-    <p:sldId xmlns:r="http://schemas.openxmlformats.org/officeDocument/2006/relationships" id="259" r:id="R23696ec42b614fcc"/>
-    <p:sldId xmlns:r="http://schemas.openxmlformats.org/officeDocument/2006/relationships" id="260" r:id="R78883b1937cb4d39"/>
-    <p:sldId xmlns:r="http://schemas.openxmlformats.org/officeDocument/2006/relationships" id="261" r:id="Rb9db9180c36c43a2"/>
-    <p:sldId xmlns:r="http://schemas.openxmlformats.org/officeDocument/2006/relationships" id="262" r:id="Rb915d32fc2dc47a6"/>
-    <p:sldId xmlns:r="http://schemas.openxmlformats.org/officeDocument/2006/relationships" id="263" r:id="Raa6cb380633a4703"/>
-    <p:sldId xmlns:r="http://schemas.openxmlformats.org/officeDocument/2006/relationships" id="264" r:id="Rd2c3df8c30d64ef8"/>
-    <p:sldId xmlns:r="http://schemas.openxmlformats.org/officeDocument/2006/relationships" id="265" r:id="R4a798ffdb6854728"/>
-    <p:sldId xmlns:r="http://schemas.openxmlformats.org/officeDocument/2006/relationships" id="266" r:id="R1eceb7d56f6b46fc"/>
-    <p:sldId xmlns:r="http://schemas.openxmlformats.org/officeDocument/2006/relationships" id="267" r:id="Rd19e27a3e5a941e7"/>
-    <p:sldId xmlns:r="http://schemas.openxmlformats.org/officeDocument/2006/relationships" id="268" r:id="R01c98fe7c7ca4704"/>
-    <p:sldId xmlns:r="http://schemas.openxmlformats.org/officeDocument/2006/relationships" id="269" r:id="R12f1e492880b495a"/>
-    <p:sldId xmlns:r="http://schemas.openxmlformats.org/officeDocument/2006/relationships" id="270" r:id="R91e3030376b747c4"/>
-    <p:sldId xmlns:r="http://schemas.openxmlformats.org/officeDocument/2006/relationships" id="271" r:id="Rf09472a87e0f4f93"/>
-    <p:sldId xmlns:r="http://schemas.openxmlformats.org/officeDocument/2006/relationships" id="272" r:id="R8f4e885be3784f2f"/>
-    <p:sldId xmlns:r="http://schemas.openxmlformats.org/officeDocument/2006/relationships" id="273" r:id="R103b415cd7844a21"/>
-    <p:sldId xmlns:r="http://schemas.openxmlformats.org/officeDocument/2006/relationships" id="274" r:id="R63879e09e8b248d1"/>
-    <p:sldId xmlns:r="http://schemas.openxmlformats.org/officeDocument/2006/relationships" id="275" r:id="R73cfd732817f4146"/>
-    <p:sldId xmlns:r="http://schemas.openxmlformats.org/officeDocument/2006/relationships" id="276" r:id="Rd4ce9357822741f8"/>
-    <p:sldId xmlns:r="http://schemas.openxmlformats.org/officeDocument/2006/relationships" id="277" r:id="Ra34e6c1303024106"/>
+    <p:sldId xmlns:r="http://schemas.openxmlformats.org/officeDocument/2006/relationships" id="256" r:id="R06aca6160cd942d5"/>
+    <p:sldId xmlns:r="http://schemas.openxmlformats.org/officeDocument/2006/relationships" id="257" r:id="R86078bfaad4e45a7"/>
+    <p:sldId xmlns:r="http://schemas.openxmlformats.org/officeDocument/2006/relationships" id="258" r:id="R8b71cd448b8e4f02"/>
+    <p:sldId xmlns:r="http://schemas.openxmlformats.org/officeDocument/2006/relationships" id="259" r:id="R6e4dcad0d99f44eb"/>
+    <p:sldId xmlns:r="http://schemas.openxmlformats.org/officeDocument/2006/relationships" id="260" r:id="R644faa77604a46df"/>
+    <p:sldId xmlns:r="http://schemas.openxmlformats.org/officeDocument/2006/relationships" id="261" r:id="Rc1c014cab37340b1"/>
+    <p:sldId xmlns:r="http://schemas.openxmlformats.org/officeDocument/2006/relationships" id="262" r:id="Rcb0bb3f1a58b4d6f"/>
+    <p:sldId xmlns:r="http://schemas.openxmlformats.org/officeDocument/2006/relationships" id="263" r:id="R3124e3dba2884798"/>
+    <p:sldId xmlns:r="http://schemas.openxmlformats.org/officeDocument/2006/relationships" id="264" r:id="R3e4da2e152d94dc5"/>
+    <p:sldId xmlns:r="http://schemas.openxmlformats.org/officeDocument/2006/relationships" id="265" r:id="Rc93f2ff99b804f01"/>
+    <p:sldId xmlns:r="http://schemas.openxmlformats.org/officeDocument/2006/relationships" id="266" r:id="R4b4aab4a19054b23"/>
+    <p:sldId xmlns:r="http://schemas.openxmlformats.org/officeDocument/2006/relationships" id="267" r:id="R923ee701d8b1478d"/>
+    <p:sldId xmlns:r="http://schemas.openxmlformats.org/officeDocument/2006/relationships" id="268" r:id="Re2d0cfac54774176"/>
+    <p:sldId xmlns:r="http://schemas.openxmlformats.org/officeDocument/2006/relationships" id="269" r:id="Ra46cef779c254f30"/>
+    <p:sldId xmlns:r="http://schemas.openxmlformats.org/officeDocument/2006/relationships" id="270" r:id="Ra4fc5dd8669a49dc"/>
+    <p:sldId xmlns:r="http://schemas.openxmlformats.org/officeDocument/2006/relationships" id="271" r:id="R7067006636734f51"/>
+    <p:sldId xmlns:r="http://schemas.openxmlformats.org/officeDocument/2006/relationships" id="272" r:id="Rf600e917ab0d48a0"/>
+    <p:sldId xmlns:r="http://schemas.openxmlformats.org/officeDocument/2006/relationships" id="273" r:id="Rb66e8513574642ae"/>
+    <p:sldId xmlns:r="http://schemas.openxmlformats.org/officeDocument/2006/relationships" id="274" r:id="R18a1b5f085184d89"/>
+    <p:sldId xmlns:r="http://schemas.openxmlformats.org/officeDocument/2006/relationships" id="275" r:id="R4f96289868cd4481"/>
+    <p:sldId xmlns:r="http://schemas.openxmlformats.org/officeDocument/2006/relationships" id="276" r:id="R093e84d000e740e5"/>
+    <p:sldId xmlns:r="http://schemas.openxmlformats.org/officeDocument/2006/relationships" id="277" r:id="Rfb1fd85b340649a8"/>
+    <p:sldId xmlns:r="http://schemas.openxmlformats.org/officeDocument/2006/relationships" id="278" r:id="R63c58584573847fe"/>
+    <p:sldId xmlns:r="http://schemas.openxmlformats.org/officeDocument/2006/relationships" id="279" r:id="Red09aa29b55b4451"/>
+    <p:sldId xmlns:r="http://schemas.openxmlformats.org/officeDocument/2006/relationships" id="280" r:id="R3a528ed6b1e545f7"/>
+    <p:sldId xmlns:r="http://schemas.openxmlformats.org/officeDocument/2006/relationships" id="281" r:id="R07b51d796da84dd2"/>
+    <p:sldId xmlns:r="http://schemas.openxmlformats.org/officeDocument/2006/relationships" id="282" r:id="R8ca777c129ec44a4"/>
+    <p:sldId xmlns:r="http://schemas.openxmlformats.org/officeDocument/2006/relationships" id="283" r:id="R215a63037c9b4b5a"/>
   </p:sldIdLst>
   <p:sldSz cx="12192000" cy="6858000"/>
   <p:notesSz cx="6858000" cy="9144000"/>
@@ -1858,6 +1864,596 @@
 </p:notes>
 </file>
 
+<file path=ppt/notesSlides/notesSlide23.xml><?xml version="1.0" encoding="utf-8"?>
+<p:notes xmlns:p="http://schemas.openxmlformats.org/presentationml/2006/main">
+  <p:cSld>
+    <p:spTree>
+      <p:nvGrpSpPr>
+        <p:cNvPr id="1" name=""/>
+        <p:cNvGrpSpPr/>
+        <p:nvPr/>
+      </p:nvGrpSpPr>
+      <p:grpSpPr>
+        <a:xfrm xmlns:a="http://schemas.openxmlformats.org/drawingml/2006/main"/>
+      </p:grpSpPr>
+      <p:sp>
+        <p:nvSpPr>
+          <p:cNvPr id="2" name="Slide Image Placeholder 1"/>
+          <p:cNvSpPr>
+            <a:spLocks xmlns:a="http://schemas.openxmlformats.org/drawingml/2006/main" noGrp="1"/>
+          </p:cNvSpPr>
+          <p:nvPr>
+            <p:ph type="sldImg" idx="0"/>
+          </p:nvPr>
+        </p:nvSpPr>
+        <p:spPr/>
+      </p:sp>
+      <p:sp>
+        <p:nvSpPr>
+          <p:cNvPr id="3" name="Notes Placeholder 2"/>
+          <p:cNvSpPr>
+            <a:spLocks xmlns:a="http://schemas.openxmlformats.org/drawingml/2006/main" noGrp="1"/>
+          </p:cNvSpPr>
+          <p:nvPr>
+            <p:ph type="body" idx="1"/>
+          </p:nvPr>
+        </p:nvSpPr>
+        <p:spPr/>
+        <p:txBody>
+          <a:bodyPr xmlns:a="http://schemas.openxmlformats.org/drawingml/2006/main"/>
+          <a:lstStyle xmlns:a="http://schemas.openxmlformats.org/drawingml/2006/main"/>
+          <a:p xmlns:a="http://schemas.openxmlformats.org/drawingml/2006/main">
+            <a:r>
+              <a:t>This is the irreversible confirmation read. The exact TRAIN-selected candidate is evaluated on the previously sealed period. A failure stops the exact rule without rescue tuning.</a:t>
+            </a:r>
+          </a:p>
+          <a:p xmlns:a="http://schemas.openxmlformats.org/drawingml/2006/main">
+            <a:r>
+              <a:t/>
+            </a:r>
+          </a:p>
+          <a:p xmlns:a="http://schemas.openxmlformats.org/drawingml/2006/main">
+            <a:r>
+              <a:t>[Sources]</a:t>
+            </a:r>
+          </a:p>
+          <a:p xmlns:a="http://schemas.openxmlformats.org/drawingml/2006/main">
+            <a:r>
+              <a:t>- Local one-shot confirmation report: runs/research_workbench/operator_hypothesis_lab/nvda_daily_proto_rule_confirmation_20260831/report.md</a:t>
+            </a:r>
+          </a:p>
+          <a:p xmlns:a="http://schemas.openxmlformats.org/drawingml/2006/main">
+            <a:r>
+              <a:t>- Predeclared confirmation gates: runs/research_workbench/operator_hypothesis_lab/nvda_daily_proto_rule_confirmation_20260831/confirmation_gates.csv</a:t>
+            </a:r>
+          </a:p>
+          <a:p xmlns:a="http://schemas.openxmlformats.org/drawingml/2006/main">
+            <a:r>
+              <a:t>- Explicit-as-of query health: runs/research_workbench/operator_hypothesis_lab/nvda_daily_proto_rule_confirmation_20260831/query_health.csv</a:t>
+            </a:r>
+          </a:p>
+          <a:p xmlns:a="http://schemas.openxmlformats.org/drawingml/2006/main">
+            <a:r>
+              <a:t>[/Sources]</a:t>
+            </a:r>
+          </a:p>
+        </p:txBody>
+      </p:sp>
+      <p:sp>
+        <p:nvSpPr>
+          <p:cNvPr id="4" name="Slide Number Placeholder 3"/>
+          <p:cNvSpPr>
+            <a:spLocks xmlns:a="http://schemas.openxmlformats.org/drawingml/2006/main" noGrp="1"/>
+          </p:cNvSpPr>
+          <p:nvPr>
+            <p:ph type="sldNum" idx="5"/>
+          </p:nvPr>
+        </p:nvSpPr>
+        <p:spPr/>
+        <p:txBody>
+          <a:bodyPr xmlns:a="http://schemas.openxmlformats.org/drawingml/2006/main"/>
+          <a:lstStyle xmlns:a="http://schemas.openxmlformats.org/drawingml/2006/main"/>
+          <a:p xmlns:a="http://schemas.openxmlformats.org/drawingml/2006/main"/>
+        </p:txBody>
+      </p:sp>
+    </p:spTree>
+  </p:cSld>
+  <p:clrMapOvr>
+    <a:masterClrMapping xmlns:a="http://schemas.openxmlformats.org/drawingml/2006/main"/>
+  </p:clrMapOvr>
+</p:notes>
+</file>
+
+<file path=ppt/notesSlides/notesSlide24.xml><?xml version="1.0" encoding="utf-8"?>
+<p:notes xmlns:p="http://schemas.openxmlformats.org/presentationml/2006/main">
+  <p:cSld>
+    <p:spTree>
+      <p:nvGrpSpPr>
+        <p:cNvPr id="1" name=""/>
+        <p:cNvGrpSpPr/>
+        <p:nvPr/>
+      </p:nvGrpSpPr>
+      <p:grpSpPr>
+        <a:xfrm xmlns:a="http://schemas.openxmlformats.org/drawingml/2006/main"/>
+      </p:grpSpPr>
+      <p:sp>
+        <p:nvSpPr>
+          <p:cNvPr id="2" name="Slide Image Placeholder 1"/>
+          <p:cNvSpPr>
+            <a:spLocks xmlns:a="http://schemas.openxmlformats.org/drawingml/2006/main" noGrp="1"/>
+          </p:cNvSpPr>
+          <p:nvPr>
+            <p:ph type="sldImg" idx="0"/>
+          </p:nvPr>
+        </p:nvSpPr>
+        <p:spPr/>
+      </p:sp>
+      <p:sp>
+        <p:nvSpPr>
+          <p:cNvPr id="3" name="Notes Placeholder 2"/>
+          <p:cNvSpPr>
+            <a:spLocks xmlns:a="http://schemas.openxmlformats.org/drawingml/2006/main" noGrp="1"/>
+          </p:cNvSpPr>
+          <p:nvPr>
+            <p:ph type="body" idx="1"/>
+          </p:nvPr>
+        </p:nvSpPr>
+        <p:spPr/>
+        <p:txBody>
+          <a:bodyPr xmlns:a="http://schemas.openxmlformats.org/drawingml/2006/main"/>
+          <a:lstStyle xmlns:a="http://schemas.openxmlformats.org/drawingml/2006/main"/>
+          <a:p xmlns:a="http://schemas.openxmlformats.org/drawingml/2006/main">
+            <a:r>
+              <a:t>TRAIN showed a 6.33% mean net return for the joint condition. Untouched confirmation produced 1.56%, below 4.44% unconditional gross drift and below all three frozen controls. The exact rule therefore fails confirmation.</a:t>
+            </a:r>
+          </a:p>
+          <a:p xmlns:a="http://schemas.openxmlformats.org/drawingml/2006/main">
+            <a:r>
+              <a:t/>
+            </a:r>
+          </a:p>
+          <a:p xmlns:a="http://schemas.openxmlformats.org/drawingml/2006/main">
+            <a:r>
+              <a:t>[Sources]</a:t>
+            </a:r>
+          </a:p>
+          <a:p xmlns:a="http://schemas.openxmlformats.org/drawingml/2006/main">
+            <a:r>
+              <a:t>- Local one-shot confirmation report: runs/research_workbench/operator_hypothesis_lab/nvda_daily_proto_rule_confirmation_20260831/report.md</a:t>
+            </a:r>
+          </a:p>
+          <a:p xmlns:a="http://schemas.openxmlformats.org/drawingml/2006/main">
+            <a:r>
+              <a:t>- Predeclared confirmation gates: runs/research_workbench/operator_hypothesis_lab/nvda_daily_proto_rule_confirmation_20260831/confirmation_gates.csv</a:t>
+            </a:r>
+          </a:p>
+          <a:p xmlns:a="http://schemas.openxmlformats.org/drawingml/2006/main">
+            <a:r>
+              <a:t>- Frozen confirmation rule summary: runs/research_workbench/operator_hypothesis_lab/nvda_daily_proto_rule_confirmation_20260831/rule_summary.csv</a:t>
+            </a:r>
+          </a:p>
+          <a:p xmlns:a="http://schemas.openxmlformats.org/drawingml/2006/main">
+            <a:r>
+              <a:t>[/Sources]</a:t>
+            </a:r>
+          </a:p>
+        </p:txBody>
+      </p:sp>
+      <p:sp>
+        <p:nvSpPr>
+          <p:cNvPr id="4" name="Slide Number Placeholder 3"/>
+          <p:cNvSpPr>
+            <a:spLocks xmlns:a="http://schemas.openxmlformats.org/drawingml/2006/main" noGrp="1"/>
+          </p:cNvSpPr>
+          <p:nvPr>
+            <p:ph type="sldNum" idx="5"/>
+          </p:nvPr>
+        </p:nvSpPr>
+        <p:spPr/>
+        <p:txBody>
+          <a:bodyPr xmlns:a="http://schemas.openxmlformats.org/drawingml/2006/main"/>
+          <a:lstStyle xmlns:a="http://schemas.openxmlformats.org/drawingml/2006/main"/>
+          <a:p xmlns:a="http://schemas.openxmlformats.org/drawingml/2006/main"/>
+        </p:txBody>
+      </p:sp>
+    </p:spTree>
+  </p:cSld>
+  <p:clrMapOvr>
+    <a:masterClrMapping xmlns:a="http://schemas.openxmlformats.org/drawingml/2006/main"/>
+  </p:clrMapOvr>
+</p:notes>
+</file>
+
+<file path=ppt/notesSlides/notesSlide25.xml><?xml version="1.0" encoding="utf-8"?>
+<p:notes xmlns:p="http://schemas.openxmlformats.org/presentationml/2006/main">
+  <p:cSld>
+    <p:spTree>
+      <p:nvGrpSpPr>
+        <p:cNvPr id="1" name=""/>
+        <p:cNvGrpSpPr/>
+        <p:nvPr/>
+      </p:nvGrpSpPr>
+      <p:grpSpPr>
+        <a:xfrm xmlns:a="http://schemas.openxmlformats.org/drawingml/2006/main"/>
+      </p:grpSpPr>
+      <p:sp>
+        <p:nvSpPr>
+          <p:cNvPr id="2" name="Slide Image Placeholder 1"/>
+          <p:cNvSpPr>
+            <a:spLocks xmlns:a="http://schemas.openxmlformats.org/drawingml/2006/main" noGrp="1"/>
+          </p:cNvSpPr>
+          <p:nvPr>
+            <p:ph type="sldImg" idx="0"/>
+          </p:nvPr>
+        </p:nvSpPr>
+        <p:spPr/>
+      </p:sp>
+      <p:sp>
+        <p:nvSpPr>
+          <p:cNvPr id="3" name="Notes Placeholder 2"/>
+          <p:cNvSpPr>
+            <a:spLocks xmlns:a="http://schemas.openxmlformats.org/drawingml/2006/main" noGrp="1"/>
+          </p:cNvSpPr>
+          <p:nvPr>
+            <p:ph type="body" idx="1"/>
+          </p:nvPr>
+        </p:nvSpPr>
+        <p:spPr/>
+        <p:txBody>
+          <a:bodyPr xmlns:a="http://schemas.openxmlformats.org/drawingml/2006/main"/>
+          <a:lstStyle xmlns:a="http://schemas.openxmlformats.org/drawingml/2006/main"/>
+          <a:p xmlns:a="http://schemas.openxmlformats.org/drawingml/2006/main">
+            <a:r>
+              <a:t>The rule was right more often than wrong and had a positive median, but those facts are subordinate to the economic comparison. The average result lagged what NVDA produced unconditionally over the same 20-session horizon.</a:t>
+            </a:r>
+          </a:p>
+          <a:p xmlns:a="http://schemas.openxmlformats.org/drawingml/2006/main">
+            <a:r>
+              <a:t/>
+            </a:r>
+          </a:p>
+          <a:p xmlns:a="http://schemas.openxmlformats.org/drawingml/2006/main">
+            <a:r>
+              <a:t>[Sources]</a:t>
+            </a:r>
+          </a:p>
+          <a:p xmlns:a="http://schemas.openxmlformats.org/drawingml/2006/main">
+            <a:r>
+              <a:t>- Untouched-period trade ledger: runs/research_workbench/operator_hypothesis_lab/nvda_daily_proto_rule_confirmation_20260831/confirmation_trade_ledger.csv</a:t>
+            </a:r>
+          </a:p>
+          <a:p xmlns:a="http://schemas.openxmlformats.org/drawingml/2006/main">
+            <a:r>
+              <a:t>- Frozen confirmation rule summary: runs/research_workbench/operator_hypothesis_lab/nvda_daily_proto_rule_confirmation_20260831/rule_summary.csv</a:t>
+            </a:r>
+          </a:p>
+          <a:p xmlns:a="http://schemas.openxmlformats.org/drawingml/2006/main">
+            <a:r>
+              <a:t>- Predeclared confirmation gates: runs/research_workbench/operator_hypothesis_lab/nvda_daily_proto_rule_confirmation_20260831/confirmation_gates.csv</a:t>
+            </a:r>
+          </a:p>
+          <a:p xmlns:a="http://schemas.openxmlformats.org/drawingml/2006/main">
+            <a:r>
+              <a:t>[/Sources]</a:t>
+            </a:r>
+          </a:p>
+        </p:txBody>
+      </p:sp>
+      <p:sp>
+        <p:nvSpPr>
+          <p:cNvPr id="4" name="Slide Number Placeholder 3"/>
+          <p:cNvSpPr>
+            <a:spLocks xmlns:a="http://schemas.openxmlformats.org/drawingml/2006/main" noGrp="1"/>
+          </p:cNvSpPr>
+          <p:nvPr>
+            <p:ph type="sldNum" idx="5"/>
+          </p:nvPr>
+        </p:nvSpPr>
+        <p:spPr/>
+        <p:txBody>
+          <a:bodyPr xmlns:a="http://schemas.openxmlformats.org/drawingml/2006/main"/>
+          <a:lstStyle xmlns:a="http://schemas.openxmlformats.org/drawingml/2006/main"/>
+          <a:p xmlns:a="http://schemas.openxmlformats.org/drawingml/2006/main"/>
+        </p:txBody>
+      </p:sp>
+    </p:spTree>
+  </p:cSld>
+  <p:clrMapOvr>
+    <a:masterClrMapping xmlns:a="http://schemas.openxmlformats.org/drawingml/2006/main"/>
+  </p:clrMapOvr>
+</p:notes>
+</file>
+
+<file path=ppt/notesSlides/notesSlide26.xml><?xml version="1.0" encoding="utf-8"?>
+<p:notes xmlns:p="http://schemas.openxmlformats.org/presentationml/2006/main">
+  <p:cSld>
+    <p:spTree>
+      <p:nvGrpSpPr>
+        <p:cNvPr id="1" name=""/>
+        <p:cNvGrpSpPr/>
+        <p:nvPr/>
+      </p:nvGrpSpPr>
+      <p:grpSpPr>
+        <a:xfrm xmlns:a="http://schemas.openxmlformats.org/drawingml/2006/main"/>
+      </p:grpSpPr>
+      <p:sp>
+        <p:nvSpPr>
+          <p:cNvPr id="2" name="Slide Image Placeholder 1"/>
+          <p:cNvSpPr>
+            <a:spLocks xmlns:a="http://schemas.openxmlformats.org/drawingml/2006/main" noGrp="1"/>
+          </p:cNvSpPr>
+          <p:nvPr>
+            <p:ph type="sldImg" idx="0"/>
+          </p:nvPr>
+        </p:nvSpPr>
+        <p:spPr/>
+      </p:sp>
+      <p:sp>
+        <p:nvSpPr>
+          <p:cNvPr id="3" name="Notes Placeholder 2"/>
+          <p:cNvSpPr>
+            <a:spLocks xmlns:a="http://schemas.openxmlformats.org/drawingml/2006/main" noGrp="1"/>
+          </p:cNvSpPr>
+          <p:nvPr>
+            <p:ph type="body" idx="1"/>
+          </p:nvPr>
+        </p:nvSpPr>
+        <p:spPr/>
+        <p:txBody>
+          <a:bodyPr xmlns:a="http://schemas.openxmlformats.org/drawingml/2006/main"/>
+          <a:lstStyle xmlns:a="http://schemas.openxmlformats.org/drawingml/2006/main"/>
+          <a:p xmlns:a="http://schemas.openxmlformats.org/drawingml/2006/main">
+            <a:r>
+              <a:t>The participation chart shows only nine non-overlapping entries. The realized-equity path remained below its starting level through much of the confirmation period before a late large winner. This visual reinforces why the drift and ingredient-control comparisons are decisive.</a:t>
+            </a:r>
+          </a:p>
+          <a:p xmlns:a="http://schemas.openxmlformats.org/drawingml/2006/main">
+            <a:r>
+              <a:t/>
+            </a:r>
+          </a:p>
+          <a:p xmlns:a="http://schemas.openxmlformats.org/drawingml/2006/main">
+            <a:r>
+              <a:t>[Sources]</a:t>
+            </a:r>
+          </a:p>
+          <a:p xmlns:a="http://schemas.openxmlformats.org/drawingml/2006/main">
+            <a:r>
+              <a:t>- Untouched-period trade ledger: runs/research_workbench/operator_hypothesis_lab/nvda_daily_proto_rule_confirmation_20260831/confirmation_trade_ledger.csv</a:t>
+            </a:r>
+          </a:p>
+          <a:p xmlns:a="http://schemas.openxmlformats.org/drawingml/2006/main">
+            <a:r>
+              <a:t>- Frozen confirmation rule summary: runs/research_workbench/operator_hypothesis_lab/nvda_daily_proto_rule_confirmation_20260831/rule_summary.csv</a:t>
+            </a:r>
+          </a:p>
+          <a:p xmlns:a="http://schemas.openxmlformats.org/drawingml/2006/main">
+            <a:r>
+              <a:t>[/Sources]</a:t>
+            </a:r>
+          </a:p>
+        </p:txBody>
+      </p:sp>
+      <p:sp>
+        <p:nvSpPr>
+          <p:cNvPr id="4" name="Slide Number Placeholder 3"/>
+          <p:cNvSpPr>
+            <a:spLocks xmlns:a="http://schemas.openxmlformats.org/drawingml/2006/main" noGrp="1"/>
+          </p:cNvSpPr>
+          <p:nvPr>
+            <p:ph type="sldNum" idx="5"/>
+          </p:nvPr>
+        </p:nvSpPr>
+        <p:spPr/>
+        <p:txBody>
+          <a:bodyPr xmlns:a="http://schemas.openxmlformats.org/drawingml/2006/main"/>
+          <a:lstStyle xmlns:a="http://schemas.openxmlformats.org/drawingml/2006/main"/>
+          <a:p xmlns:a="http://schemas.openxmlformats.org/drawingml/2006/main"/>
+        </p:txBody>
+      </p:sp>
+    </p:spTree>
+  </p:cSld>
+  <p:clrMapOvr>
+    <a:masterClrMapping xmlns:a="http://schemas.openxmlformats.org/drawingml/2006/main"/>
+  </p:clrMapOvr>
+</p:notes>
+</file>
+
+<file path=ppt/notesSlides/notesSlide27.xml><?xml version="1.0" encoding="utf-8"?>
+<p:notes xmlns:p="http://schemas.openxmlformats.org/presentationml/2006/main">
+  <p:cSld>
+    <p:spTree>
+      <p:nvGrpSpPr>
+        <p:cNvPr id="1" name=""/>
+        <p:cNvGrpSpPr/>
+        <p:nvPr/>
+      </p:nvGrpSpPr>
+      <p:grpSpPr>
+        <a:xfrm xmlns:a="http://schemas.openxmlformats.org/drawingml/2006/main"/>
+      </p:grpSpPr>
+      <p:sp>
+        <p:nvSpPr>
+          <p:cNvPr id="2" name="Slide Image Placeholder 1"/>
+          <p:cNvSpPr>
+            <a:spLocks xmlns:a="http://schemas.openxmlformats.org/drawingml/2006/main" noGrp="1"/>
+          </p:cNvSpPr>
+          <p:nvPr>
+            <p:ph type="sldImg" idx="0"/>
+          </p:nvPr>
+        </p:nvSpPr>
+        <p:spPr/>
+      </p:sp>
+      <p:sp>
+        <p:nvSpPr>
+          <p:cNvPr id="3" name="Notes Placeholder 2"/>
+          <p:cNvSpPr>
+            <a:spLocks xmlns:a="http://schemas.openxmlformats.org/drawingml/2006/main" noGrp="1"/>
+          </p:cNvSpPr>
+          <p:nvPr>
+            <p:ph type="body" idx="1"/>
+          </p:nvPr>
+        </p:nvSpPr>
+        <p:spPr/>
+        <p:txBody>
+          <a:bodyPr xmlns:a="http://schemas.openxmlformats.org/drawingml/2006/main"/>
+          <a:lstStyle xmlns:a="http://schemas.openxmlformats.org/drawingml/2006/main"/>
+          <a:p xmlns:a="http://schemas.openxmlformats.org/drawingml/2006/main">
+            <a:r>
+              <a:t>The all-path panel shows considerable dispersion rather than a repeated recovery trajectory. The worst trade lost 18.6%, the median-nearest trade gained 2.2%, and the best gained 21.6%. These are descriptive trade tapes, not independent confirmations.</a:t>
+            </a:r>
+          </a:p>
+          <a:p xmlns:a="http://schemas.openxmlformats.org/drawingml/2006/main">
+            <a:r>
+              <a:t/>
+            </a:r>
+          </a:p>
+          <a:p xmlns:a="http://schemas.openxmlformats.org/drawingml/2006/main">
+            <a:r>
+              <a:t>[Sources]</a:t>
+            </a:r>
+          </a:p>
+          <a:p xmlns:a="http://schemas.openxmlformats.org/drawingml/2006/main">
+            <a:r>
+              <a:t>- Untouched-period trade ledger: runs/research_workbench/operator_hypothesis_lab/nvda_daily_proto_rule_confirmation_20260831/confirmation_trade_ledger.csv</a:t>
+            </a:r>
+          </a:p>
+          <a:p xmlns:a="http://schemas.openxmlformats.org/drawingml/2006/main">
+            <a:r>
+              <a:t>- Local one-shot confirmation report: runs/research_workbench/operator_hypothesis_lab/nvda_daily_proto_rule_confirmation_20260831/report.md</a:t>
+            </a:r>
+          </a:p>
+          <a:p xmlns:a="http://schemas.openxmlformats.org/drawingml/2006/main">
+            <a:r>
+              <a:t>[/Sources]</a:t>
+            </a:r>
+          </a:p>
+        </p:txBody>
+      </p:sp>
+      <p:sp>
+        <p:nvSpPr>
+          <p:cNvPr id="4" name="Slide Number Placeholder 3"/>
+          <p:cNvSpPr>
+            <a:spLocks xmlns:a="http://schemas.openxmlformats.org/drawingml/2006/main" noGrp="1"/>
+          </p:cNvSpPr>
+          <p:nvPr>
+            <p:ph type="sldNum" idx="5"/>
+          </p:nvPr>
+        </p:nvSpPr>
+        <p:spPr/>
+        <p:txBody>
+          <a:bodyPr xmlns:a="http://schemas.openxmlformats.org/drawingml/2006/main"/>
+          <a:lstStyle xmlns:a="http://schemas.openxmlformats.org/drawingml/2006/main"/>
+          <a:p xmlns:a="http://schemas.openxmlformats.org/drawingml/2006/main"/>
+        </p:txBody>
+      </p:sp>
+    </p:spTree>
+  </p:cSld>
+  <p:clrMapOvr>
+    <a:masterClrMapping xmlns:a="http://schemas.openxmlformats.org/drawingml/2006/main"/>
+  </p:clrMapOvr>
+</p:notes>
+</file>
+
+<file path=ppt/notesSlides/notesSlide28.xml><?xml version="1.0" encoding="utf-8"?>
+<p:notes xmlns:p="http://schemas.openxmlformats.org/presentationml/2006/main">
+  <p:cSld>
+    <p:spTree>
+      <p:nvGrpSpPr>
+        <p:cNvPr id="1" name=""/>
+        <p:cNvGrpSpPr/>
+        <p:nvPr/>
+      </p:nvGrpSpPr>
+      <p:grpSpPr>
+        <a:xfrm xmlns:a="http://schemas.openxmlformats.org/drawingml/2006/main"/>
+      </p:grpSpPr>
+      <p:sp>
+        <p:nvSpPr>
+          <p:cNvPr id="2" name="Slide Image Placeholder 1"/>
+          <p:cNvSpPr>
+            <a:spLocks xmlns:a="http://schemas.openxmlformats.org/drawingml/2006/main" noGrp="1"/>
+          </p:cNvSpPr>
+          <p:nvPr>
+            <p:ph type="sldImg" idx="0"/>
+          </p:nvPr>
+        </p:nvSpPr>
+        <p:spPr/>
+      </p:sp>
+      <p:sp>
+        <p:nvSpPr>
+          <p:cNvPr id="3" name="Notes Placeholder 2"/>
+          <p:cNvSpPr>
+            <a:spLocks xmlns:a="http://schemas.openxmlformats.org/drawingml/2006/main" noGrp="1"/>
+          </p:cNvSpPr>
+          <p:nvPr>
+            <p:ph type="body" idx="1"/>
+          </p:nvPr>
+        </p:nvSpPr>
+        <p:spPr/>
+        <p:txBody>
+          <a:bodyPr xmlns:a="http://schemas.openxmlformats.org/drawingml/2006/main"/>
+          <a:lstStyle xmlns:a="http://schemas.openxmlformats.org/drawingml/2006/main"/>
+          <a:p xmlns:a="http://schemas.openxmlformats.org/drawingml/2006/main">
+            <a:r>
+              <a:t>The exact one-asset rule is stopped. The confirmation period has now been consumed and cannot be reused as untouched evidence. A later variation may be researched only as a new hypothesis with a newly protected confirmation boundary.</a:t>
+            </a:r>
+          </a:p>
+          <a:p xmlns:a="http://schemas.openxmlformats.org/drawingml/2006/main">
+            <a:r>
+              <a:t/>
+            </a:r>
+          </a:p>
+          <a:p xmlns:a="http://schemas.openxmlformats.org/drawingml/2006/main">
+            <a:r>
+              <a:t>[Sources]</a:t>
+            </a:r>
+          </a:p>
+          <a:p xmlns:a="http://schemas.openxmlformats.org/drawingml/2006/main">
+            <a:r>
+              <a:t>- Predeclared confirmation gates: runs/research_workbench/operator_hypothesis_lab/nvda_daily_proto_rule_confirmation_20260831/confirmation_gates.csv</a:t>
+            </a:r>
+          </a:p>
+          <a:p xmlns:a="http://schemas.openxmlformats.org/drawingml/2006/main">
+            <a:r>
+              <a:t>- Local one-shot confirmation report: runs/research_workbench/operator_hypothesis_lab/nvda_daily_proto_rule_confirmation_20260831/report.md</a:t>
+            </a:r>
+          </a:p>
+          <a:p xmlns:a="http://schemas.openxmlformats.org/drawingml/2006/main">
+            <a:r>
+              <a:t>- Explicit-as-of query health: runs/research_workbench/operator_hypothesis_lab/nvda_daily_proto_rule_confirmation_20260831/query_health.csv</a:t>
+            </a:r>
+          </a:p>
+          <a:p xmlns:a="http://schemas.openxmlformats.org/drawingml/2006/main">
+            <a:r>
+              <a:t>[/Sources]</a:t>
+            </a:r>
+          </a:p>
+        </p:txBody>
+      </p:sp>
+      <p:sp>
+        <p:nvSpPr>
+          <p:cNvPr id="4" name="Slide Number Placeholder 3"/>
+          <p:cNvSpPr>
+            <a:spLocks xmlns:a="http://schemas.openxmlformats.org/drawingml/2006/main" noGrp="1"/>
+          </p:cNvSpPr>
+          <p:nvPr>
+            <p:ph type="sldNum" idx="5"/>
+          </p:nvPr>
+        </p:nvSpPr>
+        <p:spPr/>
+        <p:txBody>
+          <a:bodyPr xmlns:a="http://schemas.openxmlformats.org/drawingml/2006/main"/>
+          <a:lstStyle xmlns:a="http://schemas.openxmlformats.org/drawingml/2006/main"/>
+          <a:p xmlns:a="http://schemas.openxmlformats.org/drawingml/2006/main"/>
+        </p:txBody>
+      </p:sp>
+    </p:spTree>
+  </p:cSld>
+  <p:clrMapOvr>
+    <a:masterClrMapping xmlns:a="http://schemas.openxmlformats.org/drawingml/2006/main"/>
+  </p:clrMapOvr>
+</p:notes>
+</file>
+
 <file path=ppt/notesSlides/notesSlide3.xml><?xml version="1.0" encoding="utf-8"?>
 <p:notes xmlns:p="http://schemas.openxmlformats.org/presentationml/2006/main">
   <p:cSld>
@@ -2561,7 +3157,7 @@
   </p:cSld>
   <p:clrMap bg1="lt1" tx1="dk1" bg2="lt2" tx2="dk2" accent1="accent1" accent2="accent2" accent3="accent3" accent4="accent4" accent5="accent5" accent6="accent6" hlink="hlink" folHlink="folHlink"/>
   <p:sldLayoutIdLst>
-    <p:sldLayoutId xmlns:r="http://schemas.openxmlformats.org/officeDocument/2006/relationships" id="2147483649" r:id="R50e6237f20d4458b"/>
+    <p:sldLayoutId xmlns:r="http://schemas.openxmlformats.org/officeDocument/2006/relationships" id="2147483649" r:id="Rcb2be51a4b34422b"/>
   </p:sldLayoutIdLst>
   <p:txStyles>
     <p:titleStyle>
@@ -3112,7 +3708,7 @@
           <p:cNvPr id="13" name="">
             <a:extLst xmlns:a="http://schemas.openxmlformats.org/drawingml/2006/main">
               <a:ext uri="{FF2B5EF4-FFF2-40B4-BE49-F238E27FC236}">
-                <a16:creationId xmlns:a16="http://schemas.microsoft.com/office/drawing/2014/main" id="{1ADE7CEE-FAC7-44A3-8D23-79C6F28E9A67}"/>
+                <a16:creationId xmlns:a16="http://schemas.microsoft.com/office/drawing/2014/main" id="{0D4D9025-B41E-44BB-92FB-380561AF044D}"/>
               </a:ext>
             </a:extLst>
           </p:cNvPr>
@@ -3145,7 +3741,7 @@
           <p:cNvPr id="2" name="">
             <a:extLst xmlns:a="http://schemas.openxmlformats.org/drawingml/2006/main">
               <a:ext uri="{FF2B5EF4-FFF2-40B4-BE49-F238E27FC236}">
-                <a16:creationId xmlns:a16="http://schemas.microsoft.com/office/drawing/2014/main" id="{B38EE946-69F8-420B-A993-8A8177F7B075}"/>
+                <a16:creationId xmlns:a16="http://schemas.microsoft.com/office/drawing/2014/main" id="{EF6E2A96-EAAC-4FCF-B419-E64A2A4AB4D7}"/>
               </a:ext>
             </a:extLst>
           </p:cNvPr>
@@ -3195,7 +3791,7 @@
           <p:cNvPr id="3" name="">
             <a:extLst xmlns:a="http://schemas.openxmlformats.org/drawingml/2006/main">
               <a:ext uri="{FF2B5EF4-FFF2-40B4-BE49-F238E27FC236}">
-                <a16:creationId xmlns:a16="http://schemas.microsoft.com/office/drawing/2014/main" id="{BB9128D0-38A2-4CF0-B23A-5A7F770083D6}"/>
+                <a16:creationId xmlns:a16="http://schemas.microsoft.com/office/drawing/2014/main" id="{88196792-2907-45D1-B52E-054CFAEF79D9}"/>
               </a:ext>
             </a:extLst>
           </p:cNvPr>
@@ -3262,7 +3858,7 @@
           <p:cNvPr id="4" name="">
             <a:extLst xmlns:a="http://schemas.openxmlformats.org/drawingml/2006/main">
               <a:ext uri="{FF2B5EF4-FFF2-40B4-BE49-F238E27FC236}">
-                <a16:creationId xmlns:a16="http://schemas.microsoft.com/office/drawing/2014/main" id="{B197C271-D780-4B28-AC9C-AC4BE919C53C}"/>
+                <a16:creationId xmlns:a16="http://schemas.microsoft.com/office/drawing/2014/main" id="{28DE54C1-DC05-4AE2-9DA2-CF049A893066}"/>
               </a:ext>
             </a:extLst>
           </p:cNvPr>
@@ -3312,7 +3908,7 @@
           <p:cNvPr id="5" name="">
             <a:extLst xmlns:a="http://schemas.openxmlformats.org/drawingml/2006/main">
               <a:ext uri="{FF2B5EF4-FFF2-40B4-BE49-F238E27FC236}">
-                <a16:creationId xmlns:a16="http://schemas.microsoft.com/office/drawing/2014/main" id="{7886FA6B-6781-4B5A-9C39-6483B4C7B0BA}"/>
+                <a16:creationId xmlns:a16="http://schemas.microsoft.com/office/drawing/2014/main" id="{44630846-7928-4290-93ED-F04F1D138EDA}"/>
               </a:ext>
             </a:extLst>
           </p:cNvPr>
@@ -3345,7 +3941,7 @@
           <p:cNvPr id="6" name="">
             <a:extLst xmlns:a="http://schemas.openxmlformats.org/drawingml/2006/main">
               <a:ext uri="{FF2B5EF4-FFF2-40B4-BE49-F238E27FC236}">
-                <a16:creationId xmlns:a16="http://schemas.microsoft.com/office/drawing/2014/main" id="{547DF32A-E48A-4A3C-A5B4-4EB60CCA54FB}"/>
+                <a16:creationId xmlns:a16="http://schemas.microsoft.com/office/drawing/2014/main" id="{C430AEDE-2B34-4197-A0DE-0711CD51A688}"/>
               </a:ext>
             </a:extLst>
           </p:cNvPr>
@@ -3395,7 +3991,7 @@
           <p:cNvPr id="7" name="">
             <a:extLst xmlns:a="http://schemas.openxmlformats.org/drawingml/2006/main">
               <a:ext uri="{FF2B5EF4-FFF2-40B4-BE49-F238E27FC236}">
-                <a16:creationId xmlns:a16="http://schemas.microsoft.com/office/drawing/2014/main" id="{E1CF9959-39A1-42DA-945F-59EAA06877CC}"/>
+                <a16:creationId xmlns:a16="http://schemas.microsoft.com/office/drawing/2014/main" id="{9904A233-098D-41AF-A1E8-3027F4309BE6}"/>
               </a:ext>
             </a:extLst>
           </p:cNvPr>
@@ -3445,7 +4041,7 @@
           <p:cNvPr id="8" name="">
             <a:extLst xmlns:a="http://schemas.openxmlformats.org/drawingml/2006/main">
               <a:ext uri="{FF2B5EF4-FFF2-40B4-BE49-F238E27FC236}">
-                <a16:creationId xmlns:a16="http://schemas.microsoft.com/office/drawing/2014/main" id="{29D37C27-8BBE-4085-B78B-7112C443E95C}"/>
+                <a16:creationId xmlns:a16="http://schemas.microsoft.com/office/drawing/2014/main" id="{E1E7F959-1ABE-4918-9EC0-3838F33CDDC3}"/>
               </a:ext>
             </a:extLst>
           </p:cNvPr>
@@ -3495,7 +4091,7 @@
           <p:cNvPr id="9" name="">
             <a:extLst xmlns:a="http://schemas.openxmlformats.org/drawingml/2006/main">
               <a:ext uri="{FF2B5EF4-FFF2-40B4-BE49-F238E27FC236}">
-                <a16:creationId xmlns:a16="http://schemas.microsoft.com/office/drawing/2014/main" id="{3F406258-3050-471E-94EB-E6C188F39B09}"/>
+                <a16:creationId xmlns:a16="http://schemas.microsoft.com/office/drawing/2014/main" id="{0CFD6B34-A62F-475E-BA6A-075722D71E23}"/>
               </a:ext>
             </a:extLst>
           </p:cNvPr>
@@ -3528,7 +4124,7 @@
           <p:cNvPr id="10" name="">
             <a:extLst xmlns:a="http://schemas.openxmlformats.org/drawingml/2006/main">
               <a:ext uri="{FF2B5EF4-FFF2-40B4-BE49-F238E27FC236}">
-                <a16:creationId xmlns:a16="http://schemas.microsoft.com/office/drawing/2014/main" id="{8EA6EC05-0B2A-47CF-A690-B3B577A85E31}"/>
+                <a16:creationId xmlns:a16="http://schemas.microsoft.com/office/drawing/2014/main" id="{EDCA770C-509C-49EA-91E6-0D0416489E7C}"/>
               </a:ext>
             </a:extLst>
           </p:cNvPr>
@@ -3578,7 +4174,7 @@
           <p:cNvPr id="11" name="">
             <a:extLst xmlns:a="http://schemas.openxmlformats.org/drawingml/2006/main">
               <a:ext uri="{FF2B5EF4-FFF2-40B4-BE49-F238E27FC236}">
-                <a16:creationId xmlns:a16="http://schemas.microsoft.com/office/drawing/2014/main" id="{602AC1FA-AD97-41FD-BC97-917FB9554CC2}"/>
+                <a16:creationId xmlns:a16="http://schemas.microsoft.com/office/drawing/2014/main" id="{90686403-4FEF-4EF2-BF3D-FEC1CB8CBA6E}"/>
               </a:ext>
             </a:extLst>
           </p:cNvPr>
@@ -3628,7 +4224,7 @@
           <p:cNvPr id="12" name="">
             <a:extLst xmlns:a="http://schemas.openxmlformats.org/drawingml/2006/main">
               <a:ext uri="{FF2B5EF4-FFF2-40B4-BE49-F238E27FC236}">
-                <a16:creationId xmlns:a16="http://schemas.microsoft.com/office/drawing/2014/main" id="{EB18B1E0-FA3D-4D5A-947B-C8D72D32F068}"/>
+                <a16:creationId xmlns:a16="http://schemas.microsoft.com/office/drawing/2014/main" id="{C6E960F1-8B15-474F-A4E1-9F74F0970E7D}"/>
               </a:ext>
             </a:extLst>
           </p:cNvPr>
@@ -3676,7 +4272,7 @@
     </p:spTree>
     <p:extLst>
       <p:ext uri="{BB962C8B-B14F-4D97-AF65-F5344CB8AC3E}">
-        <p14:creationId xmlns:p14="http://schemas.microsoft.com/office/powerpoint/2010/main" val="112234099"/>
+        <p14:creationId xmlns:p14="http://schemas.microsoft.com/office/powerpoint/2010/main" val="1249182721"/>
       </p:ext>
     </p:extLst>
   </p:cSld>
@@ -3707,7 +4303,7 @@
           <p:cNvPr id="18" name="">
             <a:extLst xmlns:a="http://schemas.openxmlformats.org/drawingml/2006/main">
               <a:ext uri="{FF2B5EF4-FFF2-40B4-BE49-F238E27FC236}">
-                <a16:creationId xmlns:a16="http://schemas.microsoft.com/office/drawing/2014/main" id="{BC75F8F9-99C0-41AE-9694-F57142499CE8}"/>
+                <a16:creationId xmlns:a16="http://schemas.microsoft.com/office/drawing/2014/main" id="{9A3FC428-1511-4298-9FEA-D4BBEE30E85E}"/>
               </a:ext>
             </a:extLst>
           </p:cNvPr>
@@ -3757,7 +4353,7 @@
           <p:cNvPr id="2" name="">
             <a:extLst xmlns:a="http://schemas.openxmlformats.org/drawingml/2006/main">
               <a:ext uri="{FF2B5EF4-FFF2-40B4-BE49-F238E27FC236}">
-                <a16:creationId xmlns:a16="http://schemas.microsoft.com/office/drawing/2014/main" id="{B8624F4F-84D9-4F54-9835-4BE22A3EE5B4}"/>
+                <a16:creationId xmlns:a16="http://schemas.microsoft.com/office/drawing/2014/main" id="{13883396-726A-4E68-A6DC-309D5806753E}"/>
               </a:ext>
             </a:extLst>
           </p:cNvPr>
@@ -3807,7 +4403,7 @@
           <p:cNvPr id="3" name="">
             <a:extLst xmlns:a="http://schemas.openxmlformats.org/drawingml/2006/main">
               <a:ext uri="{FF2B5EF4-FFF2-40B4-BE49-F238E27FC236}">
-                <a16:creationId xmlns:a16="http://schemas.microsoft.com/office/drawing/2014/main" id="{FAB1C48D-D9C6-4468-9B75-AAE955878D26}"/>
+                <a16:creationId xmlns:a16="http://schemas.microsoft.com/office/drawing/2014/main" id="{D8AE4546-AFD5-4BE0-816B-FD071002D20B}"/>
               </a:ext>
             </a:extLst>
           </p:cNvPr>
@@ -3840,7 +4436,7 @@
           <p:cNvPr id="4" name="">
             <a:extLst xmlns:a="http://schemas.openxmlformats.org/drawingml/2006/main">
               <a:ext uri="{FF2B5EF4-FFF2-40B4-BE49-F238E27FC236}">
-                <a16:creationId xmlns:a16="http://schemas.microsoft.com/office/drawing/2014/main" id="{2AC16B9C-7BE9-4528-A546-AE0ADD6205FD}"/>
+                <a16:creationId xmlns:a16="http://schemas.microsoft.com/office/drawing/2014/main" id="{91F2D097-9463-456E-841F-0C261EF8EB93}"/>
               </a:ext>
             </a:extLst>
           </p:cNvPr>
@@ -3890,7 +4486,7 @@
           <p:cNvPr id="5" name="">
             <a:extLst xmlns:a="http://schemas.openxmlformats.org/drawingml/2006/main">
               <a:ext uri="{FF2B5EF4-FFF2-40B4-BE49-F238E27FC236}">
-                <a16:creationId xmlns:a16="http://schemas.microsoft.com/office/drawing/2014/main" id="{7558824D-1182-4D65-8731-C769C6E5621E}"/>
+                <a16:creationId xmlns:a16="http://schemas.microsoft.com/office/drawing/2014/main" id="{2CFE288F-72BA-4213-84E5-55CAF78E0038}"/>
               </a:ext>
             </a:extLst>
           </p:cNvPr>
@@ -3944,7 +4540,7 @@
           <p:nvPr/>
         </p:nvPicPr>
         <p:blipFill>
-          <a:blip xmlns:r="http://schemas.openxmlformats.org/officeDocument/2006/relationships" xmlns:a="http://schemas.openxmlformats.org/drawingml/2006/main" r:embed="R984476946bbd4ecf"/>
+          <a:blip xmlns:r="http://schemas.openxmlformats.org/officeDocument/2006/relationships" xmlns:a="http://schemas.openxmlformats.org/drawingml/2006/main" r:embed="Rd6cf4ac203ee42a2"/>
           <a:stretch xmlns:a="http://schemas.openxmlformats.org/drawingml/2006/main"/>
         </p:blipFill>
         <p:spPr>
@@ -3962,7 +4558,7 @@
           <p:cNvPr id="7" name="">
             <a:extLst xmlns:a="http://schemas.openxmlformats.org/drawingml/2006/main">
               <a:ext uri="{FF2B5EF4-FFF2-40B4-BE49-F238E27FC236}">
-                <a16:creationId xmlns:a16="http://schemas.microsoft.com/office/drawing/2014/main" id="{853D6BCC-D44B-43EC-BEA3-A31CB98C76F8}"/>
+                <a16:creationId xmlns:a16="http://schemas.microsoft.com/office/drawing/2014/main" id="{D9900266-EB99-4A64-982B-4A9505E68D6E}"/>
               </a:ext>
             </a:extLst>
           </p:cNvPr>
@@ -3995,7 +4591,7 @@
           <p:cNvPr id="8" name="">
             <a:extLst xmlns:a="http://schemas.openxmlformats.org/drawingml/2006/main">
               <a:ext uri="{FF2B5EF4-FFF2-40B4-BE49-F238E27FC236}">
-                <a16:creationId xmlns:a16="http://schemas.microsoft.com/office/drawing/2014/main" id="{88616C87-18A9-4962-B3EA-E331A81B7E5C}"/>
+                <a16:creationId xmlns:a16="http://schemas.microsoft.com/office/drawing/2014/main" id="{AF9C97C8-E801-4D21-A35D-191542D39B84}"/>
               </a:ext>
             </a:extLst>
           </p:cNvPr>
@@ -4045,7 +4641,7 @@
           <p:cNvPr id="9" name="">
             <a:extLst xmlns:a="http://schemas.openxmlformats.org/drawingml/2006/main">
               <a:ext uri="{FF2B5EF4-FFF2-40B4-BE49-F238E27FC236}">
-                <a16:creationId xmlns:a16="http://schemas.microsoft.com/office/drawing/2014/main" id="{A3B4740B-5CD3-4738-B718-3DA59454F850}"/>
+                <a16:creationId xmlns:a16="http://schemas.microsoft.com/office/drawing/2014/main" id="{849C3742-F424-45D8-BA4E-C47ADF6CD988}"/>
               </a:ext>
             </a:extLst>
           </p:cNvPr>
@@ -4095,7 +4691,7 @@
           <p:cNvPr id="10" name="">
             <a:extLst xmlns:a="http://schemas.openxmlformats.org/drawingml/2006/main">
               <a:ext uri="{FF2B5EF4-FFF2-40B4-BE49-F238E27FC236}">
-                <a16:creationId xmlns:a16="http://schemas.microsoft.com/office/drawing/2014/main" id="{1EDDE925-FCF4-4E42-9EF7-1BFC6942EE9D}"/>
+                <a16:creationId xmlns:a16="http://schemas.microsoft.com/office/drawing/2014/main" id="{69A92A21-4B4A-4CB6-84AE-A78C8F5D659A}"/>
               </a:ext>
             </a:extLst>
           </p:cNvPr>
@@ -4145,7 +4741,7 @@
           <p:cNvPr id="11" name="">
             <a:extLst xmlns:a="http://schemas.openxmlformats.org/drawingml/2006/main">
               <a:ext uri="{FF2B5EF4-FFF2-40B4-BE49-F238E27FC236}">
-                <a16:creationId xmlns:a16="http://schemas.microsoft.com/office/drawing/2014/main" id="{0C3C2580-BF8B-4799-98B4-CA16317DA634}"/>
+                <a16:creationId xmlns:a16="http://schemas.microsoft.com/office/drawing/2014/main" id="{11EFF3F3-7957-4304-ADDD-14F0543453B6}"/>
               </a:ext>
             </a:extLst>
           </p:cNvPr>
@@ -4195,7 +4791,7 @@
           <p:cNvPr id="12" name="">
             <a:extLst xmlns:a="http://schemas.openxmlformats.org/drawingml/2006/main">
               <a:ext uri="{FF2B5EF4-FFF2-40B4-BE49-F238E27FC236}">
-                <a16:creationId xmlns:a16="http://schemas.microsoft.com/office/drawing/2014/main" id="{4B6928B1-1059-4C4C-9871-A0534E3CBABC}"/>
+                <a16:creationId xmlns:a16="http://schemas.microsoft.com/office/drawing/2014/main" id="{FDCCBEAB-EBF6-4ABC-BC24-0293452F6327}"/>
               </a:ext>
             </a:extLst>
           </p:cNvPr>
@@ -4245,7 +4841,7 @@
           <p:cNvPr id="13" name="">
             <a:extLst xmlns:a="http://schemas.openxmlformats.org/drawingml/2006/main">
               <a:ext uri="{FF2B5EF4-FFF2-40B4-BE49-F238E27FC236}">
-                <a16:creationId xmlns:a16="http://schemas.microsoft.com/office/drawing/2014/main" id="{5045DE74-5453-4BFA-839D-76C115194438}"/>
+                <a16:creationId xmlns:a16="http://schemas.microsoft.com/office/drawing/2014/main" id="{55FE6214-DCE5-44D7-8227-E3F12090A4DB}"/>
               </a:ext>
             </a:extLst>
           </p:cNvPr>
@@ -4295,7 +4891,7 @@
           <p:cNvPr id="14" name="">
             <a:extLst xmlns:a="http://schemas.openxmlformats.org/drawingml/2006/main">
               <a:ext uri="{FF2B5EF4-FFF2-40B4-BE49-F238E27FC236}">
-                <a16:creationId xmlns:a16="http://schemas.microsoft.com/office/drawing/2014/main" id="{79AA97C0-A87E-4844-8540-50D8C9815E20}"/>
+                <a16:creationId xmlns:a16="http://schemas.microsoft.com/office/drawing/2014/main" id="{2F6E1190-0C8C-4D06-A643-6E5CCEBBE80D}"/>
               </a:ext>
             </a:extLst>
           </p:cNvPr>
@@ -4345,7 +4941,7 @@
           <p:cNvPr id="15" name="">
             <a:extLst xmlns:a="http://schemas.openxmlformats.org/drawingml/2006/main">
               <a:ext uri="{FF2B5EF4-FFF2-40B4-BE49-F238E27FC236}">
-                <a16:creationId xmlns:a16="http://schemas.microsoft.com/office/drawing/2014/main" id="{9CC9D26B-7D7F-4B5F-B031-DE39E592B6D3}"/>
+                <a16:creationId xmlns:a16="http://schemas.microsoft.com/office/drawing/2014/main" id="{0B05035D-569E-4FB5-AC3F-F88B672B3E3C}"/>
               </a:ext>
             </a:extLst>
           </p:cNvPr>
@@ -4378,7 +4974,7 @@
           <p:cNvPr id="16" name="">
             <a:extLst xmlns:a="http://schemas.openxmlformats.org/drawingml/2006/main">
               <a:ext uri="{FF2B5EF4-FFF2-40B4-BE49-F238E27FC236}">
-                <a16:creationId xmlns:a16="http://schemas.microsoft.com/office/drawing/2014/main" id="{2E984EF5-02B1-4C78-B6FA-208DB4E6C7DF}"/>
+                <a16:creationId xmlns:a16="http://schemas.microsoft.com/office/drawing/2014/main" id="{DF2814DA-B77D-4E47-B5D5-128978DD0015}"/>
               </a:ext>
             </a:extLst>
           </p:cNvPr>
@@ -4428,7 +5024,7 @@
           <p:cNvPr id="17" name="">
             <a:extLst xmlns:a="http://schemas.openxmlformats.org/drawingml/2006/main">
               <a:ext uri="{FF2B5EF4-FFF2-40B4-BE49-F238E27FC236}">
-                <a16:creationId xmlns:a16="http://schemas.microsoft.com/office/drawing/2014/main" id="{EB9FEB8E-3206-474F-8670-2F66C43E3675}"/>
+                <a16:creationId xmlns:a16="http://schemas.microsoft.com/office/drawing/2014/main" id="{F3B54D83-9C34-491F-B804-111119EF054C}"/>
               </a:ext>
             </a:extLst>
           </p:cNvPr>
@@ -4476,7 +5072,7 @@
     </p:spTree>
     <p:extLst>
       <p:ext uri="{BB962C8B-B14F-4D97-AF65-F5344CB8AC3E}">
-        <p14:creationId xmlns:p14="http://schemas.microsoft.com/office/powerpoint/2010/main" val="1761246154"/>
+        <p14:creationId xmlns:p14="http://schemas.microsoft.com/office/powerpoint/2010/main" val="565820044"/>
       </p:ext>
     </p:extLst>
   </p:cSld>
@@ -4507,7 +5103,7 @@
           <p:cNvPr id="16" name="">
             <a:extLst xmlns:a="http://schemas.openxmlformats.org/drawingml/2006/main">
               <a:ext uri="{FF2B5EF4-FFF2-40B4-BE49-F238E27FC236}">
-                <a16:creationId xmlns:a16="http://schemas.microsoft.com/office/drawing/2014/main" id="{C997BBAA-502C-46A2-AD26-4C20FDA3712B}"/>
+                <a16:creationId xmlns:a16="http://schemas.microsoft.com/office/drawing/2014/main" id="{DC8657FB-02B5-499E-B26D-AFC705C8C082}"/>
               </a:ext>
             </a:extLst>
           </p:cNvPr>
@@ -4557,7 +5153,7 @@
           <p:cNvPr id="2" name="">
             <a:extLst xmlns:a="http://schemas.openxmlformats.org/drawingml/2006/main">
               <a:ext uri="{FF2B5EF4-FFF2-40B4-BE49-F238E27FC236}">
-                <a16:creationId xmlns:a16="http://schemas.microsoft.com/office/drawing/2014/main" id="{FE6C1FB6-4258-4BC2-A44E-D029EBE74D39}"/>
+                <a16:creationId xmlns:a16="http://schemas.microsoft.com/office/drawing/2014/main" id="{70647F9E-EBB6-4E50-B06D-EC280DF3D1A3}"/>
               </a:ext>
             </a:extLst>
           </p:cNvPr>
@@ -4607,7 +5203,7 @@
           <p:cNvPr id="3" name="">
             <a:extLst xmlns:a="http://schemas.openxmlformats.org/drawingml/2006/main">
               <a:ext uri="{FF2B5EF4-FFF2-40B4-BE49-F238E27FC236}">
-                <a16:creationId xmlns:a16="http://schemas.microsoft.com/office/drawing/2014/main" id="{F47E0F99-A536-48ED-94AC-21D3A739FAD8}"/>
+                <a16:creationId xmlns:a16="http://schemas.microsoft.com/office/drawing/2014/main" id="{37170093-6191-4901-BC00-FF26D6D976FA}"/>
               </a:ext>
             </a:extLst>
           </p:cNvPr>
@@ -4640,7 +5236,7 @@
           <p:cNvPr id="4" name="">
             <a:extLst xmlns:a="http://schemas.openxmlformats.org/drawingml/2006/main">
               <a:ext uri="{FF2B5EF4-FFF2-40B4-BE49-F238E27FC236}">
-                <a16:creationId xmlns:a16="http://schemas.microsoft.com/office/drawing/2014/main" id="{3EC76BEA-2F5B-4707-ACA3-980D45F62841}"/>
+                <a16:creationId xmlns:a16="http://schemas.microsoft.com/office/drawing/2014/main" id="{91CE1CC0-2DC8-469A-8B8B-9B24CC935533}"/>
               </a:ext>
             </a:extLst>
           </p:cNvPr>
@@ -4690,7 +5286,7 @@
           <p:cNvPr id="5" name="">
             <a:extLst xmlns:a="http://schemas.openxmlformats.org/drawingml/2006/main">
               <a:ext uri="{FF2B5EF4-FFF2-40B4-BE49-F238E27FC236}">
-                <a16:creationId xmlns:a16="http://schemas.microsoft.com/office/drawing/2014/main" id="{E746DEEA-319A-4AB3-908A-DCE4EF1C5EBF}"/>
+                <a16:creationId xmlns:a16="http://schemas.microsoft.com/office/drawing/2014/main" id="{C63A77D9-4ED3-47A7-98B7-5D25898523E1}"/>
               </a:ext>
             </a:extLst>
           </p:cNvPr>
@@ -4744,7 +5340,7 @@
           <p:nvPr/>
         </p:nvPicPr>
         <p:blipFill>
-          <a:blip xmlns:r="http://schemas.openxmlformats.org/officeDocument/2006/relationships" xmlns:a="http://schemas.openxmlformats.org/drawingml/2006/main" r:embed="Rcb240bb657ca4451"/>
+          <a:blip xmlns:r="http://schemas.openxmlformats.org/officeDocument/2006/relationships" xmlns:a="http://schemas.openxmlformats.org/drawingml/2006/main" r:embed="Ra9899182ea2e4089"/>
           <a:stretch xmlns:a="http://schemas.openxmlformats.org/drawingml/2006/main"/>
         </p:blipFill>
         <p:spPr>
@@ -4762,7 +5358,7 @@
           <p:cNvPr id="7" name="">
             <a:extLst xmlns:a="http://schemas.openxmlformats.org/drawingml/2006/main">
               <a:ext uri="{FF2B5EF4-FFF2-40B4-BE49-F238E27FC236}">
-                <a16:creationId xmlns:a16="http://schemas.microsoft.com/office/drawing/2014/main" id="{A53BC5D8-223F-43B3-AFC4-3C489124C07E}"/>
+                <a16:creationId xmlns:a16="http://schemas.microsoft.com/office/drawing/2014/main" id="{3250AEBE-A4E4-42A5-B969-E14036464379}"/>
               </a:ext>
             </a:extLst>
           </p:cNvPr>
@@ -4795,7 +5391,7 @@
           <p:cNvPr id="8" name="">
             <a:extLst xmlns:a="http://schemas.openxmlformats.org/drawingml/2006/main">
               <a:ext uri="{FF2B5EF4-FFF2-40B4-BE49-F238E27FC236}">
-                <a16:creationId xmlns:a16="http://schemas.microsoft.com/office/drawing/2014/main" id="{0EB927ED-5B70-4465-85AC-2F1816C323F9}"/>
+                <a16:creationId xmlns:a16="http://schemas.microsoft.com/office/drawing/2014/main" id="{8281C01F-EECF-4B90-A85F-BA9BF3150895}"/>
               </a:ext>
             </a:extLst>
           </p:cNvPr>
@@ -4845,7 +5441,7 @@
           <p:cNvPr id="9" name="">
             <a:extLst xmlns:a="http://schemas.openxmlformats.org/drawingml/2006/main">
               <a:ext uri="{FF2B5EF4-FFF2-40B4-BE49-F238E27FC236}">
-                <a16:creationId xmlns:a16="http://schemas.microsoft.com/office/drawing/2014/main" id="{A7CFF5B0-0BA6-452B-A85B-B7FE887CC3C6}"/>
+                <a16:creationId xmlns:a16="http://schemas.microsoft.com/office/drawing/2014/main" id="{240C142C-1C9E-429B-A4E6-ECD09D64BA56}"/>
               </a:ext>
             </a:extLst>
           </p:cNvPr>
@@ -4878,7 +5474,7 @@
           <p:cNvPr id="10" name="">
             <a:extLst xmlns:a="http://schemas.openxmlformats.org/drawingml/2006/main">
               <a:ext uri="{FF2B5EF4-FFF2-40B4-BE49-F238E27FC236}">
-                <a16:creationId xmlns:a16="http://schemas.microsoft.com/office/drawing/2014/main" id="{84AE0746-5299-4A18-9804-DA776C5A7308}"/>
+                <a16:creationId xmlns:a16="http://schemas.microsoft.com/office/drawing/2014/main" id="{DBCA5CA2-9CC9-49E5-A702-0158D9137C6F}"/>
               </a:ext>
             </a:extLst>
           </p:cNvPr>
@@ -4928,7 +5524,7 @@
           <p:cNvPr id="11" name="">
             <a:extLst xmlns:a="http://schemas.openxmlformats.org/drawingml/2006/main">
               <a:ext uri="{FF2B5EF4-FFF2-40B4-BE49-F238E27FC236}">
-                <a16:creationId xmlns:a16="http://schemas.microsoft.com/office/drawing/2014/main" id="{06F3C2E7-9C37-4985-A6EB-C94E99F944D8}"/>
+                <a16:creationId xmlns:a16="http://schemas.microsoft.com/office/drawing/2014/main" id="{2B28BD1E-8208-4406-AB89-B9FF045C103E}"/>
               </a:ext>
             </a:extLst>
           </p:cNvPr>
@@ -4961,7 +5557,7 @@
           <p:cNvPr id="12" name="">
             <a:extLst xmlns:a="http://schemas.openxmlformats.org/drawingml/2006/main">
               <a:ext uri="{FF2B5EF4-FFF2-40B4-BE49-F238E27FC236}">
-                <a16:creationId xmlns:a16="http://schemas.microsoft.com/office/drawing/2014/main" id="{F85E6C94-22CC-4993-AFE6-9B238378BE3B}"/>
+                <a16:creationId xmlns:a16="http://schemas.microsoft.com/office/drawing/2014/main" id="{057A7B7D-6F44-420F-97C6-6ED240D859F4}"/>
               </a:ext>
             </a:extLst>
           </p:cNvPr>
@@ -5011,7 +5607,7 @@
           <p:cNvPr id="13" name="">
             <a:extLst xmlns:a="http://schemas.openxmlformats.org/drawingml/2006/main">
               <a:ext uri="{FF2B5EF4-FFF2-40B4-BE49-F238E27FC236}">
-                <a16:creationId xmlns:a16="http://schemas.microsoft.com/office/drawing/2014/main" id="{0FB89328-BD9F-4633-9639-96EE5822667E}"/>
+                <a16:creationId xmlns:a16="http://schemas.microsoft.com/office/drawing/2014/main" id="{44548E67-CF9E-46A0-9DEB-1F33A9EA25C4}"/>
               </a:ext>
             </a:extLst>
           </p:cNvPr>
@@ -5061,7 +5657,7 @@
           <p:cNvPr id="14" name="">
             <a:extLst xmlns:a="http://schemas.openxmlformats.org/drawingml/2006/main">
               <a:ext uri="{FF2B5EF4-FFF2-40B4-BE49-F238E27FC236}">
-                <a16:creationId xmlns:a16="http://schemas.microsoft.com/office/drawing/2014/main" id="{386B4EB3-98FE-49FD-852A-1D7E97DD3D94}"/>
+                <a16:creationId xmlns:a16="http://schemas.microsoft.com/office/drawing/2014/main" id="{14DAD82D-3C21-418C-90E2-8A1960B74C26}"/>
               </a:ext>
             </a:extLst>
           </p:cNvPr>
@@ -5094,7 +5690,7 @@
           <p:cNvPr id="15" name="">
             <a:extLst xmlns:a="http://schemas.openxmlformats.org/drawingml/2006/main">
               <a:ext uri="{FF2B5EF4-FFF2-40B4-BE49-F238E27FC236}">
-                <a16:creationId xmlns:a16="http://schemas.microsoft.com/office/drawing/2014/main" id="{B05C010A-D3AC-4558-B464-3BC006E4C54E}"/>
+                <a16:creationId xmlns:a16="http://schemas.microsoft.com/office/drawing/2014/main" id="{86279669-DF54-4DC7-B9F2-CB9E15B07FFD}"/>
               </a:ext>
             </a:extLst>
           </p:cNvPr>
@@ -5142,7 +5738,7 @@
     </p:spTree>
     <p:extLst>
       <p:ext uri="{BB962C8B-B14F-4D97-AF65-F5344CB8AC3E}">
-        <p14:creationId xmlns:p14="http://schemas.microsoft.com/office/powerpoint/2010/main" val="1118580256"/>
+        <p14:creationId xmlns:p14="http://schemas.microsoft.com/office/powerpoint/2010/main" val="691026131"/>
       </p:ext>
     </p:extLst>
   </p:cSld>
@@ -5173,7 +5769,7 @@
           <p:cNvPr id="14" name="">
             <a:extLst xmlns:a="http://schemas.openxmlformats.org/drawingml/2006/main">
               <a:ext uri="{FF2B5EF4-FFF2-40B4-BE49-F238E27FC236}">
-                <a16:creationId xmlns:a16="http://schemas.microsoft.com/office/drawing/2014/main" id="{4D02B83F-2D08-4D23-846F-0D43875D4D5B}"/>
+                <a16:creationId xmlns:a16="http://schemas.microsoft.com/office/drawing/2014/main" id="{AEB9057D-D60A-436E-B4BC-188E4E0D72F2}"/>
               </a:ext>
             </a:extLst>
           </p:cNvPr>
@@ -5223,7 +5819,7 @@
           <p:cNvPr id="2" name="">
             <a:extLst xmlns:a="http://schemas.openxmlformats.org/drawingml/2006/main">
               <a:ext uri="{FF2B5EF4-FFF2-40B4-BE49-F238E27FC236}">
-                <a16:creationId xmlns:a16="http://schemas.microsoft.com/office/drawing/2014/main" id="{BCE602C7-A8D3-4A22-A5EC-F42463222FE2}"/>
+                <a16:creationId xmlns:a16="http://schemas.microsoft.com/office/drawing/2014/main" id="{DF69AA48-71AA-47EA-8F9F-4EF308D8DC43}"/>
               </a:ext>
             </a:extLst>
           </p:cNvPr>
@@ -5273,7 +5869,7 @@
           <p:cNvPr id="3" name="">
             <a:extLst xmlns:a="http://schemas.openxmlformats.org/drawingml/2006/main">
               <a:ext uri="{FF2B5EF4-FFF2-40B4-BE49-F238E27FC236}">
-                <a16:creationId xmlns:a16="http://schemas.microsoft.com/office/drawing/2014/main" id="{D5375293-FEC8-4BDA-BF51-1554DA97C850}"/>
+                <a16:creationId xmlns:a16="http://schemas.microsoft.com/office/drawing/2014/main" id="{901159ED-B283-42C3-9A27-9FE9BF199A72}"/>
               </a:ext>
             </a:extLst>
           </p:cNvPr>
@@ -5306,7 +5902,7 @@
           <p:cNvPr id="4" name="">
             <a:extLst xmlns:a="http://schemas.openxmlformats.org/drawingml/2006/main">
               <a:ext uri="{FF2B5EF4-FFF2-40B4-BE49-F238E27FC236}">
-                <a16:creationId xmlns:a16="http://schemas.microsoft.com/office/drawing/2014/main" id="{3BD6B111-F0FD-46C7-9329-ACE386A25E86}"/>
+                <a16:creationId xmlns:a16="http://schemas.microsoft.com/office/drawing/2014/main" id="{5345962A-209F-4928-BE99-6C928FE19BCB}"/>
               </a:ext>
             </a:extLst>
           </p:cNvPr>
@@ -5356,7 +5952,7 @@
           <p:cNvPr id="5" name="">
             <a:extLst xmlns:a="http://schemas.openxmlformats.org/drawingml/2006/main">
               <a:ext uri="{FF2B5EF4-FFF2-40B4-BE49-F238E27FC236}">
-                <a16:creationId xmlns:a16="http://schemas.microsoft.com/office/drawing/2014/main" id="{12DAD76B-071B-4CB4-8B54-B71989675A65}"/>
+                <a16:creationId xmlns:a16="http://schemas.microsoft.com/office/drawing/2014/main" id="{B4983F84-6ACC-48B9-8BF7-A2ECEA6B4743}"/>
               </a:ext>
             </a:extLst>
           </p:cNvPr>
@@ -5410,7 +6006,7 @@
           <p:nvPr/>
         </p:nvPicPr>
         <p:blipFill>
-          <a:blip xmlns:r="http://schemas.openxmlformats.org/officeDocument/2006/relationships" xmlns:a="http://schemas.openxmlformats.org/drawingml/2006/main" r:embed="R3b923efff5674e88"/>
+          <a:blip xmlns:r="http://schemas.openxmlformats.org/officeDocument/2006/relationships" xmlns:a="http://schemas.openxmlformats.org/drawingml/2006/main" r:embed="Rb89be78a749f488b"/>
           <a:stretch xmlns:a="http://schemas.openxmlformats.org/drawingml/2006/main"/>
         </p:blipFill>
         <p:spPr>
@@ -5428,7 +6024,7 @@
           <p:cNvPr id="7" name="">
             <a:extLst xmlns:a="http://schemas.openxmlformats.org/drawingml/2006/main">
               <a:ext uri="{FF2B5EF4-FFF2-40B4-BE49-F238E27FC236}">
-                <a16:creationId xmlns:a16="http://schemas.microsoft.com/office/drawing/2014/main" id="{A4B09F91-1260-4E73-A939-3820150A71D1}"/>
+                <a16:creationId xmlns:a16="http://schemas.microsoft.com/office/drawing/2014/main" id="{F1D585AB-CC6C-49BF-B138-D3E7B0EA4CEB}"/>
               </a:ext>
             </a:extLst>
           </p:cNvPr>
@@ -5461,7 +6057,7 @@
           <p:cNvPr id="8" name="">
             <a:extLst xmlns:a="http://schemas.openxmlformats.org/drawingml/2006/main">
               <a:ext uri="{FF2B5EF4-FFF2-40B4-BE49-F238E27FC236}">
-                <a16:creationId xmlns:a16="http://schemas.microsoft.com/office/drawing/2014/main" id="{584495EC-7B6E-47B2-AFCD-FEB8615E9327}"/>
+                <a16:creationId xmlns:a16="http://schemas.microsoft.com/office/drawing/2014/main" id="{98B556E0-65CE-4214-9040-76DD8C0DA0D8}"/>
               </a:ext>
             </a:extLst>
           </p:cNvPr>
@@ -5511,7 +6107,7 @@
           <p:cNvPr id="9" name="">
             <a:extLst xmlns:a="http://schemas.openxmlformats.org/drawingml/2006/main">
               <a:ext uri="{FF2B5EF4-FFF2-40B4-BE49-F238E27FC236}">
-                <a16:creationId xmlns:a16="http://schemas.microsoft.com/office/drawing/2014/main" id="{1D75E33E-F2BC-48A2-8B3D-7CF178F1E1DF}"/>
+                <a16:creationId xmlns:a16="http://schemas.microsoft.com/office/drawing/2014/main" id="{D1FF4A3B-6D0F-4C45-81D9-4678CDADD745}"/>
               </a:ext>
             </a:extLst>
           </p:cNvPr>
@@ -5544,7 +6140,7 @@
           <p:cNvPr id="10" name="">
             <a:extLst xmlns:a="http://schemas.openxmlformats.org/drawingml/2006/main">
               <a:ext uri="{FF2B5EF4-FFF2-40B4-BE49-F238E27FC236}">
-                <a16:creationId xmlns:a16="http://schemas.microsoft.com/office/drawing/2014/main" id="{6B47E4E2-AAD8-4BA5-BBEA-F7240614AE5F}"/>
+                <a16:creationId xmlns:a16="http://schemas.microsoft.com/office/drawing/2014/main" id="{1B2FD36B-30A7-45E8-94FB-032574A0A93C}"/>
               </a:ext>
             </a:extLst>
           </p:cNvPr>
@@ -5594,7 +6190,7 @@
           <p:cNvPr id="11" name="">
             <a:extLst xmlns:a="http://schemas.openxmlformats.org/drawingml/2006/main">
               <a:ext uri="{FF2B5EF4-FFF2-40B4-BE49-F238E27FC236}">
-                <a16:creationId xmlns:a16="http://schemas.microsoft.com/office/drawing/2014/main" id="{325AADB0-1EC1-417F-984A-E283680B59A2}"/>
+                <a16:creationId xmlns:a16="http://schemas.microsoft.com/office/drawing/2014/main" id="{1F9BF767-7E8E-446C-8F60-2E2471929712}"/>
               </a:ext>
             </a:extLst>
           </p:cNvPr>
@@ -5627,7 +6223,7 @@
           <p:cNvPr id="12" name="">
             <a:extLst xmlns:a="http://schemas.openxmlformats.org/drawingml/2006/main">
               <a:ext uri="{FF2B5EF4-FFF2-40B4-BE49-F238E27FC236}">
-                <a16:creationId xmlns:a16="http://schemas.microsoft.com/office/drawing/2014/main" id="{69F8BD37-87E7-4820-A923-1582FA23635D}"/>
+                <a16:creationId xmlns:a16="http://schemas.microsoft.com/office/drawing/2014/main" id="{DB76A075-280B-478B-8414-124843563912}"/>
               </a:ext>
             </a:extLst>
           </p:cNvPr>
@@ -5677,7 +6273,7 @@
           <p:cNvPr id="13" name="">
             <a:extLst xmlns:a="http://schemas.openxmlformats.org/drawingml/2006/main">
               <a:ext uri="{FF2B5EF4-FFF2-40B4-BE49-F238E27FC236}">
-                <a16:creationId xmlns:a16="http://schemas.microsoft.com/office/drawing/2014/main" id="{A55C44BD-CF37-4794-8E47-FBFC4A8BC73D}"/>
+                <a16:creationId xmlns:a16="http://schemas.microsoft.com/office/drawing/2014/main" id="{0D0E604A-97A8-4B28-8B32-0F76E073D136}"/>
               </a:ext>
             </a:extLst>
           </p:cNvPr>
@@ -5725,7 +6321,7 @@
     </p:spTree>
     <p:extLst>
       <p:ext uri="{BB962C8B-B14F-4D97-AF65-F5344CB8AC3E}">
-        <p14:creationId xmlns:p14="http://schemas.microsoft.com/office/powerpoint/2010/main" val="115997785"/>
+        <p14:creationId xmlns:p14="http://schemas.microsoft.com/office/powerpoint/2010/main" val="241434893"/>
       </p:ext>
     </p:extLst>
   </p:cSld>
@@ -5756,7 +6352,7 @@
           <p:cNvPr id="24" name="">
             <a:extLst xmlns:a="http://schemas.openxmlformats.org/drawingml/2006/main">
               <a:ext uri="{FF2B5EF4-FFF2-40B4-BE49-F238E27FC236}">
-                <a16:creationId xmlns:a16="http://schemas.microsoft.com/office/drawing/2014/main" id="{1E59477D-EFAD-4449-8B4E-C065A7385203}"/>
+                <a16:creationId xmlns:a16="http://schemas.microsoft.com/office/drawing/2014/main" id="{1B5A9CC6-69D0-49D7-8CC7-F2AE0B167C1C}"/>
               </a:ext>
             </a:extLst>
           </p:cNvPr>
@@ -5806,7 +6402,7 @@
           <p:cNvPr id="2" name="">
             <a:extLst xmlns:a="http://schemas.openxmlformats.org/drawingml/2006/main">
               <a:ext uri="{FF2B5EF4-FFF2-40B4-BE49-F238E27FC236}">
-                <a16:creationId xmlns:a16="http://schemas.microsoft.com/office/drawing/2014/main" id="{0209DFF3-3AEA-4372-AB50-36BFD0C1F86A}"/>
+                <a16:creationId xmlns:a16="http://schemas.microsoft.com/office/drawing/2014/main" id="{B05797C0-3A36-40E4-9D31-DB84249131FC}"/>
               </a:ext>
             </a:extLst>
           </p:cNvPr>
@@ -5856,7 +6452,7 @@
           <p:cNvPr id="3" name="">
             <a:extLst xmlns:a="http://schemas.openxmlformats.org/drawingml/2006/main">
               <a:ext uri="{FF2B5EF4-FFF2-40B4-BE49-F238E27FC236}">
-                <a16:creationId xmlns:a16="http://schemas.microsoft.com/office/drawing/2014/main" id="{9C718B18-D236-4BCC-99C2-05700117A7EA}"/>
+                <a16:creationId xmlns:a16="http://schemas.microsoft.com/office/drawing/2014/main" id="{6313A42D-DE37-44DE-8488-8D5263C54560}"/>
               </a:ext>
             </a:extLst>
           </p:cNvPr>
@@ -5889,7 +6485,7 @@
           <p:cNvPr id="4" name="">
             <a:extLst xmlns:a="http://schemas.openxmlformats.org/drawingml/2006/main">
               <a:ext uri="{FF2B5EF4-FFF2-40B4-BE49-F238E27FC236}">
-                <a16:creationId xmlns:a16="http://schemas.microsoft.com/office/drawing/2014/main" id="{1BEF5DAB-EF74-43FA-A6C9-80A6BA268660}"/>
+                <a16:creationId xmlns:a16="http://schemas.microsoft.com/office/drawing/2014/main" id="{6CE1927C-9D07-471E-A529-1CEEDD79AA8C}"/>
               </a:ext>
             </a:extLst>
           </p:cNvPr>
@@ -5939,7 +6535,7 @@
           <p:cNvPr id="5" name="">
             <a:extLst xmlns:a="http://schemas.openxmlformats.org/drawingml/2006/main">
               <a:ext uri="{FF2B5EF4-FFF2-40B4-BE49-F238E27FC236}">
-                <a16:creationId xmlns:a16="http://schemas.microsoft.com/office/drawing/2014/main" id="{4997E050-1205-4B37-8F1B-C48299EBC45A}"/>
+                <a16:creationId xmlns:a16="http://schemas.microsoft.com/office/drawing/2014/main" id="{1647453F-9520-406E-A986-964846F21623}"/>
               </a:ext>
             </a:extLst>
           </p:cNvPr>
@@ -5989,7 +6585,7 @@
           <p:cNvPr id="6" name="">
             <a:extLst xmlns:a="http://schemas.openxmlformats.org/drawingml/2006/main">
               <a:ext uri="{FF2B5EF4-FFF2-40B4-BE49-F238E27FC236}">
-                <a16:creationId xmlns:a16="http://schemas.microsoft.com/office/drawing/2014/main" id="{5C23D1E6-D29F-4615-BC8B-CC16136FF682}"/>
+                <a16:creationId xmlns:a16="http://schemas.microsoft.com/office/drawing/2014/main" id="{5F9B3503-82E6-4BDB-8CDF-EC3CBCD8B3B5}"/>
               </a:ext>
             </a:extLst>
           </p:cNvPr>
@@ -6022,7 +6618,7 @@
           <p:cNvPr id="7" name="">
             <a:extLst xmlns:a="http://schemas.openxmlformats.org/drawingml/2006/main">
               <a:ext uri="{FF2B5EF4-FFF2-40B4-BE49-F238E27FC236}">
-                <a16:creationId xmlns:a16="http://schemas.microsoft.com/office/drawing/2014/main" id="{E7D171F8-C5A2-46F8-8DCF-4C0899DCEF95}"/>
+                <a16:creationId xmlns:a16="http://schemas.microsoft.com/office/drawing/2014/main" id="{CFEB1ECC-2F2F-40DE-B4E1-EA6D54FFA59F}"/>
               </a:ext>
             </a:extLst>
           </p:cNvPr>
@@ -6072,7 +6668,7 @@
           <p:cNvPr id="8" name="">
             <a:extLst xmlns:a="http://schemas.openxmlformats.org/drawingml/2006/main">
               <a:ext uri="{FF2B5EF4-FFF2-40B4-BE49-F238E27FC236}">
-                <a16:creationId xmlns:a16="http://schemas.microsoft.com/office/drawing/2014/main" id="{EB86FA45-E205-443C-AB3A-343A9BC6E0D8}"/>
+                <a16:creationId xmlns:a16="http://schemas.microsoft.com/office/drawing/2014/main" id="{4C99EA43-2AE1-490C-BD9A-26DE4C07CB20}"/>
               </a:ext>
             </a:extLst>
           </p:cNvPr>
@@ -6122,7 +6718,7 @@
           <p:cNvPr id="9" name="">
             <a:extLst xmlns:a="http://schemas.openxmlformats.org/drawingml/2006/main">
               <a:ext uri="{FF2B5EF4-FFF2-40B4-BE49-F238E27FC236}">
-                <a16:creationId xmlns:a16="http://schemas.microsoft.com/office/drawing/2014/main" id="{B9430BB2-C057-4764-B384-A48470EFD2A8}"/>
+                <a16:creationId xmlns:a16="http://schemas.microsoft.com/office/drawing/2014/main" id="{D0C1B768-B80A-4924-B5D5-61ABE11104A3}"/>
               </a:ext>
             </a:extLst>
           </p:cNvPr>
@@ -6172,7 +6768,7 @@
           <p:cNvPr id="10" name="">
             <a:extLst xmlns:a="http://schemas.openxmlformats.org/drawingml/2006/main">
               <a:ext uri="{FF2B5EF4-FFF2-40B4-BE49-F238E27FC236}">
-                <a16:creationId xmlns:a16="http://schemas.microsoft.com/office/drawing/2014/main" id="{6DE0451A-E757-4909-AB03-2C6E2ACCDC2F}"/>
+                <a16:creationId xmlns:a16="http://schemas.microsoft.com/office/drawing/2014/main" id="{62516C94-6073-42F2-B657-E66107715A8F}"/>
               </a:ext>
             </a:extLst>
           </p:cNvPr>
@@ -6222,7 +6818,7 @@
           <p:cNvPr id="11" name="">
             <a:extLst xmlns:a="http://schemas.openxmlformats.org/drawingml/2006/main">
               <a:ext uri="{FF2B5EF4-FFF2-40B4-BE49-F238E27FC236}">
-                <a16:creationId xmlns:a16="http://schemas.microsoft.com/office/drawing/2014/main" id="{DD6A8D52-AB4A-47C3-BCAD-542402D48BF0}"/>
+                <a16:creationId xmlns:a16="http://schemas.microsoft.com/office/drawing/2014/main" id="{D6F4745A-838B-4343-846F-89DA47F64847}"/>
               </a:ext>
             </a:extLst>
           </p:cNvPr>
@@ -6255,7 +6851,7 @@
           <p:cNvPr id="12" name="">
             <a:extLst xmlns:a="http://schemas.openxmlformats.org/drawingml/2006/main">
               <a:ext uri="{FF2B5EF4-FFF2-40B4-BE49-F238E27FC236}">
-                <a16:creationId xmlns:a16="http://schemas.microsoft.com/office/drawing/2014/main" id="{DFC3FBFB-B4C1-4D19-B006-9B42D06A09EF}"/>
+                <a16:creationId xmlns:a16="http://schemas.microsoft.com/office/drawing/2014/main" id="{A9B78245-96AD-4A13-A5AB-4E5CC1BD7135}"/>
               </a:ext>
             </a:extLst>
           </p:cNvPr>
@@ -6305,7 +6901,7 @@
           <p:cNvPr id="13" name="">
             <a:extLst xmlns:a="http://schemas.openxmlformats.org/drawingml/2006/main">
               <a:ext uri="{FF2B5EF4-FFF2-40B4-BE49-F238E27FC236}">
-                <a16:creationId xmlns:a16="http://schemas.microsoft.com/office/drawing/2014/main" id="{1A7B159B-7B33-4F89-A750-B812C8EC2614}"/>
+                <a16:creationId xmlns:a16="http://schemas.microsoft.com/office/drawing/2014/main" id="{9BF9FD15-BF8D-4BE8-AD3A-C65E945034E0}"/>
               </a:ext>
             </a:extLst>
           </p:cNvPr>
@@ -6338,7 +6934,7 @@
           <p:cNvPr id="14" name="">
             <a:extLst xmlns:a="http://schemas.openxmlformats.org/drawingml/2006/main">
               <a:ext uri="{FF2B5EF4-FFF2-40B4-BE49-F238E27FC236}">
-                <a16:creationId xmlns:a16="http://schemas.microsoft.com/office/drawing/2014/main" id="{9AF5ED5F-0476-427F-B2E7-CBAFD9ED9759}"/>
+                <a16:creationId xmlns:a16="http://schemas.microsoft.com/office/drawing/2014/main" id="{40D6B520-5B0C-425D-8D74-B766F2A921BF}"/>
               </a:ext>
             </a:extLst>
           </p:cNvPr>
@@ -6388,7 +6984,7 @@
           <p:cNvPr id="15" name="">
             <a:extLst xmlns:a="http://schemas.openxmlformats.org/drawingml/2006/main">
               <a:ext uri="{FF2B5EF4-FFF2-40B4-BE49-F238E27FC236}">
-                <a16:creationId xmlns:a16="http://schemas.microsoft.com/office/drawing/2014/main" id="{2DC64934-ABC1-4E3D-82C0-72465AFC45DE}"/>
+                <a16:creationId xmlns:a16="http://schemas.microsoft.com/office/drawing/2014/main" id="{3B019796-6197-45B3-BDE1-F94D7C39ED0B}"/>
               </a:ext>
             </a:extLst>
           </p:cNvPr>
@@ -6421,7 +7017,7 @@
           <p:cNvPr id="16" name="">
             <a:extLst xmlns:a="http://schemas.openxmlformats.org/drawingml/2006/main">
               <a:ext uri="{FF2B5EF4-FFF2-40B4-BE49-F238E27FC236}">
-                <a16:creationId xmlns:a16="http://schemas.microsoft.com/office/drawing/2014/main" id="{0963018F-144C-4DA7-924E-D1AC813F597D}"/>
+                <a16:creationId xmlns:a16="http://schemas.microsoft.com/office/drawing/2014/main" id="{15DB1EBE-72FE-4F02-B726-36561206AF86}"/>
               </a:ext>
             </a:extLst>
           </p:cNvPr>
@@ -6471,7 +7067,7 @@
           <p:cNvPr id="17" name="">
             <a:extLst xmlns:a="http://schemas.openxmlformats.org/drawingml/2006/main">
               <a:ext uri="{FF2B5EF4-FFF2-40B4-BE49-F238E27FC236}">
-                <a16:creationId xmlns:a16="http://schemas.microsoft.com/office/drawing/2014/main" id="{391FABA6-97AE-4F80-97BA-AFFFDA6F1081}"/>
+                <a16:creationId xmlns:a16="http://schemas.microsoft.com/office/drawing/2014/main" id="{67B3640C-F293-4DC1-A2E6-8CA67D5EB4DA}"/>
               </a:ext>
             </a:extLst>
           </p:cNvPr>
@@ -6521,7 +7117,7 @@
           <p:cNvPr id="18" name="">
             <a:extLst xmlns:a="http://schemas.openxmlformats.org/drawingml/2006/main">
               <a:ext uri="{FF2B5EF4-FFF2-40B4-BE49-F238E27FC236}">
-                <a16:creationId xmlns:a16="http://schemas.microsoft.com/office/drawing/2014/main" id="{9E375C8F-5143-4797-9FA3-207557781278}"/>
+                <a16:creationId xmlns:a16="http://schemas.microsoft.com/office/drawing/2014/main" id="{4BCE4F42-7CC7-4141-9F8F-9F523078D8E5}"/>
               </a:ext>
             </a:extLst>
           </p:cNvPr>
@@ -6571,7 +7167,7 @@
           <p:cNvPr id="19" name="">
             <a:extLst xmlns:a="http://schemas.openxmlformats.org/drawingml/2006/main">
               <a:ext uri="{FF2B5EF4-FFF2-40B4-BE49-F238E27FC236}">
-                <a16:creationId xmlns:a16="http://schemas.microsoft.com/office/drawing/2014/main" id="{BCE389E8-FA2F-46E8-BA0C-7A534EF6EAC6}"/>
+                <a16:creationId xmlns:a16="http://schemas.microsoft.com/office/drawing/2014/main" id="{9907F168-9499-4DA8-83D7-F4A21720FA88}"/>
               </a:ext>
             </a:extLst>
           </p:cNvPr>
@@ -6621,7 +7217,7 @@
           <p:cNvPr id="20" name="">
             <a:extLst xmlns:a="http://schemas.openxmlformats.org/drawingml/2006/main">
               <a:ext uri="{FF2B5EF4-FFF2-40B4-BE49-F238E27FC236}">
-                <a16:creationId xmlns:a16="http://schemas.microsoft.com/office/drawing/2014/main" id="{39492F91-5FD5-490D-B10B-043C2E004A43}"/>
+                <a16:creationId xmlns:a16="http://schemas.microsoft.com/office/drawing/2014/main" id="{0B6FC9D8-9930-4DF5-9233-5301564B1DD2}"/>
               </a:ext>
             </a:extLst>
           </p:cNvPr>
@@ -6654,7 +7250,7 @@
           <p:cNvPr id="21" name="">
             <a:extLst xmlns:a="http://schemas.openxmlformats.org/drawingml/2006/main">
               <a:ext uri="{FF2B5EF4-FFF2-40B4-BE49-F238E27FC236}">
-                <a16:creationId xmlns:a16="http://schemas.microsoft.com/office/drawing/2014/main" id="{60ABC69E-BBD1-4440-98D1-C2627D874626}"/>
+                <a16:creationId xmlns:a16="http://schemas.microsoft.com/office/drawing/2014/main" id="{4566E228-0ACF-4B64-9BE7-DEA8C96D45CB}"/>
               </a:ext>
             </a:extLst>
           </p:cNvPr>
@@ -6704,7 +7300,7 @@
           <p:cNvPr id="22" name="">
             <a:extLst xmlns:a="http://schemas.openxmlformats.org/drawingml/2006/main">
               <a:ext uri="{FF2B5EF4-FFF2-40B4-BE49-F238E27FC236}">
-                <a16:creationId xmlns:a16="http://schemas.microsoft.com/office/drawing/2014/main" id="{0BCDB58F-D7C0-4A56-9AFC-5D5EBD85D867}"/>
+                <a16:creationId xmlns:a16="http://schemas.microsoft.com/office/drawing/2014/main" id="{DFB306BF-1B55-4324-8D2D-B3258426477F}"/>
               </a:ext>
             </a:extLst>
           </p:cNvPr>
@@ -6737,7 +7333,7 @@
           <p:cNvPr id="23" name="">
             <a:extLst xmlns:a="http://schemas.openxmlformats.org/drawingml/2006/main">
               <a:ext uri="{FF2B5EF4-FFF2-40B4-BE49-F238E27FC236}">
-                <a16:creationId xmlns:a16="http://schemas.microsoft.com/office/drawing/2014/main" id="{01D2AE39-400E-4915-A11A-AEC70423A611}"/>
+                <a16:creationId xmlns:a16="http://schemas.microsoft.com/office/drawing/2014/main" id="{6C962683-2B5C-4913-81B5-ED3973F25449}"/>
               </a:ext>
             </a:extLst>
           </p:cNvPr>
@@ -6785,7 +7381,7 @@
     </p:spTree>
     <p:extLst>
       <p:ext uri="{BB962C8B-B14F-4D97-AF65-F5344CB8AC3E}">
-        <p14:creationId xmlns:p14="http://schemas.microsoft.com/office/powerpoint/2010/main" val="1670244430"/>
+        <p14:creationId xmlns:p14="http://schemas.microsoft.com/office/powerpoint/2010/main" val="1805365656"/>
       </p:ext>
     </p:extLst>
   </p:cSld>
@@ -6816,7 +7412,7 @@
           <p:cNvPr id="16" name="">
             <a:extLst xmlns:a="http://schemas.openxmlformats.org/drawingml/2006/main">
               <a:ext uri="{FF2B5EF4-FFF2-40B4-BE49-F238E27FC236}">
-                <a16:creationId xmlns:a16="http://schemas.microsoft.com/office/drawing/2014/main" id="{DFDC671E-8AD6-4A91-8CAB-674691E86586}"/>
+                <a16:creationId xmlns:a16="http://schemas.microsoft.com/office/drawing/2014/main" id="{FE984EE6-992F-4C66-BA66-72187763B7EF}"/>
               </a:ext>
             </a:extLst>
           </p:cNvPr>
@@ -6866,7 +7462,7 @@
           <p:cNvPr id="2" name="">
             <a:extLst xmlns:a="http://schemas.openxmlformats.org/drawingml/2006/main">
               <a:ext uri="{FF2B5EF4-FFF2-40B4-BE49-F238E27FC236}">
-                <a16:creationId xmlns:a16="http://schemas.microsoft.com/office/drawing/2014/main" id="{F4358764-601F-4520-905D-A74C3AECB286}"/>
+                <a16:creationId xmlns:a16="http://schemas.microsoft.com/office/drawing/2014/main" id="{9F1ECD2A-27F9-4222-A2B4-FCC4DCD58E7D}"/>
               </a:ext>
             </a:extLst>
           </p:cNvPr>
@@ -6916,7 +7512,7 @@
           <p:cNvPr id="3" name="">
             <a:extLst xmlns:a="http://schemas.openxmlformats.org/drawingml/2006/main">
               <a:ext uri="{FF2B5EF4-FFF2-40B4-BE49-F238E27FC236}">
-                <a16:creationId xmlns:a16="http://schemas.microsoft.com/office/drawing/2014/main" id="{D5F741CE-21A1-4951-8022-9BB4154BAF9A}"/>
+                <a16:creationId xmlns:a16="http://schemas.microsoft.com/office/drawing/2014/main" id="{4FA86F2A-4432-460A-B387-9A7DEE225E5B}"/>
               </a:ext>
             </a:extLst>
           </p:cNvPr>
@@ -6949,7 +7545,7 @@
           <p:cNvPr id="4" name="">
             <a:extLst xmlns:a="http://schemas.openxmlformats.org/drawingml/2006/main">
               <a:ext uri="{FF2B5EF4-FFF2-40B4-BE49-F238E27FC236}">
-                <a16:creationId xmlns:a16="http://schemas.microsoft.com/office/drawing/2014/main" id="{E51155EF-A693-4FDF-A499-D90E299C88C7}"/>
+                <a16:creationId xmlns:a16="http://schemas.microsoft.com/office/drawing/2014/main" id="{3C871789-A22A-468C-B7B8-1F23E590ABF3}"/>
               </a:ext>
             </a:extLst>
           </p:cNvPr>
@@ -6999,7 +7595,7 @@
           <p:cNvPr id="5" name="">
             <a:extLst xmlns:a="http://schemas.openxmlformats.org/drawingml/2006/main">
               <a:ext uri="{FF2B5EF4-FFF2-40B4-BE49-F238E27FC236}">
-                <a16:creationId xmlns:a16="http://schemas.microsoft.com/office/drawing/2014/main" id="{02369E22-B7FB-4FBF-92A3-02421941CB74}"/>
+                <a16:creationId xmlns:a16="http://schemas.microsoft.com/office/drawing/2014/main" id="{98D0034F-7F56-4CB9-A88D-9425113DC5C5}"/>
               </a:ext>
             </a:extLst>
           </p:cNvPr>
@@ -7049,7 +7645,7 @@
           <p:cNvPr id="6" name="">
             <a:extLst xmlns:a="http://schemas.openxmlformats.org/drawingml/2006/main">
               <a:ext uri="{FF2B5EF4-FFF2-40B4-BE49-F238E27FC236}">
-                <a16:creationId xmlns:a16="http://schemas.microsoft.com/office/drawing/2014/main" id="{9D9F8A5F-5C16-4600-828D-105F5D2B3A84}"/>
+                <a16:creationId xmlns:a16="http://schemas.microsoft.com/office/drawing/2014/main" id="{6A7AA4BC-660C-49BF-97F3-DD188DB924CF}"/>
               </a:ext>
             </a:extLst>
           </p:cNvPr>
@@ -7082,7 +7678,7 @@
           <p:cNvPr id="7" name="">
             <a:extLst xmlns:a="http://schemas.openxmlformats.org/drawingml/2006/main">
               <a:ext uri="{FF2B5EF4-FFF2-40B4-BE49-F238E27FC236}">
-                <a16:creationId xmlns:a16="http://schemas.microsoft.com/office/drawing/2014/main" id="{8B4490C1-C51E-4FE8-A9D9-53A2BA3A9104}"/>
+                <a16:creationId xmlns:a16="http://schemas.microsoft.com/office/drawing/2014/main" id="{40DBF2F4-F3EC-4097-89D6-BC2EBAC2AD0E}"/>
               </a:ext>
             </a:extLst>
           </p:cNvPr>
@@ -7132,7 +7728,7 @@
           <p:cNvPr id="8" name="">
             <a:extLst xmlns:a="http://schemas.openxmlformats.org/drawingml/2006/main">
               <a:ext uri="{FF2B5EF4-FFF2-40B4-BE49-F238E27FC236}">
-                <a16:creationId xmlns:a16="http://schemas.microsoft.com/office/drawing/2014/main" id="{0BA95983-66E2-4F54-8D07-8E417629BBCF}"/>
+                <a16:creationId xmlns:a16="http://schemas.microsoft.com/office/drawing/2014/main" id="{7E655FD3-40F4-4904-88CC-B4E7E22869E8}"/>
               </a:ext>
             </a:extLst>
           </p:cNvPr>
@@ -7182,7 +7778,7 @@
           <p:cNvPr id="9" name="">
             <a:extLst xmlns:a="http://schemas.openxmlformats.org/drawingml/2006/main">
               <a:ext uri="{FF2B5EF4-FFF2-40B4-BE49-F238E27FC236}">
-                <a16:creationId xmlns:a16="http://schemas.microsoft.com/office/drawing/2014/main" id="{9748AC5C-49EC-4077-9BA5-A624787D2C26}"/>
+                <a16:creationId xmlns:a16="http://schemas.microsoft.com/office/drawing/2014/main" id="{AFBB8D9F-EDB3-4A6E-9F3E-BCCC69AA32FD}"/>
               </a:ext>
             </a:extLst>
           </p:cNvPr>
@@ -7232,7 +7828,7 @@
           <p:cNvPr id="10" name="">
             <a:extLst xmlns:a="http://schemas.openxmlformats.org/drawingml/2006/main">
               <a:ext uri="{FF2B5EF4-FFF2-40B4-BE49-F238E27FC236}">
-                <a16:creationId xmlns:a16="http://schemas.microsoft.com/office/drawing/2014/main" id="{F1D1EE4B-F246-4212-BEE6-B090D38684CA}"/>
+                <a16:creationId xmlns:a16="http://schemas.microsoft.com/office/drawing/2014/main" id="{82314CE4-3C98-4A3E-BF78-1D415994303D}"/>
               </a:ext>
             </a:extLst>
           </p:cNvPr>
@@ -7282,7 +7878,7 @@
           <p:cNvPr id="11" name="">
             <a:extLst xmlns:a="http://schemas.openxmlformats.org/drawingml/2006/main">
               <a:ext uri="{FF2B5EF4-FFF2-40B4-BE49-F238E27FC236}">
-                <a16:creationId xmlns:a16="http://schemas.microsoft.com/office/drawing/2014/main" id="{72316C2C-5BF3-49CB-B0C1-E7B05E41D1F6}"/>
+                <a16:creationId xmlns:a16="http://schemas.microsoft.com/office/drawing/2014/main" id="{933A1223-A18A-4BE7-AFC9-E38EE7862FF2}"/>
               </a:ext>
             </a:extLst>
           </p:cNvPr>
@@ -7332,7 +7928,7 @@
           <p:cNvPr id="12" name="">
             <a:extLst xmlns:a="http://schemas.openxmlformats.org/drawingml/2006/main">
               <a:ext uri="{FF2B5EF4-FFF2-40B4-BE49-F238E27FC236}">
-                <a16:creationId xmlns:a16="http://schemas.microsoft.com/office/drawing/2014/main" id="{0B485697-623F-4FDB-9801-AB1D81CCFEF1}"/>
+                <a16:creationId xmlns:a16="http://schemas.microsoft.com/office/drawing/2014/main" id="{CEDB8260-8CD2-428F-99E4-76322733E3B0}"/>
               </a:ext>
             </a:extLst>
           </p:cNvPr>
@@ -7382,7 +7978,7 @@
           <p:cNvPr id="13" name="">
             <a:extLst xmlns:a="http://schemas.openxmlformats.org/drawingml/2006/main">
               <a:ext uri="{FF2B5EF4-FFF2-40B4-BE49-F238E27FC236}">
-                <a16:creationId xmlns:a16="http://schemas.microsoft.com/office/drawing/2014/main" id="{33C5E5EF-67E4-4024-8C49-9D847C78439D}"/>
+                <a16:creationId xmlns:a16="http://schemas.microsoft.com/office/drawing/2014/main" id="{C1A8302F-939C-4D57-8A6C-9151EB3DDEE7}"/>
               </a:ext>
             </a:extLst>
           </p:cNvPr>
@@ -7432,7 +8028,7 @@
           <p:cNvPr id="14" name="">
             <a:extLst xmlns:a="http://schemas.openxmlformats.org/drawingml/2006/main">
               <a:ext uri="{FF2B5EF4-FFF2-40B4-BE49-F238E27FC236}">
-                <a16:creationId xmlns:a16="http://schemas.microsoft.com/office/drawing/2014/main" id="{93BE82A8-3D27-478A-BBA7-7D477A1739CB}"/>
+                <a16:creationId xmlns:a16="http://schemas.microsoft.com/office/drawing/2014/main" id="{4E476D45-AA63-442F-8302-CDB02E0229F4}"/>
               </a:ext>
             </a:extLst>
           </p:cNvPr>
@@ -7482,7 +8078,7 @@
           <p:cNvPr id="15" name="">
             <a:extLst xmlns:a="http://schemas.openxmlformats.org/drawingml/2006/main">
               <a:ext uri="{FF2B5EF4-FFF2-40B4-BE49-F238E27FC236}">
-                <a16:creationId xmlns:a16="http://schemas.microsoft.com/office/drawing/2014/main" id="{E87962FD-CC87-4475-A981-D630DB1AF6F6}"/>
+                <a16:creationId xmlns:a16="http://schemas.microsoft.com/office/drawing/2014/main" id="{8D5E13F7-C02A-4EC2-B0D1-67F135BFACBB}"/>
               </a:ext>
             </a:extLst>
           </p:cNvPr>
@@ -7530,7 +8126,7 @@
     </p:spTree>
     <p:extLst>
       <p:ext uri="{BB962C8B-B14F-4D97-AF65-F5344CB8AC3E}">
-        <p14:creationId xmlns:p14="http://schemas.microsoft.com/office/powerpoint/2010/main" val="1917300781"/>
+        <p14:creationId xmlns:p14="http://schemas.microsoft.com/office/powerpoint/2010/main" val="299562216"/>
       </p:ext>
     </p:extLst>
   </p:cSld>
@@ -7561,7 +8157,7 @@
           <p:cNvPr id="6" name="">
             <a:extLst xmlns:a="http://schemas.openxmlformats.org/drawingml/2006/main">
               <a:ext uri="{FF2B5EF4-FFF2-40B4-BE49-F238E27FC236}">
-                <a16:creationId xmlns:a16="http://schemas.microsoft.com/office/drawing/2014/main" id="{B4914183-3DD3-49D5-836E-FBF648E3F086}"/>
+                <a16:creationId xmlns:a16="http://schemas.microsoft.com/office/drawing/2014/main" id="{592DB84C-B36B-4AAD-9EC6-68ABC89BFF7E}"/>
               </a:ext>
             </a:extLst>
           </p:cNvPr>
@@ -7611,7 +8207,7 @@
           <p:cNvPr id="2" name="">
             <a:extLst xmlns:a="http://schemas.openxmlformats.org/drawingml/2006/main">
               <a:ext uri="{FF2B5EF4-FFF2-40B4-BE49-F238E27FC236}">
-                <a16:creationId xmlns:a16="http://schemas.microsoft.com/office/drawing/2014/main" id="{C76CF9CE-BA68-4046-B100-728C3BB1EE4B}"/>
+                <a16:creationId xmlns:a16="http://schemas.microsoft.com/office/drawing/2014/main" id="{DE6844B8-26B4-4A8C-941B-AEC13465D98A}"/>
               </a:ext>
             </a:extLst>
           </p:cNvPr>
@@ -7678,7 +8274,7 @@
           <p:cNvPr id="3" name="">
             <a:extLst xmlns:a="http://schemas.openxmlformats.org/drawingml/2006/main">
               <a:ext uri="{FF2B5EF4-FFF2-40B4-BE49-F238E27FC236}">
-                <a16:creationId xmlns:a16="http://schemas.microsoft.com/office/drawing/2014/main" id="{C04AE9E5-4E42-440E-8889-4F6D009CF3CF}"/>
+                <a16:creationId xmlns:a16="http://schemas.microsoft.com/office/drawing/2014/main" id="{252DF2A9-ACBC-49AA-A729-E5988C637F2F}"/>
               </a:ext>
             </a:extLst>
           </p:cNvPr>
@@ -7728,7 +8324,7 @@
           <p:cNvPr id="4" name="">
             <a:extLst xmlns:a="http://schemas.openxmlformats.org/drawingml/2006/main">
               <a:ext uri="{FF2B5EF4-FFF2-40B4-BE49-F238E27FC236}">
-                <a16:creationId xmlns:a16="http://schemas.microsoft.com/office/drawing/2014/main" id="{826D6EDF-F5E4-4FC1-9D5A-53F8401C6891}"/>
+                <a16:creationId xmlns:a16="http://schemas.microsoft.com/office/drawing/2014/main" id="{648522B4-14BB-4DE6-9E88-4AB9E03E07B6}"/>
               </a:ext>
             </a:extLst>
           </p:cNvPr>
@@ -7778,7 +8374,7 @@
           <p:cNvPr id="5" name="">
             <a:extLst xmlns:a="http://schemas.openxmlformats.org/drawingml/2006/main">
               <a:ext uri="{FF2B5EF4-FFF2-40B4-BE49-F238E27FC236}">
-                <a16:creationId xmlns:a16="http://schemas.microsoft.com/office/drawing/2014/main" id="{F7C7FCD3-6690-49CB-A64F-38876F0F2767}"/>
+                <a16:creationId xmlns:a16="http://schemas.microsoft.com/office/drawing/2014/main" id="{9D509C6A-13FE-4939-868E-7A59276E28B9}"/>
               </a:ext>
             </a:extLst>
           </p:cNvPr>
@@ -7826,7 +8422,7 @@
     </p:spTree>
     <p:extLst>
       <p:ext uri="{BB962C8B-B14F-4D97-AF65-F5344CB8AC3E}">
-        <p14:creationId xmlns:p14="http://schemas.microsoft.com/office/powerpoint/2010/main" val="297651712"/>
+        <p14:creationId xmlns:p14="http://schemas.microsoft.com/office/powerpoint/2010/main" val="102596344"/>
       </p:ext>
     </p:extLst>
   </p:cSld>
@@ -7857,7 +8453,7 @@
           <p:cNvPr id="20" name="">
             <a:extLst xmlns:a="http://schemas.openxmlformats.org/drawingml/2006/main">
               <a:ext uri="{FF2B5EF4-FFF2-40B4-BE49-F238E27FC236}">
-                <a16:creationId xmlns:a16="http://schemas.microsoft.com/office/drawing/2014/main" id="{2B79A190-48F6-45C1-A151-32D651499934}"/>
+                <a16:creationId xmlns:a16="http://schemas.microsoft.com/office/drawing/2014/main" id="{FCA5491C-244D-4566-9491-8DDD99F998C9}"/>
               </a:ext>
             </a:extLst>
           </p:cNvPr>
@@ -7907,7 +8503,7 @@
           <p:cNvPr id="2" name="">
             <a:extLst xmlns:a="http://schemas.openxmlformats.org/drawingml/2006/main">
               <a:ext uri="{FF2B5EF4-FFF2-40B4-BE49-F238E27FC236}">
-                <a16:creationId xmlns:a16="http://schemas.microsoft.com/office/drawing/2014/main" id="{E313ED1D-C1AF-48F3-A731-0CCDCE4CC621}"/>
+                <a16:creationId xmlns:a16="http://schemas.microsoft.com/office/drawing/2014/main" id="{D88907A4-61CB-4B1F-97E8-FECD08C07725}"/>
               </a:ext>
             </a:extLst>
           </p:cNvPr>
@@ -7957,7 +8553,7 @@
           <p:cNvPr id="3" name="">
             <a:extLst xmlns:a="http://schemas.openxmlformats.org/drawingml/2006/main">
               <a:ext uri="{FF2B5EF4-FFF2-40B4-BE49-F238E27FC236}">
-                <a16:creationId xmlns:a16="http://schemas.microsoft.com/office/drawing/2014/main" id="{93FA6F6F-C2CA-4F17-AFA0-A0394B3C5F1B}"/>
+                <a16:creationId xmlns:a16="http://schemas.microsoft.com/office/drawing/2014/main" id="{1B83D13A-0E53-46EE-90C7-09AE30AD9194}"/>
               </a:ext>
             </a:extLst>
           </p:cNvPr>
@@ -7990,7 +8586,7 @@
           <p:cNvPr id="4" name="">
             <a:extLst xmlns:a="http://schemas.openxmlformats.org/drawingml/2006/main">
               <a:ext uri="{FF2B5EF4-FFF2-40B4-BE49-F238E27FC236}">
-                <a16:creationId xmlns:a16="http://schemas.microsoft.com/office/drawing/2014/main" id="{A9B197D2-82A8-46A1-A15F-E27AFF487D89}"/>
+                <a16:creationId xmlns:a16="http://schemas.microsoft.com/office/drawing/2014/main" id="{15DB55E7-A2EC-4826-8971-1BDBA4407001}"/>
               </a:ext>
             </a:extLst>
           </p:cNvPr>
@@ -8040,7 +8636,7 @@
           <p:cNvPr id="5" name="">
             <a:extLst xmlns:a="http://schemas.openxmlformats.org/drawingml/2006/main">
               <a:ext uri="{FF2B5EF4-FFF2-40B4-BE49-F238E27FC236}">
-                <a16:creationId xmlns:a16="http://schemas.microsoft.com/office/drawing/2014/main" id="{06D29A5F-C621-4FF8-883E-487DDDB881CD}"/>
+                <a16:creationId xmlns:a16="http://schemas.microsoft.com/office/drawing/2014/main" id="{F4610BDE-4ABB-40E5-A7B3-22659689CBE5}"/>
               </a:ext>
             </a:extLst>
           </p:cNvPr>
@@ -8090,7 +8686,7 @@
           <p:cNvPr id="6" name="">
             <a:extLst xmlns:a="http://schemas.openxmlformats.org/drawingml/2006/main">
               <a:ext uri="{FF2B5EF4-FFF2-40B4-BE49-F238E27FC236}">
-                <a16:creationId xmlns:a16="http://schemas.microsoft.com/office/drawing/2014/main" id="{4CCC06B5-1622-4501-A1FC-DA731A251EB9}"/>
+                <a16:creationId xmlns:a16="http://schemas.microsoft.com/office/drawing/2014/main" id="{FA3F5A1D-9E56-44AA-87C2-E9CFD1939666}"/>
               </a:ext>
             </a:extLst>
           </p:cNvPr>
@@ -8123,7 +8719,7 @@
           <p:cNvPr id="7" name="">
             <a:extLst xmlns:a="http://schemas.openxmlformats.org/drawingml/2006/main">
               <a:ext uri="{FF2B5EF4-FFF2-40B4-BE49-F238E27FC236}">
-                <a16:creationId xmlns:a16="http://schemas.microsoft.com/office/drawing/2014/main" id="{6737FD43-6A7E-4446-958A-935000EF0605}"/>
+                <a16:creationId xmlns:a16="http://schemas.microsoft.com/office/drawing/2014/main" id="{A6C397A7-2C79-469B-8A12-CA2EBCF8385D}"/>
               </a:ext>
             </a:extLst>
           </p:cNvPr>
@@ -8173,7 +8769,7 @@
           <p:cNvPr id="8" name="">
             <a:extLst xmlns:a="http://schemas.openxmlformats.org/drawingml/2006/main">
               <a:ext uri="{FF2B5EF4-FFF2-40B4-BE49-F238E27FC236}">
-                <a16:creationId xmlns:a16="http://schemas.microsoft.com/office/drawing/2014/main" id="{A801BBEC-89FA-4B53-A3A4-1C1A9FD9A755}"/>
+                <a16:creationId xmlns:a16="http://schemas.microsoft.com/office/drawing/2014/main" id="{F7613A2F-05D8-4751-88A7-355E12228755}"/>
               </a:ext>
             </a:extLst>
           </p:cNvPr>
@@ -8223,7 +8819,7 @@
           <p:cNvPr id="9" name="">
             <a:extLst xmlns:a="http://schemas.openxmlformats.org/drawingml/2006/main">
               <a:ext uri="{FF2B5EF4-FFF2-40B4-BE49-F238E27FC236}">
-                <a16:creationId xmlns:a16="http://schemas.microsoft.com/office/drawing/2014/main" id="{11DD4A81-B6E7-4AB8-81AF-53F74D1B8CDE}"/>
+                <a16:creationId xmlns:a16="http://schemas.microsoft.com/office/drawing/2014/main" id="{6BA7CED2-FC40-4356-BB90-8CCF43300302}"/>
               </a:ext>
             </a:extLst>
           </p:cNvPr>
@@ -8273,7 +8869,7 @@
           <p:cNvPr id="10" name="">
             <a:extLst xmlns:a="http://schemas.openxmlformats.org/drawingml/2006/main">
               <a:ext uri="{FF2B5EF4-FFF2-40B4-BE49-F238E27FC236}">
-                <a16:creationId xmlns:a16="http://schemas.microsoft.com/office/drawing/2014/main" id="{F71B7E33-217D-4488-BE44-43695982E3E3}"/>
+                <a16:creationId xmlns:a16="http://schemas.microsoft.com/office/drawing/2014/main" id="{25A5AC8F-75FE-46FC-BA65-B12D7BE4537C}"/>
               </a:ext>
             </a:extLst>
           </p:cNvPr>
@@ -8323,7 +8919,7 @@
           <p:cNvPr id="11" name="">
             <a:extLst xmlns:a="http://schemas.openxmlformats.org/drawingml/2006/main">
               <a:ext uri="{FF2B5EF4-FFF2-40B4-BE49-F238E27FC236}">
-                <a16:creationId xmlns:a16="http://schemas.microsoft.com/office/drawing/2014/main" id="{6E0747B8-49BD-4ED5-A340-3DF70FD87A36}"/>
+                <a16:creationId xmlns:a16="http://schemas.microsoft.com/office/drawing/2014/main" id="{4978FFAA-2032-48B2-8497-532E9151A4BD}"/>
               </a:ext>
             </a:extLst>
           </p:cNvPr>
@@ -8373,7 +8969,7 @@
           <p:cNvPr id="12" name="">
             <a:extLst xmlns:a="http://schemas.openxmlformats.org/drawingml/2006/main">
               <a:ext uri="{FF2B5EF4-FFF2-40B4-BE49-F238E27FC236}">
-                <a16:creationId xmlns:a16="http://schemas.microsoft.com/office/drawing/2014/main" id="{770FE7CC-2D17-4684-87E6-32591B697F2F}"/>
+                <a16:creationId xmlns:a16="http://schemas.microsoft.com/office/drawing/2014/main" id="{06450BDF-E4EB-4A8E-BED4-EE241D255F8C}"/>
               </a:ext>
             </a:extLst>
           </p:cNvPr>
@@ -8406,7 +9002,7 @@
           <p:cNvPr id="13" name="">
             <a:extLst xmlns:a="http://schemas.openxmlformats.org/drawingml/2006/main">
               <a:ext uri="{FF2B5EF4-FFF2-40B4-BE49-F238E27FC236}">
-                <a16:creationId xmlns:a16="http://schemas.microsoft.com/office/drawing/2014/main" id="{7A9A91FA-427D-42D5-9519-BA43863CFD7B}"/>
+                <a16:creationId xmlns:a16="http://schemas.microsoft.com/office/drawing/2014/main" id="{2B8B9421-86EF-4B71-9104-3B2B839A3A57}"/>
               </a:ext>
             </a:extLst>
           </p:cNvPr>
@@ -8456,7 +9052,7 @@
           <p:cNvPr id="14" name="">
             <a:extLst xmlns:a="http://schemas.openxmlformats.org/drawingml/2006/main">
               <a:ext uri="{FF2B5EF4-FFF2-40B4-BE49-F238E27FC236}">
-                <a16:creationId xmlns:a16="http://schemas.microsoft.com/office/drawing/2014/main" id="{D6817E95-205C-4B1C-B76F-196E04A47256}"/>
+                <a16:creationId xmlns:a16="http://schemas.microsoft.com/office/drawing/2014/main" id="{F5CEB417-2DD5-4AE9-8E16-71AAAF420C39}"/>
               </a:ext>
             </a:extLst>
           </p:cNvPr>
@@ -8506,7 +9102,7 @@
           <p:cNvPr id="15" name="">
             <a:extLst xmlns:a="http://schemas.openxmlformats.org/drawingml/2006/main">
               <a:ext uri="{FF2B5EF4-FFF2-40B4-BE49-F238E27FC236}">
-                <a16:creationId xmlns:a16="http://schemas.microsoft.com/office/drawing/2014/main" id="{D8221FE0-DAE1-4DD3-9FDA-11E5D6D215A5}"/>
+                <a16:creationId xmlns:a16="http://schemas.microsoft.com/office/drawing/2014/main" id="{190C1E62-0F1F-4571-9D06-257F4FE163FB}"/>
               </a:ext>
             </a:extLst>
           </p:cNvPr>
@@ -8556,7 +9152,7 @@
           <p:cNvPr id="16" name="">
             <a:extLst xmlns:a="http://schemas.openxmlformats.org/drawingml/2006/main">
               <a:ext uri="{FF2B5EF4-FFF2-40B4-BE49-F238E27FC236}">
-                <a16:creationId xmlns:a16="http://schemas.microsoft.com/office/drawing/2014/main" id="{D7AA7442-715A-464F-83CA-EF2E3F7F6C49}"/>
+                <a16:creationId xmlns:a16="http://schemas.microsoft.com/office/drawing/2014/main" id="{B8A0253F-5094-43A5-B528-069F939C6ED8}"/>
               </a:ext>
             </a:extLst>
           </p:cNvPr>
@@ -8606,7 +9202,7 @@
           <p:cNvPr id="17" name="">
             <a:extLst xmlns:a="http://schemas.openxmlformats.org/drawingml/2006/main">
               <a:ext uri="{FF2B5EF4-FFF2-40B4-BE49-F238E27FC236}">
-                <a16:creationId xmlns:a16="http://schemas.microsoft.com/office/drawing/2014/main" id="{6DCF643C-9ECC-481C-8B13-F1E228972A32}"/>
+                <a16:creationId xmlns:a16="http://schemas.microsoft.com/office/drawing/2014/main" id="{C974A905-CD03-4682-9D99-4678521C6B10}"/>
               </a:ext>
             </a:extLst>
           </p:cNvPr>
@@ -8656,7 +9252,7 @@
           <p:cNvPr id="18" name="">
             <a:extLst xmlns:a="http://schemas.openxmlformats.org/drawingml/2006/main">
               <a:ext uri="{FF2B5EF4-FFF2-40B4-BE49-F238E27FC236}">
-                <a16:creationId xmlns:a16="http://schemas.microsoft.com/office/drawing/2014/main" id="{64D10813-79F2-4BAA-A380-DADC6F41C338}"/>
+                <a16:creationId xmlns:a16="http://schemas.microsoft.com/office/drawing/2014/main" id="{FF56BF54-C6E2-460E-942F-8BAA9C8DA386}"/>
               </a:ext>
             </a:extLst>
           </p:cNvPr>
@@ -8689,7 +9285,7 @@
           <p:cNvPr id="19" name="">
             <a:extLst xmlns:a="http://schemas.openxmlformats.org/drawingml/2006/main">
               <a:ext uri="{FF2B5EF4-FFF2-40B4-BE49-F238E27FC236}">
-                <a16:creationId xmlns:a16="http://schemas.microsoft.com/office/drawing/2014/main" id="{89991146-1B6E-4831-A44B-56E7FF71269E}"/>
+                <a16:creationId xmlns:a16="http://schemas.microsoft.com/office/drawing/2014/main" id="{483AD765-CC90-46FD-BC55-24BF53494CBF}"/>
               </a:ext>
             </a:extLst>
           </p:cNvPr>
@@ -8737,7 +9333,7 @@
     </p:spTree>
     <p:extLst>
       <p:ext uri="{BB962C8B-B14F-4D97-AF65-F5344CB8AC3E}">
-        <p14:creationId xmlns:p14="http://schemas.microsoft.com/office/powerpoint/2010/main" val="1457286895"/>
+        <p14:creationId xmlns:p14="http://schemas.microsoft.com/office/powerpoint/2010/main" val="1760779519"/>
       </p:ext>
     </p:extLst>
   </p:cSld>
@@ -8768,7 +9364,7 @@
           <p:cNvPr id="7" name="">
             <a:extLst xmlns:a="http://schemas.openxmlformats.org/drawingml/2006/main">
               <a:ext uri="{FF2B5EF4-FFF2-40B4-BE49-F238E27FC236}">
-                <a16:creationId xmlns:a16="http://schemas.microsoft.com/office/drawing/2014/main" id="{42AA7EAE-AFBB-4E97-A938-2AB86A960A74}"/>
+                <a16:creationId xmlns:a16="http://schemas.microsoft.com/office/drawing/2014/main" id="{DC6E974D-1D3C-41C9-80F9-6D616DD2C86A}"/>
               </a:ext>
             </a:extLst>
           </p:cNvPr>
@@ -8818,7 +9414,7 @@
           <p:cNvPr id="2" name="">
             <a:extLst xmlns:a="http://schemas.openxmlformats.org/drawingml/2006/main">
               <a:ext uri="{FF2B5EF4-FFF2-40B4-BE49-F238E27FC236}">
-                <a16:creationId xmlns:a16="http://schemas.microsoft.com/office/drawing/2014/main" id="{FF66EFCD-FA69-48BC-BB28-48B7C6FBB838}"/>
+                <a16:creationId xmlns:a16="http://schemas.microsoft.com/office/drawing/2014/main" id="{4477F6CE-44DA-4FDA-AA47-1D186529ED06}"/>
               </a:ext>
             </a:extLst>
           </p:cNvPr>
@@ -8868,7 +9464,7 @@
           <p:cNvPr id="3" name="">
             <a:extLst xmlns:a="http://schemas.openxmlformats.org/drawingml/2006/main">
               <a:ext uri="{FF2B5EF4-FFF2-40B4-BE49-F238E27FC236}">
-                <a16:creationId xmlns:a16="http://schemas.microsoft.com/office/drawing/2014/main" id="{9B28DC83-997F-436B-A8A8-426E57E75475}"/>
+                <a16:creationId xmlns:a16="http://schemas.microsoft.com/office/drawing/2014/main" id="{FA8E598E-E74D-4143-BE5B-10AC8769274E}"/>
               </a:ext>
             </a:extLst>
           </p:cNvPr>
@@ -8901,7 +9497,7 @@
           <p:cNvPr id="4" name="">
             <a:extLst xmlns:a="http://schemas.openxmlformats.org/drawingml/2006/main">
               <a:ext uri="{FF2B5EF4-FFF2-40B4-BE49-F238E27FC236}">
-                <a16:creationId xmlns:a16="http://schemas.microsoft.com/office/drawing/2014/main" id="{6E9BF8C8-AC7A-4837-AA91-9586E6A5756D}"/>
+                <a16:creationId xmlns:a16="http://schemas.microsoft.com/office/drawing/2014/main" id="{B3CA689A-C1EF-4C6E-A853-0B9FBD59F6D0}"/>
               </a:ext>
             </a:extLst>
           </p:cNvPr>
@@ -8951,7 +9547,7 @@
           <p:cNvPr id="5" name="">
             <a:extLst xmlns:a="http://schemas.openxmlformats.org/drawingml/2006/main">
               <a:ext uri="{FF2B5EF4-FFF2-40B4-BE49-F238E27FC236}">
-                <a16:creationId xmlns:a16="http://schemas.microsoft.com/office/drawing/2014/main" id="{356D5FAD-4BF3-4A31-B004-D1DB535290AD}"/>
+                <a16:creationId xmlns:a16="http://schemas.microsoft.com/office/drawing/2014/main" id="{AC0EB136-4412-4023-945F-0C7E05C85FA7}"/>
               </a:ext>
             </a:extLst>
           </p:cNvPr>
@@ -9005,7 +9601,7 @@
           <p:nvPr/>
         </p:nvPicPr>
         <p:blipFill>
-          <a:blip xmlns:r="http://schemas.openxmlformats.org/officeDocument/2006/relationships" xmlns:a="http://schemas.openxmlformats.org/drawingml/2006/main" r:embed="R591dab0a93be40d5"/>
+          <a:blip xmlns:r="http://schemas.openxmlformats.org/officeDocument/2006/relationships" xmlns:a="http://schemas.openxmlformats.org/drawingml/2006/main" r:embed="R2438911490774ff7"/>
           <a:stretch xmlns:a="http://schemas.openxmlformats.org/drawingml/2006/main"/>
         </p:blipFill>
         <p:spPr>
@@ -9021,7 +9617,7 @@
     </p:spTree>
     <p:extLst>
       <p:ext uri="{BB962C8B-B14F-4D97-AF65-F5344CB8AC3E}">
-        <p14:creationId xmlns:p14="http://schemas.microsoft.com/office/powerpoint/2010/main" val="2027813797"/>
+        <p14:creationId xmlns:p14="http://schemas.microsoft.com/office/powerpoint/2010/main" val="811780400"/>
       </p:ext>
     </p:extLst>
   </p:cSld>
@@ -9052,7 +9648,7 @@
           <p:cNvPr id="19" name="">
             <a:extLst xmlns:a="http://schemas.openxmlformats.org/drawingml/2006/main">
               <a:ext uri="{FF2B5EF4-FFF2-40B4-BE49-F238E27FC236}">
-                <a16:creationId xmlns:a16="http://schemas.microsoft.com/office/drawing/2014/main" id="{E0F9AB40-E88E-4D01-9D8D-77E6299150B7}"/>
+                <a16:creationId xmlns:a16="http://schemas.microsoft.com/office/drawing/2014/main" id="{0A607FB6-DFFC-4498-9E27-8E38666161B5}"/>
               </a:ext>
             </a:extLst>
           </p:cNvPr>
@@ -9102,7 +9698,7 @@
           <p:cNvPr id="2" name="">
             <a:extLst xmlns:a="http://schemas.openxmlformats.org/drawingml/2006/main">
               <a:ext uri="{FF2B5EF4-FFF2-40B4-BE49-F238E27FC236}">
-                <a16:creationId xmlns:a16="http://schemas.microsoft.com/office/drawing/2014/main" id="{A1C766B3-3368-4FA8-AE8D-D3CE0C9A4C1E}"/>
+                <a16:creationId xmlns:a16="http://schemas.microsoft.com/office/drawing/2014/main" id="{9F6EB4C2-FD69-4DCC-9273-6915F346EFDB}"/>
               </a:ext>
             </a:extLst>
           </p:cNvPr>
@@ -9152,7 +9748,7 @@
           <p:cNvPr id="3" name="">
             <a:extLst xmlns:a="http://schemas.openxmlformats.org/drawingml/2006/main">
               <a:ext uri="{FF2B5EF4-FFF2-40B4-BE49-F238E27FC236}">
-                <a16:creationId xmlns:a16="http://schemas.microsoft.com/office/drawing/2014/main" id="{6B0F6276-AAD0-4919-93D5-5E448D513FE5}"/>
+                <a16:creationId xmlns:a16="http://schemas.microsoft.com/office/drawing/2014/main" id="{0F10E0CF-95C8-4638-AB3A-48AAE585747E}"/>
               </a:ext>
             </a:extLst>
           </p:cNvPr>
@@ -9185,7 +9781,7 @@
           <p:cNvPr id="4" name="">
             <a:extLst xmlns:a="http://schemas.openxmlformats.org/drawingml/2006/main">
               <a:ext uri="{FF2B5EF4-FFF2-40B4-BE49-F238E27FC236}">
-                <a16:creationId xmlns:a16="http://schemas.microsoft.com/office/drawing/2014/main" id="{69ABEB22-124C-49A3-A49A-280139F92414}"/>
+                <a16:creationId xmlns:a16="http://schemas.microsoft.com/office/drawing/2014/main" id="{1AA75B44-8B39-43AF-9A51-9D64D41EE2AE}"/>
               </a:ext>
             </a:extLst>
           </p:cNvPr>
@@ -9235,7 +9831,7 @@
           <p:cNvPr id="5" name="">
             <a:extLst xmlns:a="http://schemas.openxmlformats.org/drawingml/2006/main">
               <a:ext uri="{FF2B5EF4-FFF2-40B4-BE49-F238E27FC236}">
-                <a16:creationId xmlns:a16="http://schemas.microsoft.com/office/drawing/2014/main" id="{002F8EFB-A1B6-4135-BDCC-B288F1ABFC37}"/>
+                <a16:creationId xmlns:a16="http://schemas.microsoft.com/office/drawing/2014/main" id="{2B72C927-6FB8-49B5-97C2-C7431B1CFC2B}"/>
               </a:ext>
             </a:extLst>
           </p:cNvPr>
@@ -9289,7 +9885,7 @@
           <p:nvPr/>
         </p:nvPicPr>
         <p:blipFill>
-          <a:blip xmlns:r="http://schemas.openxmlformats.org/officeDocument/2006/relationships" xmlns:a="http://schemas.openxmlformats.org/drawingml/2006/main" r:embed="R38d5c864d551496a"/>
+          <a:blip xmlns:r="http://schemas.openxmlformats.org/officeDocument/2006/relationships" xmlns:a="http://schemas.openxmlformats.org/drawingml/2006/main" r:embed="R8cac2415573e423f"/>
           <a:stretch xmlns:a="http://schemas.openxmlformats.org/drawingml/2006/main"/>
         </p:blipFill>
         <p:spPr>
@@ -9307,7 +9903,7 @@
           <p:cNvPr id="7" name="">
             <a:extLst xmlns:a="http://schemas.openxmlformats.org/drawingml/2006/main">
               <a:ext uri="{FF2B5EF4-FFF2-40B4-BE49-F238E27FC236}">
-                <a16:creationId xmlns:a16="http://schemas.microsoft.com/office/drawing/2014/main" id="{B1681A90-AF93-47AD-A8B5-CCC5AAA66BA8}"/>
+                <a16:creationId xmlns:a16="http://schemas.microsoft.com/office/drawing/2014/main" id="{11F30594-EF9A-44DB-AEA5-78608EF6A7D5}"/>
               </a:ext>
             </a:extLst>
           </p:cNvPr>
@@ -9340,7 +9936,7 @@
           <p:cNvPr id="8" name="">
             <a:extLst xmlns:a="http://schemas.openxmlformats.org/drawingml/2006/main">
               <a:ext uri="{FF2B5EF4-FFF2-40B4-BE49-F238E27FC236}">
-                <a16:creationId xmlns:a16="http://schemas.microsoft.com/office/drawing/2014/main" id="{AF959B4F-35D0-4B91-915F-1FC280233DD8}"/>
+                <a16:creationId xmlns:a16="http://schemas.microsoft.com/office/drawing/2014/main" id="{2A420B38-6D33-4D01-905E-536175A9394C}"/>
               </a:ext>
             </a:extLst>
           </p:cNvPr>
@@ -9390,7 +9986,7 @@
           <p:cNvPr id="9" name="">
             <a:extLst xmlns:a="http://schemas.openxmlformats.org/drawingml/2006/main">
               <a:ext uri="{FF2B5EF4-FFF2-40B4-BE49-F238E27FC236}">
-                <a16:creationId xmlns:a16="http://schemas.microsoft.com/office/drawing/2014/main" id="{3813CC23-DE7E-45C1-9271-FF89C96FD41C}"/>
+                <a16:creationId xmlns:a16="http://schemas.microsoft.com/office/drawing/2014/main" id="{BB264477-3627-412F-AD3A-4AF6E4636C18}"/>
               </a:ext>
             </a:extLst>
           </p:cNvPr>
@@ -9440,7 +10036,7 @@
           <p:cNvPr id="10" name="">
             <a:extLst xmlns:a="http://schemas.openxmlformats.org/drawingml/2006/main">
               <a:ext uri="{FF2B5EF4-FFF2-40B4-BE49-F238E27FC236}">
-                <a16:creationId xmlns:a16="http://schemas.microsoft.com/office/drawing/2014/main" id="{F5BEFD9D-5B35-4561-AC31-ADD6C4D89435}"/>
+                <a16:creationId xmlns:a16="http://schemas.microsoft.com/office/drawing/2014/main" id="{8B2433D1-B44E-4964-8FB7-AE15CD53FCEE}"/>
               </a:ext>
             </a:extLst>
           </p:cNvPr>
@@ -9490,7 +10086,7 @@
           <p:cNvPr id="11" name="">
             <a:extLst xmlns:a="http://schemas.openxmlformats.org/drawingml/2006/main">
               <a:ext uri="{FF2B5EF4-FFF2-40B4-BE49-F238E27FC236}">
-                <a16:creationId xmlns:a16="http://schemas.microsoft.com/office/drawing/2014/main" id="{70BEB982-1080-4A4D-8432-7EDD277FD6FB}"/>
+                <a16:creationId xmlns:a16="http://schemas.microsoft.com/office/drawing/2014/main" id="{5375650A-63E9-4528-B957-72BE9305241B}"/>
               </a:ext>
             </a:extLst>
           </p:cNvPr>
@@ -9540,7 +10136,7 @@
           <p:cNvPr id="12" name="">
             <a:extLst xmlns:a="http://schemas.openxmlformats.org/drawingml/2006/main">
               <a:ext uri="{FF2B5EF4-FFF2-40B4-BE49-F238E27FC236}">
-                <a16:creationId xmlns:a16="http://schemas.microsoft.com/office/drawing/2014/main" id="{CA2CF93F-3150-42A8-A515-C48F270D63BE}"/>
+                <a16:creationId xmlns:a16="http://schemas.microsoft.com/office/drawing/2014/main" id="{8CA3FD18-B5B1-475D-AA07-94224C04890D}"/>
               </a:ext>
             </a:extLst>
           </p:cNvPr>
@@ -9590,7 +10186,7 @@
           <p:cNvPr id="13" name="">
             <a:extLst xmlns:a="http://schemas.openxmlformats.org/drawingml/2006/main">
               <a:ext uri="{FF2B5EF4-FFF2-40B4-BE49-F238E27FC236}">
-                <a16:creationId xmlns:a16="http://schemas.microsoft.com/office/drawing/2014/main" id="{D911B03F-489C-4828-947A-C5BE0B29D682}"/>
+                <a16:creationId xmlns:a16="http://schemas.microsoft.com/office/drawing/2014/main" id="{3D77168B-1265-4A26-8BA0-BB36053FDA2B}"/>
               </a:ext>
             </a:extLst>
           </p:cNvPr>
@@ -9623,7 +10219,7 @@
           <p:cNvPr id="14" name="">
             <a:extLst xmlns:a="http://schemas.openxmlformats.org/drawingml/2006/main">
               <a:ext uri="{FF2B5EF4-FFF2-40B4-BE49-F238E27FC236}">
-                <a16:creationId xmlns:a16="http://schemas.microsoft.com/office/drawing/2014/main" id="{817849DA-13D6-4F96-A39A-3E6A285171A2}"/>
+                <a16:creationId xmlns:a16="http://schemas.microsoft.com/office/drawing/2014/main" id="{A39FAF74-D4A5-480A-B27D-F3BD2743A2A8}"/>
               </a:ext>
             </a:extLst>
           </p:cNvPr>
@@ -9673,7 +10269,7 @@
           <p:cNvPr id="15" name="">
             <a:extLst xmlns:a="http://schemas.openxmlformats.org/drawingml/2006/main">
               <a:ext uri="{FF2B5EF4-FFF2-40B4-BE49-F238E27FC236}">
-                <a16:creationId xmlns:a16="http://schemas.microsoft.com/office/drawing/2014/main" id="{37A79A76-63D6-4A43-A403-10C63BB2C373}"/>
+                <a16:creationId xmlns:a16="http://schemas.microsoft.com/office/drawing/2014/main" id="{DC3FB572-1274-4E65-A473-774066F8FDF1}"/>
               </a:ext>
             </a:extLst>
           </p:cNvPr>
@@ -9723,7 +10319,7 @@
           <p:cNvPr id="16" name="">
             <a:extLst xmlns:a="http://schemas.openxmlformats.org/drawingml/2006/main">
               <a:ext uri="{FF2B5EF4-FFF2-40B4-BE49-F238E27FC236}">
-                <a16:creationId xmlns:a16="http://schemas.microsoft.com/office/drawing/2014/main" id="{EB80F513-AAED-4F4C-AC48-D00241B34EFD}"/>
+                <a16:creationId xmlns:a16="http://schemas.microsoft.com/office/drawing/2014/main" id="{B0527114-0B9B-4E0F-B254-E58F55C8868F}"/>
               </a:ext>
             </a:extLst>
           </p:cNvPr>
@@ -9773,7 +10369,7 @@
           <p:cNvPr id="17" name="">
             <a:extLst xmlns:a="http://schemas.openxmlformats.org/drawingml/2006/main">
               <a:ext uri="{FF2B5EF4-FFF2-40B4-BE49-F238E27FC236}">
-                <a16:creationId xmlns:a16="http://schemas.microsoft.com/office/drawing/2014/main" id="{4184DE6A-8897-40F8-A072-623E7C4B5931}"/>
+                <a16:creationId xmlns:a16="http://schemas.microsoft.com/office/drawing/2014/main" id="{9877CB47-9DD8-4555-A8B7-E7C6C6E139E6}"/>
               </a:ext>
             </a:extLst>
           </p:cNvPr>
@@ -9823,7 +10419,7 @@
           <p:cNvPr id="18" name="">
             <a:extLst xmlns:a="http://schemas.openxmlformats.org/drawingml/2006/main">
               <a:ext uri="{FF2B5EF4-FFF2-40B4-BE49-F238E27FC236}">
-                <a16:creationId xmlns:a16="http://schemas.microsoft.com/office/drawing/2014/main" id="{20AD97B1-8BAA-49CD-8DBB-EE6EF87D1A28}"/>
+                <a16:creationId xmlns:a16="http://schemas.microsoft.com/office/drawing/2014/main" id="{BBB2994D-98F1-4C5D-8AA1-C3B5E3DF4B50}"/>
               </a:ext>
             </a:extLst>
           </p:cNvPr>
@@ -9871,7 +10467,7 @@
     </p:spTree>
     <p:extLst>
       <p:ext uri="{BB962C8B-B14F-4D97-AF65-F5344CB8AC3E}">
-        <p14:creationId xmlns:p14="http://schemas.microsoft.com/office/powerpoint/2010/main" val="2072276394"/>
+        <p14:creationId xmlns:p14="http://schemas.microsoft.com/office/powerpoint/2010/main" val="1711225210"/>
       </p:ext>
     </p:extLst>
   </p:cSld>
@@ -9902,7 +10498,7 @@
           <p:cNvPr id="18" name="">
             <a:extLst xmlns:a="http://schemas.openxmlformats.org/drawingml/2006/main">
               <a:ext uri="{FF2B5EF4-FFF2-40B4-BE49-F238E27FC236}">
-                <a16:creationId xmlns:a16="http://schemas.microsoft.com/office/drawing/2014/main" id="{8123068C-C61E-47DE-843F-851424CC1F55}"/>
+                <a16:creationId xmlns:a16="http://schemas.microsoft.com/office/drawing/2014/main" id="{39891488-6139-4DF8-8EDD-43A0D6F005D9}"/>
               </a:ext>
             </a:extLst>
           </p:cNvPr>
@@ -9952,7 +10548,7 @@
           <p:cNvPr id="2" name="">
             <a:extLst xmlns:a="http://schemas.openxmlformats.org/drawingml/2006/main">
               <a:ext uri="{FF2B5EF4-FFF2-40B4-BE49-F238E27FC236}">
-                <a16:creationId xmlns:a16="http://schemas.microsoft.com/office/drawing/2014/main" id="{C228BFAC-D986-46E2-A038-FE1E97BC06CF}"/>
+                <a16:creationId xmlns:a16="http://schemas.microsoft.com/office/drawing/2014/main" id="{C80FE05C-E261-438A-9137-B73A632EB58D}"/>
               </a:ext>
             </a:extLst>
           </p:cNvPr>
@@ -10002,7 +10598,7 @@
           <p:cNvPr id="3" name="">
             <a:extLst xmlns:a="http://schemas.openxmlformats.org/drawingml/2006/main">
               <a:ext uri="{FF2B5EF4-FFF2-40B4-BE49-F238E27FC236}">
-                <a16:creationId xmlns:a16="http://schemas.microsoft.com/office/drawing/2014/main" id="{A36625B1-8230-4A2D-959C-FB199C7E8034}"/>
+                <a16:creationId xmlns:a16="http://schemas.microsoft.com/office/drawing/2014/main" id="{A3A1CD63-3F49-4B0E-9CDF-1135E4CB9F3B}"/>
               </a:ext>
             </a:extLst>
           </p:cNvPr>
@@ -10035,7 +10631,7 @@
           <p:cNvPr id="4" name="">
             <a:extLst xmlns:a="http://schemas.openxmlformats.org/drawingml/2006/main">
               <a:ext uri="{FF2B5EF4-FFF2-40B4-BE49-F238E27FC236}">
-                <a16:creationId xmlns:a16="http://schemas.microsoft.com/office/drawing/2014/main" id="{2A47CF0C-C24D-47C5-B61B-B2D2CE03A9AD}"/>
+                <a16:creationId xmlns:a16="http://schemas.microsoft.com/office/drawing/2014/main" id="{39FFD6A0-4F73-4229-BDB9-BD9EA69D971F}"/>
               </a:ext>
             </a:extLst>
           </p:cNvPr>
@@ -10085,7 +10681,7 @@
           <p:cNvPr id="5" name="">
             <a:extLst xmlns:a="http://schemas.openxmlformats.org/drawingml/2006/main">
               <a:ext uri="{FF2B5EF4-FFF2-40B4-BE49-F238E27FC236}">
-                <a16:creationId xmlns:a16="http://schemas.microsoft.com/office/drawing/2014/main" id="{9E069B7A-E4DD-466D-976B-96ADAB58E3BC}"/>
+                <a16:creationId xmlns:a16="http://schemas.microsoft.com/office/drawing/2014/main" id="{20652741-613D-4954-B29E-49F49B5D87D1}"/>
               </a:ext>
             </a:extLst>
           </p:cNvPr>
@@ -10139,7 +10735,7 @@
           <p:nvPr/>
         </p:nvPicPr>
         <p:blipFill>
-          <a:blip xmlns:r="http://schemas.openxmlformats.org/officeDocument/2006/relationships" xmlns:a="http://schemas.openxmlformats.org/drawingml/2006/main" r:embed="R5891d2e252424a03"/>
+          <a:blip xmlns:r="http://schemas.openxmlformats.org/officeDocument/2006/relationships" xmlns:a="http://schemas.openxmlformats.org/drawingml/2006/main" r:embed="R7952820fc1a64146"/>
           <a:stretch xmlns:a="http://schemas.openxmlformats.org/drawingml/2006/main"/>
         </p:blipFill>
         <p:spPr>
@@ -10157,7 +10753,7 @@
           <p:cNvPr id="7" name="">
             <a:extLst xmlns:a="http://schemas.openxmlformats.org/drawingml/2006/main">
               <a:ext uri="{FF2B5EF4-FFF2-40B4-BE49-F238E27FC236}">
-                <a16:creationId xmlns:a16="http://schemas.microsoft.com/office/drawing/2014/main" id="{964C168B-E480-4E34-9915-57B7BA8A8226}"/>
+                <a16:creationId xmlns:a16="http://schemas.microsoft.com/office/drawing/2014/main" id="{C5CBEEC0-32D0-4832-B4A5-542B5293F47C}"/>
               </a:ext>
             </a:extLst>
           </p:cNvPr>
@@ -10190,7 +10786,7 @@
           <p:cNvPr id="8" name="">
             <a:extLst xmlns:a="http://schemas.openxmlformats.org/drawingml/2006/main">
               <a:ext uri="{FF2B5EF4-FFF2-40B4-BE49-F238E27FC236}">
-                <a16:creationId xmlns:a16="http://schemas.microsoft.com/office/drawing/2014/main" id="{798FE01F-DF96-43D8-BA99-D96C58534009}"/>
+                <a16:creationId xmlns:a16="http://schemas.microsoft.com/office/drawing/2014/main" id="{B9C195AB-AC99-41D7-8607-C6E187339AD9}"/>
               </a:ext>
             </a:extLst>
           </p:cNvPr>
@@ -10240,7 +10836,7 @@
           <p:cNvPr id="9" name="">
             <a:extLst xmlns:a="http://schemas.openxmlformats.org/drawingml/2006/main">
               <a:ext uri="{FF2B5EF4-FFF2-40B4-BE49-F238E27FC236}">
-                <a16:creationId xmlns:a16="http://schemas.microsoft.com/office/drawing/2014/main" id="{6BA002F3-25E8-44BD-A2F0-C95BC8F54590}"/>
+                <a16:creationId xmlns:a16="http://schemas.microsoft.com/office/drawing/2014/main" id="{2D13E6E9-8081-4925-B707-ECFCE49EBE1B}"/>
               </a:ext>
             </a:extLst>
           </p:cNvPr>
@@ -10290,7 +10886,7 @@
           <p:cNvPr id="10" name="">
             <a:extLst xmlns:a="http://schemas.openxmlformats.org/drawingml/2006/main">
               <a:ext uri="{FF2B5EF4-FFF2-40B4-BE49-F238E27FC236}">
-                <a16:creationId xmlns:a16="http://schemas.microsoft.com/office/drawing/2014/main" id="{BC640B62-10DF-4E31-8465-46B8A2F4B791}"/>
+                <a16:creationId xmlns:a16="http://schemas.microsoft.com/office/drawing/2014/main" id="{C2BDCF76-3712-4509-B162-972572EF9EFE}"/>
               </a:ext>
             </a:extLst>
           </p:cNvPr>
@@ -10340,7 +10936,7 @@
           <p:cNvPr id="11" name="">
             <a:extLst xmlns:a="http://schemas.openxmlformats.org/drawingml/2006/main">
               <a:ext uri="{FF2B5EF4-FFF2-40B4-BE49-F238E27FC236}">
-                <a16:creationId xmlns:a16="http://schemas.microsoft.com/office/drawing/2014/main" id="{41CE3B10-D835-477F-8E7D-8EA88ABA23D7}"/>
+                <a16:creationId xmlns:a16="http://schemas.microsoft.com/office/drawing/2014/main" id="{8B3532DA-7A70-4359-ABAD-C9305C26A3BE}"/>
               </a:ext>
             </a:extLst>
           </p:cNvPr>
@@ -10390,7 +10986,7 @@
           <p:cNvPr id="12" name="">
             <a:extLst xmlns:a="http://schemas.openxmlformats.org/drawingml/2006/main">
               <a:ext uri="{FF2B5EF4-FFF2-40B4-BE49-F238E27FC236}">
-                <a16:creationId xmlns:a16="http://schemas.microsoft.com/office/drawing/2014/main" id="{52E8D97D-6829-44DD-9F71-7A0CEC8C734C}"/>
+                <a16:creationId xmlns:a16="http://schemas.microsoft.com/office/drawing/2014/main" id="{80DFBDCD-9C40-410C-8249-656EAD215241}"/>
               </a:ext>
             </a:extLst>
           </p:cNvPr>
@@ -10440,7 +11036,7 @@
           <p:cNvPr id="13" name="">
             <a:extLst xmlns:a="http://schemas.openxmlformats.org/drawingml/2006/main">
               <a:ext uri="{FF2B5EF4-FFF2-40B4-BE49-F238E27FC236}">
-                <a16:creationId xmlns:a16="http://schemas.microsoft.com/office/drawing/2014/main" id="{C2469825-9590-4B08-8CD4-0E0FF9F45054}"/>
+                <a16:creationId xmlns:a16="http://schemas.microsoft.com/office/drawing/2014/main" id="{D560CDB1-F001-4AB2-915C-FFC0AFA9E451}"/>
               </a:ext>
             </a:extLst>
           </p:cNvPr>
@@ -10490,7 +11086,7 @@
           <p:cNvPr id="14" name="">
             <a:extLst xmlns:a="http://schemas.openxmlformats.org/drawingml/2006/main">
               <a:ext uri="{FF2B5EF4-FFF2-40B4-BE49-F238E27FC236}">
-                <a16:creationId xmlns:a16="http://schemas.microsoft.com/office/drawing/2014/main" id="{4DF8196E-D99F-4843-A54B-3D09BA8050A3}"/>
+                <a16:creationId xmlns:a16="http://schemas.microsoft.com/office/drawing/2014/main" id="{17CE9377-C5AB-49AF-93B1-F0BBB9C33879}"/>
               </a:ext>
             </a:extLst>
           </p:cNvPr>
@@ -10540,7 +11136,7 @@
           <p:cNvPr id="15" name="">
             <a:extLst xmlns:a="http://schemas.openxmlformats.org/drawingml/2006/main">
               <a:ext uri="{FF2B5EF4-FFF2-40B4-BE49-F238E27FC236}">
-                <a16:creationId xmlns:a16="http://schemas.microsoft.com/office/drawing/2014/main" id="{FD9C53D8-BE64-45AF-BAC0-1D674BBCF508}"/>
+                <a16:creationId xmlns:a16="http://schemas.microsoft.com/office/drawing/2014/main" id="{1D13D6D6-BBC3-4777-A7B0-440767603B4D}"/>
               </a:ext>
             </a:extLst>
           </p:cNvPr>
@@ -10590,7 +11186,7 @@
           <p:cNvPr id="16" name="">
             <a:extLst xmlns:a="http://schemas.openxmlformats.org/drawingml/2006/main">
               <a:ext uri="{FF2B5EF4-FFF2-40B4-BE49-F238E27FC236}">
-                <a16:creationId xmlns:a16="http://schemas.microsoft.com/office/drawing/2014/main" id="{97704677-7FDD-47F6-8354-2DEEB92F5BD7}"/>
+                <a16:creationId xmlns:a16="http://schemas.microsoft.com/office/drawing/2014/main" id="{0D2CDDFE-9206-4296-BD53-C3A470039DA1}"/>
               </a:ext>
             </a:extLst>
           </p:cNvPr>
@@ -10640,7 +11236,7 @@
           <p:cNvPr id="17" name="">
             <a:extLst xmlns:a="http://schemas.openxmlformats.org/drawingml/2006/main">
               <a:ext uri="{FF2B5EF4-FFF2-40B4-BE49-F238E27FC236}">
-                <a16:creationId xmlns:a16="http://schemas.microsoft.com/office/drawing/2014/main" id="{9EAD49E1-1F82-4721-ABE6-F9E34D968F48}"/>
+                <a16:creationId xmlns:a16="http://schemas.microsoft.com/office/drawing/2014/main" id="{61C51CCF-6147-4639-A18C-06AADAE3F6CA}"/>
               </a:ext>
             </a:extLst>
           </p:cNvPr>
@@ -10688,7 +11284,7 @@
     </p:spTree>
     <p:extLst>
       <p:ext uri="{BB962C8B-B14F-4D97-AF65-F5344CB8AC3E}">
-        <p14:creationId xmlns:p14="http://schemas.microsoft.com/office/powerpoint/2010/main" val="758190428"/>
+        <p14:creationId xmlns:p14="http://schemas.microsoft.com/office/powerpoint/2010/main" val="183952062"/>
       </p:ext>
     </p:extLst>
   </p:cSld>
@@ -10719,7 +11315,7 @@
           <p:cNvPr id="23" name="">
             <a:extLst xmlns:a="http://schemas.openxmlformats.org/drawingml/2006/main">
               <a:ext uri="{FF2B5EF4-FFF2-40B4-BE49-F238E27FC236}">
-                <a16:creationId xmlns:a16="http://schemas.microsoft.com/office/drawing/2014/main" id="{021B8F3D-8E49-4497-B87B-65E25198C509}"/>
+                <a16:creationId xmlns:a16="http://schemas.microsoft.com/office/drawing/2014/main" id="{3A7CE4D2-4448-4AA5-9A4A-801F0BDC54A5}"/>
               </a:ext>
             </a:extLst>
           </p:cNvPr>
@@ -10769,7 +11365,7 @@
           <p:cNvPr id="2" name="">
             <a:extLst xmlns:a="http://schemas.openxmlformats.org/drawingml/2006/main">
               <a:ext uri="{FF2B5EF4-FFF2-40B4-BE49-F238E27FC236}">
-                <a16:creationId xmlns:a16="http://schemas.microsoft.com/office/drawing/2014/main" id="{7A68878E-E243-4308-A905-798FCD38BBF6}"/>
+                <a16:creationId xmlns:a16="http://schemas.microsoft.com/office/drawing/2014/main" id="{3788832B-EA9C-44A6-BCC6-B7720300A051}"/>
               </a:ext>
             </a:extLst>
           </p:cNvPr>
@@ -10819,7 +11415,7 @@
           <p:cNvPr id="3" name="">
             <a:extLst xmlns:a="http://schemas.openxmlformats.org/drawingml/2006/main">
               <a:ext uri="{FF2B5EF4-FFF2-40B4-BE49-F238E27FC236}">
-                <a16:creationId xmlns:a16="http://schemas.microsoft.com/office/drawing/2014/main" id="{7FFC82AA-CF59-43BF-B59A-1D2446AD5CB0}"/>
+                <a16:creationId xmlns:a16="http://schemas.microsoft.com/office/drawing/2014/main" id="{CCFC8538-5A61-421E-BB47-E96B6055D6AF}"/>
               </a:ext>
             </a:extLst>
           </p:cNvPr>
@@ -10852,7 +11448,7 @@
           <p:cNvPr id="4" name="">
             <a:extLst xmlns:a="http://schemas.openxmlformats.org/drawingml/2006/main">
               <a:ext uri="{FF2B5EF4-FFF2-40B4-BE49-F238E27FC236}">
-                <a16:creationId xmlns:a16="http://schemas.microsoft.com/office/drawing/2014/main" id="{1E2AEB22-FF7C-4E27-A25C-1080081F36C7}"/>
+                <a16:creationId xmlns:a16="http://schemas.microsoft.com/office/drawing/2014/main" id="{0785F1A7-9898-403C-B114-EDC18FBAFB0F}"/>
               </a:ext>
             </a:extLst>
           </p:cNvPr>
@@ -10902,7 +11498,7 @@
           <p:cNvPr id="5" name="">
             <a:extLst xmlns:a="http://schemas.openxmlformats.org/drawingml/2006/main">
               <a:ext uri="{FF2B5EF4-FFF2-40B4-BE49-F238E27FC236}">
-                <a16:creationId xmlns:a16="http://schemas.microsoft.com/office/drawing/2014/main" id="{46B46644-B0F4-42BB-9338-9CE0CFF8FB92}"/>
+                <a16:creationId xmlns:a16="http://schemas.microsoft.com/office/drawing/2014/main" id="{5927C8DB-5187-42F3-BF8E-D958E7784EEE}"/>
               </a:ext>
             </a:extLst>
           </p:cNvPr>
@@ -10952,7 +11548,7 @@
           <p:cNvPr id="6" name="">
             <a:extLst xmlns:a="http://schemas.openxmlformats.org/drawingml/2006/main">
               <a:ext uri="{FF2B5EF4-FFF2-40B4-BE49-F238E27FC236}">
-                <a16:creationId xmlns:a16="http://schemas.microsoft.com/office/drawing/2014/main" id="{72747313-3B64-4B81-BF15-E4B8167B272B}"/>
+                <a16:creationId xmlns:a16="http://schemas.microsoft.com/office/drawing/2014/main" id="{BEF4E349-DA76-4C94-8769-BA9F3FE338E8}"/>
               </a:ext>
             </a:extLst>
           </p:cNvPr>
@@ -10985,7 +11581,7 @@
           <p:cNvPr id="7" name="">
             <a:extLst xmlns:a="http://schemas.openxmlformats.org/drawingml/2006/main">
               <a:ext uri="{FF2B5EF4-FFF2-40B4-BE49-F238E27FC236}">
-                <a16:creationId xmlns:a16="http://schemas.microsoft.com/office/drawing/2014/main" id="{23A648D8-D186-4856-85FF-48F4DFD00E75}"/>
+                <a16:creationId xmlns:a16="http://schemas.microsoft.com/office/drawing/2014/main" id="{060DABE3-89E1-414A-8085-B69218286CBE}"/>
               </a:ext>
             </a:extLst>
           </p:cNvPr>
@@ -11035,7 +11631,7 @@
           <p:cNvPr id="8" name="">
             <a:extLst xmlns:a="http://schemas.openxmlformats.org/drawingml/2006/main">
               <a:ext uri="{FF2B5EF4-FFF2-40B4-BE49-F238E27FC236}">
-                <a16:creationId xmlns:a16="http://schemas.microsoft.com/office/drawing/2014/main" id="{C7125655-CA33-4480-BAD7-0642B2686728}"/>
+                <a16:creationId xmlns:a16="http://schemas.microsoft.com/office/drawing/2014/main" id="{5DF4660B-2027-4196-B47F-133E1CCC6C64}"/>
               </a:ext>
             </a:extLst>
           </p:cNvPr>
@@ -11068,7 +11664,7 @@
           <p:cNvPr id="9" name="">
             <a:extLst xmlns:a="http://schemas.openxmlformats.org/drawingml/2006/main">
               <a:ext uri="{FF2B5EF4-FFF2-40B4-BE49-F238E27FC236}">
-                <a16:creationId xmlns:a16="http://schemas.microsoft.com/office/drawing/2014/main" id="{7BFF0B6F-E60F-41D3-B876-B83AB132548F}"/>
+                <a16:creationId xmlns:a16="http://schemas.microsoft.com/office/drawing/2014/main" id="{DC697707-15C4-4B05-B738-3C051D8FA4D5}"/>
               </a:ext>
             </a:extLst>
           </p:cNvPr>
@@ -11118,7 +11714,7 @@
           <p:cNvPr id="10" name="">
             <a:extLst xmlns:a="http://schemas.openxmlformats.org/drawingml/2006/main">
               <a:ext uri="{FF2B5EF4-FFF2-40B4-BE49-F238E27FC236}">
-                <a16:creationId xmlns:a16="http://schemas.microsoft.com/office/drawing/2014/main" id="{6A520738-1644-4440-91CC-32A7200A8F6A}"/>
+                <a16:creationId xmlns:a16="http://schemas.microsoft.com/office/drawing/2014/main" id="{00AD32A0-33E5-419E-A40D-22FAFE5537D8}"/>
               </a:ext>
             </a:extLst>
           </p:cNvPr>
@@ -11151,7 +11747,7 @@
           <p:cNvPr id="11" name="">
             <a:extLst xmlns:a="http://schemas.openxmlformats.org/drawingml/2006/main">
               <a:ext uri="{FF2B5EF4-FFF2-40B4-BE49-F238E27FC236}">
-                <a16:creationId xmlns:a16="http://schemas.microsoft.com/office/drawing/2014/main" id="{6C75B32B-A217-4FF5-8422-12C788A70DBD}"/>
+                <a16:creationId xmlns:a16="http://schemas.microsoft.com/office/drawing/2014/main" id="{CFDC68A7-040D-4A6B-98F3-CC50117A676C}"/>
               </a:ext>
             </a:extLst>
           </p:cNvPr>
@@ -11201,7 +11797,7 @@
           <p:cNvPr id="12" name="">
             <a:extLst xmlns:a="http://schemas.openxmlformats.org/drawingml/2006/main">
               <a:ext uri="{FF2B5EF4-FFF2-40B4-BE49-F238E27FC236}">
-                <a16:creationId xmlns:a16="http://schemas.microsoft.com/office/drawing/2014/main" id="{D0C64286-5E9D-4150-BD39-87EFD4D94615}"/>
+                <a16:creationId xmlns:a16="http://schemas.microsoft.com/office/drawing/2014/main" id="{95343B35-F9E2-435F-89B6-73AA0A4832C1}"/>
               </a:ext>
             </a:extLst>
           </p:cNvPr>
@@ -11234,7 +11830,7 @@
           <p:cNvPr id="13" name="">
             <a:extLst xmlns:a="http://schemas.openxmlformats.org/drawingml/2006/main">
               <a:ext uri="{FF2B5EF4-FFF2-40B4-BE49-F238E27FC236}">
-                <a16:creationId xmlns:a16="http://schemas.microsoft.com/office/drawing/2014/main" id="{6F79BE62-DF49-4686-9A7E-4588084093B5}"/>
+                <a16:creationId xmlns:a16="http://schemas.microsoft.com/office/drawing/2014/main" id="{F6D890BC-B961-4386-BC51-CDFFFCFD425E}"/>
               </a:ext>
             </a:extLst>
           </p:cNvPr>
@@ -11284,7 +11880,7 @@
           <p:cNvPr id="14" name="">
             <a:extLst xmlns:a="http://schemas.openxmlformats.org/drawingml/2006/main">
               <a:ext uri="{FF2B5EF4-FFF2-40B4-BE49-F238E27FC236}">
-                <a16:creationId xmlns:a16="http://schemas.microsoft.com/office/drawing/2014/main" id="{C28F4AAF-8769-44C9-81A7-229CBE9BE5A3}"/>
+                <a16:creationId xmlns:a16="http://schemas.microsoft.com/office/drawing/2014/main" id="{408FA0F1-FB28-4FFC-8853-D6AC37F986DF}"/>
               </a:ext>
             </a:extLst>
           </p:cNvPr>
@@ -11317,7 +11913,7 @@
           <p:cNvPr id="15" name="">
             <a:extLst xmlns:a="http://schemas.openxmlformats.org/drawingml/2006/main">
               <a:ext uri="{FF2B5EF4-FFF2-40B4-BE49-F238E27FC236}">
-                <a16:creationId xmlns:a16="http://schemas.microsoft.com/office/drawing/2014/main" id="{BE6041C7-0ACF-4544-924F-15AC20645B41}"/>
+                <a16:creationId xmlns:a16="http://schemas.microsoft.com/office/drawing/2014/main" id="{AD1F296D-0C29-4797-BE2B-5931DCAF50AA}"/>
               </a:ext>
             </a:extLst>
           </p:cNvPr>
@@ -11367,7 +11963,7 @@
           <p:cNvPr id="16" name="">
             <a:extLst xmlns:a="http://schemas.openxmlformats.org/drawingml/2006/main">
               <a:ext uri="{FF2B5EF4-FFF2-40B4-BE49-F238E27FC236}">
-                <a16:creationId xmlns:a16="http://schemas.microsoft.com/office/drawing/2014/main" id="{3E3CE7AF-A30B-4CAB-9E12-C2BCA595F603}"/>
+                <a16:creationId xmlns:a16="http://schemas.microsoft.com/office/drawing/2014/main" id="{C430839E-1304-4973-9CA9-B222F17D9DC7}"/>
               </a:ext>
             </a:extLst>
           </p:cNvPr>
@@ -11400,7 +11996,7 @@
           <p:cNvPr id="17" name="">
             <a:extLst xmlns:a="http://schemas.openxmlformats.org/drawingml/2006/main">
               <a:ext uri="{FF2B5EF4-FFF2-40B4-BE49-F238E27FC236}">
-                <a16:creationId xmlns:a16="http://schemas.microsoft.com/office/drawing/2014/main" id="{792871F1-EBFA-43FC-80BA-24A18E5BEB5A}"/>
+                <a16:creationId xmlns:a16="http://schemas.microsoft.com/office/drawing/2014/main" id="{0D3C0724-851A-4A1E-9B29-2934E29927E6}"/>
               </a:ext>
             </a:extLst>
           </p:cNvPr>
@@ -11450,7 +12046,7 @@
           <p:cNvPr id="18" name="">
             <a:extLst xmlns:a="http://schemas.openxmlformats.org/drawingml/2006/main">
               <a:ext uri="{FF2B5EF4-FFF2-40B4-BE49-F238E27FC236}">
-                <a16:creationId xmlns:a16="http://schemas.microsoft.com/office/drawing/2014/main" id="{8044997F-2A06-4C75-B06B-4D9EC5D150DE}"/>
+                <a16:creationId xmlns:a16="http://schemas.microsoft.com/office/drawing/2014/main" id="{4AABAD7F-259C-4AD1-9B9B-891219663977}"/>
               </a:ext>
             </a:extLst>
           </p:cNvPr>
@@ -11483,7 +12079,7 @@
           <p:cNvPr id="19" name="">
             <a:extLst xmlns:a="http://schemas.openxmlformats.org/drawingml/2006/main">
               <a:ext uri="{FF2B5EF4-FFF2-40B4-BE49-F238E27FC236}">
-                <a16:creationId xmlns:a16="http://schemas.microsoft.com/office/drawing/2014/main" id="{6BE0BE4E-4850-4C8C-A8ED-6BCDDE633E01}"/>
+                <a16:creationId xmlns:a16="http://schemas.microsoft.com/office/drawing/2014/main" id="{E69763C0-5A4B-476D-9A40-4E94F42A7842}"/>
               </a:ext>
             </a:extLst>
           </p:cNvPr>
@@ -11533,7 +12129,7 @@
           <p:cNvPr id="20" name="">
             <a:extLst xmlns:a="http://schemas.openxmlformats.org/drawingml/2006/main">
               <a:ext uri="{FF2B5EF4-FFF2-40B4-BE49-F238E27FC236}">
-                <a16:creationId xmlns:a16="http://schemas.microsoft.com/office/drawing/2014/main" id="{E27DE615-6FBA-48AB-8B05-14A09B6E8AA8}"/>
+                <a16:creationId xmlns:a16="http://schemas.microsoft.com/office/drawing/2014/main" id="{032D5379-E900-499B-BC2E-06D6C6FDEFF0}"/>
               </a:ext>
             </a:extLst>
           </p:cNvPr>
@@ -11566,7 +12162,7 @@
           <p:cNvPr id="21" name="">
             <a:extLst xmlns:a="http://schemas.openxmlformats.org/drawingml/2006/main">
               <a:ext uri="{FF2B5EF4-FFF2-40B4-BE49-F238E27FC236}">
-                <a16:creationId xmlns:a16="http://schemas.microsoft.com/office/drawing/2014/main" id="{E66DC162-A318-4DBC-94A3-D8896F58277D}"/>
+                <a16:creationId xmlns:a16="http://schemas.microsoft.com/office/drawing/2014/main" id="{17C4E5ED-4F63-4B65-8C8C-F237FCC574FA}"/>
               </a:ext>
             </a:extLst>
           </p:cNvPr>
@@ -11616,7 +12212,7 @@
           <p:cNvPr id="22" name="">
             <a:extLst xmlns:a="http://schemas.openxmlformats.org/drawingml/2006/main">
               <a:ext uri="{FF2B5EF4-FFF2-40B4-BE49-F238E27FC236}">
-                <a16:creationId xmlns:a16="http://schemas.microsoft.com/office/drawing/2014/main" id="{E54ED22F-D085-40A5-BD49-1B5FD8AB24CC}"/>
+                <a16:creationId xmlns:a16="http://schemas.microsoft.com/office/drawing/2014/main" id="{8156DA13-D7D0-4B27-8E2C-4349A1FC99C0}"/>
               </a:ext>
             </a:extLst>
           </p:cNvPr>
@@ -11664,7 +12260,7 @@
     </p:spTree>
     <p:extLst>
       <p:ext uri="{BB962C8B-B14F-4D97-AF65-F5344CB8AC3E}">
-        <p14:creationId xmlns:p14="http://schemas.microsoft.com/office/powerpoint/2010/main" val="40756242"/>
+        <p14:creationId xmlns:p14="http://schemas.microsoft.com/office/powerpoint/2010/main" val="686992095"/>
       </p:ext>
     </p:extLst>
   </p:cSld>
@@ -11695,7 +12291,7 @@
           <p:cNvPr id="16" name="">
             <a:extLst xmlns:a="http://schemas.openxmlformats.org/drawingml/2006/main">
               <a:ext uri="{FF2B5EF4-FFF2-40B4-BE49-F238E27FC236}">
-                <a16:creationId xmlns:a16="http://schemas.microsoft.com/office/drawing/2014/main" id="{5E1EE232-90C3-4385-A82D-58E6BE026FC4}"/>
+                <a16:creationId xmlns:a16="http://schemas.microsoft.com/office/drawing/2014/main" id="{0940FB28-C892-4353-8CAE-797E2690FBD5}"/>
               </a:ext>
             </a:extLst>
           </p:cNvPr>
@@ -11745,7 +12341,7 @@
           <p:cNvPr id="2" name="">
             <a:extLst xmlns:a="http://schemas.openxmlformats.org/drawingml/2006/main">
               <a:ext uri="{FF2B5EF4-FFF2-40B4-BE49-F238E27FC236}">
-                <a16:creationId xmlns:a16="http://schemas.microsoft.com/office/drawing/2014/main" id="{929738F4-2966-4AB6-9B0B-A7AF8CC6A89C}"/>
+                <a16:creationId xmlns:a16="http://schemas.microsoft.com/office/drawing/2014/main" id="{E02B2380-EF25-42B1-80E9-F6CFED1A3511}"/>
               </a:ext>
             </a:extLst>
           </p:cNvPr>
@@ -11795,7 +12391,7 @@
           <p:cNvPr id="3" name="">
             <a:extLst xmlns:a="http://schemas.openxmlformats.org/drawingml/2006/main">
               <a:ext uri="{FF2B5EF4-FFF2-40B4-BE49-F238E27FC236}">
-                <a16:creationId xmlns:a16="http://schemas.microsoft.com/office/drawing/2014/main" id="{61291F25-F84B-4875-8B12-5052D881BC70}"/>
+                <a16:creationId xmlns:a16="http://schemas.microsoft.com/office/drawing/2014/main" id="{E2A5454C-5D39-400B-8E71-0411B1F9C1F9}"/>
               </a:ext>
             </a:extLst>
           </p:cNvPr>
@@ -11828,7 +12424,7 @@
           <p:cNvPr id="4" name="">
             <a:extLst xmlns:a="http://schemas.openxmlformats.org/drawingml/2006/main">
               <a:ext uri="{FF2B5EF4-FFF2-40B4-BE49-F238E27FC236}">
-                <a16:creationId xmlns:a16="http://schemas.microsoft.com/office/drawing/2014/main" id="{587344A4-969D-47E0-8EB6-E9C8BB77B88D}"/>
+                <a16:creationId xmlns:a16="http://schemas.microsoft.com/office/drawing/2014/main" id="{00AE2B39-DC86-45CC-A2AB-8D86495ED1F6}"/>
               </a:ext>
             </a:extLst>
           </p:cNvPr>
@@ -11878,7 +12474,7 @@
           <p:cNvPr id="5" name="">
             <a:extLst xmlns:a="http://schemas.openxmlformats.org/drawingml/2006/main">
               <a:ext uri="{FF2B5EF4-FFF2-40B4-BE49-F238E27FC236}">
-                <a16:creationId xmlns:a16="http://schemas.microsoft.com/office/drawing/2014/main" id="{9C377BF4-2ECF-44DD-B7EA-30A908C67143}"/>
+                <a16:creationId xmlns:a16="http://schemas.microsoft.com/office/drawing/2014/main" id="{1B0B3C09-BE4D-4D8C-BF91-9B5BDBE8A3F3}"/>
               </a:ext>
             </a:extLst>
           </p:cNvPr>
@@ -11932,7 +12528,7 @@
           <p:nvPr/>
         </p:nvPicPr>
         <p:blipFill>
-          <a:blip xmlns:r="http://schemas.openxmlformats.org/officeDocument/2006/relationships" xmlns:a="http://schemas.openxmlformats.org/drawingml/2006/main" r:embed="R4ea7f42a2d2e4361"/>
+          <a:blip xmlns:r="http://schemas.openxmlformats.org/officeDocument/2006/relationships" xmlns:a="http://schemas.openxmlformats.org/drawingml/2006/main" r:embed="R1265e41abe3d4b5c"/>
           <a:stretch xmlns:a="http://schemas.openxmlformats.org/drawingml/2006/main"/>
         </p:blipFill>
         <p:spPr>
@@ -11950,7 +12546,7 @@
           <p:cNvPr id="7" name="">
             <a:extLst xmlns:a="http://schemas.openxmlformats.org/drawingml/2006/main">
               <a:ext uri="{FF2B5EF4-FFF2-40B4-BE49-F238E27FC236}">
-                <a16:creationId xmlns:a16="http://schemas.microsoft.com/office/drawing/2014/main" id="{996735B2-F4FF-4925-93F4-F5FD2734DE7C}"/>
+                <a16:creationId xmlns:a16="http://schemas.microsoft.com/office/drawing/2014/main" id="{E90F3AC2-4CE0-4A68-84A1-9C3FC426A2B9}"/>
               </a:ext>
             </a:extLst>
           </p:cNvPr>
@@ -11983,7 +12579,7 @@
           <p:cNvPr id="8" name="">
             <a:extLst xmlns:a="http://schemas.openxmlformats.org/drawingml/2006/main">
               <a:ext uri="{FF2B5EF4-FFF2-40B4-BE49-F238E27FC236}">
-                <a16:creationId xmlns:a16="http://schemas.microsoft.com/office/drawing/2014/main" id="{CEFACA60-0F4C-40F2-B1F6-0E8B9A613D61}"/>
+                <a16:creationId xmlns:a16="http://schemas.microsoft.com/office/drawing/2014/main" id="{8F0D697E-D12D-4C5C-96D7-41C10FDD4C4F}"/>
               </a:ext>
             </a:extLst>
           </p:cNvPr>
@@ -12033,7 +12629,7 @@
           <p:cNvPr id="9" name="">
             <a:extLst xmlns:a="http://schemas.openxmlformats.org/drawingml/2006/main">
               <a:ext uri="{FF2B5EF4-FFF2-40B4-BE49-F238E27FC236}">
-                <a16:creationId xmlns:a16="http://schemas.microsoft.com/office/drawing/2014/main" id="{75EC3075-2EFF-45C4-AB53-01F344BBA516}"/>
+                <a16:creationId xmlns:a16="http://schemas.microsoft.com/office/drawing/2014/main" id="{4BE27206-70D8-414D-AE2F-CA1CAD3505B4}"/>
               </a:ext>
             </a:extLst>
           </p:cNvPr>
@@ -12066,7 +12662,7 @@
           <p:cNvPr id="10" name="">
             <a:extLst xmlns:a="http://schemas.openxmlformats.org/drawingml/2006/main">
               <a:ext uri="{FF2B5EF4-FFF2-40B4-BE49-F238E27FC236}">
-                <a16:creationId xmlns:a16="http://schemas.microsoft.com/office/drawing/2014/main" id="{76908B80-A2C9-4E0D-824E-E6BBE70BEF69}"/>
+                <a16:creationId xmlns:a16="http://schemas.microsoft.com/office/drawing/2014/main" id="{C9AB662A-6358-49FE-A255-225441194816}"/>
               </a:ext>
             </a:extLst>
           </p:cNvPr>
@@ -12116,7 +12712,7 @@
           <p:cNvPr id="11" name="">
             <a:extLst xmlns:a="http://schemas.openxmlformats.org/drawingml/2006/main">
               <a:ext uri="{FF2B5EF4-FFF2-40B4-BE49-F238E27FC236}">
-                <a16:creationId xmlns:a16="http://schemas.microsoft.com/office/drawing/2014/main" id="{88B60C8C-C634-4673-B8B3-819391B35A62}"/>
+                <a16:creationId xmlns:a16="http://schemas.microsoft.com/office/drawing/2014/main" id="{0BD91C68-C431-462B-A1D0-47008FB3CFA2}"/>
               </a:ext>
             </a:extLst>
           </p:cNvPr>
@@ -12149,7 +12745,7 @@
           <p:cNvPr id="12" name="">
             <a:extLst xmlns:a="http://schemas.openxmlformats.org/drawingml/2006/main">
               <a:ext uri="{FF2B5EF4-FFF2-40B4-BE49-F238E27FC236}">
-                <a16:creationId xmlns:a16="http://schemas.microsoft.com/office/drawing/2014/main" id="{6B47EB92-40A6-4DC5-B3EF-89CAD5A30BB5}"/>
+                <a16:creationId xmlns:a16="http://schemas.microsoft.com/office/drawing/2014/main" id="{9811E884-5694-4FC4-8AD6-D50078B33D74}"/>
               </a:ext>
             </a:extLst>
           </p:cNvPr>
@@ -12199,7 +12795,7 @@
           <p:cNvPr id="13" name="">
             <a:extLst xmlns:a="http://schemas.openxmlformats.org/drawingml/2006/main">
               <a:ext uri="{FF2B5EF4-FFF2-40B4-BE49-F238E27FC236}">
-                <a16:creationId xmlns:a16="http://schemas.microsoft.com/office/drawing/2014/main" id="{9BA06AC8-A9EF-41D6-BF9B-93CD3B4F4F34}"/>
+                <a16:creationId xmlns:a16="http://schemas.microsoft.com/office/drawing/2014/main" id="{363E24F6-CD2E-4571-BAB0-F5448B3B245F}"/>
               </a:ext>
             </a:extLst>
           </p:cNvPr>
@@ -12232,7 +12828,7 @@
           <p:cNvPr id="14" name="">
             <a:extLst xmlns:a="http://schemas.openxmlformats.org/drawingml/2006/main">
               <a:ext uri="{FF2B5EF4-FFF2-40B4-BE49-F238E27FC236}">
-                <a16:creationId xmlns:a16="http://schemas.microsoft.com/office/drawing/2014/main" id="{2D70C128-0687-48B9-8A31-11B155AA4E09}"/>
+                <a16:creationId xmlns:a16="http://schemas.microsoft.com/office/drawing/2014/main" id="{3EA01083-9EBE-49F7-9938-85EC83A13BC2}"/>
               </a:ext>
             </a:extLst>
           </p:cNvPr>
@@ -12282,7 +12878,7 @@
           <p:cNvPr id="15" name="">
             <a:extLst xmlns:a="http://schemas.openxmlformats.org/drawingml/2006/main">
               <a:ext uri="{FF2B5EF4-FFF2-40B4-BE49-F238E27FC236}">
-                <a16:creationId xmlns:a16="http://schemas.microsoft.com/office/drawing/2014/main" id="{8C6E332A-F7D2-4107-A297-82F8F6CBD1D8}"/>
+                <a16:creationId xmlns:a16="http://schemas.microsoft.com/office/drawing/2014/main" id="{D828A660-4438-443C-A5E3-12B92C5C1431}"/>
               </a:ext>
             </a:extLst>
           </p:cNvPr>
@@ -12330,7 +12926,7 @@
     </p:spTree>
     <p:extLst>
       <p:ext uri="{BB962C8B-B14F-4D97-AF65-F5344CB8AC3E}">
-        <p14:creationId xmlns:p14="http://schemas.microsoft.com/office/powerpoint/2010/main" val="1468126465"/>
+        <p14:creationId xmlns:p14="http://schemas.microsoft.com/office/powerpoint/2010/main" val="993499560"/>
       </p:ext>
     </p:extLst>
   </p:cSld>
@@ -12361,7 +12957,7 @@
           <p:cNvPr id="7" name="">
             <a:extLst xmlns:a="http://schemas.openxmlformats.org/drawingml/2006/main">
               <a:ext uri="{FF2B5EF4-FFF2-40B4-BE49-F238E27FC236}">
-                <a16:creationId xmlns:a16="http://schemas.microsoft.com/office/drawing/2014/main" id="{936EE24E-BDE6-4629-A492-BD0AC5C027E7}"/>
+                <a16:creationId xmlns:a16="http://schemas.microsoft.com/office/drawing/2014/main" id="{8EB685A5-4BA8-468D-B902-784374889DD5}"/>
               </a:ext>
             </a:extLst>
           </p:cNvPr>
@@ -12411,7 +13007,7 @@
           <p:cNvPr id="2" name="">
             <a:extLst xmlns:a="http://schemas.openxmlformats.org/drawingml/2006/main">
               <a:ext uri="{FF2B5EF4-FFF2-40B4-BE49-F238E27FC236}">
-                <a16:creationId xmlns:a16="http://schemas.microsoft.com/office/drawing/2014/main" id="{36B24E1A-6836-446D-B97D-33FB2E095616}"/>
+                <a16:creationId xmlns:a16="http://schemas.microsoft.com/office/drawing/2014/main" id="{16877CB9-B9B2-44EF-AD23-A32678D1EDCC}"/>
               </a:ext>
             </a:extLst>
           </p:cNvPr>
@@ -12461,7 +13057,7 @@
           <p:cNvPr id="3" name="">
             <a:extLst xmlns:a="http://schemas.openxmlformats.org/drawingml/2006/main">
               <a:ext uri="{FF2B5EF4-FFF2-40B4-BE49-F238E27FC236}">
-                <a16:creationId xmlns:a16="http://schemas.microsoft.com/office/drawing/2014/main" id="{275B38CB-5A5B-4D70-92E2-99435B341AE3}"/>
+                <a16:creationId xmlns:a16="http://schemas.microsoft.com/office/drawing/2014/main" id="{8DD3A9B5-40F1-4785-841A-7CA565EA6D87}"/>
               </a:ext>
             </a:extLst>
           </p:cNvPr>
@@ -12494,7 +13090,7 @@
           <p:cNvPr id="4" name="">
             <a:extLst xmlns:a="http://schemas.openxmlformats.org/drawingml/2006/main">
               <a:ext uri="{FF2B5EF4-FFF2-40B4-BE49-F238E27FC236}">
-                <a16:creationId xmlns:a16="http://schemas.microsoft.com/office/drawing/2014/main" id="{66FED9A0-CF65-4B5A-B442-7A15BA9B1223}"/>
+                <a16:creationId xmlns:a16="http://schemas.microsoft.com/office/drawing/2014/main" id="{6478BB1E-53D0-450D-8FFC-381E1A81AA6E}"/>
               </a:ext>
             </a:extLst>
           </p:cNvPr>
@@ -12544,7 +13140,7 @@
           <p:cNvPr id="5" name="">
             <a:extLst xmlns:a="http://schemas.openxmlformats.org/drawingml/2006/main">
               <a:ext uri="{FF2B5EF4-FFF2-40B4-BE49-F238E27FC236}">
-                <a16:creationId xmlns:a16="http://schemas.microsoft.com/office/drawing/2014/main" id="{EAEFEDB3-B31B-49C7-ACD4-8226B719EA28}"/>
+                <a16:creationId xmlns:a16="http://schemas.microsoft.com/office/drawing/2014/main" id="{A8F52100-0853-4D84-9168-3845920BF227}"/>
               </a:ext>
             </a:extLst>
           </p:cNvPr>
@@ -12598,7 +13194,7 @@
           <p:nvPr/>
         </p:nvPicPr>
         <p:blipFill>
-          <a:blip xmlns:r="http://schemas.openxmlformats.org/officeDocument/2006/relationships" xmlns:a="http://schemas.openxmlformats.org/drawingml/2006/main" r:embed="R211a4ca5b35341ed"/>
+          <a:blip xmlns:r="http://schemas.openxmlformats.org/officeDocument/2006/relationships" xmlns:a="http://schemas.openxmlformats.org/drawingml/2006/main" r:embed="R2a340a1a908c44b1"/>
           <a:stretch xmlns:a="http://schemas.openxmlformats.org/drawingml/2006/main"/>
         </p:blipFill>
         <p:spPr>
@@ -12614,7 +13210,7 @@
     </p:spTree>
     <p:extLst>
       <p:ext uri="{BB962C8B-B14F-4D97-AF65-F5344CB8AC3E}">
-        <p14:creationId xmlns:p14="http://schemas.microsoft.com/office/powerpoint/2010/main" val="1683071804"/>
+        <p14:creationId xmlns:p14="http://schemas.microsoft.com/office/powerpoint/2010/main" val="693699376"/>
       </p:ext>
     </p:extLst>
   </p:cSld>
@@ -12645,7 +13241,7 @@
           <p:cNvPr id="20" name="">
             <a:extLst xmlns:a="http://schemas.openxmlformats.org/drawingml/2006/main">
               <a:ext uri="{FF2B5EF4-FFF2-40B4-BE49-F238E27FC236}">
-                <a16:creationId xmlns:a16="http://schemas.microsoft.com/office/drawing/2014/main" id="{33435AD2-E5C8-4405-AFA4-EDDBC7E31779}"/>
+                <a16:creationId xmlns:a16="http://schemas.microsoft.com/office/drawing/2014/main" id="{79586805-EF36-4B5C-A4CE-210E2701278C}"/>
               </a:ext>
             </a:extLst>
           </p:cNvPr>
@@ -12695,7 +13291,7 @@
           <p:cNvPr id="2" name="">
             <a:extLst xmlns:a="http://schemas.openxmlformats.org/drawingml/2006/main">
               <a:ext uri="{FF2B5EF4-FFF2-40B4-BE49-F238E27FC236}">
-                <a16:creationId xmlns:a16="http://schemas.microsoft.com/office/drawing/2014/main" id="{2BE05053-D177-447E-B8A1-79C114FE479D}"/>
+                <a16:creationId xmlns:a16="http://schemas.microsoft.com/office/drawing/2014/main" id="{AF43A09D-C65F-4C04-A032-A3FD791331A1}"/>
               </a:ext>
             </a:extLst>
           </p:cNvPr>
@@ -12745,7 +13341,7 @@
           <p:cNvPr id="3" name="">
             <a:extLst xmlns:a="http://schemas.openxmlformats.org/drawingml/2006/main">
               <a:ext uri="{FF2B5EF4-FFF2-40B4-BE49-F238E27FC236}">
-                <a16:creationId xmlns:a16="http://schemas.microsoft.com/office/drawing/2014/main" id="{833B56B8-2DA7-4B71-8B7E-A90C5CE85EE2}"/>
+                <a16:creationId xmlns:a16="http://schemas.microsoft.com/office/drawing/2014/main" id="{1B761F1A-2E4D-46E2-BB19-DD9DD6FCAD95}"/>
               </a:ext>
             </a:extLst>
           </p:cNvPr>
@@ -12778,7 +13374,7 @@
           <p:cNvPr id="4" name="">
             <a:extLst xmlns:a="http://schemas.openxmlformats.org/drawingml/2006/main">
               <a:ext uri="{FF2B5EF4-FFF2-40B4-BE49-F238E27FC236}">
-                <a16:creationId xmlns:a16="http://schemas.microsoft.com/office/drawing/2014/main" id="{E9EC5A30-E8F2-4AC4-96DE-76AA0B211C94}"/>
+                <a16:creationId xmlns:a16="http://schemas.microsoft.com/office/drawing/2014/main" id="{F56317DE-2517-435E-B571-BF750BD07AF7}"/>
               </a:ext>
             </a:extLst>
           </p:cNvPr>
@@ -12828,7 +13424,7 @@
           <p:cNvPr id="5" name="">
             <a:extLst xmlns:a="http://schemas.openxmlformats.org/drawingml/2006/main">
               <a:ext uri="{FF2B5EF4-FFF2-40B4-BE49-F238E27FC236}">
-                <a16:creationId xmlns:a16="http://schemas.microsoft.com/office/drawing/2014/main" id="{0C9AACCB-E13D-4494-948C-DDCAA6327CB8}"/>
+                <a16:creationId xmlns:a16="http://schemas.microsoft.com/office/drawing/2014/main" id="{74F0EA68-CDFF-463E-8302-C33B220EA559}"/>
               </a:ext>
             </a:extLst>
           </p:cNvPr>
@@ -12878,7 +13474,7 @@
           <p:cNvPr id="6" name="">
             <a:extLst xmlns:a="http://schemas.openxmlformats.org/drawingml/2006/main">
               <a:ext uri="{FF2B5EF4-FFF2-40B4-BE49-F238E27FC236}">
-                <a16:creationId xmlns:a16="http://schemas.microsoft.com/office/drawing/2014/main" id="{007C9643-E8A6-4980-9E5D-7724CB5B0075}"/>
+                <a16:creationId xmlns:a16="http://schemas.microsoft.com/office/drawing/2014/main" id="{73684B11-7363-4089-8CA5-9F548EC86AF4}"/>
               </a:ext>
             </a:extLst>
           </p:cNvPr>
@@ -12911,7 +13507,7 @@
           <p:cNvPr id="7" name="">
             <a:extLst xmlns:a="http://schemas.openxmlformats.org/drawingml/2006/main">
               <a:ext uri="{FF2B5EF4-FFF2-40B4-BE49-F238E27FC236}">
-                <a16:creationId xmlns:a16="http://schemas.microsoft.com/office/drawing/2014/main" id="{A9DDA7B9-95B9-4DC9-B372-57513D39DD42}"/>
+                <a16:creationId xmlns:a16="http://schemas.microsoft.com/office/drawing/2014/main" id="{77C8ADFC-AFD2-4285-AB85-E6BE158C5586}"/>
               </a:ext>
             </a:extLst>
           </p:cNvPr>
@@ -12961,7 +13557,7 @@
           <p:cNvPr id="8" name="">
             <a:extLst xmlns:a="http://schemas.openxmlformats.org/drawingml/2006/main">
               <a:ext uri="{FF2B5EF4-FFF2-40B4-BE49-F238E27FC236}">
-                <a16:creationId xmlns:a16="http://schemas.microsoft.com/office/drawing/2014/main" id="{DD558B22-D7C5-42BF-87D0-D8BC1603CACC}"/>
+                <a16:creationId xmlns:a16="http://schemas.microsoft.com/office/drawing/2014/main" id="{DF2A5B0D-D899-40E0-A09B-3136888B714A}"/>
               </a:ext>
             </a:extLst>
           </p:cNvPr>
@@ -13011,7 +13607,7 @@
           <p:cNvPr id="9" name="">
             <a:extLst xmlns:a="http://schemas.openxmlformats.org/drawingml/2006/main">
               <a:ext uri="{FF2B5EF4-FFF2-40B4-BE49-F238E27FC236}">
-                <a16:creationId xmlns:a16="http://schemas.microsoft.com/office/drawing/2014/main" id="{FDF54F5C-6044-44B7-9E0B-A4B50E289B26}"/>
+                <a16:creationId xmlns:a16="http://schemas.microsoft.com/office/drawing/2014/main" id="{452CEE58-99B7-4900-A31B-166FC9F3685B}"/>
               </a:ext>
             </a:extLst>
           </p:cNvPr>
@@ -13061,7 +13657,7 @@
           <p:cNvPr id="10" name="">
             <a:extLst xmlns:a="http://schemas.openxmlformats.org/drawingml/2006/main">
               <a:ext uri="{FF2B5EF4-FFF2-40B4-BE49-F238E27FC236}">
-                <a16:creationId xmlns:a16="http://schemas.microsoft.com/office/drawing/2014/main" id="{76B60127-F3A5-4F6C-8A5A-B81AF712761E}"/>
+                <a16:creationId xmlns:a16="http://schemas.microsoft.com/office/drawing/2014/main" id="{FAA573E1-5047-4C77-BCEC-39409F6B373E}"/>
               </a:ext>
             </a:extLst>
           </p:cNvPr>
@@ -13094,7 +13690,7 @@
           <p:cNvPr id="11" name="">
             <a:extLst xmlns:a="http://schemas.openxmlformats.org/drawingml/2006/main">
               <a:ext uri="{FF2B5EF4-FFF2-40B4-BE49-F238E27FC236}">
-                <a16:creationId xmlns:a16="http://schemas.microsoft.com/office/drawing/2014/main" id="{A8B5FB0E-0F51-4BE1-B65A-28B66ADC1421}"/>
+                <a16:creationId xmlns:a16="http://schemas.microsoft.com/office/drawing/2014/main" id="{DC1E0F6A-8C05-49F0-BBD3-1820F19B1EB8}"/>
               </a:ext>
             </a:extLst>
           </p:cNvPr>
@@ -13144,7 +13740,7 @@
           <p:cNvPr id="12" name="">
             <a:extLst xmlns:a="http://schemas.openxmlformats.org/drawingml/2006/main">
               <a:ext uri="{FF2B5EF4-FFF2-40B4-BE49-F238E27FC236}">
-                <a16:creationId xmlns:a16="http://schemas.microsoft.com/office/drawing/2014/main" id="{53821CE0-1B09-4B86-A676-C0BB6E8015BC}"/>
+                <a16:creationId xmlns:a16="http://schemas.microsoft.com/office/drawing/2014/main" id="{E607A74F-7B56-4FE9-9A5E-66567768C227}"/>
               </a:ext>
             </a:extLst>
           </p:cNvPr>
@@ -13194,7 +13790,7 @@
           <p:cNvPr id="13" name="">
             <a:extLst xmlns:a="http://schemas.openxmlformats.org/drawingml/2006/main">
               <a:ext uri="{FF2B5EF4-FFF2-40B4-BE49-F238E27FC236}">
-                <a16:creationId xmlns:a16="http://schemas.microsoft.com/office/drawing/2014/main" id="{0F4910B5-B669-4791-AA8E-2D13AE8A38F6}"/>
+                <a16:creationId xmlns:a16="http://schemas.microsoft.com/office/drawing/2014/main" id="{682A9314-FAE4-4A57-9C11-003AB7801585}"/>
               </a:ext>
             </a:extLst>
           </p:cNvPr>
@@ -13244,7 +13840,7 @@
           <p:cNvPr id="14" name="">
             <a:extLst xmlns:a="http://schemas.openxmlformats.org/drawingml/2006/main">
               <a:ext uri="{FF2B5EF4-FFF2-40B4-BE49-F238E27FC236}">
-                <a16:creationId xmlns:a16="http://schemas.microsoft.com/office/drawing/2014/main" id="{29841346-7737-45BB-8F36-05318E79FEE6}"/>
+                <a16:creationId xmlns:a16="http://schemas.microsoft.com/office/drawing/2014/main" id="{86F90A4F-B85E-45CD-8B60-FBC0C680ADFE}"/>
               </a:ext>
             </a:extLst>
           </p:cNvPr>
@@ -13294,7 +13890,7 @@
           <p:cNvPr id="15" name="">
             <a:extLst xmlns:a="http://schemas.openxmlformats.org/drawingml/2006/main">
               <a:ext uri="{FF2B5EF4-FFF2-40B4-BE49-F238E27FC236}">
-                <a16:creationId xmlns:a16="http://schemas.microsoft.com/office/drawing/2014/main" id="{AE56921B-04C4-4EE0-8BDD-7390D30DA1AC}"/>
+                <a16:creationId xmlns:a16="http://schemas.microsoft.com/office/drawing/2014/main" id="{0AB59B3F-0637-40C4-BEC6-C7CAD5C04E09}"/>
               </a:ext>
             </a:extLst>
           </p:cNvPr>
@@ -13327,7 +13923,7 @@
           <p:cNvPr id="16" name="">
             <a:extLst xmlns:a="http://schemas.openxmlformats.org/drawingml/2006/main">
               <a:ext uri="{FF2B5EF4-FFF2-40B4-BE49-F238E27FC236}">
-                <a16:creationId xmlns:a16="http://schemas.microsoft.com/office/drawing/2014/main" id="{169D789F-BD4B-40D8-AF8E-AA923F98C523}"/>
+                <a16:creationId xmlns:a16="http://schemas.microsoft.com/office/drawing/2014/main" id="{DA6EB2DC-7E51-42A3-BFCF-D9EB683F8C3A}"/>
               </a:ext>
             </a:extLst>
           </p:cNvPr>
@@ -13377,7 +13973,7 @@
           <p:cNvPr id="17" name="">
             <a:extLst xmlns:a="http://schemas.openxmlformats.org/drawingml/2006/main">
               <a:ext uri="{FF2B5EF4-FFF2-40B4-BE49-F238E27FC236}">
-                <a16:creationId xmlns:a16="http://schemas.microsoft.com/office/drawing/2014/main" id="{DCF6F615-7659-4F57-808B-3BFE55050F05}"/>
+                <a16:creationId xmlns:a16="http://schemas.microsoft.com/office/drawing/2014/main" id="{3D4CAB93-2436-42B9-B187-67C0E1F58F51}"/>
               </a:ext>
             </a:extLst>
           </p:cNvPr>
@@ -13410,7 +14006,7 @@
           <p:cNvPr id="18" name="">
             <a:extLst xmlns:a="http://schemas.openxmlformats.org/drawingml/2006/main">
               <a:ext uri="{FF2B5EF4-FFF2-40B4-BE49-F238E27FC236}">
-                <a16:creationId xmlns:a16="http://schemas.microsoft.com/office/drawing/2014/main" id="{4344FC97-1CD0-4B51-99E7-6708FE86C400}"/>
+                <a16:creationId xmlns:a16="http://schemas.microsoft.com/office/drawing/2014/main" id="{5F1DF77E-B823-4055-95AF-0156B8EDA69E}"/>
               </a:ext>
             </a:extLst>
           </p:cNvPr>
@@ -13460,7 +14056,7 @@
           <p:cNvPr id="19" name="">
             <a:extLst xmlns:a="http://schemas.openxmlformats.org/drawingml/2006/main">
               <a:ext uri="{FF2B5EF4-FFF2-40B4-BE49-F238E27FC236}">
-                <a16:creationId xmlns:a16="http://schemas.microsoft.com/office/drawing/2014/main" id="{8458DE03-83F1-4C1B-98F7-AC7386AF6CFB}"/>
+                <a16:creationId xmlns:a16="http://schemas.microsoft.com/office/drawing/2014/main" id="{C7A4A5F6-4947-4ADD-A114-2D6B45A48FE9}"/>
               </a:ext>
             </a:extLst>
           </p:cNvPr>
@@ -13508,7 +14104,3935 @@
     </p:spTree>
     <p:extLst>
       <p:ext uri="{BB962C8B-B14F-4D97-AF65-F5344CB8AC3E}">
-        <p14:creationId xmlns:p14="http://schemas.microsoft.com/office/powerpoint/2010/main" val="1930858624"/>
+        <p14:creationId xmlns:p14="http://schemas.microsoft.com/office/powerpoint/2010/main" val="1758359540"/>
+      </p:ext>
+    </p:extLst>
+  </p:cSld>
+</p:sld>
+</file>
+
+<file path=ppt/slides/slide23.xml><?xml version="1.0" encoding="utf-8"?>
+<p:sld xmlns:p="http://schemas.openxmlformats.org/presentationml/2006/main">
+  <p:cSld>
+    <p:bg>
+      <p:bgPr>
+        <a:solidFill xmlns:a="http://schemas.openxmlformats.org/drawingml/2006/main">
+          <a:srgbClr val="24364B"/>
+        </a:solidFill>
+      </p:bgPr>
+    </p:bg>
+    <p:spTree>
+      <p:nvGrpSpPr>
+        <p:cNvPr id="1" name=""/>
+        <p:cNvGrpSpPr/>
+        <p:nvPr/>
+      </p:nvGrpSpPr>
+      <p:grpSpPr>
+        <a:xfrm xmlns:a="http://schemas.openxmlformats.org/drawingml/2006/main"/>
+      </p:grpSpPr>
+      <p:sp>
+        <p:nvSpPr>
+          <p:cNvPr id="6" name="">
+            <a:extLst xmlns:a="http://schemas.openxmlformats.org/drawingml/2006/main">
+              <a:ext uri="{FF2B5EF4-FFF2-40B4-BE49-F238E27FC236}">
+                <a16:creationId xmlns:a16="http://schemas.microsoft.com/office/drawing/2014/main" id="{D0F5949B-0924-43E9-B817-345F400F6278}"/>
+              </a:ext>
+            </a:extLst>
+          </p:cNvPr>
+          <p:cNvSpPr>
+            <a:spLocks xmlns:a="http://schemas.openxmlformats.org/drawingml/2006/main" noGrp="1"/>
+          </p:cNvSpPr>
+          <p:nvPr/>
+        </p:nvSpPr>
+        <p:spPr>
+          <a:xfrm xmlns:a="http://schemas.openxmlformats.org/drawingml/2006/main">
+            <a:off x="685800" y="895350"/>
+            <a:ext cx="4000500" cy="285750"/>
+          </a:xfrm>
+          <a:prstGeom xmlns:a="http://schemas.openxmlformats.org/drawingml/2006/main" prst="rect">
+            <a:avLst/>
+          </a:prstGeom>
+          <a:noFill xmlns:a="http://schemas.openxmlformats.org/drawingml/2006/main"/>
+          <a:ln xmlns:a="http://schemas.openxmlformats.org/drawingml/2006/main" w="0">
+            <a:noFill/>
+            <a:prstDash val="solid"/>
+          </a:ln>
+        </p:spPr>
+        <p:txBody>
+          <a:bodyPr xmlns:a="http://schemas.openxmlformats.org/drawingml/2006/main" anchor="t"/>
+          <a:lstStyle xmlns:a="http://schemas.openxmlformats.org/drawingml/2006/main"/>
+          <a:p xmlns:a="http://schemas.openxmlformats.org/drawingml/2006/main">
+            <a:pPr algn="l">
+              <a:defRPr sz="1275" b="1">
+                <a:solidFill>
+                  <a:srgbClr val="D0EDFA"/>
+                </a:solidFill>
+              </a:defRPr>
+            </a:pPr>
+            <a:r>
+              <a:rPr sz="1275" b="1">
+                <a:solidFill>
+                  <a:srgbClr val="D0EDFA"/>
+                </a:solidFill>
+              </a:rPr>
+              <a:t>FOURTH MICROSCOPE</a:t>
+            </a:r>
+          </a:p>
+        </p:txBody>
+      </p:sp>
+      <p:sp>
+        <p:nvSpPr>
+          <p:cNvPr id="2" name="">
+            <a:extLst xmlns:a="http://schemas.openxmlformats.org/drawingml/2006/main">
+              <a:ext uri="{FF2B5EF4-FFF2-40B4-BE49-F238E27FC236}">
+                <a16:creationId xmlns:a16="http://schemas.microsoft.com/office/drawing/2014/main" id="{1767DA4D-AF2F-4D97-8E2D-46EC7BB25880}"/>
+              </a:ext>
+            </a:extLst>
+          </p:cNvPr>
+          <p:cNvSpPr>
+            <a:spLocks xmlns:a="http://schemas.openxmlformats.org/drawingml/2006/main" noGrp="1"/>
+          </p:cNvSpPr>
+          <p:nvPr/>
+        </p:nvSpPr>
+        <p:spPr>
+          <a:xfrm xmlns:a="http://schemas.openxmlformats.org/drawingml/2006/main">
+            <a:off x="685800" y="1619250"/>
+            <a:ext cx="9144000" cy="1619250"/>
+          </a:xfrm>
+          <a:prstGeom xmlns:a="http://schemas.openxmlformats.org/drawingml/2006/main" prst="rect">
+            <a:avLst/>
+          </a:prstGeom>
+          <a:noFill xmlns:a="http://schemas.openxmlformats.org/drawingml/2006/main"/>
+          <a:ln xmlns:a="http://schemas.openxmlformats.org/drawingml/2006/main" w="0">
+            <a:noFill/>
+            <a:prstDash val="solid"/>
+          </a:ln>
+        </p:spPr>
+        <p:txBody>
+          <a:bodyPr xmlns:a="http://schemas.openxmlformats.org/drawingml/2006/main" anchor="t"/>
+          <a:lstStyle xmlns:a="http://schemas.openxmlformats.org/drawingml/2006/main"/>
+          <a:p xmlns:a="http://schemas.openxmlformats.org/drawingml/2006/main">
+            <a:pPr algn="l">
+              <a:defRPr sz="4800" b="1">
+                <a:solidFill>
+                  <a:srgbClr val="FFFFFF"/>
+                </a:solidFill>
+              </a:defRPr>
+            </a:pPr>
+            <a:r>
+              <a:rPr sz="4800" b="1">
+                <a:solidFill>
+                  <a:srgbClr val="FFFFFF"/>
+                </a:solidFill>
+              </a:rPr>
+              <a:t>The candidate meets</a:t>
+            </a:r>
+          </a:p>
+          <a:p xmlns:a="http://schemas.openxmlformats.org/drawingml/2006/main">
+            <a:pPr algn="l">
+              <a:defRPr sz="4800" b="1">
+                <a:solidFill>
+                  <a:srgbClr val="FFFFFF"/>
+                </a:solidFill>
+              </a:defRPr>
+            </a:pPr>
+            <a:r>
+              <a:rPr sz="4800" b="1">
+                <a:solidFill>
+                  <a:srgbClr val="FFFFFF"/>
+                </a:solidFill>
+              </a:rPr>
+              <a:t>untouched time</a:t>
+            </a:r>
+          </a:p>
+        </p:txBody>
+      </p:sp>
+      <p:sp>
+        <p:nvSpPr>
+          <p:cNvPr id="3" name="">
+            <a:extLst xmlns:a="http://schemas.openxmlformats.org/drawingml/2006/main">
+              <a:ext uri="{FF2B5EF4-FFF2-40B4-BE49-F238E27FC236}">
+                <a16:creationId xmlns:a16="http://schemas.microsoft.com/office/drawing/2014/main" id="{FD66C9AC-BB6A-4CA4-8DF7-C048D10F77E0}"/>
+              </a:ext>
+            </a:extLst>
+          </p:cNvPr>
+          <p:cNvSpPr>
+            <a:spLocks xmlns:a="http://schemas.openxmlformats.org/drawingml/2006/main" noGrp="1"/>
+          </p:cNvSpPr>
+          <p:nvPr/>
+        </p:nvSpPr>
+        <p:spPr>
+          <a:xfrm xmlns:a="http://schemas.openxmlformats.org/drawingml/2006/main">
+            <a:off x="723900" y="3886200"/>
+            <a:ext cx="10287000" cy="1200150"/>
+          </a:xfrm>
+          <a:prstGeom xmlns:a="http://schemas.openxmlformats.org/drawingml/2006/main" prst="rect">
+            <a:avLst/>
+          </a:prstGeom>
+          <a:noFill xmlns:a="http://schemas.openxmlformats.org/drawingml/2006/main"/>
+          <a:ln xmlns:a="http://schemas.openxmlformats.org/drawingml/2006/main" w="0">
+            <a:noFill/>
+            <a:prstDash val="solid"/>
+          </a:ln>
+        </p:spPr>
+        <p:txBody>
+          <a:bodyPr xmlns:a="http://schemas.openxmlformats.org/drawingml/2006/main" anchor="t"/>
+          <a:lstStyle xmlns:a="http://schemas.openxmlformats.org/drawingml/2006/main"/>
+          <a:p xmlns:a="http://schemas.openxmlformats.org/drawingml/2006/main">
+            <a:pPr algn="l">
+              <a:defRPr sz="2025" b="0">
+                <a:solidFill>
+                  <a:srgbClr val="D0EDFA"/>
+                </a:solidFill>
+              </a:defRPr>
+            </a:pPr>
+            <a:r>
+              <a:rPr sz="2025" b="0">
+                <a:solidFill>
+                  <a:srgbClr val="D0EDFA"/>
+                </a:solidFill>
+              </a:rPr>
+              <a:t>The calm-pullback rebound rule is read once on 2024-01-02 through 2026-06-23. The signal, ATR% states, timing, 20-session hold, no-overlap rule, 10-bps cost, controls, and gates remain exactly frozen.</a:t>
+            </a:r>
+          </a:p>
+        </p:txBody>
+      </p:sp>
+      <p:sp>
+        <p:nvSpPr>
+          <p:cNvPr id="4" name="">
+            <a:extLst xmlns:a="http://schemas.openxmlformats.org/drawingml/2006/main">
+              <a:ext uri="{FF2B5EF4-FFF2-40B4-BE49-F238E27FC236}">
+                <a16:creationId xmlns:a16="http://schemas.microsoft.com/office/drawing/2014/main" id="{9A8CEF5C-E967-4BC2-BBBD-42A4C0583CBC}"/>
+              </a:ext>
+            </a:extLst>
+          </p:cNvPr>
+          <p:cNvSpPr>
+            <a:spLocks xmlns:a="http://schemas.openxmlformats.org/drawingml/2006/main" noGrp="1"/>
+          </p:cNvSpPr>
+          <p:nvPr/>
+        </p:nvSpPr>
+        <p:spPr>
+          <a:xfrm xmlns:a="http://schemas.openxmlformats.org/drawingml/2006/main">
+            <a:off x="723900" y="5734050"/>
+            <a:ext cx="8572500" cy="304800"/>
+          </a:xfrm>
+          <a:prstGeom xmlns:a="http://schemas.openxmlformats.org/drawingml/2006/main" prst="rect">
+            <a:avLst/>
+          </a:prstGeom>
+          <a:noFill xmlns:a="http://schemas.openxmlformats.org/drawingml/2006/main"/>
+          <a:ln xmlns:a="http://schemas.openxmlformats.org/drawingml/2006/main" w="0">
+            <a:noFill/>
+            <a:prstDash val="solid"/>
+          </a:ln>
+        </p:spPr>
+        <p:txBody>
+          <a:bodyPr xmlns:a="http://schemas.openxmlformats.org/drawingml/2006/main" anchor="t"/>
+          <a:lstStyle xmlns:a="http://schemas.openxmlformats.org/drawingml/2006/main"/>
+          <a:p xmlns:a="http://schemas.openxmlformats.org/drawingml/2006/main">
+            <a:pPr algn="l">
+              <a:defRPr sz="1500" b="1">
+                <a:solidFill>
+                  <a:srgbClr val="FFFFFF"/>
+                </a:solidFill>
+              </a:defRPr>
+            </a:pPr>
+            <a:r>
+              <a:rPr sz="1500" b="1">
+                <a:solidFill>
+                  <a:srgbClr val="FFFFFF"/>
+                </a:solidFill>
+              </a:rPr>
+              <a:t>This period is now evidence—not a new tuning surface.</a:t>
+            </a:r>
+          </a:p>
+        </p:txBody>
+      </p:sp>
+      <p:sp>
+        <p:nvSpPr>
+          <p:cNvPr id="5" name="">
+            <a:extLst xmlns:a="http://schemas.openxmlformats.org/drawingml/2006/main">
+              <a:ext uri="{FF2B5EF4-FFF2-40B4-BE49-F238E27FC236}">
+                <a16:creationId xmlns:a16="http://schemas.microsoft.com/office/drawing/2014/main" id="{5330F23A-C9ED-443E-A42E-0E1C19A80398}"/>
+              </a:ext>
+            </a:extLst>
+          </p:cNvPr>
+          <p:cNvSpPr>
+            <a:spLocks xmlns:a="http://schemas.openxmlformats.org/drawingml/2006/main" noGrp="1"/>
+          </p:cNvSpPr>
+          <p:nvPr/>
+        </p:nvSpPr>
+        <p:spPr>
+          <a:xfrm xmlns:a="http://schemas.openxmlformats.org/drawingml/2006/main">
+            <a:off x="10801350" y="6400800"/>
+            <a:ext cx="857250" cy="190500"/>
+          </a:xfrm>
+          <a:prstGeom xmlns:a="http://schemas.openxmlformats.org/drawingml/2006/main" prst="rect">
+            <a:avLst/>
+          </a:prstGeom>
+          <a:noFill xmlns:a="http://schemas.openxmlformats.org/drawingml/2006/main"/>
+          <a:ln xmlns:a="http://schemas.openxmlformats.org/drawingml/2006/main" w="0">
+            <a:noFill/>
+            <a:prstDash val="solid"/>
+          </a:ln>
+        </p:spPr>
+        <p:txBody>
+          <a:bodyPr xmlns:a="http://schemas.openxmlformats.org/drawingml/2006/main" anchor="t"/>
+          <a:lstStyle xmlns:a="http://schemas.openxmlformats.org/drawingml/2006/main"/>
+          <a:p xmlns:a="http://schemas.openxmlformats.org/drawingml/2006/main">
+            <a:pPr algn="r">
+              <a:defRPr sz="900" b="0">
+                <a:solidFill>
+                  <a:srgbClr val="D0EDFA"/>
+                </a:solidFill>
+              </a:defRPr>
+            </a:pPr>
+            <a:r>
+              <a:rPr sz="900" b="0">
+                <a:solidFill>
+                  <a:srgbClr val="D0EDFA"/>
+                </a:solidFill>
+              </a:rPr>
+              <a:t>23</a:t>
+            </a:r>
+          </a:p>
+        </p:txBody>
+      </p:sp>
+    </p:spTree>
+    <p:extLst>
+      <p:ext uri="{BB962C8B-B14F-4D97-AF65-F5344CB8AC3E}">
+        <p14:creationId xmlns:p14="http://schemas.microsoft.com/office/powerpoint/2010/main" val="1155405834"/>
+      </p:ext>
+    </p:extLst>
+  </p:cSld>
+</p:sld>
+</file>
+
+<file path=ppt/slides/slide24.xml><?xml version="1.0" encoding="utf-8"?>
+<p:sld xmlns:p="http://schemas.openxmlformats.org/presentationml/2006/main">
+  <p:cSld>
+    <p:bg>
+      <p:bgPr>
+        <a:solidFill xmlns:a="http://schemas.openxmlformats.org/drawingml/2006/main">
+          <a:srgbClr val="FFFFFF"/>
+        </a:solidFill>
+      </p:bgPr>
+    </p:bg>
+    <p:spTree>
+      <p:nvGrpSpPr>
+        <p:cNvPr id="1" name=""/>
+        <p:cNvGrpSpPr/>
+        <p:nvPr/>
+      </p:nvGrpSpPr>
+      <p:grpSpPr>
+        <a:xfrm xmlns:a="http://schemas.openxmlformats.org/drawingml/2006/main"/>
+      </p:grpSpPr>
+      <p:sp>
+        <p:nvSpPr>
+          <p:cNvPr id="17" name="">
+            <a:extLst xmlns:a="http://schemas.openxmlformats.org/drawingml/2006/main">
+              <a:ext uri="{FF2B5EF4-FFF2-40B4-BE49-F238E27FC236}">
+                <a16:creationId xmlns:a16="http://schemas.microsoft.com/office/drawing/2014/main" id="{AB49C526-81FA-46F0-801F-302304865E51}"/>
+              </a:ext>
+            </a:extLst>
+          </p:cNvPr>
+          <p:cNvSpPr>
+            <a:spLocks xmlns:a="http://schemas.openxmlformats.org/drawingml/2006/main" noGrp="1"/>
+          </p:cNvSpPr>
+          <p:nvPr/>
+        </p:nvSpPr>
+        <p:spPr>
+          <a:xfrm xmlns:a="http://schemas.openxmlformats.org/drawingml/2006/main">
+            <a:off x="457200" y="238125"/>
+            <a:ext cx="6191250" cy="190500"/>
+          </a:xfrm>
+          <a:prstGeom xmlns:a="http://schemas.openxmlformats.org/drawingml/2006/main" prst="rect">
+            <a:avLst/>
+          </a:prstGeom>
+          <a:noFill xmlns:a="http://schemas.openxmlformats.org/drawingml/2006/main"/>
+          <a:ln xmlns:a="http://schemas.openxmlformats.org/drawingml/2006/main" w="0">
+            <a:noFill/>
+            <a:prstDash val="solid"/>
+          </a:ln>
+        </p:spPr>
+        <p:txBody>
+          <a:bodyPr xmlns:a="http://schemas.openxmlformats.org/drawingml/2006/main" anchor="t"/>
+          <a:lstStyle xmlns:a="http://schemas.openxmlformats.org/drawingml/2006/main"/>
+          <a:p xmlns:a="http://schemas.openxmlformats.org/drawingml/2006/main">
+            <a:pPr algn="l">
+              <a:defRPr sz="1050" b="1">
+                <a:solidFill>
+                  <a:srgbClr val="667386"/>
+                </a:solidFill>
+              </a:defRPr>
+            </a:pPr>
+            <a:r>
+              <a:rPr sz="1050" b="1">
+                <a:solidFill>
+                  <a:srgbClr val="667386"/>
+                </a:solidFill>
+              </a:rPr>
+              <a:t>OPERATOR HYPOTHESIS LAB · NVDA CONFIRMATION</a:t>
+            </a:r>
+          </a:p>
+        </p:txBody>
+      </p:sp>
+      <p:sp>
+        <p:nvSpPr>
+          <p:cNvPr id="2" name="">
+            <a:extLst xmlns:a="http://schemas.openxmlformats.org/drawingml/2006/main">
+              <a:ext uri="{FF2B5EF4-FFF2-40B4-BE49-F238E27FC236}">
+                <a16:creationId xmlns:a16="http://schemas.microsoft.com/office/drawing/2014/main" id="{221802E1-475B-4295-9764-5D5105D83386}"/>
+              </a:ext>
+            </a:extLst>
+          </p:cNvPr>
+          <p:cNvSpPr>
+            <a:spLocks xmlns:a="http://schemas.openxmlformats.org/drawingml/2006/main" noGrp="1"/>
+          </p:cNvSpPr>
+          <p:nvPr/>
+        </p:nvSpPr>
+        <p:spPr>
+          <a:xfrm xmlns:a="http://schemas.openxmlformats.org/drawingml/2006/main">
+            <a:off x="457200" y="523875"/>
+            <a:ext cx="11049000" cy="590550"/>
+          </a:xfrm>
+          <a:prstGeom xmlns:a="http://schemas.openxmlformats.org/drawingml/2006/main" prst="rect">
+            <a:avLst/>
+          </a:prstGeom>
+          <a:noFill xmlns:a="http://schemas.openxmlformats.org/drawingml/2006/main"/>
+          <a:ln xmlns:a="http://schemas.openxmlformats.org/drawingml/2006/main" w="0">
+            <a:noFill/>
+            <a:prstDash val="solid"/>
+          </a:ln>
+        </p:spPr>
+        <p:txBody>
+          <a:bodyPr xmlns:a="http://schemas.openxmlformats.org/drawingml/2006/main" anchor="t"/>
+          <a:lstStyle xmlns:a="http://schemas.openxmlformats.org/drawingml/2006/main"/>
+          <a:p xmlns:a="http://schemas.openxmlformats.org/drawingml/2006/main">
+            <a:pPr algn="l">
+              <a:defRPr sz="2925" b="1">
+                <a:solidFill>
+                  <a:srgbClr val="000000"/>
+                </a:solidFill>
+              </a:defRPr>
+            </a:pPr>
+            <a:r>
+              <a:rPr sz="2925" b="1">
+                <a:solidFill>
+                  <a:srgbClr val="000000"/>
+                </a:solidFill>
+              </a:rPr>
+              <a:t>The TRAIN advantage does not replicate</a:t>
+            </a:r>
+          </a:p>
+        </p:txBody>
+      </p:sp>
+      <p:sp>
+        <p:nvSpPr>
+          <p:cNvPr id="3" name="">
+            <a:extLst xmlns:a="http://schemas.openxmlformats.org/drawingml/2006/main">
+              <a:ext uri="{FF2B5EF4-FFF2-40B4-BE49-F238E27FC236}">
+                <a16:creationId xmlns:a16="http://schemas.microsoft.com/office/drawing/2014/main" id="{D2C519F9-A4A5-4BBB-9470-A73A3EA56A38}"/>
+              </a:ext>
+            </a:extLst>
+          </p:cNvPr>
+          <p:cNvSpPr>
+            <a:spLocks xmlns:a="http://schemas.openxmlformats.org/drawingml/2006/main" noGrp="1"/>
+          </p:cNvSpPr>
+          <p:nvPr/>
+        </p:nvSpPr>
+        <p:spPr>
+          <a:xfrm xmlns:a="http://schemas.openxmlformats.org/drawingml/2006/main">
+            <a:off x="457200" y="1219200"/>
+            <a:ext cx="11277600" cy="19050"/>
+          </a:xfrm>
+          <a:prstGeom xmlns:a="http://schemas.openxmlformats.org/drawingml/2006/main" prst="rect">
+            <a:avLst/>
+          </a:prstGeom>
+          <a:solidFill xmlns:a="http://schemas.openxmlformats.org/drawingml/2006/main">
+            <a:srgbClr val="B8BCC4"/>
+          </a:solidFill>
+          <a:ln xmlns:a="http://schemas.openxmlformats.org/drawingml/2006/main" w="0">
+            <a:solidFill>
+              <a:srgbClr val="B8BCC4"/>
+            </a:solidFill>
+            <a:prstDash val="solid"/>
+          </a:ln>
+        </p:spPr>
+      </p:sp>
+      <p:sp>
+        <p:nvSpPr>
+          <p:cNvPr id="4" name="">
+            <a:extLst xmlns:a="http://schemas.openxmlformats.org/drawingml/2006/main">
+              <a:ext uri="{FF2B5EF4-FFF2-40B4-BE49-F238E27FC236}">
+                <a16:creationId xmlns:a16="http://schemas.microsoft.com/office/drawing/2014/main" id="{A3310BC7-6F14-4F11-AE78-F70D0B018BBD}"/>
+              </a:ext>
+            </a:extLst>
+          </p:cNvPr>
+          <p:cNvSpPr>
+            <a:spLocks xmlns:a="http://schemas.openxmlformats.org/drawingml/2006/main" noGrp="1"/>
+          </p:cNvSpPr>
+          <p:nvPr/>
+        </p:nvSpPr>
+        <p:spPr>
+          <a:xfrm xmlns:a="http://schemas.openxmlformats.org/drawingml/2006/main">
+            <a:off x="457200" y="6515100"/>
+            <a:ext cx="7810500" cy="161925"/>
+          </a:xfrm>
+          <a:prstGeom xmlns:a="http://schemas.openxmlformats.org/drawingml/2006/main" prst="rect">
+            <a:avLst/>
+          </a:prstGeom>
+          <a:noFill xmlns:a="http://schemas.openxmlformats.org/drawingml/2006/main"/>
+          <a:ln xmlns:a="http://schemas.openxmlformats.org/drawingml/2006/main" w="0">
+            <a:noFill/>
+            <a:prstDash val="solid"/>
+          </a:ln>
+        </p:spPr>
+        <p:txBody>
+          <a:bodyPr xmlns:a="http://schemas.openxmlformats.org/drawingml/2006/main" anchor="t"/>
+          <a:lstStyle xmlns:a="http://schemas.openxmlformats.org/drawingml/2006/main"/>
+          <a:p xmlns:a="http://schemas.openxmlformats.org/drawingml/2006/main">
+            <a:pPr algn="l">
+              <a:defRPr sz="900" b="0">
+                <a:solidFill>
+                  <a:srgbClr val="667386"/>
+                </a:solidFill>
+              </a:defRPr>
+            </a:pPr>
+            <a:r>
+              <a:rPr sz="900" b="0">
+                <a:solidFill>
+                  <a:srgbClr val="667386"/>
+                </a:solidFill>
+              </a:rPr>
+              <a:t>One-shot untouched time · adjusted daily bars · frozen 2024-01-02–2026-06-23</a:t>
+            </a:r>
+          </a:p>
+        </p:txBody>
+      </p:sp>
+      <p:sp>
+        <p:nvSpPr>
+          <p:cNvPr id="5" name="">
+            <a:extLst xmlns:a="http://schemas.openxmlformats.org/drawingml/2006/main">
+              <a:ext uri="{FF2B5EF4-FFF2-40B4-BE49-F238E27FC236}">
+                <a16:creationId xmlns:a16="http://schemas.microsoft.com/office/drawing/2014/main" id="{02977FFC-B22B-424D-A671-8736F162C767}"/>
+              </a:ext>
+            </a:extLst>
+          </p:cNvPr>
+          <p:cNvSpPr>
+            <a:spLocks xmlns:a="http://schemas.openxmlformats.org/drawingml/2006/main" noGrp="1"/>
+          </p:cNvSpPr>
+          <p:nvPr/>
+        </p:nvSpPr>
+        <p:spPr>
+          <a:xfrm xmlns:a="http://schemas.openxmlformats.org/drawingml/2006/main">
+            <a:off x="10858500" y="6496050"/>
+            <a:ext cx="876300" cy="171450"/>
+          </a:xfrm>
+          <a:prstGeom xmlns:a="http://schemas.openxmlformats.org/drawingml/2006/main" prst="rect">
+            <a:avLst/>
+          </a:prstGeom>
+          <a:noFill xmlns:a="http://schemas.openxmlformats.org/drawingml/2006/main"/>
+          <a:ln xmlns:a="http://schemas.openxmlformats.org/drawingml/2006/main" w="0">
+            <a:noFill/>
+            <a:prstDash val="solid"/>
+          </a:ln>
+        </p:spPr>
+        <p:txBody>
+          <a:bodyPr xmlns:a="http://schemas.openxmlformats.org/drawingml/2006/main" anchor="t"/>
+          <a:lstStyle xmlns:a="http://schemas.openxmlformats.org/drawingml/2006/main"/>
+          <a:p xmlns:a="http://schemas.openxmlformats.org/drawingml/2006/main">
+            <a:pPr algn="r">
+              <a:defRPr sz="900" b="0">
+                <a:solidFill>
+                  <a:srgbClr val="667386"/>
+                </a:solidFill>
+              </a:defRPr>
+            </a:pPr>
+            <a:r>
+              <a:rPr sz="900" b="0">
+                <a:solidFill>
+                  <a:srgbClr val="667386"/>
+                </a:solidFill>
+              </a:rPr>
+              <a:t>24</a:t>
+            </a:r>
+          </a:p>
+        </p:txBody>
+      </p:sp>
+      <p:pic>
+        <p:nvPicPr>
+          <p:cNvPr id="22" name=""/>
+          <p:cNvPicPr>
+            <a:picLocks xmlns:a="http://schemas.openxmlformats.org/drawingml/2006/main" noChangeAspect="1"/>
+          </p:cNvPicPr>
+          <p:nvPr/>
+        </p:nvPicPr>
+        <p:blipFill>
+          <a:blip xmlns:r="http://schemas.openxmlformats.org/officeDocument/2006/relationships" xmlns:a="http://schemas.openxmlformats.org/drawingml/2006/main" r:embed="R2d52523dc3b24a4b"/>
+          <a:stretch xmlns:a="http://schemas.openxmlformats.org/drawingml/2006/main"/>
+        </p:blipFill>
+        <p:spPr>
+          <a:xfrm xmlns:a="http://schemas.openxmlformats.org/drawingml/2006/main">
+            <a:off x="342900" y="1427451"/>
+            <a:ext cx="8096250" cy="4784148"/>
+          </a:xfrm>
+          <a:prstGeom xmlns:a="http://schemas.openxmlformats.org/drawingml/2006/main" prst="rect">
+            <a:avLst/>
+          </a:prstGeom>
+        </p:spPr>
+      </p:pic>
+      <p:sp>
+        <p:nvSpPr>
+          <p:cNvPr id="7" name="">
+            <a:extLst xmlns:a="http://schemas.openxmlformats.org/drawingml/2006/main">
+              <a:ext uri="{FF2B5EF4-FFF2-40B4-BE49-F238E27FC236}">
+                <a16:creationId xmlns:a16="http://schemas.microsoft.com/office/drawing/2014/main" id="{499B3E80-6C90-46BB-99E1-143CF0BDA296}"/>
+              </a:ext>
+            </a:extLst>
+          </p:cNvPr>
+          <p:cNvSpPr>
+            <a:spLocks xmlns:a="http://schemas.openxmlformats.org/drawingml/2006/main" noGrp="1"/>
+          </p:cNvSpPr>
+          <p:nvPr/>
+        </p:nvSpPr>
+        <p:spPr>
+          <a:xfrm xmlns:a="http://schemas.openxmlformats.org/drawingml/2006/main">
+            <a:off x="8667750" y="1504950"/>
+            <a:ext cx="2971800" cy="4457700"/>
+          </a:xfrm>
+          <a:prstGeom xmlns:a="http://schemas.openxmlformats.org/drawingml/2006/main" prst="rect">
+            <a:avLst/>
+          </a:prstGeom>
+          <a:solidFill xmlns:a="http://schemas.openxmlformats.org/drawingml/2006/main">
+            <a:srgbClr val="F6E5E1"/>
+          </a:solidFill>
+          <a:ln xmlns:a="http://schemas.openxmlformats.org/drawingml/2006/main" w="0">
+            <a:solidFill>
+              <a:srgbClr val="F6E5E1"/>
+            </a:solidFill>
+            <a:prstDash val="solid"/>
+          </a:ln>
+        </p:spPr>
+      </p:sp>
+      <p:sp>
+        <p:nvSpPr>
+          <p:cNvPr id="8" name="">
+            <a:extLst xmlns:a="http://schemas.openxmlformats.org/drawingml/2006/main">
+              <a:ext uri="{FF2B5EF4-FFF2-40B4-BE49-F238E27FC236}">
+                <a16:creationId xmlns:a16="http://schemas.microsoft.com/office/drawing/2014/main" id="{0C7D3911-9FE0-4686-AE14-E50AC9B0A7ED}"/>
+              </a:ext>
+            </a:extLst>
+          </p:cNvPr>
+          <p:cNvSpPr>
+            <a:spLocks xmlns:a="http://schemas.openxmlformats.org/drawingml/2006/main" noGrp="1"/>
+          </p:cNvSpPr>
+          <p:nvPr/>
+        </p:nvSpPr>
+        <p:spPr>
+          <a:xfrm xmlns:a="http://schemas.openxmlformats.org/drawingml/2006/main">
+            <a:off x="8934450" y="1771650"/>
+            <a:ext cx="2438400" cy="419100"/>
+          </a:xfrm>
+          <a:prstGeom xmlns:a="http://schemas.openxmlformats.org/drawingml/2006/main" prst="rect">
+            <a:avLst/>
+          </a:prstGeom>
+          <a:noFill xmlns:a="http://schemas.openxmlformats.org/drawingml/2006/main"/>
+          <a:ln xmlns:a="http://schemas.openxmlformats.org/drawingml/2006/main" w="0">
+            <a:noFill/>
+            <a:prstDash val="solid"/>
+          </a:ln>
+        </p:spPr>
+        <p:txBody>
+          <a:bodyPr xmlns:a="http://schemas.openxmlformats.org/drawingml/2006/main" anchor="t"/>
+          <a:lstStyle xmlns:a="http://schemas.openxmlformats.org/drawingml/2006/main"/>
+          <a:p xmlns:a="http://schemas.openxmlformats.org/drawingml/2006/main">
+            <a:pPr algn="l">
+              <a:defRPr sz="2550" b="1">
+                <a:solidFill>
+                  <a:srgbClr val="B44738"/>
+                </a:solidFill>
+              </a:defRPr>
+            </a:pPr>
+            <a:r>
+              <a:rPr sz="2550" b="1">
+                <a:solidFill>
+                  <a:srgbClr val="B44738"/>
+                </a:solidFill>
+              </a:rPr>
+              <a:t>STOP</a:t>
+            </a:r>
+          </a:p>
+        </p:txBody>
+      </p:sp>
+      <p:sp>
+        <p:nvSpPr>
+          <p:cNvPr id="9" name="">
+            <a:extLst xmlns:a="http://schemas.openxmlformats.org/drawingml/2006/main">
+              <a:ext uri="{FF2B5EF4-FFF2-40B4-BE49-F238E27FC236}">
+                <a16:creationId xmlns:a16="http://schemas.microsoft.com/office/drawing/2014/main" id="{8E3E6BDE-B50F-47D3-BBE5-0797DD66F95A}"/>
+              </a:ext>
+            </a:extLst>
+          </p:cNvPr>
+          <p:cNvSpPr>
+            <a:spLocks xmlns:a="http://schemas.openxmlformats.org/drawingml/2006/main" noGrp="1"/>
+          </p:cNvSpPr>
+          <p:nvPr/>
+        </p:nvSpPr>
+        <p:spPr>
+          <a:xfrm xmlns:a="http://schemas.openxmlformats.org/drawingml/2006/main">
+            <a:off x="8934450" y="2362200"/>
+            <a:ext cx="2438400" cy="514350"/>
+          </a:xfrm>
+          <a:prstGeom xmlns:a="http://schemas.openxmlformats.org/drawingml/2006/main" prst="rect">
+            <a:avLst/>
+          </a:prstGeom>
+          <a:noFill xmlns:a="http://schemas.openxmlformats.org/drawingml/2006/main"/>
+          <a:ln xmlns:a="http://schemas.openxmlformats.org/drawingml/2006/main" w="0">
+            <a:noFill/>
+            <a:prstDash val="solid"/>
+          </a:ln>
+        </p:spPr>
+        <p:txBody>
+          <a:bodyPr xmlns:a="http://schemas.openxmlformats.org/drawingml/2006/main" anchor="t"/>
+          <a:lstStyle xmlns:a="http://schemas.openxmlformats.org/drawingml/2006/main"/>
+          <a:p xmlns:a="http://schemas.openxmlformats.org/drawingml/2006/main">
+            <a:pPr algn="l">
+              <a:defRPr sz="3150" b="1">
+                <a:solidFill>
+                  <a:srgbClr val="000000"/>
+                </a:solidFill>
+              </a:defRPr>
+            </a:pPr>
+            <a:r>
+              <a:rPr sz="3150" b="1">
+                <a:solidFill>
+                  <a:srgbClr val="000000"/>
+                </a:solidFill>
+              </a:rPr>
+              <a:t>1.56%</a:t>
+            </a:r>
+          </a:p>
+        </p:txBody>
+      </p:sp>
+      <p:sp>
+        <p:nvSpPr>
+          <p:cNvPr id="10" name="">
+            <a:extLst xmlns:a="http://schemas.openxmlformats.org/drawingml/2006/main">
+              <a:ext uri="{FF2B5EF4-FFF2-40B4-BE49-F238E27FC236}">
+                <a16:creationId xmlns:a16="http://schemas.microsoft.com/office/drawing/2014/main" id="{0EAEB9D9-D3FE-45DA-BD96-1C8E67F5296E}"/>
+              </a:ext>
+            </a:extLst>
+          </p:cNvPr>
+          <p:cNvSpPr>
+            <a:spLocks xmlns:a="http://schemas.openxmlformats.org/drawingml/2006/main" noGrp="1"/>
+          </p:cNvSpPr>
+          <p:nvPr/>
+        </p:nvSpPr>
+        <p:spPr>
+          <a:xfrm xmlns:a="http://schemas.openxmlformats.org/drawingml/2006/main">
+            <a:off x="8934450" y="2876550"/>
+            <a:ext cx="2438400" cy="266700"/>
+          </a:xfrm>
+          <a:prstGeom xmlns:a="http://schemas.openxmlformats.org/drawingml/2006/main" prst="rect">
+            <a:avLst/>
+          </a:prstGeom>
+          <a:noFill xmlns:a="http://schemas.openxmlformats.org/drawingml/2006/main"/>
+          <a:ln xmlns:a="http://schemas.openxmlformats.org/drawingml/2006/main" w="0">
+            <a:noFill/>
+            <a:prstDash val="solid"/>
+          </a:ln>
+        </p:spPr>
+        <p:txBody>
+          <a:bodyPr xmlns:a="http://schemas.openxmlformats.org/drawingml/2006/main" anchor="t"/>
+          <a:lstStyle xmlns:a="http://schemas.openxmlformats.org/drawingml/2006/main"/>
+          <a:p xmlns:a="http://schemas.openxmlformats.org/drawingml/2006/main">
+            <a:pPr algn="l">
+              <a:defRPr sz="1275" b="1">
+                <a:solidFill>
+                  <a:srgbClr val="24364B"/>
+                </a:solidFill>
+              </a:defRPr>
+            </a:pPr>
+            <a:r>
+              <a:rPr sz="1275" b="1">
+                <a:solidFill>
+                  <a:srgbClr val="24364B"/>
+                </a:solidFill>
+              </a:rPr>
+              <a:t>confirmation mean net</a:t>
+            </a:r>
+          </a:p>
+        </p:txBody>
+      </p:sp>
+      <p:sp>
+        <p:nvSpPr>
+          <p:cNvPr id="11" name="">
+            <a:extLst xmlns:a="http://schemas.openxmlformats.org/drawingml/2006/main">
+              <a:ext uri="{FF2B5EF4-FFF2-40B4-BE49-F238E27FC236}">
+                <a16:creationId xmlns:a16="http://schemas.microsoft.com/office/drawing/2014/main" id="{A53FC7DF-E6F4-4462-B66A-1189D6BE3773}"/>
+              </a:ext>
+            </a:extLst>
+          </p:cNvPr>
+          <p:cNvSpPr>
+            <a:spLocks xmlns:a="http://schemas.openxmlformats.org/drawingml/2006/main" noGrp="1"/>
+          </p:cNvSpPr>
+          <p:nvPr/>
+        </p:nvSpPr>
+        <p:spPr>
+          <a:xfrm xmlns:a="http://schemas.openxmlformats.org/drawingml/2006/main">
+            <a:off x="8934450" y="3533775"/>
+            <a:ext cx="85725" cy="85725"/>
+          </a:xfrm>
+          <a:prstGeom xmlns:a="http://schemas.openxmlformats.org/drawingml/2006/main" prst="rect">
+            <a:avLst/>
+          </a:prstGeom>
+          <a:solidFill xmlns:a="http://schemas.openxmlformats.org/drawingml/2006/main">
+            <a:srgbClr val="B44738"/>
+          </a:solidFill>
+          <a:ln xmlns:a="http://schemas.openxmlformats.org/drawingml/2006/main" w="0">
+            <a:solidFill>
+              <a:srgbClr val="B44738"/>
+            </a:solidFill>
+            <a:prstDash val="solid"/>
+          </a:ln>
+        </p:spPr>
+      </p:sp>
+      <p:sp>
+        <p:nvSpPr>
+          <p:cNvPr id="12" name="">
+            <a:extLst xmlns:a="http://schemas.openxmlformats.org/drawingml/2006/main">
+              <a:ext uri="{FF2B5EF4-FFF2-40B4-BE49-F238E27FC236}">
+                <a16:creationId xmlns:a16="http://schemas.microsoft.com/office/drawing/2014/main" id="{D0B3ACAE-45A6-402B-BAD0-9FECA8311E15}"/>
+              </a:ext>
+            </a:extLst>
+          </p:cNvPr>
+          <p:cNvSpPr>
+            <a:spLocks xmlns:a="http://schemas.openxmlformats.org/drawingml/2006/main" noGrp="1"/>
+          </p:cNvSpPr>
+          <p:nvPr/>
+        </p:nvSpPr>
+        <p:spPr>
+          <a:xfrm xmlns:a="http://schemas.openxmlformats.org/drawingml/2006/main">
+            <a:off x="9163050" y="3448050"/>
+            <a:ext cx="2171700" cy="533400"/>
+          </a:xfrm>
+          <a:prstGeom xmlns:a="http://schemas.openxmlformats.org/drawingml/2006/main" prst="rect">
+            <a:avLst/>
+          </a:prstGeom>
+          <a:noFill xmlns:a="http://schemas.openxmlformats.org/drawingml/2006/main"/>
+          <a:ln xmlns:a="http://schemas.openxmlformats.org/drawingml/2006/main" w="0">
+            <a:noFill/>
+            <a:prstDash val="solid"/>
+          </a:ln>
+        </p:spPr>
+        <p:txBody>
+          <a:bodyPr xmlns:a="http://schemas.openxmlformats.org/drawingml/2006/main" anchor="t"/>
+          <a:lstStyle xmlns:a="http://schemas.openxmlformats.org/drawingml/2006/main"/>
+          <a:p xmlns:a="http://schemas.openxmlformats.org/drawingml/2006/main">
+            <a:pPr algn="l">
+              <a:defRPr sz="1350" b="0">
+                <a:solidFill>
+                  <a:srgbClr val="24364B"/>
+                </a:solidFill>
+              </a:defRPr>
+            </a:pPr>
+            <a:r>
+              <a:rPr sz="1350" b="0">
+                <a:solidFill>
+                  <a:srgbClr val="24364B"/>
+                </a:solidFill>
+              </a:rPr>
+              <a:t>9 trades; minimum gate was 10</a:t>
+            </a:r>
+          </a:p>
+        </p:txBody>
+      </p:sp>
+      <p:sp>
+        <p:nvSpPr>
+          <p:cNvPr id="13" name="">
+            <a:extLst xmlns:a="http://schemas.openxmlformats.org/drawingml/2006/main">
+              <a:ext uri="{FF2B5EF4-FFF2-40B4-BE49-F238E27FC236}">
+                <a16:creationId xmlns:a16="http://schemas.microsoft.com/office/drawing/2014/main" id="{2F10E725-1E84-42D3-A07B-8E76E3EDB3C0}"/>
+              </a:ext>
+            </a:extLst>
+          </p:cNvPr>
+          <p:cNvSpPr>
+            <a:spLocks xmlns:a="http://schemas.openxmlformats.org/drawingml/2006/main" noGrp="1"/>
+          </p:cNvSpPr>
+          <p:nvPr/>
+        </p:nvSpPr>
+        <p:spPr>
+          <a:xfrm xmlns:a="http://schemas.openxmlformats.org/drawingml/2006/main">
+            <a:off x="8934450" y="4181475"/>
+            <a:ext cx="85725" cy="85725"/>
+          </a:xfrm>
+          <a:prstGeom xmlns:a="http://schemas.openxmlformats.org/drawingml/2006/main" prst="rect">
+            <a:avLst/>
+          </a:prstGeom>
+          <a:solidFill xmlns:a="http://schemas.openxmlformats.org/drawingml/2006/main">
+            <a:srgbClr val="B44738"/>
+          </a:solidFill>
+          <a:ln xmlns:a="http://schemas.openxmlformats.org/drawingml/2006/main" w="0">
+            <a:solidFill>
+              <a:srgbClr val="B44738"/>
+            </a:solidFill>
+            <a:prstDash val="solid"/>
+          </a:ln>
+        </p:spPr>
+      </p:sp>
+      <p:sp>
+        <p:nvSpPr>
+          <p:cNvPr id="14" name="">
+            <a:extLst xmlns:a="http://schemas.openxmlformats.org/drawingml/2006/main">
+              <a:ext uri="{FF2B5EF4-FFF2-40B4-BE49-F238E27FC236}">
+                <a16:creationId xmlns:a16="http://schemas.microsoft.com/office/drawing/2014/main" id="{9B8B5237-E939-40A3-87EB-A81D7AB21CB1}"/>
+              </a:ext>
+            </a:extLst>
+          </p:cNvPr>
+          <p:cNvSpPr>
+            <a:spLocks xmlns:a="http://schemas.openxmlformats.org/drawingml/2006/main" noGrp="1"/>
+          </p:cNvSpPr>
+          <p:nvPr/>
+        </p:nvSpPr>
+        <p:spPr>
+          <a:xfrm xmlns:a="http://schemas.openxmlformats.org/drawingml/2006/main">
+            <a:off x="9163050" y="4095750"/>
+            <a:ext cx="2171700" cy="685800"/>
+          </a:xfrm>
+          <a:prstGeom xmlns:a="http://schemas.openxmlformats.org/drawingml/2006/main" prst="rect">
+            <a:avLst/>
+          </a:prstGeom>
+          <a:noFill xmlns:a="http://schemas.openxmlformats.org/drawingml/2006/main"/>
+          <a:ln xmlns:a="http://schemas.openxmlformats.org/drawingml/2006/main" w="0">
+            <a:noFill/>
+            <a:prstDash val="solid"/>
+          </a:ln>
+        </p:spPr>
+        <p:txBody>
+          <a:bodyPr xmlns:a="http://schemas.openxmlformats.org/drawingml/2006/main" anchor="t"/>
+          <a:lstStyle xmlns:a="http://schemas.openxmlformats.org/drawingml/2006/main"/>
+          <a:p xmlns:a="http://schemas.openxmlformats.org/drawingml/2006/main">
+            <a:pPr algn="l">
+              <a:defRPr sz="1350" b="0">
+                <a:solidFill>
+                  <a:srgbClr val="24364B"/>
+                </a:solidFill>
+              </a:defRPr>
+            </a:pPr>
+            <a:r>
+              <a:rPr sz="1350" b="0">
+                <a:solidFill>
+                  <a:srgbClr val="24364B"/>
+                </a:solidFill>
+              </a:rPr>
+              <a:t>−2.88 pp versus 4.44% unconditional drift</a:t>
+            </a:r>
+          </a:p>
+        </p:txBody>
+      </p:sp>
+      <p:sp>
+        <p:nvSpPr>
+          <p:cNvPr id="15" name="">
+            <a:extLst xmlns:a="http://schemas.openxmlformats.org/drawingml/2006/main">
+              <a:ext uri="{FF2B5EF4-FFF2-40B4-BE49-F238E27FC236}">
+                <a16:creationId xmlns:a16="http://schemas.microsoft.com/office/drawing/2014/main" id="{54D970AA-6978-4368-B512-1D1449A1E197}"/>
+              </a:ext>
+            </a:extLst>
+          </p:cNvPr>
+          <p:cNvSpPr>
+            <a:spLocks xmlns:a="http://schemas.openxmlformats.org/drawingml/2006/main" noGrp="1"/>
+          </p:cNvSpPr>
+          <p:nvPr/>
+        </p:nvSpPr>
+        <p:spPr>
+          <a:xfrm xmlns:a="http://schemas.openxmlformats.org/drawingml/2006/main">
+            <a:off x="8934450" y="5000625"/>
+            <a:ext cx="85725" cy="85725"/>
+          </a:xfrm>
+          <a:prstGeom xmlns:a="http://schemas.openxmlformats.org/drawingml/2006/main" prst="rect">
+            <a:avLst/>
+          </a:prstGeom>
+          <a:solidFill xmlns:a="http://schemas.openxmlformats.org/drawingml/2006/main">
+            <a:srgbClr val="B44738"/>
+          </a:solidFill>
+          <a:ln xmlns:a="http://schemas.openxmlformats.org/drawingml/2006/main" w="0">
+            <a:solidFill>
+              <a:srgbClr val="B44738"/>
+            </a:solidFill>
+            <a:prstDash val="solid"/>
+          </a:ln>
+        </p:spPr>
+      </p:sp>
+      <p:sp>
+        <p:nvSpPr>
+          <p:cNvPr id="16" name="">
+            <a:extLst xmlns:a="http://schemas.openxmlformats.org/drawingml/2006/main">
+              <a:ext uri="{FF2B5EF4-FFF2-40B4-BE49-F238E27FC236}">
+                <a16:creationId xmlns:a16="http://schemas.microsoft.com/office/drawing/2014/main" id="{7BA237DB-042A-4B7D-8514-15423CFD72E7}"/>
+              </a:ext>
+            </a:extLst>
+          </p:cNvPr>
+          <p:cNvSpPr>
+            <a:spLocks xmlns:a="http://schemas.openxmlformats.org/drawingml/2006/main" noGrp="1"/>
+          </p:cNvSpPr>
+          <p:nvPr/>
+        </p:nvSpPr>
+        <p:spPr>
+          <a:xfrm xmlns:a="http://schemas.openxmlformats.org/drawingml/2006/main">
+            <a:off x="9163050" y="4914900"/>
+            <a:ext cx="2171700" cy="781050"/>
+          </a:xfrm>
+          <a:prstGeom xmlns:a="http://schemas.openxmlformats.org/drawingml/2006/main" prst="rect">
+            <a:avLst/>
+          </a:prstGeom>
+          <a:noFill xmlns:a="http://schemas.openxmlformats.org/drawingml/2006/main"/>
+          <a:ln xmlns:a="http://schemas.openxmlformats.org/drawingml/2006/main" w="0">
+            <a:noFill/>
+            <a:prstDash val="solid"/>
+          </a:ln>
+        </p:spPr>
+        <p:txBody>
+          <a:bodyPr xmlns:a="http://schemas.openxmlformats.org/drawingml/2006/main" anchor="t"/>
+          <a:lstStyle xmlns:a="http://schemas.openxmlformats.org/drawingml/2006/main"/>
+          <a:p xmlns:a="http://schemas.openxmlformats.org/drawingml/2006/main">
+            <a:pPr algn="l">
+              <a:defRPr sz="1350" b="0">
+                <a:solidFill>
+                  <a:srgbClr val="24364B"/>
+                </a:solidFill>
+              </a:defRPr>
+            </a:pPr>
+            <a:r>
+              <a:rPr sz="1350" b="0">
+                <a:solidFill>
+                  <a:srgbClr val="24364B"/>
+                </a:solidFill>
+              </a:rPr>
+              <a:t>Below every ingredient control; strongest = 5.12%</a:t>
+            </a:r>
+          </a:p>
+        </p:txBody>
+      </p:sp>
+    </p:spTree>
+    <p:extLst>
+      <p:ext uri="{BB962C8B-B14F-4D97-AF65-F5344CB8AC3E}">
+        <p14:creationId xmlns:p14="http://schemas.microsoft.com/office/powerpoint/2010/main" val="577098524"/>
+      </p:ext>
+    </p:extLst>
+  </p:cSld>
+</p:sld>
+</file>
+
+<file path=ppt/slides/slide25.xml><?xml version="1.0" encoding="utf-8"?>
+<p:sld xmlns:p="http://schemas.openxmlformats.org/presentationml/2006/main">
+  <p:cSld>
+    <p:bg>
+      <p:bgPr>
+        <a:solidFill xmlns:a="http://schemas.openxmlformats.org/drawingml/2006/main">
+          <a:srgbClr val="FFFFFF"/>
+        </a:solidFill>
+      </p:bgPr>
+    </p:bg>
+    <p:spTree>
+      <p:nvGrpSpPr>
+        <p:cNvPr id="1" name=""/>
+        <p:cNvGrpSpPr/>
+        <p:nvPr/>
+      </p:nvGrpSpPr>
+      <p:grpSpPr>
+        <a:xfrm xmlns:a="http://schemas.openxmlformats.org/drawingml/2006/main"/>
+      </p:grpSpPr>
+      <p:sp>
+        <p:nvSpPr>
+          <p:cNvPr id="15" name="">
+            <a:extLst xmlns:a="http://schemas.openxmlformats.org/drawingml/2006/main">
+              <a:ext uri="{FF2B5EF4-FFF2-40B4-BE49-F238E27FC236}">
+                <a16:creationId xmlns:a16="http://schemas.microsoft.com/office/drawing/2014/main" id="{51390E91-D0D3-4881-9B87-DF252243462F}"/>
+              </a:ext>
+            </a:extLst>
+          </p:cNvPr>
+          <p:cNvSpPr>
+            <a:spLocks xmlns:a="http://schemas.openxmlformats.org/drawingml/2006/main" noGrp="1"/>
+          </p:cNvSpPr>
+          <p:nvPr/>
+        </p:nvSpPr>
+        <p:spPr>
+          <a:xfrm xmlns:a="http://schemas.openxmlformats.org/drawingml/2006/main">
+            <a:off x="457200" y="238125"/>
+            <a:ext cx="6191250" cy="190500"/>
+          </a:xfrm>
+          <a:prstGeom xmlns:a="http://schemas.openxmlformats.org/drawingml/2006/main" prst="rect">
+            <a:avLst/>
+          </a:prstGeom>
+          <a:noFill xmlns:a="http://schemas.openxmlformats.org/drawingml/2006/main"/>
+          <a:ln xmlns:a="http://schemas.openxmlformats.org/drawingml/2006/main" w="0">
+            <a:noFill/>
+            <a:prstDash val="solid"/>
+          </a:ln>
+        </p:spPr>
+        <p:txBody>
+          <a:bodyPr xmlns:a="http://schemas.openxmlformats.org/drawingml/2006/main" anchor="t"/>
+          <a:lstStyle xmlns:a="http://schemas.openxmlformats.org/drawingml/2006/main"/>
+          <a:p xmlns:a="http://schemas.openxmlformats.org/drawingml/2006/main">
+            <a:pPr algn="l">
+              <a:defRPr sz="1050" b="1">
+                <a:solidFill>
+                  <a:srgbClr val="667386"/>
+                </a:solidFill>
+              </a:defRPr>
+            </a:pPr>
+            <a:r>
+              <a:rPr sz="1050" b="1">
+                <a:solidFill>
+                  <a:srgbClr val="667386"/>
+                </a:solidFill>
+              </a:rPr>
+              <a:t>OPERATOR HYPOTHESIS LAB · NVDA CONFIRMATION</a:t>
+            </a:r>
+          </a:p>
+        </p:txBody>
+      </p:sp>
+      <p:sp>
+        <p:nvSpPr>
+          <p:cNvPr id="2" name="">
+            <a:extLst xmlns:a="http://schemas.openxmlformats.org/drawingml/2006/main">
+              <a:ext uri="{FF2B5EF4-FFF2-40B4-BE49-F238E27FC236}">
+                <a16:creationId xmlns:a16="http://schemas.microsoft.com/office/drawing/2014/main" id="{3C746CC9-7FB8-4736-8659-B229AE684FF5}"/>
+              </a:ext>
+            </a:extLst>
+          </p:cNvPr>
+          <p:cNvSpPr>
+            <a:spLocks xmlns:a="http://schemas.openxmlformats.org/drawingml/2006/main" noGrp="1"/>
+          </p:cNvSpPr>
+          <p:nvPr/>
+        </p:nvSpPr>
+        <p:spPr>
+          <a:xfrm xmlns:a="http://schemas.openxmlformats.org/drawingml/2006/main">
+            <a:off x="457200" y="523875"/>
+            <a:ext cx="11049000" cy="590550"/>
+          </a:xfrm>
+          <a:prstGeom xmlns:a="http://schemas.openxmlformats.org/drawingml/2006/main" prst="rect">
+            <a:avLst/>
+          </a:prstGeom>
+          <a:noFill xmlns:a="http://schemas.openxmlformats.org/drawingml/2006/main"/>
+          <a:ln xmlns:a="http://schemas.openxmlformats.org/drawingml/2006/main" w="0">
+            <a:noFill/>
+            <a:prstDash val="solid"/>
+          </a:ln>
+        </p:spPr>
+        <p:txBody>
+          <a:bodyPr xmlns:a="http://schemas.openxmlformats.org/drawingml/2006/main" anchor="t"/>
+          <a:lstStyle xmlns:a="http://schemas.openxmlformats.org/drawingml/2006/main"/>
+          <a:p xmlns:a="http://schemas.openxmlformats.org/drawingml/2006/main">
+            <a:pPr algn="l">
+              <a:defRPr sz="2925" b="1">
+                <a:solidFill>
+                  <a:srgbClr val="000000"/>
+                </a:solidFill>
+              </a:defRPr>
+            </a:pPr>
+            <a:r>
+              <a:rPr sz="2925" b="1">
+                <a:solidFill>
+                  <a:srgbClr val="000000"/>
+                </a:solidFill>
+              </a:rPr>
+              <a:t>A positive median is not enough to beat the baseline</a:t>
+            </a:r>
+          </a:p>
+        </p:txBody>
+      </p:sp>
+      <p:sp>
+        <p:nvSpPr>
+          <p:cNvPr id="3" name="">
+            <a:extLst xmlns:a="http://schemas.openxmlformats.org/drawingml/2006/main">
+              <a:ext uri="{FF2B5EF4-FFF2-40B4-BE49-F238E27FC236}">
+                <a16:creationId xmlns:a16="http://schemas.microsoft.com/office/drawing/2014/main" id="{F222DAA9-0551-454B-9A49-FF357AA74D13}"/>
+              </a:ext>
+            </a:extLst>
+          </p:cNvPr>
+          <p:cNvSpPr>
+            <a:spLocks xmlns:a="http://schemas.openxmlformats.org/drawingml/2006/main" noGrp="1"/>
+          </p:cNvSpPr>
+          <p:nvPr/>
+        </p:nvSpPr>
+        <p:spPr>
+          <a:xfrm xmlns:a="http://schemas.openxmlformats.org/drawingml/2006/main">
+            <a:off x="457200" y="1219200"/>
+            <a:ext cx="11277600" cy="19050"/>
+          </a:xfrm>
+          <a:prstGeom xmlns:a="http://schemas.openxmlformats.org/drawingml/2006/main" prst="rect">
+            <a:avLst/>
+          </a:prstGeom>
+          <a:solidFill xmlns:a="http://schemas.openxmlformats.org/drawingml/2006/main">
+            <a:srgbClr val="B8BCC4"/>
+          </a:solidFill>
+          <a:ln xmlns:a="http://schemas.openxmlformats.org/drawingml/2006/main" w="0">
+            <a:solidFill>
+              <a:srgbClr val="B8BCC4"/>
+            </a:solidFill>
+            <a:prstDash val="solid"/>
+          </a:ln>
+        </p:spPr>
+      </p:sp>
+      <p:sp>
+        <p:nvSpPr>
+          <p:cNvPr id="4" name="">
+            <a:extLst xmlns:a="http://schemas.openxmlformats.org/drawingml/2006/main">
+              <a:ext uri="{FF2B5EF4-FFF2-40B4-BE49-F238E27FC236}">
+                <a16:creationId xmlns:a16="http://schemas.microsoft.com/office/drawing/2014/main" id="{1EA68B48-71A8-4D97-A186-2F0D4BEF39D7}"/>
+              </a:ext>
+            </a:extLst>
+          </p:cNvPr>
+          <p:cNvSpPr>
+            <a:spLocks xmlns:a="http://schemas.openxmlformats.org/drawingml/2006/main" noGrp="1"/>
+          </p:cNvSpPr>
+          <p:nvPr/>
+        </p:nvSpPr>
+        <p:spPr>
+          <a:xfrm xmlns:a="http://schemas.openxmlformats.org/drawingml/2006/main">
+            <a:off x="457200" y="6515100"/>
+            <a:ext cx="7810500" cy="161925"/>
+          </a:xfrm>
+          <a:prstGeom xmlns:a="http://schemas.openxmlformats.org/drawingml/2006/main" prst="rect">
+            <a:avLst/>
+          </a:prstGeom>
+          <a:noFill xmlns:a="http://schemas.openxmlformats.org/drawingml/2006/main"/>
+          <a:ln xmlns:a="http://schemas.openxmlformats.org/drawingml/2006/main" w="0">
+            <a:noFill/>
+            <a:prstDash val="solid"/>
+          </a:ln>
+        </p:spPr>
+        <p:txBody>
+          <a:bodyPr xmlns:a="http://schemas.openxmlformats.org/drawingml/2006/main" anchor="t"/>
+          <a:lstStyle xmlns:a="http://schemas.openxmlformats.org/drawingml/2006/main"/>
+          <a:p xmlns:a="http://schemas.openxmlformats.org/drawingml/2006/main">
+            <a:pPr algn="l">
+              <a:defRPr sz="900" b="0">
+                <a:solidFill>
+                  <a:srgbClr val="667386"/>
+                </a:solidFill>
+              </a:defRPr>
+            </a:pPr>
+            <a:r>
+              <a:rPr sz="900" b="0">
+                <a:solidFill>
+                  <a:srgbClr val="667386"/>
+                </a:solidFill>
+              </a:rPr>
+              <a:t>One-shot untouched time · adjusted daily bars · frozen 2024-01-02–2026-06-23</a:t>
+            </a:r>
+          </a:p>
+        </p:txBody>
+      </p:sp>
+      <p:sp>
+        <p:nvSpPr>
+          <p:cNvPr id="5" name="">
+            <a:extLst xmlns:a="http://schemas.openxmlformats.org/drawingml/2006/main">
+              <a:ext uri="{FF2B5EF4-FFF2-40B4-BE49-F238E27FC236}">
+                <a16:creationId xmlns:a16="http://schemas.microsoft.com/office/drawing/2014/main" id="{533F0E04-3DD5-48F7-8D3F-2FFF59B0886C}"/>
+              </a:ext>
+            </a:extLst>
+          </p:cNvPr>
+          <p:cNvSpPr>
+            <a:spLocks xmlns:a="http://schemas.openxmlformats.org/drawingml/2006/main" noGrp="1"/>
+          </p:cNvSpPr>
+          <p:nvPr/>
+        </p:nvSpPr>
+        <p:spPr>
+          <a:xfrm xmlns:a="http://schemas.openxmlformats.org/drawingml/2006/main">
+            <a:off x="10858500" y="6496050"/>
+            <a:ext cx="876300" cy="171450"/>
+          </a:xfrm>
+          <a:prstGeom xmlns:a="http://schemas.openxmlformats.org/drawingml/2006/main" prst="rect">
+            <a:avLst/>
+          </a:prstGeom>
+          <a:noFill xmlns:a="http://schemas.openxmlformats.org/drawingml/2006/main"/>
+          <a:ln xmlns:a="http://schemas.openxmlformats.org/drawingml/2006/main" w="0">
+            <a:noFill/>
+            <a:prstDash val="solid"/>
+          </a:ln>
+        </p:spPr>
+        <p:txBody>
+          <a:bodyPr xmlns:a="http://schemas.openxmlformats.org/drawingml/2006/main" anchor="t"/>
+          <a:lstStyle xmlns:a="http://schemas.openxmlformats.org/drawingml/2006/main"/>
+          <a:p xmlns:a="http://schemas.openxmlformats.org/drawingml/2006/main">
+            <a:pPr algn="r">
+              <a:defRPr sz="900" b="0">
+                <a:solidFill>
+                  <a:srgbClr val="667386"/>
+                </a:solidFill>
+              </a:defRPr>
+            </a:pPr>
+            <a:r>
+              <a:rPr sz="900" b="0">
+                <a:solidFill>
+                  <a:srgbClr val="667386"/>
+                </a:solidFill>
+              </a:rPr>
+              <a:t>25</a:t>
+            </a:r>
+          </a:p>
+        </p:txBody>
+      </p:sp>
+      <p:pic>
+        <p:nvPicPr>
+          <p:cNvPr id="20" name=""/>
+          <p:cNvPicPr>
+            <a:picLocks xmlns:a="http://schemas.openxmlformats.org/drawingml/2006/main" noChangeAspect="1"/>
+          </p:cNvPicPr>
+          <p:nvPr/>
+        </p:nvPicPr>
+        <p:blipFill>
+          <a:blip xmlns:r="http://schemas.openxmlformats.org/officeDocument/2006/relationships" xmlns:a="http://schemas.openxmlformats.org/drawingml/2006/main" r:embed="Rac1e109ade3e411c"/>
+          <a:stretch xmlns:a="http://schemas.openxmlformats.org/drawingml/2006/main"/>
+        </p:blipFill>
+        <p:spPr>
+          <a:xfrm xmlns:a="http://schemas.openxmlformats.org/drawingml/2006/main">
+            <a:off x="516731" y="1409700"/>
+            <a:ext cx="8167688" cy="4667250"/>
+          </a:xfrm>
+          <a:prstGeom xmlns:a="http://schemas.openxmlformats.org/drawingml/2006/main" prst="rect">
+            <a:avLst/>
+          </a:prstGeom>
+        </p:spPr>
+      </p:pic>
+      <p:sp>
+        <p:nvSpPr>
+          <p:cNvPr id="7" name="">
+            <a:extLst xmlns:a="http://schemas.openxmlformats.org/drawingml/2006/main">
+              <a:ext uri="{FF2B5EF4-FFF2-40B4-BE49-F238E27FC236}">
+                <a16:creationId xmlns:a16="http://schemas.microsoft.com/office/drawing/2014/main" id="{A1AC806D-B8A9-4C9B-A709-C944F1F96797}"/>
+              </a:ext>
+            </a:extLst>
+          </p:cNvPr>
+          <p:cNvSpPr>
+            <a:spLocks xmlns:a="http://schemas.openxmlformats.org/drawingml/2006/main" noGrp="1"/>
+          </p:cNvSpPr>
+          <p:nvPr/>
+        </p:nvSpPr>
+        <p:spPr>
+          <a:xfrm xmlns:a="http://schemas.openxmlformats.org/drawingml/2006/main">
+            <a:off x="9048750" y="1562100"/>
+            <a:ext cx="2590800" cy="4171950"/>
+          </a:xfrm>
+          <a:prstGeom xmlns:a="http://schemas.openxmlformats.org/drawingml/2006/main" prst="rect">
+            <a:avLst/>
+          </a:prstGeom>
+          <a:solidFill xmlns:a="http://schemas.openxmlformats.org/drawingml/2006/main">
+            <a:srgbClr val="F3F5F7"/>
+          </a:solidFill>
+          <a:ln xmlns:a="http://schemas.openxmlformats.org/drawingml/2006/main" w="0">
+            <a:solidFill>
+              <a:srgbClr val="F3F5F7"/>
+            </a:solidFill>
+            <a:prstDash val="solid"/>
+          </a:ln>
+        </p:spPr>
+      </p:sp>
+      <p:sp>
+        <p:nvSpPr>
+          <p:cNvPr id="8" name="">
+            <a:extLst xmlns:a="http://schemas.openxmlformats.org/drawingml/2006/main">
+              <a:ext uri="{FF2B5EF4-FFF2-40B4-BE49-F238E27FC236}">
+                <a16:creationId xmlns:a16="http://schemas.microsoft.com/office/drawing/2014/main" id="{4B199761-5240-42A6-AAAD-978982243722}"/>
+              </a:ext>
+            </a:extLst>
+          </p:cNvPr>
+          <p:cNvSpPr>
+            <a:spLocks xmlns:a="http://schemas.openxmlformats.org/drawingml/2006/main" noGrp="1"/>
+          </p:cNvSpPr>
+          <p:nvPr/>
+        </p:nvSpPr>
+        <p:spPr>
+          <a:xfrm xmlns:a="http://schemas.openxmlformats.org/drawingml/2006/main">
+            <a:off x="9277350" y="1809750"/>
+            <a:ext cx="2133600" cy="285750"/>
+          </a:xfrm>
+          <a:prstGeom xmlns:a="http://schemas.openxmlformats.org/drawingml/2006/main" prst="rect">
+            <a:avLst/>
+          </a:prstGeom>
+          <a:noFill xmlns:a="http://schemas.openxmlformats.org/drawingml/2006/main"/>
+          <a:ln xmlns:a="http://schemas.openxmlformats.org/drawingml/2006/main" w="0">
+            <a:noFill/>
+            <a:prstDash val="solid"/>
+          </a:ln>
+        </p:spPr>
+        <p:txBody>
+          <a:bodyPr xmlns:a="http://schemas.openxmlformats.org/drawingml/2006/main" anchor="t"/>
+          <a:lstStyle xmlns:a="http://schemas.openxmlformats.org/drawingml/2006/main"/>
+          <a:p xmlns:a="http://schemas.openxmlformats.org/drawingml/2006/main">
+            <a:pPr algn="l">
+              <a:defRPr sz="1725" b="1">
+                <a:solidFill>
+                  <a:srgbClr val="000000"/>
+                </a:solidFill>
+              </a:defRPr>
+            </a:pPr>
+            <a:r>
+              <a:rPr sz="1725" b="1">
+                <a:solidFill>
+                  <a:srgbClr val="000000"/>
+                </a:solidFill>
+              </a:rPr>
+              <a:t>What survived</a:t>
+            </a:r>
+          </a:p>
+        </p:txBody>
+      </p:sp>
+      <p:sp>
+        <p:nvSpPr>
+          <p:cNvPr id="9" name="">
+            <a:extLst xmlns:a="http://schemas.openxmlformats.org/drawingml/2006/main">
+              <a:ext uri="{FF2B5EF4-FFF2-40B4-BE49-F238E27FC236}">
+                <a16:creationId xmlns:a16="http://schemas.microsoft.com/office/drawing/2014/main" id="{9285CBAF-A942-46B1-80C3-669BFB977937}"/>
+              </a:ext>
+            </a:extLst>
+          </p:cNvPr>
+          <p:cNvSpPr>
+            <a:spLocks xmlns:a="http://schemas.openxmlformats.org/drawingml/2006/main" noGrp="1"/>
+          </p:cNvSpPr>
+          <p:nvPr/>
+        </p:nvSpPr>
+        <p:spPr>
+          <a:xfrm xmlns:a="http://schemas.openxmlformats.org/drawingml/2006/main">
+            <a:off x="9277350" y="2343150"/>
+            <a:ext cx="2133600" cy="438150"/>
+          </a:xfrm>
+          <a:prstGeom xmlns:a="http://schemas.openxmlformats.org/drawingml/2006/main" prst="rect">
+            <a:avLst/>
+          </a:prstGeom>
+          <a:noFill xmlns:a="http://schemas.openxmlformats.org/drawingml/2006/main"/>
+          <a:ln xmlns:a="http://schemas.openxmlformats.org/drawingml/2006/main" w="0">
+            <a:noFill/>
+            <a:prstDash val="solid"/>
+          </a:ln>
+        </p:spPr>
+        <p:txBody>
+          <a:bodyPr xmlns:a="http://schemas.openxmlformats.org/drawingml/2006/main" anchor="t"/>
+          <a:lstStyle xmlns:a="http://schemas.openxmlformats.org/drawingml/2006/main"/>
+          <a:p xmlns:a="http://schemas.openxmlformats.org/drawingml/2006/main">
+            <a:pPr algn="l">
+              <a:defRPr sz="2625" b="1">
+                <a:solidFill>
+                  <a:srgbClr val="14866D"/>
+                </a:solidFill>
+              </a:defRPr>
+            </a:pPr>
+            <a:r>
+              <a:rPr sz="2625" b="1">
+                <a:solidFill>
+                  <a:srgbClr val="14866D"/>
+                </a:solidFill>
+              </a:rPr>
+              <a:t>+2.19%</a:t>
+            </a:r>
+          </a:p>
+        </p:txBody>
+      </p:sp>
+      <p:sp>
+        <p:nvSpPr>
+          <p:cNvPr id="10" name="">
+            <a:extLst xmlns:a="http://schemas.openxmlformats.org/drawingml/2006/main">
+              <a:ext uri="{FF2B5EF4-FFF2-40B4-BE49-F238E27FC236}">
+                <a16:creationId xmlns:a16="http://schemas.microsoft.com/office/drawing/2014/main" id="{FC2A8587-A5FB-4E7C-AAE4-DA7D1A8719E8}"/>
+              </a:ext>
+            </a:extLst>
+          </p:cNvPr>
+          <p:cNvSpPr>
+            <a:spLocks xmlns:a="http://schemas.openxmlformats.org/drawingml/2006/main" noGrp="1"/>
+          </p:cNvSpPr>
+          <p:nvPr/>
+        </p:nvSpPr>
+        <p:spPr>
+          <a:xfrm xmlns:a="http://schemas.openxmlformats.org/drawingml/2006/main">
+            <a:off x="9277350" y="2762250"/>
+            <a:ext cx="2133600" cy="228600"/>
+          </a:xfrm>
+          <a:prstGeom xmlns:a="http://schemas.openxmlformats.org/drawingml/2006/main" prst="rect">
+            <a:avLst/>
+          </a:prstGeom>
+          <a:noFill xmlns:a="http://schemas.openxmlformats.org/drawingml/2006/main"/>
+          <a:ln xmlns:a="http://schemas.openxmlformats.org/drawingml/2006/main" w="0">
+            <a:noFill/>
+            <a:prstDash val="solid"/>
+          </a:ln>
+        </p:spPr>
+        <p:txBody>
+          <a:bodyPr xmlns:a="http://schemas.openxmlformats.org/drawingml/2006/main" anchor="t"/>
+          <a:lstStyle xmlns:a="http://schemas.openxmlformats.org/drawingml/2006/main"/>
+          <a:p xmlns:a="http://schemas.openxmlformats.org/drawingml/2006/main">
+            <a:pPr algn="l">
+              <a:defRPr sz="1200" b="0">
+                <a:solidFill>
+                  <a:srgbClr val="667386"/>
+                </a:solidFill>
+              </a:defRPr>
+            </a:pPr>
+            <a:r>
+              <a:rPr sz="1200" b="0">
+                <a:solidFill>
+                  <a:srgbClr val="667386"/>
+                </a:solidFill>
+              </a:rPr>
+              <a:t>median net</a:t>
+            </a:r>
+          </a:p>
+        </p:txBody>
+      </p:sp>
+      <p:sp>
+        <p:nvSpPr>
+          <p:cNvPr id="11" name="">
+            <a:extLst xmlns:a="http://schemas.openxmlformats.org/drawingml/2006/main">
+              <a:ext uri="{FF2B5EF4-FFF2-40B4-BE49-F238E27FC236}">
+                <a16:creationId xmlns:a16="http://schemas.microsoft.com/office/drawing/2014/main" id="{8E175906-AE85-4F16-915A-F813C521E54B}"/>
+              </a:ext>
+            </a:extLst>
+          </p:cNvPr>
+          <p:cNvSpPr>
+            <a:spLocks xmlns:a="http://schemas.openxmlformats.org/drawingml/2006/main" noGrp="1"/>
+          </p:cNvSpPr>
+          <p:nvPr/>
+        </p:nvSpPr>
+        <p:spPr>
+          <a:xfrm xmlns:a="http://schemas.openxmlformats.org/drawingml/2006/main">
+            <a:off x="9277350" y="3276600"/>
+            <a:ext cx="2133600" cy="438150"/>
+          </a:xfrm>
+          <a:prstGeom xmlns:a="http://schemas.openxmlformats.org/drawingml/2006/main" prst="rect">
+            <a:avLst/>
+          </a:prstGeom>
+          <a:noFill xmlns:a="http://schemas.openxmlformats.org/drawingml/2006/main"/>
+          <a:ln xmlns:a="http://schemas.openxmlformats.org/drawingml/2006/main" w="0">
+            <a:noFill/>
+            <a:prstDash val="solid"/>
+          </a:ln>
+        </p:spPr>
+        <p:txBody>
+          <a:bodyPr xmlns:a="http://schemas.openxmlformats.org/drawingml/2006/main" anchor="t"/>
+          <a:lstStyle xmlns:a="http://schemas.openxmlformats.org/drawingml/2006/main"/>
+          <a:p xmlns:a="http://schemas.openxmlformats.org/drawingml/2006/main">
+            <a:pPr algn="l">
+              <a:defRPr sz="2625" b="1">
+                <a:solidFill>
+                  <a:srgbClr val="14866D"/>
+                </a:solidFill>
+              </a:defRPr>
+            </a:pPr>
+            <a:r>
+              <a:rPr sz="2625" b="1">
+                <a:solidFill>
+                  <a:srgbClr val="14866D"/>
+                </a:solidFill>
+              </a:rPr>
+              <a:t>6 / 9</a:t>
+            </a:r>
+          </a:p>
+        </p:txBody>
+      </p:sp>
+      <p:sp>
+        <p:nvSpPr>
+          <p:cNvPr id="12" name="">
+            <a:extLst xmlns:a="http://schemas.openxmlformats.org/drawingml/2006/main">
+              <a:ext uri="{FF2B5EF4-FFF2-40B4-BE49-F238E27FC236}">
+                <a16:creationId xmlns:a16="http://schemas.microsoft.com/office/drawing/2014/main" id="{8F17A142-FBEF-42FA-B661-B65E5CD4C2F3}"/>
+              </a:ext>
+            </a:extLst>
+          </p:cNvPr>
+          <p:cNvSpPr>
+            <a:spLocks xmlns:a="http://schemas.openxmlformats.org/drawingml/2006/main" noGrp="1"/>
+          </p:cNvSpPr>
+          <p:nvPr/>
+        </p:nvSpPr>
+        <p:spPr>
+          <a:xfrm xmlns:a="http://schemas.openxmlformats.org/drawingml/2006/main">
+            <a:off x="9277350" y="3695700"/>
+            <a:ext cx="2133600" cy="228600"/>
+          </a:xfrm>
+          <a:prstGeom xmlns:a="http://schemas.openxmlformats.org/drawingml/2006/main" prst="rect">
+            <a:avLst/>
+          </a:prstGeom>
+          <a:noFill xmlns:a="http://schemas.openxmlformats.org/drawingml/2006/main"/>
+          <a:ln xmlns:a="http://schemas.openxmlformats.org/drawingml/2006/main" w="0">
+            <a:noFill/>
+            <a:prstDash val="solid"/>
+          </a:ln>
+        </p:spPr>
+        <p:txBody>
+          <a:bodyPr xmlns:a="http://schemas.openxmlformats.org/drawingml/2006/main" anchor="t"/>
+          <a:lstStyle xmlns:a="http://schemas.openxmlformats.org/drawingml/2006/main"/>
+          <a:p xmlns:a="http://schemas.openxmlformats.org/drawingml/2006/main">
+            <a:pPr algn="l">
+              <a:defRPr sz="1200" b="0">
+                <a:solidFill>
+                  <a:srgbClr val="667386"/>
+                </a:solidFill>
+              </a:defRPr>
+            </a:pPr>
+            <a:r>
+              <a:rPr sz="1200" b="0">
+                <a:solidFill>
+                  <a:srgbClr val="667386"/>
+                </a:solidFill>
+              </a:rPr>
+              <a:t>profitable trades</a:t>
+            </a:r>
+          </a:p>
+        </p:txBody>
+      </p:sp>
+      <p:sp>
+        <p:nvSpPr>
+          <p:cNvPr id="13" name="">
+            <a:extLst xmlns:a="http://schemas.openxmlformats.org/drawingml/2006/main">
+              <a:ext uri="{FF2B5EF4-FFF2-40B4-BE49-F238E27FC236}">
+                <a16:creationId xmlns:a16="http://schemas.microsoft.com/office/drawing/2014/main" id="{862C8865-E30B-450A-8A57-E9ABA192BD03}"/>
+              </a:ext>
+            </a:extLst>
+          </p:cNvPr>
+          <p:cNvSpPr>
+            <a:spLocks xmlns:a="http://schemas.openxmlformats.org/drawingml/2006/main" noGrp="1"/>
+          </p:cNvSpPr>
+          <p:nvPr/>
+        </p:nvSpPr>
+        <p:spPr>
+          <a:xfrm xmlns:a="http://schemas.openxmlformats.org/drawingml/2006/main">
+            <a:off x="9277350" y="4305300"/>
+            <a:ext cx="2133600" cy="285750"/>
+          </a:xfrm>
+          <a:prstGeom xmlns:a="http://schemas.openxmlformats.org/drawingml/2006/main" prst="rect">
+            <a:avLst/>
+          </a:prstGeom>
+          <a:noFill xmlns:a="http://schemas.openxmlformats.org/drawingml/2006/main"/>
+          <a:ln xmlns:a="http://schemas.openxmlformats.org/drawingml/2006/main" w="0">
+            <a:noFill/>
+            <a:prstDash val="solid"/>
+          </a:ln>
+        </p:spPr>
+        <p:txBody>
+          <a:bodyPr xmlns:a="http://schemas.openxmlformats.org/drawingml/2006/main" anchor="t"/>
+          <a:lstStyle xmlns:a="http://schemas.openxmlformats.org/drawingml/2006/main"/>
+          <a:p xmlns:a="http://schemas.openxmlformats.org/drawingml/2006/main">
+            <a:pPr algn="l">
+              <a:defRPr sz="1725" b="1">
+                <a:solidFill>
+                  <a:srgbClr val="B44738"/>
+                </a:solidFill>
+              </a:defRPr>
+            </a:pPr>
+            <a:r>
+              <a:rPr sz="1725" b="1">
+                <a:solidFill>
+                  <a:srgbClr val="B44738"/>
+                </a:solidFill>
+              </a:rPr>
+              <a:t>What failed</a:t>
+            </a:r>
+          </a:p>
+        </p:txBody>
+      </p:sp>
+      <p:sp>
+        <p:nvSpPr>
+          <p:cNvPr id="14" name="">
+            <a:extLst xmlns:a="http://schemas.openxmlformats.org/drawingml/2006/main">
+              <a:ext uri="{FF2B5EF4-FFF2-40B4-BE49-F238E27FC236}">
+                <a16:creationId xmlns:a16="http://schemas.microsoft.com/office/drawing/2014/main" id="{25058255-CBB9-41E5-827C-30913D6FB399}"/>
+              </a:ext>
+            </a:extLst>
+          </p:cNvPr>
+          <p:cNvSpPr>
+            <a:spLocks xmlns:a="http://schemas.openxmlformats.org/drawingml/2006/main" noGrp="1"/>
+          </p:cNvSpPr>
+          <p:nvPr/>
+        </p:nvSpPr>
+        <p:spPr>
+          <a:xfrm xmlns:a="http://schemas.openxmlformats.org/drawingml/2006/main">
+            <a:off x="9277350" y="4762500"/>
+            <a:ext cx="2133600" cy="781050"/>
+          </a:xfrm>
+          <a:prstGeom xmlns:a="http://schemas.openxmlformats.org/drawingml/2006/main" prst="rect">
+            <a:avLst/>
+          </a:prstGeom>
+          <a:noFill xmlns:a="http://schemas.openxmlformats.org/drawingml/2006/main"/>
+          <a:ln xmlns:a="http://schemas.openxmlformats.org/drawingml/2006/main" w="0">
+            <a:noFill/>
+            <a:prstDash val="solid"/>
+          </a:ln>
+        </p:spPr>
+        <p:txBody>
+          <a:bodyPr xmlns:a="http://schemas.openxmlformats.org/drawingml/2006/main" anchor="t"/>
+          <a:lstStyle xmlns:a="http://schemas.openxmlformats.org/drawingml/2006/main"/>
+          <a:p xmlns:a="http://schemas.openxmlformats.org/drawingml/2006/main">
+            <a:pPr algn="l">
+              <a:defRPr sz="1350" b="1">
+                <a:solidFill>
+                  <a:srgbClr val="24364B"/>
+                </a:solidFill>
+              </a:defRPr>
+            </a:pPr>
+            <a:r>
+              <a:rPr sz="1350" b="1">
+                <a:solidFill>
+                  <a:srgbClr val="24364B"/>
+                </a:solidFill>
+              </a:rPr>
+              <a:t>The sequence's average was too weak to overcome ordinary NVDA drift or the simpler controls.</a:t>
+            </a:r>
+          </a:p>
+        </p:txBody>
+      </p:sp>
+    </p:spTree>
+    <p:extLst>
+      <p:ext uri="{BB962C8B-B14F-4D97-AF65-F5344CB8AC3E}">
+        <p14:creationId xmlns:p14="http://schemas.microsoft.com/office/powerpoint/2010/main" val="1741468674"/>
+      </p:ext>
+    </p:extLst>
+  </p:cSld>
+</p:sld>
+</file>
+
+<file path=ppt/slides/slide26.xml><?xml version="1.0" encoding="utf-8"?>
+<p:sld xmlns:p="http://schemas.openxmlformats.org/presentationml/2006/main">
+  <p:cSld>
+    <p:bg>
+      <p:bgPr>
+        <a:solidFill xmlns:a="http://schemas.openxmlformats.org/drawingml/2006/main">
+          <a:srgbClr val="FFFFFF"/>
+        </a:solidFill>
+      </p:bgPr>
+    </p:bg>
+    <p:spTree>
+      <p:nvGrpSpPr>
+        <p:cNvPr id="1" name=""/>
+        <p:cNvGrpSpPr/>
+        <p:nvPr/>
+      </p:nvGrpSpPr>
+      <p:grpSpPr>
+        <a:xfrm xmlns:a="http://schemas.openxmlformats.org/drawingml/2006/main"/>
+      </p:grpSpPr>
+      <p:sp>
+        <p:nvSpPr>
+          <p:cNvPr id="9" name="">
+            <a:extLst xmlns:a="http://schemas.openxmlformats.org/drawingml/2006/main">
+              <a:ext uri="{FF2B5EF4-FFF2-40B4-BE49-F238E27FC236}">
+                <a16:creationId xmlns:a16="http://schemas.microsoft.com/office/drawing/2014/main" id="{4C5B014B-2446-40D4-B264-F71E8B289948}"/>
+              </a:ext>
+            </a:extLst>
+          </p:cNvPr>
+          <p:cNvSpPr>
+            <a:spLocks xmlns:a="http://schemas.openxmlformats.org/drawingml/2006/main" noGrp="1"/>
+          </p:cNvSpPr>
+          <p:nvPr/>
+        </p:nvSpPr>
+        <p:spPr>
+          <a:xfrm xmlns:a="http://schemas.openxmlformats.org/drawingml/2006/main">
+            <a:off x="457200" y="238125"/>
+            <a:ext cx="6191250" cy="190500"/>
+          </a:xfrm>
+          <a:prstGeom xmlns:a="http://schemas.openxmlformats.org/drawingml/2006/main" prst="rect">
+            <a:avLst/>
+          </a:prstGeom>
+          <a:noFill xmlns:a="http://schemas.openxmlformats.org/drawingml/2006/main"/>
+          <a:ln xmlns:a="http://schemas.openxmlformats.org/drawingml/2006/main" w="0">
+            <a:noFill/>
+            <a:prstDash val="solid"/>
+          </a:ln>
+        </p:spPr>
+        <p:txBody>
+          <a:bodyPr xmlns:a="http://schemas.openxmlformats.org/drawingml/2006/main" anchor="t"/>
+          <a:lstStyle xmlns:a="http://schemas.openxmlformats.org/drawingml/2006/main"/>
+          <a:p xmlns:a="http://schemas.openxmlformats.org/drawingml/2006/main">
+            <a:pPr algn="l">
+              <a:defRPr sz="1050" b="1">
+                <a:solidFill>
+                  <a:srgbClr val="667386"/>
+                </a:solidFill>
+              </a:defRPr>
+            </a:pPr>
+            <a:r>
+              <a:rPr sz="1050" b="1">
+                <a:solidFill>
+                  <a:srgbClr val="667386"/>
+                </a:solidFill>
+              </a:rPr>
+              <a:t>OPERATOR HYPOTHESIS LAB · NVDA CONFIRMATION</a:t>
+            </a:r>
+          </a:p>
+        </p:txBody>
+      </p:sp>
+      <p:sp>
+        <p:nvSpPr>
+          <p:cNvPr id="2" name="">
+            <a:extLst xmlns:a="http://schemas.openxmlformats.org/drawingml/2006/main">
+              <a:ext uri="{FF2B5EF4-FFF2-40B4-BE49-F238E27FC236}">
+                <a16:creationId xmlns:a16="http://schemas.microsoft.com/office/drawing/2014/main" id="{281F473C-EE2E-42C6-A329-29785837A4B4}"/>
+              </a:ext>
+            </a:extLst>
+          </p:cNvPr>
+          <p:cNvSpPr>
+            <a:spLocks xmlns:a="http://schemas.openxmlformats.org/drawingml/2006/main" noGrp="1"/>
+          </p:cNvSpPr>
+          <p:nvPr/>
+        </p:nvSpPr>
+        <p:spPr>
+          <a:xfrm xmlns:a="http://schemas.openxmlformats.org/drawingml/2006/main">
+            <a:off x="457200" y="523875"/>
+            <a:ext cx="11049000" cy="590550"/>
+          </a:xfrm>
+          <a:prstGeom xmlns:a="http://schemas.openxmlformats.org/drawingml/2006/main" prst="rect">
+            <a:avLst/>
+          </a:prstGeom>
+          <a:noFill xmlns:a="http://schemas.openxmlformats.org/drawingml/2006/main"/>
+          <a:ln xmlns:a="http://schemas.openxmlformats.org/drawingml/2006/main" w="0">
+            <a:noFill/>
+            <a:prstDash val="solid"/>
+          </a:ln>
+        </p:spPr>
+        <p:txBody>
+          <a:bodyPr xmlns:a="http://schemas.openxmlformats.org/drawingml/2006/main" anchor="t"/>
+          <a:lstStyle xmlns:a="http://schemas.openxmlformats.org/drawingml/2006/main"/>
+          <a:p xmlns:a="http://schemas.openxmlformats.org/drawingml/2006/main">
+            <a:pPr algn="l">
+              <a:defRPr sz="2925" b="1">
+                <a:solidFill>
+                  <a:srgbClr val="000000"/>
+                </a:solidFill>
+              </a:defRPr>
+            </a:pPr>
+            <a:r>
+              <a:rPr sz="2925" b="1">
+                <a:solidFill>
+                  <a:srgbClr val="000000"/>
+                </a:solidFill>
+              </a:rPr>
+              <a:t>Participation was sparse—and the path depended on late winners</a:t>
+            </a:r>
+          </a:p>
+        </p:txBody>
+      </p:sp>
+      <p:sp>
+        <p:nvSpPr>
+          <p:cNvPr id="3" name="">
+            <a:extLst xmlns:a="http://schemas.openxmlformats.org/drawingml/2006/main">
+              <a:ext uri="{FF2B5EF4-FFF2-40B4-BE49-F238E27FC236}">
+                <a16:creationId xmlns:a16="http://schemas.microsoft.com/office/drawing/2014/main" id="{2D1D9857-73FF-4CFE-8A34-45B2A823D5DA}"/>
+              </a:ext>
+            </a:extLst>
+          </p:cNvPr>
+          <p:cNvSpPr>
+            <a:spLocks xmlns:a="http://schemas.openxmlformats.org/drawingml/2006/main" noGrp="1"/>
+          </p:cNvSpPr>
+          <p:nvPr/>
+        </p:nvSpPr>
+        <p:spPr>
+          <a:xfrm xmlns:a="http://schemas.openxmlformats.org/drawingml/2006/main">
+            <a:off x="457200" y="1219200"/>
+            <a:ext cx="11277600" cy="19050"/>
+          </a:xfrm>
+          <a:prstGeom xmlns:a="http://schemas.openxmlformats.org/drawingml/2006/main" prst="rect">
+            <a:avLst/>
+          </a:prstGeom>
+          <a:solidFill xmlns:a="http://schemas.openxmlformats.org/drawingml/2006/main">
+            <a:srgbClr val="B8BCC4"/>
+          </a:solidFill>
+          <a:ln xmlns:a="http://schemas.openxmlformats.org/drawingml/2006/main" w="0">
+            <a:solidFill>
+              <a:srgbClr val="B8BCC4"/>
+            </a:solidFill>
+            <a:prstDash val="solid"/>
+          </a:ln>
+        </p:spPr>
+      </p:sp>
+      <p:sp>
+        <p:nvSpPr>
+          <p:cNvPr id="4" name="">
+            <a:extLst xmlns:a="http://schemas.openxmlformats.org/drawingml/2006/main">
+              <a:ext uri="{FF2B5EF4-FFF2-40B4-BE49-F238E27FC236}">
+                <a16:creationId xmlns:a16="http://schemas.microsoft.com/office/drawing/2014/main" id="{0A1B81B7-9B50-474A-A51B-1EC84F201B50}"/>
+              </a:ext>
+            </a:extLst>
+          </p:cNvPr>
+          <p:cNvSpPr>
+            <a:spLocks xmlns:a="http://schemas.openxmlformats.org/drawingml/2006/main" noGrp="1"/>
+          </p:cNvSpPr>
+          <p:nvPr/>
+        </p:nvSpPr>
+        <p:spPr>
+          <a:xfrm xmlns:a="http://schemas.openxmlformats.org/drawingml/2006/main">
+            <a:off x="457200" y="6515100"/>
+            <a:ext cx="7810500" cy="161925"/>
+          </a:xfrm>
+          <a:prstGeom xmlns:a="http://schemas.openxmlformats.org/drawingml/2006/main" prst="rect">
+            <a:avLst/>
+          </a:prstGeom>
+          <a:noFill xmlns:a="http://schemas.openxmlformats.org/drawingml/2006/main"/>
+          <a:ln xmlns:a="http://schemas.openxmlformats.org/drawingml/2006/main" w="0">
+            <a:noFill/>
+            <a:prstDash val="solid"/>
+          </a:ln>
+        </p:spPr>
+        <p:txBody>
+          <a:bodyPr xmlns:a="http://schemas.openxmlformats.org/drawingml/2006/main" anchor="t"/>
+          <a:lstStyle xmlns:a="http://schemas.openxmlformats.org/drawingml/2006/main"/>
+          <a:p xmlns:a="http://schemas.openxmlformats.org/drawingml/2006/main">
+            <a:pPr algn="l">
+              <a:defRPr sz="900" b="0">
+                <a:solidFill>
+                  <a:srgbClr val="667386"/>
+                </a:solidFill>
+              </a:defRPr>
+            </a:pPr>
+            <a:r>
+              <a:rPr sz="900" b="0">
+                <a:solidFill>
+                  <a:srgbClr val="667386"/>
+                </a:solidFill>
+              </a:rPr>
+              <a:t>One-shot untouched time · adjusted daily bars · frozen 2024-01-02–2026-06-23</a:t>
+            </a:r>
+          </a:p>
+        </p:txBody>
+      </p:sp>
+      <p:sp>
+        <p:nvSpPr>
+          <p:cNvPr id="5" name="">
+            <a:extLst xmlns:a="http://schemas.openxmlformats.org/drawingml/2006/main">
+              <a:ext uri="{FF2B5EF4-FFF2-40B4-BE49-F238E27FC236}">
+                <a16:creationId xmlns:a16="http://schemas.microsoft.com/office/drawing/2014/main" id="{7119CF1D-C34C-4590-AD14-176F3902C566}"/>
+              </a:ext>
+            </a:extLst>
+          </p:cNvPr>
+          <p:cNvSpPr>
+            <a:spLocks xmlns:a="http://schemas.openxmlformats.org/drawingml/2006/main" noGrp="1"/>
+          </p:cNvSpPr>
+          <p:nvPr/>
+        </p:nvSpPr>
+        <p:spPr>
+          <a:xfrm xmlns:a="http://schemas.openxmlformats.org/drawingml/2006/main">
+            <a:off x="10858500" y="6496050"/>
+            <a:ext cx="876300" cy="171450"/>
+          </a:xfrm>
+          <a:prstGeom xmlns:a="http://schemas.openxmlformats.org/drawingml/2006/main" prst="rect">
+            <a:avLst/>
+          </a:prstGeom>
+          <a:noFill xmlns:a="http://schemas.openxmlformats.org/drawingml/2006/main"/>
+          <a:ln xmlns:a="http://schemas.openxmlformats.org/drawingml/2006/main" w="0">
+            <a:noFill/>
+            <a:prstDash val="solid"/>
+          </a:ln>
+        </p:spPr>
+        <p:txBody>
+          <a:bodyPr xmlns:a="http://schemas.openxmlformats.org/drawingml/2006/main" anchor="t"/>
+          <a:lstStyle xmlns:a="http://schemas.openxmlformats.org/drawingml/2006/main"/>
+          <a:p xmlns:a="http://schemas.openxmlformats.org/drawingml/2006/main">
+            <a:pPr algn="r">
+              <a:defRPr sz="900" b="0">
+                <a:solidFill>
+                  <a:srgbClr val="667386"/>
+                </a:solidFill>
+              </a:defRPr>
+            </a:pPr>
+            <a:r>
+              <a:rPr sz="900" b="0">
+                <a:solidFill>
+                  <a:srgbClr val="667386"/>
+                </a:solidFill>
+              </a:rPr>
+              <a:t>26</a:t>
+            </a:r>
+          </a:p>
+        </p:txBody>
+      </p:sp>
+      <p:pic>
+        <p:nvPicPr>
+          <p:cNvPr id="14" name=""/>
+          <p:cNvPicPr>
+            <a:picLocks xmlns:a="http://schemas.openxmlformats.org/drawingml/2006/main" noChangeAspect="1"/>
+          </p:cNvPicPr>
+          <p:nvPr/>
+        </p:nvPicPr>
+        <p:blipFill>
+          <a:blip xmlns:r="http://schemas.openxmlformats.org/officeDocument/2006/relationships" xmlns:a="http://schemas.openxmlformats.org/drawingml/2006/main" r:embed="Ra785ea9c48ed46c4"/>
+          <a:stretch xmlns:a="http://schemas.openxmlformats.org/drawingml/2006/main"/>
+        </p:blipFill>
+        <p:spPr>
+          <a:xfrm xmlns:a="http://schemas.openxmlformats.org/drawingml/2006/main">
+            <a:off x="361950" y="2017939"/>
+            <a:ext cx="5638800" cy="3222171"/>
+          </a:xfrm>
+          <a:prstGeom xmlns:a="http://schemas.openxmlformats.org/drawingml/2006/main" prst="rect">
+            <a:avLst/>
+          </a:prstGeom>
+        </p:spPr>
+      </p:pic>
+      <p:pic>
+        <p:nvPicPr>
+          <p:cNvPr id="15" name=""/>
+          <p:cNvPicPr>
+            <a:picLocks xmlns:a="http://schemas.openxmlformats.org/drawingml/2006/main" noChangeAspect="1"/>
+          </p:cNvPicPr>
+          <p:nvPr/>
+        </p:nvPicPr>
+        <p:blipFill>
+          <a:blip xmlns:r="http://schemas.openxmlformats.org/officeDocument/2006/relationships" xmlns:a="http://schemas.openxmlformats.org/drawingml/2006/main" r:embed="R8813c4d310104713"/>
+          <a:stretch xmlns:a="http://schemas.openxmlformats.org/drawingml/2006/main"/>
+        </p:blipFill>
+        <p:spPr>
+          <a:xfrm xmlns:a="http://schemas.openxmlformats.org/drawingml/2006/main">
+            <a:off x="6191250" y="2017939"/>
+            <a:ext cx="5638800" cy="3222171"/>
+          </a:xfrm>
+          <a:prstGeom xmlns:a="http://schemas.openxmlformats.org/drawingml/2006/main" prst="rect">
+            <a:avLst/>
+          </a:prstGeom>
+        </p:spPr>
+      </p:pic>
+      <p:sp>
+        <p:nvSpPr>
+          <p:cNvPr id="8" name="">
+            <a:extLst xmlns:a="http://schemas.openxmlformats.org/drawingml/2006/main">
+              <a:ext uri="{FF2B5EF4-FFF2-40B4-BE49-F238E27FC236}">
+                <a16:creationId xmlns:a16="http://schemas.microsoft.com/office/drawing/2014/main" id="{A41F230D-BCCE-4461-9961-92C0D4F29330}"/>
+              </a:ext>
+            </a:extLst>
+          </p:cNvPr>
+          <p:cNvSpPr>
+            <a:spLocks xmlns:a="http://schemas.openxmlformats.org/drawingml/2006/main" noGrp="1"/>
+          </p:cNvSpPr>
+          <p:nvPr/>
+        </p:nvSpPr>
+        <p:spPr>
+          <a:xfrm xmlns:a="http://schemas.openxmlformats.org/drawingml/2006/main">
+            <a:off x="800100" y="5981700"/>
+            <a:ext cx="10591800" cy="419100"/>
+          </a:xfrm>
+          <a:prstGeom xmlns:a="http://schemas.openxmlformats.org/drawingml/2006/main" prst="rect">
+            <a:avLst/>
+          </a:prstGeom>
+          <a:noFill xmlns:a="http://schemas.openxmlformats.org/drawingml/2006/main"/>
+          <a:ln xmlns:a="http://schemas.openxmlformats.org/drawingml/2006/main" w="0">
+            <a:noFill/>
+            <a:prstDash val="solid"/>
+          </a:ln>
+        </p:spPr>
+        <p:txBody>
+          <a:bodyPr xmlns:a="http://schemas.openxmlformats.org/drawingml/2006/main" anchor="t"/>
+          <a:lstStyle xmlns:a="http://schemas.openxmlformats.org/drawingml/2006/main"/>
+          <a:p xmlns:a="http://schemas.openxmlformats.org/drawingml/2006/main">
+            <a:pPr algn="ctr">
+              <a:defRPr sz="1350" b="1">
+                <a:solidFill>
+                  <a:srgbClr val="24364B"/>
+                </a:solidFill>
+              </a:defRPr>
+            </a:pPr>
+            <a:r>
+              <a:rPr sz="1350" b="1">
+                <a:solidFill>
+                  <a:srgbClr val="24364B"/>
+                </a:solidFill>
+              </a:rPr>
+              <a:t>The rule spent much of 2025 underwater, then recovered on a +21.6% late trade. A final equity level above 1 does not establish incremental edge.</a:t>
+            </a:r>
+          </a:p>
+        </p:txBody>
+      </p:sp>
+    </p:spTree>
+    <p:extLst>
+      <p:ext uri="{BB962C8B-B14F-4D97-AF65-F5344CB8AC3E}">
+        <p14:creationId xmlns:p14="http://schemas.microsoft.com/office/powerpoint/2010/main" val="1531722045"/>
+      </p:ext>
+    </p:extLst>
+  </p:cSld>
+</p:sld>
+</file>
+
+<file path=ppt/slides/slide27.xml><?xml version="1.0" encoding="utf-8"?>
+<p:sld xmlns:p="http://schemas.openxmlformats.org/presentationml/2006/main">
+  <p:cSld>
+    <p:bg>
+      <p:bgPr>
+        <a:solidFill xmlns:a="http://schemas.openxmlformats.org/drawingml/2006/main">
+          <a:srgbClr val="FFFFFF"/>
+        </a:solidFill>
+      </p:bgPr>
+    </p:bg>
+    <p:spTree>
+      <p:nvGrpSpPr>
+        <p:cNvPr id="1" name=""/>
+        <p:cNvGrpSpPr/>
+        <p:nvPr/>
+      </p:nvGrpSpPr>
+      <p:grpSpPr>
+        <a:xfrm xmlns:a="http://schemas.openxmlformats.org/drawingml/2006/main"/>
+      </p:grpSpPr>
+      <p:sp>
+        <p:nvSpPr>
+          <p:cNvPr id="7" name="">
+            <a:extLst xmlns:a="http://schemas.openxmlformats.org/drawingml/2006/main">
+              <a:ext uri="{FF2B5EF4-FFF2-40B4-BE49-F238E27FC236}">
+                <a16:creationId xmlns:a16="http://schemas.microsoft.com/office/drawing/2014/main" id="{08D581FA-520D-486F-8069-4926D367B987}"/>
+              </a:ext>
+            </a:extLst>
+          </p:cNvPr>
+          <p:cNvSpPr>
+            <a:spLocks xmlns:a="http://schemas.openxmlformats.org/drawingml/2006/main" noGrp="1"/>
+          </p:cNvSpPr>
+          <p:nvPr/>
+        </p:nvSpPr>
+        <p:spPr>
+          <a:xfrm xmlns:a="http://schemas.openxmlformats.org/drawingml/2006/main">
+            <a:off x="457200" y="238125"/>
+            <a:ext cx="6191250" cy="190500"/>
+          </a:xfrm>
+          <a:prstGeom xmlns:a="http://schemas.openxmlformats.org/drawingml/2006/main" prst="rect">
+            <a:avLst/>
+          </a:prstGeom>
+          <a:noFill xmlns:a="http://schemas.openxmlformats.org/drawingml/2006/main"/>
+          <a:ln xmlns:a="http://schemas.openxmlformats.org/drawingml/2006/main" w="0">
+            <a:noFill/>
+            <a:prstDash val="solid"/>
+          </a:ln>
+        </p:spPr>
+        <p:txBody>
+          <a:bodyPr xmlns:a="http://schemas.openxmlformats.org/drawingml/2006/main" anchor="t"/>
+          <a:lstStyle xmlns:a="http://schemas.openxmlformats.org/drawingml/2006/main"/>
+          <a:p xmlns:a="http://schemas.openxmlformats.org/drawingml/2006/main">
+            <a:pPr algn="l">
+              <a:defRPr sz="1050" b="1">
+                <a:solidFill>
+                  <a:srgbClr val="667386"/>
+                </a:solidFill>
+              </a:defRPr>
+            </a:pPr>
+            <a:r>
+              <a:rPr sz="1050" b="1">
+                <a:solidFill>
+                  <a:srgbClr val="667386"/>
+                </a:solidFill>
+              </a:rPr>
+              <a:t>OPERATOR HYPOTHESIS LAB · NVDA CONFIRMATION</a:t>
+            </a:r>
+          </a:p>
+        </p:txBody>
+      </p:sp>
+      <p:sp>
+        <p:nvSpPr>
+          <p:cNvPr id="2" name="">
+            <a:extLst xmlns:a="http://schemas.openxmlformats.org/drawingml/2006/main">
+              <a:ext uri="{FF2B5EF4-FFF2-40B4-BE49-F238E27FC236}">
+                <a16:creationId xmlns:a16="http://schemas.microsoft.com/office/drawing/2014/main" id="{68E40C7D-C147-4388-9274-34011AF04932}"/>
+              </a:ext>
+            </a:extLst>
+          </p:cNvPr>
+          <p:cNvSpPr>
+            <a:spLocks xmlns:a="http://schemas.openxmlformats.org/drawingml/2006/main" noGrp="1"/>
+          </p:cNvSpPr>
+          <p:nvPr/>
+        </p:nvSpPr>
+        <p:spPr>
+          <a:xfrm xmlns:a="http://schemas.openxmlformats.org/drawingml/2006/main">
+            <a:off x="457200" y="523875"/>
+            <a:ext cx="11049000" cy="590550"/>
+          </a:xfrm>
+          <a:prstGeom xmlns:a="http://schemas.openxmlformats.org/drawingml/2006/main" prst="rect">
+            <a:avLst/>
+          </a:prstGeom>
+          <a:noFill xmlns:a="http://schemas.openxmlformats.org/drawingml/2006/main"/>
+          <a:ln xmlns:a="http://schemas.openxmlformats.org/drawingml/2006/main" w="0">
+            <a:noFill/>
+            <a:prstDash val="solid"/>
+          </a:ln>
+        </p:spPr>
+        <p:txBody>
+          <a:bodyPr xmlns:a="http://schemas.openxmlformats.org/drawingml/2006/main" anchor="t"/>
+          <a:lstStyle xmlns:a="http://schemas.openxmlformats.org/drawingml/2006/main"/>
+          <a:p xmlns:a="http://schemas.openxmlformats.org/drawingml/2006/main">
+            <a:pPr algn="l">
+              <a:defRPr sz="2925" b="1">
+                <a:solidFill>
+                  <a:srgbClr val="000000"/>
+                </a:solidFill>
+              </a:defRPr>
+            </a:pPr>
+            <a:r>
+              <a:rPr sz="2925" b="1">
+                <a:solidFill>
+                  <a:srgbClr val="000000"/>
+                </a:solidFill>
+              </a:rPr>
+              <a:t>The trade paths do not reveal a stable rebound shape</a:t>
+            </a:r>
+          </a:p>
+        </p:txBody>
+      </p:sp>
+      <p:sp>
+        <p:nvSpPr>
+          <p:cNvPr id="3" name="">
+            <a:extLst xmlns:a="http://schemas.openxmlformats.org/drawingml/2006/main">
+              <a:ext uri="{FF2B5EF4-FFF2-40B4-BE49-F238E27FC236}">
+                <a16:creationId xmlns:a16="http://schemas.microsoft.com/office/drawing/2014/main" id="{43408F00-B46B-4D6D-B571-63A87022C5A5}"/>
+              </a:ext>
+            </a:extLst>
+          </p:cNvPr>
+          <p:cNvSpPr>
+            <a:spLocks xmlns:a="http://schemas.openxmlformats.org/drawingml/2006/main" noGrp="1"/>
+          </p:cNvSpPr>
+          <p:nvPr/>
+        </p:nvSpPr>
+        <p:spPr>
+          <a:xfrm xmlns:a="http://schemas.openxmlformats.org/drawingml/2006/main">
+            <a:off x="457200" y="1219200"/>
+            <a:ext cx="11277600" cy="19050"/>
+          </a:xfrm>
+          <a:prstGeom xmlns:a="http://schemas.openxmlformats.org/drawingml/2006/main" prst="rect">
+            <a:avLst/>
+          </a:prstGeom>
+          <a:solidFill xmlns:a="http://schemas.openxmlformats.org/drawingml/2006/main">
+            <a:srgbClr val="B8BCC4"/>
+          </a:solidFill>
+          <a:ln xmlns:a="http://schemas.openxmlformats.org/drawingml/2006/main" w="0">
+            <a:solidFill>
+              <a:srgbClr val="B8BCC4"/>
+            </a:solidFill>
+            <a:prstDash val="solid"/>
+          </a:ln>
+        </p:spPr>
+      </p:sp>
+      <p:sp>
+        <p:nvSpPr>
+          <p:cNvPr id="4" name="">
+            <a:extLst xmlns:a="http://schemas.openxmlformats.org/drawingml/2006/main">
+              <a:ext uri="{FF2B5EF4-FFF2-40B4-BE49-F238E27FC236}">
+                <a16:creationId xmlns:a16="http://schemas.microsoft.com/office/drawing/2014/main" id="{BE06B589-57BF-4918-9967-78CDC926CBB5}"/>
+              </a:ext>
+            </a:extLst>
+          </p:cNvPr>
+          <p:cNvSpPr>
+            <a:spLocks xmlns:a="http://schemas.openxmlformats.org/drawingml/2006/main" noGrp="1"/>
+          </p:cNvSpPr>
+          <p:nvPr/>
+        </p:nvSpPr>
+        <p:spPr>
+          <a:xfrm xmlns:a="http://schemas.openxmlformats.org/drawingml/2006/main">
+            <a:off x="457200" y="6515100"/>
+            <a:ext cx="7810500" cy="161925"/>
+          </a:xfrm>
+          <a:prstGeom xmlns:a="http://schemas.openxmlformats.org/drawingml/2006/main" prst="rect">
+            <a:avLst/>
+          </a:prstGeom>
+          <a:noFill xmlns:a="http://schemas.openxmlformats.org/drawingml/2006/main"/>
+          <a:ln xmlns:a="http://schemas.openxmlformats.org/drawingml/2006/main" w="0">
+            <a:noFill/>
+            <a:prstDash val="solid"/>
+          </a:ln>
+        </p:spPr>
+        <p:txBody>
+          <a:bodyPr xmlns:a="http://schemas.openxmlformats.org/drawingml/2006/main" anchor="t"/>
+          <a:lstStyle xmlns:a="http://schemas.openxmlformats.org/drawingml/2006/main"/>
+          <a:p xmlns:a="http://schemas.openxmlformats.org/drawingml/2006/main">
+            <a:pPr algn="l">
+              <a:defRPr sz="900" b="0">
+                <a:solidFill>
+                  <a:srgbClr val="667386"/>
+                </a:solidFill>
+              </a:defRPr>
+            </a:pPr>
+            <a:r>
+              <a:rPr sz="900" b="0">
+                <a:solidFill>
+                  <a:srgbClr val="667386"/>
+                </a:solidFill>
+              </a:rPr>
+              <a:t>One-shot untouched time · adjusted daily bars · frozen 2024-01-02–2026-06-23</a:t>
+            </a:r>
+          </a:p>
+        </p:txBody>
+      </p:sp>
+      <p:sp>
+        <p:nvSpPr>
+          <p:cNvPr id="5" name="">
+            <a:extLst xmlns:a="http://schemas.openxmlformats.org/drawingml/2006/main">
+              <a:ext uri="{FF2B5EF4-FFF2-40B4-BE49-F238E27FC236}">
+                <a16:creationId xmlns:a16="http://schemas.microsoft.com/office/drawing/2014/main" id="{C246D281-25DE-4043-8235-400C199EDC87}"/>
+              </a:ext>
+            </a:extLst>
+          </p:cNvPr>
+          <p:cNvSpPr>
+            <a:spLocks xmlns:a="http://schemas.openxmlformats.org/drawingml/2006/main" noGrp="1"/>
+          </p:cNvSpPr>
+          <p:nvPr/>
+        </p:nvSpPr>
+        <p:spPr>
+          <a:xfrm xmlns:a="http://schemas.openxmlformats.org/drawingml/2006/main">
+            <a:off x="10858500" y="6496050"/>
+            <a:ext cx="876300" cy="171450"/>
+          </a:xfrm>
+          <a:prstGeom xmlns:a="http://schemas.openxmlformats.org/drawingml/2006/main" prst="rect">
+            <a:avLst/>
+          </a:prstGeom>
+          <a:noFill xmlns:a="http://schemas.openxmlformats.org/drawingml/2006/main"/>
+          <a:ln xmlns:a="http://schemas.openxmlformats.org/drawingml/2006/main" w="0">
+            <a:noFill/>
+            <a:prstDash val="solid"/>
+          </a:ln>
+        </p:spPr>
+        <p:txBody>
+          <a:bodyPr xmlns:a="http://schemas.openxmlformats.org/drawingml/2006/main" anchor="t"/>
+          <a:lstStyle xmlns:a="http://schemas.openxmlformats.org/drawingml/2006/main"/>
+          <a:p xmlns:a="http://schemas.openxmlformats.org/drawingml/2006/main">
+            <a:pPr algn="r">
+              <a:defRPr sz="900" b="0">
+                <a:solidFill>
+                  <a:srgbClr val="667386"/>
+                </a:solidFill>
+              </a:defRPr>
+            </a:pPr>
+            <a:r>
+              <a:rPr sz="900" b="0">
+                <a:solidFill>
+                  <a:srgbClr val="667386"/>
+                </a:solidFill>
+              </a:rPr>
+              <a:t>27</a:t>
+            </a:r>
+          </a:p>
+        </p:txBody>
+      </p:sp>
+      <p:pic>
+        <p:nvPicPr>
+          <p:cNvPr id="12" name=""/>
+          <p:cNvPicPr>
+            <a:picLocks xmlns:a="http://schemas.openxmlformats.org/drawingml/2006/main" noChangeAspect="1"/>
+          </p:cNvPicPr>
+          <p:nvPr/>
+        </p:nvPicPr>
+        <p:blipFill>
+          <a:blip xmlns:r="http://schemas.openxmlformats.org/officeDocument/2006/relationships" xmlns:a="http://schemas.openxmlformats.org/drawingml/2006/main" r:embed="R2476124eefc545f0"/>
+          <a:stretch xmlns:a="http://schemas.openxmlformats.org/drawingml/2006/main"/>
+        </p:blipFill>
+        <p:spPr>
+          <a:xfrm xmlns:a="http://schemas.openxmlformats.org/drawingml/2006/main">
+            <a:off x="1896208" y="1371600"/>
+            <a:ext cx="8285285" cy="4895850"/>
+          </a:xfrm>
+          <a:prstGeom xmlns:a="http://schemas.openxmlformats.org/drawingml/2006/main" prst="rect">
+            <a:avLst/>
+          </a:prstGeom>
+        </p:spPr>
+      </p:pic>
+    </p:spTree>
+    <p:extLst>
+      <p:ext uri="{BB962C8B-B14F-4D97-AF65-F5344CB8AC3E}">
+        <p14:creationId xmlns:p14="http://schemas.microsoft.com/office/powerpoint/2010/main" val="2079219341"/>
+      </p:ext>
+    </p:extLst>
+  </p:cSld>
+</p:sld>
+</file>
+
+<file path=ppt/slides/slide28.xml><?xml version="1.0" encoding="utf-8"?>
+<p:sld xmlns:p="http://schemas.openxmlformats.org/presentationml/2006/main">
+  <p:cSld>
+    <p:bg>
+      <p:bgPr>
+        <a:solidFill xmlns:a="http://schemas.openxmlformats.org/drawingml/2006/main">
+          <a:srgbClr val="FFFFFF"/>
+        </a:solidFill>
+      </p:bgPr>
+    </p:bg>
+    <p:spTree>
+      <p:nvGrpSpPr>
+        <p:cNvPr id="1" name=""/>
+        <p:cNvGrpSpPr/>
+        <p:nvPr/>
+      </p:nvGrpSpPr>
+      <p:grpSpPr>
+        <a:xfrm xmlns:a="http://schemas.openxmlformats.org/drawingml/2006/main"/>
+      </p:grpSpPr>
+      <p:sp>
+        <p:nvSpPr>
+          <p:cNvPr id="36" name="">
+            <a:extLst xmlns:a="http://schemas.openxmlformats.org/drawingml/2006/main">
+              <a:ext uri="{FF2B5EF4-FFF2-40B4-BE49-F238E27FC236}">
+                <a16:creationId xmlns:a16="http://schemas.microsoft.com/office/drawing/2014/main" id="{BEE6B572-C7C3-4F39-8511-714E7607E069}"/>
+              </a:ext>
+            </a:extLst>
+          </p:cNvPr>
+          <p:cNvSpPr>
+            <a:spLocks xmlns:a="http://schemas.openxmlformats.org/drawingml/2006/main" noGrp="1"/>
+          </p:cNvSpPr>
+          <p:nvPr/>
+        </p:nvSpPr>
+        <p:spPr>
+          <a:xfrm xmlns:a="http://schemas.openxmlformats.org/drawingml/2006/main">
+            <a:off x="457200" y="238125"/>
+            <a:ext cx="6191250" cy="190500"/>
+          </a:xfrm>
+          <a:prstGeom xmlns:a="http://schemas.openxmlformats.org/drawingml/2006/main" prst="rect">
+            <a:avLst/>
+          </a:prstGeom>
+          <a:noFill xmlns:a="http://schemas.openxmlformats.org/drawingml/2006/main"/>
+          <a:ln xmlns:a="http://schemas.openxmlformats.org/drawingml/2006/main" w="0">
+            <a:noFill/>
+            <a:prstDash val="solid"/>
+          </a:ln>
+        </p:spPr>
+        <p:txBody>
+          <a:bodyPr xmlns:a="http://schemas.openxmlformats.org/drawingml/2006/main" anchor="t"/>
+          <a:lstStyle xmlns:a="http://schemas.openxmlformats.org/drawingml/2006/main"/>
+          <a:p xmlns:a="http://schemas.openxmlformats.org/drawingml/2006/main">
+            <a:pPr algn="l">
+              <a:defRPr sz="1050" b="1">
+                <a:solidFill>
+                  <a:srgbClr val="667386"/>
+                </a:solidFill>
+              </a:defRPr>
+            </a:pPr>
+            <a:r>
+              <a:rPr sz="1050" b="1">
+                <a:solidFill>
+                  <a:srgbClr val="667386"/>
+                </a:solidFill>
+              </a:rPr>
+              <a:t>OPERATOR HYPOTHESIS LAB · NVDA CONFIRMATION</a:t>
+            </a:r>
+          </a:p>
+        </p:txBody>
+      </p:sp>
+      <p:sp>
+        <p:nvSpPr>
+          <p:cNvPr id="2" name="">
+            <a:extLst xmlns:a="http://schemas.openxmlformats.org/drawingml/2006/main">
+              <a:ext uri="{FF2B5EF4-FFF2-40B4-BE49-F238E27FC236}">
+                <a16:creationId xmlns:a16="http://schemas.microsoft.com/office/drawing/2014/main" id="{891076BE-7533-4903-920E-5E2CBCB35CC8}"/>
+              </a:ext>
+            </a:extLst>
+          </p:cNvPr>
+          <p:cNvSpPr>
+            <a:spLocks xmlns:a="http://schemas.openxmlformats.org/drawingml/2006/main" noGrp="1"/>
+          </p:cNvSpPr>
+          <p:nvPr/>
+        </p:nvSpPr>
+        <p:spPr>
+          <a:xfrm xmlns:a="http://schemas.openxmlformats.org/drawingml/2006/main">
+            <a:off x="457200" y="523875"/>
+            <a:ext cx="11049000" cy="590550"/>
+          </a:xfrm>
+          <a:prstGeom xmlns:a="http://schemas.openxmlformats.org/drawingml/2006/main" prst="rect">
+            <a:avLst/>
+          </a:prstGeom>
+          <a:noFill xmlns:a="http://schemas.openxmlformats.org/drawingml/2006/main"/>
+          <a:ln xmlns:a="http://schemas.openxmlformats.org/drawingml/2006/main" w="0">
+            <a:noFill/>
+            <a:prstDash val="solid"/>
+          </a:ln>
+        </p:spPr>
+        <p:txBody>
+          <a:bodyPr xmlns:a="http://schemas.openxmlformats.org/drawingml/2006/main" anchor="t"/>
+          <a:lstStyle xmlns:a="http://schemas.openxmlformats.org/drawingml/2006/main"/>
+          <a:p xmlns:a="http://schemas.openxmlformats.org/drawingml/2006/main">
+            <a:pPr algn="l">
+              <a:defRPr sz="2925" b="1">
+                <a:solidFill>
+                  <a:srgbClr val="000000"/>
+                </a:solidFill>
+              </a:defRPr>
+            </a:pPr>
+            <a:r>
+              <a:rPr sz="2925" b="1">
+                <a:solidFill>
+                  <a:srgbClr val="000000"/>
+                </a:solidFill>
+              </a:rPr>
+              <a:t>The exact calm-pullback rebound rule stops</a:t>
+            </a:r>
+          </a:p>
+        </p:txBody>
+      </p:sp>
+      <p:sp>
+        <p:nvSpPr>
+          <p:cNvPr id="3" name="">
+            <a:extLst xmlns:a="http://schemas.openxmlformats.org/drawingml/2006/main">
+              <a:ext uri="{FF2B5EF4-FFF2-40B4-BE49-F238E27FC236}">
+                <a16:creationId xmlns:a16="http://schemas.microsoft.com/office/drawing/2014/main" id="{9083416F-1E20-44F5-B0BD-A009FC15CEFB}"/>
+              </a:ext>
+            </a:extLst>
+          </p:cNvPr>
+          <p:cNvSpPr>
+            <a:spLocks xmlns:a="http://schemas.openxmlformats.org/drawingml/2006/main" noGrp="1"/>
+          </p:cNvSpPr>
+          <p:nvPr/>
+        </p:nvSpPr>
+        <p:spPr>
+          <a:xfrm xmlns:a="http://schemas.openxmlformats.org/drawingml/2006/main">
+            <a:off x="457200" y="1219200"/>
+            <a:ext cx="11277600" cy="19050"/>
+          </a:xfrm>
+          <a:prstGeom xmlns:a="http://schemas.openxmlformats.org/drawingml/2006/main" prst="rect">
+            <a:avLst/>
+          </a:prstGeom>
+          <a:solidFill xmlns:a="http://schemas.openxmlformats.org/drawingml/2006/main">
+            <a:srgbClr val="B8BCC4"/>
+          </a:solidFill>
+          <a:ln xmlns:a="http://schemas.openxmlformats.org/drawingml/2006/main" w="0">
+            <a:solidFill>
+              <a:srgbClr val="B8BCC4"/>
+            </a:solidFill>
+            <a:prstDash val="solid"/>
+          </a:ln>
+        </p:spPr>
+      </p:sp>
+      <p:sp>
+        <p:nvSpPr>
+          <p:cNvPr id="4" name="">
+            <a:extLst xmlns:a="http://schemas.openxmlformats.org/drawingml/2006/main">
+              <a:ext uri="{FF2B5EF4-FFF2-40B4-BE49-F238E27FC236}">
+                <a16:creationId xmlns:a16="http://schemas.microsoft.com/office/drawing/2014/main" id="{6132976A-6017-4A7B-BE65-9C0F3E4842A3}"/>
+              </a:ext>
+            </a:extLst>
+          </p:cNvPr>
+          <p:cNvSpPr>
+            <a:spLocks xmlns:a="http://schemas.openxmlformats.org/drawingml/2006/main" noGrp="1"/>
+          </p:cNvSpPr>
+          <p:nvPr/>
+        </p:nvSpPr>
+        <p:spPr>
+          <a:xfrm xmlns:a="http://schemas.openxmlformats.org/drawingml/2006/main">
+            <a:off x="457200" y="6515100"/>
+            <a:ext cx="7810500" cy="161925"/>
+          </a:xfrm>
+          <a:prstGeom xmlns:a="http://schemas.openxmlformats.org/drawingml/2006/main" prst="rect">
+            <a:avLst/>
+          </a:prstGeom>
+          <a:noFill xmlns:a="http://schemas.openxmlformats.org/drawingml/2006/main"/>
+          <a:ln xmlns:a="http://schemas.openxmlformats.org/drawingml/2006/main" w="0">
+            <a:noFill/>
+            <a:prstDash val="solid"/>
+          </a:ln>
+        </p:spPr>
+        <p:txBody>
+          <a:bodyPr xmlns:a="http://schemas.openxmlformats.org/drawingml/2006/main" anchor="t"/>
+          <a:lstStyle xmlns:a="http://schemas.openxmlformats.org/drawingml/2006/main"/>
+          <a:p xmlns:a="http://schemas.openxmlformats.org/drawingml/2006/main">
+            <a:pPr algn="l">
+              <a:defRPr sz="900" b="0">
+                <a:solidFill>
+                  <a:srgbClr val="667386"/>
+                </a:solidFill>
+              </a:defRPr>
+            </a:pPr>
+            <a:r>
+              <a:rPr sz="900" b="0">
+                <a:solidFill>
+                  <a:srgbClr val="667386"/>
+                </a:solidFill>
+              </a:rPr>
+              <a:t>One-shot untouched time · adjusted daily bars · frozen 2024-01-02–2026-06-23</a:t>
+            </a:r>
+          </a:p>
+        </p:txBody>
+      </p:sp>
+      <p:sp>
+        <p:nvSpPr>
+          <p:cNvPr id="5" name="">
+            <a:extLst xmlns:a="http://schemas.openxmlformats.org/drawingml/2006/main">
+              <a:ext uri="{FF2B5EF4-FFF2-40B4-BE49-F238E27FC236}">
+                <a16:creationId xmlns:a16="http://schemas.microsoft.com/office/drawing/2014/main" id="{D4DF93F2-CF61-431A-8524-580C8679E8CA}"/>
+              </a:ext>
+            </a:extLst>
+          </p:cNvPr>
+          <p:cNvSpPr>
+            <a:spLocks xmlns:a="http://schemas.openxmlformats.org/drawingml/2006/main" noGrp="1"/>
+          </p:cNvSpPr>
+          <p:nvPr/>
+        </p:nvSpPr>
+        <p:spPr>
+          <a:xfrm xmlns:a="http://schemas.openxmlformats.org/drawingml/2006/main">
+            <a:off x="10858500" y="6496050"/>
+            <a:ext cx="876300" cy="171450"/>
+          </a:xfrm>
+          <a:prstGeom xmlns:a="http://schemas.openxmlformats.org/drawingml/2006/main" prst="rect">
+            <a:avLst/>
+          </a:prstGeom>
+          <a:noFill xmlns:a="http://schemas.openxmlformats.org/drawingml/2006/main"/>
+          <a:ln xmlns:a="http://schemas.openxmlformats.org/drawingml/2006/main" w="0">
+            <a:noFill/>
+            <a:prstDash val="solid"/>
+          </a:ln>
+        </p:spPr>
+        <p:txBody>
+          <a:bodyPr xmlns:a="http://schemas.openxmlformats.org/drawingml/2006/main" anchor="t"/>
+          <a:lstStyle xmlns:a="http://schemas.openxmlformats.org/drawingml/2006/main"/>
+          <a:p xmlns:a="http://schemas.openxmlformats.org/drawingml/2006/main">
+            <a:pPr algn="r">
+              <a:defRPr sz="900" b="0">
+                <a:solidFill>
+                  <a:srgbClr val="667386"/>
+                </a:solidFill>
+              </a:defRPr>
+            </a:pPr>
+            <a:r>
+              <a:rPr sz="900" b="0">
+                <a:solidFill>
+                  <a:srgbClr val="667386"/>
+                </a:solidFill>
+              </a:rPr>
+              <a:t>28</a:t>
+            </a:r>
+          </a:p>
+        </p:txBody>
+      </p:sp>
+      <p:sp>
+        <p:nvSpPr>
+          <p:cNvPr id="6" name="">
+            <a:extLst xmlns:a="http://schemas.openxmlformats.org/drawingml/2006/main">
+              <a:ext uri="{FF2B5EF4-FFF2-40B4-BE49-F238E27FC236}">
+                <a16:creationId xmlns:a16="http://schemas.microsoft.com/office/drawing/2014/main" id="{2496CF3E-8FB1-40B9-AB83-E93831DF093F}"/>
+              </a:ext>
+            </a:extLst>
+          </p:cNvPr>
+          <p:cNvSpPr>
+            <a:spLocks xmlns:a="http://schemas.openxmlformats.org/drawingml/2006/main" noGrp="1"/>
+          </p:cNvSpPr>
+          <p:nvPr/>
+        </p:nvSpPr>
+        <p:spPr>
+          <a:xfrm xmlns:a="http://schemas.openxmlformats.org/drawingml/2006/main">
+            <a:off x="552450" y="1562100"/>
+            <a:ext cx="11087100" cy="914400"/>
+          </a:xfrm>
+          <a:prstGeom xmlns:a="http://schemas.openxmlformats.org/drawingml/2006/main" prst="rect">
+            <a:avLst/>
+          </a:prstGeom>
+          <a:solidFill xmlns:a="http://schemas.openxmlformats.org/drawingml/2006/main">
+            <a:srgbClr val="F6E5E1"/>
+          </a:solidFill>
+          <a:ln xmlns:a="http://schemas.openxmlformats.org/drawingml/2006/main" w="0">
+            <a:solidFill>
+              <a:srgbClr val="F6E5E1"/>
+            </a:solidFill>
+            <a:prstDash val="solid"/>
+          </a:ln>
+        </p:spPr>
+      </p:sp>
+      <p:sp>
+        <p:nvSpPr>
+          <p:cNvPr id="7" name="">
+            <a:extLst xmlns:a="http://schemas.openxmlformats.org/drawingml/2006/main">
+              <a:ext uri="{FF2B5EF4-FFF2-40B4-BE49-F238E27FC236}">
+                <a16:creationId xmlns:a16="http://schemas.microsoft.com/office/drawing/2014/main" id="{DC9A6C23-DD5D-487E-BF21-323F29A93A7E}"/>
+              </a:ext>
+            </a:extLst>
+          </p:cNvPr>
+          <p:cNvSpPr>
+            <a:spLocks xmlns:a="http://schemas.openxmlformats.org/drawingml/2006/main" noGrp="1"/>
+          </p:cNvSpPr>
+          <p:nvPr/>
+        </p:nvSpPr>
+        <p:spPr>
+          <a:xfrm xmlns:a="http://schemas.openxmlformats.org/drawingml/2006/main">
+            <a:off x="819150" y="1809750"/>
+            <a:ext cx="10553700" cy="419100"/>
+          </a:xfrm>
+          <a:prstGeom xmlns:a="http://schemas.openxmlformats.org/drawingml/2006/main" prst="rect">
+            <a:avLst/>
+          </a:prstGeom>
+          <a:noFill xmlns:a="http://schemas.openxmlformats.org/drawingml/2006/main"/>
+          <a:ln xmlns:a="http://schemas.openxmlformats.org/drawingml/2006/main" w="0">
+            <a:noFill/>
+            <a:prstDash val="solid"/>
+          </a:ln>
+        </p:spPr>
+        <p:txBody>
+          <a:bodyPr xmlns:a="http://schemas.openxmlformats.org/drawingml/2006/main" anchor="t"/>
+          <a:lstStyle xmlns:a="http://schemas.openxmlformats.org/drawingml/2006/main"/>
+          <a:p xmlns:a="http://schemas.openxmlformats.org/drawingml/2006/main">
+            <a:pPr algn="ctr">
+              <a:defRPr sz="2325" b="1">
+                <a:solidFill>
+                  <a:srgbClr val="B44738"/>
+                </a:solidFill>
+              </a:defRPr>
+            </a:pPr>
+            <a:r>
+              <a:rPr sz="2325" b="1">
+                <a:solidFill>
+                  <a:srgbClr val="B44738"/>
+                </a:solidFill>
+              </a:rPr>
+              <a:t>STOP_CONFIRMATION_GATES_FAILED</a:t>
+            </a:r>
+          </a:p>
+        </p:txBody>
+      </p:sp>
+      <p:sp>
+        <p:nvSpPr>
+          <p:cNvPr id="8" name="">
+            <a:extLst xmlns:a="http://schemas.openxmlformats.org/drawingml/2006/main">
+              <a:ext uri="{FF2B5EF4-FFF2-40B4-BE49-F238E27FC236}">
+                <a16:creationId xmlns:a16="http://schemas.microsoft.com/office/drawing/2014/main" id="{28136C19-9556-43CE-95FD-3E7CB4852B24}"/>
+              </a:ext>
+            </a:extLst>
+          </p:cNvPr>
+          <p:cNvSpPr>
+            <a:spLocks xmlns:a="http://schemas.openxmlformats.org/drawingml/2006/main" noGrp="1"/>
+          </p:cNvSpPr>
+          <p:nvPr/>
+        </p:nvSpPr>
+        <p:spPr>
+          <a:xfrm xmlns:a="http://schemas.openxmlformats.org/drawingml/2006/main">
+            <a:off x="552450" y="2895600"/>
+            <a:ext cx="3333750" cy="361950"/>
+          </a:xfrm>
+          <a:prstGeom xmlns:a="http://schemas.openxmlformats.org/drawingml/2006/main" prst="rect">
+            <a:avLst/>
+          </a:prstGeom>
+          <a:noFill xmlns:a="http://schemas.openxmlformats.org/drawingml/2006/main"/>
+          <a:ln xmlns:a="http://schemas.openxmlformats.org/drawingml/2006/main" w="0">
+            <a:noFill/>
+            <a:prstDash val="solid"/>
+          </a:ln>
+        </p:spPr>
+        <p:txBody>
+          <a:bodyPr xmlns:a="http://schemas.openxmlformats.org/drawingml/2006/main" anchor="t"/>
+          <a:lstStyle xmlns:a="http://schemas.openxmlformats.org/drawingml/2006/main"/>
+          <a:p xmlns:a="http://schemas.openxmlformats.org/drawingml/2006/main">
+            <a:pPr algn="l">
+              <a:defRPr sz="2100" b="1">
+                <a:solidFill>
+                  <a:srgbClr val="000000"/>
+                </a:solidFill>
+              </a:defRPr>
+            </a:pPr>
+            <a:r>
+              <a:rPr sz="2100" b="1">
+                <a:solidFill>
+                  <a:srgbClr val="000000"/>
+                </a:solidFill>
+              </a:rPr>
+              <a:t>Predeclared gates</a:t>
+            </a:r>
+          </a:p>
+        </p:txBody>
+      </p:sp>
+      <p:sp>
+        <p:nvSpPr>
+          <p:cNvPr id="9" name="">
+            <a:extLst xmlns:a="http://schemas.openxmlformats.org/drawingml/2006/main">
+              <a:ext uri="{FF2B5EF4-FFF2-40B4-BE49-F238E27FC236}">
+                <a16:creationId xmlns:a16="http://schemas.microsoft.com/office/drawing/2014/main" id="{330A7571-82C1-4BEB-AB90-851936E16394}"/>
+              </a:ext>
+            </a:extLst>
+          </p:cNvPr>
+          <p:cNvSpPr>
+            <a:spLocks xmlns:a="http://schemas.openxmlformats.org/drawingml/2006/main" noGrp="1"/>
+          </p:cNvSpPr>
+          <p:nvPr/>
+        </p:nvSpPr>
+        <p:spPr>
+          <a:xfrm xmlns:a="http://schemas.openxmlformats.org/drawingml/2006/main">
+            <a:off x="685800" y="3429000"/>
+            <a:ext cx="876300" cy="323850"/>
+          </a:xfrm>
+          <a:prstGeom xmlns:a="http://schemas.openxmlformats.org/drawingml/2006/main" prst="rect">
+            <a:avLst/>
+          </a:prstGeom>
+          <a:solidFill xmlns:a="http://schemas.openxmlformats.org/drawingml/2006/main">
+            <a:srgbClr val="F6E5E1"/>
+          </a:solidFill>
+          <a:ln xmlns:a="http://schemas.openxmlformats.org/drawingml/2006/main" w="0">
+            <a:solidFill>
+              <a:srgbClr val="F6E5E1"/>
+            </a:solidFill>
+            <a:prstDash val="solid"/>
+          </a:ln>
+        </p:spPr>
+      </p:sp>
+      <p:sp>
+        <p:nvSpPr>
+          <p:cNvPr id="10" name="">
+            <a:extLst xmlns:a="http://schemas.openxmlformats.org/drawingml/2006/main">
+              <a:ext uri="{FF2B5EF4-FFF2-40B4-BE49-F238E27FC236}">
+                <a16:creationId xmlns:a16="http://schemas.microsoft.com/office/drawing/2014/main" id="{85CA4B5E-C841-4726-96C6-400D1B4D6BC3}"/>
+              </a:ext>
+            </a:extLst>
+          </p:cNvPr>
+          <p:cNvSpPr>
+            <a:spLocks xmlns:a="http://schemas.openxmlformats.org/drawingml/2006/main" noGrp="1"/>
+          </p:cNvSpPr>
+          <p:nvPr/>
+        </p:nvSpPr>
+        <p:spPr>
+          <a:xfrm xmlns:a="http://schemas.openxmlformats.org/drawingml/2006/main">
+            <a:off x="742950" y="3495675"/>
+            <a:ext cx="762000" cy="190500"/>
+          </a:xfrm>
+          <a:prstGeom xmlns:a="http://schemas.openxmlformats.org/drawingml/2006/main" prst="rect">
+            <a:avLst/>
+          </a:prstGeom>
+          <a:noFill xmlns:a="http://schemas.openxmlformats.org/drawingml/2006/main"/>
+          <a:ln xmlns:a="http://schemas.openxmlformats.org/drawingml/2006/main" w="0">
+            <a:noFill/>
+            <a:prstDash val="solid"/>
+          </a:ln>
+        </p:spPr>
+        <p:txBody>
+          <a:bodyPr xmlns:a="http://schemas.openxmlformats.org/drawingml/2006/main" anchor="t"/>
+          <a:lstStyle xmlns:a="http://schemas.openxmlformats.org/drawingml/2006/main"/>
+          <a:p xmlns:a="http://schemas.openxmlformats.org/drawingml/2006/main">
+            <a:pPr algn="ctr">
+              <a:defRPr sz="1050" b="1">
+                <a:solidFill>
+                  <a:srgbClr val="B44738"/>
+                </a:solidFill>
+              </a:defRPr>
+            </a:pPr>
+            <a:r>
+              <a:rPr sz="1050" b="1">
+                <a:solidFill>
+                  <a:srgbClr val="B44738"/>
+                </a:solidFill>
+              </a:rPr>
+              <a:t>FAIL</a:t>
+            </a:r>
+          </a:p>
+        </p:txBody>
+      </p:sp>
+      <p:sp>
+        <p:nvSpPr>
+          <p:cNvPr id="11" name="">
+            <a:extLst xmlns:a="http://schemas.openxmlformats.org/drawingml/2006/main">
+              <a:ext uri="{FF2B5EF4-FFF2-40B4-BE49-F238E27FC236}">
+                <a16:creationId xmlns:a16="http://schemas.microsoft.com/office/drawing/2014/main" id="{726335A8-6458-43F6-A7DB-DFF1E71BB4A1}"/>
+              </a:ext>
+            </a:extLst>
+          </p:cNvPr>
+          <p:cNvSpPr>
+            <a:spLocks xmlns:a="http://schemas.openxmlformats.org/drawingml/2006/main" noGrp="1"/>
+          </p:cNvSpPr>
+          <p:nvPr/>
+        </p:nvSpPr>
+        <p:spPr>
+          <a:xfrm xmlns:a="http://schemas.openxmlformats.org/drawingml/2006/main">
+            <a:off x="1771650" y="3476625"/>
+            <a:ext cx="2571750" cy="247650"/>
+          </a:xfrm>
+          <a:prstGeom xmlns:a="http://schemas.openxmlformats.org/drawingml/2006/main" prst="rect">
+            <a:avLst/>
+          </a:prstGeom>
+          <a:noFill xmlns:a="http://schemas.openxmlformats.org/drawingml/2006/main"/>
+          <a:ln xmlns:a="http://schemas.openxmlformats.org/drawingml/2006/main" w="0">
+            <a:noFill/>
+            <a:prstDash val="solid"/>
+          </a:ln>
+        </p:spPr>
+        <p:txBody>
+          <a:bodyPr xmlns:a="http://schemas.openxmlformats.org/drawingml/2006/main" anchor="t"/>
+          <a:lstStyle xmlns:a="http://schemas.openxmlformats.org/drawingml/2006/main"/>
+          <a:p xmlns:a="http://schemas.openxmlformats.org/drawingml/2006/main">
+            <a:pPr algn="l">
+              <a:defRPr sz="1425" b="1">
+                <a:solidFill>
+                  <a:srgbClr val="000000"/>
+                </a:solidFill>
+              </a:defRPr>
+            </a:pPr>
+            <a:r>
+              <a:rPr sz="1425" b="1">
+                <a:solidFill>
+                  <a:srgbClr val="000000"/>
+                </a:solidFill>
+              </a:rPr>
+              <a:t>Minimum sample</a:t>
+            </a:r>
+          </a:p>
+        </p:txBody>
+      </p:sp>
+      <p:sp>
+        <p:nvSpPr>
+          <p:cNvPr id="12" name="">
+            <a:extLst xmlns:a="http://schemas.openxmlformats.org/drawingml/2006/main">
+              <a:ext uri="{FF2B5EF4-FFF2-40B4-BE49-F238E27FC236}">
+                <a16:creationId xmlns:a16="http://schemas.microsoft.com/office/drawing/2014/main" id="{755E05F3-BB81-4574-84CB-98D1FAF4C30A}"/>
+              </a:ext>
+            </a:extLst>
+          </p:cNvPr>
+          <p:cNvSpPr>
+            <a:spLocks xmlns:a="http://schemas.openxmlformats.org/drawingml/2006/main" noGrp="1"/>
+          </p:cNvSpPr>
+          <p:nvPr/>
+        </p:nvSpPr>
+        <p:spPr>
+          <a:xfrm xmlns:a="http://schemas.openxmlformats.org/drawingml/2006/main">
+            <a:off x="4400550" y="3486150"/>
+            <a:ext cx="2190750" cy="228600"/>
+          </a:xfrm>
+          <a:prstGeom xmlns:a="http://schemas.openxmlformats.org/drawingml/2006/main" prst="rect">
+            <a:avLst/>
+          </a:prstGeom>
+          <a:noFill xmlns:a="http://schemas.openxmlformats.org/drawingml/2006/main"/>
+          <a:ln xmlns:a="http://schemas.openxmlformats.org/drawingml/2006/main" w="0">
+            <a:noFill/>
+            <a:prstDash val="solid"/>
+          </a:ln>
+        </p:spPr>
+        <p:txBody>
+          <a:bodyPr xmlns:a="http://schemas.openxmlformats.org/drawingml/2006/main" anchor="t"/>
+          <a:lstStyle xmlns:a="http://schemas.openxmlformats.org/drawingml/2006/main"/>
+          <a:p xmlns:a="http://schemas.openxmlformats.org/drawingml/2006/main">
+            <a:pPr algn="l">
+              <a:defRPr sz="1275" b="0">
+                <a:solidFill>
+                  <a:srgbClr val="667386"/>
+                </a:solidFill>
+              </a:defRPr>
+            </a:pPr>
+            <a:r>
+              <a:rPr sz="1275" b="0">
+                <a:solidFill>
+                  <a:srgbClr val="667386"/>
+                </a:solidFill>
+              </a:rPr>
+              <a:t>9 trades; required 10</a:t>
+            </a:r>
+          </a:p>
+        </p:txBody>
+      </p:sp>
+      <p:sp>
+        <p:nvSpPr>
+          <p:cNvPr id="13" name="">
+            <a:extLst xmlns:a="http://schemas.openxmlformats.org/drawingml/2006/main">
+              <a:ext uri="{FF2B5EF4-FFF2-40B4-BE49-F238E27FC236}">
+                <a16:creationId xmlns:a16="http://schemas.microsoft.com/office/drawing/2014/main" id="{6A65A42E-FBD2-4A13-8E95-EBC48E0E225C}"/>
+              </a:ext>
+            </a:extLst>
+          </p:cNvPr>
+          <p:cNvSpPr>
+            <a:spLocks xmlns:a="http://schemas.openxmlformats.org/drawingml/2006/main" noGrp="1"/>
+          </p:cNvSpPr>
+          <p:nvPr/>
+        </p:nvSpPr>
+        <p:spPr>
+          <a:xfrm xmlns:a="http://schemas.openxmlformats.org/drawingml/2006/main">
+            <a:off x="685800" y="3905250"/>
+            <a:ext cx="876300" cy="323850"/>
+          </a:xfrm>
+          <a:prstGeom xmlns:a="http://schemas.openxmlformats.org/drawingml/2006/main" prst="rect">
+            <a:avLst/>
+          </a:prstGeom>
+          <a:solidFill xmlns:a="http://schemas.openxmlformats.org/drawingml/2006/main">
+            <a:srgbClr val="F6E5E1"/>
+          </a:solidFill>
+          <a:ln xmlns:a="http://schemas.openxmlformats.org/drawingml/2006/main" w="0">
+            <a:solidFill>
+              <a:srgbClr val="F6E5E1"/>
+            </a:solidFill>
+            <a:prstDash val="solid"/>
+          </a:ln>
+        </p:spPr>
+      </p:sp>
+      <p:sp>
+        <p:nvSpPr>
+          <p:cNvPr id="14" name="">
+            <a:extLst xmlns:a="http://schemas.openxmlformats.org/drawingml/2006/main">
+              <a:ext uri="{FF2B5EF4-FFF2-40B4-BE49-F238E27FC236}">
+                <a16:creationId xmlns:a16="http://schemas.microsoft.com/office/drawing/2014/main" id="{7FA36725-99A0-42B7-B982-E9D5857DE140}"/>
+              </a:ext>
+            </a:extLst>
+          </p:cNvPr>
+          <p:cNvSpPr>
+            <a:spLocks xmlns:a="http://schemas.openxmlformats.org/drawingml/2006/main" noGrp="1"/>
+          </p:cNvSpPr>
+          <p:nvPr/>
+        </p:nvSpPr>
+        <p:spPr>
+          <a:xfrm xmlns:a="http://schemas.openxmlformats.org/drawingml/2006/main">
+            <a:off x="742950" y="3971925"/>
+            <a:ext cx="762000" cy="190500"/>
+          </a:xfrm>
+          <a:prstGeom xmlns:a="http://schemas.openxmlformats.org/drawingml/2006/main" prst="rect">
+            <a:avLst/>
+          </a:prstGeom>
+          <a:noFill xmlns:a="http://schemas.openxmlformats.org/drawingml/2006/main"/>
+          <a:ln xmlns:a="http://schemas.openxmlformats.org/drawingml/2006/main" w="0">
+            <a:noFill/>
+            <a:prstDash val="solid"/>
+          </a:ln>
+        </p:spPr>
+        <p:txBody>
+          <a:bodyPr xmlns:a="http://schemas.openxmlformats.org/drawingml/2006/main" anchor="t"/>
+          <a:lstStyle xmlns:a="http://schemas.openxmlformats.org/drawingml/2006/main"/>
+          <a:p xmlns:a="http://schemas.openxmlformats.org/drawingml/2006/main">
+            <a:pPr algn="ctr">
+              <a:defRPr sz="1050" b="1">
+                <a:solidFill>
+                  <a:srgbClr val="B44738"/>
+                </a:solidFill>
+              </a:defRPr>
+            </a:pPr>
+            <a:r>
+              <a:rPr sz="1050" b="1">
+                <a:solidFill>
+                  <a:srgbClr val="B44738"/>
+                </a:solidFill>
+              </a:rPr>
+              <a:t>FAIL</a:t>
+            </a:r>
+          </a:p>
+        </p:txBody>
+      </p:sp>
+      <p:sp>
+        <p:nvSpPr>
+          <p:cNvPr id="15" name="">
+            <a:extLst xmlns:a="http://schemas.openxmlformats.org/drawingml/2006/main">
+              <a:ext uri="{FF2B5EF4-FFF2-40B4-BE49-F238E27FC236}">
+                <a16:creationId xmlns:a16="http://schemas.microsoft.com/office/drawing/2014/main" id="{2F1A3879-69FE-419B-A059-8C2069AEBF94}"/>
+              </a:ext>
+            </a:extLst>
+          </p:cNvPr>
+          <p:cNvSpPr>
+            <a:spLocks xmlns:a="http://schemas.openxmlformats.org/drawingml/2006/main" noGrp="1"/>
+          </p:cNvSpPr>
+          <p:nvPr/>
+        </p:nvSpPr>
+        <p:spPr>
+          <a:xfrm xmlns:a="http://schemas.openxmlformats.org/drawingml/2006/main">
+            <a:off x="1771650" y="3952875"/>
+            <a:ext cx="2571750" cy="247650"/>
+          </a:xfrm>
+          <a:prstGeom xmlns:a="http://schemas.openxmlformats.org/drawingml/2006/main" prst="rect">
+            <a:avLst/>
+          </a:prstGeom>
+          <a:noFill xmlns:a="http://schemas.openxmlformats.org/drawingml/2006/main"/>
+          <a:ln xmlns:a="http://schemas.openxmlformats.org/drawingml/2006/main" w="0">
+            <a:noFill/>
+            <a:prstDash val="solid"/>
+          </a:ln>
+        </p:spPr>
+        <p:txBody>
+          <a:bodyPr xmlns:a="http://schemas.openxmlformats.org/drawingml/2006/main" anchor="t"/>
+          <a:lstStyle xmlns:a="http://schemas.openxmlformats.org/drawingml/2006/main"/>
+          <a:p xmlns:a="http://schemas.openxmlformats.org/drawingml/2006/main">
+            <a:pPr algn="l">
+              <a:defRPr sz="1425" b="1">
+                <a:solidFill>
+                  <a:srgbClr val="000000"/>
+                </a:solidFill>
+              </a:defRPr>
+            </a:pPr>
+            <a:r>
+              <a:rPr sz="1425" b="1">
+                <a:solidFill>
+                  <a:srgbClr val="000000"/>
+                </a:solidFill>
+              </a:rPr>
+              <a:t>Beat drift</a:t>
+            </a:r>
+          </a:p>
+        </p:txBody>
+      </p:sp>
+      <p:sp>
+        <p:nvSpPr>
+          <p:cNvPr id="16" name="">
+            <a:extLst xmlns:a="http://schemas.openxmlformats.org/drawingml/2006/main">
+              <a:ext uri="{FF2B5EF4-FFF2-40B4-BE49-F238E27FC236}">
+                <a16:creationId xmlns:a16="http://schemas.microsoft.com/office/drawing/2014/main" id="{7A1DE9C8-C83A-446A-AB62-B4491CF6DBAA}"/>
+              </a:ext>
+            </a:extLst>
+          </p:cNvPr>
+          <p:cNvSpPr>
+            <a:spLocks xmlns:a="http://schemas.openxmlformats.org/drawingml/2006/main" noGrp="1"/>
+          </p:cNvSpPr>
+          <p:nvPr/>
+        </p:nvSpPr>
+        <p:spPr>
+          <a:xfrm xmlns:a="http://schemas.openxmlformats.org/drawingml/2006/main">
+            <a:off x="4400550" y="3962400"/>
+            <a:ext cx="2190750" cy="228600"/>
+          </a:xfrm>
+          <a:prstGeom xmlns:a="http://schemas.openxmlformats.org/drawingml/2006/main" prst="rect">
+            <a:avLst/>
+          </a:prstGeom>
+          <a:noFill xmlns:a="http://schemas.openxmlformats.org/drawingml/2006/main"/>
+          <a:ln xmlns:a="http://schemas.openxmlformats.org/drawingml/2006/main" w="0">
+            <a:noFill/>
+            <a:prstDash val="solid"/>
+          </a:ln>
+        </p:spPr>
+        <p:txBody>
+          <a:bodyPr xmlns:a="http://schemas.openxmlformats.org/drawingml/2006/main" anchor="t"/>
+          <a:lstStyle xmlns:a="http://schemas.openxmlformats.org/drawingml/2006/main"/>
+          <a:p xmlns:a="http://schemas.openxmlformats.org/drawingml/2006/main">
+            <a:pPr algn="l">
+              <a:defRPr sz="1275" b="0">
+                <a:solidFill>
+                  <a:srgbClr val="667386"/>
+                </a:solidFill>
+              </a:defRPr>
+            </a:pPr>
+            <a:r>
+              <a:rPr sz="1275" b="0">
+                <a:solidFill>
+                  <a:srgbClr val="667386"/>
+                </a:solidFill>
+              </a:rPr>
+              <a:t>1.56% vs 4.44%</a:t>
+            </a:r>
+          </a:p>
+        </p:txBody>
+      </p:sp>
+      <p:sp>
+        <p:nvSpPr>
+          <p:cNvPr id="17" name="">
+            <a:extLst xmlns:a="http://schemas.openxmlformats.org/drawingml/2006/main">
+              <a:ext uri="{FF2B5EF4-FFF2-40B4-BE49-F238E27FC236}">
+                <a16:creationId xmlns:a16="http://schemas.microsoft.com/office/drawing/2014/main" id="{3DEDED15-9643-44DC-BF74-C8FE785F58E4}"/>
+              </a:ext>
+            </a:extLst>
+          </p:cNvPr>
+          <p:cNvSpPr>
+            <a:spLocks xmlns:a="http://schemas.openxmlformats.org/drawingml/2006/main" noGrp="1"/>
+          </p:cNvSpPr>
+          <p:nvPr/>
+        </p:nvSpPr>
+        <p:spPr>
+          <a:xfrm xmlns:a="http://schemas.openxmlformats.org/drawingml/2006/main">
+            <a:off x="685800" y="4381500"/>
+            <a:ext cx="876300" cy="323850"/>
+          </a:xfrm>
+          <a:prstGeom xmlns:a="http://schemas.openxmlformats.org/drawingml/2006/main" prst="rect">
+            <a:avLst/>
+          </a:prstGeom>
+          <a:solidFill xmlns:a="http://schemas.openxmlformats.org/drawingml/2006/main">
+            <a:srgbClr val="E2F1EC"/>
+          </a:solidFill>
+          <a:ln xmlns:a="http://schemas.openxmlformats.org/drawingml/2006/main" w="0">
+            <a:solidFill>
+              <a:srgbClr val="E2F1EC"/>
+            </a:solidFill>
+            <a:prstDash val="solid"/>
+          </a:ln>
+        </p:spPr>
+      </p:sp>
+      <p:sp>
+        <p:nvSpPr>
+          <p:cNvPr id="18" name="">
+            <a:extLst xmlns:a="http://schemas.openxmlformats.org/drawingml/2006/main">
+              <a:ext uri="{FF2B5EF4-FFF2-40B4-BE49-F238E27FC236}">
+                <a16:creationId xmlns:a16="http://schemas.microsoft.com/office/drawing/2014/main" id="{E0C70A46-6CAE-47FF-8BE7-624604C5F60F}"/>
+              </a:ext>
+            </a:extLst>
+          </p:cNvPr>
+          <p:cNvSpPr>
+            <a:spLocks xmlns:a="http://schemas.openxmlformats.org/drawingml/2006/main" noGrp="1"/>
+          </p:cNvSpPr>
+          <p:nvPr/>
+        </p:nvSpPr>
+        <p:spPr>
+          <a:xfrm xmlns:a="http://schemas.openxmlformats.org/drawingml/2006/main">
+            <a:off x="742950" y="4448175"/>
+            <a:ext cx="762000" cy="190500"/>
+          </a:xfrm>
+          <a:prstGeom xmlns:a="http://schemas.openxmlformats.org/drawingml/2006/main" prst="rect">
+            <a:avLst/>
+          </a:prstGeom>
+          <a:noFill xmlns:a="http://schemas.openxmlformats.org/drawingml/2006/main"/>
+          <a:ln xmlns:a="http://schemas.openxmlformats.org/drawingml/2006/main" w="0">
+            <a:noFill/>
+            <a:prstDash val="solid"/>
+          </a:ln>
+        </p:spPr>
+        <p:txBody>
+          <a:bodyPr xmlns:a="http://schemas.openxmlformats.org/drawingml/2006/main" anchor="t"/>
+          <a:lstStyle xmlns:a="http://schemas.openxmlformats.org/drawingml/2006/main"/>
+          <a:p xmlns:a="http://schemas.openxmlformats.org/drawingml/2006/main">
+            <a:pPr algn="ctr">
+              <a:defRPr sz="1050" b="1">
+                <a:solidFill>
+                  <a:srgbClr val="14866D"/>
+                </a:solidFill>
+              </a:defRPr>
+            </a:pPr>
+            <a:r>
+              <a:rPr sz="1050" b="1">
+                <a:solidFill>
+                  <a:srgbClr val="14866D"/>
+                </a:solidFill>
+              </a:rPr>
+              <a:t>PASS</a:t>
+            </a:r>
+          </a:p>
+        </p:txBody>
+      </p:sp>
+      <p:sp>
+        <p:nvSpPr>
+          <p:cNvPr id="19" name="">
+            <a:extLst xmlns:a="http://schemas.openxmlformats.org/drawingml/2006/main">
+              <a:ext uri="{FF2B5EF4-FFF2-40B4-BE49-F238E27FC236}">
+                <a16:creationId xmlns:a16="http://schemas.microsoft.com/office/drawing/2014/main" id="{F4848AFE-CE17-4206-87E0-AACCBBECCE7E}"/>
+              </a:ext>
+            </a:extLst>
+          </p:cNvPr>
+          <p:cNvSpPr>
+            <a:spLocks xmlns:a="http://schemas.openxmlformats.org/drawingml/2006/main" noGrp="1"/>
+          </p:cNvSpPr>
+          <p:nvPr/>
+        </p:nvSpPr>
+        <p:spPr>
+          <a:xfrm xmlns:a="http://schemas.openxmlformats.org/drawingml/2006/main">
+            <a:off x="1771650" y="4429125"/>
+            <a:ext cx="2571750" cy="247650"/>
+          </a:xfrm>
+          <a:prstGeom xmlns:a="http://schemas.openxmlformats.org/drawingml/2006/main" prst="rect">
+            <a:avLst/>
+          </a:prstGeom>
+          <a:noFill xmlns:a="http://schemas.openxmlformats.org/drawingml/2006/main"/>
+          <a:ln xmlns:a="http://schemas.openxmlformats.org/drawingml/2006/main" w="0">
+            <a:noFill/>
+            <a:prstDash val="solid"/>
+          </a:ln>
+        </p:spPr>
+        <p:txBody>
+          <a:bodyPr xmlns:a="http://schemas.openxmlformats.org/drawingml/2006/main" anchor="t"/>
+          <a:lstStyle xmlns:a="http://schemas.openxmlformats.org/drawingml/2006/main"/>
+          <a:p xmlns:a="http://schemas.openxmlformats.org/drawingml/2006/main">
+            <a:pPr algn="l">
+              <a:defRPr sz="1425" b="1">
+                <a:solidFill>
+                  <a:srgbClr val="000000"/>
+                </a:solidFill>
+              </a:defRPr>
+            </a:pPr>
+            <a:r>
+              <a:rPr sz="1425" b="1">
+                <a:solidFill>
+                  <a:srgbClr val="000000"/>
+                </a:solidFill>
+              </a:rPr>
+              <a:t>Positive median</a:t>
+            </a:r>
+          </a:p>
+        </p:txBody>
+      </p:sp>
+      <p:sp>
+        <p:nvSpPr>
+          <p:cNvPr id="20" name="">
+            <a:extLst xmlns:a="http://schemas.openxmlformats.org/drawingml/2006/main">
+              <a:ext uri="{FF2B5EF4-FFF2-40B4-BE49-F238E27FC236}">
+                <a16:creationId xmlns:a16="http://schemas.microsoft.com/office/drawing/2014/main" id="{9BA97825-32DD-45C9-8F77-8D8807CF04F4}"/>
+              </a:ext>
+            </a:extLst>
+          </p:cNvPr>
+          <p:cNvSpPr>
+            <a:spLocks xmlns:a="http://schemas.openxmlformats.org/drawingml/2006/main" noGrp="1"/>
+          </p:cNvSpPr>
+          <p:nvPr/>
+        </p:nvSpPr>
+        <p:spPr>
+          <a:xfrm xmlns:a="http://schemas.openxmlformats.org/drawingml/2006/main">
+            <a:off x="4400550" y="4438650"/>
+            <a:ext cx="2190750" cy="228600"/>
+          </a:xfrm>
+          <a:prstGeom xmlns:a="http://schemas.openxmlformats.org/drawingml/2006/main" prst="rect">
+            <a:avLst/>
+          </a:prstGeom>
+          <a:noFill xmlns:a="http://schemas.openxmlformats.org/drawingml/2006/main"/>
+          <a:ln xmlns:a="http://schemas.openxmlformats.org/drawingml/2006/main" w="0">
+            <a:noFill/>
+            <a:prstDash val="solid"/>
+          </a:ln>
+        </p:spPr>
+        <p:txBody>
+          <a:bodyPr xmlns:a="http://schemas.openxmlformats.org/drawingml/2006/main" anchor="t"/>
+          <a:lstStyle xmlns:a="http://schemas.openxmlformats.org/drawingml/2006/main"/>
+          <a:p xmlns:a="http://schemas.openxmlformats.org/drawingml/2006/main">
+            <a:pPr algn="l">
+              <a:defRPr sz="1275" b="0">
+                <a:solidFill>
+                  <a:srgbClr val="667386"/>
+                </a:solidFill>
+              </a:defRPr>
+            </a:pPr>
+            <a:r>
+              <a:rPr sz="1275" b="0">
+                <a:solidFill>
+                  <a:srgbClr val="667386"/>
+                </a:solidFill>
+              </a:rPr>
+              <a:t>+2.19%</a:t>
+            </a:r>
+          </a:p>
+        </p:txBody>
+      </p:sp>
+      <p:sp>
+        <p:nvSpPr>
+          <p:cNvPr id="21" name="">
+            <a:extLst xmlns:a="http://schemas.openxmlformats.org/drawingml/2006/main">
+              <a:ext uri="{FF2B5EF4-FFF2-40B4-BE49-F238E27FC236}">
+                <a16:creationId xmlns:a16="http://schemas.microsoft.com/office/drawing/2014/main" id="{9ADBEE2A-5DBF-40F5-BB39-E93FE0EB0C19}"/>
+              </a:ext>
+            </a:extLst>
+          </p:cNvPr>
+          <p:cNvSpPr>
+            <a:spLocks xmlns:a="http://schemas.openxmlformats.org/drawingml/2006/main" noGrp="1"/>
+          </p:cNvSpPr>
+          <p:nvPr/>
+        </p:nvSpPr>
+        <p:spPr>
+          <a:xfrm xmlns:a="http://schemas.openxmlformats.org/drawingml/2006/main">
+            <a:off x="685800" y="4857750"/>
+            <a:ext cx="876300" cy="323850"/>
+          </a:xfrm>
+          <a:prstGeom xmlns:a="http://schemas.openxmlformats.org/drawingml/2006/main" prst="rect">
+            <a:avLst/>
+          </a:prstGeom>
+          <a:solidFill xmlns:a="http://schemas.openxmlformats.org/drawingml/2006/main">
+            <a:srgbClr val="E2F1EC"/>
+          </a:solidFill>
+          <a:ln xmlns:a="http://schemas.openxmlformats.org/drawingml/2006/main" w="0">
+            <a:solidFill>
+              <a:srgbClr val="E2F1EC"/>
+            </a:solidFill>
+            <a:prstDash val="solid"/>
+          </a:ln>
+        </p:spPr>
+      </p:sp>
+      <p:sp>
+        <p:nvSpPr>
+          <p:cNvPr id="22" name="">
+            <a:extLst xmlns:a="http://schemas.openxmlformats.org/drawingml/2006/main">
+              <a:ext uri="{FF2B5EF4-FFF2-40B4-BE49-F238E27FC236}">
+                <a16:creationId xmlns:a16="http://schemas.microsoft.com/office/drawing/2014/main" id="{AFA7C83E-B4FB-42E6-AD6A-4AC5404CC154}"/>
+              </a:ext>
+            </a:extLst>
+          </p:cNvPr>
+          <p:cNvSpPr>
+            <a:spLocks xmlns:a="http://schemas.openxmlformats.org/drawingml/2006/main" noGrp="1"/>
+          </p:cNvSpPr>
+          <p:nvPr/>
+        </p:nvSpPr>
+        <p:spPr>
+          <a:xfrm xmlns:a="http://schemas.openxmlformats.org/drawingml/2006/main">
+            <a:off x="742950" y="4924425"/>
+            <a:ext cx="762000" cy="190500"/>
+          </a:xfrm>
+          <a:prstGeom xmlns:a="http://schemas.openxmlformats.org/drawingml/2006/main" prst="rect">
+            <a:avLst/>
+          </a:prstGeom>
+          <a:noFill xmlns:a="http://schemas.openxmlformats.org/drawingml/2006/main"/>
+          <a:ln xmlns:a="http://schemas.openxmlformats.org/drawingml/2006/main" w="0">
+            <a:noFill/>
+            <a:prstDash val="solid"/>
+          </a:ln>
+        </p:spPr>
+        <p:txBody>
+          <a:bodyPr xmlns:a="http://schemas.openxmlformats.org/drawingml/2006/main" anchor="t"/>
+          <a:lstStyle xmlns:a="http://schemas.openxmlformats.org/drawingml/2006/main"/>
+          <a:p xmlns:a="http://schemas.openxmlformats.org/drawingml/2006/main">
+            <a:pPr algn="ctr">
+              <a:defRPr sz="1050" b="1">
+                <a:solidFill>
+                  <a:srgbClr val="14866D"/>
+                </a:solidFill>
+              </a:defRPr>
+            </a:pPr>
+            <a:r>
+              <a:rPr sz="1050" b="1">
+                <a:solidFill>
+                  <a:srgbClr val="14866D"/>
+                </a:solidFill>
+              </a:rPr>
+              <a:t>PASS</a:t>
+            </a:r>
+          </a:p>
+        </p:txBody>
+      </p:sp>
+      <p:sp>
+        <p:nvSpPr>
+          <p:cNvPr id="23" name="">
+            <a:extLst xmlns:a="http://schemas.openxmlformats.org/drawingml/2006/main">
+              <a:ext uri="{FF2B5EF4-FFF2-40B4-BE49-F238E27FC236}">
+                <a16:creationId xmlns:a16="http://schemas.microsoft.com/office/drawing/2014/main" id="{DB91D058-5410-4F93-A209-3DA602BB2F7A}"/>
+              </a:ext>
+            </a:extLst>
+          </p:cNvPr>
+          <p:cNvSpPr>
+            <a:spLocks xmlns:a="http://schemas.openxmlformats.org/drawingml/2006/main" noGrp="1"/>
+          </p:cNvSpPr>
+          <p:nvPr/>
+        </p:nvSpPr>
+        <p:spPr>
+          <a:xfrm xmlns:a="http://schemas.openxmlformats.org/drawingml/2006/main">
+            <a:off x="1771650" y="4905375"/>
+            <a:ext cx="2571750" cy="247650"/>
+          </a:xfrm>
+          <a:prstGeom xmlns:a="http://schemas.openxmlformats.org/drawingml/2006/main" prst="rect">
+            <a:avLst/>
+          </a:prstGeom>
+          <a:noFill xmlns:a="http://schemas.openxmlformats.org/drawingml/2006/main"/>
+          <a:ln xmlns:a="http://schemas.openxmlformats.org/drawingml/2006/main" w="0">
+            <a:noFill/>
+            <a:prstDash val="solid"/>
+          </a:ln>
+        </p:spPr>
+        <p:txBody>
+          <a:bodyPr xmlns:a="http://schemas.openxmlformats.org/drawingml/2006/main" anchor="t"/>
+          <a:lstStyle xmlns:a="http://schemas.openxmlformats.org/drawingml/2006/main"/>
+          <a:p xmlns:a="http://schemas.openxmlformats.org/drawingml/2006/main">
+            <a:pPr algn="l">
+              <a:defRPr sz="1425" b="1">
+                <a:solidFill>
+                  <a:srgbClr val="000000"/>
+                </a:solidFill>
+              </a:defRPr>
+            </a:pPr>
+            <a:r>
+              <a:rPr sz="1425" b="1">
+                <a:solidFill>
+                  <a:srgbClr val="000000"/>
+                </a:solidFill>
+              </a:rPr>
+              <a:t>Majority profitable</a:t>
+            </a:r>
+          </a:p>
+        </p:txBody>
+      </p:sp>
+      <p:sp>
+        <p:nvSpPr>
+          <p:cNvPr id="24" name="">
+            <a:extLst xmlns:a="http://schemas.openxmlformats.org/drawingml/2006/main">
+              <a:ext uri="{FF2B5EF4-FFF2-40B4-BE49-F238E27FC236}">
+                <a16:creationId xmlns:a16="http://schemas.microsoft.com/office/drawing/2014/main" id="{E0894466-0AD2-4124-9D77-A7CBBD91950B}"/>
+              </a:ext>
+            </a:extLst>
+          </p:cNvPr>
+          <p:cNvSpPr>
+            <a:spLocks xmlns:a="http://schemas.openxmlformats.org/drawingml/2006/main" noGrp="1"/>
+          </p:cNvSpPr>
+          <p:nvPr/>
+        </p:nvSpPr>
+        <p:spPr>
+          <a:xfrm xmlns:a="http://schemas.openxmlformats.org/drawingml/2006/main">
+            <a:off x="4400550" y="4914900"/>
+            <a:ext cx="2190750" cy="228600"/>
+          </a:xfrm>
+          <a:prstGeom xmlns:a="http://schemas.openxmlformats.org/drawingml/2006/main" prst="rect">
+            <a:avLst/>
+          </a:prstGeom>
+          <a:noFill xmlns:a="http://schemas.openxmlformats.org/drawingml/2006/main"/>
+          <a:ln xmlns:a="http://schemas.openxmlformats.org/drawingml/2006/main" w="0">
+            <a:noFill/>
+            <a:prstDash val="solid"/>
+          </a:ln>
+        </p:spPr>
+        <p:txBody>
+          <a:bodyPr xmlns:a="http://schemas.openxmlformats.org/drawingml/2006/main" anchor="t"/>
+          <a:lstStyle xmlns:a="http://schemas.openxmlformats.org/drawingml/2006/main"/>
+          <a:p xmlns:a="http://schemas.openxmlformats.org/drawingml/2006/main">
+            <a:pPr algn="l">
+              <a:defRPr sz="1275" b="0">
+                <a:solidFill>
+                  <a:srgbClr val="667386"/>
+                </a:solidFill>
+              </a:defRPr>
+            </a:pPr>
+            <a:r>
+              <a:rPr sz="1275" b="0">
+                <a:solidFill>
+                  <a:srgbClr val="667386"/>
+                </a:solidFill>
+              </a:rPr>
+              <a:t>66.7%</a:t>
+            </a:r>
+          </a:p>
+        </p:txBody>
+      </p:sp>
+      <p:sp>
+        <p:nvSpPr>
+          <p:cNvPr id="25" name="">
+            <a:extLst xmlns:a="http://schemas.openxmlformats.org/drawingml/2006/main">
+              <a:ext uri="{FF2B5EF4-FFF2-40B4-BE49-F238E27FC236}">
+                <a16:creationId xmlns:a16="http://schemas.microsoft.com/office/drawing/2014/main" id="{E9618808-0C3D-483B-A8A6-B0D74072D97C}"/>
+              </a:ext>
+            </a:extLst>
+          </p:cNvPr>
+          <p:cNvSpPr>
+            <a:spLocks xmlns:a="http://schemas.openxmlformats.org/drawingml/2006/main" noGrp="1"/>
+          </p:cNvSpPr>
+          <p:nvPr/>
+        </p:nvSpPr>
+        <p:spPr>
+          <a:xfrm xmlns:a="http://schemas.openxmlformats.org/drawingml/2006/main">
+            <a:off x="685800" y="5334000"/>
+            <a:ext cx="876300" cy="323850"/>
+          </a:xfrm>
+          <a:prstGeom xmlns:a="http://schemas.openxmlformats.org/drawingml/2006/main" prst="rect">
+            <a:avLst/>
+          </a:prstGeom>
+          <a:solidFill xmlns:a="http://schemas.openxmlformats.org/drawingml/2006/main">
+            <a:srgbClr val="F6E5E1"/>
+          </a:solidFill>
+          <a:ln xmlns:a="http://schemas.openxmlformats.org/drawingml/2006/main" w="0">
+            <a:solidFill>
+              <a:srgbClr val="F6E5E1"/>
+            </a:solidFill>
+            <a:prstDash val="solid"/>
+          </a:ln>
+        </p:spPr>
+      </p:sp>
+      <p:sp>
+        <p:nvSpPr>
+          <p:cNvPr id="26" name="">
+            <a:extLst xmlns:a="http://schemas.openxmlformats.org/drawingml/2006/main">
+              <a:ext uri="{FF2B5EF4-FFF2-40B4-BE49-F238E27FC236}">
+                <a16:creationId xmlns:a16="http://schemas.microsoft.com/office/drawing/2014/main" id="{4A080F44-F725-431D-A63E-06DE97AF917E}"/>
+              </a:ext>
+            </a:extLst>
+          </p:cNvPr>
+          <p:cNvSpPr>
+            <a:spLocks xmlns:a="http://schemas.openxmlformats.org/drawingml/2006/main" noGrp="1"/>
+          </p:cNvSpPr>
+          <p:nvPr/>
+        </p:nvSpPr>
+        <p:spPr>
+          <a:xfrm xmlns:a="http://schemas.openxmlformats.org/drawingml/2006/main">
+            <a:off x="742950" y="5400675"/>
+            <a:ext cx="762000" cy="190500"/>
+          </a:xfrm>
+          <a:prstGeom xmlns:a="http://schemas.openxmlformats.org/drawingml/2006/main" prst="rect">
+            <a:avLst/>
+          </a:prstGeom>
+          <a:noFill xmlns:a="http://schemas.openxmlformats.org/drawingml/2006/main"/>
+          <a:ln xmlns:a="http://schemas.openxmlformats.org/drawingml/2006/main" w="0">
+            <a:noFill/>
+            <a:prstDash val="solid"/>
+          </a:ln>
+        </p:spPr>
+        <p:txBody>
+          <a:bodyPr xmlns:a="http://schemas.openxmlformats.org/drawingml/2006/main" anchor="t"/>
+          <a:lstStyle xmlns:a="http://schemas.openxmlformats.org/drawingml/2006/main"/>
+          <a:p xmlns:a="http://schemas.openxmlformats.org/drawingml/2006/main">
+            <a:pPr algn="ctr">
+              <a:defRPr sz="1050" b="1">
+                <a:solidFill>
+                  <a:srgbClr val="B44738"/>
+                </a:solidFill>
+              </a:defRPr>
+            </a:pPr>
+            <a:r>
+              <a:rPr sz="1050" b="1">
+                <a:solidFill>
+                  <a:srgbClr val="B44738"/>
+                </a:solidFill>
+              </a:rPr>
+              <a:t>FAIL</a:t>
+            </a:r>
+          </a:p>
+        </p:txBody>
+      </p:sp>
+      <p:sp>
+        <p:nvSpPr>
+          <p:cNvPr id="27" name="">
+            <a:extLst xmlns:a="http://schemas.openxmlformats.org/drawingml/2006/main">
+              <a:ext uri="{FF2B5EF4-FFF2-40B4-BE49-F238E27FC236}">
+                <a16:creationId xmlns:a16="http://schemas.microsoft.com/office/drawing/2014/main" id="{F9978854-932E-4232-92D9-AD43BA56C9DA}"/>
+              </a:ext>
+            </a:extLst>
+          </p:cNvPr>
+          <p:cNvSpPr>
+            <a:spLocks xmlns:a="http://schemas.openxmlformats.org/drawingml/2006/main" noGrp="1"/>
+          </p:cNvSpPr>
+          <p:nvPr/>
+        </p:nvSpPr>
+        <p:spPr>
+          <a:xfrm xmlns:a="http://schemas.openxmlformats.org/drawingml/2006/main">
+            <a:off x="1771650" y="5381625"/>
+            <a:ext cx="2571750" cy="247650"/>
+          </a:xfrm>
+          <a:prstGeom xmlns:a="http://schemas.openxmlformats.org/drawingml/2006/main" prst="rect">
+            <a:avLst/>
+          </a:prstGeom>
+          <a:noFill xmlns:a="http://schemas.openxmlformats.org/drawingml/2006/main"/>
+          <a:ln xmlns:a="http://schemas.openxmlformats.org/drawingml/2006/main" w="0">
+            <a:noFill/>
+            <a:prstDash val="solid"/>
+          </a:ln>
+        </p:spPr>
+        <p:txBody>
+          <a:bodyPr xmlns:a="http://schemas.openxmlformats.org/drawingml/2006/main" anchor="t"/>
+          <a:lstStyle xmlns:a="http://schemas.openxmlformats.org/drawingml/2006/main"/>
+          <a:p xmlns:a="http://schemas.openxmlformats.org/drawingml/2006/main">
+            <a:pPr algn="l">
+              <a:defRPr sz="1425" b="1">
+                <a:solidFill>
+                  <a:srgbClr val="000000"/>
+                </a:solidFill>
+              </a:defRPr>
+            </a:pPr>
+            <a:r>
+              <a:rPr sz="1425" b="1">
+                <a:solidFill>
+                  <a:srgbClr val="000000"/>
+                </a:solidFill>
+              </a:rPr>
+              <a:t>Beat each control</a:t>
+            </a:r>
+          </a:p>
+        </p:txBody>
+      </p:sp>
+      <p:sp>
+        <p:nvSpPr>
+          <p:cNvPr id="28" name="">
+            <a:extLst xmlns:a="http://schemas.openxmlformats.org/drawingml/2006/main">
+              <a:ext uri="{FF2B5EF4-FFF2-40B4-BE49-F238E27FC236}">
+                <a16:creationId xmlns:a16="http://schemas.microsoft.com/office/drawing/2014/main" id="{0EC96D83-F395-4FFC-B366-AE9EA49B9219}"/>
+              </a:ext>
+            </a:extLst>
+          </p:cNvPr>
+          <p:cNvSpPr>
+            <a:spLocks xmlns:a="http://schemas.openxmlformats.org/drawingml/2006/main" noGrp="1"/>
+          </p:cNvSpPr>
+          <p:nvPr/>
+        </p:nvSpPr>
+        <p:spPr>
+          <a:xfrm xmlns:a="http://schemas.openxmlformats.org/drawingml/2006/main">
+            <a:off x="4400550" y="5391150"/>
+            <a:ext cx="2190750" cy="228600"/>
+          </a:xfrm>
+          <a:prstGeom xmlns:a="http://schemas.openxmlformats.org/drawingml/2006/main" prst="rect">
+            <a:avLst/>
+          </a:prstGeom>
+          <a:noFill xmlns:a="http://schemas.openxmlformats.org/drawingml/2006/main"/>
+          <a:ln xmlns:a="http://schemas.openxmlformats.org/drawingml/2006/main" w="0">
+            <a:noFill/>
+            <a:prstDash val="solid"/>
+          </a:ln>
+        </p:spPr>
+        <p:txBody>
+          <a:bodyPr xmlns:a="http://schemas.openxmlformats.org/drawingml/2006/main" anchor="t"/>
+          <a:lstStyle xmlns:a="http://schemas.openxmlformats.org/drawingml/2006/main"/>
+          <a:p xmlns:a="http://schemas.openxmlformats.org/drawingml/2006/main">
+            <a:pPr algn="l">
+              <a:defRPr sz="1275" b="0">
+                <a:solidFill>
+                  <a:srgbClr val="667386"/>
+                </a:solidFill>
+              </a:defRPr>
+            </a:pPr>
+            <a:r>
+              <a:rPr sz="1275" b="0">
+                <a:solidFill>
+                  <a:srgbClr val="667386"/>
+                </a:solidFill>
+              </a:rPr>
+              <a:t>strongest control 5.12%</a:t>
+            </a:r>
+          </a:p>
+        </p:txBody>
+      </p:sp>
+      <p:sp>
+        <p:nvSpPr>
+          <p:cNvPr id="29" name="">
+            <a:extLst xmlns:a="http://schemas.openxmlformats.org/drawingml/2006/main">
+              <a:ext uri="{FF2B5EF4-FFF2-40B4-BE49-F238E27FC236}">
+                <a16:creationId xmlns:a16="http://schemas.microsoft.com/office/drawing/2014/main" id="{65D51E8D-84F2-4259-8456-9DB561D69AEA}"/>
+              </a:ext>
+            </a:extLst>
+          </p:cNvPr>
+          <p:cNvSpPr>
+            <a:spLocks xmlns:a="http://schemas.openxmlformats.org/drawingml/2006/main" noGrp="1"/>
+          </p:cNvSpPr>
+          <p:nvPr/>
+        </p:nvSpPr>
+        <p:spPr>
+          <a:xfrm xmlns:a="http://schemas.openxmlformats.org/drawingml/2006/main">
+            <a:off x="7029450" y="2895600"/>
+            <a:ext cx="4610100" cy="3238500"/>
+          </a:xfrm>
+          <a:prstGeom xmlns:a="http://schemas.openxmlformats.org/drawingml/2006/main" prst="rect">
+            <a:avLst/>
+          </a:prstGeom>
+          <a:solidFill xmlns:a="http://schemas.openxmlformats.org/drawingml/2006/main">
+            <a:srgbClr val="F3F5F7"/>
+          </a:solidFill>
+          <a:ln xmlns:a="http://schemas.openxmlformats.org/drawingml/2006/main" w="0">
+            <a:solidFill>
+              <a:srgbClr val="F3F5F7"/>
+            </a:solidFill>
+            <a:prstDash val="solid"/>
+          </a:ln>
+        </p:spPr>
+      </p:sp>
+      <p:sp>
+        <p:nvSpPr>
+          <p:cNvPr id="30" name="">
+            <a:extLst xmlns:a="http://schemas.openxmlformats.org/drawingml/2006/main">
+              <a:ext uri="{FF2B5EF4-FFF2-40B4-BE49-F238E27FC236}">
+                <a16:creationId xmlns:a16="http://schemas.microsoft.com/office/drawing/2014/main" id="{CAD28628-0F66-45EE-AEEF-89681CAED7CC}"/>
+              </a:ext>
+            </a:extLst>
+          </p:cNvPr>
+          <p:cNvSpPr>
+            <a:spLocks xmlns:a="http://schemas.openxmlformats.org/drawingml/2006/main" noGrp="1"/>
+          </p:cNvSpPr>
+          <p:nvPr/>
+        </p:nvSpPr>
+        <p:spPr>
+          <a:xfrm xmlns:a="http://schemas.openxmlformats.org/drawingml/2006/main">
+            <a:off x="7296150" y="3162300"/>
+            <a:ext cx="4076700" cy="323850"/>
+          </a:xfrm>
+          <a:prstGeom xmlns:a="http://schemas.openxmlformats.org/drawingml/2006/main" prst="rect">
+            <a:avLst/>
+          </a:prstGeom>
+          <a:noFill xmlns:a="http://schemas.openxmlformats.org/drawingml/2006/main"/>
+          <a:ln xmlns:a="http://schemas.openxmlformats.org/drawingml/2006/main" w="0">
+            <a:noFill/>
+            <a:prstDash val="solid"/>
+          </a:ln>
+        </p:spPr>
+        <p:txBody>
+          <a:bodyPr xmlns:a="http://schemas.openxmlformats.org/drawingml/2006/main" anchor="t"/>
+          <a:lstStyle xmlns:a="http://schemas.openxmlformats.org/drawingml/2006/main"/>
+          <a:p xmlns:a="http://schemas.openxmlformats.org/drawingml/2006/main">
+            <a:pPr algn="l">
+              <a:defRPr sz="2025" b="1">
+                <a:solidFill>
+                  <a:srgbClr val="000000"/>
+                </a:solidFill>
+              </a:defRPr>
+            </a:pPr>
+            <a:r>
+              <a:rPr sz="2025" b="1">
+                <a:solidFill>
+                  <a:srgbClr val="000000"/>
+                </a:solidFill>
+              </a:rPr>
+              <a:t>What we learned</a:t>
+            </a:r>
+          </a:p>
+        </p:txBody>
+      </p:sp>
+      <p:sp>
+        <p:nvSpPr>
+          <p:cNvPr id="31" name="">
+            <a:extLst xmlns:a="http://schemas.openxmlformats.org/drawingml/2006/main">
+              <a:ext uri="{FF2B5EF4-FFF2-40B4-BE49-F238E27FC236}">
+                <a16:creationId xmlns:a16="http://schemas.microsoft.com/office/drawing/2014/main" id="{205EFC13-394F-4855-98F8-83BACA7BC6A8}"/>
+              </a:ext>
+            </a:extLst>
+          </p:cNvPr>
+          <p:cNvSpPr>
+            <a:spLocks xmlns:a="http://schemas.openxmlformats.org/drawingml/2006/main" noGrp="1"/>
+          </p:cNvSpPr>
+          <p:nvPr/>
+        </p:nvSpPr>
+        <p:spPr>
+          <a:xfrm xmlns:a="http://schemas.openxmlformats.org/drawingml/2006/main">
+            <a:off x="7315200" y="3838575"/>
+            <a:ext cx="85725" cy="85725"/>
+          </a:xfrm>
+          <a:prstGeom xmlns:a="http://schemas.openxmlformats.org/drawingml/2006/main" prst="rect">
+            <a:avLst/>
+          </a:prstGeom>
+          <a:solidFill xmlns:a="http://schemas.openxmlformats.org/drawingml/2006/main">
+            <a:srgbClr val="3D8DFF"/>
+          </a:solidFill>
+          <a:ln xmlns:a="http://schemas.openxmlformats.org/drawingml/2006/main" w="0">
+            <a:solidFill>
+              <a:srgbClr val="3D8DFF"/>
+            </a:solidFill>
+            <a:prstDash val="solid"/>
+          </a:ln>
+        </p:spPr>
+      </p:sp>
+      <p:sp>
+        <p:nvSpPr>
+          <p:cNvPr id="32" name="">
+            <a:extLst xmlns:a="http://schemas.openxmlformats.org/drawingml/2006/main">
+              <a:ext uri="{FF2B5EF4-FFF2-40B4-BE49-F238E27FC236}">
+                <a16:creationId xmlns:a16="http://schemas.microsoft.com/office/drawing/2014/main" id="{EE4F8A1C-8E1B-4EC8-8A70-54C3F7CBCAC3}"/>
+              </a:ext>
+            </a:extLst>
+          </p:cNvPr>
+          <p:cNvSpPr>
+            <a:spLocks xmlns:a="http://schemas.openxmlformats.org/drawingml/2006/main" noGrp="1"/>
+          </p:cNvSpPr>
+          <p:nvPr/>
+        </p:nvSpPr>
+        <p:spPr>
+          <a:xfrm xmlns:a="http://schemas.openxmlformats.org/drawingml/2006/main">
+            <a:off x="7543800" y="3752850"/>
+            <a:ext cx="3771900" cy="723900"/>
+          </a:xfrm>
+          <a:prstGeom xmlns:a="http://schemas.openxmlformats.org/drawingml/2006/main" prst="rect">
+            <a:avLst/>
+          </a:prstGeom>
+          <a:noFill xmlns:a="http://schemas.openxmlformats.org/drawingml/2006/main"/>
+          <a:ln xmlns:a="http://schemas.openxmlformats.org/drawingml/2006/main" w="0">
+            <a:noFill/>
+            <a:prstDash val="solid"/>
+          </a:ln>
+        </p:spPr>
+        <p:txBody>
+          <a:bodyPr xmlns:a="http://schemas.openxmlformats.org/drawingml/2006/main" anchor="t"/>
+          <a:lstStyle xmlns:a="http://schemas.openxmlformats.org/drawingml/2006/main"/>
+          <a:p xmlns:a="http://schemas.openxmlformats.org/drawingml/2006/main">
+            <a:pPr algn="l">
+              <a:defRPr sz="1500" b="0">
+                <a:solidFill>
+                  <a:srgbClr val="24364B"/>
+                </a:solidFill>
+              </a:defRPr>
+            </a:pPr>
+            <a:r>
+              <a:rPr sz="1500" b="0">
+                <a:solidFill>
+                  <a:srgbClr val="24364B"/>
+                </a:solidFill>
+              </a:rPr>
+              <a:t>A descriptive clue can survive TRAIN execution and still vanish in new time.</a:t>
+            </a:r>
+          </a:p>
+        </p:txBody>
+      </p:sp>
+      <p:sp>
+        <p:nvSpPr>
+          <p:cNvPr id="33" name="">
+            <a:extLst xmlns:a="http://schemas.openxmlformats.org/drawingml/2006/main">
+              <a:ext uri="{FF2B5EF4-FFF2-40B4-BE49-F238E27FC236}">
+                <a16:creationId xmlns:a16="http://schemas.microsoft.com/office/drawing/2014/main" id="{CE258554-6B59-4885-8B6E-770E0A14D1E7}"/>
+              </a:ext>
+            </a:extLst>
+          </p:cNvPr>
+          <p:cNvSpPr>
+            <a:spLocks xmlns:a="http://schemas.openxmlformats.org/drawingml/2006/main" noGrp="1"/>
+          </p:cNvSpPr>
+          <p:nvPr/>
+        </p:nvSpPr>
+        <p:spPr>
+          <a:xfrm xmlns:a="http://schemas.openxmlformats.org/drawingml/2006/main">
+            <a:off x="7315200" y="4714875"/>
+            <a:ext cx="85725" cy="85725"/>
+          </a:xfrm>
+          <a:prstGeom xmlns:a="http://schemas.openxmlformats.org/drawingml/2006/main" prst="rect">
+            <a:avLst/>
+          </a:prstGeom>
+          <a:solidFill xmlns:a="http://schemas.openxmlformats.org/drawingml/2006/main">
+            <a:srgbClr val="A86B00"/>
+          </a:solidFill>
+          <a:ln xmlns:a="http://schemas.openxmlformats.org/drawingml/2006/main" w="0">
+            <a:solidFill>
+              <a:srgbClr val="A86B00"/>
+            </a:solidFill>
+            <a:prstDash val="solid"/>
+          </a:ln>
+        </p:spPr>
+      </p:sp>
+      <p:sp>
+        <p:nvSpPr>
+          <p:cNvPr id="34" name="">
+            <a:extLst xmlns:a="http://schemas.openxmlformats.org/drawingml/2006/main">
+              <a:ext uri="{FF2B5EF4-FFF2-40B4-BE49-F238E27FC236}">
+                <a16:creationId xmlns:a16="http://schemas.microsoft.com/office/drawing/2014/main" id="{B05C599A-D0AB-4B6D-9A35-82BCF16A76B5}"/>
+              </a:ext>
+            </a:extLst>
+          </p:cNvPr>
+          <p:cNvSpPr>
+            <a:spLocks xmlns:a="http://schemas.openxmlformats.org/drawingml/2006/main" noGrp="1"/>
+          </p:cNvSpPr>
+          <p:nvPr/>
+        </p:nvSpPr>
+        <p:spPr>
+          <a:xfrm xmlns:a="http://schemas.openxmlformats.org/drawingml/2006/main">
+            <a:off x="7543800" y="4629150"/>
+            <a:ext cx="3771900" cy="800100"/>
+          </a:xfrm>
+          <a:prstGeom xmlns:a="http://schemas.openxmlformats.org/drawingml/2006/main" prst="rect">
+            <a:avLst/>
+          </a:prstGeom>
+          <a:noFill xmlns:a="http://schemas.openxmlformats.org/drawingml/2006/main"/>
+          <a:ln xmlns:a="http://schemas.openxmlformats.org/drawingml/2006/main" w="0">
+            <a:noFill/>
+            <a:prstDash val="solid"/>
+          </a:ln>
+        </p:spPr>
+        <p:txBody>
+          <a:bodyPr xmlns:a="http://schemas.openxmlformats.org/drawingml/2006/main" anchor="t"/>
+          <a:lstStyle xmlns:a="http://schemas.openxmlformats.org/drawingml/2006/main"/>
+          <a:p xmlns:a="http://schemas.openxmlformats.org/drawingml/2006/main">
+            <a:pPr algn="l">
+              <a:defRPr sz="1500" b="0">
+                <a:solidFill>
+                  <a:srgbClr val="24364B"/>
+                </a:solidFill>
+              </a:defRPr>
+            </a:pPr>
+            <a:r>
+              <a:rPr sz="1500" b="0">
+                <a:solidFill>
+                  <a:srgbClr val="24364B"/>
+                </a:solidFill>
+              </a:rPr>
+              <a:t>Win rate and median can look encouraging while average opportunity cost is unfavorable.</a:t>
+            </a:r>
+          </a:p>
+        </p:txBody>
+      </p:sp>
+      <p:sp>
+        <p:nvSpPr>
+          <p:cNvPr id="35" name="">
+            <a:extLst xmlns:a="http://schemas.openxmlformats.org/drawingml/2006/main">
+              <a:ext uri="{FF2B5EF4-FFF2-40B4-BE49-F238E27FC236}">
+                <a16:creationId xmlns:a16="http://schemas.microsoft.com/office/drawing/2014/main" id="{9E86D565-3D74-4058-8970-6BDF37869CF0}"/>
+              </a:ext>
+            </a:extLst>
+          </p:cNvPr>
+          <p:cNvSpPr>
+            <a:spLocks xmlns:a="http://schemas.openxmlformats.org/drawingml/2006/main" noGrp="1"/>
+          </p:cNvSpPr>
+          <p:nvPr/>
+        </p:nvSpPr>
+        <p:spPr>
+          <a:xfrm xmlns:a="http://schemas.openxmlformats.org/drawingml/2006/main">
+            <a:off x="7296150" y="5410200"/>
+            <a:ext cx="4076700" cy="628650"/>
+          </a:xfrm>
+          <a:prstGeom xmlns:a="http://schemas.openxmlformats.org/drawingml/2006/main" prst="rect">
+            <a:avLst/>
+          </a:prstGeom>
+          <a:noFill xmlns:a="http://schemas.openxmlformats.org/drawingml/2006/main"/>
+          <a:ln xmlns:a="http://schemas.openxmlformats.org/drawingml/2006/main" w="0">
+            <a:noFill/>
+            <a:prstDash val="solid"/>
+          </a:ln>
+        </p:spPr>
+        <p:txBody>
+          <a:bodyPr xmlns:a="http://schemas.openxmlformats.org/drawingml/2006/main" anchor="t"/>
+          <a:lstStyle xmlns:a="http://schemas.openxmlformats.org/drawingml/2006/main"/>
+          <a:p xmlns:a="http://schemas.openxmlformats.org/drawingml/2006/main">
+            <a:pPr algn="ctr">
+              <a:defRPr sz="1350" b="1">
+                <a:solidFill>
+                  <a:srgbClr val="B44738"/>
+                </a:solidFill>
+              </a:defRPr>
+            </a:pPr>
+            <a:r>
+              <a:rPr sz="1350" b="1">
+                <a:solidFill>
+                  <a:srgbClr val="B44738"/>
+                </a:solidFill>
+              </a:rPr>
+              <a:t>No rescue tuning. Any future variation must be declared as a new hypothesis and cannot overwrite this result.</a:t>
+            </a:r>
+          </a:p>
+        </p:txBody>
+      </p:sp>
+    </p:spTree>
+    <p:extLst>
+      <p:ext uri="{BB962C8B-B14F-4D97-AF65-F5344CB8AC3E}">
+        <p14:creationId xmlns:p14="http://schemas.microsoft.com/office/powerpoint/2010/main" val="674992656"/>
       </p:ext>
     </p:extLst>
   </p:cSld>
@@ -13539,7 +18063,7 @@
           <p:cNvPr id="17" name="">
             <a:extLst xmlns:a="http://schemas.openxmlformats.org/drawingml/2006/main">
               <a:ext uri="{FF2B5EF4-FFF2-40B4-BE49-F238E27FC236}">
-                <a16:creationId xmlns:a16="http://schemas.microsoft.com/office/drawing/2014/main" id="{644C1EA6-653F-4287-ACD8-11447BEB8868}"/>
+                <a16:creationId xmlns:a16="http://schemas.microsoft.com/office/drawing/2014/main" id="{411700FD-5522-4D99-8E09-013C2B330963}"/>
               </a:ext>
             </a:extLst>
           </p:cNvPr>
@@ -13589,7 +18113,7 @@
           <p:cNvPr id="2" name="">
             <a:extLst xmlns:a="http://schemas.openxmlformats.org/drawingml/2006/main">
               <a:ext uri="{FF2B5EF4-FFF2-40B4-BE49-F238E27FC236}">
-                <a16:creationId xmlns:a16="http://schemas.microsoft.com/office/drawing/2014/main" id="{8DAE3C0E-6B5C-4EFB-B796-94B5DC321A68}"/>
+                <a16:creationId xmlns:a16="http://schemas.microsoft.com/office/drawing/2014/main" id="{6461ABA0-5431-4922-B756-B90F06CDDA0D}"/>
               </a:ext>
             </a:extLst>
           </p:cNvPr>
@@ -13639,7 +18163,7 @@
           <p:cNvPr id="3" name="">
             <a:extLst xmlns:a="http://schemas.openxmlformats.org/drawingml/2006/main">
               <a:ext uri="{FF2B5EF4-FFF2-40B4-BE49-F238E27FC236}">
-                <a16:creationId xmlns:a16="http://schemas.microsoft.com/office/drawing/2014/main" id="{D272C0F0-DE67-4EA7-9093-8EB5AFA1A6BF}"/>
+                <a16:creationId xmlns:a16="http://schemas.microsoft.com/office/drawing/2014/main" id="{C99E7B0E-AEC6-4CCA-BAB3-E1E38DDD5CCF}"/>
               </a:ext>
             </a:extLst>
           </p:cNvPr>
@@ -13672,7 +18196,7 @@
           <p:cNvPr id="4" name="">
             <a:extLst xmlns:a="http://schemas.openxmlformats.org/drawingml/2006/main">
               <a:ext uri="{FF2B5EF4-FFF2-40B4-BE49-F238E27FC236}">
-                <a16:creationId xmlns:a16="http://schemas.microsoft.com/office/drawing/2014/main" id="{33BF234A-8521-429F-BF10-7717D9FAA33A}"/>
+                <a16:creationId xmlns:a16="http://schemas.microsoft.com/office/drawing/2014/main" id="{B882F9AB-E2AC-4318-9F84-380B5F8B82CD}"/>
               </a:ext>
             </a:extLst>
           </p:cNvPr>
@@ -13722,7 +18246,7 @@
           <p:cNvPr id="5" name="">
             <a:extLst xmlns:a="http://schemas.openxmlformats.org/drawingml/2006/main">
               <a:ext uri="{FF2B5EF4-FFF2-40B4-BE49-F238E27FC236}">
-                <a16:creationId xmlns:a16="http://schemas.microsoft.com/office/drawing/2014/main" id="{00445E29-071C-44AC-9A05-0A0730D1B9DD}"/>
+                <a16:creationId xmlns:a16="http://schemas.microsoft.com/office/drawing/2014/main" id="{428888B0-3BB1-476E-9742-F513A9E5680F}"/>
               </a:ext>
             </a:extLst>
           </p:cNvPr>
@@ -13776,7 +18300,7 @@
           <p:nvPr/>
         </p:nvPicPr>
         <p:blipFill>
-          <a:blip xmlns:r="http://schemas.openxmlformats.org/officeDocument/2006/relationships" xmlns:a="http://schemas.openxmlformats.org/drawingml/2006/main" r:embed="R4f6df5fecc0049ac"/>
+          <a:blip xmlns:r="http://schemas.openxmlformats.org/officeDocument/2006/relationships" xmlns:a="http://schemas.openxmlformats.org/drawingml/2006/main" r:embed="R895faac2b68243ff"/>
           <a:stretch xmlns:a="http://schemas.openxmlformats.org/drawingml/2006/main"/>
         </p:blipFill>
         <p:spPr>
@@ -13794,7 +18318,7 @@
           <p:cNvPr id="7" name="">
             <a:extLst xmlns:a="http://schemas.openxmlformats.org/drawingml/2006/main">
               <a:ext uri="{FF2B5EF4-FFF2-40B4-BE49-F238E27FC236}">
-                <a16:creationId xmlns:a16="http://schemas.microsoft.com/office/drawing/2014/main" id="{65E20CB8-F753-42ED-B2B1-CC1B09CC8469}"/>
+                <a16:creationId xmlns:a16="http://schemas.microsoft.com/office/drawing/2014/main" id="{7E5BA558-9BE8-41E2-A4FB-3AE7534A8186}"/>
               </a:ext>
             </a:extLst>
           </p:cNvPr>
@@ -13827,7 +18351,7 @@
           <p:cNvPr id="8" name="">
             <a:extLst xmlns:a="http://schemas.openxmlformats.org/drawingml/2006/main">
               <a:ext uri="{FF2B5EF4-FFF2-40B4-BE49-F238E27FC236}">
-                <a16:creationId xmlns:a16="http://schemas.microsoft.com/office/drawing/2014/main" id="{C7A5219E-B9A7-4EC0-A573-382B927CF3D3}"/>
+                <a16:creationId xmlns:a16="http://schemas.microsoft.com/office/drawing/2014/main" id="{B8D9489E-743E-4E31-B0A1-AA617BB95A1C}"/>
               </a:ext>
             </a:extLst>
           </p:cNvPr>
@@ -13877,7 +18401,7 @@
           <p:cNvPr id="9" name="">
             <a:extLst xmlns:a="http://schemas.openxmlformats.org/drawingml/2006/main">
               <a:ext uri="{FF2B5EF4-FFF2-40B4-BE49-F238E27FC236}">
-                <a16:creationId xmlns:a16="http://schemas.microsoft.com/office/drawing/2014/main" id="{3EEC2D2D-0DE5-4FB6-84A6-EEA3F37ABB0E}"/>
+                <a16:creationId xmlns:a16="http://schemas.microsoft.com/office/drawing/2014/main" id="{2FA9F786-2170-4643-B10C-1F207A3A7665}"/>
               </a:ext>
             </a:extLst>
           </p:cNvPr>
@@ -13910,7 +18434,7 @@
           <p:cNvPr id="10" name="">
             <a:extLst xmlns:a="http://schemas.openxmlformats.org/drawingml/2006/main">
               <a:ext uri="{FF2B5EF4-FFF2-40B4-BE49-F238E27FC236}">
-                <a16:creationId xmlns:a16="http://schemas.microsoft.com/office/drawing/2014/main" id="{6A13733E-9F2C-44E9-8329-4D453A2381CD}"/>
+                <a16:creationId xmlns:a16="http://schemas.microsoft.com/office/drawing/2014/main" id="{E242416B-FEA8-49E0-9C5B-832A36B95C2D}"/>
               </a:ext>
             </a:extLst>
           </p:cNvPr>
@@ -13960,7 +18484,7 @@
           <p:cNvPr id="11" name="">
             <a:extLst xmlns:a="http://schemas.openxmlformats.org/drawingml/2006/main">
               <a:ext uri="{FF2B5EF4-FFF2-40B4-BE49-F238E27FC236}">
-                <a16:creationId xmlns:a16="http://schemas.microsoft.com/office/drawing/2014/main" id="{C127FF7A-5A7E-4AE3-9148-A95BC61DCBA9}"/>
+                <a16:creationId xmlns:a16="http://schemas.microsoft.com/office/drawing/2014/main" id="{EBC8A288-A04E-4267-9A31-11ACFFD5F796}"/>
               </a:ext>
             </a:extLst>
           </p:cNvPr>
@@ -13993,7 +18517,7 @@
           <p:cNvPr id="12" name="">
             <a:extLst xmlns:a="http://schemas.openxmlformats.org/drawingml/2006/main">
               <a:ext uri="{FF2B5EF4-FFF2-40B4-BE49-F238E27FC236}">
-                <a16:creationId xmlns:a16="http://schemas.microsoft.com/office/drawing/2014/main" id="{E7D7C71E-03DB-4E75-BBD8-B0EE408EE1EE}"/>
+                <a16:creationId xmlns:a16="http://schemas.microsoft.com/office/drawing/2014/main" id="{AEDA1A25-F4E0-4A12-9149-1600D0FC0DFD}"/>
               </a:ext>
             </a:extLst>
           </p:cNvPr>
@@ -14043,7 +18567,7 @@
           <p:cNvPr id="13" name="">
             <a:extLst xmlns:a="http://schemas.openxmlformats.org/drawingml/2006/main">
               <a:ext uri="{FF2B5EF4-FFF2-40B4-BE49-F238E27FC236}">
-                <a16:creationId xmlns:a16="http://schemas.microsoft.com/office/drawing/2014/main" id="{C118B84D-912C-4736-9233-393E260A1918}"/>
+                <a16:creationId xmlns:a16="http://schemas.microsoft.com/office/drawing/2014/main" id="{1E4826E8-8A3A-4519-9673-C713596CE812}"/>
               </a:ext>
             </a:extLst>
           </p:cNvPr>
@@ -14076,7 +18600,7 @@
           <p:cNvPr id="14" name="">
             <a:extLst xmlns:a="http://schemas.openxmlformats.org/drawingml/2006/main">
               <a:ext uri="{FF2B5EF4-FFF2-40B4-BE49-F238E27FC236}">
-                <a16:creationId xmlns:a16="http://schemas.microsoft.com/office/drawing/2014/main" id="{F09B2D7A-09BE-48AF-A049-4EAF0CBCCC2A}"/>
+                <a16:creationId xmlns:a16="http://schemas.microsoft.com/office/drawing/2014/main" id="{52905306-B23B-4B79-9D6E-C3F048C1EDE5}"/>
               </a:ext>
             </a:extLst>
           </p:cNvPr>
@@ -14126,7 +18650,7 @@
           <p:cNvPr id="15" name="">
             <a:extLst xmlns:a="http://schemas.openxmlformats.org/drawingml/2006/main">
               <a:ext uri="{FF2B5EF4-FFF2-40B4-BE49-F238E27FC236}">
-                <a16:creationId xmlns:a16="http://schemas.microsoft.com/office/drawing/2014/main" id="{E1DD745E-2E8B-41A9-97E7-B6F4A5C622E9}"/>
+                <a16:creationId xmlns:a16="http://schemas.microsoft.com/office/drawing/2014/main" id="{0B030AE8-E13A-4BAC-9D15-63704A54F6A5}"/>
               </a:ext>
             </a:extLst>
           </p:cNvPr>
@@ -14159,7 +18683,7 @@
           <p:cNvPr id="16" name="">
             <a:extLst xmlns:a="http://schemas.openxmlformats.org/drawingml/2006/main">
               <a:ext uri="{FF2B5EF4-FFF2-40B4-BE49-F238E27FC236}">
-                <a16:creationId xmlns:a16="http://schemas.microsoft.com/office/drawing/2014/main" id="{B2A34EC4-1588-47F8-AFD4-C9E4090B79F4}"/>
+                <a16:creationId xmlns:a16="http://schemas.microsoft.com/office/drawing/2014/main" id="{0D689086-98ED-49AF-836A-6631CBDCB702}"/>
               </a:ext>
             </a:extLst>
           </p:cNvPr>
@@ -14207,7 +18731,7 @@
     </p:spTree>
     <p:extLst>
       <p:ext uri="{BB962C8B-B14F-4D97-AF65-F5344CB8AC3E}">
-        <p14:creationId xmlns:p14="http://schemas.microsoft.com/office/powerpoint/2010/main" val="1763957723"/>
+        <p14:creationId xmlns:p14="http://schemas.microsoft.com/office/powerpoint/2010/main" val="1466082667"/>
       </p:ext>
     </p:extLst>
   </p:cSld>
@@ -14238,7 +18762,7 @@
           <p:cNvPr id="37" name="">
             <a:extLst xmlns:a="http://schemas.openxmlformats.org/drawingml/2006/main">
               <a:ext uri="{FF2B5EF4-FFF2-40B4-BE49-F238E27FC236}">
-                <a16:creationId xmlns:a16="http://schemas.microsoft.com/office/drawing/2014/main" id="{AD3A92A5-957B-42CF-9C3E-E574587135EA}"/>
+                <a16:creationId xmlns:a16="http://schemas.microsoft.com/office/drawing/2014/main" id="{5BE7D85B-2EC6-4E0A-B4EA-5AFC9AE625BA}"/>
               </a:ext>
             </a:extLst>
           </p:cNvPr>
@@ -14288,7 +18812,7 @@
           <p:cNvPr id="2" name="">
             <a:extLst xmlns:a="http://schemas.openxmlformats.org/drawingml/2006/main">
               <a:ext uri="{FF2B5EF4-FFF2-40B4-BE49-F238E27FC236}">
-                <a16:creationId xmlns:a16="http://schemas.microsoft.com/office/drawing/2014/main" id="{D30EAFA0-0203-4C66-B5BB-A818B62CCB73}"/>
+                <a16:creationId xmlns:a16="http://schemas.microsoft.com/office/drawing/2014/main" id="{9E38CFBD-5A03-4E99-984B-F313ACA61909}"/>
               </a:ext>
             </a:extLst>
           </p:cNvPr>
@@ -14338,7 +18862,7 @@
           <p:cNvPr id="3" name="">
             <a:extLst xmlns:a="http://schemas.openxmlformats.org/drawingml/2006/main">
               <a:ext uri="{FF2B5EF4-FFF2-40B4-BE49-F238E27FC236}">
-                <a16:creationId xmlns:a16="http://schemas.microsoft.com/office/drawing/2014/main" id="{CD041A14-579D-4F90-A310-09E3D886037D}"/>
+                <a16:creationId xmlns:a16="http://schemas.microsoft.com/office/drawing/2014/main" id="{93C82177-DAB6-452B-84FD-928C90671AAC}"/>
               </a:ext>
             </a:extLst>
           </p:cNvPr>
@@ -14371,7 +18895,7 @@
           <p:cNvPr id="4" name="">
             <a:extLst xmlns:a="http://schemas.openxmlformats.org/drawingml/2006/main">
               <a:ext uri="{FF2B5EF4-FFF2-40B4-BE49-F238E27FC236}">
-                <a16:creationId xmlns:a16="http://schemas.microsoft.com/office/drawing/2014/main" id="{B52EE072-E03C-4295-AD67-EF392579B091}"/>
+                <a16:creationId xmlns:a16="http://schemas.microsoft.com/office/drawing/2014/main" id="{2528DE2B-EDFF-4A89-908D-C8F0EAC74613}"/>
               </a:ext>
             </a:extLst>
           </p:cNvPr>
@@ -14421,7 +18945,7 @@
           <p:cNvPr id="5" name="">
             <a:extLst xmlns:a="http://schemas.openxmlformats.org/drawingml/2006/main">
               <a:ext uri="{FF2B5EF4-FFF2-40B4-BE49-F238E27FC236}">
-                <a16:creationId xmlns:a16="http://schemas.microsoft.com/office/drawing/2014/main" id="{6995E440-2B24-456F-B076-47DA09752CEA}"/>
+                <a16:creationId xmlns:a16="http://schemas.microsoft.com/office/drawing/2014/main" id="{343090F6-E4E0-4A2F-9C9E-7EC95D7A0D89}"/>
               </a:ext>
             </a:extLst>
           </p:cNvPr>
@@ -14471,7 +18995,7 @@
           <p:cNvPr id="6" name="">
             <a:extLst xmlns:a="http://schemas.openxmlformats.org/drawingml/2006/main">
               <a:ext uri="{FF2B5EF4-FFF2-40B4-BE49-F238E27FC236}">
-                <a16:creationId xmlns:a16="http://schemas.microsoft.com/office/drawing/2014/main" id="{02E2F2D5-DCB7-42D8-9BFC-37CBA8BEBF52}"/>
+                <a16:creationId xmlns:a16="http://schemas.microsoft.com/office/drawing/2014/main" id="{182407DB-F484-499E-B099-9784DE60FC21}"/>
               </a:ext>
             </a:extLst>
           </p:cNvPr>
@@ -14504,7 +19028,7 @@
           <p:cNvPr id="7" name="">
             <a:extLst xmlns:a="http://schemas.openxmlformats.org/drawingml/2006/main">
               <a:ext uri="{FF2B5EF4-FFF2-40B4-BE49-F238E27FC236}">
-                <a16:creationId xmlns:a16="http://schemas.microsoft.com/office/drawing/2014/main" id="{630C950B-2782-4047-9B86-7DFB691EDAC9}"/>
+                <a16:creationId xmlns:a16="http://schemas.microsoft.com/office/drawing/2014/main" id="{023CB0D6-BBB5-463A-9AF4-1315522532AA}"/>
               </a:ext>
             </a:extLst>
           </p:cNvPr>
@@ -14537,7 +19061,7 @@
           <p:cNvPr id="8" name="">
             <a:extLst xmlns:a="http://schemas.openxmlformats.org/drawingml/2006/main">
               <a:ext uri="{FF2B5EF4-FFF2-40B4-BE49-F238E27FC236}">
-                <a16:creationId xmlns:a16="http://schemas.microsoft.com/office/drawing/2014/main" id="{4721911E-B150-4576-B617-631F7AC8B771}"/>
+                <a16:creationId xmlns:a16="http://schemas.microsoft.com/office/drawing/2014/main" id="{71907B3C-3085-4B54-9283-A1CC108A0934}"/>
               </a:ext>
             </a:extLst>
           </p:cNvPr>
@@ -14587,7 +19111,7 @@
           <p:cNvPr id="9" name="">
             <a:extLst xmlns:a="http://schemas.openxmlformats.org/drawingml/2006/main">
               <a:ext uri="{FF2B5EF4-FFF2-40B4-BE49-F238E27FC236}">
-                <a16:creationId xmlns:a16="http://schemas.microsoft.com/office/drawing/2014/main" id="{12C770CC-682F-4B9F-9346-52080AA15265}"/>
+                <a16:creationId xmlns:a16="http://schemas.microsoft.com/office/drawing/2014/main" id="{3577AA00-BC9B-4551-BA56-6C78496474B5}"/>
               </a:ext>
             </a:extLst>
           </p:cNvPr>
@@ -14637,7 +19161,7 @@
           <p:cNvPr id="10" name="">
             <a:extLst xmlns:a="http://schemas.openxmlformats.org/drawingml/2006/main">
               <a:ext uri="{FF2B5EF4-FFF2-40B4-BE49-F238E27FC236}">
-                <a16:creationId xmlns:a16="http://schemas.microsoft.com/office/drawing/2014/main" id="{2EFB318B-3EE5-4824-87D7-418BBF5E31B6}"/>
+                <a16:creationId xmlns:a16="http://schemas.microsoft.com/office/drawing/2014/main" id="{E2A30549-C249-475F-9874-D6F591198020}"/>
               </a:ext>
             </a:extLst>
           </p:cNvPr>
@@ -14687,7 +19211,7 @@
           <p:cNvPr id="11" name="">
             <a:extLst xmlns:a="http://schemas.openxmlformats.org/drawingml/2006/main">
               <a:ext uri="{FF2B5EF4-FFF2-40B4-BE49-F238E27FC236}">
-                <a16:creationId xmlns:a16="http://schemas.microsoft.com/office/drawing/2014/main" id="{EE3C9639-B813-4BA2-B1F8-5A030CABB714}"/>
+                <a16:creationId xmlns:a16="http://schemas.microsoft.com/office/drawing/2014/main" id="{F70A389F-00BE-4A0E-91B9-43798E908C23}"/>
               </a:ext>
             </a:extLst>
           </p:cNvPr>
@@ -14720,7 +19244,7 @@
           <p:cNvPr id="12" name="">
             <a:extLst xmlns:a="http://schemas.openxmlformats.org/drawingml/2006/main">
               <a:ext uri="{FF2B5EF4-FFF2-40B4-BE49-F238E27FC236}">
-                <a16:creationId xmlns:a16="http://schemas.microsoft.com/office/drawing/2014/main" id="{775DE12E-41B8-442E-9458-FE759AF0501F}"/>
+                <a16:creationId xmlns:a16="http://schemas.microsoft.com/office/drawing/2014/main" id="{C339D75B-2CF9-4312-A6F8-38B1D502BD27}"/>
               </a:ext>
             </a:extLst>
           </p:cNvPr>
@@ -14753,7 +19277,7 @@
           <p:cNvPr id="13" name="">
             <a:extLst xmlns:a="http://schemas.openxmlformats.org/drawingml/2006/main">
               <a:ext uri="{FF2B5EF4-FFF2-40B4-BE49-F238E27FC236}">
-                <a16:creationId xmlns:a16="http://schemas.microsoft.com/office/drawing/2014/main" id="{8C3860BC-26EF-4C39-B3D6-4DEFA8EB3440}"/>
+                <a16:creationId xmlns:a16="http://schemas.microsoft.com/office/drawing/2014/main" id="{0B0DE702-3609-4CC4-8199-A80EF1E6849E}"/>
               </a:ext>
             </a:extLst>
           </p:cNvPr>
@@ -14803,7 +19327,7 @@
           <p:cNvPr id="14" name="">
             <a:extLst xmlns:a="http://schemas.openxmlformats.org/drawingml/2006/main">
               <a:ext uri="{FF2B5EF4-FFF2-40B4-BE49-F238E27FC236}">
-                <a16:creationId xmlns:a16="http://schemas.microsoft.com/office/drawing/2014/main" id="{B12C8CEA-508B-4A72-BBC6-5457562A305C}"/>
+                <a16:creationId xmlns:a16="http://schemas.microsoft.com/office/drawing/2014/main" id="{D993F64E-7C68-4BC9-A03B-4F811E821661}"/>
               </a:ext>
             </a:extLst>
           </p:cNvPr>
@@ -14853,7 +19377,7 @@
           <p:cNvPr id="15" name="">
             <a:extLst xmlns:a="http://schemas.openxmlformats.org/drawingml/2006/main">
               <a:ext uri="{FF2B5EF4-FFF2-40B4-BE49-F238E27FC236}">
-                <a16:creationId xmlns:a16="http://schemas.microsoft.com/office/drawing/2014/main" id="{1857FF76-8347-4E26-91D3-4E84494A813C}"/>
+                <a16:creationId xmlns:a16="http://schemas.microsoft.com/office/drawing/2014/main" id="{C0E51EB8-1D29-492E-B79B-036B021DC14E}"/>
               </a:ext>
             </a:extLst>
           </p:cNvPr>
@@ -14903,7 +19427,7 @@
           <p:cNvPr id="16" name="">
             <a:extLst xmlns:a="http://schemas.openxmlformats.org/drawingml/2006/main">
               <a:ext uri="{FF2B5EF4-FFF2-40B4-BE49-F238E27FC236}">
-                <a16:creationId xmlns:a16="http://schemas.microsoft.com/office/drawing/2014/main" id="{07E0B914-DD75-4760-84FD-32267C914815}"/>
+                <a16:creationId xmlns:a16="http://schemas.microsoft.com/office/drawing/2014/main" id="{FDA3D57F-B9E8-497F-B61B-0987A67AB6D0}"/>
               </a:ext>
             </a:extLst>
           </p:cNvPr>
@@ -14936,7 +19460,7 @@
           <p:cNvPr id="17" name="">
             <a:extLst xmlns:a="http://schemas.openxmlformats.org/drawingml/2006/main">
               <a:ext uri="{FF2B5EF4-FFF2-40B4-BE49-F238E27FC236}">
-                <a16:creationId xmlns:a16="http://schemas.microsoft.com/office/drawing/2014/main" id="{34544C52-C1AC-4828-A4F4-613256132EC7}"/>
+                <a16:creationId xmlns:a16="http://schemas.microsoft.com/office/drawing/2014/main" id="{59A10DD2-EFA0-4247-A317-6F5949303562}"/>
               </a:ext>
             </a:extLst>
           </p:cNvPr>
@@ -14969,7 +19493,7 @@
           <p:cNvPr id="18" name="">
             <a:extLst xmlns:a="http://schemas.openxmlformats.org/drawingml/2006/main">
               <a:ext uri="{FF2B5EF4-FFF2-40B4-BE49-F238E27FC236}">
-                <a16:creationId xmlns:a16="http://schemas.microsoft.com/office/drawing/2014/main" id="{5EFE59B2-39B7-4E9C-94E4-E7217B60BC35}"/>
+                <a16:creationId xmlns:a16="http://schemas.microsoft.com/office/drawing/2014/main" id="{00A1C0EA-767C-4735-8A39-B73BD7A3A167}"/>
               </a:ext>
             </a:extLst>
           </p:cNvPr>
@@ -15019,7 +19543,7 @@
           <p:cNvPr id="19" name="">
             <a:extLst xmlns:a="http://schemas.openxmlformats.org/drawingml/2006/main">
               <a:ext uri="{FF2B5EF4-FFF2-40B4-BE49-F238E27FC236}">
-                <a16:creationId xmlns:a16="http://schemas.microsoft.com/office/drawing/2014/main" id="{87FBF508-4852-405F-A928-4ABC193BD008}"/>
+                <a16:creationId xmlns:a16="http://schemas.microsoft.com/office/drawing/2014/main" id="{5FC134D4-725C-4018-B41C-784ADAC1C803}"/>
               </a:ext>
             </a:extLst>
           </p:cNvPr>
@@ -15069,7 +19593,7 @@
           <p:cNvPr id="20" name="">
             <a:extLst xmlns:a="http://schemas.openxmlformats.org/drawingml/2006/main">
               <a:ext uri="{FF2B5EF4-FFF2-40B4-BE49-F238E27FC236}">
-                <a16:creationId xmlns:a16="http://schemas.microsoft.com/office/drawing/2014/main" id="{B7773EC9-5048-4966-AF62-076D53F40B4D}"/>
+                <a16:creationId xmlns:a16="http://schemas.microsoft.com/office/drawing/2014/main" id="{32EEE126-E70E-4A91-A159-B7293AF9BA63}"/>
               </a:ext>
             </a:extLst>
           </p:cNvPr>
@@ -15119,7 +19643,7 @@
           <p:cNvPr id="21" name="">
             <a:extLst xmlns:a="http://schemas.openxmlformats.org/drawingml/2006/main">
               <a:ext uri="{FF2B5EF4-FFF2-40B4-BE49-F238E27FC236}">
-                <a16:creationId xmlns:a16="http://schemas.microsoft.com/office/drawing/2014/main" id="{1B48200F-6E35-4B9A-9074-46A4910F0E20}"/>
+                <a16:creationId xmlns:a16="http://schemas.microsoft.com/office/drawing/2014/main" id="{27F95468-620E-48BD-B046-D0A3F8BFE861}"/>
               </a:ext>
             </a:extLst>
           </p:cNvPr>
@@ -15152,7 +19676,7 @@
           <p:cNvPr id="22" name="">
             <a:extLst xmlns:a="http://schemas.openxmlformats.org/drawingml/2006/main">
               <a:ext uri="{FF2B5EF4-FFF2-40B4-BE49-F238E27FC236}">
-                <a16:creationId xmlns:a16="http://schemas.microsoft.com/office/drawing/2014/main" id="{047371F8-66EF-4962-BC31-E1606B2546B6}"/>
+                <a16:creationId xmlns:a16="http://schemas.microsoft.com/office/drawing/2014/main" id="{33FF67C9-30D1-4452-A64B-1432543C759E}"/>
               </a:ext>
             </a:extLst>
           </p:cNvPr>
@@ -15185,7 +19709,7 @@
           <p:cNvPr id="23" name="">
             <a:extLst xmlns:a="http://schemas.openxmlformats.org/drawingml/2006/main">
               <a:ext uri="{FF2B5EF4-FFF2-40B4-BE49-F238E27FC236}">
-                <a16:creationId xmlns:a16="http://schemas.microsoft.com/office/drawing/2014/main" id="{E9B7D0EE-D0A8-4253-840D-5A6366880CBA}"/>
+                <a16:creationId xmlns:a16="http://schemas.microsoft.com/office/drawing/2014/main" id="{6F9CA843-B402-48AD-9D1E-4219D5B8D2C0}"/>
               </a:ext>
             </a:extLst>
           </p:cNvPr>
@@ -15235,7 +19759,7 @@
           <p:cNvPr id="24" name="">
             <a:extLst xmlns:a="http://schemas.openxmlformats.org/drawingml/2006/main">
               <a:ext uri="{FF2B5EF4-FFF2-40B4-BE49-F238E27FC236}">
-                <a16:creationId xmlns:a16="http://schemas.microsoft.com/office/drawing/2014/main" id="{952EBCD5-893E-48C7-B6CD-2D8D83C95357}"/>
+                <a16:creationId xmlns:a16="http://schemas.microsoft.com/office/drawing/2014/main" id="{CB0A7924-4D6C-453E-88FD-922B98AD956D}"/>
               </a:ext>
             </a:extLst>
           </p:cNvPr>
@@ -15285,7 +19809,7 @@
           <p:cNvPr id="25" name="">
             <a:extLst xmlns:a="http://schemas.openxmlformats.org/drawingml/2006/main">
               <a:ext uri="{FF2B5EF4-FFF2-40B4-BE49-F238E27FC236}">
-                <a16:creationId xmlns:a16="http://schemas.microsoft.com/office/drawing/2014/main" id="{13B51CA5-D812-4C99-986A-A8B0FAC5C81D}"/>
+                <a16:creationId xmlns:a16="http://schemas.microsoft.com/office/drawing/2014/main" id="{01847163-589C-4C92-9814-20FD989B0586}"/>
               </a:ext>
             </a:extLst>
           </p:cNvPr>
@@ -15335,7 +19859,7 @@
           <p:cNvPr id="26" name="">
             <a:extLst xmlns:a="http://schemas.openxmlformats.org/drawingml/2006/main">
               <a:ext uri="{FF2B5EF4-FFF2-40B4-BE49-F238E27FC236}">
-                <a16:creationId xmlns:a16="http://schemas.microsoft.com/office/drawing/2014/main" id="{28DB5F35-6E82-4501-8EDB-A977F2F0AD4A}"/>
+                <a16:creationId xmlns:a16="http://schemas.microsoft.com/office/drawing/2014/main" id="{569D12AB-369B-4D47-9249-6C33BF8677FA}"/>
               </a:ext>
             </a:extLst>
           </p:cNvPr>
@@ -15368,7 +19892,7 @@
           <p:cNvPr id="27" name="">
             <a:extLst xmlns:a="http://schemas.openxmlformats.org/drawingml/2006/main">
               <a:ext uri="{FF2B5EF4-FFF2-40B4-BE49-F238E27FC236}">
-                <a16:creationId xmlns:a16="http://schemas.microsoft.com/office/drawing/2014/main" id="{F73E26CC-F5C6-499D-BB92-C8AAEA726426}"/>
+                <a16:creationId xmlns:a16="http://schemas.microsoft.com/office/drawing/2014/main" id="{AEBB1BF2-5439-4D36-82E3-39ACAD5891EE}"/>
               </a:ext>
             </a:extLst>
           </p:cNvPr>
@@ -15418,7 +19942,7 @@
           <p:cNvPr id="28" name="">
             <a:extLst xmlns:a="http://schemas.openxmlformats.org/drawingml/2006/main">
               <a:ext uri="{FF2B5EF4-FFF2-40B4-BE49-F238E27FC236}">
-                <a16:creationId xmlns:a16="http://schemas.microsoft.com/office/drawing/2014/main" id="{E362F7FB-26C4-4A44-858F-C84CA1D052FA}"/>
+                <a16:creationId xmlns:a16="http://schemas.microsoft.com/office/drawing/2014/main" id="{D5EC5A60-B505-4C8B-B293-2C3C91F79D2C}"/>
               </a:ext>
             </a:extLst>
           </p:cNvPr>
@@ -15451,7 +19975,7 @@
           <p:cNvPr id="29" name="">
             <a:extLst xmlns:a="http://schemas.openxmlformats.org/drawingml/2006/main">
               <a:ext uri="{FF2B5EF4-FFF2-40B4-BE49-F238E27FC236}">
-                <a16:creationId xmlns:a16="http://schemas.microsoft.com/office/drawing/2014/main" id="{1F2B2018-AE9A-4349-955A-5CCA515E6DBC}"/>
+                <a16:creationId xmlns:a16="http://schemas.microsoft.com/office/drawing/2014/main" id="{7EBF097D-EE7B-4F7E-8914-89CBAAD0A7D8}"/>
               </a:ext>
             </a:extLst>
           </p:cNvPr>
@@ -15501,7 +20025,7 @@
           <p:cNvPr id="30" name="">
             <a:extLst xmlns:a="http://schemas.openxmlformats.org/drawingml/2006/main">
               <a:ext uri="{FF2B5EF4-FFF2-40B4-BE49-F238E27FC236}">
-                <a16:creationId xmlns:a16="http://schemas.microsoft.com/office/drawing/2014/main" id="{192D4E2D-254D-4329-9868-752F916587C7}"/>
+                <a16:creationId xmlns:a16="http://schemas.microsoft.com/office/drawing/2014/main" id="{DB7D2B0B-1DBB-402E-93E4-B61B65D30F92}"/>
               </a:ext>
             </a:extLst>
           </p:cNvPr>
@@ -15534,7 +20058,7 @@
           <p:cNvPr id="31" name="">
             <a:extLst xmlns:a="http://schemas.openxmlformats.org/drawingml/2006/main">
               <a:ext uri="{FF2B5EF4-FFF2-40B4-BE49-F238E27FC236}">
-                <a16:creationId xmlns:a16="http://schemas.microsoft.com/office/drawing/2014/main" id="{F01FDC71-73B5-434B-A165-2450A3FD580C}"/>
+                <a16:creationId xmlns:a16="http://schemas.microsoft.com/office/drawing/2014/main" id="{54D9F1D8-80D8-4C83-AC75-9E0986CFC7D1}"/>
               </a:ext>
             </a:extLst>
           </p:cNvPr>
@@ -15584,7 +20108,7 @@
           <p:cNvPr id="32" name="">
             <a:extLst xmlns:a="http://schemas.openxmlformats.org/drawingml/2006/main">
               <a:ext uri="{FF2B5EF4-FFF2-40B4-BE49-F238E27FC236}">
-                <a16:creationId xmlns:a16="http://schemas.microsoft.com/office/drawing/2014/main" id="{F9C7EE4C-DC0C-42EC-A172-54EF9ED79578}"/>
+                <a16:creationId xmlns:a16="http://schemas.microsoft.com/office/drawing/2014/main" id="{3A34E1D7-E2B5-46C7-A7AF-6E70341AB196}"/>
               </a:ext>
             </a:extLst>
           </p:cNvPr>
@@ -15634,7 +20158,7 @@
           <p:cNvPr id="33" name="">
             <a:extLst xmlns:a="http://schemas.openxmlformats.org/drawingml/2006/main">
               <a:ext uri="{FF2B5EF4-FFF2-40B4-BE49-F238E27FC236}">
-                <a16:creationId xmlns:a16="http://schemas.microsoft.com/office/drawing/2014/main" id="{F2DADE52-D114-47DF-B665-F4B0A169242B}"/>
+                <a16:creationId xmlns:a16="http://schemas.microsoft.com/office/drawing/2014/main" id="{1F8BB6AF-3B87-4AFC-BFFD-BE15A59CC1F5}"/>
               </a:ext>
             </a:extLst>
           </p:cNvPr>
@@ -15667,7 +20191,7 @@
           <p:cNvPr id="34" name="">
             <a:extLst xmlns:a="http://schemas.openxmlformats.org/drawingml/2006/main">
               <a:ext uri="{FF2B5EF4-FFF2-40B4-BE49-F238E27FC236}">
-                <a16:creationId xmlns:a16="http://schemas.microsoft.com/office/drawing/2014/main" id="{743A17F7-3B3F-487D-A2DD-C78922C810D5}"/>
+                <a16:creationId xmlns:a16="http://schemas.microsoft.com/office/drawing/2014/main" id="{85090CC9-E2AA-4D08-9C4E-FC99C88B4644}"/>
               </a:ext>
             </a:extLst>
           </p:cNvPr>
@@ -15717,7 +20241,7 @@
           <p:cNvPr id="35" name="">
             <a:extLst xmlns:a="http://schemas.openxmlformats.org/drawingml/2006/main">
               <a:ext uri="{FF2B5EF4-FFF2-40B4-BE49-F238E27FC236}">
-                <a16:creationId xmlns:a16="http://schemas.microsoft.com/office/drawing/2014/main" id="{66542F2E-BD53-41AB-9288-BB1A1A6B0071}"/>
+                <a16:creationId xmlns:a16="http://schemas.microsoft.com/office/drawing/2014/main" id="{F5CC6C7A-EA17-4850-86FE-80A0C06BACF9}"/>
               </a:ext>
             </a:extLst>
           </p:cNvPr>
@@ -15750,7 +20274,7 @@
           <p:cNvPr id="36" name="">
             <a:extLst xmlns:a="http://schemas.openxmlformats.org/drawingml/2006/main">
               <a:ext uri="{FF2B5EF4-FFF2-40B4-BE49-F238E27FC236}">
-                <a16:creationId xmlns:a16="http://schemas.microsoft.com/office/drawing/2014/main" id="{D2765F62-2E59-4E98-8BE9-40A08ECE1BFC}"/>
+                <a16:creationId xmlns:a16="http://schemas.microsoft.com/office/drawing/2014/main" id="{C54C50E3-FD24-4E29-B467-D294B32AE42F}"/>
               </a:ext>
             </a:extLst>
           </p:cNvPr>
@@ -15798,7 +20322,7 @@
     </p:spTree>
     <p:extLst>
       <p:ext uri="{BB962C8B-B14F-4D97-AF65-F5344CB8AC3E}">
-        <p14:creationId xmlns:p14="http://schemas.microsoft.com/office/powerpoint/2010/main" val="781939339"/>
+        <p14:creationId xmlns:p14="http://schemas.microsoft.com/office/powerpoint/2010/main" val="1490030157"/>
       </p:ext>
     </p:extLst>
   </p:cSld>
@@ -15829,7 +20353,7 @@
           <p:cNvPr id="6" name="">
             <a:extLst xmlns:a="http://schemas.openxmlformats.org/drawingml/2006/main">
               <a:ext uri="{FF2B5EF4-FFF2-40B4-BE49-F238E27FC236}">
-                <a16:creationId xmlns:a16="http://schemas.microsoft.com/office/drawing/2014/main" id="{26748E66-322E-4DC5-9795-EC628C6EEEED}"/>
+                <a16:creationId xmlns:a16="http://schemas.microsoft.com/office/drawing/2014/main" id="{EA292F00-0C36-4AAD-A68B-E40BA34724C8}"/>
               </a:ext>
             </a:extLst>
           </p:cNvPr>
@@ -15879,7 +20403,7 @@
           <p:cNvPr id="2" name="">
             <a:extLst xmlns:a="http://schemas.openxmlformats.org/drawingml/2006/main">
               <a:ext uri="{FF2B5EF4-FFF2-40B4-BE49-F238E27FC236}">
-                <a16:creationId xmlns:a16="http://schemas.microsoft.com/office/drawing/2014/main" id="{10DD2814-1B6B-41C2-BA02-63ADBD0B53AC}"/>
+                <a16:creationId xmlns:a16="http://schemas.microsoft.com/office/drawing/2014/main" id="{A318100C-B1F2-4E49-AEDE-4E7F503C189F}"/>
               </a:ext>
             </a:extLst>
           </p:cNvPr>
@@ -15946,7 +20470,7 @@
           <p:cNvPr id="3" name="">
             <a:extLst xmlns:a="http://schemas.openxmlformats.org/drawingml/2006/main">
               <a:ext uri="{FF2B5EF4-FFF2-40B4-BE49-F238E27FC236}">
-                <a16:creationId xmlns:a16="http://schemas.microsoft.com/office/drawing/2014/main" id="{0978FAC8-619F-48A0-8B7D-D96470E37AAA}"/>
+                <a16:creationId xmlns:a16="http://schemas.microsoft.com/office/drawing/2014/main" id="{0A1C56AE-C9D2-41CA-92D4-9DE1E91FA1E8}"/>
               </a:ext>
             </a:extLst>
           </p:cNvPr>
@@ -15996,7 +20520,7 @@
           <p:cNvPr id="4" name="">
             <a:extLst xmlns:a="http://schemas.openxmlformats.org/drawingml/2006/main">
               <a:ext uri="{FF2B5EF4-FFF2-40B4-BE49-F238E27FC236}">
-                <a16:creationId xmlns:a16="http://schemas.microsoft.com/office/drawing/2014/main" id="{AD12F223-D1C5-4A78-ADFB-E2C711283BB8}"/>
+                <a16:creationId xmlns:a16="http://schemas.microsoft.com/office/drawing/2014/main" id="{A4ECBCA7-C079-4BA9-969F-B72183CF97F3}"/>
               </a:ext>
             </a:extLst>
           </p:cNvPr>
@@ -16046,7 +20570,7 @@
           <p:cNvPr id="5" name="">
             <a:extLst xmlns:a="http://schemas.openxmlformats.org/drawingml/2006/main">
               <a:ext uri="{FF2B5EF4-FFF2-40B4-BE49-F238E27FC236}">
-                <a16:creationId xmlns:a16="http://schemas.microsoft.com/office/drawing/2014/main" id="{EB838E8E-9159-4540-BDE4-1EEA92D663F7}"/>
+                <a16:creationId xmlns:a16="http://schemas.microsoft.com/office/drawing/2014/main" id="{2115770E-D889-4E34-872A-38C51AF08054}"/>
               </a:ext>
             </a:extLst>
           </p:cNvPr>
@@ -16094,7 +20618,7 @@
     </p:spTree>
     <p:extLst>
       <p:ext uri="{BB962C8B-B14F-4D97-AF65-F5344CB8AC3E}">
-        <p14:creationId xmlns:p14="http://schemas.microsoft.com/office/powerpoint/2010/main" val="1335856655"/>
+        <p14:creationId xmlns:p14="http://schemas.microsoft.com/office/powerpoint/2010/main" val="920949618"/>
       </p:ext>
     </p:extLst>
   </p:cSld>
@@ -16125,7 +20649,7 @@
           <p:cNvPr id="17" name="">
             <a:extLst xmlns:a="http://schemas.openxmlformats.org/drawingml/2006/main">
               <a:ext uri="{FF2B5EF4-FFF2-40B4-BE49-F238E27FC236}">
-                <a16:creationId xmlns:a16="http://schemas.microsoft.com/office/drawing/2014/main" id="{2A817062-9484-4E1A-A869-ECC777D7D5FC}"/>
+                <a16:creationId xmlns:a16="http://schemas.microsoft.com/office/drawing/2014/main" id="{B1DD3F9C-54A3-47A4-903E-431E9BB91C69}"/>
               </a:ext>
             </a:extLst>
           </p:cNvPr>
@@ -16175,7 +20699,7 @@
           <p:cNvPr id="2" name="">
             <a:extLst xmlns:a="http://schemas.openxmlformats.org/drawingml/2006/main">
               <a:ext uri="{FF2B5EF4-FFF2-40B4-BE49-F238E27FC236}">
-                <a16:creationId xmlns:a16="http://schemas.microsoft.com/office/drawing/2014/main" id="{BA9F36D2-F543-4BA7-9D86-8C2C996D0FA0}"/>
+                <a16:creationId xmlns:a16="http://schemas.microsoft.com/office/drawing/2014/main" id="{46B91E60-C8A4-404E-833F-67EA6453834C}"/>
               </a:ext>
             </a:extLst>
           </p:cNvPr>
@@ -16225,7 +20749,7 @@
           <p:cNvPr id="3" name="">
             <a:extLst xmlns:a="http://schemas.openxmlformats.org/drawingml/2006/main">
               <a:ext uri="{FF2B5EF4-FFF2-40B4-BE49-F238E27FC236}">
-                <a16:creationId xmlns:a16="http://schemas.microsoft.com/office/drawing/2014/main" id="{C42A2D10-4E65-4401-8F9C-7AD8020C98DC}"/>
+                <a16:creationId xmlns:a16="http://schemas.microsoft.com/office/drawing/2014/main" id="{94DFA780-AC81-40F0-BAF3-AC03811D3847}"/>
               </a:ext>
             </a:extLst>
           </p:cNvPr>
@@ -16258,7 +20782,7 @@
           <p:cNvPr id="4" name="">
             <a:extLst xmlns:a="http://schemas.openxmlformats.org/drawingml/2006/main">
               <a:ext uri="{FF2B5EF4-FFF2-40B4-BE49-F238E27FC236}">
-                <a16:creationId xmlns:a16="http://schemas.microsoft.com/office/drawing/2014/main" id="{220A7C19-A257-4762-AC1F-4EBEFB5D2BB9}"/>
+                <a16:creationId xmlns:a16="http://schemas.microsoft.com/office/drawing/2014/main" id="{F49DBB6E-9ED9-44E7-9D76-28001080CF64}"/>
               </a:ext>
             </a:extLst>
           </p:cNvPr>
@@ -16308,7 +20832,7 @@
           <p:cNvPr id="5" name="">
             <a:extLst xmlns:a="http://schemas.openxmlformats.org/drawingml/2006/main">
               <a:ext uri="{FF2B5EF4-FFF2-40B4-BE49-F238E27FC236}">
-                <a16:creationId xmlns:a16="http://schemas.microsoft.com/office/drawing/2014/main" id="{2905D0C0-5F83-4DBD-9DFD-A154EA1744F5}"/>
+                <a16:creationId xmlns:a16="http://schemas.microsoft.com/office/drawing/2014/main" id="{739235FF-ECFC-4A45-ACE9-1DD185C04D39}"/>
               </a:ext>
             </a:extLst>
           </p:cNvPr>
@@ -16362,7 +20886,7 @@
           <p:nvPr/>
         </p:nvPicPr>
         <p:blipFill>
-          <a:blip xmlns:r="http://schemas.openxmlformats.org/officeDocument/2006/relationships" xmlns:a="http://schemas.openxmlformats.org/drawingml/2006/main" r:embed="R86e529d0f35a4435"/>
+          <a:blip xmlns:r="http://schemas.openxmlformats.org/officeDocument/2006/relationships" xmlns:a="http://schemas.openxmlformats.org/drawingml/2006/main" r:embed="R777a491ffcd942f9"/>
           <a:stretch xmlns:a="http://schemas.openxmlformats.org/drawingml/2006/main"/>
         </p:blipFill>
         <p:spPr>
@@ -16380,7 +20904,7 @@
           <p:cNvPr id="7" name="">
             <a:extLst xmlns:a="http://schemas.openxmlformats.org/drawingml/2006/main">
               <a:ext uri="{FF2B5EF4-FFF2-40B4-BE49-F238E27FC236}">
-                <a16:creationId xmlns:a16="http://schemas.microsoft.com/office/drawing/2014/main" id="{395BBD1E-AE14-4793-82DF-9578F47D9993}"/>
+                <a16:creationId xmlns:a16="http://schemas.microsoft.com/office/drawing/2014/main" id="{18FE8842-E620-4A1B-941A-5E9EA486E840}"/>
               </a:ext>
             </a:extLst>
           </p:cNvPr>
@@ -16413,7 +20937,7 @@
           <p:cNvPr id="8" name="">
             <a:extLst xmlns:a="http://schemas.openxmlformats.org/drawingml/2006/main">
               <a:ext uri="{FF2B5EF4-FFF2-40B4-BE49-F238E27FC236}">
-                <a16:creationId xmlns:a16="http://schemas.microsoft.com/office/drawing/2014/main" id="{ADD6AC80-C729-49A3-B440-33ADC252A8CB}"/>
+                <a16:creationId xmlns:a16="http://schemas.microsoft.com/office/drawing/2014/main" id="{142B955F-D4E8-44BF-9CCB-B051E53A67A3}"/>
               </a:ext>
             </a:extLst>
           </p:cNvPr>
@@ -16463,7 +20987,7 @@
           <p:cNvPr id="9" name="">
             <a:extLst xmlns:a="http://schemas.openxmlformats.org/drawingml/2006/main">
               <a:ext uri="{FF2B5EF4-FFF2-40B4-BE49-F238E27FC236}">
-                <a16:creationId xmlns:a16="http://schemas.microsoft.com/office/drawing/2014/main" id="{1661531F-0F9D-4546-AA28-7815D18035A3}"/>
+                <a16:creationId xmlns:a16="http://schemas.microsoft.com/office/drawing/2014/main" id="{E8371A05-5795-4E28-9C4C-19996BF365C0}"/>
               </a:ext>
             </a:extLst>
           </p:cNvPr>
@@ -16513,7 +21037,7 @@
           <p:cNvPr id="10" name="">
             <a:extLst xmlns:a="http://schemas.openxmlformats.org/drawingml/2006/main">
               <a:ext uri="{FF2B5EF4-FFF2-40B4-BE49-F238E27FC236}">
-                <a16:creationId xmlns:a16="http://schemas.microsoft.com/office/drawing/2014/main" id="{4DD35D9E-3349-440F-819F-7D4706D7C356}"/>
+                <a16:creationId xmlns:a16="http://schemas.microsoft.com/office/drawing/2014/main" id="{18D11D46-A42E-422C-A6A1-FF95FDDB88BF}"/>
               </a:ext>
             </a:extLst>
           </p:cNvPr>
@@ -16563,7 +21087,7 @@
           <p:cNvPr id="11" name="">
             <a:extLst xmlns:a="http://schemas.openxmlformats.org/drawingml/2006/main">
               <a:ext uri="{FF2B5EF4-FFF2-40B4-BE49-F238E27FC236}">
-                <a16:creationId xmlns:a16="http://schemas.microsoft.com/office/drawing/2014/main" id="{1CC4215B-C8C6-4AD9-B9CC-C473E2132529}"/>
+                <a16:creationId xmlns:a16="http://schemas.microsoft.com/office/drawing/2014/main" id="{FE3D6889-BE5B-4D05-9200-9DD2B6BA9A9C}"/>
               </a:ext>
             </a:extLst>
           </p:cNvPr>
@@ -16596,7 +21120,7 @@
           <p:cNvPr id="12" name="">
             <a:extLst xmlns:a="http://schemas.openxmlformats.org/drawingml/2006/main">
               <a:ext uri="{FF2B5EF4-FFF2-40B4-BE49-F238E27FC236}">
-                <a16:creationId xmlns:a16="http://schemas.microsoft.com/office/drawing/2014/main" id="{351562CD-5131-467C-968B-1764B5207093}"/>
+                <a16:creationId xmlns:a16="http://schemas.microsoft.com/office/drawing/2014/main" id="{362C8AA4-571D-4A17-85DD-A025366B117E}"/>
               </a:ext>
             </a:extLst>
           </p:cNvPr>
@@ -16646,7 +21170,7 @@
           <p:cNvPr id="13" name="">
             <a:extLst xmlns:a="http://schemas.openxmlformats.org/drawingml/2006/main">
               <a:ext uri="{FF2B5EF4-FFF2-40B4-BE49-F238E27FC236}">
-                <a16:creationId xmlns:a16="http://schemas.microsoft.com/office/drawing/2014/main" id="{8BA76E00-3F42-44B6-9182-9F3E70EBB094}"/>
+                <a16:creationId xmlns:a16="http://schemas.microsoft.com/office/drawing/2014/main" id="{BC1392B4-4020-42D8-9D10-E2D7CE3625F2}"/>
               </a:ext>
             </a:extLst>
           </p:cNvPr>
@@ -16679,7 +21203,7 @@
           <p:cNvPr id="14" name="">
             <a:extLst xmlns:a="http://schemas.openxmlformats.org/drawingml/2006/main">
               <a:ext uri="{FF2B5EF4-FFF2-40B4-BE49-F238E27FC236}">
-                <a16:creationId xmlns:a16="http://schemas.microsoft.com/office/drawing/2014/main" id="{18DAAA4E-42DE-472C-A33E-8FCE72AD1CEA}"/>
+                <a16:creationId xmlns:a16="http://schemas.microsoft.com/office/drawing/2014/main" id="{20C8DC5A-945E-4EC6-9B3E-85FEEA8EC6F0}"/>
               </a:ext>
             </a:extLst>
           </p:cNvPr>
@@ -16729,7 +21253,7 @@
           <p:cNvPr id="15" name="">
             <a:extLst xmlns:a="http://schemas.openxmlformats.org/drawingml/2006/main">
               <a:ext uri="{FF2B5EF4-FFF2-40B4-BE49-F238E27FC236}">
-                <a16:creationId xmlns:a16="http://schemas.microsoft.com/office/drawing/2014/main" id="{2F4137CF-F395-472C-B439-22DB77E9A61F}"/>
+                <a16:creationId xmlns:a16="http://schemas.microsoft.com/office/drawing/2014/main" id="{C184C7D5-414C-4B6B-8652-86B87B90B1F2}"/>
               </a:ext>
             </a:extLst>
           </p:cNvPr>
@@ -16762,7 +21286,7 @@
           <p:cNvPr id="16" name="">
             <a:extLst xmlns:a="http://schemas.openxmlformats.org/drawingml/2006/main">
               <a:ext uri="{FF2B5EF4-FFF2-40B4-BE49-F238E27FC236}">
-                <a16:creationId xmlns:a16="http://schemas.microsoft.com/office/drawing/2014/main" id="{A791BC52-A5E7-464F-85CA-4CF2298364C7}"/>
+                <a16:creationId xmlns:a16="http://schemas.microsoft.com/office/drawing/2014/main" id="{8E2F6ECC-7AF9-4284-9B2C-62C09EE57937}"/>
               </a:ext>
             </a:extLst>
           </p:cNvPr>
@@ -16810,7 +21334,7 @@
     </p:spTree>
     <p:extLst>
       <p:ext uri="{BB962C8B-B14F-4D97-AF65-F5344CB8AC3E}">
-        <p14:creationId xmlns:p14="http://schemas.microsoft.com/office/powerpoint/2010/main" val="2107507512"/>
+        <p14:creationId xmlns:p14="http://schemas.microsoft.com/office/powerpoint/2010/main" val="1962349364"/>
       </p:ext>
     </p:extLst>
   </p:cSld>
@@ -16841,7 +21365,7 @@
           <p:cNvPr id="16" name="">
             <a:extLst xmlns:a="http://schemas.openxmlformats.org/drawingml/2006/main">
               <a:ext uri="{FF2B5EF4-FFF2-40B4-BE49-F238E27FC236}">
-                <a16:creationId xmlns:a16="http://schemas.microsoft.com/office/drawing/2014/main" id="{923C166A-0227-4719-B8D9-9693C8256746}"/>
+                <a16:creationId xmlns:a16="http://schemas.microsoft.com/office/drawing/2014/main" id="{775ED001-E652-4774-A885-5231AE275738}"/>
               </a:ext>
             </a:extLst>
           </p:cNvPr>
@@ -16891,7 +21415,7 @@
           <p:cNvPr id="2" name="">
             <a:extLst xmlns:a="http://schemas.openxmlformats.org/drawingml/2006/main">
               <a:ext uri="{FF2B5EF4-FFF2-40B4-BE49-F238E27FC236}">
-                <a16:creationId xmlns:a16="http://schemas.microsoft.com/office/drawing/2014/main" id="{9E953FA3-8692-4184-BB3E-F1835E29AF08}"/>
+                <a16:creationId xmlns:a16="http://schemas.microsoft.com/office/drawing/2014/main" id="{15598AA8-8B15-4BBB-ABEE-F42A63B57969}"/>
               </a:ext>
             </a:extLst>
           </p:cNvPr>
@@ -16941,7 +21465,7 @@
           <p:cNvPr id="3" name="">
             <a:extLst xmlns:a="http://schemas.openxmlformats.org/drawingml/2006/main">
               <a:ext uri="{FF2B5EF4-FFF2-40B4-BE49-F238E27FC236}">
-                <a16:creationId xmlns:a16="http://schemas.microsoft.com/office/drawing/2014/main" id="{16689F05-B496-4EE5-BBF4-FDCE09A05929}"/>
+                <a16:creationId xmlns:a16="http://schemas.microsoft.com/office/drawing/2014/main" id="{9A994F0B-8C90-4FBD-B1B0-01297A50E12D}"/>
               </a:ext>
             </a:extLst>
           </p:cNvPr>
@@ -16974,7 +21498,7 @@
           <p:cNvPr id="4" name="">
             <a:extLst xmlns:a="http://schemas.openxmlformats.org/drawingml/2006/main">
               <a:ext uri="{FF2B5EF4-FFF2-40B4-BE49-F238E27FC236}">
-                <a16:creationId xmlns:a16="http://schemas.microsoft.com/office/drawing/2014/main" id="{66F79450-1E98-4FFA-A4EB-FEB1442B11E0}"/>
+                <a16:creationId xmlns:a16="http://schemas.microsoft.com/office/drawing/2014/main" id="{846A5BC9-AD3C-4413-9F2A-2C7DDC5206F8}"/>
               </a:ext>
             </a:extLst>
           </p:cNvPr>
@@ -17024,7 +21548,7 @@
           <p:cNvPr id="5" name="">
             <a:extLst xmlns:a="http://schemas.openxmlformats.org/drawingml/2006/main">
               <a:ext uri="{FF2B5EF4-FFF2-40B4-BE49-F238E27FC236}">
-                <a16:creationId xmlns:a16="http://schemas.microsoft.com/office/drawing/2014/main" id="{F9D53B1D-5BBA-4E93-A651-1CEC9DA05E00}"/>
+                <a16:creationId xmlns:a16="http://schemas.microsoft.com/office/drawing/2014/main" id="{A168BB3E-9963-463F-8B90-609DC785F307}"/>
               </a:ext>
             </a:extLst>
           </p:cNvPr>
@@ -17078,7 +21602,7 @@
           <p:nvPr/>
         </p:nvPicPr>
         <p:blipFill>
-          <a:blip xmlns:r="http://schemas.openxmlformats.org/officeDocument/2006/relationships" xmlns:a="http://schemas.openxmlformats.org/drawingml/2006/main" r:embed="R33c4b01143c44f25"/>
+          <a:blip xmlns:r="http://schemas.openxmlformats.org/officeDocument/2006/relationships" xmlns:a="http://schemas.openxmlformats.org/drawingml/2006/main" r:embed="R6fc59c31344b4011"/>
           <a:stretch xmlns:a="http://schemas.openxmlformats.org/drawingml/2006/main"/>
         </p:blipFill>
         <p:spPr>
@@ -17096,7 +21620,7 @@
           <p:cNvPr id="7" name="">
             <a:extLst xmlns:a="http://schemas.openxmlformats.org/drawingml/2006/main">
               <a:ext uri="{FF2B5EF4-FFF2-40B4-BE49-F238E27FC236}">
-                <a16:creationId xmlns:a16="http://schemas.microsoft.com/office/drawing/2014/main" id="{3F9CB610-E52B-46D5-B793-AA5E41325675}"/>
+                <a16:creationId xmlns:a16="http://schemas.microsoft.com/office/drawing/2014/main" id="{0E9F9D1C-9CB4-49ED-9BFD-F5E5E86A4B25}"/>
               </a:ext>
             </a:extLst>
           </p:cNvPr>
@@ -17129,7 +21653,7 @@
           <p:cNvPr id="8" name="">
             <a:extLst xmlns:a="http://schemas.openxmlformats.org/drawingml/2006/main">
               <a:ext uri="{FF2B5EF4-FFF2-40B4-BE49-F238E27FC236}">
-                <a16:creationId xmlns:a16="http://schemas.microsoft.com/office/drawing/2014/main" id="{19ED9DA3-7846-4530-9B22-70EC497135B1}"/>
+                <a16:creationId xmlns:a16="http://schemas.microsoft.com/office/drawing/2014/main" id="{6AC6F0A9-2F75-45E9-9D03-A287BF73548A}"/>
               </a:ext>
             </a:extLst>
           </p:cNvPr>
@@ -17179,7 +21703,7 @@
           <p:cNvPr id="9" name="">
             <a:extLst xmlns:a="http://schemas.openxmlformats.org/drawingml/2006/main">
               <a:ext uri="{FF2B5EF4-FFF2-40B4-BE49-F238E27FC236}">
-                <a16:creationId xmlns:a16="http://schemas.microsoft.com/office/drawing/2014/main" id="{B0EFD475-8459-4C76-8C17-92E4C29E7A1C}"/>
+                <a16:creationId xmlns:a16="http://schemas.microsoft.com/office/drawing/2014/main" id="{220B44AB-FC46-47E3-A7D0-52487B6CD66B}"/>
               </a:ext>
             </a:extLst>
           </p:cNvPr>
@@ -17212,7 +21736,7 @@
           <p:cNvPr id="10" name="">
             <a:extLst xmlns:a="http://schemas.openxmlformats.org/drawingml/2006/main">
               <a:ext uri="{FF2B5EF4-FFF2-40B4-BE49-F238E27FC236}">
-                <a16:creationId xmlns:a16="http://schemas.microsoft.com/office/drawing/2014/main" id="{B3581A29-CDEC-4D52-9B25-59E9CFD93DA5}"/>
+                <a16:creationId xmlns:a16="http://schemas.microsoft.com/office/drawing/2014/main" id="{F92E3294-3414-40C5-8774-6778AF2811CD}"/>
               </a:ext>
             </a:extLst>
           </p:cNvPr>
@@ -17262,7 +21786,7 @@
           <p:cNvPr id="11" name="">
             <a:extLst xmlns:a="http://schemas.openxmlformats.org/drawingml/2006/main">
               <a:ext uri="{FF2B5EF4-FFF2-40B4-BE49-F238E27FC236}">
-                <a16:creationId xmlns:a16="http://schemas.microsoft.com/office/drawing/2014/main" id="{FAA1CFFC-1D05-444F-9059-5D6B7C256742}"/>
+                <a16:creationId xmlns:a16="http://schemas.microsoft.com/office/drawing/2014/main" id="{F38C69C1-109A-441B-930D-99261C5D29EB}"/>
               </a:ext>
             </a:extLst>
           </p:cNvPr>
@@ -17295,7 +21819,7 @@
           <p:cNvPr id="12" name="">
             <a:extLst xmlns:a="http://schemas.openxmlformats.org/drawingml/2006/main">
               <a:ext uri="{FF2B5EF4-FFF2-40B4-BE49-F238E27FC236}">
-                <a16:creationId xmlns:a16="http://schemas.microsoft.com/office/drawing/2014/main" id="{2BF4E436-F13A-460D-AE6E-D06AB9F92203}"/>
+                <a16:creationId xmlns:a16="http://schemas.microsoft.com/office/drawing/2014/main" id="{BED71162-B8B6-4884-8C1A-6FE086CD8542}"/>
               </a:ext>
             </a:extLst>
           </p:cNvPr>
@@ -17345,7 +21869,7 @@
           <p:cNvPr id="13" name="">
             <a:extLst xmlns:a="http://schemas.openxmlformats.org/drawingml/2006/main">
               <a:ext uri="{FF2B5EF4-FFF2-40B4-BE49-F238E27FC236}">
-                <a16:creationId xmlns:a16="http://schemas.microsoft.com/office/drawing/2014/main" id="{0BF0C0F1-9C7C-46DA-8D88-C20E28D56B24}"/>
+                <a16:creationId xmlns:a16="http://schemas.microsoft.com/office/drawing/2014/main" id="{FD120BBB-881E-4877-891B-1B8EEADB9DDE}"/>
               </a:ext>
             </a:extLst>
           </p:cNvPr>
@@ -17378,7 +21902,7 @@
           <p:cNvPr id="14" name="">
             <a:extLst xmlns:a="http://schemas.openxmlformats.org/drawingml/2006/main">
               <a:ext uri="{FF2B5EF4-FFF2-40B4-BE49-F238E27FC236}">
-                <a16:creationId xmlns:a16="http://schemas.microsoft.com/office/drawing/2014/main" id="{3EAE4C3B-1017-4055-A469-5B33D42B9284}"/>
+                <a16:creationId xmlns:a16="http://schemas.microsoft.com/office/drawing/2014/main" id="{A0535B7A-94F4-4D3A-8F83-628A22DFBC77}"/>
               </a:ext>
             </a:extLst>
           </p:cNvPr>
@@ -17428,7 +21952,7 @@
           <p:cNvPr id="15" name="">
             <a:extLst xmlns:a="http://schemas.openxmlformats.org/drawingml/2006/main">
               <a:ext uri="{FF2B5EF4-FFF2-40B4-BE49-F238E27FC236}">
-                <a16:creationId xmlns:a16="http://schemas.microsoft.com/office/drawing/2014/main" id="{47196D56-AF23-46C2-8E55-C0BFD0A95B8C}"/>
+                <a16:creationId xmlns:a16="http://schemas.microsoft.com/office/drawing/2014/main" id="{DC2E1A11-FE11-42B2-A9E6-FB1C8EC2227F}"/>
               </a:ext>
             </a:extLst>
           </p:cNvPr>
@@ -17476,7 +22000,7 @@
     </p:spTree>
     <p:extLst>
       <p:ext uri="{BB962C8B-B14F-4D97-AF65-F5344CB8AC3E}">
-        <p14:creationId xmlns:p14="http://schemas.microsoft.com/office/powerpoint/2010/main" val="309137984"/>
+        <p14:creationId xmlns:p14="http://schemas.microsoft.com/office/powerpoint/2010/main" val="1661292865"/>
       </p:ext>
     </p:extLst>
   </p:cSld>
@@ -17507,7 +22031,7 @@
           <p:cNvPr id="16" name="">
             <a:extLst xmlns:a="http://schemas.openxmlformats.org/drawingml/2006/main">
               <a:ext uri="{FF2B5EF4-FFF2-40B4-BE49-F238E27FC236}">
-                <a16:creationId xmlns:a16="http://schemas.microsoft.com/office/drawing/2014/main" id="{41C205E5-767C-4DEE-88E5-08145D0E236D}"/>
+                <a16:creationId xmlns:a16="http://schemas.microsoft.com/office/drawing/2014/main" id="{A932BF7F-F2CF-4656-83B1-5EF87ADF551E}"/>
               </a:ext>
             </a:extLst>
           </p:cNvPr>
@@ -17557,7 +22081,7 @@
           <p:cNvPr id="2" name="">
             <a:extLst xmlns:a="http://schemas.openxmlformats.org/drawingml/2006/main">
               <a:ext uri="{FF2B5EF4-FFF2-40B4-BE49-F238E27FC236}">
-                <a16:creationId xmlns:a16="http://schemas.microsoft.com/office/drawing/2014/main" id="{F43C2D82-DBD4-4771-90AC-2D35B931A958}"/>
+                <a16:creationId xmlns:a16="http://schemas.microsoft.com/office/drawing/2014/main" id="{7E3659B2-75D3-42CC-8BD1-6A8A10E2C711}"/>
               </a:ext>
             </a:extLst>
           </p:cNvPr>
@@ -17607,7 +22131,7 @@
           <p:cNvPr id="3" name="">
             <a:extLst xmlns:a="http://schemas.openxmlformats.org/drawingml/2006/main">
               <a:ext uri="{FF2B5EF4-FFF2-40B4-BE49-F238E27FC236}">
-                <a16:creationId xmlns:a16="http://schemas.microsoft.com/office/drawing/2014/main" id="{6AA719B5-1631-4BD5-875C-F536332CE361}"/>
+                <a16:creationId xmlns:a16="http://schemas.microsoft.com/office/drawing/2014/main" id="{360CE4FE-90AD-4707-9322-A3A5E35A4C9D}"/>
               </a:ext>
             </a:extLst>
           </p:cNvPr>
@@ -17640,7 +22164,7 @@
           <p:cNvPr id="4" name="">
             <a:extLst xmlns:a="http://schemas.openxmlformats.org/drawingml/2006/main">
               <a:ext uri="{FF2B5EF4-FFF2-40B4-BE49-F238E27FC236}">
-                <a16:creationId xmlns:a16="http://schemas.microsoft.com/office/drawing/2014/main" id="{39E0324E-6486-4055-8FC0-56325D66FA12}"/>
+                <a16:creationId xmlns:a16="http://schemas.microsoft.com/office/drawing/2014/main" id="{483F8F2C-0E61-4204-87B6-33918EF58DB5}"/>
               </a:ext>
             </a:extLst>
           </p:cNvPr>
@@ -17690,7 +22214,7 @@
           <p:cNvPr id="5" name="">
             <a:extLst xmlns:a="http://schemas.openxmlformats.org/drawingml/2006/main">
               <a:ext uri="{FF2B5EF4-FFF2-40B4-BE49-F238E27FC236}">
-                <a16:creationId xmlns:a16="http://schemas.microsoft.com/office/drawing/2014/main" id="{E96162B2-A56D-4A53-94A6-945A995F9B3F}"/>
+                <a16:creationId xmlns:a16="http://schemas.microsoft.com/office/drawing/2014/main" id="{982E45E4-60C7-4529-96D3-138B79B0155E}"/>
               </a:ext>
             </a:extLst>
           </p:cNvPr>
@@ -17744,7 +22268,7 @@
           <p:nvPr/>
         </p:nvPicPr>
         <p:blipFill>
-          <a:blip xmlns:r="http://schemas.openxmlformats.org/officeDocument/2006/relationships" xmlns:a="http://schemas.openxmlformats.org/drawingml/2006/main" r:embed="R7fbc7a8e70f449dc"/>
+          <a:blip xmlns:r="http://schemas.openxmlformats.org/officeDocument/2006/relationships" xmlns:a="http://schemas.openxmlformats.org/drawingml/2006/main" r:embed="R03e0745b12034ea8"/>
           <a:stretch xmlns:a="http://schemas.openxmlformats.org/drawingml/2006/main"/>
         </p:blipFill>
         <p:spPr>
@@ -17762,7 +22286,7 @@
           <p:cNvPr id="7" name="">
             <a:extLst xmlns:a="http://schemas.openxmlformats.org/drawingml/2006/main">
               <a:ext uri="{FF2B5EF4-FFF2-40B4-BE49-F238E27FC236}">
-                <a16:creationId xmlns:a16="http://schemas.microsoft.com/office/drawing/2014/main" id="{F51BE130-820B-4E9A-835F-761B2F5FC2EA}"/>
+                <a16:creationId xmlns:a16="http://schemas.microsoft.com/office/drawing/2014/main" id="{4B941372-B1B5-45DB-A5C4-9708A84F55F6}"/>
               </a:ext>
             </a:extLst>
           </p:cNvPr>
@@ -17795,7 +22319,7 @@
           <p:cNvPr id="8" name="">
             <a:extLst xmlns:a="http://schemas.openxmlformats.org/drawingml/2006/main">
               <a:ext uri="{FF2B5EF4-FFF2-40B4-BE49-F238E27FC236}">
-                <a16:creationId xmlns:a16="http://schemas.microsoft.com/office/drawing/2014/main" id="{E18C3536-91E1-40EB-8E6D-D7C3D47317D0}"/>
+                <a16:creationId xmlns:a16="http://schemas.microsoft.com/office/drawing/2014/main" id="{003706CA-5236-4E13-82CD-461EB59EF846}"/>
               </a:ext>
             </a:extLst>
           </p:cNvPr>
@@ -17845,7 +22369,7 @@
           <p:cNvPr id="9" name="">
             <a:extLst xmlns:a="http://schemas.openxmlformats.org/drawingml/2006/main">
               <a:ext uri="{FF2B5EF4-FFF2-40B4-BE49-F238E27FC236}">
-                <a16:creationId xmlns:a16="http://schemas.microsoft.com/office/drawing/2014/main" id="{EDD02B87-1182-4E56-A49D-A25994886C55}"/>
+                <a16:creationId xmlns:a16="http://schemas.microsoft.com/office/drawing/2014/main" id="{BC370DC2-D67C-43F0-AF2E-1089DC23AFB5}"/>
               </a:ext>
             </a:extLst>
           </p:cNvPr>
@@ -17878,7 +22402,7 @@
           <p:cNvPr id="10" name="">
             <a:extLst xmlns:a="http://schemas.openxmlformats.org/drawingml/2006/main">
               <a:ext uri="{FF2B5EF4-FFF2-40B4-BE49-F238E27FC236}">
-                <a16:creationId xmlns:a16="http://schemas.microsoft.com/office/drawing/2014/main" id="{BD6507DA-0BE2-45D8-BFE0-4AA093942E46}"/>
+                <a16:creationId xmlns:a16="http://schemas.microsoft.com/office/drawing/2014/main" id="{84A6C611-ED86-488B-91DF-5BF4ECD19EF7}"/>
               </a:ext>
             </a:extLst>
           </p:cNvPr>
@@ -17928,7 +22452,7 @@
           <p:cNvPr id="11" name="">
             <a:extLst xmlns:a="http://schemas.openxmlformats.org/drawingml/2006/main">
               <a:ext uri="{FF2B5EF4-FFF2-40B4-BE49-F238E27FC236}">
-                <a16:creationId xmlns:a16="http://schemas.microsoft.com/office/drawing/2014/main" id="{5EAF32C0-68C4-4ADB-B21A-BCDD7586A5C3}"/>
+                <a16:creationId xmlns:a16="http://schemas.microsoft.com/office/drawing/2014/main" id="{67F1F57A-BF94-4044-8650-D3A7B317E99C}"/>
               </a:ext>
             </a:extLst>
           </p:cNvPr>
@@ -17961,7 +22485,7 @@
           <p:cNvPr id="12" name="">
             <a:extLst xmlns:a="http://schemas.openxmlformats.org/drawingml/2006/main">
               <a:ext uri="{FF2B5EF4-FFF2-40B4-BE49-F238E27FC236}">
-                <a16:creationId xmlns:a16="http://schemas.microsoft.com/office/drawing/2014/main" id="{F996F837-E8E3-4DC0-A517-DCC464A612F0}"/>
+                <a16:creationId xmlns:a16="http://schemas.microsoft.com/office/drawing/2014/main" id="{8F4B7578-6BBC-4FCB-A146-95D33C765DFF}"/>
               </a:ext>
             </a:extLst>
           </p:cNvPr>
@@ -18011,7 +22535,7 @@
           <p:cNvPr id="13" name="">
             <a:extLst xmlns:a="http://schemas.openxmlformats.org/drawingml/2006/main">
               <a:ext uri="{FF2B5EF4-FFF2-40B4-BE49-F238E27FC236}">
-                <a16:creationId xmlns:a16="http://schemas.microsoft.com/office/drawing/2014/main" id="{372C483D-7CEE-4388-8306-259299427EBC}"/>
+                <a16:creationId xmlns:a16="http://schemas.microsoft.com/office/drawing/2014/main" id="{7D918631-FE84-4DA0-94CE-A8ED37752ADE}"/>
               </a:ext>
             </a:extLst>
           </p:cNvPr>
@@ -18044,7 +22568,7 @@
           <p:cNvPr id="14" name="">
             <a:extLst xmlns:a="http://schemas.openxmlformats.org/drawingml/2006/main">
               <a:ext uri="{FF2B5EF4-FFF2-40B4-BE49-F238E27FC236}">
-                <a16:creationId xmlns:a16="http://schemas.microsoft.com/office/drawing/2014/main" id="{55FCF98C-833A-48D7-92C5-68C86F6BEB4E}"/>
+                <a16:creationId xmlns:a16="http://schemas.microsoft.com/office/drawing/2014/main" id="{DD6AD7EF-0A46-42DA-8CA8-BEDB533F6FD5}"/>
               </a:ext>
             </a:extLst>
           </p:cNvPr>
@@ -18094,7 +22618,7 @@
           <p:cNvPr id="15" name="">
             <a:extLst xmlns:a="http://schemas.openxmlformats.org/drawingml/2006/main">
               <a:ext uri="{FF2B5EF4-FFF2-40B4-BE49-F238E27FC236}">
-                <a16:creationId xmlns:a16="http://schemas.microsoft.com/office/drawing/2014/main" id="{37D38F8C-E39C-4A56-BA83-3C934E9DD5B0}"/>
+                <a16:creationId xmlns:a16="http://schemas.microsoft.com/office/drawing/2014/main" id="{92A0C3B0-C662-49F6-A0C6-3AEBB31EEBA8}"/>
               </a:ext>
             </a:extLst>
           </p:cNvPr>
@@ -18142,7 +22666,7 @@
     </p:spTree>
     <p:extLst>
       <p:ext uri="{BB962C8B-B14F-4D97-AF65-F5344CB8AC3E}">
-        <p14:creationId xmlns:p14="http://schemas.microsoft.com/office/powerpoint/2010/main" val="934390960"/>
+        <p14:creationId xmlns:p14="http://schemas.microsoft.com/office/powerpoint/2010/main" val="113299234"/>
       </p:ext>
     </p:extLst>
   </p:cSld>
@@ -18173,7 +22697,7 @@
           <p:cNvPr id="14" name="">
             <a:extLst xmlns:a="http://schemas.openxmlformats.org/drawingml/2006/main">
               <a:ext uri="{FF2B5EF4-FFF2-40B4-BE49-F238E27FC236}">
-                <a16:creationId xmlns:a16="http://schemas.microsoft.com/office/drawing/2014/main" id="{C3A726D9-FBC6-47FF-A4AD-714859AA7F24}"/>
+                <a16:creationId xmlns:a16="http://schemas.microsoft.com/office/drawing/2014/main" id="{8E3492D0-B530-4565-8BB3-F88723969425}"/>
               </a:ext>
             </a:extLst>
           </p:cNvPr>
@@ -18223,7 +22747,7 @@
           <p:cNvPr id="2" name="">
             <a:extLst xmlns:a="http://schemas.openxmlformats.org/drawingml/2006/main">
               <a:ext uri="{FF2B5EF4-FFF2-40B4-BE49-F238E27FC236}">
-                <a16:creationId xmlns:a16="http://schemas.microsoft.com/office/drawing/2014/main" id="{83220F65-D21F-49AF-A89E-345ED69BBCB9}"/>
+                <a16:creationId xmlns:a16="http://schemas.microsoft.com/office/drawing/2014/main" id="{19F631C0-5E03-4B03-82D3-200F43C3F94F}"/>
               </a:ext>
             </a:extLst>
           </p:cNvPr>
@@ -18273,7 +22797,7 @@
           <p:cNvPr id="3" name="">
             <a:extLst xmlns:a="http://schemas.openxmlformats.org/drawingml/2006/main">
               <a:ext uri="{FF2B5EF4-FFF2-40B4-BE49-F238E27FC236}">
-                <a16:creationId xmlns:a16="http://schemas.microsoft.com/office/drawing/2014/main" id="{85C345AF-24B1-40DC-AC1E-E5BC0B68E374}"/>
+                <a16:creationId xmlns:a16="http://schemas.microsoft.com/office/drawing/2014/main" id="{C5A01199-5709-413B-A01C-EDF369C348A4}"/>
               </a:ext>
             </a:extLst>
           </p:cNvPr>
@@ -18306,7 +22830,7 @@
           <p:cNvPr id="4" name="">
             <a:extLst xmlns:a="http://schemas.openxmlformats.org/drawingml/2006/main">
               <a:ext uri="{FF2B5EF4-FFF2-40B4-BE49-F238E27FC236}">
-                <a16:creationId xmlns:a16="http://schemas.microsoft.com/office/drawing/2014/main" id="{17C7BAC2-F85B-4F9C-928A-B08FBBDC8C8F}"/>
+                <a16:creationId xmlns:a16="http://schemas.microsoft.com/office/drawing/2014/main" id="{9AE7B575-656F-46C5-B337-60EB0DBF08E7}"/>
               </a:ext>
             </a:extLst>
           </p:cNvPr>
@@ -18356,7 +22880,7 @@
           <p:cNvPr id="5" name="">
             <a:extLst xmlns:a="http://schemas.openxmlformats.org/drawingml/2006/main">
               <a:ext uri="{FF2B5EF4-FFF2-40B4-BE49-F238E27FC236}">
-                <a16:creationId xmlns:a16="http://schemas.microsoft.com/office/drawing/2014/main" id="{ACA31E1C-7CE5-49E7-98F0-A304BDA29B2A}"/>
+                <a16:creationId xmlns:a16="http://schemas.microsoft.com/office/drawing/2014/main" id="{4A9B1F36-EBA0-4433-B4A4-BD518FCE31D8}"/>
               </a:ext>
             </a:extLst>
           </p:cNvPr>
@@ -18410,7 +22934,7 @@
           <p:nvPr/>
         </p:nvPicPr>
         <p:blipFill>
-          <a:blip xmlns:r="http://schemas.openxmlformats.org/officeDocument/2006/relationships" xmlns:a="http://schemas.openxmlformats.org/drawingml/2006/main" r:embed="R4ee75fd225f04523"/>
+          <a:blip xmlns:r="http://schemas.openxmlformats.org/officeDocument/2006/relationships" xmlns:a="http://schemas.openxmlformats.org/drawingml/2006/main" r:embed="R35abc1431d6942e4"/>
           <a:stretch xmlns:a="http://schemas.openxmlformats.org/drawingml/2006/main"/>
         </p:blipFill>
         <p:spPr>
@@ -18428,7 +22952,7 @@
           <p:cNvPr id="7" name="">
             <a:extLst xmlns:a="http://schemas.openxmlformats.org/drawingml/2006/main">
               <a:ext uri="{FF2B5EF4-FFF2-40B4-BE49-F238E27FC236}">
-                <a16:creationId xmlns:a16="http://schemas.microsoft.com/office/drawing/2014/main" id="{959A7FCC-002A-4E64-8E63-EB3C47853669}"/>
+                <a16:creationId xmlns:a16="http://schemas.microsoft.com/office/drawing/2014/main" id="{2A981961-F9E7-4CF8-990C-7669022F224B}"/>
               </a:ext>
             </a:extLst>
           </p:cNvPr>
@@ -18461,7 +22985,7 @@
           <p:cNvPr id="8" name="">
             <a:extLst xmlns:a="http://schemas.openxmlformats.org/drawingml/2006/main">
               <a:ext uri="{FF2B5EF4-FFF2-40B4-BE49-F238E27FC236}">
-                <a16:creationId xmlns:a16="http://schemas.microsoft.com/office/drawing/2014/main" id="{938F2036-4E70-4BF0-845D-8AE1DA74B19F}"/>
+                <a16:creationId xmlns:a16="http://schemas.microsoft.com/office/drawing/2014/main" id="{35CDBAAD-F90F-4B16-9BF9-9C56D2AD8E57}"/>
               </a:ext>
             </a:extLst>
           </p:cNvPr>
@@ -18511,7 +23035,7 @@
           <p:cNvPr id="9" name="">
             <a:extLst xmlns:a="http://schemas.openxmlformats.org/drawingml/2006/main">
               <a:ext uri="{FF2B5EF4-FFF2-40B4-BE49-F238E27FC236}">
-                <a16:creationId xmlns:a16="http://schemas.microsoft.com/office/drawing/2014/main" id="{981B4109-40C4-4DBE-AEB7-E45281556C1F}"/>
+                <a16:creationId xmlns:a16="http://schemas.microsoft.com/office/drawing/2014/main" id="{DB25CC8D-CFC8-49C4-A1BC-8A45D90D1167}"/>
               </a:ext>
             </a:extLst>
           </p:cNvPr>
@@ -18544,7 +23068,7 @@
           <p:cNvPr id="10" name="">
             <a:extLst xmlns:a="http://schemas.openxmlformats.org/drawingml/2006/main">
               <a:ext uri="{FF2B5EF4-FFF2-40B4-BE49-F238E27FC236}">
-                <a16:creationId xmlns:a16="http://schemas.microsoft.com/office/drawing/2014/main" id="{8FC51695-5AF5-43C5-B717-7CBD8AF192B7}"/>
+                <a16:creationId xmlns:a16="http://schemas.microsoft.com/office/drawing/2014/main" id="{743F539A-39E6-4FB4-A40D-A09ABDF6E656}"/>
               </a:ext>
             </a:extLst>
           </p:cNvPr>
@@ -18594,7 +23118,7 @@
           <p:cNvPr id="11" name="">
             <a:extLst xmlns:a="http://schemas.openxmlformats.org/drawingml/2006/main">
               <a:ext uri="{FF2B5EF4-FFF2-40B4-BE49-F238E27FC236}">
-                <a16:creationId xmlns:a16="http://schemas.microsoft.com/office/drawing/2014/main" id="{D7CF94F6-8E81-47EF-AE5D-6CDE9F9568EE}"/>
+                <a16:creationId xmlns:a16="http://schemas.microsoft.com/office/drawing/2014/main" id="{BAE502BF-B4F3-45D5-A1F0-8823D92D6331}"/>
               </a:ext>
             </a:extLst>
           </p:cNvPr>
@@ -18627,7 +23151,7 @@
           <p:cNvPr id="12" name="">
             <a:extLst xmlns:a="http://schemas.openxmlformats.org/drawingml/2006/main">
               <a:ext uri="{FF2B5EF4-FFF2-40B4-BE49-F238E27FC236}">
-                <a16:creationId xmlns:a16="http://schemas.microsoft.com/office/drawing/2014/main" id="{98E9C63E-5688-4C21-B5D5-971A91454A86}"/>
+                <a16:creationId xmlns:a16="http://schemas.microsoft.com/office/drawing/2014/main" id="{337AD3B3-856E-48B9-9352-CF4A75EA5441}"/>
               </a:ext>
             </a:extLst>
           </p:cNvPr>
@@ -18677,7 +23201,7 @@
           <p:cNvPr id="13" name="">
             <a:extLst xmlns:a="http://schemas.openxmlformats.org/drawingml/2006/main">
               <a:ext uri="{FF2B5EF4-FFF2-40B4-BE49-F238E27FC236}">
-                <a16:creationId xmlns:a16="http://schemas.microsoft.com/office/drawing/2014/main" id="{2DB46CB7-9142-4549-BC87-5E773B2B9F3F}"/>
+                <a16:creationId xmlns:a16="http://schemas.microsoft.com/office/drawing/2014/main" id="{763969DA-3FBD-4E77-9CB2-8A3166D3DA2A}"/>
               </a:ext>
             </a:extLst>
           </p:cNvPr>
@@ -18725,7 +23249,7 @@
     </p:spTree>
     <p:extLst>
       <p:ext uri="{BB962C8B-B14F-4D97-AF65-F5344CB8AC3E}">
-        <p14:creationId xmlns:p14="http://schemas.microsoft.com/office/powerpoint/2010/main" val="987746621"/>
+        <p14:creationId xmlns:p14="http://schemas.microsoft.com/office/powerpoint/2010/main" val="1632076552"/>
       </p:ext>
     </p:extLst>
   </p:cSld>

--- a/operator_hypothesis_lab/presentations/nvda_microscope_evidence.pptx
+++ b/operator_hypothesis_lab/presentations/nvda_microscope_evidence.pptx
@@ -2,40 +2,46 @@
 <file path=ppt/presentation.xml><?xml version="1.0" encoding="utf-8"?>
 <p:presentation xmlns:p="http://schemas.openxmlformats.org/presentationml/2006/main">
   <p:sldMasterIdLst>
-    <p:sldMasterId xmlns:r="http://schemas.openxmlformats.org/officeDocument/2006/relationships" id="2147483648" r:id="R0d0577b11d354120"/>
+    <p:sldMasterId xmlns:r="http://schemas.openxmlformats.org/officeDocument/2006/relationships" id="2147483648" r:id="Rbbd0d41bca9345e4"/>
   </p:sldMasterIdLst>
   <p:notesMasterIdLst>
-    <p:notesMasterId xmlns:r="http://schemas.openxmlformats.org/officeDocument/2006/relationships" r:id="Re13cf518a5364567"/>
+    <p:notesMasterId xmlns:r="http://schemas.openxmlformats.org/officeDocument/2006/relationships" r:id="R88811832a2b646a9"/>
   </p:notesMasterIdLst>
   <p:sldIdLst>
-    <p:sldId xmlns:r="http://schemas.openxmlformats.org/officeDocument/2006/relationships" id="256" r:id="R06aca6160cd942d5"/>
-    <p:sldId xmlns:r="http://schemas.openxmlformats.org/officeDocument/2006/relationships" id="257" r:id="R86078bfaad4e45a7"/>
-    <p:sldId xmlns:r="http://schemas.openxmlformats.org/officeDocument/2006/relationships" id="258" r:id="R8b71cd448b8e4f02"/>
-    <p:sldId xmlns:r="http://schemas.openxmlformats.org/officeDocument/2006/relationships" id="259" r:id="R6e4dcad0d99f44eb"/>
-    <p:sldId xmlns:r="http://schemas.openxmlformats.org/officeDocument/2006/relationships" id="260" r:id="R644faa77604a46df"/>
-    <p:sldId xmlns:r="http://schemas.openxmlformats.org/officeDocument/2006/relationships" id="261" r:id="Rc1c014cab37340b1"/>
-    <p:sldId xmlns:r="http://schemas.openxmlformats.org/officeDocument/2006/relationships" id="262" r:id="Rcb0bb3f1a58b4d6f"/>
-    <p:sldId xmlns:r="http://schemas.openxmlformats.org/officeDocument/2006/relationships" id="263" r:id="R3124e3dba2884798"/>
-    <p:sldId xmlns:r="http://schemas.openxmlformats.org/officeDocument/2006/relationships" id="264" r:id="R3e4da2e152d94dc5"/>
-    <p:sldId xmlns:r="http://schemas.openxmlformats.org/officeDocument/2006/relationships" id="265" r:id="Rc93f2ff99b804f01"/>
-    <p:sldId xmlns:r="http://schemas.openxmlformats.org/officeDocument/2006/relationships" id="266" r:id="R4b4aab4a19054b23"/>
-    <p:sldId xmlns:r="http://schemas.openxmlformats.org/officeDocument/2006/relationships" id="267" r:id="R923ee701d8b1478d"/>
-    <p:sldId xmlns:r="http://schemas.openxmlformats.org/officeDocument/2006/relationships" id="268" r:id="Re2d0cfac54774176"/>
-    <p:sldId xmlns:r="http://schemas.openxmlformats.org/officeDocument/2006/relationships" id="269" r:id="Ra46cef779c254f30"/>
-    <p:sldId xmlns:r="http://schemas.openxmlformats.org/officeDocument/2006/relationships" id="270" r:id="Ra4fc5dd8669a49dc"/>
-    <p:sldId xmlns:r="http://schemas.openxmlformats.org/officeDocument/2006/relationships" id="271" r:id="R7067006636734f51"/>
-    <p:sldId xmlns:r="http://schemas.openxmlformats.org/officeDocument/2006/relationships" id="272" r:id="Rf600e917ab0d48a0"/>
-    <p:sldId xmlns:r="http://schemas.openxmlformats.org/officeDocument/2006/relationships" id="273" r:id="Rb66e8513574642ae"/>
-    <p:sldId xmlns:r="http://schemas.openxmlformats.org/officeDocument/2006/relationships" id="274" r:id="R18a1b5f085184d89"/>
-    <p:sldId xmlns:r="http://schemas.openxmlformats.org/officeDocument/2006/relationships" id="275" r:id="R4f96289868cd4481"/>
-    <p:sldId xmlns:r="http://schemas.openxmlformats.org/officeDocument/2006/relationships" id="276" r:id="R093e84d000e740e5"/>
-    <p:sldId xmlns:r="http://schemas.openxmlformats.org/officeDocument/2006/relationships" id="277" r:id="Rfb1fd85b340649a8"/>
-    <p:sldId xmlns:r="http://schemas.openxmlformats.org/officeDocument/2006/relationships" id="278" r:id="R63c58584573847fe"/>
-    <p:sldId xmlns:r="http://schemas.openxmlformats.org/officeDocument/2006/relationships" id="279" r:id="Red09aa29b55b4451"/>
-    <p:sldId xmlns:r="http://schemas.openxmlformats.org/officeDocument/2006/relationships" id="280" r:id="R3a528ed6b1e545f7"/>
-    <p:sldId xmlns:r="http://schemas.openxmlformats.org/officeDocument/2006/relationships" id="281" r:id="R07b51d796da84dd2"/>
-    <p:sldId xmlns:r="http://schemas.openxmlformats.org/officeDocument/2006/relationships" id="282" r:id="R8ca777c129ec44a4"/>
-    <p:sldId xmlns:r="http://schemas.openxmlformats.org/officeDocument/2006/relationships" id="283" r:id="R215a63037c9b4b5a"/>
+    <p:sldId xmlns:r="http://schemas.openxmlformats.org/officeDocument/2006/relationships" id="256" r:id="Ra8933c80b9e64333"/>
+    <p:sldId xmlns:r="http://schemas.openxmlformats.org/officeDocument/2006/relationships" id="257" r:id="Ra8e20b94d3544a50"/>
+    <p:sldId xmlns:r="http://schemas.openxmlformats.org/officeDocument/2006/relationships" id="258" r:id="R51d7dfa78c8a487a"/>
+    <p:sldId xmlns:r="http://schemas.openxmlformats.org/officeDocument/2006/relationships" id="259" r:id="R6e518a9058274053"/>
+    <p:sldId xmlns:r="http://schemas.openxmlformats.org/officeDocument/2006/relationships" id="260" r:id="R0f492974d2f34ceb"/>
+    <p:sldId xmlns:r="http://schemas.openxmlformats.org/officeDocument/2006/relationships" id="261" r:id="Recb4cb076cdb4d19"/>
+    <p:sldId xmlns:r="http://schemas.openxmlformats.org/officeDocument/2006/relationships" id="262" r:id="Rac8f0c7d0bcf42e5"/>
+    <p:sldId xmlns:r="http://schemas.openxmlformats.org/officeDocument/2006/relationships" id="263" r:id="R815507cb940d4a49"/>
+    <p:sldId xmlns:r="http://schemas.openxmlformats.org/officeDocument/2006/relationships" id="264" r:id="R918a8a058a334d24"/>
+    <p:sldId xmlns:r="http://schemas.openxmlformats.org/officeDocument/2006/relationships" id="265" r:id="R8cee28e3a9ba48de"/>
+    <p:sldId xmlns:r="http://schemas.openxmlformats.org/officeDocument/2006/relationships" id="266" r:id="Rd2441eb23b954be6"/>
+    <p:sldId xmlns:r="http://schemas.openxmlformats.org/officeDocument/2006/relationships" id="267" r:id="R63cddb7e33d24943"/>
+    <p:sldId xmlns:r="http://schemas.openxmlformats.org/officeDocument/2006/relationships" id="268" r:id="Rd452bd521808449d"/>
+    <p:sldId xmlns:r="http://schemas.openxmlformats.org/officeDocument/2006/relationships" id="269" r:id="Rc53fa768afda422e"/>
+    <p:sldId xmlns:r="http://schemas.openxmlformats.org/officeDocument/2006/relationships" id="270" r:id="R9909a4357a9141f9"/>
+    <p:sldId xmlns:r="http://schemas.openxmlformats.org/officeDocument/2006/relationships" id="271" r:id="R22c1f74a55b44d2a"/>
+    <p:sldId xmlns:r="http://schemas.openxmlformats.org/officeDocument/2006/relationships" id="272" r:id="R74fdd0ca0f6b497e"/>
+    <p:sldId xmlns:r="http://schemas.openxmlformats.org/officeDocument/2006/relationships" id="273" r:id="R3a79d683f8b540f7"/>
+    <p:sldId xmlns:r="http://schemas.openxmlformats.org/officeDocument/2006/relationships" id="274" r:id="R0df1ecd4f5c5458d"/>
+    <p:sldId xmlns:r="http://schemas.openxmlformats.org/officeDocument/2006/relationships" id="275" r:id="R64f5e34c2ef945ba"/>
+    <p:sldId xmlns:r="http://schemas.openxmlformats.org/officeDocument/2006/relationships" id="276" r:id="R38e4ff788fd747be"/>
+    <p:sldId xmlns:r="http://schemas.openxmlformats.org/officeDocument/2006/relationships" id="277" r:id="R509a37baf351434c"/>
+    <p:sldId xmlns:r="http://schemas.openxmlformats.org/officeDocument/2006/relationships" id="278" r:id="R6b0441d8b78643b3"/>
+    <p:sldId xmlns:r="http://schemas.openxmlformats.org/officeDocument/2006/relationships" id="279" r:id="R6c77e9be1e594bd8"/>
+    <p:sldId xmlns:r="http://schemas.openxmlformats.org/officeDocument/2006/relationships" id="280" r:id="Rfc802f0b6604483b"/>
+    <p:sldId xmlns:r="http://schemas.openxmlformats.org/officeDocument/2006/relationships" id="281" r:id="Rc2104eec5bb24c71"/>
+    <p:sldId xmlns:r="http://schemas.openxmlformats.org/officeDocument/2006/relationships" id="282" r:id="Rfba6c4ee2bd940ed"/>
+    <p:sldId xmlns:r="http://schemas.openxmlformats.org/officeDocument/2006/relationships" id="283" r:id="R8fdbb5084f6540da"/>
+    <p:sldId xmlns:r="http://schemas.openxmlformats.org/officeDocument/2006/relationships" id="284" r:id="R089c4a75b54549d4"/>
+    <p:sldId xmlns:r="http://schemas.openxmlformats.org/officeDocument/2006/relationships" id="285" r:id="R4021ac5be7bb4dcc"/>
+    <p:sldId xmlns:r="http://schemas.openxmlformats.org/officeDocument/2006/relationships" id="286" r:id="R6a07fc315f3648ff"/>
+    <p:sldId xmlns:r="http://schemas.openxmlformats.org/officeDocument/2006/relationships" id="287" r:id="Rb62e4ab67c3643e5"/>
+    <p:sldId xmlns:r="http://schemas.openxmlformats.org/officeDocument/2006/relationships" id="288" r:id="R145ac233cde141f6"/>
+    <p:sldId xmlns:r="http://schemas.openxmlformats.org/officeDocument/2006/relationships" id="289" r:id="R7aa72657bd0444fa"/>
   </p:sldIdLst>
   <p:sldSz cx="12192000" cy="6858000"/>
   <p:notesSz cx="6858000" cy="9144000"/>
@@ -2454,6 +2460,106 @@
 </p:notes>
 </file>
 
+<file path=ppt/notesSlides/notesSlide29.xml><?xml version="1.0" encoding="utf-8"?>
+<p:notes xmlns:p="http://schemas.openxmlformats.org/presentationml/2006/main">
+  <p:cSld>
+    <p:spTree>
+      <p:nvGrpSpPr>
+        <p:cNvPr id="1" name=""/>
+        <p:cNvGrpSpPr/>
+        <p:nvPr/>
+      </p:nvGrpSpPr>
+      <p:grpSpPr>
+        <a:xfrm xmlns:a="http://schemas.openxmlformats.org/drawingml/2006/main"/>
+      </p:grpSpPr>
+      <p:sp>
+        <p:nvSpPr>
+          <p:cNvPr id="2" name="Slide Image Placeholder 1"/>
+          <p:cNvSpPr>
+            <a:spLocks xmlns:a="http://schemas.openxmlformats.org/drawingml/2006/main" noGrp="1"/>
+          </p:cNvSpPr>
+          <p:nvPr>
+            <p:ph type="sldImg" idx="0"/>
+          </p:nvPr>
+        </p:nvSpPr>
+        <p:spPr/>
+      </p:sp>
+      <p:sp>
+        <p:nvSpPr>
+          <p:cNvPr id="3" name="Notes Placeholder 2"/>
+          <p:cNvSpPr>
+            <a:spLocks xmlns:a="http://schemas.openxmlformats.org/drawingml/2006/main" noGrp="1"/>
+          </p:cNvSpPr>
+          <p:nvPr>
+            <p:ph type="body" idx="1"/>
+          </p:nvPr>
+        </p:nvSpPr>
+        <p:spPr/>
+        <p:txBody>
+          <a:bodyPr xmlns:a="http://schemas.openxmlformats.org/drawingml/2006/main"/>
+          <a:lstStyle xmlns:a="http://schemas.openxmlformats.org/drawingml/2006/main"/>
+          <a:p xmlns:a="http://schemas.openxmlformats.org/drawingml/2006/main">
+            <a:r>
+              <a:t>The causal clock is fixed before looking at outcomes: use the completed 09:30-10:00 log return as the predictor and the 10:00-16:00 log return as the outcome. Only full 13-bar sessions are eligible.</a:t>
+            </a:r>
+          </a:p>
+          <a:p xmlns:a="http://schemas.openxmlformats.org/drawingml/2006/main">
+            <a:r>
+              <a:t/>
+            </a:r>
+          </a:p>
+          <a:p xmlns:a="http://schemas.openxmlformats.org/drawingml/2006/main">
+            <a:r>
+              <a:t>[Sources]</a:t>
+            </a:r>
+          </a:p>
+          <a:p xmlns:a="http://schemas.openxmlformats.org/drawingml/2006/main">
+            <a:r>
+              <a:t>- Local intraday opening-response report: runs/research_workbench/operator_hypothesis_lab/nvda_intraday_opening_response_20260831/report.md</a:t>
+            </a:r>
+          </a:p>
+          <a:p xmlns:a="http://schemas.openxmlformats.org/drawingml/2006/main">
+            <a:r>
+              <a:t>- Opening-response construction checks: runs/research_workbench/operator_hypothesis_lab/nvda_intraday_opening_response_20260831/source_checks.csv</a:t>
+            </a:r>
+          </a:p>
+          <a:p xmlns:a="http://schemas.openxmlformats.org/drawingml/2006/main">
+            <a:r>
+              <a:t>- Local descriptive packet: runs/research_workbench/operator_hypothesis_lab/nvda_intraday_clock_descriptive_20260831/report.md</a:t>
+            </a:r>
+          </a:p>
+          <a:p xmlns:a="http://schemas.openxmlformats.org/drawingml/2006/main">
+            <a:r>
+              <a:t>[/Sources]</a:t>
+            </a:r>
+          </a:p>
+        </p:txBody>
+      </p:sp>
+      <p:sp>
+        <p:nvSpPr>
+          <p:cNvPr id="4" name="Slide Number Placeholder 3"/>
+          <p:cNvSpPr>
+            <a:spLocks xmlns:a="http://schemas.openxmlformats.org/drawingml/2006/main" noGrp="1"/>
+          </p:cNvSpPr>
+          <p:nvPr>
+            <p:ph type="sldNum" idx="5"/>
+          </p:nvPr>
+        </p:nvSpPr>
+        <p:spPr/>
+        <p:txBody>
+          <a:bodyPr xmlns:a="http://schemas.openxmlformats.org/drawingml/2006/main"/>
+          <a:lstStyle xmlns:a="http://schemas.openxmlformats.org/drawingml/2006/main"/>
+          <a:p xmlns:a="http://schemas.openxmlformats.org/drawingml/2006/main"/>
+        </p:txBody>
+      </p:sp>
+    </p:spTree>
+  </p:cSld>
+  <p:clrMapOvr>
+    <a:masterClrMapping xmlns:a="http://schemas.openxmlformats.org/drawingml/2006/main"/>
+  </p:clrMapOvr>
+</p:notes>
+</file>
+
 <file path=ppt/notesSlides/notesSlide3.xml><?xml version="1.0" encoding="utf-8"?>
 <p:notes xmlns:p="http://schemas.openxmlformats.org/presentationml/2006/main">
   <p:cSld>
@@ -2515,6 +2621,496 @@
           <a:p xmlns:a="http://schemas.openxmlformats.org/drawingml/2006/main">
             <a:r>
               <a:t>- Local run specification: runs/research_workbench/operator_hypothesis_lab/nvda_intraday_clock_descriptive_20260831/run_spec.csv</a:t>
+            </a:r>
+          </a:p>
+          <a:p xmlns:a="http://schemas.openxmlformats.org/drawingml/2006/main">
+            <a:r>
+              <a:t>[/Sources]</a:t>
+            </a:r>
+          </a:p>
+        </p:txBody>
+      </p:sp>
+      <p:sp>
+        <p:nvSpPr>
+          <p:cNvPr id="4" name="Slide Number Placeholder 3"/>
+          <p:cNvSpPr>
+            <a:spLocks xmlns:a="http://schemas.openxmlformats.org/drawingml/2006/main" noGrp="1"/>
+          </p:cNvSpPr>
+          <p:nvPr>
+            <p:ph type="sldNum" idx="5"/>
+          </p:nvPr>
+        </p:nvSpPr>
+        <p:spPr/>
+        <p:txBody>
+          <a:bodyPr xmlns:a="http://schemas.openxmlformats.org/drawingml/2006/main"/>
+          <a:lstStyle xmlns:a="http://schemas.openxmlformats.org/drawingml/2006/main"/>
+          <a:p xmlns:a="http://schemas.openxmlformats.org/drawingml/2006/main"/>
+        </p:txBody>
+      </p:sp>
+    </p:spTree>
+  </p:cSld>
+  <p:clrMapOvr>
+    <a:masterClrMapping xmlns:a="http://schemas.openxmlformats.org/drawingml/2006/main"/>
+  </p:clrMapOvr>
+</p:notes>
+</file>
+
+<file path=ppt/notesSlides/notesSlide30.xml><?xml version="1.0" encoding="utf-8"?>
+<p:notes xmlns:p="http://schemas.openxmlformats.org/presentationml/2006/main">
+  <p:cSld>
+    <p:spTree>
+      <p:nvGrpSpPr>
+        <p:cNvPr id="1" name=""/>
+        <p:cNvGrpSpPr/>
+        <p:nvPr/>
+      </p:nvGrpSpPr>
+      <p:grpSpPr>
+        <a:xfrm xmlns:a="http://schemas.openxmlformats.org/drawingml/2006/main"/>
+      </p:grpSpPr>
+      <p:sp>
+        <p:nvSpPr>
+          <p:cNvPr id="2" name="Slide Image Placeholder 1"/>
+          <p:cNvSpPr>
+            <a:spLocks xmlns:a="http://schemas.openxmlformats.org/drawingml/2006/main" noGrp="1"/>
+          </p:cNvSpPr>
+          <p:nvPr>
+            <p:ph type="sldImg" idx="0"/>
+          </p:nvPr>
+        </p:nvSpPr>
+        <p:spPr/>
+      </p:sp>
+      <p:sp>
+        <p:nvSpPr>
+          <p:cNvPr id="3" name="Notes Placeholder 2"/>
+          <p:cNvSpPr>
+            <a:spLocks xmlns:a="http://schemas.openxmlformats.org/drawingml/2006/main" noGrp="1"/>
+          </p:cNvSpPr>
+          <p:nvPr>
+            <p:ph type="body" idx="1"/>
+          </p:nvPr>
+        </p:nvSpPr>
+        <p:spPr/>
+        <p:txBody>
+          <a:bodyPr xmlns:a="http://schemas.openxmlformats.org/drawingml/2006/main"/>
+          <a:lstStyle xmlns:a="http://schemas.openxmlformats.org/drawingml/2006/main"/>
+          <a:p xmlns:a="http://schemas.openxmlformats.org/drawingml/2006/main">
+            <a:r>
+              <a:t>The unfiltered opening-to-remainder Pearson correlation is +0.050. The vertical lines are the single sample-wide 20th and 80th percentile cutoffs. They are descriptive bins, not yet causal rolling thresholds.</a:t>
+            </a:r>
+          </a:p>
+          <a:p xmlns:a="http://schemas.openxmlformats.org/drawingml/2006/main">
+            <a:r>
+              <a:t/>
+            </a:r>
+          </a:p>
+          <a:p xmlns:a="http://schemas.openxmlformats.org/drawingml/2006/main">
+            <a:r>
+              <a:t>[Sources]</a:t>
+            </a:r>
+          </a:p>
+          <a:p xmlns:a="http://schemas.openxmlformats.org/drawingml/2006/main">
+            <a:r>
+              <a:t>- Local intraday opening-response report: runs/research_workbench/operator_hypothesis_lab/nvda_intraday_opening_response_20260831/report.md</a:t>
+            </a:r>
+          </a:p>
+          <a:p xmlns:a="http://schemas.openxmlformats.org/drawingml/2006/main">
+            <a:r>
+              <a:t>- Full-session causal ledger: runs/research_workbench/operator_hypothesis_lab/nvda_intraday_opening_response_20260831/session_ledger.csv</a:t>
+            </a:r>
+          </a:p>
+          <a:p xmlns:a="http://schemas.openxmlformats.org/drawingml/2006/main">
+            <a:r>
+              <a:t>- Opening-bin and prior-state summaries: runs/research_workbench/operator_hypothesis_lab/nvda_intraday_opening_response_20260831/opening_bin_summary.csv</a:t>
+            </a:r>
+          </a:p>
+          <a:p xmlns:a="http://schemas.openxmlformats.org/drawingml/2006/main">
+            <a:r>
+              <a:t>[/Sources]</a:t>
+            </a:r>
+          </a:p>
+        </p:txBody>
+      </p:sp>
+      <p:sp>
+        <p:nvSpPr>
+          <p:cNvPr id="4" name="Slide Number Placeholder 3"/>
+          <p:cNvSpPr>
+            <a:spLocks xmlns:a="http://schemas.openxmlformats.org/drawingml/2006/main" noGrp="1"/>
+          </p:cNvSpPr>
+          <p:nvPr>
+            <p:ph type="sldNum" idx="5"/>
+          </p:nvPr>
+        </p:nvSpPr>
+        <p:spPr/>
+        <p:txBody>
+          <a:bodyPr xmlns:a="http://schemas.openxmlformats.org/drawingml/2006/main"/>
+          <a:lstStyle xmlns:a="http://schemas.openxmlformats.org/drawingml/2006/main"/>
+          <a:p xmlns:a="http://schemas.openxmlformats.org/drawingml/2006/main"/>
+        </p:txBody>
+      </p:sp>
+    </p:spTree>
+  </p:cSld>
+  <p:clrMapOvr>
+    <a:masterClrMapping xmlns:a="http://schemas.openxmlformats.org/drawingml/2006/main"/>
+  </p:clrMapOvr>
+</p:notes>
+</file>
+
+<file path=ppt/notesSlides/notesSlide31.xml><?xml version="1.0" encoding="utf-8"?>
+<p:notes xmlns:p="http://schemas.openxmlformats.org/presentationml/2006/main">
+  <p:cSld>
+    <p:spTree>
+      <p:nvGrpSpPr>
+        <p:cNvPr id="1" name=""/>
+        <p:cNvGrpSpPr/>
+        <p:nvPr/>
+      </p:nvGrpSpPr>
+      <p:grpSpPr>
+        <a:xfrm xmlns:a="http://schemas.openxmlformats.org/drawingml/2006/main"/>
+      </p:grpSpPr>
+      <p:sp>
+        <p:nvSpPr>
+          <p:cNvPr id="2" name="Slide Image Placeholder 1"/>
+          <p:cNvSpPr>
+            <a:spLocks xmlns:a="http://schemas.openxmlformats.org/drawingml/2006/main" noGrp="1"/>
+          </p:cNvSpPr>
+          <p:nvPr>
+            <p:ph type="sldImg" idx="0"/>
+          </p:nvPr>
+        </p:nvSpPr>
+        <p:spPr/>
+      </p:sp>
+      <p:sp>
+        <p:nvSpPr>
+          <p:cNvPr id="3" name="Notes Placeholder 2"/>
+          <p:cNvSpPr>
+            <a:spLocks xmlns:a="http://schemas.openxmlformats.org/drawingml/2006/main" noGrp="1"/>
+          </p:cNvSpPr>
+          <p:nvPr>
+            <p:ph type="body" idx="1"/>
+          </p:nvPr>
+        </p:nvSpPr>
+        <p:spPr/>
+        <p:txBody>
+          <a:bodyPr xmlns:a="http://schemas.openxmlformats.org/drawingml/2006/main"/>
+          <a:lstStyle xmlns:a="http://schemas.openxmlformats.org/drawingml/2006/main"/>
+          <a:p xmlns:a="http://schemas.openxmlformats.org/drawingml/2006/main">
+            <a:r>
+              <a:t>Bottom-20% opening sessions average -0.15% over the remainder with 45.1% positive outcomes. Middle-60% sessions average -0.02% with 50.6% positive. Top-20% sessions average +0.21% with 57.6% positive. The heavy overlap is the central caution.</a:t>
+            </a:r>
+          </a:p>
+          <a:p xmlns:a="http://schemas.openxmlformats.org/drawingml/2006/main">
+            <a:r>
+              <a:t/>
+            </a:r>
+          </a:p>
+          <a:p xmlns:a="http://schemas.openxmlformats.org/drawingml/2006/main">
+            <a:r>
+              <a:t>[Sources]</a:t>
+            </a:r>
+          </a:p>
+          <a:p xmlns:a="http://schemas.openxmlformats.org/drawingml/2006/main">
+            <a:r>
+              <a:t>- Local intraday opening-response report: runs/research_workbench/operator_hypothesis_lab/nvda_intraday_opening_response_20260831/report.md</a:t>
+            </a:r>
+          </a:p>
+          <a:p xmlns:a="http://schemas.openxmlformats.org/drawingml/2006/main">
+            <a:r>
+              <a:t>- Opening-bin and prior-state summaries: runs/research_workbench/operator_hypothesis_lab/nvda_intraday_opening_response_20260831/opening_bin_summary.csv</a:t>
+            </a:r>
+          </a:p>
+          <a:p xmlns:a="http://schemas.openxmlformats.org/drawingml/2006/main">
+            <a:r>
+              <a:t>[/Sources]</a:t>
+            </a:r>
+          </a:p>
+        </p:txBody>
+      </p:sp>
+      <p:sp>
+        <p:nvSpPr>
+          <p:cNvPr id="4" name="Slide Number Placeholder 3"/>
+          <p:cNvSpPr>
+            <a:spLocks xmlns:a="http://schemas.openxmlformats.org/drawingml/2006/main" noGrp="1"/>
+          </p:cNvSpPr>
+          <p:nvPr>
+            <p:ph type="sldNum" idx="5"/>
+          </p:nvPr>
+        </p:nvSpPr>
+        <p:spPr/>
+        <p:txBody>
+          <a:bodyPr xmlns:a="http://schemas.openxmlformats.org/drawingml/2006/main"/>
+          <a:lstStyle xmlns:a="http://schemas.openxmlformats.org/drawingml/2006/main"/>
+          <a:p xmlns:a="http://schemas.openxmlformats.org/drawingml/2006/main"/>
+        </p:txBody>
+      </p:sp>
+    </p:spTree>
+  </p:cSld>
+  <p:clrMapOvr>
+    <a:masterClrMapping xmlns:a="http://schemas.openxmlformats.org/drawingml/2006/main"/>
+  </p:clrMapOvr>
+</p:notes>
+</file>
+
+<file path=ppt/notesSlides/notesSlide32.xml><?xml version="1.0" encoding="utf-8"?>
+<p:notes xmlns:p="http://schemas.openxmlformats.org/presentationml/2006/main">
+  <p:cSld>
+    <p:spTree>
+      <p:nvGrpSpPr>
+        <p:cNvPr id="1" name=""/>
+        <p:cNvGrpSpPr/>
+        <p:nvPr/>
+      </p:nvGrpSpPr>
+      <p:grpSpPr>
+        <a:xfrm xmlns:a="http://schemas.openxmlformats.org/drawingml/2006/main"/>
+      </p:grpSpPr>
+      <p:sp>
+        <p:nvSpPr>
+          <p:cNvPr id="2" name="Slide Image Placeholder 1"/>
+          <p:cNvSpPr>
+            <a:spLocks xmlns:a="http://schemas.openxmlformats.org/drawingml/2006/main" noGrp="1"/>
+          </p:cNvSpPr>
+          <p:nvPr>
+            <p:ph type="sldImg" idx="0"/>
+          </p:nvPr>
+        </p:nvSpPr>
+        <p:spPr/>
+      </p:sp>
+      <p:sp>
+        <p:nvSpPr>
+          <p:cNvPr id="3" name="Notes Placeholder 2"/>
+          <p:cNvSpPr>
+            <a:spLocks xmlns:a="http://schemas.openxmlformats.org/drawingml/2006/main" noGrp="1"/>
+          </p:cNvSpPr>
+          <p:nvPr>
+            <p:ph type="body" idx="1"/>
+          </p:nvPr>
+        </p:nvSpPr>
+        <p:spPr/>
+        <p:txBody>
+          <a:bodyPr xmlns:a="http://schemas.openxmlformats.org/drawingml/2006/main"/>
+          <a:lstStyle xmlns:a="http://schemas.openxmlformats.org/drawingml/2006/main"/>
+          <a:p xmlns:a="http://schemas.openxmlformats.org/drawingml/2006/main">
+            <a:r>
+              <a:t>The median paths separate gradually rather than through one isolated bar. Top-tail sessions end with a positive median remainder, while bottom-tail sessions end slightly negative. Interquartile bands remain broad and overlapping; this is a conditional path summary, not an equity curve.</a:t>
+            </a:r>
+          </a:p>
+          <a:p xmlns:a="http://schemas.openxmlformats.org/drawingml/2006/main">
+            <a:r>
+              <a:t/>
+            </a:r>
+          </a:p>
+          <a:p xmlns:a="http://schemas.openxmlformats.org/drawingml/2006/main">
+            <a:r>
+              <a:t>[Sources]</a:t>
+            </a:r>
+          </a:p>
+          <a:p xmlns:a="http://schemas.openxmlformats.org/drawingml/2006/main">
+            <a:r>
+              <a:t>- Local intraday opening-response report: runs/research_workbench/operator_hypothesis_lab/nvda_intraday_opening_response_20260831/report.md</a:t>
+            </a:r>
+          </a:p>
+          <a:p xmlns:a="http://schemas.openxmlformats.org/drawingml/2006/main">
+            <a:r>
+              <a:t>- Full-session causal ledger: runs/research_workbench/operator_hypothesis_lab/nvda_intraday_opening_response_20260831/session_ledger.csv</a:t>
+            </a:r>
+          </a:p>
+          <a:p xmlns:a="http://schemas.openxmlformats.org/drawingml/2006/main">
+            <a:r>
+              <a:t>[/Sources]</a:t>
+            </a:r>
+          </a:p>
+        </p:txBody>
+      </p:sp>
+      <p:sp>
+        <p:nvSpPr>
+          <p:cNvPr id="4" name="Slide Number Placeholder 3"/>
+          <p:cNvSpPr>
+            <a:spLocks xmlns:a="http://schemas.openxmlformats.org/drawingml/2006/main" noGrp="1"/>
+          </p:cNvSpPr>
+          <p:nvPr>
+            <p:ph type="sldNum" idx="5"/>
+          </p:nvPr>
+        </p:nvSpPr>
+        <p:spPr/>
+        <p:txBody>
+          <a:bodyPr xmlns:a="http://schemas.openxmlformats.org/drawingml/2006/main"/>
+          <a:lstStyle xmlns:a="http://schemas.openxmlformats.org/drawingml/2006/main"/>
+          <a:p xmlns:a="http://schemas.openxmlformats.org/drawingml/2006/main"/>
+        </p:txBody>
+      </p:sp>
+    </p:spTree>
+  </p:cSld>
+  <p:clrMapOvr>
+    <a:masterClrMapping xmlns:a="http://schemas.openxmlformats.org/drawingml/2006/main"/>
+  </p:clrMapOvr>
+</p:notes>
+</file>
+
+<file path=ppt/notesSlides/notesSlide33.xml><?xml version="1.0" encoding="utf-8"?>
+<p:notes xmlns:p="http://schemas.openxmlformats.org/presentationml/2006/main">
+  <p:cSld>
+    <p:spTree>
+      <p:nvGrpSpPr>
+        <p:cNvPr id="1" name=""/>
+        <p:cNvGrpSpPr/>
+        <p:nvPr/>
+      </p:nvGrpSpPr>
+      <p:grpSpPr>
+        <a:xfrm xmlns:a="http://schemas.openxmlformats.org/drawingml/2006/main"/>
+      </p:grpSpPr>
+      <p:sp>
+        <p:nvSpPr>
+          <p:cNvPr id="2" name="Slide Image Placeholder 1"/>
+          <p:cNvSpPr>
+            <a:spLocks xmlns:a="http://schemas.openxmlformats.org/drawingml/2006/main" noGrp="1"/>
+          </p:cNvSpPr>
+          <p:nvPr>
+            <p:ph type="sldImg" idx="0"/>
+          </p:nvPr>
+        </p:nvSpPr>
+        <p:spPr/>
+      </p:sp>
+      <p:sp>
+        <p:nvSpPr>
+          <p:cNvPr id="3" name="Notes Placeholder 2"/>
+          <p:cNvSpPr>
+            <a:spLocks xmlns:a="http://schemas.openxmlformats.org/drawingml/2006/main" noGrp="1"/>
+          </p:cNvSpPr>
+          <p:nvPr>
+            <p:ph type="body" idx="1"/>
+          </p:nvPr>
+        </p:nvSpPr>
+        <p:spPr/>
+        <p:txBody>
+          <a:bodyPr xmlns:a="http://schemas.openxmlformats.org/drawingml/2006/main"/>
+          <a:lstStyle xmlns:a="http://schemas.openxmlformats.org/drawingml/2006/main"/>
+          <a:p xmlns:a="http://schemas.openxmlformats.org/drawingml/2006/main">
+            <a:r>
+              <a:t>The cleanest long-side descriptive contrast is a top-20% opening after a prior-day LOW or MEDIUM ATR-percent state: +0.377% mean remainder, +0.519% median, 61.8% positive, n=186. The same opening tail in HIGH ATR% averages -0.072% with 50.5% positive, n=111. Signed-ER20 down plus a top-tail opening averages +0.48% but has only 24 observations and is not promoted here.</a:t>
+            </a:r>
+          </a:p>
+          <a:p xmlns:a="http://schemas.openxmlformats.org/drawingml/2006/main">
+            <a:r>
+              <a:t/>
+            </a:r>
+          </a:p>
+          <a:p xmlns:a="http://schemas.openxmlformats.org/drawingml/2006/main">
+            <a:r>
+              <a:t>[Sources]</a:t>
+            </a:r>
+          </a:p>
+          <a:p xmlns:a="http://schemas.openxmlformats.org/drawingml/2006/main">
+            <a:r>
+              <a:t>- Local intraday opening-response report: runs/research_workbench/operator_hypothesis_lab/nvda_intraday_opening_response_20260831/report.md</a:t>
+            </a:r>
+          </a:p>
+          <a:p xmlns:a="http://schemas.openxmlformats.org/drawingml/2006/main">
+            <a:r>
+              <a:t>- Opening-bin and prior-state summaries: runs/research_workbench/operator_hypothesis_lab/nvda_intraday_opening_response_20260831/opening_bin_summary.csv</a:t>
+            </a:r>
+          </a:p>
+          <a:p xmlns:a="http://schemas.openxmlformats.org/drawingml/2006/main">
+            <a:r>
+              <a:t>- Descriptive candidate contrasts: runs/research_workbench/operator_hypothesis_lab/nvda_intraday_opening_response_20260831/descriptive_candidate_contrasts.csv</a:t>
+            </a:r>
+          </a:p>
+          <a:p xmlns:a="http://schemas.openxmlformats.org/drawingml/2006/main">
+            <a:r>
+              <a:t>[/Sources]</a:t>
+            </a:r>
+          </a:p>
+        </p:txBody>
+      </p:sp>
+      <p:sp>
+        <p:nvSpPr>
+          <p:cNvPr id="4" name="Slide Number Placeholder 3"/>
+          <p:cNvSpPr>
+            <a:spLocks xmlns:a="http://schemas.openxmlformats.org/drawingml/2006/main" noGrp="1"/>
+          </p:cNvSpPr>
+          <p:nvPr>
+            <p:ph type="sldNum" idx="5"/>
+          </p:nvPr>
+        </p:nvSpPr>
+        <p:spPr/>
+        <p:txBody>
+          <a:bodyPr xmlns:a="http://schemas.openxmlformats.org/drawingml/2006/main"/>
+          <a:lstStyle xmlns:a="http://schemas.openxmlformats.org/drawingml/2006/main"/>
+          <a:p xmlns:a="http://schemas.openxmlformats.org/drawingml/2006/main"/>
+        </p:txBody>
+      </p:sp>
+    </p:spTree>
+  </p:cSld>
+  <p:clrMapOvr>
+    <a:masterClrMapping xmlns:a="http://schemas.openxmlformats.org/drawingml/2006/main"/>
+  </p:clrMapOvr>
+</p:notes>
+</file>
+
+<file path=ppt/notesSlides/notesSlide34.xml><?xml version="1.0" encoding="utf-8"?>
+<p:notes xmlns:p="http://schemas.openxmlformats.org/presentationml/2006/main">
+  <p:cSld>
+    <p:spTree>
+      <p:nvGrpSpPr>
+        <p:cNvPr id="1" name=""/>
+        <p:cNvGrpSpPr/>
+        <p:nvPr/>
+      </p:nvGrpSpPr>
+      <p:grpSpPr>
+        <a:xfrm xmlns:a="http://schemas.openxmlformats.org/drawingml/2006/main"/>
+      </p:grpSpPr>
+      <p:sp>
+        <p:nvSpPr>
+          <p:cNvPr id="2" name="Slide Image Placeholder 1"/>
+          <p:cNvSpPr>
+            <a:spLocks xmlns:a="http://schemas.openxmlformats.org/drawingml/2006/main" noGrp="1"/>
+          </p:cNvSpPr>
+          <p:nvPr>
+            <p:ph type="sldImg" idx="0"/>
+          </p:nvPr>
+        </p:nvSpPr>
+        <p:spPr/>
+      </p:sp>
+      <p:sp>
+        <p:nvSpPr>
+          <p:cNvPr id="3" name="Notes Placeholder 2"/>
+          <p:cNvSpPr>
+            <a:spLocks xmlns:a="http://schemas.openxmlformats.org/drawingml/2006/main" noGrp="1"/>
+          </p:cNvSpPr>
+          <p:nvPr>
+            <p:ph type="body" idx="1"/>
+          </p:nvPr>
+        </p:nvSpPr>
+        <p:spPr/>
+        <p:txBody>
+          <a:bodyPr xmlns:a="http://schemas.openxmlformats.org/drawingml/2006/main"/>
+          <a:lstStyle xmlns:a="http://schemas.openxmlformats.org/drawingml/2006/main"/>
+          <a:p xmlns:a="http://schemas.openxmlformats.org/drawingml/2006/main">
+            <a:r>
+              <a:t>The current +1.070% cutoff was computed from the entire descriptive sample and therefore must not be used retrospectively as though it had been known each day. The recommended next slice converts the same rank concept into a rolling prior-252-session threshold, then tests a 10:00-to-close long rule with simple ingredient controls. That translation requires a separate operator decision.</a:t>
+            </a:r>
+          </a:p>
+          <a:p xmlns:a="http://schemas.openxmlformats.org/drawingml/2006/main">
+            <a:r>
+              <a:t/>
+            </a:r>
+          </a:p>
+          <a:p xmlns:a="http://schemas.openxmlformats.org/drawingml/2006/main">
+            <a:r>
+              <a:t>[Sources]</a:t>
+            </a:r>
+          </a:p>
+          <a:p xmlns:a="http://schemas.openxmlformats.org/drawingml/2006/main">
+            <a:r>
+              <a:t>- Local intraday opening-response report: runs/research_workbench/operator_hypothesis_lab/nvda_intraday_opening_response_20260831/report.md</a:t>
+            </a:r>
+          </a:p>
+          <a:p xmlns:a="http://schemas.openxmlformats.org/drawingml/2006/main">
+            <a:r>
+              <a:t>- Descriptive candidate contrasts: runs/research_workbench/operator_hypothesis_lab/nvda_intraday_opening_response_20260831/descriptive_candidate_contrasts.csv</a:t>
+            </a:r>
+          </a:p>
+          <a:p xmlns:a="http://schemas.openxmlformats.org/drawingml/2006/main">
+            <a:r>
+              <a:t>- Opening-response construction checks: runs/research_workbench/operator_hypothesis_lab/nvda_intraday_opening_response_20260831/source_checks.csv</a:t>
             </a:r>
           </a:p>
           <a:p xmlns:a="http://schemas.openxmlformats.org/drawingml/2006/main">
@@ -3157,7 +3753,7 @@
   </p:cSld>
   <p:clrMap bg1="lt1" tx1="dk1" bg2="lt2" tx2="dk2" accent1="accent1" accent2="accent2" accent3="accent3" accent4="accent4" accent5="accent5" accent6="accent6" hlink="hlink" folHlink="folHlink"/>
   <p:sldLayoutIdLst>
-    <p:sldLayoutId xmlns:r="http://schemas.openxmlformats.org/officeDocument/2006/relationships" id="2147483649" r:id="Rcb2be51a4b34422b"/>
+    <p:sldLayoutId xmlns:r="http://schemas.openxmlformats.org/officeDocument/2006/relationships" id="2147483649" r:id="R20ad21875f694d35"/>
   </p:sldLayoutIdLst>
   <p:txStyles>
     <p:titleStyle>
@@ -3708,7 +4304,7 @@
           <p:cNvPr id="13" name="">
             <a:extLst xmlns:a="http://schemas.openxmlformats.org/drawingml/2006/main">
               <a:ext uri="{FF2B5EF4-FFF2-40B4-BE49-F238E27FC236}">
-                <a16:creationId xmlns:a16="http://schemas.microsoft.com/office/drawing/2014/main" id="{0D4D9025-B41E-44BB-92FB-380561AF044D}"/>
+                <a16:creationId xmlns:a16="http://schemas.microsoft.com/office/drawing/2014/main" id="{469930B1-100C-4ED1-912F-D96BFC83EE52}"/>
               </a:ext>
             </a:extLst>
           </p:cNvPr>
@@ -3741,7 +4337,7 @@
           <p:cNvPr id="2" name="">
             <a:extLst xmlns:a="http://schemas.openxmlformats.org/drawingml/2006/main">
               <a:ext uri="{FF2B5EF4-FFF2-40B4-BE49-F238E27FC236}">
-                <a16:creationId xmlns:a16="http://schemas.microsoft.com/office/drawing/2014/main" id="{EF6E2A96-EAAC-4FCF-B419-E64A2A4AB4D7}"/>
+                <a16:creationId xmlns:a16="http://schemas.microsoft.com/office/drawing/2014/main" id="{42533E5C-50AD-4505-B190-C9CBA382C90B}"/>
               </a:ext>
             </a:extLst>
           </p:cNvPr>
@@ -3791,7 +4387,7 @@
           <p:cNvPr id="3" name="">
             <a:extLst xmlns:a="http://schemas.openxmlformats.org/drawingml/2006/main">
               <a:ext uri="{FF2B5EF4-FFF2-40B4-BE49-F238E27FC236}">
-                <a16:creationId xmlns:a16="http://schemas.microsoft.com/office/drawing/2014/main" id="{88196792-2907-45D1-B52E-054CFAEF79D9}"/>
+                <a16:creationId xmlns:a16="http://schemas.microsoft.com/office/drawing/2014/main" id="{6401CFBA-1AF9-48FB-B663-DC1AB6092070}"/>
               </a:ext>
             </a:extLst>
           </p:cNvPr>
@@ -3858,7 +4454,7 @@
           <p:cNvPr id="4" name="">
             <a:extLst xmlns:a="http://schemas.openxmlformats.org/drawingml/2006/main">
               <a:ext uri="{FF2B5EF4-FFF2-40B4-BE49-F238E27FC236}">
-                <a16:creationId xmlns:a16="http://schemas.microsoft.com/office/drawing/2014/main" id="{28DE54C1-DC05-4AE2-9DA2-CF049A893066}"/>
+                <a16:creationId xmlns:a16="http://schemas.microsoft.com/office/drawing/2014/main" id="{55BCCF55-A415-4108-AB38-46EC9F8B16D2}"/>
               </a:ext>
             </a:extLst>
           </p:cNvPr>
@@ -3908,7 +4504,7 @@
           <p:cNvPr id="5" name="">
             <a:extLst xmlns:a="http://schemas.openxmlformats.org/drawingml/2006/main">
               <a:ext uri="{FF2B5EF4-FFF2-40B4-BE49-F238E27FC236}">
-                <a16:creationId xmlns:a16="http://schemas.microsoft.com/office/drawing/2014/main" id="{44630846-7928-4290-93ED-F04F1D138EDA}"/>
+                <a16:creationId xmlns:a16="http://schemas.microsoft.com/office/drawing/2014/main" id="{0E27D1A1-3E9D-485C-BD81-DED94597B50F}"/>
               </a:ext>
             </a:extLst>
           </p:cNvPr>
@@ -3941,7 +4537,7 @@
           <p:cNvPr id="6" name="">
             <a:extLst xmlns:a="http://schemas.openxmlformats.org/drawingml/2006/main">
               <a:ext uri="{FF2B5EF4-FFF2-40B4-BE49-F238E27FC236}">
-                <a16:creationId xmlns:a16="http://schemas.microsoft.com/office/drawing/2014/main" id="{C430AEDE-2B34-4197-A0DE-0711CD51A688}"/>
+                <a16:creationId xmlns:a16="http://schemas.microsoft.com/office/drawing/2014/main" id="{DF5E015E-18EF-4C74-ABA2-1EDFBFE7101A}"/>
               </a:ext>
             </a:extLst>
           </p:cNvPr>
@@ -3991,7 +4587,7 @@
           <p:cNvPr id="7" name="">
             <a:extLst xmlns:a="http://schemas.openxmlformats.org/drawingml/2006/main">
               <a:ext uri="{FF2B5EF4-FFF2-40B4-BE49-F238E27FC236}">
-                <a16:creationId xmlns:a16="http://schemas.microsoft.com/office/drawing/2014/main" id="{9904A233-098D-41AF-A1E8-3027F4309BE6}"/>
+                <a16:creationId xmlns:a16="http://schemas.microsoft.com/office/drawing/2014/main" id="{8C08B449-F169-49A5-9F78-DE816D403FB9}"/>
               </a:ext>
             </a:extLst>
           </p:cNvPr>
@@ -4041,7 +4637,7 @@
           <p:cNvPr id="8" name="">
             <a:extLst xmlns:a="http://schemas.openxmlformats.org/drawingml/2006/main">
               <a:ext uri="{FF2B5EF4-FFF2-40B4-BE49-F238E27FC236}">
-                <a16:creationId xmlns:a16="http://schemas.microsoft.com/office/drawing/2014/main" id="{E1E7F959-1ABE-4918-9EC0-3838F33CDDC3}"/>
+                <a16:creationId xmlns:a16="http://schemas.microsoft.com/office/drawing/2014/main" id="{CE98AF49-DB15-4711-9177-1EA277CE0A16}"/>
               </a:ext>
             </a:extLst>
           </p:cNvPr>
@@ -4091,7 +4687,7 @@
           <p:cNvPr id="9" name="">
             <a:extLst xmlns:a="http://schemas.openxmlformats.org/drawingml/2006/main">
               <a:ext uri="{FF2B5EF4-FFF2-40B4-BE49-F238E27FC236}">
-                <a16:creationId xmlns:a16="http://schemas.microsoft.com/office/drawing/2014/main" id="{0CFD6B34-A62F-475E-BA6A-075722D71E23}"/>
+                <a16:creationId xmlns:a16="http://schemas.microsoft.com/office/drawing/2014/main" id="{E6001B46-4FEC-4E5C-8C0B-2FA7376005ED}"/>
               </a:ext>
             </a:extLst>
           </p:cNvPr>
@@ -4124,7 +4720,7 @@
           <p:cNvPr id="10" name="">
             <a:extLst xmlns:a="http://schemas.openxmlformats.org/drawingml/2006/main">
               <a:ext uri="{FF2B5EF4-FFF2-40B4-BE49-F238E27FC236}">
-                <a16:creationId xmlns:a16="http://schemas.microsoft.com/office/drawing/2014/main" id="{EDCA770C-509C-49EA-91E6-0D0416489E7C}"/>
+                <a16:creationId xmlns:a16="http://schemas.microsoft.com/office/drawing/2014/main" id="{8AC33549-F13D-4C13-B507-BDA117AAB8AE}"/>
               </a:ext>
             </a:extLst>
           </p:cNvPr>
@@ -4174,7 +4770,7 @@
           <p:cNvPr id="11" name="">
             <a:extLst xmlns:a="http://schemas.openxmlformats.org/drawingml/2006/main">
               <a:ext uri="{FF2B5EF4-FFF2-40B4-BE49-F238E27FC236}">
-                <a16:creationId xmlns:a16="http://schemas.microsoft.com/office/drawing/2014/main" id="{90686403-4FEF-4EF2-BF3D-FEC1CB8CBA6E}"/>
+                <a16:creationId xmlns:a16="http://schemas.microsoft.com/office/drawing/2014/main" id="{EFA78DA0-E008-4C1C-9BA9-788DF513240E}"/>
               </a:ext>
             </a:extLst>
           </p:cNvPr>
@@ -4214,7 +4810,7 @@
                   <a:srgbClr val="24364B"/>
                 </a:solidFill>
               </a:rPr>
-              <a:t>Observe first. Separate clock effects from state effects. Preserve 2024+ as untouched confirmation data.</a:t>
+              <a:t>Observe first. Separate descriptive clues, executable TRAIN translation, and one-shot confirmation.</a:t>
             </a:r>
           </a:p>
         </p:txBody>
@@ -4224,7 +4820,7 @@
           <p:cNvPr id="12" name="">
             <a:extLst xmlns:a="http://schemas.openxmlformats.org/drawingml/2006/main">
               <a:ext uri="{FF2B5EF4-FFF2-40B4-BE49-F238E27FC236}">
-                <a16:creationId xmlns:a16="http://schemas.microsoft.com/office/drawing/2014/main" id="{C6E960F1-8B15-474F-A4E1-9F74F0970E7D}"/>
+                <a16:creationId xmlns:a16="http://schemas.microsoft.com/office/drawing/2014/main" id="{02B28998-0AE4-4FAD-BDFB-A5B184E59949}"/>
               </a:ext>
             </a:extLst>
           </p:cNvPr>
@@ -4236,7 +4832,7 @@
         <p:spPr>
           <a:xfrm xmlns:a="http://schemas.openxmlformats.org/drawingml/2006/main">
             <a:off x="685800" y="6343650"/>
-            <a:ext cx="4572000" cy="190500"/>
+            <a:ext cx="6858000" cy="190500"/>
           </a:xfrm>
           <a:prstGeom xmlns:a="http://schemas.openxmlformats.org/drawingml/2006/main" prst="rect">
             <a:avLst/>
@@ -4264,7 +4860,7 @@
                   <a:srgbClr val="B44738"/>
                 </a:solidFill>
               </a:rPr>
-              <a:t>DESCRIPTIVE SLICE · NO EDGE CLAIM</a:t>
+              <a:t>RESEARCH DECK · DAILY CONFIRMATION STOP · INTRADAY OPENING RESPONSE ADDED</a:t>
             </a:r>
           </a:p>
         </p:txBody>
@@ -4272,7 +4868,7 @@
     </p:spTree>
     <p:extLst>
       <p:ext uri="{BB962C8B-B14F-4D97-AF65-F5344CB8AC3E}">
-        <p14:creationId xmlns:p14="http://schemas.microsoft.com/office/powerpoint/2010/main" val="1249182721"/>
+        <p14:creationId xmlns:p14="http://schemas.microsoft.com/office/powerpoint/2010/main" val="869432610"/>
       </p:ext>
     </p:extLst>
   </p:cSld>
@@ -4303,7 +4899,7 @@
           <p:cNvPr id="18" name="">
             <a:extLst xmlns:a="http://schemas.openxmlformats.org/drawingml/2006/main">
               <a:ext uri="{FF2B5EF4-FFF2-40B4-BE49-F238E27FC236}">
-                <a16:creationId xmlns:a16="http://schemas.microsoft.com/office/drawing/2014/main" id="{9A3FC428-1511-4298-9FEA-D4BBEE30E85E}"/>
+                <a16:creationId xmlns:a16="http://schemas.microsoft.com/office/drawing/2014/main" id="{A7DD448E-F54F-4B94-B806-DCA0D64651F1}"/>
               </a:ext>
             </a:extLst>
           </p:cNvPr>
@@ -4353,7 +4949,7 @@
           <p:cNvPr id="2" name="">
             <a:extLst xmlns:a="http://schemas.openxmlformats.org/drawingml/2006/main">
               <a:ext uri="{FF2B5EF4-FFF2-40B4-BE49-F238E27FC236}">
-                <a16:creationId xmlns:a16="http://schemas.microsoft.com/office/drawing/2014/main" id="{13883396-726A-4E68-A6DC-309D5806753E}"/>
+                <a16:creationId xmlns:a16="http://schemas.microsoft.com/office/drawing/2014/main" id="{897E8771-D0D3-4215-B858-3185ECE50212}"/>
               </a:ext>
             </a:extLst>
           </p:cNvPr>
@@ -4403,7 +4999,7 @@
           <p:cNvPr id="3" name="">
             <a:extLst xmlns:a="http://schemas.openxmlformats.org/drawingml/2006/main">
               <a:ext uri="{FF2B5EF4-FFF2-40B4-BE49-F238E27FC236}">
-                <a16:creationId xmlns:a16="http://schemas.microsoft.com/office/drawing/2014/main" id="{D8AE4546-AFD5-4BE0-816B-FD071002D20B}"/>
+                <a16:creationId xmlns:a16="http://schemas.microsoft.com/office/drawing/2014/main" id="{A2862161-73A7-49A8-8EA1-BD467D1F4184}"/>
               </a:ext>
             </a:extLst>
           </p:cNvPr>
@@ -4436,7 +5032,7 @@
           <p:cNvPr id="4" name="">
             <a:extLst xmlns:a="http://schemas.openxmlformats.org/drawingml/2006/main">
               <a:ext uri="{FF2B5EF4-FFF2-40B4-BE49-F238E27FC236}">
-                <a16:creationId xmlns:a16="http://schemas.microsoft.com/office/drawing/2014/main" id="{91F2D097-9463-456E-841F-0C261EF8EB93}"/>
+                <a16:creationId xmlns:a16="http://schemas.microsoft.com/office/drawing/2014/main" id="{9D39AF9A-6A52-40A6-BE9B-F8500CEBC274}"/>
               </a:ext>
             </a:extLst>
           </p:cNvPr>
@@ -4486,7 +5082,7 @@
           <p:cNvPr id="5" name="">
             <a:extLst xmlns:a="http://schemas.openxmlformats.org/drawingml/2006/main">
               <a:ext uri="{FF2B5EF4-FFF2-40B4-BE49-F238E27FC236}">
-                <a16:creationId xmlns:a16="http://schemas.microsoft.com/office/drawing/2014/main" id="{2CFE288F-72BA-4213-84E5-55CAF78E0038}"/>
+                <a16:creationId xmlns:a16="http://schemas.microsoft.com/office/drawing/2014/main" id="{8A9E4AA3-D643-434A-831E-25EEBD947476}"/>
               </a:ext>
             </a:extLst>
           </p:cNvPr>
@@ -4540,7 +5136,7 @@
           <p:nvPr/>
         </p:nvPicPr>
         <p:blipFill>
-          <a:blip xmlns:r="http://schemas.openxmlformats.org/officeDocument/2006/relationships" xmlns:a="http://schemas.openxmlformats.org/drawingml/2006/main" r:embed="Rd6cf4ac203ee42a2"/>
+          <a:blip xmlns:r="http://schemas.openxmlformats.org/officeDocument/2006/relationships" xmlns:a="http://schemas.openxmlformats.org/drawingml/2006/main" r:embed="R54df6aae67f646b5"/>
           <a:stretch xmlns:a="http://schemas.openxmlformats.org/drawingml/2006/main"/>
         </p:blipFill>
         <p:spPr>
@@ -4558,7 +5154,7 @@
           <p:cNvPr id="7" name="">
             <a:extLst xmlns:a="http://schemas.openxmlformats.org/drawingml/2006/main">
               <a:ext uri="{FF2B5EF4-FFF2-40B4-BE49-F238E27FC236}">
-                <a16:creationId xmlns:a16="http://schemas.microsoft.com/office/drawing/2014/main" id="{D9900266-EB99-4A64-982B-4A9505E68D6E}"/>
+                <a16:creationId xmlns:a16="http://schemas.microsoft.com/office/drawing/2014/main" id="{146902A0-771C-47BF-92E0-60C776F77F02}"/>
               </a:ext>
             </a:extLst>
           </p:cNvPr>
@@ -4591,7 +5187,7 @@
           <p:cNvPr id="8" name="">
             <a:extLst xmlns:a="http://schemas.openxmlformats.org/drawingml/2006/main">
               <a:ext uri="{FF2B5EF4-FFF2-40B4-BE49-F238E27FC236}">
-                <a16:creationId xmlns:a16="http://schemas.microsoft.com/office/drawing/2014/main" id="{AF9C97C8-E801-4D21-A35D-191542D39B84}"/>
+                <a16:creationId xmlns:a16="http://schemas.microsoft.com/office/drawing/2014/main" id="{5470A75E-A44A-4754-AEE0-B26F9677D0D3}"/>
               </a:ext>
             </a:extLst>
           </p:cNvPr>
@@ -4641,7 +5237,7 @@
           <p:cNvPr id="9" name="">
             <a:extLst xmlns:a="http://schemas.openxmlformats.org/drawingml/2006/main">
               <a:ext uri="{FF2B5EF4-FFF2-40B4-BE49-F238E27FC236}">
-                <a16:creationId xmlns:a16="http://schemas.microsoft.com/office/drawing/2014/main" id="{849C3742-F424-45D8-BA4E-C47ADF6CD988}"/>
+                <a16:creationId xmlns:a16="http://schemas.microsoft.com/office/drawing/2014/main" id="{5E2928E8-08A7-429B-94B2-AD5C165010F0}"/>
               </a:ext>
             </a:extLst>
           </p:cNvPr>
@@ -4691,7 +5287,7 @@
           <p:cNvPr id="10" name="">
             <a:extLst xmlns:a="http://schemas.openxmlformats.org/drawingml/2006/main">
               <a:ext uri="{FF2B5EF4-FFF2-40B4-BE49-F238E27FC236}">
-                <a16:creationId xmlns:a16="http://schemas.microsoft.com/office/drawing/2014/main" id="{69A92A21-4B4A-4CB6-84AE-A78C8F5D659A}"/>
+                <a16:creationId xmlns:a16="http://schemas.microsoft.com/office/drawing/2014/main" id="{245A33E3-39D1-49C8-875B-85FC9968E1CA}"/>
               </a:ext>
             </a:extLst>
           </p:cNvPr>
@@ -4741,7 +5337,7 @@
           <p:cNvPr id="11" name="">
             <a:extLst xmlns:a="http://schemas.openxmlformats.org/drawingml/2006/main">
               <a:ext uri="{FF2B5EF4-FFF2-40B4-BE49-F238E27FC236}">
-                <a16:creationId xmlns:a16="http://schemas.microsoft.com/office/drawing/2014/main" id="{11EFF3F3-7957-4304-ADDD-14F0543453B6}"/>
+                <a16:creationId xmlns:a16="http://schemas.microsoft.com/office/drawing/2014/main" id="{661B225C-B956-4D2F-9448-C1E67739B6FE}"/>
               </a:ext>
             </a:extLst>
           </p:cNvPr>
@@ -4791,7 +5387,7 @@
           <p:cNvPr id="12" name="">
             <a:extLst xmlns:a="http://schemas.openxmlformats.org/drawingml/2006/main">
               <a:ext uri="{FF2B5EF4-FFF2-40B4-BE49-F238E27FC236}">
-                <a16:creationId xmlns:a16="http://schemas.microsoft.com/office/drawing/2014/main" id="{FDCCBEAB-EBF6-4ABC-BC24-0293452F6327}"/>
+                <a16:creationId xmlns:a16="http://schemas.microsoft.com/office/drawing/2014/main" id="{23D0FA02-09E3-4C12-A5A7-B60027E792A7}"/>
               </a:ext>
             </a:extLst>
           </p:cNvPr>
@@ -4841,7 +5437,7 @@
           <p:cNvPr id="13" name="">
             <a:extLst xmlns:a="http://schemas.openxmlformats.org/drawingml/2006/main">
               <a:ext uri="{FF2B5EF4-FFF2-40B4-BE49-F238E27FC236}">
-                <a16:creationId xmlns:a16="http://schemas.microsoft.com/office/drawing/2014/main" id="{55FE6214-DCE5-44D7-8227-E3F12090A4DB}"/>
+                <a16:creationId xmlns:a16="http://schemas.microsoft.com/office/drawing/2014/main" id="{9726996D-4863-4D97-A95E-50E0C64E2933}"/>
               </a:ext>
             </a:extLst>
           </p:cNvPr>
@@ -4891,7 +5487,7 @@
           <p:cNvPr id="14" name="">
             <a:extLst xmlns:a="http://schemas.openxmlformats.org/drawingml/2006/main">
               <a:ext uri="{FF2B5EF4-FFF2-40B4-BE49-F238E27FC236}">
-                <a16:creationId xmlns:a16="http://schemas.microsoft.com/office/drawing/2014/main" id="{2F6E1190-0C8C-4D06-A643-6E5CCEBBE80D}"/>
+                <a16:creationId xmlns:a16="http://schemas.microsoft.com/office/drawing/2014/main" id="{D1D5553E-99F3-47EE-9063-6695AFA41A10}"/>
               </a:ext>
             </a:extLst>
           </p:cNvPr>
@@ -4941,7 +5537,7 @@
           <p:cNvPr id="15" name="">
             <a:extLst xmlns:a="http://schemas.openxmlformats.org/drawingml/2006/main">
               <a:ext uri="{FF2B5EF4-FFF2-40B4-BE49-F238E27FC236}">
-                <a16:creationId xmlns:a16="http://schemas.microsoft.com/office/drawing/2014/main" id="{0B05035D-569E-4FB5-AC3F-F88B672B3E3C}"/>
+                <a16:creationId xmlns:a16="http://schemas.microsoft.com/office/drawing/2014/main" id="{5491C1FA-2412-4A9C-84EB-D46FB6ADBC6E}"/>
               </a:ext>
             </a:extLst>
           </p:cNvPr>
@@ -4974,7 +5570,7 @@
           <p:cNvPr id="16" name="">
             <a:extLst xmlns:a="http://schemas.openxmlformats.org/drawingml/2006/main">
               <a:ext uri="{FF2B5EF4-FFF2-40B4-BE49-F238E27FC236}">
-                <a16:creationId xmlns:a16="http://schemas.microsoft.com/office/drawing/2014/main" id="{DF2814DA-B77D-4E47-B5D5-128978DD0015}"/>
+                <a16:creationId xmlns:a16="http://schemas.microsoft.com/office/drawing/2014/main" id="{D0E40463-05C0-4BE4-9A98-0458F53DAB7F}"/>
               </a:ext>
             </a:extLst>
           </p:cNvPr>
@@ -5024,7 +5620,7 @@
           <p:cNvPr id="17" name="">
             <a:extLst xmlns:a="http://schemas.openxmlformats.org/drawingml/2006/main">
               <a:ext uri="{FF2B5EF4-FFF2-40B4-BE49-F238E27FC236}">
-                <a16:creationId xmlns:a16="http://schemas.microsoft.com/office/drawing/2014/main" id="{F3B54D83-9C34-491F-B804-111119EF054C}"/>
+                <a16:creationId xmlns:a16="http://schemas.microsoft.com/office/drawing/2014/main" id="{B43DB4EC-5B21-4309-9108-07BE3C750FFE}"/>
               </a:ext>
             </a:extLst>
           </p:cNvPr>
@@ -5072,7 +5668,7 @@
     </p:spTree>
     <p:extLst>
       <p:ext uri="{BB962C8B-B14F-4D97-AF65-F5344CB8AC3E}">
-        <p14:creationId xmlns:p14="http://schemas.microsoft.com/office/powerpoint/2010/main" val="565820044"/>
+        <p14:creationId xmlns:p14="http://schemas.microsoft.com/office/powerpoint/2010/main" val="1994707530"/>
       </p:ext>
     </p:extLst>
   </p:cSld>
@@ -5103,7 +5699,7 @@
           <p:cNvPr id="16" name="">
             <a:extLst xmlns:a="http://schemas.openxmlformats.org/drawingml/2006/main">
               <a:ext uri="{FF2B5EF4-FFF2-40B4-BE49-F238E27FC236}">
-                <a16:creationId xmlns:a16="http://schemas.microsoft.com/office/drawing/2014/main" id="{DC8657FB-02B5-499E-B26D-AFC705C8C082}"/>
+                <a16:creationId xmlns:a16="http://schemas.microsoft.com/office/drawing/2014/main" id="{8CA3AC87-8AD9-4A74-9586-74C2F5760CC9}"/>
               </a:ext>
             </a:extLst>
           </p:cNvPr>
@@ -5153,7 +5749,7 @@
           <p:cNvPr id="2" name="">
             <a:extLst xmlns:a="http://schemas.openxmlformats.org/drawingml/2006/main">
               <a:ext uri="{FF2B5EF4-FFF2-40B4-BE49-F238E27FC236}">
-                <a16:creationId xmlns:a16="http://schemas.microsoft.com/office/drawing/2014/main" id="{70647F9E-EBB6-4E50-B06D-EC280DF3D1A3}"/>
+                <a16:creationId xmlns:a16="http://schemas.microsoft.com/office/drawing/2014/main" id="{48DC1373-F520-46B2-A9E7-68BCF17ED9B8}"/>
               </a:ext>
             </a:extLst>
           </p:cNvPr>
@@ -5203,7 +5799,7 @@
           <p:cNvPr id="3" name="">
             <a:extLst xmlns:a="http://schemas.openxmlformats.org/drawingml/2006/main">
               <a:ext uri="{FF2B5EF4-FFF2-40B4-BE49-F238E27FC236}">
-                <a16:creationId xmlns:a16="http://schemas.microsoft.com/office/drawing/2014/main" id="{37170093-6191-4901-BC00-FF26D6D976FA}"/>
+                <a16:creationId xmlns:a16="http://schemas.microsoft.com/office/drawing/2014/main" id="{1657715E-32CE-4E55-B005-B3817938BC0E}"/>
               </a:ext>
             </a:extLst>
           </p:cNvPr>
@@ -5236,7 +5832,7 @@
           <p:cNvPr id="4" name="">
             <a:extLst xmlns:a="http://schemas.openxmlformats.org/drawingml/2006/main">
               <a:ext uri="{FF2B5EF4-FFF2-40B4-BE49-F238E27FC236}">
-                <a16:creationId xmlns:a16="http://schemas.microsoft.com/office/drawing/2014/main" id="{91CE1CC0-2DC8-469A-8B8B-9B24CC935533}"/>
+                <a16:creationId xmlns:a16="http://schemas.microsoft.com/office/drawing/2014/main" id="{E3380644-5028-4EFF-86EF-3DF8EBD0846A}"/>
               </a:ext>
             </a:extLst>
           </p:cNvPr>
@@ -5286,7 +5882,7 @@
           <p:cNvPr id="5" name="">
             <a:extLst xmlns:a="http://schemas.openxmlformats.org/drawingml/2006/main">
               <a:ext uri="{FF2B5EF4-FFF2-40B4-BE49-F238E27FC236}">
-                <a16:creationId xmlns:a16="http://schemas.microsoft.com/office/drawing/2014/main" id="{C63A77D9-4ED3-47A7-98B7-5D25898523E1}"/>
+                <a16:creationId xmlns:a16="http://schemas.microsoft.com/office/drawing/2014/main" id="{DB8B7147-E2DB-44AA-8483-FF9B56D1ECA0}"/>
               </a:ext>
             </a:extLst>
           </p:cNvPr>
@@ -5340,7 +5936,7 @@
           <p:nvPr/>
         </p:nvPicPr>
         <p:blipFill>
-          <a:blip xmlns:r="http://schemas.openxmlformats.org/officeDocument/2006/relationships" xmlns:a="http://schemas.openxmlformats.org/drawingml/2006/main" r:embed="Ra9899182ea2e4089"/>
+          <a:blip xmlns:r="http://schemas.openxmlformats.org/officeDocument/2006/relationships" xmlns:a="http://schemas.openxmlformats.org/drawingml/2006/main" r:embed="R89ab6aebf44741e5"/>
           <a:stretch xmlns:a="http://schemas.openxmlformats.org/drawingml/2006/main"/>
         </p:blipFill>
         <p:spPr>
@@ -5358,7 +5954,7 @@
           <p:cNvPr id="7" name="">
             <a:extLst xmlns:a="http://schemas.openxmlformats.org/drawingml/2006/main">
               <a:ext uri="{FF2B5EF4-FFF2-40B4-BE49-F238E27FC236}">
-                <a16:creationId xmlns:a16="http://schemas.microsoft.com/office/drawing/2014/main" id="{3250AEBE-A4E4-42A5-B969-E14036464379}"/>
+                <a16:creationId xmlns:a16="http://schemas.microsoft.com/office/drawing/2014/main" id="{54E4A30F-79B3-4B65-9895-CA0CBE303CD9}"/>
               </a:ext>
             </a:extLst>
           </p:cNvPr>
@@ -5391,7 +5987,7 @@
           <p:cNvPr id="8" name="">
             <a:extLst xmlns:a="http://schemas.openxmlformats.org/drawingml/2006/main">
               <a:ext uri="{FF2B5EF4-FFF2-40B4-BE49-F238E27FC236}">
-                <a16:creationId xmlns:a16="http://schemas.microsoft.com/office/drawing/2014/main" id="{8281C01F-EECF-4B90-A85F-BA9BF3150895}"/>
+                <a16:creationId xmlns:a16="http://schemas.microsoft.com/office/drawing/2014/main" id="{1D062037-FA9F-4E6D-A52F-9E0DF48368D2}"/>
               </a:ext>
             </a:extLst>
           </p:cNvPr>
@@ -5441,7 +6037,7 @@
           <p:cNvPr id="9" name="">
             <a:extLst xmlns:a="http://schemas.openxmlformats.org/drawingml/2006/main">
               <a:ext uri="{FF2B5EF4-FFF2-40B4-BE49-F238E27FC236}">
-                <a16:creationId xmlns:a16="http://schemas.microsoft.com/office/drawing/2014/main" id="{240C142C-1C9E-429B-A4E6-ECD09D64BA56}"/>
+                <a16:creationId xmlns:a16="http://schemas.microsoft.com/office/drawing/2014/main" id="{C7A1021C-7630-426B-AF5A-1F66E3AAD1A1}"/>
               </a:ext>
             </a:extLst>
           </p:cNvPr>
@@ -5474,7 +6070,7 @@
           <p:cNvPr id="10" name="">
             <a:extLst xmlns:a="http://schemas.openxmlformats.org/drawingml/2006/main">
               <a:ext uri="{FF2B5EF4-FFF2-40B4-BE49-F238E27FC236}">
-                <a16:creationId xmlns:a16="http://schemas.microsoft.com/office/drawing/2014/main" id="{DBCA5CA2-9CC9-49E5-A702-0158D9137C6F}"/>
+                <a16:creationId xmlns:a16="http://schemas.microsoft.com/office/drawing/2014/main" id="{F472FB3B-7A77-4FD0-B252-32D3F88AE336}"/>
               </a:ext>
             </a:extLst>
           </p:cNvPr>
@@ -5524,7 +6120,7 @@
           <p:cNvPr id="11" name="">
             <a:extLst xmlns:a="http://schemas.openxmlformats.org/drawingml/2006/main">
               <a:ext uri="{FF2B5EF4-FFF2-40B4-BE49-F238E27FC236}">
-                <a16:creationId xmlns:a16="http://schemas.microsoft.com/office/drawing/2014/main" id="{2B28BD1E-8208-4406-AB89-B9FF045C103E}"/>
+                <a16:creationId xmlns:a16="http://schemas.microsoft.com/office/drawing/2014/main" id="{84BC3302-0E08-4E12-9D96-D960D8FF4C39}"/>
               </a:ext>
             </a:extLst>
           </p:cNvPr>
@@ -5557,7 +6153,7 @@
           <p:cNvPr id="12" name="">
             <a:extLst xmlns:a="http://schemas.openxmlformats.org/drawingml/2006/main">
               <a:ext uri="{FF2B5EF4-FFF2-40B4-BE49-F238E27FC236}">
-                <a16:creationId xmlns:a16="http://schemas.microsoft.com/office/drawing/2014/main" id="{057A7B7D-6F44-420F-97C6-6ED240D859F4}"/>
+                <a16:creationId xmlns:a16="http://schemas.microsoft.com/office/drawing/2014/main" id="{AF08353B-878C-4B65-82D5-BB01725BD092}"/>
               </a:ext>
             </a:extLst>
           </p:cNvPr>
@@ -5607,7 +6203,7 @@
           <p:cNvPr id="13" name="">
             <a:extLst xmlns:a="http://schemas.openxmlformats.org/drawingml/2006/main">
               <a:ext uri="{FF2B5EF4-FFF2-40B4-BE49-F238E27FC236}">
-                <a16:creationId xmlns:a16="http://schemas.microsoft.com/office/drawing/2014/main" id="{44548E67-CF9E-46A0-9DEB-1F33A9EA25C4}"/>
+                <a16:creationId xmlns:a16="http://schemas.microsoft.com/office/drawing/2014/main" id="{36ED854A-FBEE-4F13-B837-48E79FE5FB88}"/>
               </a:ext>
             </a:extLst>
           </p:cNvPr>
@@ -5657,7 +6253,7 @@
           <p:cNvPr id="14" name="">
             <a:extLst xmlns:a="http://schemas.openxmlformats.org/drawingml/2006/main">
               <a:ext uri="{FF2B5EF4-FFF2-40B4-BE49-F238E27FC236}">
-                <a16:creationId xmlns:a16="http://schemas.microsoft.com/office/drawing/2014/main" id="{14DAD82D-3C21-418C-90E2-8A1960B74C26}"/>
+                <a16:creationId xmlns:a16="http://schemas.microsoft.com/office/drawing/2014/main" id="{93258F9D-D364-4FED-A86E-8EFC1E64FC5F}"/>
               </a:ext>
             </a:extLst>
           </p:cNvPr>
@@ -5690,7 +6286,7 @@
           <p:cNvPr id="15" name="">
             <a:extLst xmlns:a="http://schemas.openxmlformats.org/drawingml/2006/main">
               <a:ext uri="{FF2B5EF4-FFF2-40B4-BE49-F238E27FC236}">
-                <a16:creationId xmlns:a16="http://schemas.microsoft.com/office/drawing/2014/main" id="{86279669-DF54-4DC7-B9F2-CB9E15B07FFD}"/>
+                <a16:creationId xmlns:a16="http://schemas.microsoft.com/office/drawing/2014/main" id="{DFDC55EE-26F3-4D3C-814C-6028F683133B}"/>
               </a:ext>
             </a:extLst>
           </p:cNvPr>
@@ -5738,7 +6334,7 @@
     </p:spTree>
     <p:extLst>
       <p:ext uri="{BB962C8B-B14F-4D97-AF65-F5344CB8AC3E}">
-        <p14:creationId xmlns:p14="http://schemas.microsoft.com/office/powerpoint/2010/main" val="691026131"/>
+        <p14:creationId xmlns:p14="http://schemas.microsoft.com/office/powerpoint/2010/main" val="1578438072"/>
       </p:ext>
     </p:extLst>
   </p:cSld>
@@ -5769,7 +6365,7 @@
           <p:cNvPr id="14" name="">
             <a:extLst xmlns:a="http://schemas.openxmlformats.org/drawingml/2006/main">
               <a:ext uri="{FF2B5EF4-FFF2-40B4-BE49-F238E27FC236}">
-                <a16:creationId xmlns:a16="http://schemas.microsoft.com/office/drawing/2014/main" id="{AEB9057D-D60A-436E-B4BC-188E4E0D72F2}"/>
+                <a16:creationId xmlns:a16="http://schemas.microsoft.com/office/drawing/2014/main" id="{E25D84C8-05B8-4DFE-81E4-83FE3BC5C4F8}"/>
               </a:ext>
             </a:extLst>
           </p:cNvPr>
@@ -5819,7 +6415,7 @@
           <p:cNvPr id="2" name="">
             <a:extLst xmlns:a="http://schemas.openxmlformats.org/drawingml/2006/main">
               <a:ext uri="{FF2B5EF4-FFF2-40B4-BE49-F238E27FC236}">
-                <a16:creationId xmlns:a16="http://schemas.microsoft.com/office/drawing/2014/main" id="{DF69AA48-71AA-47EA-8F9F-4EF308D8DC43}"/>
+                <a16:creationId xmlns:a16="http://schemas.microsoft.com/office/drawing/2014/main" id="{161541A5-1E35-41DD-9AF5-4F2A3A5ECAF2}"/>
               </a:ext>
             </a:extLst>
           </p:cNvPr>
@@ -5869,7 +6465,7 @@
           <p:cNvPr id="3" name="">
             <a:extLst xmlns:a="http://schemas.openxmlformats.org/drawingml/2006/main">
               <a:ext uri="{FF2B5EF4-FFF2-40B4-BE49-F238E27FC236}">
-                <a16:creationId xmlns:a16="http://schemas.microsoft.com/office/drawing/2014/main" id="{901159ED-B283-42C3-9A27-9FE9BF199A72}"/>
+                <a16:creationId xmlns:a16="http://schemas.microsoft.com/office/drawing/2014/main" id="{18B47AA4-2C2A-4907-B5F8-E656C9C25CA4}"/>
               </a:ext>
             </a:extLst>
           </p:cNvPr>
@@ -5902,7 +6498,7 @@
           <p:cNvPr id="4" name="">
             <a:extLst xmlns:a="http://schemas.openxmlformats.org/drawingml/2006/main">
               <a:ext uri="{FF2B5EF4-FFF2-40B4-BE49-F238E27FC236}">
-                <a16:creationId xmlns:a16="http://schemas.microsoft.com/office/drawing/2014/main" id="{5345962A-209F-4928-BE99-6C928FE19BCB}"/>
+                <a16:creationId xmlns:a16="http://schemas.microsoft.com/office/drawing/2014/main" id="{C10FFC84-CBA9-4FF8-8E81-8055B1C41F52}"/>
               </a:ext>
             </a:extLst>
           </p:cNvPr>
@@ -5952,7 +6548,7 @@
           <p:cNvPr id="5" name="">
             <a:extLst xmlns:a="http://schemas.openxmlformats.org/drawingml/2006/main">
               <a:ext uri="{FF2B5EF4-FFF2-40B4-BE49-F238E27FC236}">
-                <a16:creationId xmlns:a16="http://schemas.microsoft.com/office/drawing/2014/main" id="{B4983F84-6ACC-48B9-8BF7-A2ECEA6B4743}"/>
+                <a16:creationId xmlns:a16="http://schemas.microsoft.com/office/drawing/2014/main" id="{B86EC453-6446-420C-91B1-E670F1237AC4}"/>
               </a:ext>
             </a:extLst>
           </p:cNvPr>
@@ -6006,7 +6602,7 @@
           <p:nvPr/>
         </p:nvPicPr>
         <p:blipFill>
-          <a:blip xmlns:r="http://schemas.openxmlformats.org/officeDocument/2006/relationships" xmlns:a="http://schemas.openxmlformats.org/drawingml/2006/main" r:embed="Rb89be78a749f488b"/>
+          <a:blip xmlns:r="http://schemas.openxmlformats.org/officeDocument/2006/relationships" xmlns:a="http://schemas.openxmlformats.org/drawingml/2006/main" r:embed="Rcac8eaffd38a4927"/>
           <a:stretch xmlns:a="http://schemas.openxmlformats.org/drawingml/2006/main"/>
         </p:blipFill>
         <p:spPr>
@@ -6024,7 +6620,7 @@
           <p:cNvPr id="7" name="">
             <a:extLst xmlns:a="http://schemas.openxmlformats.org/drawingml/2006/main">
               <a:ext uri="{FF2B5EF4-FFF2-40B4-BE49-F238E27FC236}">
-                <a16:creationId xmlns:a16="http://schemas.microsoft.com/office/drawing/2014/main" id="{F1D585AB-CC6C-49BF-B138-D3E7B0EA4CEB}"/>
+                <a16:creationId xmlns:a16="http://schemas.microsoft.com/office/drawing/2014/main" id="{C452D37A-7C30-464E-B258-66207957B8E9}"/>
               </a:ext>
             </a:extLst>
           </p:cNvPr>
@@ -6057,7 +6653,7 @@
           <p:cNvPr id="8" name="">
             <a:extLst xmlns:a="http://schemas.openxmlformats.org/drawingml/2006/main">
               <a:ext uri="{FF2B5EF4-FFF2-40B4-BE49-F238E27FC236}">
-                <a16:creationId xmlns:a16="http://schemas.microsoft.com/office/drawing/2014/main" id="{98B556E0-65CE-4214-9040-76DD8C0DA0D8}"/>
+                <a16:creationId xmlns:a16="http://schemas.microsoft.com/office/drawing/2014/main" id="{592CC3CF-3FBA-446E-976F-F95B1F5E087C}"/>
               </a:ext>
             </a:extLst>
           </p:cNvPr>
@@ -6107,7 +6703,7 @@
           <p:cNvPr id="9" name="">
             <a:extLst xmlns:a="http://schemas.openxmlformats.org/drawingml/2006/main">
               <a:ext uri="{FF2B5EF4-FFF2-40B4-BE49-F238E27FC236}">
-                <a16:creationId xmlns:a16="http://schemas.microsoft.com/office/drawing/2014/main" id="{D1FF4A3B-6D0F-4C45-81D9-4678CDADD745}"/>
+                <a16:creationId xmlns:a16="http://schemas.microsoft.com/office/drawing/2014/main" id="{8E515338-BE10-4D3A-8479-7B470E34F9C8}"/>
               </a:ext>
             </a:extLst>
           </p:cNvPr>
@@ -6140,7 +6736,7 @@
           <p:cNvPr id="10" name="">
             <a:extLst xmlns:a="http://schemas.openxmlformats.org/drawingml/2006/main">
               <a:ext uri="{FF2B5EF4-FFF2-40B4-BE49-F238E27FC236}">
-                <a16:creationId xmlns:a16="http://schemas.microsoft.com/office/drawing/2014/main" id="{1B2FD36B-30A7-45E8-94FB-032574A0A93C}"/>
+                <a16:creationId xmlns:a16="http://schemas.microsoft.com/office/drawing/2014/main" id="{2DF99363-4718-416A-A314-9E51566908DA}"/>
               </a:ext>
             </a:extLst>
           </p:cNvPr>
@@ -6190,7 +6786,7 @@
           <p:cNvPr id="11" name="">
             <a:extLst xmlns:a="http://schemas.openxmlformats.org/drawingml/2006/main">
               <a:ext uri="{FF2B5EF4-FFF2-40B4-BE49-F238E27FC236}">
-                <a16:creationId xmlns:a16="http://schemas.microsoft.com/office/drawing/2014/main" id="{1F9BF767-7E8E-446C-8F60-2E2471929712}"/>
+                <a16:creationId xmlns:a16="http://schemas.microsoft.com/office/drawing/2014/main" id="{59E592B5-6C51-4402-9FBE-73933DE8011D}"/>
               </a:ext>
             </a:extLst>
           </p:cNvPr>
@@ -6223,7 +6819,7 @@
           <p:cNvPr id="12" name="">
             <a:extLst xmlns:a="http://schemas.openxmlformats.org/drawingml/2006/main">
               <a:ext uri="{FF2B5EF4-FFF2-40B4-BE49-F238E27FC236}">
-                <a16:creationId xmlns:a16="http://schemas.microsoft.com/office/drawing/2014/main" id="{DB76A075-280B-478B-8414-124843563912}"/>
+                <a16:creationId xmlns:a16="http://schemas.microsoft.com/office/drawing/2014/main" id="{8523C117-C507-4151-8DFA-EC87815CE0BB}"/>
               </a:ext>
             </a:extLst>
           </p:cNvPr>
@@ -6273,7 +6869,7 @@
           <p:cNvPr id="13" name="">
             <a:extLst xmlns:a="http://schemas.openxmlformats.org/drawingml/2006/main">
               <a:ext uri="{FF2B5EF4-FFF2-40B4-BE49-F238E27FC236}">
-                <a16:creationId xmlns:a16="http://schemas.microsoft.com/office/drawing/2014/main" id="{0D0E604A-97A8-4B28-8B32-0F76E073D136}"/>
+                <a16:creationId xmlns:a16="http://schemas.microsoft.com/office/drawing/2014/main" id="{3C4E3511-6D17-46ED-903B-D0B69F340C1A}"/>
               </a:ext>
             </a:extLst>
           </p:cNvPr>
@@ -6321,7 +6917,7 @@
     </p:spTree>
     <p:extLst>
       <p:ext uri="{BB962C8B-B14F-4D97-AF65-F5344CB8AC3E}">
-        <p14:creationId xmlns:p14="http://schemas.microsoft.com/office/powerpoint/2010/main" val="241434893"/>
+        <p14:creationId xmlns:p14="http://schemas.microsoft.com/office/powerpoint/2010/main" val="790626319"/>
       </p:ext>
     </p:extLst>
   </p:cSld>
@@ -6352,7 +6948,7 @@
           <p:cNvPr id="24" name="">
             <a:extLst xmlns:a="http://schemas.openxmlformats.org/drawingml/2006/main">
               <a:ext uri="{FF2B5EF4-FFF2-40B4-BE49-F238E27FC236}">
-                <a16:creationId xmlns:a16="http://schemas.microsoft.com/office/drawing/2014/main" id="{1B5A9CC6-69D0-49D7-8CC7-F2AE0B167C1C}"/>
+                <a16:creationId xmlns:a16="http://schemas.microsoft.com/office/drawing/2014/main" id="{DC42A843-2D78-4530-AF66-4E32369B921E}"/>
               </a:ext>
             </a:extLst>
           </p:cNvPr>
@@ -6402,7 +6998,7 @@
           <p:cNvPr id="2" name="">
             <a:extLst xmlns:a="http://schemas.openxmlformats.org/drawingml/2006/main">
               <a:ext uri="{FF2B5EF4-FFF2-40B4-BE49-F238E27FC236}">
-                <a16:creationId xmlns:a16="http://schemas.microsoft.com/office/drawing/2014/main" id="{B05797C0-3A36-40E4-9D31-DB84249131FC}"/>
+                <a16:creationId xmlns:a16="http://schemas.microsoft.com/office/drawing/2014/main" id="{570E8824-FDD3-4869-8313-D5AB91586B82}"/>
               </a:ext>
             </a:extLst>
           </p:cNvPr>
@@ -6452,7 +7048,7 @@
           <p:cNvPr id="3" name="">
             <a:extLst xmlns:a="http://schemas.openxmlformats.org/drawingml/2006/main">
               <a:ext uri="{FF2B5EF4-FFF2-40B4-BE49-F238E27FC236}">
-                <a16:creationId xmlns:a16="http://schemas.microsoft.com/office/drawing/2014/main" id="{6313A42D-DE37-44DE-8488-8D5263C54560}"/>
+                <a16:creationId xmlns:a16="http://schemas.microsoft.com/office/drawing/2014/main" id="{9D003601-B5E9-4E91-916E-8748FF8DB366}"/>
               </a:ext>
             </a:extLst>
           </p:cNvPr>
@@ -6485,7 +7081,7 @@
           <p:cNvPr id="4" name="">
             <a:extLst xmlns:a="http://schemas.openxmlformats.org/drawingml/2006/main">
               <a:ext uri="{FF2B5EF4-FFF2-40B4-BE49-F238E27FC236}">
-                <a16:creationId xmlns:a16="http://schemas.microsoft.com/office/drawing/2014/main" id="{6CE1927C-9D07-471E-A529-1CEEDD79AA8C}"/>
+                <a16:creationId xmlns:a16="http://schemas.microsoft.com/office/drawing/2014/main" id="{0EF5EC70-8C80-4A02-A040-F501EDA048EB}"/>
               </a:ext>
             </a:extLst>
           </p:cNvPr>
@@ -6535,7 +7131,7 @@
           <p:cNvPr id="5" name="">
             <a:extLst xmlns:a="http://schemas.openxmlformats.org/drawingml/2006/main">
               <a:ext uri="{FF2B5EF4-FFF2-40B4-BE49-F238E27FC236}">
-                <a16:creationId xmlns:a16="http://schemas.microsoft.com/office/drawing/2014/main" id="{1647453F-9520-406E-A986-964846F21623}"/>
+                <a16:creationId xmlns:a16="http://schemas.microsoft.com/office/drawing/2014/main" id="{DC99FFF7-AFCF-40D0-B3E1-09DB2192B90D}"/>
               </a:ext>
             </a:extLst>
           </p:cNvPr>
@@ -6585,7 +7181,7 @@
           <p:cNvPr id="6" name="">
             <a:extLst xmlns:a="http://schemas.openxmlformats.org/drawingml/2006/main">
               <a:ext uri="{FF2B5EF4-FFF2-40B4-BE49-F238E27FC236}">
-                <a16:creationId xmlns:a16="http://schemas.microsoft.com/office/drawing/2014/main" id="{5F9B3503-82E6-4BDB-8CDF-EC3CBCD8B3B5}"/>
+                <a16:creationId xmlns:a16="http://schemas.microsoft.com/office/drawing/2014/main" id="{A49D7894-AE91-4E5A-96C2-6C594F6E9601}"/>
               </a:ext>
             </a:extLst>
           </p:cNvPr>
@@ -6618,7 +7214,7 @@
           <p:cNvPr id="7" name="">
             <a:extLst xmlns:a="http://schemas.openxmlformats.org/drawingml/2006/main">
               <a:ext uri="{FF2B5EF4-FFF2-40B4-BE49-F238E27FC236}">
-                <a16:creationId xmlns:a16="http://schemas.microsoft.com/office/drawing/2014/main" id="{CFEB1ECC-2F2F-40DE-B4E1-EA6D54FFA59F}"/>
+                <a16:creationId xmlns:a16="http://schemas.microsoft.com/office/drawing/2014/main" id="{576182E3-F2D2-4A9A-B1BC-842922F58658}"/>
               </a:ext>
             </a:extLst>
           </p:cNvPr>
@@ -6668,7 +7264,7 @@
           <p:cNvPr id="8" name="">
             <a:extLst xmlns:a="http://schemas.openxmlformats.org/drawingml/2006/main">
               <a:ext uri="{FF2B5EF4-FFF2-40B4-BE49-F238E27FC236}">
-                <a16:creationId xmlns:a16="http://schemas.microsoft.com/office/drawing/2014/main" id="{4C99EA43-2AE1-490C-BD9A-26DE4C07CB20}"/>
+                <a16:creationId xmlns:a16="http://schemas.microsoft.com/office/drawing/2014/main" id="{0B5465BC-5408-4129-A180-31426950F5E4}"/>
               </a:ext>
             </a:extLst>
           </p:cNvPr>
@@ -6718,7 +7314,7 @@
           <p:cNvPr id="9" name="">
             <a:extLst xmlns:a="http://schemas.openxmlformats.org/drawingml/2006/main">
               <a:ext uri="{FF2B5EF4-FFF2-40B4-BE49-F238E27FC236}">
-                <a16:creationId xmlns:a16="http://schemas.microsoft.com/office/drawing/2014/main" id="{D0C1B768-B80A-4924-B5D5-61ABE11104A3}"/>
+                <a16:creationId xmlns:a16="http://schemas.microsoft.com/office/drawing/2014/main" id="{F8B461C8-B612-44FC-981C-5C040D055C2D}"/>
               </a:ext>
             </a:extLst>
           </p:cNvPr>
@@ -6768,7 +7364,7 @@
           <p:cNvPr id="10" name="">
             <a:extLst xmlns:a="http://schemas.openxmlformats.org/drawingml/2006/main">
               <a:ext uri="{FF2B5EF4-FFF2-40B4-BE49-F238E27FC236}">
-                <a16:creationId xmlns:a16="http://schemas.microsoft.com/office/drawing/2014/main" id="{62516C94-6073-42F2-B657-E66107715A8F}"/>
+                <a16:creationId xmlns:a16="http://schemas.microsoft.com/office/drawing/2014/main" id="{46D1D3DF-1AED-433F-A075-C493D1DCDDA0}"/>
               </a:ext>
             </a:extLst>
           </p:cNvPr>
@@ -6818,7 +7414,7 @@
           <p:cNvPr id="11" name="">
             <a:extLst xmlns:a="http://schemas.openxmlformats.org/drawingml/2006/main">
               <a:ext uri="{FF2B5EF4-FFF2-40B4-BE49-F238E27FC236}">
-                <a16:creationId xmlns:a16="http://schemas.microsoft.com/office/drawing/2014/main" id="{D6F4745A-838B-4343-846F-89DA47F64847}"/>
+                <a16:creationId xmlns:a16="http://schemas.microsoft.com/office/drawing/2014/main" id="{FDB54F14-1AED-48E1-9CA3-FBBE82AC5D36}"/>
               </a:ext>
             </a:extLst>
           </p:cNvPr>
@@ -6851,7 +7447,7 @@
           <p:cNvPr id="12" name="">
             <a:extLst xmlns:a="http://schemas.openxmlformats.org/drawingml/2006/main">
               <a:ext uri="{FF2B5EF4-FFF2-40B4-BE49-F238E27FC236}">
-                <a16:creationId xmlns:a16="http://schemas.microsoft.com/office/drawing/2014/main" id="{A9B78245-96AD-4A13-A5AB-4E5CC1BD7135}"/>
+                <a16:creationId xmlns:a16="http://schemas.microsoft.com/office/drawing/2014/main" id="{EDAD8AA6-7F4F-41EF-989C-2E821B2EB8B4}"/>
               </a:ext>
             </a:extLst>
           </p:cNvPr>
@@ -6901,7 +7497,7 @@
           <p:cNvPr id="13" name="">
             <a:extLst xmlns:a="http://schemas.openxmlformats.org/drawingml/2006/main">
               <a:ext uri="{FF2B5EF4-FFF2-40B4-BE49-F238E27FC236}">
-                <a16:creationId xmlns:a16="http://schemas.microsoft.com/office/drawing/2014/main" id="{9BF9FD15-BF8D-4BE8-AD3A-C65E945034E0}"/>
+                <a16:creationId xmlns:a16="http://schemas.microsoft.com/office/drawing/2014/main" id="{AABBE3C0-A82E-4C5D-8A37-E2554766ADBD}"/>
               </a:ext>
             </a:extLst>
           </p:cNvPr>
@@ -6934,7 +7530,7 @@
           <p:cNvPr id="14" name="">
             <a:extLst xmlns:a="http://schemas.openxmlformats.org/drawingml/2006/main">
               <a:ext uri="{FF2B5EF4-FFF2-40B4-BE49-F238E27FC236}">
-                <a16:creationId xmlns:a16="http://schemas.microsoft.com/office/drawing/2014/main" id="{40D6B520-5B0C-425D-8D74-B766F2A921BF}"/>
+                <a16:creationId xmlns:a16="http://schemas.microsoft.com/office/drawing/2014/main" id="{250C916A-075F-46ED-AA69-45F9E12D8D46}"/>
               </a:ext>
             </a:extLst>
           </p:cNvPr>
@@ -6984,7 +7580,7 @@
           <p:cNvPr id="15" name="">
             <a:extLst xmlns:a="http://schemas.openxmlformats.org/drawingml/2006/main">
               <a:ext uri="{FF2B5EF4-FFF2-40B4-BE49-F238E27FC236}">
-                <a16:creationId xmlns:a16="http://schemas.microsoft.com/office/drawing/2014/main" id="{3B019796-6197-45B3-BDE1-F94D7C39ED0B}"/>
+                <a16:creationId xmlns:a16="http://schemas.microsoft.com/office/drawing/2014/main" id="{3CA47FEB-7DE9-4227-B356-9EE3E217FE21}"/>
               </a:ext>
             </a:extLst>
           </p:cNvPr>
@@ -7017,7 +7613,7 @@
           <p:cNvPr id="16" name="">
             <a:extLst xmlns:a="http://schemas.openxmlformats.org/drawingml/2006/main">
               <a:ext uri="{FF2B5EF4-FFF2-40B4-BE49-F238E27FC236}">
-                <a16:creationId xmlns:a16="http://schemas.microsoft.com/office/drawing/2014/main" id="{15DB1EBE-72FE-4F02-B726-36561206AF86}"/>
+                <a16:creationId xmlns:a16="http://schemas.microsoft.com/office/drawing/2014/main" id="{D52A5C43-EB3E-40B0-863A-5BE7733DDC91}"/>
               </a:ext>
             </a:extLst>
           </p:cNvPr>
@@ -7067,7 +7663,7 @@
           <p:cNvPr id="17" name="">
             <a:extLst xmlns:a="http://schemas.openxmlformats.org/drawingml/2006/main">
               <a:ext uri="{FF2B5EF4-FFF2-40B4-BE49-F238E27FC236}">
-                <a16:creationId xmlns:a16="http://schemas.microsoft.com/office/drawing/2014/main" id="{67B3640C-F293-4DC1-A2E6-8CA67D5EB4DA}"/>
+                <a16:creationId xmlns:a16="http://schemas.microsoft.com/office/drawing/2014/main" id="{0EAD1DAD-47CD-4F25-8A72-4D9616A4D1E9}"/>
               </a:ext>
             </a:extLst>
           </p:cNvPr>
@@ -7117,7 +7713,7 @@
           <p:cNvPr id="18" name="">
             <a:extLst xmlns:a="http://schemas.openxmlformats.org/drawingml/2006/main">
               <a:ext uri="{FF2B5EF4-FFF2-40B4-BE49-F238E27FC236}">
-                <a16:creationId xmlns:a16="http://schemas.microsoft.com/office/drawing/2014/main" id="{4BCE4F42-7CC7-4141-9F8F-9F523078D8E5}"/>
+                <a16:creationId xmlns:a16="http://schemas.microsoft.com/office/drawing/2014/main" id="{F22A1959-1FE0-4449-A0C3-D34702460468}"/>
               </a:ext>
             </a:extLst>
           </p:cNvPr>
@@ -7167,7 +7763,7 @@
           <p:cNvPr id="19" name="">
             <a:extLst xmlns:a="http://schemas.openxmlformats.org/drawingml/2006/main">
               <a:ext uri="{FF2B5EF4-FFF2-40B4-BE49-F238E27FC236}">
-                <a16:creationId xmlns:a16="http://schemas.microsoft.com/office/drawing/2014/main" id="{9907F168-9499-4DA8-83D7-F4A21720FA88}"/>
+                <a16:creationId xmlns:a16="http://schemas.microsoft.com/office/drawing/2014/main" id="{46EDF62B-943B-426F-8995-2B350691BA4A}"/>
               </a:ext>
             </a:extLst>
           </p:cNvPr>
@@ -7217,7 +7813,7 @@
           <p:cNvPr id="20" name="">
             <a:extLst xmlns:a="http://schemas.openxmlformats.org/drawingml/2006/main">
               <a:ext uri="{FF2B5EF4-FFF2-40B4-BE49-F238E27FC236}">
-                <a16:creationId xmlns:a16="http://schemas.microsoft.com/office/drawing/2014/main" id="{0B6FC9D8-9930-4DF5-9233-5301564B1DD2}"/>
+                <a16:creationId xmlns:a16="http://schemas.microsoft.com/office/drawing/2014/main" id="{EE52C604-3857-499F-9D2F-6AC627BBDA5E}"/>
               </a:ext>
             </a:extLst>
           </p:cNvPr>
@@ -7250,7 +7846,7 @@
           <p:cNvPr id="21" name="">
             <a:extLst xmlns:a="http://schemas.openxmlformats.org/drawingml/2006/main">
               <a:ext uri="{FF2B5EF4-FFF2-40B4-BE49-F238E27FC236}">
-                <a16:creationId xmlns:a16="http://schemas.microsoft.com/office/drawing/2014/main" id="{4566E228-0ACF-4B64-9BE7-DEA8C96D45CB}"/>
+                <a16:creationId xmlns:a16="http://schemas.microsoft.com/office/drawing/2014/main" id="{E8FBD346-FB35-4614-B92D-AC9F785C8BFF}"/>
               </a:ext>
             </a:extLst>
           </p:cNvPr>
@@ -7300,7 +7896,7 @@
           <p:cNvPr id="22" name="">
             <a:extLst xmlns:a="http://schemas.openxmlformats.org/drawingml/2006/main">
               <a:ext uri="{FF2B5EF4-FFF2-40B4-BE49-F238E27FC236}">
-                <a16:creationId xmlns:a16="http://schemas.microsoft.com/office/drawing/2014/main" id="{DFB306BF-1B55-4324-8D2D-B3258426477F}"/>
+                <a16:creationId xmlns:a16="http://schemas.microsoft.com/office/drawing/2014/main" id="{8219C1C8-024F-4C0C-BF10-6FFC5B8DFB1B}"/>
               </a:ext>
             </a:extLst>
           </p:cNvPr>
@@ -7333,7 +7929,7 @@
           <p:cNvPr id="23" name="">
             <a:extLst xmlns:a="http://schemas.openxmlformats.org/drawingml/2006/main">
               <a:ext uri="{FF2B5EF4-FFF2-40B4-BE49-F238E27FC236}">
-                <a16:creationId xmlns:a16="http://schemas.microsoft.com/office/drawing/2014/main" id="{6C962683-2B5C-4913-81B5-ED3973F25449}"/>
+                <a16:creationId xmlns:a16="http://schemas.microsoft.com/office/drawing/2014/main" id="{37B50AAC-9F07-4DC7-BE28-61B190249FFD}"/>
               </a:ext>
             </a:extLst>
           </p:cNvPr>
@@ -7381,7 +7977,7 @@
     </p:spTree>
     <p:extLst>
       <p:ext uri="{BB962C8B-B14F-4D97-AF65-F5344CB8AC3E}">
-        <p14:creationId xmlns:p14="http://schemas.microsoft.com/office/powerpoint/2010/main" val="1805365656"/>
+        <p14:creationId xmlns:p14="http://schemas.microsoft.com/office/powerpoint/2010/main" val="153973232"/>
       </p:ext>
     </p:extLst>
   </p:cSld>
@@ -7412,7 +8008,7 @@
           <p:cNvPr id="16" name="">
             <a:extLst xmlns:a="http://schemas.openxmlformats.org/drawingml/2006/main">
               <a:ext uri="{FF2B5EF4-FFF2-40B4-BE49-F238E27FC236}">
-                <a16:creationId xmlns:a16="http://schemas.microsoft.com/office/drawing/2014/main" id="{FE984EE6-992F-4C66-BA66-72187763B7EF}"/>
+                <a16:creationId xmlns:a16="http://schemas.microsoft.com/office/drawing/2014/main" id="{A44E4A69-3EF9-41EE-89C2-5BD38FB9EC87}"/>
               </a:ext>
             </a:extLst>
           </p:cNvPr>
@@ -7462,7 +8058,7 @@
           <p:cNvPr id="2" name="">
             <a:extLst xmlns:a="http://schemas.openxmlformats.org/drawingml/2006/main">
               <a:ext uri="{FF2B5EF4-FFF2-40B4-BE49-F238E27FC236}">
-                <a16:creationId xmlns:a16="http://schemas.microsoft.com/office/drawing/2014/main" id="{9F1ECD2A-27F9-4222-A2B4-FCC4DCD58E7D}"/>
+                <a16:creationId xmlns:a16="http://schemas.microsoft.com/office/drawing/2014/main" id="{5D4D70A1-AD2F-4FF2-90B6-ED5015AA8213}"/>
               </a:ext>
             </a:extLst>
           </p:cNvPr>
@@ -7512,7 +8108,7 @@
           <p:cNvPr id="3" name="">
             <a:extLst xmlns:a="http://schemas.openxmlformats.org/drawingml/2006/main">
               <a:ext uri="{FF2B5EF4-FFF2-40B4-BE49-F238E27FC236}">
-                <a16:creationId xmlns:a16="http://schemas.microsoft.com/office/drawing/2014/main" id="{4FA86F2A-4432-460A-B387-9A7DEE225E5B}"/>
+                <a16:creationId xmlns:a16="http://schemas.microsoft.com/office/drawing/2014/main" id="{2B68FFEB-3C2E-474E-B042-6341933B8195}"/>
               </a:ext>
             </a:extLst>
           </p:cNvPr>
@@ -7545,7 +8141,7 @@
           <p:cNvPr id="4" name="">
             <a:extLst xmlns:a="http://schemas.openxmlformats.org/drawingml/2006/main">
               <a:ext uri="{FF2B5EF4-FFF2-40B4-BE49-F238E27FC236}">
-                <a16:creationId xmlns:a16="http://schemas.microsoft.com/office/drawing/2014/main" id="{3C871789-A22A-468C-B7B8-1F23E590ABF3}"/>
+                <a16:creationId xmlns:a16="http://schemas.microsoft.com/office/drawing/2014/main" id="{65841DF3-E2E9-4B33-B5E0-443F5F44F094}"/>
               </a:ext>
             </a:extLst>
           </p:cNvPr>
@@ -7595,7 +8191,7 @@
           <p:cNvPr id="5" name="">
             <a:extLst xmlns:a="http://schemas.openxmlformats.org/drawingml/2006/main">
               <a:ext uri="{FF2B5EF4-FFF2-40B4-BE49-F238E27FC236}">
-                <a16:creationId xmlns:a16="http://schemas.microsoft.com/office/drawing/2014/main" id="{98D0034F-7F56-4CB9-A88D-9425113DC5C5}"/>
+                <a16:creationId xmlns:a16="http://schemas.microsoft.com/office/drawing/2014/main" id="{4B7E7541-093F-4F3C-94CD-3B6A11A1E367}"/>
               </a:ext>
             </a:extLst>
           </p:cNvPr>
@@ -7645,7 +8241,7 @@
           <p:cNvPr id="6" name="">
             <a:extLst xmlns:a="http://schemas.openxmlformats.org/drawingml/2006/main">
               <a:ext uri="{FF2B5EF4-FFF2-40B4-BE49-F238E27FC236}">
-                <a16:creationId xmlns:a16="http://schemas.microsoft.com/office/drawing/2014/main" id="{6A7AA4BC-660C-49BF-97F3-DD188DB924CF}"/>
+                <a16:creationId xmlns:a16="http://schemas.microsoft.com/office/drawing/2014/main" id="{BCA6A817-94B9-4818-86D2-538D402CF953}"/>
               </a:ext>
             </a:extLst>
           </p:cNvPr>
@@ -7678,7 +8274,7 @@
           <p:cNvPr id="7" name="">
             <a:extLst xmlns:a="http://schemas.openxmlformats.org/drawingml/2006/main">
               <a:ext uri="{FF2B5EF4-FFF2-40B4-BE49-F238E27FC236}">
-                <a16:creationId xmlns:a16="http://schemas.microsoft.com/office/drawing/2014/main" id="{40DBF2F4-F3EC-4097-89D6-BC2EBAC2AD0E}"/>
+                <a16:creationId xmlns:a16="http://schemas.microsoft.com/office/drawing/2014/main" id="{872E8D38-5718-4941-A97B-EF81D359EA75}"/>
               </a:ext>
             </a:extLst>
           </p:cNvPr>
@@ -7728,7 +8324,7 @@
           <p:cNvPr id="8" name="">
             <a:extLst xmlns:a="http://schemas.openxmlformats.org/drawingml/2006/main">
               <a:ext uri="{FF2B5EF4-FFF2-40B4-BE49-F238E27FC236}">
-                <a16:creationId xmlns:a16="http://schemas.microsoft.com/office/drawing/2014/main" id="{7E655FD3-40F4-4904-88CC-B4E7E22869E8}"/>
+                <a16:creationId xmlns:a16="http://schemas.microsoft.com/office/drawing/2014/main" id="{B2CCCA0E-B346-4205-8C08-2D167D3F4A75}"/>
               </a:ext>
             </a:extLst>
           </p:cNvPr>
@@ -7778,7 +8374,7 @@
           <p:cNvPr id="9" name="">
             <a:extLst xmlns:a="http://schemas.openxmlformats.org/drawingml/2006/main">
               <a:ext uri="{FF2B5EF4-FFF2-40B4-BE49-F238E27FC236}">
-                <a16:creationId xmlns:a16="http://schemas.microsoft.com/office/drawing/2014/main" id="{AFBB8D9F-EDB3-4A6E-9F3E-BCCC69AA32FD}"/>
+                <a16:creationId xmlns:a16="http://schemas.microsoft.com/office/drawing/2014/main" id="{528D4CEA-2FDC-44D3-8510-ABBEE6CD9440}"/>
               </a:ext>
             </a:extLst>
           </p:cNvPr>
@@ -7828,7 +8424,7 @@
           <p:cNvPr id="10" name="">
             <a:extLst xmlns:a="http://schemas.openxmlformats.org/drawingml/2006/main">
               <a:ext uri="{FF2B5EF4-FFF2-40B4-BE49-F238E27FC236}">
-                <a16:creationId xmlns:a16="http://schemas.microsoft.com/office/drawing/2014/main" id="{82314CE4-3C98-4A3E-BF78-1D415994303D}"/>
+                <a16:creationId xmlns:a16="http://schemas.microsoft.com/office/drawing/2014/main" id="{D557F6E2-7006-42FD-A5E9-C71C5A989D24}"/>
               </a:ext>
             </a:extLst>
           </p:cNvPr>
@@ -7878,7 +8474,7 @@
           <p:cNvPr id="11" name="">
             <a:extLst xmlns:a="http://schemas.openxmlformats.org/drawingml/2006/main">
               <a:ext uri="{FF2B5EF4-FFF2-40B4-BE49-F238E27FC236}">
-                <a16:creationId xmlns:a16="http://schemas.microsoft.com/office/drawing/2014/main" id="{933A1223-A18A-4BE7-AFC9-E38EE7862FF2}"/>
+                <a16:creationId xmlns:a16="http://schemas.microsoft.com/office/drawing/2014/main" id="{64A360CA-DFCF-4F5B-BA63-111077C50AD5}"/>
               </a:ext>
             </a:extLst>
           </p:cNvPr>
@@ -7928,7 +8524,7 @@
           <p:cNvPr id="12" name="">
             <a:extLst xmlns:a="http://schemas.openxmlformats.org/drawingml/2006/main">
               <a:ext uri="{FF2B5EF4-FFF2-40B4-BE49-F238E27FC236}">
-                <a16:creationId xmlns:a16="http://schemas.microsoft.com/office/drawing/2014/main" id="{CEDB8260-8CD2-428F-99E4-76322733E3B0}"/>
+                <a16:creationId xmlns:a16="http://schemas.microsoft.com/office/drawing/2014/main" id="{65E96506-C616-44CA-9096-A64B38F9FC1B}"/>
               </a:ext>
             </a:extLst>
           </p:cNvPr>
@@ -7978,7 +8574,7 @@
           <p:cNvPr id="13" name="">
             <a:extLst xmlns:a="http://schemas.openxmlformats.org/drawingml/2006/main">
               <a:ext uri="{FF2B5EF4-FFF2-40B4-BE49-F238E27FC236}">
-                <a16:creationId xmlns:a16="http://schemas.microsoft.com/office/drawing/2014/main" id="{C1A8302F-939C-4D57-8A6C-9151EB3DDEE7}"/>
+                <a16:creationId xmlns:a16="http://schemas.microsoft.com/office/drawing/2014/main" id="{06E0A33A-0E4C-4485-B8BA-B40D790E2558}"/>
               </a:ext>
             </a:extLst>
           </p:cNvPr>
@@ -8028,7 +8624,7 @@
           <p:cNvPr id="14" name="">
             <a:extLst xmlns:a="http://schemas.openxmlformats.org/drawingml/2006/main">
               <a:ext uri="{FF2B5EF4-FFF2-40B4-BE49-F238E27FC236}">
-                <a16:creationId xmlns:a16="http://schemas.microsoft.com/office/drawing/2014/main" id="{4E476D45-AA63-442F-8302-CDB02E0229F4}"/>
+                <a16:creationId xmlns:a16="http://schemas.microsoft.com/office/drawing/2014/main" id="{B70B0B03-9E8F-4040-8AD6-3FA75AB4E6E8}"/>
               </a:ext>
             </a:extLst>
           </p:cNvPr>
@@ -8078,7 +8674,7 @@
           <p:cNvPr id="15" name="">
             <a:extLst xmlns:a="http://schemas.openxmlformats.org/drawingml/2006/main">
               <a:ext uri="{FF2B5EF4-FFF2-40B4-BE49-F238E27FC236}">
-                <a16:creationId xmlns:a16="http://schemas.microsoft.com/office/drawing/2014/main" id="{8D5E13F7-C02A-4EC2-B0D1-67F135BFACBB}"/>
+                <a16:creationId xmlns:a16="http://schemas.microsoft.com/office/drawing/2014/main" id="{62A7C0E0-AB6B-456F-A16E-4B71EF567449}"/>
               </a:ext>
             </a:extLst>
           </p:cNvPr>
@@ -8118,7 +8714,7 @@
                   <a:srgbClr val="B44738"/>
                 </a:solidFill>
               </a:rPr>
-              <a:t>CURRENT STATUS: DAILY + INTRADAY MICROSCOPES DOCUMENTED · CONDITIONED INTRADAY VIEW NOT YET RUN</a:t>
+              <a:t>CURRENT STATUS: OPENING-RESPONSE CONDITIONING ADDED ON SLIDES 29–34</a:t>
             </a:r>
           </a:p>
         </p:txBody>
@@ -8126,7 +8722,7 @@
     </p:spTree>
     <p:extLst>
       <p:ext uri="{BB962C8B-B14F-4D97-AF65-F5344CB8AC3E}">
-        <p14:creationId xmlns:p14="http://schemas.microsoft.com/office/powerpoint/2010/main" val="299562216"/>
+        <p14:creationId xmlns:p14="http://schemas.microsoft.com/office/powerpoint/2010/main" val="190012762"/>
       </p:ext>
     </p:extLst>
   </p:cSld>
@@ -8157,7 +8753,7 @@
           <p:cNvPr id="6" name="">
             <a:extLst xmlns:a="http://schemas.openxmlformats.org/drawingml/2006/main">
               <a:ext uri="{FF2B5EF4-FFF2-40B4-BE49-F238E27FC236}">
-                <a16:creationId xmlns:a16="http://schemas.microsoft.com/office/drawing/2014/main" id="{592DB84C-B36B-4AAD-9EC6-68ABC89BFF7E}"/>
+                <a16:creationId xmlns:a16="http://schemas.microsoft.com/office/drawing/2014/main" id="{0C7AA359-4042-4A6B-AE1C-FECDBFD7BCA1}"/>
               </a:ext>
             </a:extLst>
           </p:cNvPr>
@@ -8207,7 +8803,7 @@
           <p:cNvPr id="2" name="">
             <a:extLst xmlns:a="http://schemas.openxmlformats.org/drawingml/2006/main">
               <a:ext uri="{FF2B5EF4-FFF2-40B4-BE49-F238E27FC236}">
-                <a16:creationId xmlns:a16="http://schemas.microsoft.com/office/drawing/2014/main" id="{DE6844B8-26B4-4A8C-941B-AEC13465D98A}"/>
+                <a16:creationId xmlns:a16="http://schemas.microsoft.com/office/drawing/2014/main" id="{2FCC09AB-F03B-4D04-A8D3-697228098C62}"/>
               </a:ext>
             </a:extLst>
           </p:cNvPr>
@@ -8274,7 +8870,7 @@
           <p:cNvPr id="3" name="">
             <a:extLst xmlns:a="http://schemas.openxmlformats.org/drawingml/2006/main">
               <a:ext uri="{FF2B5EF4-FFF2-40B4-BE49-F238E27FC236}">
-                <a16:creationId xmlns:a16="http://schemas.microsoft.com/office/drawing/2014/main" id="{252DF2A9-ACBC-49AA-A729-E5988C637F2F}"/>
+                <a16:creationId xmlns:a16="http://schemas.microsoft.com/office/drawing/2014/main" id="{C9DB2ED2-DC37-4BD8-8179-777D88A4EBBF}"/>
               </a:ext>
             </a:extLst>
           </p:cNvPr>
@@ -8324,7 +8920,7 @@
           <p:cNvPr id="4" name="">
             <a:extLst xmlns:a="http://schemas.openxmlformats.org/drawingml/2006/main">
               <a:ext uri="{FF2B5EF4-FFF2-40B4-BE49-F238E27FC236}">
-                <a16:creationId xmlns:a16="http://schemas.microsoft.com/office/drawing/2014/main" id="{648522B4-14BB-4DE6-9E88-4AB9E03E07B6}"/>
+                <a16:creationId xmlns:a16="http://schemas.microsoft.com/office/drawing/2014/main" id="{8BBFBE00-E2C9-40E1-8703-0672C6846E86}"/>
               </a:ext>
             </a:extLst>
           </p:cNvPr>
@@ -8364,7 +8960,7 @@
                   <a:srgbClr val="FFFFFF"/>
                 </a:solidFill>
               </a:rPr>
-              <a:t>2018–2023 TRAIN only · 2024+ remains sealed</a:t>
+              <a:t>2018–2023 TRAIN only · one-shot confirmation follows</a:t>
             </a:r>
           </a:p>
         </p:txBody>
@@ -8374,7 +8970,7 @@
           <p:cNvPr id="5" name="">
             <a:extLst xmlns:a="http://schemas.openxmlformats.org/drawingml/2006/main">
               <a:ext uri="{FF2B5EF4-FFF2-40B4-BE49-F238E27FC236}">
-                <a16:creationId xmlns:a16="http://schemas.microsoft.com/office/drawing/2014/main" id="{9D509C6A-13FE-4939-868E-7A59276E28B9}"/>
+                <a16:creationId xmlns:a16="http://schemas.microsoft.com/office/drawing/2014/main" id="{DD1D13DF-5B23-4288-9E4F-BDF9A0CAC14B}"/>
               </a:ext>
             </a:extLst>
           </p:cNvPr>
@@ -8422,7 +9018,7 @@
     </p:spTree>
     <p:extLst>
       <p:ext uri="{BB962C8B-B14F-4D97-AF65-F5344CB8AC3E}">
-        <p14:creationId xmlns:p14="http://schemas.microsoft.com/office/powerpoint/2010/main" val="102596344"/>
+        <p14:creationId xmlns:p14="http://schemas.microsoft.com/office/powerpoint/2010/main" val="1317312665"/>
       </p:ext>
     </p:extLst>
   </p:cSld>
@@ -8453,7 +9049,7 @@
           <p:cNvPr id="20" name="">
             <a:extLst xmlns:a="http://schemas.openxmlformats.org/drawingml/2006/main">
               <a:ext uri="{FF2B5EF4-FFF2-40B4-BE49-F238E27FC236}">
-                <a16:creationId xmlns:a16="http://schemas.microsoft.com/office/drawing/2014/main" id="{FCA5491C-244D-4566-9491-8DDD99F998C9}"/>
+                <a16:creationId xmlns:a16="http://schemas.microsoft.com/office/drawing/2014/main" id="{24FD3CE0-1CA5-4349-AFFC-F28B39D9041C}"/>
               </a:ext>
             </a:extLst>
           </p:cNvPr>
@@ -8503,7 +9099,7 @@
           <p:cNvPr id="2" name="">
             <a:extLst xmlns:a="http://schemas.openxmlformats.org/drawingml/2006/main">
               <a:ext uri="{FF2B5EF4-FFF2-40B4-BE49-F238E27FC236}">
-                <a16:creationId xmlns:a16="http://schemas.microsoft.com/office/drawing/2014/main" id="{D88907A4-61CB-4B1F-97E8-FECD08C07725}"/>
+                <a16:creationId xmlns:a16="http://schemas.microsoft.com/office/drawing/2014/main" id="{B48E8DC5-D7C6-4E43-B89E-02CDDD39F57B}"/>
               </a:ext>
             </a:extLst>
           </p:cNvPr>
@@ -8553,7 +9149,7 @@
           <p:cNvPr id="3" name="">
             <a:extLst xmlns:a="http://schemas.openxmlformats.org/drawingml/2006/main">
               <a:ext uri="{FF2B5EF4-FFF2-40B4-BE49-F238E27FC236}">
-                <a16:creationId xmlns:a16="http://schemas.microsoft.com/office/drawing/2014/main" id="{1B83D13A-0E53-46EE-90C7-09AE30AD9194}"/>
+                <a16:creationId xmlns:a16="http://schemas.microsoft.com/office/drawing/2014/main" id="{6171FD54-7FFD-4215-8B41-0D4E86EF90C0}"/>
               </a:ext>
             </a:extLst>
           </p:cNvPr>
@@ -8586,7 +9182,7 @@
           <p:cNvPr id="4" name="">
             <a:extLst xmlns:a="http://schemas.openxmlformats.org/drawingml/2006/main">
               <a:ext uri="{FF2B5EF4-FFF2-40B4-BE49-F238E27FC236}">
-                <a16:creationId xmlns:a16="http://schemas.microsoft.com/office/drawing/2014/main" id="{15DB55E7-A2EC-4826-8971-1BDBA4407001}"/>
+                <a16:creationId xmlns:a16="http://schemas.microsoft.com/office/drawing/2014/main" id="{93CD0953-4EC4-4DCF-BC90-E9EFAD9B9210}"/>
               </a:ext>
             </a:extLst>
           </p:cNvPr>
@@ -8636,7 +9232,7 @@
           <p:cNvPr id="5" name="">
             <a:extLst xmlns:a="http://schemas.openxmlformats.org/drawingml/2006/main">
               <a:ext uri="{FF2B5EF4-FFF2-40B4-BE49-F238E27FC236}">
-                <a16:creationId xmlns:a16="http://schemas.microsoft.com/office/drawing/2014/main" id="{F4610BDE-4ABB-40E5-A7B3-22659689CBE5}"/>
+                <a16:creationId xmlns:a16="http://schemas.microsoft.com/office/drawing/2014/main" id="{1A4B8737-6B5A-47B5-BFB9-0B2A457E5139}"/>
               </a:ext>
             </a:extLst>
           </p:cNvPr>
@@ -8686,7 +9282,7 @@
           <p:cNvPr id="6" name="">
             <a:extLst xmlns:a="http://schemas.openxmlformats.org/drawingml/2006/main">
               <a:ext uri="{FF2B5EF4-FFF2-40B4-BE49-F238E27FC236}">
-                <a16:creationId xmlns:a16="http://schemas.microsoft.com/office/drawing/2014/main" id="{FA3F5A1D-9E56-44AA-87C2-E9CFD1939666}"/>
+                <a16:creationId xmlns:a16="http://schemas.microsoft.com/office/drawing/2014/main" id="{D19CD443-2A04-4BF0-98B3-2725CBE18521}"/>
               </a:ext>
             </a:extLst>
           </p:cNvPr>
@@ -8719,7 +9315,7 @@
           <p:cNvPr id="7" name="">
             <a:extLst xmlns:a="http://schemas.openxmlformats.org/drawingml/2006/main">
               <a:ext uri="{FF2B5EF4-FFF2-40B4-BE49-F238E27FC236}">
-                <a16:creationId xmlns:a16="http://schemas.microsoft.com/office/drawing/2014/main" id="{A6C397A7-2C79-469B-8A12-CA2EBCF8385D}"/>
+                <a16:creationId xmlns:a16="http://schemas.microsoft.com/office/drawing/2014/main" id="{F8B667BD-403E-40DD-9D22-1FDFE57AEE5A}"/>
               </a:ext>
             </a:extLst>
           </p:cNvPr>
@@ -8769,7 +9365,7 @@
           <p:cNvPr id="8" name="">
             <a:extLst xmlns:a="http://schemas.openxmlformats.org/drawingml/2006/main">
               <a:ext uri="{FF2B5EF4-FFF2-40B4-BE49-F238E27FC236}">
-                <a16:creationId xmlns:a16="http://schemas.microsoft.com/office/drawing/2014/main" id="{F7613A2F-05D8-4751-88A7-355E12228755}"/>
+                <a16:creationId xmlns:a16="http://schemas.microsoft.com/office/drawing/2014/main" id="{28F71638-0654-4AD2-9A0C-D4CE81D94F41}"/>
               </a:ext>
             </a:extLst>
           </p:cNvPr>
@@ -8819,7 +9415,7 @@
           <p:cNvPr id="9" name="">
             <a:extLst xmlns:a="http://schemas.openxmlformats.org/drawingml/2006/main">
               <a:ext uri="{FF2B5EF4-FFF2-40B4-BE49-F238E27FC236}">
-                <a16:creationId xmlns:a16="http://schemas.microsoft.com/office/drawing/2014/main" id="{6BA7CED2-FC40-4356-BB90-8CCF43300302}"/>
+                <a16:creationId xmlns:a16="http://schemas.microsoft.com/office/drawing/2014/main" id="{A01C68E8-A268-49AD-B54A-D83E0B4B89F3}"/>
               </a:ext>
             </a:extLst>
           </p:cNvPr>
@@ -8869,7 +9465,7 @@
           <p:cNvPr id="10" name="">
             <a:extLst xmlns:a="http://schemas.openxmlformats.org/drawingml/2006/main">
               <a:ext uri="{FF2B5EF4-FFF2-40B4-BE49-F238E27FC236}">
-                <a16:creationId xmlns:a16="http://schemas.microsoft.com/office/drawing/2014/main" id="{25A5AC8F-75FE-46FC-BA65-B12D7BE4537C}"/>
+                <a16:creationId xmlns:a16="http://schemas.microsoft.com/office/drawing/2014/main" id="{3436FAB9-057F-4B7C-8062-4EF3FBF9EE58}"/>
               </a:ext>
             </a:extLst>
           </p:cNvPr>
@@ -8919,7 +9515,7 @@
           <p:cNvPr id="11" name="">
             <a:extLst xmlns:a="http://schemas.openxmlformats.org/drawingml/2006/main">
               <a:ext uri="{FF2B5EF4-FFF2-40B4-BE49-F238E27FC236}">
-                <a16:creationId xmlns:a16="http://schemas.microsoft.com/office/drawing/2014/main" id="{4978FFAA-2032-48B2-8497-532E9151A4BD}"/>
+                <a16:creationId xmlns:a16="http://schemas.microsoft.com/office/drawing/2014/main" id="{59C75A55-8244-4ED8-9A01-0E89E2EF1CE7}"/>
               </a:ext>
             </a:extLst>
           </p:cNvPr>
@@ -8969,7 +9565,7 @@
           <p:cNvPr id="12" name="">
             <a:extLst xmlns:a="http://schemas.openxmlformats.org/drawingml/2006/main">
               <a:ext uri="{FF2B5EF4-FFF2-40B4-BE49-F238E27FC236}">
-                <a16:creationId xmlns:a16="http://schemas.microsoft.com/office/drawing/2014/main" id="{06450BDF-E4EB-4A8E-BED4-EE241D255F8C}"/>
+                <a16:creationId xmlns:a16="http://schemas.microsoft.com/office/drawing/2014/main" id="{83CE6CA2-89CC-4BEF-BE76-0BAF54685E83}"/>
               </a:ext>
             </a:extLst>
           </p:cNvPr>
@@ -9002,7 +9598,7 @@
           <p:cNvPr id="13" name="">
             <a:extLst xmlns:a="http://schemas.openxmlformats.org/drawingml/2006/main">
               <a:ext uri="{FF2B5EF4-FFF2-40B4-BE49-F238E27FC236}">
-                <a16:creationId xmlns:a16="http://schemas.microsoft.com/office/drawing/2014/main" id="{2B8B9421-86EF-4B71-9104-3B2B839A3A57}"/>
+                <a16:creationId xmlns:a16="http://schemas.microsoft.com/office/drawing/2014/main" id="{3BDB39D9-DFCE-4793-945B-A8305AE51E97}"/>
               </a:ext>
             </a:extLst>
           </p:cNvPr>
@@ -9052,7 +9648,7 @@
           <p:cNvPr id="14" name="">
             <a:extLst xmlns:a="http://schemas.openxmlformats.org/drawingml/2006/main">
               <a:ext uri="{FF2B5EF4-FFF2-40B4-BE49-F238E27FC236}">
-                <a16:creationId xmlns:a16="http://schemas.microsoft.com/office/drawing/2014/main" id="{F5CEB417-2DD5-4AE9-8E16-71AAAF420C39}"/>
+                <a16:creationId xmlns:a16="http://schemas.microsoft.com/office/drawing/2014/main" id="{734F0502-722E-4F49-A797-3D65E19FDD8F}"/>
               </a:ext>
             </a:extLst>
           </p:cNvPr>
@@ -9102,7 +9698,7 @@
           <p:cNvPr id="15" name="">
             <a:extLst xmlns:a="http://schemas.openxmlformats.org/drawingml/2006/main">
               <a:ext uri="{FF2B5EF4-FFF2-40B4-BE49-F238E27FC236}">
-                <a16:creationId xmlns:a16="http://schemas.microsoft.com/office/drawing/2014/main" id="{190C1E62-0F1F-4571-9D06-257F4FE163FB}"/>
+                <a16:creationId xmlns:a16="http://schemas.microsoft.com/office/drawing/2014/main" id="{782FF7CC-44A6-4E3A-A54C-26FAD3CDFFBB}"/>
               </a:ext>
             </a:extLst>
           </p:cNvPr>
@@ -9152,7 +9748,7 @@
           <p:cNvPr id="16" name="">
             <a:extLst xmlns:a="http://schemas.openxmlformats.org/drawingml/2006/main">
               <a:ext uri="{FF2B5EF4-FFF2-40B4-BE49-F238E27FC236}">
-                <a16:creationId xmlns:a16="http://schemas.microsoft.com/office/drawing/2014/main" id="{B8A0253F-5094-43A5-B528-069F939C6ED8}"/>
+                <a16:creationId xmlns:a16="http://schemas.microsoft.com/office/drawing/2014/main" id="{C1DD567A-8816-4E39-AD3A-AFA1A5CB3C7B}"/>
               </a:ext>
             </a:extLst>
           </p:cNvPr>
@@ -9202,7 +9798,7 @@
           <p:cNvPr id="17" name="">
             <a:extLst xmlns:a="http://schemas.openxmlformats.org/drawingml/2006/main">
               <a:ext uri="{FF2B5EF4-FFF2-40B4-BE49-F238E27FC236}">
-                <a16:creationId xmlns:a16="http://schemas.microsoft.com/office/drawing/2014/main" id="{C974A905-CD03-4682-9D99-4678521C6B10}"/>
+                <a16:creationId xmlns:a16="http://schemas.microsoft.com/office/drawing/2014/main" id="{5E1BD91D-98CE-487F-9587-D6E7277D3487}"/>
               </a:ext>
             </a:extLst>
           </p:cNvPr>
@@ -9252,7 +9848,7 @@
           <p:cNvPr id="18" name="">
             <a:extLst xmlns:a="http://schemas.openxmlformats.org/drawingml/2006/main">
               <a:ext uri="{FF2B5EF4-FFF2-40B4-BE49-F238E27FC236}">
-                <a16:creationId xmlns:a16="http://schemas.microsoft.com/office/drawing/2014/main" id="{FF56BF54-C6E2-460E-942F-8BAA9C8DA386}"/>
+                <a16:creationId xmlns:a16="http://schemas.microsoft.com/office/drawing/2014/main" id="{E5442175-B09A-472B-98AC-F6D37431E661}"/>
               </a:ext>
             </a:extLst>
           </p:cNvPr>
@@ -9285,7 +9881,7 @@
           <p:cNvPr id="19" name="">
             <a:extLst xmlns:a="http://schemas.openxmlformats.org/drawingml/2006/main">
               <a:ext uri="{FF2B5EF4-FFF2-40B4-BE49-F238E27FC236}">
-                <a16:creationId xmlns:a16="http://schemas.microsoft.com/office/drawing/2014/main" id="{483AD765-CC90-46FD-BC55-24BF53494CBF}"/>
+                <a16:creationId xmlns:a16="http://schemas.microsoft.com/office/drawing/2014/main" id="{6F6FF21C-1C38-4560-A168-A4CC6A8E4ECC}"/>
               </a:ext>
             </a:extLst>
           </p:cNvPr>
@@ -9333,7 +9929,7 @@
     </p:spTree>
     <p:extLst>
       <p:ext uri="{BB962C8B-B14F-4D97-AF65-F5344CB8AC3E}">
-        <p14:creationId xmlns:p14="http://schemas.microsoft.com/office/powerpoint/2010/main" val="1760779519"/>
+        <p14:creationId xmlns:p14="http://schemas.microsoft.com/office/powerpoint/2010/main" val="126839133"/>
       </p:ext>
     </p:extLst>
   </p:cSld>
@@ -9364,7 +9960,7 @@
           <p:cNvPr id="7" name="">
             <a:extLst xmlns:a="http://schemas.openxmlformats.org/drawingml/2006/main">
               <a:ext uri="{FF2B5EF4-FFF2-40B4-BE49-F238E27FC236}">
-                <a16:creationId xmlns:a16="http://schemas.microsoft.com/office/drawing/2014/main" id="{DC6E974D-1D3C-41C9-80F9-6D616DD2C86A}"/>
+                <a16:creationId xmlns:a16="http://schemas.microsoft.com/office/drawing/2014/main" id="{6910C709-17CF-4B22-9123-9ED67AA7A13E}"/>
               </a:ext>
             </a:extLst>
           </p:cNvPr>
@@ -9414,7 +10010,7 @@
           <p:cNvPr id="2" name="">
             <a:extLst xmlns:a="http://schemas.openxmlformats.org/drawingml/2006/main">
               <a:ext uri="{FF2B5EF4-FFF2-40B4-BE49-F238E27FC236}">
-                <a16:creationId xmlns:a16="http://schemas.microsoft.com/office/drawing/2014/main" id="{4477F6CE-44DA-4FDA-AA47-1D186529ED06}"/>
+                <a16:creationId xmlns:a16="http://schemas.microsoft.com/office/drawing/2014/main" id="{D76178F2-12F1-4D65-B67E-ACCBBA76B62D}"/>
               </a:ext>
             </a:extLst>
           </p:cNvPr>
@@ -9464,7 +10060,7 @@
           <p:cNvPr id="3" name="">
             <a:extLst xmlns:a="http://schemas.openxmlformats.org/drawingml/2006/main">
               <a:ext uri="{FF2B5EF4-FFF2-40B4-BE49-F238E27FC236}">
-                <a16:creationId xmlns:a16="http://schemas.microsoft.com/office/drawing/2014/main" id="{FA8E598E-E74D-4143-BE5B-10AC8769274E}"/>
+                <a16:creationId xmlns:a16="http://schemas.microsoft.com/office/drawing/2014/main" id="{CCA03D49-EBA7-421C-8B02-680EB3DAADF8}"/>
               </a:ext>
             </a:extLst>
           </p:cNvPr>
@@ -9497,7 +10093,7 @@
           <p:cNvPr id="4" name="">
             <a:extLst xmlns:a="http://schemas.openxmlformats.org/drawingml/2006/main">
               <a:ext uri="{FF2B5EF4-FFF2-40B4-BE49-F238E27FC236}">
-                <a16:creationId xmlns:a16="http://schemas.microsoft.com/office/drawing/2014/main" id="{B3CA689A-C1EF-4C6E-A853-0B9FBD59F6D0}"/>
+                <a16:creationId xmlns:a16="http://schemas.microsoft.com/office/drawing/2014/main" id="{066CBF21-6DF8-413D-804A-DB3D168CCCD1}"/>
               </a:ext>
             </a:extLst>
           </p:cNvPr>
@@ -9547,7 +10143,7 @@
           <p:cNvPr id="5" name="">
             <a:extLst xmlns:a="http://schemas.openxmlformats.org/drawingml/2006/main">
               <a:ext uri="{FF2B5EF4-FFF2-40B4-BE49-F238E27FC236}">
-                <a16:creationId xmlns:a16="http://schemas.microsoft.com/office/drawing/2014/main" id="{AC0EB136-4412-4023-945F-0C7E05C85FA7}"/>
+                <a16:creationId xmlns:a16="http://schemas.microsoft.com/office/drawing/2014/main" id="{BB662F27-1B7A-4DF7-BD5E-CE40BBD4C910}"/>
               </a:ext>
             </a:extLst>
           </p:cNvPr>
@@ -9601,7 +10197,7 @@
           <p:nvPr/>
         </p:nvPicPr>
         <p:blipFill>
-          <a:blip xmlns:r="http://schemas.openxmlformats.org/officeDocument/2006/relationships" xmlns:a="http://schemas.openxmlformats.org/drawingml/2006/main" r:embed="R2438911490774ff7"/>
+          <a:blip xmlns:r="http://schemas.openxmlformats.org/officeDocument/2006/relationships" xmlns:a="http://schemas.openxmlformats.org/drawingml/2006/main" r:embed="R1bab65d9ffb743af"/>
           <a:stretch xmlns:a="http://schemas.openxmlformats.org/drawingml/2006/main"/>
         </p:blipFill>
         <p:spPr>
@@ -9617,7 +10213,7 @@
     </p:spTree>
     <p:extLst>
       <p:ext uri="{BB962C8B-B14F-4D97-AF65-F5344CB8AC3E}">
-        <p14:creationId xmlns:p14="http://schemas.microsoft.com/office/powerpoint/2010/main" val="811780400"/>
+        <p14:creationId xmlns:p14="http://schemas.microsoft.com/office/powerpoint/2010/main" val="1374422175"/>
       </p:ext>
     </p:extLst>
   </p:cSld>
@@ -9648,7 +10244,7 @@
           <p:cNvPr id="19" name="">
             <a:extLst xmlns:a="http://schemas.openxmlformats.org/drawingml/2006/main">
               <a:ext uri="{FF2B5EF4-FFF2-40B4-BE49-F238E27FC236}">
-                <a16:creationId xmlns:a16="http://schemas.microsoft.com/office/drawing/2014/main" id="{0A607FB6-DFFC-4498-9E27-8E38666161B5}"/>
+                <a16:creationId xmlns:a16="http://schemas.microsoft.com/office/drawing/2014/main" id="{945E1B38-E8A5-40C3-BC26-98FD634551EB}"/>
               </a:ext>
             </a:extLst>
           </p:cNvPr>
@@ -9698,7 +10294,7 @@
           <p:cNvPr id="2" name="">
             <a:extLst xmlns:a="http://schemas.openxmlformats.org/drawingml/2006/main">
               <a:ext uri="{FF2B5EF4-FFF2-40B4-BE49-F238E27FC236}">
-                <a16:creationId xmlns:a16="http://schemas.microsoft.com/office/drawing/2014/main" id="{9F6EB4C2-FD69-4DCC-9273-6915F346EFDB}"/>
+                <a16:creationId xmlns:a16="http://schemas.microsoft.com/office/drawing/2014/main" id="{38B2750C-A6AB-4EF0-892E-52FDF8444954}"/>
               </a:ext>
             </a:extLst>
           </p:cNvPr>
@@ -9748,7 +10344,7 @@
           <p:cNvPr id="3" name="">
             <a:extLst xmlns:a="http://schemas.openxmlformats.org/drawingml/2006/main">
               <a:ext uri="{FF2B5EF4-FFF2-40B4-BE49-F238E27FC236}">
-                <a16:creationId xmlns:a16="http://schemas.microsoft.com/office/drawing/2014/main" id="{0F10E0CF-95C8-4638-AB3A-48AAE585747E}"/>
+                <a16:creationId xmlns:a16="http://schemas.microsoft.com/office/drawing/2014/main" id="{D439C9CE-92AE-4759-9559-2244E4282418}"/>
               </a:ext>
             </a:extLst>
           </p:cNvPr>
@@ -9781,7 +10377,7 @@
           <p:cNvPr id="4" name="">
             <a:extLst xmlns:a="http://schemas.openxmlformats.org/drawingml/2006/main">
               <a:ext uri="{FF2B5EF4-FFF2-40B4-BE49-F238E27FC236}">
-                <a16:creationId xmlns:a16="http://schemas.microsoft.com/office/drawing/2014/main" id="{1AA75B44-8B39-43AF-9A51-9D64D41EE2AE}"/>
+                <a16:creationId xmlns:a16="http://schemas.microsoft.com/office/drawing/2014/main" id="{5090569D-1210-4185-80A6-EC31238D9987}"/>
               </a:ext>
             </a:extLst>
           </p:cNvPr>
@@ -9831,7 +10427,7 @@
           <p:cNvPr id="5" name="">
             <a:extLst xmlns:a="http://schemas.openxmlformats.org/drawingml/2006/main">
               <a:ext uri="{FF2B5EF4-FFF2-40B4-BE49-F238E27FC236}">
-                <a16:creationId xmlns:a16="http://schemas.microsoft.com/office/drawing/2014/main" id="{2B72C927-6FB8-49B5-97C2-C7431B1CFC2B}"/>
+                <a16:creationId xmlns:a16="http://schemas.microsoft.com/office/drawing/2014/main" id="{CE8940FD-E491-432C-823A-1878DA65A515}"/>
               </a:ext>
             </a:extLst>
           </p:cNvPr>
@@ -9885,7 +10481,7 @@
           <p:nvPr/>
         </p:nvPicPr>
         <p:blipFill>
-          <a:blip xmlns:r="http://schemas.openxmlformats.org/officeDocument/2006/relationships" xmlns:a="http://schemas.openxmlformats.org/drawingml/2006/main" r:embed="R8cac2415573e423f"/>
+          <a:blip xmlns:r="http://schemas.openxmlformats.org/officeDocument/2006/relationships" xmlns:a="http://schemas.openxmlformats.org/drawingml/2006/main" r:embed="R140d16d5cc584e3f"/>
           <a:stretch xmlns:a="http://schemas.openxmlformats.org/drawingml/2006/main"/>
         </p:blipFill>
         <p:spPr>
@@ -9903,7 +10499,7 @@
           <p:cNvPr id="7" name="">
             <a:extLst xmlns:a="http://schemas.openxmlformats.org/drawingml/2006/main">
               <a:ext uri="{FF2B5EF4-FFF2-40B4-BE49-F238E27FC236}">
-                <a16:creationId xmlns:a16="http://schemas.microsoft.com/office/drawing/2014/main" id="{11F30594-EF9A-44DB-AEA5-78608EF6A7D5}"/>
+                <a16:creationId xmlns:a16="http://schemas.microsoft.com/office/drawing/2014/main" id="{CB5BFA88-C943-48D4-9FB9-C104548BA3B7}"/>
               </a:ext>
             </a:extLst>
           </p:cNvPr>
@@ -9936,7 +10532,7 @@
           <p:cNvPr id="8" name="">
             <a:extLst xmlns:a="http://schemas.openxmlformats.org/drawingml/2006/main">
               <a:ext uri="{FF2B5EF4-FFF2-40B4-BE49-F238E27FC236}">
-                <a16:creationId xmlns:a16="http://schemas.microsoft.com/office/drawing/2014/main" id="{2A420B38-6D33-4D01-905E-536175A9394C}"/>
+                <a16:creationId xmlns:a16="http://schemas.microsoft.com/office/drawing/2014/main" id="{6EE3E5DA-7F2C-48D2-9DBE-36EBE88DEFAF}"/>
               </a:ext>
             </a:extLst>
           </p:cNvPr>
@@ -9986,7 +10582,7 @@
           <p:cNvPr id="9" name="">
             <a:extLst xmlns:a="http://schemas.openxmlformats.org/drawingml/2006/main">
               <a:ext uri="{FF2B5EF4-FFF2-40B4-BE49-F238E27FC236}">
-                <a16:creationId xmlns:a16="http://schemas.microsoft.com/office/drawing/2014/main" id="{BB264477-3627-412F-AD3A-4AF6E4636C18}"/>
+                <a16:creationId xmlns:a16="http://schemas.microsoft.com/office/drawing/2014/main" id="{7759514C-13E9-48D7-B390-A2E7D8FE53AC}"/>
               </a:ext>
             </a:extLst>
           </p:cNvPr>
@@ -10036,7 +10632,7 @@
           <p:cNvPr id="10" name="">
             <a:extLst xmlns:a="http://schemas.openxmlformats.org/drawingml/2006/main">
               <a:ext uri="{FF2B5EF4-FFF2-40B4-BE49-F238E27FC236}">
-                <a16:creationId xmlns:a16="http://schemas.microsoft.com/office/drawing/2014/main" id="{8B2433D1-B44E-4964-8FB7-AE15CD53FCEE}"/>
+                <a16:creationId xmlns:a16="http://schemas.microsoft.com/office/drawing/2014/main" id="{3EA13F8F-1F2B-402F-B377-E7C0AA7E8EDD}"/>
               </a:ext>
             </a:extLst>
           </p:cNvPr>
@@ -10086,7 +10682,7 @@
           <p:cNvPr id="11" name="">
             <a:extLst xmlns:a="http://schemas.openxmlformats.org/drawingml/2006/main">
               <a:ext uri="{FF2B5EF4-FFF2-40B4-BE49-F238E27FC236}">
-                <a16:creationId xmlns:a16="http://schemas.microsoft.com/office/drawing/2014/main" id="{5375650A-63E9-4528-B957-72BE9305241B}"/>
+                <a16:creationId xmlns:a16="http://schemas.microsoft.com/office/drawing/2014/main" id="{A21E9B1E-26D1-45D2-86AB-FCA18CCE5F49}"/>
               </a:ext>
             </a:extLst>
           </p:cNvPr>
@@ -10136,7 +10732,7 @@
           <p:cNvPr id="12" name="">
             <a:extLst xmlns:a="http://schemas.openxmlformats.org/drawingml/2006/main">
               <a:ext uri="{FF2B5EF4-FFF2-40B4-BE49-F238E27FC236}">
-                <a16:creationId xmlns:a16="http://schemas.microsoft.com/office/drawing/2014/main" id="{8CA3FD18-B5B1-475D-AA07-94224C04890D}"/>
+                <a16:creationId xmlns:a16="http://schemas.microsoft.com/office/drawing/2014/main" id="{14F73ED6-6842-4F8E-A9DA-60C17E9CFFCA}"/>
               </a:ext>
             </a:extLst>
           </p:cNvPr>
@@ -10186,7 +10782,7 @@
           <p:cNvPr id="13" name="">
             <a:extLst xmlns:a="http://schemas.openxmlformats.org/drawingml/2006/main">
               <a:ext uri="{FF2B5EF4-FFF2-40B4-BE49-F238E27FC236}">
-                <a16:creationId xmlns:a16="http://schemas.microsoft.com/office/drawing/2014/main" id="{3D77168B-1265-4A26-8BA0-BB36053FDA2B}"/>
+                <a16:creationId xmlns:a16="http://schemas.microsoft.com/office/drawing/2014/main" id="{5C862BF4-B8C4-4FA9-9352-3BADB4F18202}"/>
               </a:ext>
             </a:extLst>
           </p:cNvPr>
@@ -10219,7 +10815,7 @@
           <p:cNvPr id="14" name="">
             <a:extLst xmlns:a="http://schemas.openxmlformats.org/drawingml/2006/main">
               <a:ext uri="{FF2B5EF4-FFF2-40B4-BE49-F238E27FC236}">
-                <a16:creationId xmlns:a16="http://schemas.microsoft.com/office/drawing/2014/main" id="{A39FAF74-D4A5-480A-B27D-F3BD2743A2A8}"/>
+                <a16:creationId xmlns:a16="http://schemas.microsoft.com/office/drawing/2014/main" id="{26EEE60E-6386-4626-BE04-BA14DA09152A}"/>
               </a:ext>
             </a:extLst>
           </p:cNvPr>
@@ -10269,7 +10865,7 @@
           <p:cNvPr id="15" name="">
             <a:extLst xmlns:a="http://schemas.openxmlformats.org/drawingml/2006/main">
               <a:ext uri="{FF2B5EF4-FFF2-40B4-BE49-F238E27FC236}">
-                <a16:creationId xmlns:a16="http://schemas.microsoft.com/office/drawing/2014/main" id="{DC3FB572-1274-4E65-A473-774066F8FDF1}"/>
+                <a16:creationId xmlns:a16="http://schemas.microsoft.com/office/drawing/2014/main" id="{A30638E8-6C12-4A34-B420-4FB95BE02CDC}"/>
               </a:ext>
             </a:extLst>
           </p:cNvPr>
@@ -10319,7 +10915,7 @@
           <p:cNvPr id="16" name="">
             <a:extLst xmlns:a="http://schemas.openxmlformats.org/drawingml/2006/main">
               <a:ext uri="{FF2B5EF4-FFF2-40B4-BE49-F238E27FC236}">
-                <a16:creationId xmlns:a16="http://schemas.microsoft.com/office/drawing/2014/main" id="{B0527114-0B9B-4E0F-B254-E58F55C8868F}"/>
+                <a16:creationId xmlns:a16="http://schemas.microsoft.com/office/drawing/2014/main" id="{C5160D1D-6713-4ADC-8CA9-EC53AF87DBAD}"/>
               </a:ext>
             </a:extLst>
           </p:cNvPr>
@@ -10369,7 +10965,7 @@
           <p:cNvPr id="17" name="">
             <a:extLst xmlns:a="http://schemas.openxmlformats.org/drawingml/2006/main">
               <a:ext uri="{FF2B5EF4-FFF2-40B4-BE49-F238E27FC236}">
-                <a16:creationId xmlns:a16="http://schemas.microsoft.com/office/drawing/2014/main" id="{9877CB47-9DD8-4555-A8B7-E7C6C6E139E6}"/>
+                <a16:creationId xmlns:a16="http://schemas.microsoft.com/office/drawing/2014/main" id="{A93E4A94-523B-41A6-84F0-D87F6A616938}"/>
               </a:ext>
             </a:extLst>
           </p:cNvPr>
@@ -10419,7 +11015,7 @@
           <p:cNvPr id="18" name="">
             <a:extLst xmlns:a="http://schemas.openxmlformats.org/drawingml/2006/main">
               <a:ext uri="{FF2B5EF4-FFF2-40B4-BE49-F238E27FC236}">
-                <a16:creationId xmlns:a16="http://schemas.microsoft.com/office/drawing/2014/main" id="{BBB2994D-98F1-4C5D-8AA1-C3B5E3DF4B50}"/>
+                <a16:creationId xmlns:a16="http://schemas.microsoft.com/office/drawing/2014/main" id="{B5B99A9D-069D-46FA-AFCF-C62A5E9767C3}"/>
               </a:ext>
             </a:extLst>
           </p:cNvPr>
@@ -10467,7 +11063,7 @@
     </p:spTree>
     <p:extLst>
       <p:ext uri="{BB962C8B-B14F-4D97-AF65-F5344CB8AC3E}">
-        <p14:creationId xmlns:p14="http://schemas.microsoft.com/office/powerpoint/2010/main" val="1711225210"/>
+        <p14:creationId xmlns:p14="http://schemas.microsoft.com/office/powerpoint/2010/main" val="1590339344"/>
       </p:ext>
     </p:extLst>
   </p:cSld>
@@ -10498,7 +11094,7 @@
           <p:cNvPr id="18" name="">
             <a:extLst xmlns:a="http://schemas.openxmlformats.org/drawingml/2006/main">
               <a:ext uri="{FF2B5EF4-FFF2-40B4-BE49-F238E27FC236}">
-                <a16:creationId xmlns:a16="http://schemas.microsoft.com/office/drawing/2014/main" id="{39891488-6139-4DF8-8EDD-43A0D6F005D9}"/>
+                <a16:creationId xmlns:a16="http://schemas.microsoft.com/office/drawing/2014/main" id="{031523E1-7990-4974-B4D1-F9DC9E94A616}"/>
               </a:ext>
             </a:extLst>
           </p:cNvPr>
@@ -10548,7 +11144,7 @@
           <p:cNvPr id="2" name="">
             <a:extLst xmlns:a="http://schemas.openxmlformats.org/drawingml/2006/main">
               <a:ext uri="{FF2B5EF4-FFF2-40B4-BE49-F238E27FC236}">
-                <a16:creationId xmlns:a16="http://schemas.microsoft.com/office/drawing/2014/main" id="{C80FE05C-E261-438A-9137-B73A632EB58D}"/>
+                <a16:creationId xmlns:a16="http://schemas.microsoft.com/office/drawing/2014/main" id="{88F6CE58-6F93-4F88-8766-8F20303238CC}"/>
               </a:ext>
             </a:extLst>
           </p:cNvPr>
@@ -10598,7 +11194,7 @@
           <p:cNvPr id="3" name="">
             <a:extLst xmlns:a="http://schemas.openxmlformats.org/drawingml/2006/main">
               <a:ext uri="{FF2B5EF4-FFF2-40B4-BE49-F238E27FC236}">
-                <a16:creationId xmlns:a16="http://schemas.microsoft.com/office/drawing/2014/main" id="{A3A1CD63-3F49-4B0E-9CDF-1135E4CB9F3B}"/>
+                <a16:creationId xmlns:a16="http://schemas.microsoft.com/office/drawing/2014/main" id="{22DB8D52-30F7-4365-9020-A96AC71F6A8E}"/>
               </a:ext>
             </a:extLst>
           </p:cNvPr>
@@ -10631,7 +11227,7 @@
           <p:cNvPr id="4" name="">
             <a:extLst xmlns:a="http://schemas.openxmlformats.org/drawingml/2006/main">
               <a:ext uri="{FF2B5EF4-FFF2-40B4-BE49-F238E27FC236}">
-                <a16:creationId xmlns:a16="http://schemas.microsoft.com/office/drawing/2014/main" id="{39FFD6A0-4F73-4229-BDB9-BD9EA69D971F}"/>
+                <a16:creationId xmlns:a16="http://schemas.microsoft.com/office/drawing/2014/main" id="{41EAFDD7-3B33-4F82-9EB5-B43400A013C6}"/>
               </a:ext>
             </a:extLst>
           </p:cNvPr>
@@ -10681,7 +11277,7 @@
           <p:cNvPr id="5" name="">
             <a:extLst xmlns:a="http://schemas.openxmlformats.org/drawingml/2006/main">
               <a:ext uri="{FF2B5EF4-FFF2-40B4-BE49-F238E27FC236}">
-                <a16:creationId xmlns:a16="http://schemas.microsoft.com/office/drawing/2014/main" id="{20652741-613D-4954-B29E-49F49B5D87D1}"/>
+                <a16:creationId xmlns:a16="http://schemas.microsoft.com/office/drawing/2014/main" id="{909D80F6-845C-41C2-B883-A14280DAAAED}"/>
               </a:ext>
             </a:extLst>
           </p:cNvPr>
@@ -10735,7 +11331,7 @@
           <p:nvPr/>
         </p:nvPicPr>
         <p:blipFill>
-          <a:blip xmlns:r="http://schemas.openxmlformats.org/officeDocument/2006/relationships" xmlns:a="http://schemas.openxmlformats.org/drawingml/2006/main" r:embed="R7952820fc1a64146"/>
+          <a:blip xmlns:r="http://schemas.openxmlformats.org/officeDocument/2006/relationships" xmlns:a="http://schemas.openxmlformats.org/drawingml/2006/main" r:embed="R69236746c4604c26"/>
           <a:stretch xmlns:a="http://schemas.openxmlformats.org/drawingml/2006/main"/>
         </p:blipFill>
         <p:spPr>
@@ -10753,7 +11349,7 @@
           <p:cNvPr id="7" name="">
             <a:extLst xmlns:a="http://schemas.openxmlformats.org/drawingml/2006/main">
               <a:ext uri="{FF2B5EF4-FFF2-40B4-BE49-F238E27FC236}">
-                <a16:creationId xmlns:a16="http://schemas.microsoft.com/office/drawing/2014/main" id="{C5CBEEC0-32D0-4832-B4A5-542B5293F47C}"/>
+                <a16:creationId xmlns:a16="http://schemas.microsoft.com/office/drawing/2014/main" id="{5AF9FB51-132A-4B79-BDC9-ACC1944B7C64}"/>
               </a:ext>
             </a:extLst>
           </p:cNvPr>
@@ -10786,7 +11382,7 @@
           <p:cNvPr id="8" name="">
             <a:extLst xmlns:a="http://schemas.openxmlformats.org/drawingml/2006/main">
               <a:ext uri="{FF2B5EF4-FFF2-40B4-BE49-F238E27FC236}">
-                <a16:creationId xmlns:a16="http://schemas.microsoft.com/office/drawing/2014/main" id="{B9C195AB-AC99-41D7-8607-C6E187339AD9}"/>
+                <a16:creationId xmlns:a16="http://schemas.microsoft.com/office/drawing/2014/main" id="{C3A27EAD-3445-406A-B456-79FA68069EFF}"/>
               </a:ext>
             </a:extLst>
           </p:cNvPr>
@@ -10836,7 +11432,7 @@
           <p:cNvPr id="9" name="">
             <a:extLst xmlns:a="http://schemas.openxmlformats.org/drawingml/2006/main">
               <a:ext uri="{FF2B5EF4-FFF2-40B4-BE49-F238E27FC236}">
-                <a16:creationId xmlns:a16="http://schemas.microsoft.com/office/drawing/2014/main" id="{2D13E6E9-8081-4925-B707-ECFCE49EBE1B}"/>
+                <a16:creationId xmlns:a16="http://schemas.microsoft.com/office/drawing/2014/main" id="{FE312AF2-BD4A-49D3-A20E-28D5E3C70FCA}"/>
               </a:ext>
             </a:extLst>
           </p:cNvPr>
@@ -10886,7 +11482,7 @@
           <p:cNvPr id="10" name="">
             <a:extLst xmlns:a="http://schemas.openxmlformats.org/drawingml/2006/main">
               <a:ext uri="{FF2B5EF4-FFF2-40B4-BE49-F238E27FC236}">
-                <a16:creationId xmlns:a16="http://schemas.microsoft.com/office/drawing/2014/main" id="{C2BDCF76-3712-4509-B162-972572EF9EFE}"/>
+                <a16:creationId xmlns:a16="http://schemas.microsoft.com/office/drawing/2014/main" id="{15552BF4-4CAA-482B-AB46-0CEF3DECB937}"/>
               </a:ext>
             </a:extLst>
           </p:cNvPr>
@@ -10936,7 +11532,7 @@
           <p:cNvPr id="11" name="">
             <a:extLst xmlns:a="http://schemas.openxmlformats.org/drawingml/2006/main">
               <a:ext uri="{FF2B5EF4-FFF2-40B4-BE49-F238E27FC236}">
-                <a16:creationId xmlns:a16="http://schemas.microsoft.com/office/drawing/2014/main" id="{8B3532DA-7A70-4359-ABAD-C9305C26A3BE}"/>
+                <a16:creationId xmlns:a16="http://schemas.microsoft.com/office/drawing/2014/main" id="{B4082048-FEE3-4F3B-96EC-6542CF3D4626}"/>
               </a:ext>
             </a:extLst>
           </p:cNvPr>
@@ -10986,7 +11582,7 @@
           <p:cNvPr id="12" name="">
             <a:extLst xmlns:a="http://schemas.openxmlformats.org/drawingml/2006/main">
               <a:ext uri="{FF2B5EF4-FFF2-40B4-BE49-F238E27FC236}">
-                <a16:creationId xmlns:a16="http://schemas.microsoft.com/office/drawing/2014/main" id="{80DFBDCD-9C40-410C-8249-656EAD215241}"/>
+                <a16:creationId xmlns:a16="http://schemas.microsoft.com/office/drawing/2014/main" id="{E88E07B6-3DD0-41D0-B9AA-DFBEF4BC6245}"/>
               </a:ext>
             </a:extLst>
           </p:cNvPr>
@@ -11036,7 +11632,7 @@
           <p:cNvPr id="13" name="">
             <a:extLst xmlns:a="http://schemas.openxmlformats.org/drawingml/2006/main">
               <a:ext uri="{FF2B5EF4-FFF2-40B4-BE49-F238E27FC236}">
-                <a16:creationId xmlns:a16="http://schemas.microsoft.com/office/drawing/2014/main" id="{D560CDB1-F001-4AB2-915C-FFC0AFA9E451}"/>
+                <a16:creationId xmlns:a16="http://schemas.microsoft.com/office/drawing/2014/main" id="{1E65BC8C-2404-4808-B621-226A1ECB79C3}"/>
               </a:ext>
             </a:extLst>
           </p:cNvPr>
@@ -11086,7 +11682,7 @@
           <p:cNvPr id="14" name="">
             <a:extLst xmlns:a="http://schemas.openxmlformats.org/drawingml/2006/main">
               <a:ext uri="{FF2B5EF4-FFF2-40B4-BE49-F238E27FC236}">
-                <a16:creationId xmlns:a16="http://schemas.microsoft.com/office/drawing/2014/main" id="{17CE9377-C5AB-49AF-93B1-F0BBB9C33879}"/>
+                <a16:creationId xmlns:a16="http://schemas.microsoft.com/office/drawing/2014/main" id="{ECB136C0-9508-4123-8C97-824C9F53383C}"/>
               </a:ext>
             </a:extLst>
           </p:cNvPr>
@@ -11136,7 +11732,7 @@
           <p:cNvPr id="15" name="">
             <a:extLst xmlns:a="http://schemas.openxmlformats.org/drawingml/2006/main">
               <a:ext uri="{FF2B5EF4-FFF2-40B4-BE49-F238E27FC236}">
-                <a16:creationId xmlns:a16="http://schemas.microsoft.com/office/drawing/2014/main" id="{1D13D6D6-BBC3-4777-A7B0-440767603B4D}"/>
+                <a16:creationId xmlns:a16="http://schemas.microsoft.com/office/drawing/2014/main" id="{1A58DC9C-F1E1-453B-9624-1D0A8368D7EB}"/>
               </a:ext>
             </a:extLst>
           </p:cNvPr>
@@ -11186,7 +11782,7 @@
           <p:cNvPr id="16" name="">
             <a:extLst xmlns:a="http://schemas.openxmlformats.org/drawingml/2006/main">
               <a:ext uri="{FF2B5EF4-FFF2-40B4-BE49-F238E27FC236}">
-                <a16:creationId xmlns:a16="http://schemas.microsoft.com/office/drawing/2014/main" id="{0D2CDDFE-9206-4296-BD53-C3A470039DA1}"/>
+                <a16:creationId xmlns:a16="http://schemas.microsoft.com/office/drawing/2014/main" id="{BE6ADE9D-4207-468C-AA94-A2D677F4960E}"/>
               </a:ext>
             </a:extLst>
           </p:cNvPr>
@@ -11236,7 +11832,7 @@
           <p:cNvPr id="17" name="">
             <a:extLst xmlns:a="http://schemas.openxmlformats.org/drawingml/2006/main">
               <a:ext uri="{FF2B5EF4-FFF2-40B4-BE49-F238E27FC236}">
-                <a16:creationId xmlns:a16="http://schemas.microsoft.com/office/drawing/2014/main" id="{61C51CCF-6147-4639-A18C-06AADAE3F6CA}"/>
+                <a16:creationId xmlns:a16="http://schemas.microsoft.com/office/drawing/2014/main" id="{C1E5BC7F-01C1-46B4-8D78-082FC8E79E69}"/>
               </a:ext>
             </a:extLst>
           </p:cNvPr>
@@ -11284,7 +11880,7 @@
     </p:spTree>
     <p:extLst>
       <p:ext uri="{BB962C8B-B14F-4D97-AF65-F5344CB8AC3E}">
-        <p14:creationId xmlns:p14="http://schemas.microsoft.com/office/powerpoint/2010/main" val="183952062"/>
+        <p14:creationId xmlns:p14="http://schemas.microsoft.com/office/powerpoint/2010/main" val="1101123996"/>
       </p:ext>
     </p:extLst>
   </p:cSld>
@@ -11315,7 +11911,7 @@
           <p:cNvPr id="23" name="">
             <a:extLst xmlns:a="http://schemas.openxmlformats.org/drawingml/2006/main">
               <a:ext uri="{FF2B5EF4-FFF2-40B4-BE49-F238E27FC236}">
-                <a16:creationId xmlns:a16="http://schemas.microsoft.com/office/drawing/2014/main" id="{3A7CE4D2-4448-4AA5-9A4A-801F0BDC54A5}"/>
+                <a16:creationId xmlns:a16="http://schemas.microsoft.com/office/drawing/2014/main" id="{9DC7348E-2D30-4677-B85D-4147E8D746A0}"/>
               </a:ext>
             </a:extLst>
           </p:cNvPr>
@@ -11365,7 +11961,7 @@
           <p:cNvPr id="2" name="">
             <a:extLst xmlns:a="http://schemas.openxmlformats.org/drawingml/2006/main">
               <a:ext uri="{FF2B5EF4-FFF2-40B4-BE49-F238E27FC236}">
-                <a16:creationId xmlns:a16="http://schemas.microsoft.com/office/drawing/2014/main" id="{3788832B-EA9C-44A6-BCC6-B7720300A051}"/>
+                <a16:creationId xmlns:a16="http://schemas.microsoft.com/office/drawing/2014/main" id="{2B9751F2-FA73-424B-88F9-623B5290B602}"/>
               </a:ext>
             </a:extLst>
           </p:cNvPr>
@@ -11415,7 +12011,7 @@
           <p:cNvPr id="3" name="">
             <a:extLst xmlns:a="http://schemas.openxmlformats.org/drawingml/2006/main">
               <a:ext uri="{FF2B5EF4-FFF2-40B4-BE49-F238E27FC236}">
-                <a16:creationId xmlns:a16="http://schemas.microsoft.com/office/drawing/2014/main" id="{CCFC8538-5A61-421E-BB47-E96B6055D6AF}"/>
+                <a16:creationId xmlns:a16="http://schemas.microsoft.com/office/drawing/2014/main" id="{C19EFF45-F279-46A6-BC0B-1752E023940A}"/>
               </a:ext>
             </a:extLst>
           </p:cNvPr>
@@ -11448,7 +12044,7 @@
           <p:cNvPr id="4" name="">
             <a:extLst xmlns:a="http://schemas.openxmlformats.org/drawingml/2006/main">
               <a:ext uri="{FF2B5EF4-FFF2-40B4-BE49-F238E27FC236}">
-                <a16:creationId xmlns:a16="http://schemas.microsoft.com/office/drawing/2014/main" id="{0785F1A7-9898-403C-B114-EDC18FBAFB0F}"/>
+                <a16:creationId xmlns:a16="http://schemas.microsoft.com/office/drawing/2014/main" id="{1CBFA95B-1DA6-4FE6-9073-70E247020F9F}"/>
               </a:ext>
             </a:extLst>
           </p:cNvPr>
@@ -11498,7 +12094,7 @@
           <p:cNvPr id="5" name="">
             <a:extLst xmlns:a="http://schemas.openxmlformats.org/drawingml/2006/main">
               <a:ext uri="{FF2B5EF4-FFF2-40B4-BE49-F238E27FC236}">
-                <a16:creationId xmlns:a16="http://schemas.microsoft.com/office/drawing/2014/main" id="{5927C8DB-5187-42F3-BF8E-D958E7784EEE}"/>
+                <a16:creationId xmlns:a16="http://schemas.microsoft.com/office/drawing/2014/main" id="{F6D7A641-170C-46B1-BDDE-02267761B7A5}"/>
               </a:ext>
             </a:extLst>
           </p:cNvPr>
@@ -11548,7 +12144,7 @@
           <p:cNvPr id="6" name="">
             <a:extLst xmlns:a="http://schemas.openxmlformats.org/drawingml/2006/main">
               <a:ext uri="{FF2B5EF4-FFF2-40B4-BE49-F238E27FC236}">
-                <a16:creationId xmlns:a16="http://schemas.microsoft.com/office/drawing/2014/main" id="{BEF4E349-DA76-4C94-8769-BA9F3FE338E8}"/>
+                <a16:creationId xmlns:a16="http://schemas.microsoft.com/office/drawing/2014/main" id="{733E3943-1AED-4C39-8D73-C1427F6A9645}"/>
               </a:ext>
             </a:extLst>
           </p:cNvPr>
@@ -11581,7 +12177,7 @@
           <p:cNvPr id="7" name="">
             <a:extLst xmlns:a="http://schemas.openxmlformats.org/drawingml/2006/main">
               <a:ext uri="{FF2B5EF4-FFF2-40B4-BE49-F238E27FC236}">
-                <a16:creationId xmlns:a16="http://schemas.microsoft.com/office/drawing/2014/main" id="{060DABE3-89E1-414A-8085-B69218286CBE}"/>
+                <a16:creationId xmlns:a16="http://schemas.microsoft.com/office/drawing/2014/main" id="{06977885-0C30-48A3-9100-1141392EFE34}"/>
               </a:ext>
             </a:extLst>
           </p:cNvPr>
@@ -11631,7 +12227,7 @@
           <p:cNvPr id="8" name="">
             <a:extLst xmlns:a="http://schemas.openxmlformats.org/drawingml/2006/main">
               <a:ext uri="{FF2B5EF4-FFF2-40B4-BE49-F238E27FC236}">
-                <a16:creationId xmlns:a16="http://schemas.microsoft.com/office/drawing/2014/main" id="{5DF4660B-2027-4196-B47F-133E1CCC6C64}"/>
+                <a16:creationId xmlns:a16="http://schemas.microsoft.com/office/drawing/2014/main" id="{17CF1790-EE66-4B86-BBBB-CF01A0490E67}"/>
               </a:ext>
             </a:extLst>
           </p:cNvPr>
@@ -11664,7 +12260,7 @@
           <p:cNvPr id="9" name="">
             <a:extLst xmlns:a="http://schemas.openxmlformats.org/drawingml/2006/main">
               <a:ext uri="{FF2B5EF4-FFF2-40B4-BE49-F238E27FC236}">
-                <a16:creationId xmlns:a16="http://schemas.microsoft.com/office/drawing/2014/main" id="{DC697707-15C4-4B05-B738-3C051D8FA4D5}"/>
+                <a16:creationId xmlns:a16="http://schemas.microsoft.com/office/drawing/2014/main" id="{F964F1EB-71B6-4FA4-8782-6B15AA524800}"/>
               </a:ext>
             </a:extLst>
           </p:cNvPr>
@@ -11714,7 +12310,7 @@
           <p:cNvPr id="10" name="">
             <a:extLst xmlns:a="http://schemas.openxmlformats.org/drawingml/2006/main">
               <a:ext uri="{FF2B5EF4-FFF2-40B4-BE49-F238E27FC236}">
-                <a16:creationId xmlns:a16="http://schemas.microsoft.com/office/drawing/2014/main" id="{00AD32A0-33E5-419E-A40D-22FAFE5537D8}"/>
+                <a16:creationId xmlns:a16="http://schemas.microsoft.com/office/drawing/2014/main" id="{0BA005F8-F35D-4D53-A640-0AF0E92E8C64}"/>
               </a:ext>
             </a:extLst>
           </p:cNvPr>
@@ -11747,7 +12343,7 @@
           <p:cNvPr id="11" name="">
             <a:extLst xmlns:a="http://schemas.openxmlformats.org/drawingml/2006/main">
               <a:ext uri="{FF2B5EF4-FFF2-40B4-BE49-F238E27FC236}">
-                <a16:creationId xmlns:a16="http://schemas.microsoft.com/office/drawing/2014/main" id="{CFDC68A7-040D-4A6B-98F3-CC50117A676C}"/>
+                <a16:creationId xmlns:a16="http://schemas.microsoft.com/office/drawing/2014/main" id="{0DFA0B6A-5BA3-49F7-ADA3-00DD2FE5501E}"/>
               </a:ext>
             </a:extLst>
           </p:cNvPr>
@@ -11797,7 +12393,7 @@
           <p:cNvPr id="12" name="">
             <a:extLst xmlns:a="http://schemas.openxmlformats.org/drawingml/2006/main">
               <a:ext uri="{FF2B5EF4-FFF2-40B4-BE49-F238E27FC236}">
-                <a16:creationId xmlns:a16="http://schemas.microsoft.com/office/drawing/2014/main" id="{95343B35-F9E2-435F-89B6-73AA0A4832C1}"/>
+                <a16:creationId xmlns:a16="http://schemas.microsoft.com/office/drawing/2014/main" id="{E19917A3-F213-4B5C-AB3F-BF420302CD59}"/>
               </a:ext>
             </a:extLst>
           </p:cNvPr>
@@ -11830,7 +12426,7 @@
           <p:cNvPr id="13" name="">
             <a:extLst xmlns:a="http://schemas.openxmlformats.org/drawingml/2006/main">
               <a:ext uri="{FF2B5EF4-FFF2-40B4-BE49-F238E27FC236}">
-                <a16:creationId xmlns:a16="http://schemas.microsoft.com/office/drawing/2014/main" id="{F6D890BC-B961-4386-BC51-CDFFFCFD425E}"/>
+                <a16:creationId xmlns:a16="http://schemas.microsoft.com/office/drawing/2014/main" id="{5C0BA90E-A68B-4562-8CBB-FBCCAD8E772D}"/>
               </a:ext>
             </a:extLst>
           </p:cNvPr>
@@ -11880,7 +12476,7 @@
           <p:cNvPr id="14" name="">
             <a:extLst xmlns:a="http://schemas.openxmlformats.org/drawingml/2006/main">
               <a:ext uri="{FF2B5EF4-FFF2-40B4-BE49-F238E27FC236}">
-                <a16:creationId xmlns:a16="http://schemas.microsoft.com/office/drawing/2014/main" id="{408FA0F1-FB28-4FFC-8853-D6AC37F986DF}"/>
+                <a16:creationId xmlns:a16="http://schemas.microsoft.com/office/drawing/2014/main" id="{7F4ACB2C-D07A-48CF-B13D-E5FE1E753AE6}"/>
               </a:ext>
             </a:extLst>
           </p:cNvPr>
@@ -11913,7 +12509,7 @@
           <p:cNvPr id="15" name="">
             <a:extLst xmlns:a="http://schemas.openxmlformats.org/drawingml/2006/main">
               <a:ext uri="{FF2B5EF4-FFF2-40B4-BE49-F238E27FC236}">
-                <a16:creationId xmlns:a16="http://schemas.microsoft.com/office/drawing/2014/main" id="{AD1F296D-0C29-4797-BE2B-5931DCAF50AA}"/>
+                <a16:creationId xmlns:a16="http://schemas.microsoft.com/office/drawing/2014/main" id="{6395BE87-6134-4670-A8C6-3B66B04DC36E}"/>
               </a:ext>
             </a:extLst>
           </p:cNvPr>
@@ -11963,7 +12559,7 @@
           <p:cNvPr id="16" name="">
             <a:extLst xmlns:a="http://schemas.openxmlformats.org/drawingml/2006/main">
               <a:ext uri="{FF2B5EF4-FFF2-40B4-BE49-F238E27FC236}">
-                <a16:creationId xmlns:a16="http://schemas.microsoft.com/office/drawing/2014/main" id="{C430839E-1304-4973-9CA9-B222F17D9DC7}"/>
+                <a16:creationId xmlns:a16="http://schemas.microsoft.com/office/drawing/2014/main" id="{8D74BA44-B681-4586-A9E9-CCF34C381716}"/>
               </a:ext>
             </a:extLst>
           </p:cNvPr>
@@ -11996,7 +12592,7 @@
           <p:cNvPr id="17" name="">
             <a:extLst xmlns:a="http://schemas.openxmlformats.org/drawingml/2006/main">
               <a:ext uri="{FF2B5EF4-FFF2-40B4-BE49-F238E27FC236}">
-                <a16:creationId xmlns:a16="http://schemas.microsoft.com/office/drawing/2014/main" id="{0D3C0724-851A-4A1E-9B29-2934E29927E6}"/>
+                <a16:creationId xmlns:a16="http://schemas.microsoft.com/office/drawing/2014/main" id="{14F56862-CE69-4130-B1E6-3FBDF65889BA}"/>
               </a:ext>
             </a:extLst>
           </p:cNvPr>
@@ -12046,7 +12642,7 @@
           <p:cNvPr id="18" name="">
             <a:extLst xmlns:a="http://schemas.openxmlformats.org/drawingml/2006/main">
               <a:ext uri="{FF2B5EF4-FFF2-40B4-BE49-F238E27FC236}">
-                <a16:creationId xmlns:a16="http://schemas.microsoft.com/office/drawing/2014/main" id="{4AABAD7F-259C-4AD1-9B9B-891219663977}"/>
+                <a16:creationId xmlns:a16="http://schemas.microsoft.com/office/drawing/2014/main" id="{0EF7A6D3-F5D7-45BC-9BFD-40271E1D91EA}"/>
               </a:ext>
             </a:extLst>
           </p:cNvPr>
@@ -12079,7 +12675,7 @@
           <p:cNvPr id="19" name="">
             <a:extLst xmlns:a="http://schemas.openxmlformats.org/drawingml/2006/main">
               <a:ext uri="{FF2B5EF4-FFF2-40B4-BE49-F238E27FC236}">
-                <a16:creationId xmlns:a16="http://schemas.microsoft.com/office/drawing/2014/main" id="{E69763C0-5A4B-476D-9A40-4E94F42A7842}"/>
+                <a16:creationId xmlns:a16="http://schemas.microsoft.com/office/drawing/2014/main" id="{B6A15E2F-2AAA-46F4-B0C9-2DFF1F5D0B10}"/>
               </a:ext>
             </a:extLst>
           </p:cNvPr>
@@ -12129,7 +12725,7 @@
           <p:cNvPr id="20" name="">
             <a:extLst xmlns:a="http://schemas.openxmlformats.org/drawingml/2006/main">
               <a:ext uri="{FF2B5EF4-FFF2-40B4-BE49-F238E27FC236}">
-                <a16:creationId xmlns:a16="http://schemas.microsoft.com/office/drawing/2014/main" id="{032D5379-E900-499B-BC2E-06D6C6FDEFF0}"/>
+                <a16:creationId xmlns:a16="http://schemas.microsoft.com/office/drawing/2014/main" id="{D9EE05D5-B3B7-4371-8968-EDC635E132A5}"/>
               </a:ext>
             </a:extLst>
           </p:cNvPr>
@@ -12162,7 +12758,7 @@
           <p:cNvPr id="21" name="">
             <a:extLst xmlns:a="http://schemas.openxmlformats.org/drawingml/2006/main">
               <a:ext uri="{FF2B5EF4-FFF2-40B4-BE49-F238E27FC236}">
-                <a16:creationId xmlns:a16="http://schemas.microsoft.com/office/drawing/2014/main" id="{17C4E5ED-4F63-4B65-8C8C-F237FCC574FA}"/>
+                <a16:creationId xmlns:a16="http://schemas.microsoft.com/office/drawing/2014/main" id="{1AFF7971-83DC-4644-AFFB-1DE792B31DC9}"/>
               </a:ext>
             </a:extLst>
           </p:cNvPr>
@@ -12212,7 +12808,7 @@
           <p:cNvPr id="22" name="">
             <a:extLst xmlns:a="http://schemas.openxmlformats.org/drawingml/2006/main">
               <a:ext uri="{FF2B5EF4-FFF2-40B4-BE49-F238E27FC236}">
-                <a16:creationId xmlns:a16="http://schemas.microsoft.com/office/drawing/2014/main" id="{8156DA13-D7D0-4B27-8E2C-4349A1FC99C0}"/>
+                <a16:creationId xmlns:a16="http://schemas.microsoft.com/office/drawing/2014/main" id="{1DBD1D82-E1BF-4A26-A0B9-98F12AC8925D}"/>
               </a:ext>
             </a:extLst>
           </p:cNvPr>
@@ -12260,7 +12856,7 @@
     </p:spTree>
     <p:extLst>
       <p:ext uri="{BB962C8B-B14F-4D97-AF65-F5344CB8AC3E}">
-        <p14:creationId xmlns:p14="http://schemas.microsoft.com/office/powerpoint/2010/main" val="686992095"/>
+        <p14:creationId xmlns:p14="http://schemas.microsoft.com/office/powerpoint/2010/main" val="1912799294"/>
       </p:ext>
     </p:extLst>
   </p:cSld>
@@ -12291,7 +12887,7 @@
           <p:cNvPr id="16" name="">
             <a:extLst xmlns:a="http://schemas.openxmlformats.org/drawingml/2006/main">
               <a:ext uri="{FF2B5EF4-FFF2-40B4-BE49-F238E27FC236}">
-                <a16:creationId xmlns:a16="http://schemas.microsoft.com/office/drawing/2014/main" id="{0940FB28-C892-4353-8CAE-797E2690FBD5}"/>
+                <a16:creationId xmlns:a16="http://schemas.microsoft.com/office/drawing/2014/main" id="{14799A1E-6B26-4ED2-AE90-0750FA9B54B8}"/>
               </a:ext>
             </a:extLst>
           </p:cNvPr>
@@ -12341,7 +12937,7 @@
           <p:cNvPr id="2" name="">
             <a:extLst xmlns:a="http://schemas.openxmlformats.org/drawingml/2006/main">
               <a:ext uri="{FF2B5EF4-FFF2-40B4-BE49-F238E27FC236}">
-                <a16:creationId xmlns:a16="http://schemas.microsoft.com/office/drawing/2014/main" id="{E02B2380-EF25-42B1-80E9-F6CFED1A3511}"/>
+                <a16:creationId xmlns:a16="http://schemas.microsoft.com/office/drawing/2014/main" id="{846954BF-6496-46A2-B251-784F90F01B68}"/>
               </a:ext>
             </a:extLst>
           </p:cNvPr>
@@ -12391,7 +12987,7 @@
           <p:cNvPr id="3" name="">
             <a:extLst xmlns:a="http://schemas.openxmlformats.org/drawingml/2006/main">
               <a:ext uri="{FF2B5EF4-FFF2-40B4-BE49-F238E27FC236}">
-                <a16:creationId xmlns:a16="http://schemas.microsoft.com/office/drawing/2014/main" id="{E2A5454C-5D39-400B-8E71-0411B1F9C1F9}"/>
+                <a16:creationId xmlns:a16="http://schemas.microsoft.com/office/drawing/2014/main" id="{66FF3C76-89A2-4562-B011-4CCFE655B4F0}"/>
               </a:ext>
             </a:extLst>
           </p:cNvPr>
@@ -12424,7 +13020,7 @@
           <p:cNvPr id="4" name="">
             <a:extLst xmlns:a="http://schemas.openxmlformats.org/drawingml/2006/main">
               <a:ext uri="{FF2B5EF4-FFF2-40B4-BE49-F238E27FC236}">
-                <a16:creationId xmlns:a16="http://schemas.microsoft.com/office/drawing/2014/main" id="{00AE2B39-DC86-45CC-A2AB-8D86495ED1F6}"/>
+                <a16:creationId xmlns:a16="http://schemas.microsoft.com/office/drawing/2014/main" id="{5A1D2A84-F03D-41FB-B280-53B054A517B9}"/>
               </a:ext>
             </a:extLst>
           </p:cNvPr>
@@ -12474,7 +13070,7 @@
           <p:cNvPr id="5" name="">
             <a:extLst xmlns:a="http://schemas.openxmlformats.org/drawingml/2006/main">
               <a:ext uri="{FF2B5EF4-FFF2-40B4-BE49-F238E27FC236}">
-                <a16:creationId xmlns:a16="http://schemas.microsoft.com/office/drawing/2014/main" id="{1B0B3C09-BE4D-4D8C-BF91-9B5BDBE8A3F3}"/>
+                <a16:creationId xmlns:a16="http://schemas.microsoft.com/office/drawing/2014/main" id="{1543E0B0-16E1-4391-8ACC-E2F34B9C8F1C}"/>
               </a:ext>
             </a:extLst>
           </p:cNvPr>
@@ -12528,7 +13124,7 @@
           <p:nvPr/>
         </p:nvPicPr>
         <p:blipFill>
-          <a:blip xmlns:r="http://schemas.openxmlformats.org/officeDocument/2006/relationships" xmlns:a="http://schemas.openxmlformats.org/drawingml/2006/main" r:embed="R1265e41abe3d4b5c"/>
+          <a:blip xmlns:r="http://schemas.openxmlformats.org/officeDocument/2006/relationships" xmlns:a="http://schemas.openxmlformats.org/drawingml/2006/main" r:embed="Raf5c7afe44084615"/>
           <a:stretch xmlns:a="http://schemas.openxmlformats.org/drawingml/2006/main"/>
         </p:blipFill>
         <p:spPr>
@@ -12546,7 +13142,7 @@
           <p:cNvPr id="7" name="">
             <a:extLst xmlns:a="http://schemas.openxmlformats.org/drawingml/2006/main">
               <a:ext uri="{FF2B5EF4-FFF2-40B4-BE49-F238E27FC236}">
-                <a16:creationId xmlns:a16="http://schemas.microsoft.com/office/drawing/2014/main" id="{E90F3AC2-4CE0-4A68-84A1-9C3FC426A2B9}"/>
+                <a16:creationId xmlns:a16="http://schemas.microsoft.com/office/drawing/2014/main" id="{A8425F4C-7FD6-4D4C-9C9B-DA1F7EDA6252}"/>
               </a:ext>
             </a:extLst>
           </p:cNvPr>
@@ -12579,7 +13175,7 @@
           <p:cNvPr id="8" name="">
             <a:extLst xmlns:a="http://schemas.openxmlformats.org/drawingml/2006/main">
               <a:ext uri="{FF2B5EF4-FFF2-40B4-BE49-F238E27FC236}">
-                <a16:creationId xmlns:a16="http://schemas.microsoft.com/office/drawing/2014/main" id="{8F0D697E-D12D-4C5C-96D7-41C10FDD4C4F}"/>
+                <a16:creationId xmlns:a16="http://schemas.microsoft.com/office/drawing/2014/main" id="{FA0FE63D-7824-4321-B8B4-6818D5880813}"/>
               </a:ext>
             </a:extLst>
           </p:cNvPr>
@@ -12629,7 +13225,7 @@
           <p:cNvPr id="9" name="">
             <a:extLst xmlns:a="http://schemas.openxmlformats.org/drawingml/2006/main">
               <a:ext uri="{FF2B5EF4-FFF2-40B4-BE49-F238E27FC236}">
-                <a16:creationId xmlns:a16="http://schemas.microsoft.com/office/drawing/2014/main" id="{4BE27206-70D8-414D-AE2F-CA1CAD3505B4}"/>
+                <a16:creationId xmlns:a16="http://schemas.microsoft.com/office/drawing/2014/main" id="{99A6A7B3-C80D-4B47-A4DA-D51DE2F5B4EB}"/>
               </a:ext>
             </a:extLst>
           </p:cNvPr>
@@ -12662,7 +13258,7 @@
           <p:cNvPr id="10" name="">
             <a:extLst xmlns:a="http://schemas.openxmlformats.org/drawingml/2006/main">
               <a:ext uri="{FF2B5EF4-FFF2-40B4-BE49-F238E27FC236}">
-                <a16:creationId xmlns:a16="http://schemas.microsoft.com/office/drawing/2014/main" id="{C9AB662A-6358-49FE-A255-225441194816}"/>
+                <a16:creationId xmlns:a16="http://schemas.microsoft.com/office/drawing/2014/main" id="{432A18BB-5346-4D8F-ADBB-996F0F945FDB}"/>
               </a:ext>
             </a:extLst>
           </p:cNvPr>
@@ -12712,7 +13308,7 @@
           <p:cNvPr id="11" name="">
             <a:extLst xmlns:a="http://schemas.openxmlformats.org/drawingml/2006/main">
               <a:ext uri="{FF2B5EF4-FFF2-40B4-BE49-F238E27FC236}">
-                <a16:creationId xmlns:a16="http://schemas.microsoft.com/office/drawing/2014/main" id="{0BD91C68-C431-462B-A1D0-47008FB3CFA2}"/>
+                <a16:creationId xmlns:a16="http://schemas.microsoft.com/office/drawing/2014/main" id="{ED25B503-6902-42FB-A8B1-67DB38322DF8}"/>
               </a:ext>
             </a:extLst>
           </p:cNvPr>
@@ -12745,7 +13341,7 @@
           <p:cNvPr id="12" name="">
             <a:extLst xmlns:a="http://schemas.openxmlformats.org/drawingml/2006/main">
               <a:ext uri="{FF2B5EF4-FFF2-40B4-BE49-F238E27FC236}">
-                <a16:creationId xmlns:a16="http://schemas.microsoft.com/office/drawing/2014/main" id="{9811E884-5694-4FC4-8AD6-D50078B33D74}"/>
+                <a16:creationId xmlns:a16="http://schemas.microsoft.com/office/drawing/2014/main" id="{5ACC0CA3-AA61-400A-B2D5-B99BD96A2A03}"/>
               </a:ext>
             </a:extLst>
           </p:cNvPr>
@@ -12795,7 +13391,7 @@
           <p:cNvPr id="13" name="">
             <a:extLst xmlns:a="http://schemas.openxmlformats.org/drawingml/2006/main">
               <a:ext uri="{FF2B5EF4-FFF2-40B4-BE49-F238E27FC236}">
-                <a16:creationId xmlns:a16="http://schemas.microsoft.com/office/drawing/2014/main" id="{363E24F6-CD2E-4571-BAB0-F5448B3B245F}"/>
+                <a16:creationId xmlns:a16="http://schemas.microsoft.com/office/drawing/2014/main" id="{773074F7-3BFA-447E-845C-19BF9DE60A26}"/>
               </a:ext>
             </a:extLst>
           </p:cNvPr>
@@ -12828,7 +13424,7 @@
           <p:cNvPr id="14" name="">
             <a:extLst xmlns:a="http://schemas.openxmlformats.org/drawingml/2006/main">
               <a:ext uri="{FF2B5EF4-FFF2-40B4-BE49-F238E27FC236}">
-                <a16:creationId xmlns:a16="http://schemas.microsoft.com/office/drawing/2014/main" id="{3EA01083-9EBE-49F7-9938-85EC83A13BC2}"/>
+                <a16:creationId xmlns:a16="http://schemas.microsoft.com/office/drawing/2014/main" id="{21CD37BC-E3B5-48CA-B34A-0C8F38F4D15D}"/>
               </a:ext>
             </a:extLst>
           </p:cNvPr>
@@ -12878,7 +13474,7 @@
           <p:cNvPr id="15" name="">
             <a:extLst xmlns:a="http://schemas.openxmlformats.org/drawingml/2006/main">
               <a:ext uri="{FF2B5EF4-FFF2-40B4-BE49-F238E27FC236}">
-                <a16:creationId xmlns:a16="http://schemas.microsoft.com/office/drawing/2014/main" id="{D828A660-4438-443C-A5E3-12B92C5C1431}"/>
+                <a16:creationId xmlns:a16="http://schemas.microsoft.com/office/drawing/2014/main" id="{300F76FC-E815-4B2A-ACDB-54B701EDFEBD}"/>
               </a:ext>
             </a:extLst>
           </p:cNvPr>
@@ -12926,7 +13522,7 @@
     </p:spTree>
     <p:extLst>
       <p:ext uri="{BB962C8B-B14F-4D97-AF65-F5344CB8AC3E}">
-        <p14:creationId xmlns:p14="http://schemas.microsoft.com/office/powerpoint/2010/main" val="993499560"/>
+        <p14:creationId xmlns:p14="http://schemas.microsoft.com/office/powerpoint/2010/main" val="334413080"/>
       </p:ext>
     </p:extLst>
   </p:cSld>
@@ -12957,7 +13553,7 @@
           <p:cNvPr id="7" name="">
             <a:extLst xmlns:a="http://schemas.openxmlformats.org/drawingml/2006/main">
               <a:ext uri="{FF2B5EF4-FFF2-40B4-BE49-F238E27FC236}">
-                <a16:creationId xmlns:a16="http://schemas.microsoft.com/office/drawing/2014/main" id="{8EB685A5-4BA8-468D-B902-784374889DD5}"/>
+                <a16:creationId xmlns:a16="http://schemas.microsoft.com/office/drawing/2014/main" id="{AD271688-40F5-4A5A-B3D8-91BEB6D4CCD1}"/>
               </a:ext>
             </a:extLst>
           </p:cNvPr>
@@ -13007,7 +13603,7 @@
           <p:cNvPr id="2" name="">
             <a:extLst xmlns:a="http://schemas.openxmlformats.org/drawingml/2006/main">
               <a:ext uri="{FF2B5EF4-FFF2-40B4-BE49-F238E27FC236}">
-                <a16:creationId xmlns:a16="http://schemas.microsoft.com/office/drawing/2014/main" id="{16877CB9-B9B2-44EF-AD23-A32678D1EDCC}"/>
+                <a16:creationId xmlns:a16="http://schemas.microsoft.com/office/drawing/2014/main" id="{6E00FA76-2742-492E-B7C5-6EABE91CE6FF}"/>
               </a:ext>
             </a:extLst>
           </p:cNvPr>
@@ -13057,7 +13653,7 @@
           <p:cNvPr id="3" name="">
             <a:extLst xmlns:a="http://schemas.openxmlformats.org/drawingml/2006/main">
               <a:ext uri="{FF2B5EF4-FFF2-40B4-BE49-F238E27FC236}">
-                <a16:creationId xmlns:a16="http://schemas.microsoft.com/office/drawing/2014/main" id="{8DD3A9B5-40F1-4785-841A-7CA565EA6D87}"/>
+                <a16:creationId xmlns:a16="http://schemas.microsoft.com/office/drawing/2014/main" id="{5519691F-86A5-4550-AC5B-C1F967E0D466}"/>
               </a:ext>
             </a:extLst>
           </p:cNvPr>
@@ -13090,7 +13686,7 @@
           <p:cNvPr id="4" name="">
             <a:extLst xmlns:a="http://schemas.openxmlformats.org/drawingml/2006/main">
               <a:ext uri="{FF2B5EF4-FFF2-40B4-BE49-F238E27FC236}">
-                <a16:creationId xmlns:a16="http://schemas.microsoft.com/office/drawing/2014/main" id="{6478BB1E-53D0-450D-8FFC-381E1A81AA6E}"/>
+                <a16:creationId xmlns:a16="http://schemas.microsoft.com/office/drawing/2014/main" id="{3F256EAF-4E42-46B5-83CB-8568D83C6BEA}"/>
               </a:ext>
             </a:extLst>
           </p:cNvPr>
@@ -13140,7 +13736,7 @@
           <p:cNvPr id="5" name="">
             <a:extLst xmlns:a="http://schemas.openxmlformats.org/drawingml/2006/main">
               <a:ext uri="{FF2B5EF4-FFF2-40B4-BE49-F238E27FC236}">
-                <a16:creationId xmlns:a16="http://schemas.microsoft.com/office/drawing/2014/main" id="{A8F52100-0853-4D84-9168-3845920BF227}"/>
+                <a16:creationId xmlns:a16="http://schemas.microsoft.com/office/drawing/2014/main" id="{7E659268-6E80-47B3-B648-218013A6441A}"/>
               </a:ext>
             </a:extLst>
           </p:cNvPr>
@@ -13194,7 +13790,7 @@
           <p:nvPr/>
         </p:nvPicPr>
         <p:blipFill>
-          <a:blip xmlns:r="http://schemas.openxmlformats.org/officeDocument/2006/relationships" xmlns:a="http://schemas.openxmlformats.org/drawingml/2006/main" r:embed="R2a340a1a908c44b1"/>
+          <a:blip xmlns:r="http://schemas.openxmlformats.org/officeDocument/2006/relationships" xmlns:a="http://schemas.openxmlformats.org/drawingml/2006/main" r:embed="Rd98572775def4e07"/>
           <a:stretch xmlns:a="http://schemas.openxmlformats.org/drawingml/2006/main"/>
         </p:blipFill>
         <p:spPr>
@@ -13210,7 +13806,7 @@
     </p:spTree>
     <p:extLst>
       <p:ext uri="{BB962C8B-B14F-4D97-AF65-F5344CB8AC3E}">
-        <p14:creationId xmlns:p14="http://schemas.microsoft.com/office/powerpoint/2010/main" val="693699376"/>
+        <p14:creationId xmlns:p14="http://schemas.microsoft.com/office/powerpoint/2010/main" val="2006977098"/>
       </p:ext>
     </p:extLst>
   </p:cSld>
@@ -13241,7 +13837,7 @@
           <p:cNvPr id="20" name="">
             <a:extLst xmlns:a="http://schemas.openxmlformats.org/drawingml/2006/main">
               <a:ext uri="{FF2B5EF4-FFF2-40B4-BE49-F238E27FC236}">
-                <a16:creationId xmlns:a16="http://schemas.microsoft.com/office/drawing/2014/main" id="{79586805-EF36-4B5C-A4CE-210E2701278C}"/>
+                <a16:creationId xmlns:a16="http://schemas.microsoft.com/office/drawing/2014/main" id="{F4B79CCE-EF41-4F36-AE8E-E9E983EF68FD}"/>
               </a:ext>
             </a:extLst>
           </p:cNvPr>
@@ -13291,7 +13887,7 @@
           <p:cNvPr id="2" name="">
             <a:extLst xmlns:a="http://schemas.openxmlformats.org/drawingml/2006/main">
               <a:ext uri="{FF2B5EF4-FFF2-40B4-BE49-F238E27FC236}">
-                <a16:creationId xmlns:a16="http://schemas.microsoft.com/office/drawing/2014/main" id="{AF43A09D-C65F-4C04-A032-A3FD791331A1}"/>
+                <a16:creationId xmlns:a16="http://schemas.microsoft.com/office/drawing/2014/main" id="{D2B45398-F520-4672-A659-87A1C0C1FB6D}"/>
               </a:ext>
             </a:extLst>
           </p:cNvPr>
@@ -13341,7 +13937,7 @@
           <p:cNvPr id="3" name="">
             <a:extLst xmlns:a="http://schemas.openxmlformats.org/drawingml/2006/main">
               <a:ext uri="{FF2B5EF4-FFF2-40B4-BE49-F238E27FC236}">
-                <a16:creationId xmlns:a16="http://schemas.microsoft.com/office/drawing/2014/main" id="{1B761F1A-2E4D-46E2-BB19-DD9DD6FCAD95}"/>
+                <a16:creationId xmlns:a16="http://schemas.microsoft.com/office/drawing/2014/main" id="{157B6C8B-9423-4071-A310-EEBE452F522B}"/>
               </a:ext>
             </a:extLst>
           </p:cNvPr>
@@ -13374,7 +13970,7 @@
           <p:cNvPr id="4" name="">
             <a:extLst xmlns:a="http://schemas.openxmlformats.org/drawingml/2006/main">
               <a:ext uri="{FF2B5EF4-FFF2-40B4-BE49-F238E27FC236}">
-                <a16:creationId xmlns:a16="http://schemas.microsoft.com/office/drawing/2014/main" id="{F56317DE-2517-435E-B571-BF750BD07AF7}"/>
+                <a16:creationId xmlns:a16="http://schemas.microsoft.com/office/drawing/2014/main" id="{86B33F7F-BDAA-4D9C-94C7-DFA5FF8C53A9}"/>
               </a:ext>
             </a:extLst>
           </p:cNvPr>
@@ -13424,7 +14020,7 @@
           <p:cNvPr id="5" name="">
             <a:extLst xmlns:a="http://schemas.openxmlformats.org/drawingml/2006/main">
               <a:ext uri="{FF2B5EF4-FFF2-40B4-BE49-F238E27FC236}">
-                <a16:creationId xmlns:a16="http://schemas.microsoft.com/office/drawing/2014/main" id="{74F0EA68-CDFF-463E-8302-C33B220EA559}"/>
+                <a16:creationId xmlns:a16="http://schemas.microsoft.com/office/drawing/2014/main" id="{BC9E8A28-23E0-436D-BA04-CB640F5869BD}"/>
               </a:ext>
             </a:extLst>
           </p:cNvPr>
@@ -13474,7 +14070,7 @@
           <p:cNvPr id="6" name="">
             <a:extLst xmlns:a="http://schemas.openxmlformats.org/drawingml/2006/main">
               <a:ext uri="{FF2B5EF4-FFF2-40B4-BE49-F238E27FC236}">
-                <a16:creationId xmlns:a16="http://schemas.microsoft.com/office/drawing/2014/main" id="{73684B11-7363-4089-8CA5-9F548EC86AF4}"/>
+                <a16:creationId xmlns:a16="http://schemas.microsoft.com/office/drawing/2014/main" id="{EC8F0F53-8787-4B94-9AD7-482F152E6D80}"/>
               </a:ext>
             </a:extLst>
           </p:cNvPr>
@@ -13507,7 +14103,7 @@
           <p:cNvPr id="7" name="">
             <a:extLst xmlns:a="http://schemas.openxmlformats.org/drawingml/2006/main">
               <a:ext uri="{FF2B5EF4-FFF2-40B4-BE49-F238E27FC236}">
-                <a16:creationId xmlns:a16="http://schemas.microsoft.com/office/drawing/2014/main" id="{77C8ADFC-AFD2-4285-AB85-E6BE158C5586}"/>
+                <a16:creationId xmlns:a16="http://schemas.microsoft.com/office/drawing/2014/main" id="{E161A9ED-4427-4DB7-BC37-1041F06598E9}"/>
               </a:ext>
             </a:extLst>
           </p:cNvPr>
@@ -13557,7 +14153,7 @@
           <p:cNvPr id="8" name="">
             <a:extLst xmlns:a="http://schemas.openxmlformats.org/drawingml/2006/main">
               <a:ext uri="{FF2B5EF4-FFF2-40B4-BE49-F238E27FC236}">
-                <a16:creationId xmlns:a16="http://schemas.microsoft.com/office/drawing/2014/main" id="{DF2A5B0D-D899-40E0-A09B-3136888B714A}"/>
+                <a16:creationId xmlns:a16="http://schemas.microsoft.com/office/drawing/2014/main" id="{63F67E23-8412-4F90-A3E5-FBCA376EA397}"/>
               </a:ext>
             </a:extLst>
           </p:cNvPr>
@@ -13607,7 +14203,7 @@
           <p:cNvPr id="9" name="">
             <a:extLst xmlns:a="http://schemas.openxmlformats.org/drawingml/2006/main">
               <a:ext uri="{FF2B5EF4-FFF2-40B4-BE49-F238E27FC236}">
-                <a16:creationId xmlns:a16="http://schemas.microsoft.com/office/drawing/2014/main" id="{452CEE58-99B7-4900-A31B-166FC9F3685B}"/>
+                <a16:creationId xmlns:a16="http://schemas.microsoft.com/office/drawing/2014/main" id="{765129FA-7BA2-4D0E-818E-400EE604C8CC}"/>
               </a:ext>
             </a:extLst>
           </p:cNvPr>
@@ -13657,7 +14253,7 @@
           <p:cNvPr id="10" name="">
             <a:extLst xmlns:a="http://schemas.openxmlformats.org/drawingml/2006/main">
               <a:ext uri="{FF2B5EF4-FFF2-40B4-BE49-F238E27FC236}">
-                <a16:creationId xmlns:a16="http://schemas.microsoft.com/office/drawing/2014/main" id="{FAA573E1-5047-4C77-BCEC-39409F6B373E}"/>
+                <a16:creationId xmlns:a16="http://schemas.microsoft.com/office/drawing/2014/main" id="{77834F4E-C1C7-45DE-BE2F-75E6446AF0C2}"/>
               </a:ext>
             </a:extLst>
           </p:cNvPr>
@@ -13690,7 +14286,7 @@
           <p:cNvPr id="11" name="">
             <a:extLst xmlns:a="http://schemas.openxmlformats.org/drawingml/2006/main">
               <a:ext uri="{FF2B5EF4-FFF2-40B4-BE49-F238E27FC236}">
-                <a16:creationId xmlns:a16="http://schemas.microsoft.com/office/drawing/2014/main" id="{DC1E0F6A-8C05-49F0-BBD3-1820F19B1EB8}"/>
+                <a16:creationId xmlns:a16="http://schemas.microsoft.com/office/drawing/2014/main" id="{29CFBF86-CA2F-4641-A7F1-F0D9073F97C4}"/>
               </a:ext>
             </a:extLst>
           </p:cNvPr>
@@ -13740,7 +14336,7 @@
           <p:cNvPr id="12" name="">
             <a:extLst xmlns:a="http://schemas.openxmlformats.org/drawingml/2006/main">
               <a:ext uri="{FF2B5EF4-FFF2-40B4-BE49-F238E27FC236}">
-                <a16:creationId xmlns:a16="http://schemas.microsoft.com/office/drawing/2014/main" id="{E607A74F-7B56-4FE9-9A5E-66567768C227}"/>
+                <a16:creationId xmlns:a16="http://schemas.microsoft.com/office/drawing/2014/main" id="{AA55CF86-E1B2-4A6F-9D3D-D6CCD63E324C}"/>
               </a:ext>
             </a:extLst>
           </p:cNvPr>
@@ -13790,7 +14386,7 @@
           <p:cNvPr id="13" name="">
             <a:extLst xmlns:a="http://schemas.openxmlformats.org/drawingml/2006/main">
               <a:ext uri="{FF2B5EF4-FFF2-40B4-BE49-F238E27FC236}">
-                <a16:creationId xmlns:a16="http://schemas.microsoft.com/office/drawing/2014/main" id="{682A9314-FAE4-4A57-9C11-003AB7801585}"/>
+                <a16:creationId xmlns:a16="http://schemas.microsoft.com/office/drawing/2014/main" id="{E43A9301-6385-41BC-B0CC-B23D09A4DA2E}"/>
               </a:ext>
             </a:extLst>
           </p:cNvPr>
@@ -13840,7 +14436,7 @@
           <p:cNvPr id="14" name="">
             <a:extLst xmlns:a="http://schemas.openxmlformats.org/drawingml/2006/main">
               <a:ext uri="{FF2B5EF4-FFF2-40B4-BE49-F238E27FC236}">
-                <a16:creationId xmlns:a16="http://schemas.microsoft.com/office/drawing/2014/main" id="{86F90A4F-B85E-45CD-8B60-FBC0C680ADFE}"/>
+                <a16:creationId xmlns:a16="http://schemas.microsoft.com/office/drawing/2014/main" id="{E3706038-B0D5-44C5-ACF8-078EEB6DE4B3}"/>
               </a:ext>
             </a:extLst>
           </p:cNvPr>
@@ -13890,7 +14486,7 @@
           <p:cNvPr id="15" name="">
             <a:extLst xmlns:a="http://schemas.openxmlformats.org/drawingml/2006/main">
               <a:ext uri="{FF2B5EF4-FFF2-40B4-BE49-F238E27FC236}">
-                <a16:creationId xmlns:a16="http://schemas.microsoft.com/office/drawing/2014/main" id="{0AB59B3F-0637-40C4-BEC6-C7CAD5C04E09}"/>
+                <a16:creationId xmlns:a16="http://schemas.microsoft.com/office/drawing/2014/main" id="{2C8440C1-8A00-4BBA-BA43-EBE9593AF832}"/>
               </a:ext>
             </a:extLst>
           </p:cNvPr>
@@ -13923,7 +14519,7 @@
           <p:cNvPr id="16" name="">
             <a:extLst xmlns:a="http://schemas.openxmlformats.org/drawingml/2006/main">
               <a:ext uri="{FF2B5EF4-FFF2-40B4-BE49-F238E27FC236}">
-                <a16:creationId xmlns:a16="http://schemas.microsoft.com/office/drawing/2014/main" id="{DA6EB2DC-7E51-42A3-BFCF-D9EB683F8C3A}"/>
+                <a16:creationId xmlns:a16="http://schemas.microsoft.com/office/drawing/2014/main" id="{A6EC5E1C-1B7B-426A-B7D2-C096DB93542C}"/>
               </a:ext>
             </a:extLst>
           </p:cNvPr>
@@ -13973,7 +14569,7 @@
           <p:cNvPr id="17" name="">
             <a:extLst xmlns:a="http://schemas.openxmlformats.org/drawingml/2006/main">
               <a:ext uri="{FF2B5EF4-FFF2-40B4-BE49-F238E27FC236}">
-                <a16:creationId xmlns:a16="http://schemas.microsoft.com/office/drawing/2014/main" id="{3D4CAB93-2436-42B9-B187-67C0E1F58F51}"/>
+                <a16:creationId xmlns:a16="http://schemas.microsoft.com/office/drawing/2014/main" id="{B6C5096D-7AF7-4FF9-B82B-650EB5B1C03D}"/>
               </a:ext>
             </a:extLst>
           </p:cNvPr>
@@ -14006,7 +14602,7 @@
           <p:cNvPr id="18" name="">
             <a:extLst xmlns:a="http://schemas.openxmlformats.org/drawingml/2006/main">
               <a:ext uri="{FF2B5EF4-FFF2-40B4-BE49-F238E27FC236}">
-                <a16:creationId xmlns:a16="http://schemas.microsoft.com/office/drawing/2014/main" id="{5F1DF77E-B823-4055-95AF-0156B8EDA69E}"/>
+                <a16:creationId xmlns:a16="http://schemas.microsoft.com/office/drawing/2014/main" id="{6819F8CD-BF4E-44E3-871C-7D8E4C1E9A48}"/>
               </a:ext>
             </a:extLst>
           </p:cNvPr>
@@ -14056,7 +14652,7 @@
           <p:cNvPr id="19" name="">
             <a:extLst xmlns:a="http://schemas.openxmlformats.org/drawingml/2006/main">
               <a:ext uri="{FF2B5EF4-FFF2-40B4-BE49-F238E27FC236}">
-                <a16:creationId xmlns:a16="http://schemas.microsoft.com/office/drawing/2014/main" id="{C7A4A5F6-4947-4ADD-A114-2D6B45A48FE9}"/>
+                <a16:creationId xmlns:a16="http://schemas.microsoft.com/office/drawing/2014/main" id="{425B41FB-34F9-49EC-BB99-0A881FC96880}"/>
               </a:ext>
             </a:extLst>
           </p:cNvPr>
@@ -14104,7 +14700,7 @@
     </p:spTree>
     <p:extLst>
       <p:ext uri="{BB962C8B-B14F-4D97-AF65-F5344CB8AC3E}">
-        <p14:creationId xmlns:p14="http://schemas.microsoft.com/office/powerpoint/2010/main" val="1758359540"/>
+        <p14:creationId xmlns:p14="http://schemas.microsoft.com/office/powerpoint/2010/main" val="356054498"/>
       </p:ext>
     </p:extLst>
   </p:cSld>
@@ -14135,7 +14731,7 @@
           <p:cNvPr id="6" name="">
             <a:extLst xmlns:a="http://schemas.openxmlformats.org/drawingml/2006/main">
               <a:ext uri="{FF2B5EF4-FFF2-40B4-BE49-F238E27FC236}">
-                <a16:creationId xmlns:a16="http://schemas.microsoft.com/office/drawing/2014/main" id="{D0F5949B-0924-43E9-B817-345F400F6278}"/>
+                <a16:creationId xmlns:a16="http://schemas.microsoft.com/office/drawing/2014/main" id="{3AD9D035-DCC0-49B4-8915-320A58308872}"/>
               </a:ext>
             </a:extLst>
           </p:cNvPr>
@@ -14185,7 +14781,7 @@
           <p:cNvPr id="2" name="">
             <a:extLst xmlns:a="http://schemas.openxmlformats.org/drawingml/2006/main">
               <a:ext uri="{FF2B5EF4-FFF2-40B4-BE49-F238E27FC236}">
-                <a16:creationId xmlns:a16="http://schemas.microsoft.com/office/drawing/2014/main" id="{1767DA4D-AF2F-4D97-8E2D-46EC7BB25880}"/>
+                <a16:creationId xmlns:a16="http://schemas.microsoft.com/office/drawing/2014/main" id="{E90FEBF6-6BEF-4900-895B-469292EAB3BC}"/>
               </a:ext>
             </a:extLst>
           </p:cNvPr>
@@ -14252,7 +14848,7 @@
           <p:cNvPr id="3" name="">
             <a:extLst xmlns:a="http://schemas.openxmlformats.org/drawingml/2006/main">
               <a:ext uri="{FF2B5EF4-FFF2-40B4-BE49-F238E27FC236}">
-                <a16:creationId xmlns:a16="http://schemas.microsoft.com/office/drawing/2014/main" id="{FD66C9AC-BB6A-4CA4-8DF7-C048D10F77E0}"/>
+                <a16:creationId xmlns:a16="http://schemas.microsoft.com/office/drawing/2014/main" id="{67AD34BA-ECD7-4DCE-85CC-1E0A69930E18}"/>
               </a:ext>
             </a:extLst>
           </p:cNvPr>
@@ -14302,7 +14898,7 @@
           <p:cNvPr id="4" name="">
             <a:extLst xmlns:a="http://schemas.openxmlformats.org/drawingml/2006/main">
               <a:ext uri="{FF2B5EF4-FFF2-40B4-BE49-F238E27FC236}">
-                <a16:creationId xmlns:a16="http://schemas.microsoft.com/office/drawing/2014/main" id="{9A8CEF5C-E967-4BC2-BBBD-42A4C0583CBC}"/>
+                <a16:creationId xmlns:a16="http://schemas.microsoft.com/office/drawing/2014/main" id="{53ECB2F2-07B7-4F50-94ED-82CC842F8124}"/>
               </a:ext>
             </a:extLst>
           </p:cNvPr>
@@ -14352,7 +14948,7 @@
           <p:cNvPr id="5" name="">
             <a:extLst xmlns:a="http://schemas.openxmlformats.org/drawingml/2006/main">
               <a:ext uri="{FF2B5EF4-FFF2-40B4-BE49-F238E27FC236}">
-                <a16:creationId xmlns:a16="http://schemas.microsoft.com/office/drawing/2014/main" id="{5330F23A-C9ED-443E-A42E-0E1C19A80398}"/>
+                <a16:creationId xmlns:a16="http://schemas.microsoft.com/office/drawing/2014/main" id="{07554C4A-1B37-4FCE-AB41-E9F44F8CAF98}"/>
               </a:ext>
             </a:extLst>
           </p:cNvPr>
@@ -14400,7 +14996,7 @@
     </p:spTree>
     <p:extLst>
       <p:ext uri="{BB962C8B-B14F-4D97-AF65-F5344CB8AC3E}">
-        <p14:creationId xmlns:p14="http://schemas.microsoft.com/office/powerpoint/2010/main" val="1155405834"/>
+        <p14:creationId xmlns:p14="http://schemas.microsoft.com/office/powerpoint/2010/main" val="2094339899"/>
       </p:ext>
     </p:extLst>
   </p:cSld>
@@ -14431,7 +15027,7 @@
           <p:cNvPr id="17" name="">
             <a:extLst xmlns:a="http://schemas.openxmlformats.org/drawingml/2006/main">
               <a:ext uri="{FF2B5EF4-FFF2-40B4-BE49-F238E27FC236}">
-                <a16:creationId xmlns:a16="http://schemas.microsoft.com/office/drawing/2014/main" id="{AB49C526-81FA-46F0-801F-302304865E51}"/>
+                <a16:creationId xmlns:a16="http://schemas.microsoft.com/office/drawing/2014/main" id="{7B109696-3FEC-48ED-ADCD-4103DE623088}"/>
               </a:ext>
             </a:extLst>
           </p:cNvPr>
@@ -14481,7 +15077,7 @@
           <p:cNvPr id="2" name="">
             <a:extLst xmlns:a="http://schemas.openxmlformats.org/drawingml/2006/main">
               <a:ext uri="{FF2B5EF4-FFF2-40B4-BE49-F238E27FC236}">
-                <a16:creationId xmlns:a16="http://schemas.microsoft.com/office/drawing/2014/main" id="{221802E1-475B-4295-9764-5D5105D83386}"/>
+                <a16:creationId xmlns:a16="http://schemas.microsoft.com/office/drawing/2014/main" id="{29EA7D88-7EF3-4446-8684-B7B26F01CBF6}"/>
               </a:ext>
             </a:extLst>
           </p:cNvPr>
@@ -14531,7 +15127,7 @@
           <p:cNvPr id="3" name="">
             <a:extLst xmlns:a="http://schemas.openxmlformats.org/drawingml/2006/main">
               <a:ext uri="{FF2B5EF4-FFF2-40B4-BE49-F238E27FC236}">
-                <a16:creationId xmlns:a16="http://schemas.microsoft.com/office/drawing/2014/main" id="{D2C519F9-A4A5-4BBB-9470-A73A3EA56A38}"/>
+                <a16:creationId xmlns:a16="http://schemas.microsoft.com/office/drawing/2014/main" id="{62BA9E10-ACB3-418A-91E5-9FCD4B9C63E5}"/>
               </a:ext>
             </a:extLst>
           </p:cNvPr>
@@ -14564,7 +15160,7 @@
           <p:cNvPr id="4" name="">
             <a:extLst xmlns:a="http://schemas.openxmlformats.org/drawingml/2006/main">
               <a:ext uri="{FF2B5EF4-FFF2-40B4-BE49-F238E27FC236}">
-                <a16:creationId xmlns:a16="http://schemas.microsoft.com/office/drawing/2014/main" id="{A3310BC7-6F14-4F11-AE78-F70D0B018BBD}"/>
+                <a16:creationId xmlns:a16="http://schemas.microsoft.com/office/drawing/2014/main" id="{2000AA70-5A0E-4964-952C-CD5F51309220}"/>
               </a:ext>
             </a:extLst>
           </p:cNvPr>
@@ -14614,7 +15210,7 @@
           <p:cNvPr id="5" name="">
             <a:extLst xmlns:a="http://schemas.openxmlformats.org/drawingml/2006/main">
               <a:ext uri="{FF2B5EF4-FFF2-40B4-BE49-F238E27FC236}">
-                <a16:creationId xmlns:a16="http://schemas.microsoft.com/office/drawing/2014/main" id="{02977FFC-B22B-424D-A671-8736F162C767}"/>
+                <a16:creationId xmlns:a16="http://schemas.microsoft.com/office/drawing/2014/main" id="{28DEFCA6-F90D-40D3-AAD2-A22802DEBC03}"/>
               </a:ext>
             </a:extLst>
           </p:cNvPr>
@@ -14668,7 +15264,7 @@
           <p:nvPr/>
         </p:nvPicPr>
         <p:blipFill>
-          <a:blip xmlns:r="http://schemas.openxmlformats.org/officeDocument/2006/relationships" xmlns:a="http://schemas.openxmlformats.org/drawingml/2006/main" r:embed="R2d52523dc3b24a4b"/>
+          <a:blip xmlns:r="http://schemas.openxmlformats.org/officeDocument/2006/relationships" xmlns:a="http://schemas.openxmlformats.org/drawingml/2006/main" r:embed="Rfe82e5d9c9db49b3"/>
           <a:stretch xmlns:a="http://schemas.openxmlformats.org/drawingml/2006/main"/>
         </p:blipFill>
         <p:spPr>
@@ -14686,7 +15282,7 @@
           <p:cNvPr id="7" name="">
             <a:extLst xmlns:a="http://schemas.openxmlformats.org/drawingml/2006/main">
               <a:ext uri="{FF2B5EF4-FFF2-40B4-BE49-F238E27FC236}">
-                <a16:creationId xmlns:a16="http://schemas.microsoft.com/office/drawing/2014/main" id="{499B3E80-6C90-46BB-99E1-143CF0BDA296}"/>
+                <a16:creationId xmlns:a16="http://schemas.microsoft.com/office/drawing/2014/main" id="{89AF4492-4356-40AF-AB73-0CB2ED163F85}"/>
               </a:ext>
             </a:extLst>
           </p:cNvPr>
@@ -14719,7 +15315,7 @@
           <p:cNvPr id="8" name="">
             <a:extLst xmlns:a="http://schemas.openxmlformats.org/drawingml/2006/main">
               <a:ext uri="{FF2B5EF4-FFF2-40B4-BE49-F238E27FC236}">
-                <a16:creationId xmlns:a16="http://schemas.microsoft.com/office/drawing/2014/main" id="{0C7D3911-9FE0-4686-AE14-E50AC9B0A7ED}"/>
+                <a16:creationId xmlns:a16="http://schemas.microsoft.com/office/drawing/2014/main" id="{DA2AC9E8-B006-4D2E-9578-4715B9C68794}"/>
               </a:ext>
             </a:extLst>
           </p:cNvPr>
@@ -14769,7 +15365,7 @@
           <p:cNvPr id="9" name="">
             <a:extLst xmlns:a="http://schemas.openxmlformats.org/drawingml/2006/main">
               <a:ext uri="{FF2B5EF4-FFF2-40B4-BE49-F238E27FC236}">
-                <a16:creationId xmlns:a16="http://schemas.microsoft.com/office/drawing/2014/main" id="{8E3E6BDE-B50F-47D3-BBE5-0797DD66F95A}"/>
+                <a16:creationId xmlns:a16="http://schemas.microsoft.com/office/drawing/2014/main" id="{4DEB5ACC-2736-4FE5-91E4-34708D106B3B}"/>
               </a:ext>
             </a:extLst>
           </p:cNvPr>
@@ -14819,7 +15415,7 @@
           <p:cNvPr id="10" name="">
             <a:extLst xmlns:a="http://schemas.openxmlformats.org/drawingml/2006/main">
               <a:ext uri="{FF2B5EF4-FFF2-40B4-BE49-F238E27FC236}">
-                <a16:creationId xmlns:a16="http://schemas.microsoft.com/office/drawing/2014/main" id="{0EAEB9D9-D3FE-45DA-BD96-1C8E67F5296E}"/>
+                <a16:creationId xmlns:a16="http://schemas.microsoft.com/office/drawing/2014/main" id="{32E6B38D-B1CD-482E-A79D-E1654DFE2D19}"/>
               </a:ext>
             </a:extLst>
           </p:cNvPr>
@@ -14869,7 +15465,7 @@
           <p:cNvPr id="11" name="">
             <a:extLst xmlns:a="http://schemas.openxmlformats.org/drawingml/2006/main">
               <a:ext uri="{FF2B5EF4-FFF2-40B4-BE49-F238E27FC236}">
-                <a16:creationId xmlns:a16="http://schemas.microsoft.com/office/drawing/2014/main" id="{A53FC7DF-E6F4-4462-B66A-1189D6BE3773}"/>
+                <a16:creationId xmlns:a16="http://schemas.microsoft.com/office/drawing/2014/main" id="{B8BF0338-82F7-4F8E-9C78-46E5FF1933C6}"/>
               </a:ext>
             </a:extLst>
           </p:cNvPr>
@@ -14902,7 +15498,7 @@
           <p:cNvPr id="12" name="">
             <a:extLst xmlns:a="http://schemas.openxmlformats.org/drawingml/2006/main">
               <a:ext uri="{FF2B5EF4-FFF2-40B4-BE49-F238E27FC236}">
-                <a16:creationId xmlns:a16="http://schemas.microsoft.com/office/drawing/2014/main" id="{D0B3ACAE-45A6-402B-BAD0-9FECA8311E15}"/>
+                <a16:creationId xmlns:a16="http://schemas.microsoft.com/office/drawing/2014/main" id="{9E4989E0-E971-483E-AFAD-08BB0DDC4C9D}"/>
               </a:ext>
             </a:extLst>
           </p:cNvPr>
@@ -14952,7 +15548,7 @@
           <p:cNvPr id="13" name="">
             <a:extLst xmlns:a="http://schemas.openxmlformats.org/drawingml/2006/main">
               <a:ext uri="{FF2B5EF4-FFF2-40B4-BE49-F238E27FC236}">
-                <a16:creationId xmlns:a16="http://schemas.microsoft.com/office/drawing/2014/main" id="{2F10E725-1E84-42D3-A07B-8E76E3EDB3C0}"/>
+                <a16:creationId xmlns:a16="http://schemas.microsoft.com/office/drawing/2014/main" id="{30EAEA68-E3D1-4716-B5AD-4EC0D4057179}"/>
               </a:ext>
             </a:extLst>
           </p:cNvPr>
@@ -14985,7 +15581,7 @@
           <p:cNvPr id="14" name="">
             <a:extLst xmlns:a="http://schemas.openxmlformats.org/drawingml/2006/main">
               <a:ext uri="{FF2B5EF4-FFF2-40B4-BE49-F238E27FC236}">
-                <a16:creationId xmlns:a16="http://schemas.microsoft.com/office/drawing/2014/main" id="{9B8B5237-E939-40A3-87EB-A81D7AB21CB1}"/>
+                <a16:creationId xmlns:a16="http://schemas.microsoft.com/office/drawing/2014/main" id="{60B044C5-7973-4CB8-8D17-E1A4892F5B2A}"/>
               </a:ext>
             </a:extLst>
           </p:cNvPr>
@@ -15035,7 +15631,7 @@
           <p:cNvPr id="15" name="">
             <a:extLst xmlns:a="http://schemas.openxmlformats.org/drawingml/2006/main">
               <a:ext uri="{FF2B5EF4-FFF2-40B4-BE49-F238E27FC236}">
-                <a16:creationId xmlns:a16="http://schemas.microsoft.com/office/drawing/2014/main" id="{54D970AA-6978-4368-B512-1D1449A1E197}"/>
+                <a16:creationId xmlns:a16="http://schemas.microsoft.com/office/drawing/2014/main" id="{B2F7F77F-C992-4C20-87FC-9A633E1023EC}"/>
               </a:ext>
             </a:extLst>
           </p:cNvPr>
@@ -15068,7 +15664,7 @@
           <p:cNvPr id="16" name="">
             <a:extLst xmlns:a="http://schemas.openxmlformats.org/drawingml/2006/main">
               <a:ext uri="{FF2B5EF4-FFF2-40B4-BE49-F238E27FC236}">
-                <a16:creationId xmlns:a16="http://schemas.microsoft.com/office/drawing/2014/main" id="{7BA237DB-042A-4B7D-8514-15423CFD72E7}"/>
+                <a16:creationId xmlns:a16="http://schemas.microsoft.com/office/drawing/2014/main" id="{BDC1EDA7-B1EF-434C-BDCF-4F505E820989}"/>
               </a:ext>
             </a:extLst>
           </p:cNvPr>
@@ -15116,7 +15712,7 @@
     </p:spTree>
     <p:extLst>
       <p:ext uri="{BB962C8B-B14F-4D97-AF65-F5344CB8AC3E}">
-        <p14:creationId xmlns:p14="http://schemas.microsoft.com/office/powerpoint/2010/main" val="577098524"/>
+        <p14:creationId xmlns:p14="http://schemas.microsoft.com/office/powerpoint/2010/main" val="1608028267"/>
       </p:ext>
     </p:extLst>
   </p:cSld>
@@ -15147,7 +15743,7 @@
           <p:cNvPr id="15" name="">
             <a:extLst xmlns:a="http://schemas.openxmlformats.org/drawingml/2006/main">
               <a:ext uri="{FF2B5EF4-FFF2-40B4-BE49-F238E27FC236}">
-                <a16:creationId xmlns:a16="http://schemas.microsoft.com/office/drawing/2014/main" id="{51390E91-D0D3-4881-9B87-DF252243462F}"/>
+                <a16:creationId xmlns:a16="http://schemas.microsoft.com/office/drawing/2014/main" id="{2FB8E70F-332C-4AB7-87CA-9B7C4D8F2987}"/>
               </a:ext>
             </a:extLst>
           </p:cNvPr>
@@ -15197,7 +15793,7 @@
           <p:cNvPr id="2" name="">
             <a:extLst xmlns:a="http://schemas.openxmlformats.org/drawingml/2006/main">
               <a:ext uri="{FF2B5EF4-FFF2-40B4-BE49-F238E27FC236}">
-                <a16:creationId xmlns:a16="http://schemas.microsoft.com/office/drawing/2014/main" id="{3C746CC9-7FB8-4736-8659-B229AE684FF5}"/>
+                <a16:creationId xmlns:a16="http://schemas.microsoft.com/office/drawing/2014/main" id="{4640C84B-478C-44EB-A7AE-3B4BD573A2DA}"/>
               </a:ext>
             </a:extLst>
           </p:cNvPr>
@@ -15247,7 +15843,7 @@
           <p:cNvPr id="3" name="">
             <a:extLst xmlns:a="http://schemas.openxmlformats.org/drawingml/2006/main">
               <a:ext uri="{FF2B5EF4-FFF2-40B4-BE49-F238E27FC236}">
-                <a16:creationId xmlns:a16="http://schemas.microsoft.com/office/drawing/2014/main" id="{F222DAA9-0551-454B-9A49-FF357AA74D13}"/>
+                <a16:creationId xmlns:a16="http://schemas.microsoft.com/office/drawing/2014/main" id="{45D79024-0C06-4094-B34F-2BF793B23948}"/>
               </a:ext>
             </a:extLst>
           </p:cNvPr>
@@ -15280,7 +15876,7 @@
           <p:cNvPr id="4" name="">
             <a:extLst xmlns:a="http://schemas.openxmlformats.org/drawingml/2006/main">
               <a:ext uri="{FF2B5EF4-FFF2-40B4-BE49-F238E27FC236}">
-                <a16:creationId xmlns:a16="http://schemas.microsoft.com/office/drawing/2014/main" id="{1EA68B48-71A8-4D97-A186-2F0D4BEF39D7}"/>
+                <a16:creationId xmlns:a16="http://schemas.microsoft.com/office/drawing/2014/main" id="{6BC15A9A-CF0F-4F2C-94CA-D9F523BEF310}"/>
               </a:ext>
             </a:extLst>
           </p:cNvPr>
@@ -15330,7 +15926,7 @@
           <p:cNvPr id="5" name="">
             <a:extLst xmlns:a="http://schemas.openxmlformats.org/drawingml/2006/main">
               <a:ext uri="{FF2B5EF4-FFF2-40B4-BE49-F238E27FC236}">
-                <a16:creationId xmlns:a16="http://schemas.microsoft.com/office/drawing/2014/main" id="{533F0E04-3DD5-48F7-8D3F-2FFF59B0886C}"/>
+                <a16:creationId xmlns:a16="http://schemas.microsoft.com/office/drawing/2014/main" id="{30EF946C-66A2-40CD-B4B6-51E42B65EEF6}"/>
               </a:ext>
             </a:extLst>
           </p:cNvPr>
@@ -15384,7 +15980,7 @@
           <p:nvPr/>
         </p:nvPicPr>
         <p:blipFill>
-          <a:blip xmlns:r="http://schemas.openxmlformats.org/officeDocument/2006/relationships" xmlns:a="http://schemas.openxmlformats.org/drawingml/2006/main" r:embed="Rac1e109ade3e411c"/>
+          <a:blip xmlns:r="http://schemas.openxmlformats.org/officeDocument/2006/relationships" xmlns:a="http://schemas.openxmlformats.org/drawingml/2006/main" r:embed="R1a8e20dd6f414d2a"/>
           <a:stretch xmlns:a="http://schemas.openxmlformats.org/drawingml/2006/main"/>
         </p:blipFill>
         <p:spPr>
@@ -15402,7 +15998,7 @@
           <p:cNvPr id="7" name="">
             <a:extLst xmlns:a="http://schemas.openxmlformats.org/drawingml/2006/main">
               <a:ext uri="{FF2B5EF4-FFF2-40B4-BE49-F238E27FC236}">
-                <a16:creationId xmlns:a16="http://schemas.microsoft.com/office/drawing/2014/main" id="{A1AC806D-B8A9-4C9B-A709-C944F1F96797}"/>
+                <a16:creationId xmlns:a16="http://schemas.microsoft.com/office/drawing/2014/main" id="{F7B02D88-195A-4626-B2D7-30601576A65D}"/>
               </a:ext>
             </a:extLst>
           </p:cNvPr>
@@ -15435,7 +16031,7 @@
           <p:cNvPr id="8" name="">
             <a:extLst xmlns:a="http://schemas.openxmlformats.org/drawingml/2006/main">
               <a:ext uri="{FF2B5EF4-FFF2-40B4-BE49-F238E27FC236}">
-                <a16:creationId xmlns:a16="http://schemas.microsoft.com/office/drawing/2014/main" id="{4B199761-5240-42A6-AAAD-978982243722}"/>
+                <a16:creationId xmlns:a16="http://schemas.microsoft.com/office/drawing/2014/main" id="{810071A9-11BA-46B1-BB1C-DC53CB8E4B59}"/>
               </a:ext>
             </a:extLst>
           </p:cNvPr>
@@ -15485,7 +16081,7 @@
           <p:cNvPr id="9" name="">
             <a:extLst xmlns:a="http://schemas.openxmlformats.org/drawingml/2006/main">
               <a:ext uri="{FF2B5EF4-FFF2-40B4-BE49-F238E27FC236}">
-                <a16:creationId xmlns:a16="http://schemas.microsoft.com/office/drawing/2014/main" id="{9285CBAF-A942-46B1-80C3-669BFB977937}"/>
+                <a16:creationId xmlns:a16="http://schemas.microsoft.com/office/drawing/2014/main" id="{0BDD972E-C2AD-4A0A-94CB-AD4386146C43}"/>
               </a:ext>
             </a:extLst>
           </p:cNvPr>
@@ -15535,7 +16131,7 @@
           <p:cNvPr id="10" name="">
             <a:extLst xmlns:a="http://schemas.openxmlformats.org/drawingml/2006/main">
               <a:ext uri="{FF2B5EF4-FFF2-40B4-BE49-F238E27FC236}">
-                <a16:creationId xmlns:a16="http://schemas.microsoft.com/office/drawing/2014/main" id="{FC2A8587-A5FB-4E7C-AAE4-DA7D1A8719E8}"/>
+                <a16:creationId xmlns:a16="http://schemas.microsoft.com/office/drawing/2014/main" id="{4DAAB98A-AF40-4A51-A3E2-94C45BA54797}"/>
               </a:ext>
             </a:extLst>
           </p:cNvPr>
@@ -15585,7 +16181,7 @@
           <p:cNvPr id="11" name="">
             <a:extLst xmlns:a="http://schemas.openxmlformats.org/drawingml/2006/main">
               <a:ext uri="{FF2B5EF4-FFF2-40B4-BE49-F238E27FC236}">
-                <a16:creationId xmlns:a16="http://schemas.microsoft.com/office/drawing/2014/main" id="{8E175906-AE85-4F16-915A-F813C521E54B}"/>
+                <a16:creationId xmlns:a16="http://schemas.microsoft.com/office/drawing/2014/main" id="{1C136F20-46FC-4A89-88BC-348BF27CD1CB}"/>
               </a:ext>
             </a:extLst>
           </p:cNvPr>
@@ -15635,7 +16231,7 @@
           <p:cNvPr id="12" name="">
             <a:extLst xmlns:a="http://schemas.openxmlformats.org/drawingml/2006/main">
               <a:ext uri="{FF2B5EF4-FFF2-40B4-BE49-F238E27FC236}">
-                <a16:creationId xmlns:a16="http://schemas.microsoft.com/office/drawing/2014/main" id="{8F17A142-FBEF-42FA-B661-B65E5CD4C2F3}"/>
+                <a16:creationId xmlns:a16="http://schemas.microsoft.com/office/drawing/2014/main" id="{089D293E-50C1-4824-8FEB-B6EE9F83A781}"/>
               </a:ext>
             </a:extLst>
           </p:cNvPr>
@@ -15685,7 +16281,7 @@
           <p:cNvPr id="13" name="">
             <a:extLst xmlns:a="http://schemas.openxmlformats.org/drawingml/2006/main">
               <a:ext uri="{FF2B5EF4-FFF2-40B4-BE49-F238E27FC236}">
-                <a16:creationId xmlns:a16="http://schemas.microsoft.com/office/drawing/2014/main" id="{862C8865-E30B-450A-8A57-E9ABA192BD03}"/>
+                <a16:creationId xmlns:a16="http://schemas.microsoft.com/office/drawing/2014/main" id="{A9E9156E-8C11-496C-B085-1BD68EAD417E}"/>
               </a:ext>
             </a:extLst>
           </p:cNvPr>
@@ -15735,7 +16331,7 @@
           <p:cNvPr id="14" name="">
             <a:extLst xmlns:a="http://schemas.openxmlformats.org/drawingml/2006/main">
               <a:ext uri="{FF2B5EF4-FFF2-40B4-BE49-F238E27FC236}">
-                <a16:creationId xmlns:a16="http://schemas.microsoft.com/office/drawing/2014/main" id="{25058255-CBB9-41E5-827C-30913D6FB399}"/>
+                <a16:creationId xmlns:a16="http://schemas.microsoft.com/office/drawing/2014/main" id="{6DB75049-F767-45F0-A646-1FAD9F9FED97}"/>
               </a:ext>
             </a:extLst>
           </p:cNvPr>
@@ -15783,7 +16379,7 @@
     </p:spTree>
     <p:extLst>
       <p:ext uri="{BB962C8B-B14F-4D97-AF65-F5344CB8AC3E}">
-        <p14:creationId xmlns:p14="http://schemas.microsoft.com/office/powerpoint/2010/main" val="1741468674"/>
+        <p14:creationId xmlns:p14="http://schemas.microsoft.com/office/powerpoint/2010/main" val="1057221431"/>
       </p:ext>
     </p:extLst>
   </p:cSld>
@@ -15814,7 +16410,7 @@
           <p:cNvPr id="9" name="">
             <a:extLst xmlns:a="http://schemas.openxmlformats.org/drawingml/2006/main">
               <a:ext uri="{FF2B5EF4-FFF2-40B4-BE49-F238E27FC236}">
-                <a16:creationId xmlns:a16="http://schemas.microsoft.com/office/drawing/2014/main" id="{4C5B014B-2446-40D4-B264-F71E8B289948}"/>
+                <a16:creationId xmlns:a16="http://schemas.microsoft.com/office/drawing/2014/main" id="{31459C28-C638-4F86-AA96-B95573FB370F}"/>
               </a:ext>
             </a:extLst>
           </p:cNvPr>
@@ -15864,7 +16460,7 @@
           <p:cNvPr id="2" name="">
             <a:extLst xmlns:a="http://schemas.openxmlformats.org/drawingml/2006/main">
               <a:ext uri="{FF2B5EF4-FFF2-40B4-BE49-F238E27FC236}">
-                <a16:creationId xmlns:a16="http://schemas.microsoft.com/office/drawing/2014/main" id="{281F473C-EE2E-42C6-A329-29785837A4B4}"/>
+                <a16:creationId xmlns:a16="http://schemas.microsoft.com/office/drawing/2014/main" id="{5AAE6563-F040-41AB-83A7-3E10A574A1C5}"/>
               </a:ext>
             </a:extLst>
           </p:cNvPr>
@@ -15914,7 +16510,7 @@
           <p:cNvPr id="3" name="">
             <a:extLst xmlns:a="http://schemas.openxmlformats.org/drawingml/2006/main">
               <a:ext uri="{FF2B5EF4-FFF2-40B4-BE49-F238E27FC236}">
-                <a16:creationId xmlns:a16="http://schemas.microsoft.com/office/drawing/2014/main" id="{2D1D9857-73FF-4CFE-8A34-45B2A823D5DA}"/>
+                <a16:creationId xmlns:a16="http://schemas.microsoft.com/office/drawing/2014/main" id="{B9374786-494A-46DC-81FA-C27922A369B0}"/>
               </a:ext>
             </a:extLst>
           </p:cNvPr>
@@ -15947,7 +16543,7 @@
           <p:cNvPr id="4" name="">
             <a:extLst xmlns:a="http://schemas.openxmlformats.org/drawingml/2006/main">
               <a:ext uri="{FF2B5EF4-FFF2-40B4-BE49-F238E27FC236}">
-                <a16:creationId xmlns:a16="http://schemas.microsoft.com/office/drawing/2014/main" id="{0A1B81B7-9B50-474A-A51B-1EC84F201B50}"/>
+                <a16:creationId xmlns:a16="http://schemas.microsoft.com/office/drawing/2014/main" id="{AFDA19AA-1CBF-4E60-83BD-2C7CF2A8B414}"/>
               </a:ext>
             </a:extLst>
           </p:cNvPr>
@@ -15997,7 +16593,7 @@
           <p:cNvPr id="5" name="">
             <a:extLst xmlns:a="http://schemas.openxmlformats.org/drawingml/2006/main">
               <a:ext uri="{FF2B5EF4-FFF2-40B4-BE49-F238E27FC236}">
-                <a16:creationId xmlns:a16="http://schemas.microsoft.com/office/drawing/2014/main" id="{7119CF1D-C34C-4590-AD14-176F3902C566}"/>
+                <a16:creationId xmlns:a16="http://schemas.microsoft.com/office/drawing/2014/main" id="{CB139F03-E11D-4A54-BAF9-C6D358CE03D5}"/>
               </a:ext>
             </a:extLst>
           </p:cNvPr>
@@ -16051,7 +16647,7 @@
           <p:nvPr/>
         </p:nvPicPr>
         <p:blipFill>
-          <a:blip xmlns:r="http://schemas.openxmlformats.org/officeDocument/2006/relationships" xmlns:a="http://schemas.openxmlformats.org/drawingml/2006/main" r:embed="Ra785ea9c48ed46c4"/>
+          <a:blip xmlns:r="http://schemas.openxmlformats.org/officeDocument/2006/relationships" xmlns:a="http://schemas.openxmlformats.org/drawingml/2006/main" r:embed="Rb15504007b6040c1"/>
           <a:stretch xmlns:a="http://schemas.openxmlformats.org/drawingml/2006/main"/>
         </p:blipFill>
         <p:spPr>
@@ -16073,7 +16669,7 @@
           <p:nvPr/>
         </p:nvPicPr>
         <p:blipFill>
-          <a:blip xmlns:r="http://schemas.openxmlformats.org/officeDocument/2006/relationships" xmlns:a="http://schemas.openxmlformats.org/drawingml/2006/main" r:embed="R8813c4d310104713"/>
+          <a:blip xmlns:r="http://schemas.openxmlformats.org/officeDocument/2006/relationships" xmlns:a="http://schemas.openxmlformats.org/drawingml/2006/main" r:embed="R2734f6175ca94c48"/>
           <a:stretch xmlns:a="http://schemas.openxmlformats.org/drawingml/2006/main"/>
         </p:blipFill>
         <p:spPr>
@@ -16091,7 +16687,7 @@
           <p:cNvPr id="8" name="">
             <a:extLst xmlns:a="http://schemas.openxmlformats.org/drawingml/2006/main">
               <a:ext uri="{FF2B5EF4-FFF2-40B4-BE49-F238E27FC236}">
-                <a16:creationId xmlns:a16="http://schemas.microsoft.com/office/drawing/2014/main" id="{A41F230D-BCCE-4461-9961-92C0D4F29330}"/>
+                <a16:creationId xmlns:a16="http://schemas.microsoft.com/office/drawing/2014/main" id="{53C8E69F-7C87-4273-B30E-87517A0EDF61}"/>
               </a:ext>
             </a:extLst>
           </p:cNvPr>
@@ -16139,7 +16735,7 @@
     </p:spTree>
     <p:extLst>
       <p:ext uri="{BB962C8B-B14F-4D97-AF65-F5344CB8AC3E}">
-        <p14:creationId xmlns:p14="http://schemas.microsoft.com/office/powerpoint/2010/main" val="1531722045"/>
+        <p14:creationId xmlns:p14="http://schemas.microsoft.com/office/powerpoint/2010/main" val="1530413175"/>
       </p:ext>
     </p:extLst>
   </p:cSld>
@@ -16170,7 +16766,7 @@
           <p:cNvPr id="7" name="">
             <a:extLst xmlns:a="http://schemas.openxmlformats.org/drawingml/2006/main">
               <a:ext uri="{FF2B5EF4-FFF2-40B4-BE49-F238E27FC236}">
-                <a16:creationId xmlns:a16="http://schemas.microsoft.com/office/drawing/2014/main" id="{08D581FA-520D-486F-8069-4926D367B987}"/>
+                <a16:creationId xmlns:a16="http://schemas.microsoft.com/office/drawing/2014/main" id="{5BC2F4ED-543B-40AF-A401-61855A355C4B}"/>
               </a:ext>
             </a:extLst>
           </p:cNvPr>
@@ -16220,7 +16816,7 @@
           <p:cNvPr id="2" name="">
             <a:extLst xmlns:a="http://schemas.openxmlformats.org/drawingml/2006/main">
               <a:ext uri="{FF2B5EF4-FFF2-40B4-BE49-F238E27FC236}">
-                <a16:creationId xmlns:a16="http://schemas.microsoft.com/office/drawing/2014/main" id="{68E40C7D-C147-4388-9274-34011AF04932}"/>
+                <a16:creationId xmlns:a16="http://schemas.microsoft.com/office/drawing/2014/main" id="{85203528-3D7B-49D1-8B6F-285C697A35B0}"/>
               </a:ext>
             </a:extLst>
           </p:cNvPr>
@@ -16270,7 +16866,7 @@
           <p:cNvPr id="3" name="">
             <a:extLst xmlns:a="http://schemas.openxmlformats.org/drawingml/2006/main">
               <a:ext uri="{FF2B5EF4-FFF2-40B4-BE49-F238E27FC236}">
-                <a16:creationId xmlns:a16="http://schemas.microsoft.com/office/drawing/2014/main" id="{43408F00-B46B-4D6D-B571-63A87022C5A5}"/>
+                <a16:creationId xmlns:a16="http://schemas.microsoft.com/office/drawing/2014/main" id="{9822E927-1E80-49DC-9AF4-23163848B874}"/>
               </a:ext>
             </a:extLst>
           </p:cNvPr>
@@ -16303,7 +16899,7 @@
           <p:cNvPr id="4" name="">
             <a:extLst xmlns:a="http://schemas.openxmlformats.org/drawingml/2006/main">
               <a:ext uri="{FF2B5EF4-FFF2-40B4-BE49-F238E27FC236}">
-                <a16:creationId xmlns:a16="http://schemas.microsoft.com/office/drawing/2014/main" id="{BE06B589-57BF-4918-9967-78CDC926CBB5}"/>
+                <a16:creationId xmlns:a16="http://schemas.microsoft.com/office/drawing/2014/main" id="{81B759B3-80D6-45F5-AEC4-D29ECBB29BA5}"/>
               </a:ext>
             </a:extLst>
           </p:cNvPr>
@@ -16353,7 +16949,7 @@
           <p:cNvPr id="5" name="">
             <a:extLst xmlns:a="http://schemas.openxmlformats.org/drawingml/2006/main">
               <a:ext uri="{FF2B5EF4-FFF2-40B4-BE49-F238E27FC236}">
-                <a16:creationId xmlns:a16="http://schemas.microsoft.com/office/drawing/2014/main" id="{C246D281-25DE-4043-8235-400C199EDC87}"/>
+                <a16:creationId xmlns:a16="http://schemas.microsoft.com/office/drawing/2014/main" id="{A0A72F96-EF97-4E8B-9A94-75B40579A6B2}"/>
               </a:ext>
             </a:extLst>
           </p:cNvPr>
@@ -16407,7 +17003,7 @@
           <p:nvPr/>
         </p:nvPicPr>
         <p:blipFill>
-          <a:blip xmlns:r="http://schemas.openxmlformats.org/officeDocument/2006/relationships" xmlns:a="http://schemas.openxmlformats.org/drawingml/2006/main" r:embed="R2476124eefc545f0"/>
+          <a:blip xmlns:r="http://schemas.openxmlformats.org/officeDocument/2006/relationships" xmlns:a="http://schemas.openxmlformats.org/drawingml/2006/main" r:embed="Rcf3826841f7a406f"/>
           <a:stretch xmlns:a="http://schemas.openxmlformats.org/drawingml/2006/main"/>
         </p:blipFill>
         <p:spPr>
@@ -16423,7 +17019,7 @@
     </p:spTree>
     <p:extLst>
       <p:ext uri="{BB962C8B-B14F-4D97-AF65-F5344CB8AC3E}">
-        <p14:creationId xmlns:p14="http://schemas.microsoft.com/office/powerpoint/2010/main" val="2079219341"/>
+        <p14:creationId xmlns:p14="http://schemas.microsoft.com/office/powerpoint/2010/main" val="102954692"/>
       </p:ext>
     </p:extLst>
   </p:cSld>
@@ -16454,7 +17050,7 @@
           <p:cNvPr id="36" name="">
             <a:extLst xmlns:a="http://schemas.openxmlformats.org/drawingml/2006/main">
               <a:ext uri="{FF2B5EF4-FFF2-40B4-BE49-F238E27FC236}">
-                <a16:creationId xmlns:a16="http://schemas.microsoft.com/office/drawing/2014/main" id="{BEE6B572-C7C3-4F39-8511-714E7607E069}"/>
+                <a16:creationId xmlns:a16="http://schemas.microsoft.com/office/drawing/2014/main" id="{F54CB59F-B4DC-483A-95B2-ED4502595A57}"/>
               </a:ext>
             </a:extLst>
           </p:cNvPr>
@@ -16504,7 +17100,7 @@
           <p:cNvPr id="2" name="">
             <a:extLst xmlns:a="http://schemas.openxmlformats.org/drawingml/2006/main">
               <a:ext uri="{FF2B5EF4-FFF2-40B4-BE49-F238E27FC236}">
-                <a16:creationId xmlns:a16="http://schemas.microsoft.com/office/drawing/2014/main" id="{891076BE-7533-4903-920E-5E2CBCB35CC8}"/>
+                <a16:creationId xmlns:a16="http://schemas.microsoft.com/office/drawing/2014/main" id="{C4D9D86E-B339-459F-A4FD-6B6828832ADB}"/>
               </a:ext>
             </a:extLst>
           </p:cNvPr>
@@ -16554,7 +17150,7 @@
           <p:cNvPr id="3" name="">
             <a:extLst xmlns:a="http://schemas.openxmlformats.org/drawingml/2006/main">
               <a:ext uri="{FF2B5EF4-FFF2-40B4-BE49-F238E27FC236}">
-                <a16:creationId xmlns:a16="http://schemas.microsoft.com/office/drawing/2014/main" id="{9083416F-1E20-44F5-B0BD-A009FC15CEFB}"/>
+                <a16:creationId xmlns:a16="http://schemas.microsoft.com/office/drawing/2014/main" id="{569A948A-4419-49FE-90A9-2E803C525800}"/>
               </a:ext>
             </a:extLst>
           </p:cNvPr>
@@ -16587,7 +17183,7 @@
           <p:cNvPr id="4" name="">
             <a:extLst xmlns:a="http://schemas.openxmlformats.org/drawingml/2006/main">
               <a:ext uri="{FF2B5EF4-FFF2-40B4-BE49-F238E27FC236}">
-                <a16:creationId xmlns:a16="http://schemas.microsoft.com/office/drawing/2014/main" id="{6132976A-6017-4A7B-BE65-9C0F3E4842A3}"/>
+                <a16:creationId xmlns:a16="http://schemas.microsoft.com/office/drawing/2014/main" id="{9E8C8884-D124-4372-B609-5456E88FAC42}"/>
               </a:ext>
             </a:extLst>
           </p:cNvPr>
@@ -16637,7 +17233,7 @@
           <p:cNvPr id="5" name="">
             <a:extLst xmlns:a="http://schemas.openxmlformats.org/drawingml/2006/main">
               <a:ext uri="{FF2B5EF4-FFF2-40B4-BE49-F238E27FC236}">
-                <a16:creationId xmlns:a16="http://schemas.microsoft.com/office/drawing/2014/main" id="{D4DF93F2-CF61-431A-8524-580C8679E8CA}"/>
+                <a16:creationId xmlns:a16="http://schemas.microsoft.com/office/drawing/2014/main" id="{ECFEBFDD-0539-4055-BB34-8B3AF8247C96}"/>
               </a:ext>
             </a:extLst>
           </p:cNvPr>
@@ -16687,7 +17283,7 @@
           <p:cNvPr id="6" name="">
             <a:extLst xmlns:a="http://schemas.openxmlformats.org/drawingml/2006/main">
               <a:ext uri="{FF2B5EF4-FFF2-40B4-BE49-F238E27FC236}">
-                <a16:creationId xmlns:a16="http://schemas.microsoft.com/office/drawing/2014/main" id="{2496CF3E-8FB1-40B9-AB83-E93831DF093F}"/>
+                <a16:creationId xmlns:a16="http://schemas.microsoft.com/office/drawing/2014/main" id="{3D9F115B-F57F-4190-9005-635D6DB99C24}"/>
               </a:ext>
             </a:extLst>
           </p:cNvPr>
@@ -16720,7 +17316,7 @@
           <p:cNvPr id="7" name="">
             <a:extLst xmlns:a="http://schemas.openxmlformats.org/drawingml/2006/main">
               <a:ext uri="{FF2B5EF4-FFF2-40B4-BE49-F238E27FC236}">
-                <a16:creationId xmlns:a16="http://schemas.microsoft.com/office/drawing/2014/main" id="{DC9A6C23-DD5D-487E-BF21-323F29A93A7E}"/>
+                <a16:creationId xmlns:a16="http://schemas.microsoft.com/office/drawing/2014/main" id="{527773A7-D5B2-44D6-8726-D97528A8A67F}"/>
               </a:ext>
             </a:extLst>
           </p:cNvPr>
@@ -16770,7 +17366,7 @@
           <p:cNvPr id="8" name="">
             <a:extLst xmlns:a="http://schemas.openxmlformats.org/drawingml/2006/main">
               <a:ext uri="{FF2B5EF4-FFF2-40B4-BE49-F238E27FC236}">
-                <a16:creationId xmlns:a16="http://schemas.microsoft.com/office/drawing/2014/main" id="{28136C19-9556-43CE-95FD-3E7CB4852B24}"/>
+                <a16:creationId xmlns:a16="http://schemas.microsoft.com/office/drawing/2014/main" id="{7A0B0716-B338-47E9-A93C-33F9903B8F1B}"/>
               </a:ext>
             </a:extLst>
           </p:cNvPr>
@@ -16820,7 +17416,7 @@
           <p:cNvPr id="9" name="">
             <a:extLst xmlns:a="http://schemas.openxmlformats.org/drawingml/2006/main">
               <a:ext uri="{FF2B5EF4-FFF2-40B4-BE49-F238E27FC236}">
-                <a16:creationId xmlns:a16="http://schemas.microsoft.com/office/drawing/2014/main" id="{330A7571-82C1-4BEB-AB90-851936E16394}"/>
+                <a16:creationId xmlns:a16="http://schemas.microsoft.com/office/drawing/2014/main" id="{64894019-E227-4347-9B0C-C09EBB506C14}"/>
               </a:ext>
             </a:extLst>
           </p:cNvPr>
@@ -16853,7 +17449,7 @@
           <p:cNvPr id="10" name="">
             <a:extLst xmlns:a="http://schemas.openxmlformats.org/drawingml/2006/main">
               <a:ext uri="{FF2B5EF4-FFF2-40B4-BE49-F238E27FC236}">
-                <a16:creationId xmlns:a16="http://schemas.microsoft.com/office/drawing/2014/main" id="{85CA4B5E-C841-4726-96C6-400D1B4D6BC3}"/>
+                <a16:creationId xmlns:a16="http://schemas.microsoft.com/office/drawing/2014/main" id="{1F71CF0A-92C9-4CA9-9C73-5B66D9945CE0}"/>
               </a:ext>
             </a:extLst>
           </p:cNvPr>
@@ -16903,7 +17499,7 @@
           <p:cNvPr id="11" name="">
             <a:extLst xmlns:a="http://schemas.openxmlformats.org/drawingml/2006/main">
               <a:ext uri="{FF2B5EF4-FFF2-40B4-BE49-F238E27FC236}">
-                <a16:creationId xmlns:a16="http://schemas.microsoft.com/office/drawing/2014/main" id="{726335A8-6458-43F6-A7DB-DFF1E71BB4A1}"/>
+                <a16:creationId xmlns:a16="http://schemas.microsoft.com/office/drawing/2014/main" id="{1047EEA4-DE4F-4A3E-8272-7E21DBA0C9C1}"/>
               </a:ext>
             </a:extLst>
           </p:cNvPr>
@@ -16953,7 +17549,7 @@
           <p:cNvPr id="12" name="">
             <a:extLst xmlns:a="http://schemas.openxmlformats.org/drawingml/2006/main">
               <a:ext uri="{FF2B5EF4-FFF2-40B4-BE49-F238E27FC236}">
-                <a16:creationId xmlns:a16="http://schemas.microsoft.com/office/drawing/2014/main" id="{755E05F3-BB81-4574-84CB-98D1FAF4C30A}"/>
+                <a16:creationId xmlns:a16="http://schemas.microsoft.com/office/drawing/2014/main" id="{E29CF8D1-452F-4221-AFD0-30E12A3BBA2F}"/>
               </a:ext>
             </a:extLst>
           </p:cNvPr>
@@ -17003,7 +17599,7 @@
           <p:cNvPr id="13" name="">
             <a:extLst xmlns:a="http://schemas.openxmlformats.org/drawingml/2006/main">
               <a:ext uri="{FF2B5EF4-FFF2-40B4-BE49-F238E27FC236}">
-                <a16:creationId xmlns:a16="http://schemas.microsoft.com/office/drawing/2014/main" id="{6A65A42E-FBD2-4A13-8E95-EBC48E0E225C}"/>
+                <a16:creationId xmlns:a16="http://schemas.microsoft.com/office/drawing/2014/main" id="{A0CFBAA1-EF71-46AD-8526-B295D87C0C8A}"/>
               </a:ext>
             </a:extLst>
           </p:cNvPr>
@@ -17036,7 +17632,7 @@
           <p:cNvPr id="14" name="">
             <a:extLst xmlns:a="http://schemas.openxmlformats.org/drawingml/2006/main">
               <a:ext uri="{FF2B5EF4-FFF2-40B4-BE49-F238E27FC236}">
-                <a16:creationId xmlns:a16="http://schemas.microsoft.com/office/drawing/2014/main" id="{7FA36725-99A0-42B7-B982-E9D5857DE140}"/>
+                <a16:creationId xmlns:a16="http://schemas.microsoft.com/office/drawing/2014/main" id="{DDD199D1-DE35-4D8A-BA15-12EA50B78A8A}"/>
               </a:ext>
             </a:extLst>
           </p:cNvPr>
@@ -17086,7 +17682,7 @@
           <p:cNvPr id="15" name="">
             <a:extLst xmlns:a="http://schemas.openxmlformats.org/drawingml/2006/main">
               <a:ext uri="{FF2B5EF4-FFF2-40B4-BE49-F238E27FC236}">
-                <a16:creationId xmlns:a16="http://schemas.microsoft.com/office/drawing/2014/main" id="{2F1A3879-69FE-419B-A059-8C2069AEBF94}"/>
+                <a16:creationId xmlns:a16="http://schemas.microsoft.com/office/drawing/2014/main" id="{231F5F05-B783-494D-8607-0F0ED3E3A311}"/>
               </a:ext>
             </a:extLst>
           </p:cNvPr>
@@ -17136,7 +17732,7 @@
           <p:cNvPr id="16" name="">
             <a:extLst xmlns:a="http://schemas.openxmlformats.org/drawingml/2006/main">
               <a:ext uri="{FF2B5EF4-FFF2-40B4-BE49-F238E27FC236}">
-                <a16:creationId xmlns:a16="http://schemas.microsoft.com/office/drawing/2014/main" id="{7A1DE9C8-C83A-446A-AB62-B4491CF6DBAA}"/>
+                <a16:creationId xmlns:a16="http://schemas.microsoft.com/office/drawing/2014/main" id="{B950A283-4116-4EA3-8999-4F00C78AF284}"/>
               </a:ext>
             </a:extLst>
           </p:cNvPr>
@@ -17186,7 +17782,7 @@
           <p:cNvPr id="17" name="">
             <a:extLst xmlns:a="http://schemas.openxmlformats.org/drawingml/2006/main">
               <a:ext uri="{FF2B5EF4-FFF2-40B4-BE49-F238E27FC236}">
-                <a16:creationId xmlns:a16="http://schemas.microsoft.com/office/drawing/2014/main" id="{3DEDED15-9643-44DC-BF74-C8FE785F58E4}"/>
+                <a16:creationId xmlns:a16="http://schemas.microsoft.com/office/drawing/2014/main" id="{E4B63EAC-DBB3-42AA-8BA4-84762857192C}"/>
               </a:ext>
             </a:extLst>
           </p:cNvPr>
@@ -17219,7 +17815,7 @@
           <p:cNvPr id="18" name="">
             <a:extLst xmlns:a="http://schemas.openxmlformats.org/drawingml/2006/main">
               <a:ext uri="{FF2B5EF4-FFF2-40B4-BE49-F238E27FC236}">
-                <a16:creationId xmlns:a16="http://schemas.microsoft.com/office/drawing/2014/main" id="{E0C70A46-6CAE-47FF-8BE7-624604C5F60F}"/>
+                <a16:creationId xmlns:a16="http://schemas.microsoft.com/office/drawing/2014/main" id="{00BD21C2-2A2E-46A8-B939-EC137CBC49AE}"/>
               </a:ext>
             </a:extLst>
           </p:cNvPr>
@@ -17269,7 +17865,7 @@
           <p:cNvPr id="19" name="">
             <a:extLst xmlns:a="http://schemas.openxmlformats.org/drawingml/2006/main">
               <a:ext uri="{FF2B5EF4-FFF2-40B4-BE49-F238E27FC236}">
-                <a16:creationId xmlns:a16="http://schemas.microsoft.com/office/drawing/2014/main" id="{F4848AFE-CE17-4206-87E0-AACCBBECCE7E}"/>
+                <a16:creationId xmlns:a16="http://schemas.microsoft.com/office/drawing/2014/main" id="{05D99847-F2C4-4145-9284-0B7695361D82}"/>
               </a:ext>
             </a:extLst>
           </p:cNvPr>
@@ -17319,7 +17915,7 @@
           <p:cNvPr id="20" name="">
             <a:extLst xmlns:a="http://schemas.openxmlformats.org/drawingml/2006/main">
               <a:ext uri="{FF2B5EF4-FFF2-40B4-BE49-F238E27FC236}">
-                <a16:creationId xmlns:a16="http://schemas.microsoft.com/office/drawing/2014/main" id="{9BA97825-32DD-45C9-8F77-8D8807CF04F4}"/>
+                <a16:creationId xmlns:a16="http://schemas.microsoft.com/office/drawing/2014/main" id="{971AAE16-9438-4F8F-B289-B5D1CAAC7067}"/>
               </a:ext>
             </a:extLst>
           </p:cNvPr>
@@ -17369,7 +17965,7 @@
           <p:cNvPr id="21" name="">
             <a:extLst xmlns:a="http://schemas.openxmlformats.org/drawingml/2006/main">
               <a:ext uri="{FF2B5EF4-FFF2-40B4-BE49-F238E27FC236}">
-                <a16:creationId xmlns:a16="http://schemas.microsoft.com/office/drawing/2014/main" id="{9ADBEE2A-5DBF-40F5-BB39-E93FE0EB0C19}"/>
+                <a16:creationId xmlns:a16="http://schemas.microsoft.com/office/drawing/2014/main" id="{83EBBC04-0DD5-4E9E-8FC1-257757752F47}"/>
               </a:ext>
             </a:extLst>
           </p:cNvPr>
@@ -17402,7 +17998,7 @@
           <p:cNvPr id="22" name="">
             <a:extLst xmlns:a="http://schemas.openxmlformats.org/drawingml/2006/main">
               <a:ext uri="{FF2B5EF4-FFF2-40B4-BE49-F238E27FC236}">
-                <a16:creationId xmlns:a16="http://schemas.microsoft.com/office/drawing/2014/main" id="{AFA7C83E-B4FB-42E6-AD6A-4AC5404CC154}"/>
+                <a16:creationId xmlns:a16="http://schemas.microsoft.com/office/drawing/2014/main" id="{A20EBB37-2A62-4B45-ADBE-45890A6CD55D}"/>
               </a:ext>
             </a:extLst>
           </p:cNvPr>
@@ -17452,7 +18048,7 @@
           <p:cNvPr id="23" name="">
             <a:extLst xmlns:a="http://schemas.openxmlformats.org/drawingml/2006/main">
               <a:ext uri="{FF2B5EF4-FFF2-40B4-BE49-F238E27FC236}">
-                <a16:creationId xmlns:a16="http://schemas.microsoft.com/office/drawing/2014/main" id="{DB91D058-5410-4F93-A209-3DA602BB2F7A}"/>
+                <a16:creationId xmlns:a16="http://schemas.microsoft.com/office/drawing/2014/main" id="{161131E3-53A6-4C01-9FFC-40F5E45004D1}"/>
               </a:ext>
             </a:extLst>
           </p:cNvPr>
@@ -17502,7 +18098,7 @@
           <p:cNvPr id="24" name="">
             <a:extLst xmlns:a="http://schemas.openxmlformats.org/drawingml/2006/main">
               <a:ext uri="{FF2B5EF4-FFF2-40B4-BE49-F238E27FC236}">
-                <a16:creationId xmlns:a16="http://schemas.microsoft.com/office/drawing/2014/main" id="{E0894466-0AD2-4124-9D77-A7CBBD91950B}"/>
+                <a16:creationId xmlns:a16="http://schemas.microsoft.com/office/drawing/2014/main" id="{A25F459A-F2EF-4087-A114-768BD2DF053E}"/>
               </a:ext>
             </a:extLst>
           </p:cNvPr>
@@ -17552,7 +18148,7 @@
           <p:cNvPr id="25" name="">
             <a:extLst xmlns:a="http://schemas.openxmlformats.org/drawingml/2006/main">
               <a:ext uri="{FF2B5EF4-FFF2-40B4-BE49-F238E27FC236}">
-                <a16:creationId xmlns:a16="http://schemas.microsoft.com/office/drawing/2014/main" id="{E9618808-0C3D-483B-A8A6-B0D74072D97C}"/>
+                <a16:creationId xmlns:a16="http://schemas.microsoft.com/office/drawing/2014/main" id="{14601A7B-5826-4ED4-A5CA-8E6FEF5E2688}"/>
               </a:ext>
             </a:extLst>
           </p:cNvPr>
@@ -17585,7 +18181,7 @@
           <p:cNvPr id="26" name="">
             <a:extLst xmlns:a="http://schemas.openxmlformats.org/drawingml/2006/main">
               <a:ext uri="{FF2B5EF4-FFF2-40B4-BE49-F238E27FC236}">
-                <a16:creationId xmlns:a16="http://schemas.microsoft.com/office/drawing/2014/main" id="{4A080F44-F725-431D-A63E-06DE97AF917E}"/>
+                <a16:creationId xmlns:a16="http://schemas.microsoft.com/office/drawing/2014/main" id="{D369F6B4-52E7-48FD-B33C-E12B6C60477B}"/>
               </a:ext>
             </a:extLst>
           </p:cNvPr>
@@ -17635,7 +18231,7 @@
           <p:cNvPr id="27" name="">
             <a:extLst xmlns:a="http://schemas.openxmlformats.org/drawingml/2006/main">
               <a:ext uri="{FF2B5EF4-FFF2-40B4-BE49-F238E27FC236}">
-                <a16:creationId xmlns:a16="http://schemas.microsoft.com/office/drawing/2014/main" id="{F9978854-932E-4232-92D9-AD43BA56C9DA}"/>
+                <a16:creationId xmlns:a16="http://schemas.microsoft.com/office/drawing/2014/main" id="{D2E344C1-4E68-4541-9B92-CF95C512A527}"/>
               </a:ext>
             </a:extLst>
           </p:cNvPr>
@@ -17685,7 +18281,7 @@
           <p:cNvPr id="28" name="">
             <a:extLst xmlns:a="http://schemas.openxmlformats.org/drawingml/2006/main">
               <a:ext uri="{FF2B5EF4-FFF2-40B4-BE49-F238E27FC236}">
-                <a16:creationId xmlns:a16="http://schemas.microsoft.com/office/drawing/2014/main" id="{0EC96D83-F395-4FFC-B366-AE9EA49B9219}"/>
+                <a16:creationId xmlns:a16="http://schemas.microsoft.com/office/drawing/2014/main" id="{0FBE27D8-FC35-4C8F-A769-9D594DBEFC6E}"/>
               </a:ext>
             </a:extLst>
           </p:cNvPr>
@@ -17735,7 +18331,7 @@
           <p:cNvPr id="29" name="">
             <a:extLst xmlns:a="http://schemas.openxmlformats.org/drawingml/2006/main">
               <a:ext uri="{FF2B5EF4-FFF2-40B4-BE49-F238E27FC236}">
-                <a16:creationId xmlns:a16="http://schemas.microsoft.com/office/drawing/2014/main" id="{65D51E8D-84F2-4259-8456-9DB561D69AEA}"/>
+                <a16:creationId xmlns:a16="http://schemas.microsoft.com/office/drawing/2014/main" id="{2CD934D8-A60A-44F7-A9BB-424BAF8B0E73}"/>
               </a:ext>
             </a:extLst>
           </p:cNvPr>
@@ -17768,7 +18364,7 @@
           <p:cNvPr id="30" name="">
             <a:extLst xmlns:a="http://schemas.openxmlformats.org/drawingml/2006/main">
               <a:ext uri="{FF2B5EF4-FFF2-40B4-BE49-F238E27FC236}">
-                <a16:creationId xmlns:a16="http://schemas.microsoft.com/office/drawing/2014/main" id="{CAD28628-0F66-45EE-AEEF-89681CAED7CC}"/>
+                <a16:creationId xmlns:a16="http://schemas.microsoft.com/office/drawing/2014/main" id="{B81FE487-3F3D-4F66-8101-CDEBA1E98981}"/>
               </a:ext>
             </a:extLst>
           </p:cNvPr>
@@ -17818,7 +18414,7 @@
           <p:cNvPr id="31" name="">
             <a:extLst xmlns:a="http://schemas.openxmlformats.org/drawingml/2006/main">
               <a:ext uri="{FF2B5EF4-FFF2-40B4-BE49-F238E27FC236}">
-                <a16:creationId xmlns:a16="http://schemas.microsoft.com/office/drawing/2014/main" id="{205EFC13-394F-4855-98F8-83BACA7BC6A8}"/>
+                <a16:creationId xmlns:a16="http://schemas.microsoft.com/office/drawing/2014/main" id="{DF0760A6-C090-4F9A-930B-7D1AF5CDD6A8}"/>
               </a:ext>
             </a:extLst>
           </p:cNvPr>
@@ -17851,7 +18447,7 @@
           <p:cNvPr id="32" name="">
             <a:extLst xmlns:a="http://schemas.openxmlformats.org/drawingml/2006/main">
               <a:ext uri="{FF2B5EF4-FFF2-40B4-BE49-F238E27FC236}">
-                <a16:creationId xmlns:a16="http://schemas.microsoft.com/office/drawing/2014/main" id="{EE4F8A1C-8E1B-4EC8-8A70-54C3F7CBCAC3}"/>
+                <a16:creationId xmlns:a16="http://schemas.microsoft.com/office/drawing/2014/main" id="{368BAE59-E615-4258-878C-552E5E09C28B}"/>
               </a:ext>
             </a:extLst>
           </p:cNvPr>
@@ -17901,7 +18497,7 @@
           <p:cNvPr id="33" name="">
             <a:extLst xmlns:a="http://schemas.openxmlformats.org/drawingml/2006/main">
               <a:ext uri="{FF2B5EF4-FFF2-40B4-BE49-F238E27FC236}">
-                <a16:creationId xmlns:a16="http://schemas.microsoft.com/office/drawing/2014/main" id="{CE258554-6B59-4885-8B6E-770E0A14D1E7}"/>
+                <a16:creationId xmlns:a16="http://schemas.microsoft.com/office/drawing/2014/main" id="{23A92552-6282-4C77-A0A4-B1C47EAFB3A6}"/>
               </a:ext>
             </a:extLst>
           </p:cNvPr>
@@ -17934,7 +18530,7 @@
           <p:cNvPr id="34" name="">
             <a:extLst xmlns:a="http://schemas.openxmlformats.org/drawingml/2006/main">
               <a:ext uri="{FF2B5EF4-FFF2-40B4-BE49-F238E27FC236}">
-                <a16:creationId xmlns:a16="http://schemas.microsoft.com/office/drawing/2014/main" id="{B05C599A-D0AB-4B6D-9A35-82BCF16A76B5}"/>
+                <a16:creationId xmlns:a16="http://schemas.microsoft.com/office/drawing/2014/main" id="{5A107609-3283-4CA3-81D7-771238564AA2}"/>
               </a:ext>
             </a:extLst>
           </p:cNvPr>
@@ -17984,7 +18580,7 @@
           <p:cNvPr id="35" name="">
             <a:extLst xmlns:a="http://schemas.openxmlformats.org/drawingml/2006/main">
               <a:ext uri="{FF2B5EF4-FFF2-40B4-BE49-F238E27FC236}">
-                <a16:creationId xmlns:a16="http://schemas.microsoft.com/office/drawing/2014/main" id="{9E86D565-3D74-4058-8970-6BDF37869CF0}"/>
+                <a16:creationId xmlns:a16="http://schemas.microsoft.com/office/drawing/2014/main" id="{BADE1B0A-5760-4748-A5F2-BC42BEDF5B80}"/>
               </a:ext>
             </a:extLst>
           </p:cNvPr>
@@ -18032,7 +18628,303 @@
     </p:spTree>
     <p:extLst>
       <p:ext uri="{BB962C8B-B14F-4D97-AF65-F5344CB8AC3E}">
-        <p14:creationId xmlns:p14="http://schemas.microsoft.com/office/powerpoint/2010/main" val="674992656"/>
+        <p14:creationId xmlns:p14="http://schemas.microsoft.com/office/powerpoint/2010/main" val="676539882"/>
+      </p:ext>
+    </p:extLst>
+  </p:cSld>
+</p:sld>
+</file>
+
+<file path=ppt/slides/slide29.xml><?xml version="1.0" encoding="utf-8"?>
+<p:sld xmlns:p="http://schemas.openxmlformats.org/presentationml/2006/main">
+  <p:cSld>
+    <p:bg>
+      <p:bgPr>
+        <a:solidFill xmlns:a="http://schemas.openxmlformats.org/drawingml/2006/main">
+          <a:srgbClr val="24364B"/>
+        </a:solidFill>
+      </p:bgPr>
+    </p:bg>
+    <p:spTree>
+      <p:nvGrpSpPr>
+        <p:cNvPr id="1" name=""/>
+        <p:cNvGrpSpPr/>
+        <p:nvPr/>
+      </p:nvGrpSpPr>
+      <p:grpSpPr>
+        <a:xfrm xmlns:a="http://schemas.openxmlformats.org/drawingml/2006/main"/>
+      </p:grpSpPr>
+      <p:sp>
+        <p:nvSpPr>
+          <p:cNvPr id="6" name="">
+            <a:extLst xmlns:a="http://schemas.openxmlformats.org/drawingml/2006/main">
+              <a:ext uri="{FF2B5EF4-FFF2-40B4-BE49-F238E27FC236}">
+                <a16:creationId xmlns:a16="http://schemas.microsoft.com/office/drawing/2014/main" id="{B1D6EFD6-AB3A-454A-A4AA-9A11F9BC36AD}"/>
+              </a:ext>
+            </a:extLst>
+          </p:cNvPr>
+          <p:cNvSpPr>
+            <a:spLocks xmlns:a="http://schemas.openxmlformats.org/drawingml/2006/main" noGrp="1"/>
+          </p:cNvSpPr>
+          <p:nvPr/>
+        </p:nvSpPr>
+        <p:spPr>
+          <a:xfrm xmlns:a="http://schemas.openxmlformats.org/drawingml/2006/main">
+            <a:off x="685800" y="895350"/>
+            <a:ext cx="4000500" cy="285750"/>
+          </a:xfrm>
+          <a:prstGeom xmlns:a="http://schemas.openxmlformats.org/drawingml/2006/main" prst="rect">
+            <a:avLst/>
+          </a:prstGeom>
+          <a:noFill xmlns:a="http://schemas.openxmlformats.org/drawingml/2006/main"/>
+          <a:ln xmlns:a="http://schemas.openxmlformats.org/drawingml/2006/main" w="0">
+            <a:noFill/>
+            <a:prstDash val="solid"/>
+          </a:ln>
+        </p:spPr>
+        <p:txBody>
+          <a:bodyPr xmlns:a="http://schemas.openxmlformats.org/drawingml/2006/main" anchor="t"/>
+          <a:lstStyle xmlns:a="http://schemas.openxmlformats.org/drawingml/2006/main"/>
+          <a:p xmlns:a="http://schemas.openxmlformats.org/drawingml/2006/main">
+            <a:pPr algn="l">
+              <a:defRPr sz="1275" b="1">
+                <a:solidFill>
+                  <a:srgbClr val="D0EDFA"/>
+                </a:solidFill>
+              </a:defRPr>
+            </a:pPr>
+            <a:r>
+              <a:rPr sz="1275" b="1">
+                <a:solidFill>
+                  <a:srgbClr val="D0EDFA"/>
+                </a:solidFill>
+              </a:rPr>
+              <a:t>FIFTH MICROSCOPE</a:t>
+            </a:r>
+          </a:p>
+        </p:txBody>
+      </p:sp>
+      <p:sp>
+        <p:nvSpPr>
+          <p:cNvPr id="2" name="">
+            <a:extLst xmlns:a="http://schemas.openxmlformats.org/drawingml/2006/main">
+              <a:ext uri="{FF2B5EF4-FFF2-40B4-BE49-F238E27FC236}">
+                <a16:creationId xmlns:a16="http://schemas.microsoft.com/office/drawing/2014/main" id="{B2194B3F-F76E-4E9E-B327-D06A32E0449E}"/>
+              </a:ext>
+            </a:extLst>
+          </p:cNvPr>
+          <p:cNvSpPr>
+            <a:spLocks xmlns:a="http://schemas.openxmlformats.org/drawingml/2006/main" noGrp="1"/>
+          </p:cNvSpPr>
+          <p:nvPr/>
+        </p:nvSpPr>
+        <p:spPr>
+          <a:xfrm xmlns:a="http://schemas.openxmlformats.org/drawingml/2006/main">
+            <a:off x="685800" y="1619250"/>
+            <a:ext cx="9334500" cy="1619250"/>
+          </a:xfrm>
+          <a:prstGeom xmlns:a="http://schemas.openxmlformats.org/drawingml/2006/main" prst="rect">
+            <a:avLst/>
+          </a:prstGeom>
+          <a:noFill xmlns:a="http://schemas.openxmlformats.org/drawingml/2006/main"/>
+          <a:ln xmlns:a="http://schemas.openxmlformats.org/drawingml/2006/main" w="0">
+            <a:noFill/>
+            <a:prstDash val="solid"/>
+          </a:ln>
+        </p:spPr>
+        <p:txBody>
+          <a:bodyPr xmlns:a="http://schemas.openxmlformats.org/drawingml/2006/main" anchor="t"/>
+          <a:lstStyle xmlns:a="http://schemas.openxmlformats.org/drawingml/2006/main"/>
+          <a:p xmlns:a="http://schemas.openxmlformats.org/drawingml/2006/main">
+            <a:pPr algn="l">
+              <a:defRPr sz="4800" b="1">
+                <a:solidFill>
+                  <a:srgbClr val="FFFFFF"/>
+                </a:solidFill>
+              </a:defRPr>
+            </a:pPr>
+            <a:r>
+              <a:rPr sz="4800" b="1">
+                <a:solidFill>
+                  <a:srgbClr val="FFFFFF"/>
+                </a:solidFill>
+              </a:rPr>
+              <a:t>After the opening bar,</a:t>
+            </a:r>
+          </a:p>
+          <a:p xmlns:a="http://schemas.openxmlformats.org/drawingml/2006/main">
+            <a:pPr algn="l">
+              <a:defRPr sz="4800" b="1">
+                <a:solidFill>
+                  <a:srgbClr val="FFFFFF"/>
+                </a:solidFill>
+              </a:defRPr>
+            </a:pPr>
+            <a:r>
+              <a:rPr sz="4800" b="1">
+                <a:solidFill>
+                  <a:srgbClr val="FFFFFF"/>
+                </a:solidFill>
+              </a:rPr>
+              <a:t>what happens next?</a:t>
+            </a:r>
+          </a:p>
+        </p:txBody>
+      </p:sp>
+      <p:sp>
+        <p:nvSpPr>
+          <p:cNvPr id="3" name="">
+            <a:extLst xmlns:a="http://schemas.openxmlformats.org/drawingml/2006/main">
+              <a:ext uri="{FF2B5EF4-FFF2-40B4-BE49-F238E27FC236}">
+                <a16:creationId xmlns:a16="http://schemas.microsoft.com/office/drawing/2014/main" id="{75828EAF-B9F2-4E97-B6C9-5ED6532067AD}"/>
+              </a:ext>
+            </a:extLst>
+          </p:cNvPr>
+          <p:cNvSpPr>
+            <a:spLocks xmlns:a="http://schemas.openxmlformats.org/drawingml/2006/main" noGrp="1"/>
+          </p:cNvSpPr>
+          <p:nvPr/>
+        </p:nvSpPr>
+        <p:spPr>
+          <a:xfrm xmlns:a="http://schemas.openxmlformats.org/drawingml/2006/main">
+            <a:off x="723900" y="3886200"/>
+            <a:ext cx="10287000" cy="1200150"/>
+          </a:xfrm>
+          <a:prstGeom xmlns:a="http://schemas.openxmlformats.org/drawingml/2006/main" prst="rect">
+            <a:avLst/>
+          </a:prstGeom>
+          <a:noFill xmlns:a="http://schemas.openxmlformats.org/drawingml/2006/main"/>
+          <a:ln xmlns:a="http://schemas.openxmlformats.org/drawingml/2006/main" w="0">
+            <a:noFill/>
+            <a:prstDash val="solid"/>
+          </a:ln>
+        </p:spPr>
+        <p:txBody>
+          <a:bodyPr xmlns:a="http://schemas.openxmlformats.org/drawingml/2006/main" anchor="t"/>
+          <a:lstStyle xmlns:a="http://schemas.openxmlformats.org/drawingml/2006/main"/>
+          <a:p xmlns:a="http://schemas.openxmlformats.org/drawingml/2006/main">
+            <a:pPr algn="l">
+              <a:defRPr sz="2025" b="0">
+                <a:solidFill>
+                  <a:srgbClr val="D0EDFA"/>
+                </a:solidFill>
+              </a:defRPr>
+            </a:pPr>
+            <a:r>
+              <a:rPr sz="2025" b="0">
+                <a:solidFill>
+                  <a:srgbClr val="D0EDFA"/>
+                </a:solidFill>
+              </a:rPr>
+              <a:t>At 10:00 ET, the first 30-minute return is complete and therefore observable. The remaining 10:00-to-16:00 return is still ahead. This section asks whether the first move carries directional information into that tradable remainder.</a:t>
+            </a:r>
+          </a:p>
+        </p:txBody>
+      </p:sp>
+      <p:sp>
+        <p:nvSpPr>
+          <p:cNvPr id="4" name="">
+            <a:extLst xmlns:a="http://schemas.openxmlformats.org/drawingml/2006/main">
+              <a:ext uri="{FF2B5EF4-FFF2-40B4-BE49-F238E27FC236}">
+                <a16:creationId xmlns:a16="http://schemas.microsoft.com/office/drawing/2014/main" id="{3A060F6C-4176-4FB8-B7AB-BDA2E4BEDC4B}"/>
+              </a:ext>
+            </a:extLst>
+          </p:cNvPr>
+          <p:cNvSpPr>
+            <a:spLocks xmlns:a="http://schemas.openxmlformats.org/drawingml/2006/main" noGrp="1"/>
+          </p:cNvSpPr>
+          <p:nvPr/>
+        </p:nvSpPr>
+        <p:spPr>
+          <a:xfrm xmlns:a="http://schemas.openxmlformats.org/drawingml/2006/main">
+            <a:off x="723900" y="5734050"/>
+            <a:ext cx="9334500" cy="304800"/>
+          </a:xfrm>
+          <a:prstGeom xmlns:a="http://schemas.openxmlformats.org/drawingml/2006/main" prst="rect">
+            <a:avLst/>
+          </a:prstGeom>
+          <a:noFill xmlns:a="http://schemas.openxmlformats.org/drawingml/2006/main"/>
+          <a:ln xmlns:a="http://schemas.openxmlformats.org/drawingml/2006/main" w="0">
+            <a:noFill/>
+            <a:prstDash val="solid"/>
+          </a:ln>
+        </p:spPr>
+        <p:txBody>
+          <a:bodyPr xmlns:a="http://schemas.openxmlformats.org/drawingml/2006/main" anchor="t"/>
+          <a:lstStyle xmlns:a="http://schemas.openxmlformats.org/drawingml/2006/main"/>
+          <a:p xmlns:a="http://schemas.openxmlformats.org/drawingml/2006/main">
+            <a:pPr algn="l">
+              <a:defRPr sz="1500" b="1">
+                <a:solidFill>
+                  <a:srgbClr val="FFFFFF"/>
+                </a:solidFill>
+              </a:defRPr>
+            </a:pPr>
+            <a:r>
+              <a:rPr sz="1500" b="1">
+                <a:solidFill>
+                  <a:srgbClr val="FFFFFF"/>
+                </a:solidFill>
+              </a:rPr>
+              <a:t>1,487 full sessions · 12 early closes excluded · no rule or P&amp;L</a:t>
+            </a:r>
+          </a:p>
+        </p:txBody>
+      </p:sp>
+      <p:sp>
+        <p:nvSpPr>
+          <p:cNvPr id="5" name="">
+            <a:extLst xmlns:a="http://schemas.openxmlformats.org/drawingml/2006/main">
+              <a:ext uri="{FF2B5EF4-FFF2-40B4-BE49-F238E27FC236}">
+                <a16:creationId xmlns:a16="http://schemas.microsoft.com/office/drawing/2014/main" id="{BE54BE9A-18C6-41B7-B415-77EC3A9798BE}"/>
+              </a:ext>
+            </a:extLst>
+          </p:cNvPr>
+          <p:cNvSpPr>
+            <a:spLocks xmlns:a="http://schemas.openxmlformats.org/drawingml/2006/main" noGrp="1"/>
+          </p:cNvSpPr>
+          <p:nvPr/>
+        </p:nvSpPr>
+        <p:spPr>
+          <a:xfrm xmlns:a="http://schemas.openxmlformats.org/drawingml/2006/main">
+            <a:off x="10801350" y="6400800"/>
+            <a:ext cx="857250" cy="190500"/>
+          </a:xfrm>
+          <a:prstGeom xmlns:a="http://schemas.openxmlformats.org/drawingml/2006/main" prst="rect">
+            <a:avLst/>
+          </a:prstGeom>
+          <a:noFill xmlns:a="http://schemas.openxmlformats.org/drawingml/2006/main"/>
+          <a:ln xmlns:a="http://schemas.openxmlformats.org/drawingml/2006/main" w="0">
+            <a:noFill/>
+            <a:prstDash val="solid"/>
+          </a:ln>
+        </p:spPr>
+        <p:txBody>
+          <a:bodyPr xmlns:a="http://schemas.openxmlformats.org/drawingml/2006/main" anchor="t"/>
+          <a:lstStyle xmlns:a="http://schemas.openxmlformats.org/drawingml/2006/main"/>
+          <a:p xmlns:a="http://schemas.openxmlformats.org/drawingml/2006/main">
+            <a:pPr algn="r">
+              <a:defRPr sz="900" b="0">
+                <a:solidFill>
+                  <a:srgbClr val="D0EDFA"/>
+                </a:solidFill>
+              </a:defRPr>
+            </a:pPr>
+            <a:r>
+              <a:rPr sz="900" b="0">
+                <a:solidFill>
+                  <a:srgbClr val="D0EDFA"/>
+                </a:solidFill>
+              </a:rPr>
+              <a:t>29</a:t>
+            </a:r>
+          </a:p>
+        </p:txBody>
+      </p:sp>
+    </p:spTree>
+    <p:extLst>
+      <p:ext uri="{BB962C8B-B14F-4D97-AF65-F5344CB8AC3E}">
+        <p14:creationId xmlns:p14="http://schemas.microsoft.com/office/powerpoint/2010/main" val="1580971231"/>
       </p:ext>
     </p:extLst>
   </p:cSld>
@@ -18063,7 +18955,7 @@
           <p:cNvPr id="17" name="">
             <a:extLst xmlns:a="http://schemas.openxmlformats.org/drawingml/2006/main">
               <a:ext uri="{FF2B5EF4-FFF2-40B4-BE49-F238E27FC236}">
-                <a16:creationId xmlns:a16="http://schemas.microsoft.com/office/drawing/2014/main" id="{411700FD-5522-4D99-8E09-013C2B330963}"/>
+                <a16:creationId xmlns:a16="http://schemas.microsoft.com/office/drawing/2014/main" id="{126F072C-44C4-4944-A5DA-6E4316642E76}"/>
               </a:ext>
             </a:extLst>
           </p:cNvPr>
@@ -18113,7 +19005,7 @@
           <p:cNvPr id="2" name="">
             <a:extLst xmlns:a="http://schemas.openxmlformats.org/drawingml/2006/main">
               <a:ext uri="{FF2B5EF4-FFF2-40B4-BE49-F238E27FC236}">
-                <a16:creationId xmlns:a16="http://schemas.microsoft.com/office/drawing/2014/main" id="{6461ABA0-5431-4922-B756-B90F06CDDA0D}"/>
+                <a16:creationId xmlns:a16="http://schemas.microsoft.com/office/drawing/2014/main" id="{999E03F6-F8FA-449C-89AE-CB860C703D64}"/>
               </a:ext>
             </a:extLst>
           </p:cNvPr>
@@ -18163,7 +19055,7 @@
           <p:cNvPr id="3" name="">
             <a:extLst xmlns:a="http://schemas.openxmlformats.org/drawingml/2006/main">
               <a:ext uri="{FF2B5EF4-FFF2-40B4-BE49-F238E27FC236}">
-                <a16:creationId xmlns:a16="http://schemas.microsoft.com/office/drawing/2014/main" id="{C99E7B0E-AEC6-4CCA-BAB3-E1E38DDD5CCF}"/>
+                <a16:creationId xmlns:a16="http://schemas.microsoft.com/office/drawing/2014/main" id="{B4490F36-FBC2-41E6-9D55-E10498C5FF93}"/>
               </a:ext>
             </a:extLst>
           </p:cNvPr>
@@ -18196,7 +19088,7 @@
           <p:cNvPr id="4" name="">
             <a:extLst xmlns:a="http://schemas.openxmlformats.org/drawingml/2006/main">
               <a:ext uri="{FF2B5EF4-FFF2-40B4-BE49-F238E27FC236}">
-                <a16:creationId xmlns:a16="http://schemas.microsoft.com/office/drawing/2014/main" id="{B882F9AB-E2AC-4318-9F84-380B5F8B82CD}"/>
+                <a16:creationId xmlns:a16="http://schemas.microsoft.com/office/drawing/2014/main" id="{D5ACF9A2-19F8-4593-952A-C01194BEEF8C}"/>
               </a:ext>
             </a:extLst>
           </p:cNvPr>
@@ -18246,7 +19138,7 @@
           <p:cNvPr id="5" name="">
             <a:extLst xmlns:a="http://schemas.openxmlformats.org/drawingml/2006/main">
               <a:ext uri="{FF2B5EF4-FFF2-40B4-BE49-F238E27FC236}">
-                <a16:creationId xmlns:a16="http://schemas.microsoft.com/office/drawing/2014/main" id="{428888B0-3BB1-476E-9742-F513A9E5680F}"/>
+                <a16:creationId xmlns:a16="http://schemas.microsoft.com/office/drawing/2014/main" id="{1FCBEA80-0835-4A43-BA13-0D6703B34F95}"/>
               </a:ext>
             </a:extLst>
           </p:cNvPr>
@@ -18300,7 +19192,7 @@
           <p:nvPr/>
         </p:nvPicPr>
         <p:blipFill>
-          <a:blip xmlns:r="http://schemas.openxmlformats.org/officeDocument/2006/relationships" xmlns:a="http://schemas.openxmlformats.org/drawingml/2006/main" r:embed="R895faac2b68243ff"/>
+          <a:blip xmlns:r="http://schemas.openxmlformats.org/officeDocument/2006/relationships" xmlns:a="http://schemas.openxmlformats.org/drawingml/2006/main" r:embed="R104cf129f61f46c0"/>
           <a:stretch xmlns:a="http://schemas.openxmlformats.org/drawingml/2006/main"/>
         </p:blipFill>
         <p:spPr>
@@ -18318,7 +19210,7 @@
           <p:cNvPr id="7" name="">
             <a:extLst xmlns:a="http://schemas.openxmlformats.org/drawingml/2006/main">
               <a:ext uri="{FF2B5EF4-FFF2-40B4-BE49-F238E27FC236}">
-                <a16:creationId xmlns:a16="http://schemas.microsoft.com/office/drawing/2014/main" id="{7E5BA558-9BE8-41E2-A4FB-3AE7534A8186}"/>
+                <a16:creationId xmlns:a16="http://schemas.microsoft.com/office/drawing/2014/main" id="{EA06F44B-7363-41D7-BA59-52A2D8AB0830}"/>
               </a:ext>
             </a:extLst>
           </p:cNvPr>
@@ -18351,7 +19243,7 @@
           <p:cNvPr id="8" name="">
             <a:extLst xmlns:a="http://schemas.openxmlformats.org/drawingml/2006/main">
               <a:ext uri="{FF2B5EF4-FFF2-40B4-BE49-F238E27FC236}">
-                <a16:creationId xmlns:a16="http://schemas.microsoft.com/office/drawing/2014/main" id="{B8D9489E-743E-4E31-B0A1-AA617BB95A1C}"/>
+                <a16:creationId xmlns:a16="http://schemas.microsoft.com/office/drawing/2014/main" id="{D0C06CF9-4436-480A-90A6-390431D964FA}"/>
               </a:ext>
             </a:extLst>
           </p:cNvPr>
@@ -18401,7 +19293,7 @@
           <p:cNvPr id="9" name="">
             <a:extLst xmlns:a="http://schemas.openxmlformats.org/drawingml/2006/main">
               <a:ext uri="{FF2B5EF4-FFF2-40B4-BE49-F238E27FC236}">
-                <a16:creationId xmlns:a16="http://schemas.microsoft.com/office/drawing/2014/main" id="{2FA9F786-2170-4643-B10C-1F207A3A7665}"/>
+                <a16:creationId xmlns:a16="http://schemas.microsoft.com/office/drawing/2014/main" id="{C36C529B-176E-44B5-BCA3-894EB0EB8196}"/>
               </a:ext>
             </a:extLst>
           </p:cNvPr>
@@ -18434,7 +19326,7 @@
           <p:cNvPr id="10" name="">
             <a:extLst xmlns:a="http://schemas.openxmlformats.org/drawingml/2006/main">
               <a:ext uri="{FF2B5EF4-FFF2-40B4-BE49-F238E27FC236}">
-                <a16:creationId xmlns:a16="http://schemas.microsoft.com/office/drawing/2014/main" id="{E242416B-FEA8-49E0-9C5B-832A36B95C2D}"/>
+                <a16:creationId xmlns:a16="http://schemas.microsoft.com/office/drawing/2014/main" id="{4D5440C3-BE11-423A-BE56-CAE8DBA15858}"/>
               </a:ext>
             </a:extLst>
           </p:cNvPr>
@@ -18484,7 +19376,7 @@
           <p:cNvPr id="11" name="">
             <a:extLst xmlns:a="http://schemas.openxmlformats.org/drawingml/2006/main">
               <a:ext uri="{FF2B5EF4-FFF2-40B4-BE49-F238E27FC236}">
-                <a16:creationId xmlns:a16="http://schemas.microsoft.com/office/drawing/2014/main" id="{EBC8A288-A04E-4267-9A31-11ACFFD5F796}"/>
+                <a16:creationId xmlns:a16="http://schemas.microsoft.com/office/drawing/2014/main" id="{D28E65E5-8982-46B0-8302-B0EDEAEE4736}"/>
               </a:ext>
             </a:extLst>
           </p:cNvPr>
@@ -18517,7 +19409,7 @@
           <p:cNvPr id="12" name="">
             <a:extLst xmlns:a="http://schemas.openxmlformats.org/drawingml/2006/main">
               <a:ext uri="{FF2B5EF4-FFF2-40B4-BE49-F238E27FC236}">
-                <a16:creationId xmlns:a16="http://schemas.microsoft.com/office/drawing/2014/main" id="{AEDA1A25-F4E0-4A12-9149-1600D0FC0DFD}"/>
+                <a16:creationId xmlns:a16="http://schemas.microsoft.com/office/drawing/2014/main" id="{0266AC35-09A7-4F9C-842E-0CEDFBD60379}"/>
               </a:ext>
             </a:extLst>
           </p:cNvPr>
@@ -18567,7 +19459,7 @@
           <p:cNvPr id="13" name="">
             <a:extLst xmlns:a="http://schemas.openxmlformats.org/drawingml/2006/main">
               <a:ext uri="{FF2B5EF4-FFF2-40B4-BE49-F238E27FC236}">
-                <a16:creationId xmlns:a16="http://schemas.microsoft.com/office/drawing/2014/main" id="{1E4826E8-8A3A-4519-9673-C713596CE812}"/>
+                <a16:creationId xmlns:a16="http://schemas.microsoft.com/office/drawing/2014/main" id="{4142728B-B79B-4CDB-B8A1-51383FA4B4C9}"/>
               </a:ext>
             </a:extLst>
           </p:cNvPr>
@@ -18600,7 +19492,7 @@
           <p:cNvPr id="14" name="">
             <a:extLst xmlns:a="http://schemas.openxmlformats.org/drawingml/2006/main">
               <a:ext uri="{FF2B5EF4-FFF2-40B4-BE49-F238E27FC236}">
-                <a16:creationId xmlns:a16="http://schemas.microsoft.com/office/drawing/2014/main" id="{52905306-B23B-4B79-9D6E-C3F048C1EDE5}"/>
+                <a16:creationId xmlns:a16="http://schemas.microsoft.com/office/drawing/2014/main" id="{93379051-8917-469D-9094-C3EA519E8346}"/>
               </a:ext>
             </a:extLst>
           </p:cNvPr>
@@ -18650,7 +19542,7 @@
           <p:cNvPr id="15" name="">
             <a:extLst xmlns:a="http://schemas.openxmlformats.org/drawingml/2006/main">
               <a:ext uri="{FF2B5EF4-FFF2-40B4-BE49-F238E27FC236}">
-                <a16:creationId xmlns:a16="http://schemas.microsoft.com/office/drawing/2014/main" id="{0B030AE8-E13A-4BAC-9D15-63704A54F6A5}"/>
+                <a16:creationId xmlns:a16="http://schemas.microsoft.com/office/drawing/2014/main" id="{97DD2695-3D9F-43D6-9A04-9C69BC79CF40}"/>
               </a:ext>
             </a:extLst>
           </p:cNvPr>
@@ -18683,7 +19575,7 @@
           <p:cNvPr id="16" name="">
             <a:extLst xmlns:a="http://schemas.openxmlformats.org/drawingml/2006/main">
               <a:ext uri="{FF2B5EF4-FFF2-40B4-BE49-F238E27FC236}">
-                <a16:creationId xmlns:a16="http://schemas.microsoft.com/office/drawing/2014/main" id="{0D689086-98ED-49AF-836A-6631CBDCB702}"/>
+                <a16:creationId xmlns:a16="http://schemas.microsoft.com/office/drawing/2014/main" id="{235975F5-BBA8-4F46-B2B8-8DB796D15B0D}"/>
               </a:ext>
             </a:extLst>
           </p:cNvPr>
@@ -18731,7 +19623,3035 @@
     </p:spTree>
     <p:extLst>
       <p:ext uri="{BB962C8B-B14F-4D97-AF65-F5344CB8AC3E}">
-        <p14:creationId xmlns:p14="http://schemas.microsoft.com/office/powerpoint/2010/main" val="1466082667"/>
+        <p14:creationId xmlns:p14="http://schemas.microsoft.com/office/powerpoint/2010/main" val="775567583"/>
+      </p:ext>
+    </p:extLst>
+  </p:cSld>
+</p:sld>
+</file>
+
+<file path=ppt/slides/slide30.xml><?xml version="1.0" encoding="utf-8"?>
+<p:sld xmlns:p="http://schemas.openxmlformats.org/presentationml/2006/main">
+  <p:cSld>
+    <p:bg>
+      <p:bgPr>
+        <a:solidFill xmlns:a="http://schemas.openxmlformats.org/drawingml/2006/main">
+          <a:srgbClr val="FFFFFF"/>
+        </a:solidFill>
+      </p:bgPr>
+    </p:bg>
+    <p:spTree>
+      <p:nvGrpSpPr>
+        <p:cNvPr id="1" name=""/>
+        <p:cNvGrpSpPr/>
+        <p:nvPr/>
+      </p:nvGrpSpPr>
+      <p:grpSpPr>
+        <a:xfrm xmlns:a="http://schemas.openxmlformats.org/drawingml/2006/main"/>
+      </p:grpSpPr>
+      <p:sp>
+        <p:nvSpPr>
+          <p:cNvPr id="17" name="">
+            <a:extLst xmlns:a="http://schemas.openxmlformats.org/drawingml/2006/main">
+              <a:ext uri="{FF2B5EF4-FFF2-40B4-BE49-F238E27FC236}">
+                <a16:creationId xmlns:a16="http://schemas.microsoft.com/office/drawing/2014/main" id="{856F5E9D-075F-4672-B070-5B8A2EFEC82C}"/>
+              </a:ext>
+            </a:extLst>
+          </p:cNvPr>
+          <p:cNvSpPr>
+            <a:spLocks xmlns:a="http://schemas.openxmlformats.org/drawingml/2006/main" noGrp="1"/>
+          </p:cNvSpPr>
+          <p:nvPr/>
+        </p:nvSpPr>
+        <p:spPr>
+          <a:xfrm xmlns:a="http://schemas.openxmlformats.org/drawingml/2006/main">
+            <a:off x="457200" y="238125"/>
+            <a:ext cx="7239000" cy="190500"/>
+          </a:xfrm>
+          <a:prstGeom xmlns:a="http://schemas.openxmlformats.org/drawingml/2006/main" prst="rect">
+            <a:avLst/>
+          </a:prstGeom>
+          <a:noFill xmlns:a="http://schemas.openxmlformats.org/drawingml/2006/main"/>
+          <a:ln xmlns:a="http://schemas.openxmlformats.org/drawingml/2006/main" w="0">
+            <a:noFill/>
+            <a:prstDash val="solid"/>
+          </a:ln>
+        </p:spPr>
+        <p:txBody>
+          <a:bodyPr xmlns:a="http://schemas.openxmlformats.org/drawingml/2006/main" anchor="t"/>
+          <a:lstStyle xmlns:a="http://schemas.openxmlformats.org/drawingml/2006/main"/>
+          <a:p xmlns:a="http://schemas.openxmlformats.org/drawingml/2006/main">
+            <a:pPr algn="l">
+              <a:defRPr sz="1050" b="1">
+                <a:solidFill>
+                  <a:srgbClr val="667386"/>
+                </a:solidFill>
+              </a:defRPr>
+            </a:pPr>
+            <a:r>
+              <a:rPr sz="1050" b="1">
+                <a:solidFill>
+                  <a:srgbClr val="667386"/>
+                </a:solidFill>
+              </a:rPr>
+              <a:t>OPERATOR HYPOTHESIS LAB · NVDA INTRADAY OPENING RESPONSE</a:t>
+            </a:r>
+          </a:p>
+        </p:txBody>
+      </p:sp>
+      <p:sp>
+        <p:nvSpPr>
+          <p:cNvPr id="2" name="">
+            <a:extLst xmlns:a="http://schemas.openxmlformats.org/drawingml/2006/main">
+              <a:ext uri="{FF2B5EF4-FFF2-40B4-BE49-F238E27FC236}">
+                <a16:creationId xmlns:a16="http://schemas.microsoft.com/office/drawing/2014/main" id="{E2CD130B-BF0B-4255-896C-41D05FE372CE}"/>
+              </a:ext>
+            </a:extLst>
+          </p:cNvPr>
+          <p:cNvSpPr>
+            <a:spLocks xmlns:a="http://schemas.openxmlformats.org/drawingml/2006/main" noGrp="1"/>
+          </p:cNvSpPr>
+          <p:nvPr/>
+        </p:nvSpPr>
+        <p:spPr>
+          <a:xfrm xmlns:a="http://schemas.openxmlformats.org/drawingml/2006/main">
+            <a:off x="457200" y="523875"/>
+            <a:ext cx="11049000" cy="590550"/>
+          </a:xfrm>
+          <a:prstGeom xmlns:a="http://schemas.openxmlformats.org/drawingml/2006/main" prst="rect">
+            <a:avLst/>
+          </a:prstGeom>
+          <a:noFill xmlns:a="http://schemas.openxmlformats.org/drawingml/2006/main"/>
+          <a:ln xmlns:a="http://schemas.openxmlformats.org/drawingml/2006/main" w="0">
+            <a:noFill/>
+            <a:prstDash val="solid"/>
+          </a:ln>
+        </p:spPr>
+        <p:txBody>
+          <a:bodyPr xmlns:a="http://schemas.openxmlformats.org/drawingml/2006/main" anchor="t"/>
+          <a:lstStyle xmlns:a="http://schemas.openxmlformats.org/drawingml/2006/main"/>
+          <a:p xmlns:a="http://schemas.openxmlformats.org/drawingml/2006/main">
+            <a:pPr algn="l">
+              <a:defRPr sz="2925" b="1">
+                <a:solidFill>
+                  <a:srgbClr val="000000"/>
+                </a:solidFill>
+              </a:defRPr>
+            </a:pPr>
+            <a:r>
+              <a:rPr sz="2925" b="1">
+                <a:solidFill>
+                  <a:srgbClr val="000000"/>
+                </a:solidFill>
+              </a:rPr>
+              <a:t>The opening bar carries only a weak unconditional signal</a:t>
+            </a:r>
+          </a:p>
+        </p:txBody>
+      </p:sp>
+      <p:sp>
+        <p:nvSpPr>
+          <p:cNvPr id="3" name="">
+            <a:extLst xmlns:a="http://schemas.openxmlformats.org/drawingml/2006/main">
+              <a:ext uri="{FF2B5EF4-FFF2-40B4-BE49-F238E27FC236}">
+                <a16:creationId xmlns:a16="http://schemas.microsoft.com/office/drawing/2014/main" id="{54CB4D87-172B-453A-9F83-8105BE6B43AF}"/>
+              </a:ext>
+            </a:extLst>
+          </p:cNvPr>
+          <p:cNvSpPr>
+            <a:spLocks xmlns:a="http://schemas.openxmlformats.org/drawingml/2006/main" noGrp="1"/>
+          </p:cNvSpPr>
+          <p:nvPr/>
+        </p:nvSpPr>
+        <p:spPr>
+          <a:xfrm xmlns:a="http://schemas.openxmlformats.org/drawingml/2006/main">
+            <a:off x="457200" y="1219200"/>
+            <a:ext cx="11277600" cy="19050"/>
+          </a:xfrm>
+          <a:prstGeom xmlns:a="http://schemas.openxmlformats.org/drawingml/2006/main" prst="rect">
+            <a:avLst/>
+          </a:prstGeom>
+          <a:solidFill xmlns:a="http://schemas.openxmlformats.org/drawingml/2006/main">
+            <a:srgbClr val="B8BCC4"/>
+          </a:solidFill>
+          <a:ln xmlns:a="http://schemas.openxmlformats.org/drawingml/2006/main" w="0">
+            <a:solidFill>
+              <a:srgbClr val="B8BCC4"/>
+            </a:solidFill>
+            <a:prstDash val="solid"/>
+          </a:ln>
+        </p:spPr>
+      </p:sp>
+      <p:sp>
+        <p:nvSpPr>
+          <p:cNvPr id="4" name="">
+            <a:extLst xmlns:a="http://schemas.openxmlformats.org/drawingml/2006/main">
+              <a:ext uri="{FF2B5EF4-FFF2-40B4-BE49-F238E27FC236}">
+                <a16:creationId xmlns:a16="http://schemas.microsoft.com/office/drawing/2014/main" id="{D574C8C9-22EB-48BF-A566-44FC3D3D26D5}"/>
+              </a:ext>
+            </a:extLst>
+          </p:cNvPr>
+          <p:cNvSpPr>
+            <a:spLocks xmlns:a="http://schemas.openxmlformats.org/drawingml/2006/main" noGrp="1"/>
+          </p:cNvSpPr>
+          <p:nvPr/>
+        </p:nvSpPr>
+        <p:spPr>
+          <a:xfrm xmlns:a="http://schemas.openxmlformats.org/drawingml/2006/main">
+            <a:off x="457200" y="6515100"/>
+            <a:ext cx="7810500" cy="161925"/>
+          </a:xfrm>
+          <a:prstGeom xmlns:a="http://schemas.openxmlformats.org/drawingml/2006/main" prst="rect">
+            <a:avLst/>
+          </a:prstGeom>
+          <a:noFill xmlns:a="http://schemas.openxmlformats.org/drawingml/2006/main"/>
+          <a:ln xmlns:a="http://schemas.openxmlformats.org/drawingml/2006/main" w="0">
+            <a:noFill/>
+            <a:prstDash val="solid"/>
+          </a:ln>
+        </p:spPr>
+        <p:txBody>
+          <a:bodyPr xmlns:a="http://schemas.openxmlformats.org/drawingml/2006/main" anchor="t"/>
+          <a:lstStyle xmlns:a="http://schemas.openxmlformats.org/drawingml/2006/main"/>
+          <a:p xmlns:a="http://schemas.openxmlformats.org/drawingml/2006/main">
+            <a:pPr algn="l">
+              <a:defRPr sz="900" b="0">
+                <a:solidFill>
+                  <a:srgbClr val="667386"/>
+                </a:solidFill>
+              </a:defRPr>
+            </a:pPr>
+            <a:r>
+              <a:rPr sz="900" b="0">
+                <a:solidFill>
+                  <a:srgbClr val="667386"/>
+                </a:solidFill>
+              </a:rPr>
+              <a:t>Descriptive research · 1,487 full sessions · frozen 2018-01-02–2023-12-29</a:t>
+            </a:r>
+          </a:p>
+        </p:txBody>
+      </p:sp>
+      <p:sp>
+        <p:nvSpPr>
+          <p:cNvPr id="5" name="">
+            <a:extLst xmlns:a="http://schemas.openxmlformats.org/drawingml/2006/main">
+              <a:ext uri="{FF2B5EF4-FFF2-40B4-BE49-F238E27FC236}">
+                <a16:creationId xmlns:a16="http://schemas.microsoft.com/office/drawing/2014/main" id="{54F5C50E-D947-462C-B9E7-3778950FBDEC}"/>
+              </a:ext>
+            </a:extLst>
+          </p:cNvPr>
+          <p:cNvSpPr>
+            <a:spLocks xmlns:a="http://schemas.openxmlformats.org/drawingml/2006/main" noGrp="1"/>
+          </p:cNvSpPr>
+          <p:nvPr/>
+        </p:nvSpPr>
+        <p:spPr>
+          <a:xfrm xmlns:a="http://schemas.openxmlformats.org/drawingml/2006/main">
+            <a:off x="10858500" y="6496050"/>
+            <a:ext cx="876300" cy="171450"/>
+          </a:xfrm>
+          <a:prstGeom xmlns:a="http://schemas.openxmlformats.org/drawingml/2006/main" prst="rect">
+            <a:avLst/>
+          </a:prstGeom>
+          <a:noFill xmlns:a="http://schemas.openxmlformats.org/drawingml/2006/main"/>
+          <a:ln xmlns:a="http://schemas.openxmlformats.org/drawingml/2006/main" w="0">
+            <a:noFill/>
+            <a:prstDash val="solid"/>
+          </a:ln>
+        </p:spPr>
+        <p:txBody>
+          <a:bodyPr xmlns:a="http://schemas.openxmlformats.org/drawingml/2006/main" anchor="t"/>
+          <a:lstStyle xmlns:a="http://schemas.openxmlformats.org/drawingml/2006/main"/>
+          <a:p xmlns:a="http://schemas.openxmlformats.org/drawingml/2006/main">
+            <a:pPr algn="r">
+              <a:defRPr sz="900" b="0">
+                <a:solidFill>
+                  <a:srgbClr val="667386"/>
+                </a:solidFill>
+              </a:defRPr>
+            </a:pPr>
+            <a:r>
+              <a:rPr sz="900" b="0">
+                <a:solidFill>
+                  <a:srgbClr val="667386"/>
+                </a:solidFill>
+              </a:rPr>
+              <a:t>30</a:t>
+            </a:r>
+          </a:p>
+        </p:txBody>
+      </p:sp>
+      <p:pic>
+        <p:nvPicPr>
+          <p:cNvPr id="22" name=""/>
+          <p:cNvPicPr>
+            <a:picLocks xmlns:a="http://schemas.openxmlformats.org/drawingml/2006/main" noChangeAspect="1"/>
+          </p:cNvPicPr>
+          <p:nvPr/>
+        </p:nvPicPr>
+        <p:blipFill>
+          <a:blip xmlns:r="http://schemas.openxmlformats.org/officeDocument/2006/relationships" xmlns:a="http://schemas.openxmlformats.org/drawingml/2006/main" r:embed="R4649929864db4b71"/>
+          <a:stretch xmlns:a="http://schemas.openxmlformats.org/drawingml/2006/main"/>
+        </p:blipFill>
+        <p:spPr>
+          <a:xfrm xmlns:a="http://schemas.openxmlformats.org/drawingml/2006/main">
+            <a:off x="1231024" y="1371600"/>
+            <a:ext cx="6415252" cy="4895850"/>
+          </a:xfrm>
+          <a:prstGeom xmlns:a="http://schemas.openxmlformats.org/drawingml/2006/main" prst="rect">
+            <a:avLst/>
+          </a:prstGeom>
+        </p:spPr>
+      </p:pic>
+      <p:sp>
+        <p:nvSpPr>
+          <p:cNvPr id="7" name="">
+            <a:extLst xmlns:a="http://schemas.openxmlformats.org/drawingml/2006/main">
+              <a:ext uri="{FF2B5EF4-FFF2-40B4-BE49-F238E27FC236}">
+                <a16:creationId xmlns:a16="http://schemas.microsoft.com/office/drawing/2014/main" id="{EA653FE6-FA40-4B0F-B67B-74D0A9A59863}"/>
+              </a:ext>
+            </a:extLst>
+          </p:cNvPr>
+          <p:cNvSpPr>
+            <a:spLocks xmlns:a="http://schemas.openxmlformats.org/drawingml/2006/main" noGrp="1"/>
+          </p:cNvSpPr>
+          <p:nvPr/>
+        </p:nvSpPr>
+        <p:spPr>
+          <a:xfrm xmlns:a="http://schemas.openxmlformats.org/drawingml/2006/main">
+            <a:off x="8724900" y="1504950"/>
+            <a:ext cx="2914650" cy="4419600"/>
+          </a:xfrm>
+          <a:prstGeom xmlns:a="http://schemas.openxmlformats.org/drawingml/2006/main" prst="rect">
+            <a:avLst/>
+          </a:prstGeom>
+          <a:solidFill xmlns:a="http://schemas.openxmlformats.org/drawingml/2006/main">
+            <a:srgbClr val="F3F5F7"/>
+          </a:solidFill>
+          <a:ln xmlns:a="http://schemas.openxmlformats.org/drawingml/2006/main" w="0">
+            <a:solidFill>
+              <a:srgbClr val="F3F5F7"/>
+            </a:solidFill>
+            <a:prstDash val="solid"/>
+          </a:ln>
+        </p:spPr>
+      </p:sp>
+      <p:sp>
+        <p:nvSpPr>
+          <p:cNvPr id="8" name="">
+            <a:extLst xmlns:a="http://schemas.openxmlformats.org/drawingml/2006/main">
+              <a:ext uri="{FF2B5EF4-FFF2-40B4-BE49-F238E27FC236}">
+                <a16:creationId xmlns:a16="http://schemas.microsoft.com/office/drawing/2014/main" id="{3BBCF76A-589D-4DF5-8786-ED50C88EAA17}"/>
+              </a:ext>
+            </a:extLst>
+          </p:cNvPr>
+          <p:cNvSpPr>
+            <a:spLocks xmlns:a="http://schemas.openxmlformats.org/drawingml/2006/main" noGrp="1"/>
+          </p:cNvSpPr>
+          <p:nvPr/>
+        </p:nvSpPr>
+        <p:spPr>
+          <a:xfrm xmlns:a="http://schemas.openxmlformats.org/drawingml/2006/main">
+            <a:off x="8972550" y="1809750"/>
+            <a:ext cx="2419350" cy="495300"/>
+          </a:xfrm>
+          <a:prstGeom xmlns:a="http://schemas.openxmlformats.org/drawingml/2006/main" prst="rect">
+            <a:avLst/>
+          </a:prstGeom>
+          <a:noFill xmlns:a="http://schemas.openxmlformats.org/drawingml/2006/main"/>
+          <a:ln xmlns:a="http://schemas.openxmlformats.org/drawingml/2006/main" w="0">
+            <a:noFill/>
+            <a:prstDash val="solid"/>
+          </a:ln>
+        </p:spPr>
+        <p:txBody>
+          <a:bodyPr xmlns:a="http://schemas.openxmlformats.org/drawingml/2006/main" anchor="t"/>
+          <a:lstStyle xmlns:a="http://schemas.openxmlformats.org/drawingml/2006/main"/>
+          <a:p xmlns:a="http://schemas.openxmlformats.org/drawingml/2006/main">
+            <a:pPr algn="l">
+              <a:defRPr sz="3000" b="1">
+                <a:solidFill>
+                  <a:srgbClr val="3D8DFF"/>
+                </a:solidFill>
+              </a:defRPr>
+            </a:pPr>
+            <a:r>
+              <a:rPr sz="3000" b="1">
+                <a:solidFill>
+                  <a:srgbClr val="3D8DFF"/>
+                </a:solidFill>
+              </a:rPr>
+              <a:t>+0.050</a:t>
+            </a:r>
+          </a:p>
+        </p:txBody>
+      </p:sp>
+      <p:sp>
+        <p:nvSpPr>
+          <p:cNvPr id="9" name="">
+            <a:extLst xmlns:a="http://schemas.openxmlformats.org/drawingml/2006/main">
+              <a:ext uri="{FF2B5EF4-FFF2-40B4-BE49-F238E27FC236}">
+                <a16:creationId xmlns:a16="http://schemas.microsoft.com/office/drawing/2014/main" id="{24B091FB-5A4E-4D7B-BE19-7D9465C1AD5A}"/>
+              </a:ext>
+            </a:extLst>
+          </p:cNvPr>
+          <p:cNvSpPr>
+            <a:spLocks xmlns:a="http://schemas.openxmlformats.org/drawingml/2006/main" noGrp="1"/>
+          </p:cNvSpPr>
+          <p:nvPr/>
+        </p:nvSpPr>
+        <p:spPr>
+          <a:xfrm xmlns:a="http://schemas.openxmlformats.org/drawingml/2006/main">
+            <a:off x="8972550" y="2324100"/>
+            <a:ext cx="2419350" cy="266700"/>
+          </a:xfrm>
+          <a:prstGeom xmlns:a="http://schemas.openxmlformats.org/drawingml/2006/main" prst="rect">
+            <a:avLst/>
+          </a:prstGeom>
+          <a:noFill xmlns:a="http://schemas.openxmlformats.org/drawingml/2006/main"/>
+          <a:ln xmlns:a="http://schemas.openxmlformats.org/drawingml/2006/main" w="0">
+            <a:noFill/>
+            <a:prstDash val="solid"/>
+          </a:ln>
+        </p:spPr>
+        <p:txBody>
+          <a:bodyPr xmlns:a="http://schemas.openxmlformats.org/drawingml/2006/main" anchor="t"/>
+          <a:lstStyle xmlns:a="http://schemas.openxmlformats.org/drawingml/2006/main"/>
+          <a:p xmlns:a="http://schemas.openxmlformats.org/drawingml/2006/main">
+            <a:pPr algn="l">
+              <a:defRPr sz="1350" b="1">
+                <a:solidFill>
+                  <a:srgbClr val="24364B"/>
+                </a:solidFill>
+              </a:defRPr>
+            </a:pPr>
+            <a:r>
+              <a:rPr sz="1350" b="1">
+                <a:solidFill>
+                  <a:srgbClr val="24364B"/>
+                </a:solidFill>
+              </a:rPr>
+              <a:t>Pearson correlation</a:t>
+            </a:r>
+          </a:p>
+        </p:txBody>
+      </p:sp>
+      <p:sp>
+        <p:nvSpPr>
+          <p:cNvPr id="10" name="">
+            <a:extLst xmlns:a="http://schemas.openxmlformats.org/drawingml/2006/main">
+              <a:ext uri="{FF2B5EF4-FFF2-40B4-BE49-F238E27FC236}">
+                <a16:creationId xmlns:a16="http://schemas.microsoft.com/office/drawing/2014/main" id="{9BB3A4CD-B52F-41F0-B834-1A9772DE9CE9}"/>
+              </a:ext>
+            </a:extLst>
+          </p:cNvPr>
+          <p:cNvSpPr>
+            <a:spLocks xmlns:a="http://schemas.openxmlformats.org/drawingml/2006/main" noGrp="1"/>
+          </p:cNvSpPr>
+          <p:nvPr/>
+        </p:nvSpPr>
+        <p:spPr>
+          <a:xfrm xmlns:a="http://schemas.openxmlformats.org/drawingml/2006/main">
+            <a:off x="8972550" y="2990850"/>
+            <a:ext cx="1162050" cy="400050"/>
+          </a:xfrm>
+          <a:prstGeom xmlns:a="http://schemas.openxmlformats.org/drawingml/2006/main" prst="rect">
+            <a:avLst/>
+          </a:prstGeom>
+          <a:noFill xmlns:a="http://schemas.openxmlformats.org/drawingml/2006/main"/>
+          <a:ln xmlns:a="http://schemas.openxmlformats.org/drawingml/2006/main" w="0">
+            <a:noFill/>
+            <a:prstDash val="solid"/>
+          </a:ln>
+        </p:spPr>
+        <p:txBody>
+          <a:bodyPr xmlns:a="http://schemas.openxmlformats.org/drawingml/2006/main" anchor="t"/>
+          <a:lstStyle xmlns:a="http://schemas.openxmlformats.org/drawingml/2006/main"/>
+          <a:p xmlns:a="http://schemas.openxmlformats.org/drawingml/2006/main">
+            <a:pPr algn="l">
+              <a:defRPr sz="2100" b="1">
+                <a:solidFill>
+                  <a:srgbClr val="B44738"/>
+                </a:solidFill>
+              </a:defRPr>
+            </a:pPr>
+            <a:r>
+              <a:rPr sz="2100" b="1">
+                <a:solidFill>
+                  <a:srgbClr val="B44738"/>
+                </a:solidFill>
+              </a:rPr>
+              <a:t>−0.979%</a:t>
+            </a:r>
+          </a:p>
+        </p:txBody>
+      </p:sp>
+      <p:sp>
+        <p:nvSpPr>
+          <p:cNvPr id="11" name="">
+            <a:extLst xmlns:a="http://schemas.openxmlformats.org/drawingml/2006/main">
+              <a:ext uri="{FF2B5EF4-FFF2-40B4-BE49-F238E27FC236}">
+                <a16:creationId xmlns:a16="http://schemas.microsoft.com/office/drawing/2014/main" id="{51186336-62C3-4715-9165-6F6F5344634C}"/>
+              </a:ext>
+            </a:extLst>
+          </p:cNvPr>
+          <p:cNvSpPr>
+            <a:spLocks xmlns:a="http://schemas.openxmlformats.org/drawingml/2006/main" noGrp="1"/>
+          </p:cNvSpPr>
+          <p:nvPr/>
+        </p:nvSpPr>
+        <p:spPr>
+          <a:xfrm xmlns:a="http://schemas.openxmlformats.org/drawingml/2006/main">
+            <a:off x="10210800" y="2990850"/>
+            <a:ext cx="1181100" cy="400050"/>
+          </a:xfrm>
+          <a:prstGeom xmlns:a="http://schemas.openxmlformats.org/drawingml/2006/main" prst="rect">
+            <a:avLst/>
+          </a:prstGeom>
+          <a:noFill xmlns:a="http://schemas.openxmlformats.org/drawingml/2006/main"/>
+          <a:ln xmlns:a="http://schemas.openxmlformats.org/drawingml/2006/main" w="0">
+            <a:noFill/>
+            <a:prstDash val="solid"/>
+          </a:ln>
+        </p:spPr>
+        <p:txBody>
+          <a:bodyPr xmlns:a="http://schemas.openxmlformats.org/drawingml/2006/main" anchor="t"/>
+          <a:lstStyle xmlns:a="http://schemas.openxmlformats.org/drawingml/2006/main"/>
+          <a:p xmlns:a="http://schemas.openxmlformats.org/drawingml/2006/main">
+            <a:pPr algn="l">
+              <a:defRPr sz="2100" b="1">
+                <a:solidFill>
+                  <a:srgbClr val="14866D"/>
+                </a:solidFill>
+              </a:defRPr>
+            </a:pPr>
+            <a:r>
+              <a:rPr sz="2100" b="1">
+                <a:solidFill>
+                  <a:srgbClr val="14866D"/>
+                </a:solidFill>
+              </a:rPr>
+              <a:t>+1.070%</a:t>
+            </a:r>
+          </a:p>
+        </p:txBody>
+      </p:sp>
+      <p:sp>
+        <p:nvSpPr>
+          <p:cNvPr id="12" name="">
+            <a:extLst xmlns:a="http://schemas.openxmlformats.org/drawingml/2006/main">
+              <a:ext uri="{FF2B5EF4-FFF2-40B4-BE49-F238E27FC236}">
+                <a16:creationId xmlns:a16="http://schemas.microsoft.com/office/drawing/2014/main" id="{1D057555-7B0F-47C1-854C-6D9A02F5B1D4}"/>
+              </a:ext>
+            </a:extLst>
+          </p:cNvPr>
+          <p:cNvSpPr>
+            <a:spLocks xmlns:a="http://schemas.openxmlformats.org/drawingml/2006/main" noGrp="1"/>
+          </p:cNvSpPr>
+          <p:nvPr/>
+        </p:nvSpPr>
+        <p:spPr>
+          <a:xfrm xmlns:a="http://schemas.openxmlformats.org/drawingml/2006/main">
+            <a:off x="8972550" y="3409950"/>
+            <a:ext cx="2419350" cy="400050"/>
+          </a:xfrm>
+          <a:prstGeom xmlns:a="http://schemas.openxmlformats.org/drawingml/2006/main" prst="rect">
+            <a:avLst/>
+          </a:prstGeom>
+          <a:noFill xmlns:a="http://schemas.openxmlformats.org/drawingml/2006/main"/>
+          <a:ln xmlns:a="http://schemas.openxmlformats.org/drawingml/2006/main" w="0">
+            <a:noFill/>
+            <a:prstDash val="solid"/>
+          </a:ln>
+        </p:spPr>
+        <p:txBody>
+          <a:bodyPr xmlns:a="http://schemas.openxmlformats.org/drawingml/2006/main" anchor="t"/>
+          <a:lstStyle xmlns:a="http://schemas.openxmlformats.org/drawingml/2006/main"/>
+          <a:p xmlns:a="http://schemas.openxmlformats.org/drawingml/2006/main">
+            <a:pPr algn="ctr">
+              <a:defRPr sz="1125" b="0">
+                <a:solidFill>
+                  <a:srgbClr val="667386"/>
+                </a:solidFill>
+              </a:defRPr>
+            </a:pPr>
+            <a:r>
+              <a:rPr sz="1125" b="0">
+                <a:solidFill>
+                  <a:srgbClr val="667386"/>
+                </a:solidFill>
+              </a:rPr>
+              <a:t>sample-wide 20th / 80th cutoffs</a:t>
+            </a:r>
+          </a:p>
+        </p:txBody>
+      </p:sp>
+      <p:sp>
+        <p:nvSpPr>
+          <p:cNvPr id="13" name="">
+            <a:extLst xmlns:a="http://schemas.openxmlformats.org/drawingml/2006/main">
+              <a:ext uri="{FF2B5EF4-FFF2-40B4-BE49-F238E27FC236}">
+                <a16:creationId xmlns:a16="http://schemas.microsoft.com/office/drawing/2014/main" id="{D17F3A28-B250-42CC-86E0-7DE4CE91F843}"/>
+              </a:ext>
+            </a:extLst>
+          </p:cNvPr>
+          <p:cNvSpPr>
+            <a:spLocks xmlns:a="http://schemas.openxmlformats.org/drawingml/2006/main" noGrp="1"/>
+          </p:cNvSpPr>
+          <p:nvPr/>
+        </p:nvSpPr>
+        <p:spPr>
+          <a:xfrm xmlns:a="http://schemas.openxmlformats.org/drawingml/2006/main">
+            <a:off x="8972550" y="4200525"/>
+            <a:ext cx="85725" cy="85725"/>
+          </a:xfrm>
+          <a:prstGeom xmlns:a="http://schemas.openxmlformats.org/drawingml/2006/main" prst="rect">
+            <a:avLst/>
+          </a:prstGeom>
+          <a:solidFill xmlns:a="http://schemas.openxmlformats.org/drawingml/2006/main">
+            <a:srgbClr val="B44738"/>
+          </a:solidFill>
+          <a:ln xmlns:a="http://schemas.openxmlformats.org/drawingml/2006/main" w="0">
+            <a:solidFill>
+              <a:srgbClr val="B44738"/>
+            </a:solidFill>
+            <a:prstDash val="solid"/>
+          </a:ln>
+        </p:spPr>
+      </p:sp>
+      <p:sp>
+        <p:nvSpPr>
+          <p:cNvPr id="14" name="">
+            <a:extLst xmlns:a="http://schemas.openxmlformats.org/drawingml/2006/main">
+              <a:ext uri="{FF2B5EF4-FFF2-40B4-BE49-F238E27FC236}">
+                <a16:creationId xmlns:a16="http://schemas.microsoft.com/office/drawing/2014/main" id="{29263262-901C-407A-A21E-62048894DC86}"/>
+              </a:ext>
+            </a:extLst>
+          </p:cNvPr>
+          <p:cNvSpPr>
+            <a:spLocks xmlns:a="http://schemas.openxmlformats.org/drawingml/2006/main" noGrp="1"/>
+          </p:cNvSpPr>
+          <p:nvPr/>
+        </p:nvSpPr>
+        <p:spPr>
+          <a:xfrm xmlns:a="http://schemas.openxmlformats.org/drawingml/2006/main">
+            <a:off x="9201150" y="4114800"/>
+            <a:ext cx="2152650" cy="552450"/>
+          </a:xfrm>
+          <a:prstGeom xmlns:a="http://schemas.openxmlformats.org/drawingml/2006/main" prst="rect">
+            <a:avLst/>
+          </a:prstGeom>
+          <a:noFill xmlns:a="http://schemas.openxmlformats.org/drawingml/2006/main"/>
+          <a:ln xmlns:a="http://schemas.openxmlformats.org/drawingml/2006/main" w="0">
+            <a:noFill/>
+            <a:prstDash val="solid"/>
+          </a:ln>
+        </p:spPr>
+        <p:txBody>
+          <a:bodyPr xmlns:a="http://schemas.openxmlformats.org/drawingml/2006/main" anchor="t"/>
+          <a:lstStyle xmlns:a="http://schemas.openxmlformats.org/drawingml/2006/main"/>
+          <a:p xmlns:a="http://schemas.openxmlformats.org/drawingml/2006/main">
+            <a:pPr algn="l">
+              <a:defRPr sz="1350" b="0">
+                <a:solidFill>
+                  <a:srgbClr val="24364B"/>
+                </a:solidFill>
+              </a:defRPr>
+            </a:pPr>
+            <a:r>
+              <a:rPr sz="1350" b="0">
+                <a:solidFill>
+                  <a:srgbClr val="24364B"/>
+                </a:solidFill>
+              </a:rPr>
+              <a:t>The cloud dominates the relationship.</a:t>
+            </a:r>
+          </a:p>
+        </p:txBody>
+      </p:sp>
+      <p:sp>
+        <p:nvSpPr>
+          <p:cNvPr id="15" name="">
+            <a:extLst xmlns:a="http://schemas.openxmlformats.org/drawingml/2006/main">
+              <a:ext uri="{FF2B5EF4-FFF2-40B4-BE49-F238E27FC236}">
+                <a16:creationId xmlns:a16="http://schemas.microsoft.com/office/drawing/2014/main" id="{A2A4B3E6-CADD-445D-973B-127147513337}"/>
+              </a:ext>
+            </a:extLst>
+          </p:cNvPr>
+          <p:cNvSpPr>
+            <a:spLocks xmlns:a="http://schemas.openxmlformats.org/drawingml/2006/main" noGrp="1"/>
+          </p:cNvSpPr>
+          <p:nvPr/>
+        </p:nvSpPr>
+        <p:spPr>
+          <a:xfrm xmlns:a="http://schemas.openxmlformats.org/drawingml/2006/main">
+            <a:off x="8972550" y="4924425"/>
+            <a:ext cx="85725" cy="85725"/>
+          </a:xfrm>
+          <a:prstGeom xmlns:a="http://schemas.openxmlformats.org/drawingml/2006/main" prst="rect">
+            <a:avLst/>
+          </a:prstGeom>
+          <a:solidFill xmlns:a="http://schemas.openxmlformats.org/drawingml/2006/main">
+            <a:srgbClr val="14866D"/>
+          </a:solidFill>
+          <a:ln xmlns:a="http://schemas.openxmlformats.org/drawingml/2006/main" w="0">
+            <a:solidFill>
+              <a:srgbClr val="14866D"/>
+            </a:solidFill>
+            <a:prstDash val="solid"/>
+          </a:ln>
+        </p:spPr>
+      </p:sp>
+      <p:sp>
+        <p:nvSpPr>
+          <p:cNvPr id="16" name="">
+            <a:extLst xmlns:a="http://schemas.openxmlformats.org/drawingml/2006/main">
+              <a:ext uri="{FF2B5EF4-FFF2-40B4-BE49-F238E27FC236}">
+                <a16:creationId xmlns:a16="http://schemas.microsoft.com/office/drawing/2014/main" id="{880AF925-0ADE-49A8-964B-9BCB1F0E6476}"/>
+              </a:ext>
+            </a:extLst>
+          </p:cNvPr>
+          <p:cNvSpPr>
+            <a:spLocks xmlns:a="http://schemas.openxmlformats.org/drawingml/2006/main" noGrp="1"/>
+          </p:cNvSpPr>
+          <p:nvPr/>
+        </p:nvSpPr>
+        <p:spPr>
+          <a:xfrm xmlns:a="http://schemas.openxmlformats.org/drawingml/2006/main">
+            <a:off x="9201150" y="4838700"/>
+            <a:ext cx="2152650" cy="742950"/>
+          </a:xfrm>
+          <a:prstGeom xmlns:a="http://schemas.openxmlformats.org/drawingml/2006/main" prst="rect">
+            <a:avLst/>
+          </a:prstGeom>
+          <a:noFill xmlns:a="http://schemas.openxmlformats.org/drawingml/2006/main"/>
+          <a:ln xmlns:a="http://schemas.openxmlformats.org/drawingml/2006/main" w="0">
+            <a:noFill/>
+            <a:prstDash val="solid"/>
+          </a:ln>
+        </p:spPr>
+        <p:txBody>
+          <a:bodyPr xmlns:a="http://schemas.openxmlformats.org/drawingml/2006/main" anchor="t"/>
+          <a:lstStyle xmlns:a="http://schemas.openxmlformats.org/drawingml/2006/main"/>
+          <a:p xmlns:a="http://schemas.openxmlformats.org/drawingml/2006/main">
+            <a:pPr algn="l">
+              <a:defRPr sz="1350" b="0">
+                <a:solidFill>
+                  <a:srgbClr val="24364B"/>
+                </a:solidFill>
+              </a:defRPr>
+            </a:pPr>
+            <a:r>
+              <a:rPr sz="1350" b="0">
+                <a:solidFill>
+                  <a:srgbClr val="24364B"/>
+                </a:solidFill>
+              </a:rPr>
+              <a:t>The tails lean slightly in the direction of the opening move.</a:t>
+            </a:r>
+          </a:p>
+        </p:txBody>
+      </p:sp>
+    </p:spTree>
+    <p:extLst>
+      <p:ext uri="{BB962C8B-B14F-4D97-AF65-F5344CB8AC3E}">
+        <p14:creationId xmlns:p14="http://schemas.microsoft.com/office/powerpoint/2010/main" val="53736426"/>
+      </p:ext>
+    </p:extLst>
+  </p:cSld>
+</p:sld>
+</file>
+
+<file path=ppt/slides/slide31.xml><?xml version="1.0" encoding="utf-8"?>
+<p:sld xmlns:p="http://schemas.openxmlformats.org/presentationml/2006/main">
+  <p:cSld>
+    <p:bg>
+      <p:bgPr>
+        <a:solidFill xmlns:a="http://schemas.openxmlformats.org/drawingml/2006/main">
+          <a:srgbClr val="FFFFFF"/>
+        </a:solidFill>
+      </p:bgPr>
+    </p:bg>
+    <p:spTree>
+      <p:nvGrpSpPr>
+        <p:cNvPr id="1" name=""/>
+        <p:cNvGrpSpPr/>
+        <p:nvPr/>
+      </p:nvGrpSpPr>
+      <p:grpSpPr>
+        <a:xfrm xmlns:a="http://schemas.openxmlformats.org/drawingml/2006/main"/>
+      </p:grpSpPr>
+      <p:sp>
+        <p:nvSpPr>
+          <p:cNvPr id="7" name="">
+            <a:extLst xmlns:a="http://schemas.openxmlformats.org/drawingml/2006/main">
+              <a:ext uri="{FF2B5EF4-FFF2-40B4-BE49-F238E27FC236}">
+                <a16:creationId xmlns:a16="http://schemas.microsoft.com/office/drawing/2014/main" id="{2F9E870D-7A63-4233-9757-C1506A1B4B46}"/>
+              </a:ext>
+            </a:extLst>
+          </p:cNvPr>
+          <p:cNvSpPr>
+            <a:spLocks xmlns:a="http://schemas.openxmlformats.org/drawingml/2006/main" noGrp="1"/>
+          </p:cNvSpPr>
+          <p:nvPr/>
+        </p:nvSpPr>
+        <p:spPr>
+          <a:xfrm xmlns:a="http://schemas.openxmlformats.org/drawingml/2006/main">
+            <a:off x="457200" y="238125"/>
+            <a:ext cx="7239000" cy="190500"/>
+          </a:xfrm>
+          <a:prstGeom xmlns:a="http://schemas.openxmlformats.org/drawingml/2006/main" prst="rect">
+            <a:avLst/>
+          </a:prstGeom>
+          <a:noFill xmlns:a="http://schemas.openxmlformats.org/drawingml/2006/main"/>
+          <a:ln xmlns:a="http://schemas.openxmlformats.org/drawingml/2006/main" w="0">
+            <a:noFill/>
+            <a:prstDash val="solid"/>
+          </a:ln>
+        </p:spPr>
+        <p:txBody>
+          <a:bodyPr xmlns:a="http://schemas.openxmlformats.org/drawingml/2006/main" anchor="t"/>
+          <a:lstStyle xmlns:a="http://schemas.openxmlformats.org/drawingml/2006/main"/>
+          <a:p xmlns:a="http://schemas.openxmlformats.org/drawingml/2006/main">
+            <a:pPr algn="l">
+              <a:defRPr sz="1050" b="1">
+                <a:solidFill>
+                  <a:srgbClr val="667386"/>
+                </a:solidFill>
+              </a:defRPr>
+            </a:pPr>
+            <a:r>
+              <a:rPr sz="1050" b="1">
+                <a:solidFill>
+                  <a:srgbClr val="667386"/>
+                </a:solidFill>
+              </a:rPr>
+              <a:t>OPERATOR HYPOTHESIS LAB · NVDA INTRADAY OPENING RESPONSE</a:t>
+            </a:r>
+          </a:p>
+        </p:txBody>
+      </p:sp>
+      <p:sp>
+        <p:nvSpPr>
+          <p:cNvPr id="2" name="">
+            <a:extLst xmlns:a="http://schemas.openxmlformats.org/drawingml/2006/main">
+              <a:ext uri="{FF2B5EF4-FFF2-40B4-BE49-F238E27FC236}">
+                <a16:creationId xmlns:a16="http://schemas.microsoft.com/office/drawing/2014/main" id="{538A616B-AD38-4108-A466-9D8383ADFB8E}"/>
+              </a:ext>
+            </a:extLst>
+          </p:cNvPr>
+          <p:cNvSpPr>
+            <a:spLocks xmlns:a="http://schemas.openxmlformats.org/drawingml/2006/main" noGrp="1"/>
+          </p:cNvSpPr>
+          <p:nvPr/>
+        </p:nvSpPr>
+        <p:spPr>
+          <a:xfrm xmlns:a="http://schemas.openxmlformats.org/drawingml/2006/main">
+            <a:off x="457200" y="523875"/>
+            <a:ext cx="11049000" cy="590550"/>
+          </a:xfrm>
+          <a:prstGeom xmlns:a="http://schemas.openxmlformats.org/drawingml/2006/main" prst="rect">
+            <a:avLst/>
+          </a:prstGeom>
+          <a:noFill xmlns:a="http://schemas.openxmlformats.org/drawingml/2006/main"/>
+          <a:ln xmlns:a="http://schemas.openxmlformats.org/drawingml/2006/main" w="0">
+            <a:noFill/>
+            <a:prstDash val="solid"/>
+          </a:ln>
+        </p:spPr>
+        <p:txBody>
+          <a:bodyPr xmlns:a="http://schemas.openxmlformats.org/drawingml/2006/main" anchor="t"/>
+          <a:lstStyle xmlns:a="http://schemas.openxmlformats.org/drawingml/2006/main"/>
+          <a:p xmlns:a="http://schemas.openxmlformats.org/drawingml/2006/main">
+            <a:pPr algn="l">
+              <a:defRPr sz="2925" b="1">
+                <a:solidFill>
+                  <a:srgbClr val="000000"/>
+                </a:solidFill>
+              </a:defRPr>
+            </a:pPr>
+            <a:r>
+              <a:rPr sz="2925" b="1">
+                <a:solidFill>
+                  <a:srgbClr val="000000"/>
+                </a:solidFill>
+              </a:rPr>
+              <a:t>Tail averages separate, but individual outcomes overlap heavily</a:t>
+            </a:r>
+          </a:p>
+        </p:txBody>
+      </p:sp>
+      <p:sp>
+        <p:nvSpPr>
+          <p:cNvPr id="3" name="">
+            <a:extLst xmlns:a="http://schemas.openxmlformats.org/drawingml/2006/main">
+              <a:ext uri="{FF2B5EF4-FFF2-40B4-BE49-F238E27FC236}">
+                <a16:creationId xmlns:a16="http://schemas.microsoft.com/office/drawing/2014/main" id="{12EA13F9-D0A2-4CD4-9B92-29F89A157AB0}"/>
+              </a:ext>
+            </a:extLst>
+          </p:cNvPr>
+          <p:cNvSpPr>
+            <a:spLocks xmlns:a="http://schemas.openxmlformats.org/drawingml/2006/main" noGrp="1"/>
+          </p:cNvSpPr>
+          <p:nvPr/>
+        </p:nvSpPr>
+        <p:spPr>
+          <a:xfrm xmlns:a="http://schemas.openxmlformats.org/drawingml/2006/main">
+            <a:off x="457200" y="1219200"/>
+            <a:ext cx="11277600" cy="19050"/>
+          </a:xfrm>
+          <a:prstGeom xmlns:a="http://schemas.openxmlformats.org/drawingml/2006/main" prst="rect">
+            <a:avLst/>
+          </a:prstGeom>
+          <a:solidFill xmlns:a="http://schemas.openxmlformats.org/drawingml/2006/main">
+            <a:srgbClr val="B8BCC4"/>
+          </a:solidFill>
+          <a:ln xmlns:a="http://schemas.openxmlformats.org/drawingml/2006/main" w="0">
+            <a:solidFill>
+              <a:srgbClr val="B8BCC4"/>
+            </a:solidFill>
+            <a:prstDash val="solid"/>
+          </a:ln>
+        </p:spPr>
+      </p:sp>
+      <p:sp>
+        <p:nvSpPr>
+          <p:cNvPr id="4" name="">
+            <a:extLst xmlns:a="http://schemas.openxmlformats.org/drawingml/2006/main">
+              <a:ext uri="{FF2B5EF4-FFF2-40B4-BE49-F238E27FC236}">
+                <a16:creationId xmlns:a16="http://schemas.microsoft.com/office/drawing/2014/main" id="{C2D87746-A2ED-4BA4-AFBA-C3B175296DAF}"/>
+              </a:ext>
+            </a:extLst>
+          </p:cNvPr>
+          <p:cNvSpPr>
+            <a:spLocks xmlns:a="http://schemas.openxmlformats.org/drawingml/2006/main" noGrp="1"/>
+          </p:cNvSpPr>
+          <p:nvPr/>
+        </p:nvSpPr>
+        <p:spPr>
+          <a:xfrm xmlns:a="http://schemas.openxmlformats.org/drawingml/2006/main">
+            <a:off x="457200" y="6515100"/>
+            <a:ext cx="7810500" cy="161925"/>
+          </a:xfrm>
+          <a:prstGeom xmlns:a="http://schemas.openxmlformats.org/drawingml/2006/main" prst="rect">
+            <a:avLst/>
+          </a:prstGeom>
+          <a:noFill xmlns:a="http://schemas.openxmlformats.org/drawingml/2006/main"/>
+          <a:ln xmlns:a="http://schemas.openxmlformats.org/drawingml/2006/main" w="0">
+            <a:noFill/>
+            <a:prstDash val="solid"/>
+          </a:ln>
+        </p:spPr>
+        <p:txBody>
+          <a:bodyPr xmlns:a="http://schemas.openxmlformats.org/drawingml/2006/main" anchor="t"/>
+          <a:lstStyle xmlns:a="http://schemas.openxmlformats.org/drawingml/2006/main"/>
+          <a:p xmlns:a="http://schemas.openxmlformats.org/drawingml/2006/main">
+            <a:pPr algn="l">
+              <a:defRPr sz="900" b="0">
+                <a:solidFill>
+                  <a:srgbClr val="667386"/>
+                </a:solidFill>
+              </a:defRPr>
+            </a:pPr>
+            <a:r>
+              <a:rPr sz="900" b="0">
+                <a:solidFill>
+                  <a:srgbClr val="667386"/>
+                </a:solidFill>
+              </a:rPr>
+              <a:t>Descriptive research · 1,487 full sessions · frozen 2018-01-02–2023-12-29</a:t>
+            </a:r>
+          </a:p>
+        </p:txBody>
+      </p:sp>
+      <p:sp>
+        <p:nvSpPr>
+          <p:cNvPr id="5" name="">
+            <a:extLst xmlns:a="http://schemas.openxmlformats.org/drawingml/2006/main">
+              <a:ext uri="{FF2B5EF4-FFF2-40B4-BE49-F238E27FC236}">
+                <a16:creationId xmlns:a16="http://schemas.microsoft.com/office/drawing/2014/main" id="{29D91DF4-1BD6-439E-8230-4892A999CDC5}"/>
+              </a:ext>
+            </a:extLst>
+          </p:cNvPr>
+          <p:cNvSpPr>
+            <a:spLocks xmlns:a="http://schemas.openxmlformats.org/drawingml/2006/main" noGrp="1"/>
+          </p:cNvSpPr>
+          <p:nvPr/>
+        </p:nvSpPr>
+        <p:spPr>
+          <a:xfrm xmlns:a="http://schemas.openxmlformats.org/drawingml/2006/main">
+            <a:off x="10858500" y="6496050"/>
+            <a:ext cx="876300" cy="171450"/>
+          </a:xfrm>
+          <a:prstGeom xmlns:a="http://schemas.openxmlformats.org/drawingml/2006/main" prst="rect">
+            <a:avLst/>
+          </a:prstGeom>
+          <a:noFill xmlns:a="http://schemas.openxmlformats.org/drawingml/2006/main"/>
+          <a:ln xmlns:a="http://schemas.openxmlformats.org/drawingml/2006/main" w="0">
+            <a:noFill/>
+            <a:prstDash val="solid"/>
+          </a:ln>
+        </p:spPr>
+        <p:txBody>
+          <a:bodyPr xmlns:a="http://schemas.openxmlformats.org/drawingml/2006/main" anchor="t"/>
+          <a:lstStyle xmlns:a="http://schemas.openxmlformats.org/drawingml/2006/main"/>
+          <a:p xmlns:a="http://schemas.openxmlformats.org/drawingml/2006/main">
+            <a:pPr algn="r">
+              <a:defRPr sz="900" b="0">
+                <a:solidFill>
+                  <a:srgbClr val="667386"/>
+                </a:solidFill>
+              </a:defRPr>
+            </a:pPr>
+            <a:r>
+              <a:rPr sz="900" b="0">
+                <a:solidFill>
+                  <a:srgbClr val="667386"/>
+                </a:solidFill>
+              </a:rPr>
+              <a:t>31</a:t>
+            </a:r>
+          </a:p>
+        </p:txBody>
+      </p:sp>
+      <p:pic>
+        <p:nvPicPr>
+          <p:cNvPr id="12" name=""/>
+          <p:cNvPicPr>
+            <a:picLocks xmlns:a="http://schemas.openxmlformats.org/drawingml/2006/main" noChangeAspect="1"/>
+          </p:cNvPicPr>
+          <p:nvPr/>
+        </p:nvPicPr>
+        <p:blipFill>
+          <a:blip xmlns:r="http://schemas.openxmlformats.org/officeDocument/2006/relationships" xmlns:a="http://schemas.openxmlformats.org/drawingml/2006/main" r:embed="Rca38c27e7f6b4d1b"/>
+          <a:stretch xmlns:a="http://schemas.openxmlformats.org/drawingml/2006/main"/>
+        </p:blipFill>
+        <p:spPr>
+          <a:xfrm xmlns:a="http://schemas.openxmlformats.org/drawingml/2006/main">
+            <a:off x="2356104" y="1371600"/>
+            <a:ext cx="7441692" cy="4895850"/>
+          </a:xfrm>
+          <a:prstGeom xmlns:a="http://schemas.openxmlformats.org/drawingml/2006/main" prst="rect">
+            <a:avLst/>
+          </a:prstGeom>
+        </p:spPr>
+      </p:pic>
+    </p:spTree>
+    <p:extLst>
+      <p:ext uri="{BB962C8B-B14F-4D97-AF65-F5344CB8AC3E}">
+        <p14:creationId xmlns:p14="http://schemas.microsoft.com/office/powerpoint/2010/main" val="1616362873"/>
+      </p:ext>
+    </p:extLst>
+  </p:cSld>
+</p:sld>
+</file>
+
+<file path=ppt/slides/slide32.xml><?xml version="1.0" encoding="utf-8"?>
+<p:sld xmlns:p="http://schemas.openxmlformats.org/presentationml/2006/main">
+  <p:cSld>
+    <p:bg>
+      <p:bgPr>
+        <a:solidFill xmlns:a="http://schemas.openxmlformats.org/drawingml/2006/main">
+          <a:srgbClr val="FFFFFF"/>
+        </a:solidFill>
+      </p:bgPr>
+    </p:bg>
+    <p:spTree>
+      <p:nvGrpSpPr>
+        <p:cNvPr id="1" name=""/>
+        <p:cNvGrpSpPr/>
+        <p:nvPr/>
+      </p:nvGrpSpPr>
+      <p:grpSpPr>
+        <a:xfrm xmlns:a="http://schemas.openxmlformats.org/drawingml/2006/main"/>
+      </p:grpSpPr>
+      <p:sp>
+        <p:nvSpPr>
+          <p:cNvPr id="7" name="">
+            <a:extLst xmlns:a="http://schemas.openxmlformats.org/drawingml/2006/main">
+              <a:ext uri="{FF2B5EF4-FFF2-40B4-BE49-F238E27FC236}">
+                <a16:creationId xmlns:a16="http://schemas.microsoft.com/office/drawing/2014/main" id="{397C968A-4B14-4BF1-A5B0-7140A489FAF7}"/>
+              </a:ext>
+            </a:extLst>
+          </p:cNvPr>
+          <p:cNvSpPr>
+            <a:spLocks xmlns:a="http://schemas.openxmlformats.org/drawingml/2006/main" noGrp="1"/>
+          </p:cNvSpPr>
+          <p:nvPr/>
+        </p:nvSpPr>
+        <p:spPr>
+          <a:xfrm xmlns:a="http://schemas.openxmlformats.org/drawingml/2006/main">
+            <a:off x="457200" y="238125"/>
+            <a:ext cx="7239000" cy="190500"/>
+          </a:xfrm>
+          <a:prstGeom xmlns:a="http://schemas.openxmlformats.org/drawingml/2006/main" prst="rect">
+            <a:avLst/>
+          </a:prstGeom>
+          <a:noFill xmlns:a="http://schemas.openxmlformats.org/drawingml/2006/main"/>
+          <a:ln xmlns:a="http://schemas.openxmlformats.org/drawingml/2006/main" w="0">
+            <a:noFill/>
+            <a:prstDash val="solid"/>
+          </a:ln>
+        </p:spPr>
+        <p:txBody>
+          <a:bodyPr xmlns:a="http://schemas.openxmlformats.org/drawingml/2006/main" anchor="t"/>
+          <a:lstStyle xmlns:a="http://schemas.openxmlformats.org/drawingml/2006/main"/>
+          <a:p xmlns:a="http://schemas.openxmlformats.org/drawingml/2006/main">
+            <a:pPr algn="l">
+              <a:defRPr sz="1050" b="1">
+                <a:solidFill>
+                  <a:srgbClr val="667386"/>
+                </a:solidFill>
+              </a:defRPr>
+            </a:pPr>
+            <a:r>
+              <a:rPr sz="1050" b="1">
+                <a:solidFill>
+                  <a:srgbClr val="667386"/>
+                </a:solidFill>
+              </a:rPr>
+              <a:t>OPERATOR HYPOTHESIS LAB · NVDA INTRADAY OPENING RESPONSE</a:t>
+            </a:r>
+          </a:p>
+        </p:txBody>
+      </p:sp>
+      <p:sp>
+        <p:nvSpPr>
+          <p:cNvPr id="2" name="">
+            <a:extLst xmlns:a="http://schemas.openxmlformats.org/drawingml/2006/main">
+              <a:ext uri="{FF2B5EF4-FFF2-40B4-BE49-F238E27FC236}">
+                <a16:creationId xmlns:a16="http://schemas.microsoft.com/office/drawing/2014/main" id="{037E6238-C8D2-4F4B-A457-10DF9AE2F3AA}"/>
+              </a:ext>
+            </a:extLst>
+          </p:cNvPr>
+          <p:cNvSpPr>
+            <a:spLocks xmlns:a="http://schemas.openxmlformats.org/drawingml/2006/main" noGrp="1"/>
+          </p:cNvSpPr>
+          <p:nvPr/>
+        </p:nvSpPr>
+        <p:spPr>
+          <a:xfrm xmlns:a="http://schemas.openxmlformats.org/drawingml/2006/main">
+            <a:off x="457200" y="523875"/>
+            <a:ext cx="11049000" cy="590550"/>
+          </a:xfrm>
+          <a:prstGeom xmlns:a="http://schemas.openxmlformats.org/drawingml/2006/main" prst="rect">
+            <a:avLst/>
+          </a:prstGeom>
+          <a:noFill xmlns:a="http://schemas.openxmlformats.org/drawingml/2006/main"/>
+          <a:ln xmlns:a="http://schemas.openxmlformats.org/drawingml/2006/main" w="0">
+            <a:noFill/>
+            <a:prstDash val="solid"/>
+          </a:ln>
+        </p:spPr>
+        <p:txBody>
+          <a:bodyPr xmlns:a="http://schemas.openxmlformats.org/drawingml/2006/main" anchor="t"/>
+          <a:lstStyle xmlns:a="http://schemas.openxmlformats.org/drawingml/2006/main"/>
+          <a:p xmlns:a="http://schemas.openxmlformats.org/drawingml/2006/main">
+            <a:pPr algn="l">
+              <a:defRPr sz="2925" b="1">
+                <a:solidFill>
+                  <a:srgbClr val="000000"/>
+                </a:solidFill>
+              </a:defRPr>
+            </a:pPr>
+            <a:r>
+              <a:rPr sz="2925" b="1">
+                <a:solidFill>
+                  <a:srgbClr val="000000"/>
+                </a:solidFill>
+              </a:rPr>
+              <a:t>The directional tilt develops gradually after 10:00</a:t>
+            </a:r>
+          </a:p>
+        </p:txBody>
+      </p:sp>
+      <p:sp>
+        <p:nvSpPr>
+          <p:cNvPr id="3" name="">
+            <a:extLst xmlns:a="http://schemas.openxmlformats.org/drawingml/2006/main">
+              <a:ext uri="{FF2B5EF4-FFF2-40B4-BE49-F238E27FC236}">
+                <a16:creationId xmlns:a16="http://schemas.microsoft.com/office/drawing/2014/main" id="{FB6B218E-E590-4419-87BC-5A1EA184DE15}"/>
+              </a:ext>
+            </a:extLst>
+          </p:cNvPr>
+          <p:cNvSpPr>
+            <a:spLocks xmlns:a="http://schemas.openxmlformats.org/drawingml/2006/main" noGrp="1"/>
+          </p:cNvSpPr>
+          <p:nvPr/>
+        </p:nvSpPr>
+        <p:spPr>
+          <a:xfrm xmlns:a="http://schemas.openxmlformats.org/drawingml/2006/main">
+            <a:off x="457200" y="1219200"/>
+            <a:ext cx="11277600" cy="19050"/>
+          </a:xfrm>
+          <a:prstGeom xmlns:a="http://schemas.openxmlformats.org/drawingml/2006/main" prst="rect">
+            <a:avLst/>
+          </a:prstGeom>
+          <a:solidFill xmlns:a="http://schemas.openxmlformats.org/drawingml/2006/main">
+            <a:srgbClr val="B8BCC4"/>
+          </a:solidFill>
+          <a:ln xmlns:a="http://schemas.openxmlformats.org/drawingml/2006/main" w="0">
+            <a:solidFill>
+              <a:srgbClr val="B8BCC4"/>
+            </a:solidFill>
+            <a:prstDash val="solid"/>
+          </a:ln>
+        </p:spPr>
+      </p:sp>
+      <p:sp>
+        <p:nvSpPr>
+          <p:cNvPr id="4" name="">
+            <a:extLst xmlns:a="http://schemas.openxmlformats.org/drawingml/2006/main">
+              <a:ext uri="{FF2B5EF4-FFF2-40B4-BE49-F238E27FC236}">
+                <a16:creationId xmlns:a16="http://schemas.microsoft.com/office/drawing/2014/main" id="{AD7205B9-840B-40CD-BC73-96E189D2628E}"/>
+              </a:ext>
+            </a:extLst>
+          </p:cNvPr>
+          <p:cNvSpPr>
+            <a:spLocks xmlns:a="http://schemas.openxmlformats.org/drawingml/2006/main" noGrp="1"/>
+          </p:cNvSpPr>
+          <p:nvPr/>
+        </p:nvSpPr>
+        <p:spPr>
+          <a:xfrm xmlns:a="http://schemas.openxmlformats.org/drawingml/2006/main">
+            <a:off x="457200" y="6515100"/>
+            <a:ext cx="7810500" cy="161925"/>
+          </a:xfrm>
+          <a:prstGeom xmlns:a="http://schemas.openxmlformats.org/drawingml/2006/main" prst="rect">
+            <a:avLst/>
+          </a:prstGeom>
+          <a:noFill xmlns:a="http://schemas.openxmlformats.org/drawingml/2006/main"/>
+          <a:ln xmlns:a="http://schemas.openxmlformats.org/drawingml/2006/main" w="0">
+            <a:noFill/>
+            <a:prstDash val="solid"/>
+          </a:ln>
+        </p:spPr>
+        <p:txBody>
+          <a:bodyPr xmlns:a="http://schemas.openxmlformats.org/drawingml/2006/main" anchor="t"/>
+          <a:lstStyle xmlns:a="http://schemas.openxmlformats.org/drawingml/2006/main"/>
+          <a:p xmlns:a="http://schemas.openxmlformats.org/drawingml/2006/main">
+            <a:pPr algn="l">
+              <a:defRPr sz="900" b="0">
+                <a:solidFill>
+                  <a:srgbClr val="667386"/>
+                </a:solidFill>
+              </a:defRPr>
+            </a:pPr>
+            <a:r>
+              <a:rPr sz="900" b="0">
+                <a:solidFill>
+                  <a:srgbClr val="667386"/>
+                </a:solidFill>
+              </a:rPr>
+              <a:t>Descriptive research · 1,487 full sessions · frozen 2018-01-02–2023-12-29</a:t>
+            </a:r>
+          </a:p>
+        </p:txBody>
+      </p:sp>
+      <p:sp>
+        <p:nvSpPr>
+          <p:cNvPr id="5" name="">
+            <a:extLst xmlns:a="http://schemas.openxmlformats.org/drawingml/2006/main">
+              <a:ext uri="{FF2B5EF4-FFF2-40B4-BE49-F238E27FC236}">
+                <a16:creationId xmlns:a16="http://schemas.microsoft.com/office/drawing/2014/main" id="{CDD50D04-D778-4AC3-B3F9-1D7B98098615}"/>
+              </a:ext>
+            </a:extLst>
+          </p:cNvPr>
+          <p:cNvSpPr>
+            <a:spLocks xmlns:a="http://schemas.openxmlformats.org/drawingml/2006/main" noGrp="1"/>
+          </p:cNvSpPr>
+          <p:nvPr/>
+        </p:nvSpPr>
+        <p:spPr>
+          <a:xfrm xmlns:a="http://schemas.openxmlformats.org/drawingml/2006/main">
+            <a:off x="10858500" y="6496050"/>
+            <a:ext cx="876300" cy="171450"/>
+          </a:xfrm>
+          <a:prstGeom xmlns:a="http://schemas.openxmlformats.org/drawingml/2006/main" prst="rect">
+            <a:avLst/>
+          </a:prstGeom>
+          <a:noFill xmlns:a="http://schemas.openxmlformats.org/drawingml/2006/main"/>
+          <a:ln xmlns:a="http://schemas.openxmlformats.org/drawingml/2006/main" w="0">
+            <a:noFill/>
+            <a:prstDash val="solid"/>
+          </a:ln>
+        </p:spPr>
+        <p:txBody>
+          <a:bodyPr xmlns:a="http://schemas.openxmlformats.org/drawingml/2006/main" anchor="t"/>
+          <a:lstStyle xmlns:a="http://schemas.openxmlformats.org/drawingml/2006/main"/>
+          <a:p xmlns:a="http://schemas.openxmlformats.org/drawingml/2006/main">
+            <a:pPr algn="r">
+              <a:defRPr sz="900" b="0">
+                <a:solidFill>
+                  <a:srgbClr val="667386"/>
+                </a:solidFill>
+              </a:defRPr>
+            </a:pPr>
+            <a:r>
+              <a:rPr sz="900" b="0">
+                <a:solidFill>
+                  <a:srgbClr val="667386"/>
+                </a:solidFill>
+              </a:rPr>
+              <a:t>32</a:t>
+            </a:r>
+          </a:p>
+        </p:txBody>
+      </p:sp>
+      <p:pic>
+        <p:nvPicPr>
+          <p:cNvPr id="12" name=""/>
+          <p:cNvPicPr>
+            <a:picLocks xmlns:a="http://schemas.openxmlformats.org/drawingml/2006/main" noChangeAspect="1"/>
+          </p:cNvPicPr>
+          <p:nvPr/>
+        </p:nvPicPr>
+        <p:blipFill>
+          <a:blip xmlns:r="http://schemas.openxmlformats.org/officeDocument/2006/relationships" xmlns:a="http://schemas.openxmlformats.org/drawingml/2006/main" r:embed="R1242afab3fbd4e71"/>
+          <a:stretch xmlns:a="http://schemas.openxmlformats.org/drawingml/2006/main"/>
+        </p:blipFill>
+        <p:spPr>
+          <a:xfrm xmlns:a="http://schemas.openxmlformats.org/drawingml/2006/main">
+            <a:off x="2356104" y="1371600"/>
+            <a:ext cx="7441692" cy="4895850"/>
+          </a:xfrm>
+          <a:prstGeom xmlns:a="http://schemas.openxmlformats.org/drawingml/2006/main" prst="rect">
+            <a:avLst/>
+          </a:prstGeom>
+        </p:spPr>
+      </p:pic>
+    </p:spTree>
+    <p:extLst>
+      <p:ext uri="{BB962C8B-B14F-4D97-AF65-F5344CB8AC3E}">
+        <p14:creationId xmlns:p14="http://schemas.microsoft.com/office/powerpoint/2010/main" val="1983161129"/>
+      </p:ext>
+    </p:extLst>
+  </p:cSld>
+</p:sld>
+</file>
+
+<file path=ppt/slides/slide33.xml><?xml version="1.0" encoding="utf-8"?>
+<p:sld xmlns:p="http://schemas.openxmlformats.org/presentationml/2006/main">
+  <p:cSld>
+    <p:bg>
+      <p:bgPr>
+        <a:solidFill xmlns:a="http://schemas.openxmlformats.org/drawingml/2006/main">
+          <a:srgbClr val="FFFFFF"/>
+        </a:solidFill>
+      </p:bgPr>
+    </p:bg>
+    <p:spTree>
+      <p:nvGrpSpPr>
+        <p:cNvPr id="1" name=""/>
+        <p:cNvGrpSpPr/>
+        <p:nvPr/>
+      </p:nvGrpSpPr>
+      <p:grpSpPr>
+        <a:xfrm xmlns:a="http://schemas.openxmlformats.org/drawingml/2006/main"/>
+      </p:grpSpPr>
+      <p:sp>
+        <p:nvSpPr>
+          <p:cNvPr id="17" name="">
+            <a:extLst xmlns:a="http://schemas.openxmlformats.org/drawingml/2006/main">
+              <a:ext uri="{FF2B5EF4-FFF2-40B4-BE49-F238E27FC236}">
+                <a16:creationId xmlns:a16="http://schemas.microsoft.com/office/drawing/2014/main" id="{E60B0189-6B04-45C4-BCF1-C6E98091BD7C}"/>
+              </a:ext>
+            </a:extLst>
+          </p:cNvPr>
+          <p:cNvSpPr>
+            <a:spLocks xmlns:a="http://schemas.openxmlformats.org/drawingml/2006/main" noGrp="1"/>
+          </p:cNvSpPr>
+          <p:nvPr/>
+        </p:nvSpPr>
+        <p:spPr>
+          <a:xfrm xmlns:a="http://schemas.openxmlformats.org/drawingml/2006/main">
+            <a:off x="457200" y="238125"/>
+            <a:ext cx="7239000" cy="190500"/>
+          </a:xfrm>
+          <a:prstGeom xmlns:a="http://schemas.openxmlformats.org/drawingml/2006/main" prst="rect">
+            <a:avLst/>
+          </a:prstGeom>
+          <a:noFill xmlns:a="http://schemas.openxmlformats.org/drawingml/2006/main"/>
+          <a:ln xmlns:a="http://schemas.openxmlformats.org/drawingml/2006/main" w="0">
+            <a:noFill/>
+            <a:prstDash val="solid"/>
+          </a:ln>
+        </p:spPr>
+        <p:txBody>
+          <a:bodyPr xmlns:a="http://schemas.openxmlformats.org/drawingml/2006/main" anchor="t"/>
+          <a:lstStyle xmlns:a="http://schemas.openxmlformats.org/drawingml/2006/main"/>
+          <a:p xmlns:a="http://schemas.openxmlformats.org/drawingml/2006/main">
+            <a:pPr algn="l">
+              <a:defRPr sz="1050" b="1">
+                <a:solidFill>
+                  <a:srgbClr val="667386"/>
+                </a:solidFill>
+              </a:defRPr>
+            </a:pPr>
+            <a:r>
+              <a:rPr sz="1050" b="1">
+                <a:solidFill>
+                  <a:srgbClr val="667386"/>
+                </a:solidFill>
+              </a:rPr>
+              <a:t>OPERATOR HYPOTHESIS LAB · NVDA INTRADAY OPENING RESPONSE</a:t>
+            </a:r>
+          </a:p>
+        </p:txBody>
+      </p:sp>
+      <p:sp>
+        <p:nvSpPr>
+          <p:cNvPr id="2" name="">
+            <a:extLst xmlns:a="http://schemas.openxmlformats.org/drawingml/2006/main">
+              <a:ext uri="{FF2B5EF4-FFF2-40B4-BE49-F238E27FC236}">
+                <a16:creationId xmlns:a16="http://schemas.microsoft.com/office/drawing/2014/main" id="{A43DEFDB-34B2-4A49-8165-411F4AE92F55}"/>
+              </a:ext>
+            </a:extLst>
+          </p:cNvPr>
+          <p:cNvSpPr>
+            <a:spLocks xmlns:a="http://schemas.openxmlformats.org/drawingml/2006/main" noGrp="1"/>
+          </p:cNvSpPr>
+          <p:nvPr/>
+        </p:nvSpPr>
+        <p:spPr>
+          <a:xfrm xmlns:a="http://schemas.openxmlformats.org/drawingml/2006/main">
+            <a:off x="457200" y="523875"/>
+            <a:ext cx="11049000" cy="590550"/>
+          </a:xfrm>
+          <a:prstGeom xmlns:a="http://schemas.openxmlformats.org/drawingml/2006/main" prst="rect">
+            <a:avLst/>
+          </a:prstGeom>
+          <a:noFill xmlns:a="http://schemas.openxmlformats.org/drawingml/2006/main"/>
+          <a:ln xmlns:a="http://schemas.openxmlformats.org/drawingml/2006/main" w="0">
+            <a:noFill/>
+            <a:prstDash val="solid"/>
+          </a:ln>
+        </p:spPr>
+        <p:txBody>
+          <a:bodyPr xmlns:a="http://schemas.openxmlformats.org/drawingml/2006/main" anchor="t"/>
+          <a:lstStyle xmlns:a="http://schemas.openxmlformats.org/drawingml/2006/main"/>
+          <a:p xmlns:a="http://schemas.openxmlformats.org/drawingml/2006/main">
+            <a:pPr algn="l">
+              <a:defRPr sz="2925" b="1">
+                <a:solidFill>
+                  <a:srgbClr val="000000"/>
+                </a:solidFill>
+              </a:defRPr>
+            </a:pPr>
+            <a:r>
+              <a:rPr sz="2925" b="1">
+                <a:solidFill>
+                  <a:srgbClr val="000000"/>
+                </a:solidFill>
+              </a:rPr>
+              <a:t>Prior-day ATR% is the clearest descriptive discriminator</a:t>
+            </a:r>
+          </a:p>
+        </p:txBody>
+      </p:sp>
+      <p:sp>
+        <p:nvSpPr>
+          <p:cNvPr id="3" name="">
+            <a:extLst xmlns:a="http://schemas.openxmlformats.org/drawingml/2006/main">
+              <a:ext uri="{FF2B5EF4-FFF2-40B4-BE49-F238E27FC236}">
+                <a16:creationId xmlns:a16="http://schemas.microsoft.com/office/drawing/2014/main" id="{3C836AEC-7413-4810-A143-0B6108FE2FFF}"/>
+              </a:ext>
+            </a:extLst>
+          </p:cNvPr>
+          <p:cNvSpPr>
+            <a:spLocks xmlns:a="http://schemas.openxmlformats.org/drawingml/2006/main" noGrp="1"/>
+          </p:cNvSpPr>
+          <p:nvPr/>
+        </p:nvSpPr>
+        <p:spPr>
+          <a:xfrm xmlns:a="http://schemas.openxmlformats.org/drawingml/2006/main">
+            <a:off x="457200" y="1219200"/>
+            <a:ext cx="11277600" cy="19050"/>
+          </a:xfrm>
+          <a:prstGeom xmlns:a="http://schemas.openxmlformats.org/drawingml/2006/main" prst="rect">
+            <a:avLst/>
+          </a:prstGeom>
+          <a:solidFill xmlns:a="http://schemas.openxmlformats.org/drawingml/2006/main">
+            <a:srgbClr val="B8BCC4"/>
+          </a:solidFill>
+          <a:ln xmlns:a="http://schemas.openxmlformats.org/drawingml/2006/main" w="0">
+            <a:solidFill>
+              <a:srgbClr val="B8BCC4"/>
+            </a:solidFill>
+            <a:prstDash val="solid"/>
+          </a:ln>
+        </p:spPr>
+      </p:sp>
+      <p:sp>
+        <p:nvSpPr>
+          <p:cNvPr id="4" name="">
+            <a:extLst xmlns:a="http://schemas.openxmlformats.org/drawingml/2006/main">
+              <a:ext uri="{FF2B5EF4-FFF2-40B4-BE49-F238E27FC236}">
+                <a16:creationId xmlns:a16="http://schemas.microsoft.com/office/drawing/2014/main" id="{B4F05F3C-95DA-4C07-A479-A13F1F007ED2}"/>
+              </a:ext>
+            </a:extLst>
+          </p:cNvPr>
+          <p:cNvSpPr>
+            <a:spLocks xmlns:a="http://schemas.openxmlformats.org/drawingml/2006/main" noGrp="1"/>
+          </p:cNvSpPr>
+          <p:nvPr/>
+        </p:nvSpPr>
+        <p:spPr>
+          <a:xfrm xmlns:a="http://schemas.openxmlformats.org/drawingml/2006/main">
+            <a:off x="457200" y="6515100"/>
+            <a:ext cx="7810500" cy="161925"/>
+          </a:xfrm>
+          <a:prstGeom xmlns:a="http://schemas.openxmlformats.org/drawingml/2006/main" prst="rect">
+            <a:avLst/>
+          </a:prstGeom>
+          <a:noFill xmlns:a="http://schemas.openxmlformats.org/drawingml/2006/main"/>
+          <a:ln xmlns:a="http://schemas.openxmlformats.org/drawingml/2006/main" w="0">
+            <a:noFill/>
+            <a:prstDash val="solid"/>
+          </a:ln>
+        </p:spPr>
+        <p:txBody>
+          <a:bodyPr xmlns:a="http://schemas.openxmlformats.org/drawingml/2006/main" anchor="t"/>
+          <a:lstStyle xmlns:a="http://schemas.openxmlformats.org/drawingml/2006/main"/>
+          <a:p xmlns:a="http://schemas.openxmlformats.org/drawingml/2006/main">
+            <a:pPr algn="l">
+              <a:defRPr sz="900" b="0">
+                <a:solidFill>
+                  <a:srgbClr val="667386"/>
+                </a:solidFill>
+              </a:defRPr>
+            </a:pPr>
+            <a:r>
+              <a:rPr sz="900" b="0">
+                <a:solidFill>
+                  <a:srgbClr val="667386"/>
+                </a:solidFill>
+              </a:rPr>
+              <a:t>Descriptive research · 1,487 full sessions · frozen 2018-01-02–2023-12-29</a:t>
+            </a:r>
+          </a:p>
+        </p:txBody>
+      </p:sp>
+      <p:sp>
+        <p:nvSpPr>
+          <p:cNvPr id="5" name="">
+            <a:extLst xmlns:a="http://schemas.openxmlformats.org/drawingml/2006/main">
+              <a:ext uri="{FF2B5EF4-FFF2-40B4-BE49-F238E27FC236}">
+                <a16:creationId xmlns:a16="http://schemas.microsoft.com/office/drawing/2014/main" id="{7B358FB6-B070-4EF2-8E47-D44D8B946D47}"/>
+              </a:ext>
+            </a:extLst>
+          </p:cNvPr>
+          <p:cNvSpPr>
+            <a:spLocks xmlns:a="http://schemas.openxmlformats.org/drawingml/2006/main" noGrp="1"/>
+          </p:cNvSpPr>
+          <p:nvPr/>
+        </p:nvSpPr>
+        <p:spPr>
+          <a:xfrm xmlns:a="http://schemas.openxmlformats.org/drawingml/2006/main">
+            <a:off x="10858500" y="6496050"/>
+            <a:ext cx="876300" cy="171450"/>
+          </a:xfrm>
+          <a:prstGeom xmlns:a="http://schemas.openxmlformats.org/drawingml/2006/main" prst="rect">
+            <a:avLst/>
+          </a:prstGeom>
+          <a:noFill xmlns:a="http://schemas.openxmlformats.org/drawingml/2006/main"/>
+          <a:ln xmlns:a="http://schemas.openxmlformats.org/drawingml/2006/main" w="0">
+            <a:noFill/>
+            <a:prstDash val="solid"/>
+          </a:ln>
+        </p:spPr>
+        <p:txBody>
+          <a:bodyPr xmlns:a="http://schemas.openxmlformats.org/drawingml/2006/main" anchor="t"/>
+          <a:lstStyle xmlns:a="http://schemas.openxmlformats.org/drawingml/2006/main"/>
+          <a:p xmlns:a="http://schemas.openxmlformats.org/drawingml/2006/main">
+            <a:pPr algn="r">
+              <a:defRPr sz="900" b="0">
+                <a:solidFill>
+                  <a:srgbClr val="667386"/>
+                </a:solidFill>
+              </a:defRPr>
+            </a:pPr>
+            <a:r>
+              <a:rPr sz="900" b="0">
+                <a:solidFill>
+                  <a:srgbClr val="667386"/>
+                </a:solidFill>
+              </a:rPr>
+              <a:t>33</a:t>
+            </a:r>
+          </a:p>
+        </p:txBody>
+      </p:sp>
+      <p:pic>
+        <p:nvPicPr>
+          <p:cNvPr id="22" name=""/>
+          <p:cNvPicPr>
+            <a:picLocks xmlns:a="http://schemas.openxmlformats.org/drawingml/2006/main" noChangeAspect="1"/>
+          </p:cNvPicPr>
+          <p:nvPr/>
+        </p:nvPicPr>
+        <p:blipFill>
+          <a:blip xmlns:r="http://schemas.openxmlformats.org/officeDocument/2006/relationships" xmlns:a="http://schemas.openxmlformats.org/drawingml/2006/main" r:embed="R02d87d01c22c4b98"/>
+          <a:stretch xmlns:a="http://schemas.openxmlformats.org/drawingml/2006/main"/>
+        </p:blipFill>
+        <p:spPr>
+          <a:xfrm xmlns:a="http://schemas.openxmlformats.org/drawingml/2006/main">
+            <a:off x="323850" y="1512310"/>
+            <a:ext cx="8572500" cy="4481080"/>
+          </a:xfrm>
+          <a:prstGeom xmlns:a="http://schemas.openxmlformats.org/drawingml/2006/main" prst="rect">
+            <a:avLst/>
+          </a:prstGeom>
+        </p:spPr>
+      </p:pic>
+      <p:sp>
+        <p:nvSpPr>
+          <p:cNvPr id="7" name="">
+            <a:extLst xmlns:a="http://schemas.openxmlformats.org/drawingml/2006/main">
+              <a:ext uri="{FF2B5EF4-FFF2-40B4-BE49-F238E27FC236}">
+                <a16:creationId xmlns:a16="http://schemas.microsoft.com/office/drawing/2014/main" id="{EA75AB9C-CAFE-4C68-8F12-F8C46DDB3782}"/>
+              </a:ext>
+            </a:extLst>
+          </p:cNvPr>
+          <p:cNvSpPr>
+            <a:spLocks xmlns:a="http://schemas.openxmlformats.org/drawingml/2006/main" noGrp="1"/>
+          </p:cNvSpPr>
+          <p:nvPr/>
+        </p:nvSpPr>
+        <p:spPr>
+          <a:xfrm xmlns:a="http://schemas.openxmlformats.org/drawingml/2006/main">
+            <a:off x="9105900" y="1504950"/>
+            <a:ext cx="2533650" cy="4419600"/>
+          </a:xfrm>
+          <a:prstGeom xmlns:a="http://schemas.openxmlformats.org/drawingml/2006/main" prst="rect">
+            <a:avLst/>
+          </a:prstGeom>
+          <a:solidFill xmlns:a="http://schemas.openxmlformats.org/drawingml/2006/main">
+            <a:srgbClr val="F3F5F7"/>
+          </a:solidFill>
+          <a:ln xmlns:a="http://schemas.openxmlformats.org/drawingml/2006/main" w="0">
+            <a:solidFill>
+              <a:srgbClr val="F3F5F7"/>
+            </a:solidFill>
+            <a:prstDash val="solid"/>
+          </a:ln>
+        </p:spPr>
+      </p:sp>
+      <p:sp>
+        <p:nvSpPr>
+          <p:cNvPr id="8" name="">
+            <a:extLst xmlns:a="http://schemas.openxmlformats.org/drawingml/2006/main">
+              <a:ext uri="{FF2B5EF4-FFF2-40B4-BE49-F238E27FC236}">
+                <a16:creationId xmlns:a16="http://schemas.microsoft.com/office/drawing/2014/main" id="{C3265E0A-21BB-4888-9D56-CD423DE4C486}"/>
+              </a:ext>
+            </a:extLst>
+          </p:cNvPr>
+          <p:cNvSpPr>
+            <a:spLocks xmlns:a="http://schemas.openxmlformats.org/drawingml/2006/main" noGrp="1"/>
+          </p:cNvSpPr>
+          <p:nvPr/>
+        </p:nvSpPr>
+        <p:spPr>
+          <a:xfrm xmlns:a="http://schemas.openxmlformats.org/drawingml/2006/main">
+            <a:off x="9334500" y="1752600"/>
+            <a:ext cx="2076450" cy="285750"/>
+          </a:xfrm>
+          <a:prstGeom xmlns:a="http://schemas.openxmlformats.org/drawingml/2006/main" prst="rect">
+            <a:avLst/>
+          </a:prstGeom>
+          <a:noFill xmlns:a="http://schemas.openxmlformats.org/drawingml/2006/main"/>
+          <a:ln xmlns:a="http://schemas.openxmlformats.org/drawingml/2006/main" w="0">
+            <a:noFill/>
+            <a:prstDash val="solid"/>
+          </a:ln>
+        </p:spPr>
+        <p:txBody>
+          <a:bodyPr xmlns:a="http://schemas.openxmlformats.org/drawingml/2006/main" anchor="t"/>
+          <a:lstStyle xmlns:a="http://schemas.openxmlformats.org/drawingml/2006/main"/>
+          <a:p xmlns:a="http://schemas.openxmlformats.org/drawingml/2006/main">
+            <a:pPr algn="l">
+              <a:defRPr sz="1650" b="1">
+                <a:solidFill>
+                  <a:srgbClr val="000000"/>
+                </a:solidFill>
+              </a:defRPr>
+            </a:pPr>
+            <a:r>
+              <a:rPr sz="1650" b="1">
+                <a:solidFill>
+                  <a:srgbClr val="000000"/>
+                </a:solidFill>
+              </a:rPr>
+              <a:t>Top 20% opening</a:t>
+            </a:r>
+          </a:p>
+        </p:txBody>
+      </p:sp>
+      <p:sp>
+        <p:nvSpPr>
+          <p:cNvPr id="9" name="">
+            <a:extLst xmlns:a="http://schemas.openxmlformats.org/drawingml/2006/main">
+              <a:ext uri="{FF2B5EF4-FFF2-40B4-BE49-F238E27FC236}">
+                <a16:creationId xmlns:a16="http://schemas.microsoft.com/office/drawing/2014/main" id="{CB558F8E-3932-4E3B-87CF-698DA0E9BD7A}"/>
+              </a:ext>
+            </a:extLst>
+          </p:cNvPr>
+          <p:cNvSpPr>
+            <a:spLocks xmlns:a="http://schemas.openxmlformats.org/drawingml/2006/main" noGrp="1"/>
+          </p:cNvSpPr>
+          <p:nvPr/>
+        </p:nvSpPr>
+        <p:spPr>
+          <a:xfrm xmlns:a="http://schemas.openxmlformats.org/drawingml/2006/main">
+            <a:off x="9334500" y="2266950"/>
+            <a:ext cx="2076450" cy="419100"/>
+          </a:xfrm>
+          <a:prstGeom xmlns:a="http://schemas.openxmlformats.org/drawingml/2006/main" prst="rect">
+            <a:avLst/>
+          </a:prstGeom>
+          <a:noFill xmlns:a="http://schemas.openxmlformats.org/drawingml/2006/main"/>
+          <a:ln xmlns:a="http://schemas.openxmlformats.org/drawingml/2006/main" w="0">
+            <a:noFill/>
+            <a:prstDash val="solid"/>
+          </a:ln>
+        </p:spPr>
+        <p:txBody>
+          <a:bodyPr xmlns:a="http://schemas.openxmlformats.org/drawingml/2006/main" anchor="t"/>
+          <a:lstStyle xmlns:a="http://schemas.openxmlformats.org/drawingml/2006/main"/>
+          <a:p xmlns:a="http://schemas.openxmlformats.org/drawingml/2006/main">
+            <a:pPr algn="l">
+              <a:defRPr sz="2550" b="1">
+                <a:solidFill>
+                  <a:srgbClr val="14866D"/>
+                </a:solidFill>
+              </a:defRPr>
+            </a:pPr>
+            <a:r>
+              <a:rPr sz="2550" b="1">
+                <a:solidFill>
+                  <a:srgbClr val="14866D"/>
+                </a:solidFill>
+              </a:rPr>
+              <a:t>+0.38%</a:t>
+            </a:r>
+          </a:p>
+        </p:txBody>
+      </p:sp>
+      <p:sp>
+        <p:nvSpPr>
+          <p:cNvPr id="10" name="">
+            <a:extLst xmlns:a="http://schemas.openxmlformats.org/drawingml/2006/main">
+              <a:ext uri="{FF2B5EF4-FFF2-40B4-BE49-F238E27FC236}">
+                <a16:creationId xmlns:a16="http://schemas.microsoft.com/office/drawing/2014/main" id="{FB71BF2B-92EB-4C1A-A385-2E8944DE3DEB}"/>
+              </a:ext>
+            </a:extLst>
+          </p:cNvPr>
+          <p:cNvSpPr>
+            <a:spLocks xmlns:a="http://schemas.openxmlformats.org/drawingml/2006/main" noGrp="1"/>
+          </p:cNvSpPr>
+          <p:nvPr/>
+        </p:nvSpPr>
+        <p:spPr>
+          <a:xfrm xmlns:a="http://schemas.openxmlformats.org/drawingml/2006/main">
+            <a:off x="9334500" y="2705100"/>
+            <a:ext cx="2076450" cy="228600"/>
+          </a:xfrm>
+          <a:prstGeom xmlns:a="http://schemas.openxmlformats.org/drawingml/2006/main" prst="rect">
+            <a:avLst/>
+          </a:prstGeom>
+          <a:noFill xmlns:a="http://schemas.openxmlformats.org/drawingml/2006/main"/>
+          <a:ln xmlns:a="http://schemas.openxmlformats.org/drawingml/2006/main" w="0">
+            <a:noFill/>
+            <a:prstDash val="solid"/>
+          </a:ln>
+        </p:spPr>
+        <p:txBody>
+          <a:bodyPr xmlns:a="http://schemas.openxmlformats.org/drawingml/2006/main" anchor="t"/>
+          <a:lstStyle xmlns:a="http://schemas.openxmlformats.org/drawingml/2006/main"/>
+          <a:p xmlns:a="http://schemas.openxmlformats.org/drawingml/2006/main">
+            <a:pPr algn="l">
+              <a:defRPr sz="1200" b="1">
+                <a:solidFill>
+                  <a:srgbClr val="24364B"/>
+                </a:solidFill>
+              </a:defRPr>
+            </a:pPr>
+            <a:r>
+              <a:rPr sz="1200" b="1">
+                <a:solidFill>
+                  <a:srgbClr val="24364B"/>
+                </a:solidFill>
+              </a:rPr>
+              <a:t>LOW / MEDIUM ATR%</a:t>
+            </a:r>
+          </a:p>
+        </p:txBody>
+      </p:sp>
+      <p:sp>
+        <p:nvSpPr>
+          <p:cNvPr id="11" name="">
+            <a:extLst xmlns:a="http://schemas.openxmlformats.org/drawingml/2006/main">
+              <a:ext uri="{FF2B5EF4-FFF2-40B4-BE49-F238E27FC236}">
+                <a16:creationId xmlns:a16="http://schemas.microsoft.com/office/drawing/2014/main" id="{75CA29AD-2788-4EF9-8931-B20CC57A0074}"/>
+              </a:ext>
+            </a:extLst>
+          </p:cNvPr>
+          <p:cNvSpPr>
+            <a:spLocks xmlns:a="http://schemas.openxmlformats.org/drawingml/2006/main" noGrp="1"/>
+          </p:cNvSpPr>
+          <p:nvPr/>
+        </p:nvSpPr>
+        <p:spPr>
+          <a:xfrm xmlns:a="http://schemas.openxmlformats.org/drawingml/2006/main">
+            <a:off x="9334500" y="2990850"/>
+            <a:ext cx="2076450" cy="228600"/>
+          </a:xfrm>
+          <a:prstGeom xmlns:a="http://schemas.openxmlformats.org/drawingml/2006/main" prst="rect">
+            <a:avLst/>
+          </a:prstGeom>
+          <a:noFill xmlns:a="http://schemas.openxmlformats.org/drawingml/2006/main"/>
+          <a:ln xmlns:a="http://schemas.openxmlformats.org/drawingml/2006/main" w="0">
+            <a:noFill/>
+            <a:prstDash val="solid"/>
+          </a:ln>
+        </p:spPr>
+        <p:txBody>
+          <a:bodyPr xmlns:a="http://schemas.openxmlformats.org/drawingml/2006/main" anchor="t"/>
+          <a:lstStyle xmlns:a="http://schemas.openxmlformats.org/drawingml/2006/main"/>
+          <a:p xmlns:a="http://schemas.openxmlformats.org/drawingml/2006/main">
+            <a:pPr algn="l">
+              <a:defRPr sz="1200" b="0">
+                <a:solidFill>
+                  <a:srgbClr val="667386"/>
+                </a:solidFill>
+              </a:defRPr>
+            </a:pPr>
+            <a:r>
+              <a:rPr sz="1200" b="0">
+                <a:solidFill>
+                  <a:srgbClr val="667386"/>
+                </a:solidFill>
+              </a:rPr>
+              <a:t>61.8% up · n=186</a:t>
+            </a:r>
+          </a:p>
+        </p:txBody>
+      </p:sp>
+      <p:sp>
+        <p:nvSpPr>
+          <p:cNvPr id="12" name="">
+            <a:extLst xmlns:a="http://schemas.openxmlformats.org/drawingml/2006/main">
+              <a:ext uri="{FF2B5EF4-FFF2-40B4-BE49-F238E27FC236}">
+                <a16:creationId xmlns:a16="http://schemas.microsoft.com/office/drawing/2014/main" id="{E316B69A-63A0-4AA0-A181-06EB66C43779}"/>
+              </a:ext>
+            </a:extLst>
+          </p:cNvPr>
+          <p:cNvSpPr>
+            <a:spLocks xmlns:a="http://schemas.openxmlformats.org/drawingml/2006/main" noGrp="1"/>
+          </p:cNvSpPr>
+          <p:nvPr/>
+        </p:nvSpPr>
+        <p:spPr>
+          <a:xfrm xmlns:a="http://schemas.openxmlformats.org/drawingml/2006/main">
+            <a:off x="9334500" y="3524250"/>
+            <a:ext cx="2076450" cy="419100"/>
+          </a:xfrm>
+          <a:prstGeom xmlns:a="http://schemas.openxmlformats.org/drawingml/2006/main" prst="rect">
+            <a:avLst/>
+          </a:prstGeom>
+          <a:noFill xmlns:a="http://schemas.openxmlformats.org/drawingml/2006/main"/>
+          <a:ln xmlns:a="http://schemas.openxmlformats.org/drawingml/2006/main" w="0">
+            <a:noFill/>
+            <a:prstDash val="solid"/>
+          </a:ln>
+        </p:spPr>
+        <p:txBody>
+          <a:bodyPr xmlns:a="http://schemas.openxmlformats.org/drawingml/2006/main" anchor="t"/>
+          <a:lstStyle xmlns:a="http://schemas.openxmlformats.org/drawingml/2006/main"/>
+          <a:p xmlns:a="http://schemas.openxmlformats.org/drawingml/2006/main">
+            <a:pPr algn="l">
+              <a:defRPr sz="2550" b="1">
+                <a:solidFill>
+                  <a:srgbClr val="B44738"/>
+                </a:solidFill>
+              </a:defRPr>
+            </a:pPr>
+            <a:r>
+              <a:rPr sz="2550" b="1">
+                <a:solidFill>
+                  <a:srgbClr val="B44738"/>
+                </a:solidFill>
+              </a:rPr>
+              <a:t>−0.07%</a:t>
+            </a:r>
+          </a:p>
+        </p:txBody>
+      </p:sp>
+      <p:sp>
+        <p:nvSpPr>
+          <p:cNvPr id="13" name="">
+            <a:extLst xmlns:a="http://schemas.openxmlformats.org/drawingml/2006/main">
+              <a:ext uri="{FF2B5EF4-FFF2-40B4-BE49-F238E27FC236}">
+                <a16:creationId xmlns:a16="http://schemas.microsoft.com/office/drawing/2014/main" id="{1BD5A55C-ECD9-4F5B-B17E-EAC960CE9D4C}"/>
+              </a:ext>
+            </a:extLst>
+          </p:cNvPr>
+          <p:cNvSpPr>
+            <a:spLocks xmlns:a="http://schemas.openxmlformats.org/drawingml/2006/main" noGrp="1"/>
+          </p:cNvSpPr>
+          <p:nvPr/>
+        </p:nvSpPr>
+        <p:spPr>
+          <a:xfrm xmlns:a="http://schemas.openxmlformats.org/drawingml/2006/main">
+            <a:off x="9334500" y="3962400"/>
+            <a:ext cx="2076450" cy="228600"/>
+          </a:xfrm>
+          <a:prstGeom xmlns:a="http://schemas.openxmlformats.org/drawingml/2006/main" prst="rect">
+            <a:avLst/>
+          </a:prstGeom>
+          <a:noFill xmlns:a="http://schemas.openxmlformats.org/drawingml/2006/main"/>
+          <a:ln xmlns:a="http://schemas.openxmlformats.org/drawingml/2006/main" w="0">
+            <a:noFill/>
+            <a:prstDash val="solid"/>
+          </a:ln>
+        </p:spPr>
+        <p:txBody>
+          <a:bodyPr xmlns:a="http://schemas.openxmlformats.org/drawingml/2006/main" anchor="t"/>
+          <a:lstStyle xmlns:a="http://schemas.openxmlformats.org/drawingml/2006/main"/>
+          <a:p xmlns:a="http://schemas.openxmlformats.org/drawingml/2006/main">
+            <a:pPr algn="l">
+              <a:defRPr sz="1200" b="1">
+                <a:solidFill>
+                  <a:srgbClr val="24364B"/>
+                </a:solidFill>
+              </a:defRPr>
+            </a:pPr>
+            <a:r>
+              <a:rPr sz="1200" b="1">
+                <a:solidFill>
+                  <a:srgbClr val="24364B"/>
+                </a:solidFill>
+              </a:rPr>
+              <a:t>HIGH ATR%</a:t>
+            </a:r>
+          </a:p>
+        </p:txBody>
+      </p:sp>
+      <p:sp>
+        <p:nvSpPr>
+          <p:cNvPr id="14" name="">
+            <a:extLst xmlns:a="http://schemas.openxmlformats.org/drawingml/2006/main">
+              <a:ext uri="{FF2B5EF4-FFF2-40B4-BE49-F238E27FC236}">
+                <a16:creationId xmlns:a16="http://schemas.microsoft.com/office/drawing/2014/main" id="{3EDD128F-73B4-4278-AF20-54E6CCB71355}"/>
+              </a:ext>
+            </a:extLst>
+          </p:cNvPr>
+          <p:cNvSpPr>
+            <a:spLocks xmlns:a="http://schemas.openxmlformats.org/drawingml/2006/main" noGrp="1"/>
+          </p:cNvSpPr>
+          <p:nvPr/>
+        </p:nvSpPr>
+        <p:spPr>
+          <a:xfrm xmlns:a="http://schemas.openxmlformats.org/drawingml/2006/main">
+            <a:off x="9334500" y="4248150"/>
+            <a:ext cx="2076450" cy="228600"/>
+          </a:xfrm>
+          <a:prstGeom xmlns:a="http://schemas.openxmlformats.org/drawingml/2006/main" prst="rect">
+            <a:avLst/>
+          </a:prstGeom>
+          <a:noFill xmlns:a="http://schemas.openxmlformats.org/drawingml/2006/main"/>
+          <a:ln xmlns:a="http://schemas.openxmlformats.org/drawingml/2006/main" w="0">
+            <a:noFill/>
+            <a:prstDash val="solid"/>
+          </a:ln>
+        </p:spPr>
+        <p:txBody>
+          <a:bodyPr xmlns:a="http://schemas.openxmlformats.org/drawingml/2006/main" anchor="t"/>
+          <a:lstStyle xmlns:a="http://schemas.openxmlformats.org/drawingml/2006/main"/>
+          <a:p xmlns:a="http://schemas.openxmlformats.org/drawingml/2006/main">
+            <a:pPr algn="l">
+              <a:defRPr sz="1200" b="0">
+                <a:solidFill>
+                  <a:srgbClr val="667386"/>
+                </a:solidFill>
+              </a:defRPr>
+            </a:pPr>
+            <a:r>
+              <a:rPr sz="1200" b="0">
+                <a:solidFill>
+                  <a:srgbClr val="667386"/>
+                </a:solidFill>
+              </a:rPr>
+              <a:t>50.5% up · n=111</a:t>
+            </a:r>
+          </a:p>
+        </p:txBody>
+      </p:sp>
+      <p:sp>
+        <p:nvSpPr>
+          <p:cNvPr id="15" name="">
+            <a:extLst xmlns:a="http://schemas.openxmlformats.org/drawingml/2006/main">
+              <a:ext uri="{FF2B5EF4-FFF2-40B4-BE49-F238E27FC236}">
+                <a16:creationId xmlns:a16="http://schemas.microsoft.com/office/drawing/2014/main" id="{F1C47A91-2676-4FE5-B5F0-B521FF7CABAF}"/>
+              </a:ext>
+            </a:extLst>
+          </p:cNvPr>
+          <p:cNvSpPr>
+            <a:spLocks xmlns:a="http://schemas.openxmlformats.org/drawingml/2006/main" noGrp="1"/>
+          </p:cNvSpPr>
+          <p:nvPr/>
+        </p:nvSpPr>
+        <p:spPr>
+          <a:xfrm xmlns:a="http://schemas.openxmlformats.org/drawingml/2006/main">
+            <a:off x="9334500" y="4781550"/>
+            <a:ext cx="2076450" cy="19050"/>
+          </a:xfrm>
+          <a:prstGeom xmlns:a="http://schemas.openxmlformats.org/drawingml/2006/main" prst="rect">
+            <a:avLst/>
+          </a:prstGeom>
+          <a:solidFill xmlns:a="http://schemas.openxmlformats.org/drawingml/2006/main">
+            <a:srgbClr val="B8BCC4"/>
+          </a:solidFill>
+          <a:ln xmlns:a="http://schemas.openxmlformats.org/drawingml/2006/main" w="0">
+            <a:solidFill>
+              <a:srgbClr val="B8BCC4"/>
+            </a:solidFill>
+            <a:prstDash val="solid"/>
+          </a:ln>
+        </p:spPr>
+      </p:sp>
+      <p:sp>
+        <p:nvSpPr>
+          <p:cNvPr id="16" name="">
+            <a:extLst xmlns:a="http://schemas.openxmlformats.org/drawingml/2006/main">
+              <a:ext uri="{FF2B5EF4-FFF2-40B4-BE49-F238E27FC236}">
+                <a16:creationId xmlns:a16="http://schemas.microsoft.com/office/drawing/2014/main" id="{FD5F504E-ECD4-438A-8F1B-08024A113406}"/>
+              </a:ext>
+            </a:extLst>
+          </p:cNvPr>
+          <p:cNvSpPr>
+            <a:spLocks xmlns:a="http://schemas.openxmlformats.org/drawingml/2006/main" noGrp="1"/>
+          </p:cNvSpPr>
+          <p:nvPr/>
+        </p:nvSpPr>
+        <p:spPr>
+          <a:xfrm xmlns:a="http://schemas.openxmlformats.org/drawingml/2006/main">
+            <a:off x="9334500" y="5010150"/>
+            <a:ext cx="2076450" cy="742950"/>
+          </a:xfrm>
+          <a:prstGeom xmlns:a="http://schemas.openxmlformats.org/drawingml/2006/main" prst="rect">
+            <a:avLst/>
+          </a:prstGeom>
+          <a:noFill xmlns:a="http://schemas.openxmlformats.org/drawingml/2006/main"/>
+          <a:ln xmlns:a="http://schemas.openxmlformats.org/drawingml/2006/main" w="0">
+            <a:noFill/>
+            <a:prstDash val="solid"/>
+          </a:ln>
+        </p:spPr>
+        <p:txBody>
+          <a:bodyPr xmlns:a="http://schemas.openxmlformats.org/drawingml/2006/main" anchor="t"/>
+          <a:lstStyle xmlns:a="http://schemas.openxmlformats.org/drawingml/2006/main"/>
+          <a:p xmlns:a="http://schemas.openxmlformats.org/drawingml/2006/main">
+            <a:pPr algn="l">
+              <a:defRPr sz="1275" b="1">
+                <a:solidFill>
+                  <a:srgbClr val="24364B"/>
+                </a:solidFill>
+              </a:defRPr>
+            </a:pPr>
+            <a:r>
+              <a:rPr sz="1275" b="1">
+                <a:solidFill>
+                  <a:srgbClr val="24364B"/>
+                </a:solidFill>
+              </a:rPr>
+              <a:t>Bottom-20% opening inside HIGH ATR% averages −0.48%; only 39.3% finish the remainder positive.</a:t>
+            </a:r>
+          </a:p>
+        </p:txBody>
+      </p:sp>
+    </p:spTree>
+    <p:extLst>
+      <p:ext uri="{BB962C8B-B14F-4D97-AF65-F5344CB8AC3E}">
+        <p14:creationId xmlns:p14="http://schemas.microsoft.com/office/powerpoint/2010/main" val="1803990778"/>
+      </p:ext>
+    </p:extLst>
+  </p:cSld>
+</p:sld>
+</file>
+
+<file path=ppt/slides/slide34.xml><?xml version="1.0" encoding="utf-8"?>
+<p:sld xmlns:p="http://schemas.openxmlformats.org/presentationml/2006/main">
+  <p:cSld>
+    <p:bg>
+      <p:bgPr>
+        <a:solidFill xmlns:a="http://schemas.openxmlformats.org/drawingml/2006/main">
+          <a:srgbClr val="FFFFFF"/>
+        </a:solidFill>
+      </p:bgPr>
+    </p:bg>
+    <p:spTree>
+      <p:nvGrpSpPr>
+        <p:cNvPr id="1" name=""/>
+        <p:cNvGrpSpPr/>
+        <p:nvPr/>
+      </p:nvGrpSpPr>
+      <p:grpSpPr>
+        <a:xfrm xmlns:a="http://schemas.openxmlformats.org/drawingml/2006/main"/>
+      </p:grpSpPr>
+      <p:sp>
+        <p:nvSpPr>
+          <p:cNvPr id="22" name="">
+            <a:extLst xmlns:a="http://schemas.openxmlformats.org/drawingml/2006/main">
+              <a:ext uri="{FF2B5EF4-FFF2-40B4-BE49-F238E27FC236}">
+                <a16:creationId xmlns:a16="http://schemas.microsoft.com/office/drawing/2014/main" id="{EED12366-5EE0-476C-B98E-498E4012F30A}"/>
+              </a:ext>
+            </a:extLst>
+          </p:cNvPr>
+          <p:cNvSpPr>
+            <a:spLocks xmlns:a="http://schemas.openxmlformats.org/drawingml/2006/main" noGrp="1"/>
+          </p:cNvSpPr>
+          <p:nvPr/>
+        </p:nvSpPr>
+        <p:spPr>
+          <a:xfrm xmlns:a="http://schemas.openxmlformats.org/drawingml/2006/main">
+            <a:off x="457200" y="238125"/>
+            <a:ext cx="7239000" cy="190500"/>
+          </a:xfrm>
+          <a:prstGeom xmlns:a="http://schemas.openxmlformats.org/drawingml/2006/main" prst="rect">
+            <a:avLst/>
+          </a:prstGeom>
+          <a:noFill xmlns:a="http://schemas.openxmlformats.org/drawingml/2006/main"/>
+          <a:ln xmlns:a="http://schemas.openxmlformats.org/drawingml/2006/main" w="0">
+            <a:noFill/>
+            <a:prstDash val="solid"/>
+          </a:ln>
+        </p:spPr>
+        <p:txBody>
+          <a:bodyPr xmlns:a="http://schemas.openxmlformats.org/drawingml/2006/main" anchor="t"/>
+          <a:lstStyle xmlns:a="http://schemas.openxmlformats.org/drawingml/2006/main"/>
+          <a:p xmlns:a="http://schemas.openxmlformats.org/drawingml/2006/main">
+            <a:pPr algn="l">
+              <a:defRPr sz="1050" b="1">
+                <a:solidFill>
+                  <a:srgbClr val="667386"/>
+                </a:solidFill>
+              </a:defRPr>
+            </a:pPr>
+            <a:r>
+              <a:rPr sz="1050" b="1">
+                <a:solidFill>
+                  <a:srgbClr val="667386"/>
+                </a:solidFill>
+              </a:rPr>
+              <a:t>OPERATOR HYPOTHESIS LAB · NVDA INTRADAY OPENING RESPONSE</a:t>
+            </a:r>
+          </a:p>
+        </p:txBody>
+      </p:sp>
+      <p:sp>
+        <p:nvSpPr>
+          <p:cNvPr id="2" name="">
+            <a:extLst xmlns:a="http://schemas.openxmlformats.org/drawingml/2006/main">
+              <a:ext uri="{FF2B5EF4-FFF2-40B4-BE49-F238E27FC236}">
+                <a16:creationId xmlns:a16="http://schemas.microsoft.com/office/drawing/2014/main" id="{AFC26617-CA60-4798-B80F-EB00B1615844}"/>
+              </a:ext>
+            </a:extLst>
+          </p:cNvPr>
+          <p:cNvSpPr>
+            <a:spLocks xmlns:a="http://schemas.openxmlformats.org/drawingml/2006/main" noGrp="1"/>
+          </p:cNvSpPr>
+          <p:nvPr/>
+        </p:nvSpPr>
+        <p:spPr>
+          <a:xfrm xmlns:a="http://schemas.openxmlformats.org/drawingml/2006/main">
+            <a:off x="457200" y="523875"/>
+            <a:ext cx="11049000" cy="590550"/>
+          </a:xfrm>
+          <a:prstGeom xmlns:a="http://schemas.openxmlformats.org/drawingml/2006/main" prst="rect">
+            <a:avLst/>
+          </a:prstGeom>
+          <a:noFill xmlns:a="http://schemas.openxmlformats.org/drawingml/2006/main"/>
+          <a:ln xmlns:a="http://schemas.openxmlformats.org/drawingml/2006/main" w="0">
+            <a:noFill/>
+            <a:prstDash val="solid"/>
+          </a:ln>
+        </p:spPr>
+        <p:txBody>
+          <a:bodyPr xmlns:a="http://schemas.openxmlformats.org/drawingml/2006/main" anchor="t"/>
+          <a:lstStyle xmlns:a="http://schemas.openxmlformats.org/drawingml/2006/main"/>
+          <a:p xmlns:a="http://schemas.openxmlformats.org/drawingml/2006/main">
+            <a:pPr algn="l">
+              <a:defRPr sz="2925" b="1">
+                <a:solidFill>
+                  <a:srgbClr val="000000"/>
+                </a:solidFill>
+              </a:defRPr>
+            </a:pPr>
+            <a:r>
+              <a:rPr sz="2925" b="1">
+                <a:solidFill>
+                  <a:srgbClr val="000000"/>
+                </a:solidFill>
+              </a:rPr>
+              <a:t>ATR% conditions a candidate for the next TRAIN test</a:t>
+            </a:r>
+          </a:p>
+        </p:txBody>
+      </p:sp>
+      <p:sp>
+        <p:nvSpPr>
+          <p:cNvPr id="3" name="">
+            <a:extLst xmlns:a="http://schemas.openxmlformats.org/drawingml/2006/main">
+              <a:ext uri="{FF2B5EF4-FFF2-40B4-BE49-F238E27FC236}">
+                <a16:creationId xmlns:a16="http://schemas.microsoft.com/office/drawing/2014/main" id="{05A33AC3-18BD-4A27-8F4C-68AC8976AC4A}"/>
+              </a:ext>
+            </a:extLst>
+          </p:cNvPr>
+          <p:cNvSpPr>
+            <a:spLocks xmlns:a="http://schemas.openxmlformats.org/drawingml/2006/main" noGrp="1"/>
+          </p:cNvSpPr>
+          <p:nvPr/>
+        </p:nvSpPr>
+        <p:spPr>
+          <a:xfrm xmlns:a="http://schemas.openxmlformats.org/drawingml/2006/main">
+            <a:off x="457200" y="1219200"/>
+            <a:ext cx="11277600" cy="19050"/>
+          </a:xfrm>
+          <a:prstGeom xmlns:a="http://schemas.openxmlformats.org/drawingml/2006/main" prst="rect">
+            <a:avLst/>
+          </a:prstGeom>
+          <a:solidFill xmlns:a="http://schemas.openxmlformats.org/drawingml/2006/main">
+            <a:srgbClr val="B8BCC4"/>
+          </a:solidFill>
+          <a:ln xmlns:a="http://schemas.openxmlformats.org/drawingml/2006/main" w="0">
+            <a:solidFill>
+              <a:srgbClr val="B8BCC4"/>
+            </a:solidFill>
+            <a:prstDash val="solid"/>
+          </a:ln>
+        </p:spPr>
+      </p:sp>
+      <p:sp>
+        <p:nvSpPr>
+          <p:cNvPr id="4" name="">
+            <a:extLst xmlns:a="http://schemas.openxmlformats.org/drawingml/2006/main">
+              <a:ext uri="{FF2B5EF4-FFF2-40B4-BE49-F238E27FC236}">
+                <a16:creationId xmlns:a16="http://schemas.microsoft.com/office/drawing/2014/main" id="{7C8C4296-4E29-4ADD-9A35-B8C9661D8BA8}"/>
+              </a:ext>
+            </a:extLst>
+          </p:cNvPr>
+          <p:cNvSpPr>
+            <a:spLocks xmlns:a="http://schemas.openxmlformats.org/drawingml/2006/main" noGrp="1"/>
+          </p:cNvSpPr>
+          <p:nvPr/>
+        </p:nvSpPr>
+        <p:spPr>
+          <a:xfrm xmlns:a="http://schemas.openxmlformats.org/drawingml/2006/main">
+            <a:off x="457200" y="6515100"/>
+            <a:ext cx="7810500" cy="161925"/>
+          </a:xfrm>
+          <a:prstGeom xmlns:a="http://schemas.openxmlformats.org/drawingml/2006/main" prst="rect">
+            <a:avLst/>
+          </a:prstGeom>
+          <a:noFill xmlns:a="http://schemas.openxmlformats.org/drawingml/2006/main"/>
+          <a:ln xmlns:a="http://schemas.openxmlformats.org/drawingml/2006/main" w="0">
+            <a:noFill/>
+            <a:prstDash val="solid"/>
+          </a:ln>
+        </p:spPr>
+        <p:txBody>
+          <a:bodyPr xmlns:a="http://schemas.openxmlformats.org/drawingml/2006/main" anchor="t"/>
+          <a:lstStyle xmlns:a="http://schemas.openxmlformats.org/drawingml/2006/main"/>
+          <a:p xmlns:a="http://schemas.openxmlformats.org/drawingml/2006/main">
+            <a:pPr algn="l">
+              <a:defRPr sz="900" b="0">
+                <a:solidFill>
+                  <a:srgbClr val="667386"/>
+                </a:solidFill>
+              </a:defRPr>
+            </a:pPr>
+            <a:r>
+              <a:rPr sz="900" b="0">
+                <a:solidFill>
+                  <a:srgbClr val="667386"/>
+                </a:solidFill>
+              </a:rPr>
+              <a:t>Descriptive research · 1,487 full sessions · frozen 2018-01-02–2023-12-29</a:t>
+            </a:r>
+          </a:p>
+        </p:txBody>
+      </p:sp>
+      <p:sp>
+        <p:nvSpPr>
+          <p:cNvPr id="5" name="">
+            <a:extLst xmlns:a="http://schemas.openxmlformats.org/drawingml/2006/main">
+              <a:ext uri="{FF2B5EF4-FFF2-40B4-BE49-F238E27FC236}">
+                <a16:creationId xmlns:a16="http://schemas.microsoft.com/office/drawing/2014/main" id="{181F3FE7-1D76-49B2-814B-89DF727D49F8}"/>
+              </a:ext>
+            </a:extLst>
+          </p:cNvPr>
+          <p:cNvSpPr>
+            <a:spLocks xmlns:a="http://schemas.openxmlformats.org/drawingml/2006/main" noGrp="1"/>
+          </p:cNvSpPr>
+          <p:nvPr/>
+        </p:nvSpPr>
+        <p:spPr>
+          <a:xfrm xmlns:a="http://schemas.openxmlformats.org/drawingml/2006/main">
+            <a:off x="10858500" y="6496050"/>
+            <a:ext cx="876300" cy="171450"/>
+          </a:xfrm>
+          <a:prstGeom xmlns:a="http://schemas.openxmlformats.org/drawingml/2006/main" prst="rect">
+            <a:avLst/>
+          </a:prstGeom>
+          <a:noFill xmlns:a="http://schemas.openxmlformats.org/drawingml/2006/main"/>
+          <a:ln xmlns:a="http://schemas.openxmlformats.org/drawingml/2006/main" w="0">
+            <a:noFill/>
+            <a:prstDash val="solid"/>
+          </a:ln>
+        </p:spPr>
+        <p:txBody>
+          <a:bodyPr xmlns:a="http://schemas.openxmlformats.org/drawingml/2006/main" anchor="t"/>
+          <a:lstStyle xmlns:a="http://schemas.openxmlformats.org/drawingml/2006/main"/>
+          <a:p xmlns:a="http://schemas.openxmlformats.org/drawingml/2006/main">
+            <a:pPr algn="r">
+              <a:defRPr sz="900" b="0">
+                <a:solidFill>
+                  <a:srgbClr val="667386"/>
+                </a:solidFill>
+              </a:defRPr>
+            </a:pPr>
+            <a:r>
+              <a:rPr sz="900" b="0">
+                <a:solidFill>
+                  <a:srgbClr val="667386"/>
+                </a:solidFill>
+              </a:rPr>
+              <a:t>34</a:t>
+            </a:r>
+          </a:p>
+        </p:txBody>
+      </p:sp>
+      <p:sp>
+        <p:nvSpPr>
+          <p:cNvPr id="6" name="">
+            <a:extLst xmlns:a="http://schemas.openxmlformats.org/drawingml/2006/main">
+              <a:ext uri="{FF2B5EF4-FFF2-40B4-BE49-F238E27FC236}">
+                <a16:creationId xmlns:a16="http://schemas.microsoft.com/office/drawing/2014/main" id="{43668D7B-04AC-4A9C-97C5-034FC460594E}"/>
+              </a:ext>
+            </a:extLst>
+          </p:cNvPr>
+          <p:cNvSpPr>
+            <a:spLocks xmlns:a="http://schemas.openxmlformats.org/drawingml/2006/main" noGrp="1"/>
+          </p:cNvSpPr>
+          <p:nvPr/>
+        </p:nvSpPr>
+        <p:spPr>
+          <a:xfrm xmlns:a="http://schemas.openxmlformats.org/drawingml/2006/main">
+            <a:off x="552450" y="1562100"/>
+            <a:ext cx="5181600" cy="3867150"/>
+          </a:xfrm>
+          <a:prstGeom xmlns:a="http://schemas.openxmlformats.org/drawingml/2006/main" prst="rect">
+            <a:avLst/>
+          </a:prstGeom>
+          <a:solidFill xmlns:a="http://schemas.openxmlformats.org/drawingml/2006/main">
+            <a:srgbClr val="E2F1EC"/>
+          </a:solidFill>
+          <a:ln xmlns:a="http://schemas.openxmlformats.org/drawingml/2006/main" w="0">
+            <a:solidFill>
+              <a:srgbClr val="E2F1EC"/>
+            </a:solidFill>
+            <a:prstDash val="solid"/>
+          </a:ln>
+        </p:spPr>
+      </p:sp>
+      <p:sp>
+        <p:nvSpPr>
+          <p:cNvPr id="7" name="">
+            <a:extLst xmlns:a="http://schemas.openxmlformats.org/drawingml/2006/main">
+              <a:ext uri="{FF2B5EF4-FFF2-40B4-BE49-F238E27FC236}">
+                <a16:creationId xmlns:a16="http://schemas.microsoft.com/office/drawing/2014/main" id="{A6474C96-D60E-46AA-8884-CA5128E1C89D}"/>
+              </a:ext>
+            </a:extLst>
+          </p:cNvPr>
+          <p:cNvSpPr>
+            <a:spLocks xmlns:a="http://schemas.openxmlformats.org/drawingml/2006/main" noGrp="1"/>
+          </p:cNvSpPr>
+          <p:nvPr/>
+        </p:nvSpPr>
+        <p:spPr>
+          <a:xfrm xmlns:a="http://schemas.openxmlformats.org/drawingml/2006/main">
+            <a:off x="838200" y="1828800"/>
+            <a:ext cx="4572000" cy="342900"/>
+          </a:xfrm>
+          <a:prstGeom xmlns:a="http://schemas.openxmlformats.org/drawingml/2006/main" prst="rect">
+            <a:avLst/>
+          </a:prstGeom>
+          <a:noFill xmlns:a="http://schemas.openxmlformats.org/drawingml/2006/main"/>
+          <a:ln xmlns:a="http://schemas.openxmlformats.org/drawingml/2006/main" w="0">
+            <a:noFill/>
+            <a:prstDash val="solid"/>
+          </a:ln>
+        </p:spPr>
+        <p:txBody>
+          <a:bodyPr xmlns:a="http://schemas.openxmlformats.org/drawingml/2006/main" anchor="t"/>
+          <a:lstStyle xmlns:a="http://schemas.openxmlformats.org/drawingml/2006/main"/>
+          <a:p xmlns:a="http://schemas.openxmlformats.org/drawingml/2006/main">
+            <a:pPr algn="l">
+              <a:defRPr sz="2100" b="1">
+                <a:solidFill>
+                  <a:srgbClr val="14866D"/>
+                </a:solidFill>
+              </a:defRPr>
+            </a:pPr>
+            <a:r>
+              <a:rPr sz="2100" b="1">
+                <a:solidFill>
+                  <a:srgbClr val="14866D"/>
+                </a:solidFill>
+              </a:rPr>
+              <a:t>Descriptive candidate</a:t>
+            </a:r>
+          </a:p>
+        </p:txBody>
+      </p:sp>
+      <p:sp>
+        <p:nvSpPr>
+          <p:cNvPr id="8" name="">
+            <a:extLst xmlns:a="http://schemas.openxmlformats.org/drawingml/2006/main">
+              <a:ext uri="{FF2B5EF4-FFF2-40B4-BE49-F238E27FC236}">
+                <a16:creationId xmlns:a16="http://schemas.microsoft.com/office/drawing/2014/main" id="{47AFD30D-F60A-439B-9F0F-DB67A7E35CA5}"/>
+              </a:ext>
+            </a:extLst>
+          </p:cNvPr>
+          <p:cNvSpPr>
+            <a:spLocks xmlns:a="http://schemas.openxmlformats.org/drawingml/2006/main" noGrp="1"/>
+          </p:cNvSpPr>
+          <p:nvPr/>
+        </p:nvSpPr>
+        <p:spPr>
+          <a:xfrm xmlns:a="http://schemas.openxmlformats.org/drawingml/2006/main">
+            <a:off x="857250" y="2457450"/>
+            <a:ext cx="1809750" cy="247650"/>
+          </a:xfrm>
+          <a:prstGeom xmlns:a="http://schemas.openxmlformats.org/drawingml/2006/main" prst="rect">
+            <a:avLst/>
+          </a:prstGeom>
+          <a:noFill xmlns:a="http://schemas.openxmlformats.org/drawingml/2006/main"/>
+          <a:ln xmlns:a="http://schemas.openxmlformats.org/drawingml/2006/main" w="0">
+            <a:noFill/>
+            <a:prstDash val="solid"/>
+          </a:ln>
+        </p:spPr>
+        <p:txBody>
+          <a:bodyPr xmlns:a="http://schemas.openxmlformats.org/drawingml/2006/main" anchor="t"/>
+          <a:lstStyle xmlns:a="http://schemas.openxmlformats.org/drawingml/2006/main"/>
+          <a:p xmlns:a="http://schemas.openxmlformats.org/drawingml/2006/main">
+            <a:pPr algn="l">
+              <a:defRPr sz="1275" b="1">
+                <a:solidFill>
+                  <a:srgbClr val="667386"/>
+                </a:solidFill>
+              </a:defRPr>
+            </a:pPr>
+            <a:r>
+              <a:rPr sz="1275" b="1">
+                <a:solidFill>
+                  <a:srgbClr val="667386"/>
+                </a:solidFill>
+              </a:rPr>
+              <a:t>Before the open</a:t>
+            </a:r>
+          </a:p>
+        </p:txBody>
+      </p:sp>
+      <p:sp>
+        <p:nvSpPr>
+          <p:cNvPr id="9" name="">
+            <a:extLst xmlns:a="http://schemas.openxmlformats.org/drawingml/2006/main">
+              <a:ext uri="{FF2B5EF4-FFF2-40B4-BE49-F238E27FC236}">
+                <a16:creationId xmlns:a16="http://schemas.microsoft.com/office/drawing/2014/main" id="{02904A66-F69C-40FE-9FBC-AE8BFD8318D8}"/>
+              </a:ext>
+            </a:extLst>
+          </p:cNvPr>
+          <p:cNvSpPr>
+            <a:spLocks xmlns:a="http://schemas.openxmlformats.org/drawingml/2006/main" noGrp="1"/>
+          </p:cNvSpPr>
+          <p:nvPr/>
+        </p:nvSpPr>
+        <p:spPr>
+          <a:xfrm xmlns:a="http://schemas.openxmlformats.org/drawingml/2006/main">
+            <a:off x="857250" y="2781300"/>
+            <a:ext cx="4438650" cy="400050"/>
+          </a:xfrm>
+          <a:prstGeom xmlns:a="http://schemas.openxmlformats.org/drawingml/2006/main" prst="rect">
+            <a:avLst/>
+          </a:prstGeom>
+          <a:noFill xmlns:a="http://schemas.openxmlformats.org/drawingml/2006/main"/>
+          <a:ln xmlns:a="http://schemas.openxmlformats.org/drawingml/2006/main" w="0">
+            <a:noFill/>
+            <a:prstDash val="solid"/>
+          </a:ln>
+        </p:spPr>
+        <p:txBody>
+          <a:bodyPr xmlns:a="http://schemas.openxmlformats.org/drawingml/2006/main" anchor="t"/>
+          <a:lstStyle xmlns:a="http://schemas.openxmlformats.org/drawingml/2006/main"/>
+          <a:p xmlns:a="http://schemas.openxmlformats.org/drawingml/2006/main">
+            <a:pPr algn="l">
+              <a:defRPr sz="1950" b="1">
+                <a:solidFill>
+                  <a:srgbClr val="24364B"/>
+                </a:solidFill>
+              </a:defRPr>
+            </a:pPr>
+            <a:r>
+              <a:rPr sz="1950" b="1">
+                <a:solidFill>
+                  <a:srgbClr val="24364B"/>
+                </a:solidFill>
+              </a:rPr>
+              <a:t>Prior-day ATR% = LOW or MEDIUM</a:t>
+            </a:r>
+          </a:p>
+        </p:txBody>
+      </p:sp>
+      <p:sp>
+        <p:nvSpPr>
+          <p:cNvPr id="10" name="">
+            <a:extLst xmlns:a="http://schemas.openxmlformats.org/drawingml/2006/main">
+              <a:ext uri="{FF2B5EF4-FFF2-40B4-BE49-F238E27FC236}">
+                <a16:creationId xmlns:a16="http://schemas.microsoft.com/office/drawing/2014/main" id="{CF26A4AA-D63E-41C0-B751-DE5A247A38E1}"/>
+              </a:ext>
+            </a:extLst>
+          </p:cNvPr>
+          <p:cNvSpPr>
+            <a:spLocks xmlns:a="http://schemas.openxmlformats.org/drawingml/2006/main" noGrp="1"/>
+          </p:cNvSpPr>
+          <p:nvPr/>
+        </p:nvSpPr>
+        <p:spPr>
+          <a:xfrm xmlns:a="http://schemas.openxmlformats.org/drawingml/2006/main">
+            <a:off x="857250" y="3486150"/>
+            <a:ext cx="1809750" cy="247650"/>
+          </a:xfrm>
+          <a:prstGeom xmlns:a="http://schemas.openxmlformats.org/drawingml/2006/main" prst="rect">
+            <a:avLst/>
+          </a:prstGeom>
+          <a:noFill xmlns:a="http://schemas.openxmlformats.org/drawingml/2006/main"/>
+          <a:ln xmlns:a="http://schemas.openxmlformats.org/drawingml/2006/main" w="0">
+            <a:noFill/>
+            <a:prstDash val="solid"/>
+          </a:ln>
+        </p:spPr>
+        <p:txBody>
+          <a:bodyPr xmlns:a="http://schemas.openxmlformats.org/drawingml/2006/main" anchor="t"/>
+          <a:lstStyle xmlns:a="http://schemas.openxmlformats.org/drawingml/2006/main"/>
+          <a:p xmlns:a="http://schemas.openxmlformats.org/drawingml/2006/main">
+            <a:pPr algn="l">
+              <a:defRPr sz="1275" b="1">
+                <a:solidFill>
+                  <a:srgbClr val="667386"/>
+                </a:solidFill>
+              </a:defRPr>
+            </a:pPr>
+            <a:r>
+              <a:rPr sz="1275" b="1">
+                <a:solidFill>
+                  <a:srgbClr val="667386"/>
+                </a:solidFill>
+              </a:rPr>
+              <a:t>At 10:00</a:t>
+            </a:r>
+          </a:p>
+        </p:txBody>
+      </p:sp>
+      <p:sp>
+        <p:nvSpPr>
+          <p:cNvPr id="11" name="">
+            <a:extLst xmlns:a="http://schemas.openxmlformats.org/drawingml/2006/main">
+              <a:ext uri="{FF2B5EF4-FFF2-40B4-BE49-F238E27FC236}">
+                <a16:creationId xmlns:a16="http://schemas.microsoft.com/office/drawing/2014/main" id="{F07ABB87-0CD2-4FF0-8924-EC293D6F390E}"/>
+              </a:ext>
+            </a:extLst>
+          </p:cNvPr>
+          <p:cNvSpPr>
+            <a:spLocks xmlns:a="http://schemas.openxmlformats.org/drawingml/2006/main" noGrp="1"/>
+          </p:cNvSpPr>
+          <p:nvPr/>
+        </p:nvSpPr>
+        <p:spPr>
+          <a:xfrm xmlns:a="http://schemas.openxmlformats.org/drawingml/2006/main">
+            <a:off x="857250" y="3810000"/>
+            <a:ext cx="4438650" cy="400050"/>
+          </a:xfrm>
+          <a:prstGeom xmlns:a="http://schemas.openxmlformats.org/drawingml/2006/main" prst="rect">
+            <a:avLst/>
+          </a:prstGeom>
+          <a:noFill xmlns:a="http://schemas.openxmlformats.org/drawingml/2006/main"/>
+          <a:ln xmlns:a="http://schemas.openxmlformats.org/drawingml/2006/main" w="0">
+            <a:noFill/>
+            <a:prstDash val="solid"/>
+          </a:ln>
+        </p:spPr>
+        <p:txBody>
+          <a:bodyPr xmlns:a="http://schemas.openxmlformats.org/drawingml/2006/main" anchor="t"/>
+          <a:lstStyle xmlns:a="http://schemas.openxmlformats.org/drawingml/2006/main"/>
+          <a:p xmlns:a="http://schemas.openxmlformats.org/drawingml/2006/main">
+            <a:pPr algn="l">
+              <a:defRPr sz="1950" b="1">
+                <a:solidFill>
+                  <a:srgbClr val="24364B"/>
+                </a:solidFill>
+              </a:defRPr>
+            </a:pPr>
+            <a:r>
+              <a:rPr sz="1950" b="1">
+                <a:solidFill>
+                  <a:srgbClr val="24364B"/>
+                </a:solidFill>
+              </a:rPr>
+              <a:t>Opening return is in its positive tail</a:t>
+            </a:r>
+          </a:p>
+        </p:txBody>
+      </p:sp>
+      <p:sp>
+        <p:nvSpPr>
+          <p:cNvPr id="12" name="">
+            <a:extLst xmlns:a="http://schemas.openxmlformats.org/drawingml/2006/main">
+              <a:ext uri="{FF2B5EF4-FFF2-40B4-BE49-F238E27FC236}">
+                <a16:creationId xmlns:a16="http://schemas.microsoft.com/office/drawing/2014/main" id="{87B9D64F-C400-4B0A-884E-220DA20220B4}"/>
+              </a:ext>
+            </a:extLst>
+          </p:cNvPr>
+          <p:cNvSpPr>
+            <a:spLocks xmlns:a="http://schemas.openxmlformats.org/drawingml/2006/main" noGrp="1"/>
+          </p:cNvSpPr>
+          <p:nvPr/>
+        </p:nvSpPr>
+        <p:spPr>
+          <a:xfrm xmlns:a="http://schemas.openxmlformats.org/drawingml/2006/main">
+            <a:off x="857250" y="4629150"/>
+            <a:ext cx="4438650" cy="552450"/>
+          </a:xfrm>
+          <a:prstGeom xmlns:a="http://schemas.openxmlformats.org/drawingml/2006/main" prst="rect">
+            <a:avLst/>
+          </a:prstGeom>
+          <a:noFill xmlns:a="http://schemas.openxmlformats.org/drawingml/2006/main"/>
+          <a:ln xmlns:a="http://schemas.openxmlformats.org/drawingml/2006/main" w="0">
+            <a:noFill/>
+            <a:prstDash val="solid"/>
+          </a:ln>
+        </p:spPr>
+        <p:txBody>
+          <a:bodyPr xmlns:a="http://schemas.openxmlformats.org/drawingml/2006/main" anchor="t"/>
+          <a:lstStyle xmlns:a="http://schemas.openxmlformats.org/drawingml/2006/main"/>
+          <a:p xmlns:a="http://schemas.openxmlformats.org/drawingml/2006/main">
+            <a:pPr algn="ctr">
+              <a:defRPr sz="1425" b="1">
+                <a:solidFill>
+                  <a:srgbClr val="14866D"/>
+                </a:solidFill>
+              </a:defRPr>
+            </a:pPr>
+            <a:r>
+              <a:rPr sz="1425" b="1">
+                <a:solidFill>
+                  <a:srgbClr val="14866D"/>
+                </a:solidFill>
+              </a:rPr>
+              <a:t>Observed remainder: +0.38% mean · +0.52% median · 61.8% up · n=186</a:t>
+            </a:r>
+          </a:p>
+        </p:txBody>
+      </p:sp>
+      <p:sp>
+        <p:nvSpPr>
+          <p:cNvPr id="13" name="">
+            <a:extLst xmlns:a="http://schemas.openxmlformats.org/drawingml/2006/main">
+              <a:ext uri="{FF2B5EF4-FFF2-40B4-BE49-F238E27FC236}">
+                <a16:creationId xmlns:a16="http://schemas.microsoft.com/office/drawing/2014/main" id="{CA0308BE-F731-49BF-89B9-E8FBD2A23D07}"/>
+              </a:ext>
+            </a:extLst>
+          </p:cNvPr>
+          <p:cNvSpPr>
+            <a:spLocks xmlns:a="http://schemas.openxmlformats.org/drawingml/2006/main" noGrp="1"/>
+          </p:cNvSpPr>
+          <p:nvPr/>
+        </p:nvSpPr>
+        <p:spPr>
+          <a:xfrm xmlns:a="http://schemas.openxmlformats.org/drawingml/2006/main">
+            <a:off x="6096000" y="1562100"/>
+            <a:ext cx="5543550" cy="3867150"/>
+          </a:xfrm>
+          <a:prstGeom xmlns:a="http://schemas.openxmlformats.org/drawingml/2006/main" prst="rect">
+            <a:avLst/>
+          </a:prstGeom>
+          <a:solidFill xmlns:a="http://schemas.openxmlformats.org/drawingml/2006/main">
+            <a:srgbClr val="F3F5F7"/>
+          </a:solidFill>
+          <a:ln xmlns:a="http://schemas.openxmlformats.org/drawingml/2006/main" w="0">
+            <a:solidFill>
+              <a:srgbClr val="F3F5F7"/>
+            </a:solidFill>
+            <a:prstDash val="solid"/>
+          </a:ln>
+        </p:spPr>
+      </p:sp>
+      <p:sp>
+        <p:nvSpPr>
+          <p:cNvPr id="14" name="">
+            <a:extLst xmlns:a="http://schemas.openxmlformats.org/drawingml/2006/main">
+              <a:ext uri="{FF2B5EF4-FFF2-40B4-BE49-F238E27FC236}">
+                <a16:creationId xmlns:a16="http://schemas.microsoft.com/office/drawing/2014/main" id="{836DE421-A143-4003-A926-A517AE130E22}"/>
+              </a:ext>
+            </a:extLst>
+          </p:cNvPr>
+          <p:cNvSpPr>
+            <a:spLocks xmlns:a="http://schemas.openxmlformats.org/drawingml/2006/main" noGrp="1"/>
+          </p:cNvSpPr>
+          <p:nvPr/>
+        </p:nvSpPr>
+        <p:spPr>
+          <a:xfrm xmlns:a="http://schemas.openxmlformats.org/drawingml/2006/main">
+            <a:off x="6381750" y="1828800"/>
+            <a:ext cx="4762500" cy="342900"/>
+          </a:xfrm>
+          <a:prstGeom xmlns:a="http://schemas.openxmlformats.org/drawingml/2006/main" prst="rect">
+            <a:avLst/>
+          </a:prstGeom>
+          <a:noFill xmlns:a="http://schemas.openxmlformats.org/drawingml/2006/main"/>
+          <a:ln xmlns:a="http://schemas.openxmlformats.org/drawingml/2006/main" w="0">
+            <a:noFill/>
+            <a:prstDash val="solid"/>
+          </a:ln>
+        </p:spPr>
+        <p:txBody>
+          <a:bodyPr xmlns:a="http://schemas.openxmlformats.org/drawingml/2006/main" anchor="t"/>
+          <a:lstStyle xmlns:a="http://schemas.openxmlformats.org/drawingml/2006/main"/>
+          <a:p xmlns:a="http://schemas.openxmlformats.org/drawingml/2006/main">
+            <a:pPr algn="l">
+              <a:defRPr sz="2100" b="1">
+                <a:solidFill>
+                  <a:srgbClr val="000000"/>
+                </a:solidFill>
+              </a:defRPr>
+            </a:pPr>
+            <a:r>
+              <a:rPr sz="2100" b="1">
+                <a:solidFill>
+                  <a:srgbClr val="000000"/>
+                </a:solidFill>
+              </a:rPr>
+              <a:t>Recommended causal translation</a:t>
+            </a:r>
+          </a:p>
+        </p:txBody>
+      </p:sp>
+      <p:sp>
+        <p:nvSpPr>
+          <p:cNvPr id="15" name="">
+            <a:extLst xmlns:a="http://schemas.openxmlformats.org/drawingml/2006/main">
+              <a:ext uri="{FF2B5EF4-FFF2-40B4-BE49-F238E27FC236}">
+                <a16:creationId xmlns:a16="http://schemas.microsoft.com/office/drawing/2014/main" id="{CB370F86-9354-45EA-8A86-EB1C2D482DC1}"/>
+              </a:ext>
+            </a:extLst>
+          </p:cNvPr>
+          <p:cNvSpPr>
+            <a:spLocks xmlns:a="http://schemas.openxmlformats.org/drawingml/2006/main" noGrp="1"/>
+          </p:cNvSpPr>
+          <p:nvPr/>
+        </p:nvSpPr>
+        <p:spPr>
+          <a:xfrm xmlns:a="http://schemas.openxmlformats.org/drawingml/2006/main">
+            <a:off x="6419850" y="2543175"/>
+            <a:ext cx="85725" cy="85725"/>
+          </a:xfrm>
+          <a:prstGeom xmlns:a="http://schemas.openxmlformats.org/drawingml/2006/main" prst="rect">
+            <a:avLst/>
+          </a:prstGeom>
+          <a:solidFill xmlns:a="http://schemas.openxmlformats.org/drawingml/2006/main">
+            <a:srgbClr val="3D8DFF"/>
+          </a:solidFill>
+          <a:ln xmlns:a="http://schemas.openxmlformats.org/drawingml/2006/main" w="0">
+            <a:solidFill>
+              <a:srgbClr val="3D8DFF"/>
+            </a:solidFill>
+            <a:prstDash val="solid"/>
+          </a:ln>
+        </p:spPr>
+      </p:sp>
+      <p:sp>
+        <p:nvSpPr>
+          <p:cNvPr id="16" name="">
+            <a:extLst xmlns:a="http://schemas.openxmlformats.org/drawingml/2006/main">
+              <a:ext uri="{FF2B5EF4-FFF2-40B4-BE49-F238E27FC236}">
+                <a16:creationId xmlns:a16="http://schemas.microsoft.com/office/drawing/2014/main" id="{51E9CFC3-F998-4F1B-AD69-D1E861F3F57C}"/>
+              </a:ext>
+            </a:extLst>
+          </p:cNvPr>
+          <p:cNvSpPr>
+            <a:spLocks xmlns:a="http://schemas.openxmlformats.org/drawingml/2006/main" noGrp="1"/>
+          </p:cNvSpPr>
+          <p:nvPr/>
+        </p:nvSpPr>
+        <p:spPr>
+          <a:xfrm xmlns:a="http://schemas.openxmlformats.org/drawingml/2006/main">
+            <a:off x="6648450" y="2457450"/>
+            <a:ext cx="4533900" cy="685800"/>
+          </a:xfrm>
+          <a:prstGeom xmlns:a="http://schemas.openxmlformats.org/drawingml/2006/main" prst="rect">
+            <a:avLst/>
+          </a:prstGeom>
+          <a:noFill xmlns:a="http://schemas.openxmlformats.org/drawingml/2006/main"/>
+          <a:ln xmlns:a="http://schemas.openxmlformats.org/drawingml/2006/main" w="0">
+            <a:noFill/>
+            <a:prstDash val="solid"/>
+          </a:ln>
+        </p:spPr>
+        <p:txBody>
+          <a:bodyPr xmlns:a="http://schemas.openxmlformats.org/drawingml/2006/main" anchor="t"/>
+          <a:lstStyle xmlns:a="http://schemas.openxmlformats.org/drawingml/2006/main"/>
+          <a:p xmlns:a="http://schemas.openxmlformats.org/drawingml/2006/main">
+            <a:pPr algn="l">
+              <a:defRPr sz="1500" b="0">
+                <a:solidFill>
+                  <a:srgbClr val="24364B"/>
+                </a:solidFill>
+              </a:defRPr>
+            </a:pPr>
+            <a:r>
+              <a:rPr sz="1500" b="0">
+                <a:solidFill>
+                  <a:srgbClr val="24364B"/>
+                </a:solidFill>
+              </a:rPr>
+              <a:t>Compute the opening-tail cutoff from the prior 252 full sessions only.</a:t>
+            </a:r>
+          </a:p>
+        </p:txBody>
+      </p:sp>
+      <p:sp>
+        <p:nvSpPr>
+          <p:cNvPr id="17" name="">
+            <a:extLst xmlns:a="http://schemas.openxmlformats.org/drawingml/2006/main">
+              <a:ext uri="{FF2B5EF4-FFF2-40B4-BE49-F238E27FC236}">
+                <a16:creationId xmlns:a16="http://schemas.microsoft.com/office/drawing/2014/main" id="{D400E36C-8F77-45DC-8DDF-9DE820DCCEB0}"/>
+              </a:ext>
+            </a:extLst>
+          </p:cNvPr>
+          <p:cNvSpPr>
+            <a:spLocks xmlns:a="http://schemas.openxmlformats.org/drawingml/2006/main" noGrp="1"/>
+          </p:cNvSpPr>
+          <p:nvPr/>
+        </p:nvSpPr>
+        <p:spPr>
+          <a:xfrm xmlns:a="http://schemas.openxmlformats.org/drawingml/2006/main">
+            <a:off x="6419850" y="3362325"/>
+            <a:ext cx="85725" cy="85725"/>
+          </a:xfrm>
+          <a:prstGeom xmlns:a="http://schemas.openxmlformats.org/drawingml/2006/main" prst="rect">
+            <a:avLst/>
+          </a:prstGeom>
+          <a:solidFill xmlns:a="http://schemas.openxmlformats.org/drawingml/2006/main">
+            <a:srgbClr val="14866D"/>
+          </a:solidFill>
+          <a:ln xmlns:a="http://schemas.openxmlformats.org/drawingml/2006/main" w="0">
+            <a:solidFill>
+              <a:srgbClr val="14866D"/>
+            </a:solidFill>
+            <a:prstDash val="solid"/>
+          </a:ln>
+        </p:spPr>
+      </p:sp>
+      <p:sp>
+        <p:nvSpPr>
+          <p:cNvPr id="18" name="">
+            <a:extLst xmlns:a="http://schemas.openxmlformats.org/drawingml/2006/main">
+              <a:ext uri="{FF2B5EF4-FFF2-40B4-BE49-F238E27FC236}">
+                <a16:creationId xmlns:a16="http://schemas.microsoft.com/office/drawing/2014/main" id="{2D82C7BA-D1A3-4DDA-A2D7-3E50386B5085}"/>
+              </a:ext>
+            </a:extLst>
+          </p:cNvPr>
+          <p:cNvSpPr>
+            <a:spLocks xmlns:a="http://schemas.openxmlformats.org/drawingml/2006/main" noGrp="1"/>
+          </p:cNvSpPr>
+          <p:nvPr/>
+        </p:nvSpPr>
+        <p:spPr>
+          <a:xfrm xmlns:a="http://schemas.openxmlformats.org/drawingml/2006/main">
+            <a:off x="6648450" y="3276600"/>
+            <a:ext cx="4533900" cy="895350"/>
+          </a:xfrm>
+          <a:prstGeom xmlns:a="http://schemas.openxmlformats.org/drawingml/2006/main" prst="rect">
+            <a:avLst/>
+          </a:prstGeom>
+          <a:noFill xmlns:a="http://schemas.openxmlformats.org/drawingml/2006/main"/>
+          <a:ln xmlns:a="http://schemas.openxmlformats.org/drawingml/2006/main" w="0">
+            <a:noFill/>
+            <a:prstDash val="solid"/>
+          </a:ln>
+        </p:spPr>
+        <p:txBody>
+          <a:bodyPr xmlns:a="http://schemas.openxmlformats.org/drawingml/2006/main" anchor="t"/>
+          <a:lstStyle xmlns:a="http://schemas.openxmlformats.org/drawingml/2006/main"/>
+          <a:p xmlns:a="http://schemas.openxmlformats.org/drawingml/2006/main">
+            <a:pPr algn="l">
+              <a:defRPr sz="1500" b="0">
+                <a:solidFill>
+                  <a:srgbClr val="24364B"/>
+                </a:solidFill>
+              </a:defRPr>
+            </a:pPr>
+            <a:r>
+              <a:rPr sz="1500" b="0">
+                <a:solidFill>
+                  <a:srgbClr val="24364B"/>
+                </a:solidFill>
+              </a:rPr>
+              <a:t>If the first bar clears that cutoff and yesterday's ATR% was not HIGH, enter at 10:00 and exit at 16:00.</a:t>
+            </a:r>
+          </a:p>
+        </p:txBody>
+      </p:sp>
+      <p:sp>
+        <p:nvSpPr>
+          <p:cNvPr id="19" name="">
+            <a:extLst xmlns:a="http://schemas.openxmlformats.org/drawingml/2006/main">
+              <a:ext uri="{FF2B5EF4-FFF2-40B4-BE49-F238E27FC236}">
+                <a16:creationId xmlns:a16="http://schemas.microsoft.com/office/drawing/2014/main" id="{AA3E9AFF-4B70-41AD-90C0-E26B6D05E56E}"/>
+              </a:ext>
+            </a:extLst>
+          </p:cNvPr>
+          <p:cNvSpPr>
+            <a:spLocks xmlns:a="http://schemas.openxmlformats.org/drawingml/2006/main" noGrp="1"/>
+          </p:cNvSpPr>
+          <p:nvPr/>
+        </p:nvSpPr>
+        <p:spPr>
+          <a:xfrm xmlns:a="http://schemas.openxmlformats.org/drawingml/2006/main">
+            <a:off x="6419850" y="4410075"/>
+            <a:ext cx="85725" cy="85725"/>
+          </a:xfrm>
+          <a:prstGeom xmlns:a="http://schemas.openxmlformats.org/drawingml/2006/main" prst="rect">
+            <a:avLst/>
+          </a:prstGeom>
+          <a:solidFill xmlns:a="http://schemas.openxmlformats.org/drawingml/2006/main">
+            <a:srgbClr val="A86B00"/>
+          </a:solidFill>
+          <a:ln xmlns:a="http://schemas.openxmlformats.org/drawingml/2006/main" w="0">
+            <a:solidFill>
+              <a:srgbClr val="A86B00"/>
+            </a:solidFill>
+            <a:prstDash val="solid"/>
+          </a:ln>
+        </p:spPr>
+      </p:sp>
+      <p:sp>
+        <p:nvSpPr>
+          <p:cNvPr id="20" name="">
+            <a:extLst xmlns:a="http://schemas.openxmlformats.org/drawingml/2006/main">
+              <a:ext uri="{FF2B5EF4-FFF2-40B4-BE49-F238E27FC236}">
+                <a16:creationId xmlns:a16="http://schemas.microsoft.com/office/drawing/2014/main" id="{F12BB704-48C4-4BC0-9E72-D750F8BE1468}"/>
+              </a:ext>
+            </a:extLst>
+          </p:cNvPr>
+          <p:cNvSpPr>
+            <a:spLocks xmlns:a="http://schemas.openxmlformats.org/drawingml/2006/main" noGrp="1"/>
+          </p:cNvSpPr>
+          <p:nvPr/>
+        </p:nvSpPr>
+        <p:spPr>
+          <a:xfrm xmlns:a="http://schemas.openxmlformats.org/drawingml/2006/main">
+            <a:off x="6648450" y="4324350"/>
+            <a:ext cx="4533900" cy="876300"/>
+          </a:xfrm>
+          <a:prstGeom xmlns:a="http://schemas.openxmlformats.org/drawingml/2006/main" prst="rect">
+            <a:avLst/>
+          </a:prstGeom>
+          <a:noFill xmlns:a="http://schemas.openxmlformats.org/drawingml/2006/main"/>
+          <a:ln xmlns:a="http://schemas.openxmlformats.org/drawingml/2006/main" w="0">
+            <a:noFill/>
+            <a:prstDash val="solid"/>
+          </a:ln>
+        </p:spPr>
+        <p:txBody>
+          <a:bodyPr xmlns:a="http://schemas.openxmlformats.org/drawingml/2006/main" anchor="t"/>
+          <a:lstStyle xmlns:a="http://schemas.openxmlformats.org/drawingml/2006/main"/>
+          <a:p xmlns:a="http://schemas.openxmlformats.org/drawingml/2006/main">
+            <a:pPr algn="l">
+              <a:defRPr sz="1500" b="0">
+                <a:solidFill>
+                  <a:srgbClr val="24364B"/>
+                </a:solidFill>
+              </a:defRPr>
+            </a:pPr>
+            <a:r>
+              <a:rPr sz="1500" b="0">
+                <a:solidFill>
+                  <a:srgbClr val="24364B"/>
+                </a:solidFill>
+              </a:rPr>
+              <a:t>Compare with opening-tail-only, ATR-state-only, HIGH-ATR opposite, and unconditional 10:00-to-close controls.</a:t>
+            </a:r>
+          </a:p>
+        </p:txBody>
+      </p:sp>
+      <p:sp>
+        <p:nvSpPr>
+          <p:cNvPr id="21" name="">
+            <a:extLst xmlns:a="http://schemas.openxmlformats.org/drawingml/2006/main">
+              <a:ext uri="{FF2B5EF4-FFF2-40B4-BE49-F238E27FC236}">
+                <a16:creationId xmlns:a16="http://schemas.microsoft.com/office/drawing/2014/main" id="{FEA839FA-26A8-41FD-AAAA-F3F948CCF855}"/>
+              </a:ext>
+            </a:extLst>
+          </p:cNvPr>
+          <p:cNvSpPr>
+            <a:spLocks xmlns:a="http://schemas.openxmlformats.org/drawingml/2006/main" noGrp="1"/>
+          </p:cNvSpPr>
+          <p:nvPr/>
+        </p:nvSpPr>
+        <p:spPr>
+          <a:xfrm xmlns:a="http://schemas.openxmlformats.org/drawingml/2006/main">
+            <a:off x="552450" y="5924550"/>
+            <a:ext cx="11087100" cy="247650"/>
+          </a:xfrm>
+          <a:prstGeom xmlns:a="http://schemas.openxmlformats.org/drawingml/2006/main" prst="rect">
+            <a:avLst/>
+          </a:prstGeom>
+          <a:noFill xmlns:a="http://schemas.openxmlformats.org/drawingml/2006/main"/>
+          <a:ln xmlns:a="http://schemas.openxmlformats.org/drawingml/2006/main" w="0">
+            <a:noFill/>
+            <a:prstDash val="solid"/>
+          </a:ln>
+        </p:spPr>
+        <p:txBody>
+          <a:bodyPr xmlns:a="http://schemas.openxmlformats.org/drawingml/2006/main" anchor="t"/>
+          <a:lstStyle xmlns:a="http://schemas.openxmlformats.org/drawingml/2006/main"/>
+          <a:p xmlns:a="http://schemas.openxmlformats.org/drawingml/2006/main">
+            <a:pPr algn="ctr">
+              <a:defRPr sz="1275" b="1">
+                <a:solidFill>
+                  <a:srgbClr val="B44738"/>
+                </a:solidFill>
+              </a:defRPr>
+            </a:pPr>
+            <a:r>
+              <a:rPr sz="1275" b="1">
+                <a:solidFill>
+                  <a:srgbClr val="B44738"/>
+                </a:solidFill>
+              </a:rPr>
+              <a:t>NO RULE, COST, OR P&amp;L WAS TESTED IN THIS SLICE</a:t>
+            </a:r>
+          </a:p>
+        </p:txBody>
+      </p:sp>
+    </p:spTree>
+    <p:extLst>
+      <p:ext uri="{BB962C8B-B14F-4D97-AF65-F5344CB8AC3E}">
+        <p14:creationId xmlns:p14="http://schemas.microsoft.com/office/powerpoint/2010/main" val="1614722810"/>
       </p:ext>
     </p:extLst>
   </p:cSld>
@@ -18762,7 +22682,7 @@
           <p:cNvPr id="37" name="">
             <a:extLst xmlns:a="http://schemas.openxmlformats.org/drawingml/2006/main">
               <a:ext uri="{FF2B5EF4-FFF2-40B4-BE49-F238E27FC236}">
-                <a16:creationId xmlns:a16="http://schemas.microsoft.com/office/drawing/2014/main" id="{5BE7D85B-2EC6-4E0A-B4EA-5AFC9AE625BA}"/>
+                <a16:creationId xmlns:a16="http://schemas.microsoft.com/office/drawing/2014/main" id="{D88E3CEA-6104-4790-8E49-8B62FCA99A07}"/>
               </a:ext>
             </a:extLst>
           </p:cNvPr>
@@ -18812,7 +22732,7 @@
           <p:cNvPr id="2" name="">
             <a:extLst xmlns:a="http://schemas.openxmlformats.org/drawingml/2006/main">
               <a:ext uri="{FF2B5EF4-FFF2-40B4-BE49-F238E27FC236}">
-                <a16:creationId xmlns:a16="http://schemas.microsoft.com/office/drawing/2014/main" id="{9E38CFBD-5A03-4E99-984B-F313ACA61909}"/>
+                <a16:creationId xmlns:a16="http://schemas.microsoft.com/office/drawing/2014/main" id="{F473CDA4-EB39-47E5-9660-8BF39D61931F}"/>
               </a:ext>
             </a:extLst>
           </p:cNvPr>
@@ -18862,7 +22782,7 @@
           <p:cNvPr id="3" name="">
             <a:extLst xmlns:a="http://schemas.openxmlformats.org/drawingml/2006/main">
               <a:ext uri="{FF2B5EF4-FFF2-40B4-BE49-F238E27FC236}">
-                <a16:creationId xmlns:a16="http://schemas.microsoft.com/office/drawing/2014/main" id="{93C82177-DAB6-452B-84FD-928C90671AAC}"/>
+                <a16:creationId xmlns:a16="http://schemas.microsoft.com/office/drawing/2014/main" id="{B4E8BEC9-6D90-4355-98CA-2EF98CBC01C0}"/>
               </a:ext>
             </a:extLst>
           </p:cNvPr>
@@ -18895,7 +22815,7 @@
           <p:cNvPr id="4" name="">
             <a:extLst xmlns:a="http://schemas.openxmlformats.org/drawingml/2006/main">
               <a:ext uri="{FF2B5EF4-FFF2-40B4-BE49-F238E27FC236}">
-                <a16:creationId xmlns:a16="http://schemas.microsoft.com/office/drawing/2014/main" id="{2528DE2B-EDFF-4A89-908D-C8F0EAC74613}"/>
+                <a16:creationId xmlns:a16="http://schemas.microsoft.com/office/drawing/2014/main" id="{5F53AE26-E8B3-4845-BD32-FAB80CA9A3AF}"/>
               </a:ext>
             </a:extLst>
           </p:cNvPr>
@@ -18945,7 +22865,7 @@
           <p:cNvPr id="5" name="">
             <a:extLst xmlns:a="http://schemas.openxmlformats.org/drawingml/2006/main">
               <a:ext uri="{FF2B5EF4-FFF2-40B4-BE49-F238E27FC236}">
-                <a16:creationId xmlns:a16="http://schemas.microsoft.com/office/drawing/2014/main" id="{343090F6-E4E0-4A2F-9C9E-7EC95D7A0D89}"/>
+                <a16:creationId xmlns:a16="http://schemas.microsoft.com/office/drawing/2014/main" id="{4B40E0E7-031C-4E85-A25D-BC0C38D5B6FB}"/>
               </a:ext>
             </a:extLst>
           </p:cNvPr>
@@ -18995,7 +22915,7 @@
           <p:cNvPr id="6" name="">
             <a:extLst xmlns:a="http://schemas.openxmlformats.org/drawingml/2006/main">
               <a:ext uri="{FF2B5EF4-FFF2-40B4-BE49-F238E27FC236}">
-                <a16:creationId xmlns:a16="http://schemas.microsoft.com/office/drawing/2014/main" id="{182407DB-F484-499E-B099-9784DE60FC21}"/>
+                <a16:creationId xmlns:a16="http://schemas.microsoft.com/office/drawing/2014/main" id="{A6570EF4-1FE0-40BF-8CDB-B2C56429F456}"/>
               </a:ext>
             </a:extLst>
           </p:cNvPr>
@@ -19028,7 +22948,7 @@
           <p:cNvPr id="7" name="">
             <a:extLst xmlns:a="http://schemas.openxmlformats.org/drawingml/2006/main">
               <a:ext uri="{FF2B5EF4-FFF2-40B4-BE49-F238E27FC236}">
-                <a16:creationId xmlns:a16="http://schemas.microsoft.com/office/drawing/2014/main" id="{023CB0D6-BBB5-463A-9AF4-1315522532AA}"/>
+                <a16:creationId xmlns:a16="http://schemas.microsoft.com/office/drawing/2014/main" id="{2E704B9D-BB04-46CE-8395-5F4BB7A291B0}"/>
               </a:ext>
             </a:extLst>
           </p:cNvPr>
@@ -19061,7 +22981,7 @@
           <p:cNvPr id="8" name="">
             <a:extLst xmlns:a="http://schemas.openxmlformats.org/drawingml/2006/main">
               <a:ext uri="{FF2B5EF4-FFF2-40B4-BE49-F238E27FC236}">
-                <a16:creationId xmlns:a16="http://schemas.microsoft.com/office/drawing/2014/main" id="{71907B3C-3085-4B54-9283-A1CC108A0934}"/>
+                <a16:creationId xmlns:a16="http://schemas.microsoft.com/office/drawing/2014/main" id="{5150A2A7-B9F1-4C61-B3CB-D39A32E40520}"/>
               </a:ext>
             </a:extLst>
           </p:cNvPr>
@@ -19111,7 +23031,7 @@
           <p:cNvPr id="9" name="">
             <a:extLst xmlns:a="http://schemas.openxmlformats.org/drawingml/2006/main">
               <a:ext uri="{FF2B5EF4-FFF2-40B4-BE49-F238E27FC236}">
-                <a16:creationId xmlns:a16="http://schemas.microsoft.com/office/drawing/2014/main" id="{3577AA00-BC9B-4551-BA56-6C78496474B5}"/>
+                <a16:creationId xmlns:a16="http://schemas.microsoft.com/office/drawing/2014/main" id="{A243A666-8EE4-43BF-BDCA-BD6E7D1E4833}"/>
               </a:ext>
             </a:extLst>
           </p:cNvPr>
@@ -19161,7 +23081,7 @@
           <p:cNvPr id="10" name="">
             <a:extLst xmlns:a="http://schemas.openxmlformats.org/drawingml/2006/main">
               <a:ext uri="{FF2B5EF4-FFF2-40B4-BE49-F238E27FC236}">
-                <a16:creationId xmlns:a16="http://schemas.microsoft.com/office/drawing/2014/main" id="{E2A30549-C249-475F-9874-D6F591198020}"/>
+                <a16:creationId xmlns:a16="http://schemas.microsoft.com/office/drawing/2014/main" id="{F6A2E5DF-862D-4B2E-9AA3-BE57C9B1419C}"/>
               </a:ext>
             </a:extLst>
           </p:cNvPr>
@@ -19211,7 +23131,7 @@
           <p:cNvPr id="11" name="">
             <a:extLst xmlns:a="http://schemas.openxmlformats.org/drawingml/2006/main">
               <a:ext uri="{FF2B5EF4-FFF2-40B4-BE49-F238E27FC236}">
-                <a16:creationId xmlns:a16="http://schemas.microsoft.com/office/drawing/2014/main" id="{F70A389F-00BE-4A0E-91B9-43798E908C23}"/>
+                <a16:creationId xmlns:a16="http://schemas.microsoft.com/office/drawing/2014/main" id="{25F1FAF1-B86F-4664-B4FF-2C9B29B47335}"/>
               </a:ext>
             </a:extLst>
           </p:cNvPr>
@@ -19244,7 +23164,7 @@
           <p:cNvPr id="12" name="">
             <a:extLst xmlns:a="http://schemas.openxmlformats.org/drawingml/2006/main">
               <a:ext uri="{FF2B5EF4-FFF2-40B4-BE49-F238E27FC236}">
-                <a16:creationId xmlns:a16="http://schemas.microsoft.com/office/drawing/2014/main" id="{C339D75B-2CF9-4312-A6F8-38B1D502BD27}"/>
+                <a16:creationId xmlns:a16="http://schemas.microsoft.com/office/drawing/2014/main" id="{F6FFC260-1D09-44C4-82A9-91DB1A1B64A5}"/>
               </a:ext>
             </a:extLst>
           </p:cNvPr>
@@ -19277,7 +23197,7 @@
           <p:cNvPr id="13" name="">
             <a:extLst xmlns:a="http://schemas.openxmlformats.org/drawingml/2006/main">
               <a:ext uri="{FF2B5EF4-FFF2-40B4-BE49-F238E27FC236}">
-                <a16:creationId xmlns:a16="http://schemas.microsoft.com/office/drawing/2014/main" id="{0B0DE702-3609-4CC4-8199-A80EF1E6849E}"/>
+                <a16:creationId xmlns:a16="http://schemas.microsoft.com/office/drawing/2014/main" id="{D89AFEFB-94D4-48CC-BA5E-CDA2E6D4FCD1}"/>
               </a:ext>
             </a:extLst>
           </p:cNvPr>
@@ -19327,7 +23247,7 @@
           <p:cNvPr id="14" name="">
             <a:extLst xmlns:a="http://schemas.openxmlformats.org/drawingml/2006/main">
               <a:ext uri="{FF2B5EF4-FFF2-40B4-BE49-F238E27FC236}">
-                <a16:creationId xmlns:a16="http://schemas.microsoft.com/office/drawing/2014/main" id="{D993F64E-7C68-4BC9-A03B-4F811E821661}"/>
+                <a16:creationId xmlns:a16="http://schemas.microsoft.com/office/drawing/2014/main" id="{6BF4070A-CD93-485F-94A9-E38F0FF9C23D}"/>
               </a:ext>
             </a:extLst>
           </p:cNvPr>
@@ -19377,7 +23297,7 @@
           <p:cNvPr id="15" name="">
             <a:extLst xmlns:a="http://schemas.openxmlformats.org/drawingml/2006/main">
               <a:ext uri="{FF2B5EF4-FFF2-40B4-BE49-F238E27FC236}">
-                <a16:creationId xmlns:a16="http://schemas.microsoft.com/office/drawing/2014/main" id="{C0E51EB8-1D29-492E-B79B-036B021DC14E}"/>
+                <a16:creationId xmlns:a16="http://schemas.microsoft.com/office/drawing/2014/main" id="{7EC296CD-5F28-4579-96BC-FC7B3F4225AA}"/>
               </a:ext>
             </a:extLst>
           </p:cNvPr>
@@ -19427,7 +23347,7 @@
           <p:cNvPr id="16" name="">
             <a:extLst xmlns:a="http://schemas.openxmlformats.org/drawingml/2006/main">
               <a:ext uri="{FF2B5EF4-FFF2-40B4-BE49-F238E27FC236}">
-                <a16:creationId xmlns:a16="http://schemas.microsoft.com/office/drawing/2014/main" id="{FDA3D57F-B9E8-497F-B61B-0987A67AB6D0}"/>
+                <a16:creationId xmlns:a16="http://schemas.microsoft.com/office/drawing/2014/main" id="{DD154346-7E52-41FE-BAEB-C52C38EEAE34}"/>
               </a:ext>
             </a:extLst>
           </p:cNvPr>
@@ -19460,7 +23380,7 @@
           <p:cNvPr id="17" name="">
             <a:extLst xmlns:a="http://schemas.openxmlformats.org/drawingml/2006/main">
               <a:ext uri="{FF2B5EF4-FFF2-40B4-BE49-F238E27FC236}">
-                <a16:creationId xmlns:a16="http://schemas.microsoft.com/office/drawing/2014/main" id="{59A10DD2-EFA0-4247-A317-6F5949303562}"/>
+                <a16:creationId xmlns:a16="http://schemas.microsoft.com/office/drawing/2014/main" id="{D9D90EBC-4375-4FDD-AB81-BFAC2CDB7169}"/>
               </a:ext>
             </a:extLst>
           </p:cNvPr>
@@ -19493,7 +23413,7 @@
           <p:cNvPr id="18" name="">
             <a:extLst xmlns:a="http://schemas.openxmlformats.org/drawingml/2006/main">
               <a:ext uri="{FF2B5EF4-FFF2-40B4-BE49-F238E27FC236}">
-                <a16:creationId xmlns:a16="http://schemas.microsoft.com/office/drawing/2014/main" id="{00A1C0EA-767C-4735-8A39-B73BD7A3A167}"/>
+                <a16:creationId xmlns:a16="http://schemas.microsoft.com/office/drawing/2014/main" id="{1C59F64C-DDEA-4E8F-A40A-B6B981BA46B1}"/>
               </a:ext>
             </a:extLst>
           </p:cNvPr>
@@ -19543,7 +23463,7 @@
           <p:cNvPr id="19" name="">
             <a:extLst xmlns:a="http://schemas.openxmlformats.org/drawingml/2006/main">
               <a:ext uri="{FF2B5EF4-FFF2-40B4-BE49-F238E27FC236}">
-                <a16:creationId xmlns:a16="http://schemas.microsoft.com/office/drawing/2014/main" id="{5FC134D4-725C-4018-B41C-784ADAC1C803}"/>
+                <a16:creationId xmlns:a16="http://schemas.microsoft.com/office/drawing/2014/main" id="{DE88E1FF-644B-4CCF-A4D0-951EA1622366}"/>
               </a:ext>
             </a:extLst>
           </p:cNvPr>
@@ -19593,7 +23513,7 @@
           <p:cNvPr id="20" name="">
             <a:extLst xmlns:a="http://schemas.openxmlformats.org/drawingml/2006/main">
               <a:ext uri="{FF2B5EF4-FFF2-40B4-BE49-F238E27FC236}">
-                <a16:creationId xmlns:a16="http://schemas.microsoft.com/office/drawing/2014/main" id="{32EEE126-E70E-4A91-A159-B7293AF9BA63}"/>
+                <a16:creationId xmlns:a16="http://schemas.microsoft.com/office/drawing/2014/main" id="{A25C2EB4-C619-4524-8858-BBA70021580A}"/>
               </a:ext>
             </a:extLst>
           </p:cNvPr>
@@ -19643,7 +23563,7 @@
           <p:cNvPr id="21" name="">
             <a:extLst xmlns:a="http://schemas.openxmlformats.org/drawingml/2006/main">
               <a:ext uri="{FF2B5EF4-FFF2-40B4-BE49-F238E27FC236}">
-                <a16:creationId xmlns:a16="http://schemas.microsoft.com/office/drawing/2014/main" id="{27F95468-620E-48BD-B046-D0A3F8BFE861}"/>
+                <a16:creationId xmlns:a16="http://schemas.microsoft.com/office/drawing/2014/main" id="{B3DDC50F-B330-4CA6-8121-D571BB7B73CD}"/>
               </a:ext>
             </a:extLst>
           </p:cNvPr>
@@ -19676,7 +23596,7 @@
           <p:cNvPr id="22" name="">
             <a:extLst xmlns:a="http://schemas.openxmlformats.org/drawingml/2006/main">
               <a:ext uri="{FF2B5EF4-FFF2-40B4-BE49-F238E27FC236}">
-                <a16:creationId xmlns:a16="http://schemas.microsoft.com/office/drawing/2014/main" id="{33FF67C9-30D1-4452-A64B-1432543C759E}"/>
+                <a16:creationId xmlns:a16="http://schemas.microsoft.com/office/drawing/2014/main" id="{8528F985-9DCC-408A-9D65-19D31D469F77}"/>
               </a:ext>
             </a:extLst>
           </p:cNvPr>
@@ -19709,7 +23629,7 @@
           <p:cNvPr id="23" name="">
             <a:extLst xmlns:a="http://schemas.openxmlformats.org/drawingml/2006/main">
               <a:ext uri="{FF2B5EF4-FFF2-40B4-BE49-F238E27FC236}">
-                <a16:creationId xmlns:a16="http://schemas.microsoft.com/office/drawing/2014/main" id="{6F9CA843-B402-48AD-9D1E-4219D5B8D2C0}"/>
+                <a16:creationId xmlns:a16="http://schemas.microsoft.com/office/drawing/2014/main" id="{18D4155F-800E-4D67-9555-946ACF4A9F17}"/>
               </a:ext>
             </a:extLst>
           </p:cNvPr>
@@ -19759,7 +23679,7 @@
           <p:cNvPr id="24" name="">
             <a:extLst xmlns:a="http://schemas.openxmlformats.org/drawingml/2006/main">
               <a:ext uri="{FF2B5EF4-FFF2-40B4-BE49-F238E27FC236}">
-                <a16:creationId xmlns:a16="http://schemas.microsoft.com/office/drawing/2014/main" id="{CB0A7924-4D6C-453E-88FD-922B98AD956D}"/>
+                <a16:creationId xmlns:a16="http://schemas.microsoft.com/office/drawing/2014/main" id="{1ED19DB8-679B-4A9F-92E1-5473AEC9B579}"/>
               </a:ext>
             </a:extLst>
           </p:cNvPr>
@@ -19799,7 +23719,7 @@
                   <a:srgbClr val="24364B"/>
                 </a:solidFill>
               </a:rPr>
-              <a:t>unread</a:t>
+              <a:t>intraday unread</a:t>
             </a:r>
           </a:p>
         </p:txBody>
@@ -19809,7 +23729,7 @@
           <p:cNvPr id="25" name="">
             <a:extLst xmlns:a="http://schemas.openxmlformats.org/drawingml/2006/main">
               <a:ext uri="{FF2B5EF4-FFF2-40B4-BE49-F238E27FC236}">
-                <a16:creationId xmlns:a16="http://schemas.microsoft.com/office/drawing/2014/main" id="{01847163-589C-4C92-9814-20FD989B0586}"/>
+                <a16:creationId xmlns:a16="http://schemas.microsoft.com/office/drawing/2014/main" id="{66362200-B98A-42B1-9DE8-C6C1CF9F04DD}"/>
               </a:ext>
             </a:extLst>
           </p:cNvPr>
@@ -19849,7 +23769,7 @@
                   <a:srgbClr val="667386"/>
                 </a:solidFill>
               </a:rPr>
-              <a:t>Reserved confirmation boundary</a:t>
+              <a:t>Daily confirmation is documented later</a:t>
             </a:r>
           </a:p>
         </p:txBody>
@@ -19859,7 +23779,7 @@
           <p:cNvPr id="26" name="">
             <a:extLst xmlns:a="http://schemas.openxmlformats.org/drawingml/2006/main">
               <a:ext uri="{FF2B5EF4-FFF2-40B4-BE49-F238E27FC236}">
-                <a16:creationId xmlns:a16="http://schemas.microsoft.com/office/drawing/2014/main" id="{569D12AB-369B-4D47-9249-6C33BF8677FA}"/>
+                <a16:creationId xmlns:a16="http://schemas.microsoft.com/office/drawing/2014/main" id="{D2D3E205-74CE-42A6-9E99-082B5ED1E207}"/>
               </a:ext>
             </a:extLst>
           </p:cNvPr>
@@ -19892,7 +23812,7 @@
           <p:cNvPr id="27" name="">
             <a:extLst xmlns:a="http://schemas.openxmlformats.org/drawingml/2006/main">
               <a:ext uri="{FF2B5EF4-FFF2-40B4-BE49-F238E27FC236}">
-                <a16:creationId xmlns:a16="http://schemas.microsoft.com/office/drawing/2014/main" id="{AEBB1BF2-5439-4D36-82E3-39ACAD5891EE}"/>
+                <a16:creationId xmlns:a16="http://schemas.microsoft.com/office/drawing/2014/main" id="{8FEF3F54-2A8C-48EE-98F8-D5E31AF53C09}"/>
               </a:ext>
             </a:extLst>
           </p:cNvPr>
@@ -19942,7 +23862,7 @@
           <p:cNvPr id="28" name="">
             <a:extLst xmlns:a="http://schemas.openxmlformats.org/drawingml/2006/main">
               <a:ext uri="{FF2B5EF4-FFF2-40B4-BE49-F238E27FC236}">
-                <a16:creationId xmlns:a16="http://schemas.microsoft.com/office/drawing/2014/main" id="{D5EC5A60-B505-4C8B-B293-2C3C91F79D2C}"/>
+                <a16:creationId xmlns:a16="http://schemas.microsoft.com/office/drawing/2014/main" id="{B80E62DF-C849-461F-907E-BF109246EB28}"/>
               </a:ext>
             </a:extLst>
           </p:cNvPr>
@@ -19975,7 +23895,7 @@
           <p:cNvPr id="29" name="">
             <a:extLst xmlns:a="http://schemas.openxmlformats.org/drawingml/2006/main">
               <a:ext uri="{FF2B5EF4-FFF2-40B4-BE49-F238E27FC236}">
-                <a16:creationId xmlns:a16="http://schemas.microsoft.com/office/drawing/2014/main" id="{7EBF097D-EE7B-4F7E-8914-89CBAAD0A7D8}"/>
+                <a16:creationId xmlns:a16="http://schemas.microsoft.com/office/drawing/2014/main" id="{B57483AA-5537-43FC-94B5-79958D1B2A8D}"/>
               </a:ext>
             </a:extLst>
           </p:cNvPr>
@@ -20025,7 +23945,7 @@
           <p:cNvPr id="30" name="">
             <a:extLst xmlns:a="http://schemas.openxmlformats.org/drawingml/2006/main">
               <a:ext uri="{FF2B5EF4-FFF2-40B4-BE49-F238E27FC236}">
-                <a16:creationId xmlns:a16="http://schemas.microsoft.com/office/drawing/2014/main" id="{DB7D2B0B-1DBB-402E-93E4-B61B65D30F92}"/>
+                <a16:creationId xmlns:a16="http://schemas.microsoft.com/office/drawing/2014/main" id="{8F5AE873-5CAB-4ED7-AE94-68C9316A7673}"/>
               </a:ext>
             </a:extLst>
           </p:cNvPr>
@@ -20058,7 +23978,7 @@
           <p:cNvPr id="31" name="">
             <a:extLst xmlns:a="http://schemas.openxmlformats.org/drawingml/2006/main">
               <a:ext uri="{FF2B5EF4-FFF2-40B4-BE49-F238E27FC236}">
-                <a16:creationId xmlns:a16="http://schemas.microsoft.com/office/drawing/2014/main" id="{54D9F1D8-80D8-4C83-AC75-9E0986CFC7D1}"/>
+                <a16:creationId xmlns:a16="http://schemas.microsoft.com/office/drawing/2014/main" id="{006E5386-E4B4-4E6A-9160-9E0DE224C4B4}"/>
               </a:ext>
             </a:extLst>
           </p:cNvPr>
@@ -20108,7 +24028,7 @@
           <p:cNvPr id="32" name="">
             <a:extLst xmlns:a="http://schemas.openxmlformats.org/drawingml/2006/main">
               <a:ext uri="{FF2B5EF4-FFF2-40B4-BE49-F238E27FC236}">
-                <a16:creationId xmlns:a16="http://schemas.microsoft.com/office/drawing/2014/main" id="{3A34E1D7-E2B5-46C7-A7AF-6E70341AB196}"/>
+                <a16:creationId xmlns:a16="http://schemas.microsoft.com/office/drawing/2014/main" id="{1102D1E6-9CEC-477B-A6CB-FFB44135897D}"/>
               </a:ext>
             </a:extLst>
           </p:cNvPr>
@@ -20158,7 +24078,7 @@
           <p:cNvPr id="33" name="">
             <a:extLst xmlns:a="http://schemas.openxmlformats.org/drawingml/2006/main">
               <a:ext uri="{FF2B5EF4-FFF2-40B4-BE49-F238E27FC236}">
-                <a16:creationId xmlns:a16="http://schemas.microsoft.com/office/drawing/2014/main" id="{1F8BB6AF-3B87-4AFC-BFFD-BE15A59CC1F5}"/>
+                <a16:creationId xmlns:a16="http://schemas.microsoft.com/office/drawing/2014/main" id="{743876D3-5AE1-44D2-A4F5-FF06EAB827F6}"/>
               </a:ext>
             </a:extLst>
           </p:cNvPr>
@@ -20191,7 +24111,7 @@
           <p:cNvPr id="34" name="">
             <a:extLst xmlns:a="http://schemas.openxmlformats.org/drawingml/2006/main">
               <a:ext uri="{FF2B5EF4-FFF2-40B4-BE49-F238E27FC236}">
-                <a16:creationId xmlns:a16="http://schemas.microsoft.com/office/drawing/2014/main" id="{85090CC9-E2AA-4D08-9C4E-FC99C88B4644}"/>
+                <a16:creationId xmlns:a16="http://schemas.microsoft.com/office/drawing/2014/main" id="{D2922183-FF3D-4D5F-A3A3-E90F23DC54BD}"/>
               </a:ext>
             </a:extLst>
           </p:cNvPr>
@@ -20241,7 +24161,7 @@
           <p:cNvPr id="35" name="">
             <a:extLst xmlns:a="http://schemas.openxmlformats.org/drawingml/2006/main">
               <a:ext uri="{FF2B5EF4-FFF2-40B4-BE49-F238E27FC236}">
-                <a16:creationId xmlns:a16="http://schemas.microsoft.com/office/drawing/2014/main" id="{F5CC6C7A-EA17-4850-86FE-80A0C06BACF9}"/>
+                <a16:creationId xmlns:a16="http://schemas.microsoft.com/office/drawing/2014/main" id="{A749DD28-07A7-4907-9DED-9E63643557AD}"/>
               </a:ext>
             </a:extLst>
           </p:cNvPr>
@@ -20274,7 +24194,7 @@
           <p:cNvPr id="36" name="">
             <a:extLst xmlns:a="http://schemas.openxmlformats.org/drawingml/2006/main">
               <a:ext uri="{FF2B5EF4-FFF2-40B4-BE49-F238E27FC236}">
-                <a16:creationId xmlns:a16="http://schemas.microsoft.com/office/drawing/2014/main" id="{C54C50E3-FD24-4E29-B467-D294B32AE42F}"/>
+                <a16:creationId xmlns:a16="http://schemas.microsoft.com/office/drawing/2014/main" id="{CDD1F41D-70C2-4C1F-9EEF-8DB0495806C5}"/>
               </a:ext>
             </a:extLst>
           </p:cNvPr>
@@ -20322,7 +24242,7 @@
     </p:spTree>
     <p:extLst>
       <p:ext uri="{BB962C8B-B14F-4D97-AF65-F5344CB8AC3E}">
-        <p14:creationId xmlns:p14="http://schemas.microsoft.com/office/powerpoint/2010/main" val="1490030157"/>
+        <p14:creationId xmlns:p14="http://schemas.microsoft.com/office/powerpoint/2010/main" val="2127526724"/>
       </p:ext>
     </p:extLst>
   </p:cSld>
@@ -20353,7 +24273,7 @@
           <p:cNvPr id="6" name="">
             <a:extLst xmlns:a="http://schemas.openxmlformats.org/drawingml/2006/main">
               <a:ext uri="{FF2B5EF4-FFF2-40B4-BE49-F238E27FC236}">
-                <a16:creationId xmlns:a16="http://schemas.microsoft.com/office/drawing/2014/main" id="{EA292F00-0C36-4AAD-A68B-E40BA34724C8}"/>
+                <a16:creationId xmlns:a16="http://schemas.microsoft.com/office/drawing/2014/main" id="{790EBAEF-3B0E-4511-9350-5D5D1008A1DE}"/>
               </a:ext>
             </a:extLst>
           </p:cNvPr>
@@ -20403,7 +24323,7 @@
           <p:cNvPr id="2" name="">
             <a:extLst xmlns:a="http://schemas.openxmlformats.org/drawingml/2006/main">
               <a:ext uri="{FF2B5EF4-FFF2-40B4-BE49-F238E27FC236}">
-                <a16:creationId xmlns:a16="http://schemas.microsoft.com/office/drawing/2014/main" id="{A318100C-B1F2-4E49-AEDE-4E7F503C189F}"/>
+                <a16:creationId xmlns:a16="http://schemas.microsoft.com/office/drawing/2014/main" id="{FBAF2345-DBBD-4E0A-88BC-4CC77D955702}"/>
               </a:ext>
             </a:extLst>
           </p:cNvPr>
@@ -20470,7 +24390,7 @@
           <p:cNvPr id="3" name="">
             <a:extLst xmlns:a="http://schemas.openxmlformats.org/drawingml/2006/main">
               <a:ext uri="{FF2B5EF4-FFF2-40B4-BE49-F238E27FC236}">
-                <a16:creationId xmlns:a16="http://schemas.microsoft.com/office/drawing/2014/main" id="{0A1C56AE-C9D2-41CA-92D4-9DE1E91FA1E8}"/>
+                <a16:creationId xmlns:a16="http://schemas.microsoft.com/office/drawing/2014/main" id="{0088B8F3-91E7-433F-9AF7-4C72B1958E9C}"/>
               </a:ext>
             </a:extLst>
           </p:cNvPr>
@@ -20520,7 +24440,7 @@
           <p:cNvPr id="4" name="">
             <a:extLst xmlns:a="http://schemas.openxmlformats.org/drawingml/2006/main">
               <a:ext uri="{FF2B5EF4-FFF2-40B4-BE49-F238E27FC236}">
-                <a16:creationId xmlns:a16="http://schemas.microsoft.com/office/drawing/2014/main" id="{A4ECBCA7-C079-4BA9-969F-B72183CF97F3}"/>
+                <a16:creationId xmlns:a16="http://schemas.microsoft.com/office/drawing/2014/main" id="{76C881D2-4FD8-4D51-BA70-ED62C1F205D3}"/>
               </a:ext>
             </a:extLst>
           </p:cNvPr>
@@ -20570,7 +24490,7 @@
           <p:cNvPr id="5" name="">
             <a:extLst xmlns:a="http://schemas.openxmlformats.org/drawingml/2006/main">
               <a:ext uri="{FF2B5EF4-FFF2-40B4-BE49-F238E27FC236}">
-                <a16:creationId xmlns:a16="http://schemas.microsoft.com/office/drawing/2014/main" id="{2115770E-D889-4E34-872A-38C51AF08054}"/>
+                <a16:creationId xmlns:a16="http://schemas.microsoft.com/office/drawing/2014/main" id="{E290F17B-EA85-47D3-A616-5FFF18672A06}"/>
               </a:ext>
             </a:extLst>
           </p:cNvPr>
@@ -20618,7 +24538,7 @@
     </p:spTree>
     <p:extLst>
       <p:ext uri="{BB962C8B-B14F-4D97-AF65-F5344CB8AC3E}">
-        <p14:creationId xmlns:p14="http://schemas.microsoft.com/office/powerpoint/2010/main" val="920949618"/>
+        <p14:creationId xmlns:p14="http://schemas.microsoft.com/office/powerpoint/2010/main" val="1050842076"/>
       </p:ext>
     </p:extLst>
   </p:cSld>
@@ -20649,7 +24569,7 @@
           <p:cNvPr id="17" name="">
             <a:extLst xmlns:a="http://schemas.openxmlformats.org/drawingml/2006/main">
               <a:ext uri="{FF2B5EF4-FFF2-40B4-BE49-F238E27FC236}">
-                <a16:creationId xmlns:a16="http://schemas.microsoft.com/office/drawing/2014/main" id="{B1DD3F9C-54A3-47A4-903E-431E9BB91C69}"/>
+                <a16:creationId xmlns:a16="http://schemas.microsoft.com/office/drawing/2014/main" id="{29145604-B01D-4AC5-B9B5-02614D18EB63}"/>
               </a:ext>
             </a:extLst>
           </p:cNvPr>
@@ -20699,7 +24619,7 @@
           <p:cNvPr id="2" name="">
             <a:extLst xmlns:a="http://schemas.openxmlformats.org/drawingml/2006/main">
               <a:ext uri="{FF2B5EF4-FFF2-40B4-BE49-F238E27FC236}">
-                <a16:creationId xmlns:a16="http://schemas.microsoft.com/office/drawing/2014/main" id="{46B91E60-C8A4-404E-833F-67EA6453834C}"/>
+                <a16:creationId xmlns:a16="http://schemas.microsoft.com/office/drawing/2014/main" id="{0316A912-4F4A-47DF-8E56-7AF8C3F74E3E}"/>
               </a:ext>
             </a:extLst>
           </p:cNvPr>
@@ -20749,7 +24669,7 @@
           <p:cNvPr id="3" name="">
             <a:extLst xmlns:a="http://schemas.openxmlformats.org/drawingml/2006/main">
               <a:ext uri="{FF2B5EF4-FFF2-40B4-BE49-F238E27FC236}">
-                <a16:creationId xmlns:a16="http://schemas.microsoft.com/office/drawing/2014/main" id="{94DFA780-AC81-40F0-BAF3-AC03811D3847}"/>
+                <a16:creationId xmlns:a16="http://schemas.microsoft.com/office/drawing/2014/main" id="{44351605-53DD-4876-9604-8E945D130FED}"/>
               </a:ext>
             </a:extLst>
           </p:cNvPr>
@@ -20782,7 +24702,7 @@
           <p:cNvPr id="4" name="">
             <a:extLst xmlns:a="http://schemas.openxmlformats.org/drawingml/2006/main">
               <a:ext uri="{FF2B5EF4-FFF2-40B4-BE49-F238E27FC236}">
-                <a16:creationId xmlns:a16="http://schemas.microsoft.com/office/drawing/2014/main" id="{F49DBB6E-9ED9-44E7-9D76-28001080CF64}"/>
+                <a16:creationId xmlns:a16="http://schemas.microsoft.com/office/drawing/2014/main" id="{799A5D1C-DA80-4724-92BC-36C8A83CF98C}"/>
               </a:ext>
             </a:extLst>
           </p:cNvPr>
@@ -20832,7 +24752,7 @@
           <p:cNvPr id="5" name="">
             <a:extLst xmlns:a="http://schemas.openxmlformats.org/drawingml/2006/main">
               <a:ext uri="{FF2B5EF4-FFF2-40B4-BE49-F238E27FC236}">
-                <a16:creationId xmlns:a16="http://schemas.microsoft.com/office/drawing/2014/main" id="{739235FF-ECFC-4A45-ACE9-1DD185C04D39}"/>
+                <a16:creationId xmlns:a16="http://schemas.microsoft.com/office/drawing/2014/main" id="{74EEF5D4-1D99-421C-9BB7-EAD72596B3BA}"/>
               </a:ext>
             </a:extLst>
           </p:cNvPr>
@@ -20886,7 +24806,7 @@
           <p:nvPr/>
         </p:nvPicPr>
         <p:blipFill>
-          <a:blip xmlns:r="http://schemas.openxmlformats.org/officeDocument/2006/relationships" xmlns:a="http://schemas.openxmlformats.org/drawingml/2006/main" r:embed="R777a491ffcd942f9"/>
+          <a:blip xmlns:r="http://schemas.openxmlformats.org/officeDocument/2006/relationships" xmlns:a="http://schemas.openxmlformats.org/drawingml/2006/main" r:embed="Rf1b69fb9a750414d"/>
           <a:stretch xmlns:a="http://schemas.openxmlformats.org/drawingml/2006/main"/>
         </p:blipFill>
         <p:spPr>
@@ -20904,7 +24824,7 @@
           <p:cNvPr id="7" name="">
             <a:extLst xmlns:a="http://schemas.openxmlformats.org/drawingml/2006/main">
               <a:ext uri="{FF2B5EF4-FFF2-40B4-BE49-F238E27FC236}">
-                <a16:creationId xmlns:a16="http://schemas.microsoft.com/office/drawing/2014/main" id="{18FE8842-E620-4A1B-941A-5E9EA486E840}"/>
+                <a16:creationId xmlns:a16="http://schemas.microsoft.com/office/drawing/2014/main" id="{1F5ABB59-087F-4A5E-996B-B9AE7DF0B57A}"/>
               </a:ext>
             </a:extLst>
           </p:cNvPr>
@@ -20937,7 +24857,7 @@
           <p:cNvPr id="8" name="">
             <a:extLst xmlns:a="http://schemas.openxmlformats.org/drawingml/2006/main">
               <a:ext uri="{FF2B5EF4-FFF2-40B4-BE49-F238E27FC236}">
-                <a16:creationId xmlns:a16="http://schemas.microsoft.com/office/drawing/2014/main" id="{142B955F-D4E8-44BF-9CCB-B051E53A67A3}"/>
+                <a16:creationId xmlns:a16="http://schemas.microsoft.com/office/drawing/2014/main" id="{EF876495-3340-4BAA-B31A-85C735F89077}"/>
               </a:ext>
             </a:extLst>
           </p:cNvPr>
@@ -20987,7 +24907,7 @@
           <p:cNvPr id="9" name="">
             <a:extLst xmlns:a="http://schemas.openxmlformats.org/drawingml/2006/main">
               <a:ext uri="{FF2B5EF4-FFF2-40B4-BE49-F238E27FC236}">
-                <a16:creationId xmlns:a16="http://schemas.microsoft.com/office/drawing/2014/main" id="{E8371A05-5795-4E28-9C4C-19996BF365C0}"/>
+                <a16:creationId xmlns:a16="http://schemas.microsoft.com/office/drawing/2014/main" id="{3E997D6E-BD90-4F53-AC1D-8D1B530F2BF7}"/>
               </a:ext>
             </a:extLst>
           </p:cNvPr>
@@ -21037,7 +24957,7 @@
           <p:cNvPr id="10" name="">
             <a:extLst xmlns:a="http://schemas.openxmlformats.org/drawingml/2006/main">
               <a:ext uri="{FF2B5EF4-FFF2-40B4-BE49-F238E27FC236}">
-                <a16:creationId xmlns:a16="http://schemas.microsoft.com/office/drawing/2014/main" id="{18D11D46-A42E-422C-A6A1-FF95FDDB88BF}"/>
+                <a16:creationId xmlns:a16="http://schemas.microsoft.com/office/drawing/2014/main" id="{7994FFF4-A7AA-496C-91EA-267A0BC865AB}"/>
               </a:ext>
             </a:extLst>
           </p:cNvPr>
@@ -21087,7 +25007,7 @@
           <p:cNvPr id="11" name="">
             <a:extLst xmlns:a="http://schemas.openxmlformats.org/drawingml/2006/main">
               <a:ext uri="{FF2B5EF4-FFF2-40B4-BE49-F238E27FC236}">
-                <a16:creationId xmlns:a16="http://schemas.microsoft.com/office/drawing/2014/main" id="{FE3D6889-BE5B-4D05-9200-9DD2B6BA9A9C}"/>
+                <a16:creationId xmlns:a16="http://schemas.microsoft.com/office/drawing/2014/main" id="{E2203168-A257-4207-AB24-71E94DD473E9}"/>
               </a:ext>
             </a:extLst>
           </p:cNvPr>
@@ -21120,7 +25040,7 @@
           <p:cNvPr id="12" name="">
             <a:extLst xmlns:a="http://schemas.openxmlformats.org/drawingml/2006/main">
               <a:ext uri="{FF2B5EF4-FFF2-40B4-BE49-F238E27FC236}">
-                <a16:creationId xmlns:a16="http://schemas.microsoft.com/office/drawing/2014/main" id="{362C8AA4-571D-4A17-85DD-A025366B117E}"/>
+                <a16:creationId xmlns:a16="http://schemas.microsoft.com/office/drawing/2014/main" id="{210006E2-3B4F-4EE1-A34D-07CA91D10951}"/>
               </a:ext>
             </a:extLst>
           </p:cNvPr>
@@ -21170,7 +25090,7 @@
           <p:cNvPr id="13" name="">
             <a:extLst xmlns:a="http://schemas.openxmlformats.org/drawingml/2006/main">
               <a:ext uri="{FF2B5EF4-FFF2-40B4-BE49-F238E27FC236}">
-                <a16:creationId xmlns:a16="http://schemas.microsoft.com/office/drawing/2014/main" id="{BC1392B4-4020-42D8-9D10-E2D7CE3625F2}"/>
+                <a16:creationId xmlns:a16="http://schemas.microsoft.com/office/drawing/2014/main" id="{DDDC187F-226E-484A-9523-C474976807CF}"/>
               </a:ext>
             </a:extLst>
           </p:cNvPr>
@@ -21203,7 +25123,7 @@
           <p:cNvPr id="14" name="">
             <a:extLst xmlns:a="http://schemas.openxmlformats.org/drawingml/2006/main">
               <a:ext uri="{FF2B5EF4-FFF2-40B4-BE49-F238E27FC236}">
-                <a16:creationId xmlns:a16="http://schemas.microsoft.com/office/drawing/2014/main" id="{20C8DC5A-945E-4EC6-9B3E-85FEEA8EC6F0}"/>
+                <a16:creationId xmlns:a16="http://schemas.microsoft.com/office/drawing/2014/main" id="{66B15DC9-0472-4DC1-8F2B-444FF83E369F}"/>
               </a:ext>
             </a:extLst>
           </p:cNvPr>
@@ -21253,7 +25173,7 @@
           <p:cNvPr id="15" name="">
             <a:extLst xmlns:a="http://schemas.openxmlformats.org/drawingml/2006/main">
               <a:ext uri="{FF2B5EF4-FFF2-40B4-BE49-F238E27FC236}">
-                <a16:creationId xmlns:a16="http://schemas.microsoft.com/office/drawing/2014/main" id="{C184C7D5-414C-4B6B-8652-86B87B90B1F2}"/>
+                <a16:creationId xmlns:a16="http://schemas.microsoft.com/office/drawing/2014/main" id="{9121AFD2-76DD-4A0B-8828-FF8B43D106D0}"/>
               </a:ext>
             </a:extLst>
           </p:cNvPr>
@@ -21286,7 +25206,7 @@
           <p:cNvPr id="16" name="">
             <a:extLst xmlns:a="http://schemas.openxmlformats.org/drawingml/2006/main">
               <a:ext uri="{FF2B5EF4-FFF2-40B4-BE49-F238E27FC236}">
-                <a16:creationId xmlns:a16="http://schemas.microsoft.com/office/drawing/2014/main" id="{8E2F6ECC-7AF9-4284-9B2C-62C09EE57937}"/>
+                <a16:creationId xmlns:a16="http://schemas.microsoft.com/office/drawing/2014/main" id="{9F3966E5-D038-44FA-8222-C69104610FCE}"/>
               </a:ext>
             </a:extLst>
           </p:cNvPr>
@@ -21334,7 +25254,7 @@
     </p:spTree>
     <p:extLst>
       <p:ext uri="{BB962C8B-B14F-4D97-AF65-F5344CB8AC3E}">
-        <p14:creationId xmlns:p14="http://schemas.microsoft.com/office/powerpoint/2010/main" val="1962349364"/>
+        <p14:creationId xmlns:p14="http://schemas.microsoft.com/office/powerpoint/2010/main" val="1690273608"/>
       </p:ext>
     </p:extLst>
   </p:cSld>
@@ -21365,7 +25285,7 @@
           <p:cNvPr id="16" name="">
             <a:extLst xmlns:a="http://schemas.openxmlformats.org/drawingml/2006/main">
               <a:ext uri="{FF2B5EF4-FFF2-40B4-BE49-F238E27FC236}">
-                <a16:creationId xmlns:a16="http://schemas.microsoft.com/office/drawing/2014/main" id="{775ED001-E652-4774-A885-5231AE275738}"/>
+                <a16:creationId xmlns:a16="http://schemas.microsoft.com/office/drawing/2014/main" id="{57563795-C959-4E5F-8E56-0A442B72A9D6}"/>
               </a:ext>
             </a:extLst>
           </p:cNvPr>
@@ -21415,7 +25335,7 @@
           <p:cNvPr id="2" name="">
             <a:extLst xmlns:a="http://schemas.openxmlformats.org/drawingml/2006/main">
               <a:ext uri="{FF2B5EF4-FFF2-40B4-BE49-F238E27FC236}">
-                <a16:creationId xmlns:a16="http://schemas.microsoft.com/office/drawing/2014/main" id="{15598AA8-8B15-4BBB-ABEE-F42A63B57969}"/>
+                <a16:creationId xmlns:a16="http://schemas.microsoft.com/office/drawing/2014/main" id="{179508A8-66BE-4F58-9538-8FA973C546E1}"/>
               </a:ext>
             </a:extLst>
           </p:cNvPr>
@@ -21465,7 +25385,7 @@
           <p:cNvPr id="3" name="">
             <a:extLst xmlns:a="http://schemas.openxmlformats.org/drawingml/2006/main">
               <a:ext uri="{FF2B5EF4-FFF2-40B4-BE49-F238E27FC236}">
-                <a16:creationId xmlns:a16="http://schemas.microsoft.com/office/drawing/2014/main" id="{9A994F0B-8C90-4FBD-B1B0-01297A50E12D}"/>
+                <a16:creationId xmlns:a16="http://schemas.microsoft.com/office/drawing/2014/main" id="{88D4ADE2-367F-4C55-94EE-88B5646911AB}"/>
               </a:ext>
             </a:extLst>
           </p:cNvPr>
@@ -21498,7 +25418,7 @@
           <p:cNvPr id="4" name="">
             <a:extLst xmlns:a="http://schemas.openxmlformats.org/drawingml/2006/main">
               <a:ext uri="{FF2B5EF4-FFF2-40B4-BE49-F238E27FC236}">
-                <a16:creationId xmlns:a16="http://schemas.microsoft.com/office/drawing/2014/main" id="{846A5BC9-AD3C-4413-9F2A-2C7DDC5206F8}"/>
+                <a16:creationId xmlns:a16="http://schemas.microsoft.com/office/drawing/2014/main" id="{F0675854-4FD8-4D4B-A0C1-A097C5829747}"/>
               </a:ext>
             </a:extLst>
           </p:cNvPr>
@@ -21548,7 +25468,7 @@
           <p:cNvPr id="5" name="">
             <a:extLst xmlns:a="http://schemas.openxmlformats.org/drawingml/2006/main">
               <a:ext uri="{FF2B5EF4-FFF2-40B4-BE49-F238E27FC236}">
-                <a16:creationId xmlns:a16="http://schemas.microsoft.com/office/drawing/2014/main" id="{A168BB3E-9963-463F-8B90-609DC785F307}"/>
+                <a16:creationId xmlns:a16="http://schemas.microsoft.com/office/drawing/2014/main" id="{DBE7FCDD-75C3-4234-B4F9-AAB3520434A3}"/>
               </a:ext>
             </a:extLst>
           </p:cNvPr>
@@ -21602,7 +25522,7 @@
           <p:nvPr/>
         </p:nvPicPr>
         <p:blipFill>
-          <a:blip xmlns:r="http://schemas.openxmlformats.org/officeDocument/2006/relationships" xmlns:a="http://schemas.openxmlformats.org/drawingml/2006/main" r:embed="R6fc59c31344b4011"/>
+          <a:blip xmlns:r="http://schemas.openxmlformats.org/officeDocument/2006/relationships" xmlns:a="http://schemas.openxmlformats.org/drawingml/2006/main" r:embed="R25b90b851f224ff0"/>
           <a:stretch xmlns:a="http://schemas.openxmlformats.org/drawingml/2006/main"/>
         </p:blipFill>
         <p:spPr>
@@ -21620,7 +25540,7 @@
           <p:cNvPr id="7" name="">
             <a:extLst xmlns:a="http://schemas.openxmlformats.org/drawingml/2006/main">
               <a:ext uri="{FF2B5EF4-FFF2-40B4-BE49-F238E27FC236}">
-                <a16:creationId xmlns:a16="http://schemas.microsoft.com/office/drawing/2014/main" id="{0E9F9D1C-9CB4-49ED-9BFD-F5E5E86A4B25}"/>
+                <a16:creationId xmlns:a16="http://schemas.microsoft.com/office/drawing/2014/main" id="{F40A0093-0F6F-4255-94BA-F76058F6B71C}"/>
               </a:ext>
             </a:extLst>
           </p:cNvPr>
@@ -21653,7 +25573,7 @@
           <p:cNvPr id="8" name="">
             <a:extLst xmlns:a="http://schemas.openxmlformats.org/drawingml/2006/main">
               <a:ext uri="{FF2B5EF4-FFF2-40B4-BE49-F238E27FC236}">
-                <a16:creationId xmlns:a16="http://schemas.microsoft.com/office/drawing/2014/main" id="{6AC6F0A9-2F75-45E9-9D03-A287BF73548A}"/>
+                <a16:creationId xmlns:a16="http://schemas.microsoft.com/office/drawing/2014/main" id="{49C79496-C154-4DA9-83F8-416EE3C4CAA4}"/>
               </a:ext>
             </a:extLst>
           </p:cNvPr>
@@ -21703,7 +25623,7 @@
           <p:cNvPr id="9" name="">
             <a:extLst xmlns:a="http://schemas.openxmlformats.org/drawingml/2006/main">
               <a:ext uri="{FF2B5EF4-FFF2-40B4-BE49-F238E27FC236}">
-                <a16:creationId xmlns:a16="http://schemas.microsoft.com/office/drawing/2014/main" id="{220B44AB-FC46-47E3-A7D0-52487B6CD66B}"/>
+                <a16:creationId xmlns:a16="http://schemas.microsoft.com/office/drawing/2014/main" id="{7C83BC26-0641-4A4A-8304-99D45CF131CD}"/>
               </a:ext>
             </a:extLst>
           </p:cNvPr>
@@ -21736,7 +25656,7 @@
           <p:cNvPr id="10" name="">
             <a:extLst xmlns:a="http://schemas.openxmlformats.org/drawingml/2006/main">
               <a:ext uri="{FF2B5EF4-FFF2-40B4-BE49-F238E27FC236}">
-                <a16:creationId xmlns:a16="http://schemas.microsoft.com/office/drawing/2014/main" id="{F92E3294-3414-40C5-8774-6778AF2811CD}"/>
+                <a16:creationId xmlns:a16="http://schemas.microsoft.com/office/drawing/2014/main" id="{B66AA8D9-1093-4B14-AAFD-C65AB7436863}"/>
               </a:ext>
             </a:extLst>
           </p:cNvPr>
@@ -21786,7 +25706,7 @@
           <p:cNvPr id="11" name="">
             <a:extLst xmlns:a="http://schemas.openxmlformats.org/drawingml/2006/main">
               <a:ext uri="{FF2B5EF4-FFF2-40B4-BE49-F238E27FC236}">
-                <a16:creationId xmlns:a16="http://schemas.microsoft.com/office/drawing/2014/main" id="{F38C69C1-109A-441B-930D-99261C5D29EB}"/>
+                <a16:creationId xmlns:a16="http://schemas.microsoft.com/office/drawing/2014/main" id="{48E9888A-40F0-4D40-9CA1-20E22E2A36EC}"/>
               </a:ext>
             </a:extLst>
           </p:cNvPr>
@@ -21819,7 +25739,7 @@
           <p:cNvPr id="12" name="">
             <a:extLst xmlns:a="http://schemas.openxmlformats.org/drawingml/2006/main">
               <a:ext uri="{FF2B5EF4-FFF2-40B4-BE49-F238E27FC236}">
-                <a16:creationId xmlns:a16="http://schemas.microsoft.com/office/drawing/2014/main" id="{BED71162-B8B6-4884-8C1A-6FE086CD8542}"/>
+                <a16:creationId xmlns:a16="http://schemas.microsoft.com/office/drawing/2014/main" id="{66F45B90-5F41-47AE-B459-5E6FE91E287C}"/>
               </a:ext>
             </a:extLst>
           </p:cNvPr>
@@ -21869,7 +25789,7 @@
           <p:cNvPr id="13" name="">
             <a:extLst xmlns:a="http://schemas.openxmlformats.org/drawingml/2006/main">
               <a:ext uri="{FF2B5EF4-FFF2-40B4-BE49-F238E27FC236}">
-                <a16:creationId xmlns:a16="http://schemas.microsoft.com/office/drawing/2014/main" id="{FD120BBB-881E-4877-891B-1B8EEADB9DDE}"/>
+                <a16:creationId xmlns:a16="http://schemas.microsoft.com/office/drawing/2014/main" id="{3E97A921-B287-48B3-8CBE-A4CEBDB0C3B2}"/>
               </a:ext>
             </a:extLst>
           </p:cNvPr>
@@ -21902,7 +25822,7 @@
           <p:cNvPr id="14" name="">
             <a:extLst xmlns:a="http://schemas.openxmlformats.org/drawingml/2006/main">
               <a:ext uri="{FF2B5EF4-FFF2-40B4-BE49-F238E27FC236}">
-                <a16:creationId xmlns:a16="http://schemas.microsoft.com/office/drawing/2014/main" id="{A0535B7A-94F4-4D3A-8F83-628A22DFBC77}"/>
+                <a16:creationId xmlns:a16="http://schemas.microsoft.com/office/drawing/2014/main" id="{9D0B01EF-8047-4C32-8FC2-238508F6CFC6}"/>
               </a:ext>
             </a:extLst>
           </p:cNvPr>
@@ -21952,7 +25872,7 @@
           <p:cNvPr id="15" name="">
             <a:extLst xmlns:a="http://schemas.openxmlformats.org/drawingml/2006/main">
               <a:ext uri="{FF2B5EF4-FFF2-40B4-BE49-F238E27FC236}">
-                <a16:creationId xmlns:a16="http://schemas.microsoft.com/office/drawing/2014/main" id="{DC2E1A11-FE11-42B2-A9E6-FB1C8EC2227F}"/>
+                <a16:creationId xmlns:a16="http://schemas.microsoft.com/office/drawing/2014/main" id="{DA543368-C99D-4244-BFC7-3FD975D4F592}"/>
               </a:ext>
             </a:extLst>
           </p:cNvPr>
@@ -22000,7 +25920,7 @@
     </p:spTree>
     <p:extLst>
       <p:ext uri="{BB962C8B-B14F-4D97-AF65-F5344CB8AC3E}">
-        <p14:creationId xmlns:p14="http://schemas.microsoft.com/office/powerpoint/2010/main" val="1661292865"/>
+        <p14:creationId xmlns:p14="http://schemas.microsoft.com/office/powerpoint/2010/main" val="1573846542"/>
       </p:ext>
     </p:extLst>
   </p:cSld>
@@ -22031,7 +25951,7 @@
           <p:cNvPr id="16" name="">
             <a:extLst xmlns:a="http://schemas.openxmlformats.org/drawingml/2006/main">
               <a:ext uri="{FF2B5EF4-FFF2-40B4-BE49-F238E27FC236}">
-                <a16:creationId xmlns:a16="http://schemas.microsoft.com/office/drawing/2014/main" id="{A932BF7F-F2CF-4656-83B1-5EF87ADF551E}"/>
+                <a16:creationId xmlns:a16="http://schemas.microsoft.com/office/drawing/2014/main" id="{0044B9E2-71C5-4896-9F6E-700756EAE4F8}"/>
               </a:ext>
             </a:extLst>
           </p:cNvPr>
@@ -22081,7 +26001,7 @@
           <p:cNvPr id="2" name="">
             <a:extLst xmlns:a="http://schemas.openxmlformats.org/drawingml/2006/main">
               <a:ext uri="{FF2B5EF4-FFF2-40B4-BE49-F238E27FC236}">
-                <a16:creationId xmlns:a16="http://schemas.microsoft.com/office/drawing/2014/main" id="{7E3659B2-75D3-42CC-8BD1-6A8A10E2C711}"/>
+                <a16:creationId xmlns:a16="http://schemas.microsoft.com/office/drawing/2014/main" id="{BC15C3DD-F00F-43AC-B84A-45A6FD9B3425}"/>
               </a:ext>
             </a:extLst>
           </p:cNvPr>
@@ -22131,7 +26051,7 @@
           <p:cNvPr id="3" name="">
             <a:extLst xmlns:a="http://schemas.openxmlformats.org/drawingml/2006/main">
               <a:ext uri="{FF2B5EF4-FFF2-40B4-BE49-F238E27FC236}">
-                <a16:creationId xmlns:a16="http://schemas.microsoft.com/office/drawing/2014/main" id="{360CE4FE-90AD-4707-9322-A3A5E35A4C9D}"/>
+                <a16:creationId xmlns:a16="http://schemas.microsoft.com/office/drawing/2014/main" id="{25C88683-BD59-4973-85D7-F9915140367F}"/>
               </a:ext>
             </a:extLst>
           </p:cNvPr>
@@ -22164,7 +26084,7 @@
           <p:cNvPr id="4" name="">
             <a:extLst xmlns:a="http://schemas.openxmlformats.org/drawingml/2006/main">
               <a:ext uri="{FF2B5EF4-FFF2-40B4-BE49-F238E27FC236}">
-                <a16:creationId xmlns:a16="http://schemas.microsoft.com/office/drawing/2014/main" id="{483F8F2C-0E61-4204-87B6-33918EF58DB5}"/>
+                <a16:creationId xmlns:a16="http://schemas.microsoft.com/office/drawing/2014/main" id="{B9C03ECF-9733-4DC3-BF99-647FA5A1A93A}"/>
               </a:ext>
             </a:extLst>
           </p:cNvPr>
@@ -22214,7 +26134,7 @@
           <p:cNvPr id="5" name="">
             <a:extLst xmlns:a="http://schemas.openxmlformats.org/drawingml/2006/main">
               <a:ext uri="{FF2B5EF4-FFF2-40B4-BE49-F238E27FC236}">
-                <a16:creationId xmlns:a16="http://schemas.microsoft.com/office/drawing/2014/main" id="{982E45E4-60C7-4529-96D3-138B79B0155E}"/>
+                <a16:creationId xmlns:a16="http://schemas.microsoft.com/office/drawing/2014/main" id="{7267AA9D-7199-44D3-9A3D-1CC4E7E125F2}"/>
               </a:ext>
             </a:extLst>
           </p:cNvPr>
@@ -22268,7 +26188,7 @@
           <p:nvPr/>
         </p:nvPicPr>
         <p:blipFill>
-          <a:blip xmlns:r="http://schemas.openxmlformats.org/officeDocument/2006/relationships" xmlns:a="http://schemas.openxmlformats.org/drawingml/2006/main" r:embed="R03e0745b12034ea8"/>
+          <a:blip xmlns:r="http://schemas.openxmlformats.org/officeDocument/2006/relationships" xmlns:a="http://schemas.openxmlformats.org/drawingml/2006/main" r:embed="Rd8378ba788fd4aa3"/>
           <a:stretch xmlns:a="http://schemas.openxmlformats.org/drawingml/2006/main"/>
         </p:blipFill>
         <p:spPr>
@@ -22286,7 +26206,7 @@
           <p:cNvPr id="7" name="">
             <a:extLst xmlns:a="http://schemas.openxmlformats.org/drawingml/2006/main">
               <a:ext uri="{FF2B5EF4-FFF2-40B4-BE49-F238E27FC236}">
-                <a16:creationId xmlns:a16="http://schemas.microsoft.com/office/drawing/2014/main" id="{4B941372-B1B5-45DB-A5C4-9708A84F55F6}"/>
+                <a16:creationId xmlns:a16="http://schemas.microsoft.com/office/drawing/2014/main" id="{813107E4-7743-4006-ABA6-C8911E9DD5E0}"/>
               </a:ext>
             </a:extLst>
           </p:cNvPr>
@@ -22319,7 +26239,7 @@
           <p:cNvPr id="8" name="">
             <a:extLst xmlns:a="http://schemas.openxmlformats.org/drawingml/2006/main">
               <a:ext uri="{FF2B5EF4-FFF2-40B4-BE49-F238E27FC236}">
-                <a16:creationId xmlns:a16="http://schemas.microsoft.com/office/drawing/2014/main" id="{003706CA-5236-4E13-82CD-461EB59EF846}"/>
+                <a16:creationId xmlns:a16="http://schemas.microsoft.com/office/drawing/2014/main" id="{389B5D2C-EA57-4A84-8AFB-D7DB8AED0BA5}"/>
               </a:ext>
             </a:extLst>
           </p:cNvPr>
@@ -22369,7 +26289,7 @@
           <p:cNvPr id="9" name="">
             <a:extLst xmlns:a="http://schemas.openxmlformats.org/drawingml/2006/main">
               <a:ext uri="{FF2B5EF4-FFF2-40B4-BE49-F238E27FC236}">
-                <a16:creationId xmlns:a16="http://schemas.microsoft.com/office/drawing/2014/main" id="{BC370DC2-D67C-43F0-AF2E-1089DC23AFB5}"/>
+                <a16:creationId xmlns:a16="http://schemas.microsoft.com/office/drawing/2014/main" id="{F81F6C80-AEE8-44CF-BE78-2A1D4F41702A}"/>
               </a:ext>
             </a:extLst>
           </p:cNvPr>
@@ -22402,7 +26322,7 @@
           <p:cNvPr id="10" name="">
             <a:extLst xmlns:a="http://schemas.openxmlformats.org/drawingml/2006/main">
               <a:ext uri="{FF2B5EF4-FFF2-40B4-BE49-F238E27FC236}">
-                <a16:creationId xmlns:a16="http://schemas.microsoft.com/office/drawing/2014/main" id="{84A6C611-ED86-488B-91DF-5BF4ECD19EF7}"/>
+                <a16:creationId xmlns:a16="http://schemas.microsoft.com/office/drawing/2014/main" id="{10C21F77-24E1-4BC5-9CC7-8BD5E057B361}"/>
               </a:ext>
             </a:extLst>
           </p:cNvPr>
@@ -22452,7 +26372,7 @@
           <p:cNvPr id="11" name="">
             <a:extLst xmlns:a="http://schemas.openxmlformats.org/drawingml/2006/main">
               <a:ext uri="{FF2B5EF4-FFF2-40B4-BE49-F238E27FC236}">
-                <a16:creationId xmlns:a16="http://schemas.microsoft.com/office/drawing/2014/main" id="{67F1F57A-BF94-4044-8650-D3A7B317E99C}"/>
+                <a16:creationId xmlns:a16="http://schemas.microsoft.com/office/drawing/2014/main" id="{DB521ACE-C766-4AF6-B29A-08F533C85E23}"/>
               </a:ext>
             </a:extLst>
           </p:cNvPr>
@@ -22485,7 +26405,7 @@
           <p:cNvPr id="12" name="">
             <a:extLst xmlns:a="http://schemas.openxmlformats.org/drawingml/2006/main">
               <a:ext uri="{FF2B5EF4-FFF2-40B4-BE49-F238E27FC236}">
-                <a16:creationId xmlns:a16="http://schemas.microsoft.com/office/drawing/2014/main" id="{8F4B7578-6BBC-4FCB-A146-95D33C765DFF}"/>
+                <a16:creationId xmlns:a16="http://schemas.microsoft.com/office/drawing/2014/main" id="{03127ADF-02AD-4858-A444-30D7298901FC}"/>
               </a:ext>
             </a:extLst>
           </p:cNvPr>
@@ -22535,7 +26455,7 @@
           <p:cNvPr id="13" name="">
             <a:extLst xmlns:a="http://schemas.openxmlformats.org/drawingml/2006/main">
               <a:ext uri="{FF2B5EF4-FFF2-40B4-BE49-F238E27FC236}">
-                <a16:creationId xmlns:a16="http://schemas.microsoft.com/office/drawing/2014/main" id="{7D918631-FE84-4DA0-94CE-A8ED37752ADE}"/>
+                <a16:creationId xmlns:a16="http://schemas.microsoft.com/office/drawing/2014/main" id="{66EAB33E-EC45-474D-A4F1-01DD2D5CDD8F}"/>
               </a:ext>
             </a:extLst>
           </p:cNvPr>
@@ -22568,7 +26488,7 @@
           <p:cNvPr id="14" name="">
             <a:extLst xmlns:a="http://schemas.openxmlformats.org/drawingml/2006/main">
               <a:ext uri="{FF2B5EF4-FFF2-40B4-BE49-F238E27FC236}">
-                <a16:creationId xmlns:a16="http://schemas.microsoft.com/office/drawing/2014/main" id="{DD6AD7EF-0A46-42DA-8CA8-BEDB533F6FD5}"/>
+                <a16:creationId xmlns:a16="http://schemas.microsoft.com/office/drawing/2014/main" id="{296DF343-8283-47CE-A23E-43765A755D05}"/>
               </a:ext>
             </a:extLst>
           </p:cNvPr>
@@ -22618,7 +26538,7 @@
           <p:cNvPr id="15" name="">
             <a:extLst xmlns:a="http://schemas.openxmlformats.org/drawingml/2006/main">
               <a:ext uri="{FF2B5EF4-FFF2-40B4-BE49-F238E27FC236}">
-                <a16:creationId xmlns:a16="http://schemas.microsoft.com/office/drawing/2014/main" id="{92A0C3B0-C662-49F6-A0C6-3AEBB31EEBA8}"/>
+                <a16:creationId xmlns:a16="http://schemas.microsoft.com/office/drawing/2014/main" id="{A81C6B0D-A8E8-4975-BBE3-57B736FD0B6B}"/>
               </a:ext>
             </a:extLst>
           </p:cNvPr>
@@ -22666,7 +26586,7 @@
     </p:spTree>
     <p:extLst>
       <p:ext uri="{BB962C8B-B14F-4D97-AF65-F5344CB8AC3E}">
-        <p14:creationId xmlns:p14="http://schemas.microsoft.com/office/powerpoint/2010/main" val="113299234"/>
+        <p14:creationId xmlns:p14="http://schemas.microsoft.com/office/powerpoint/2010/main" val="662374459"/>
       </p:ext>
     </p:extLst>
   </p:cSld>
@@ -22697,7 +26617,7 @@
           <p:cNvPr id="14" name="">
             <a:extLst xmlns:a="http://schemas.openxmlformats.org/drawingml/2006/main">
               <a:ext uri="{FF2B5EF4-FFF2-40B4-BE49-F238E27FC236}">
-                <a16:creationId xmlns:a16="http://schemas.microsoft.com/office/drawing/2014/main" id="{8E3492D0-B530-4565-8BB3-F88723969425}"/>
+                <a16:creationId xmlns:a16="http://schemas.microsoft.com/office/drawing/2014/main" id="{8CB0417A-BFEB-4643-92C3-E03031DE9F06}"/>
               </a:ext>
             </a:extLst>
           </p:cNvPr>
@@ -22747,7 +26667,7 @@
           <p:cNvPr id="2" name="">
             <a:extLst xmlns:a="http://schemas.openxmlformats.org/drawingml/2006/main">
               <a:ext uri="{FF2B5EF4-FFF2-40B4-BE49-F238E27FC236}">
-                <a16:creationId xmlns:a16="http://schemas.microsoft.com/office/drawing/2014/main" id="{19F631C0-5E03-4B03-82D3-200F43C3F94F}"/>
+                <a16:creationId xmlns:a16="http://schemas.microsoft.com/office/drawing/2014/main" id="{1D669593-8A4B-43C5-9F60-A9F2E98A1D2F}"/>
               </a:ext>
             </a:extLst>
           </p:cNvPr>
@@ -22797,7 +26717,7 @@
           <p:cNvPr id="3" name="">
             <a:extLst xmlns:a="http://schemas.openxmlformats.org/drawingml/2006/main">
               <a:ext uri="{FF2B5EF4-FFF2-40B4-BE49-F238E27FC236}">
-                <a16:creationId xmlns:a16="http://schemas.microsoft.com/office/drawing/2014/main" id="{C5A01199-5709-413B-A01C-EDF369C348A4}"/>
+                <a16:creationId xmlns:a16="http://schemas.microsoft.com/office/drawing/2014/main" id="{B7074F34-1590-45EA-BFCE-438193E9CAF4}"/>
               </a:ext>
             </a:extLst>
           </p:cNvPr>
@@ -22830,7 +26750,7 @@
           <p:cNvPr id="4" name="">
             <a:extLst xmlns:a="http://schemas.openxmlformats.org/drawingml/2006/main">
               <a:ext uri="{FF2B5EF4-FFF2-40B4-BE49-F238E27FC236}">
-                <a16:creationId xmlns:a16="http://schemas.microsoft.com/office/drawing/2014/main" id="{9AE7B575-656F-46C5-B337-60EB0DBF08E7}"/>
+                <a16:creationId xmlns:a16="http://schemas.microsoft.com/office/drawing/2014/main" id="{56195DD7-1084-43E0-B238-7A158E09BA17}"/>
               </a:ext>
             </a:extLst>
           </p:cNvPr>
@@ -22880,7 +26800,7 @@
           <p:cNvPr id="5" name="">
             <a:extLst xmlns:a="http://schemas.openxmlformats.org/drawingml/2006/main">
               <a:ext uri="{FF2B5EF4-FFF2-40B4-BE49-F238E27FC236}">
-                <a16:creationId xmlns:a16="http://schemas.microsoft.com/office/drawing/2014/main" id="{4A9B1F36-EBA0-4433-B4A4-BD518FCE31D8}"/>
+                <a16:creationId xmlns:a16="http://schemas.microsoft.com/office/drawing/2014/main" id="{3449809B-3449-47D6-9B14-FDDE5B104D2D}"/>
               </a:ext>
             </a:extLst>
           </p:cNvPr>
@@ -22934,7 +26854,7 @@
           <p:nvPr/>
         </p:nvPicPr>
         <p:blipFill>
-          <a:blip xmlns:r="http://schemas.openxmlformats.org/officeDocument/2006/relationships" xmlns:a="http://schemas.openxmlformats.org/drawingml/2006/main" r:embed="R35abc1431d6942e4"/>
+          <a:blip xmlns:r="http://schemas.openxmlformats.org/officeDocument/2006/relationships" xmlns:a="http://schemas.openxmlformats.org/drawingml/2006/main" r:embed="Rc3afa726d70a4a77"/>
           <a:stretch xmlns:a="http://schemas.openxmlformats.org/drawingml/2006/main"/>
         </p:blipFill>
         <p:spPr>
@@ -22952,7 +26872,7 @@
           <p:cNvPr id="7" name="">
             <a:extLst xmlns:a="http://schemas.openxmlformats.org/drawingml/2006/main">
               <a:ext uri="{FF2B5EF4-FFF2-40B4-BE49-F238E27FC236}">
-                <a16:creationId xmlns:a16="http://schemas.microsoft.com/office/drawing/2014/main" id="{2A981961-F9E7-4CF8-990C-7669022F224B}"/>
+                <a16:creationId xmlns:a16="http://schemas.microsoft.com/office/drawing/2014/main" id="{D9C461F9-A3A2-4428-B058-62029A66F974}"/>
               </a:ext>
             </a:extLst>
           </p:cNvPr>
@@ -22985,7 +26905,7 @@
           <p:cNvPr id="8" name="">
             <a:extLst xmlns:a="http://schemas.openxmlformats.org/drawingml/2006/main">
               <a:ext uri="{FF2B5EF4-FFF2-40B4-BE49-F238E27FC236}">
-                <a16:creationId xmlns:a16="http://schemas.microsoft.com/office/drawing/2014/main" id="{35CDBAAD-F90F-4B16-9BF9-9C56D2AD8E57}"/>
+                <a16:creationId xmlns:a16="http://schemas.microsoft.com/office/drawing/2014/main" id="{9D01177E-9192-425C-AA24-F3A8D90DC461}"/>
               </a:ext>
             </a:extLst>
           </p:cNvPr>
@@ -23035,7 +26955,7 @@
           <p:cNvPr id="9" name="">
             <a:extLst xmlns:a="http://schemas.openxmlformats.org/drawingml/2006/main">
               <a:ext uri="{FF2B5EF4-FFF2-40B4-BE49-F238E27FC236}">
-                <a16:creationId xmlns:a16="http://schemas.microsoft.com/office/drawing/2014/main" id="{DB25CC8D-CFC8-49C4-A1BC-8A45D90D1167}"/>
+                <a16:creationId xmlns:a16="http://schemas.microsoft.com/office/drawing/2014/main" id="{FD92A052-CDD2-4C95-8D22-2E7D3147912E}"/>
               </a:ext>
             </a:extLst>
           </p:cNvPr>
@@ -23068,7 +26988,7 @@
           <p:cNvPr id="10" name="">
             <a:extLst xmlns:a="http://schemas.openxmlformats.org/drawingml/2006/main">
               <a:ext uri="{FF2B5EF4-FFF2-40B4-BE49-F238E27FC236}">
-                <a16:creationId xmlns:a16="http://schemas.microsoft.com/office/drawing/2014/main" id="{743F539A-39E6-4FB4-A40D-A09ABDF6E656}"/>
+                <a16:creationId xmlns:a16="http://schemas.microsoft.com/office/drawing/2014/main" id="{F4D81C96-BA52-49A4-B82A-6AC9AA13F633}"/>
               </a:ext>
             </a:extLst>
           </p:cNvPr>
@@ -23118,7 +27038,7 @@
           <p:cNvPr id="11" name="">
             <a:extLst xmlns:a="http://schemas.openxmlformats.org/drawingml/2006/main">
               <a:ext uri="{FF2B5EF4-FFF2-40B4-BE49-F238E27FC236}">
-                <a16:creationId xmlns:a16="http://schemas.microsoft.com/office/drawing/2014/main" id="{BAE502BF-B4F3-45D5-A1F0-8823D92D6331}"/>
+                <a16:creationId xmlns:a16="http://schemas.microsoft.com/office/drawing/2014/main" id="{14B45E62-CAF1-4B21-A6A0-0581A12CE151}"/>
               </a:ext>
             </a:extLst>
           </p:cNvPr>
@@ -23151,7 +27071,7 @@
           <p:cNvPr id="12" name="">
             <a:extLst xmlns:a="http://schemas.openxmlformats.org/drawingml/2006/main">
               <a:ext uri="{FF2B5EF4-FFF2-40B4-BE49-F238E27FC236}">
-                <a16:creationId xmlns:a16="http://schemas.microsoft.com/office/drawing/2014/main" id="{337AD3B3-856E-48B9-9352-CF4A75EA5441}"/>
+                <a16:creationId xmlns:a16="http://schemas.microsoft.com/office/drawing/2014/main" id="{6615C90A-37B8-4BEC-91F8-9A69C07A03A1}"/>
               </a:ext>
             </a:extLst>
           </p:cNvPr>
@@ -23201,7 +27121,7 @@
           <p:cNvPr id="13" name="">
             <a:extLst xmlns:a="http://schemas.openxmlformats.org/drawingml/2006/main">
               <a:ext uri="{FF2B5EF4-FFF2-40B4-BE49-F238E27FC236}">
-                <a16:creationId xmlns:a16="http://schemas.microsoft.com/office/drawing/2014/main" id="{763969DA-3FBD-4E77-9CB2-8A3166D3DA2A}"/>
+                <a16:creationId xmlns:a16="http://schemas.microsoft.com/office/drawing/2014/main" id="{BFE2B7DE-1729-429E-ABA0-1F029882E2EE}"/>
               </a:ext>
             </a:extLst>
           </p:cNvPr>
@@ -23249,7 +27169,7 @@
     </p:spTree>
     <p:extLst>
       <p:ext uri="{BB962C8B-B14F-4D97-AF65-F5344CB8AC3E}">
-        <p14:creationId xmlns:p14="http://schemas.microsoft.com/office/powerpoint/2010/main" val="1632076552"/>
+        <p14:creationId xmlns:p14="http://schemas.microsoft.com/office/powerpoint/2010/main" val="1951463452"/>
       </p:ext>
     </p:extLst>
   </p:cSld>

--- a/operator_hypothesis_lab/presentations/nvda_microscope_evidence.pptx
+++ b/operator_hypothesis_lab/presentations/nvda_microscope_evidence.pptx
@@ -2,46 +2,53 @@
 <file path=ppt/presentation.xml><?xml version="1.0" encoding="utf-8"?>
 <p:presentation xmlns:p="http://schemas.openxmlformats.org/presentationml/2006/main">
   <p:sldMasterIdLst>
-    <p:sldMasterId xmlns:r="http://schemas.openxmlformats.org/officeDocument/2006/relationships" id="2147483648" r:id="Rbbd0d41bca9345e4"/>
+    <p:sldMasterId xmlns:r="http://schemas.openxmlformats.org/officeDocument/2006/relationships" id="2147483648" r:id="Rd001b836da8c432f"/>
   </p:sldMasterIdLst>
   <p:notesMasterIdLst>
-    <p:notesMasterId xmlns:r="http://schemas.openxmlformats.org/officeDocument/2006/relationships" r:id="R88811832a2b646a9"/>
+    <p:notesMasterId xmlns:r="http://schemas.openxmlformats.org/officeDocument/2006/relationships" r:id="R172482a4dbd14424"/>
   </p:notesMasterIdLst>
   <p:sldIdLst>
-    <p:sldId xmlns:r="http://schemas.openxmlformats.org/officeDocument/2006/relationships" id="256" r:id="Ra8933c80b9e64333"/>
-    <p:sldId xmlns:r="http://schemas.openxmlformats.org/officeDocument/2006/relationships" id="257" r:id="Ra8e20b94d3544a50"/>
-    <p:sldId xmlns:r="http://schemas.openxmlformats.org/officeDocument/2006/relationships" id="258" r:id="R51d7dfa78c8a487a"/>
-    <p:sldId xmlns:r="http://schemas.openxmlformats.org/officeDocument/2006/relationships" id="259" r:id="R6e518a9058274053"/>
-    <p:sldId xmlns:r="http://schemas.openxmlformats.org/officeDocument/2006/relationships" id="260" r:id="R0f492974d2f34ceb"/>
-    <p:sldId xmlns:r="http://schemas.openxmlformats.org/officeDocument/2006/relationships" id="261" r:id="Recb4cb076cdb4d19"/>
-    <p:sldId xmlns:r="http://schemas.openxmlformats.org/officeDocument/2006/relationships" id="262" r:id="Rac8f0c7d0bcf42e5"/>
-    <p:sldId xmlns:r="http://schemas.openxmlformats.org/officeDocument/2006/relationships" id="263" r:id="R815507cb940d4a49"/>
-    <p:sldId xmlns:r="http://schemas.openxmlformats.org/officeDocument/2006/relationships" id="264" r:id="R918a8a058a334d24"/>
-    <p:sldId xmlns:r="http://schemas.openxmlformats.org/officeDocument/2006/relationships" id="265" r:id="R8cee28e3a9ba48de"/>
-    <p:sldId xmlns:r="http://schemas.openxmlformats.org/officeDocument/2006/relationships" id="266" r:id="Rd2441eb23b954be6"/>
-    <p:sldId xmlns:r="http://schemas.openxmlformats.org/officeDocument/2006/relationships" id="267" r:id="R63cddb7e33d24943"/>
-    <p:sldId xmlns:r="http://schemas.openxmlformats.org/officeDocument/2006/relationships" id="268" r:id="Rd452bd521808449d"/>
-    <p:sldId xmlns:r="http://schemas.openxmlformats.org/officeDocument/2006/relationships" id="269" r:id="Rc53fa768afda422e"/>
-    <p:sldId xmlns:r="http://schemas.openxmlformats.org/officeDocument/2006/relationships" id="270" r:id="R9909a4357a9141f9"/>
-    <p:sldId xmlns:r="http://schemas.openxmlformats.org/officeDocument/2006/relationships" id="271" r:id="R22c1f74a55b44d2a"/>
-    <p:sldId xmlns:r="http://schemas.openxmlformats.org/officeDocument/2006/relationships" id="272" r:id="R74fdd0ca0f6b497e"/>
-    <p:sldId xmlns:r="http://schemas.openxmlformats.org/officeDocument/2006/relationships" id="273" r:id="R3a79d683f8b540f7"/>
-    <p:sldId xmlns:r="http://schemas.openxmlformats.org/officeDocument/2006/relationships" id="274" r:id="R0df1ecd4f5c5458d"/>
-    <p:sldId xmlns:r="http://schemas.openxmlformats.org/officeDocument/2006/relationships" id="275" r:id="R64f5e34c2ef945ba"/>
-    <p:sldId xmlns:r="http://schemas.openxmlformats.org/officeDocument/2006/relationships" id="276" r:id="R38e4ff788fd747be"/>
-    <p:sldId xmlns:r="http://schemas.openxmlformats.org/officeDocument/2006/relationships" id="277" r:id="R509a37baf351434c"/>
-    <p:sldId xmlns:r="http://schemas.openxmlformats.org/officeDocument/2006/relationships" id="278" r:id="R6b0441d8b78643b3"/>
-    <p:sldId xmlns:r="http://schemas.openxmlformats.org/officeDocument/2006/relationships" id="279" r:id="R6c77e9be1e594bd8"/>
-    <p:sldId xmlns:r="http://schemas.openxmlformats.org/officeDocument/2006/relationships" id="280" r:id="Rfc802f0b6604483b"/>
-    <p:sldId xmlns:r="http://schemas.openxmlformats.org/officeDocument/2006/relationships" id="281" r:id="Rc2104eec5bb24c71"/>
-    <p:sldId xmlns:r="http://schemas.openxmlformats.org/officeDocument/2006/relationships" id="282" r:id="Rfba6c4ee2bd940ed"/>
-    <p:sldId xmlns:r="http://schemas.openxmlformats.org/officeDocument/2006/relationships" id="283" r:id="R8fdbb5084f6540da"/>
-    <p:sldId xmlns:r="http://schemas.openxmlformats.org/officeDocument/2006/relationships" id="284" r:id="R089c4a75b54549d4"/>
-    <p:sldId xmlns:r="http://schemas.openxmlformats.org/officeDocument/2006/relationships" id="285" r:id="R4021ac5be7bb4dcc"/>
-    <p:sldId xmlns:r="http://schemas.openxmlformats.org/officeDocument/2006/relationships" id="286" r:id="R6a07fc315f3648ff"/>
-    <p:sldId xmlns:r="http://schemas.openxmlformats.org/officeDocument/2006/relationships" id="287" r:id="Rb62e4ab67c3643e5"/>
-    <p:sldId xmlns:r="http://schemas.openxmlformats.org/officeDocument/2006/relationships" id="288" r:id="R145ac233cde141f6"/>
-    <p:sldId xmlns:r="http://schemas.openxmlformats.org/officeDocument/2006/relationships" id="289" r:id="R7aa72657bd0444fa"/>
+    <p:sldId xmlns:r="http://schemas.openxmlformats.org/officeDocument/2006/relationships" id="256" r:id="Rebc9873fea4e475d"/>
+    <p:sldId xmlns:r="http://schemas.openxmlformats.org/officeDocument/2006/relationships" id="257" r:id="Rbbda74f2db2e4cd7"/>
+    <p:sldId xmlns:r="http://schemas.openxmlformats.org/officeDocument/2006/relationships" id="258" r:id="Ree4584c49e624498"/>
+    <p:sldId xmlns:r="http://schemas.openxmlformats.org/officeDocument/2006/relationships" id="259" r:id="Re91b6b25491b4a34"/>
+    <p:sldId xmlns:r="http://schemas.openxmlformats.org/officeDocument/2006/relationships" id="260" r:id="Rdfb531f13ad84883"/>
+    <p:sldId xmlns:r="http://schemas.openxmlformats.org/officeDocument/2006/relationships" id="261" r:id="R1e721178fbe041ad"/>
+    <p:sldId xmlns:r="http://schemas.openxmlformats.org/officeDocument/2006/relationships" id="262" r:id="R3351649eb9574a4c"/>
+    <p:sldId xmlns:r="http://schemas.openxmlformats.org/officeDocument/2006/relationships" id="263" r:id="Rc1ecb06d7755403d"/>
+    <p:sldId xmlns:r="http://schemas.openxmlformats.org/officeDocument/2006/relationships" id="264" r:id="R7b51fa1e3b714bde"/>
+    <p:sldId xmlns:r="http://schemas.openxmlformats.org/officeDocument/2006/relationships" id="265" r:id="R59b47ac52b9f4521"/>
+    <p:sldId xmlns:r="http://schemas.openxmlformats.org/officeDocument/2006/relationships" id="266" r:id="R2e7a277a89014b37"/>
+    <p:sldId xmlns:r="http://schemas.openxmlformats.org/officeDocument/2006/relationships" id="267" r:id="Rcad109e61db24af5"/>
+    <p:sldId xmlns:r="http://schemas.openxmlformats.org/officeDocument/2006/relationships" id="268" r:id="R684242dd0f634823"/>
+    <p:sldId xmlns:r="http://schemas.openxmlformats.org/officeDocument/2006/relationships" id="269" r:id="R06eea4550e924d85"/>
+    <p:sldId xmlns:r="http://schemas.openxmlformats.org/officeDocument/2006/relationships" id="270" r:id="R52f24da4c35c473c"/>
+    <p:sldId xmlns:r="http://schemas.openxmlformats.org/officeDocument/2006/relationships" id="271" r:id="R5434cf545cee494c"/>
+    <p:sldId xmlns:r="http://schemas.openxmlformats.org/officeDocument/2006/relationships" id="272" r:id="Re46cf35dab8247b6"/>
+    <p:sldId xmlns:r="http://schemas.openxmlformats.org/officeDocument/2006/relationships" id="273" r:id="R68bb61d95d164005"/>
+    <p:sldId xmlns:r="http://schemas.openxmlformats.org/officeDocument/2006/relationships" id="274" r:id="R39b52bcc6637498b"/>
+    <p:sldId xmlns:r="http://schemas.openxmlformats.org/officeDocument/2006/relationships" id="275" r:id="Rdf97edcb24e340ed"/>
+    <p:sldId xmlns:r="http://schemas.openxmlformats.org/officeDocument/2006/relationships" id="276" r:id="R0a35941c14354eea"/>
+    <p:sldId xmlns:r="http://schemas.openxmlformats.org/officeDocument/2006/relationships" id="277" r:id="Rc2a055d7107e48a9"/>
+    <p:sldId xmlns:r="http://schemas.openxmlformats.org/officeDocument/2006/relationships" id="278" r:id="R944966c90bbf4f07"/>
+    <p:sldId xmlns:r="http://schemas.openxmlformats.org/officeDocument/2006/relationships" id="279" r:id="R4846ee69c9bc42f3"/>
+    <p:sldId xmlns:r="http://schemas.openxmlformats.org/officeDocument/2006/relationships" id="280" r:id="Ref7246e0efc74a0c"/>
+    <p:sldId xmlns:r="http://schemas.openxmlformats.org/officeDocument/2006/relationships" id="281" r:id="R452e472c596d4f37"/>
+    <p:sldId xmlns:r="http://schemas.openxmlformats.org/officeDocument/2006/relationships" id="282" r:id="Ref522fee22594f7c"/>
+    <p:sldId xmlns:r="http://schemas.openxmlformats.org/officeDocument/2006/relationships" id="283" r:id="R54c7a99512d74465"/>
+    <p:sldId xmlns:r="http://schemas.openxmlformats.org/officeDocument/2006/relationships" id="284" r:id="R3de56fa1b527440e"/>
+    <p:sldId xmlns:r="http://schemas.openxmlformats.org/officeDocument/2006/relationships" id="285" r:id="R448ef8bf8d944bd0"/>
+    <p:sldId xmlns:r="http://schemas.openxmlformats.org/officeDocument/2006/relationships" id="286" r:id="R0df2cf32303b41a3"/>
+    <p:sldId xmlns:r="http://schemas.openxmlformats.org/officeDocument/2006/relationships" id="287" r:id="R5871145f52b04198"/>
+    <p:sldId xmlns:r="http://schemas.openxmlformats.org/officeDocument/2006/relationships" id="288" r:id="R5e886d2c356b4266"/>
+    <p:sldId xmlns:r="http://schemas.openxmlformats.org/officeDocument/2006/relationships" id="289" r:id="R5e218417f17048b2"/>
+    <p:sldId xmlns:r="http://schemas.openxmlformats.org/officeDocument/2006/relationships" id="290" r:id="Rfc484576610f4978"/>
+    <p:sldId xmlns:r="http://schemas.openxmlformats.org/officeDocument/2006/relationships" id="291" r:id="R8e9854dd5d504af6"/>
+    <p:sldId xmlns:r="http://schemas.openxmlformats.org/officeDocument/2006/relationships" id="292" r:id="R700c12613a13467d"/>
+    <p:sldId xmlns:r="http://schemas.openxmlformats.org/officeDocument/2006/relationships" id="293" r:id="Rfa72e044e3b340b3"/>
+    <p:sldId xmlns:r="http://schemas.openxmlformats.org/officeDocument/2006/relationships" id="294" r:id="Ra7a8e59a5c2a4a45"/>
+    <p:sldId xmlns:r="http://schemas.openxmlformats.org/officeDocument/2006/relationships" id="295" r:id="R0d072244a7f34743"/>
+    <p:sldId xmlns:r="http://schemas.openxmlformats.org/officeDocument/2006/relationships" id="296" r:id="R5f25d12d20d64c26"/>
   </p:sldIdLst>
   <p:sldSz cx="12192000" cy="6858000"/>
   <p:notesSz cx="6858000" cy="9144000"/>
@@ -3085,7 +3092,7 @@
           <a:lstStyle xmlns:a="http://schemas.openxmlformats.org/drawingml/2006/main"/>
           <a:p xmlns:a="http://schemas.openxmlformats.org/drawingml/2006/main">
             <a:r>
-              <a:t>The current +1.070% cutoff was computed from the entire descriptive sample and therefore must not be used retrospectively as though it had been known each day. The recommended next slice converts the same rank concept into a rolling prior-252-session threshold, then tests a 10:00-to-close long rule with simple ingredient controls. That translation requires a separate operator decision.</a:t>
+              <a:t>The current +1.070% cutoff was computed from the entire descriptive sample and therefore must not be used retrospectively as though it had been known each day. The next section converts the same rank concept into a rolling prior-252-session threshold and tests the 10:00-to-close long rule with the predeclared ingredient controls.</a:t>
             </a:r>
           </a:p>
           <a:p xmlns:a="http://schemas.openxmlformats.org/drawingml/2006/main">
@@ -3111,6 +3118,506 @@
           <a:p xmlns:a="http://schemas.openxmlformats.org/drawingml/2006/main">
             <a:r>
               <a:t>- Opening-response construction checks: runs/research_workbench/operator_hypothesis_lab/nvda_intraday_opening_response_20260831/source_checks.csv</a:t>
+            </a:r>
+          </a:p>
+          <a:p xmlns:a="http://schemas.openxmlformats.org/drawingml/2006/main">
+            <a:r>
+              <a:t>- Frozen causal rule specification: runs/research_workbench/operator_hypothesis_lab/nvda_intraday_opening_rule_20260831/run_spec.csv</a:t>
+            </a:r>
+          </a:p>
+          <a:p xmlns:a="http://schemas.openxmlformats.org/drawingml/2006/main">
+            <a:r>
+              <a:t>[/Sources]</a:t>
+            </a:r>
+          </a:p>
+        </p:txBody>
+      </p:sp>
+      <p:sp>
+        <p:nvSpPr>
+          <p:cNvPr id="4" name="Slide Number Placeholder 3"/>
+          <p:cNvSpPr>
+            <a:spLocks xmlns:a="http://schemas.openxmlformats.org/drawingml/2006/main" noGrp="1"/>
+          </p:cNvSpPr>
+          <p:nvPr>
+            <p:ph type="sldNum" idx="5"/>
+          </p:nvPr>
+        </p:nvSpPr>
+        <p:spPr/>
+        <p:txBody>
+          <a:bodyPr xmlns:a="http://schemas.openxmlformats.org/drawingml/2006/main"/>
+          <a:lstStyle xmlns:a="http://schemas.openxmlformats.org/drawingml/2006/main"/>
+          <a:p xmlns:a="http://schemas.openxmlformats.org/drawingml/2006/main"/>
+        </p:txBody>
+      </p:sp>
+    </p:spTree>
+  </p:cSld>
+  <p:clrMapOvr>
+    <a:masterClrMapping xmlns:a="http://schemas.openxmlformats.org/drawingml/2006/main"/>
+  </p:clrMapOvr>
+</p:notes>
+</file>
+
+<file path=ppt/notesSlides/notesSlide35.xml><?xml version="1.0" encoding="utf-8"?>
+<p:notes xmlns:p="http://schemas.openxmlformats.org/presentationml/2006/main">
+  <p:cSld>
+    <p:spTree>
+      <p:nvGrpSpPr>
+        <p:cNvPr id="1" name=""/>
+        <p:cNvGrpSpPr/>
+        <p:nvPr/>
+      </p:nvGrpSpPr>
+      <p:grpSpPr>
+        <a:xfrm xmlns:a="http://schemas.openxmlformats.org/drawingml/2006/main"/>
+      </p:grpSpPr>
+      <p:sp>
+        <p:nvSpPr>
+          <p:cNvPr id="2" name="Slide Image Placeholder 1"/>
+          <p:cNvSpPr>
+            <a:spLocks xmlns:a="http://schemas.openxmlformats.org/drawingml/2006/main" noGrp="1"/>
+          </p:cNvSpPr>
+          <p:nvPr>
+            <p:ph type="sldImg" idx="0"/>
+          </p:nvPr>
+        </p:nvSpPr>
+        <p:spPr/>
+      </p:sp>
+      <p:sp>
+        <p:nvSpPr>
+          <p:cNvPr id="3" name="Notes Placeholder 2"/>
+          <p:cNvSpPr>
+            <a:spLocks xmlns:a="http://schemas.openxmlformats.org/drawingml/2006/main" noGrp="1"/>
+          </p:cNvSpPr>
+          <p:nvPr>
+            <p:ph type="body" idx="1"/>
+          </p:nvPr>
+        </p:nvSpPr>
+        <p:spPr/>
+        <p:txBody>
+          <a:bodyPr xmlns:a="http://schemas.openxmlformats.org/drawingml/2006/main"/>
+          <a:lstStyle xmlns:a="http://schemas.openxmlformats.org/drawingml/2006/main"/>
+          <a:p xmlns:a="http://schemas.openxmlformats.org/drawingml/2006/main">
+            <a:r>
+              <a:t>This is a new causal TRAIN hypothesis, not a continuation of the retrospective bin. The current opening is compared with the prior 252 complete openings only; the ATR-percent state comes from the preceding completed daily session; the position begins at 10:00 and ends at 16:00.</a:t>
+            </a:r>
+          </a:p>
+          <a:p xmlns:a="http://schemas.openxmlformats.org/drawingml/2006/main">
+            <a:r>
+              <a:t/>
+            </a:r>
+          </a:p>
+          <a:p xmlns:a="http://schemas.openxmlformats.org/drawingml/2006/main">
+            <a:r>
+              <a:t>[Sources]</a:t>
+            </a:r>
+          </a:p>
+          <a:p xmlns:a="http://schemas.openxmlformats.org/drawingml/2006/main">
+            <a:r>
+              <a:t>- Frozen causal rule specification: runs/research_workbench/operator_hypothesis_lab/nvda_intraday_opening_rule_20260831/run_spec.csv</a:t>
+            </a:r>
+          </a:p>
+          <a:p xmlns:a="http://schemas.openxmlformats.org/drawingml/2006/main">
+            <a:r>
+              <a:t>- Causal construction checks: runs/research_workbench/operator_hypothesis_lab/nvda_intraday_opening_rule_20260831/construction_checks.csv</a:t>
+            </a:r>
+          </a:p>
+          <a:p xmlns:a="http://schemas.openxmlformats.org/drawingml/2006/main">
+            <a:r>
+              <a:t>[/Sources]</a:t>
+            </a:r>
+          </a:p>
+        </p:txBody>
+      </p:sp>
+      <p:sp>
+        <p:nvSpPr>
+          <p:cNvPr id="4" name="Slide Number Placeholder 3"/>
+          <p:cNvSpPr>
+            <a:spLocks xmlns:a="http://schemas.openxmlformats.org/drawingml/2006/main" noGrp="1"/>
+          </p:cNvSpPr>
+          <p:nvPr>
+            <p:ph type="sldNum" idx="5"/>
+          </p:nvPr>
+        </p:nvSpPr>
+        <p:spPr/>
+        <p:txBody>
+          <a:bodyPr xmlns:a="http://schemas.openxmlformats.org/drawingml/2006/main"/>
+          <a:lstStyle xmlns:a="http://schemas.openxmlformats.org/drawingml/2006/main"/>
+          <a:p xmlns:a="http://schemas.openxmlformats.org/drawingml/2006/main"/>
+        </p:txBody>
+      </p:sp>
+    </p:spTree>
+  </p:cSld>
+  <p:clrMapOvr>
+    <a:masterClrMapping xmlns:a="http://schemas.openxmlformats.org/drawingml/2006/main"/>
+  </p:clrMapOvr>
+</p:notes>
+</file>
+
+<file path=ppt/notesSlides/notesSlide36.xml><?xml version="1.0" encoding="utf-8"?>
+<p:notes xmlns:p="http://schemas.openxmlformats.org/presentationml/2006/main">
+  <p:cSld>
+    <p:spTree>
+      <p:nvGrpSpPr>
+        <p:cNvPr id="1" name=""/>
+        <p:cNvGrpSpPr/>
+        <p:nvPr/>
+      </p:nvGrpSpPr>
+      <p:grpSpPr>
+        <a:xfrm xmlns:a="http://schemas.openxmlformats.org/drawingml/2006/main"/>
+      </p:grpSpPr>
+      <p:sp>
+        <p:nvSpPr>
+          <p:cNvPr id="2" name="Slide Image Placeholder 1"/>
+          <p:cNvSpPr>
+            <a:spLocks xmlns:a="http://schemas.openxmlformats.org/drawingml/2006/main" noGrp="1"/>
+          </p:cNvSpPr>
+          <p:nvPr>
+            <p:ph type="sldImg" idx="0"/>
+          </p:nvPr>
+        </p:nvSpPr>
+        <p:spPr/>
+      </p:sp>
+      <p:sp>
+        <p:nvSpPr>
+          <p:cNvPr id="3" name="Notes Placeholder 2"/>
+          <p:cNvSpPr>
+            <a:spLocks xmlns:a="http://schemas.openxmlformats.org/drawingml/2006/main" noGrp="1"/>
+          </p:cNvSpPr>
+          <p:nvPr>
+            <p:ph type="body" idx="1"/>
+          </p:nvPr>
+        </p:nvSpPr>
+        <p:spPr/>
+        <p:txBody>
+          <a:bodyPr xmlns:a="http://schemas.openxmlformats.org/drawingml/2006/main"/>
+          <a:lstStyle xmlns:a="http://schemas.openxmlformats.org/drawingml/2006/main"/>
+          <a:p xmlns:a="http://schemas.openxmlformats.org/drawingml/2006/main">
+            <a:r>
+              <a:t>The first 252 full sessions are warm-up only. Beginning 2019-01-11, each opening return is compared with the prior 252 complete openings using a type-8 80th percentile. Green dots meet the opening threshold after a LOW or MEDIUM prior-day ATR-percent state; red triangles meet the same threshold after HIGH ATR-percent.</a:t>
+            </a:r>
+          </a:p>
+          <a:p xmlns:a="http://schemas.openxmlformats.org/drawingml/2006/main">
+            <a:r>
+              <a:t/>
+            </a:r>
+          </a:p>
+          <a:p xmlns:a="http://schemas.openxmlformats.org/drawingml/2006/main">
+            <a:r>
+              <a:t>[Sources]</a:t>
+            </a:r>
+          </a:p>
+          <a:p xmlns:a="http://schemas.openxmlformats.org/drawingml/2006/main">
+            <a:r>
+              <a:t>- Frozen causal rule specification: runs/research_workbench/operator_hypothesis_lab/nvda_intraday_opening_rule_20260831/run_spec.csv</a:t>
+            </a:r>
+          </a:p>
+          <a:p xmlns:a="http://schemas.openxmlformats.org/drawingml/2006/main">
+            <a:r>
+              <a:t>- Causal construction checks: runs/research_workbench/operator_hypothesis_lab/nvda_intraday_opening_rule_20260831/construction_checks.csv</a:t>
+            </a:r>
+          </a:p>
+          <a:p xmlns:a="http://schemas.openxmlformats.org/drawingml/2006/main">
+            <a:r>
+              <a:t>- Causal same-day trade ledger: runs/research_workbench/operator_hypothesis_lab/nvda_intraday_opening_rule_20260831/trade_ledger.csv</a:t>
+            </a:r>
+          </a:p>
+          <a:p xmlns:a="http://schemas.openxmlformats.org/drawingml/2006/main">
+            <a:r>
+              <a:t>[/Sources]</a:t>
+            </a:r>
+          </a:p>
+        </p:txBody>
+      </p:sp>
+      <p:sp>
+        <p:nvSpPr>
+          <p:cNvPr id="4" name="Slide Number Placeholder 3"/>
+          <p:cNvSpPr>
+            <a:spLocks xmlns:a="http://schemas.openxmlformats.org/drawingml/2006/main" noGrp="1"/>
+          </p:cNvSpPr>
+          <p:nvPr>
+            <p:ph type="sldNum" idx="5"/>
+          </p:nvPr>
+        </p:nvSpPr>
+        <p:spPr/>
+        <p:txBody>
+          <a:bodyPr xmlns:a="http://schemas.openxmlformats.org/drawingml/2006/main"/>
+          <a:lstStyle xmlns:a="http://schemas.openxmlformats.org/drawingml/2006/main"/>
+          <a:p xmlns:a="http://schemas.openxmlformats.org/drawingml/2006/main"/>
+        </p:txBody>
+      </p:sp>
+    </p:spTree>
+  </p:cSld>
+  <p:clrMapOvr>
+    <a:masterClrMapping xmlns:a="http://schemas.openxmlformats.org/drawingml/2006/main"/>
+  </p:clrMapOvr>
+</p:notes>
+</file>
+
+<file path=ppt/notesSlides/notesSlide37.xml><?xml version="1.0" encoding="utf-8"?>
+<p:notes xmlns:p="http://schemas.openxmlformats.org/presentationml/2006/main">
+  <p:cSld>
+    <p:spTree>
+      <p:nvGrpSpPr>
+        <p:cNvPr id="1" name=""/>
+        <p:cNvGrpSpPr/>
+        <p:nvPr/>
+      </p:nvGrpSpPr>
+      <p:grpSpPr>
+        <a:xfrm xmlns:a="http://schemas.openxmlformats.org/drawingml/2006/main"/>
+      </p:grpSpPr>
+      <p:sp>
+        <p:nvSpPr>
+          <p:cNvPr id="2" name="Slide Image Placeholder 1"/>
+          <p:cNvSpPr>
+            <a:spLocks xmlns:a="http://schemas.openxmlformats.org/drawingml/2006/main" noGrp="1"/>
+          </p:cNvSpPr>
+          <p:nvPr>
+            <p:ph type="sldImg" idx="0"/>
+          </p:nvPr>
+        </p:nvSpPr>
+        <p:spPr/>
+      </p:sp>
+      <p:sp>
+        <p:nvSpPr>
+          <p:cNvPr id="3" name="Notes Placeholder 2"/>
+          <p:cNvSpPr>
+            <a:spLocks xmlns:a="http://schemas.openxmlformats.org/drawingml/2006/main" noGrp="1"/>
+          </p:cNvSpPr>
+          <p:nvPr>
+            <p:ph type="body" idx="1"/>
+          </p:nvPr>
+        </p:nvSpPr>
+        <p:spPr/>
+        <p:txBody>
+          <a:bodyPr xmlns:a="http://schemas.openxmlformats.org/drawingml/2006/main"/>
+          <a:lstStyle xmlns:a="http://schemas.openxmlformats.org/drawingml/2006/main"/>
+          <a:p xmlns:a="http://schemas.openxmlformats.org/drawingml/2006/main">
+            <a:r>
+              <a:t>The candidate produces 157 trades with +0.204% mean net, +0.430% median net, and 59.9% profitable. Opening-tail-only produces +0.062% mean net. LOW/MEDIUM-ATR-only produces -0.019%. The same opening tail after HIGH ATR produces -0.192%. Unconditional 10:00-to-close after costs produces -0.068%. The candidate clears every aggregate and simpler-control gate.</a:t>
+            </a:r>
+          </a:p>
+          <a:p xmlns:a="http://schemas.openxmlformats.org/drawingml/2006/main">
+            <a:r>
+              <a:t/>
+            </a:r>
+          </a:p>
+          <a:p xmlns:a="http://schemas.openxmlformats.org/drawingml/2006/main">
+            <a:r>
+              <a:t>[Sources]</a:t>
+            </a:r>
+          </a:p>
+          <a:p xmlns:a="http://schemas.openxmlformats.org/drawingml/2006/main">
+            <a:r>
+              <a:t>- Causal intraday opening-rule TRAIN report: runs/research_workbench/operator_hypothesis_lab/nvda_intraday_opening_rule_20260831/report.md</a:t>
+            </a:r>
+          </a:p>
+          <a:p xmlns:a="http://schemas.openxmlformats.org/drawingml/2006/main">
+            <a:r>
+              <a:t>- Candidate and control summary: runs/research_workbench/operator_hypothesis_lab/nvda_intraday_opening_rule_20260831/rule_summary.csv</a:t>
+            </a:r>
+          </a:p>
+          <a:p xmlns:a="http://schemas.openxmlformats.org/drawingml/2006/main">
+            <a:r>
+              <a:t>- Causal same-day trade ledger: runs/research_workbench/operator_hypothesis_lab/nvda_intraday_opening_rule_20260831/trade_ledger.csv</a:t>
+            </a:r>
+          </a:p>
+          <a:p xmlns:a="http://schemas.openxmlformats.org/drawingml/2006/main">
+            <a:r>
+              <a:t>[/Sources]</a:t>
+            </a:r>
+          </a:p>
+        </p:txBody>
+      </p:sp>
+      <p:sp>
+        <p:nvSpPr>
+          <p:cNvPr id="4" name="Slide Number Placeholder 3"/>
+          <p:cNvSpPr>
+            <a:spLocks xmlns:a="http://schemas.openxmlformats.org/drawingml/2006/main" noGrp="1"/>
+          </p:cNvSpPr>
+          <p:nvPr>
+            <p:ph type="sldNum" idx="5"/>
+          </p:nvPr>
+        </p:nvSpPr>
+        <p:spPr/>
+        <p:txBody>
+          <a:bodyPr xmlns:a="http://schemas.openxmlformats.org/drawingml/2006/main"/>
+          <a:lstStyle xmlns:a="http://schemas.openxmlformats.org/drawingml/2006/main"/>
+          <a:p xmlns:a="http://schemas.openxmlformats.org/drawingml/2006/main"/>
+        </p:txBody>
+      </p:sp>
+    </p:spTree>
+  </p:cSld>
+  <p:clrMapOvr>
+    <a:masterClrMapping xmlns:a="http://schemas.openxmlformats.org/drawingml/2006/main"/>
+  </p:clrMapOvr>
+</p:notes>
+</file>
+
+<file path=ppt/notesSlides/notesSlide38.xml><?xml version="1.0" encoding="utf-8"?>
+<p:notes xmlns:p="http://schemas.openxmlformats.org/presentationml/2006/main">
+  <p:cSld>
+    <p:spTree>
+      <p:nvGrpSpPr>
+        <p:cNvPr id="1" name=""/>
+        <p:cNvGrpSpPr/>
+        <p:nvPr/>
+      </p:nvGrpSpPr>
+      <p:grpSpPr>
+        <a:xfrm xmlns:a="http://schemas.openxmlformats.org/drawingml/2006/main"/>
+      </p:grpSpPr>
+      <p:sp>
+        <p:nvSpPr>
+          <p:cNvPr id="2" name="Slide Image Placeholder 1"/>
+          <p:cNvSpPr>
+            <a:spLocks xmlns:a="http://schemas.openxmlformats.org/drawingml/2006/main" noGrp="1"/>
+          </p:cNvSpPr>
+          <p:nvPr>
+            <p:ph type="sldImg" idx="0"/>
+          </p:nvPr>
+        </p:nvSpPr>
+        <p:spPr/>
+      </p:sp>
+      <p:sp>
+        <p:nvSpPr>
+          <p:cNvPr id="3" name="Notes Placeholder 2"/>
+          <p:cNvSpPr>
+            <a:spLocks xmlns:a="http://schemas.openxmlformats.org/drawingml/2006/main" noGrp="1"/>
+          </p:cNvSpPr>
+          <p:nvPr>
+            <p:ph type="body" idx="1"/>
+          </p:nvPr>
+        </p:nvSpPr>
+        <p:spPr/>
+        <p:txBody>
+          <a:bodyPr xmlns:a="http://schemas.openxmlformats.org/drawingml/2006/main"/>
+          <a:lstStyle xmlns:a="http://schemas.openxmlformats.org/drawingml/2006/main"/>
+          <a:p xmlns:a="http://schemas.openxmlformats.org/drawingml/2006/main">
+            <a:r>
+              <a:t>Only 2021 and 2023 have positive annual mean net return; the frozen calendar-breadth gate requires at least three positive years. The 2023 candidate trades contribute 0.2876 of the total 0.3201 cumulative net log return, or 89.9%. The failure is not weak sample size or weak aggregate economics; it is concentration in late sample time.</a:t>
+            </a:r>
+          </a:p>
+          <a:p xmlns:a="http://schemas.openxmlformats.org/drawingml/2006/main">
+            <a:r>
+              <a:t/>
+            </a:r>
+          </a:p>
+          <a:p xmlns:a="http://schemas.openxmlformats.org/drawingml/2006/main">
+            <a:r>
+              <a:t>[Sources]</a:t>
+            </a:r>
+          </a:p>
+          <a:p xmlns:a="http://schemas.openxmlformats.org/drawingml/2006/main">
+            <a:r>
+              <a:t>- Candidate calendar summary: runs/research_workbench/operator_hypothesis_lab/nvda_intraday_opening_rule_20260831/calendar_summary.csv</a:t>
+            </a:r>
+          </a:p>
+          <a:p xmlns:a="http://schemas.openxmlformats.org/drawingml/2006/main">
+            <a:r>
+              <a:t>- Frozen TRAIN gates: runs/research_workbench/operator_hypothesis_lab/nvda_intraday_opening_rule_20260831/train_gates.csv</a:t>
+            </a:r>
+          </a:p>
+          <a:p xmlns:a="http://schemas.openxmlformats.org/drawingml/2006/main">
+            <a:r>
+              <a:t>- Causal intraday opening-rule TRAIN report: runs/research_workbench/operator_hypothesis_lab/nvda_intraday_opening_rule_20260831/report.md</a:t>
+            </a:r>
+          </a:p>
+          <a:p xmlns:a="http://schemas.openxmlformats.org/drawingml/2006/main">
+            <a:r>
+              <a:t>[/Sources]</a:t>
+            </a:r>
+          </a:p>
+        </p:txBody>
+      </p:sp>
+      <p:sp>
+        <p:nvSpPr>
+          <p:cNvPr id="4" name="Slide Number Placeholder 3"/>
+          <p:cNvSpPr>
+            <a:spLocks xmlns:a="http://schemas.openxmlformats.org/drawingml/2006/main" noGrp="1"/>
+          </p:cNvSpPr>
+          <p:nvPr>
+            <p:ph type="sldNum" idx="5"/>
+          </p:nvPr>
+        </p:nvSpPr>
+        <p:spPr/>
+        <p:txBody>
+          <a:bodyPr xmlns:a="http://schemas.openxmlformats.org/drawingml/2006/main"/>
+          <a:lstStyle xmlns:a="http://schemas.openxmlformats.org/drawingml/2006/main"/>
+          <a:p xmlns:a="http://schemas.openxmlformats.org/drawingml/2006/main"/>
+        </p:txBody>
+      </p:sp>
+    </p:spTree>
+  </p:cSld>
+  <p:clrMapOvr>
+    <a:masterClrMapping xmlns:a="http://schemas.openxmlformats.org/drawingml/2006/main"/>
+  </p:clrMapOvr>
+</p:notes>
+</file>
+
+<file path=ppt/notesSlides/notesSlide39.xml><?xml version="1.0" encoding="utf-8"?>
+<p:notes xmlns:p="http://schemas.openxmlformats.org/presentationml/2006/main">
+  <p:cSld>
+    <p:spTree>
+      <p:nvGrpSpPr>
+        <p:cNvPr id="1" name=""/>
+        <p:cNvGrpSpPr/>
+        <p:nvPr/>
+      </p:nvGrpSpPr>
+      <p:grpSpPr>
+        <a:xfrm xmlns:a="http://schemas.openxmlformats.org/drawingml/2006/main"/>
+      </p:grpSpPr>
+      <p:sp>
+        <p:nvSpPr>
+          <p:cNvPr id="2" name="Slide Image Placeholder 1"/>
+          <p:cNvSpPr>
+            <a:spLocks xmlns:a="http://schemas.openxmlformats.org/drawingml/2006/main" noGrp="1"/>
+          </p:cNvSpPr>
+          <p:nvPr>
+            <p:ph type="sldImg" idx="0"/>
+          </p:nvPr>
+        </p:nvSpPr>
+        <p:spPr/>
+      </p:sp>
+      <p:sp>
+        <p:nvSpPr>
+          <p:cNvPr id="3" name="Notes Placeholder 2"/>
+          <p:cNvSpPr>
+            <a:spLocks xmlns:a="http://schemas.openxmlformats.org/drawingml/2006/main" noGrp="1"/>
+          </p:cNvSpPr>
+          <p:nvPr>
+            <p:ph type="body" idx="1"/>
+          </p:nvPr>
+        </p:nvSpPr>
+        <p:spPr/>
+        <p:txBody>
+          <a:bodyPr xmlns:a="http://schemas.openxmlformats.org/drawingml/2006/main"/>
+          <a:lstStyle xmlns:a="http://schemas.openxmlformats.org/drawingml/2006/main"/>
+          <a:p xmlns:a="http://schemas.openxmlformats.org/drawingml/2006/main">
+            <a:r>
+              <a:t>Sequential same-day candidate trades compound $1 to about $1.38 after 10 bps round trip, but the path spends much of 2019-2022 around or below its start and rises sharply in 2023. This is a realized TRAIN path, not confirmation and not deployable authority.</a:t>
+            </a:r>
+          </a:p>
+          <a:p xmlns:a="http://schemas.openxmlformats.org/drawingml/2006/main">
+            <a:r>
+              <a:t/>
+            </a:r>
+          </a:p>
+          <a:p xmlns:a="http://schemas.openxmlformats.org/drawingml/2006/main">
+            <a:r>
+              <a:t>[Sources]</a:t>
+            </a:r>
+          </a:p>
+          <a:p xmlns:a="http://schemas.openxmlformats.org/drawingml/2006/main">
+            <a:r>
+              <a:t>- Causal intraday opening-rule TRAIN report: runs/research_workbench/operator_hypothesis_lab/nvda_intraday_opening_rule_20260831/report.md</a:t>
+            </a:r>
+          </a:p>
+          <a:p xmlns:a="http://schemas.openxmlformats.org/drawingml/2006/main">
+            <a:r>
+              <a:t>- Causal same-day trade ledger: runs/research_workbench/operator_hypothesis_lab/nvda_intraday_opening_rule_20260831/trade_ledger.csv</a:t>
+            </a:r>
+          </a:p>
+          <a:p xmlns:a="http://schemas.openxmlformats.org/drawingml/2006/main">
+            <a:r>
+              <a:t>- Candidate calendar summary: runs/research_workbench/operator_hypothesis_lab/nvda_intraday_opening_rule_20260831/calendar_summary.csv</a:t>
             </a:r>
           </a:p>
           <a:p xmlns:a="http://schemas.openxmlformats.org/drawingml/2006/main">
@@ -3206,6 +3713,206 @@
           <a:p xmlns:a="http://schemas.openxmlformats.org/drawingml/2006/main">
             <a:r>
               <a:t>- Local run specification: runs/research_workbench/operator_hypothesis_lab/nvda_intraday_clock_descriptive_20260831/run_spec.csv</a:t>
+            </a:r>
+          </a:p>
+          <a:p xmlns:a="http://schemas.openxmlformats.org/drawingml/2006/main">
+            <a:r>
+              <a:t>[/Sources]</a:t>
+            </a:r>
+          </a:p>
+        </p:txBody>
+      </p:sp>
+      <p:sp>
+        <p:nvSpPr>
+          <p:cNvPr id="4" name="Slide Number Placeholder 3"/>
+          <p:cNvSpPr>
+            <a:spLocks xmlns:a="http://schemas.openxmlformats.org/drawingml/2006/main" noGrp="1"/>
+          </p:cNvSpPr>
+          <p:nvPr>
+            <p:ph type="sldNum" idx="5"/>
+          </p:nvPr>
+        </p:nvSpPr>
+        <p:spPr/>
+        <p:txBody>
+          <a:bodyPr xmlns:a="http://schemas.openxmlformats.org/drawingml/2006/main"/>
+          <a:lstStyle xmlns:a="http://schemas.openxmlformats.org/drawingml/2006/main"/>
+          <a:p xmlns:a="http://schemas.openxmlformats.org/drawingml/2006/main"/>
+        </p:txBody>
+      </p:sp>
+    </p:spTree>
+  </p:cSld>
+  <p:clrMapOvr>
+    <a:masterClrMapping xmlns:a="http://schemas.openxmlformats.org/drawingml/2006/main"/>
+  </p:clrMapOvr>
+</p:notes>
+</file>
+
+<file path=ppt/notesSlides/notesSlide40.xml><?xml version="1.0" encoding="utf-8"?>
+<p:notes xmlns:p="http://schemas.openxmlformats.org/presentationml/2006/main">
+  <p:cSld>
+    <p:spTree>
+      <p:nvGrpSpPr>
+        <p:cNvPr id="1" name=""/>
+        <p:cNvGrpSpPr/>
+        <p:nvPr/>
+      </p:nvGrpSpPr>
+      <p:grpSpPr>
+        <a:xfrm xmlns:a="http://schemas.openxmlformats.org/drawingml/2006/main"/>
+      </p:grpSpPr>
+      <p:sp>
+        <p:nvSpPr>
+          <p:cNvPr id="2" name="Slide Image Placeholder 1"/>
+          <p:cNvSpPr>
+            <a:spLocks xmlns:a="http://schemas.openxmlformats.org/drawingml/2006/main" noGrp="1"/>
+          </p:cNvSpPr>
+          <p:nvPr>
+            <p:ph type="sldImg" idx="0"/>
+          </p:nvPr>
+        </p:nvSpPr>
+        <p:spPr/>
+      </p:sp>
+      <p:sp>
+        <p:nvSpPr>
+          <p:cNvPr id="3" name="Notes Placeholder 2"/>
+          <p:cNvSpPr>
+            <a:spLocks xmlns:a="http://schemas.openxmlformats.org/drawingml/2006/main" noGrp="1"/>
+          </p:cNvSpPr>
+          <p:nvPr>
+            <p:ph type="body" idx="1"/>
+          </p:nvPr>
+        </p:nvSpPr>
+        <p:spPr/>
+        <p:txBody>
+          <a:bodyPr xmlns:a="http://schemas.openxmlformats.org/drawingml/2006/main"/>
+          <a:lstStyle xmlns:a="http://schemas.openxmlformats.org/drawingml/2006/main"/>
+          <a:p xmlns:a="http://schemas.openxmlformats.org/drawingml/2006/main">
+            <a:r>
+              <a:t>The worst candidate day loses 6.58% net from 10:00 to 16:00; the median-nearest day gains 0.43%; the best gains 6.04% net. These tapes make the distribution concrete and show that the filter does not imply low-volatility trades even when the prior-day ATR-percent state is LOW or MEDIUM.</a:t>
+            </a:r>
+          </a:p>
+          <a:p xmlns:a="http://schemas.openxmlformats.org/drawingml/2006/main">
+            <a:r>
+              <a:t/>
+            </a:r>
+          </a:p>
+          <a:p xmlns:a="http://schemas.openxmlformats.org/drawingml/2006/main">
+            <a:r>
+              <a:t>[Sources]</a:t>
+            </a:r>
+          </a:p>
+          <a:p xmlns:a="http://schemas.openxmlformats.org/drawingml/2006/main">
+            <a:r>
+              <a:t>- Causal same-day trade ledger: runs/research_workbench/operator_hypothesis_lab/nvda_intraday_opening_rule_20260831/trade_ledger.csv</a:t>
+            </a:r>
+          </a:p>
+          <a:p xmlns:a="http://schemas.openxmlformats.org/drawingml/2006/main">
+            <a:r>
+              <a:t>- Causal intraday opening-rule TRAIN report: runs/research_workbench/operator_hypothesis_lab/nvda_intraday_opening_rule_20260831/report.md</a:t>
+            </a:r>
+          </a:p>
+          <a:p xmlns:a="http://schemas.openxmlformats.org/drawingml/2006/main">
+            <a:r>
+              <a:t>[/Sources]</a:t>
+            </a:r>
+          </a:p>
+        </p:txBody>
+      </p:sp>
+      <p:sp>
+        <p:nvSpPr>
+          <p:cNvPr id="4" name="Slide Number Placeholder 3"/>
+          <p:cNvSpPr>
+            <a:spLocks xmlns:a="http://schemas.openxmlformats.org/drawingml/2006/main" noGrp="1"/>
+          </p:cNvSpPr>
+          <p:nvPr>
+            <p:ph type="sldNum" idx="5"/>
+          </p:nvPr>
+        </p:nvSpPr>
+        <p:spPr/>
+        <p:txBody>
+          <a:bodyPr xmlns:a="http://schemas.openxmlformats.org/drawingml/2006/main"/>
+          <a:lstStyle xmlns:a="http://schemas.openxmlformats.org/drawingml/2006/main"/>
+          <a:p xmlns:a="http://schemas.openxmlformats.org/drawingml/2006/main"/>
+        </p:txBody>
+      </p:sp>
+    </p:spTree>
+  </p:cSld>
+  <p:clrMapOvr>
+    <a:masterClrMapping xmlns:a="http://schemas.openxmlformats.org/drawingml/2006/main"/>
+  </p:clrMapOvr>
+</p:notes>
+</file>
+
+<file path=ppt/notesSlides/notesSlide41.xml><?xml version="1.0" encoding="utf-8"?>
+<p:notes xmlns:p="http://schemas.openxmlformats.org/presentationml/2006/main">
+  <p:cSld>
+    <p:spTree>
+      <p:nvGrpSpPr>
+        <p:cNvPr id="1" name=""/>
+        <p:cNvGrpSpPr/>
+        <p:nvPr/>
+      </p:nvGrpSpPr>
+      <p:grpSpPr>
+        <a:xfrm xmlns:a="http://schemas.openxmlformats.org/drawingml/2006/main"/>
+      </p:grpSpPr>
+      <p:sp>
+        <p:nvSpPr>
+          <p:cNvPr id="2" name="Slide Image Placeholder 1"/>
+          <p:cNvSpPr>
+            <a:spLocks xmlns:a="http://schemas.openxmlformats.org/drawingml/2006/main" noGrp="1"/>
+          </p:cNvSpPr>
+          <p:nvPr>
+            <p:ph type="sldImg" idx="0"/>
+          </p:nvPr>
+        </p:nvSpPr>
+        <p:spPr/>
+      </p:sp>
+      <p:sp>
+        <p:nvSpPr>
+          <p:cNvPr id="3" name="Notes Placeholder 2"/>
+          <p:cNvSpPr>
+            <a:spLocks xmlns:a="http://schemas.openxmlformats.org/drawingml/2006/main" noGrp="1"/>
+          </p:cNvSpPr>
+          <p:nvPr>
+            <p:ph type="body" idx="1"/>
+          </p:nvPr>
+        </p:nvSpPr>
+        <p:spPr/>
+        <p:txBody>
+          <a:bodyPr xmlns:a="http://schemas.openxmlformats.org/drawingml/2006/main"/>
+          <a:lstStyle xmlns:a="http://schemas.openxmlformats.org/drawingml/2006/main"/>
+          <a:p xmlns:a="http://schemas.openxmlformats.org/drawingml/2006/main">
+            <a:r>
+              <a:t>Four of five predeclared TRAIN gates pass. The calendar-breadth gate fails, so the exact rule stops and 2024+ intraday data remain unread. The scientifically useful residue is the signed ATR-state contrast: top-tail openings continue after LOW/MEDIUM ATR but fade after HIGH ATR. That mechanism can motivate a separately declared future study, but this parameterization cannot be rescue-tuned.</a:t>
+            </a:r>
+          </a:p>
+          <a:p xmlns:a="http://schemas.openxmlformats.org/drawingml/2006/main">
+            <a:r>
+              <a:t/>
+            </a:r>
+          </a:p>
+          <a:p xmlns:a="http://schemas.openxmlformats.org/drawingml/2006/main">
+            <a:r>
+              <a:t>[Sources]</a:t>
+            </a:r>
+          </a:p>
+          <a:p xmlns:a="http://schemas.openxmlformats.org/drawingml/2006/main">
+            <a:r>
+              <a:t>- Frozen TRAIN gates: runs/research_workbench/operator_hypothesis_lab/nvda_intraday_opening_rule_20260831/train_gates.csv</a:t>
+            </a:r>
+          </a:p>
+          <a:p xmlns:a="http://schemas.openxmlformats.org/drawingml/2006/main">
+            <a:r>
+              <a:t>- Candidate and control summary: runs/research_workbench/operator_hypothesis_lab/nvda_intraday_opening_rule_20260831/rule_summary.csv</a:t>
+            </a:r>
+          </a:p>
+          <a:p xmlns:a="http://schemas.openxmlformats.org/drawingml/2006/main">
+            <a:r>
+              <a:t>- Candidate calendar summary: runs/research_workbench/operator_hypothesis_lab/nvda_intraday_opening_rule_20260831/calendar_summary.csv</a:t>
+            </a:r>
+          </a:p>
+          <a:p xmlns:a="http://schemas.openxmlformats.org/drawingml/2006/main">
+            <a:r>
+              <a:t>- Causal intraday opening-rule TRAIN report: runs/research_workbench/operator_hypothesis_lab/nvda_intraday_opening_rule_20260831/report.md</a:t>
             </a:r>
           </a:p>
           <a:p xmlns:a="http://schemas.openxmlformats.org/drawingml/2006/main">
@@ -3753,7 +4460,7 @@
   </p:cSld>
   <p:clrMap bg1="lt1" tx1="dk1" bg2="lt2" tx2="dk2" accent1="accent1" accent2="accent2" accent3="accent3" accent4="accent4" accent5="accent5" accent6="accent6" hlink="hlink" folHlink="folHlink"/>
   <p:sldLayoutIdLst>
-    <p:sldLayoutId xmlns:r="http://schemas.openxmlformats.org/officeDocument/2006/relationships" id="2147483649" r:id="R20ad21875f694d35"/>
+    <p:sldLayoutId xmlns:r="http://schemas.openxmlformats.org/officeDocument/2006/relationships" id="2147483649" r:id="R8c3d592f9517411a"/>
   </p:sldLayoutIdLst>
   <p:txStyles>
     <p:titleStyle>
@@ -4304,7 +5011,7 @@
           <p:cNvPr id="13" name="">
             <a:extLst xmlns:a="http://schemas.openxmlformats.org/drawingml/2006/main">
               <a:ext uri="{FF2B5EF4-FFF2-40B4-BE49-F238E27FC236}">
-                <a16:creationId xmlns:a16="http://schemas.microsoft.com/office/drawing/2014/main" id="{469930B1-100C-4ED1-912F-D96BFC83EE52}"/>
+                <a16:creationId xmlns:a16="http://schemas.microsoft.com/office/drawing/2014/main" id="{DCF52A80-3BB1-4982-9BB9-62A2A466B8A3}"/>
               </a:ext>
             </a:extLst>
           </p:cNvPr>
@@ -4337,7 +5044,7 @@
           <p:cNvPr id="2" name="">
             <a:extLst xmlns:a="http://schemas.openxmlformats.org/drawingml/2006/main">
               <a:ext uri="{FF2B5EF4-FFF2-40B4-BE49-F238E27FC236}">
-                <a16:creationId xmlns:a16="http://schemas.microsoft.com/office/drawing/2014/main" id="{42533E5C-50AD-4505-B190-C9CBA382C90B}"/>
+                <a16:creationId xmlns:a16="http://schemas.microsoft.com/office/drawing/2014/main" id="{BCC2FC0F-0E55-4ACF-9704-0C8DE2172399}"/>
               </a:ext>
             </a:extLst>
           </p:cNvPr>
@@ -4387,7 +5094,7 @@
           <p:cNvPr id="3" name="">
             <a:extLst xmlns:a="http://schemas.openxmlformats.org/drawingml/2006/main">
               <a:ext uri="{FF2B5EF4-FFF2-40B4-BE49-F238E27FC236}">
-                <a16:creationId xmlns:a16="http://schemas.microsoft.com/office/drawing/2014/main" id="{6401CFBA-1AF9-48FB-B663-DC1AB6092070}"/>
+                <a16:creationId xmlns:a16="http://schemas.microsoft.com/office/drawing/2014/main" id="{044BA55C-6815-4472-9279-C441C398B931}"/>
               </a:ext>
             </a:extLst>
           </p:cNvPr>
@@ -4454,7 +5161,7 @@
           <p:cNvPr id="4" name="">
             <a:extLst xmlns:a="http://schemas.openxmlformats.org/drawingml/2006/main">
               <a:ext uri="{FF2B5EF4-FFF2-40B4-BE49-F238E27FC236}">
-                <a16:creationId xmlns:a16="http://schemas.microsoft.com/office/drawing/2014/main" id="{55BCCF55-A415-4108-AB38-46EC9F8B16D2}"/>
+                <a16:creationId xmlns:a16="http://schemas.microsoft.com/office/drawing/2014/main" id="{916AF6E0-A31D-4AB0-93ED-C79215570DDB}"/>
               </a:ext>
             </a:extLst>
           </p:cNvPr>
@@ -4504,7 +5211,7 @@
           <p:cNvPr id="5" name="">
             <a:extLst xmlns:a="http://schemas.openxmlformats.org/drawingml/2006/main">
               <a:ext uri="{FF2B5EF4-FFF2-40B4-BE49-F238E27FC236}">
-                <a16:creationId xmlns:a16="http://schemas.microsoft.com/office/drawing/2014/main" id="{0E27D1A1-3E9D-485C-BD81-DED94597B50F}"/>
+                <a16:creationId xmlns:a16="http://schemas.microsoft.com/office/drawing/2014/main" id="{706B0132-80E3-43AB-B1D4-04917254F121}"/>
               </a:ext>
             </a:extLst>
           </p:cNvPr>
@@ -4537,7 +5244,7 @@
           <p:cNvPr id="6" name="">
             <a:extLst xmlns:a="http://schemas.openxmlformats.org/drawingml/2006/main">
               <a:ext uri="{FF2B5EF4-FFF2-40B4-BE49-F238E27FC236}">
-                <a16:creationId xmlns:a16="http://schemas.microsoft.com/office/drawing/2014/main" id="{DF5E015E-18EF-4C74-ABA2-1EDFBFE7101A}"/>
+                <a16:creationId xmlns:a16="http://schemas.microsoft.com/office/drawing/2014/main" id="{6C059808-1394-4037-B51B-9A34FBDED675}"/>
               </a:ext>
             </a:extLst>
           </p:cNvPr>
@@ -4587,7 +5294,7 @@
           <p:cNvPr id="7" name="">
             <a:extLst xmlns:a="http://schemas.openxmlformats.org/drawingml/2006/main">
               <a:ext uri="{FF2B5EF4-FFF2-40B4-BE49-F238E27FC236}">
-                <a16:creationId xmlns:a16="http://schemas.microsoft.com/office/drawing/2014/main" id="{8C08B449-F169-49A5-9F78-DE816D403FB9}"/>
+                <a16:creationId xmlns:a16="http://schemas.microsoft.com/office/drawing/2014/main" id="{20EFD08C-5C56-4EDD-A7EB-6078DD8C6C7C}"/>
               </a:ext>
             </a:extLst>
           </p:cNvPr>
@@ -4637,7 +5344,7 @@
           <p:cNvPr id="8" name="">
             <a:extLst xmlns:a="http://schemas.openxmlformats.org/drawingml/2006/main">
               <a:ext uri="{FF2B5EF4-FFF2-40B4-BE49-F238E27FC236}">
-                <a16:creationId xmlns:a16="http://schemas.microsoft.com/office/drawing/2014/main" id="{CE98AF49-DB15-4711-9177-1EA277CE0A16}"/>
+                <a16:creationId xmlns:a16="http://schemas.microsoft.com/office/drawing/2014/main" id="{F231F105-5412-405C-B5BA-1FF27089E3B9}"/>
               </a:ext>
             </a:extLst>
           </p:cNvPr>
@@ -4687,7 +5394,7 @@
           <p:cNvPr id="9" name="">
             <a:extLst xmlns:a="http://schemas.openxmlformats.org/drawingml/2006/main">
               <a:ext uri="{FF2B5EF4-FFF2-40B4-BE49-F238E27FC236}">
-                <a16:creationId xmlns:a16="http://schemas.microsoft.com/office/drawing/2014/main" id="{E6001B46-4FEC-4E5C-8C0B-2FA7376005ED}"/>
+                <a16:creationId xmlns:a16="http://schemas.microsoft.com/office/drawing/2014/main" id="{0954CAFA-CCB3-46A3-95A7-1684BB3CA2E1}"/>
               </a:ext>
             </a:extLst>
           </p:cNvPr>
@@ -4720,7 +5427,7 @@
           <p:cNvPr id="10" name="">
             <a:extLst xmlns:a="http://schemas.openxmlformats.org/drawingml/2006/main">
               <a:ext uri="{FF2B5EF4-FFF2-40B4-BE49-F238E27FC236}">
-                <a16:creationId xmlns:a16="http://schemas.microsoft.com/office/drawing/2014/main" id="{8AC33549-F13D-4C13-B507-BDA117AAB8AE}"/>
+                <a16:creationId xmlns:a16="http://schemas.microsoft.com/office/drawing/2014/main" id="{0501FD22-EE5A-4D76-A9C6-19FAFC46009F}"/>
               </a:ext>
             </a:extLst>
           </p:cNvPr>
@@ -4770,7 +5477,7 @@
           <p:cNvPr id="11" name="">
             <a:extLst xmlns:a="http://schemas.openxmlformats.org/drawingml/2006/main">
               <a:ext uri="{FF2B5EF4-FFF2-40B4-BE49-F238E27FC236}">
-                <a16:creationId xmlns:a16="http://schemas.microsoft.com/office/drawing/2014/main" id="{EFA78DA0-E008-4C1C-9BA9-788DF513240E}"/>
+                <a16:creationId xmlns:a16="http://schemas.microsoft.com/office/drawing/2014/main" id="{2CE2DBA8-A8B0-4792-9D95-8D38FDC33CD9}"/>
               </a:ext>
             </a:extLst>
           </p:cNvPr>
@@ -4820,7 +5527,7 @@
           <p:cNvPr id="12" name="">
             <a:extLst xmlns:a="http://schemas.openxmlformats.org/drawingml/2006/main">
               <a:ext uri="{FF2B5EF4-FFF2-40B4-BE49-F238E27FC236}">
-                <a16:creationId xmlns:a16="http://schemas.microsoft.com/office/drawing/2014/main" id="{02B28998-0AE4-4FAD-BDFB-A5B184E59949}"/>
+                <a16:creationId xmlns:a16="http://schemas.microsoft.com/office/drawing/2014/main" id="{76EAAF85-FB0D-4C44-B9A0-54B6B82F9D96}"/>
               </a:ext>
             </a:extLst>
           </p:cNvPr>
@@ -4832,7 +5539,7 @@
         <p:spPr>
           <a:xfrm xmlns:a="http://schemas.openxmlformats.org/drawingml/2006/main">
             <a:off x="685800" y="6343650"/>
-            <a:ext cx="6858000" cy="190500"/>
+            <a:ext cx="7239000" cy="190500"/>
           </a:xfrm>
           <a:prstGeom xmlns:a="http://schemas.openxmlformats.org/drawingml/2006/main" prst="rect">
             <a:avLst/>
@@ -4860,7 +5567,7 @@
                   <a:srgbClr val="B44738"/>
                 </a:solidFill>
               </a:rPr>
-              <a:t>RESEARCH DECK · DAILY CONFIRMATION STOP · INTRADAY OPENING RESPONSE ADDED</a:t>
+              <a:t>RESEARCH DECK · DAILY CONFIRMATION STOP · INTRADAY OPENING RULE STOP</a:t>
             </a:r>
           </a:p>
         </p:txBody>
@@ -4868,7 +5575,7 @@
     </p:spTree>
     <p:extLst>
       <p:ext uri="{BB962C8B-B14F-4D97-AF65-F5344CB8AC3E}">
-        <p14:creationId xmlns:p14="http://schemas.microsoft.com/office/powerpoint/2010/main" val="869432610"/>
+        <p14:creationId xmlns:p14="http://schemas.microsoft.com/office/powerpoint/2010/main" val="78994697"/>
       </p:ext>
     </p:extLst>
   </p:cSld>
@@ -4899,7 +5606,7 @@
           <p:cNvPr id="18" name="">
             <a:extLst xmlns:a="http://schemas.openxmlformats.org/drawingml/2006/main">
               <a:ext uri="{FF2B5EF4-FFF2-40B4-BE49-F238E27FC236}">
-                <a16:creationId xmlns:a16="http://schemas.microsoft.com/office/drawing/2014/main" id="{A7DD448E-F54F-4B94-B806-DCA0D64651F1}"/>
+                <a16:creationId xmlns:a16="http://schemas.microsoft.com/office/drawing/2014/main" id="{D5339364-5B4B-4BAA-A480-D76B839BDBE9}"/>
               </a:ext>
             </a:extLst>
           </p:cNvPr>
@@ -4949,7 +5656,7 @@
           <p:cNvPr id="2" name="">
             <a:extLst xmlns:a="http://schemas.openxmlformats.org/drawingml/2006/main">
               <a:ext uri="{FF2B5EF4-FFF2-40B4-BE49-F238E27FC236}">
-                <a16:creationId xmlns:a16="http://schemas.microsoft.com/office/drawing/2014/main" id="{897E8771-D0D3-4215-B858-3185ECE50212}"/>
+                <a16:creationId xmlns:a16="http://schemas.microsoft.com/office/drawing/2014/main" id="{E449A817-8BB0-46BD-A932-424B90801A28}"/>
               </a:ext>
             </a:extLst>
           </p:cNvPr>
@@ -4999,7 +5706,7 @@
           <p:cNvPr id="3" name="">
             <a:extLst xmlns:a="http://schemas.openxmlformats.org/drawingml/2006/main">
               <a:ext uri="{FF2B5EF4-FFF2-40B4-BE49-F238E27FC236}">
-                <a16:creationId xmlns:a16="http://schemas.microsoft.com/office/drawing/2014/main" id="{A2862161-73A7-49A8-8EA1-BD467D1F4184}"/>
+                <a16:creationId xmlns:a16="http://schemas.microsoft.com/office/drawing/2014/main" id="{44618EAB-9C2E-4CC0-B491-842576B87D17}"/>
               </a:ext>
             </a:extLst>
           </p:cNvPr>
@@ -5032,7 +5739,7 @@
           <p:cNvPr id="4" name="">
             <a:extLst xmlns:a="http://schemas.openxmlformats.org/drawingml/2006/main">
               <a:ext uri="{FF2B5EF4-FFF2-40B4-BE49-F238E27FC236}">
-                <a16:creationId xmlns:a16="http://schemas.microsoft.com/office/drawing/2014/main" id="{9D39AF9A-6A52-40A6-BE9B-F8500CEBC274}"/>
+                <a16:creationId xmlns:a16="http://schemas.microsoft.com/office/drawing/2014/main" id="{169CA2F2-52CE-42B9-8DAB-66EF1286A3C4}"/>
               </a:ext>
             </a:extLst>
           </p:cNvPr>
@@ -5082,7 +5789,7 @@
           <p:cNvPr id="5" name="">
             <a:extLst xmlns:a="http://schemas.openxmlformats.org/drawingml/2006/main">
               <a:ext uri="{FF2B5EF4-FFF2-40B4-BE49-F238E27FC236}">
-                <a16:creationId xmlns:a16="http://schemas.microsoft.com/office/drawing/2014/main" id="{8A9E4AA3-D643-434A-831E-25EEBD947476}"/>
+                <a16:creationId xmlns:a16="http://schemas.microsoft.com/office/drawing/2014/main" id="{444DEAA2-3C80-4AE5-9114-80E63D9077D3}"/>
               </a:ext>
             </a:extLst>
           </p:cNvPr>
@@ -5136,7 +5843,7 @@
           <p:nvPr/>
         </p:nvPicPr>
         <p:blipFill>
-          <a:blip xmlns:r="http://schemas.openxmlformats.org/officeDocument/2006/relationships" xmlns:a="http://schemas.openxmlformats.org/drawingml/2006/main" r:embed="R54df6aae67f646b5"/>
+          <a:blip xmlns:r="http://schemas.openxmlformats.org/officeDocument/2006/relationships" xmlns:a="http://schemas.openxmlformats.org/drawingml/2006/main" r:embed="R23d18a3b90834887"/>
           <a:stretch xmlns:a="http://schemas.openxmlformats.org/drawingml/2006/main"/>
         </p:blipFill>
         <p:spPr>
@@ -5154,7 +5861,7 @@
           <p:cNvPr id="7" name="">
             <a:extLst xmlns:a="http://schemas.openxmlformats.org/drawingml/2006/main">
               <a:ext uri="{FF2B5EF4-FFF2-40B4-BE49-F238E27FC236}">
-                <a16:creationId xmlns:a16="http://schemas.microsoft.com/office/drawing/2014/main" id="{146902A0-771C-47BF-92E0-60C776F77F02}"/>
+                <a16:creationId xmlns:a16="http://schemas.microsoft.com/office/drawing/2014/main" id="{88FA8A07-39C6-4D98-A29D-F349165F3EA0}"/>
               </a:ext>
             </a:extLst>
           </p:cNvPr>
@@ -5187,7 +5894,7 @@
           <p:cNvPr id="8" name="">
             <a:extLst xmlns:a="http://schemas.openxmlformats.org/drawingml/2006/main">
               <a:ext uri="{FF2B5EF4-FFF2-40B4-BE49-F238E27FC236}">
-                <a16:creationId xmlns:a16="http://schemas.microsoft.com/office/drawing/2014/main" id="{5470A75E-A44A-4754-AEE0-B26F9677D0D3}"/>
+                <a16:creationId xmlns:a16="http://schemas.microsoft.com/office/drawing/2014/main" id="{2BC4A516-FE15-46C8-AA35-75B2BAD8F96D}"/>
               </a:ext>
             </a:extLst>
           </p:cNvPr>
@@ -5237,7 +5944,7 @@
           <p:cNvPr id="9" name="">
             <a:extLst xmlns:a="http://schemas.openxmlformats.org/drawingml/2006/main">
               <a:ext uri="{FF2B5EF4-FFF2-40B4-BE49-F238E27FC236}">
-                <a16:creationId xmlns:a16="http://schemas.microsoft.com/office/drawing/2014/main" id="{5E2928E8-08A7-429B-94B2-AD5C165010F0}"/>
+                <a16:creationId xmlns:a16="http://schemas.microsoft.com/office/drawing/2014/main" id="{9C151CA1-F12B-4EDC-88AD-26C495F98C35}"/>
               </a:ext>
             </a:extLst>
           </p:cNvPr>
@@ -5287,7 +5994,7 @@
           <p:cNvPr id="10" name="">
             <a:extLst xmlns:a="http://schemas.openxmlformats.org/drawingml/2006/main">
               <a:ext uri="{FF2B5EF4-FFF2-40B4-BE49-F238E27FC236}">
-                <a16:creationId xmlns:a16="http://schemas.microsoft.com/office/drawing/2014/main" id="{245A33E3-39D1-49C8-875B-85FC9968E1CA}"/>
+                <a16:creationId xmlns:a16="http://schemas.microsoft.com/office/drawing/2014/main" id="{9A6C5E2A-DF78-4E20-9C93-18289370E784}"/>
               </a:ext>
             </a:extLst>
           </p:cNvPr>
@@ -5337,7 +6044,7 @@
           <p:cNvPr id="11" name="">
             <a:extLst xmlns:a="http://schemas.openxmlformats.org/drawingml/2006/main">
               <a:ext uri="{FF2B5EF4-FFF2-40B4-BE49-F238E27FC236}">
-                <a16:creationId xmlns:a16="http://schemas.microsoft.com/office/drawing/2014/main" id="{661B225C-B956-4D2F-9448-C1E67739B6FE}"/>
+                <a16:creationId xmlns:a16="http://schemas.microsoft.com/office/drawing/2014/main" id="{50844BC6-BCAA-4A0C-8DE3-7F4EF58DC9EF}"/>
               </a:ext>
             </a:extLst>
           </p:cNvPr>
@@ -5387,7 +6094,7 @@
           <p:cNvPr id="12" name="">
             <a:extLst xmlns:a="http://schemas.openxmlformats.org/drawingml/2006/main">
               <a:ext uri="{FF2B5EF4-FFF2-40B4-BE49-F238E27FC236}">
-                <a16:creationId xmlns:a16="http://schemas.microsoft.com/office/drawing/2014/main" id="{23D0FA02-09E3-4C12-A5A7-B60027E792A7}"/>
+                <a16:creationId xmlns:a16="http://schemas.microsoft.com/office/drawing/2014/main" id="{699DB10B-9C06-48E2-AFD9-E61A1E40F5EC}"/>
               </a:ext>
             </a:extLst>
           </p:cNvPr>
@@ -5437,7 +6144,7 @@
           <p:cNvPr id="13" name="">
             <a:extLst xmlns:a="http://schemas.openxmlformats.org/drawingml/2006/main">
               <a:ext uri="{FF2B5EF4-FFF2-40B4-BE49-F238E27FC236}">
-                <a16:creationId xmlns:a16="http://schemas.microsoft.com/office/drawing/2014/main" id="{9726996D-4863-4D97-A95E-50E0C64E2933}"/>
+                <a16:creationId xmlns:a16="http://schemas.microsoft.com/office/drawing/2014/main" id="{46C10B75-AAEB-4BC1-8270-F801E56C0538}"/>
               </a:ext>
             </a:extLst>
           </p:cNvPr>
@@ -5487,7 +6194,7 @@
           <p:cNvPr id="14" name="">
             <a:extLst xmlns:a="http://schemas.openxmlformats.org/drawingml/2006/main">
               <a:ext uri="{FF2B5EF4-FFF2-40B4-BE49-F238E27FC236}">
-                <a16:creationId xmlns:a16="http://schemas.microsoft.com/office/drawing/2014/main" id="{D1D5553E-99F3-47EE-9063-6695AFA41A10}"/>
+                <a16:creationId xmlns:a16="http://schemas.microsoft.com/office/drawing/2014/main" id="{50C67199-7276-4FC5-83DE-692601E660AD}"/>
               </a:ext>
             </a:extLst>
           </p:cNvPr>
@@ -5537,7 +6244,7 @@
           <p:cNvPr id="15" name="">
             <a:extLst xmlns:a="http://schemas.openxmlformats.org/drawingml/2006/main">
               <a:ext uri="{FF2B5EF4-FFF2-40B4-BE49-F238E27FC236}">
-                <a16:creationId xmlns:a16="http://schemas.microsoft.com/office/drawing/2014/main" id="{5491C1FA-2412-4A9C-84EB-D46FB6ADBC6E}"/>
+                <a16:creationId xmlns:a16="http://schemas.microsoft.com/office/drawing/2014/main" id="{BFD3E9EC-063D-4BF7-9212-F5E08D7DFCCB}"/>
               </a:ext>
             </a:extLst>
           </p:cNvPr>
@@ -5570,7 +6277,7 @@
           <p:cNvPr id="16" name="">
             <a:extLst xmlns:a="http://schemas.openxmlformats.org/drawingml/2006/main">
               <a:ext uri="{FF2B5EF4-FFF2-40B4-BE49-F238E27FC236}">
-                <a16:creationId xmlns:a16="http://schemas.microsoft.com/office/drawing/2014/main" id="{D0E40463-05C0-4BE4-9A98-0458F53DAB7F}"/>
+                <a16:creationId xmlns:a16="http://schemas.microsoft.com/office/drawing/2014/main" id="{F870E05C-CF2C-4B65-BCA3-E633216D35FB}"/>
               </a:ext>
             </a:extLst>
           </p:cNvPr>
@@ -5620,7 +6327,7 @@
           <p:cNvPr id="17" name="">
             <a:extLst xmlns:a="http://schemas.openxmlformats.org/drawingml/2006/main">
               <a:ext uri="{FF2B5EF4-FFF2-40B4-BE49-F238E27FC236}">
-                <a16:creationId xmlns:a16="http://schemas.microsoft.com/office/drawing/2014/main" id="{B43DB4EC-5B21-4309-9108-07BE3C750FFE}"/>
+                <a16:creationId xmlns:a16="http://schemas.microsoft.com/office/drawing/2014/main" id="{1B64A680-8C08-4313-AC01-74B2A8635329}"/>
               </a:ext>
             </a:extLst>
           </p:cNvPr>
@@ -5668,7 +6375,7 @@
     </p:spTree>
     <p:extLst>
       <p:ext uri="{BB962C8B-B14F-4D97-AF65-F5344CB8AC3E}">
-        <p14:creationId xmlns:p14="http://schemas.microsoft.com/office/powerpoint/2010/main" val="1994707530"/>
+        <p14:creationId xmlns:p14="http://schemas.microsoft.com/office/powerpoint/2010/main" val="392117004"/>
       </p:ext>
     </p:extLst>
   </p:cSld>
@@ -5699,7 +6406,7 @@
           <p:cNvPr id="16" name="">
             <a:extLst xmlns:a="http://schemas.openxmlformats.org/drawingml/2006/main">
               <a:ext uri="{FF2B5EF4-FFF2-40B4-BE49-F238E27FC236}">
-                <a16:creationId xmlns:a16="http://schemas.microsoft.com/office/drawing/2014/main" id="{8CA3AC87-8AD9-4A74-9586-74C2F5760CC9}"/>
+                <a16:creationId xmlns:a16="http://schemas.microsoft.com/office/drawing/2014/main" id="{332E7575-A7FC-423D-BC2E-AC52F16EB094}"/>
               </a:ext>
             </a:extLst>
           </p:cNvPr>
@@ -5749,7 +6456,7 @@
           <p:cNvPr id="2" name="">
             <a:extLst xmlns:a="http://schemas.openxmlformats.org/drawingml/2006/main">
               <a:ext uri="{FF2B5EF4-FFF2-40B4-BE49-F238E27FC236}">
-                <a16:creationId xmlns:a16="http://schemas.microsoft.com/office/drawing/2014/main" id="{48DC1373-F520-46B2-A9E7-68BCF17ED9B8}"/>
+                <a16:creationId xmlns:a16="http://schemas.microsoft.com/office/drawing/2014/main" id="{79BA8AFC-C62A-4F19-A373-D53194D18700}"/>
               </a:ext>
             </a:extLst>
           </p:cNvPr>
@@ -5799,7 +6506,7 @@
           <p:cNvPr id="3" name="">
             <a:extLst xmlns:a="http://schemas.openxmlformats.org/drawingml/2006/main">
               <a:ext uri="{FF2B5EF4-FFF2-40B4-BE49-F238E27FC236}">
-                <a16:creationId xmlns:a16="http://schemas.microsoft.com/office/drawing/2014/main" id="{1657715E-32CE-4E55-B005-B3817938BC0E}"/>
+                <a16:creationId xmlns:a16="http://schemas.microsoft.com/office/drawing/2014/main" id="{039218F8-AC23-4389-A957-3565980F4C82}"/>
               </a:ext>
             </a:extLst>
           </p:cNvPr>
@@ -5832,7 +6539,7 @@
           <p:cNvPr id="4" name="">
             <a:extLst xmlns:a="http://schemas.openxmlformats.org/drawingml/2006/main">
               <a:ext uri="{FF2B5EF4-FFF2-40B4-BE49-F238E27FC236}">
-                <a16:creationId xmlns:a16="http://schemas.microsoft.com/office/drawing/2014/main" id="{E3380644-5028-4EFF-86EF-3DF8EBD0846A}"/>
+                <a16:creationId xmlns:a16="http://schemas.microsoft.com/office/drawing/2014/main" id="{82B8BA4B-2433-4311-BC03-9F90D5CCDAB5}"/>
               </a:ext>
             </a:extLst>
           </p:cNvPr>
@@ -5882,7 +6589,7 @@
           <p:cNvPr id="5" name="">
             <a:extLst xmlns:a="http://schemas.openxmlformats.org/drawingml/2006/main">
               <a:ext uri="{FF2B5EF4-FFF2-40B4-BE49-F238E27FC236}">
-                <a16:creationId xmlns:a16="http://schemas.microsoft.com/office/drawing/2014/main" id="{DB8B7147-E2DB-44AA-8483-FF9B56D1ECA0}"/>
+                <a16:creationId xmlns:a16="http://schemas.microsoft.com/office/drawing/2014/main" id="{FA94BD0D-4679-44D6-86E0-197D7ABE4664}"/>
               </a:ext>
             </a:extLst>
           </p:cNvPr>
@@ -5936,7 +6643,7 @@
           <p:nvPr/>
         </p:nvPicPr>
         <p:blipFill>
-          <a:blip xmlns:r="http://schemas.openxmlformats.org/officeDocument/2006/relationships" xmlns:a="http://schemas.openxmlformats.org/drawingml/2006/main" r:embed="R89ab6aebf44741e5"/>
+          <a:blip xmlns:r="http://schemas.openxmlformats.org/officeDocument/2006/relationships" xmlns:a="http://schemas.openxmlformats.org/drawingml/2006/main" r:embed="Rd871a345fee3403c"/>
           <a:stretch xmlns:a="http://schemas.openxmlformats.org/drawingml/2006/main"/>
         </p:blipFill>
         <p:spPr>
@@ -5954,7 +6661,7 @@
           <p:cNvPr id="7" name="">
             <a:extLst xmlns:a="http://schemas.openxmlformats.org/drawingml/2006/main">
               <a:ext uri="{FF2B5EF4-FFF2-40B4-BE49-F238E27FC236}">
-                <a16:creationId xmlns:a16="http://schemas.microsoft.com/office/drawing/2014/main" id="{54E4A30F-79B3-4B65-9895-CA0CBE303CD9}"/>
+                <a16:creationId xmlns:a16="http://schemas.microsoft.com/office/drawing/2014/main" id="{366BCAC5-45F0-4888-83CE-5397E7F76B83}"/>
               </a:ext>
             </a:extLst>
           </p:cNvPr>
@@ -5987,7 +6694,7 @@
           <p:cNvPr id="8" name="">
             <a:extLst xmlns:a="http://schemas.openxmlformats.org/drawingml/2006/main">
               <a:ext uri="{FF2B5EF4-FFF2-40B4-BE49-F238E27FC236}">
-                <a16:creationId xmlns:a16="http://schemas.microsoft.com/office/drawing/2014/main" id="{1D062037-FA9F-4E6D-A52F-9E0DF48368D2}"/>
+                <a16:creationId xmlns:a16="http://schemas.microsoft.com/office/drawing/2014/main" id="{8DF82760-65F5-4A2A-9520-BBA7A27D22D1}"/>
               </a:ext>
             </a:extLst>
           </p:cNvPr>
@@ -6037,7 +6744,7 @@
           <p:cNvPr id="9" name="">
             <a:extLst xmlns:a="http://schemas.openxmlformats.org/drawingml/2006/main">
               <a:ext uri="{FF2B5EF4-FFF2-40B4-BE49-F238E27FC236}">
-                <a16:creationId xmlns:a16="http://schemas.microsoft.com/office/drawing/2014/main" id="{C7A1021C-7630-426B-AF5A-1F66E3AAD1A1}"/>
+                <a16:creationId xmlns:a16="http://schemas.microsoft.com/office/drawing/2014/main" id="{16DE216E-2F4A-4377-A0BE-6517501C6584}"/>
               </a:ext>
             </a:extLst>
           </p:cNvPr>
@@ -6070,7 +6777,7 @@
           <p:cNvPr id="10" name="">
             <a:extLst xmlns:a="http://schemas.openxmlformats.org/drawingml/2006/main">
               <a:ext uri="{FF2B5EF4-FFF2-40B4-BE49-F238E27FC236}">
-                <a16:creationId xmlns:a16="http://schemas.microsoft.com/office/drawing/2014/main" id="{F472FB3B-7A77-4FD0-B252-32D3F88AE336}"/>
+                <a16:creationId xmlns:a16="http://schemas.microsoft.com/office/drawing/2014/main" id="{5FFCA478-DF07-4A4D-B4C6-639882273ECF}"/>
               </a:ext>
             </a:extLst>
           </p:cNvPr>
@@ -6120,7 +6827,7 @@
           <p:cNvPr id="11" name="">
             <a:extLst xmlns:a="http://schemas.openxmlformats.org/drawingml/2006/main">
               <a:ext uri="{FF2B5EF4-FFF2-40B4-BE49-F238E27FC236}">
-                <a16:creationId xmlns:a16="http://schemas.microsoft.com/office/drawing/2014/main" id="{84BC3302-0E08-4E12-9D96-D960D8FF4C39}"/>
+                <a16:creationId xmlns:a16="http://schemas.microsoft.com/office/drawing/2014/main" id="{8224C75B-EED4-4163-BEE7-84F21A01E42F}"/>
               </a:ext>
             </a:extLst>
           </p:cNvPr>
@@ -6153,7 +6860,7 @@
           <p:cNvPr id="12" name="">
             <a:extLst xmlns:a="http://schemas.openxmlformats.org/drawingml/2006/main">
               <a:ext uri="{FF2B5EF4-FFF2-40B4-BE49-F238E27FC236}">
-                <a16:creationId xmlns:a16="http://schemas.microsoft.com/office/drawing/2014/main" id="{AF08353B-878C-4B65-82D5-BB01725BD092}"/>
+                <a16:creationId xmlns:a16="http://schemas.microsoft.com/office/drawing/2014/main" id="{B30E393D-6B83-461A-9D12-DCAE8C380987}"/>
               </a:ext>
             </a:extLst>
           </p:cNvPr>
@@ -6203,7 +6910,7 @@
           <p:cNvPr id="13" name="">
             <a:extLst xmlns:a="http://schemas.openxmlformats.org/drawingml/2006/main">
               <a:ext uri="{FF2B5EF4-FFF2-40B4-BE49-F238E27FC236}">
-                <a16:creationId xmlns:a16="http://schemas.microsoft.com/office/drawing/2014/main" id="{36ED854A-FBEE-4F13-B837-48E79FE5FB88}"/>
+                <a16:creationId xmlns:a16="http://schemas.microsoft.com/office/drawing/2014/main" id="{CCEADB39-987F-4AF8-8615-D5EF6CA1087F}"/>
               </a:ext>
             </a:extLst>
           </p:cNvPr>
@@ -6253,7 +6960,7 @@
           <p:cNvPr id="14" name="">
             <a:extLst xmlns:a="http://schemas.openxmlformats.org/drawingml/2006/main">
               <a:ext uri="{FF2B5EF4-FFF2-40B4-BE49-F238E27FC236}">
-                <a16:creationId xmlns:a16="http://schemas.microsoft.com/office/drawing/2014/main" id="{93258F9D-D364-4FED-A86E-8EFC1E64FC5F}"/>
+                <a16:creationId xmlns:a16="http://schemas.microsoft.com/office/drawing/2014/main" id="{EA9CEA72-91FE-4F5B-A9F0-15681775D46B}"/>
               </a:ext>
             </a:extLst>
           </p:cNvPr>
@@ -6286,7 +6993,7 @@
           <p:cNvPr id="15" name="">
             <a:extLst xmlns:a="http://schemas.openxmlformats.org/drawingml/2006/main">
               <a:ext uri="{FF2B5EF4-FFF2-40B4-BE49-F238E27FC236}">
-                <a16:creationId xmlns:a16="http://schemas.microsoft.com/office/drawing/2014/main" id="{DFDC55EE-26F3-4D3C-814C-6028F683133B}"/>
+                <a16:creationId xmlns:a16="http://schemas.microsoft.com/office/drawing/2014/main" id="{9C3F4E5C-B010-4C31-9A31-22A5788B0A39}"/>
               </a:ext>
             </a:extLst>
           </p:cNvPr>
@@ -6334,7 +7041,7 @@
     </p:spTree>
     <p:extLst>
       <p:ext uri="{BB962C8B-B14F-4D97-AF65-F5344CB8AC3E}">
-        <p14:creationId xmlns:p14="http://schemas.microsoft.com/office/powerpoint/2010/main" val="1578438072"/>
+        <p14:creationId xmlns:p14="http://schemas.microsoft.com/office/powerpoint/2010/main" val="451282034"/>
       </p:ext>
     </p:extLst>
   </p:cSld>
@@ -6365,7 +7072,7 @@
           <p:cNvPr id="14" name="">
             <a:extLst xmlns:a="http://schemas.openxmlformats.org/drawingml/2006/main">
               <a:ext uri="{FF2B5EF4-FFF2-40B4-BE49-F238E27FC236}">
-                <a16:creationId xmlns:a16="http://schemas.microsoft.com/office/drawing/2014/main" id="{E25D84C8-05B8-4DFE-81E4-83FE3BC5C4F8}"/>
+                <a16:creationId xmlns:a16="http://schemas.microsoft.com/office/drawing/2014/main" id="{4FD8E69B-950B-4563-95ED-483B942334A7}"/>
               </a:ext>
             </a:extLst>
           </p:cNvPr>
@@ -6415,7 +7122,7 @@
           <p:cNvPr id="2" name="">
             <a:extLst xmlns:a="http://schemas.openxmlformats.org/drawingml/2006/main">
               <a:ext uri="{FF2B5EF4-FFF2-40B4-BE49-F238E27FC236}">
-                <a16:creationId xmlns:a16="http://schemas.microsoft.com/office/drawing/2014/main" id="{161541A5-1E35-41DD-9AF5-4F2A3A5ECAF2}"/>
+                <a16:creationId xmlns:a16="http://schemas.microsoft.com/office/drawing/2014/main" id="{2FDB1B8F-FC89-4B3A-8B89-C2F43A2D414C}"/>
               </a:ext>
             </a:extLst>
           </p:cNvPr>
@@ -6465,7 +7172,7 @@
           <p:cNvPr id="3" name="">
             <a:extLst xmlns:a="http://schemas.openxmlformats.org/drawingml/2006/main">
               <a:ext uri="{FF2B5EF4-FFF2-40B4-BE49-F238E27FC236}">
-                <a16:creationId xmlns:a16="http://schemas.microsoft.com/office/drawing/2014/main" id="{18B47AA4-2C2A-4907-B5F8-E656C9C25CA4}"/>
+                <a16:creationId xmlns:a16="http://schemas.microsoft.com/office/drawing/2014/main" id="{67D792B7-164F-4F24-8715-85A80F049DD3}"/>
               </a:ext>
             </a:extLst>
           </p:cNvPr>
@@ -6498,7 +7205,7 @@
           <p:cNvPr id="4" name="">
             <a:extLst xmlns:a="http://schemas.openxmlformats.org/drawingml/2006/main">
               <a:ext uri="{FF2B5EF4-FFF2-40B4-BE49-F238E27FC236}">
-                <a16:creationId xmlns:a16="http://schemas.microsoft.com/office/drawing/2014/main" id="{C10FFC84-CBA9-4FF8-8E81-8055B1C41F52}"/>
+                <a16:creationId xmlns:a16="http://schemas.microsoft.com/office/drawing/2014/main" id="{E484D31C-3F30-442B-86EA-DC62BD8799AD}"/>
               </a:ext>
             </a:extLst>
           </p:cNvPr>
@@ -6548,7 +7255,7 @@
           <p:cNvPr id="5" name="">
             <a:extLst xmlns:a="http://schemas.openxmlformats.org/drawingml/2006/main">
               <a:ext uri="{FF2B5EF4-FFF2-40B4-BE49-F238E27FC236}">
-                <a16:creationId xmlns:a16="http://schemas.microsoft.com/office/drawing/2014/main" id="{B86EC453-6446-420C-91B1-E670F1237AC4}"/>
+                <a16:creationId xmlns:a16="http://schemas.microsoft.com/office/drawing/2014/main" id="{234AA8DC-6A64-4AFA-8D16-D3C47B04C427}"/>
               </a:ext>
             </a:extLst>
           </p:cNvPr>
@@ -6602,7 +7309,7 @@
           <p:nvPr/>
         </p:nvPicPr>
         <p:blipFill>
-          <a:blip xmlns:r="http://schemas.openxmlformats.org/officeDocument/2006/relationships" xmlns:a="http://schemas.openxmlformats.org/drawingml/2006/main" r:embed="Rcac8eaffd38a4927"/>
+          <a:blip xmlns:r="http://schemas.openxmlformats.org/officeDocument/2006/relationships" xmlns:a="http://schemas.openxmlformats.org/drawingml/2006/main" r:embed="R9b9e0e1acfc344c1"/>
           <a:stretch xmlns:a="http://schemas.openxmlformats.org/drawingml/2006/main"/>
         </p:blipFill>
         <p:spPr>
@@ -6620,7 +7327,7 @@
           <p:cNvPr id="7" name="">
             <a:extLst xmlns:a="http://schemas.openxmlformats.org/drawingml/2006/main">
               <a:ext uri="{FF2B5EF4-FFF2-40B4-BE49-F238E27FC236}">
-                <a16:creationId xmlns:a16="http://schemas.microsoft.com/office/drawing/2014/main" id="{C452D37A-7C30-464E-B258-66207957B8E9}"/>
+                <a16:creationId xmlns:a16="http://schemas.microsoft.com/office/drawing/2014/main" id="{53C4E9F2-C6BA-4175-BB11-F9B947FADCF4}"/>
               </a:ext>
             </a:extLst>
           </p:cNvPr>
@@ -6653,7 +7360,7 @@
           <p:cNvPr id="8" name="">
             <a:extLst xmlns:a="http://schemas.openxmlformats.org/drawingml/2006/main">
               <a:ext uri="{FF2B5EF4-FFF2-40B4-BE49-F238E27FC236}">
-                <a16:creationId xmlns:a16="http://schemas.microsoft.com/office/drawing/2014/main" id="{592CC3CF-3FBA-446E-976F-F95B1F5E087C}"/>
+                <a16:creationId xmlns:a16="http://schemas.microsoft.com/office/drawing/2014/main" id="{7B21B3D0-E02C-4BFE-B626-980F7B164DF2}"/>
               </a:ext>
             </a:extLst>
           </p:cNvPr>
@@ -6703,7 +7410,7 @@
           <p:cNvPr id="9" name="">
             <a:extLst xmlns:a="http://schemas.openxmlformats.org/drawingml/2006/main">
               <a:ext uri="{FF2B5EF4-FFF2-40B4-BE49-F238E27FC236}">
-                <a16:creationId xmlns:a16="http://schemas.microsoft.com/office/drawing/2014/main" id="{8E515338-BE10-4D3A-8479-7B470E34F9C8}"/>
+                <a16:creationId xmlns:a16="http://schemas.microsoft.com/office/drawing/2014/main" id="{016D7A63-5762-40DA-8F68-766E08E01007}"/>
               </a:ext>
             </a:extLst>
           </p:cNvPr>
@@ -6736,7 +7443,7 @@
           <p:cNvPr id="10" name="">
             <a:extLst xmlns:a="http://schemas.openxmlformats.org/drawingml/2006/main">
               <a:ext uri="{FF2B5EF4-FFF2-40B4-BE49-F238E27FC236}">
-                <a16:creationId xmlns:a16="http://schemas.microsoft.com/office/drawing/2014/main" id="{2DF99363-4718-416A-A314-9E51566908DA}"/>
+                <a16:creationId xmlns:a16="http://schemas.microsoft.com/office/drawing/2014/main" id="{D337FA49-3165-47E7-98B3-EFDFE07706ED}"/>
               </a:ext>
             </a:extLst>
           </p:cNvPr>
@@ -6786,7 +7493,7 @@
           <p:cNvPr id="11" name="">
             <a:extLst xmlns:a="http://schemas.openxmlformats.org/drawingml/2006/main">
               <a:ext uri="{FF2B5EF4-FFF2-40B4-BE49-F238E27FC236}">
-                <a16:creationId xmlns:a16="http://schemas.microsoft.com/office/drawing/2014/main" id="{59E592B5-6C51-4402-9FBE-73933DE8011D}"/>
+                <a16:creationId xmlns:a16="http://schemas.microsoft.com/office/drawing/2014/main" id="{DFC207BD-C673-42BA-9EC8-C98922876D70}"/>
               </a:ext>
             </a:extLst>
           </p:cNvPr>
@@ -6819,7 +7526,7 @@
           <p:cNvPr id="12" name="">
             <a:extLst xmlns:a="http://schemas.openxmlformats.org/drawingml/2006/main">
               <a:ext uri="{FF2B5EF4-FFF2-40B4-BE49-F238E27FC236}">
-                <a16:creationId xmlns:a16="http://schemas.microsoft.com/office/drawing/2014/main" id="{8523C117-C507-4151-8DFA-EC87815CE0BB}"/>
+                <a16:creationId xmlns:a16="http://schemas.microsoft.com/office/drawing/2014/main" id="{6603154F-7155-437E-9BDD-D0C8CC005D42}"/>
               </a:ext>
             </a:extLst>
           </p:cNvPr>
@@ -6869,7 +7576,7 @@
           <p:cNvPr id="13" name="">
             <a:extLst xmlns:a="http://schemas.openxmlformats.org/drawingml/2006/main">
               <a:ext uri="{FF2B5EF4-FFF2-40B4-BE49-F238E27FC236}">
-                <a16:creationId xmlns:a16="http://schemas.microsoft.com/office/drawing/2014/main" id="{3C4E3511-6D17-46ED-903B-D0B69F340C1A}"/>
+                <a16:creationId xmlns:a16="http://schemas.microsoft.com/office/drawing/2014/main" id="{158B475E-781F-4E2A-A0F6-4E2A574E9AAC}"/>
               </a:ext>
             </a:extLst>
           </p:cNvPr>
@@ -6917,7 +7624,7 @@
     </p:spTree>
     <p:extLst>
       <p:ext uri="{BB962C8B-B14F-4D97-AF65-F5344CB8AC3E}">
-        <p14:creationId xmlns:p14="http://schemas.microsoft.com/office/powerpoint/2010/main" val="790626319"/>
+        <p14:creationId xmlns:p14="http://schemas.microsoft.com/office/powerpoint/2010/main" val="1492826537"/>
       </p:ext>
     </p:extLst>
   </p:cSld>
@@ -6948,7 +7655,7 @@
           <p:cNvPr id="24" name="">
             <a:extLst xmlns:a="http://schemas.openxmlformats.org/drawingml/2006/main">
               <a:ext uri="{FF2B5EF4-FFF2-40B4-BE49-F238E27FC236}">
-                <a16:creationId xmlns:a16="http://schemas.microsoft.com/office/drawing/2014/main" id="{DC42A843-2D78-4530-AF66-4E32369B921E}"/>
+                <a16:creationId xmlns:a16="http://schemas.microsoft.com/office/drawing/2014/main" id="{81E228D1-2EE9-427D-B2E0-0E0D67278E86}"/>
               </a:ext>
             </a:extLst>
           </p:cNvPr>
@@ -6998,7 +7705,7 @@
           <p:cNvPr id="2" name="">
             <a:extLst xmlns:a="http://schemas.openxmlformats.org/drawingml/2006/main">
               <a:ext uri="{FF2B5EF4-FFF2-40B4-BE49-F238E27FC236}">
-                <a16:creationId xmlns:a16="http://schemas.microsoft.com/office/drawing/2014/main" id="{570E8824-FDD3-4869-8313-D5AB91586B82}"/>
+                <a16:creationId xmlns:a16="http://schemas.microsoft.com/office/drawing/2014/main" id="{DA9729BE-C8A8-405B-88D8-E44D36486DAC}"/>
               </a:ext>
             </a:extLst>
           </p:cNvPr>
@@ -7048,7 +7755,7 @@
           <p:cNvPr id="3" name="">
             <a:extLst xmlns:a="http://schemas.openxmlformats.org/drawingml/2006/main">
               <a:ext uri="{FF2B5EF4-FFF2-40B4-BE49-F238E27FC236}">
-                <a16:creationId xmlns:a16="http://schemas.microsoft.com/office/drawing/2014/main" id="{9D003601-B5E9-4E91-916E-8748FF8DB366}"/>
+                <a16:creationId xmlns:a16="http://schemas.microsoft.com/office/drawing/2014/main" id="{EE1A9E6D-9290-4316-8164-0E28C7F4C133}"/>
               </a:ext>
             </a:extLst>
           </p:cNvPr>
@@ -7081,7 +7788,7 @@
           <p:cNvPr id="4" name="">
             <a:extLst xmlns:a="http://schemas.openxmlformats.org/drawingml/2006/main">
               <a:ext uri="{FF2B5EF4-FFF2-40B4-BE49-F238E27FC236}">
-                <a16:creationId xmlns:a16="http://schemas.microsoft.com/office/drawing/2014/main" id="{0EF5EC70-8C80-4A02-A040-F501EDA048EB}"/>
+                <a16:creationId xmlns:a16="http://schemas.microsoft.com/office/drawing/2014/main" id="{70D265D7-62C8-49D7-B5D4-8000A391AAB3}"/>
               </a:ext>
             </a:extLst>
           </p:cNvPr>
@@ -7131,7 +7838,7 @@
           <p:cNvPr id="5" name="">
             <a:extLst xmlns:a="http://schemas.openxmlformats.org/drawingml/2006/main">
               <a:ext uri="{FF2B5EF4-FFF2-40B4-BE49-F238E27FC236}">
-                <a16:creationId xmlns:a16="http://schemas.microsoft.com/office/drawing/2014/main" id="{DC99FFF7-AFCF-40D0-B3E1-09DB2192B90D}"/>
+                <a16:creationId xmlns:a16="http://schemas.microsoft.com/office/drawing/2014/main" id="{90260E48-10D8-4E2E-BE46-A8893667EA9E}"/>
               </a:ext>
             </a:extLst>
           </p:cNvPr>
@@ -7181,7 +7888,7 @@
           <p:cNvPr id="6" name="">
             <a:extLst xmlns:a="http://schemas.openxmlformats.org/drawingml/2006/main">
               <a:ext uri="{FF2B5EF4-FFF2-40B4-BE49-F238E27FC236}">
-                <a16:creationId xmlns:a16="http://schemas.microsoft.com/office/drawing/2014/main" id="{A49D7894-AE91-4E5A-96C2-6C594F6E9601}"/>
+                <a16:creationId xmlns:a16="http://schemas.microsoft.com/office/drawing/2014/main" id="{0810117E-408E-4DC8-940B-674FF4454594}"/>
               </a:ext>
             </a:extLst>
           </p:cNvPr>
@@ -7214,7 +7921,7 @@
           <p:cNvPr id="7" name="">
             <a:extLst xmlns:a="http://schemas.openxmlformats.org/drawingml/2006/main">
               <a:ext uri="{FF2B5EF4-FFF2-40B4-BE49-F238E27FC236}">
-                <a16:creationId xmlns:a16="http://schemas.microsoft.com/office/drawing/2014/main" id="{576182E3-F2D2-4A9A-B1BC-842922F58658}"/>
+                <a16:creationId xmlns:a16="http://schemas.microsoft.com/office/drawing/2014/main" id="{57FDA853-F69E-46E3-BDF8-B4F3A73FDF4E}"/>
               </a:ext>
             </a:extLst>
           </p:cNvPr>
@@ -7264,7 +7971,7 @@
           <p:cNvPr id="8" name="">
             <a:extLst xmlns:a="http://schemas.openxmlformats.org/drawingml/2006/main">
               <a:ext uri="{FF2B5EF4-FFF2-40B4-BE49-F238E27FC236}">
-                <a16:creationId xmlns:a16="http://schemas.microsoft.com/office/drawing/2014/main" id="{0B5465BC-5408-4129-A180-31426950F5E4}"/>
+                <a16:creationId xmlns:a16="http://schemas.microsoft.com/office/drawing/2014/main" id="{7F188729-E1B9-40B3-A0BF-8BFC9BEF6F0B}"/>
               </a:ext>
             </a:extLst>
           </p:cNvPr>
@@ -7314,7 +8021,7 @@
           <p:cNvPr id="9" name="">
             <a:extLst xmlns:a="http://schemas.openxmlformats.org/drawingml/2006/main">
               <a:ext uri="{FF2B5EF4-FFF2-40B4-BE49-F238E27FC236}">
-                <a16:creationId xmlns:a16="http://schemas.microsoft.com/office/drawing/2014/main" id="{F8B461C8-B612-44FC-981C-5C040D055C2D}"/>
+                <a16:creationId xmlns:a16="http://schemas.microsoft.com/office/drawing/2014/main" id="{4A8B1205-1BB0-417A-83DB-2B86579FB12C}"/>
               </a:ext>
             </a:extLst>
           </p:cNvPr>
@@ -7364,7 +8071,7 @@
           <p:cNvPr id="10" name="">
             <a:extLst xmlns:a="http://schemas.openxmlformats.org/drawingml/2006/main">
               <a:ext uri="{FF2B5EF4-FFF2-40B4-BE49-F238E27FC236}">
-                <a16:creationId xmlns:a16="http://schemas.microsoft.com/office/drawing/2014/main" id="{46D1D3DF-1AED-433F-A075-C493D1DCDDA0}"/>
+                <a16:creationId xmlns:a16="http://schemas.microsoft.com/office/drawing/2014/main" id="{C00E89D3-653A-46D7-ADDC-A4960404271A}"/>
               </a:ext>
             </a:extLst>
           </p:cNvPr>
@@ -7414,7 +8121,7 @@
           <p:cNvPr id="11" name="">
             <a:extLst xmlns:a="http://schemas.openxmlformats.org/drawingml/2006/main">
               <a:ext uri="{FF2B5EF4-FFF2-40B4-BE49-F238E27FC236}">
-                <a16:creationId xmlns:a16="http://schemas.microsoft.com/office/drawing/2014/main" id="{FDB54F14-1AED-48E1-9CA3-FBBE82AC5D36}"/>
+                <a16:creationId xmlns:a16="http://schemas.microsoft.com/office/drawing/2014/main" id="{1BB10F9B-77F3-455E-B336-F5244C3CDFDB}"/>
               </a:ext>
             </a:extLst>
           </p:cNvPr>
@@ -7447,7 +8154,7 @@
           <p:cNvPr id="12" name="">
             <a:extLst xmlns:a="http://schemas.openxmlformats.org/drawingml/2006/main">
               <a:ext uri="{FF2B5EF4-FFF2-40B4-BE49-F238E27FC236}">
-                <a16:creationId xmlns:a16="http://schemas.microsoft.com/office/drawing/2014/main" id="{EDAD8AA6-7F4F-41EF-989C-2E821B2EB8B4}"/>
+                <a16:creationId xmlns:a16="http://schemas.microsoft.com/office/drawing/2014/main" id="{30810D57-D53D-420F-9DD4-28E07D95B251}"/>
               </a:ext>
             </a:extLst>
           </p:cNvPr>
@@ -7497,7 +8204,7 @@
           <p:cNvPr id="13" name="">
             <a:extLst xmlns:a="http://schemas.openxmlformats.org/drawingml/2006/main">
               <a:ext uri="{FF2B5EF4-FFF2-40B4-BE49-F238E27FC236}">
-                <a16:creationId xmlns:a16="http://schemas.microsoft.com/office/drawing/2014/main" id="{AABBE3C0-A82E-4C5D-8A37-E2554766ADBD}"/>
+                <a16:creationId xmlns:a16="http://schemas.microsoft.com/office/drawing/2014/main" id="{647060B7-4ED1-429E-91A1-C044B815846D}"/>
               </a:ext>
             </a:extLst>
           </p:cNvPr>
@@ -7530,7 +8237,7 @@
           <p:cNvPr id="14" name="">
             <a:extLst xmlns:a="http://schemas.openxmlformats.org/drawingml/2006/main">
               <a:ext uri="{FF2B5EF4-FFF2-40B4-BE49-F238E27FC236}">
-                <a16:creationId xmlns:a16="http://schemas.microsoft.com/office/drawing/2014/main" id="{250C916A-075F-46ED-AA69-45F9E12D8D46}"/>
+                <a16:creationId xmlns:a16="http://schemas.microsoft.com/office/drawing/2014/main" id="{CBBBFDF2-ED0E-471D-B3D8-2E33975DD91E}"/>
               </a:ext>
             </a:extLst>
           </p:cNvPr>
@@ -7580,7 +8287,7 @@
           <p:cNvPr id="15" name="">
             <a:extLst xmlns:a="http://schemas.openxmlformats.org/drawingml/2006/main">
               <a:ext uri="{FF2B5EF4-FFF2-40B4-BE49-F238E27FC236}">
-                <a16:creationId xmlns:a16="http://schemas.microsoft.com/office/drawing/2014/main" id="{3CA47FEB-7DE9-4227-B356-9EE3E217FE21}"/>
+                <a16:creationId xmlns:a16="http://schemas.microsoft.com/office/drawing/2014/main" id="{D531160F-6FB8-486B-8A5B-441D8A87B105}"/>
               </a:ext>
             </a:extLst>
           </p:cNvPr>
@@ -7613,7 +8320,7 @@
           <p:cNvPr id="16" name="">
             <a:extLst xmlns:a="http://schemas.openxmlformats.org/drawingml/2006/main">
               <a:ext uri="{FF2B5EF4-FFF2-40B4-BE49-F238E27FC236}">
-                <a16:creationId xmlns:a16="http://schemas.microsoft.com/office/drawing/2014/main" id="{D52A5C43-EB3E-40B0-863A-5BE7733DDC91}"/>
+                <a16:creationId xmlns:a16="http://schemas.microsoft.com/office/drawing/2014/main" id="{14F1768A-695B-476E-8A3E-C631D71EE80B}"/>
               </a:ext>
             </a:extLst>
           </p:cNvPr>
@@ -7663,7 +8370,7 @@
           <p:cNvPr id="17" name="">
             <a:extLst xmlns:a="http://schemas.openxmlformats.org/drawingml/2006/main">
               <a:ext uri="{FF2B5EF4-FFF2-40B4-BE49-F238E27FC236}">
-                <a16:creationId xmlns:a16="http://schemas.microsoft.com/office/drawing/2014/main" id="{0EAD1DAD-47CD-4F25-8A72-4D9616A4D1E9}"/>
+                <a16:creationId xmlns:a16="http://schemas.microsoft.com/office/drawing/2014/main" id="{BAC6DE0E-ADCE-4CFB-B4FD-FB9C0BBD9F2D}"/>
               </a:ext>
             </a:extLst>
           </p:cNvPr>
@@ -7713,7 +8420,7 @@
           <p:cNvPr id="18" name="">
             <a:extLst xmlns:a="http://schemas.openxmlformats.org/drawingml/2006/main">
               <a:ext uri="{FF2B5EF4-FFF2-40B4-BE49-F238E27FC236}">
-                <a16:creationId xmlns:a16="http://schemas.microsoft.com/office/drawing/2014/main" id="{F22A1959-1FE0-4449-A0C3-D34702460468}"/>
+                <a16:creationId xmlns:a16="http://schemas.microsoft.com/office/drawing/2014/main" id="{D4EF6763-A31A-46BF-989E-10B31DD05D3F}"/>
               </a:ext>
             </a:extLst>
           </p:cNvPr>
@@ -7763,7 +8470,7 @@
           <p:cNvPr id="19" name="">
             <a:extLst xmlns:a="http://schemas.openxmlformats.org/drawingml/2006/main">
               <a:ext uri="{FF2B5EF4-FFF2-40B4-BE49-F238E27FC236}">
-                <a16:creationId xmlns:a16="http://schemas.microsoft.com/office/drawing/2014/main" id="{46EDF62B-943B-426F-8995-2B350691BA4A}"/>
+                <a16:creationId xmlns:a16="http://schemas.microsoft.com/office/drawing/2014/main" id="{2F6E3D5B-20B8-49CF-970D-DAC81D41E702}"/>
               </a:ext>
             </a:extLst>
           </p:cNvPr>
@@ -7813,7 +8520,7 @@
           <p:cNvPr id="20" name="">
             <a:extLst xmlns:a="http://schemas.openxmlformats.org/drawingml/2006/main">
               <a:ext uri="{FF2B5EF4-FFF2-40B4-BE49-F238E27FC236}">
-                <a16:creationId xmlns:a16="http://schemas.microsoft.com/office/drawing/2014/main" id="{EE52C604-3857-499F-9D2F-6AC627BBDA5E}"/>
+                <a16:creationId xmlns:a16="http://schemas.microsoft.com/office/drawing/2014/main" id="{68A07CDA-83BB-4EE4-BBA9-E58063627582}"/>
               </a:ext>
             </a:extLst>
           </p:cNvPr>
@@ -7846,7 +8553,7 @@
           <p:cNvPr id="21" name="">
             <a:extLst xmlns:a="http://schemas.openxmlformats.org/drawingml/2006/main">
               <a:ext uri="{FF2B5EF4-FFF2-40B4-BE49-F238E27FC236}">
-                <a16:creationId xmlns:a16="http://schemas.microsoft.com/office/drawing/2014/main" id="{E8FBD346-FB35-4614-B92D-AC9F785C8BFF}"/>
+                <a16:creationId xmlns:a16="http://schemas.microsoft.com/office/drawing/2014/main" id="{133DB28B-7C63-4ADD-ABCD-07D2C1C68E8C}"/>
               </a:ext>
             </a:extLst>
           </p:cNvPr>
@@ -7896,7 +8603,7 @@
           <p:cNvPr id="22" name="">
             <a:extLst xmlns:a="http://schemas.openxmlformats.org/drawingml/2006/main">
               <a:ext uri="{FF2B5EF4-FFF2-40B4-BE49-F238E27FC236}">
-                <a16:creationId xmlns:a16="http://schemas.microsoft.com/office/drawing/2014/main" id="{8219C1C8-024F-4C0C-BF10-6FFC5B8DFB1B}"/>
+                <a16:creationId xmlns:a16="http://schemas.microsoft.com/office/drawing/2014/main" id="{4996C982-B9CA-4CF8-A603-518456411F16}"/>
               </a:ext>
             </a:extLst>
           </p:cNvPr>
@@ -7929,7 +8636,7 @@
           <p:cNvPr id="23" name="">
             <a:extLst xmlns:a="http://schemas.openxmlformats.org/drawingml/2006/main">
               <a:ext uri="{FF2B5EF4-FFF2-40B4-BE49-F238E27FC236}">
-                <a16:creationId xmlns:a16="http://schemas.microsoft.com/office/drawing/2014/main" id="{37B50AAC-9F07-4DC7-BE28-61B190249FFD}"/>
+                <a16:creationId xmlns:a16="http://schemas.microsoft.com/office/drawing/2014/main" id="{ACAED91C-C05F-4D1C-9D0B-B42D074C7409}"/>
               </a:ext>
             </a:extLst>
           </p:cNvPr>
@@ -7977,7 +8684,7 @@
     </p:spTree>
     <p:extLst>
       <p:ext uri="{BB962C8B-B14F-4D97-AF65-F5344CB8AC3E}">
-        <p14:creationId xmlns:p14="http://schemas.microsoft.com/office/powerpoint/2010/main" val="153973232"/>
+        <p14:creationId xmlns:p14="http://schemas.microsoft.com/office/powerpoint/2010/main" val="693862102"/>
       </p:ext>
     </p:extLst>
   </p:cSld>
@@ -8008,7 +8715,7 @@
           <p:cNvPr id="16" name="">
             <a:extLst xmlns:a="http://schemas.openxmlformats.org/drawingml/2006/main">
               <a:ext uri="{FF2B5EF4-FFF2-40B4-BE49-F238E27FC236}">
-                <a16:creationId xmlns:a16="http://schemas.microsoft.com/office/drawing/2014/main" id="{A44E4A69-3EF9-41EE-89C2-5BD38FB9EC87}"/>
+                <a16:creationId xmlns:a16="http://schemas.microsoft.com/office/drawing/2014/main" id="{0BA01C6A-7049-4B99-BACA-C0E7CAB96CB6}"/>
               </a:ext>
             </a:extLst>
           </p:cNvPr>
@@ -8058,7 +8765,7 @@
           <p:cNvPr id="2" name="">
             <a:extLst xmlns:a="http://schemas.openxmlformats.org/drawingml/2006/main">
               <a:ext uri="{FF2B5EF4-FFF2-40B4-BE49-F238E27FC236}">
-                <a16:creationId xmlns:a16="http://schemas.microsoft.com/office/drawing/2014/main" id="{5D4D70A1-AD2F-4FF2-90B6-ED5015AA8213}"/>
+                <a16:creationId xmlns:a16="http://schemas.microsoft.com/office/drawing/2014/main" id="{21239DB5-6CF8-4859-B234-47112BBDA805}"/>
               </a:ext>
             </a:extLst>
           </p:cNvPr>
@@ -8108,7 +8815,7 @@
           <p:cNvPr id="3" name="">
             <a:extLst xmlns:a="http://schemas.openxmlformats.org/drawingml/2006/main">
               <a:ext uri="{FF2B5EF4-FFF2-40B4-BE49-F238E27FC236}">
-                <a16:creationId xmlns:a16="http://schemas.microsoft.com/office/drawing/2014/main" id="{2B68FFEB-3C2E-474E-B042-6341933B8195}"/>
+                <a16:creationId xmlns:a16="http://schemas.microsoft.com/office/drawing/2014/main" id="{98C52369-582B-4D38-B235-8036BD684A48}"/>
               </a:ext>
             </a:extLst>
           </p:cNvPr>
@@ -8141,7 +8848,7 @@
           <p:cNvPr id="4" name="">
             <a:extLst xmlns:a="http://schemas.openxmlformats.org/drawingml/2006/main">
               <a:ext uri="{FF2B5EF4-FFF2-40B4-BE49-F238E27FC236}">
-                <a16:creationId xmlns:a16="http://schemas.microsoft.com/office/drawing/2014/main" id="{65841DF3-E2E9-4B33-B5E0-443F5F44F094}"/>
+                <a16:creationId xmlns:a16="http://schemas.microsoft.com/office/drawing/2014/main" id="{BC5380D4-9B3A-4023-96F3-EC346DDE0009}"/>
               </a:ext>
             </a:extLst>
           </p:cNvPr>
@@ -8191,7 +8898,7 @@
           <p:cNvPr id="5" name="">
             <a:extLst xmlns:a="http://schemas.openxmlformats.org/drawingml/2006/main">
               <a:ext uri="{FF2B5EF4-FFF2-40B4-BE49-F238E27FC236}">
-                <a16:creationId xmlns:a16="http://schemas.microsoft.com/office/drawing/2014/main" id="{4B7E7541-093F-4F3C-94CD-3B6A11A1E367}"/>
+                <a16:creationId xmlns:a16="http://schemas.microsoft.com/office/drawing/2014/main" id="{059D888B-B65F-4981-8EEA-0474A7B2DCFB}"/>
               </a:ext>
             </a:extLst>
           </p:cNvPr>
@@ -8241,7 +8948,7 @@
           <p:cNvPr id="6" name="">
             <a:extLst xmlns:a="http://schemas.openxmlformats.org/drawingml/2006/main">
               <a:ext uri="{FF2B5EF4-FFF2-40B4-BE49-F238E27FC236}">
-                <a16:creationId xmlns:a16="http://schemas.microsoft.com/office/drawing/2014/main" id="{BCA6A817-94B9-4818-86D2-538D402CF953}"/>
+                <a16:creationId xmlns:a16="http://schemas.microsoft.com/office/drawing/2014/main" id="{C18DE444-A593-4B64-88C6-DB57E08C2734}"/>
               </a:ext>
             </a:extLst>
           </p:cNvPr>
@@ -8274,7 +8981,7 @@
           <p:cNvPr id="7" name="">
             <a:extLst xmlns:a="http://schemas.openxmlformats.org/drawingml/2006/main">
               <a:ext uri="{FF2B5EF4-FFF2-40B4-BE49-F238E27FC236}">
-                <a16:creationId xmlns:a16="http://schemas.microsoft.com/office/drawing/2014/main" id="{872E8D38-5718-4941-A97B-EF81D359EA75}"/>
+                <a16:creationId xmlns:a16="http://schemas.microsoft.com/office/drawing/2014/main" id="{EE3FA081-36A3-4F8D-926C-7F1C0563AC7B}"/>
               </a:ext>
             </a:extLst>
           </p:cNvPr>
@@ -8324,7 +9031,7 @@
           <p:cNvPr id="8" name="">
             <a:extLst xmlns:a="http://schemas.openxmlformats.org/drawingml/2006/main">
               <a:ext uri="{FF2B5EF4-FFF2-40B4-BE49-F238E27FC236}">
-                <a16:creationId xmlns:a16="http://schemas.microsoft.com/office/drawing/2014/main" id="{B2CCCA0E-B346-4205-8C08-2D167D3F4A75}"/>
+                <a16:creationId xmlns:a16="http://schemas.microsoft.com/office/drawing/2014/main" id="{EAA6BC05-4F48-4F1F-9B14-FB0432ED7C78}"/>
               </a:ext>
             </a:extLst>
           </p:cNvPr>
@@ -8374,7 +9081,7 @@
           <p:cNvPr id="9" name="">
             <a:extLst xmlns:a="http://schemas.openxmlformats.org/drawingml/2006/main">
               <a:ext uri="{FF2B5EF4-FFF2-40B4-BE49-F238E27FC236}">
-                <a16:creationId xmlns:a16="http://schemas.microsoft.com/office/drawing/2014/main" id="{528D4CEA-2FDC-44D3-8510-ABBEE6CD9440}"/>
+                <a16:creationId xmlns:a16="http://schemas.microsoft.com/office/drawing/2014/main" id="{DB72E2F0-26ED-44FC-B68E-FE3264C6E92C}"/>
               </a:ext>
             </a:extLst>
           </p:cNvPr>
@@ -8424,7 +9131,7 @@
           <p:cNvPr id="10" name="">
             <a:extLst xmlns:a="http://schemas.openxmlformats.org/drawingml/2006/main">
               <a:ext uri="{FF2B5EF4-FFF2-40B4-BE49-F238E27FC236}">
-                <a16:creationId xmlns:a16="http://schemas.microsoft.com/office/drawing/2014/main" id="{D557F6E2-7006-42FD-A5E9-C71C5A989D24}"/>
+                <a16:creationId xmlns:a16="http://schemas.microsoft.com/office/drawing/2014/main" id="{97360687-F46B-4526-B644-2F9A94A4DD51}"/>
               </a:ext>
             </a:extLst>
           </p:cNvPr>
@@ -8474,7 +9181,7 @@
           <p:cNvPr id="11" name="">
             <a:extLst xmlns:a="http://schemas.openxmlformats.org/drawingml/2006/main">
               <a:ext uri="{FF2B5EF4-FFF2-40B4-BE49-F238E27FC236}">
-                <a16:creationId xmlns:a16="http://schemas.microsoft.com/office/drawing/2014/main" id="{64A360CA-DFCF-4F5B-BA63-111077C50AD5}"/>
+                <a16:creationId xmlns:a16="http://schemas.microsoft.com/office/drawing/2014/main" id="{4C1F0417-A2D5-4C4A-995A-A97BE32747E9}"/>
               </a:ext>
             </a:extLst>
           </p:cNvPr>
@@ -8524,7 +9231,7 @@
           <p:cNvPr id="12" name="">
             <a:extLst xmlns:a="http://schemas.openxmlformats.org/drawingml/2006/main">
               <a:ext uri="{FF2B5EF4-FFF2-40B4-BE49-F238E27FC236}">
-                <a16:creationId xmlns:a16="http://schemas.microsoft.com/office/drawing/2014/main" id="{65E96506-C616-44CA-9096-A64B38F9FC1B}"/>
+                <a16:creationId xmlns:a16="http://schemas.microsoft.com/office/drawing/2014/main" id="{6B45E796-0D3C-452E-85A9-042C24316EF4}"/>
               </a:ext>
             </a:extLst>
           </p:cNvPr>
@@ -8574,7 +9281,7 @@
           <p:cNvPr id="13" name="">
             <a:extLst xmlns:a="http://schemas.openxmlformats.org/drawingml/2006/main">
               <a:ext uri="{FF2B5EF4-FFF2-40B4-BE49-F238E27FC236}">
-                <a16:creationId xmlns:a16="http://schemas.microsoft.com/office/drawing/2014/main" id="{06E0A33A-0E4C-4485-B8BA-B40D790E2558}"/>
+                <a16:creationId xmlns:a16="http://schemas.microsoft.com/office/drawing/2014/main" id="{6A1F712A-5FE9-4318-A715-526379253C6D}"/>
               </a:ext>
             </a:extLst>
           </p:cNvPr>
@@ -8624,7 +9331,7 @@
           <p:cNvPr id="14" name="">
             <a:extLst xmlns:a="http://schemas.openxmlformats.org/drawingml/2006/main">
               <a:ext uri="{FF2B5EF4-FFF2-40B4-BE49-F238E27FC236}">
-                <a16:creationId xmlns:a16="http://schemas.microsoft.com/office/drawing/2014/main" id="{B70B0B03-9E8F-4040-8AD6-3FA75AB4E6E8}"/>
+                <a16:creationId xmlns:a16="http://schemas.microsoft.com/office/drawing/2014/main" id="{FE722945-BC39-43FC-822E-B1FE5FCA48C7}"/>
               </a:ext>
             </a:extLst>
           </p:cNvPr>
@@ -8674,7 +9381,7 @@
           <p:cNvPr id="15" name="">
             <a:extLst xmlns:a="http://schemas.openxmlformats.org/drawingml/2006/main">
               <a:ext uri="{FF2B5EF4-FFF2-40B4-BE49-F238E27FC236}">
-                <a16:creationId xmlns:a16="http://schemas.microsoft.com/office/drawing/2014/main" id="{62A7C0E0-AB6B-456F-A16E-4B71EF567449}"/>
+                <a16:creationId xmlns:a16="http://schemas.microsoft.com/office/drawing/2014/main" id="{C21D7CB3-0831-44B8-A601-B4B1216CB1FF}"/>
               </a:ext>
             </a:extLst>
           </p:cNvPr>
@@ -8722,7 +9429,7 @@
     </p:spTree>
     <p:extLst>
       <p:ext uri="{BB962C8B-B14F-4D97-AF65-F5344CB8AC3E}">
-        <p14:creationId xmlns:p14="http://schemas.microsoft.com/office/powerpoint/2010/main" val="190012762"/>
+        <p14:creationId xmlns:p14="http://schemas.microsoft.com/office/powerpoint/2010/main" val="395410380"/>
       </p:ext>
     </p:extLst>
   </p:cSld>
@@ -8753,7 +9460,7 @@
           <p:cNvPr id="6" name="">
             <a:extLst xmlns:a="http://schemas.openxmlformats.org/drawingml/2006/main">
               <a:ext uri="{FF2B5EF4-FFF2-40B4-BE49-F238E27FC236}">
-                <a16:creationId xmlns:a16="http://schemas.microsoft.com/office/drawing/2014/main" id="{0C7AA359-4042-4A6B-AE1C-FECDBFD7BCA1}"/>
+                <a16:creationId xmlns:a16="http://schemas.microsoft.com/office/drawing/2014/main" id="{1D365844-45E0-44A2-A497-9EFF1682EAC3}"/>
               </a:ext>
             </a:extLst>
           </p:cNvPr>
@@ -8803,7 +9510,7 @@
           <p:cNvPr id="2" name="">
             <a:extLst xmlns:a="http://schemas.openxmlformats.org/drawingml/2006/main">
               <a:ext uri="{FF2B5EF4-FFF2-40B4-BE49-F238E27FC236}">
-                <a16:creationId xmlns:a16="http://schemas.microsoft.com/office/drawing/2014/main" id="{2FCC09AB-F03B-4D04-A8D3-697228098C62}"/>
+                <a16:creationId xmlns:a16="http://schemas.microsoft.com/office/drawing/2014/main" id="{941074C7-23E1-4207-878B-99C505BB0D98}"/>
               </a:ext>
             </a:extLst>
           </p:cNvPr>
@@ -8870,7 +9577,7 @@
           <p:cNvPr id="3" name="">
             <a:extLst xmlns:a="http://schemas.openxmlformats.org/drawingml/2006/main">
               <a:ext uri="{FF2B5EF4-FFF2-40B4-BE49-F238E27FC236}">
-                <a16:creationId xmlns:a16="http://schemas.microsoft.com/office/drawing/2014/main" id="{C9DB2ED2-DC37-4BD8-8179-777D88A4EBBF}"/>
+                <a16:creationId xmlns:a16="http://schemas.microsoft.com/office/drawing/2014/main" id="{EE5FA4A7-E40C-4707-BE91-99BF732996E2}"/>
               </a:ext>
             </a:extLst>
           </p:cNvPr>
@@ -8920,7 +9627,7 @@
           <p:cNvPr id="4" name="">
             <a:extLst xmlns:a="http://schemas.openxmlformats.org/drawingml/2006/main">
               <a:ext uri="{FF2B5EF4-FFF2-40B4-BE49-F238E27FC236}">
-                <a16:creationId xmlns:a16="http://schemas.microsoft.com/office/drawing/2014/main" id="{8BBFBE00-E2C9-40E1-8703-0672C6846E86}"/>
+                <a16:creationId xmlns:a16="http://schemas.microsoft.com/office/drawing/2014/main" id="{234773AD-F277-483F-BC8F-0B2C5814B7BC}"/>
               </a:ext>
             </a:extLst>
           </p:cNvPr>
@@ -8970,7 +9677,7 @@
           <p:cNvPr id="5" name="">
             <a:extLst xmlns:a="http://schemas.openxmlformats.org/drawingml/2006/main">
               <a:ext uri="{FF2B5EF4-FFF2-40B4-BE49-F238E27FC236}">
-                <a16:creationId xmlns:a16="http://schemas.microsoft.com/office/drawing/2014/main" id="{DD1D13DF-5B23-4288-9E4F-BDF9A0CAC14B}"/>
+                <a16:creationId xmlns:a16="http://schemas.microsoft.com/office/drawing/2014/main" id="{08A36CAC-DAD7-42B3-885A-9B576B8D7404}"/>
               </a:ext>
             </a:extLst>
           </p:cNvPr>
@@ -9018,7 +9725,7 @@
     </p:spTree>
     <p:extLst>
       <p:ext uri="{BB962C8B-B14F-4D97-AF65-F5344CB8AC3E}">
-        <p14:creationId xmlns:p14="http://schemas.microsoft.com/office/powerpoint/2010/main" val="1317312665"/>
+        <p14:creationId xmlns:p14="http://schemas.microsoft.com/office/powerpoint/2010/main" val="1106128381"/>
       </p:ext>
     </p:extLst>
   </p:cSld>
@@ -9049,7 +9756,7 @@
           <p:cNvPr id="20" name="">
             <a:extLst xmlns:a="http://schemas.openxmlformats.org/drawingml/2006/main">
               <a:ext uri="{FF2B5EF4-FFF2-40B4-BE49-F238E27FC236}">
-                <a16:creationId xmlns:a16="http://schemas.microsoft.com/office/drawing/2014/main" id="{24FD3CE0-1CA5-4349-AFFC-F28B39D9041C}"/>
+                <a16:creationId xmlns:a16="http://schemas.microsoft.com/office/drawing/2014/main" id="{E5EF1BA9-6966-42E1-99A7-FCA8CCB96339}"/>
               </a:ext>
             </a:extLst>
           </p:cNvPr>
@@ -9099,7 +9806,7 @@
           <p:cNvPr id="2" name="">
             <a:extLst xmlns:a="http://schemas.openxmlformats.org/drawingml/2006/main">
               <a:ext uri="{FF2B5EF4-FFF2-40B4-BE49-F238E27FC236}">
-                <a16:creationId xmlns:a16="http://schemas.microsoft.com/office/drawing/2014/main" id="{B48E8DC5-D7C6-4E43-B89E-02CDDD39F57B}"/>
+                <a16:creationId xmlns:a16="http://schemas.microsoft.com/office/drawing/2014/main" id="{7EC54F36-9095-4BB0-9B42-C52ABD398253}"/>
               </a:ext>
             </a:extLst>
           </p:cNvPr>
@@ -9149,7 +9856,7 @@
           <p:cNvPr id="3" name="">
             <a:extLst xmlns:a="http://schemas.openxmlformats.org/drawingml/2006/main">
               <a:ext uri="{FF2B5EF4-FFF2-40B4-BE49-F238E27FC236}">
-                <a16:creationId xmlns:a16="http://schemas.microsoft.com/office/drawing/2014/main" id="{6171FD54-7FFD-4215-8B41-0D4E86EF90C0}"/>
+                <a16:creationId xmlns:a16="http://schemas.microsoft.com/office/drawing/2014/main" id="{5E424164-92D0-4670-A306-9DD7A811584E}"/>
               </a:ext>
             </a:extLst>
           </p:cNvPr>
@@ -9182,7 +9889,7 @@
           <p:cNvPr id="4" name="">
             <a:extLst xmlns:a="http://schemas.openxmlformats.org/drawingml/2006/main">
               <a:ext uri="{FF2B5EF4-FFF2-40B4-BE49-F238E27FC236}">
-                <a16:creationId xmlns:a16="http://schemas.microsoft.com/office/drawing/2014/main" id="{93CD0953-4EC4-4DCF-BC90-E9EFAD9B9210}"/>
+                <a16:creationId xmlns:a16="http://schemas.microsoft.com/office/drawing/2014/main" id="{569D0AEA-E157-4532-A8F5-235383C10617}"/>
               </a:ext>
             </a:extLst>
           </p:cNvPr>
@@ -9232,7 +9939,7 @@
           <p:cNvPr id="5" name="">
             <a:extLst xmlns:a="http://schemas.openxmlformats.org/drawingml/2006/main">
               <a:ext uri="{FF2B5EF4-FFF2-40B4-BE49-F238E27FC236}">
-                <a16:creationId xmlns:a16="http://schemas.microsoft.com/office/drawing/2014/main" id="{1A4B8737-6B5A-47B5-BFB9-0B2A457E5139}"/>
+                <a16:creationId xmlns:a16="http://schemas.microsoft.com/office/drawing/2014/main" id="{959C9BDE-A491-4277-A43F-19B17C0FCF80}"/>
               </a:ext>
             </a:extLst>
           </p:cNvPr>
@@ -9282,7 +9989,7 @@
           <p:cNvPr id="6" name="">
             <a:extLst xmlns:a="http://schemas.openxmlformats.org/drawingml/2006/main">
               <a:ext uri="{FF2B5EF4-FFF2-40B4-BE49-F238E27FC236}">
-                <a16:creationId xmlns:a16="http://schemas.microsoft.com/office/drawing/2014/main" id="{D19CD443-2A04-4BF0-98B3-2725CBE18521}"/>
+                <a16:creationId xmlns:a16="http://schemas.microsoft.com/office/drawing/2014/main" id="{A693DDCA-6AC6-441F-90B5-E51E44D66EA2}"/>
               </a:ext>
             </a:extLst>
           </p:cNvPr>
@@ -9315,7 +10022,7 @@
           <p:cNvPr id="7" name="">
             <a:extLst xmlns:a="http://schemas.openxmlformats.org/drawingml/2006/main">
               <a:ext uri="{FF2B5EF4-FFF2-40B4-BE49-F238E27FC236}">
-                <a16:creationId xmlns:a16="http://schemas.microsoft.com/office/drawing/2014/main" id="{F8B667BD-403E-40DD-9D22-1FDFE57AEE5A}"/>
+                <a16:creationId xmlns:a16="http://schemas.microsoft.com/office/drawing/2014/main" id="{B43F617A-45EC-4F02-93DB-55C2E0F200F9}"/>
               </a:ext>
             </a:extLst>
           </p:cNvPr>
@@ -9365,7 +10072,7 @@
           <p:cNvPr id="8" name="">
             <a:extLst xmlns:a="http://schemas.openxmlformats.org/drawingml/2006/main">
               <a:ext uri="{FF2B5EF4-FFF2-40B4-BE49-F238E27FC236}">
-                <a16:creationId xmlns:a16="http://schemas.microsoft.com/office/drawing/2014/main" id="{28F71638-0654-4AD2-9A0C-D4CE81D94F41}"/>
+                <a16:creationId xmlns:a16="http://schemas.microsoft.com/office/drawing/2014/main" id="{9F02369B-1BCC-4B5A-A022-F775367A9397}"/>
               </a:ext>
             </a:extLst>
           </p:cNvPr>
@@ -9415,7 +10122,7 @@
           <p:cNvPr id="9" name="">
             <a:extLst xmlns:a="http://schemas.openxmlformats.org/drawingml/2006/main">
               <a:ext uri="{FF2B5EF4-FFF2-40B4-BE49-F238E27FC236}">
-                <a16:creationId xmlns:a16="http://schemas.microsoft.com/office/drawing/2014/main" id="{A01C68E8-A268-49AD-B54A-D83E0B4B89F3}"/>
+                <a16:creationId xmlns:a16="http://schemas.microsoft.com/office/drawing/2014/main" id="{2535BDFC-21E0-41B9-A9D7-60DA0D40906C}"/>
               </a:ext>
             </a:extLst>
           </p:cNvPr>
@@ -9465,7 +10172,7 @@
           <p:cNvPr id="10" name="">
             <a:extLst xmlns:a="http://schemas.openxmlformats.org/drawingml/2006/main">
               <a:ext uri="{FF2B5EF4-FFF2-40B4-BE49-F238E27FC236}">
-                <a16:creationId xmlns:a16="http://schemas.microsoft.com/office/drawing/2014/main" id="{3436FAB9-057F-4B7C-8062-4EF3FBF9EE58}"/>
+                <a16:creationId xmlns:a16="http://schemas.microsoft.com/office/drawing/2014/main" id="{513F68CD-6E46-49C2-9F97-BD7ED148CB2B}"/>
               </a:ext>
             </a:extLst>
           </p:cNvPr>
@@ -9515,7 +10222,7 @@
           <p:cNvPr id="11" name="">
             <a:extLst xmlns:a="http://schemas.openxmlformats.org/drawingml/2006/main">
               <a:ext uri="{FF2B5EF4-FFF2-40B4-BE49-F238E27FC236}">
-                <a16:creationId xmlns:a16="http://schemas.microsoft.com/office/drawing/2014/main" id="{59C75A55-8244-4ED8-9A01-0E89E2EF1CE7}"/>
+                <a16:creationId xmlns:a16="http://schemas.microsoft.com/office/drawing/2014/main" id="{4B368ECC-A59F-408D-BF88-0AB41A105494}"/>
               </a:ext>
             </a:extLst>
           </p:cNvPr>
@@ -9565,7 +10272,7 @@
           <p:cNvPr id="12" name="">
             <a:extLst xmlns:a="http://schemas.openxmlformats.org/drawingml/2006/main">
               <a:ext uri="{FF2B5EF4-FFF2-40B4-BE49-F238E27FC236}">
-                <a16:creationId xmlns:a16="http://schemas.microsoft.com/office/drawing/2014/main" id="{83CE6CA2-89CC-4BEF-BE76-0BAF54685E83}"/>
+                <a16:creationId xmlns:a16="http://schemas.microsoft.com/office/drawing/2014/main" id="{7AFB0168-B553-42E5-8EE4-3A3B95B5B0F4}"/>
               </a:ext>
             </a:extLst>
           </p:cNvPr>
@@ -9598,7 +10305,7 @@
           <p:cNvPr id="13" name="">
             <a:extLst xmlns:a="http://schemas.openxmlformats.org/drawingml/2006/main">
               <a:ext uri="{FF2B5EF4-FFF2-40B4-BE49-F238E27FC236}">
-                <a16:creationId xmlns:a16="http://schemas.microsoft.com/office/drawing/2014/main" id="{3BDB39D9-DFCE-4793-945B-A8305AE51E97}"/>
+                <a16:creationId xmlns:a16="http://schemas.microsoft.com/office/drawing/2014/main" id="{2428410B-367E-4C51-95FB-561C84FD877B}"/>
               </a:ext>
             </a:extLst>
           </p:cNvPr>
@@ -9648,7 +10355,7 @@
           <p:cNvPr id="14" name="">
             <a:extLst xmlns:a="http://schemas.openxmlformats.org/drawingml/2006/main">
               <a:ext uri="{FF2B5EF4-FFF2-40B4-BE49-F238E27FC236}">
-                <a16:creationId xmlns:a16="http://schemas.microsoft.com/office/drawing/2014/main" id="{734F0502-722E-4F49-A797-3D65E19FDD8F}"/>
+                <a16:creationId xmlns:a16="http://schemas.microsoft.com/office/drawing/2014/main" id="{82C92ACE-DE6D-486F-BEE9-295EF6572CDB}"/>
               </a:ext>
             </a:extLst>
           </p:cNvPr>
@@ -9698,7 +10405,7 @@
           <p:cNvPr id="15" name="">
             <a:extLst xmlns:a="http://schemas.openxmlformats.org/drawingml/2006/main">
               <a:ext uri="{FF2B5EF4-FFF2-40B4-BE49-F238E27FC236}">
-                <a16:creationId xmlns:a16="http://schemas.microsoft.com/office/drawing/2014/main" id="{782FF7CC-44A6-4E3A-A54C-26FAD3CDFFBB}"/>
+                <a16:creationId xmlns:a16="http://schemas.microsoft.com/office/drawing/2014/main" id="{12D51F1F-E130-48CC-ACE6-260ABF5EA155}"/>
               </a:ext>
             </a:extLst>
           </p:cNvPr>
@@ -9748,7 +10455,7 @@
           <p:cNvPr id="16" name="">
             <a:extLst xmlns:a="http://schemas.openxmlformats.org/drawingml/2006/main">
               <a:ext uri="{FF2B5EF4-FFF2-40B4-BE49-F238E27FC236}">
-                <a16:creationId xmlns:a16="http://schemas.microsoft.com/office/drawing/2014/main" id="{C1DD567A-8816-4E39-AD3A-AFA1A5CB3C7B}"/>
+                <a16:creationId xmlns:a16="http://schemas.microsoft.com/office/drawing/2014/main" id="{1B711E07-5CCC-4FAC-BF3E-E6151047B49C}"/>
               </a:ext>
             </a:extLst>
           </p:cNvPr>
@@ -9798,7 +10505,7 @@
           <p:cNvPr id="17" name="">
             <a:extLst xmlns:a="http://schemas.openxmlformats.org/drawingml/2006/main">
               <a:ext uri="{FF2B5EF4-FFF2-40B4-BE49-F238E27FC236}">
-                <a16:creationId xmlns:a16="http://schemas.microsoft.com/office/drawing/2014/main" id="{5E1BD91D-98CE-487F-9587-D6E7277D3487}"/>
+                <a16:creationId xmlns:a16="http://schemas.microsoft.com/office/drawing/2014/main" id="{E63EF3EE-A02E-4E99-AB6D-F73A2C15E920}"/>
               </a:ext>
             </a:extLst>
           </p:cNvPr>
@@ -9848,7 +10555,7 @@
           <p:cNvPr id="18" name="">
             <a:extLst xmlns:a="http://schemas.openxmlformats.org/drawingml/2006/main">
               <a:ext uri="{FF2B5EF4-FFF2-40B4-BE49-F238E27FC236}">
-                <a16:creationId xmlns:a16="http://schemas.microsoft.com/office/drawing/2014/main" id="{E5442175-B09A-472B-98AC-F6D37431E661}"/>
+                <a16:creationId xmlns:a16="http://schemas.microsoft.com/office/drawing/2014/main" id="{1DE7D587-F23E-4B26-A7CF-DAB76E515ACD}"/>
               </a:ext>
             </a:extLst>
           </p:cNvPr>
@@ -9881,7 +10588,7 @@
           <p:cNvPr id="19" name="">
             <a:extLst xmlns:a="http://schemas.openxmlformats.org/drawingml/2006/main">
               <a:ext uri="{FF2B5EF4-FFF2-40B4-BE49-F238E27FC236}">
-                <a16:creationId xmlns:a16="http://schemas.microsoft.com/office/drawing/2014/main" id="{6F6FF21C-1C38-4560-A168-A4CC6A8E4ECC}"/>
+                <a16:creationId xmlns:a16="http://schemas.microsoft.com/office/drawing/2014/main" id="{E1A914A7-B01B-4E24-95D8-004BFA96F848}"/>
               </a:ext>
             </a:extLst>
           </p:cNvPr>
@@ -9929,7 +10636,7 @@
     </p:spTree>
     <p:extLst>
       <p:ext uri="{BB962C8B-B14F-4D97-AF65-F5344CB8AC3E}">
-        <p14:creationId xmlns:p14="http://schemas.microsoft.com/office/powerpoint/2010/main" val="126839133"/>
+        <p14:creationId xmlns:p14="http://schemas.microsoft.com/office/powerpoint/2010/main" val="2052747319"/>
       </p:ext>
     </p:extLst>
   </p:cSld>
@@ -9960,7 +10667,7 @@
           <p:cNvPr id="7" name="">
             <a:extLst xmlns:a="http://schemas.openxmlformats.org/drawingml/2006/main">
               <a:ext uri="{FF2B5EF4-FFF2-40B4-BE49-F238E27FC236}">
-                <a16:creationId xmlns:a16="http://schemas.microsoft.com/office/drawing/2014/main" id="{6910C709-17CF-4B22-9123-9ED67AA7A13E}"/>
+                <a16:creationId xmlns:a16="http://schemas.microsoft.com/office/drawing/2014/main" id="{9716AD96-2002-401C-9CB3-92B4D4510229}"/>
               </a:ext>
             </a:extLst>
           </p:cNvPr>
@@ -10010,7 +10717,7 @@
           <p:cNvPr id="2" name="">
             <a:extLst xmlns:a="http://schemas.openxmlformats.org/drawingml/2006/main">
               <a:ext uri="{FF2B5EF4-FFF2-40B4-BE49-F238E27FC236}">
-                <a16:creationId xmlns:a16="http://schemas.microsoft.com/office/drawing/2014/main" id="{D76178F2-12F1-4D65-B67E-ACCBBA76B62D}"/>
+                <a16:creationId xmlns:a16="http://schemas.microsoft.com/office/drawing/2014/main" id="{33995700-5E99-47F4-B5CA-7EF7576CC8A8}"/>
               </a:ext>
             </a:extLst>
           </p:cNvPr>
@@ -10060,7 +10767,7 @@
           <p:cNvPr id="3" name="">
             <a:extLst xmlns:a="http://schemas.openxmlformats.org/drawingml/2006/main">
               <a:ext uri="{FF2B5EF4-FFF2-40B4-BE49-F238E27FC236}">
-                <a16:creationId xmlns:a16="http://schemas.microsoft.com/office/drawing/2014/main" id="{CCA03D49-EBA7-421C-8B02-680EB3DAADF8}"/>
+                <a16:creationId xmlns:a16="http://schemas.microsoft.com/office/drawing/2014/main" id="{2865BE3A-9C85-4257-A789-508CEE6356A2}"/>
               </a:ext>
             </a:extLst>
           </p:cNvPr>
@@ -10093,7 +10800,7 @@
           <p:cNvPr id="4" name="">
             <a:extLst xmlns:a="http://schemas.openxmlformats.org/drawingml/2006/main">
               <a:ext uri="{FF2B5EF4-FFF2-40B4-BE49-F238E27FC236}">
-                <a16:creationId xmlns:a16="http://schemas.microsoft.com/office/drawing/2014/main" id="{066CBF21-6DF8-413D-804A-DB3D168CCCD1}"/>
+                <a16:creationId xmlns:a16="http://schemas.microsoft.com/office/drawing/2014/main" id="{B00D6116-FC67-464F-A8C1-17432D95326F}"/>
               </a:ext>
             </a:extLst>
           </p:cNvPr>
@@ -10143,7 +10850,7 @@
           <p:cNvPr id="5" name="">
             <a:extLst xmlns:a="http://schemas.openxmlformats.org/drawingml/2006/main">
               <a:ext uri="{FF2B5EF4-FFF2-40B4-BE49-F238E27FC236}">
-                <a16:creationId xmlns:a16="http://schemas.microsoft.com/office/drawing/2014/main" id="{BB662F27-1B7A-4DF7-BD5E-CE40BBD4C910}"/>
+                <a16:creationId xmlns:a16="http://schemas.microsoft.com/office/drawing/2014/main" id="{9EEBE0D5-DD67-49B7-846A-32F43292AEFC}"/>
               </a:ext>
             </a:extLst>
           </p:cNvPr>
@@ -10197,7 +10904,7 @@
           <p:nvPr/>
         </p:nvPicPr>
         <p:blipFill>
-          <a:blip xmlns:r="http://schemas.openxmlformats.org/officeDocument/2006/relationships" xmlns:a="http://schemas.openxmlformats.org/drawingml/2006/main" r:embed="R1bab65d9ffb743af"/>
+          <a:blip xmlns:r="http://schemas.openxmlformats.org/officeDocument/2006/relationships" xmlns:a="http://schemas.openxmlformats.org/drawingml/2006/main" r:embed="R363e1f0938ed479a"/>
           <a:stretch xmlns:a="http://schemas.openxmlformats.org/drawingml/2006/main"/>
         </p:blipFill>
         <p:spPr>
@@ -10213,7 +10920,7 @@
     </p:spTree>
     <p:extLst>
       <p:ext uri="{BB962C8B-B14F-4D97-AF65-F5344CB8AC3E}">
-        <p14:creationId xmlns:p14="http://schemas.microsoft.com/office/powerpoint/2010/main" val="1374422175"/>
+        <p14:creationId xmlns:p14="http://schemas.microsoft.com/office/powerpoint/2010/main" val="1544891782"/>
       </p:ext>
     </p:extLst>
   </p:cSld>
@@ -10244,7 +10951,7 @@
           <p:cNvPr id="19" name="">
             <a:extLst xmlns:a="http://schemas.openxmlformats.org/drawingml/2006/main">
               <a:ext uri="{FF2B5EF4-FFF2-40B4-BE49-F238E27FC236}">
-                <a16:creationId xmlns:a16="http://schemas.microsoft.com/office/drawing/2014/main" id="{945E1B38-E8A5-40C3-BC26-98FD634551EB}"/>
+                <a16:creationId xmlns:a16="http://schemas.microsoft.com/office/drawing/2014/main" id="{35E97B19-2DBB-4A48-B0EE-C384790E48CF}"/>
               </a:ext>
             </a:extLst>
           </p:cNvPr>
@@ -10294,7 +11001,7 @@
           <p:cNvPr id="2" name="">
             <a:extLst xmlns:a="http://schemas.openxmlformats.org/drawingml/2006/main">
               <a:ext uri="{FF2B5EF4-FFF2-40B4-BE49-F238E27FC236}">
-                <a16:creationId xmlns:a16="http://schemas.microsoft.com/office/drawing/2014/main" id="{38B2750C-A6AB-4EF0-892E-52FDF8444954}"/>
+                <a16:creationId xmlns:a16="http://schemas.microsoft.com/office/drawing/2014/main" id="{005A1236-13F5-47EC-941F-BB11CBFE7992}"/>
               </a:ext>
             </a:extLst>
           </p:cNvPr>
@@ -10344,7 +11051,7 @@
           <p:cNvPr id="3" name="">
             <a:extLst xmlns:a="http://schemas.openxmlformats.org/drawingml/2006/main">
               <a:ext uri="{FF2B5EF4-FFF2-40B4-BE49-F238E27FC236}">
-                <a16:creationId xmlns:a16="http://schemas.microsoft.com/office/drawing/2014/main" id="{D439C9CE-92AE-4759-9559-2244E4282418}"/>
+                <a16:creationId xmlns:a16="http://schemas.microsoft.com/office/drawing/2014/main" id="{5339E996-0BE5-4B08-A4E4-A6E9B8A5C7D5}"/>
               </a:ext>
             </a:extLst>
           </p:cNvPr>
@@ -10377,7 +11084,7 @@
           <p:cNvPr id="4" name="">
             <a:extLst xmlns:a="http://schemas.openxmlformats.org/drawingml/2006/main">
               <a:ext uri="{FF2B5EF4-FFF2-40B4-BE49-F238E27FC236}">
-                <a16:creationId xmlns:a16="http://schemas.microsoft.com/office/drawing/2014/main" id="{5090569D-1210-4185-80A6-EC31238D9987}"/>
+                <a16:creationId xmlns:a16="http://schemas.microsoft.com/office/drawing/2014/main" id="{5D537E0C-D141-42B8-826A-D840BA305491}"/>
               </a:ext>
             </a:extLst>
           </p:cNvPr>
@@ -10427,7 +11134,7 @@
           <p:cNvPr id="5" name="">
             <a:extLst xmlns:a="http://schemas.openxmlformats.org/drawingml/2006/main">
               <a:ext uri="{FF2B5EF4-FFF2-40B4-BE49-F238E27FC236}">
-                <a16:creationId xmlns:a16="http://schemas.microsoft.com/office/drawing/2014/main" id="{CE8940FD-E491-432C-823A-1878DA65A515}"/>
+                <a16:creationId xmlns:a16="http://schemas.microsoft.com/office/drawing/2014/main" id="{3D33983E-9978-468A-88AC-0F430ED2925D}"/>
               </a:ext>
             </a:extLst>
           </p:cNvPr>
@@ -10481,7 +11188,7 @@
           <p:nvPr/>
         </p:nvPicPr>
         <p:blipFill>
-          <a:blip xmlns:r="http://schemas.openxmlformats.org/officeDocument/2006/relationships" xmlns:a="http://schemas.openxmlformats.org/drawingml/2006/main" r:embed="R140d16d5cc584e3f"/>
+          <a:blip xmlns:r="http://schemas.openxmlformats.org/officeDocument/2006/relationships" xmlns:a="http://schemas.openxmlformats.org/drawingml/2006/main" r:embed="Rdfddaaa6fc7d4997"/>
           <a:stretch xmlns:a="http://schemas.openxmlformats.org/drawingml/2006/main"/>
         </p:blipFill>
         <p:spPr>
@@ -10499,7 +11206,7 @@
           <p:cNvPr id="7" name="">
             <a:extLst xmlns:a="http://schemas.openxmlformats.org/drawingml/2006/main">
               <a:ext uri="{FF2B5EF4-FFF2-40B4-BE49-F238E27FC236}">
-                <a16:creationId xmlns:a16="http://schemas.microsoft.com/office/drawing/2014/main" id="{CB5BFA88-C943-48D4-9FB9-C104548BA3B7}"/>
+                <a16:creationId xmlns:a16="http://schemas.microsoft.com/office/drawing/2014/main" id="{44B6F07B-8956-4ECC-ACBA-18661BDBEF9D}"/>
               </a:ext>
             </a:extLst>
           </p:cNvPr>
@@ -10532,7 +11239,7 @@
           <p:cNvPr id="8" name="">
             <a:extLst xmlns:a="http://schemas.openxmlformats.org/drawingml/2006/main">
               <a:ext uri="{FF2B5EF4-FFF2-40B4-BE49-F238E27FC236}">
-                <a16:creationId xmlns:a16="http://schemas.microsoft.com/office/drawing/2014/main" id="{6EE3E5DA-7F2C-48D2-9DBE-36EBE88DEFAF}"/>
+                <a16:creationId xmlns:a16="http://schemas.microsoft.com/office/drawing/2014/main" id="{DD53BE3D-9DE4-4423-B21B-9AB015E05C1E}"/>
               </a:ext>
             </a:extLst>
           </p:cNvPr>
@@ -10582,7 +11289,7 @@
           <p:cNvPr id="9" name="">
             <a:extLst xmlns:a="http://schemas.openxmlformats.org/drawingml/2006/main">
               <a:ext uri="{FF2B5EF4-FFF2-40B4-BE49-F238E27FC236}">
-                <a16:creationId xmlns:a16="http://schemas.microsoft.com/office/drawing/2014/main" id="{7759514C-13E9-48D7-B390-A2E7D8FE53AC}"/>
+                <a16:creationId xmlns:a16="http://schemas.microsoft.com/office/drawing/2014/main" id="{0B69D903-B97A-4B29-BC23-EE0D8A235F66}"/>
               </a:ext>
             </a:extLst>
           </p:cNvPr>
@@ -10632,7 +11339,7 @@
           <p:cNvPr id="10" name="">
             <a:extLst xmlns:a="http://schemas.openxmlformats.org/drawingml/2006/main">
               <a:ext uri="{FF2B5EF4-FFF2-40B4-BE49-F238E27FC236}">
-                <a16:creationId xmlns:a16="http://schemas.microsoft.com/office/drawing/2014/main" id="{3EA13F8F-1F2B-402F-B377-E7C0AA7E8EDD}"/>
+                <a16:creationId xmlns:a16="http://schemas.microsoft.com/office/drawing/2014/main" id="{4B534D6A-0F47-40B5-B629-82A39E998446}"/>
               </a:ext>
             </a:extLst>
           </p:cNvPr>
@@ -10682,7 +11389,7 @@
           <p:cNvPr id="11" name="">
             <a:extLst xmlns:a="http://schemas.openxmlformats.org/drawingml/2006/main">
               <a:ext uri="{FF2B5EF4-FFF2-40B4-BE49-F238E27FC236}">
-                <a16:creationId xmlns:a16="http://schemas.microsoft.com/office/drawing/2014/main" id="{A21E9B1E-26D1-45D2-86AB-FCA18CCE5F49}"/>
+                <a16:creationId xmlns:a16="http://schemas.microsoft.com/office/drawing/2014/main" id="{618176B6-7F94-4E27-96D9-43A478A65D72}"/>
               </a:ext>
             </a:extLst>
           </p:cNvPr>
@@ -10732,7 +11439,7 @@
           <p:cNvPr id="12" name="">
             <a:extLst xmlns:a="http://schemas.openxmlformats.org/drawingml/2006/main">
               <a:ext uri="{FF2B5EF4-FFF2-40B4-BE49-F238E27FC236}">
-                <a16:creationId xmlns:a16="http://schemas.microsoft.com/office/drawing/2014/main" id="{14F73ED6-6842-4F8E-A9DA-60C17E9CFFCA}"/>
+                <a16:creationId xmlns:a16="http://schemas.microsoft.com/office/drawing/2014/main" id="{85E812A7-144C-41FD-9C2A-C488FCF5972C}"/>
               </a:ext>
             </a:extLst>
           </p:cNvPr>
@@ -10782,7 +11489,7 @@
           <p:cNvPr id="13" name="">
             <a:extLst xmlns:a="http://schemas.openxmlformats.org/drawingml/2006/main">
               <a:ext uri="{FF2B5EF4-FFF2-40B4-BE49-F238E27FC236}">
-                <a16:creationId xmlns:a16="http://schemas.microsoft.com/office/drawing/2014/main" id="{5C862BF4-B8C4-4FA9-9352-3BADB4F18202}"/>
+                <a16:creationId xmlns:a16="http://schemas.microsoft.com/office/drawing/2014/main" id="{38AF2D7B-F102-43D4-BAE7-87C4E0BE4FCE}"/>
               </a:ext>
             </a:extLst>
           </p:cNvPr>
@@ -10815,7 +11522,7 @@
           <p:cNvPr id="14" name="">
             <a:extLst xmlns:a="http://schemas.openxmlformats.org/drawingml/2006/main">
               <a:ext uri="{FF2B5EF4-FFF2-40B4-BE49-F238E27FC236}">
-                <a16:creationId xmlns:a16="http://schemas.microsoft.com/office/drawing/2014/main" id="{26EEE60E-6386-4626-BE04-BA14DA09152A}"/>
+                <a16:creationId xmlns:a16="http://schemas.microsoft.com/office/drawing/2014/main" id="{18BEB052-74BF-4C52-AF4A-F53494514679}"/>
               </a:ext>
             </a:extLst>
           </p:cNvPr>
@@ -10865,7 +11572,7 @@
           <p:cNvPr id="15" name="">
             <a:extLst xmlns:a="http://schemas.openxmlformats.org/drawingml/2006/main">
               <a:ext uri="{FF2B5EF4-FFF2-40B4-BE49-F238E27FC236}">
-                <a16:creationId xmlns:a16="http://schemas.microsoft.com/office/drawing/2014/main" id="{A30638E8-6C12-4A34-B420-4FB95BE02CDC}"/>
+                <a16:creationId xmlns:a16="http://schemas.microsoft.com/office/drawing/2014/main" id="{C7058B02-C4C0-4877-8B9C-A043E4DA2214}"/>
               </a:ext>
             </a:extLst>
           </p:cNvPr>
@@ -10915,7 +11622,7 @@
           <p:cNvPr id="16" name="">
             <a:extLst xmlns:a="http://schemas.openxmlformats.org/drawingml/2006/main">
               <a:ext uri="{FF2B5EF4-FFF2-40B4-BE49-F238E27FC236}">
-                <a16:creationId xmlns:a16="http://schemas.microsoft.com/office/drawing/2014/main" id="{C5160D1D-6713-4ADC-8CA9-EC53AF87DBAD}"/>
+                <a16:creationId xmlns:a16="http://schemas.microsoft.com/office/drawing/2014/main" id="{A4A4A880-BD1E-4FFC-AC01-9F27B2209AEC}"/>
               </a:ext>
             </a:extLst>
           </p:cNvPr>
@@ -10965,7 +11672,7 @@
           <p:cNvPr id="17" name="">
             <a:extLst xmlns:a="http://schemas.openxmlformats.org/drawingml/2006/main">
               <a:ext uri="{FF2B5EF4-FFF2-40B4-BE49-F238E27FC236}">
-                <a16:creationId xmlns:a16="http://schemas.microsoft.com/office/drawing/2014/main" id="{A93E4A94-523B-41A6-84F0-D87F6A616938}"/>
+                <a16:creationId xmlns:a16="http://schemas.microsoft.com/office/drawing/2014/main" id="{AE8673B4-DBA0-4D4A-90E3-D18FBC86329A}"/>
               </a:ext>
             </a:extLst>
           </p:cNvPr>
@@ -11015,7 +11722,7 @@
           <p:cNvPr id="18" name="">
             <a:extLst xmlns:a="http://schemas.openxmlformats.org/drawingml/2006/main">
               <a:ext uri="{FF2B5EF4-FFF2-40B4-BE49-F238E27FC236}">
-                <a16:creationId xmlns:a16="http://schemas.microsoft.com/office/drawing/2014/main" id="{B5B99A9D-069D-46FA-AFCF-C62A5E9767C3}"/>
+                <a16:creationId xmlns:a16="http://schemas.microsoft.com/office/drawing/2014/main" id="{AF724F35-F0CE-42C6-8740-CF1A50CB4DB7}"/>
               </a:ext>
             </a:extLst>
           </p:cNvPr>
@@ -11063,7 +11770,7 @@
     </p:spTree>
     <p:extLst>
       <p:ext uri="{BB962C8B-B14F-4D97-AF65-F5344CB8AC3E}">
-        <p14:creationId xmlns:p14="http://schemas.microsoft.com/office/powerpoint/2010/main" val="1590339344"/>
+        <p14:creationId xmlns:p14="http://schemas.microsoft.com/office/powerpoint/2010/main" val="1456846304"/>
       </p:ext>
     </p:extLst>
   </p:cSld>
@@ -11094,7 +11801,7 @@
           <p:cNvPr id="18" name="">
             <a:extLst xmlns:a="http://schemas.openxmlformats.org/drawingml/2006/main">
               <a:ext uri="{FF2B5EF4-FFF2-40B4-BE49-F238E27FC236}">
-                <a16:creationId xmlns:a16="http://schemas.microsoft.com/office/drawing/2014/main" id="{031523E1-7990-4974-B4D1-F9DC9E94A616}"/>
+                <a16:creationId xmlns:a16="http://schemas.microsoft.com/office/drawing/2014/main" id="{937E4195-1BEA-4BE1-BFFA-62402C3A38E1}"/>
               </a:ext>
             </a:extLst>
           </p:cNvPr>
@@ -11144,7 +11851,7 @@
           <p:cNvPr id="2" name="">
             <a:extLst xmlns:a="http://schemas.openxmlformats.org/drawingml/2006/main">
               <a:ext uri="{FF2B5EF4-FFF2-40B4-BE49-F238E27FC236}">
-                <a16:creationId xmlns:a16="http://schemas.microsoft.com/office/drawing/2014/main" id="{88F6CE58-6F93-4F88-8766-8F20303238CC}"/>
+                <a16:creationId xmlns:a16="http://schemas.microsoft.com/office/drawing/2014/main" id="{7063E5B1-482E-43C0-94B0-6D3A81FADD61}"/>
               </a:ext>
             </a:extLst>
           </p:cNvPr>
@@ -11194,7 +11901,7 @@
           <p:cNvPr id="3" name="">
             <a:extLst xmlns:a="http://schemas.openxmlformats.org/drawingml/2006/main">
               <a:ext uri="{FF2B5EF4-FFF2-40B4-BE49-F238E27FC236}">
-                <a16:creationId xmlns:a16="http://schemas.microsoft.com/office/drawing/2014/main" id="{22DB8D52-30F7-4365-9020-A96AC71F6A8E}"/>
+                <a16:creationId xmlns:a16="http://schemas.microsoft.com/office/drawing/2014/main" id="{64F848F1-367D-47FC-8CDD-AB6220196CDF}"/>
               </a:ext>
             </a:extLst>
           </p:cNvPr>
@@ -11227,7 +11934,7 @@
           <p:cNvPr id="4" name="">
             <a:extLst xmlns:a="http://schemas.openxmlformats.org/drawingml/2006/main">
               <a:ext uri="{FF2B5EF4-FFF2-40B4-BE49-F238E27FC236}">
-                <a16:creationId xmlns:a16="http://schemas.microsoft.com/office/drawing/2014/main" id="{41EAFDD7-3B33-4F82-9EB5-B43400A013C6}"/>
+                <a16:creationId xmlns:a16="http://schemas.microsoft.com/office/drawing/2014/main" id="{D3F1DC45-B08B-41D4-9E87-CADC5E69E32F}"/>
               </a:ext>
             </a:extLst>
           </p:cNvPr>
@@ -11277,7 +11984,7 @@
           <p:cNvPr id="5" name="">
             <a:extLst xmlns:a="http://schemas.openxmlformats.org/drawingml/2006/main">
               <a:ext uri="{FF2B5EF4-FFF2-40B4-BE49-F238E27FC236}">
-                <a16:creationId xmlns:a16="http://schemas.microsoft.com/office/drawing/2014/main" id="{909D80F6-845C-41C2-B883-A14280DAAAED}"/>
+                <a16:creationId xmlns:a16="http://schemas.microsoft.com/office/drawing/2014/main" id="{19FBD805-58B2-4E7D-BDA2-E2ADDDA46F9D}"/>
               </a:ext>
             </a:extLst>
           </p:cNvPr>
@@ -11331,7 +12038,7 @@
           <p:nvPr/>
         </p:nvPicPr>
         <p:blipFill>
-          <a:blip xmlns:r="http://schemas.openxmlformats.org/officeDocument/2006/relationships" xmlns:a="http://schemas.openxmlformats.org/drawingml/2006/main" r:embed="R69236746c4604c26"/>
+          <a:blip xmlns:r="http://schemas.openxmlformats.org/officeDocument/2006/relationships" xmlns:a="http://schemas.openxmlformats.org/drawingml/2006/main" r:embed="Rbd458f11bb344fa5"/>
           <a:stretch xmlns:a="http://schemas.openxmlformats.org/drawingml/2006/main"/>
         </p:blipFill>
         <p:spPr>
@@ -11349,7 +12056,7 @@
           <p:cNvPr id="7" name="">
             <a:extLst xmlns:a="http://schemas.openxmlformats.org/drawingml/2006/main">
               <a:ext uri="{FF2B5EF4-FFF2-40B4-BE49-F238E27FC236}">
-                <a16:creationId xmlns:a16="http://schemas.microsoft.com/office/drawing/2014/main" id="{5AF9FB51-132A-4B79-BDC9-ACC1944B7C64}"/>
+                <a16:creationId xmlns:a16="http://schemas.microsoft.com/office/drawing/2014/main" id="{91EB09EC-729D-4D42-9911-64C80F65F8EF}"/>
               </a:ext>
             </a:extLst>
           </p:cNvPr>
@@ -11382,7 +12089,7 @@
           <p:cNvPr id="8" name="">
             <a:extLst xmlns:a="http://schemas.openxmlformats.org/drawingml/2006/main">
               <a:ext uri="{FF2B5EF4-FFF2-40B4-BE49-F238E27FC236}">
-                <a16:creationId xmlns:a16="http://schemas.microsoft.com/office/drawing/2014/main" id="{C3A27EAD-3445-406A-B456-79FA68069EFF}"/>
+                <a16:creationId xmlns:a16="http://schemas.microsoft.com/office/drawing/2014/main" id="{2D6545E6-9B33-497F-B7CB-45F42E2537CB}"/>
               </a:ext>
             </a:extLst>
           </p:cNvPr>
@@ -11432,7 +12139,7 @@
           <p:cNvPr id="9" name="">
             <a:extLst xmlns:a="http://schemas.openxmlformats.org/drawingml/2006/main">
               <a:ext uri="{FF2B5EF4-FFF2-40B4-BE49-F238E27FC236}">
-                <a16:creationId xmlns:a16="http://schemas.microsoft.com/office/drawing/2014/main" id="{FE312AF2-BD4A-49D3-A20E-28D5E3C70FCA}"/>
+                <a16:creationId xmlns:a16="http://schemas.microsoft.com/office/drawing/2014/main" id="{3BF86C6E-5346-4C90-9866-D86DD01694A7}"/>
               </a:ext>
             </a:extLst>
           </p:cNvPr>
@@ -11482,7 +12189,7 @@
           <p:cNvPr id="10" name="">
             <a:extLst xmlns:a="http://schemas.openxmlformats.org/drawingml/2006/main">
               <a:ext uri="{FF2B5EF4-FFF2-40B4-BE49-F238E27FC236}">
-                <a16:creationId xmlns:a16="http://schemas.microsoft.com/office/drawing/2014/main" id="{15552BF4-4CAA-482B-AB46-0CEF3DECB937}"/>
+                <a16:creationId xmlns:a16="http://schemas.microsoft.com/office/drawing/2014/main" id="{DB5B093C-1DF2-4863-A7A5-A594BDF9DE98}"/>
               </a:ext>
             </a:extLst>
           </p:cNvPr>
@@ -11532,7 +12239,7 @@
           <p:cNvPr id="11" name="">
             <a:extLst xmlns:a="http://schemas.openxmlformats.org/drawingml/2006/main">
               <a:ext uri="{FF2B5EF4-FFF2-40B4-BE49-F238E27FC236}">
-                <a16:creationId xmlns:a16="http://schemas.microsoft.com/office/drawing/2014/main" id="{B4082048-FEE3-4F3B-96EC-6542CF3D4626}"/>
+                <a16:creationId xmlns:a16="http://schemas.microsoft.com/office/drawing/2014/main" id="{23CC1E04-668E-4E8C-92EF-E1758E95A791}"/>
               </a:ext>
             </a:extLst>
           </p:cNvPr>
@@ -11582,7 +12289,7 @@
           <p:cNvPr id="12" name="">
             <a:extLst xmlns:a="http://schemas.openxmlformats.org/drawingml/2006/main">
               <a:ext uri="{FF2B5EF4-FFF2-40B4-BE49-F238E27FC236}">
-                <a16:creationId xmlns:a16="http://schemas.microsoft.com/office/drawing/2014/main" id="{E88E07B6-3DD0-41D0-B9AA-DFBEF4BC6245}"/>
+                <a16:creationId xmlns:a16="http://schemas.microsoft.com/office/drawing/2014/main" id="{EEEBF619-18B7-4859-B92A-F0F745405E4A}"/>
               </a:ext>
             </a:extLst>
           </p:cNvPr>
@@ -11632,7 +12339,7 @@
           <p:cNvPr id="13" name="">
             <a:extLst xmlns:a="http://schemas.openxmlformats.org/drawingml/2006/main">
               <a:ext uri="{FF2B5EF4-FFF2-40B4-BE49-F238E27FC236}">
-                <a16:creationId xmlns:a16="http://schemas.microsoft.com/office/drawing/2014/main" id="{1E65BC8C-2404-4808-B621-226A1ECB79C3}"/>
+                <a16:creationId xmlns:a16="http://schemas.microsoft.com/office/drawing/2014/main" id="{4A88AD2F-4CED-404E-9EA6-AFEDC1E2FCC9}"/>
               </a:ext>
             </a:extLst>
           </p:cNvPr>
@@ -11682,7 +12389,7 @@
           <p:cNvPr id="14" name="">
             <a:extLst xmlns:a="http://schemas.openxmlformats.org/drawingml/2006/main">
               <a:ext uri="{FF2B5EF4-FFF2-40B4-BE49-F238E27FC236}">
-                <a16:creationId xmlns:a16="http://schemas.microsoft.com/office/drawing/2014/main" id="{ECB136C0-9508-4123-8C97-824C9F53383C}"/>
+                <a16:creationId xmlns:a16="http://schemas.microsoft.com/office/drawing/2014/main" id="{B12241DB-BE08-40E6-9378-B36E3B50097D}"/>
               </a:ext>
             </a:extLst>
           </p:cNvPr>
@@ -11732,7 +12439,7 @@
           <p:cNvPr id="15" name="">
             <a:extLst xmlns:a="http://schemas.openxmlformats.org/drawingml/2006/main">
               <a:ext uri="{FF2B5EF4-FFF2-40B4-BE49-F238E27FC236}">
-                <a16:creationId xmlns:a16="http://schemas.microsoft.com/office/drawing/2014/main" id="{1A58DC9C-F1E1-453B-9624-1D0A8368D7EB}"/>
+                <a16:creationId xmlns:a16="http://schemas.microsoft.com/office/drawing/2014/main" id="{6B100B62-55FB-4B75-B343-75FCCC8AA2F5}"/>
               </a:ext>
             </a:extLst>
           </p:cNvPr>
@@ -11782,7 +12489,7 @@
           <p:cNvPr id="16" name="">
             <a:extLst xmlns:a="http://schemas.openxmlformats.org/drawingml/2006/main">
               <a:ext uri="{FF2B5EF4-FFF2-40B4-BE49-F238E27FC236}">
-                <a16:creationId xmlns:a16="http://schemas.microsoft.com/office/drawing/2014/main" id="{BE6ADE9D-4207-468C-AA94-A2D677F4960E}"/>
+                <a16:creationId xmlns:a16="http://schemas.microsoft.com/office/drawing/2014/main" id="{EB3C6C17-30C0-49F2-842B-100EBAB09D86}"/>
               </a:ext>
             </a:extLst>
           </p:cNvPr>
@@ -11832,7 +12539,7 @@
           <p:cNvPr id="17" name="">
             <a:extLst xmlns:a="http://schemas.openxmlformats.org/drawingml/2006/main">
               <a:ext uri="{FF2B5EF4-FFF2-40B4-BE49-F238E27FC236}">
-                <a16:creationId xmlns:a16="http://schemas.microsoft.com/office/drawing/2014/main" id="{C1E5BC7F-01C1-46B4-8D78-082FC8E79E69}"/>
+                <a16:creationId xmlns:a16="http://schemas.microsoft.com/office/drawing/2014/main" id="{525BF7EE-4275-4363-A7E1-A24C384421B5}"/>
               </a:ext>
             </a:extLst>
           </p:cNvPr>
@@ -11880,7 +12587,7 @@
     </p:spTree>
     <p:extLst>
       <p:ext uri="{BB962C8B-B14F-4D97-AF65-F5344CB8AC3E}">
-        <p14:creationId xmlns:p14="http://schemas.microsoft.com/office/powerpoint/2010/main" val="1101123996"/>
+        <p14:creationId xmlns:p14="http://schemas.microsoft.com/office/powerpoint/2010/main" val="1785445312"/>
       </p:ext>
     </p:extLst>
   </p:cSld>
@@ -11911,7 +12618,7 @@
           <p:cNvPr id="23" name="">
             <a:extLst xmlns:a="http://schemas.openxmlformats.org/drawingml/2006/main">
               <a:ext uri="{FF2B5EF4-FFF2-40B4-BE49-F238E27FC236}">
-                <a16:creationId xmlns:a16="http://schemas.microsoft.com/office/drawing/2014/main" id="{9DC7348E-2D30-4677-B85D-4147E8D746A0}"/>
+                <a16:creationId xmlns:a16="http://schemas.microsoft.com/office/drawing/2014/main" id="{57B191F9-49B1-46FD-BF0F-AEC0E1FECE8F}"/>
               </a:ext>
             </a:extLst>
           </p:cNvPr>
@@ -11961,7 +12668,7 @@
           <p:cNvPr id="2" name="">
             <a:extLst xmlns:a="http://schemas.openxmlformats.org/drawingml/2006/main">
               <a:ext uri="{FF2B5EF4-FFF2-40B4-BE49-F238E27FC236}">
-                <a16:creationId xmlns:a16="http://schemas.microsoft.com/office/drawing/2014/main" id="{2B9751F2-FA73-424B-88F9-623B5290B602}"/>
+                <a16:creationId xmlns:a16="http://schemas.microsoft.com/office/drawing/2014/main" id="{3AD47E79-E59E-4F13-8260-627BA10E899C}"/>
               </a:ext>
             </a:extLst>
           </p:cNvPr>
@@ -12011,7 +12718,7 @@
           <p:cNvPr id="3" name="">
             <a:extLst xmlns:a="http://schemas.openxmlformats.org/drawingml/2006/main">
               <a:ext uri="{FF2B5EF4-FFF2-40B4-BE49-F238E27FC236}">
-                <a16:creationId xmlns:a16="http://schemas.microsoft.com/office/drawing/2014/main" id="{C19EFF45-F279-46A6-BC0B-1752E023940A}"/>
+                <a16:creationId xmlns:a16="http://schemas.microsoft.com/office/drawing/2014/main" id="{2468AC12-B009-4D13-B86D-DA62A634398D}"/>
               </a:ext>
             </a:extLst>
           </p:cNvPr>
@@ -12044,7 +12751,7 @@
           <p:cNvPr id="4" name="">
             <a:extLst xmlns:a="http://schemas.openxmlformats.org/drawingml/2006/main">
               <a:ext uri="{FF2B5EF4-FFF2-40B4-BE49-F238E27FC236}">
-                <a16:creationId xmlns:a16="http://schemas.microsoft.com/office/drawing/2014/main" id="{1CBFA95B-1DA6-4FE6-9073-70E247020F9F}"/>
+                <a16:creationId xmlns:a16="http://schemas.microsoft.com/office/drawing/2014/main" id="{237BAD00-D300-4D1A-880F-BC7A7C7613C3}"/>
               </a:ext>
             </a:extLst>
           </p:cNvPr>
@@ -12094,7 +12801,7 @@
           <p:cNvPr id="5" name="">
             <a:extLst xmlns:a="http://schemas.openxmlformats.org/drawingml/2006/main">
               <a:ext uri="{FF2B5EF4-FFF2-40B4-BE49-F238E27FC236}">
-                <a16:creationId xmlns:a16="http://schemas.microsoft.com/office/drawing/2014/main" id="{F6D7A641-170C-46B1-BDDE-02267761B7A5}"/>
+                <a16:creationId xmlns:a16="http://schemas.microsoft.com/office/drawing/2014/main" id="{E98AE7A9-4815-460F-A18F-4F2B8A36789F}"/>
               </a:ext>
             </a:extLst>
           </p:cNvPr>
@@ -12144,7 +12851,7 @@
           <p:cNvPr id="6" name="">
             <a:extLst xmlns:a="http://schemas.openxmlformats.org/drawingml/2006/main">
               <a:ext uri="{FF2B5EF4-FFF2-40B4-BE49-F238E27FC236}">
-                <a16:creationId xmlns:a16="http://schemas.microsoft.com/office/drawing/2014/main" id="{733E3943-1AED-4C39-8D73-C1427F6A9645}"/>
+                <a16:creationId xmlns:a16="http://schemas.microsoft.com/office/drawing/2014/main" id="{0DCCCA2B-D0EF-4411-A031-86DC52F56CC7}"/>
               </a:ext>
             </a:extLst>
           </p:cNvPr>
@@ -12177,7 +12884,7 @@
           <p:cNvPr id="7" name="">
             <a:extLst xmlns:a="http://schemas.openxmlformats.org/drawingml/2006/main">
               <a:ext uri="{FF2B5EF4-FFF2-40B4-BE49-F238E27FC236}">
-                <a16:creationId xmlns:a16="http://schemas.microsoft.com/office/drawing/2014/main" id="{06977885-0C30-48A3-9100-1141392EFE34}"/>
+                <a16:creationId xmlns:a16="http://schemas.microsoft.com/office/drawing/2014/main" id="{682DDC3A-C197-49D0-8588-BB218F847EBA}"/>
               </a:ext>
             </a:extLst>
           </p:cNvPr>
@@ -12227,7 +12934,7 @@
           <p:cNvPr id="8" name="">
             <a:extLst xmlns:a="http://schemas.openxmlformats.org/drawingml/2006/main">
               <a:ext uri="{FF2B5EF4-FFF2-40B4-BE49-F238E27FC236}">
-                <a16:creationId xmlns:a16="http://schemas.microsoft.com/office/drawing/2014/main" id="{17CF1790-EE66-4B86-BBBB-CF01A0490E67}"/>
+                <a16:creationId xmlns:a16="http://schemas.microsoft.com/office/drawing/2014/main" id="{AF2B25C4-1745-49EE-B9D1-DF93E2B60BB2}"/>
               </a:ext>
             </a:extLst>
           </p:cNvPr>
@@ -12260,7 +12967,7 @@
           <p:cNvPr id="9" name="">
             <a:extLst xmlns:a="http://schemas.openxmlformats.org/drawingml/2006/main">
               <a:ext uri="{FF2B5EF4-FFF2-40B4-BE49-F238E27FC236}">
-                <a16:creationId xmlns:a16="http://schemas.microsoft.com/office/drawing/2014/main" id="{F964F1EB-71B6-4FA4-8782-6B15AA524800}"/>
+                <a16:creationId xmlns:a16="http://schemas.microsoft.com/office/drawing/2014/main" id="{59683345-0730-46CA-994A-187FB0898A71}"/>
               </a:ext>
             </a:extLst>
           </p:cNvPr>
@@ -12310,7 +13017,7 @@
           <p:cNvPr id="10" name="">
             <a:extLst xmlns:a="http://schemas.openxmlformats.org/drawingml/2006/main">
               <a:ext uri="{FF2B5EF4-FFF2-40B4-BE49-F238E27FC236}">
-                <a16:creationId xmlns:a16="http://schemas.microsoft.com/office/drawing/2014/main" id="{0BA005F8-F35D-4D53-A640-0AF0E92E8C64}"/>
+                <a16:creationId xmlns:a16="http://schemas.microsoft.com/office/drawing/2014/main" id="{9715CA78-67A2-45B3-BEDF-74578821B706}"/>
               </a:ext>
             </a:extLst>
           </p:cNvPr>
@@ -12343,7 +13050,7 @@
           <p:cNvPr id="11" name="">
             <a:extLst xmlns:a="http://schemas.openxmlformats.org/drawingml/2006/main">
               <a:ext uri="{FF2B5EF4-FFF2-40B4-BE49-F238E27FC236}">
-                <a16:creationId xmlns:a16="http://schemas.microsoft.com/office/drawing/2014/main" id="{0DFA0B6A-5BA3-49F7-ADA3-00DD2FE5501E}"/>
+                <a16:creationId xmlns:a16="http://schemas.microsoft.com/office/drawing/2014/main" id="{8D9A98CA-06D9-48A8-BC85-6E9160B48582}"/>
               </a:ext>
             </a:extLst>
           </p:cNvPr>
@@ -12393,7 +13100,7 @@
           <p:cNvPr id="12" name="">
             <a:extLst xmlns:a="http://schemas.openxmlformats.org/drawingml/2006/main">
               <a:ext uri="{FF2B5EF4-FFF2-40B4-BE49-F238E27FC236}">
-                <a16:creationId xmlns:a16="http://schemas.microsoft.com/office/drawing/2014/main" id="{E19917A3-F213-4B5C-AB3F-BF420302CD59}"/>
+                <a16:creationId xmlns:a16="http://schemas.microsoft.com/office/drawing/2014/main" id="{FBC37D3D-2C5A-4A5F-85FE-DE5815C21021}"/>
               </a:ext>
             </a:extLst>
           </p:cNvPr>
@@ -12426,7 +13133,7 @@
           <p:cNvPr id="13" name="">
             <a:extLst xmlns:a="http://schemas.openxmlformats.org/drawingml/2006/main">
               <a:ext uri="{FF2B5EF4-FFF2-40B4-BE49-F238E27FC236}">
-                <a16:creationId xmlns:a16="http://schemas.microsoft.com/office/drawing/2014/main" id="{5C0BA90E-A68B-4562-8CBB-FBCCAD8E772D}"/>
+                <a16:creationId xmlns:a16="http://schemas.microsoft.com/office/drawing/2014/main" id="{593CD1B8-8427-4823-B0A3-E1BCAB55720E}"/>
               </a:ext>
             </a:extLst>
           </p:cNvPr>
@@ -12476,7 +13183,7 @@
           <p:cNvPr id="14" name="">
             <a:extLst xmlns:a="http://schemas.openxmlformats.org/drawingml/2006/main">
               <a:ext uri="{FF2B5EF4-FFF2-40B4-BE49-F238E27FC236}">
-                <a16:creationId xmlns:a16="http://schemas.microsoft.com/office/drawing/2014/main" id="{7F4ACB2C-D07A-48CF-B13D-E5FE1E753AE6}"/>
+                <a16:creationId xmlns:a16="http://schemas.microsoft.com/office/drawing/2014/main" id="{5736E3B3-E274-415D-A232-5346814CB86F}"/>
               </a:ext>
             </a:extLst>
           </p:cNvPr>
@@ -12509,7 +13216,7 @@
           <p:cNvPr id="15" name="">
             <a:extLst xmlns:a="http://schemas.openxmlformats.org/drawingml/2006/main">
               <a:ext uri="{FF2B5EF4-FFF2-40B4-BE49-F238E27FC236}">
-                <a16:creationId xmlns:a16="http://schemas.microsoft.com/office/drawing/2014/main" id="{6395BE87-6134-4670-A8C6-3B66B04DC36E}"/>
+                <a16:creationId xmlns:a16="http://schemas.microsoft.com/office/drawing/2014/main" id="{2C16FEF7-B495-439C-A264-41ABA6466F2A}"/>
               </a:ext>
             </a:extLst>
           </p:cNvPr>
@@ -12559,7 +13266,7 @@
           <p:cNvPr id="16" name="">
             <a:extLst xmlns:a="http://schemas.openxmlformats.org/drawingml/2006/main">
               <a:ext uri="{FF2B5EF4-FFF2-40B4-BE49-F238E27FC236}">
-                <a16:creationId xmlns:a16="http://schemas.microsoft.com/office/drawing/2014/main" id="{8D74BA44-B681-4586-A9E9-CCF34C381716}"/>
+                <a16:creationId xmlns:a16="http://schemas.microsoft.com/office/drawing/2014/main" id="{11273893-D33D-4D8E-963A-D041AF5021BD}"/>
               </a:ext>
             </a:extLst>
           </p:cNvPr>
@@ -12592,7 +13299,7 @@
           <p:cNvPr id="17" name="">
             <a:extLst xmlns:a="http://schemas.openxmlformats.org/drawingml/2006/main">
               <a:ext uri="{FF2B5EF4-FFF2-40B4-BE49-F238E27FC236}">
-                <a16:creationId xmlns:a16="http://schemas.microsoft.com/office/drawing/2014/main" id="{14F56862-CE69-4130-B1E6-3FBDF65889BA}"/>
+                <a16:creationId xmlns:a16="http://schemas.microsoft.com/office/drawing/2014/main" id="{B99D748F-CB5A-44C1-B646-7BD113E43530}"/>
               </a:ext>
             </a:extLst>
           </p:cNvPr>
@@ -12642,7 +13349,7 @@
           <p:cNvPr id="18" name="">
             <a:extLst xmlns:a="http://schemas.openxmlformats.org/drawingml/2006/main">
               <a:ext uri="{FF2B5EF4-FFF2-40B4-BE49-F238E27FC236}">
-                <a16:creationId xmlns:a16="http://schemas.microsoft.com/office/drawing/2014/main" id="{0EF7A6D3-F5D7-45BC-9BFD-40271E1D91EA}"/>
+                <a16:creationId xmlns:a16="http://schemas.microsoft.com/office/drawing/2014/main" id="{4326D5B8-F201-490B-BCF1-A58010640ECF}"/>
               </a:ext>
             </a:extLst>
           </p:cNvPr>
@@ -12675,7 +13382,7 @@
           <p:cNvPr id="19" name="">
             <a:extLst xmlns:a="http://schemas.openxmlformats.org/drawingml/2006/main">
               <a:ext uri="{FF2B5EF4-FFF2-40B4-BE49-F238E27FC236}">
-                <a16:creationId xmlns:a16="http://schemas.microsoft.com/office/drawing/2014/main" id="{B6A15E2F-2AAA-46F4-B0C9-2DFF1F5D0B10}"/>
+                <a16:creationId xmlns:a16="http://schemas.microsoft.com/office/drawing/2014/main" id="{59E80B8E-AAD9-460C-9234-58B637B26885}"/>
               </a:ext>
             </a:extLst>
           </p:cNvPr>
@@ -12725,7 +13432,7 @@
           <p:cNvPr id="20" name="">
             <a:extLst xmlns:a="http://schemas.openxmlformats.org/drawingml/2006/main">
               <a:ext uri="{FF2B5EF4-FFF2-40B4-BE49-F238E27FC236}">
-                <a16:creationId xmlns:a16="http://schemas.microsoft.com/office/drawing/2014/main" id="{D9EE05D5-B3B7-4371-8968-EDC635E132A5}"/>
+                <a16:creationId xmlns:a16="http://schemas.microsoft.com/office/drawing/2014/main" id="{593F4DAE-B79C-44B3-82BD-2A50375A5B63}"/>
               </a:ext>
             </a:extLst>
           </p:cNvPr>
@@ -12758,7 +13465,7 @@
           <p:cNvPr id="21" name="">
             <a:extLst xmlns:a="http://schemas.openxmlformats.org/drawingml/2006/main">
               <a:ext uri="{FF2B5EF4-FFF2-40B4-BE49-F238E27FC236}">
-                <a16:creationId xmlns:a16="http://schemas.microsoft.com/office/drawing/2014/main" id="{1AFF7971-83DC-4644-AFFB-1DE792B31DC9}"/>
+                <a16:creationId xmlns:a16="http://schemas.microsoft.com/office/drawing/2014/main" id="{CA0A503B-3589-4D4C-98D1-53388DB2364A}"/>
               </a:ext>
             </a:extLst>
           </p:cNvPr>
@@ -12808,7 +13515,7 @@
           <p:cNvPr id="22" name="">
             <a:extLst xmlns:a="http://schemas.openxmlformats.org/drawingml/2006/main">
               <a:ext uri="{FF2B5EF4-FFF2-40B4-BE49-F238E27FC236}">
-                <a16:creationId xmlns:a16="http://schemas.microsoft.com/office/drawing/2014/main" id="{1DBD1D82-E1BF-4A26-A0B9-98F12AC8925D}"/>
+                <a16:creationId xmlns:a16="http://schemas.microsoft.com/office/drawing/2014/main" id="{93CAC258-D697-471E-A887-EFBE9FADE3DE}"/>
               </a:ext>
             </a:extLst>
           </p:cNvPr>
@@ -12856,7 +13563,7 @@
     </p:spTree>
     <p:extLst>
       <p:ext uri="{BB962C8B-B14F-4D97-AF65-F5344CB8AC3E}">
-        <p14:creationId xmlns:p14="http://schemas.microsoft.com/office/powerpoint/2010/main" val="1912799294"/>
+        <p14:creationId xmlns:p14="http://schemas.microsoft.com/office/powerpoint/2010/main" val="1187828418"/>
       </p:ext>
     </p:extLst>
   </p:cSld>
@@ -12887,7 +13594,7 @@
           <p:cNvPr id="16" name="">
             <a:extLst xmlns:a="http://schemas.openxmlformats.org/drawingml/2006/main">
               <a:ext uri="{FF2B5EF4-FFF2-40B4-BE49-F238E27FC236}">
-                <a16:creationId xmlns:a16="http://schemas.microsoft.com/office/drawing/2014/main" id="{14799A1E-6B26-4ED2-AE90-0750FA9B54B8}"/>
+                <a16:creationId xmlns:a16="http://schemas.microsoft.com/office/drawing/2014/main" id="{8B73D5C2-BD80-4DB4-B3CF-3A52A33D9F88}"/>
               </a:ext>
             </a:extLst>
           </p:cNvPr>
@@ -12937,7 +13644,7 @@
           <p:cNvPr id="2" name="">
             <a:extLst xmlns:a="http://schemas.openxmlformats.org/drawingml/2006/main">
               <a:ext uri="{FF2B5EF4-FFF2-40B4-BE49-F238E27FC236}">
-                <a16:creationId xmlns:a16="http://schemas.microsoft.com/office/drawing/2014/main" id="{846954BF-6496-46A2-B251-784F90F01B68}"/>
+                <a16:creationId xmlns:a16="http://schemas.microsoft.com/office/drawing/2014/main" id="{A33E6292-6AC7-438F-8691-B49C52FB23AA}"/>
               </a:ext>
             </a:extLst>
           </p:cNvPr>
@@ -12987,7 +13694,7 @@
           <p:cNvPr id="3" name="">
             <a:extLst xmlns:a="http://schemas.openxmlformats.org/drawingml/2006/main">
               <a:ext uri="{FF2B5EF4-FFF2-40B4-BE49-F238E27FC236}">
-                <a16:creationId xmlns:a16="http://schemas.microsoft.com/office/drawing/2014/main" id="{66FF3C76-89A2-4562-B011-4CCFE655B4F0}"/>
+                <a16:creationId xmlns:a16="http://schemas.microsoft.com/office/drawing/2014/main" id="{20A2C69C-B140-4C7D-9EC8-3EB301A117AA}"/>
               </a:ext>
             </a:extLst>
           </p:cNvPr>
@@ -13020,7 +13727,7 @@
           <p:cNvPr id="4" name="">
             <a:extLst xmlns:a="http://schemas.openxmlformats.org/drawingml/2006/main">
               <a:ext uri="{FF2B5EF4-FFF2-40B4-BE49-F238E27FC236}">
-                <a16:creationId xmlns:a16="http://schemas.microsoft.com/office/drawing/2014/main" id="{5A1D2A84-F03D-41FB-B280-53B054A517B9}"/>
+                <a16:creationId xmlns:a16="http://schemas.microsoft.com/office/drawing/2014/main" id="{030DD448-03FB-4703-85E8-A825A30ED8C0}"/>
               </a:ext>
             </a:extLst>
           </p:cNvPr>
@@ -13070,7 +13777,7 @@
           <p:cNvPr id="5" name="">
             <a:extLst xmlns:a="http://schemas.openxmlformats.org/drawingml/2006/main">
               <a:ext uri="{FF2B5EF4-FFF2-40B4-BE49-F238E27FC236}">
-                <a16:creationId xmlns:a16="http://schemas.microsoft.com/office/drawing/2014/main" id="{1543E0B0-16E1-4391-8ACC-E2F34B9C8F1C}"/>
+                <a16:creationId xmlns:a16="http://schemas.microsoft.com/office/drawing/2014/main" id="{7EFF2566-1F66-4610-8231-F604C7CA5B62}"/>
               </a:ext>
             </a:extLst>
           </p:cNvPr>
@@ -13124,7 +13831,7 @@
           <p:nvPr/>
         </p:nvPicPr>
         <p:blipFill>
-          <a:blip xmlns:r="http://schemas.openxmlformats.org/officeDocument/2006/relationships" xmlns:a="http://schemas.openxmlformats.org/drawingml/2006/main" r:embed="Raf5c7afe44084615"/>
+          <a:blip xmlns:r="http://schemas.openxmlformats.org/officeDocument/2006/relationships" xmlns:a="http://schemas.openxmlformats.org/drawingml/2006/main" r:embed="R4751c8a75ad64b23"/>
           <a:stretch xmlns:a="http://schemas.openxmlformats.org/drawingml/2006/main"/>
         </p:blipFill>
         <p:spPr>
@@ -13142,7 +13849,7 @@
           <p:cNvPr id="7" name="">
             <a:extLst xmlns:a="http://schemas.openxmlformats.org/drawingml/2006/main">
               <a:ext uri="{FF2B5EF4-FFF2-40B4-BE49-F238E27FC236}">
-                <a16:creationId xmlns:a16="http://schemas.microsoft.com/office/drawing/2014/main" id="{A8425F4C-7FD6-4D4C-9C9B-DA1F7EDA6252}"/>
+                <a16:creationId xmlns:a16="http://schemas.microsoft.com/office/drawing/2014/main" id="{7ED5B8F3-B8E3-4E6D-A3A2-815E0CC0FFBD}"/>
               </a:ext>
             </a:extLst>
           </p:cNvPr>
@@ -13175,7 +13882,7 @@
           <p:cNvPr id="8" name="">
             <a:extLst xmlns:a="http://schemas.openxmlformats.org/drawingml/2006/main">
               <a:ext uri="{FF2B5EF4-FFF2-40B4-BE49-F238E27FC236}">
-                <a16:creationId xmlns:a16="http://schemas.microsoft.com/office/drawing/2014/main" id="{FA0FE63D-7824-4321-B8B4-6818D5880813}"/>
+                <a16:creationId xmlns:a16="http://schemas.microsoft.com/office/drawing/2014/main" id="{E08D685E-4897-4790-9199-83E6A1E8CC9B}"/>
               </a:ext>
             </a:extLst>
           </p:cNvPr>
@@ -13225,7 +13932,7 @@
           <p:cNvPr id="9" name="">
             <a:extLst xmlns:a="http://schemas.openxmlformats.org/drawingml/2006/main">
               <a:ext uri="{FF2B5EF4-FFF2-40B4-BE49-F238E27FC236}">
-                <a16:creationId xmlns:a16="http://schemas.microsoft.com/office/drawing/2014/main" id="{99A6A7B3-C80D-4B47-A4DA-D51DE2F5B4EB}"/>
+                <a16:creationId xmlns:a16="http://schemas.microsoft.com/office/drawing/2014/main" id="{D7D45556-8C12-4EE8-825F-8C069BDA6C9F}"/>
               </a:ext>
             </a:extLst>
           </p:cNvPr>
@@ -13258,7 +13965,7 @@
           <p:cNvPr id="10" name="">
             <a:extLst xmlns:a="http://schemas.openxmlformats.org/drawingml/2006/main">
               <a:ext uri="{FF2B5EF4-FFF2-40B4-BE49-F238E27FC236}">
-                <a16:creationId xmlns:a16="http://schemas.microsoft.com/office/drawing/2014/main" id="{432A18BB-5346-4D8F-ADBB-996F0F945FDB}"/>
+                <a16:creationId xmlns:a16="http://schemas.microsoft.com/office/drawing/2014/main" id="{BFEB1F03-2D6A-4059-B68B-FFBF43393A2A}"/>
               </a:ext>
             </a:extLst>
           </p:cNvPr>
@@ -13308,7 +14015,7 @@
           <p:cNvPr id="11" name="">
             <a:extLst xmlns:a="http://schemas.openxmlformats.org/drawingml/2006/main">
               <a:ext uri="{FF2B5EF4-FFF2-40B4-BE49-F238E27FC236}">
-                <a16:creationId xmlns:a16="http://schemas.microsoft.com/office/drawing/2014/main" id="{ED25B503-6902-42FB-A8B1-67DB38322DF8}"/>
+                <a16:creationId xmlns:a16="http://schemas.microsoft.com/office/drawing/2014/main" id="{726765AF-F36F-441B-8CDB-11C7A8732A72}"/>
               </a:ext>
             </a:extLst>
           </p:cNvPr>
@@ -13341,7 +14048,7 @@
           <p:cNvPr id="12" name="">
             <a:extLst xmlns:a="http://schemas.openxmlformats.org/drawingml/2006/main">
               <a:ext uri="{FF2B5EF4-FFF2-40B4-BE49-F238E27FC236}">
-                <a16:creationId xmlns:a16="http://schemas.microsoft.com/office/drawing/2014/main" id="{5ACC0CA3-AA61-400A-B2D5-B99BD96A2A03}"/>
+                <a16:creationId xmlns:a16="http://schemas.microsoft.com/office/drawing/2014/main" id="{EB777920-C9AF-4AAC-BFD3-A05686482A87}"/>
               </a:ext>
             </a:extLst>
           </p:cNvPr>
@@ -13391,7 +14098,7 @@
           <p:cNvPr id="13" name="">
             <a:extLst xmlns:a="http://schemas.openxmlformats.org/drawingml/2006/main">
               <a:ext uri="{FF2B5EF4-FFF2-40B4-BE49-F238E27FC236}">
-                <a16:creationId xmlns:a16="http://schemas.microsoft.com/office/drawing/2014/main" id="{773074F7-3BFA-447E-845C-19BF9DE60A26}"/>
+                <a16:creationId xmlns:a16="http://schemas.microsoft.com/office/drawing/2014/main" id="{74945755-241B-408D-8A77-CE6E975B433B}"/>
               </a:ext>
             </a:extLst>
           </p:cNvPr>
@@ -13424,7 +14131,7 @@
           <p:cNvPr id="14" name="">
             <a:extLst xmlns:a="http://schemas.openxmlformats.org/drawingml/2006/main">
               <a:ext uri="{FF2B5EF4-FFF2-40B4-BE49-F238E27FC236}">
-                <a16:creationId xmlns:a16="http://schemas.microsoft.com/office/drawing/2014/main" id="{21CD37BC-E3B5-48CA-B34A-0C8F38F4D15D}"/>
+                <a16:creationId xmlns:a16="http://schemas.microsoft.com/office/drawing/2014/main" id="{2BA41E1B-9BAA-428E-9941-EC78B4C05B5A}"/>
               </a:ext>
             </a:extLst>
           </p:cNvPr>
@@ -13474,7 +14181,7 @@
           <p:cNvPr id="15" name="">
             <a:extLst xmlns:a="http://schemas.openxmlformats.org/drawingml/2006/main">
               <a:ext uri="{FF2B5EF4-FFF2-40B4-BE49-F238E27FC236}">
-                <a16:creationId xmlns:a16="http://schemas.microsoft.com/office/drawing/2014/main" id="{300F76FC-E815-4B2A-ACDB-54B701EDFEBD}"/>
+                <a16:creationId xmlns:a16="http://schemas.microsoft.com/office/drawing/2014/main" id="{5FAD52E2-F09A-4283-8A53-1C4501D00E5A}"/>
               </a:ext>
             </a:extLst>
           </p:cNvPr>
@@ -13522,7 +14229,7 @@
     </p:spTree>
     <p:extLst>
       <p:ext uri="{BB962C8B-B14F-4D97-AF65-F5344CB8AC3E}">
-        <p14:creationId xmlns:p14="http://schemas.microsoft.com/office/powerpoint/2010/main" val="334413080"/>
+        <p14:creationId xmlns:p14="http://schemas.microsoft.com/office/powerpoint/2010/main" val="1381729245"/>
       </p:ext>
     </p:extLst>
   </p:cSld>
@@ -13553,7 +14260,7 @@
           <p:cNvPr id="7" name="">
             <a:extLst xmlns:a="http://schemas.openxmlformats.org/drawingml/2006/main">
               <a:ext uri="{FF2B5EF4-FFF2-40B4-BE49-F238E27FC236}">
-                <a16:creationId xmlns:a16="http://schemas.microsoft.com/office/drawing/2014/main" id="{AD271688-40F5-4A5A-B3D8-91BEB6D4CCD1}"/>
+                <a16:creationId xmlns:a16="http://schemas.microsoft.com/office/drawing/2014/main" id="{2AD591BC-75F0-42A8-9891-D809A4FFE7CD}"/>
               </a:ext>
             </a:extLst>
           </p:cNvPr>
@@ -13603,7 +14310,7 @@
           <p:cNvPr id="2" name="">
             <a:extLst xmlns:a="http://schemas.openxmlformats.org/drawingml/2006/main">
               <a:ext uri="{FF2B5EF4-FFF2-40B4-BE49-F238E27FC236}">
-                <a16:creationId xmlns:a16="http://schemas.microsoft.com/office/drawing/2014/main" id="{6E00FA76-2742-492E-B7C5-6EABE91CE6FF}"/>
+                <a16:creationId xmlns:a16="http://schemas.microsoft.com/office/drawing/2014/main" id="{50616A31-8F22-4C7E-85C0-498EB3C4EE1C}"/>
               </a:ext>
             </a:extLst>
           </p:cNvPr>
@@ -13653,7 +14360,7 @@
           <p:cNvPr id="3" name="">
             <a:extLst xmlns:a="http://schemas.openxmlformats.org/drawingml/2006/main">
               <a:ext uri="{FF2B5EF4-FFF2-40B4-BE49-F238E27FC236}">
-                <a16:creationId xmlns:a16="http://schemas.microsoft.com/office/drawing/2014/main" id="{5519691F-86A5-4550-AC5B-C1F967E0D466}"/>
+                <a16:creationId xmlns:a16="http://schemas.microsoft.com/office/drawing/2014/main" id="{FF9B8926-B19E-47A2-A8FA-64A8700F2CD0}"/>
               </a:ext>
             </a:extLst>
           </p:cNvPr>
@@ -13686,7 +14393,7 @@
           <p:cNvPr id="4" name="">
             <a:extLst xmlns:a="http://schemas.openxmlformats.org/drawingml/2006/main">
               <a:ext uri="{FF2B5EF4-FFF2-40B4-BE49-F238E27FC236}">
-                <a16:creationId xmlns:a16="http://schemas.microsoft.com/office/drawing/2014/main" id="{3F256EAF-4E42-46B5-83CB-8568D83C6BEA}"/>
+                <a16:creationId xmlns:a16="http://schemas.microsoft.com/office/drawing/2014/main" id="{1E7F4924-4A96-4D9A-B699-9BD12C3F29BC}"/>
               </a:ext>
             </a:extLst>
           </p:cNvPr>
@@ -13736,7 +14443,7 @@
           <p:cNvPr id="5" name="">
             <a:extLst xmlns:a="http://schemas.openxmlformats.org/drawingml/2006/main">
               <a:ext uri="{FF2B5EF4-FFF2-40B4-BE49-F238E27FC236}">
-                <a16:creationId xmlns:a16="http://schemas.microsoft.com/office/drawing/2014/main" id="{7E659268-6E80-47B3-B648-218013A6441A}"/>
+                <a16:creationId xmlns:a16="http://schemas.microsoft.com/office/drawing/2014/main" id="{8AC821BC-83EE-485D-B6BB-D35BCB76BF3E}"/>
               </a:ext>
             </a:extLst>
           </p:cNvPr>
@@ -13790,7 +14497,7 @@
           <p:nvPr/>
         </p:nvPicPr>
         <p:blipFill>
-          <a:blip xmlns:r="http://schemas.openxmlformats.org/officeDocument/2006/relationships" xmlns:a="http://schemas.openxmlformats.org/drawingml/2006/main" r:embed="Rd98572775def4e07"/>
+          <a:blip xmlns:r="http://schemas.openxmlformats.org/officeDocument/2006/relationships" xmlns:a="http://schemas.openxmlformats.org/drawingml/2006/main" r:embed="R0dc1bbc20cb9464e"/>
           <a:stretch xmlns:a="http://schemas.openxmlformats.org/drawingml/2006/main"/>
         </p:blipFill>
         <p:spPr>
@@ -13806,7 +14513,7 @@
     </p:spTree>
     <p:extLst>
       <p:ext uri="{BB962C8B-B14F-4D97-AF65-F5344CB8AC3E}">
-        <p14:creationId xmlns:p14="http://schemas.microsoft.com/office/powerpoint/2010/main" val="2006977098"/>
+        <p14:creationId xmlns:p14="http://schemas.microsoft.com/office/powerpoint/2010/main" val="1003947271"/>
       </p:ext>
     </p:extLst>
   </p:cSld>
@@ -13837,7 +14544,7 @@
           <p:cNvPr id="20" name="">
             <a:extLst xmlns:a="http://schemas.openxmlformats.org/drawingml/2006/main">
               <a:ext uri="{FF2B5EF4-FFF2-40B4-BE49-F238E27FC236}">
-                <a16:creationId xmlns:a16="http://schemas.microsoft.com/office/drawing/2014/main" id="{F4B79CCE-EF41-4F36-AE8E-E9E983EF68FD}"/>
+                <a16:creationId xmlns:a16="http://schemas.microsoft.com/office/drawing/2014/main" id="{15AF46B0-3096-4FCC-9206-E1DDF1B29600}"/>
               </a:ext>
             </a:extLst>
           </p:cNvPr>
@@ -13887,7 +14594,7 @@
           <p:cNvPr id="2" name="">
             <a:extLst xmlns:a="http://schemas.openxmlformats.org/drawingml/2006/main">
               <a:ext uri="{FF2B5EF4-FFF2-40B4-BE49-F238E27FC236}">
-                <a16:creationId xmlns:a16="http://schemas.microsoft.com/office/drawing/2014/main" id="{D2B45398-F520-4672-A659-87A1C0C1FB6D}"/>
+                <a16:creationId xmlns:a16="http://schemas.microsoft.com/office/drawing/2014/main" id="{CAFE8B64-DCBA-43A2-ADC9-BADB2395EA5D}"/>
               </a:ext>
             </a:extLst>
           </p:cNvPr>
@@ -13937,7 +14644,7 @@
           <p:cNvPr id="3" name="">
             <a:extLst xmlns:a="http://schemas.openxmlformats.org/drawingml/2006/main">
               <a:ext uri="{FF2B5EF4-FFF2-40B4-BE49-F238E27FC236}">
-                <a16:creationId xmlns:a16="http://schemas.microsoft.com/office/drawing/2014/main" id="{157B6C8B-9423-4071-A310-EEBE452F522B}"/>
+                <a16:creationId xmlns:a16="http://schemas.microsoft.com/office/drawing/2014/main" id="{2998F8A6-2F0C-4F02-8C64-76AA7226AA28}"/>
               </a:ext>
             </a:extLst>
           </p:cNvPr>
@@ -13970,7 +14677,7 @@
           <p:cNvPr id="4" name="">
             <a:extLst xmlns:a="http://schemas.openxmlformats.org/drawingml/2006/main">
               <a:ext uri="{FF2B5EF4-FFF2-40B4-BE49-F238E27FC236}">
-                <a16:creationId xmlns:a16="http://schemas.microsoft.com/office/drawing/2014/main" id="{86B33F7F-BDAA-4D9C-94C7-DFA5FF8C53A9}"/>
+                <a16:creationId xmlns:a16="http://schemas.microsoft.com/office/drawing/2014/main" id="{E3E864A1-8B75-40C9-897E-503F2866A15F}"/>
               </a:ext>
             </a:extLst>
           </p:cNvPr>
@@ -14020,7 +14727,7 @@
           <p:cNvPr id="5" name="">
             <a:extLst xmlns:a="http://schemas.openxmlformats.org/drawingml/2006/main">
               <a:ext uri="{FF2B5EF4-FFF2-40B4-BE49-F238E27FC236}">
-                <a16:creationId xmlns:a16="http://schemas.microsoft.com/office/drawing/2014/main" id="{BC9E8A28-23E0-436D-BA04-CB640F5869BD}"/>
+                <a16:creationId xmlns:a16="http://schemas.microsoft.com/office/drawing/2014/main" id="{5209FE38-FB65-452D-849E-2EBEB95C9993}"/>
               </a:ext>
             </a:extLst>
           </p:cNvPr>
@@ -14070,7 +14777,7 @@
           <p:cNvPr id="6" name="">
             <a:extLst xmlns:a="http://schemas.openxmlformats.org/drawingml/2006/main">
               <a:ext uri="{FF2B5EF4-FFF2-40B4-BE49-F238E27FC236}">
-                <a16:creationId xmlns:a16="http://schemas.microsoft.com/office/drawing/2014/main" id="{EC8F0F53-8787-4B94-9AD7-482F152E6D80}"/>
+                <a16:creationId xmlns:a16="http://schemas.microsoft.com/office/drawing/2014/main" id="{1862FB5C-C3E0-47B4-9E62-036CC9E9A54F}"/>
               </a:ext>
             </a:extLst>
           </p:cNvPr>
@@ -14103,7 +14810,7 @@
           <p:cNvPr id="7" name="">
             <a:extLst xmlns:a="http://schemas.openxmlformats.org/drawingml/2006/main">
               <a:ext uri="{FF2B5EF4-FFF2-40B4-BE49-F238E27FC236}">
-                <a16:creationId xmlns:a16="http://schemas.microsoft.com/office/drawing/2014/main" id="{E161A9ED-4427-4DB7-BC37-1041F06598E9}"/>
+                <a16:creationId xmlns:a16="http://schemas.microsoft.com/office/drawing/2014/main" id="{BB934AA3-01B9-4BC0-A2A3-CA4BFD0D841E}"/>
               </a:ext>
             </a:extLst>
           </p:cNvPr>
@@ -14153,7 +14860,7 @@
           <p:cNvPr id="8" name="">
             <a:extLst xmlns:a="http://schemas.openxmlformats.org/drawingml/2006/main">
               <a:ext uri="{FF2B5EF4-FFF2-40B4-BE49-F238E27FC236}">
-                <a16:creationId xmlns:a16="http://schemas.microsoft.com/office/drawing/2014/main" id="{63F67E23-8412-4F90-A3E5-FBCA376EA397}"/>
+                <a16:creationId xmlns:a16="http://schemas.microsoft.com/office/drawing/2014/main" id="{6A759DF6-EB2A-4CF6-B0BE-515EC054BB69}"/>
               </a:ext>
             </a:extLst>
           </p:cNvPr>
@@ -14203,7 +14910,7 @@
           <p:cNvPr id="9" name="">
             <a:extLst xmlns:a="http://schemas.openxmlformats.org/drawingml/2006/main">
               <a:ext uri="{FF2B5EF4-FFF2-40B4-BE49-F238E27FC236}">
-                <a16:creationId xmlns:a16="http://schemas.microsoft.com/office/drawing/2014/main" id="{765129FA-7BA2-4D0E-818E-400EE604C8CC}"/>
+                <a16:creationId xmlns:a16="http://schemas.microsoft.com/office/drawing/2014/main" id="{12E3BA02-D5E0-42B6-8072-0BD6C671FF5B}"/>
               </a:ext>
             </a:extLst>
           </p:cNvPr>
@@ -14253,7 +14960,7 @@
           <p:cNvPr id="10" name="">
             <a:extLst xmlns:a="http://schemas.openxmlformats.org/drawingml/2006/main">
               <a:ext uri="{FF2B5EF4-FFF2-40B4-BE49-F238E27FC236}">
-                <a16:creationId xmlns:a16="http://schemas.microsoft.com/office/drawing/2014/main" id="{77834F4E-C1C7-45DE-BE2F-75E6446AF0C2}"/>
+                <a16:creationId xmlns:a16="http://schemas.microsoft.com/office/drawing/2014/main" id="{1525ACF2-F050-4E1F-9BDC-F8A3206F8D70}"/>
               </a:ext>
             </a:extLst>
           </p:cNvPr>
@@ -14286,7 +14993,7 @@
           <p:cNvPr id="11" name="">
             <a:extLst xmlns:a="http://schemas.openxmlformats.org/drawingml/2006/main">
               <a:ext uri="{FF2B5EF4-FFF2-40B4-BE49-F238E27FC236}">
-                <a16:creationId xmlns:a16="http://schemas.microsoft.com/office/drawing/2014/main" id="{29CFBF86-CA2F-4641-A7F1-F0D9073F97C4}"/>
+                <a16:creationId xmlns:a16="http://schemas.microsoft.com/office/drawing/2014/main" id="{863D5B1A-53E4-414A-B3F3-4B64A79E6FF2}"/>
               </a:ext>
             </a:extLst>
           </p:cNvPr>
@@ -14336,7 +15043,7 @@
           <p:cNvPr id="12" name="">
             <a:extLst xmlns:a="http://schemas.openxmlformats.org/drawingml/2006/main">
               <a:ext uri="{FF2B5EF4-FFF2-40B4-BE49-F238E27FC236}">
-                <a16:creationId xmlns:a16="http://schemas.microsoft.com/office/drawing/2014/main" id="{AA55CF86-E1B2-4A6F-9D3D-D6CCD63E324C}"/>
+                <a16:creationId xmlns:a16="http://schemas.microsoft.com/office/drawing/2014/main" id="{FF176D49-0D34-4595-A5A0-A07468572B1A}"/>
               </a:ext>
             </a:extLst>
           </p:cNvPr>
@@ -14386,7 +15093,7 @@
           <p:cNvPr id="13" name="">
             <a:extLst xmlns:a="http://schemas.openxmlformats.org/drawingml/2006/main">
               <a:ext uri="{FF2B5EF4-FFF2-40B4-BE49-F238E27FC236}">
-                <a16:creationId xmlns:a16="http://schemas.microsoft.com/office/drawing/2014/main" id="{E43A9301-6385-41BC-B0CC-B23D09A4DA2E}"/>
+                <a16:creationId xmlns:a16="http://schemas.microsoft.com/office/drawing/2014/main" id="{2088F3ED-8196-449C-A6FE-62E3AEBFB025}"/>
               </a:ext>
             </a:extLst>
           </p:cNvPr>
@@ -14436,7 +15143,7 @@
           <p:cNvPr id="14" name="">
             <a:extLst xmlns:a="http://schemas.openxmlformats.org/drawingml/2006/main">
               <a:ext uri="{FF2B5EF4-FFF2-40B4-BE49-F238E27FC236}">
-                <a16:creationId xmlns:a16="http://schemas.microsoft.com/office/drawing/2014/main" id="{E3706038-B0D5-44C5-ACF8-078EEB6DE4B3}"/>
+                <a16:creationId xmlns:a16="http://schemas.microsoft.com/office/drawing/2014/main" id="{2B0E65E6-B38C-4FEC-8371-CC486127167A}"/>
               </a:ext>
             </a:extLst>
           </p:cNvPr>
@@ -14486,7 +15193,7 @@
           <p:cNvPr id="15" name="">
             <a:extLst xmlns:a="http://schemas.openxmlformats.org/drawingml/2006/main">
               <a:ext uri="{FF2B5EF4-FFF2-40B4-BE49-F238E27FC236}">
-                <a16:creationId xmlns:a16="http://schemas.microsoft.com/office/drawing/2014/main" id="{2C8440C1-8A00-4BBA-BA43-EBE9593AF832}"/>
+                <a16:creationId xmlns:a16="http://schemas.microsoft.com/office/drawing/2014/main" id="{3DE665EB-E422-48EA-826F-DFEA998A666C}"/>
               </a:ext>
             </a:extLst>
           </p:cNvPr>
@@ -14519,7 +15226,7 @@
           <p:cNvPr id="16" name="">
             <a:extLst xmlns:a="http://schemas.openxmlformats.org/drawingml/2006/main">
               <a:ext uri="{FF2B5EF4-FFF2-40B4-BE49-F238E27FC236}">
-                <a16:creationId xmlns:a16="http://schemas.microsoft.com/office/drawing/2014/main" id="{A6EC5E1C-1B7B-426A-B7D2-C096DB93542C}"/>
+                <a16:creationId xmlns:a16="http://schemas.microsoft.com/office/drawing/2014/main" id="{CF6283A8-73A1-4610-9D15-A6B029816F61}"/>
               </a:ext>
             </a:extLst>
           </p:cNvPr>
@@ -14569,7 +15276,7 @@
           <p:cNvPr id="17" name="">
             <a:extLst xmlns:a="http://schemas.openxmlformats.org/drawingml/2006/main">
               <a:ext uri="{FF2B5EF4-FFF2-40B4-BE49-F238E27FC236}">
-                <a16:creationId xmlns:a16="http://schemas.microsoft.com/office/drawing/2014/main" id="{B6C5096D-7AF7-4FF9-B82B-650EB5B1C03D}"/>
+                <a16:creationId xmlns:a16="http://schemas.microsoft.com/office/drawing/2014/main" id="{88C84EE2-D920-4A77-9589-F9B2E3B766DD}"/>
               </a:ext>
             </a:extLst>
           </p:cNvPr>
@@ -14602,7 +15309,7 @@
           <p:cNvPr id="18" name="">
             <a:extLst xmlns:a="http://schemas.openxmlformats.org/drawingml/2006/main">
               <a:ext uri="{FF2B5EF4-FFF2-40B4-BE49-F238E27FC236}">
-                <a16:creationId xmlns:a16="http://schemas.microsoft.com/office/drawing/2014/main" id="{6819F8CD-BF4E-44E3-871C-7D8E4C1E9A48}"/>
+                <a16:creationId xmlns:a16="http://schemas.microsoft.com/office/drawing/2014/main" id="{486C3967-18A1-4EAD-AEE4-3098F8B59DBC}"/>
               </a:ext>
             </a:extLst>
           </p:cNvPr>
@@ -14652,7 +15359,7 @@
           <p:cNvPr id="19" name="">
             <a:extLst xmlns:a="http://schemas.openxmlformats.org/drawingml/2006/main">
               <a:ext uri="{FF2B5EF4-FFF2-40B4-BE49-F238E27FC236}">
-                <a16:creationId xmlns:a16="http://schemas.microsoft.com/office/drawing/2014/main" id="{425B41FB-34F9-49EC-BB99-0A881FC96880}"/>
+                <a16:creationId xmlns:a16="http://schemas.microsoft.com/office/drawing/2014/main" id="{82EEE4BC-7E33-4F59-B513-95DD5E61CC3C}"/>
               </a:ext>
             </a:extLst>
           </p:cNvPr>
@@ -14700,7 +15407,7 @@
     </p:spTree>
     <p:extLst>
       <p:ext uri="{BB962C8B-B14F-4D97-AF65-F5344CB8AC3E}">
-        <p14:creationId xmlns:p14="http://schemas.microsoft.com/office/powerpoint/2010/main" val="356054498"/>
+        <p14:creationId xmlns:p14="http://schemas.microsoft.com/office/powerpoint/2010/main" val="845669559"/>
       </p:ext>
     </p:extLst>
   </p:cSld>
@@ -14731,7 +15438,7 @@
           <p:cNvPr id="6" name="">
             <a:extLst xmlns:a="http://schemas.openxmlformats.org/drawingml/2006/main">
               <a:ext uri="{FF2B5EF4-FFF2-40B4-BE49-F238E27FC236}">
-                <a16:creationId xmlns:a16="http://schemas.microsoft.com/office/drawing/2014/main" id="{3AD9D035-DCC0-49B4-8915-320A58308872}"/>
+                <a16:creationId xmlns:a16="http://schemas.microsoft.com/office/drawing/2014/main" id="{1C8F176E-80C3-4E51-950E-40CFEBD94C67}"/>
               </a:ext>
             </a:extLst>
           </p:cNvPr>
@@ -14781,7 +15488,7 @@
           <p:cNvPr id="2" name="">
             <a:extLst xmlns:a="http://schemas.openxmlformats.org/drawingml/2006/main">
               <a:ext uri="{FF2B5EF4-FFF2-40B4-BE49-F238E27FC236}">
-                <a16:creationId xmlns:a16="http://schemas.microsoft.com/office/drawing/2014/main" id="{E90FEBF6-6BEF-4900-895B-469292EAB3BC}"/>
+                <a16:creationId xmlns:a16="http://schemas.microsoft.com/office/drawing/2014/main" id="{E06CC9F6-57A1-4187-BCCF-F2270C33CC87}"/>
               </a:ext>
             </a:extLst>
           </p:cNvPr>
@@ -14848,7 +15555,7 @@
           <p:cNvPr id="3" name="">
             <a:extLst xmlns:a="http://schemas.openxmlformats.org/drawingml/2006/main">
               <a:ext uri="{FF2B5EF4-FFF2-40B4-BE49-F238E27FC236}">
-                <a16:creationId xmlns:a16="http://schemas.microsoft.com/office/drawing/2014/main" id="{67AD34BA-ECD7-4DCE-85CC-1E0A69930E18}"/>
+                <a16:creationId xmlns:a16="http://schemas.microsoft.com/office/drawing/2014/main" id="{00F75AEA-AA34-4638-80A4-367239266053}"/>
               </a:ext>
             </a:extLst>
           </p:cNvPr>
@@ -14898,7 +15605,7 @@
           <p:cNvPr id="4" name="">
             <a:extLst xmlns:a="http://schemas.openxmlformats.org/drawingml/2006/main">
               <a:ext uri="{FF2B5EF4-FFF2-40B4-BE49-F238E27FC236}">
-                <a16:creationId xmlns:a16="http://schemas.microsoft.com/office/drawing/2014/main" id="{53ECB2F2-07B7-4F50-94ED-82CC842F8124}"/>
+                <a16:creationId xmlns:a16="http://schemas.microsoft.com/office/drawing/2014/main" id="{89726FCB-E267-4E0A-AE1B-74C9EC55C466}"/>
               </a:ext>
             </a:extLst>
           </p:cNvPr>
@@ -14948,7 +15655,7 @@
           <p:cNvPr id="5" name="">
             <a:extLst xmlns:a="http://schemas.openxmlformats.org/drawingml/2006/main">
               <a:ext uri="{FF2B5EF4-FFF2-40B4-BE49-F238E27FC236}">
-                <a16:creationId xmlns:a16="http://schemas.microsoft.com/office/drawing/2014/main" id="{07554C4A-1B37-4FCE-AB41-E9F44F8CAF98}"/>
+                <a16:creationId xmlns:a16="http://schemas.microsoft.com/office/drawing/2014/main" id="{BC429160-D13B-406C-BA7E-3D18B1122F17}"/>
               </a:ext>
             </a:extLst>
           </p:cNvPr>
@@ -14996,7 +15703,7 @@
     </p:spTree>
     <p:extLst>
       <p:ext uri="{BB962C8B-B14F-4D97-AF65-F5344CB8AC3E}">
-        <p14:creationId xmlns:p14="http://schemas.microsoft.com/office/powerpoint/2010/main" val="2094339899"/>
+        <p14:creationId xmlns:p14="http://schemas.microsoft.com/office/powerpoint/2010/main" val="932493179"/>
       </p:ext>
     </p:extLst>
   </p:cSld>
@@ -15027,7 +15734,7 @@
           <p:cNvPr id="17" name="">
             <a:extLst xmlns:a="http://schemas.openxmlformats.org/drawingml/2006/main">
               <a:ext uri="{FF2B5EF4-FFF2-40B4-BE49-F238E27FC236}">
-                <a16:creationId xmlns:a16="http://schemas.microsoft.com/office/drawing/2014/main" id="{7B109696-3FEC-48ED-ADCD-4103DE623088}"/>
+                <a16:creationId xmlns:a16="http://schemas.microsoft.com/office/drawing/2014/main" id="{D45A9EE7-AC37-410B-A930-2DC97AC390D8}"/>
               </a:ext>
             </a:extLst>
           </p:cNvPr>
@@ -15077,7 +15784,7 @@
           <p:cNvPr id="2" name="">
             <a:extLst xmlns:a="http://schemas.openxmlformats.org/drawingml/2006/main">
               <a:ext uri="{FF2B5EF4-FFF2-40B4-BE49-F238E27FC236}">
-                <a16:creationId xmlns:a16="http://schemas.microsoft.com/office/drawing/2014/main" id="{29EA7D88-7EF3-4446-8684-B7B26F01CBF6}"/>
+                <a16:creationId xmlns:a16="http://schemas.microsoft.com/office/drawing/2014/main" id="{1E59AAC2-B860-4C0E-970D-F6DDA819F7AE}"/>
               </a:ext>
             </a:extLst>
           </p:cNvPr>
@@ -15127,7 +15834,7 @@
           <p:cNvPr id="3" name="">
             <a:extLst xmlns:a="http://schemas.openxmlformats.org/drawingml/2006/main">
               <a:ext uri="{FF2B5EF4-FFF2-40B4-BE49-F238E27FC236}">
-                <a16:creationId xmlns:a16="http://schemas.microsoft.com/office/drawing/2014/main" id="{62BA9E10-ACB3-418A-91E5-9FCD4B9C63E5}"/>
+                <a16:creationId xmlns:a16="http://schemas.microsoft.com/office/drawing/2014/main" id="{9C24E66A-A19C-4CA2-BC6C-A42DFDC9E58A}"/>
               </a:ext>
             </a:extLst>
           </p:cNvPr>
@@ -15160,7 +15867,7 @@
           <p:cNvPr id="4" name="">
             <a:extLst xmlns:a="http://schemas.openxmlformats.org/drawingml/2006/main">
               <a:ext uri="{FF2B5EF4-FFF2-40B4-BE49-F238E27FC236}">
-                <a16:creationId xmlns:a16="http://schemas.microsoft.com/office/drawing/2014/main" id="{2000AA70-5A0E-4964-952C-CD5F51309220}"/>
+                <a16:creationId xmlns:a16="http://schemas.microsoft.com/office/drawing/2014/main" id="{487CD263-FAF9-4846-AB73-C2D3254E6929}"/>
               </a:ext>
             </a:extLst>
           </p:cNvPr>
@@ -15210,7 +15917,7 @@
           <p:cNvPr id="5" name="">
             <a:extLst xmlns:a="http://schemas.openxmlformats.org/drawingml/2006/main">
               <a:ext uri="{FF2B5EF4-FFF2-40B4-BE49-F238E27FC236}">
-                <a16:creationId xmlns:a16="http://schemas.microsoft.com/office/drawing/2014/main" id="{28DEFCA6-F90D-40D3-AAD2-A22802DEBC03}"/>
+                <a16:creationId xmlns:a16="http://schemas.microsoft.com/office/drawing/2014/main" id="{EEFA902B-840B-4337-954F-0C5004A12EDF}"/>
               </a:ext>
             </a:extLst>
           </p:cNvPr>
@@ -15264,7 +15971,7 @@
           <p:nvPr/>
         </p:nvPicPr>
         <p:blipFill>
-          <a:blip xmlns:r="http://schemas.openxmlformats.org/officeDocument/2006/relationships" xmlns:a="http://schemas.openxmlformats.org/drawingml/2006/main" r:embed="Rfe82e5d9c9db49b3"/>
+          <a:blip xmlns:r="http://schemas.openxmlformats.org/officeDocument/2006/relationships" xmlns:a="http://schemas.openxmlformats.org/drawingml/2006/main" r:embed="R80455b68f1a44a61"/>
           <a:stretch xmlns:a="http://schemas.openxmlformats.org/drawingml/2006/main"/>
         </p:blipFill>
         <p:spPr>
@@ -15282,7 +15989,7 @@
           <p:cNvPr id="7" name="">
             <a:extLst xmlns:a="http://schemas.openxmlformats.org/drawingml/2006/main">
               <a:ext uri="{FF2B5EF4-FFF2-40B4-BE49-F238E27FC236}">
-                <a16:creationId xmlns:a16="http://schemas.microsoft.com/office/drawing/2014/main" id="{89AF4492-4356-40AF-AB73-0CB2ED163F85}"/>
+                <a16:creationId xmlns:a16="http://schemas.microsoft.com/office/drawing/2014/main" id="{D5983204-97FE-41B5-9D62-303ED026F5C0}"/>
               </a:ext>
             </a:extLst>
           </p:cNvPr>
@@ -15315,7 +16022,7 @@
           <p:cNvPr id="8" name="">
             <a:extLst xmlns:a="http://schemas.openxmlformats.org/drawingml/2006/main">
               <a:ext uri="{FF2B5EF4-FFF2-40B4-BE49-F238E27FC236}">
-                <a16:creationId xmlns:a16="http://schemas.microsoft.com/office/drawing/2014/main" id="{DA2AC9E8-B006-4D2E-9578-4715B9C68794}"/>
+                <a16:creationId xmlns:a16="http://schemas.microsoft.com/office/drawing/2014/main" id="{3F915F42-6346-4AC8-BED3-61A0E0A09842}"/>
               </a:ext>
             </a:extLst>
           </p:cNvPr>
@@ -15365,7 +16072,7 @@
           <p:cNvPr id="9" name="">
             <a:extLst xmlns:a="http://schemas.openxmlformats.org/drawingml/2006/main">
               <a:ext uri="{FF2B5EF4-FFF2-40B4-BE49-F238E27FC236}">
-                <a16:creationId xmlns:a16="http://schemas.microsoft.com/office/drawing/2014/main" id="{4DEB5ACC-2736-4FE5-91E4-34708D106B3B}"/>
+                <a16:creationId xmlns:a16="http://schemas.microsoft.com/office/drawing/2014/main" id="{77A35FB7-7370-40F9-A5F9-E82FF4ACAD4F}"/>
               </a:ext>
             </a:extLst>
           </p:cNvPr>
@@ -15415,7 +16122,7 @@
           <p:cNvPr id="10" name="">
             <a:extLst xmlns:a="http://schemas.openxmlformats.org/drawingml/2006/main">
               <a:ext uri="{FF2B5EF4-FFF2-40B4-BE49-F238E27FC236}">
-                <a16:creationId xmlns:a16="http://schemas.microsoft.com/office/drawing/2014/main" id="{32E6B38D-B1CD-482E-A79D-E1654DFE2D19}"/>
+                <a16:creationId xmlns:a16="http://schemas.microsoft.com/office/drawing/2014/main" id="{E5936D15-5649-41BB-961E-88FEB3083841}"/>
               </a:ext>
             </a:extLst>
           </p:cNvPr>
@@ -15465,7 +16172,7 @@
           <p:cNvPr id="11" name="">
             <a:extLst xmlns:a="http://schemas.openxmlformats.org/drawingml/2006/main">
               <a:ext uri="{FF2B5EF4-FFF2-40B4-BE49-F238E27FC236}">
-                <a16:creationId xmlns:a16="http://schemas.microsoft.com/office/drawing/2014/main" id="{B8BF0338-82F7-4F8E-9C78-46E5FF1933C6}"/>
+                <a16:creationId xmlns:a16="http://schemas.microsoft.com/office/drawing/2014/main" id="{E6543ABB-F00F-4758-922B-EFD1C1147859}"/>
               </a:ext>
             </a:extLst>
           </p:cNvPr>
@@ -15498,7 +16205,7 @@
           <p:cNvPr id="12" name="">
             <a:extLst xmlns:a="http://schemas.openxmlformats.org/drawingml/2006/main">
               <a:ext uri="{FF2B5EF4-FFF2-40B4-BE49-F238E27FC236}">
-                <a16:creationId xmlns:a16="http://schemas.microsoft.com/office/drawing/2014/main" id="{9E4989E0-E971-483E-AFAD-08BB0DDC4C9D}"/>
+                <a16:creationId xmlns:a16="http://schemas.microsoft.com/office/drawing/2014/main" id="{2F20BA4E-38D0-43C6-9A60-4F30ADFB2DCA}"/>
               </a:ext>
             </a:extLst>
           </p:cNvPr>
@@ -15548,7 +16255,7 @@
           <p:cNvPr id="13" name="">
             <a:extLst xmlns:a="http://schemas.openxmlformats.org/drawingml/2006/main">
               <a:ext uri="{FF2B5EF4-FFF2-40B4-BE49-F238E27FC236}">
-                <a16:creationId xmlns:a16="http://schemas.microsoft.com/office/drawing/2014/main" id="{30EAEA68-E3D1-4716-B5AD-4EC0D4057179}"/>
+                <a16:creationId xmlns:a16="http://schemas.microsoft.com/office/drawing/2014/main" id="{BD9C6F24-CAD9-4989-9B5D-EB54D5B97A22}"/>
               </a:ext>
             </a:extLst>
           </p:cNvPr>
@@ -15581,7 +16288,7 @@
           <p:cNvPr id="14" name="">
             <a:extLst xmlns:a="http://schemas.openxmlformats.org/drawingml/2006/main">
               <a:ext uri="{FF2B5EF4-FFF2-40B4-BE49-F238E27FC236}">
-                <a16:creationId xmlns:a16="http://schemas.microsoft.com/office/drawing/2014/main" id="{60B044C5-7973-4CB8-8D17-E1A4892F5B2A}"/>
+                <a16:creationId xmlns:a16="http://schemas.microsoft.com/office/drawing/2014/main" id="{52385109-428C-41CB-A93B-B947D396B78F}"/>
               </a:ext>
             </a:extLst>
           </p:cNvPr>
@@ -15631,7 +16338,7 @@
           <p:cNvPr id="15" name="">
             <a:extLst xmlns:a="http://schemas.openxmlformats.org/drawingml/2006/main">
               <a:ext uri="{FF2B5EF4-FFF2-40B4-BE49-F238E27FC236}">
-                <a16:creationId xmlns:a16="http://schemas.microsoft.com/office/drawing/2014/main" id="{B2F7F77F-C992-4C20-87FC-9A633E1023EC}"/>
+                <a16:creationId xmlns:a16="http://schemas.microsoft.com/office/drawing/2014/main" id="{798B1C17-2F15-4610-9503-66573D052FCD}"/>
               </a:ext>
             </a:extLst>
           </p:cNvPr>
@@ -15664,7 +16371,7 @@
           <p:cNvPr id="16" name="">
             <a:extLst xmlns:a="http://schemas.openxmlformats.org/drawingml/2006/main">
               <a:ext uri="{FF2B5EF4-FFF2-40B4-BE49-F238E27FC236}">
-                <a16:creationId xmlns:a16="http://schemas.microsoft.com/office/drawing/2014/main" id="{BDC1EDA7-B1EF-434C-BDCF-4F505E820989}"/>
+                <a16:creationId xmlns:a16="http://schemas.microsoft.com/office/drawing/2014/main" id="{0ECC5E8C-F39C-4F63-8D39-CB6E2CFC8A09}"/>
               </a:ext>
             </a:extLst>
           </p:cNvPr>
@@ -15712,7 +16419,7 @@
     </p:spTree>
     <p:extLst>
       <p:ext uri="{BB962C8B-B14F-4D97-AF65-F5344CB8AC3E}">
-        <p14:creationId xmlns:p14="http://schemas.microsoft.com/office/powerpoint/2010/main" val="1608028267"/>
+        <p14:creationId xmlns:p14="http://schemas.microsoft.com/office/powerpoint/2010/main" val="1229679768"/>
       </p:ext>
     </p:extLst>
   </p:cSld>
@@ -15743,7 +16450,7 @@
           <p:cNvPr id="15" name="">
             <a:extLst xmlns:a="http://schemas.openxmlformats.org/drawingml/2006/main">
               <a:ext uri="{FF2B5EF4-FFF2-40B4-BE49-F238E27FC236}">
-                <a16:creationId xmlns:a16="http://schemas.microsoft.com/office/drawing/2014/main" id="{2FB8E70F-332C-4AB7-87CA-9B7C4D8F2987}"/>
+                <a16:creationId xmlns:a16="http://schemas.microsoft.com/office/drawing/2014/main" id="{7818B62A-80BE-434E-9CA1-5EDB7D8B62BB}"/>
               </a:ext>
             </a:extLst>
           </p:cNvPr>
@@ -15793,7 +16500,7 @@
           <p:cNvPr id="2" name="">
             <a:extLst xmlns:a="http://schemas.openxmlformats.org/drawingml/2006/main">
               <a:ext uri="{FF2B5EF4-FFF2-40B4-BE49-F238E27FC236}">
-                <a16:creationId xmlns:a16="http://schemas.microsoft.com/office/drawing/2014/main" id="{4640C84B-478C-44EB-A7AE-3B4BD573A2DA}"/>
+                <a16:creationId xmlns:a16="http://schemas.microsoft.com/office/drawing/2014/main" id="{1CC70397-82F9-4D02-8B1B-FE92B35225A2}"/>
               </a:ext>
             </a:extLst>
           </p:cNvPr>
@@ -15843,7 +16550,7 @@
           <p:cNvPr id="3" name="">
             <a:extLst xmlns:a="http://schemas.openxmlformats.org/drawingml/2006/main">
               <a:ext uri="{FF2B5EF4-FFF2-40B4-BE49-F238E27FC236}">
-                <a16:creationId xmlns:a16="http://schemas.microsoft.com/office/drawing/2014/main" id="{45D79024-0C06-4094-B34F-2BF793B23948}"/>
+                <a16:creationId xmlns:a16="http://schemas.microsoft.com/office/drawing/2014/main" id="{44CB1131-E9E9-4CB6-A8A0-7C1A78C85279}"/>
               </a:ext>
             </a:extLst>
           </p:cNvPr>
@@ -15876,7 +16583,7 @@
           <p:cNvPr id="4" name="">
             <a:extLst xmlns:a="http://schemas.openxmlformats.org/drawingml/2006/main">
               <a:ext uri="{FF2B5EF4-FFF2-40B4-BE49-F238E27FC236}">
-                <a16:creationId xmlns:a16="http://schemas.microsoft.com/office/drawing/2014/main" id="{6BC15A9A-CF0F-4F2C-94CA-D9F523BEF310}"/>
+                <a16:creationId xmlns:a16="http://schemas.microsoft.com/office/drawing/2014/main" id="{F5E2A902-48A0-42E8-BEFD-40FCD9220E3E}"/>
               </a:ext>
             </a:extLst>
           </p:cNvPr>
@@ -15926,7 +16633,7 @@
           <p:cNvPr id="5" name="">
             <a:extLst xmlns:a="http://schemas.openxmlformats.org/drawingml/2006/main">
               <a:ext uri="{FF2B5EF4-FFF2-40B4-BE49-F238E27FC236}">
-                <a16:creationId xmlns:a16="http://schemas.microsoft.com/office/drawing/2014/main" id="{30EF946C-66A2-40CD-B4B6-51E42B65EEF6}"/>
+                <a16:creationId xmlns:a16="http://schemas.microsoft.com/office/drawing/2014/main" id="{7361B12D-A90E-4D9B-830C-189C4B7469F3}"/>
               </a:ext>
             </a:extLst>
           </p:cNvPr>
@@ -15980,7 +16687,7 @@
           <p:nvPr/>
         </p:nvPicPr>
         <p:blipFill>
-          <a:blip xmlns:r="http://schemas.openxmlformats.org/officeDocument/2006/relationships" xmlns:a="http://schemas.openxmlformats.org/drawingml/2006/main" r:embed="R1a8e20dd6f414d2a"/>
+          <a:blip xmlns:r="http://schemas.openxmlformats.org/officeDocument/2006/relationships" xmlns:a="http://schemas.openxmlformats.org/drawingml/2006/main" r:embed="R093f9634955b48de"/>
           <a:stretch xmlns:a="http://schemas.openxmlformats.org/drawingml/2006/main"/>
         </p:blipFill>
         <p:spPr>
@@ -15998,7 +16705,7 @@
           <p:cNvPr id="7" name="">
             <a:extLst xmlns:a="http://schemas.openxmlformats.org/drawingml/2006/main">
               <a:ext uri="{FF2B5EF4-FFF2-40B4-BE49-F238E27FC236}">
-                <a16:creationId xmlns:a16="http://schemas.microsoft.com/office/drawing/2014/main" id="{F7B02D88-195A-4626-B2D7-30601576A65D}"/>
+                <a16:creationId xmlns:a16="http://schemas.microsoft.com/office/drawing/2014/main" id="{39A4C6F6-9DD8-4CD8-BE22-6824642640F8}"/>
               </a:ext>
             </a:extLst>
           </p:cNvPr>
@@ -16031,7 +16738,7 @@
           <p:cNvPr id="8" name="">
             <a:extLst xmlns:a="http://schemas.openxmlformats.org/drawingml/2006/main">
               <a:ext uri="{FF2B5EF4-FFF2-40B4-BE49-F238E27FC236}">
-                <a16:creationId xmlns:a16="http://schemas.microsoft.com/office/drawing/2014/main" id="{810071A9-11BA-46B1-BB1C-DC53CB8E4B59}"/>
+                <a16:creationId xmlns:a16="http://schemas.microsoft.com/office/drawing/2014/main" id="{498F3C21-55EA-47EC-832C-18E3FBEE4622}"/>
               </a:ext>
             </a:extLst>
           </p:cNvPr>
@@ -16081,7 +16788,7 @@
           <p:cNvPr id="9" name="">
             <a:extLst xmlns:a="http://schemas.openxmlformats.org/drawingml/2006/main">
               <a:ext uri="{FF2B5EF4-FFF2-40B4-BE49-F238E27FC236}">
-                <a16:creationId xmlns:a16="http://schemas.microsoft.com/office/drawing/2014/main" id="{0BDD972E-C2AD-4A0A-94CB-AD4386146C43}"/>
+                <a16:creationId xmlns:a16="http://schemas.microsoft.com/office/drawing/2014/main" id="{493739E8-12EF-4CF4-9887-C4B0D65C6070}"/>
               </a:ext>
             </a:extLst>
           </p:cNvPr>
@@ -16131,7 +16838,7 @@
           <p:cNvPr id="10" name="">
             <a:extLst xmlns:a="http://schemas.openxmlformats.org/drawingml/2006/main">
               <a:ext uri="{FF2B5EF4-FFF2-40B4-BE49-F238E27FC236}">
-                <a16:creationId xmlns:a16="http://schemas.microsoft.com/office/drawing/2014/main" id="{4DAAB98A-AF40-4A51-A3E2-94C45BA54797}"/>
+                <a16:creationId xmlns:a16="http://schemas.microsoft.com/office/drawing/2014/main" id="{5FEB2E30-EF23-4EFC-B7A5-1B7C242BFCC6}"/>
               </a:ext>
             </a:extLst>
           </p:cNvPr>
@@ -16181,7 +16888,7 @@
           <p:cNvPr id="11" name="">
             <a:extLst xmlns:a="http://schemas.openxmlformats.org/drawingml/2006/main">
               <a:ext uri="{FF2B5EF4-FFF2-40B4-BE49-F238E27FC236}">
-                <a16:creationId xmlns:a16="http://schemas.microsoft.com/office/drawing/2014/main" id="{1C136F20-46FC-4A89-88BC-348BF27CD1CB}"/>
+                <a16:creationId xmlns:a16="http://schemas.microsoft.com/office/drawing/2014/main" id="{26CE2E62-AF60-4A51-A5C5-245BC1409D93}"/>
               </a:ext>
             </a:extLst>
           </p:cNvPr>
@@ -16231,7 +16938,7 @@
           <p:cNvPr id="12" name="">
             <a:extLst xmlns:a="http://schemas.openxmlformats.org/drawingml/2006/main">
               <a:ext uri="{FF2B5EF4-FFF2-40B4-BE49-F238E27FC236}">
-                <a16:creationId xmlns:a16="http://schemas.microsoft.com/office/drawing/2014/main" id="{089D293E-50C1-4824-8FEB-B6EE9F83A781}"/>
+                <a16:creationId xmlns:a16="http://schemas.microsoft.com/office/drawing/2014/main" id="{B4D597CF-A716-4424-8F8A-6C3612074EE4}"/>
               </a:ext>
             </a:extLst>
           </p:cNvPr>
@@ -16281,7 +16988,7 @@
           <p:cNvPr id="13" name="">
             <a:extLst xmlns:a="http://schemas.openxmlformats.org/drawingml/2006/main">
               <a:ext uri="{FF2B5EF4-FFF2-40B4-BE49-F238E27FC236}">
-                <a16:creationId xmlns:a16="http://schemas.microsoft.com/office/drawing/2014/main" id="{A9E9156E-8C11-496C-B085-1BD68EAD417E}"/>
+                <a16:creationId xmlns:a16="http://schemas.microsoft.com/office/drawing/2014/main" id="{B017E89C-2532-4962-9948-054A4456BD08}"/>
               </a:ext>
             </a:extLst>
           </p:cNvPr>
@@ -16331,7 +17038,7 @@
           <p:cNvPr id="14" name="">
             <a:extLst xmlns:a="http://schemas.openxmlformats.org/drawingml/2006/main">
               <a:ext uri="{FF2B5EF4-FFF2-40B4-BE49-F238E27FC236}">
-                <a16:creationId xmlns:a16="http://schemas.microsoft.com/office/drawing/2014/main" id="{6DB75049-F767-45F0-A646-1FAD9F9FED97}"/>
+                <a16:creationId xmlns:a16="http://schemas.microsoft.com/office/drawing/2014/main" id="{24A56469-122C-4652-B1D6-36D94EDEF9C7}"/>
               </a:ext>
             </a:extLst>
           </p:cNvPr>
@@ -16379,7 +17086,7 @@
     </p:spTree>
     <p:extLst>
       <p:ext uri="{BB962C8B-B14F-4D97-AF65-F5344CB8AC3E}">
-        <p14:creationId xmlns:p14="http://schemas.microsoft.com/office/powerpoint/2010/main" val="1057221431"/>
+        <p14:creationId xmlns:p14="http://schemas.microsoft.com/office/powerpoint/2010/main" val="922853523"/>
       </p:ext>
     </p:extLst>
   </p:cSld>
@@ -16410,7 +17117,7 @@
           <p:cNvPr id="9" name="">
             <a:extLst xmlns:a="http://schemas.openxmlformats.org/drawingml/2006/main">
               <a:ext uri="{FF2B5EF4-FFF2-40B4-BE49-F238E27FC236}">
-                <a16:creationId xmlns:a16="http://schemas.microsoft.com/office/drawing/2014/main" id="{31459C28-C638-4F86-AA96-B95573FB370F}"/>
+                <a16:creationId xmlns:a16="http://schemas.microsoft.com/office/drawing/2014/main" id="{481DAF22-9F8E-417B-9840-3796C98BB295}"/>
               </a:ext>
             </a:extLst>
           </p:cNvPr>
@@ -16460,7 +17167,7 @@
           <p:cNvPr id="2" name="">
             <a:extLst xmlns:a="http://schemas.openxmlformats.org/drawingml/2006/main">
               <a:ext uri="{FF2B5EF4-FFF2-40B4-BE49-F238E27FC236}">
-                <a16:creationId xmlns:a16="http://schemas.microsoft.com/office/drawing/2014/main" id="{5AAE6563-F040-41AB-83A7-3E10A574A1C5}"/>
+                <a16:creationId xmlns:a16="http://schemas.microsoft.com/office/drawing/2014/main" id="{E5C459E8-EB7F-420D-8EF6-D74468697921}"/>
               </a:ext>
             </a:extLst>
           </p:cNvPr>
@@ -16510,7 +17217,7 @@
           <p:cNvPr id="3" name="">
             <a:extLst xmlns:a="http://schemas.openxmlformats.org/drawingml/2006/main">
               <a:ext uri="{FF2B5EF4-FFF2-40B4-BE49-F238E27FC236}">
-                <a16:creationId xmlns:a16="http://schemas.microsoft.com/office/drawing/2014/main" id="{B9374786-494A-46DC-81FA-C27922A369B0}"/>
+                <a16:creationId xmlns:a16="http://schemas.microsoft.com/office/drawing/2014/main" id="{B67270EB-49F0-40D0-A63C-E2E48EF6E771}"/>
               </a:ext>
             </a:extLst>
           </p:cNvPr>
@@ -16543,7 +17250,7 @@
           <p:cNvPr id="4" name="">
             <a:extLst xmlns:a="http://schemas.openxmlformats.org/drawingml/2006/main">
               <a:ext uri="{FF2B5EF4-FFF2-40B4-BE49-F238E27FC236}">
-                <a16:creationId xmlns:a16="http://schemas.microsoft.com/office/drawing/2014/main" id="{AFDA19AA-1CBF-4E60-83BD-2C7CF2A8B414}"/>
+                <a16:creationId xmlns:a16="http://schemas.microsoft.com/office/drawing/2014/main" id="{B4AD96A8-3960-4FD9-BC86-620E0102D365}"/>
               </a:ext>
             </a:extLst>
           </p:cNvPr>
@@ -16593,7 +17300,7 @@
           <p:cNvPr id="5" name="">
             <a:extLst xmlns:a="http://schemas.openxmlformats.org/drawingml/2006/main">
               <a:ext uri="{FF2B5EF4-FFF2-40B4-BE49-F238E27FC236}">
-                <a16:creationId xmlns:a16="http://schemas.microsoft.com/office/drawing/2014/main" id="{CB139F03-E11D-4A54-BAF9-C6D358CE03D5}"/>
+                <a16:creationId xmlns:a16="http://schemas.microsoft.com/office/drawing/2014/main" id="{5AD047BB-0814-4117-A087-20F03339EAFD}"/>
               </a:ext>
             </a:extLst>
           </p:cNvPr>
@@ -16647,7 +17354,7 @@
           <p:nvPr/>
         </p:nvPicPr>
         <p:blipFill>
-          <a:blip xmlns:r="http://schemas.openxmlformats.org/officeDocument/2006/relationships" xmlns:a="http://schemas.openxmlformats.org/drawingml/2006/main" r:embed="Rb15504007b6040c1"/>
+          <a:blip xmlns:r="http://schemas.openxmlformats.org/officeDocument/2006/relationships" xmlns:a="http://schemas.openxmlformats.org/drawingml/2006/main" r:embed="R03ba87c18cb74599"/>
           <a:stretch xmlns:a="http://schemas.openxmlformats.org/drawingml/2006/main"/>
         </p:blipFill>
         <p:spPr>
@@ -16669,7 +17376,7 @@
           <p:nvPr/>
         </p:nvPicPr>
         <p:blipFill>
-          <a:blip xmlns:r="http://schemas.openxmlformats.org/officeDocument/2006/relationships" xmlns:a="http://schemas.openxmlformats.org/drawingml/2006/main" r:embed="R2734f6175ca94c48"/>
+          <a:blip xmlns:r="http://schemas.openxmlformats.org/officeDocument/2006/relationships" xmlns:a="http://schemas.openxmlformats.org/drawingml/2006/main" r:embed="Re3a47cc05dd04c31"/>
           <a:stretch xmlns:a="http://schemas.openxmlformats.org/drawingml/2006/main"/>
         </p:blipFill>
         <p:spPr>
@@ -16687,7 +17394,7 @@
           <p:cNvPr id="8" name="">
             <a:extLst xmlns:a="http://schemas.openxmlformats.org/drawingml/2006/main">
               <a:ext uri="{FF2B5EF4-FFF2-40B4-BE49-F238E27FC236}">
-                <a16:creationId xmlns:a16="http://schemas.microsoft.com/office/drawing/2014/main" id="{53C8E69F-7C87-4273-B30E-87517A0EDF61}"/>
+                <a16:creationId xmlns:a16="http://schemas.microsoft.com/office/drawing/2014/main" id="{02FA386C-04EC-4AD6-BE6B-7BD3DF827FB1}"/>
               </a:ext>
             </a:extLst>
           </p:cNvPr>
@@ -16735,7 +17442,7 @@
     </p:spTree>
     <p:extLst>
       <p:ext uri="{BB962C8B-B14F-4D97-AF65-F5344CB8AC3E}">
-        <p14:creationId xmlns:p14="http://schemas.microsoft.com/office/powerpoint/2010/main" val="1530413175"/>
+        <p14:creationId xmlns:p14="http://schemas.microsoft.com/office/powerpoint/2010/main" val="2116646399"/>
       </p:ext>
     </p:extLst>
   </p:cSld>
@@ -16766,7 +17473,7 @@
           <p:cNvPr id="7" name="">
             <a:extLst xmlns:a="http://schemas.openxmlformats.org/drawingml/2006/main">
               <a:ext uri="{FF2B5EF4-FFF2-40B4-BE49-F238E27FC236}">
-                <a16:creationId xmlns:a16="http://schemas.microsoft.com/office/drawing/2014/main" id="{5BC2F4ED-543B-40AF-A401-61855A355C4B}"/>
+                <a16:creationId xmlns:a16="http://schemas.microsoft.com/office/drawing/2014/main" id="{6FC7B4AB-88C7-4A2A-AD7B-AB9D92D401CB}"/>
               </a:ext>
             </a:extLst>
           </p:cNvPr>
@@ -16816,7 +17523,7 @@
           <p:cNvPr id="2" name="">
             <a:extLst xmlns:a="http://schemas.openxmlformats.org/drawingml/2006/main">
               <a:ext uri="{FF2B5EF4-FFF2-40B4-BE49-F238E27FC236}">
-                <a16:creationId xmlns:a16="http://schemas.microsoft.com/office/drawing/2014/main" id="{85203528-3D7B-49D1-8B6F-285C697A35B0}"/>
+                <a16:creationId xmlns:a16="http://schemas.microsoft.com/office/drawing/2014/main" id="{C49720D5-C013-4A18-B6B7-9AD7B72B1B96}"/>
               </a:ext>
             </a:extLst>
           </p:cNvPr>
@@ -16866,7 +17573,7 @@
           <p:cNvPr id="3" name="">
             <a:extLst xmlns:a="http://schemas.openxmlformats.org/drawingml/2006/main">
               <a:ext uri="{FF2B5EF4-FFF2-40B4-BE49-F238E27FC236}">
-                <a16:creationId xmlns:a16="http://schemas.microsoft.com/office/drawing/2014/main" id="{9822E927-1E80-49DC-9AF4-23163848B874}"/>
+                <a16:creationId xmlns:a16="http://schemas.microsoft.com/office/drawing/2014/main" id="{C3CA335D-9D74-4156-ADC8-34B49666C23E}"/>
               </a:ext>
             </a:extLst>
           </p:cNvPr>
@@ -16899,7 +17606,7 @@
           <p:cNvPr id="4" name="">
             <a:extLst xmlns:a="http://schemas.openxmlformats.org/drawingml/2006/main">
               <a:ext uri="{FF2B5EF4-FFF2-40B4-BE49-F238E27FC236}">
-                <a16:creationId xmlns:a16="http://schemas.microsoft.com/office/drawing/2014/main" id="{81B759B3-80D6-45F5-AEC4-D29ECBB29BA5}"/>
+                <a16:creationId xmlns:a16="http://schemas.microsoft.com/office/drawing/2014/main" id="{4C8E814D-419F-49B9-9DEB-140FEBA94ED6}"/>
               </a:ext>
             </a:extLst>
           </p:cNvPr>
@@ -16949,7 +17656,7 @@
           <p:cNvPr id="5" name="">
             <a:extLst xmlns:a="http://schemas.openxmlformats.org/drawingml/2006/main">
               <a:ext uri="{FF2B5EF4-FFF2-40B4-BE49-F238E27FC236}">
-                <a16:creationId xmlns:a16="http://schemas.microsoft.com/office/drawing/2014/main" id="{A0A72F96-EF97-4E8B-9A94-75B40579A6B2}"/>
+                <a16:creationId xmlns:a16="http://schemas.microsoft.com/office/drawing/2014/main" id="{A8695E67-9C1F-43E3-AA6D-42FF63DCCC38}"/>
               </a:ext>
             </a:extLst>
           </p:cNvPr>
@@ -17003,7 +17710,7 @@
           <p:nvPr/>
         </p:nvPicPr>
         <p:blipFill>
-          <a:blip xmlns:r="http://schemas.openxmlformats.org/officeDocument/2006/relationships" xmlns:a="http://schemas.openxmlformats.org/drawingml/2006/main" r:embed="Rcf3826841f7a406f"/>
+          <a:blip xmlns:r="http://schemas.openxmlformats.org/officeDocument/2006/relationships" xmlns:a="http://schemas.openxmlformats.org/drawingml/2006/main" r:embed="R8dca38726b504841"/>
           <a:stretch xmlns:a="http://schemas.openxmlformats.org/drawingml/2006/main"/>
         </p:blipFill>
         <p:spPr>
@@ -17019,7 +17726,7 @@
     </p:spTree>
     <p:extLst>
       <p:ext uri="{BB962C8B-B14F-4D97-AF65-F5344CB8AC3E}">
-        <p14:creationId xmlns:p14="http://schemas.microsoft.com/office/powerpoint/2010/main" val="102954692"/>
+        <p14:creationId xmlns:p14="http://schemas.microsoft.com/office/powerpoint/2010/main" val="548535250"/>
       </p:ext>
     </p:extLst>
   </p:cSld>
@@ -17050,7 +17757,7 @@
           <p:cNvPr id="36" name="">
             <a:extLst xmlns:a="http://schemas.openxmlformats.org/drawingml/2006/main">
               <a:ext uri="{FF2B5EF4-FFF2-40B4-BE49-F238E27FC236}">
-                <a16:creationId xmlns:a16="http://schemas.microsoft.com/office/drawing/2014/main" id="{F54CB59F-B4DC-483A-95B2-ED4502595A57}"/>
+                <a16:creationId xmlns:a16="http://schemas.microsoft.com/office/drawing/2014/main" id="{0EA17D05-87E3-420B-AA5B-4A96EDFE10C9}"/>
               </a:ext>
             </a:extLst>
           </p:cNvPr>
@@ -17100,7 +17807,7 @@
           <p:cNvPr id="2" name="">
             <a:extLst xmlns:a="http://schemas.openxmlformats.org/drawingml/2006/main">
               <a:ext uri="{FF2B5EF4-FFF2-40B4-BE49-F238E27FC236}">
-                <a16:creationId xmlns:a16="http://schemas.microsoft.com/office/drawing/2014/main" id="{C4D9D86E-B339-459F-A4FD-6B6828832ADB}"/>
+                <a16:creationId xmlns:a16="http://schemas.microsoft.com/office/drawing/2014/main" id="{11333F42-237B-4AF9-844E-46C7428BDDA2}"/>
               </a:ext>
             </a:extLst>
           </p:cNvPr>
@@ -17150,7 +17857,7 @@
           <p:cNvPr id="3" name="">
             <a:extLst xmlns:a="http://schemas.openxmlformats.org/drawingml/2006/main">
               <a:ext uri="{FF2B5EF4-FFF2-40B4-BE49-F238E27FC236}">
-                <a16:creationId xmlns:a16="http://schemas.microsoft.com/office/drawing/2014/main" id="{569A948A-4419-49FE-90A9-2E803C525800}"/>
+                <a16:creationId xmlns:a16="http://schemas.microsoft.com/office/drawing/2014/main" id="{1B9D2113-F3BD-47E7-A0B9-B725D6051D7B}"/>
               </a:ext>
             </a:extLst>
           </p:cNvPr>
@@ -17183,7 +17890,7 @@
           <p:cNvPr id="4" name="">
             <a:extLst xmlns:a="http://schemas.openxmlformats.org/drawingml/2006/main">
               <a:ext uri="{FF2B5EF4-FFF2-40B4-BE49-F238E27FC236}">
-                <a16:creationId xmlns:a16="http://schemas.microsoft.com/office/drawing/2014/main" id="{9E8C8884-D124-4372-B609-5456E88FAC42}"/>
+                <a16:creationId xmlns:a16="http://schemas.microsoft.com/office/drawing/2014/main" id="{4F22DC3E-7098-4A70-B8C1-5C2A424EE920}"/>
               </a:ext>
             </a:extLst>
           </p:cNvPr>
@@ -17233,7 +17940,7 @@
           <p:cNvPr id="5" name="">
             <a:extLst xmlns:a="http://schemas.openxmlformats.org/drawingml/2006/main">
               <a:ext uri="{FF2B5EF4-FFF2-40B4-BE49-F238E27FC236}">
-                <a16:creationId xmlns:a16="http://schemas.microsoft.com/office/drawing/2014/main" id="{ECFEBFDD-0539-4055-BB34-8B3AF8247C96}"/>
+                <a16:creationId xmlns:a16="http://schemas.microsoft.com/office/drawing/2014/main" id="{D18A6264-4DD3-4DF1-9B74-C64E35FDCC16}"/>
               </a:ext>
             </a:extLst>
           </p:cNvPr>
@@ -17283,7 +17990,7 @@
           <p:cNvPr id="6" name="">
             <a:extLst xmlns:a="http://schemas.openxmlformats.org/drawingml/2006/main">
               <a:ext uri="{FF2B5EF4-FFF2-40B4-BE49-F238E27FC236}">
-                <a16:creationId xmlns:a16="http://schemas.microsoft.com/office/drawing/2014/main" id="{3D9F115B-F57F-4190-9005-635D6DB99C24}"/>
+                <a16:creationId xmlns:a16="http://schemas.microsoft.com/office/drawing/2014/main" id="{EDB1ACDF-1675-4BFA-8CAA-23A70EB3660A}"/>
               </a:ext>
             </a:extLst>
           </p:cNvPr>
@@ -17316,7 +18023,7 @@
           <p:cNvPr id="7" name="">
             <a:extLst xmlns:a="http://schemas.openxmlformats.org/drawingml/2006/main">
               <a:ext uri="{FF2B5EF4-FFF2-40B4-BE49-F238E27FC236}">
-                <a16:creationId xmlns:a16="http://schemas.microsoft.com/office/drawing/2014/main" id="{527773A7-D5B2-44D6-8726-D97528A8A67F}"/>
+                <a16:creationId xmlns:a16="http://schemas.microsoft.com/office/drawing/2014/main" id="{165C883D-6D3E-445F-8E34-A0A8C65C6F79}"/>
               </a:ext>
             </a:extLst>
           </p:cNvPr>
@@ -17366,7 +18073,7 @@
           <p:cNvPr id="8" name="">
             <a:extLst xmlns:a="http://schemas.openxmlformats.org/drawingml/2006/main">
               <a:ext uri="{FF2B5EF4-FFF2-40B4-BE49-F238E27FC236}">
-                <a16:creationId xmlns:a16="http://schemas.microsoft.com/office/drawing/2014/main" id="{7A0B0716-B338-47E9-A93C-33F9903B8F1B}"/>
+                <a16:creationId xmlns:a16="http://schemas.microsoft.com/office/drawing/2014/main" id="{FD442764-7FAC-4911-AFEE-BFC456853BD1}"/>
               </a:ext>
             </a:extLst>
           </p:cNvPr>
@@ -17416,7 +18123,7 @@
           <p:cNvPr id="9" name="">
             <a:extLst xmlns:a="http://schemas.openxmlformats.org/drawingml/2006/main">
               <a:ext uri="{FF2B5EF4-FFF2-40B4-BE49-F238E27FC236}">
-                <a16:creationId xmlns:a16="http://schemas.microsoft.com/office/drawing/2014/main" id="{64894019-E227-4347-9B0C-C09EBB506C14}"/>
+                <a16:creationId xmlns:a16="http://schemas.microsoft.com/office/drawing/2014/main" id="{BBED2E60-F1BF-4E7F-87C9-B350D020968C}"/>
               </a:ext>
             </a:extLst>
           </p:cNvPr>
@@ -17449,7 +18156,7 @@
           <p:cNvPr id="10" name="">
             <a:extLst xmlns:a="http://schemas.openxmlformats.org/drawingml/2006/main">
               <a:ext uri="{FF2B5EF4-FFF2-40B4-BE49-F238E27FC236}">
-                <a16:creationId xmlns:a16="http://schemas.microsoft.com/office/drawing/2014/main" id="{1F71CF0A-92C9-4CA9-9C73-5B66D9945CE0}"/>
+                <a16:creationId xmlns:a16="http://schemas.microsoft.com/office/drawing/2014/main" id="{CE4F4903-574F-461A-96E8-C9F84B6DC02C}"/>
               </a:ext>
             </a:extLst>
           </p:cNvPr>
@@ -17499,7 +18206,7 @@
           <p:cNvPr id="11" name="">
             <a:extLst xmlns:a="http://schemas.openxmlformats.org/drawingml/2006/main">
               <a:ext uri="{FF2B5EF4-FFF2-40B4-BE49-F238E27FC236}">
-                <a16:creationId xmlns:a16="http://schemas.microsoft.com/office/drawing/2014/main" id="{1047EEA4-DE4F-4A3E-8272-7E21DBA0C9C1}"/>
+                <a16:creationId xmlns:a16="http://schemas.microsoft.com/office/drawing/2014/main" id="{2F498588-332A-4B9C-B974-79886355E6FB}"/>
               </a:ext>
             </a:extLst>
           </p:cNvPr>
@@ -17549,7 +18256,7 @@
           <p:cNvPr id="12" name="">
             <a:extLst xmlns:a="http://schemas.openxmlformats.org/drawingml/2006/main">
               <a:ext uri="{FF2B5EF4-FFF2-40B4-BE49-F238E27FC236}">
-                <a16:creationId xmlns:a16="http://schemas.microsoft.com/office/drawing/2014/main" id="{E29CF8D1-452F-4221-AFD0-30E12A3BBA2F}"/>
+                <a16:creationId xmlns:a16="http://schemas.microsoft.com/office/drawing/2014/main" id="{BBDA2065-297A-4878-BC2D-78C4D0F99B04}"/>
               </a:ext>
             </a:extLst>
           </p:cNvPr>
@@ -17599,7 +18306,7 @@
           <p:cNvPr id="13" name="">
             <a:extLst xmlns:a="http://schemas.openxmlformats.org/drawingml/2006/main">
               <a:ext uri="{FF2B5EF4-FFF2-40B4-BE49-F238E27FC236}">
-                <a16:creationId xmlns:a16="http://schemas.microsoft.com/office/drawing/2014/main" id="{A0CFBAA1-EF71-46AD-8526-B295D87C0C8A}"/>
+                <a16:creationId xmlns:a16="http://schemas.microsoft.com/office/drawing/2014/main" id="{258B8BF2-960E-4908-B5F2-A1A095762CE4}"/>
               </a:ext>
             </a:extLst>
           </p:cNvPr>
@@ -17632,7 +18339,7 @@
           <p:cNvPr id="14" name="">
             <a:extLst xmlns:a="http://schemas.openxmlformats.org/drawingml/2006/main">
               <a:ext uri="{FF2B5EF4-FFF2-40B4-BE49-F238E27FC236}">
-                <a16:creationId xmlns:a16="http://schemas.microsoft.com/office/drawing/2014/main" id="{DDD199D1-DE35-4D8A-BA15-12EA50B78A8A}"/>
+                <a16:creationId xmlns:a16="http://schemas.microsoft.com/office/drawing/2014/main" id="{1263B89E-5316-4D71-AB5F-BACF130338CC}"/>
               </a:ext>
             </a:extLst>
           </p:cNvPr>
@@ -17682,7 +18389,7 @@
           <p:cNvPr id="15" name="">
             <a:extLst xmlns:a="http://schemas.openxmlformats.org/drawingml/2006/main">
               <a:ext uri="{FF2B5EF4-FFF2-40B4-BE49-F238E27FC236}">
-                <a16:creationId xmlns:a16="http://schemas.microsoft.com/office/drawing/2014/main" id="{231F5F05-B783-494D-8607-0F0ED3E3A311}"/>
+                <a16:creationId xmlns:a16="http://schemas.microsoft.com/office/drawing/2014/main" id="{EAEB1ADC-6362-4B61-8401-22F4243ED02E}"/>
               </a:ext>
             </a:extLst>
           </p:cNvPr>
@@ -17732,7 +18439,7 @@
           <p:cNvPr id="16" name="">
             <a:extLst xmlns:a="http://schemas.openxmlformats.org/drawingml/2006/main">
               <a:ext uri="{FF2B5EF4-FFF2-40B4-BE49-F238E27FC236}">
-                <a16:creationId xmlns:a16="http://schemas.microsoft.com/office/drawing/2014/main" id="{B950A283-4116-4EA3-8999-4F00C78AF284}"/>
+                <a16:creationId xmlns:a16="http://schemas.microsoft.com/office/drawing/2014/main" id="{0E1BEA66-3708-4B86-9325-26CA7DF498C8}"/>
               </a:ext>
             </a:extLst>
           </p:cNvPr>
@@ -17782,7 +18489,7 @@
           <p:cNvPr id="17" name="">
             <a:extLst xmlns:a="http://schemas.openxmlformats.org/drawingml/2006/main">
               <a:ext uri="{FF2B5EF4-FFF2-40B4-BE49-F238E27FC236}">
-                <a16:creationId xmlns:a16="http://schemas.microsoft.com/office/drawing/2014/main" id="{E4B63EAC-DBB3-42AA-8BA4-84762857192C}"/>
+                <a16:creationId xmlns:a16="http://schemas.microsoft.com/office/drawing/2014/main" id="{88DB2C95-E170-4206-8D0D-F33B4F901434}"/>
               </a:ext>
             </a:extLst>
           </p:cNvPr>
@@ -17815,7 +18522,7 @@
           <p:cNvPr id="18" name="">
             <a:extLst xmlns:a="http://schemas.openxmlformats.org/drawingml/2006/main">
               <a:ext uri="{FF2B5EF4-FFF2-40B4-BE49-F238E27FC236}">
-                <a16:creationId xmlns:a16="http://schemas.microsoft.com/office/drawing/2014/main" id="{00BD21C2-2A2E-46A8-B939-EC137CBC49AE}"/>
+                <a16:creationId xmlns:a16="http://schemas.microsoft.com/office/drawing/2014/main" id="{2DEF762F-41DC-4B9D-88F6-38ED3A6BB44A}"/>
               </a:ext>
             </a:extLst>
           </p:cNvPr>
@@ -17865,7 +18572,7 @@
           <p:cNvPr id="19" name="">
             <a:extLst xmlns:a="http://schemas.openxmlformats.org/drawingml/2006/main">
               <a:ext uri="{FF2B5EF4-FFF2-40B4-BE49-F238E27FC236}">
-                <a16:creationId xmlns:a16="http://schemas.microsoft.com/office/drawing/2014/main" id="{05D99847-F2C4-4145-9284-0B7695361D82}"/>
+                <a16:creationId xmlns:a16="http://schemas.microsoft.com/office/drawing/2014/main" id="{015ECA16-E29A-4B7B-93FE-2F0913CAECCB}"/>
               </a:ext>
             </a:extLst>
           </p:cNvPr>
@@ -17915,7 +18622,7 @@
           <p:cNvPr id="20" name="">
             <a:extLst xmlns:a="http://schemas.openxmlformats.org/drawingml/2006/main">
               <a:ext uri="{FF2B5EF4-FFF2-40B4-BE49-F238E27FC236}">
-                <a16:creationId xmlns:a16="http://schemas.microsoft.com/office/drawing/2014/main" id="{971AAE16-9438-4F8F-B289-B5D1CAAC7067}"/>
+                <a16:creationId xmlns:a16="http://schemas.microsoft.com/office/drawing/2014/main" id="{4C9A86E9-3DDB-4EFA-9B61-94DB9798E664}"/>
               </a:ext>
             </a:extLst>
           </p:cNvPr>
@@ -17965,7 +18672,7 @@
           <p:cNvPr id="21" name="">
             <a:extLst xmlns:a="http://schemas.openxmlformats.org/drawingml/2006/main">
               <a:ext uri="{FF2B5EF4-FFF2-40B4-BE49-F238E27FC236}">
-                <a16:creationId xmlns:a16="http://schemas.microsoft.com/office/drawing/2014/main" id="{83EBBC04-0DD5-4E9E-8FC1-257757752F47}"/>
+                <a16:creationId xmlns:a16="http://schemas.microsoft.com/office/drawing/2014/main" id="{39508F1A-7BA6-4330-9BCD-87947EBDC2FC}"/>
               </a:ext>
             </a:extLst>
           </p:cNvPr>
@@ -17998,7 +18705,7 @@
           <p:cNvPr id="22" name="">
             <a:extLst xmlns:a="http://schemas.openxmlformats.org/drawingml/2006/main">
               <a:ext uri="{FF2B5EF4-FFF2-40B4-BE49-F238E27FC236}">
-                <a16:creationId xmlns:a16="http://schemas.microsoft.com/office/drawing/2014/main" id="{A20EBB37-2A62-4B45-ADBE-45890A6CD55D}"/>
+                <a16:creationId xmlns:a16="http://schemas.microsoft.com/office/drawing/2014/main" id="{C133972D-954E-4E40-ADF4-DC6A0FB2A8AE}"/>
               </a:ext>
             </a:extLst>
           </p:cNvPr>
@@ -18048,7 +18755,7 @@
           <p:cNvPr id="23" name="">
             <a:extLst xmlns:a="http://schemas.openxmlformats.org/drawingml/2006/main">
               <a:ext uri="{FF2B5EF4-FFF2-40B4-BE49-F238E27FC236}">
-                <a16:creationId xmlns:a16="http://schemas.microsoft.com/office/drawing/2014/main" id="{161131E3-53A6-4C01-9FFC-40F5E45004D1}"/>
+                <a16:creationId xmlns:a16="http://schemas.microsoft.com/office/drawing/2014/main" id="{C9192614-F77D-4A7F-94C8-B6B89166135F}"/>
               </a:ext>
             </a:extLst>
           </p:cNvPr>
@@ -18098,7 +18805,7 @@
           <p:cNvPr id="24" name="">
             <a:extLst xmlns:a="http://schemas.openxmlformats.org/drawingml/2006/main">
               <a:ext uri="{FF2B5EF4-FFF2-40B4-BE49-F238E27FC236}">
-                <a16:creationId xmlns:a16="http://schemas.microsoft.com/office/drawing/2014/main" id="{A25F459A-F2EF-4087-A114-768BD2DF053E}"/>
+                <a16:creationId xmlns:a16="http://schemas.microsoft.com/office/drawing/2014/main" id="{0124407E-8DC8-409F-A09C-98874411AD6B}"/>
               </a:ext>
             </a:extLst>
           </p:cNvPr>
@@ -18148,7 +18855,7 @@
           <p:cNvPr id="25" name="">
             <a:extLst xmlns:a="http://schemas.openxmlformats.org/drawingml/2006/main">
               <a:ext uri="{FF2B5EF4-FFF2-40B4-BE49-F238E27FC236}">
-                <a16:creationId xmlns:a16="http://schemas.microsoft.com/office/drawing/2014/main" id="{14601A7B-5826-4ED4-A5CA-8E6FEF5E2688}"/>
+                <a16:creationId xmlns:a16="http://schemas.microsoft.com/office/drawing/2014/main" id="{3A2BE59A-9C08-4AA1-9420-0DAB1D1C753C}"/>
               </a:ext>
             </a:extLst>
           </p:cNvPr>
@@ -18181,7 +18888,7 @@
           <p:cNvPr id="26" name="">
             <a:extLst xmlns:a="http://schemas.openxmlformats.org/drawingml/2006/main">
               <a:ext uri="{FF2B5EF4-FFF2-40B4-BE49-F238E27FC236}">
-                <a16:creationId xmlns:a16="http://schemas.microsoft.com/office/drawing/2014/main" id="{D369F6B4-52E7-48FD-B33C-E12B6C60477B}"/>
+                <a16:creationId xmlns:a16="http://schemas.microsoft.com/office/drawing/2014/main" id="{2FB11434-1F81-4E7C-8ABC-18FCEDE80439}"/>
               </a:ext>
             </a:extLst>
           </p:cNvPr>
@@ -18231,7 +18938,7 @@
           <p:cNvPr id="27" name="">
             <a:extLst xmlns:a="http://schemas.openxmlformats.org/drawingml/2006/main">
               <a:ext uri="{FF2B5EF4-FFF2-40B4-BE49-F238E27FC236}">
-                <a16:creationId xmlns:a16="http://schemas.microsoft.com/office/drawing/2014/main" id="{D2E344C1-4E68-4541-9B92-CF95C512A527}"/>
+                <a16:creationId xmlns:a16="http://schemas.microsoft.com/office/drawing/2014/main" id="{10EB5ED6-F0AB-43B1-A402-AD0B721ACEB7}"/>
               </a:ext>
             </a:extLst>
           </p:cNvPr>
@@ -18281,7 +18988,7 @@
           <p:cNvPr id="28" name="">
             <a:extLst xmlns:a="http://schemas.openxmlformats.org/drawingml/2006/main">
               <a:ext uri="{FF2B5EF4-FFF2-40B4-BE49-F238E27FC236}">
-                <a16:creationId xmlns:a16="http://schemas.microsoft.com/office/drawing/2014/main" id="{0FBE27D8-FC35-4C8F-A769-9D594DBEFC6E}"/>
+                <a16:creationId xmlns:a16="http://schemas.microsoft.com/office/drawing/2014/main" id="{C9C18D72-AFC0-4078-B185-80AE8502B9B1}"/>
               </a:ext>
             </a:extLst>
           </p:cNvPr>
@@ -18331,7 +19038,7 @@
           <p:cNvPr id="29" name="">
             <a:extLst xmlns:a="http://schemas.openxmlformats.org/drawingml/2006/main">
               <a:ext uri="{FF2B5EF4-FFF2-40B4-BE49-F238E27FC236}">
-                <a16:creationId xmlns:a16="http://schemas.microsoft.com/office/drawing/2014/main" id="{2CD934D8-A60A-44F7-A9BB-424BAF8B0E73}"/>
+                <a16:creationId xmlns:a16="http://schemas.microsoft.com/office/drawing/2014/main" id="{993F0A96-7D6C-4320-92D3-CB86F6FEA8DE}"/>
               </a:ext>
             </a:extLst>
           </p:cNvPr>
@@ -18364,7 +19071,7 @@
           <p:cNvPr id="30" name="">
             <a:extLst xmlns:a="http://schemas.openxmlformats.org/drawingml/2006/main">
               <a:ext uri="{FF2B5EF4-FFF2-40B4-BE49-F238E27FC236}">
-                <a16:creationId xmlns:a16="http://schemas.microsoft.com/office/drawing/2014/main" id="{B81FE487-3F3D-4F66-8101-CDEBA1E98981}"/>
+                <a16:creationId xmlns:a16="http://schemas.microsoft.com/office/drawing/2014/main" id="{7ABD7E30-4DAB-4015-A432-FF2EDB4BECEF}"/>
               </a:ext>
             </a:extLst>
           </p:cNvPr>
@@ -18414,7 +19121,7 @@
           <p:cNvPr id="31" name="">
             <a:extLst xmlns:a="http://schemas.openxmlformats.org/drawingml/2006/main">
               <a:ext uri="{FF2B5EF4-FFF2-40B4-BE49-F238E27FC236}">
-                <a16:creationId xmlns:a16="http://schemas.microsoft.com/office/drawing/2014/main" id="{DF0760A6-C090-4F9A-930B-7D1AF5CDD6A8}"/>
+                <a16:creationId xmlns:a16="http://schemas.microsoft.com/office/drawing/2014/main" id="{188D3305-B807-46A0-A1B9-47FFC7D41116}"/>
               </a:ext>
             </a:extLst>
           </p:cNvPr>
@@ -18447,7 +19154,7 @@
           <p:cNvPr id="32" name="">
             <a:extLst xmlns:a="http://schemas.openxmlformats.org/drawingml/2006/main">
               <a:ext uri="{FF2B5EF4-FFF2-40B4-BE49-F238E27FC236}">
-                <a16:creationId xmlns:a16="http://schemas.microsoft.com/office/drawing/2014/main" id="{368BAE59-E615-4258-878C-552E5E09C28B}"/>
+                <a16:creationId xmlns:a16="http://schemas.microsoft.com/office/drawing/2014/main" id="{BEE0DFAE-DCDA-4878-8764-766FB9B6D0DE}"/>
               </a:ext>
             </a:extLst>
           </p:cNvPr>
@@ -18497,7 +19204,7 @@
           <p:cNvPr id="33" name="">
             <a:extLst xmlns:a="http://schemas.openxmlformats.org/drawingml/2006/main">
               <a:ext uri="{FF2B5EF4-FFF2-40B4-BE49-F238E27FC236}">
-                <a16:creationId xmlns:a16="http://schemas.microsoft.com/office/drawing/2014/main" id="{23A92552-6282-4C77-A0A4-B1C47EAFB3A6}"/>
+                <a16:creationId xmlns:a16="http://schemas.microsoft.com/office/drawing/2014/main" id="{73D5D03A-81E0-4B22-8118-7F61DAE938E2}"/>
               </a:ext>
             </a:extLst>
           </p:cNvPr>
@@ -18530,7 +19237,7 @@
           <p:cNvPr id="34" name="">
             <a:extLst xmlns:a="http://schemas.openxmlformats.org/drawingml/2006/main">
               <a:ext uri="{FF2B5EF4-FFF2-40B4-BE49-F238E27FC236}">
-                <a16:creationId xmlns:a16="http://schemas.microsoft.com/office/drawing/2014/main" id="{5A107609-3283-4CA3-81D7-771238564AA2}"/>
+                <a16:creationId xmlns:a16="http://schemas.microsoft.com/office/drawing/2014/main" id="{26D0FD02-15DF-4470-AE60-D24305159B3D}"/>
               </a:ext>
             </a:extLst>
           </p:cNvPr>
@@ -18580,7 +19287,7 @@
           <p:cNvPr id="35" name="">
             <a:extLst xmlns:a="http://schemas.openxmlformats.org/drawingml/2006/main">
               <a:ext uri="{FF2B5EF4-FFF2-40B4-BE49-F238E27FC236}">
-                <a16:creationId xmlns:a16="http://schemas.microsoft.com/office/drawing/2014/main" id="{BADE1B0A-5760-4748-A5F2-BC42BEDF5B80}"/>
+                <a16:creationId xmlns:a16="http://schemas.microsoft.com/office/drawing/2014/main" id="{73192185-917B-4679-ACAD-4D9D1807102A}"/>
               </a:ext>
             </a:extLst>
           </p:cNvPr>
@@ -18628,7 +19335,7 @@
     </p:spTree>
     <p:extLst>
       <p:ext uri="{BB962C8B-B14F-4D97-AF65-F5344CB8AC3E}">
-        <p14:creationId xmlns:p14="http://schemas.microsoft.com/office/powerpoint/2010/main" val="676539882"/>
+        <p14:creationId xmlns:p14="http://schemas.microsoft.com/office/powerpoint/2010/main" val="770602214"/>
       </p:ext>
     </p:extLst>
   </p:cSld>
@@ -18659,7 +19366,7 @@
           <p:cNvPr id="6" name="">
             <a:extLst xmlns:a="http://schemas.openxmlformats.org/drawingml/2006/main">
               <a:ext uri="{FF2B5EF4-FFF2-40B4-BE49-F238E27FC236}">
-                <a16:creationId xmlns:a16="http://schemas.microsoft.com/office/drawing/2014/main" id="{B1D6EFD6-AB3A-454A-A4AA-9A11F9BC36AD}"/>
+                <a16:creationId xmlns:a16="http://schemas.microsoft.com/office/drawing/2014/main" id="{9A9AAC26-5E90-402D-83A4-96335A8A7FFB}"/>
               </a:ext>
             </a:extLst>
           </p:cNvPr>
@@ -18709,7 +19416,7 @@
           <p:cNvPr id="2" name="">
             <a:extLst xmlns:a="http://schemas.openxmlformats.org/drawingml/2006/main">
               <a:ext uri="{FF2B5EF4-FFF2-40B4-BE49-F238E27FC236}">
-                <a16:creationId xmlns:a16="http://schemas.microsoft.com/office/drawing/2014/main" id="{B2194B3F-F76E-4E9E-B327-D06A32E0449E}"/>
+                <a16:creationId xmlns:a16="http://schemas.microsoft.com/office/drawing/2014/main" id="{C0ED4EFE-D7A7-4189-A795-01E87C0B9C74}"/>
               </a:ext>
             </a:extLst>
           </p:cNvPr>
@@ -18776,7 +19483,7 @@
           <p:cNvPr id="3" name="">
             <a:extLst xmlns:a="http://schemas.openxmlformats.org/drawingml/2006/main">
               <a:ext uri="{FF2B5EF4-FFF2-40B4-BE49-F238E27FC236}">
-                <a16:creationId xmlns:a16="http://schemas.microsoft.com/office/drawing/2014/main" id="{75828EAF-B9F2-4E97-B6C9-5ED6532067AD}"/>
+                <a16:creationId xmlns:a16="http://schemas.microsoft.com/office/drawing/2014/main" id="{CB8A4F01-7DD3-4E15-AF86-BDF4549326F2}"/>
               </a:ext>
             </a:extLst>
           </p:cNvPr>
@@ -18826,7 +19533,7 @@
           <p:cNvPr id="4" name="">
             <a:extLst xmlns:a="http://schemas.openxmlformats.org/drawingml/2006/main">
               <a:ext uri="{FF2B5EF4-FFF2-40B4-BE49-F238E27FC236}">
-                <a16:creationId xmlns:a16="http://schemas.microsoft.com/office/drawing/2014/main" id="{3A060F6C-4176-4FB8-B7AB-BDA2E4BEDC4B}"/>
+                <a16:creationId xmlns:a16="http://schemas.microsoft.com/office/drawing/2014/main" id="{33F260A3-C959-400B-8AF5-DD6FDFBFC6E3}"/>
               </a:ext>
             </a:extLst>
           </p:cNvPr>
@@ -18876,7 +19583,7 @@
           <p:cNvPr id="5" name="">
             <a:extLst xmlns:a="http://schemas.openxmlformats.org/drawingml/2006/main">
               <a:ext uri="{FF2B5EF4-FFF2-40B4-BE49-F238E27FC236}">
-                <a16:creationId xmlns:a16="http://schemas.microsoft.com/office/drawing/2014/main" id="{BE54BE9A-18C6-41B7-B415-77EC3A9798BE}"/>
+                <a16:creationId xmlns:a16="http://schemas.microsoft.com/office/drawing/2014/main" id="{F3F49752-42B2-4E90-8811-D45C15984F0F}"/>
               </a:ext>
             </a:extLst>
           </p:cNvPr>
@@ -18924,7 +19631,7 @@
     </p:spTree>
     <p:extLst>
       <p:ext uri="{BB962C8B-B14F-4D97-AF65-F5344CB8AC3E}">
-        <p14:creationId xmlns:p14="http://schemas.microsoft.com/office/powerpoint/2010/main" val="1580971231"/>
+        <p14:creationId xmlns:p14="http://schemas.microsoft.com/office/powerpoint/2010/main" val="2062802158"/>
       </p:ext>
     </p:extLst>
   </p:cSld>
@@ -18955,7 +19662,7 @@
           <p:cNvPr id="17" name="">
             <a:extLst xmlns:a="http://schemas.openxmlformats.org/drawingml/2006/main">
               <a:ext uri="{FF2B5EF4-FFF2-40B4-BE49-F238E27FC236}">
-                <a16:creationId xmlns:a16="http://schemas.microsoft.com/office/drawing/2014/main" id="{126F072C-44C4-4944-A5DA-6E4316642E76}"/>
+                <a16:creationId xmlns:a16="http://schemas.microsoft.com/office/drawing/2014/main" id="{C329BC25-6E8C-4967-89A8-B683AC82A277}"/>
               </a:ext>
             </a:extLst>
           </p:cNvPr>
@@ -19005,7 +19712,7 @@
           <p:cNvPr id="2" name="">
             <a:extLst xmlns:a="http://schemas.openxmlformats.org/drawingml/2006/main">
               <a:ext uri="{FF2B5EF4-FFF2-40B4-BE49-F238E27FC236}">
-                <a16:creationId xmlns:a16="http://schemas.microsoft.com/office/drawing/2014/main" id="{999E03F6-F8FA-449C-89AE-CB860C703D64}"/>
+                <a16:creationId xmlns:a16="http://schemas.microsoft.com/office/drawing/2014/main" id="{ADD9754D-0B93-418F-9903-108979D6848C}"/>
               </a:ext>
             </a:extLst>
           </p:cNvPr>
@@ -19055,7 +19762,7 @@
           <p:cNvPr id="3" name="">
             <a:extLst xmlns:a="http://schemas.openxmlformats.org/drawingml/2006/main">
               <a:ext uri="{FF2B5EF4-FFF2-40B4-BE49-F238E27FC236}">
-                <a16:creationId xmlns:a16="http://schemas.microsoft.com/office/drawing/2014/main" id="{B4490F36-FBC2-41E6-9D55-E10498C5FF93}"/>
+                <a16:creationId xmlns:a16="http://schemas.microsoft.com/office/drawing/2014/main" id="{3D6045E5-F526-4DDF-9D18-5248EE961889}"/>
               </a:ext>
             </a:extLst>
           </p:cNvPr>
@@ -19088,7 +19795,7 @@
           <p:cNvPr id="4" name="">
             <a:extLst xmlns:a="http://schemas.openxmlformats.org/drawingml/2006/main">
               <a:ext uri="{FF2B5EF4-FFF2-40B4-BE49-F238E27FC236}">
-                <a16:creationId xmlns:a16="http://schemas.microsoft.com/office/drawing/2014/main" id="{D5ACF9A2-19F8-4593-952A-C01194BEEF8C}"/>
+                <a16:creationId xmlns:a16="http://schemas.microsoft.com/office/drawing/2014/main" id="{179453E3-3C5B-4C7C-A97B-509F3EB9BE1A}"/>
               </a:ext>
             </a:extLst>
           </p:cNvPr>
@@ -19138,7 +19845,7 @@
           <p:cNvPr id="5" name="">
             <a:extLst xmlns:a="http://schemas.openxmlformats.org/drawingml/2006/main">
               <a:ext uri="{FF2B5EF4-FFF2-40B4-BE49-F238E27FC236}">
-                <a16:creationId xmlns:a16="http://schemas.microsoft.com/office/drawing/2014/main" id="{1FCBEA80-0835-4A43-BA13-0D6703B34F95}"/>
+                <a16:creationId xmlns:a16="http://schemas.microsoft.com/office/drawing/2014/main" id="{3710C933-9B91-4152-BE99-34BE20BD02C3}"/>
               </a:ext>
             </a:extLst>
           </p:cNvPr>
@@ -19192,7 +19899,7 @@
           <p:nvPr/>
         </p:nvPicPr>
         <p:blipFill>
-          <a:blip xmlns:r="http://schemas.openxmlformats.org/officeDocument/2006/relationships" xmlns:a="http://schemas.openxmlformats.org/drawingml/2006/main" r:embed="R104cf129f61f46c0"/>
+          <a:blip xmlns:r="http://schemas.openxmlformats.org/officeDocument/2006/relationships" xmlns:a="http://schemas.openxmlformats.org/drawingml/2006/main" r:embed="Raea73abb39c943ec"/>
           <a:stretch xmlns:a="http://schemas.openxmlformats.org/drawingml/2006/main"/>
         </p:blipFill>
         <p:spPr>
@@ -19210,7 +19917,7 @@
           <p:cNvPr id="7" name="">
             <a:extLst xmlns:a="http://schemas.openxmlformats.org/drawingml/2006/main">
               <a:ext uri="{FF2B5EF4-FFF2-40B4-BE49-F238E27FC236}">
-                <a16:creationId xmlns:a16="http://schemas.microsoft.com/office/drawing/2014/main" id="{EA06F44B-7363-41D7-BA59-52A2D8AB0830}"/>
+                <a16:creationId xmlns:a16="http://schemas.microsoft.com/office/drawing/2014/main" id="{C4CCB7B7-326C-45D0-B5C0-762AA5C39515}"/>
               </a:ext>
             </a:extLst>
           </p:cNvPr>
@@ -19243,7 +19950,7 @@
           <p:cNvPr id="8" name="">
             <a:extLst xmlns:a="http://schemas.openxmlformats.org/drawingml/2006/main">
               <a:ext uri="{FF2B5EF4-FFF2-40B4-BE49-F238E27FC236}">
-                <a16:creationId xmlns:a16="http://schemas.microsoft.com/office/drawing/2014/main" id="{D0C06CF9-4436-480A-90A6-390431D964FA}"/>
+                <a16:creationId xmlns:a16="http://schemas.microsoft.com/office/drawing/2014/main" id="{24829EE8-4FF8-474B-A605-6454539611FC}"/>
               </a:ext>
             </a:extLst>
           </p:cNvPr>
@@ -19293,7 +20000,7 @@
           <p:cNvPr id="9" name="">
             <a:extLst xmlns:a="http://schemas.openxmlformats.org/drawingml/2006/main">
               <a:ext uri="{FF2B5EF4-FFF2-40B4-BE49-F238E27FC236}">
-                <a16:creationId xmlns:a16="http://schemas.microsoft.com/office/drawing/2014/main" id="{C36C529B-176E-44B5-BCA3-894EB0EB8196}"/>
+                <a16:creationId xmlns:a16="http://schemas.microsoft.com/office/drawing/2014/main" id="{0C4CC94A-4F37-4D63-A3BC-FE39818E48AF}"/>
               </a:ext>
             </a:extLst>
           </p:cNvPr>
@@ -19326,7 +20033,7 @@
           <p:cNvPr id="10" name="">
             <a:extLst xmlns:a="http://schemas.openxmlformats.org/drawingml/2006/main">
               <a:ext uri="{FF2B5EF4-FFF2-40B4-BE49-F238E27FC236}">
-                <a16:creationId xmlns:a16="http://schemas.microsoft.com/office/drawing/2014/main" id="{4D5440C3-BE11-423A-BE56-CAE8DBA15858}"/>
+                <a16:creationId xmlns:a16="http://schemas.microsoft.com/office/drawing/2014/main" id="{7B80D688-0331-44B7-91D5-67E852CF1DC3}"/>
               </a:ext>
             </a:extLst>
           </p:cNvPr>
@@ -19376,7 +20083,7 @@
           <p:cNvPr id="11" name="">
             <a:extLst xmlns:a="http://schemas.openxmlformats.org/drawingml/2006/main">
               <a:ext uri="{FF2B5EF4-FFF2-40B4-BE49-F238E27FC236}">
-                <a16:creationId xmlns:a16="http://schemas.microsoft.com/office/drawing/2014/main" id="{D28E65E5-8982-46B0-8302-B0EDEAEE4736}"/>
+                <a16:creationId xmlns:a16="http://schemas.microsoft.com/office/drawing/2014/main" id="{260F2276-7036-48A7-BF06-9F67CC6B0AD9}"/>
               </a:ext>
             </a:extLst>
           </p:cNvPr>
@@ -19409,7 +20116,7 @@
           <p:cNvPr id="12" name="">
             <a:extLst xmlns:a="http://schemas.openxmlformats.org/drawingml/2006/main">
               <a:ext uri="{FF2B5EF4-FFF2-40B4-BE49-F238E27FC236}">
-                <a16:creationId xmlns:a16="http://schemas.microsoft.com/office/drawing/2014/main" id="{0266AC35-09A7-4F9C-842E-0CEDFBD60379}"/>
+                <a16:creationId xmlns:a16="http://schemas.microsoft.com/office/drawing/2014/main" id="{97C6D67B-7AAC-40F5-ABA6-C7AE39C0A191}"/>
               </a:ext>
             </a:extLst>
           </p:cNvPr>
@@ -19459,7 +20166,7 @@
           <p:cNvPr id="13" name="">
             <a:extLst xmlns:a="http://schemas.openxmlformats.org/drawingml/2006/main">
               <a:ext uri="{FF2B5EF4-FFF2-40B4-BE49-F238E27FC236}">
-                <a16:creationId xmlns:a16="http://schemas.microsoft.com/office/drawing/2014/main" id="{4142728B-B79B-4CDB-B8A1-51383FA4B4C9}"/>
+                <a16:creationId xmlns:a16="http://schemas.microsoft.com/office/drawing/2014/main" id="{2D8CD665-AC41-40F1-9396-00362C9BF864}"/>
               </a:ext>
             </a:extLst>
           </p:cNvPr>
@@ -19492,7 +20199,7 @@
           <p:cNvPr id="14" name="">
             <a:extLst xmlns:a="http://schemas.openxmlformats.org/drawingml/2006/main">
               <a:ext uri="{FF2B5EF4-FFF2-40B4-BE49-F238E27FC236}">
-                <a16:creationId xmlns:a16="http://schemas.microsoft.com/office/drawing/2014/main" id="{93379051-8917-469D-9094-C3EA519E8346}"/>
+                <a16:creationId xmlns:a16="http://schemas.microsoft.com/office/drawing/2014/main" id="{D67E1552-2627-4B65-9F48-A8042AFFA6CB}"/>
               </a:ext>
             </a:extLst>
           </p:cNvPr>
@@ -19542,7 +20249,7 @@
           <p:cNvPr id="15" name="">
             <a:extLst xmlns:a="http://schemas.openxmlformats.org/drawingml/2006/main">
               <a:ext uri="{FF2B5EF4-FFF2-40B4-BE49-F238E27FC236}">
-                <a16:creationId xmlns:a16="http://schemas.microsoft.com/office/drawing/2014/main" id="{97DD2695-3D9F-43D6-9A04-9C69BC79CF40}"/>
+                <a16:creationId xmlns:a16="http://schemas.microsoft.com/office/drawing/2014/main" id="{7B7B3B56-F458-4F3C-B636-F7EDD345A735}"/>
               </a:ext>
             </a:extLst>
           </p:cNvPr>
@@ -19575,7 +20282,7 @@
           <p:cNvPr id="16" name="">
             <a:extLst xmlns:a="http://schemas.openxmlformats.org/drawingml/2006/main">
               <a:ext uri="{FF2B5EF4-FFF2-40B4-BE49-F238E27FC236}">
-                <a16:creationId xmlns:a16="http://schemas.microsoft.com/office/drawing/2014/main" id="{235975F5-BBA8-4F46-B2B8-8DB796D15B0D}"/>
+                <a16:creationId xmlns:a16="http://schemas.microsoft.com/office/drawing/2014/main" id="{3DE749AF-6F35-4369-94F9-AD4D865C64EC}"/>
               </a:ext>
             </a:extLst>
           </p:cNvPr>
@@ -19623,7 +20330,7 @@
     </p:spTree>
     <p:extLst>
       <p:ext uri="{BB962C8B-B14F-4D97-AF65-F5344CB8AC3E}">
-        <p14:creationId xmlns:p14="http://schemas.microsoft.com/office/powerpoint/2010/main" val="775567583"/>
+        <p14:creationId xmlns:p14="http://schemas.microsoft.com/office/powerpoint/2010/main" val="523644090"/>
       </p:ext>
     </p:extLst>
   </p:cSld>
@@ -19654,7 +20361,7 @@
           <p:cNvPr id="17" name="">
             <a:extLst xmlns:a="http://schemas.openxmlformats.org/drawingml/2006/main">
               <a:ext uri="{FF2B5EF4-FFF2-40B4-BE49-F238E27FC236}">
-                <a16:creationId xmlns:a16="http://schemas.microsoft.com/office/drawing/2014/main" id="{856F5E9D-075F-4672-B070-5B8A2EFEC82C}"/>
+                <a16:creationId xmlns:a16="http://schemas.microsoft.com/office/drawing/2014/main" id="{B09C2269-D533-4C5F-9A55-4C5EF684EE66}"/>
               </a:ext>
             </a:extLst>
           </p:cNvPr>
@@ -19704,7 +20411,7 @@
           <p:cNvPr id="2" name="">
             <a:extLst xmlns:a="http://schemas.openxmlformats.org/drawingml/2006/main">
               <a:ext uri="{FF2B5EF4-FFF2-40B4-BE49-F238E27FC236}">
-                <a16:creationId xmlns:a16="http://schemas.microsoft.com/office/drawing/2014/main" id="{E2CD130B-BF0B-4255-896C-41D05FE372CE}"/>
+                <a16:creationId xmlns:a16="http://schemas.microsoft.com/office/drawing/2014/main" id="{B9AAE009-8C34-4E35-9487-E0B8B9FC65B9}"/>
               </a:ext>
             </a:extLst>
           </p:cNvPr>
@@ -19754,7 +20461,7 @@
           <p:cNvPr id="3" name="">
             <a:extLst xmlns:a="http://schemas.openxmlformats.org/drawingml/2006/main">
               <a:ext uri="{FF2B5EF4-FFF2-40B4-BE49-F238E27FC236}">
-                <a16:creationId xmlns:a16="http://schemas.microsoft.com/office/drawing/2014/main" id="{54CB4D87-172B-453A-9F83-8105BE6B43AF}"/>
+                <a16:creationId xmlns:a16="http://schemas.microsoft.com/office/drawing/2014/main" id="{AFF0F2C5-747C-46BE-B4F8-BD2014DA81E4}"/>
               </a:ext>
             </a:extLst>
           </p:cNvPr>
@@ -19787,7 +20494,7 @@
           <p:cNvPr id="4" name="">
             <a:extLst xmlns:a="http://schemas.openxmlformats.org/drawingml/2006/main">
               <a:ext uri="{FF2B5EF4-FFF2-40B4-BE49-F238E27FC236}">
-                <a16:creationId xmlns:a16="http://schemas.microsoft.com/office/drawing/2014/main" id="{D574C8C9-22EB-48BF-A566-44FC3D3D26D5}"/>
+                <a16:creationId xmlns:a16="http://schemas.microsoft.com/office/drawing/2014/main" id="{0CA6EB35-2026-497A-9CEC-78B7DC9859DA}"/>
               </a:ext>
             </a:extLst>
           </p:cNvPr>
@@ -19837,7 +20544,7 @@
           <p:cNvPr id="5" name="">
             <a:extLst xmlns:a="http://schemas.openxmlformats.org/drawingml/2006/main">
               <a:ext uri="{FF2B5EF4-FFF2-40B4-BE49-F238E27FC236}">
-                <a16:creationId xmlns:a16="http://schemas.microsoft.com/office/drawing/2014/main" id="{54F5C50E-D947-462C-B9E7-3778950FBDEC}"/>
+                <a16:creationId xmlns:a16="http://schemas.microsoft.com/office/drawing/2014/main" id="{F6895976-0933-4FC1-9989-F7CF17720494}"/>
               </a:ext>
             </a:extLst>
           </p:cNvPr>
@@ -19891,7 +20598,7 @@
           <p:nvPr/>
         </p:nvPicPr>
         <p:blipFill>
-          <a:blip xmlns:r="http://schemas.openxmlformats.org/officeDocument/2006/relationships" xmlns:a="http://schemas.openxmlformats.org/drawingml/2006/main" r:embed="R4649929864db4b71"/>
+          <a:blip xmlns:r="http://schemas.openxmlformats.org/officeDocument/2006/relationships" xmlns:a="http://schemas.openxmlformats.org/drawingml/2006/main" r:embed="Rb447c0a942ac4cbe"/>
           <a:stretch xmlns:a="http://schemas.openxmlformats.org/drawingml/2006/main"/>
         </p:blipFill>
         <p:spPr>
@@ -19909,7 +20616,7 @@
           <p:cNvPr id="7" name="">
             <a:extLst xmlns:a="http://schemas.openxmlformats.org/drawingml/2006/main">
               <a:ext uri="{FF2B5EF4-FFF2-40B4-BE49-F238E27FC236}">
-                <a16:creationId xmlns:a16="http://schemas.microsoft.com/office/drawing/2014/main" id="{EA653FE6-FA40-4B0F-B67B-74D0A9A59863}"/>
+                <a16:creationId xmlns:a16="http://schemas.microsoft.com/office/drawing/2014/main" id="{0282C247-2123-4768-838B-43B6A9DE7C77}"/>
               </a:ext>
             </a:extLst>
           </p:cNvPr>
@@ -19942,7 +20649,7 @@
           <p:cNvPr id="8" name="">
             <a:extLst xmlns:a="http://schemas.openxmlformats.org/drawingml/2006/main">
               <a:ext uri="{FF2B5EF4-FFF2-40B4-BE49-F238E27FC236}">
-                <a16:creationId xmlns:a16="http://schemas.microsoft.com/office/drawing/2014/main" id="{3BBCF76A-589D-4DF5-8786-ED50C88EAA17}"/>
+                <a16:creationId xmlns:a16="http://schemas.microsoft.com/office/drawing/2014/main" id="{82D91624-4C8A-4598-8443-4CBEF82814F7}"/>
               </a:ext>
             </a:extLst>
           </p:cNvPr>
@@ -19992,7 +20699,7 @@
           <p:cNvPr id="9" name="">
             <a:extLst xmlns:a="http://schemas.openxmlformats.org/drawingml/2006/main">
               <a:ext uri="{FF2B5EF4-FFF2-40B4-BE49-F238E27FC236}">
-                <a16:creationId xmlns:a16="http://schemas.microsoft.com/office/drawing/2014/main" id="{24B091FB-5A4E-4D7B-BE19-7D9465C1AD5A}"/>
+                <a16:creationId xmlns:a16="http://schemas.microsoft.com/office/drawing/2014/main" id="{427385F8-E466-4060-80AA-6A4CDE0E81E1}"/>
               </a:ext>
             </a:extLst>
           </p:cNvPr>
@@ -20042,7 +20749,7 @@
           <p:cNvPr id="10" name="">
             <a:extLst xmlns:a="http://schemas.openxmlformats.org/drawingml/2006/main">
               <a:ext uri="{FF2B5EF4-FFF2-40B4-BE49-F238E27FC236}">
-                <a16:creationId xmlns:a16="http://schemas.microsoft.com/office/drawing/2014/main" id="{9BB3A4CD-B52F-41F0-B834-1A9772DE9CE9}"/>
+                <a16:creationId xmlns:a16="http://schemas.microsoft.com/office/drawing/2014/main" id="{46A8E319-CA2D-47BB-88B7-43D241F095C0}"/>
               </a:ext>
             </a:extLst>
           </p:cNvPr>
@@ -20092,7 +20799,7 @@
           <p:cNvPr id="11" name="">
             <a:extLst xmlns:a="http://schemas.openxmlformats.org/drawingml/2006/main">
               <a:ext uri="{FF2B5EF4-FFF2-40B4-BE49-F238E27FC236}">
-                <a16:creationId xmlns:a16="http://schemas.microsoft.com/office/drawing/2014/main" id="{51186336-62C3-4715-9165-6F6F5344634C}"/>
+                <a16:creationId xmlns:a16="http://schemas.microsoft.com/office/drawing/2014/main" id="{4454FF31-E57F-450A-A219-0F53C96F534A}"/>
               </a:ext>
             </a:extLst>
           </p:cNvPr>
@@ -20142,7 +20849,7 @@
           <p:cNvPr id="12" name="">
             <a:extLst xmlns:a="http://schemas.openxmlformats.org/drawingml/2006/main">
               <a:ext uri="{FF2B5EF4-FFF2-40B4-BE49-F238E27FC236}">
-                <a16:creationId xmlns:a16="http://schemas.microsoft.com/office/drawing/2014/main" id="{1D057555-7B0F-47C1-854C-6D9A02F5B1D4}"/>
+                <a16:creationId xmlns:a16="http://schemas.microsoft.com/office/drawing/2014/main" id="{D3BBA846-9E08-4075-9ECB-327B07CAD38F}"/>
               </a:ext>
             </a:extLst>
           </p:cNvPr>
@@ -20192,7 +20899,7 @@
           <p:cNvPr id="13" name="">
             <a:extLst xmlns:a="http://schemas.openxmlformats.org/drawingml/2006/main">
               <a:ext uri="{FF2B5EF4-FFF2-40B4-BE49-F238E27FC236}">
-                <a16:creationId xmlns:a16="http://schemas.microsoft.com/office/drawing/2014/main" id="{D17F3A28-B250-42CC-86E0-7DE4CE91F843}"/>
+                <a16:creationId xmlns:a16="http://schemas.microsoft.com/office/drawing/2014/main" id="{07C9AC3C-8C7F-4D73-80E5-7098A4B38E44}"/>
               </a:ext>
             </a:extLst>
           </p:cNvPr>
@@ -20225,7 +20932,7 @@
           <p:cNvPr id="14" name="">
             <a:extLst xmlns:a="http://schemas.openxmlformats.org/drawingml/2006/main">
               <a:ext uri="{FF2B5EF4-FFF2-40B4-BE49-F238E27FC236}">
-                <a16:creationId xmlns:a16="http://schemas.microsoft.com/office/drawing/2014/main" id="{29263262-901C-407A-A21E-62048894DC86}"/>
+                <a16:creationId xmlns:a16="http://schemas.microsoft.com/office/drawing/2014/main" id="{ABF44E0F-4EC6-4432-8917-75CD2D6D8849}"/>
               </a:ext>
             </a:extLst>
           </p:cNvPr>
@@ -20275,7 +20982,7 @@
           <p:cNvPr id="15" name="">
             <a:extLst xmlns:a="http://schemas.openxmlformats.org/drawingml/2006/main">
               <a:ext uri="{FF2B5EF4-FFF2-40B4-BE49-F238E27FC236}">
-                <a16:creationId xmlns:a16="http://schemas.microsoft.com/office/drawing/2014/main" id="{A2A4B3E6-CADD-445D-973B-127147513337}"/>
+                <a16:creationId xmlns:a16="http://schemas.microsoft.com/office/drawing/2014/main" id="{95D6AFC8-0BE3-4FDB-B1AF-A96E56B676A1}"/>
               </a:ext>
             </a:extLst>
           </p:cNvPr>
@@ -20308,7 +21015,7 @@
           <p:cNvPr id="16" name="">
             <a:extLst xmlns:a="http://schemas.openxmlformats.org/drawingml/2006/main">
               <a:ext uri="{FF2B5EF4-FFF2-40B4-BE49-F238E27FC236}">
-                <a16:creationId xmlns:a16="http://schemas.microsoft.com/office/drawing/2014/main" id="{880AF925-0ADE-49A8-964B-9BCB1F0E6476}"/>
+                <a16:creationId xmlns:a16="http://schemas.microsoft.com/office/drawing/2014/main" id="{CCE91360-159D-4AA1-9E4F-9BECE9C955A4}"/>
               </a:ext>
             </a:extLst>
           </p:cNvPr>
@@ -20356,7 +21063,7 @@
     </p:spTree>
     <p:extLst>
       <p:ext uri="{BB962C8B-B14F-4D97-AF65-F5344CB8AC3E}">
-        <p14:creationId xmlns:p14="http://schemas.microsoft.com/office/powerpoint/2010/main" val="53736426"/>
+        <p14:creationId xmlns:p14="http://schemas.microsoft.com/office/powerpoint/2010/main" val="1805999480"/>
       </p:ext>
     </p:extLst>
   </p:cSld>
@@ -20387,7 +21094,7 @@
           <p:cNvPr id="7" name="">
             <a:extLst xmlns:a="http://schemas.openxmlformats.org/drawingml/2006/main">
               <a:ext uri="{FF2B5EF4-FFF2-40B4-BE49-F238E27FC236}">
-                <a16:creationId xmlns:a16="http://schemas.microsoft.com/office/drawing/2014/main" id="{2F9E870D-7A63-4233-9757-C1506A1B4B46}"/>
+                <a16:creationId xmlns:a16="http://schemas.microsoft.com/office/drawing/2014/main" id="{446365F9-4079-4623-8BBD-F9EF9F5F2F9D}"/>
               </a:ext>
             </a:extLst>
           </p:cNvPr>
@@ -20437,7 +21144,7 @@
           <p:cNvPr id="2" name="">
             <a:extLst xmlns:a="http://schemas.openxmlformats.org/drawingml/2006/main">
               <a:ext uri="{FF2B5EF4-FFF2-40B4-BE49-F238E27FC236}">
-                <a16:creationId xmlns:a16="http://schemas.microsoft.com/office/drawing/2014/main" id="{538A616B-AD38-4108-A466-9D8383ADFB8E}"/>
+                <a16:creationId xmlns:a16="http://schemas.microsoft.com/office/drawing/2014/main" id="{DDCBE65B-D6C4-4909-BCA7-6D8E03A52B46}"/>
               </a:ext>
             </a:extLst>
           </p:cNvPr>
@@ -20487,7 +21194,7 @@
           <p:cNvPr id="3" name="">
             <a:extLst xmlns:a="http://schemas.openxmlformats.org/drawingml/2006/main">
               <a:ext uri="{FF2B5EF4-FFF2-40B4-BE49-F238E27FC236}">
-                <a16:creationId xmlns:a16="http://schemas.microsoft.com/office/drawing/2014/main" id="{12EA13F9-D0A2-4CD4-9B92-29F89A157AB0}"/>
+                <a16:creationId xmlns:a16="http://schemas.microsoft.com/office/drawing/2014/main" id="{D744D77C-2EDB-46E8-AD85-75FCE61CFFAF}"/>
               </a:ext>
             </a:extLst>
           </p:cNvPr>
@@ -20520,7 +21227,7 @@
           <p:cNvPr id="4" name="">
             <a:extLst xmlns:a="http://schemas.openxmlformats.org/drawingml/2006/main">
               <a:ext uri="{FF2B5EF4-FFF2-40B4-BE49-F238E27FC236}">
-                <a16:creationId xmlns:a16="http://schemas.microsoft.com/office/drawing/2014/main" id="{C2D87746-A2ED-4BA4-AFBA-C3B175296DAF}"/>
+                <a16:creationId xmlns:a16="http://schemas.microsoft.com/office/drawing/2014/main" id="{7DCAAE5D-5628-4B69-BD37-28F5CEAEE5B4}"/>
               </a:ext>
             </a:extLst>
           </p:cNvPr>
@@ -20570,7 +21277,7 @@
           <p:cNvPr id="5" name="">
             <a:extLst xmlns:a="http://schemas.openxmlformats.org/drawingml/2006/main">
               <a:ext uri="{FF2B5EF4-FFF2-40B4-BE49-F238E27FC236}">
-                <a16:creationId xmlns:a16="http://schemas.microsoft.com/office/drawing/2014/main" id="{29D91DF4-1BD6-439E-8230-4892A999CDC5}"/>
+                <a16:creationId xmlns:a16="http://schemas.microsoft.com/office/drawing/2014/main" id="{7D7B4772-0B4E-4EB2-8C2E-CC22C5C95AE5}"/>
               </a:ext>
             </a:extLst>
           </p:cNvPr>
@@ -20624,7 +21331,7 @@
           <p:nvPr/>
         </p:nvPicPr>
         <p:blipFill>
-          <a:blip xmlns:r="http://schemas.openxmlformats.org/officeDocument/2006/relationships" xmlns:a="http://schemas.openxmlformats.org/drawingml/2006/main" r:embed="Rca38c27e7f6b4d1b"/>
+          <a:blip xmlns:r="http://schemas.openxmlformats.org/officeDocument/2006/relationships" xmlns:a="http://schemas.openxmlformats.org/drawingml/2006/main" r:embed="R2490e3602c1d4bf2"/>
           <a:stretch xmlns:a="http://schemas.openxmlformats.org/drawingml/2006/main"/>
         </p:blipFill>
         <p:spPr>
@@ -20640,7 +21347,7 @@
     </p:spTree>
     <p:extLst>
       <p:ext uri="{BB962C8B-B14F-4D97-AF65-F5344CB8AC3E}">
-        <p14:creationId xmlns:p14="http://schemas.microsoft.com/office/powerpoint/2010/main" val="1616362873"/>
+        <p14:creationId xmlns:p14="http://schemas.microsoft.com/office/powerpoint/2010/main" val="1792631030"/>
       </p:ext>
     </p:extLst>
   </p:cSld>
@@ -20671,7 +21378,7 @@
           <p:cNvPr id="7" name="">
             <a:extLst xmlns:a="http://schemas.openxmlformats.org/drawingml/2006/main">
               <a:ext uri="{FF2B5EF4-FFF2-40B4-BE49-F238E27FC236}">
-                <a16:creationId xmlns:a16="http://schemas.microsoft.com/office/drawing/2014/main" id="{397C968A-4B14-4BF1-A5B0-7140A489FAF7}"/>
+                <a16:creationId xmlns:a16="http://schemas.microsoft.com/office/drawing/2014/main" id="{F3898648-BFC3-41E1-ACFD-16EBB5628EFD}"/>
               </a:ext>
             </a:extLst>
           </p:cNvPr>
@@ -20721,7 +21428,7 @@
           <p:cNvPr id="2" name="">
             <a:extLst xmlns:a="http://schemas.openxmlformats.org/drawingml/2006/main">
               <a:ext uri="{FF2B5EF4-FFF2-40B4-BE49-F238E27FC236}">
-                <a16:creationId xmlns:a16="http://schemas.microsoft.com/office/drawing/2014/main" id="{037E6238-C8D2-4F4B-A457-10DF9AE2F3AA}"/>
+                <a16:creationId xmlns:a16="http://schemas.microsoft.com/office/drawing/2014/main" id="{EED30C6A-8680-42A6-9537-08954EECA887}"/>
               </a:ext>
             </a:extLst>
           </p:cNvPr>
@@ -20771,7 +21478,7 @@
           <p:cNvPr id="3" name="">
             <a:extLst xmlns:a="http://schemas.openxmlformats.org/drawingml/2006/main">
               <a:ext uri="{FF2B5EF4-FFF2-40B4-BE49-F238E27FC236}">
-                <a16:creationId xmlns:a16="http://schemas.microsoft.com/office/drawing/2014/main" id="{FB6B218E-E590-4419-87BC-5A1EA184DE15}"/>
+                <a16:creationId xmlns:a16="http://schemas.microsoft.com/office/drawing/2014/main" id="{34212062-9598-4DBA-9830-FFDE3B0EF814}"/>
               </a:ext>
             </a:extLst>
           </p:cNvPr>
@@ -20804,7 +21511,7 @@
           <p:cNvPr id="4" name="">
             <a:extLst xmlns:a="http://schemas.openxmlformats.org/drawingml/2006/main">
               <a:ext uri="{FF2B5EF4-FFF2-40B4-BE49-F238E27FC236}">
-                <a16:creationId xmlns:a16="http://schemas.microsoft.com/office/drawing/2014/main" id="{AD7205B9-840B-40CD-BC73-96E189D2628E}"/>
+                <a16:creationId xmlns:a16="http://schemas.microsoft.com/office/drawing/2014/main" id="{BD5DDE88-DA55-43D9-B522-0E9A9B804D55}"/>
               </a:ext>
             </a:extLst>
           </p:cNvPr>
@@ -20854,7 +21561,7 @@
           <p:cNvPr id="5" name="">
             <a:extLst xmlns:a="http://schemas.openxmlformats.org/drawingml/2006/main">
               <a:ext uri="{FF2B5EF4-FFF2-40B4-BE49-F238E27FC236}">
-                <a16:creationId xmlns:a16="http://schemas.microsoft.com/office/drawing/2014/main" id="{CDD50D04-D778-4AC3-B3F9-1D7B98098615}"/>
+                <a16:creationId xmlns:a16="http://schemas.microsoft.com/office/drawing/2014/main" id="{02AFD954-D5E3-49F3-A528-8227B665EEE6}"/>
               </a:ext>
             </a:extLst>
           </p:cNvPr>
@@ -20908,7 +21615,7 @@
           <p:nvPr/>
         </p:nvPicPr>
         <p:blipFill>
-          <a:blip xmlns:r="http://schemas.openxmlformats.org/officeDocument/2006/relationships" xmlns:a="http://schemas.openxmlformats.org/drawingml/2006/main" r:embed="R1242afab3fbd4e71"/>
+          <a:blip xmlns:r="http://schemas.openxmlformats.org/officeDocument/2006/relationships" xmlns:a="http://schemas.openxmlformats.org/drawingml/2006/main" r:embed="R864436c6620d48c1"/>
           <a:stretch xmlns:a="http://schemas.openxmlformats.org/drawingml/2006/main"/>
         </p:blipFill>
         <p:spPr>
@@ -20924,7 +21631,7 @@
     </p:spTree>
     <p:extLst>
       <p:ext uri="{BB962C8B-B14F-4D97-AF65-F5344CB8AC3E}">
-        <p14:creationId xmlns:p14="http://schemas.microsoft.com/office/powerpoint/2010/main" val="1983161129"/>
+        <p14:creationId xmlns:p14="http://schemas.microsoft.com/office/powerpoint/2010/main" val="1537977524"/>
       </p:ext>
     </p:extLst>
   </p:cSld>
@@ -20955,7 +21662,7 @@
           <p:cNvPr id="17" name="">
             <a:extLst xmlns:a="http://schemas.openxmlformats.org/drawingml/2006/main">
               <a:ext uri="{FF2B5EF4-FFF2-40B4-BE49-F238E27FC236}">
-                <a16:creationId xmlns:a16="http://schemas.microsoft.com/office/drawing/2014/main" id="{E60B0189-6B04-45C4-BCF1-C6E98091BD7C}"/>
+                <a16:creationId xmlns:a16="http://schemas.microsoft.com/office/drawing/2014/main" id="{C83C71D0-88BE-4EBB-A519-86204AF48937}"/>
               </a:ext>
             </a:extLst>
           </p:cNvPr>
@@ -21005,7 +21712,7 @@
           <p:cNvPr id="2" name="">
             <a:extLst xmlns:a="http://schemas.openxmlformats.org/drawingml/2006/main">
               <a:ext uri="{FF2B5EF4-FFF2-40B4-BE49-F238E27FC236}">
-                <a16:creationId xmlns:a16="http://schemas.microsoft.com/office/drawing/2014/main" id="{A43DEFDB-34B2-4A49-8165-411F4AE92F55}"/>
+                <a16:creationId xmlns:a16="http://schemas.microsoft.com/office/drawing/2014/main" id="{6A99DA96-E9D8-49E6-A650-EB1E1752A9A8}"/>
               </a:ext>
             </a:extLst>
           </p:cNvPr>
@@ -21055,7 +21762,7 @@
           <p:cNvPr id="3" name="">
             <a:extLst xmlns:a="http://schemas.openxmlformats.org/drawingml/2006/main">
               <a:ext uri="{FF2B5EF4-FFF2-40B4-BE49-F238E27FC236}">
-                <a16:creationId xmlns:a16="http://schemas.microsoft.com/office/drawing/2014/main" id="{3C836AEC-7413-4810-A143-0B6108FE2FFF}"/>
+                <a16:creationId xmlns:a16="http://schemas.microsoft.com/office/drawing/2014/main" id="{47AF5BAA-EC00-47FD-ABB9-A92BE59D961F}"/>
               </a:ext>
             </a:extLst>
           </p:cNvPr>
@@ -21088,7 +21795,7 @@
           <p:cNvPr id="4" name="">
             <a:extLst xmlns:a="http://schemas.openxmlformats.org/drawingml/2006/main">
               <a:ext uri="{FF2B5EF4-FFF2-40B4-BE49-F238E27FC236}">
-                <a16:creationId xmlns:a16="http://schemas.microsoft.com/office/drawing/2014/main" id="{B4F05F3C-95DA-4C07-A479-A13F1F007ED2}"/>
+                <a16:creationId xmlns:a16="http://schemas.microsoft.com/office/drawing/2014/main" id="{1424FCDC-55A3-4745-82B6-DC0CEF6C79D1}"/>
               </a:ext>
             </a:extLst>
           </p:cNvPr>
@@ -21138,7 +21845,7 @@
           <p:cNvPr id="5" name="">
             <a:extLst xmlns:a="http://schemas.openxmlformats.org/drawingml/2006/main">
               <a:ext uri="{FF2B5EF4-FFF2-40B4-BE49-F238E27FC236}">
-                <a16:creationId xmlns:a16="http://schemas.microsoft.com/office/drawing/2014/main" id="{7B358FB6-B070-4EF2-8E47-D44D8B946D47}"/>
+                <a16:creationId xmlns:a16="http://schemas.microsoft.com/office/drawing/2014/main" id="{FB21D1B0-F858-4E33-9C3E-EEC9853905BF}"/>
               </a:ext>
             </a:extLst>
           </p:cNvPr>
@@ -21192,7 +21899,7 @@
           <p:nvPr/>
         </p:nvPicPr>
         <p:blipFill>
-          <a:blip xmlns:r="http://schemas.openxmlformats.org/officeDocument/2006/relationships" xmlns:a="http://schemas.openxmlformats.org/drawingml/2006/main" r:embed="R02d87d01c22c4b98"/>
+          <a:blip xmlns:r="http://schemas.openxmlformats.org/officeDocument/2006/relationships" xmlns:a="http://schemas.openxmlformats.org/drawingml/2006/main" r:embed="R3a0606eb83c44c2e"/>
           <a:stretch xmlns:a="http://schemas.openxmlformats.org/drawingml/2006/main"/>
         </p:blipFill>
         <p:spPr>
@@ -21210,7 +21917,7 @@
           <p:cNvPr id="7" name="">
             <a:extLst xmlns:a="http://schemas.openxmlformats.org/drawingml/2006/main">
               <a:ext uri="{FF2B5EF4-FFF2-40B4-BE49-F238E27FC236}">
-                <a16:creationId xmlns:a16="http://schemas.microsoft.com/office/drawing/2014/main" id="{EA75AB9C-CAFE-4C68-8F12-F8C46DDB3782}"/>
+                <a16:creationId xmlns:a16="http://schemas.microsoft.com/office/drawing/2014/main" id="{13A67109-9C4F-463D-BA3C-837D97936A72}"/>
               </a:ext>
             </a:extLst>
           </p:cNvPr>
@@ -21243,7 +21950,7 @@
           <p:cNvPr id="8" name="">
             <a:extLst xmlns:a="http://schemas.openxmlformats.org/drawingml/2006/main">
               <a:ext uri="{FF2B5EF4-FFF2-40B4-BE49-F238E27FC236}">
-                <a16:creationId xmlns:a16="http://schemas.microsoft.com/office/drawing/2014/main" id="{C3265E0A-21BB-4888-9D56-CD423DE4C486}"/>
+                <a16:creationId xmlns:a16="http://schemas.microsoft.com/office/drawing/2014/main" id="{104623C5-C80C-49B7-85E6-1F743F99AC57}"/>
               </a:ext>
             </a:extLst>
           </p:cNvPr>
@@ -21293,7 +22000,7 @@
           <p:cNvPr id="9" name="">
             <a:extLst xmlns:a="http://schemas.openxmlformats.org/drawingml/2006/main">
               <a:ext uri="{FF2B5EF4-FFF2-40B4-BE49-F238E27FC236}">
-                <a16:creationId xmlns:a16="http://schemas.microsoft.com/office/drawing/2014/main" id="{CB558F8E-3932-4E3B-87CF-698DA0E9BD7A}"/>
+                <a16:creationId xmlns:a16="http://schemas.microsoft.com/office/drawing/2014/main" id="{88D87C72-8FD9-4DC2-A861-9F20373B0DB7}"/>
               </a:ext>
             </a:extLst>
           </p:cNvPr>
@@ -21343,7 +22050,7 @@
           <p:cNvPr id="10" name="">
             <a:extLst xmlns:a="http://schemas.openxmlformats.org/drawingml/2006/main">
               <a:ext uri="{FF2B5EF4-FFF2-40B4-BE49-F238E27FC236}">
-                <a16:creationId xmlns:a16="http://schemas.microsoft.com/office/drawing/2014/main" id="{FB71BF2B-92EB-4C1A-A385-2E8944DE3DEB}"/>
+                <a16:creationId xmlns:a16="http://schemas.microsoft.com/office/drawing/2014/main" id="{5181C927-2CBF-4639-AF47-F069AE6A033E}"/>
               </a:ext>
             </a:extLst>
           </p:cNvPr>
@@ -21393,7 +22100,7 @@
           <p:cNvPr id="11" name="">
             <a:extLst xmlns:a="http://schemas.openxmlformats.org/drawingml/2006/main">
               <a:ext uri="{FF2B5EF4-FFF2-40B4-BE49-F238E27FC236}">
-                <a16:creationId xmlns:a16="http://schemas.microsoft.com/office/drawing/2014/main" id="{75CA29AD-2788-4EF9-8931-B20CC57A0074}"/>
+                <a16:creationId xmlns:a16="http://schemas.microsoft.com/office/drawing/2014/main" id="{D8401E1B-12FB-4C56-99B4-DA0CD75C065A}"/>
               </a:ext>
             </a:extLst>
           </p:cNvPr>
@@ -21443,7 +22150,7 @@
           <p:cNvPr id="12" name="">
             <a:extLst xmlns:a="http://schemas.openxmlformats.org/drawingml/2006/main">
               <a:ext uri="{FF2B5EF4-FFF2-40B4-BE49-F238E27FC236}">
-                <a16:creationId xmlns:a16="http://schemas.microsoft.com/office/drawing/2014/main" id="{E316B69A-63A0-4AA0-A181-06EB66C43779}"/>
+                <a16:creationId xmlns:a16="http://schemas.microsoft.com/office/drawing/2014/main" id="{725C632D-D8FB-4F13-B5A8-FE9C380B3BA6}"/>
               </a:ext>
             </a:extLst>
           </p:cNvPr>
@@ -21493,7 +22200,7 @@
           <p:cNvPr id="13" name="">
             <a:extLst xmlns:a="http://schemas.openxmlformats.org/drawingml/2006/main">
               <a:ext uri="{FF2B5EF4-FFF2-40B4-BE49-F238E27FC236}">
-                <a16:creationId xmlns:a16="http://schemas.microsoft.com/office/drawing/2014/main" id="{1BD5A55C-ECD9-4F5B-B17E-EAC960CE9D4C}"/>
+                <a16:creationId xmlns:a16="http://schemas.microsoft.com/office/drawing/2014/main" id="{25256BDA-09BC-4A7A-B15E-E6825B83093E}"/>
               </a:ext>
             </a:extLst>
           </p:cNvPr>
@@ -21543,7 +22250,7 @@
           <p:cNvPr id="14" name="">
             <a:extLst xmlns:a="http://schemas.openxmlformats.org/drawingml/2006/main">
               <a:ext uri="{FF2B5EF4-FFF2-40B4-BE49-F238E27FC236}">
-                <a16:creationId xmlns:a16="http://schemas.microsoft.com/office/drawing/2014/main" id="{3EDD128F-73B4-4278-AF20-54E6CCB71355}"/>
+                <a16:creationId xmlns:a16="http://schemas.microsoft.com/office/drawing/2014/main" id="{A6C274CF-3BED-4DE5-9617-05D14A2AB519}"/>
               </a:ext>
             </a:extLst>
           </p:cNvPr>
@@ -21593,7 +22300,7 @@
           <p:cNvPr id="15" name="">
             <a:extLst xmlns:a="http://schemas.openxmlformats.org/drawingml/2006/main">
               <a:ext uri="{FF2B5EF4-FFF2-40B4-BE49-F238E27FC236}">
-                <a16:creationId xmlns:a16="http://schemas.microsoft.com/office/drawing/2014/main" id="{F1C47A91-2676-4FE5-B5F0-B521FF7CABAF}"/>
+                <a16:creationId xmlns:a16="http://schemas.microsoft.com/office/drawing/2014/main" id="{0C128E22-379C-4D20-9667-8E70013764FA}"/>
               </a:ext>
             </a:extLst>
           </p:cNvPr>
@@ -21626,7 +22333,7 @@
           <p:cNvPr id="16" name="">
             <a:extLst xmlns:a="http://schemas.openxmlformats.org/drawingml/2006/main">
               <a:ext uri="{FF2B5EF4-FFF2-40B4-BE49-F238E27FC236}">
-                <a16:creationId xmlns:a16="http://schemas.microsoft.com/office/drawing/2014/main" id="{FD5F504E-ECD4-438A-8F1B-08024A113406}"/>
+                <a16:creationId xmlns:a16="http://schemas.microsoft.com/office/drawing/2014/main" id="{76DEB376-2320-437E-B52A-95A1B9DEA6A7}"/>
               </a:ext>
             </a:extLst>
           </p:cNvPr>
@@ -21674,7 +22381,7 @@
     </p:spTree>
     <p:extLst>
       <p:ext uri="{BB962C8B-B14F-4D97-AF65-F5344CB8AC3E}">
-        <p14:creationId xmlns:p14="http://schemas.microsoft.com/office/powerpoint/2010/main" val="1803990778"/>
+        <p14:creationId xmlns:p14="http://schemas.microsoft.com/office/powerpoint/2010/main" val="222618232"/>
       </p:ext>
     </p:extLst>
   </p:cSld>
@@ -21705,7 +22412,7 @@
           <p:cNvPr id="22" name="">
             <a:extLst xmlns:a="http://schemas.openxmlformats.org/drawingml/2006/main">
               <a:ext uri="{FF2B5EF4-FFF2-40B4-BE49-F238E27FC236}">
-                <a16:creationId xmlns:a16="http://schemas.microsoft.com/office/drawing/2014/main" id="{EED12366-5EE0-476C-B98E-498E4012F30A}"/>
+                <a16:creationId xmlns:a16="http://schemas.microsoft.com/office/drawing/2014/main" id="{33461D22-9827-4AD9-812A-1046FE3133F7}"/>
               </a:ext>
             </a:extLst>
           </p:cNvPr>
@@ -21755,7 +22462,7 @@
           <p:cNvPr id="2" name="">
             <a:extLst xmlns:a="http://schemas.openxmlformats.org/drawingml/2006/main">
               <a:ext uri="{FF2B5EF4-FFF2-40B4-BE49-F238E27FC236}">
-                <a16:creationId xmlns:a16="http://schemas.microsoft.com/office/drawing/2014/main" id="{AFC26617-CA60-4798-B80F-EB00B1615844}"/>
+                <a16:creationId xmlns:a16="http://schemas.microsoft.com/office/drawing/2014/main" id="{B8B65831-47D9-4438-850F-9CF012BB47FE}"/>
               </a:ext>
             </a:extLst>
           </p:cNvPr>
@@ -21805,7 +22512,7 @@
           <p:cNvPr id="3" name="">
             <a:extLst xmlns:a="http://schemas.openxmlformats.org/drawingml/2006/main">
               <a:ext uri="{FF2B5EF4-FFF2-40B4-BE49-F238E27FC236}">
-                <a16:creationId xmlns:a16="http://schemas.microsoft.com/office/drawing/2014/main" id="{05A33AC3-18BD-4A27-8F4C-68AC8976AC4A}"/>
+                <a16:creationId xmlns:a16="http://schemas.microsoft.com/office/drawing/2014/main" id="{9B05848C-8736-4DCF-AF65-D97D34EEB099}"/>
               </a:ext>
             </a:extLst>
           </p:cNvPr>
@@ -21838,7 +22545,7 @@
           <p:cNvPr id="4" name="">
             <a:extLst xmlns:a="http://schemas.openxmlformats.org/drawingml/2006/main">
               <a:ext uri="{FF2B5EF4-FFF2-40B4-BE49-F238E27FC236}">
-                <a16:creationId xmlns:a16="http://schemas.microsoft.com/office/drawing/2014/main" id="{7C8C4296-4E29-4ADD-9A35-B8C9661D8BA8}"/>
+                <a16:creationId xmlns:a16="http://schemas.microsoft.com/office/drawing/2014/main" id="{EB23EFA1-A8C8-4B3C-A1BA-ABA2BF9256D2}"/>
               </a:ext>
             </a:extLst>
           </p:cNvPr>
@@ -21888,7 +22595,7 @@
           <p:cNvPr id="5" name="">
             <a:extLst xmlns:a="http://schemas.openxmlformats.org/drawingml/2006/main">
               <a:ext uri="{FF2B5EF4-FFF2-40B4-BE49-F238E27FC236}">
-                <a16:creationId xmlns:a16="http://schemas.microsoft.com/office/drawing/2014/main" id="{181F3FE7-1D76-49B2-814B-89DF727D49F8}"/>
+                <a16:creationId xmlns:a16="http://schemas.microsoft.com/office/drawing/2014/main" id="{C308D325-17BD-48ED-AB3C-25E47637811B}"/>
               </a:ext>
             </a:extLst>
           </p:cNvPr>
@@ -21938,7 +22645,7 @@
           <p:cNvPr id="6" name="">
             <a:extLst xmlns:a="http://schemas.openxmlformats.org/drawingml/2006/main">
               <a:ext uri="{FF2B5EF4-FFF2-40B4-BE49-F238E27FC236}">
-                <a16:creationId xmlns:a16="http://schemas.microsoft.com/office/drawing/2014/main" id="{43668D7B-04AC-4A9C-97C5-034FC460594E}"/>
+                <a16:creationId xmlns:a16="http://schemas.microsoft.com/office/drawing/2014/main" id="{9E8BAEEC-1891-4B9C-A863-84E1DC1164EA}"/>
               </a:ext>
             </a:extLst>
           </p:cNvPr>
@@ -21971,7 +22678,7 @@
           <p:cNvPr id="7" name="">
             <a:extLst xmlns:a="http://schemas.openxmlformats.org/drawingml/2006/main">
               <a:ext uri="{FF2B5EF4-FFF2-40B4-BE49-F238E27FC236}">
-                <a16:creationId xmlns:a16="http://schemas.microsoft.com/office/drawing/2014/main" id="{A6474C96-D60E-46AA-8884-CA5128E1C89D}"/>
+                <a16:creationId xmlns:a16="http://schemas.microsoft.com/office/drawing/2014/main" id="{2A2E41A1-D6A7-4E6C-B73F-7F695E1BE197}"/>
               </a:ext>
             </a:extLst>
           </p:cNvPr>
@@ -22021,7 +22728,7 @@
           <p:cNvPr id="8" name="">
             <a:extLst xmlns:a="http://schemas.openxmlformats.org/drawingml/2006/main">
               <a:ext uri="{FF2B5EF4-FFF2-40B4-BE49-F238E27FC236}">
-                <a16:creationId xmlns:a16="http://schemas.microsoft.com/office/drawing/2014/main" id="{47AFD30D-F60A-439B-9F0F-DB67A7E35CA5}"/>
+                <a16:creationId xmlns:a16="http://schemas.microsoft.com/office/drawing/2014/main" id="{BB9A57A5-35BA-4280-B329-3714F62EF352}"/>
               </a:ext>
             </a:extLst>
           </p:cNvPr>
@@ -22071,7 +22778,7 @@
           <p:cNvPr id="9" name="">
             <a:extLst xmlns:a="http://schemas.openxmlformats.org/drawingml/2006/main">
               <a:ext uri="{FF2B5EF4-FFF2-40B4-BE49-F238E27FC236}">
-                <a16:creationId xmlns:a16="http://schemas.microsoft.com/office/drawing/2014/main" id="{02904A66-F69C-40FE-9FBC-AE8BFD8318D8}"/>
+                <a16:creationId xmlns:a16="http://schemas.microsoft.com/office/drawing/2014/main" id="{8A32390A-226B-439E-859D-21D8EE4C76D9}"/>
               </a:ext>
             </a:extLst>
           </p:cNvPr>
@@ -22121,7 +22828,7 @@
           <p:cNvPr id="10" name="">
             <a:extLst xmlns:a="http://schemas.openxmlformats.org/drawingml/2006/main">
               <a:ext uri="{FF2B5EF4-FFF2-40B4-BE49-F238E27FC236}">
-                <a16:creationId xmlns:a16="http://schemas.microsoft.com/office/drawing/2014/main" id="{CF26A4AA-D63E-41C0-B751-DE5A247A38E1}"/>
+                <a16:creationId xmlns:a16="http://schemas.microsoft.com/office/drawing/2014/main" id="{120FBA28-5D7C-41D8-B685-46DA2AD59C2E}"/>
               </a:ext>
             </a:extLst>
           </p:cNvPr>
@@ -22171,7 +22878,7 @@
           <p:cNvPr id="11" name="">
             <a:extLst xmlns:a="http://schemas.openxmlformats.org/drawingml/2006/main">
               <a:ext uri="{FF2B5EF4-FFF2-40B4-BE49-F238E27FC236}">
-                <a16:creationId xmlns:a16="http://schemas.microsoft.com/office/drawing/2014/main" id="{F07ABB87-0CD2-4FF0-8924-EC293D6F390E}"/>
+                <a16:creationId xmlns:a16="http://schemas.microsoft.com/office/drawing/2014/main" id="{76A558F7-17EF-4EDD-BF70-811260939B99}"/>
               </a:ext>
             </a:extLst>
           </p:cNvPr>
@@ -22221,7 +22928,7 @@
           <p:cNvPr id="12" name="">
             <a:extLst xmlns:a="http://schemas.openxmlformats.org/drawingml/2006/main">
               <a:ext uri="{FF2B5EF4-FFF2-40B4-BE49-F238E27FC236}">
-                <a16:creationId xmlns:a16="http://schemas.microsoft.com/office/drawing/2014/main" id="{87B9D64F-C400-4B0A-884E-220DA20220B4}"/>
+                <a16:creationId xmlns:a16="http://schemas.microsoft.com/office/drawing/2014/main" id="{020E61D5-60BD-4F70-BBBC-B3A2F51BC0EE}"/>
               </a:ext>
             </a:extLst>
           </p:cNvPr>
@@ -22271,7 +22978,7 @@
           <p:cNvPr id="13" name="">
             <a:extLst xmlns:a="http://schemas.openxmlformats.org/drawingml/2006/main">
               <a:ext uri="{FF2B5EF4-FFF2-40B4-BE49-F238E27FC236}">
-                <a16:creationId xmlns:a16="http://schemas.microsoft.com/office/drawing/2014/main" id="{CA0308BE-F731-49BF-89B9-E8FBD2A23D07}"/>
+                <a16:creationId xmlns:a16="http://schemas.microsoft.com/office/drawing/2014/main" id="{2ECDF878-232C-4B8C-8C73-A43A3B4FF52C}"/>
               </a:ext>
             </a:extLst>
           </p:cNvPr>
@@ -22304,7 +23011,7 @@
           <p:cNvPr id="14" name="">
             <a:extLst xmlns:a="http://schemas.openxmlformats.org/drawingml/2006/main">
               <a:ext uri="{FF2B5EF4-FFF2-40B4-BE49-F238E27FC236}">
-                <a16:creationId xmlns:a16="http://schemas.microsoft.com/office/drawing/2014/main" id="{836DE421-A143-4003-A926-A517AE130E22}"/>
+                <a16:creationId xmlns:a16="http://schemas.microsoft.com/office/drawing/2014/main" id="{2E69CBAF-219C-43FA-A031-0F1ADCE932A9}"/>
               </a:ext>
             </a:extLst>
           </p:cNvPr>
@@ -22354,7 +23061,7 @@
           <p:cNvPr id="15" name="">
             <a:extLst xmlns:a="http://schemas.openxmlformats.org/drawingml/2006/main">
               <a:ext uri="{FF2B5EF4-FFF2-40B4-BE49-F238E27FC236}">
-                <a16:creationId xmlns:a16="http://schemas.microsoft.com/office/drawing/2014/main" id="{CB370F86-9354-45EA-8A86-EB1C2D482DC1}"/>
+                <a16:creationId xmlns:a16="http://schemas.microsoft.com/office/drawing/2014/main" id="{56033A05-3D21-4CCB-91DE-11B82E61AB33}"/>
               </a:ext>
             </a:extLst>
           </p:cNvPr>
@@ -22387,7 +23094,7 @@
           <p:cNvPr id="16" name="">
             <a:extLst xmlns:a="http://schemas.openxmlformats.org/drawingml/2006/main">
               <a:ext uri="{FF2B5EF4-FFF2-40B4-BE49-F238E27FC236}">
-                <a16:creationId xmlns:a16="http://schemas.microsoft.com/office/drawing/2014/main" id="{51E9CFC3-F998-4F1B-AD69-D1E861F3F57C}"/>
+                <a16:creationId xmlns:a16="http://schemas.microsoft.com/office/drawing/2014/main" id="{E90DA35F-45F9-4221-9971-5878C95E8A55}"/>
               </a:ext>
             </a:extLst>
           </p:cNvPr>
@@ -22437,7 +23144,7 @@
           <p:cNvPr id="17" name="">
             <a:extLst xmlns:a="http://schemas.openxmlformats.org/drawingml/2006/main">
               <a:ext uri="{FF2B5EF4-FFF2-40B4-BE49-F238E27FC236}">
-                <a16:creationId xmlns:a16="http://schemas.microsoft.com/office/drawing/2014/main" id="{D400E36C-8F77-45DC-8DDF-9DE820DCCEB0}"/>
+                <a16:creationId xmlns:a16="http://schemas.microsoft.com/office/drawing/2014/main" id="{6780D6EB-AA1D-4B85-A9ED-430E26ECAE4E}"/>
               </a:ext>
             </a:extLst>
           </p:cNvPr>
@@ -22470,7 +23177,7 @@
           <p:cNvPr id="18" name="">
             <a:extLst xmlns:a="http://schemas.openxmlformats.org/drawingml/2006/main">
               <a:ext uri="{FF2B5EF4-FFF2-40B4-BE49-F238E27FC236}">
-                <a16:creationId xmlns:a16="http://schemas.microsoft.com/office/drawing/2014/main" id="{2D82C7BA-D1A3-4DDA-A2D7-3E50386B5085}"/>
+                <a16:creationId xmlns:a16="http://schemas.microsoft.com/office/drawing/2014/main" id="{F8281EC0-0713-4526-969D-270586021019}"/>
               </a:ext>
             </a:extLst>
           </p:cNvPr>
@@ -22520,7 +23227,7 @@
           <p:cNvPr id="19" name="">
             <a:extLst xmlns:a="http://schemas.openxmlformats.org/drawingml/2006/main">
               <a:ext uri="{FF2B5EF4-FFF2-40B4-BE49-F238E27FC236}">
-                <a16:creationId xmlns:a16="http://schemas.microsoft.com/office/drawing/2014/main" id="{AA3E9AFF-4B70-41AD-90C0-E26B6D05E56E}"/>
+                <a16:creationId xmlns:a16="http://schemas.microsoft.com/office/drawing/2014/main" id="{56167DDE-726D-4D4D-AF80-79F185FDF87E}"/>
               </a:ext>
             </a:extLst>
           </p:cNvPr>
@@ -22553,7 +23260,7 @@
           <p:cNvPr id="20" name="">
             <a:extLst xmlns:a="http://schemas.openxmlformats.org/drawingml/2006/main">
               <a:ext uri="{FF2B5EF4-FFF2-40B4-BE49-F238E27FC236}">
-                <a16:creationId xmlns:a16="http://schemas.microsoft.com/office/drawing/2014/main" id="{F12BB704-48C4-4BC0-9E72-D750F8BE1468}"/>
+                <a16:creationId xmlns:a16="http://schemas.microsoft.com/office/drawing/2014/main" id="{8770F743-763C-4968-9E55-0DAC71D0BE83}"/>
               </a:ext>
             </a:extLst>
           </p:cNvPr>
@@ -22603,7 +23310,7 @@
           <p:cNvPr id="21" name="">
             <a:extLst xmlns:a="http://schemas.openxmlformats.org/drawingml/2006/main">
               <a:ext uri="{FF2B5EF4-FFF2-40B4-BE49-F238E27FC236}">
-                <a16:creationId xmlns:a16="http://schemas.microsoft.com/office/drawing/2014/main" id="{FEA839FA-26A8-41FD-AAAA-F3F948CCF855}"/>
+                <a16:creationId xmlns:a16="http://schemas.microsoft.com/office/drawing/2014/main" id="{E6867ED3-C399-4EAC-AF51-D08B6EC76E73}"/>
               </a:ext>
             </a:extLst>
           </p:cNvPr>
@@ -22643,7 +23350,7 @@
                   <a:srgbClr val="B44738"/>
                 </a:solidFill>
               </a:rPr>
-              <a:t>NO RULE, COST, OR P&amp;L WAS TESTED IN THIS SLICE</a:t>
+              <a:t>THIS TRANSLATION IS EXECUTED ON SLIDES 35–41</a:t>
             </a:r>
           </a:p>
         </p:txBody>
@@ -22651,7 +23358,1805 @@
     </p:spTree>
     <p:extLst>
       <p:ext uri="{BB962C8B-B14F-4D97-AF65-F5344CB8AC3E}">
-        <p14:creationId xmlns:p14="http://schemas.microsoft.com/office/powerpoint/2010/main" val="1614722810"/>
+        <p14:creationId xmlns:p14="http://schemas.microsoft.com/office/powerpoint/2010/main" val="217477300"/>
+      </p:ext>
+    </p:extLst>
+  </p:cSld>
+</p:sld>
+</file>
+
+<file path=ppt/slides/slide35.xml><?xml version="1.0" encoding="utf-8"?>
+<p:sld xmlns:p="http://schemas.openxmlformats.org/presentationml/2006/main">
+  <p:cSld>
+    <p:bg>
+      <p:bgPr>
+        <a:solidFill xmlns:a="http://schemas.openxmlformats.org/drawingml/2006/main">
+          <a:srgbClr val="24364B"/>
+        </a:solidFill>
+      </p:bgPr>
+    </p:bg>
+    <p:spTree>
+      <p:nvGrpSpPr>
+        <p:cNvPr id="1" name=""/>
+        <p:cNvGrpSpPr/>
+        <p:nvPr/>
+      </p:nvGrpSpPr>
+      <p:grpSpPr>
+        <a:xfrm xmlns:a="http://schemas.openxmlformats.org/drawingml/2006/main"/>
+      </p:grpSpPr>
+      <p:sp>
+        <p:nvSpPr>
+          <p:cNvPr id="6" name="">
+            <a:extLst xmlns:a="http://schemas.openxmlformats.org/drawingml/2006/main">
+              <a:ext uri="{FF2B5EF4-FFF2-40B4-BE49-F238E27FC236}">
+                <a16:creationId xmlns:a16="http://schemas.microsoft.com/office/drawing/2014/main" id="{689EF4EB-0510-44A2-A2F2-99748C2BDFC0}"/>
+              </a:ext>
+            </a:extLst>
+          </p:cNvPr>
+          <p:cNvSpPr>
+            <a:spLocks xmlns:a="http://schemas.openxmlformats.org/drawingml/2006/main" noGrp="1"/>
+          </p:cNvSpPr>
+          <p:nvPr/>
+        </p:nvSpPr>
+        <p:spPr>
+          <a:xfrm xmlns:a="http://schemas.openxmlformats.org/drawingml/2006/main">
+            <a:off x="685800" y="895350"/>
+            <a:ext cx="4000500" cy="285750"/>
+          </a:xfrm>
+          <a:prstGeom xmlns:a="http://schemas.openxmlformats.org/drawingml/2006/main" prst="rect">
+            <a:avLst/>
+          </a:prstGeom>
+          <a:noFill xmlns:a="http://schemas.openxmlformats.org/drawingml/2006/main"/>
+          <a:ln xmlns:a="http://schemas.openxmlformats.org/drawingml/2006/main" w="0">
+            <a:noFill/>
+            <a:prstDash val="solid"/>
+          </a:ln>
+        </p:spPr>
+        <p:txBody>
+          <a:bodyPr xmlns:a="http://schemas.openxmlformats.org/drawingml/2006/main" anchor="t"/>
+          <a:lstStyle xmlns:a="http://schemas.openxmlformats.org/drawingml/2006/main"/>
+          <a:p xmlns:a="http://schemas.openxmlformats.org/drawingml/2006/main">
+            <a:pPr algn="l">
+              <a:defRPr sz="1275" b="1">
+                <a:solidFill>
+                  <a:srgbClr val="D0EDFA"/>
+                </a:solidFill>
+              </a:defRPr>
+            </a:pPr>
+            <a:r>
+              <a:rPr sz="1275" b="1">
+                <a:solidFill>
+                  <a:srgbClr val="D0EDFA"/>
+                </a:solidFill>
+              </a:rPr>
+              <a:t>SIXTH MICROSCOPE</a:t>
+            </a:r>
+          </a:p>
+        </p:txBody>
+      </p:sp>
+      <p:sp>
+        <p:nvSpPr>
+          <p:cNvPr id="2" name="">
+            <a:extLst xmlns:a="http://schemas.openxmlformats.org/drawingml/2006/main">
+              <a:ext uri="{FF2B5EF4-FFF2-40B4-BE49-F238E27FC236}">
+                <a16:creationId xmlns:a16="http://schemas.microsoft.com/office/drawing/2014/main" id="{64F39B9C-D456-4D51-9905-B5558B071AA0}"/>
+              </a:ext>
+            </a:extLst>
+          </p:cNvPr>
+          <p:cNvSpPr>
+            <a:spLocks xmlns:a="http://schemas.openxmlformats.org/drawingml/2006/main" noGrp="1"/>
+          </p:cNvSpPr>
+          <p:nvPr/>
+        </p:nvSpPr>
+        <p:spPr>
+          <a:xfrm xmlns:a="http://schemas.openxmlformats.org/drawingml/2006/main">
+            <a:off x="685800" y="1619250"/>
+            <a:ext cx="9334500" cy="1619250"/>
+          </a:xfrm>
+          <a:prstGeom xmlns:a="http://schemas.openxmlformats.org/drawingml/2006/main" prst="rect">
+            <a:avLst/>
+          </a:prstGeom>
+          <a:noFill xmlns:a="http://schemas.openxmlformats.org/drawingml/2006/main"/>
+          <a:ln xmlns:a="http://schemas.openxmlformats.org/drawingml/2006/main" w="0">
+            <a:noFill/>
+            <a:prstDash val="solid"/>
+          </a:ln>
+        </p:spPr>
+        <p:txBody>
+          <a:bodyPr xmlns:a="http://schemas.openxmlformats.org/drawingml/2006/main" anchor="t"/>
+          <a:lstStyle xmlns:a="http://schemas.openxmlformats.org/drawingml/2006/main"/>
+          <a:p xmlns:a="http://schemas.openxmlformats.org/drawingml/2006/main">
+            <a:pPr algn="l">
+              <a:defRPr sz="4800" b="1">
+                <a:solidFill>
+                  <a:srgbClr val="FFFFFF"/>
+                </a:solidFill>
+              </a:defRPr>
+            </a:pPr>
+            <a:r>
+              <a:rPr sz="4800" b="1">
+                <a:solidFill>
+                  <a:srgbClr val="FFFFFF"/>
+                </a:solidFill>
+              </a:rPr>
+              <a:t>Can the clue survive</a:t>
+            </a:r>
+          </a:p>
+          <a:p xmlns:a="http://schemas.openxmlformats.org/drawingml/2006/main">
+            <a:pPr algn="l">
+              <a:defRPr sz="4800" b="1">
+                <a:solidFill>
+                  <a:srgbClr val="FFFFFF"/>
+                </a:solidFill>
+              </a:defRPr>
+            </a:pPr>
+            <a:r>
+              <a:rPr sz="4800" b="1">
+                <a:solidFill>
+                  <a:srgbClr val="FFFFFF"/>
+                </a:solidFill>
+              </a:rPr>
+              <a:t>causal timing?</a:t>
+            </a:r>
+          </a:p>
+        </p:txBody>
+      </p:sp>
+      <p:sp>
+        <p:nvSpPr>
+          <p:cNvPr id="3" name="">
+            <a:extLst xmlns:a="http://schemas.openxmlformats.org/drawingml/2006/main">
+              <a:ext uri="{FF2B5EF4-FFF2-40B4-BE49-F238E27FC236}">
+                <a16:creationId xmlns:a16="http://schemas.microsoft.com/office/drawing/2014/main" id="{9B068EC7-AED8-4641-8F49-BB46628155F7}"/>
+              </a:ext>
+            </a:extLst>
+          </p:cNvPr>
+          <p:cNvSpPr>
+            <a:spLocks xmlns:a="http://schemas.openxmlformats.org/drawingml/2006/main" noGrp="1"/>
+          </p:cNvSpPr>
+          <p:nvPr/>
+        </p:nvSpPr>
+        <p:spPr>
+          <a:xfrm xmlns:a="http://schemas.openxmlformats.org/drawingml/2006/main">
+            <a:off x="723900" y="3886200"/>
+            <a:ext cx="10287000" cy="1257300"/>
+          </a:xfrm>
+          <a:prstGeom xmlns:a="http://schemas.openxmlformats.org/drawingml/2006/main" prst="rect">
+            <a:avLst/>
+          </a:prstGeom>
+          <a:noFill xmlns:a="http://schemas.openxmlformats.org/drawingml/2006/main"/>
+          <a:ln xmlns:a="http://schemas.openxmlformats.org/drawingml/2006/main" w="0">
+            <a:noFill/>
+            <a:prstDash val="solid"/>
+          </a:ln>
+        </p:spPr>
+        <p:txBody>
+          <a:bodyPr xmlns:a="http://schemas.openxmlformats.org/drawingml/2006/main" anchor="t"/>
+          <a:lstStyle xmlns:a="http://schemas.openxmlformats.org/drawingml/2006/main"/>
+          <a:p xmlns:a="http://schemas.openxmlformats.org/drawingml/2006/main">
+            <a:pPr algn="l">
+              <a:defRPr sz="2025" b="0">
+                <a:solidFill>
+                  <a:srgbClr val="D0EDFA"/>
+                </a:solidFill>
+              </a:defRPr>
+            </a:pPr>
+            <a:r>
+              <a:rPr sz="2025" b="0">
+                <a:solidFill>
+                  <a:srgbClr val="D0EDFA"/>
+                </a:solidFill>
+              </a:rPr>
+              <a:t>At 10:00, compare the completed opening return with a threshold learned from the prior 252 full sessions. Trade only when yesterday's ATR% was LOW or MEDIUM; exit at 16:00. The rule must beat every simpler control after 10 bps round trip.</a:t>
+            </a:r>
+          </a:p>
+        </p:txBody>
+      </p:sp>
+      <p:sp>
+        <p:nvSpPr>
+          <p:cNvPr id="4" name="">
+            <a:extLst xmlns:a="http://schemas.openxmlformats.org/drawingml/2006/main">
+              <a:ext uri="{FF2B5EF4-FFF2-40B4-BE49-F238E27FC236}">
+                <a16:creationId xmlns:a16="http://schemas.microsoft.com/office/drawing/2014/main" id="{D6B63F6A-DDEF-4E90-82D6-327CBC3DB0F9}"/>
+              </a:ext>
+            </a:extLst>
+          </p:cNvPr>
+          <p:cNvSpPr>
+            <a:spLocks xmlns:a="http://schemas.openxmlformats.org/drawingml/2006/main" noGrp="1"/>
+          </p:cNvSpPr>
+          <p:nvPr/>
+        </p:nvSpPr>
+        <p:spPr>
+          <a:xfrm xmlns:a="http://schemas.openxmlformats.org/drawingml/2006/main">
+            <a:off x="723900" y="5734050"/>
+            <a:ext cx="9334500" cy="304800"/>
+          </a:xfrm>
+          <a:prstGeom xmlns:a="http://schemas.openxmlformats.org/drawingml/2006/main" prst="rect">
+            <a:avLst/>
+          </a:prstGeom>
+          <a:noFill xmlns:a="http://schemas.openxmlformats.org/drawingml/2006/main"/>
+          <a:ln xmlns:a="http://schemas.openxmlformats.org/drawingml/2006/main" w="0">
+            <a:noFill/>
+            <a:prstDash val="solid"/>
+          </a:ln>
+        </p:spPr>
+        <p:txBody>
+          <a:bodyPr xmlns:a="http://schemas.openxmlformats.org/drawingml/2006/main" anchor="t"/>
+          <a:lstStyle xmlns:a="http://schemas.openxmlformats.org/drawingml/2006/main"/>
+          <a:p xmlns:a="http://schemas.openxmlformats.org/drawingml/2006/main">
+            <a:pPr algn="l">
+              <a:defRPr sz="1500" b="1">
+                <a:solidFill>
+                  <a:srgbClr val="FFFFFF"/>
+                </a:solidFill>
+              </a:defRPr>
+            </a:pPr>
+            <a:r>
+              <a:rPr sz="1500" b="1">
+                <a:solidFill>
+                  <a:srgbClr val="FFFFFF"/>
+                </a:solidFill>
+              </a:rPr>
+              <a:t>TRAIN only · 2024+ intraday data remain unread</a:t>
+            </a:r>
+          </a:p>
+        </p:txBody>
+      </p:sp>
+      <p:sp>
+        <p:nvSpPr>
+          <p:cNvPr id="5" name="">
+            <a:extLst xmlns:a="http://schemas.openxmlformats.org/drawingml/2006/main">
+              <a:ext uri="{FF2B5EF4-FFF2-40B4-BE49-F238E27FC236}">
+                <a16:creationId xmlns:a16="http://schemas.microsoft.com/office/drawing/2014/main" id="{1A026B54-C137-4249-826D-4740B83CF3C8}"/>
+              </a:ext>
+            </a:extLst>
+          </p:cNvPr>
+          <p:cNvSpPr>
+            <a:spLocks xmlns:a="http://schemas.openxmlformats.org/drawingml/2006/main" noGrp="1"/>
+          </p:cNvSpPr>
+          <p:nvPr/>
+        </p:nvSpPr>
+        <p:spPr>
+          <a:xfrm xmlns:a="http://schemas.openxmlformats.org/drawingml/2006/main">
+            <a:off x="10801350" y="6400800"/>
+            <a:ext cx="857250" cy="190500"/>
+          </a:xfrm>
+          <a:prstGeom xmlns:a="http://schemas.openxmlformats.org/drawingml/2006/main" prst="rect">
+            <a:avLst/>
+          </a:prstGeom>
+          <a:noFill xmlns:a="http://schemas.openxmlformats.org/drawingml/2006/main"/>
+          <a:ln xmlns:a="http://schemas.openxmlformats.org/drawingml/2006/main" w="0">
+            <a:noFill/>
+            <a:prstDash val="solid"/>
+          </a:ln>
+        </p:spPr>
+        <p:txBody>
+          <a:bodyPr xmlns:a="http://schemas.openxmlformats.org/drawingml/2006/main" anchor="t"/>
+          <a:lstStyle xmlns:a="http://schemas.openxmlformats.org/drawingml/2006/main"/>
+          <a:p xmlns:a="http://schemas.openxmlformats.org/drawingml/2006/main">
+            <a:pPr algn="r">
+              <a:defRPr sz="900" b="0">
+                <a:solidFill>
+                  <a:srgbClr val="D0EDFA"/>
+                </a:solidFill>
+              </a:defRPr>
+            </a:pPr>
+            <a:r>
+              <a:rPr sz="900" b="0">
+                <a:solidFill>
+                  <a:srgbClr val="D0EDFA"/>
+                </a:solidFill>
+              </a:rPr>
+              <a:t>35</a:t>
+            </a:r>
+          </a:p>
+        </p:txBody>
+      </p:sp>
+    </p:spTree>
+    <p:extLst>
+      <p:ext uri="{BB962C8B-B14F-4D97-AF65-F5344CB8AC3E}">
+        <p14:creationId xmlns:p14="http://schemas.microsoft.com/office/powerpoint/2010/main" val="144284178"/>
+      </p:ext>
+    </p:extLst>
+  </p:cSld>
+</p:sld>
+</file>
+
+<file path=ppt/slides/slide36.xml><?xml version="1.0" encoding="utf-8"?>
+<p:sld xmlns:p="http://schemas.openxmlformats.org/presentationml/2006/main">
+  <p:cSld>
+    <p:bg>
+      <p:bgPr>
+        <a:solidFill xmlns:a="http://schemas.openxmlformats.org/drawingml/2006/main">
+          <a:srgbClr val="FFFFFF"/>
+        </a:solidFill>
+      </p:bgPr>
+    </p:bg>
+    <p:spTree>
+      <p:nvGrpSpPr>
+        <p:cNvPr id="1" name=""/>
+        <p:cNvGrpSpPr/>
+        <p:nvPr/>
+      </p:nvGrpSpPr>
+      <p:grpSpPr>
+        <a:xfrm xmlns:a="http://schemas.openxmlformats.org/drawingml/2006/main"/>
+      </p:grpSpPr>
+      <p:sp>
+        <p:nvSpPr>
+          <p:cNvPr id="7" name="">
+            <a:extLst xmlns:a="http://schemas.openxmlformats.org/drawingml/2006/main">
+              <a:ext uri="{FF2B5EF4-FFF2-40B4-BE49-F238E27FC236}">
+                <a16:creationId xmlns:a16="http://schemas.microsoft.com/office/drawing/2014/main" id="{4A9CAE94-C3DF-4CE7-85D6-0C5FEF2D9239}"/>
+              </a:ext>
+            </a:extLst>
+          </p:cNvPr>
+          <p:cNvSpPr>
+            <a:spLocks xmlns:a="http://schemas.openxmlformats.org/drawingml/2006/main" noGrp="1"/>
+          </p:cNvSpPr>
+          <p:nvPr/>
+        </p:nvSpPr>
+        <p:spPr>
+          <a:xfrm xmlns:a="http://schemas.openxmlformats.org/drawingml/2006/main">
+            <a:off x="457200" y="238125"/>
+            <a:ext cx="7239000" cy="190500"/>
+          </a:xfrm>
+          <a:prstGeom xmlns:a="http://schemas.openxmlformats.org/drawingml/2006/main" prst="rect">
+            <a:avLst/>
+          </a:prstGeom>
+          <a:noFill xmlns:a="http://schemas.openxmlformats.org/drawingml/2006/main"/>
+          <a:ln xmlns:a="http://schemas.openxmlformats.org/drawingml/2006/main" w="0">
+            <a:noFill/>
+            <a:prstDash val="solid"/>
+          </a:ln>
+        </p:spPr>
+        <p:txBody>
+          <a:bodyPr xmlns:a="http://schemas.openxmlformats.org/drawingml/2006/main" anchor="t"/>
+          <a:lstStyle xmlns:a="http://schemas.openxmlformats.org/drawingml/2006/main"/>
+          <a:p xmlns:a="http://schemas.openxmlformats.org/drawingml/2006/main">
+            <a:pPr algn="l">
+              <a:defRPr sz="1050" b="1">
+                <a:solidFill>
+                  <a:srgbClr val="667386"/>
+                </a:solidFill>
+              </a:defRPr>
+            </a:pPr>
+            <a:r>
+              <a:rPr sz="1050" b="1">
+                <a:solidFill>
+                  <a:srgbClr val="667386"/>
+                </a:solidFill>
+              </a:rPr>
+              <a:t>OPERATOR HYPOTHESIS LAB · NVDA INTRADAY OPENING RULE</a:t>
+            </a:r>
+          </a:p>
+        </p:txBody>
+      </p:sp>
+      <p:sp>
+        <p:nvSpPr>
+          <p:cNvPr id="2" name="">
+            <a:extLst xmlns:a="http://schemas.openxmlformats.org/drawingml/2006/main">
+              <a:ext uri="{FF2B5EF4-FFF2-40B4-BE49-F238E27FC236}">
+                <a16:creationId xmlns:a16="http://schemas.microsoft.com/office/drawing/2014/main" id="{FF106D4C-7B0F-4039-BCEB-61E02366C2A7}"/>
+              </a:ext>
+            </a:extLst>
+          </p:cNvPr>
+          <p:cNvSpPr>
+            <a:spLocks xmlns:a="http://schemas.openxmlformats.org/drawingml/2006/main" noGrp="1"/>
+          </p:cNvSpPr>
+          <p:nvPr/>
+        </p:nvSpPr>
+        <p:spPr>
+          <a:xfrm xmlns:a="http://schemas.openxmlformats.org/drawingml/2006/main">
+            <a:off x="457200" y="523875"/>
+            <a:ext cx="11049000" cy="590550"/>
+          </a:xfrm>
+          <a:prstGeom xmlns:a="http://schemas.openxmlformats.org/drawingml/2006/main" prst="rect">
+            <a:avLst/>
+          </a:prstGeom>
+          <a:noFill xmlns:a="http://schemas.openxmlformats.org/drawingml/2006/main"/>
+          <a:ln xmlns:a="http://schemas.openxmlformats.org/drawingml/2006/main" w="0">
+            <a:noFill/>
+            <a:prstDash val="solid"/>
+          </a:ln>
+        </p:spPr>
+        <p:txBody>
+          <a:bodyPr xmlns:a="http://schemas.openxmlformats.org/drawingml/2006/main" anchor="t"/>
+          <a:lstStyle xmlns:a="http://schemas.openxmlformats.org/drawingml/2006/main"/>
+          <a:p xmlns:a="http://schemas.openxmlformats.org/drawingml/2006/main">
+            <a:pPr algn="l">
+              <a:defRPr sz="2925" b="1">
+                <a:solidFill>
+                  <a:srgbClr val="000000"/>
+                </a:solidFill>
+              </a:defRPr>
+            </a:pPr>
+            <a:r>
+              <a:rPr sz="2925" b="1">
+                <a:solidFill>
+                  <a:srgbClr val="000000"/>
+                </a:solidFill>
+              </a:rPr>
+              <a:t>Every signal is knowable at 10:00 without future data</a:t>
+            </a:r>
+          </a:p>
+        </p:txBody>
+      </p:sp>
+      <p:sp>
+        <p:nvSpPr>
+          <p:cNvPr id="3" name="">
+            <a:extLst xmlns:a="http://schemas.openxmlformats.org/drawingml/2006/main">
+              <a:ext uri="{FF2B5EF4-FFF2-40B4-BE49-F238E27FC236}">
+                <a16:creationId xmlns:a16="http://schemas.microsoft.com/office/drawing/2014/main" id="{559DEF51-86C9-48A9-A347-7466130D5A68}"/>
+              </a:ext>
+            </a:extLst>
+          </p:cNvPr>
+          <p:cNvSpPr>
+            <a:spLocks xmlns:a="http://schemas.openxmlformats.org/drawingml/2006/main" noGrp="1"/>
+          </p:cNvSpPr>
+          <p:nvPr/>
+        </p:nvSpPr>
+        <p:spPr>
+          <a:xfrm xmlns:a="http://schemas.openxmlformats.org/drawingml/2006/main">
+            <a:off x="457200" y="1219200"/>
+            <a:ext cx="11277600" cy="19050"/>
+          </a:xfrm>
+          <a:prstGeom xmlns:a="http://schemas.openxmlformats.org/drawingml/2006/main" prst="rect">
+            <a:avLst/>
+          </a:prstGeom>
+          <a:solidFill xmlns:a="http://schemas.openxmlformats.org/drawingml/2006/main">
+            <a:srgbClr val="B8BCC4"/>
+          </a:solidFill>
+          <a:ln xmlns:a="http://schemas.openxmlformats.org/drawingml/2006/main" w="0">
+            <a:solidFill>
+              <a:srgbClr val="B8BCC4"/>
+            </a:solidFill>
+            <a:prstDash val="solid"/>
+          </a:ln>
+        </p:spPr>
+      </p:sp>
+      <p:sp>
+        <p:nvSpPr>
+          <p:cNvPr id="4" name="">
+            <a:extLst xmlns:a="http://schemas.openxmlformats.org/drawingml/2006/main">
+              <a:ext uri="{FF2B5EF4-FFF2-40B4-BE49-F238E27FC236}">
+                <a16:creationId xmlns:a16="http://schemas.microsoft.com/office/drawing/2014/main" id="{A7F89F9D-869D-481E-A123-1DAB55609429}"/>
+              </a:ext>
+            </a:extLst>
+          </p:cNvPr>
+          <p:cNvSpPr>
+            <a:spLocks xmlns:a="http://schemas.openxmlformats.org/drawingml/2006/main" noGrp="1"/>
+          </p:cNvSpPr>
+          <p:nvPr/>
+        </p:nvSpPr>
+        <p:spPr>
+          <a:xfrm xmlns:a="http://schemas.openxmlformats.org/drawingml/2006/main">
+            <a:off x="457200" y="6515100"/>
+            <a:ext cx="8572500" cy="161925"/>
+          </a:xfrm>
+          <a:prstGeom xmlns:a="http://schemas.openxmlformats.org/drawingml/2006/main" prst="rect">
+            <a:avLst/>
+          </a:prstGeom>
+          <a:noFill xmlns:a="http://schemas.openxmlformats.org/drawingml/2006/main"/>
+          <a:ln xmlns:a="http://schemas.openxmlformats.org/drawingml/2006/main" w="0">
+            <a:noFill/>
+            <a:prstDash val="solid"/>
+          </a:ln>
+        </p:spPr>
+        <p:txBody>
+          <a:bodyPr xmlns:a="http://schemas.openxmlformats.org/drawingml/2006/main" anchor="t"/>
+          <a:lstStyle xmlns:a="http://schemas.openxmlformats.org/drawingml/2006/main"/>
+          <a:p xmlns:a="http://schemas.openxmlformats.org/drawingml/2006/main">
+            <a:pPr algn="l">
+              <a:defRPr sz="900" b="0">
+                <a:solidFill>
+                  <a:srgbClr val="667386"/>
+                </a:solidFill>
+              </a:defRPr>
+            </a:pPr>
+            <a:r>
+              <a:rPr sz="900" b="0">
+                <a:solidFill>
+                  <a:srgbClr val="667386"/>
+                </a:solidFill>
+              </a:rPr>
+              <a:t>Causal TRAIN translation · 2019-01-11–2023-12-29 after prior-252-session warm-up</a:t>
+            </a:r>
+          </a:p>
+        </p:txBody>
+      </p:sp>
+      <p:sp>
+        <p:nvSpPr>
+          <p:cNvPr id="5" name="">
+            <a:extLst xmlns:a="http://schemas.openxmlformats.org/drawingml/2006/main">
+              <a:ext uri="{FF2B5EF4-FFF2-40B4-BE49-F238E27FC236}">
+                <a16:creationId xmlns:a16="http://schemas.microsoft.com/office/drawing/2014/main" id="{F5F36231-1B95-4B62-BE73-77F60225B0EE}"/>
+              </a:ext>
+            </a:extLst>
+          </p:cNvPr>
+          <p:cNvSpPr>
+            <a:spLocks xmlns:a="http://schemas.openxmlformats.org/drawingml/2006/main" noGrp="1"/>
+          </p:cNvSpPr>
+          <p:nvPr/>
+        </p:nvSpPr>
+        <p:spPr>
+          <a:xfrm xmlns:a="http://schemas.openxmlformats.org/drawingml/2006/main">
+            <a:off x="10858500" y="6496050"/>
+            <a:ext cx="876300" cy="171450"/>
+          </a:xfrm>
+          <a:prstGeom xmlns:a="http://schemas.openxmlformats.org/drawingml/2006/main" prst="rect">
+            <a:avLst/>
+          </a:prstGeom>
+          <a:noFill xmlns:a="http://schemas.openxmlformats.org/drawingml/2006/main"/>
+          <a:ln xmlns:a="http://schemas.openxmlformats.org/drawingml/2006/main" w="0">
+            <a:noFill/>
+            <a:prstDash val="solid"/>
+          </a:ln>
+        </p:spPr>
+        <p:txBody>
+          <a:bodyPr xmlns:a="http://schemas.openxmlformats.org/drawingml/2006/main" anchor="t"/>
+          <a:lstStyle xmlns:a="http://schemas.openxmlformats.org/drawingml/2006/main"/>
+          <a:p xmlns:a="http://schemas.openxmlformats.org/drawingml/2006/main">
+            <a:pPr algn="r">
+              <a:defRPr sz="900" b="0">
+                <a:solidFill>
+                  <a:srgbClr val="667386"/>
+                </a:solidFill>
+              </a:defRPr>
+            </a:pPr>
+            <a:r>
+              <a:rPr sz="900" b="0">
+                <a:solidFill>
+                  <a:srgbClr val="667386"/>
+                </a:solidFill>
+              </a:rPr>
+              <a:t>36</a:t>
+            </a:r>
+          </a:p>
+        </p:txBody>
+      </p:sp>
+      <p:pic>
+        <p:nvPicPr>
+          <p:cNvPr id="12" name=""/>
+          <p:cNvPicPr>
+            <a:picLocks xmlns:a="http://schemas.openxmlformats.org/drawingml/2006/main" noChangeAspect="1"/>
+          </p:cNvPicPr>
+          <p:nvPr/>
+        </p:nvPicPr>
+        <p:blipFill>
+          <a:blip xmlns:r="http://schemas.openxmlformats.org/officeDocument/2006/relationships" xmlns:a="http://schemas.openxmlformats.org/drawingml/2006/main" r:embed="R47a53dea345d4b3b"/>
+          <a:stretch xmlns:a="http://schemas.openxmlformats.org/drawingml/2006/main"/>
+        </p:blipFill>
+        <p:spPr>
+          <a:xfrm xmlns:a="http://schemas.openxmlformats.org/drawingml/2006/main">
+            <a:off x="1934308" y="1371600"/>
+            <a:ext cx="8285285" cy="4895850"/>
+          </a:xfrm>
+          <a:prstGeom xmlns:a="http://schemas.openxmlformats.org/drawingml/2006/main" prst="rect">
+            <a:avLst/>
+          </a:prstGeom>
+        </p:spPr>
+      </p:pic>
+    </p:spTree>
+    <p:extLst>
+      <p:ext uri="{BB962C8B-B14F-4D97-AF65-F5344CB8AC3E}">
+        <p14:creationId xmlns:p14="http://schemas.microsoft.com/office/powerpoint/2010/main" val="518259252"/>
+      </p:ext>
+    </p:extLst>
+  </p:cSld>
+</p:sld>
+</file>
+
+<file path=ppt/slides/slide37.xml><?xml version="1.0" encoding="utf-8"?>
+<p:sld xmlns:p="http://schemas.openxmlformats.org/presentationml/2006/main">
+  <p:cSld>
+    <p:bg>
+      <p:bgPr>
+        <a:solidFill xmlns:a="http://schemas.openxmlformats.org/drawingml/2006/main">
+          <a:srgbClr val="FFFFFF"/>
+        </a:solidFill>
+      </p:bgPr>
+    </p:bg>
+    <p:spTree>
+      <p:nvGrpSpPr>
+        <p:cNvPr id="1" name=""/>
+        <p:cNvGrpSpPr/>
+        <p:nvPr/>
+      </p:nvGrpSpPr>
+      <p:grpSpPr>
+        <a:xfrm xmlns:a="http://schemas.openxmlformats.org/drawingml/2006/main"/>
+      </p:grpSpPr>
+      <p:sp>
+        <p:nvSpPr>
+          <p:cNvPr id="7" name="">
+            <a:extLst xmlns:a="http://schemas.openxmlformats.org/drawingml/2006/main">
+              <a:ext uri="{FF2B5EF4-FFF2-40B4-BE49-F238E27FC236}">
+                <a16:creationId xmlns:a16="http://schemas.microsoft.com/office/drawing/2014/main" id="{6BFCB91E-7018-4AFA-AB9A-E4022D0DEDBC}"/>
+              </a:ext>
+            </a:extLst>
+          </p:cNvPr>
+          <p:cNvSpPr>
+            <a:spLocks xmlns:a="http://schemas.openxmlformats.org/drawingml/2006/main" noGrp="1"/>
+          </p:cNvSpPr>
+          <p:nvPr/>
+        </p:nvSpPr>
+        <p:spPr>
+          <a:xfrm xmlns:a="http://schemas.openxmlformats.org/drawingml/2006/main">
+            <a:off x="457200" y="238125"/>
+            <a:ext cx="7239000" cy="190500"/>
+          </a:xfrm>
+          <a:prstGeom xmlns:a="http://schemas.openxmlformats.org/drawingml/2006/main" prst="rect">
+            <a:avLst/>
+          </a:prstGeom>
+          <a:noFill xmlns:a="http://schemas.openxmlformats.org/drawingml/2006/main"/>
+          <a:ln xmlns:a="http://schemas.openxmlformats.org/drawingml/2006/main" w="0">
+            <a:noFill/>
+            <a:prstDash val="solid"/>
+          </a:ln>
+        </p:spPr>
+        <p:txBody>
+          <a:bodyPr xmlns:a="http://schemas.openxmlformats.org/drawingml/2006/main" anchor="t"/>
+          <a:lstStyle xmlns:a="http://schemas.openxmlformats.org/drawingml/2006/main"/>
+          <a:p xmlns:a="http://schemas.openxmlformats.org/drawingml/2006/main">
+            <a:pPr algn="l">
+              <a:defRPr sz="1050" b="1">
+                <a:solidFill>
+                  <a:srgbClr val="667386"/>
+                </a:solidFill>
+              </a:defRPr>
+            </a:pPr>
+            <a:r>
+              <a:rPr sz="1050" b="1">
+                <a:solidFill>
+                  <a:srgbClr val="667386"/>
+                </a:solidFill>
+              </a:rPr>
+              <a:t>OPERATOR HYPOTHESIS LAB · NVDA INTRADAY OPENING RULE</a:t>
+            </a:r>
+          </a:p>
+        </p:txBody>
+      </p:sp>
+      <p:sp>
+        <p:nvSpPr>
+          <p:cNvPr id="2" name="">
+            <a:extLst xmlns:a="http://schemas.openxmlformats.org/drawingml/2006/main">
+              <a:ext uri="{FF2B5EF4-FFF2-40B4-BE49-F238E27FC236}">
+                <a16:creationId xmlns:a16="http://schemas.microsoft.com/office/drawing/2014/main" id="{5D874944-351A-4A06-86C7-08DCA578D10B}"/>
+              </a:ext>
+            </a:extLst>
+          </p:cNvPr>
+          <p:cNvSpPr>
+            <a:spLocks xmlns:a="http://schemas.openxmlformats.org/drawingml/2006/main" noGrp="1"/>
+          </p:cNvSpPr>
+          <p:nvPr/>
+        </p:nvSpPr>
+        <p:spPr>
+          <a:xfrm xmlns:a="http://schemas.openxmlformats.org/drawingml/2006/main">
+            <a:off x="457200" y="523875"/>
+            <a:ext cx="11049000" cy="590550"/>
+          </a:xfrm>
+          <a:prstGeom xmlns:a="http://schemas.openxmlformats.org/drawingml/2006/main" prst="rect">
+            <a:avLst/>
+          </a:prstGeom>
+          <a:noFill xmlns:a="http://schemas.openxmlformats.org/drawingml/2006/main"/>
+          <a:ln xmlns:a="http://schemas.openxmlformats.org/drawingml/2006/main" w="0">
+            <a:noFill/>
+            <a:prstDash val="solid"/>
+          </a:ln>
+        </p:spPr>
+        <p:txBody>
+          <a:bodyPr xmlns:a="http://schemas.openxmlformats.org/drawingml/2006/main" anchor="t"/>
+          <a:lstStyle xmlns:a="http://schemas.openxmlformats.org/drawingml/2006/main"/>
+          <a:p xmlns:a="http://schemas.openxmlformats.org/drawingml/2006/main">
+            <a:pPr algn="l">
+              <a:defRPr sz="2925" b="1">
+                <a:solidFill>
+                  <a:srgbClr val="000000"/>
+                </a:solidFill>
+              </a:defRPr>
+            </a:pPr>
+            <a:r>
+              <a:rPr sz="2925" b="1">
+                <a:solidFill>
+                  <a:srgbClr val="000000"/>
+                </a:solidFill>
+              </a:rPr>
+              <a:t>ATR% performs real discrimination inside TRAIN</a:t>
+            </a:r>
+          </a:p>
+        </p:txBody>
+      </p:sp>
+      <p:sp>
+        <p:nvSpPr>
+          <p:cNvPr id="3" name="">
+            <a:extLst xmlns:a="http://schemas.openxmlformats.org/drawingml/2006/main">
+              <a:ext uri="{FF2B5EF4-FFF2-40B4-BE49-F238E27FC236}">
+                <a16:creationId xmlns:a16="http://schemas.microsoft.com/office/drawing/2014/main" id="{3787F996-0CBE-4EB7-B0F6-EF0C11E9C5FE}"/>
+              </a:ext>
+            </a:extLst>
+          </p:cNvPr>
+          <p:cNvSpPr>
+            <a:spLocks xmlns:a="http://schemas.openxmlformats.org/drawingml/2006/main" noGrp="1"/>
+          </p:cNvSpPr>
+          <p:nvPr/>
+        </p:nvSpPr>
+        <p:spPr>
+          <a:xfrm xmlns:a="http://schemas.openxmlformats.org/drawingml/2006/main">
+            <a:off x="457200" y="1219200"/>
+            <a:ext cx="11277600" cy="19050"/>
+          </a:xfrm>
+          <a:prstGeom xmlns:a="http://schemas.openxmlformats.org/drawingml/2006/main" prst="rect">
+            <a:avLst/>
+          </a:prstGeom>
+          <a:solidFill xmlns:a="http://schemas.openxmlformats.org/drawingml/2006/main">
+            <a:srgbClr val="B8BCC4"/>
+          </a:solidFill>
+          <a:ln xmlns:a="http://schemas.openxmlformats.org/drawingml/2006/main" w="0">
+            <a:solidFill>
+              <a:srgbClr val="B8BCC4"/>
+            </a:solidFill>
+            <a:prstDash val="solid"/>
+          </a:ln>
+        </p:spPr>
+      </p:sp>
+      <p:sp>
+        <p:nvSpPr>
+          <p:cNvPr id="4" name="">
+            <a:extLst xmlns:a="http://schemas.openxmlformats.org/drawingml/2006/main">
+              <a:ext uri="{FF2B5EF4-FFF2-40B4-BE49-F238E27FC236}">
+                <a16:creationId xmlns:a16="http://schemas.microsoft.com/office/drawing/2014/main" id="{54FCE8B9-1C59-4B7E-A1A5-94B39F68DECC}"/>
+              </a:ext>
+            </a:extLst>
+          </p:cNvPr>
+          <p:cNvSpPr>
+            <a:spLocks xmlns:a="http://schemas.openxmlformats.org/drawingml/2006/main" noGrp="1"/>
+          </p:cNvSpPr>
+          <p:nvPr/>
+        </p:nvSpPr>
+        <p:spPr>
+          <a:xfrm xmlns:a="http://schemas.openxmlformats.org/drawingml/2006/main">
+            <a:off x="457200" y="6515100"/>
+            <a:ext cx="8572500" cy="161925"/>
+          </a:xfrm>
+          <a:prstGeom xmlns:a="http://schemas.openxmlformats.org/drawingml/2006/main" prst="rect">
+            <a:avLst/>
+          </a:prstGeom>
+          <a:noFill xmlns:a="http://schemas.openxmlformats.org/drawingml/2006/main"/>
+          <a:ln xmlns:a="http://schemas.openxmlformats.org/drawingml/2006/main" w="0">
+            <a:noFill/>
+            <a:prstDash val="solid"/>
+          </a:ln>
+        </p:spPr>
+        <p:txBody>
+          <a:bodyPr xmlns:a="http://schemas.openxmlformats.org/drawingml/2006/main" anchor="t"/>
+          <a:lstStyle xmlns:a="http://schemas.openxmlformats.org/drawingml/2006/main"/>
+          <a:p xmlns:a="http://schemas.openxmlformats.org/drawingml/2006/main">
+            <a:pPr algn="l">
+              <a:defRPr sz="900" b="0">
+                <a:solidFill>
+                  <a:srgbClr val="667386"/>
+                </a:solidFill>
+              </a:defRPr>
+            </a:pPr>
+            <a:r>
+              <a:rPr sz="900" b="0">
+                <a:solidFill>
+                  <a:srgbClr val="667386"/>
+                </a:solidFill>
+              </a:rPr>
+              <a:t>Causal TRAIN translation · 2019-01-11–2023-12-29 after prior-252-session warm-up</a:t>
+            </a:r>
+          </a:p>
+        </p:txBody>
+      </p:sp>
+      <p:sp>
+        <p:nvSpPr>
+          <p:cNvPr id="5" name="">
+            <a:extLst xmlns:a="http://schemas.openxmlformats.org/drawingml/2006/main">
+              <a:ext uri="{FF2B5EF4-FFF2-40B4-BE49-F238E27FC236}">
+                <a16:creationId xmlns:a16="http://schemas.microsoft.com/office/drawing/2014/main" id="{D41CD223-B7BD-4208-A68D-A427B284EFFA}"/>
+              </a:ext>
+            </a:extLst>
+          </p:cNvPr>
+          <p:cNvSpPr>
+            <a:spLocks xmlns:a="http://schemas.openxmlformats.org/drawingml/2006/main" noGrp="1"/>
+          </p:cNvSpPr>
+          <p:nvPr/>
+        </p:nvSpPr>
+        <p:spPr>
+          <a:xfrm xmlns:a="http://schemas.openxmlformats.org/drawingml/2006/main">
+            <a:off x="10858500" y="6496050"/>
+            <a:ext cx="876300" cy="171450"/>
+          </a:xfrm>
+          <a:prstGeom xmlns:a="http://schemas.openxmlformats.org/drawingml/2006/main" prst="rect">
+            <a:avLst/>
+          </a:prstGeom>
+          <a:noFill xmlns:a="http://schemas.openxmlformats.org/drawingml/2006/main"/>
+          <a:ln xmlns:a="http://schemas.openxmlformats.org/drawingml/2006/main" w="0">
+            <a:noFill/>
+            <a:prstDash val="solid"/>
+          </a:ln>
+        </p:spPr>
+        <p:txBody>
+          <a:bodyPr xmlns:a="http://schemas.openxmlformats.org/drawingml/2006/main" anchor="t"/>
+          <a:lstStyle xmlns:a="http://schemas.openxmlformats.org/drawingml/2006/main"/>
+          <a:p xmlns:a="http://schemas.openxmlformats.org/drawingml/2006/main">
+            <a:pPr algn="r">
+              <a:defRPr sz="900" b="0">
+                <a:solidFill>
+                  <a:srgbClr val="667386"/>
+                </a:solidFill>
+              </a:defRPr>
+            </a:pPr>
+            <a:r>
+              <a:rPr sz="900" b="0">
+                <a:solidFill>
+                  <a:srgbClr val="667386"/>
+                </a:solidFill>
+              </a:rPr>
+              <a:t>37</a:t>
+            </a:r>
+          </a:p>
+        </p:txBody>
+      </p:sp>
+      <p:pic>
+        <p:nvPicPr>
+          <p:cNvPr id="12" name=""/>
+          <p:cNvPicPr>
+            <a:picLocks xmlns:a="http://schemas.openxmlformats.org/drawingml/2006/main" noChangeAspect="1"/>
+          </p:cNvPicPr>
+          <p:nvPr/>
+        </p:nvPicPr>
+        <p:blipFill>
+          <a:blip xmlns:r="http://schemas.openxmlformats.org/officeDocument/2006/relationships" xmlns:a="http://schemas.openxmlformats.org/drawingml/2006/main" r:embed="Rb0b7f83122bf4764"/>
+          <a:stretch xmlns:a="http://schemas.openxmlformats.org/drawingml/2006/main"/>
+        </p:blipFill>
+        <p:spPr>
+          <a:xfrm xmlns:a="http://schemas.openxmlformats.org/drawingml/2006/main">
+            <a:off x="2055359" y="1371600"/>
+            <a:ext cx="8043182" cy="4895850"/>
+          </a:xfrm>
+          <a:prstGeom xmlns:a="http://schemas.openxmlformats.org/drawingml/2006/main" prst="rect">
+            <a:avLst/>
+          </a:prstGeom>
+        </p:spPr>
+      </p:pic>
+    </p:spTree>
+    <p:extLst>
+      <p:ext uri="{BB962C8B-B14F-4D97-AF65-F5344CB8AC3E}">
+        <p14:creationId xmlns:p14="http://schemas.microsoft.com/office/powerpoint/2010/main" val="762549877"/>
+      </p:ext>
+    </p:extLst>
+  </p:cSld>
+</p:sld>
+</file>
+
+<file path=ppt/slides/slide38.xml><?xml version="1.0" encoding="utf-8"?>
+<p:sld xmlns:p="http://schemas.openxmlformats.org/presentationml/2006/main">
+  <p:cSld>
+    <p:bg>
+      <p:bgPr>
+        <a:solidFill xmlns:a="http://schemas.openxmlformats.org/drawingml/2006/main">
+          <a:srgbClr val="FFFFFF"/>
+        </a:solidFill>
+      </p:bgPr>
+    </p:bg>
+    <p:spTree>
+      <p:nvGrpSpPr>
+        <p:cNvPr id="1" name=""/>
+        <p:cNvGrpSpPr/>
+        <p:nvPr/>
+      </p:nvGrpSpPr>
+      <p:grpSpPr>
+        <a:xfrm xmlns:a="http://schemas.openxmlformats.org/drawingml/2006/main"/>
+      </p:grpSpPr>
+      <p:sp>
+        <p:nvSpPr>
+          <p:cNvPr id="15" name="">
+            <a:extLst xmlns:a="http://schemas.openxmlformats.org/drawingml/2006/main">
+              <a:ext uri="{FF2B5EF4-FFF2-40B4-BE49-F238E27FC236}">
+                <a16:creationId xmlns:a16="http://schemas.microsoft.com/office/drawing/2014/main" id="{44DB292B-42ED-4E91-AFB4-9ADCCEF725E6}"/>
+              </a:ext>
+            </a:extLst>
+          </p:cNvPr>
+          <p:cNvSpPr>
+            <a:spLocks xmlns:a="http://schemas.openxmlformats.org/drawingml/2006/main" noGrp="1"/>
+          </p:cNvSpPr>
+          <p:nvPr/>
+        </p:nvSpPr>
+        <p:spPr>
+          <a:xfrm xmlns:a="http://schemas.openxmlformats.org/drawingml/2006/main">
+            <a:off x="457200" y="238125"/>
+            <a:ext cx="7239000" cy="190500"/>
+          </a:xfrm>
+          <a:prstGeom xmlns:a="http://schemas.openxmlformats.org/drawingml/2006/main" prst="rect">
+            <a:avLst/>
+          </a:prstGeom>
+          <a:noFill xmlns:a="http://schemas.openxmlformats.org/drawingml/2006/main"/>
+          <a:ln xmlns:a="http://schemas.openxmlformats.org/drawingml/2006/main" w="0">
+            <a:noFill/>
+            <a:prstDash val="solid"/>
+          </a:ln>
+        </p:spPr>
+        <p:txBody>
+          <a:bodyPr xmlns:a="http://schemas.openxmlformats.org/drawingml/2006/main" anchor="t"/>
+          <a:lstStyle xmlns:a="http://schemas.openxmlformats.org/drawingml/2006/main"/>
+          <a:p xmlns:a="http://schemas.openxmlformats.org/drawingml/2006/main">
+            <a:pPr algn="l">
+              <a:defRPr sz="1050" b="1">
+                <a:solidFill>
+                  <a:srgbClr val="667386"/>
+                </a:solidFill>
+              </a:defRPr>
+            </a:pPr>
+            <a:r>
+              <a:rPr sz="1050" b="1">
+                <a:solidFill>
+                  <a:srgbClr val="667386"/>
+                </a:solidFill>
+              </a:rPr>
+              <a:t>OPERATOR HYPOTHESIS LAB · NVDA INTRADAY OPENING RULE</a:t>
+            </a:r>
+          </a:p>
+        </p:txBody>
+      </p:sp>
+      <p:sp>
+        <p:nvSpPr>
+          <p:cNvPr id="2" name="">
+            <a:extLst xmlns:a="http://schemas.openxmlformats.org/drawingml/2006/main">
+              <a:ext uri="{FF2B5EF4-FFF2-40B4-BE49-F238E27FC236}">
+                <a16:creationId xmlns:a16="http://schemas.microsoft.com/office/drawing/2014/main" id="{1827E85D-CC85-4192-9C0C-856849490518}"/>
+              </a:ext>
+            </a:extLst>
+          </p:cNvPr>
+          <p:cNvSpPr>
+            <a:spLocks xmlns:a="http://schemas.openxmlformats.org/drawingml/2006/main" noGrp="1"/>
+          </p:cNvSpPr>
+          <p:nvPr/>
+        </p:nvSpPr>
+        <p:spPr>
+          <a:xfrm xmlns:a="http://schemas.openxmlformats.org/drawingml/2006/main">
+            <a:off x="457200" y="523875"/>
+            <a:ext cx="11049000" cy="590550"/>
+          </a:xfrm>
+          <a:prstGeom xmlns:a="http://schemas.openxmlformats.org/drawingml/2006/main" prst="rect">
+            <a:avLst/>
+          </a:prstGeom>
+          <a:noFill xmlns:a="http://schemas.openxmlformats.org/drawingml/2006/main"/>
+          <a:ln xmlns:a="http://schemas.openxmlformats.org/drawingml/2006/main" w="0">
+            <a:noFill/>
+            <a:prstDash val="solid"/>
+          </a:ln>
+        </p:spPr>
+        <p:txBody>
+          <a:bodyPr xmlns:a="http://schemas.openxmlformats.org/drawingml/2006/main" anchor="t"/>
+          <a:lstStyle xmlns:a="http://schemas.openxmlformats.org/drawingml/2006/main"/>
+          <a:p xmlns:a="http://schemas.openxmlformats.org/drawingml/2006/main">
+            <a:pPr algn="l">
+              <a:defRPr sz="2925" b="1">
+                <a:solidFill>
+                  <a:srgbClr val="000000"/>
+                </a:solidFill>
+              </a:defRPr>
+            </a:pPr>
+            <a:r>
+              <a:rPr sz="2925" b="1">
+                <a:solidFill>
+                  <a:srgbClr val="000000"/>
+                </a:solidFill>
+              </a:rPr>
+              <a:t>The aggregate result fails temporal breadth</a:t>
+            </a:r>
+          </a:p>
+        </p:txBody>
+      </p:sp>
+      <p:sp>
+        <p:nvSpPr>
+          <p:cNvPr id="3" name="">
+            <a:extLst xmlns:a="http://schemas.openxmlformats.org/drawingml/2006/main">
+              <a:ext uri="{FF2B5EF4-FFF2-40B4-BE49-F238E27FC236}">
+                <a16:creationId xmlns:a16="http://schemas.microsoft.com/office/drawing/2014/main" id="{BBE5212B-ACDE-4C18-9C07-A2C2B911AF38}"/>
+              </a:ext>
+            </a:extLst>
+          </p:cNvPr>
+          <p:cNvSpPr>
+            <a:spLocks xmlns:a="http://schemas.openxmlformats.org/drawingml/2006/main" noGrp="1"/>
+          </p:cNvSpPr>
+          <p:nvPr/>
+        </p:nvSpPr>
+        <p:spPr>
+          <a:xfrm xmlns:a="http://schemas.openxmlformats.org/drawingml/2006/main">
+            <a:off x="457200" y="1219200"/>
+            <a:ext cx="11277600" cy="19050"/>
+          </a:xfrm>
+          <a:prstGeom xmlns:a="http://schemas.openxmlformats.org/drawingml/2006/main" prst="rect">
+            <a:avLst/>
+          </a:prstGeom>
+          <a:solidFill xmlns:a="http://schemas.openxmlformats.org/drawingml/2006/main">
+            <a:srgbClr val="B8BCC4"/>
+          </a:solidFill>
+          <a:ln xmlns:a="http://schemas.openxmlformats.org/drawingml/2006/main" w="0">
+            <a:solidFill>
+              <a:srgbClr val="B8BCC4"/>
+            </a:solidFill>
+            <a:prstDash val="solid"/>
+          </a:ln>
+        </p:spPr>
+      </p:sp>
+      <p:sp>
+        <p:nvSpPr>
+          <p:cNvPr id="4" name="">
+            <a:extLst xmlns:a="http://schemas.openxmlformats.org/drawingml/2006/main">
+              <a:ext uri="{FF2B5EF4-FFF2-40B4-BE49-F238E27FC236}">
+                <a16:creationId xmlns:a16="http://schemas.microsoft.com/office/drawing/2014/main" id="{F20D34E5-4F65-4DA5-AB08-E80057F5C4F3}"/>
+              </a:ext>
+            </a:extLst>
+          </p:cNvPr>
+          <p:cNvSpPr>
+            <a:spLocks xmlns:a="http://schemas.openxmlformats.org/drawingml/2006/main" noGrp="1"/>
+          </p:cNvSpPr>
+          <p:nvPr/>
+        </p:nvSpPr>
+        <p:spPr>
+          <a:xfrm xmlns:a="http://schemas.openxmlformats.org/drawingml/2006/main">
+            <a:off x="457200" y="6515100"/>
+            <a:ext cx="8572500" cy="161925"/>
+          </a:xfrm>
+          <a:prstGeom xmlns:a="http://schemas.openxmlformats.org/drawingml/2006/main" prst="rect">
+            <a:avLst/>
+          </a:prstGeom>
+          <a:noFill xmlns:a="http://schemas.openxmlformats.org/drawingml/2006/main"/>
+          <a:ln xmlns:a="http://schemas.openxmlformats.org/drawingml/2006/main" w="0">
+            <a:noFill/>
+            <a:prstDash val="solid"/>
+          </a:ln>
+        </p:spPr>
+        <p:txBody>
+          <a:bodyPr xmlns:a="http://schemas.openxmlformats.org/drawingml/2006/main" anchor="t"/>
+          <a:lstStyle xmlns:a="http://schemas.openxmlformats.org/drawingml/2006/main"/>
+          <a:p xmlns:a="http://schemas.openxmlformats.org/drawingml/2006/main">
+            <a:pPr algn="l">
+              <a:defRPr sz="900" b="0">
+                <a:solidFill>
+                  <a:srgbClr val="667386"/>
+                </a:solidFill>
+              </a:defRPr>
+            </a:pPr>
+            <a:r>
+              <a:rPr sz="900" b="0">
+                <a:solidFill>
+                  <a:srgbClr val="667386"/>
+                </a:solidFill>
+              </a:rPr>
+              <a:t>Causal TRAIN translation · 2019-01-11–2023-12-29 after prior-252-session warm-up</a:t>
+            </a:r>
+          </a:p>
+        </p:txBody>
+      </p:sp>
+      <p:sp>
+        <p:nvSpPr>
+          <p:cNvPr id="5" name="">
+            <a:extLst xmlns:a="http://schemas.openxmlformats.org/drawingml/2006/main">
+              <a:ext uri="{FF2B5EF4-FFF2-40B4-BE49-F238E27FC236}">
+                <a16:creationId xmlns:a16="http://schemas.microsoft.com/office/drawing/2014/main" id="{951A9F9B-19FF-40B4-AD93-6DCB8B64A7D7}"/>
+              </a:ext>
+            </a:extLst>
+          </p:cNvPr>
+          <p:cNvSpPr>
+            <a:spLocks xmlns:a="http://schemas.openxmlformats.org/drawingml/2006/main" noGrp="1"/>
+          </p:cNvSpPr>
+          <p:nvPr/>
+        </p:nvSpPr>
+        <p:spPr>
+          <a:xfrm xmlns:a="http://schemas.openxmlformats.org/drawingml/2006/main">
+            <a:off x="10858500" y="6496050"/>
+            <a:ext cx="876300" cy="171450"/>
+          </a:xfrm>
+          <a:prstGeom xmlns:a="http://schemas.openxmlformats.org/drawingml/2006/main" prst="rect">
+            <a:avLst/>
+          </a:prstGeom>
+          <a:noFill xmlns:a="http://schemas.openxmlformats.org/drawingml/2006/main"/>
+          <a:ln xmlns:a="http://schemas.openxmlformats.org/drawingml/2006/main" w="0">
+            <a:noFill/>
+            <a:prstDash val="solid"/>
+          </a:ln>
+        </p:spPr>
+        <p:txBody>
+          <a:bodyPr xmlns:a="http://schemas.openxmlformats.org/drawingml/2006/main" anchor="t"/>
+          <a:lstStyle xmlns:a="http://schemas.openxmlformats.org/drawingml/2006/main"/>
+          <a:p xmlns:a="http://schemas.openxmlformats.org/drawingml/2006/main">
+            <a:pPr algn="r">
+              <a:defRPr sz="900" b="0">
+                <a:solidFill>
+                  <a:srgbClr val="667386"/>
+                </a:solidFill>
+              </a:defRPr>
+            </a:pPr>
+            <a:r>
+              <a:rPr sz="900" b="0">
+                <a:solidFill>
+                  <a:srgbClr val="667386"/>
+                </a:solidFill>
+              </a:rPr>
+              <a:t>38</a:t>
+            </a:r>
+          </a:p>
+        </p:txBody>
+      </p:sp>
+      <p:pic>
+        <p:nvPicPr>
+          <p:cNvPr id="20" name=""/>
+          <p:cNvPicPr>
+            <a:picLocks xmlns:a="http://schemas.openxmlformats.org/drawingml/2006/main" noChangeAspect="1"/>
+          </p:cNvPicPr>
+          <p:nvPr/>
+        </p:nvPicPr>
+        <p:blipFill>
+          <a:blip xmlns:r="http://schemas.openxmlformats.org/officeDocument/2006/relationships" xmlns:a="http://schemas.openxmlformats.org/drawingml/2006/main" r:embed="R6c2a87a174b24ae0"/>
+          <a:stretch xmlns:a="http://schemas.openxmlformats.org/drawingml/2006/main"/>
+        </p:blipFill>
+        <p:spPr>
+          <a:xfrm xmlns:a="http://schemas.openxmlformats.org/drawingml/2006/main">
+            <a:off x="403777" y="1371600"/>
+            <a:ext cx="8088796" cy="4895850"/>
+          </a:xfrm>
+          <a:prstGeom xmlns:a="http://schemas.openxmlformats.org/drawingml/2006/main" prst="rect">
+            <a:avLst/>
+          </a:prstGeom>
+        </p:spPr>
+      </p:pic>
+      <p:sp>
+        <p:nvSpPr>
+          <p:cNvPr id="7" name="">
+            <a:extLst xmlns:a="http://schemas.openxmlformats.org/drawingml/2006/main">
+              <a:ext uri="{FF2B5EF4-FFF2-40B4-BE49-F238E27FC236}">
+                <a16:creationId xmlns:a16="http://schemas.microsoft.com/office/drawing/2014/main" id="{9B50A468-D183-465F-B350-C20ADAF2C288}"/>
+              </a:ext>
+            </a:extLst>
+          </p:cNvPr>
+          <p:cNvSpPr>
+            <a:spLocks xmlns:a="http://schemas.openxmlformats.org/drawingml/2006/main" noGrp="1"/>
+          </p:cNvSpPr>
+          <p:nvPr/>
+        </p:nvSpPr>
+        <p:spPr>
+          <a:xfrm xmlns:a="http://schemas.openxmlformats.org/drawingml/2006/main">
+            <a:off x="8743950" y="1504950"/>
+            <a:ext cx="2895600" cy="4419600"/>
+          </a:xfrm>
+          <a:prstGeom xmlns:a="http://schemas.openxmlformats.org/drawingml/2006/main" prst="rect">
+            <a:avLst/>
+          </a:prstGeom>
+          <a:solidFill xmlns:a="http://schemas.openxmlformats.org/drawingml/2006/main">
+            <a:srgbClr val="F3F5F7"/>
+          </a:solidFill>
+          <a:ln xmlns:a="http://schemas.openxmlformats.org/drawingml/2006/main" w="0">
+            <a:solidFill>
+              <a:srgbClr val="F3F5F7"/>
+            </a:solidFill>
+            <a:prstDash val="solid"/>
+          </a:ln>
+        </p:spPr>
+      </p:sp>
+      <p:sp>
+        <p:nvSpPr>
+          <p:cNvPr id="8" name="">
+            <a:extLst xmlns:a="http://schemas.openxmlformats.org/drawingml/2006/main">
+              <a:ext uri="{FF2B5EF4-FFF2-40B4-BE49-F238E27FC236}">
+                <a16:creationId xmlns:a16="http://schemas.microsoft.com/office/drawing/2014/main" id="{9473CCA9-0F9C-4272-84EA-81EEC0B43F2A}"/>
+              </a:ext>
+            </a:extLst>
+          </p:cNvPr>
+          <p:cNvSpPr>
+            <a:spLocks xmlns:a="http://schemas.openxmlformats.org/drawingml/2006/main" noGrp="1"/>
+          </p:cNvSpPr>
+          <p:nvPr/>
+        </p:nvSpPr>
+        <p:spPr>
+          <a:xfrm xmlns:a="http://schemas.openxmlformats.org/drawingml/2006/main">
+            <a:off x="8991600" y="1809750"/>
+            <a:ext cx="2400300" cy="533400"/>
+          </a:xfrm>
+          <a:prstGeom xmlns:a="http://schemas.openxmlformats.org/drawingml/2006/main" prst="rect">
+            <a:avLst/>
+          </a:prstGeom>
+          <a:noFill xmlns:a="http://schemas.openxmlformats.org/drawingml/2006/main"/>
+          <a:ln xmlns:a="http://schemas.openxmlformats.org/drawingml/2006/main" w="0">
+            <a:noFill/>
+            <a:prstDash val="solid"/>
+          </a:ln>
+        </p:spPr>
+        <p:txBody>
+          <a:bodyPr xmlns:a="http://schemas.openxmlformats.org/drawingml/2006/main" anchor="t"/>
+          <a:lstStyle xmlns:a="http://schemas.openxmlformats.org/drawingml/2006/main"/>
+          <a:p xmlns:a="http://schemas.openxmlformats.org/drawingml/2006/main">
+            <a:pPr algn="l">
+              <a:defRPr sz="3300" b="1">
+                <a:solidFill>
+                  <a:srgbClr val="B44738"/>
+                </a:solidFill>
+              </a:defRPr>
+            </a:pPr>
+            <a:r>
+              <a:rPr sz="3300" b="1">
+                <a:solidFill>
+                  <a:srgbClr val="B44738"/>
+                </a:solidFill>
+              </a:rPr>
+              <a:t>2 / 5</a:t>
+            </a:r>
+          </a:p>
+        </p:txBody>
+      </p:sp>
+      <p:sp>
+        <p:nvSpPr>
+          <p:cNvPr id="9" name="">
+            <a:extLst xmlns:a="http://schemas.openxmlformats.org/drawingml/2006/main">
+              <a:ext uri="{FF2B5EF4-FFF2-40B4-BE49-F238E27FC236}">
+                <a16:creationId xmlns:a16="http://schemas.microsoft.com/office/drawing/2014/main" id="{C68DC7A1-8705-4250-8FE4-5F8EC2E44105}"/>
+              </a:ext>
+            </a:extLst>
+          </p:cNvPr>
+          <p:cNvSpPr>
+            <a:spLocks xmlns:a="http://schemas.openxmlformats.org/drawingml/2006/main" noGrp="1"/>
+          </p:cNvSpPr>
+          <p:nvPr/>
+        </p:nvSpPr>
+        <p:spPr>
+          <a:xfrm xmlns:a="http://schemas.openxmlformats.org/drawingml/2006/main">
+            <a:off x="8991600" y="2343150"/>
+            <a:ext cx="2400300" cy="266700"/>
+          </a:xfrm>
+          <a:prstGeom xmlns:a="http://schemas.openxmlformats.org/drawingml/2006/main" prst="rect">
+            <a:avLst/>
+          </a:prstGeom>
+          <a:noFill xmlns:a="http://schemas.openxmlformats.org/drawingml/2006/main"/>
+          <a:ln xmlns:a="http://schemas.openxmlformats.org/drawingml/2006/main" w="0">
+            <a:noFill/>
+            <a:prstDash val="solid"/>
+          </a:ln>
+        </p:spPr>
+        <p:txBody>
+          <a:bodyPr xmlns:a="http://schemas.openxmlformats.org/drawingml/2006/main" anchor="t"/>
+          <a:lstStyle xmlns:a="http://schemas.openxmlformats.org/drawingml/2006/main"/>
+          <a:p xmlns:a="http://schemas.openxmlformats.org/drawingml/2006/main">
+            <a:pPr algn="l">
+              <a:defRPr sz="1425" b="1">
+                <a:solidFill>
+                  <a:srgbClr val="24364B"/>
+                </a:solidFill>
+              </a:defRPr>
+            </a:pPr>
+            <a:r>
+              <a:rPr sz="1425" b="1">
+                <a:solidFill>
+                  <a:srgbClr val="24364B"/>
+                </a:solidFill>
+              </a:rPr>
+              <a:t>positive years</a:t>
+            </a:r>
+          </a:p>
+        </p:txBody>
+      </p:sp>
+      <p:sp>
+        <p:nvSpPr>
+          <p:cNvPr id="10" name="">
+            <a:extLst xmlns:a="http://schemas.openxmlformats.org/drawingml/2006/main">
+              <a:ext uri="{FF2B5EF4-FFF2-40B4-BE49-F238E27FC236}">
+                <a16:creationId xmlns:a16="http://schemas.microsoft.com/office/drawing/2014/main" id="{A4E9B9FE-E677-43A4-8403-DD441FC21885}"/>
+              </a:ext>
+            </a:extLst>
+          </p:cNvPr>
+          <p:cNvSpPr>
+            <a:spLocks xmlns:a="http://schemas.openxmlformats.org/drawingml/2006/main" noGrp="1"/>
+          </p:cNvSpPr>
+          <p:nvPr/>
+        </p:nvSpPr>
+        <p:spPr>
+          <a:xfrm xmlns:a="http://schemas.openxmlformats.org/drawingml/2006/main">
+            <a:off x="8991600" y="2647950"/>
+            <a:ext cx="2400300" cy="228600"/>
+          </a:xfrm>
+          <a:prstGeom xmlns:a="http://schemas.openxmlformats.org/drawingml/2006/main" prst="rect">
+            <a:avLst/>
+          </a:prstGeom>
+          <a:noFill xmlns:a="http://schemas.openxmlformats.org/drawingml/2006/main"/>
+          <a:ln xmlns:a="http://schemas.openxmlformats.org/drawingml/2006/main" w="0">
+            <a:noFill/>
+            <a:prstDash val="solid"/>
+          </a:ln>
+        </p:spPr>
+        <p:txBody>
+          <a:bodyPr xmlns:a="http://schemas.openxmlformats.org/drawingml/2006/main" anchor="t"/>
+          <a:lstStyle xmlns:a="http://schemas.openxmlformats.org/drawingml/2006/main"/>
+          <a:p xmlns:a="http://schemas.openxmlformats.org/drawingml/2006/main">
+            <a:pPr algn="l">
+              <a:defRPr sz="1125" b="0">
+                <a:solidFill>
+                  <a:srgbClr val="667386"/>
+                </a:solidFill>
+              </a:defRPr>
+            </a:pPr>
+            <a:r>
+              <a:rPr sz="1125" b="0">
+                <a:solidFill>
+                  <a:srgbClr val="667386"/>
+                </a:solidFill>
+              </a:rPr>
+              <a:t>Gate required at least 3</a:t>
+            </a:r>
+          </a:p>
+        </p:txBody>
+      </p:sp>
+      <p:sp>
+        <p:nvSpPr>
+          <p:cNvPr id="11" name="">
+            <a:extLst xmlns:a="http://schemas.openxmlformats.org/drawingml/2006/main">
+              <a:ext uri="{FF2B5EF4-FFF2-40B4-BE49-F238E27FC236}">
+                <a16:creationId xmlns:a16="http://schemas.microsoft.com/office/drawing/2014/main" id="{1522F45F-2CA7-444F-9CEF-2358B4687F92}"/>
+              </a:ext>
+            </a:extLst>
+          </p:cNvPr>
+          <p:cNvSpPr>
+            <a:spLocks xmlns:a="http://schemas.openxmlformats.org/drawingml/2006/main" noGrp="1"/>
+          </p:cNvSpPr>
+          <p:nvPr/>
+        </p:nvSpPr>
+        <p:spPr>
+          <a:xfrm xmlns:a="http://schemas.openxmlformats.org/drawingml/2006/main">
+            <a:off x="8991600" y="3162300"/>
+            <a:ext cx="2400300" cy="19050"/>
+          </a:xfrm>
+          <a:prstGeom xmlns:a="http://schemas.openxmlformats.org/drawingml/2006/main" prst="rect">
+            <a:avLst/>
+          </a:prstGeom>
+          <a:solidFill xmlns:a="http://schemas.openxmlformats.org/drawingml/2006/main">
+            <a:srgbClr val="B8BCC4"/>
+          </a:solidFill>
+          <a:ln xmlns:a="http://schemas.openxmlformats.org/drawingml/2006/main" w="0">
+            <a:solidFill>
+              <a:srgbClr val="B8BCC4"/>
+            </a:solidFill>
+            <a:prstDash val="solid"/>
+          </a:ln>
+        </p:spPr>
+      </p:sp>
+      <p:sp>
+        <p:nvSpPr>
+          <p:cNvPr id="12" name="">
+            <a:extLst xmlns:a="http://schemas.openxmlformats.org/drawingml/2006/main">
+              <a:ext uri="{FF2B5EF4-FFF2-40B4-BE49-F238E27FC236}">
+                <a16:creationId xmlns:a16="http://schemas.microsoft.com/office/drawing/2014/main" id="{3EC90595-E958-4F73-A865-336B7F6DFF6F}"/>
+              </a:ext>
+            </a:extLst>
+          </p:cNvPr>
+          <p:cNvSpPr>
+            <a:spLocks xmlns:a="http://schemas.openxmlformats.org/drawingml/2006/main" noGrp="1"/>
+          </p:cNvSpPr>
+          <p:nvPr/>
+        </p:nvSpPr>
+        <p:spPr>
+          <a:xfrm xmlns:a="http://schemas.openxmlformats.org/drawingml/2006/main">
+            <a:off x="8991600" y="3467100"/>
+            <a:ext cx="2400300" cy="476250"/>
+          </a:xfrm>
+          <a:prstGeom xmlns:a="http://schemas.openxmlformats.org/drawingml/2006/main" prst="rect">
+            <a:avLst/>
+          </a:prstGeom>
+          <a:noFill xmlns:a="http://schemas.openxmlformats.org/drawingml/2006/main"/>
+          <a:ln xmlns:a="http://schemas.openxmlformats.org/drawingml/2006/main" w="0">
+            <a:noFill/>
+            <a:prstDash val="solid"/>
+          </a:ln>
+        </p:spPr>
+        <p:txBody>
+          <a:bodyPr xmlns:a="http://schemas.openxmlformats.org/drawingml/2006/main" anchor="t"/>
+          <a:lstStyle xmlns:a="http://schemas.openxmlformats.org/drawingml/2006/main"/>
+          <a:p xmlns:a="http://schemas.openxmlformats.org/drawingml/2006/main">
+            <a:pPr algn="l">
+              <a:defRPr sz="2850" b="1">
+                <a:solidFill>
+                  <a:srgbClr val="A86B00"/>
+                </a:solidFill>
+              </a:defRPr>
+            </a:pPr>
+            <a:r>
+              <a:rPr sz="2850" b="1">
+                <a:solidFill>
+                  <a:srgbClr val="A86B00"/>
+                </a:solidFill>
+              </a:rPr>
+              <a:t>89.9%</a:t>
+            </a:r>
+          </a:p>
+        </p:txBody>
+      </p:sp>
+      <p:sp>
+        <p:nvSpPr>
+          <p:cNvPr id="13" name="">
+            <a:extLst xmlns:a="http://schemas.openxmlformats.org/drawingml/2006/main">
+              <a:ext uri="{FF2B5EF4-FFF2-40B4-BE49-F238E27FC236}">
+                <a16:creationId xmlns:a16="http://schemas.microsoft.com/office/drawing/2014/main" id="{DDC545B3-157E-4754-8109-E4C7B6AE0E73}"/>
+              </a:ext>
+            </a:extLst>
+          </p:cNvPr>
+          <p:cNvSpPr>
+            <a:spLocks xmlns:a="http://schemas.openxmlformats.org/drawingml/2006/main" noGrp="1"/>
+          </p:cNvSpPr>
+          <p:nvPr/>
+        </p:nvSpPr>
+        <p:spPr>
+          <a:xfrm xmlns:a="http://schemas.openxmlformats.org/drawingml/2006/main">
+            <a:off x="8991600" y="3962400"/>
+            <a:ext cx="2400300" cy="552450"/>
+          </a:xfrm>
+          <a:prstGeom xmlns:a="http://schemas.openxmlformats.org/drawingml/2006/main" prst="rect">
+            <a:avLst/>
+          </a:prstGeom>
+          <a:noFill xmlns:a="http://schemas.openxmlformats.org/drawingml/2006/main"/>
+          <a:ln xmlns:a="http://schemas.openxmlformats.org/drawingml/2006/main" w="0">
+            <a:noFill/>
+            <a:prstDash val="solid"/>
+          </a:ln>
+        </p:spPr>
+        <p:txBody>
+          <a:bodyPr xmlns:a="http://schemas.openxmlformats.org/drawingml/2006/main" anchor="t"/>
+          <a:lstStyle xmlns:a="http://schemas.openxmlformats.org/drawingml/2006/main"/>
+          <a:p xmlns:a="http://schemas.openxmlformats.org/drawingml/2006/main">
+            <a:pPr algn="ctr">
+              <a:defRPr sz="1350" b="1">
+                <a:solidFill>
+                  <a:srgbClr val="24364B"/>
+                </a:solidFill>
+              </a:defRPr>
+            </a:pPr>
+            <a:r>
+              <a:rPr sz="1350" b="1">
+                <a:solidFill>
+                  <a:srgbClr val="24364B"/>
+                </a:solidFill>
+              </a:rPr>
+              <a:t>of cumulative net log return came from 2023</a:t>
+            </a:r>
+          </a:p>
+        </p:txBody>
+      </p:sp>
+      <p:sp>
+        <p:nvSpPr>
+          <p:cNvPr id="14" name="">
+            <a:extLst xmlns:a="http://schemas.openxmlformats.org/drawingml/2006/main">
+              <a:ext uri="{FF2B5EF4-FFF2-40B4-BE49-F238E27FC236}">
+                <a16:creationId xmlns:a16="http://schemas.microsoft.com/office/drawing/2014/main" id="{B3697707-F832-481C-82B0-52CE05EADD2B}"/>
+              </a:ext>
+            </a:extLst>
+          </p:cNvPr>
+          <p:cNvSpPr>
+            <a:spLocks xmlns:a="http://schemas.openxmlformats.org/drawingml/2006/main" noGrp="1"/>
+          </p:cNvSpPr>
+          <p:nvPr/>
+        </p:nvSpPr>
+        <p:spPr>
+          <a:xfrm xmlns:a="http://schemas.openxmlformats.org/drawingml/2006/main">
+            <a:off x="8991600" y="4953000"/>
+            <a:ext cx="2400300" cy="590550"/>
+          </a:xfrm>
+          <a:prstGeom xmlns:a="http://schemas.openxmlformats.org/drawingml/2006/main" prst="rect">
+            <a:avLst/>
+          </a:prstGeom>
+          <a:noFill xmlns:a="http://schemas.openxmlformats.org/drawingml/2006/main"/>
+          <a:ln xmlns:a="http://schemas.openxmlformats.org/drawingml/2006/main" w="0">
+            <a:noFill/>
+            <a:prstDash val="solid"/>
+          </a:ln>
+        </p:spPr>
+        <p:txBody>
+          <a:bodyPr xmlns:a="http://schemas.openxmlformats.org/drawingml/2006/main" anchor="t"/>
+          <a:lstStyle xmlns:a="http://schemas.openxmlformats.org/drawingml/2006/main"/>
+          <a:p xmlns:a="http://schemas.openxmlformats.org/drawingml/2006/main">
+            <a:pPr algn="ctr">
+              <a:defRPr sz="1350" b="0">
+                <a:solidFill>
+                  <a:srgbClr val="B44738"/>
+                </a:solidFill>
+              </a:defRPr>
+            </a:pPr>
+            <a:r>
+              <a:rPr sz="1350" b="0">
+                <a:solidFill>
+                  <a:srgbClr val="B44738"/>
+                </a:solidFill>
+              </a:rPr>
+              <a:t>2019, 2020, and 2022 had negative mean net returns.</a:t>
+            </a:r>
+          </a:p>
+        </p:txBody>
+      </p:sp>
+    </p:spTree>
+    <p:extLst>
+      <p:ext uri="{BB962C8B-B14F-4D97-AF65-F5344CB8AC3E}">
+        <p14:creationId xmlns:p14="http://schemas.microsoft.com/office/powerpoint/2010/main" val="4690023"/>
+      </p:ext>
+    </p:extLst>
+  </p:cSld>
+</p:sld>
+</file>
+
+<file path=ppt/slides/slide39.xml><?xml version="1.0" encoding="utf-8"?>
+<p:sld xmlns:p="http://schemas.openxmlformats.org/presentationml/2006/main">
+  <p:cSld>
+    <p:bg>
+      <p:bgPr>
+        <a:solidFill xmlns:a="http://schemas.openxmlformats.org/drawingml/2006/main">
+          <a:srgbClr val="FFFFFF"/>
+        </a:solidFill>
+      </p:bgPr>
+    </p:bg>
+    <p:spTree>
+      <p:nvGrpSpPr>
+        <p:cNvPr id="1" name=""/>
+        <p:cNvGrpSpPr/>
+        <p:nvPr/>
+      </p:nvGrpSpPr>
+      <p:grpSpPr>
+        <a:xfrm xmlns:a="http://schemas.openxmlformats.org/drawingml/2006/main"/>
+      </p:grpSpPr>
+      <p:sp>
+        <p:nvSpPr>
+          <p:cNvPr id="7" name="">
+            <a:extLst xmlns:a="http://schemas.openxmlformats.org/drawingml/2006/main">
+              <a:ext uri="{FF2B5EF4-FFF2-40B4-BE49-F238E27FC236}">
+                <a16:creationId xmlns:a16="http://schemas.microsoft.com/office/drawing/2014/main" id="{189ABE44-C12D-47C2-9898-1841969BC326}"/>
+              </a:ext>
+            </a:extLst>
+          </p:cNvPr>
+          <p:cNvSpPr>
+            <a:spLocks xmlns:a="http://schemas.openxmlformats.org/drawingml/2006/main" noGrp="1"/>
+          </p:cNvSpPr>
+          <p:nvPr/>
+        </p:nvSpPr>
+        <p:spPr>
+          <a:xfrm xmlns:a="http://schemas.openxmlformats.org/drawingml/2006/main">
+            <a:off x="457200" y="238125"/>
+            <a:ext cx="7239000" cy="190500"/>
+          </a:xfrm>
+          <a:prstGeom xmlns:a="http://schemas.openxmlformats.org/drawingml/2006/main" prst="rect">
+            <a:avLst/>
+          </a:prstGeom>
+          <a:noFill xmlns:a="http://schemas.openxmlformats.org/drawingml/2006/main"/>
+          <a:ln xmlns:a="http://schemas.openxmlformats.org/drawingml/2006/main" w="0">
+            <a:noFill/>
+            <a:prstDash val="solid"/>
+          </a:ln>
+        </p:spPr>
+        <p:txBody>
+          <a:bodyPr xmlns:a="http://schemas.openxmlformats.org/drawingml/2006/main" anchor="t"/>
+          <a:lstStyle xmlns:a="http://schemas.openxmlformats.org/drawingml/2006/main"/>
+          <a:p xmlns:a="http://schemas.openxmlformats.org/drawingml/2006/main">
+            <a:pPr algn="l">
+              <a:defRPr sz="1050" b="1">
+                <a:solidFill>
+                  <a:srgbClr val="667386"/>
+                </a:solidFill>
+              </a:defRPr>
+            </a:pPr>
+            <a:r>
+              <a:rPr sz="1050" b="1">
+                <a:solidFill>
+                  <a:srgbClr val="667386"/>
+                </a:solidFill>
+              </a:rPr>
+              <a:t>OPERATOR HYPOTHESIS LAB · NVDA INTRADAY OPENING RULE</a:t>
+            </a:r>
+          </a:p>
+        </p:txBody>
+      </p:sp>
+      <p:sp>
+        <p:nvSpPr>
+          <p:cNvPr id="2" name="">
+            <a:extLst xmlns:a="http://schemas.openxmlformats.org/drawingml/2006/main">
+              <a:ext uri="{FF2B5EF4-FFF2-40B4-BE49-F238E27FC236}">
+                <a16:creationId xmlns:a16="http://schemas.microsoft.com/office/drawing/2014/main" id="{C6498FBD-56FB-49D6-90B8-B663B4765E1D}"/>
+              </a:ext>
+            </a:extLst>
+          </p:cNvPr>
+          <p:cNvSpPr>
+            <a:spLocks xmlns:a="http://schemas.openxmlformats.org/drawingml/2006/main" noGrp="1"/>
+          </p:cNvSpPr>
+          <p:nvPr/>
+        </p:nvSpPr>
+        <p:spPr>
+          <a:xfrm xmlns:a="http://schemas.openxmlformats.org/drawingml/2006/main">
+            <a:off x="457200" y="523875"/>
+            <a:ext cx="11049000" cy="590550"/>
+          </a:xfrm>
+          <a:prstGeom xmlns:a="http://schemas.openxmlformats.org/drawingml/2006/main" prst="rect">
+            <a:avLst/>
+          </a:prstGeom>
+          <a:noFill xmlns:a="http://schemas.openxmlformats.org/drawingml/2006/main"/>
+          <a:ln xmlns:a="http://schemas.openxmlformats.org/drawingml/2006/main" w="0">
+            <a:noFill/>
+            <a:prstDash val="solid"/>
+          </a:ln>
+        </p:spPr>
+        <p:txBody>
+          <a:bodyPr xmlns:a="http://schemas.openxmlformats.org/drawingml/2006/main" anchor="t"/>
+          <a:lstStyle xmlns:a="http://schemas.openxmlformats.org/drawingml/2006/main"/>
+          <a:p xmlns:a="http://schemas.openxmlformats.org/drawingml/2006/main">
+            <a:pPr algn="l">
+              <a:defRPr sz="2925" b="1">
+                <a:solidFill>
+                  <a:srgbClr val="000000"/>
+                </a:solidFill>
+              </a:defRPr>
+            </a:pPr>
+            <a:r>
+              <a:rPr sz="2925" b="1">
+                <a:solidFill>
+                  <a:srgbClr val="000000"/>
+                </a:solidFill>
+              </a:rPr>
+              <a:t>Most realized gains arrive late in the sample</a:t>
+            </a:r>
+          </a:p>
+        </p:txBody>
+      </p:sp>
+      <p:sp>
+        <p:nvSpPr>
+          <p:cNvPr id="3" name="">
+            <a:extLst xmlns:a="http://schemas.openxmlformats.org/drawingml/2006/main">
+              <a:ext uri="{FF2B5EF4-FFF2-40B4-BE49-F238E27FC236}">
+                <a16:creationId xmlns:a16="http://schemas.microsoft.com/office/drawing/2014/main" id="{2213A00D-F2D1-4470-AEB3-66701515077C}"/>
+              </a:ext>
+            </a:extLst>
+          </p:cNvPr>
+          <p:cNvSpPr>
+            <a:spLocks xmlns:a="http://schemas.openxmlformats.org/drawingml/2006/main" noGrp="1"/>
+          </p:cNvSpPr>
+          <p:nvPr/>
+        </p:nvSpPr>
+        <p:spPr>
+          <a:xfrm xmlns:a="http://schemas.openxmlformats.org/drawingml/2006/main">
+            <a:off x="457200" y="1219200"/>
+            <a:ext cx="11277600" cy="19050"/>
+          </a:xfrm>
+          <a:prstGeom xmlns:a="http://schemas.openxmlformats.org/drawingml/2006/main" prst="rect">
+            <a:avLst/>
+          </a:prstGeom>
+          <a:solidFill xmlns:a="http://schemas.openxmlformats.org/drawingml/2006/main">
+            <a:srgbClr val="B8BCC4"/>
+          </a:solidFill>
+          <a:ln xmlns:a="http://schemas.openxmlformats.org/drawingml/2006/main" w="0">
+            <a:solidFill>
+              <a:srgbClr val="B8BCC4"/>
+            </a:solidFill>
+            <a:prstDash val="solid"/>
+          </a:ln>
+        </p:spPr>
+      </p:sp>
+      <p:sp>
+        <p:nvSpPr>
+          <p:cNvPr id="4" name="">
+            <a:extLst xmlns:a="http://schemas.openxmlformats.org/drawingml/2006/main">
+              <a:ext uri="{FF2B5EF4-FFF2-40B4-BE49-F238E27FC236}">
+                <a16:creationId xmlns:a16="http://schemas.microsoft.com/office/drawing/2014/main" id="{D65A20B8-5E55-4C8F-BA46-A091A86F7A07}"/>
+              </a:ext>
+            </a:extLst>
+          </p:cNvPr>
+          <p:cNvSpPr>
+            <a:spLocks xmlns:a="http://schemas.openxmlformats.org/drawingml/2006/main" noGrp="1"/>
+          </p:cNvSpPr>
+          <p:nvPr/>
+        </p:nvSpPr>
+        <p:spPr>
+          <a:xfrm xmlns:a="http://schemas.openxmlformats.org/drawingml/2006/main">
+            <a:off x="457200" y="6515100"/>
+            <a:ext cx="8572500" cy="161925"/>
+          </a:xfrm>
+          <a:prstGeom xmlns:a="http://schemas.openxmlformats.org/drawingml/2006/main" prst="rect">
+            <a:avLst/>
+          </a:prstGeom>
+          <a:noFill xmlns:a="http://schemas.openxmlformats.org/drawingml/2006/main"/>
+          <a:ln xmlns:a="http://schemas.openxmlformats.org/drawingml/2006/main" w="0">
+            <a:noFill/>
+            <a:prstDash val="solid"/>
+          </a:ln>
+        </p:spPr>
+        <p:txBody>
+          <a:bodyPr xmlns:a="http://schemas.openxmlformats.org/drawingml/2006/main" anchor="t"/>
+          <a:lstStyle xmlns:a="http://schemas.openxmlformats.org/drawingml/2006/main"/>
+          <a:p xmlns:a="http://schemas.openxmlformats.org/drawingml/2006/main">
+            <a:pPr algn="l">
+              <a:defRPr sz="900" b="0">
+                <a:solidFill>
+                  <a:srgbClr val="667386"/>
+                </a:solidFill>
+              </a:defRPr>
+            </a:pPr>
+            <a:r>
+              <a:rPr sz="900" b="0">
+                <a:solidFill>
+                  <a:srgbClr val="667386"/>
+                </a:solidFill>
+              </a:rPr>
+              <a:t>Causal TRAIN translation · 2019-01-11–2023-12-29 after prior-252-session warm-up</a:t>
+            </a:r>
+          </a:p>
+        </p:txBody>
+      </p:sp>
+      <p:sp>
+        <p:nvSpPr>
+          <p:cNvPr id="5" name="">
+            <a:extLst xmlns:a="http://schemas.openxmlformats.org/drawingml/2006/main">
+              <a:ext uri="{FF2B5EF4-FFF2-40B4-BE49-F238E27FC236}">
+                <a16:creationId xmlns:a16="http://schemas.microsoft.com/office/drawing/2014/main" id="{11BFBA30-E7DC-49F4-B256-CDF498A68977}"/>
+              </a:ext>
+            </a:extLst>
+          </p:cNvPr>
+          <p:cNvSpPr>
+            <a:spLocks xmlns:a="http://schemas.openxmlformats.org/drawingml/2006/main" noGrp="1"/>
+          </p:cNvSpPr>
+          <p:nvPr/>
+        </p:nvSpPr>
+        <p:spPr>
+          <a:xfrm xmlns:a="http://schemas.openxmlformats.org/drawingml/2006/main">
+            <a:off x="10858500" y="6496050"/>
+            <a:ext cx="876300" cy="171450"/>
+          </a:xfrm>
+          <a:prstGeom xmlns:a="http://schemas.openxmlformats.org/drawingml/2006/main" prst="rect">
+            <a:avLst/>
+          </a:prstGeom>
+          <a:noFill xmlns:a="http://schemas.openxmlformats.org/drawingml/2006/main"/>
+          <a:ln xmlns:a="http://schemas.openxmlformats.org/drawingml/2006/main" w="0">
+            <a:noFill/>
+            <a:prstDash val="solid"/>
+          </a:ln>
+        </p:spPr>
+        <p:txBody>
+          <a:bodyPr xmlns:a="http://schemas.openxmlformats.org/drawingml/2006/main" anchor="t"/>
+          <a:lstStyle xmlns:a="http://schemas.openxmlformats.org/drawingml/2006/main"/>
+          <a:p xmlns:a="http://schemas.openxmlformats.org/drawingml/2006/main">
+            <a:pPr algn="r">
+              <a:defRPr sz="900" b="0">
+                <a:solidFill>
+                  <a:srgbClr val="667386"/>
+                </a:solidFill>
+              </a:defRPr>
+            </a:pPr>
+            <a:r>
+              <a:rPr sz="900" b="0">
+                <a:solidFill>
+                  <a:srgbClr val="667386"/>
+                </a:solidFill>
+              </a:rPr>
+              <a:t>39</a:t>
+            </a:r>
+          </a:p>
+        </p:txBody>
+      </p:sp>
+      <p:pic>
+        <p:nvPicPr>
+          <p:cNvPr id="12" name=""/>
+          <p:cNvPicPr>
+            <a:picLocks xmlns:a="http://schemas.openxmlformats.org/drawingml/2006/main" noChangeAspect="1"/>
+          </p:cNvPicPr>
+          <p:nvPr/>
+        </p:nvPicPr>
+        <p:blipFill>
+          <a:blip xmlns:r="http://schemas.openxmlformats.org/officeDocument/2006/relationships" xmlns:a="http://schemas.openxmlformats.org/drawingml/2006/main" r:embed="Rb92adbfc0ae34bb5"/>
+          <a:stretch xmlns:a="http://schemas.openxmlformats.org/drawingml/2006/main"/>
+        </p:blipFill>
+        <p:spPr>
+          <a:xfrm xmlns:a="http://schemas.openxmlformats.org/drawingml/2006/main">
+            <a:off x="1819689" y="1371600"/>
+            <a:ext cx="8514522" cy="4895850"/>
+          </a:xfrm>
+          <a:prstGeom xmlns:a="http://schemas.openxmlformats.org/drawingml/2006/main" prst="rect">
+            <a:avLst/>
+          </a:prstGeom>
+        </p:spPr>
+      </p:pic>
+    </p:spTree>
+    <p:extLst>
+      <p:ext uri="{BB962C8B-B14F-4D97-AF65-F5344CB8AC3E}">
+        <p14:creationId xmlns:p14="http://schemas.microsoft.com/office/powerpoint/2010/main" val="1545640161"/>
       </p:ext>
     </p:extLst>
   </p:cSld>
@@ -22682,7 +25187,7 @@
           <p:cNvPr id="37" name="">
             <a:extLst xmlns:a="http://schemas.openxmlformats.org/drawingml/2006/main">
               <a:ext uri="{FF2B5EF4-FFF2-40B4-BE49-F238E27FC236}">
-                <a16:creationId xmlns:a16="http://schemas.microsoft.com/office/drawing/2014/main" id="{D88E3CEA-6104-4790-8E49-8B62FCA99A07}"/>
+                <a16:creationId xmlns:a16="http://schemas.microsoft.com/office/drawing/2014/main" id="{4D97CD94-0A79-437A-98BA-5DA0D493B889}"/>
               </a:ext>
             </a:extLst>
           </p:cNvPr>
@@ -22732,7 +25237,7 @@
           <p:cNvPr id="2" name="">
             <a:extLst xmlns:a="http://schemas.openxmlformats.org/drawingml/2006/main">
               <a:ext uri="{FF2B5EF4-FFF2-40B4-BE49-F238E27FC236}">
-                <a16:creationId xmlns:a16="http://schemas.microsoft.com/office/drawing/2014/main" id="{F473CDA4-EB39-47E5-9660-8BF39D61931F}"/>
+                <a16:creationId xmlns:a16="http://schemas.microsoft.com/office/drawing/2014/main" id="{57056982-0168-47AD-BA1B-DD549F78E97D}"/>
               </a:ext>
             </a:extLst>
           </p:cNvPr>
@@ -22782,7 +25287,7 @@
           <p:cNvPr id="3" name="">
             <a:extLst xmlns:a="http://schemas.openxmlformats.org/drawingml/2006/main">
               <a:ext uri="{FF2B5EF4-FFF2-40B4-BE49-F238E27FC236}">
-                <a16:creationId xmlns:a16="http://schemas.microsoft.com/office/drawing/2014/main" id="{B4E8BEC9-6D90-4355-98CA-2EF98CBC01C0}"/>
+                <a16:creationId xmlns:a16="http://schemas.microsoft.com/office/drawing/2014/main" id="{7FF65260-AFFC-41FA-954B-8F35AD911286}"/>
               </a:ext>
             </a:extLst>
           </p:cNvPr>
@@ -22815,7 +25320,7 @@
           <p:cNvPr id="4" name="">
             <a:extLst xmlns:a="http://schemas.openxmlformats.org/drawingml/2006/main">
               <a:ext uri="{FF2B5EF4-FFF2-40B4-BE49-F238E27FC236}">
-                <a16:creationId xmlns:a16="http://schemas.microsoft.com/office/drawing/2014/main" id="{5F53AE26-E8B3-4845-BD32-FAB80CA9A3AF}"/>
+                <a16:creationId xmlns:a16="http://schemas.microsoft.com/office/drawing/2014/main" id="{67902390-3746-4929-BC0C-D6E52C3B52C3}"/>
               </a:ext>
             </a:extLst>
           </p:cNvPr>
@@ -22865,7 +25370,7 @@
           <p:cNvPr id="5" name="">
             <a:extLst xmlns:a="http://schemas.openxmlformats.org/drawingml/2006/main">
               <a:ext uri="{FF2B5EF4-FFF2-40B4-BE49-F238E27FC236}">
-                <a16:creationId xmlns:a16="http://schemas.microsoft.com/office/drawing/2014/main" id="{4B40E0E7-031C-4E85-A25D-BC0C38D5B6FB}"/>
+                <a16:creationId xmlns:a16="http://schemas.microsoft.com/office/drawing/2014/main" id="{81D660D7-12E7-4FBD-B6E0-96722790D996}"/>
               </a:ext>
             </a:extLst>
           </p:cNvPr>
@@ -22915,7 +25420,7 @@
           <p:cNvPr id="6" name="">
             <a:extLst xmlns:a="http://schemas.openxmlformats.org/drawingml/2006/main">
               <a:ext uri="{FF2B5EF4-FFF2-40B4-BE49-F238E27FC236}">
-                <a16:creationId xmlns:a16="http://schemas.microsoft.com/office/drawing/2014/main" id="{A6570EF4-1FE0-40BF-8CDB-B2C56429F456}"/>
+                <a16:creationId xmlns:a16="http://schemas.microsoft.com/office/drawing/2014/main" id="{4867079F-952D-4C75-A497-F497711355A6}"/>
               </a:ext>
             </a:extLst>
           </p:cNvPr>
@@ -22948,7 +25453,7 @@
           <p:cNvPr id="7" name="">
             <a:extLst xmlns:a="http://schemas.openxmlformats.org/drawingml/2006/main">
               <a:ext uri="{FF2B5EF4-FFF2-40B4-BE49-F238E27FC236}">
-                <a16:creationId xmlns:a16="http://schemas.microsoft.com/office/drawing/2014/main" id="{2E704B9D-BB04-46CE-8395-5F4BB7A291B0}"/>
+                <a16:creationId xmlns:a16="http://schemas.microsoft.com/office/drawing/2014/main" id="{837DED17-4903-49F6-AF40-45907E56C952}"/>
               </a:ext>
             </a:extLst>
           </p:cNvPr>
@@ -22981,7 +25486,7 @@
           <p:cNvPr id="8" name="">
             <a:extLst xmlns:a="http://schemas.openxmlformats.org/drawingml/2006/main">
               <a:ext uri="{FF2B5EF4-FFF2-40B4-BE49-F238E27FC236}">
-                <a16:creationId xmlns:a16="http://schemas.microsoft.com/office/drawing/2014/main" id="{5150A2A7-B9F1-4C61-B3CB-D39A32E40520}"/>
+                <a16:creationId xmlns:a16="http://schemas.microsoft.com/office/drawing/2014/main" id="{0DA397B8-66F0-4253-8A27-4912019D8CDA}"/>
               </a:ext>
             </a:extLst>
           </p:cNvPr>
@@ -23031,7 +25536,7 @@
           <p:cNvPr id="9" name="">
             <a:extLst xmlns:a="http://schemas.openxmlformats.org/drawingml/2006/main">
               <a:ext uri="{FF2B5EF4-FFF2-40B4-BE49-F238E27FC236}">
-                <a16:creationId xmlns:a16="http://schemas.microsoft.com/office/drawing/2014/main" id="{A243A666-8EE4-43BF-BDCA-BD6E7D1E4833}"/>
+                <a16:creationId xmlns:a16="http://schemas.microsoft.com/office/drawing/2014/main" id="{51D39A6B-A310-4922-A864-01AFF8B8707C}"/>
               </a:ext>
             </a:extLst>
           </p:cNvPr>
@@ -23081,7 +25586,7 @@
           <p:cNvPr id="10" name="">
             <a:extLst xmlns:a="http://schemas.openxmlformats.org/drawingml/2006/main">
               <a:ext uri="{FF2B5EF4-FFF2-40B4-BE49-F238E27FC236}">
-                <a16:creationId xmlns:a16="http://schemas.microsoft.com/office/drawing/2014/main" id="{F6A2E5DF-862D-4B2E-9AA3-BE57C9B1419C}"/>
+                <a16:creationId xmlns:a16="http://schemas.microsoft.com/office/drawing/2014/main" id="{7807EEE7-86C3-405F-A869-5D5157AFF103}"/>
               </a:ext>
             </a:extLst>
           </p:cNvPr>
@@ -23131,7 +25636,7 @@
           <p:cNvPr id="11" name="">
             <a:extLst xmlns:a="http://schemas.openxmlformats.org/drawingml/2006/main">
               <a:ext uri="{FF2B5EF4-FFF2-40B4-BE49-F238E27FC236}">
-                <a16:creationId xmlns:a16="http://schemas.microsoft.com/office/drawing/2014/main" id="{25F1FAF1-B86F-4664-B4FF-2C9B29B47335}"/>
+                <a16:creationId xmlns:a16="http://schemas.microsoft.com/office/drawing/2014/main" id="{4C643BA0-7CF3-4552-9C67-DA5BB29B3E36}"/>
               </a:ext>
             </a:extLst>
           </p:cNvPr>
@@ -23164,7 +25669,7 @@
           <p:cNvPr id="12" name="">
             <a:extLst xmlns:a="http://schemas.openxmlformats.org/drawingml/2006/main">
               <a:ext uri="{FF2B5EF4-FFF2-40B4-BE49-F238E27FC236}">
-                <a16:creationId xmlns:a16="http://schemas.microsoft.com/office/drawing/2014/main" id="{F6FFC260-1D09-44C4-82A9-91DB1A1B64A5}"/>
+                <a16:creationId xmlns:a16="http://schemas.microsoft.com/office/drawing/2014/main" id="{7F40CEC8-143F-4A9A-B01B-5C12307415A4}"/>
               </a:ext>
             </a:extLst>
           </p:cNvPr>
@@ -23197,7 +25702,7 @@
           <p:cNvPr id="13" name="">
             <a:extLst xmlns:a="http://schemas.openxmlformats.org/drawingml/2006/main">
               <a:ext uri="{FF2B5EF4-FFF2-40B4-BE49-F238E27FC236}">
-                <a16:creationId xmlns:a16="http://schemas.microsoft.com/office/drawing/2014/main" id="{D89AFEFB-94D4-48CC-BA5E-CDA2E6D4FCD1}"/>
+                <a16:creationId xmlns:a16="http://schemas.microsoft.com/office/drawing/2014/main" id="{B613CAEB-3EE7-4E32-8F60-AD82C51856A8}"/>
               </a:ext>
             </a:extLst>
           </p:cNvPr>
@@ -23247,7 +25752,7 @@
           <p:cNvPr id="14" name="">
             <a:extLst xmlns:a="http://schemas.openxmlformats.org/drawingml/2006/main">
               <a:ext uri="{FF2B5EF4-FFF2-40B4-BE49-F238E27FC236}">
-                <a16:creationId xmlns:a16="http://schemas.microsoft.com/office/drawing/2014/main" id="{6BF4070A-CD93-485F-94A9-E38F0FF9C23D}"/>
+                <a16:creationId xmlns:a16="http://schemas.microsoft.com/office/drawing/2014/main" id="{E5F55F4D-DFF6-44DC-9D6A-909CB2DBF326}"/>
               </a:ext>
             </a:extLst>
           </p:cNvPr>
@@ -23297,7 +25802,7 @@
           <p:cNvPr id="15" name="">
             <a:extLst xmlns:a="http://schemas.openxmlformats.org/drawingml/2006/main">
               <a:ext uri="{FF2B5EF4-FFF2-40B4-BE49-F238E27FC236}">
-                <a16:creationId xmlns:a16="http://schemas.microsoft.com/office/drawing/2014/main" id="{7EC296CD-5F28-4579-96BC-FC7B3F4225AA}"/>
+                <a16:creationId xmlns:a16="http://schemas.microsoft.com/office/drawing/2014/main" id="{02E0D207-01A5-411C-BC48-625AA519F12F}"/>
               </a:ext>
             </a:extLst>
           </p:cNvPr>
@@ -23347,7 +25852,7 @@
           <p:cNvPr id="16" name="">
             <a:extLst xmlns:a="http://schemas.openxmlformats.org/drawingml/2006/main">
               <a:ext uri="{FF2B5EF4-FFF2-40B4-BE49-F238E27FC236}">
-                <a16:creationId xmlns:a16="http://schemas.microsoft.com/office/drawing/2014/main" id="{DD154346-7E52-41FE-BAEB-C52C38EEAE34}"/>
+                <a16:creationId xmlns:a16="http://schemas.microsoft.com/office/drawing/2014/main" id="{0EFFF3EA-7109-40F4-BDB3-EFE7CDAB44A7}"/>
               </a:ext>
             </a:extLst>
           </p:cNvPr>
@@ -23380,7 +25885,7 @@
           <p:cNvPr id="17" name="">
             <a:extLst xmlns:a="http://schemas.openxmlformats.org/drawingml/2006/main">
               <a:ext uri="{FF2B5EF4-FFF2-40B4-BE49-F238E27FC236}">
-                <a16:creationId xmlns:a16="http://schemas.microsoft.com/office/drawing/2014/main" id="{D9D90EBC-4375-4FDD-AB81-BFAC2CDB7169}"/>
+                <a16:creationId xmlns:a16="http://schemas.microsoft.com/office/drawing/2014/main" id="{21D050F1-710C-4322-8A41-1BD760E7341E}"/>
               </a:ext>
             </a:extLst>
           </p:cNvPr>
@@ -23413,7 +25918,7 @@
           <p:cNvPr id="18" name="">
             <a:extLst xmlns:a="http://schemas.openxmlformats.org/drawingml/2006/main">
               <a:ext uri="{FF2B5EF4-FFF2-40B4-BE49-F238E27FC236}">
-                <a16:creationId xmlns:a16="http://schemas.microsoft.com/office/drawing/2014/main" id="{1C59F64C-DDEA-4E8F-A40A-B6B981BA46B1}"/>
+                <a16:creationId xmlns:a16="http://schemas.microsoft.com/office/drawing/2014/main" id="{B7DA95D4-2A93-4771-8740-BD50C3D2DF9B}"/>
               </a:ext>
             </a:extLst>
           </p:cNvPr>
@@ -23463,7 +25968,7 @@
           <p:cNvPr id="19" name="">
             <a:extLst xmlns:a="http://schemas.openxmlformats.org/drawingml/2006/main">
               <a:ext uri="{FF2B5EF4-FFF2-40B4-BE49-F238E27FC236}">
-                <a16:creationId xmlns:a16="http://schemas.microsoft.com/office/drawing/2014/main" id="{DE88E1FF-644B-4CCF-A4D0-951EA1622366}"/>
+                <a16:creationId xmlns:a16="http://schemas.microsoft.com/office/drawing/2014/main" id="{35AB9FC0-E690-47FB-AD31-3FC8231F7941}"/>
               </a:ext>
             </a:extLst>
           </p:cNvPr>
@@ -23513,7 +26018,7 @@
           <p:cNvPr id="20" name="">
             <a:extLst xmlns:a="http://schemas.openxmlformats.org/drawingml/2006/main">
               <a:ext uri="{FF2B5EF4-FFF2-40B4-BE49-F238E27FC236}">
-                <a16:creationId xmlns:a16="http://schemas.microsoft.com/office/drawing/2014/main" id="{A25C2EB4-C619-4524-8858-BBA70021580A}"/>
+                <a16:creationId xmlns:a16="http://schemas.microsoft.com/office/drawing/2014/main" id="{33D00C98-1D56-4B6C-AD0D-1A3328A96988}"/>
               </a:ext>
             </a:extLst>
           </p:cNvPr>
@@ -23563,7 +26068,7 @@
           <p:cNvPr id="21" name="">
             <a:extLst xmlns:a="http://schemas.openxmlformats.org/drawingml/2006/main">
               <a:ext uri="{FF2B5EF4-FFF2-40B4-BE49-F238E27FC236}">
-                <a16:creationId xmlns:a16="http://schemas.microsoft.com/office/drawing/2014/main" id="{B3DDC50F-B330-4CA6-8121-D571BB7B73CD}"/>
+                <a16:creationId xmlns:a16="http://schemas.microsoft.com/office/drawing/2014/main" id="{7F5148D4-C581-4F0A-A81D-896C301FD717}"/>
               </a:ext>
             </a:extLst>
           </p:cNvPr>
@@ -23596,7 +26101,7 @@
           <p:cNvPr id="22" name="">
             <a:extLst xmlns:a="http://schemas.openxmlformats.org/drawingml/2006/main">
               <a:ext uri="{FF2B5EF4-FFF2-40B4-BE49-F238E27FC236}">
-                <a16:creationId xmlns:a16="http://schemas.microsoft.com/office/drawing/2014/main" id="{8528F985-9DCC-408A-9D65-19D31D469F77}"/>
+                <a16:creationId xmlns:a16="http://schemas.microsoft.com/office/drawing/2014/main" id="{8E1C0D84-628E-4E3D-B6AE-CBEA18693082}"/>
               </a:ext>
             </a:extLst>
           </p:cNvPr>
@@ -23629,7 +26134,7 @@
           <p:cNvPr id="23" name="">
             <a:extLst xmlns:a="http://schemas.openxmlformats.org/drawingml/2006/main">
               <a:ext uri="{FF2B5EF4-FFF2-40B4-BE49-F238E27FC236}">
-                <a16:creationId xmlns:a16="http://schemas.microsoft.com/office/drawing/2014/main" id="{18D4155F-800E-4D67-9555-946ACF4A9F17}"/>
+                <a16:creationId xmlns:a16="http://schemas.microsoft.com/office/drawing/2014/main" id="{47D92066-8FB3-4AE4-88B9-796823816744}"/>
               </a:ext>
             </a:extLst>
           </p:cNvPr>
@@ -23679,7 +26184,7 @@
           <p:cNvPr id="24" name="">
             <a:extLst xmlns:a="http://schemas.openxmlformats.org/drawingml/2006/main">
               <a:ext uri="{FF2B5EF4-FFF2-40B4-BE49-F238E27FC236}">
-                <a16:creationId xmlns:a16="http://schemas.microsoft.com/office/drawing/2014/main" id="{1ED19DB8-679B-4A9F-92E1-5473AEC9B579}"/>
+                <a16:creationId xmlns:a16="http://schemas.microsoft.com/office/drawing/2014/main" id="{8604D789-9A9D-422E-A3C1-0D8F6D79054E}"/>
               </a:ext>
             </a:extLst>
           </p:cNvPr>
@@ -23729,7 +26234,7 @@
           <p:cNvPr id="25" name="">
             <a:extLst xmlns:a="http://schemas.openxmlformats.org/drawingml/2006/main">
               <a:ext uri="{FF2B5EF4-FFF2-40B4-BE49-F238E27FC236}">
-                <a16:creationId xmlns:a16="http://schemas.microsoft.com/office/drawing/2014/main" id="{66362200-B98A-42B1-9DE8-C6C1CF9F04DD}"/>
+                <a16:creationId xmlns:a16="http://schemas.microsoft.com/office/drawing/2014/main" id="{E0236897-EFD2-4CEE-A9D5-778C8F12AC5E}"/>
               </a:ext>
             </a:extLst>
           </p:cNvPr>
@@ -23779,7 +26284,7 @@
           <p:cNvPr id="26" name="">
             <a:extLst xmlns:a="http://schemas.openxmlformats.org/drawingml/2006/main">
               <a:ext uri="{FF2B5EF4-FFF2-40B4-BE49-F238E27FC236}">
-                <a16:creationId xmlns:a16="http://schemas.microsoft.com/office/drawing/2014/main" id="{D2D3E205-74CE-42A6-9E99-082B5ED1E207}"/>
+                <a16:creationId xmlns:a16="http://schemas.microsoft.com/office/drawing/2014/main" id="{201E2487-B54F-415B-8F91-62B89A6BCCDA}"/>
               </a:ext>
             </a:extLst>
           </p:cNvPr>
@@ -23812,7 +26317,7 @@
           <p:cNvPr id="27" name="">
             <a:extLst xmlns:a="http://schemas.openxmlformats.org/drawingml/2006/main">
               <a:ext uri="{FF2B5EF4-FFF2-40B4-BE49-F238E27FC236}">
-                <a16:creationId xmlns:a16="http://schemas.microsoft.com/office/drawing/2014/main" id="{8FEF3F54-2A8C-48EE-98F8-D5E31AF53C09}"/>
+                <a16:creationId xmlns:a16="http://schemas.microsoft.com/office/drawing/2014/main" id="{4079F15B-012E-4059-953C-F8092927B5C5}"/>
               </a:ext>
             </a:extLst>
           </p:cNvPr>
@@ -23862,7 +26367,7 @@
           <p:cNvPr id="28" name="">
             <a:extLst xmlns:a="http://schemas.openxmlformats.org/drawingml/2006/main">
               <a:ext uri="{FF2B5EF4-FFF2-40B4-BE49-F238E27FC236}">
-                <a16:creationId xmlns:a16="http://schemas.microsoft.com/office/drawing/2014/main" id="{B80E62DF-C849-461F-907E-BF109246EB28}"/>
+                <a16:creationId xmlns:a16="http://schemas.microsoft.com/office/drawing/2014/main" id="{1D89BD8C-15F8-481A-8C84-6914E1CF7554}"/>
               </a:ext>
             </a:extLst>
           </p:cNvPr>
@@ -23895,7 +26400,7 @@
           <p:cNvPr id="29" name="">
             <a:extLst xmlns:a="http://schemas.openxmlformats.org/drawingml/2006/main">
               <a:ext uri="{FF2B5EF4-FFF2-40B4-BE49-F238E27FC236}">
-                <a16:creationId xmlns:a16="http://schemas.microsoft.com/office/drawing/2014/main" id="{B57483AA-5537-43FC-94B5-79958D1B2A8D}"/>
+                <a16:creationId xmlns:a16="http://schemas.microsoft.com/office/drawing/2014/main" id="{DA35314F-D4CF-40F9-A958-2535854050DF}"/>
               </a:ext>
             </a:extLst>
           </p:cNvPr>
@@ -23945,7 +26450,7 @@
           <p:cNvPr id="30" name="">
             <a:extLst xmlns:a="http://schemas.openxmlformats.org/drawingml/2006/main">
               <a:ext uri="{FF2B5EF4-FFF2-40B4-BE49-F238E27FC236}">
-                <a16:creationId xmlns:a16="http://schemas.microsoft.com/office/drawing/2014/main" id="{8F5AE873-5CAB-4ED7-AE94-68C9316A7673}"/>
+                <a16:creationId xmlns:a16="http://schemas.microsoft.com/office/drawing/2014/main" id="{92B6F4B0-1B9D-4306-BC07-A0055C704909}"/>
               </a:ext>
             </a:extLst>
           </p:cNvPr>
@@ -23978,7 +26483,7 @@
           <p:cNvPr id="31" name="">
             <a:extLst xmlns:a="http://schemas.openxmlformats.org/drawingml/2006/main">
               <a:ext uri="{FF2B5EF4-FFF2-40B4-BE49-F238E27FC236}">
-                <a16:creationId xmlns:a16="http://schemas.microsoft.com/office/drawing/2014/main" id="{006E5386-E4B4-4E6A-9160-9E0DE224C4B4}"/>
+                <a16:creationId xmlns:a16="http://schemas.microsoft.com/office/drawing/2014/main" id="{94BB6D4D-35BC-45ED-9434-519CA372594D}"/>
               </a:ext>
             </a:extLst>
           </p:cNvPr>
@@ -24028,7 +26533,7 @@
           <p:cNvPr id="32" name="">
             <a:extLst xmlns:a="http://schemas.openxmlformats.org/drawingml/2006/main">
               <a:ext uri="{FF2B5EF4-FFF2-40B4-BE49-F238E27FC236}">
-                <a16:creationId xmlns:a16="http://schemas.microsoft.com/office/drawing/2014/main" id="{1102D1E6-9CEC-477B-A6CB-FFB44135897D}"/>
+                <a16:creationId xmlns:a16="http://schemas.microsoft.com/office/drawing/2014/main" id="{4D3315BE-E004-4025-890E-3B5505A3A122}"/>
               </a:ext>
             </a:extLst>
           </p:cNvPr>
@@ -24078,7 +26583,7 @@
           <p:cNvPr id="33" name="">
             <a:extLst xmlns:a="http://schemas.openxmlformats.org/drawingml/2006/main">
               <a:ext uri="{FF2B5EF4-FFF2-40B4-BE49-F238E27FC236}">
-                <a16:creationId xmlns:a16="http://schemas.microsoft.com/office/drawing/2014/main" id="{743876D3-5AE1-44D2-A4F5-FF06EAB827F6}"/>
+                <a16:creationId xmlns:a16="http://schemas.microsoft.com/office/drawing/2014/main" id="{7D5F4ED9-E527-48FD-A5D6-F2D37C7B09FF}"/>
               </a:ext>
             </a:extLst>
           </p:cNvPr>
@@ -24111,7 +26616,7 @@
           <p:cNvPr id="34" name="">
             <a:extLst xmlns:a="http://schemas.openxmlformats.org/drawingml/2006/main">
               <a:ext uri="{FF2B5EF4-FFF2-40B4-BE49-F238E27FC236}">
-                <a16:creationId xmlns:a16="http://schemas.microsoft.com/office/drawing/2014/main" id="{D2922183-FF3D-4D5F-A3A3-E90F23DC54BD}"/>
+                <a16:creationId xmlns:a16="http://schemas.microsoft.com/office/drawing/2014/main" id="{8D3F3451-8E03-4750-87AB-3BC87206E388}"/>
               </a:ext>
             </a:extLst>
           </p:cNvPr>
@@ -24161,7 +26666,7 @@
           <p:cNvPr id="35" name="">
             <a:extLst xmlns:a="http://schemas.openxmlformats.org/drawingml/2006/main">
               <a:ext uri="{FF2B5EF4-FFF2-40B4-BE49-F238E27FC236}">
-                <a16:creationId xmlns:a16="http://schemas.microsoft.com/office/drawing/2014/main" id="{A749DD28-07A7-4907-9DED-9E63643557AD}"/>
+                <a16:creationId xmlns:a16="http://schemas.microsoft.com/office/drawing/2014/main" id="{448DCA1F-8D1F-45EE-A2C0-3AD7D9B933D8}"/>
               </a:ext>
             </a:extLst>
           </p:cNvPr>
@@ -24194,7 +26699,7 @@
           <p:cNvPr id="36" name="">
             <a:extLst xmlns:a="http://schemas.openxmlformats.org/drawingml/2006/main">
               <a:ext uri="{FF2B5EF4-FFF2-40B4-BE49-F238E27FC236}">
-                <a16:creationId xmlns:a16="http://schemas.microsoft.com/office/drawing/2014/main" id="{CDD1F41D-70C2-4C1F-9EEF-8DB0495806C5}"/>
+                <a16:creationId xmlns:a16="http://schemas.microsoft.com/office/drawing/2014/main" id="{6DFFCA8F-7CA1-42EA-8748-429924E74198}"/>
               </a:ext>
             </a:extLst>
           </p:cNvPr>
@@ -24242,7 +26747,1900 @@
     </p:spTree>
     <p:extLst>
       <p:ext uri="{BB962C8B-B14F-4D97-AF65-F5344CB8AC3E}">
-        <p14:creationId xmlns:p14="http://schemas.microsoft.com/office/powerpoint/2010/main" val="2127526724"/>
+        <p14:creationId xmlns:p14="http://schemas.microsoft.com/office/powerpoint/2010/main" val="1002015684"/>
+      </p:ext>
+    </p:extLst>
+  </p:cSld>
+</p:sld>
+</file>
+
+<file path=ppt/slides/slide40.xml><?xml version="1.0" encoding="utf-8"?>
+<p:sld xmlns:p="http://schemas.openxmlformats.org/presentationml/2006/main">
+  <p:cSld>
+    <p:bg>
+      <p:bgPr>
+        <a:solidFill xmlns:a="http://schemas.openxmlformats.org/drawingml/2006/main">
+          <a:srgbClr val="FFFFFF"/>
+        </a:solidFill>
+      </p:bgPr>
+    </p:bg>
+    <p:spTree>
+      <p:nvGrpSpPr>
+        <p:cNvPr id="1" name=""/>
+        <p:cNvGrpSpPr/>
+        <p:nvPr/>
+      </p:nvGrpSpPr>
+      <p:grpSpPr>
+        <a:xfrm xmlns:a="http://schemas.openxmlformats.org/drawingml/2006/main"/>
+      </p:grpSpPr>
+      <p:sp>
+        <p:nvSpPr>
+          <p:cNvPr id="7" name="">
+            <a:extLst xmlns:a="http://schemas.openxmlformats.org/drawingml/2006/main">
+              <a:ext uri="{FF2B5EF4-FFF2-40B4-BE49-F238E27FC236}">
+                <a16:creationId xmlns:a16="http://schemas.microsoft.com/office/drawing/2014/main" id="{619E65C1-11E6-4077-8B2F-CDCF4313E9D9}"/>
+              </a:ext>
+            </a:extLst>
+          </p:cNvPr>
+          <p:cNvSpPr>
+            <a:spLocks xmlns:a="http://schemas.openxmlformats.org/drawingml/2006/main" noGrp="1"/>
+          </p:cNvSpPr>
+          <p:nvPr/>
+        </p:nvSpPr>
+        <p:spPr>
+          <a:xfrm xmlns:a="http://schemas.openxmlformats.org/drawingml/2006/main">
+            <a:off x="457200" y="238125"/>
+            <a:ext cx="7239000" cy="190500"/>
+          </a:xfrm>
+          <a:prstGeom xmlns:a="http://schemas.openxmlformats.org/drawingml/2006/main" prst="rect">
+            <a:avLst/>
+          </a:prstGeom>
+          <a:noFill xmlns:a="http://schemas.openxmlformats.org/drawingml/2006/main"/>
+          <a:ln xmlns:a="http://schemas.openxmlformats.org/drawingml/2006/main" w="0">
+            <a:noFill/>
+            <a:prstDash val="solid"/>
+          </a:ln>
+        </p:spPr>
+        <p:txBody>
+          <a:bodyPr xmlns:a="http://schemas.openxmlformats.org/drawingml/2006/main" anchor="t"/>
+          <a:lstStyle xmlns:a="http://schemas.openxmlformats.org/drawingml/2006/main"/>
+          <a:p xmlns:a="http://schemas.openxmlformats.org/drawingml/2006/main">
+            <a:pPr algn="l">
+              <a:defRPr sz="1050" b="1">
+                <a:solidFill>
+                  <a:srgbClr val="667386"/>
+                </a:solidFill>
+              </a:defRPr>
+            </a:pPr>
+            <a:r>
+              <a:rPr sz="1050" b="1">
+                <a:solidFill>
+                  <a:srgbClr val="667386"/>
+                </a:solidFill>
+              </a:rPr>
+              <a:t>OPERATOR HYPOTHESIS LAB · NVDA INTRADAY OPENING RULE</a:t>
+            </a:r>
+          </a:p>
+        </p:txBody>
+      </p:sp>
+      <p:sp>
+        <p:nvSpPr>
+          <p:cNvPr id="2" name="">
+            <a:extLst xmlns:a="http://schemas.openxmlformats.org/drawingml/2006/main">
+              <a:ext uri="{FF2B5EF4-FFF2-40B4-BE49-F238E27FC236}">
+                <a16:creationId xmlns:a16="http://schemas.microsoft.com/office/drawing/2014/main" id="{4D6B8322-02CE-43F7-BD21-82C6B976DBC0}"/>
+              </a:ext>
+            </a:extLst>
+          </p:cNvPr>
+          <p:cNvSpPr>
+            <a:spLocks xmlns:a="http://schemas.openxmlformats.org/drawingml/2006/main" noGrp="1"/>
+          </p:cNvSpPr>
+          <p:nvPr/>
+        </p:nvSpPr>
+        <p:spPr>
+          <a:xfrm xmlns:a="http://schemas.openxmlformats.org/drawingml/2006/main">
+            <a:off x="457200" y="523875"/>
+            <a:ext cx="11049000" cy="590550"/>
+          </a:xfrm>
+          <a:prstGeom xmlns:a="http://schemas.openxmlformats.org/drawingml/2006/main" prst="rect">
+            <a:avLst/>
+          </a:prstGeom>
+          <a:noFill xmlns:a="http://schemas.openxmlformats.org/drawingml/2006/main"/>
+          <a:ln xmlns:a="http://schemas.openxmlformats.org/drawingml/2006/main" w="0">
+            <a:noFill/>
+            <a:prstDash val="solid"/>
+          </a:ln>
+        </p:spPr>
+        <p:txBody>
+          <a:bodyPr xmlns:a="http://schemas.openxmlformats.org/drawingml/2006/main" anchor="t"/>
+          <a:lstStyle xmlns:a="http://schemas.openxmlformats.org/drawingml/2006/main"/>
+          <a:p xmlns:a="http://schemas.openxmlformats.org/drawingml/2006/main">
+            <a:pPr algn="l">
+              <a:defRPr sz="2925" b="1">
+                <a:solidFill>
+                  <a:srgbClr val="000000"/>
+                </a:solidFill>
+              </a:defRPr>
+            </a:pPr>
+            <a:r>
+              <a:rPr sz="2925" b="1">
+                <a:solidFill>
+                  <a:srgbClr val="000000"/>
+                </a:solidFill>
+              </a:rPr>
+              <a:t>A positive typical trade still contains severe same-day risk</a:t>
+            </a:r>
+          </a:p>
+        </p:txBody>
+      </p:sp>
+      <p:sp>
+        <p:nvSpPr>
+          <p:cNvPr id="3" name="">
+            <a:extLst xmlns:a="http://schemas.openxmlformats.org/drawingml/2006/main">
+              <a:ext uri="{FF2B5EF4-FFF2-40B4-BE49-F238E27FC236}">
+                <a16:creationId xmlns:a16="http://schemas.microsoft.com/office/drawing/2014/main" id="{669F0A96-3999-4569-AC22-1461747C022C}"/>
+              </a:ext>
+            </a:extLst>
+          </p:cNvPr>
+          <p:cNvSpPr>
+            <a:spLocks xmlns:a="http://schemas.openxmlformats.org/drawingml/2006/main" noGrp="1"/>
+          </p:cNvSpPr>
+          <p:nvPr/>
+        </p:nvSpPr>
+        <p:spPr>
+          <a:xfrm xmlns:a="http://schemas.openxmlformats.org/drawingml/2006/main">
+            <a:off x="457200" y="1219200"/>
+            <a:ext cx="11277600" cy="19050"/>
+          </a:xfrm>
+          <a:prstGeom xmlns:a="http://schemas.openxmlformats.org/drawingml/2006/main" prst="rect">
+            <a:avLst/>
+          </a:prstGeom>
+          <a:solidFill xmlns:a="http://schemas.openxmlformats.org/drawingml/2006/main">
+            <a:srgbClr val="B8BCC4"/>
+          </a:solidFill>
+          <a:ln xmlns:a="http://schemas.openxmlformats.org/drawingml/2006/main" w="0">
+            <a:solidFill>
+              <a:srgbClr val="B8BCC4"/>
+            </a:solidFill>
+            <a:prstDash val="solid"/>
+          </a:ln>
+        </p:spPr>
+      </p:sp>
+      <p:sp>
+        <p:nvSpPr>
+          <p:cNvPr id="4" name="">
+            <a:extLst xmlns:a="http://schemas.openxmlformats.org/drawingml/2006/main">
+              <a:ext uri="{FF2B5EF4-FFF2-40B4-BE49-F238E27FC236}">
+                <a16:creationId xmlns:a16="http://schemas.microsoft.com/office/drawing/2014/main" id="{FD88D443-C645-4AEB-AB36-35A89617CA4E}"/>
+              </a:ext>
+            </a:extLst>
+          </p:cNvPr>
+          <p:cNvSpPr>
+            <a:spLocks xmlns:a="http://schemas.openxmlformats.org/drawingml/2006/main" noGrp="1"/>
+          </p:cNvSpPr>
+          <p:nvPr/>
+        </p:nvSpPr>
+        <p:spPr>
+          <a:xfrm xmlns:a="http://schemas.openxmlformats.org/drawingml/2006/main">
+            <a:off x="457200" y="6515100"/>
+            <a:ext cx="8572500" cy="161925"/>
+          </a:xfrm>
+          <a:prstGeom xmlns:a="http://schemas.openxmlformats.org/drawingml/2006/main" prst="rect">
+            <a:avLst/>
+          </a:prstGeom>
+          <a:noFill xmlns:a="http://schemas.openxmlformats.org/drawingml/2006/main"/>
+          <a:ln xmlns:a="http://schemas.openxmlformats.org/drawingml/2006/main" w="0">
+            <a:noFill/>
+            <a:prstDash val="solid"/>
+          </a:ln>
+        </p:spPr>
+        <p:txBody>
+          <a:bodyPr xmlns:a="http://schemas.openxmlformats.org/drawingml/2006/main" anchor="t"/>
+          <a:lstStyle xmlns:a="http://schemas.openxmlformats.org/drawingml/2006/main"/>
+          <a:p xmlns:a="http://schemas.openxmlformats.org/drawingml/2006/main">
+            <a:pPr algn="l">
+              <a:defRPr sz="900" b="0">
+                <a:solidFill>
+                  <a:srgbClr val="667386"/>
+                </a:solidFill>
+              </a:defRPr>
+            </a:pPr>
+            <a:r>
+              <a:rPr sz="900" b="0">
+                <a:solidFill>
+                  <a:srgbClr val="667386"/>
+                </a:solidFill>
+              </a:rPr>
+              <a:t>Causal TRAIN translation · 2019-01-11–2023-12-29 after prior-252-session warm-up</a:t>
+            </a:r>
+          </a:p>
+        </p:txBody>
+      </p:sp>
+      <p:sp>
+        <p:nvSpPr>
+          <p:cNvPr id="5" name="">
+            <a:extLst xmlns:a="http://schemas.openxmlformats.org/drawingml/2006/main">
+              <a:ext uri="{FF2B5EF4-FFF2-40B4-BE49-F238E27FC236}">
+                <a16:creationId xmlns:a16="http://schemas.microsoft.com/office/drawing/2014/main" id="{C4E28D5F-CA99-438D-809A-DF16DCCC2345}"/>
+              </a:ext>
+            </a:extLst>
+          </p:cNvPr>
+          <p:cNvSpPr>
+            <a:spLocks xmlns:a="http://schemas.openxmlformats.org/drawingml/2006/main" noGrp="1"/>
+          </p:cNvSpPr>
+          <p:nvPr/>
+        </p:nvSpPr>
+        <p:spPr>
+          <a:xfrm xmlns:a="http://schemas.openxmlformats.org/drawingml/2006/main">
+            <a:off x="10858500" y="6496050"/>
+            <a:ext cx="876300" cy="171450"/>
+          </a:xfrm>
+          <a:prstGeom xmlns:a="http://schemas.openxmlformats.org/drawingml/2006/main" prst="rect">
+            <a:avLst/>
+          </a:prstGeom>
+          <a:noFill xmlns:a="http://schemas.openxmlformats.org/drawingml/2006/main"/>
+          <a:ln xmlns:a="http://schemas.openxmlformats.org/drawingml/2006/main" w="0">
+            <a:noFill/>
+            <a:prstDash val="solid"/>
+          </a:ln>
+        </p:spPr>
+        <p:txBody>
+          <a:bodyPr xmlns:a="http://schemas.openxmlformats.org/drawingml/2006/main" anchor="t"/>
+          <a:lstStyle xmlns:a="http://schemas.openxmlformats.org/drawingml/2006/main"/>
+          <a:p xmlns:a="http://schemas.openxmlformats.org/drawingml/2006/main">
+            <a:pPr algn="r">
+              <a:defRPr sz="900" b="0">
+                <a:solidFill>
+                  <a:srgbClr val="667386"/>
+                </a:solidFill>
+              </a:defRPr>
+            </a:pPr>
+            <a:r>
+              <a:rPr sz="900" b="0">
+                <a:solidFill>
+                  <a:srgbClr val="667386"/>
+                </a:solidFill>
+              </a:rPr>
+              <a:t>40</a:t>
+            </a:r>
+          </a:p>
+        </p:txBody>
+      </p:sp>
+      <p:pic>
+        <p:nvPicPr>
+          <p:cNvPr id="12" name=""/>
+          <p:cNvPicPr>
+            <a:picLocks xmlns:a="http://schemas.openxmlformats.org/drawingml/2006/main" noChangeAspect="1"/>
+          </p:cNvPicPr>
+          <p:nvPr/>
+        </p:nvPicPr>
+        <p:blipFill>
+          <a:blip xmlns:r="http://schemas.openxmlformats.org/officeDocument/2006/relationships" xmlns:a="http://schemas.openxmlformats.org/drawingml/2006/main" r:embed="R003b5bb4c39f4bb2"/>
+          <a:stretch xmlns:a="http://schemas.openxmlformats.org/drawingml/2006/main"/>
+        </p:blipFill>
+        <p:spPr>
+          <a:xfrm xmlns:a="http://schemas.openxmlformats.org/drawingml/2006/main">
+            <a:off x="691515" y="1371600"/>
+            <a:ext cx="10770870" cy="4895850"/>
+          </a:xfrm>
+          <a:prstGeom xmlns:a="http://schemas.openxmlformats.org/drawingml/2006/main" prst="rect">
+            <a:avLst/>
+          </a:prstGeom>
+        </p:spPr>
+      </p:pic>
+    </p:spTree>
+    <p:extLst>
+      <p:ext uri="{BB962C8B-B14F-4D97-AF65-F5344CB8AC3E}">
+        <p14:creationId xmlns:p14="http://schemas.microsoft.com/office/powerpoint/2010/main" val="1717143667"/>
+      </p:ext>
+    </p:extLst>
+  </p:cSld>
+</p:sld>
+</file>
+
+<file path=ppt/slides/slide41.xml><?xml version="1.0" encoding="utf-8"?>
+<p:sld xmlns:p="http://schemas.openxmlformats.org/presentationml/2006/main">
+  <p:cSld>
+    <p:bg>
+      <p:bgPr>
+        <a:solidFill xmlns:a="http://schemas.openxmlformats.org/drawingml/2006/main">
+          <a:srgbClr val="FFFFFF"/>
+        </a:solidFill>
+      </p:bgPr>
+    </p:bg>
+    <p:spTree>
+      <p:nvGrpSpPr>
+        <p:cNvPr id="1" name=""/>
+        <p:cNvGrpSpPr/>
+        <p:nvPr/>
+      </p:nvGrpSpPr>
+      <p:grpSpPr>
+        <a:xfrm xmlns:a="http://schemas.openxmlformats.org/drawingml/2006/main"/>
+      </p:grpSpPr>
+      <p:sp>
+        <p:nvSpPr>
+          <p:cNvPr id="36" name="">
+            <a:extLst xmlns:a="http://schemas.openxmlformats.org/drawingml/2006/main">
+              <a:ext uri="{FF2B5EF4-FFF2-40B4-BE49-F238E27FC236}">
+                <a16:creationId xmlns:a16="http://schemas.microsoft.com/office/drawing/2014/main" id="{24CF5998-B97D-42D6-9E8B-D43E5A035A88}"/>
+              </a:ext>
+            </a:extLst>
+          </p:cNvPr>
+          <p:cNvSpPr>
+            <a:spLocks xmlns:a="http://schemas.openxmlformats.org/drawingml/2006/main" noGrp="1"/>
+          </p:cNvSpPr>
+          <p:nvPr/>
+        </p:nvSpPr>
+        <p:spPr>
+          <a:xfrm xmlns:a="http://schemas.openxmlformats.org/drawingml/2006/main">
+            <a:off x="457200" y="238125"/>
+            <a:ext cx="7239000" cy="190500"/>
+          </a:xfrm>
+          <a:prstGeom xmlns:a="http://schemas.openxmlformats.org/drawingml/2006/main" prst="rect">
+            <a:avLst/>
+          </a:prstGeom>
+          <a:noFill xmlns:a="http://schemas.openxmlformats.org/drawingml/2006/main"/>
+          <a:ln xmlns:a="http://schemas.openxmlformats.org/drawingml/2006/main" w="0">
+            <a:noFill/>
+            <a:prstDash val="solid"/>
+          </a:ln>
+        </p:spPr>
+        <p:txBody>
+          <a:bodyPr xmlns:a="http://schemas.openxmlformats.org/drawingml/2006/main" anchor="t"/>
+          <a:lstStyle xmlns:a="http://schemas.openxmlformats.org/drawingml/2006/main"/>
+          <a:p xmlns:a="http://schemas.openxmlformats.org/drawingml/2006/main">
+            <a:pPr algn="l">
+              <a:defRPr sz="1050" b="1">
+                <a:solidFill>
+                  <a:srgbClr val="667386"/>
+                </a:solidFill>
+              </a:defRPr>
+            </a:pPr>
+            <a:r>
+              <a:rPr sz="1050" b="1">
+                <a:solidFill>
+                  <a:srgbClr val="667386"/>
+                </a:solidFill>
+              </a:rPr>
+              <a:t>OPERATOR HYPOTHESIS LAB · NVDA INTRADAY OPENING RULE</a:t>
+            </a:r>
+          </a:p>
+        </p:txBody>
+      </p:sp>
+      <p:sp>
+        <p:nvSpPr>
+          <p:cNvPr id="2" name="">
+            <a:extLst xmlns:a="http://schemas.openxmlformats.org/drawingml/2006/main">
+              <a:ext uri="{FF2B5EF4-FFF2-40B4-BE49-F238E27FC236}">
+                <a16:creationId xmlns:a16="http://schemas.microsoft.com/office/drawing/2014/main" id="{89C74174-F838-4130-93FC-9DB1FD417916}"/>
+              </a:ext>
+            </a:extLst>
+          </p:cNvPr>
+          <p:cNvSpPr>
+            <a:spLocks xmlns:a="http://schemas.openxmlformats.org/drawingml/2006/main" noGrp="1"/>
+          </p:cNvSpPr>
+          <p:nvPr/>
+        </p:nvSpPr>
+        <p:spPr>
+          <a:xfrm xmlns:a="http://schemas.openxmlformats.org/drawingml/2006/main">
+            <a:off x="457200" y="523875"/>
+            <a:ext cx="11049000" cy="590550"/>
+          </a:xfrm>
+          <a:prstGeom xmlns:a="http://schemas.openxmlformats.org/drawingml/2006/main" prst="rect">
+            <a:avLst/>
+          </a:prstGeom>
+          <a:noFill xmlns:a="http://schemas.openxmlformats.org/drawingml/2006/main"/>
+          <a:ln xmlns:a="http://schemas.openxmlformats.org/drawingml/2006/main" w="0">
+            <a:noFill/>
+            <a:prstDash val="solid"/>
+          </a:ln>
+        </p:spPr>
+        <p:txBody>
+          <a:bodyPr xmlns:a="http://schemas.openxmlformats.org/drawingml/2006/main" anchor="t"/>
+          <a:lstStyle xmlns:a="http://schemas.openxmlformats.org/drawingml/2006/main"/>
+          <a:p xmlns:a="http://schemas.openxmlformats.org/drawingml/2006/main">
+            <a:pPr algn="l">
+              <a:defRPr sz="2925" b="1">
+                <a:solidFill>
+                  <a:srgbClr val="000000"/>
+                </a:solidFill>
+              </a:defRPr>
+            </a:pPr>
+            <a:r>
+              <a:rPr sz="2925" b="1">
+                <a:solidFill>
+                  <a:srgbClr val="000000"/>
+                </a:solidFill>
+              </a:rPr>
+              <a:t>The mechanism is promising; the exact rule still stops</a:t>
+            </a:r>
+          </a:p>
+        </p:txBody>
+      </p:sp>
+      <p:sp>
+        <p:nvSpPr>
+          <p:cNvPr id="3" name="">
+            <a:extLst xmlns:a="http://schemas.openxmlformats.org/drawingml/2006/main">
+              <a:ext uri="{FF2B5EF4-FFF2-40B4-BE49-F238E27FC236}">
+                <a16:creationId xmlns:a16="http://schemas.microsoft.com/office/drawing/2014/main" id="{AFAD0B3C-F7F8-41FD-B39D-140003E8AA7A}"/>
+              </a:ext>
+            </a:extLst>
+          </p:cNvPr>
+          <p:cNvSpPr>
+            <a:spLocks xmlns:a="http://schemas.openxmlformats.org/drawingml/2006/main" noGrp="1"/>
+          </p:cNvSpPr>
+          <p:nvPr/>
+        </p:nvSpPr>
+        <p:spPr>
+          <a:xfrm xmlns:a="http://schemas.openxmlformats.org/drawingml/2006/main">
+            <a:off x="457200" y="1219200"/>
+            <a:ext cx="11277600" cy="19050"/>
+          </a:xfrm>
+          <a:prstGeom xmlns:a="http://schemas.openxmlformats.org/drawingml/2006/main" prst="rect">
+            <a:avLst/>
+          </a:prstGeom>
+          <a:solidFill xmlns:a="http://schemas.openxmlformats.org/drawingml/2006/main">
+            <a:srgbClr val="B8BCC4"/>
+          </a:solidFill>
+          <a:ln xmlns:a="http://schemas.openxmlformats.org/drawingml/2006/main" w="0">
+            <a:solidFill>
+              <a:srgbClr val="B8BCC4"/>
+            </a:solidFill>
+            <a:prstDash val="solid"/>
+          </a:ln>
+        </p:spPr>
+      </p:sp>
+      <p:sp>
+        <p:nvSpPr>
+          <p:cNvPr id="4" name="">
+            <a:extLst xmlns:a="http://schemas.openxmlformats.org/drawingml/2006/main">
+              <a:ext uri="{FF2B5EF4-FFF2-40B4-BE49-F238E27FC236}">
+                <a16:creationId xmlns:a16="http://schemas.microsoft.com/office/drawing/2014/main" id="{CA5C2410-A651-4B4E-A182-ABDFCB690577}"/>
+              </a:ext>
+            </a:extLst>
+          </p:cNvPr>
+          <p:cNvSpPr>
+            <a:spLocks xmlns:a="http://schemas.openxmlformats.org/drawingml/2006/main" noGrp="1"/>
+          </p:cNvSpPr>
+          <p:nvPr/>
+        </p:nvSpPr>
+        <p:spPr>
+          <a:xfrm xmlns:a="http://schemas.openxmlformats.org/drawingml/2006/main">
+            <a:off x="457200" y="6515100"/>
+            <a:ext cx="8572500" cy="161925"/>
+          </a:xfrm>
+          <a:prstGeom xmlns:a="http://schemas.openxmlformats.org/drawingml/2006/main" prst="rect">
+            <a:avLst/>
+          </a:prstGeom>
+          <a:noFill xmlns:a="http://schemas.openxmlformats.org/drawingml/2006/main"/>
+          <a:ln xmlns:a="http://schemas.openxmlformats.org/drawingml/2006/main" w="0">
+            <a:noFill/>
+            <a:prstDash val="solid"/>
+          </a:ln>
+        </p:spPr>
+        <p:txBody>
+          <a:bodyPr xmlns:a="http://schemas.openxmlformats.org/drawingml/2006/main" anchor="t"/>
+          <a:lstStyle xmlns:a="http://schemas.openxmlformats.org/drawingml/2006/main"/>
+          <a:p xmlns:a="http://schemas.openxmlformats.org/drawingml/2006/main">
+            <a:pPr algn="l">
+              <a:defRPr sz="900" b="0">
+                <a:solidFill>
+                  <a:srgbClr val="667386"/>
+                </a:solidFill>
+              </a:defRPr>
+            </a:pPr>
+            <a:r>
+              <a:rPr sz="900" b="0">
+                <a:solidFill>
+                  <a:srgbClr val="667386"/>
+                </a:solidFill>
+              </a:rPr>
+              <a:t>Causal TRAIN translation · 2019-01-11–2023-12-29 after prior-252-session warm-up</a:t>
+            </a:r>
+          </a:p>
+        </p:txBody>
+      </p:sp>
+      <p:sp>
+        <p:nvSpPr>
+          <p:cNvPr id="5" name="">
+            <a:extLst xmlns:a="http://schemas.openxmlformats.org/drawingml/2006/main">
+              <a:ext uri="{FF2B5EF4-FFF2-40B4-BE49-F238E27FC236}">
+                <a16:creationId xmlns:a16="http://schemas.microsoft.com/office/drawing/2014/main" id="{D186E483-16D3-4A7A-8902-B24438570975}"/>
+              </a:ext>
+            </a:extLst>
+          </p:cNvPr>
+          <p:cNvSpPr>
+            <a:spLocks xmlns:a="http://schemas.openxmlformats.org/drawingml/2006/main" noGrp="1"/>
+          </p:cNvSpPr>
+          <p:nvPr/>
+        </p:nvSpPr>
+        <p:spPr>
+          <a:xfrm xmlns:a="http://schemas.openxmlformats.org/drawingml/2006/main">
+            <a:off x="10858500" y="6496050"/>
+            <a:ext cx="876300" cy="171450"/>
+          </a:xfrm>
+          <a:prstGeom xmlns:a="http://schemas.openxmlformats.org/drawingml/2006/main" prst="rect">
+            <a:avLst/>
+          </a:prstGeom>
+          <a:noFill xmlns:a="http://schemas.openxmlformats.org/drawingml/2006/main"/>
+          <a:ln xmlns:a="http://schemas.openxmlformats.org/drawingml/2006/main" w="0">
+            <a:noFill/>
+            <a:prstDash val="solid"/>
+          </a:ln>
+        </p:spPr>
+        <p:txBody>
+          <a:bodyPr xmlns:a="http://schemas.openxmlformats.org/drawingml/2006/main" anchor="t"/>
+          <a:lstStyle xmlns:a="http://schemas.openxmlformats.org/drawingml/2006/main"/>
+          <a:p xmlns:a="http://schemas.openxmlformats.org/drawingml/2006/main">
+            <a:pPr algn="r">
+              <a:defRPr sz="900" b="0">
+                <a:solidFill>
+                  <a:srgbClr val="667386"/>
+                </a:solidFill>
+              </a:defRPr>
+            </a:pPr>
+            <a:r>
+              <a:rPr sz="900" b="0">
+                <a:solidFill>
+                  <a:srgbClr val="667386"/>
+                </a:solidFill>
+              </a:rPr>
+              <a:t>41</a:t>
+            </a:r>
+          </a:p>
+        </p:txBody>
+      </p:sp>
+      <p:sp>
+        <p:nvSpPr>
+          <p:cNvPr id="6" name="">
+            <a:extLst xmlns:a="http://schemas.openxmlformats.org/drawingml/2006/main">
+              <a:ext uri="{FF2B5EF4-FFF2-40B4-BE49-F238E27FC236}">
+                <a16:creationId xmlns:a16="http://schemas.microsoft.com/office/drawing/2014/main" id="{39EAC9BE-6DD8-434E-9DE5-CC7CBE9F71D6}"/>
+              </a:ext>
+            </a:extLst>
+          </p:cNvPr>
+          <p:cNvSpPr>
+            <a:spLocks xmlns:a="http://schemas.openxmlformats.org/drawingml/2006/main" noGrp="1"/>
+          </p:cNvSpPr>
+          <p:nvPr/>
+        </p:nvSpPr>
+        <p:spPr>
+          <a:xfrm xmlns:a="http://schemas.openxmlformats.org/drawingml/2006/main">
+            <a:off x="552450" y="1562100"/>
+            <a:ext cx="11087100" cy="838200"/>
+          </a:xfrm>
+          <a:prstGeom xmlns:a="http://schemas.openxmlformats.org/drawingml/2006/main" prst="rect">
+            <a:avLst/>
+          </a:prstGeom>
+          <a:solidFill xmlns:a="http://schemas.openxmlformats.org/drawingml/2006/main">
+            <a:srgbClr val="F6E5E1"/>
+          </a:solidFill>
+          <a:ln xmlns:a="http://schemas.openxmlformats.org/drawingml/2006/main" w="0">
+            <a:solidFill>
+              <a:srgbClr val="F6E5E1"/>
+            </a:solidFill>
+            <a:prstDash val="solid"/>
+          </a:ln>
+        </p:spPr>
+      </p:sp>
+      <p:sp>
+        <p:nvSpPr>
+          <p:cNvPr id="7" name="">
+            <a:extLst xmlns:a="http://schemas.openxmlformats.org/drawingml/2006/main">
+              <a:ext uri="{FF2B5EF4-FFF2-40B4-BE49-F238E27FC236}">
+                <a16:creationId xmlns:a16="http://schemas.microsoft.com/office/drawing/2014/main" id="{6BEDC18E-27CE-4E07-8F13-273345A69D99}"/>
+              </a:ext>
+            </a:extLst>
+          </p:cNvPr>
+          <p:cNvSpPr>
+            <a:spLocks xmlns:a="http://schemas.openxmlformats.org/drawingml/2006/main" noGrp="1"/>
+          </p:cNvSpPr>
+          <p:nvPr/>
+        </p:nvSpPr>
+        <p:spPr>
+          <a:xfrm xmlns:a="http://schemas.openxmlformats.org/drawingml/2006/main">
+            <a:off x="819150" y="1771650"/>
+            <a:ext cx="10553700" cy="419100"/>
+          </a:xfrm>
+          <a:prstGeom xmlns:a="http://schemas.openxmlformats.org/drawingml/2006/main" prst="rect">
+            <a:avLst/>
+          </a:prstGeom>
+          <a:noFill xmlns:a="http://schemas.openxmlformats.org/drawingml/2006/main"/>
+          <a:ln xmlns:a="http://schemas.openxmlformats.org/drawingml/2006/main" w="0">
+            <a:noFill/>
+            <a:prstDash val="solid"/>
+          </a:ln>
+        </p:spPr>
+        <p:txBody>
+          <a:bodyPr xmlns:a="http://schemas.openxmlformats.org/drawingml/2006/main" anchor="t"/>
+          <a:lstStyle xmlns:a="http://schemas.openxmlformats.org/drawingml/2006/main"/>
+          <a:p xmlns:a="http://schemas.openxmlformats.org/drawingml/2006/main">
+            <a:pPr algn="ctr">
+              <a:defRPr sz="2325" b="1">
+                <a:solidFill>
+                  <a:srgbClr val="B44738"/>
+                </a:solidFill>
+              </a:defRPr>
+            </a:pPr>
+            <a:r>
+              <a:rPr sz="2325" b="1">
+                <a:solidFill>
+                  <a:srgbClr val="B44738"/>
+                </a:solidFill>
+              </a:rPr>
+              <a:t>STOP_TRAIN_TRANSLATION_GATES_FAILED</a:t>
+            </a:r>
+          </a:p>
+        </p:txBody>
+      </p:sp>
+      <p:sp>
+        <p:nvSpPr>
+          <p:cNvPr id="8" name="">
+            <a:extLst xmlns:a="http://schemas.openxmlformats.org/drawingml/2006/main">
+              <a:ext uri="{FF2B5EF4-FFF2-40B4-BE49-F238E27FC236}">
+                <a16:creationId xmlns:a16="http://schemas.microsoft.com/office/drawing/2014/main" id="{E2E5DC05-605B-470B-BF84-78DBC154D5B1}"/>
+              </a:ext>
+            </a:extLst>
+          </p:cNvPr>
+          <p:cNvSpPr>
+            <a:spLocks xmlns:a="http://schemas.openxmlformats.org/drawingml/2006/main" noGrp="1"/>
+          </p:cNvSpPr>
+          <p:nvPr/>
+        </p:nvSpPr>
+        <p:spPr>
+          <a:xfrm xmlns:a="http://schemas.openxmlformats.org/drawingml/2006/main">
+            <a:off x="552450" y="2781300"/>
+            <a:ext cx="3333750" cy="361950"/>
+          </a:xfrm>
+          <a:prstGeom xmlns:a="http://schemas.openxmlformats.org/drawingml/2006/main" prst="rect">
+            <a:avLst/>
+          </a:prstGeom>
+          <a:noFill xmlns:a="http://schemas.openxmlformats.org/drawingml/2006/main"/>
+          <a:ln xmlns:a="http://schemas.openxmlformats.org/drawingml/2006/main" w="0">
+            <a:noFill/>
+            <a:prstDash val="solid"/>
+          </a:ln>
+        </p:spPr>
+        <p:txBody>
+          <a:bodyPr xmlns:a="http://schemas.openxmlformats.org/drawingml/2006/main" anchor="t"/>
+          <a:lstStyle xmlns:a="http://schemas.openxmlformats.org/drawingml/2006/main"/>
+          <a:p xmlns:a="http://schemas.openxmlformats.org/drawingml/2006/main">
+            <a:pPr algn="l">
+              <a:defRPr sz="2100" b="1">
+                <a:solidFill>
+                  <a:srgbClr val="000000"/>
+                </a:solidFill>
+              </a:defRPr>
+            </a:pPr>
+            <a:r>
+              <a:rPr sz="2100" b="1">
+                <a:solidFill>
+                  <a:srgbClr val="000000"/>
+                </a:solidFill>
+              </a:rPr>
+              <a:t>Frozen gates</a:t>
+            </a:r>
+          </a:p>
+        </p:txBody>
+      </p:sp>
+      <p:sp>
+        <p:nvSpPr>
+          <p:cNvPr id="9" name="">
+            <a:extLst xmlns:a="http://schemas.openxmlformats.org/drawingml/2006/main">
+              <a:ext uri="{FF2B5EF4-FFF2-40B4-BE49-F238E27FC236}">
+                <a16:creationId xmlns:a16="http://schemas.microsoft.com/office/drawing/2014/main" id="{D99B553E-39A1-4D08-8699-2A4A8BD7CF0C}"/>
+              </a:ext>
+            </a:extLst>
+          </p:cNvPr>
+          <p:cNvSpPr>
+            <a:spLocks xmlns:a="http://schemas.openxmlformats.org/drawingml/2006/main" noGrp="1"/>
+          </p:cNvSpPr>
+          <p:nvPr/>
+        </p:nvSpPr>
+        <p:spPr>
+          <a:xfrm xmlns:a="http://schemas.openxmlformats.org/drawingml/2006/main">
+            <a:off x="685800" y="3257550"/>
+            <a:ext cx="876300" cy="304800"/>
+          </a:xfrm>
+          <a:prstGeom xmlns:a="http://schemas.openxmlformats.org/drawingml/2006/main" prst="rect">
+            <a:avLst/>
+          </a:prstGeom>
+          <a:solidFill xmlns:a="http://schemas.openxmlformats.org/drawingml/2006/main">
+            <a:srgbClr val="E2F1EC"/>
+          </a:solidFill>
+          <a:ln xmlns:a="http://schemas.openxmlformats.org/drawingml/2006/main" w="0">
+            <a:solidFill>
+              <a:srgbClr val="E2F1EC"/>
+            </a:solidFill>
+            <a:prstDash val="solid"/>
+          </a:ln>
+        </p:spPr>
+      </p:sp>
+      <p:sp>
+        <p:nvSpPr>
+          <p:cNvPr id="10" name="">
+            <a:extLst xmlns:a="http://schemas.openxmlformats.org/drawingml/2006/main">
+              <a:ext uri="{FF2B5EF4-FFF2-40B4-BE49-F238E27FC236}">
+                <a16:creationId xmlns:a16="http://schemas.microsoft.com/office/drawing/2014/main" id="{5C940981-0209-4CC6-A1E7-89B1B555B7AA}"/>
+              </a:ext>
+            </a:extLst>
+          </p:cNvPr>
+          <p:cNvSpPr>
+            <a:spLocks xmlns:a="http://schemas.openxmlformats.org/drawingml/2006/main" noGrp="1"/>
+          </p:cNvSpPr>
+          <p:nvPr/>
+        </p:nvSpPr>
+        <p:spPr>
+          <a:xfrm xmlns:a="http://schemas.openxmlformats.org/drawingml/2006/main">
+            <a:off x="742950" y="3314700"/>
+            <a:ext cx="762000" cy="190500"/>
+          </a:xfrm>
+          <a:prstGeom xmlns:a="http://schemas.openxmlformats.org/drawingml/2006/main" prst="rect">
+            <a:avLst/>
+          </a:prstGeom>
+          <a:noFill xmlns:a="http://schemas.openxmlformats.org/drawingml/2006/main"/>
+          <a:ln xmlns:a="http://schemas.openxmlformats.org/drawingml/2006/main" w="0">
+            <a:noFill/>
+            <a:prstDash val="solid"/>
+          </a:ln>
+        </p:spPr>
+        <p:txBody>
+          <a:bodyPr xmlns:a="http://schemas.openxmlformats.org/drawingml/2006/main" anchor="t"/>
+          <a:lstStyle xmlns:a="http://schemas.openxmlformats.org/drawingml/2006/main"/>
+          <a:p xmlns:a="http://schemas.openxmlformats.org/drawingml/2006/main">
+            <a:pPr algn="ctr">
+              <a:defRPr sz="1050" b="1">
+                <a:solidFill>
+                  <a:srgbClr val="14866D"/>
+                </a:solidFill>
+              </a:defRPr>
+            </a:pPr>
+            <a:r>
+              <a:rPr sz="1050" b="1">
+                <a:solidFill>
+                  <a:srgbClr val="14866D"/>
+                </a:solidFill>
+              </a:rPr>
+              <a:t>PASS</a:t>
+            </a:r>
+          </a:p>
+        </p:txBody>
+      </p:sp>
+      <p:sp>
+        <p:nvSpPr>
+          <p:cNvPr id="11" name="">
+            <a:extLst xmlns:a="http://schemas.openxmlformats.org/drawingml/2006/main">
+              <a:ext uri="{FF2B5EF4-FFF2-40B4-BE49-F238E27FC236}">
+                <a16:creationId xmlns:a16="http://schemas.microsoft.com/office/drawing/2014/main" id="{D57D6622-FE79-41EF-8A60-8B94FFEA6ECE}"/>
+              </a:ext>
+            </a:extLst>
+          </p:cNvPr>
+          <p:cNvSpPr>
+            <a:spLocks xmlns:a="http://schemas.openxmlformats.org/drawingml/2006/main" noGrp="1"/>
+          </p:cNvSpPr>
+          <p:nvPr/>
+        </p:nvSpPr>
+        <p:spPr>
+          <a:xfrm xmlns:a="http://schemas.openxmlformats.org/drawingml/2006/main">
+            <a:off x="1771650" y="3295650"/>
+            <a:ext cx="2266950" cy="247650"/>
+          </a:xfrm>
+          <a:prstGeom xmlns:a="http://schemas.openxmlformats.org/drawingml/2006/main" prst="rect">
+            <a:avLst/>
+          </a:prstGeom>
+          <a:noFill xmlns:a="http://schemas.openxmlformats.org/drawingml/2006/main"/>
+          <a:ln xmlns:a="http://schemas.openxmlformats.org/drawingml/2006/main" w="0">
+            <a:noFill/>
+            <a:prstDash val="solid"/>
+          </a:ln>
+        </p:spPr>
+        <p:txBody>
+          <a:bodyPr xmlns:a="http://schemas.openxmlformats.org/drawingml/2006/main" anchor="t"/>
+          <a:lstStyle xmlns:a="http://schemas.openxmlformats.org/drawingml/2006/main"/>
+          <a:p xmlns:a="http://schemas.openxmlformats.org/drawingml/2006/main">
+            <a:pPr algn="l">
+              <a:defRPr sz="1350" b="1">
+                <a:solidFill>
+                  <a:srgbClr val="000000"/>
+                </a:solidFill>
+              </a:defRPr>
+            </a:pPr>
+            <a:r>
+              <a:rPr sz="1350" b="1">
+                <a:solidFill>
+                  <a:srgbClr val="000000"/>
+                </a:solidFill>
+              </a:rPr>
+              <a:t>Support</a:t>
+            </a:r>
+          </a:p>
+        </p:txBody>
+      </p:sp>
+      <p:sp>
+        <p:nvSpPr>
+          <p:cNvPr id="12" name="">
+            <a:extLst xmlns:a="http://schemas.openxmlformats.org/drawingml/2006/main">
+              <a:ext uri="{FF2B5EF4-FFF2-40B4-BE49-F238E27FC236}">
+                <a16:creationId xmlns:a16="http://schemas.microsoft.com/office/drawing/2014/main" id="{0AE6DE14-680F-4772-9040-DEF2A640CB14}"/>
+              </a:ext>
+            </a:extLst>
+          </p:cNvPr>
+          <p:cNvSpPr>
+            <a:spLocks xmlns:a="http://schemas.openxmlformats.org/drawingml/2006/main" noGrp="1"/>
+          </p:cNvSpPr>
+          <p:nvPr/>
+        </p:nvSpPr>
+        <p:spPr>
+          <a:xfrm xmlns:a="http://schemas.openxmlformats.org/drawingml/2006/main">
+            <a:off x="4095750" y="3305175"/>
+            <a:ext cx="2667000" cy="228600"/>
+          </a:xfrm>
+          <a:prstGeom xmlns:a="http://schemas.openxmlformats.org/drawingml/2006/main" prst="rect">
+            <a:avLst/>
+          </a:prstGeom>
+          <a:noFill xmlns:a="http://schemas.openxmlformats.org/drawingml/2006/main"/>
+          <a:ln xmlns:a="http://schemas.openxmlformats.org/drawingml/2006/main" w="0">
+            <a:noFill/>
+            <a:prstDash val="solid"/>
+          </a:ln>
+        </p:spPr>
+        <p:txBody>
+          <a:bodyPr xmlns:a="http://schemas.openxmlformats.org/drawingml/2006/main" anchor="t"/>
+          <a:lstStyle xmlns:a="http://schemas.openxmlformats.org/drawingml/2006/main"/>
+          <a:p xmlns:a="http://schemas.openxmlformats.org/drawingml/2006/main">
+            <a:pPr algn="l">
+              <a:defRPr sz="1200" b="0">
+                <a:solidFill>
+                  <a:srgbClr val="667386"/>
+                </a:solidFill>
+              </a:defRPr>
+            </a:pPr>
+            <a:r>
+              <a:rPr sz="1200" b="0">
+                <a:solidFill>
+                  <a:srgbClr val="667386"/>
+                </a:solidFill>
+              </a:rPr>
+              <a:t>157 trades; minimum 100</a:t>
+            </a:r>
+          </a:p>
+        </p:txBody>
+      </p:sp>
+      <p:sp>
+        <p:nvSpPr>
+          <p:cNvPr id="13" name="">
+            <a:extLst xmlns:a="http://schemas.openxmlformats.org/drawingml/2006/main">
+              <a:ext uri="{FF2B5EF4-FFF2-40B4-BE49-F238E27FC236}">
+                <a16:creationId xmlns:a16="http://schemas.microsoft.com/office/drawing/2014/main" id="{CB477E8B-91E5-43FC-8953-A0CA18C4CB26}"/>
+              </a:ext>
+            </a:extLst>
+          </p:cNvPr>
+          <p:cNvSpPr>
+            <a:spLocks xmlns:a="http://schemas.openxmlformats.org/drawingml/2006/main" noGrp="1"/>
+          </p:cNvSpPr>
+          <p:nvPr/>
+        </p:nvSpPr>
+        <p:spPr>
+          <a:xfrm xmlns:a="http://schemas.openxmlformats.org/drawingml/2006/main">
+            <a:off x="685800" y="3714750"/>
+            <a:ext cx="876300" cy="304800"/>
+          </a:xfrm>
+          <a:prstGeom xmlns:a="http://schemas.openxmlformats.org/drawingml/2006/main" prst="rect">
+            <a:avLst/>
+          </a:prstGeom>
+          <a:solidFill xmlns:a="http://schemas.openxmlformats.org/drawingml/2006/main">
+            <a:srgbClr val="E2F1EC"/>
+          </a:solidFill>
+          <a:ln xmlns:a="http://schemas.openxmlformats.org/drawingml/2006/main" w="0">
+            <a:solidFill>
+              <a:srgbClr val="E2F1EC"/>
+            </a:solidFill>
+            <a:prstDash val="solid"/>
+          </a:ln>
+        </p:spPr>
+      </p:sp>
+      <p:sp>
+        <p:nvSpPr>
+          <p:cNvPr id="14" name="">
+            <a:extLst xmlns:a="http://schemas.openxmlformats.org/drawingml/2006/main">
+              <a:ext uri="{FF2B5EF4-FFF2-40B4-BE49-F238E27FC236}">
+                <a16:creationId xmlns:a16="http://schemas.microsoft.com/office/drawing/2014/main" id="{17613B64-259A-4230-81B8-08C60F1D4346}"/>
+              </a:ext>
+            </a:extLst>
+          </p:cNvPr>
+          <p:cNvSpPr>
+            <a:spLocks xmlns:a="http://schemas.openxmlformats.org/drawingml/2006/main" noGrp="1"/>
+          </p:cNvSpPr>
+          <p:nvPr/>
+        </p:nvSpPr>
+        <p:spPr>
+          <a:xfrm xmlns:a="http://schemas.openxmlformats.org/drawingml/2006/main">
+            <a:off x="742950" y="3771900"/>
+            <a:ext cx="762000" cy="190500"/>
+          </a:xfrm>
+          <a:prstGeom xmlns:a="http://schemas.openxmlformats.org/drawingml/2006/main" prst="rect">
+            <a:avLst/>
+          </a:prstGeom>
+          <a:noFill xmlns:a="http://schemas.openxmlformats.org/drawingml/2006/main"/>
+          <a:ln xmlns:a="http://schemas.openxmlformats.org/drawingml/2006/main" w="0">
+            <a:noFill/>
+            <a:prstDash val="solid"/>
+          </a:ln>
+        </p:spPr>
+        <p:txBody>
+          <a:bodyPr xmlns:a="http://schemas.openxmlformats.org/drawingml/2006/main" anchor="t"/>
+          <a:lstStyle xmlns:a="http://schemas.openxmlformats.org/drawingml/2006/main"/>
+          <a:p xmlns:a="http://schemas.openxmlformats.org/drawingml/2006/main">
+            <a:pPr algn="ctr">
+              <a:defRPr sz="1050" b="1">
+                <a:solidFill>
+                  <a:srgbClr val="14866D"/>
+                </a:solidFill>
+              </a:defRPr>
+            </a:pPr>
+            <a:r>
+              <a:rPr sz="1050" b="1">
+                <a:solidFill>
+                  <a:srgbClr val="14866D"/>
+                </a:solidFill>
+              </a:rPr>
+              <a:t>PASS</a:t>
+            </a:r>
+          </a:p>
+        </p:txBody>
+      </p:sp>
+      <p:sp>
+        <p:nvSpPr>
+          <p:cNvPr id="15" name="">
+            <a:extLst xmlns:a="http://schemas.openxmlformats.org/drawingml/2006/main">
+              <a:ext uri="{FF2B5EF4-FFF2-40B4-BE49-F238E27FC236}">
+                <a16:creationId xmlns:a16="http://schemas.microsoft.com/office/drawing/2014/main" id="{62D2EAEC-4AEC-4883-8A5E-D751845C99D5}"/>
+              </a:ext>
+            </a:extLst>
+          </p:cNvPr>
+          <p:cNvSpPr>
+            <a:spLocks xmlns:a="http://schemas.openxmlformats.org/drawingml/2006/main" noGrp="1"/>
+          </p:cNvSpPr>
+          <p:nvPr/>
+        </p:nvSpPr>
+        <p:spPr>
+          <a:xfrm xmlns:a="http://schemas.openxmlformats.org/drawingml/2006/main">
+            <a:off x="1771650" y="3752850"/>
+            <a:ext cx="2266950" cy="247650"/>
+          </a:xfrm>
+          <a:prstGeom xmlns:a="http://schemas.openxmlformats.org/drawingml/2006/main" prst="rect">
+            <a:avLst/>
+          </a:prstGeom>
+          <a:noFill xmlns:a="http://schemas.openxmlformats.org/drawingml/2006/main"/>
+          <a:ln xmlns:a="http://schemas.openxmlformats.org/drawingml/2006/main" w="0">
+            <a:noFill/>
+            <a:prstDash val="solid"/>
+          </a:ln>
+        </p:spPr>
+        <p:txBody>
+          <a:bodyPr xmlns:a="http://schemas.openxmlformats.org/drawingml/2006/main" anchor="t"/>
+          <a:lstStyle xmlns:a="http://schemas.openxmlformats.org/drawingml/2006/main"/>
+          <a:p xmlns:a="http://schemas.openxmlformats.org/drawingml/2006/main">
+            <a:pPr algn="l">
+              <a:defRPr sz="1350" b="1">
+                <a:solidFill>
+                  <a:srgbClr val="000000"/>
+                </a:solidFill>
+              </a:defRPr>
+            </a:pPr>
+            <a:r>
+              <a:rPr sz="1350" b="1">
+                <a:solidFill>
+                  <a:srgbClr val="000000"/>
+                </a:solidFill>
+              </a:rPr>
+              <a:t>Positive mean</a:t>
+            </a:r>
+          </a:p>
+        </p:txBody>
+      </p:sp>
+      <p:sp>
+        <p:nvSpPr>
+          <p:cNvPr id="16" name="">
+            <a:extLst xmlns:a="http://schemas.openxmlformats.org/drawingml/2006/main">
+              <a:ext uri="{FF2B5EF4-FFF2-40B4-BE49-F238E27FC236}">
+                <a16:creationId xmlns:a16="http://schemas.microsoft.com/office/drawing/2014/main" id="{CA406C87-51A9-4405-BDF0-D0D0A992F89C}"/>
+              </a:ext>
+            </a:extLst>
+          </p:cNvPr>
+          <p:cNvSpPr>
+            <a:spLocks xmlns:a="http://schemas.openxmlformats.org/drawingml/2006/main" noGrp="1"/>
+          </p:cNvSpPr>
+          <p:nvPr/>
+        </p:nvSpPr>
+        <p:spPr>
+          <a:xfrm xmlns:a="http://schemas.openxmlformats.org/drawingml/2006/main">
+            <a:off x="4095750" y="3762375"/>
+            <a:ext cx="2667000" cy="228600"/>
+          </a:xfrm>
+          <a:prstGeom xmlns:a="http://schemas.openxmlformats.org/drawingml/2006/main" prst="rect">
+            <a:avLst/>
+          </a:prstGeom>
+          <a:noFill xmlns:a="http://schemas.openxmlformats.org/drawingml/2006/main"/>
+          <a:ln xmlns:a="http://schemas.openxmlformats.org/drawingml/2006/main" w="0">
+            <a:noFill/>
+            <a:prstDash val="solid"/>
+          </a:ln>
+        </p:spPr>
+        <p:txBody>
+          <a:bodyPr xmlns:a="http://schemas.openxmlformats.org/drawingml/2006/main" anchor="t"/>
+          <a:lstStyle xmlns:a="http://schemas.openxmlformats.org/drawingml/2006/main"/>
+          <a:p xmlns:a="http://schemas.openxmlformats.org/drawingml/2006/main">
+            <a:pPr algn="l">
+              <a:defRPr sz="1200" b="0">
+                <a:solidFill>
+                  <a:srgbClr val="667386"/>
+                </a:solidFill>
+              </a:defRPr>
+            </a:pPr>
+            <a:r>
+              <a:rPr sz="1200" b="0">
+                <a:solidFill>
+                  <a:srgbClr val="667386"/>
+                </a:solidFill>
+              </a:rPr>
+              <a:t>+0.204% net</a:t>
+            </a:r>
+          </a:p>
+        </p:txBody>
+      </p:sp>
+      <p:sp>
+        <p:nvSpPr>
+          <p:cNvPr id="17" name="">
+            <a:extLst xmlns:a="http://schemas.openxmlformats.org/drawingml/2006/main">
+              <a:ext uri="{FF2B5EF4-FFF2-40B4-BE49-F238E27FC236}">
+                <a16:creationId xmlns:a16="http://schemas.microsoft.com/office/drawing/2014/main" id="{1884C12D-A571-4C19-BB14-60BD45AD2428}"/>
+              </a:ext>
+            </a:extLst>
+          </p:cNvPr>
+          <p:cNvSpPr>
+            <a:spLocks xmlns:a="http://schemas.openxmlformats.org/drawingml/2006/main" noGrp="1"/>
+          </p:cNvSpPr>
+          <p:nvPr/>
+        </p:nvSpPr>
+        <p:spPr>
+          <a:xfrm xmlns:a="http://schemas.openxmlformats.org/drawingml/2006/main">
+            <a:off x="685800" y="4171950"/>
+            <a:ext cx="876300" cy="304800"/>
+          </a:xfrm>
+          <a:prstGeom xmlns:a="http://schemas.openxmlformats.org/drawingml/2006/main" prst="rect">
+            <a:avLst/>
+          </a:prstGeom>
+          <a:solidFill xmlns:a="http://schemas.openxmlformats.org/drawingml/2006/main">
+            <a:srgbClr val="E2F1EC"/>
+          </a:solidFill>
+          <a:ln xmlns:a="http://schemas.openxmlformats.org/drawingml/2006/main" w="0">
+            <a:solidFill>
+              <a:srgbClr val="E2F1EC"/>
+            </a:solidFill>
+            <a:prstDash val="solid"/>
+          </a:ln>
+        </p:spPr>
+      </p:sp>
+      <p:sp>
+        <p:nvSpPr>
+          <p:cNvPr id="18" name="">
+            <a:extLst xmlns:a="http://schemas.openxmlformats.org/drawingml/2006/main">
+              <a:ext uri="{FF2B5EF4-FFF2-40B4-BE49-F238E27FC236}">
+                <a16:creationId xmlns:a16="http://schemas.microsoft.com/office/drawing/2014/main" id="{2ED6F740-1E10-4447-B120-8C4C5D5AF4F5}"/>
+              </a:ext>
+            </a:extLst>
+          </p:cNvPr>
+          <p:cNvSpPr>
+            <a:spLocks xmlns:a="http://schemas.openxmlformats.org/drawingml/2006/main" noGrp="1"/>
+          </p:cNvSpPr>
+          <p:nvPr/>
+        </p:nvSpPr>
+        <p:spPr>
+          <a:xfrm xmlns:a="http://schemas.openxmlformats.org/drawingml/2006/main">
+            <a:off x="742950" y="4229100"/>
+            <a:ext cx="762000" cy="190500"/>
+          </a:xfrm>
+          <a:prstGeom xmlns:a="http://schemas.openxmlformats.org/drawingml/2006/main" prst="rect">
+            <a:avLst/>
+          </a:prstGeom>
+          <a:noFill xmlns:a="http://schemas.openxmlformats.org/drawingml/2006/main"/>
+          <a:ln xmlns:a="http://schemas.openxmlformats.org/drawingml/2006/main" w="0">
+            <a:noFill/>
+            <a:prstDash val="solid"/>
+          </a:ln>
+        </p:spPr>
+        <p:txBody>
+          <a:bodyPr xmlns:a="http://schemas.openxmlformats.org/drawingml/2006/main" anchor="t"/>
+          <a:lstStyle xmlns:a="http://schemas.openxmlformats.org/drawingml/2006/main"/>
+          <a:p xmlns:a="http://schemas.openxmlformats.org/drawingml/2006/main">
+            <a:pPr algn="ctr">
+              <a:defRPr sz="1050" b="1">
+                <a:solidFill>
+                  <a:srgbClr val="14866D"/>
+                </a:solidFill>
+              </a:defRPr>
+            </a:pPr>
+            <a:r>
+              <a:rPr sz="1050" b="1">
+                <a:solidFill>
+                  <a:srgbClr val="14866D"/>
+                </a:solidFill>
+              </a:rPr>
+              <a:t>PASS</a:t>
+            </a:r>
+          </a:p>
+        </p:txBody>
+      </p:sp>
+      <p:sp>
+        <p:nvSpPr>
+          <p:cNvPr id="19" name="">
+            <a:extLst xmlns:a="http://schemas.openxmlformats.org/drawingml/2006/main">
+              <a:ext uri="{FF2B5EF4-FFF2-40B4-BE49-F238E27FC236}">
+                <a16:creationId xmlns:a16="http://schemas.microsoft.com/office/drawing/2014/main" id="{41DDAA3A-22E4-4BB6-A689-4E85E5A2AA29}"/>
+              </a:ext>
+            </a:extLst>
+          </p:cNvPr>
+          <p:cNvSpPr>
+            <a:spLocks xmlns:a="http://schemas.openxmlformats.org/drawingml/2006/main" noGrp="1"/>
+          </p:cNvSpPr>
+          <p:nvPr/>
+        </p:nvSpPr>
+        <p:spPr>
+          <a:xfrm xmlns:a="http://schemas.openxmlformats.org/drawingml/2006/main">
+            <a:off x="1771650" y="4210050"/>
+            <a:ext cx="2266950" cy="247650"/>
+          </a:xfrm>
+          <a:prstGeom xmlns:a="http://schemas.openxmlformats.org/drawingml/2006/main" prst="rect">
+            <a:avLst/>
+          </a:prstGeom>
+          <a:noFill xmlns:a="http://schemas.openxmlformats.org/drawingml/2006/main"/>
+          <a:ln xmlns:a="http://schemas.openxmlformats.org/drawingml/2006/main" w="0">
+            <a:noFill/>
+            <a:prstDash val="solid"/>
+          </a:ln>
+        </p:spPr>
+        <p:txBody>
+          <a:bodyPr xmlns:a="http://schemas.openxmlformats.org/drawingml/2006/main" anchor="t"/>
+          <a:lstStyle xmlns:a="http://schemas.openxmlformats.org/drawingml/2006/main"/>
+          <a:p xmlns:a="http://schemas.openxmlformats.org/drawingml/2006/main">
+            <a:pPr algn="l">
+              <a:defRPr sz="1350" b="1">
+                <a:solidFill>
+                  <a:srgbClr val="000000"/>
+                </a:solidFill>
+              </a:defRPr>
+            </a:pPr>
+            <a:r>
+              <a:rPr sz="1350" b="1">
+                <a:solidFill>
+                  <a:srgbClr val="000000"/>
+                </a:solidFill>
+              </a:rPr>
+              <a:t>Typical trade</a:t>
+            </a:r>
+          </a:p>
+        </p:txBody>
+      </p:sp>
+      <p:sp>
+        <p:nvSpPr>
+          <p:cNvPr id="20" name="">
+            <a:extLst xmlns:a="http://schemas.openxmlformats.org/drawingml/2006/main">
+              <a:ext uri="{FF2B5EF4-FFF2-40B4-BE49-F238E27FC236}">
+                <a16:creationId xmlns:a16="http://schemas.microsoft.com/office/drawing/2014/main" id="{E2CDA70F-7504-41ED-9BB5-0AE04113DF9F}"/>
+              </a:ext>
+            </a:extLst>
+          </p:cNvPr>
+          <p:cNvSpPr>
+            <a:spLocks xmlns:a="http://schemas.openxmlformats.org/drawingml/2006/main" noGrp="1"/>
+          </p:cNvSpPr>
+          <p:nvPr/>
+        </p:nvSpPr>
+        <p:spPr>
+          <a:xfrm xmlns:a="http://schemas.openxmlformats.org/drawingml/2006/main">
+            <a:off x="4095750" y="4219575"/>
+            <a:ext cx="2667000" cy="228600"/>
+          </a:xfrm>
+          <a:prstGeom xmlns:a="http://schemas.openxmlformats.org/drawingml/2006/main" prst="rect">
+            <a:avLst/>
+          </a:prstGeom>
+          <a:noFill xmlns:a="http://schemas.openxmlformats.org/drawingml/2006/main"/>
+          <a:ln xmlns:a="http://schemas.openxmlformats.org/drawingml/2006/main" w="0">
+            <a:noFill/>
+            <a:prstDash val="solid"/>
+          </a:ln>
+        </p:spPr>
+        <p:txBody>
+          <a:bodyPr xmlns:a="http://schemas.openxmlformats.org/drawingml/2006/main" anchor="t"/>
+          <a:lstStyle xmlns:a="http://schemas.openxmlformats.org/drawingml/2006/main"/>
+          <a:p xmlns:a="http://schemas.openxmlformats.org/drawingml/2006/main">
+            <a:pPr algn="l">
+              <a:defRPr sz="1200" b="0">
+                <a:solidFill>
+                  <a:srgbClr val="667386"/>
+                </a:solidFill>
+              </a:defRPr>
+            </a:pPr>
+            <a:r>
+              <a:rPr sz="1200" b="0">
+                <a:solidFill>
+                  <a:srgbClr val="667386"/>
+                </a:solidFill>
+              </a:rPr>
+              <a:t>+0.430% median; 59.9% up</a:t>
+            </a:r>
+          </a:p>
+        </p:txBody>
+      </p:sp>
+      <p:sp>
+        <p:nvSpPr>
+          <p:cNvPr id="21" name="">
+            <a:extLst xmlns:a="http://schemas.openxmlformats.org/drawingml/2006/main">
+              <a:ext uri="{FF2B5EF4-FFF2-40B4-BE49-F238E27FC236}">
+                <a16:creationId xmlns:a16="http://schemas.microsoft.com/office/drawing/2014/main" id="{D7125D82-2AA8-42CF-8101-9FACD1C0009D}"/>
+              </a:ext>
+            </a:extLst>
+          </p:cNvPr>
+          <p:cNvSpPr>
+            <a:spLocks xmlns:a="http://schemas.openxmlformats.org/drawingml/2006/main" noGrp="1"/>
+          </p:cNvSpPr>
+          <p:nvPr/>
+        </p:nvSpPr>
+        <p:spPr>
+          <a:xfrm xmlns:a="http://schemas.openxmlformats.org/drawingml/2006/main">
+            <a:off x="685800" y="4629150"/>
+            <a:ext cx="876300" cy="304800"/>
+          </a:xfrm>
+          <a:prstGeom xmlns:a="http://schemas.openxmlformats.org/drawingml/2006/main" prst="rect">
+            <a:avLst/>
+          </a:prstGeom>
+          <a:solidFill xmlns:a="http://schemas.openxmlformats.org/drawingml/2006/main">
+            <a:srgbClr val="E2F1EC"/>
+          </a:solidFill>
+          <a:ln xmlns:a="http://schemas.openxmlformats.org/drawingml/2006/main" w="0">
+            <a:solidFill>
+              <a:srgbClr val="E2F1EC"/>
+            </a:solidFill>
+            <a:prstDash val="solid"/>
+          </a:ln>
+        </p:spPr>
+      </p:sp>
+      <p:sp>
+        <p:nvSpPr>
+          <p:cNvPr id="22" name="">
+            <a:extLst xmlns:a="http://schemas.openxmlformats.org/drawingml/2006/main">
+              <a:ext uri="{FF2B5EF4-FFF2-40B4-BE49-F238E27FC236}">
+                <a16:creationId xmlns:a16="http://schemas.microsoft.com/office/drawing/2014/main" id="{06D930C0-F325-4190-BD70-F085C20F5612}"/>
+              </a:ext>
+            </a:extLst>
+          </p:cNvPr>
+          <p:cNvSpPr>
+            <a:spLocks xmlns:a="http://schemas.openxmlformats.org/drawingml/2006/main" noGrp="1"/>
+          </p:cNvSpPr>
+          <p:nvPr/>
+        </p:nvSpPr>
+        <p:spPr>
+          <a:xfrm xmlns:a="http://schemas.openxmlformats.org/drawingml/2006/main">
+            <a:off x="742950" y="4686300"/>
+            <a:ext cx="762000" cy="190500"/>
+          </a:xfrm>
+          <a:prstGeom xmlns:a="http://schemas.openxmlformats.org/drawingml/2006/main" prst="rect">
+            <a:avLst/>
+          </a:prstGeom>
+          <a:noFill xmlns:a="http://schemas.openxmlformats.org/drawingml/2006/main"/>
+          <a:ln xmlns:a="http://schemas.openxmlformats.org/drawingml/2006/main" w="0">
+            <a:noFill/>
+            <a:prstDash val="solid"/>
+          </a:ln>
+        </p:spPr>
+        <p:txBody>
+          <a:bodyPr xmlns:a="http://schemas.openxmlformats.org/drawingml/2006/main" anchor="t"/>
+          <a:lstStyle xmlns:a="http://schemas.openxmlformats.org/drawingml/2006/main"/>
+          <a:p xmlns:a="http://schemas.openxmlformats.org/drawingml/2006/main">
+            <a:pPr algn="ctr">
+              <a:defRPr sz="1050" b="1">
+                <a:solidFill>
+                  <a:srgbClr val="14866D"/>
+                </a:solidFill>
+              </a:defRPr>
+            </a:pPr>
+            <a:r>
+              <a:rPr sz="1050" b="1">
+                <a:solidFill>
+                  <a:srgbClr val="14866D"/>
+                </a:solidFill>
+              </a:rPr>
+              <a:t>PASS</a:t>
+            </a:r>
+          </a:p>
+        </p:txBody>
+      </p:sp>
+      <p:sp>
+        <p:nvSpPr>
+          <p:cNvPr id="23" name="">
+            <a:extLst xmlns:a="http://schemas.openxmlformats.org/drawingml/2006/main">
+              <a:ext uri="{FF2B5EF4-FFF2-40B4-BE49-F238E27FC236}">
+                <a16:creationId xmlns:a16="http://schemas.microsoft.com/office/drawing/2014/main" id="{6BBBD2A0-6498-4180-A5E4-581ED8FF1B61}"/>
+              </a:ext>
+            </a:extLst>
+          </p:cNvPr>
+          <p:cNvSpPr>
+            <a:spLocks xmlns:a="http://schemas.openxmlformats.org/drawingml/2006/main" noGrp="1"/>
+          </p:cNvSpPr>
+          <p:nvPr/>
+        </p:nvSpPr>
+        <p:spPr>
+          <a:xfrm xmlns:a="http://schemas.openxmlformats.org/drawingml/2006/main">
+            <a:off x="1771650" y="4667250"/>
+            <a:ext cx="2266950" cy="247650"/>
+          </a:xfrm>
+          <a:prstGeom xmlns:a="http://schemas.openxmlformats.org/drawingml/2006/main" prst="rect">
+            <a:avLst/>
+          </a:prstGeom>
+          <a:noFill xmlns:a="http://schemas.openxmlformats.org/drawingml/2006/main"/>
+          <a:ln xmlns:a="http://schemas.openxmlformats.org/drawingml/2006/main" w="0">
+            <a:noFill/>
+            <a:prstDash val="solid"/>
+          </a:ln>
+        </p:spPr>
+        <p:txBody>
+          <a:bodyPr xmlns:a="http://schemas.openxmlformats.org/drawingml/2006/main" anchor="t"/>
+          <a:lstStyle xmlns:a="http://schemas.openxmlformats.org/drawingml/2006/main"/>
+          <a:p xmlns:a="http://schemas.openxmlformats.org/drawingml/2006/main">
+            <a:pPr algn="l">
+              <a:defRPr sz="1350" b="1">
+                <a:solidFill>
+                  <a:srgbClr val="000000"/>
+                </a:solidFill>
+              </a:defRPr>
+            </a:pPr>
+            <a:r>
+              <a:rPr sz="1350" b="1">
+                <a:solidFill>
+                  <a:srgbClr val="000000"/>
+                </a:solidFill>
+              </a:rPr>
+              <a:t>Beat controls</a:t>
+            </a:r>
+          </a:p>
+        </p:txBody>
+      </p:sp>
+      <p:sp>
+        <p:nvSpPr>
+          <p:cNvPr id="24" name="">
+            <a:extLst xmlns:a="http://schemas.openxmlformats.org/drawingml/2006/main">
+              <a:ext uri="{FF2B5EF4-FFF2-40B4-BE49-F238E27FC236}">
+                <a16:creationId xmlns:a16="http://schemas.microsoft.com/office/drawing/2014/main" id="{FF5BDC80-BC92-4BBA-9CAE-76633812FE73}"/>
+              </a:ext>
+            </a:extLst>
+          </p:cNvPr>
+          <p:cNvSpPr>
+            <a:spLocks xmlns:a="http://schemas.openxmlformats.org/drawingml/2006/main" noGrp="1"/>
+          </p:cNvSpPr>
+          <p:nvPr/>
+        </p:nvSpPr>
+        <p:spPr>
+          <a:xfrm xmlns:a="http://schemas.openxmlformats.org/drawingml/2006/main">
+            <a:off x="4095750" y="4676775"/>
+            <a:ext cx="2667000" cy="228600"/>
+          </a:xfrm>
+          <a:prstGeom xmlns:a="http://schemas.openxmlformats.org/drawingml/2006/main" prst="rect">
+            <a:avLst/>
+          </a:prstGeom>
+          <a:noFill xmlns:a="http://schemas.openxmlformats.org/drawingml/2006/main"/>
+          <a:ln xmlns:a="http://schemas.openxmlformats.org/drawingml/2006/main" w="0">
+            <a:noFill/>
+            <a:prstDash val="solid"/>
+          </a:ln>
+        </p:spPr>
+        <p:txBody>
+          <a:bodyPr xmlns:a="http://schemas.openxmlformats.org/drawingml/2006/main" anchor="t"/>
+          <a:lstStyle xmlns:a="http://schemas.openxmlformats.org/drawingml/2006/main"/>
+          <a:p xmlns:a="http://schemas.openxmlformats.org/drawingml/2006/main">
+            <a:pPr algn="l">
+              <a:defRPr sz="1200" b="0">
+                <a:solidFill>
+                  <a:srgbClr val="667386"/>
+                </a:solidFill>
+              </a:defRPr>
+            </a:pPr>
+            <a:r>
+              <a:rPr sz="1200" b="0">
+                <a:solidFill>
+                  <a:srgbClr val="667386"/>
+                </a:solidFill>
+              </a:rPr>
+              <a:t>strongest control +0.062%</a:t>
+            </a:r>
+          </a:p>
+        </p:txBody>
+      </p:sp>
+      <p:sp>
+        <p:nvSpPr>
+          <p:cNvPr id="25" name="">
+            <a:extLst xmlns:a="http://schemas.openxmlformats.org/drawingml/2006/main">
+              <a:ext uri="{FF2B5EF4-FFF2-40B4-BE49-F238E27FC236}">
+                <a16:creationId xmlns:a16="http://schemas.microsoft.com/office/drawing/2014/main" id="{8299FBE1-EC8E-4C00-BD41-DF22345CAA30}"/>
+              </a:ext>
+            </a:extLst>
+          </p:cNvPr>
+          <p:cNvSpPr>
+            <a:spLocks xmlns:a="http://schemas.openxmlformats.org/drawingml/2006/main" noGrp="1"/>
+          </p:cNvSpPr>
+          <p:nvPr/>
+        </p:nvSpPr>
+        <p:spPr>
+          <a:xfrm xmlns:a="http://schemas.openxmlformats.org/drawingml/2006/main">
+            <a:off x="685800" y="5086350"/>
+            <a:ext cx="876300" cy="304800"/>
+          </a:xfrm>
+          <a:prstGeom xmlns:a="http://schemas.openxmlformats.org/drawingml/2006/main" prst="rect">
+            <a:avLst/>
+          </a:prstGeom>
+          <a:solidFill xmlns:a="http://schemas.openxmlformats.org/drawingml/2006/main">
+            <a:srgbClr val="F6E5E1"/>
+          </a:solidFill>
+          <a:ln xmlns:a="http://schemas.openxmlformats.org/drawingml/2006/main" w="0">
+            <a:solidFill>
+              <a:srgbClr val="F6E5E1"/>
+            </a:solidFill>
+            <a:prstDash val="solid"/>
+          </a:ln>
+        </p:spPr>
+      </p:sp>
+      <p:sp>
+        <p:nvSpPr>
+          <p:cNvPr id="26" name="">
+            <a:extLst xmlns:a="http://schemas.openxmlformats.org/drawingml/2006/main">
+              <a:ext uri="{FF2B5EF4-FFF2-40B4-BE49-F238E27FC236}">
+                <a16:creationId xmlns:a16="http://schemas.microsoft.com/office/drawing/2014/main" id="{B14E0A55-6DC6-4FD1-8053-6CE00535D302}"/>
+              </a:ext>
+            </a:extLst>
+          </p:cNvPr>
+          <p:cNvSpPr>
+            <a:spLocks xmlns:a="http://schemas.openxmlformats.org/drawingml/2006/main" noGrp="1"/>
+          </p:cNvSpPr>
+          <p:nvPr/>
+        </p:nvSpPr>
+        <p:spPr>
+          <a:xfrm xmlns:a="http://schemas.openxmlformats.org/drawingml/2006/main">
+            <a:off x="742950" y="5143500"/>
+            <a:ext cx="762000" cy="190500"/>
+          </a:xfrm>
+          <a:prstGeom xmlns:a="http://schemas.openxmlformats.org/drawingml/2006/main" prst="rect">
+            <a:avLst/>
+          </a:prstGeom>
+          <a:noFill xmlns:a="http://schemas.openxmlformats.org/drawingml/2006/main"/>
+          <a:ln xmlns:a="http://schemas.openxmlformats.org/drawingml/2006/main" w="0">
+            <a:noFill/>
+            <a:prstDash val="solid"/>
+          </a:ln>
+        </p:spPr>
+        <p:txBody>
+          <a:bodyPr xmlns:a="http://schemas.openxmlformats.org/drawingml/2006/main" anchor="t"/>
+          <a:lstStyle xmlns:a="http://schemas.openxmlformats.org/drawingml/2006/main"/>
+          <a:p xmlns:a="http://schemas.openxmlformats.org/drawingml/2006/main">
+            <a:pPr algn="ctr">
+              <a:defRPr sz="1050" b="1">
+                <a:solidFill>
+                  <a:srgbClr val="B44738"/>
+                </a:solidFill>
+              </a:defRPr>
+            </a:pPr>
+            <a:r>
+              <a:rPr sz="1050" b="1">
+                <a:solidFill>
+                  <a:srgbClr val="B44738"/>
+                </a:solidFill>
+              </a:rPr>
+              <a:t>FAIL</a:t>
+            </a:r>
+          </a:p>
+        </p:txBody>
+      </p:sp>
+      <p:sp>
+        <p:nvSpPr>
+          <p:cNvPr id="27" name="">
+            <a:extLst xmlns:a="http://schemas.openxmlformats.org/drawingml/2006/main">
+              <a:ext uri="{FF2B5EF4-FFF2-40B4-BE49-F238E27FC236}">
+                <a16:creationId xmlns:a16="http://schemas.microsoft.com/office/drawing/2014/main" id="{0B473FB2-D402-44E6-9F8B-B928C7796FED}"/>
+              </a:ext>
+            </a:extLst>
+          </p:cNvPr>
+          <p:cNvSpPr>
+            <a:spLocks xmlns:a="http://schemas.openxmlformats.org/drawingml/2006/main" noGrp="1"/>
+          </p:cNvSpPr>
+          <p:nvPr/>
+        </p:nvSpPr>
+        <p:spPr>
+          <a:xfrm xmlns:a="http://schemas.openxmlformats.org/drawingml/2006/main">
+            <a:off x="1771650" y="5124450"/>
+            <a:ext cx="2266950" cy="247650"/>
+          </a:xfrm>
+          <a:prstGeom xmlns:a="http://schemas.openxmlformats.org/drawingml/2006/main" prst="rect">
+            <a:avLst/>
+          </a:prstGeom>
+          <a:noFill xmlns:a="http://schemas.openxmlformats.org/drawingml/2006/main"/>
+          <a:ln xmlns:a="http://schemas.openxmlformats.org/drawingml/2006/main" w="0">
+            <a:noFill/>
+            <a:prstDash val="solid"/>
+          </a:ln>
+        </p:spPr>
+        <p:txBody>
+          <a:bodyPr xmlns:a="http://schemas.openxmlformats.org/drawingml/2006/main" anchor="t"/>
+          <a:lstStyle xmlns:a="http://schemas.openxmlformats.org/drawingml/2006/main"/>
+          <a:p xmlns:a="http://schemas.openxmlformats.org/drawingml/2006/main">
+            <a:pPr algn="l">
+              <a:defRPr sz="1350" b="1">
+                <a:solidFill>
+                  <a:srgbClr val="000000"/>
+                </a:solidFill>
+              </a:defRPr>
+            </a:pPr>
+            <a:r>
+              <a:rPr sz="1350" b="1">
+                <a:solidFill>
+                  <a:srgbClr val="000000"/>
+                </a:solidFill>
+              </a:rPr>
+              <a:t>Calendar breadth</a:t>
+            </a:r>
+          </a:p>
+        </p:txBody>
+      </p:sp>
+      <p:sp>
+        <p:nvSpPr>
+          <p:cNvPr id="28" name="">
+            <a:extLst xmlns:a="http://schemas.openxmlformats.org/drawingml/2006/main">
+              <a:ext uri="{FF2B5EF4-FFF2-40B4-BE49-F238E27FC236}">
+                <a16:creationId xmlns:a16="http://schemas.microsoft.com/office/drawing/2014/main" id="{95E63275-94B6-4C2A-A20C-56EF8B1E9EA9}"/>
+              </a:ext>
+            </a:extLst>
+          </p:cNvPr>
+          <p:cNvSpPr>
+            <a:spLocks xmlns:a="http://schemas.openxmlformats.org/drawingml/2006/main" noGrp="1"/>
+          </p:cNvSpPr>
+          <p:nvPr/>
+        </p:nvSpPr>
+        <p:spPr>
+          <a:xfrm xmlns:a="http://schemas.openxmlformats.org/drawingml/2006/main">
+            <a:off x="4095750" y="5133975"/>
+            <a:ext cx="2667000" cy="228600"/>
+          </a:xfrm>
+          <a:prstGeom xmlns:a="http://schemas.openxmlformats.org/drawingml/2006/main" prst="rect">
+            <a:avLst/>
+          </a:prstGeom>
+          <a:noFill xmlns:a="http://schemas.openxmlformats.org/drawingml/2006/main"/>
+          <a:ln xmlns:a="http://schemas.openxmlformats.org/drawingml/2006/main" w="0">
+            <a:noFill/>
+            <a:prstDash val="solid"/>
+          </a:ln>
+        </p:spPr>
+        <p:txBody>
+          <a:bodyPr xmlns:a="http://schemas.openxmlformats.org/drawingml/2006/main" anchor="t"/>
+          <a:lstStyle xmlns:a="http://schemas.openxmlformats.org/drawingml/2006/main"/>
+          <a:p xmlns:a="http://schemas.openxmlformats.org/drawingml/2006/main">
+            <a:pPr algn="l">
+              <a:defRPr sz="1200" b="0">
+                <a:solidFill>
+                  <a:srgbClr val="667386"/>
+                </a:solidFill>
+              </a:defRPr>
+            </a:pPr>
+            <a:r>
+              <a:rPr sz="1200" b="0">
+                <a:solidFill>
+                  <a:srgbClr val="667386"/>
+                </a:solidFill>
+              </a:rPr>
+              <a:t>2 positive years; required 3</a:t>
+            </a:r>
+          </a:p>
+        </p:txBody>
+      </p:sp>
+      <p:sp>
+        <p:nvSpPr>
+          <p:cNvPr id="29" name="">
+            <a:extLst xmlns:a="http://schemas.openxmlformats.org/drawingml/2006/main">
+              <a:ext uri="{FF2B5EF4-FFF2-40B4-BE49-F238E27FC236}">
+                <a16:creationId xmlns:a16="http://schemas.microsoft.com/office/drawing/2014/main" id="{405CCF5F-0643-42D8-8E3B-F6FF44DEEAA1}"/>
+              </a:ext>
+            </a:extLst>
+          </p:cNvPr>
+          <p:cNvSpPr>
+            <a:spLocks xmlns:a="http://schemas.openxmlformats.org/drawingml/2006/main" noGrp="1"/>
+          </p:cNvSpPr>
+          <p:nvPr/>
+        </p:nvSpPr>
+        <p:spPr>
+          <a:xfrm xmlns:a="http://schemas.openxmlformats.org/drawingml/2006/main">
+            <a:off x="7162800" y="2781300"/>
+            <a:ext cx="4476750" cy="3181350"/>
+          </a:xfrm>
+          <a:prstGeom xmlns:a="http://schemas.openxmlformats.org/drawingml/2006/main" prst="rect">
+            <a:avLst/>
+          </a:prstGeom>
+          <a:solidFill xmlns:a="http://schemas.openxmlformats.org/drawingml/2006/main">
+            <a:srgbClr val="F3F5F7"/>
+          </a:solidFill>
+          <a:ln xmlns:a="http://schemas.openxmlformats.org/drawingml/2006/main" w="0">
+            <a:solidFill>
+              <a:srgbClr val="F3F5F7"/>
+            </a:solidFill>
+            <a:prstDash val="solid"/>
+          </a:ln>
+        </p:spPr>
+      </p:sp>
+      <p:sp>
+        <p:nvSpPr>
+          <p:cNvPr id="30" name="">
+            <a:extLst xmlns:a="http://schemas.openxmlformats.org/drawingml/2006/main">
+              <a:ext uri="{FF2B5EF4-FFF2-40B4-BE49-F238E27FC236}">
+                <a16:creationId xmlns:a16="http://schemas.microsoft.com/office/drawing/2014/main" id="{00BE8A8A-8765-405C-9FEE-9D1E05CD008E}"/>
+              </a:ext>
+            </a:extLst>
+          </p:cNvPr>
+          <p:cNvSpPr>
+            <a:spLocks xmlns:a="http://schemas.openxmlformats.org/drawingml/2006/main" noGrp="1"/>
+          </p:cNvSpPr>
+          <p:nvPr/>
+        </p:nvSpPr>
+        <p:spPr>
+          <a:xfrm xmlns:a="http://schemas.openxmlformats.org/drawingml/2006/main">
+            <a:off x="7429500" y="3048000"/>
+            <a:ext cx="3943350" cy="323850"/>
+          </a:xfrm>
+          <a:prstGeom xmlns:a="http://schemas.openxmlformats.org/drawingml/2006/main" prst="rect">
+            <a:avLst/>
+          </a:prstGeom>
+          <a:noFill xmlns:a="http://schemas.openxmlformats.org/drawingml/2006/main"/>
+          <a:ln xmlns:a="http://schemas.openxmlformats.org/drawingml/2006/main" w="0">
+            <a:noFill/>
+            <a:prstDash val="solid"/>
+          </a:ln>
+        </p:spPr>
+        <p:txBody>
+          <a:bodyPr xmlns:a="http://schemas.openxmlformats.org/drawingml/2006/main" anchor="t"/>
+          <a:lstStyle xmlns:a="http://schemas.openxmlformats.org/drawingml/2006/main"/>
+          <a:p xmlns:a="http://schemas.openxmlformats.org/drawingml/2006/main">
+            <a:pPr algn="l">
+              <a:defRPr sz="2025" b="1">
+                <a:solidFill>
+                  <a:srgbClr val="000000"/>
+                </a:solidFill>
+              </a:defRPr>
+            </a:pPr>
+            <a:r>
+              <a:rPr sz="2025" b="1">
+                <a:solidFill>
+                  <a:srgbClr val="000000"/>
+                </a:solidFill>
+              </a:rPr>
+              <a:t>What survives the STOP</a:t>
+            </a:r>
+          </a:p>
+        </p:txBody>
+      </p:sp>
+      <p:sp>
+        <p:nvSpPr>
+          <p:cNvPr id="31" name="">
+            <a:extLst xmlns:a="http://schemas.openxmlformats.org/drawingml/2006/main">
+              <a:ext uri="{FF2B5EF4-FFF2-40B4-BE49-F238E27FC236}">
+                <a16:creationId xmlns:a16="http://schemas.microsoft.com/office/drawing/2014/main" id="{2C4C5BB4-CB36-4D42-A053-CAB40FE6E373}"/>
+              </a:ext>
+            </a:extLst>
+          </p:cNvPr>
+          <p:cNvSpPr>
+            <a:spLocks xmlns:a="http://schemas.openxmlformats.org/drawingml/2006/main" noGrp="1"/>
+          </p:cNvSpPr>
+          <p:nvPr/>
+        </p:nvSpPr>
+        <p:spPr>
+          <a:xfrm xmlns:a="http://schemas.openxmlformats.org/drawingml/2006/main">
+            <a:off x="7448550" y="3724275"/>
+            <a:ext cx="85725" cy="85725"/>
+          </a:xfrm>
+          <a:prstGeom xmlns:a="http://schemas.openxmlformats.org/drawingml/2006/main" prst="rect">
+            <a:avLst/>
+          </a:prstGeom>
+          <a:solidFill xmlns:a="http://schemas.openxmlformats.org/drawingml/2006/main">
+            <a:srgbClr val="14866D"/>
+          </a:solidFill>
+          <a:ln xmlns:a="http://schemas.openxmlformats.org/drawingml/2006/main" w="0">
+            <a:solidFill>
+              <a:srgbClr val="14866D"/>
+            </a:solidFill>
+            <a:prstDash val="solid"/>
+          </a:ln>
+        </p:spPr>
+      </p:sp>
+      <p:sp>
+        <p:nvSpPr>
+          <p:cNvPr id="32" name="">
+            <a:extLst xmlns:a="http://schemas.openxmlformats.org/drawingml/2006/main">
+              <a:ext uri="{FF2B5EF4-FFF2-40B4-BE49-F238E27FC236}">
+                <a16:creationId xmlns:a16="http://schemas.microsoft.com/office/drawing/2014/main" id="{149F8270-60AE-4B6A-A0E5-243E48ABEE50}"/>
+              </a:ext>
+            </a:extLst>
+          </p:cNvPr>
+          <p:cNvSpPr>
+            <a:spLocks xmlns:a="http://schemas.openxmlformats.org/drawingml/2006/main" noGrp="1"/>
+          </p:cNvSpPr>
+          <p:nvPr/>
+        </p:nvSpPr>
+        <p:spPr>
+          <a:xfrm xmlns:a="http://schemas.openxmlformats.org/drawingml/2006/main">
+            <a:off x="7677150" y="3638550"/>
+            <a:ext cx="3638550" cy="685800"/>
+          </a:xfrm>
+          <a:prstGeom xmlns:a="http://schemas.openxmlformats.org/drawingml/2006/main" prst="rect">
+            <a:avLst/>
+          </a:prstGeom>
+          <a:noFill xmlns:a="http://schemas.openxmlformats.org/drawingml/2006/main"/>
+          <a:ln xmlns:a="http://schemas.openxmlformats.org/drawingml/2006/main" w="0">
+            <a:noFill/>
+            <a:prstDash val="solid"/>
+          </a:ln>
+        </p:spPr>
+        <p:txBody>
+          <a:bodyPr xmlns:a="http://schemas.openxmlformats.org/drawingml/2006/main" anchor="t"/>
+          <a:lstStyle xmlns:a="http://schemas.openxmlformats.org/drawingml/2006/main"/>
+          <a:p xmlns:a="http://schemas.openxmlformats.org/drawingml/2006/main">
+            <a:pPr algn="l">
+              <a:defRPr sz="1425" b="0">
+                <a:solidFill>
+                  <a:srgbClr val="24364B"/>
+                </a:solidFill>
+              </a:defRPr>
+            </a:pPr>
+            <a:r>
+              <a:rPr sz="1425" b="0">
+                <a:solidFill>
+                  <a:srgbClr val="24364B"/>
+                </a:solidFill>
+              </a:rPr>
+              <a:t>A strong opening behaves differently after calm versus HIGH-ATR prior days.</a:t>
+            </a:r>
+          </a:p>
+        </p:txBody>
+      </p:sp>
+      <p:sp>
+        <p:nvSpPr>
+          <p:cNvPr id="33" name="">
+            <a:extLst xmlns:a="http://schemas.openxmlformats.org/drawingml/2006/main">
+              <a:ext uri="{FF2B5EF4-FFF2-40B4-BE49-F238E27FC236}">
+                <a16:creationId xmlns:a16="http://schemas.microsoft.com/office/drawing/2014/main" id="{FF2F024A-B1BB-4021-AACF-603C420D7FB3}"/>
+              </a:ext>
+            </a:extLst>
+          </p:cNvPr>
+          <p:cNvSpPr>
+            <a:spLocks xmlns:a="http://schemas.openxmlformats.org/drawingml/2006/main" noGrp="1"/>
+          </p:cNvSpPr>
+          <p:nvPr/>
+        </p:nvSpPr>
+        <p:spPr>
+          <a:xfrm xmlns:a="http://schemas.openxmlformats.org/drawingml/2006/main">
+            <a:off x="7448550" y="4543425"/>
+            <a:ext cx="85725" cy="85725"/>
+          </a:xfrm>
+          <a:prstGeom xmlns:a="http://schemas.openxmlformats.org/drawingml/2006/main" prst="rect">
+            <a:avLst/>
+          </a:prstGeom>
+          <a:solidFill xmlns:a="http://schemas.openxmlformats.org/drawingml/2006/main">
+            <a:srgbClr val="3D8DFF"/>
+          </a:solidFill>
+          <a:ln xmlns:a="http://schemas.openxmlformats.org/drawingml/2006/main" w="0">
+            <a:solidFill>
+              <a:srgbClr val="3D8DFF"/>
+            </a:solidFill>
+            <a:prstDash val="solid"/>
+          </a:ln>
+        </p:spPr>
+      </p:sp>
+      <p:sp>
+        <p:nvSpPr>
+          <p:cNvPr id="34" name="">
+            <a:extLst xmlns:a="http://schemas.openxmlformats.org/drawingml/2006/main">
+              <a:ext uri="{FF2B5EF4-FFF2-40B4-BE49-F238E27FC236}">
+                <a16:creationId xmlns:a16="http://schemas.microsoft.com/office/drawing/2014/main" id="{239952D5-62D8-4BA5-8783-9DD609AEFCF9}"/>
+              </a:ext>
+            </a:extLst>
+          </p:cNvPr>
+          <p:cNvSpPr>
+            <a:spLocks xmlns:a="http://schemas.openxmlformats.org/drawingml/2006/main" noGrp="1"/>
+          </p:cNvSpPr>
+          <p:nvPr/>
+        </p:nvSpPr>
+        <p:spPr>
+          <a:xfrm xmlns:a="http://schemas.openxmlformats.org/drawingml/2006/main">
+            <a:off x="7677150" y="4457700"/>
+            <a:ext cx="3638550" cy="742950"/>
+          </a:xfrm>
+          <a:prstGeom xmlns:a="http://schemas.openxmlformats.org/drawingml/2006/main" prst="rect">
+            <a:avLst/>
+          </a:prstGeom>
+          <a:noFill xmlns:a="http://schemas.openxmlformats.org/drawingml/2006/main"/>
+          <a:ln xmlns:a="http://schemas.openxmlformats.org/drawingml/2006/main" w="0">
+            <a:noFill/>
+            <a:prstDash val="solid"/>
+          </a:ln>
+        </p:spPr>
+        <p:txBody>
+          <a:bodyPr xmlns:a="http://schemas.openxmlformats.org/drawingml/2006/main" anchor="t"/>
+          <a:lstStyle xmlns:a="http://schemas.openxmlformats.org/drawingml/2006/main"/>
+          <a:p xmlns:a="http://schemas.openxmlformats.org/drawingml/2006/main">
+            <a:pPr algn="l">
+              <a:defRPr sz="1425" b="0">
+                <a:solidFill>
+                  <a:srgbClr val="24364B"/>
+                </a:solidFill>
+              </a:defRPr>
+            </a:pPr>
+            <a:r>
+              <a:rPr sz="1425" b="0">
+                <a:solidFill>
+                  <a:srgbClr val="24364B"/>
+                </a:solidFill>
+              </a:rPr>
+              <a:t>The joint filter beats both ingredients, the opposite state, and drift inside TRAIN.</a:t>
+            </a:r>
+          </a:p>
+        </p:txBody>
+      </p:sp>
+      <p:sp>
+        <p:nvSpPr>
+          <p:cNvPr id="35" name="">
+            <a:extLst xmlns:a="http://schemas.openxmlformats.org/drawingml/2006/main">
+              <a:ext uri="{FF2B5EF4-FFF2-40B4-BE49-F238E27FC236}">
+                <a16:creationId xmlns:a16="http://schemas.microsoft.com/office/drawing/2014/main" id="{36D1B13A-8FAE-4B5A-A179-2575754B77A8}"/>
+              </a:ext>
+            </a:extLst>
+          </p:cNvPr>
+          <p:cNvSpPr>
+            <a:spLocks xmlns:a="http://schemas.openxmlformats.org/drawingml/2006/main" noGrp="1"/>
+          </p:cNvSpPr>
+          <p:nvPr/>
+        </p:nvSpPr>
+        <p:spPr>
+          <a:xfrm xmlns:a="http://schemas.openxmlformats.org/drawingml/2006/main">
+            <a:off x="7429500" y="5314950"/>
+            <a:ext cx="3943350" cy="590550"/>
+          </a:xfrm>
+          <a:prstGeom xmlns:a="http://schemas.openxmlformats.org/drawingml/2006/main" prst="rect">
+            <a:avLst/>
+          </a:prstGeom>
+          <a:noFill xmlns:a="http://schemas.openxmlformats.org/drawingml/2006/main"/>
+          <a:ln xmlns:a="http://schemas.openxmlformats.org/drawingml/2006/main" w="0">
+            <a:noFill/>
+            <a:prstDash val="solid"/>
+          </a:ln>
+        </p:spPr>
+        <p:txBody>
+          <a:bodyPr xmlns:a="http://schemas.openxmlformats.org/drawingml/2006/main" anchor="t"/>
+          <a:lstStyle xmlns:a="http://schemas.openxmlformats.org/drawingml/2006/main"/>
+          <a:p xmlns:a="http://schemas.openxmlformats.org/drawingml/2006/main">
+            <a:pPr algn="ctr">
+              <a:defRPr sz="1275" b="1">
+                <a:solidFill>
+                  <a:srgbClr val="B44738"/>
+                </a:solidFill>
+              </a:defRPr>
+            </a:pPr>
+            <a:r>
+              <a:rPr sz="1275" b="1">
+                <a:solidFill>
+                  <a:srgbClr val="B44738"/>
+                </a:solidFill>
+              </a:rPr>
+              <a:t>The exact rule cannot advance because its gains are concentrated in 2023. No threshold, state, clock, or cost rescue is allowed from this packet.</a:t>
+            </a:r>
+          </a:p>
+        </p:txBody>
+      </p:sp>
+    </p:spTree>
+    <p:extLst>
+      <p:ext uri="{BB962C8B-B14F-4D97-AF65-F5344CB8AC3E}">
+        <p14:creationId xmlns:p14="http://schemas.microsoft.com/office/powerpoint/2010/main" val="1383315151"/>
       </p:ext>
     </p:extLst>
   </p:cSld>
@@ -24273,7 +28671,7 @@
           <p:cNvPr id="6" name="">
             <a:extLst xmlns:a="http://schemas.openxmlformats.org/drawingml/2006/main">
               <a:ext uri="{FF2B5EF4-FFF2-40B4-BE49-F238E27FC236}">
-                <a16:creationId xmlns:a16="http://schemas.microsoft.com/office/drawing/2014/main" id="{790EBAEF-3B0E-4511-9350-5D5D1008A1DE}"/>
+                <a16:creationId xmlns:a16="http://schemas.microsoft.com/office/drawing/2014/main" id="{9BF8B590-CA64-4115-94B9-91830033820C}"/>
               </a:ext>
             </a:extLst>
           </p:cNvPr>
@@ -24323,7 +28721,7 @@
           <p:cNvPr id="2" name="">
             <a:extLst xmlns:a="http://schemas.openxmlformats.org/drawingml/2006/main">
               <a:ext uri="{FF2B5EF4-FFF2-40B4-BE49-F238E27FC236}">
-                <a16:creationId xmlns:a16="http://schemas.microsoft.com/office/drawing/2014/main" id="{FBAF2345-DBBD-4E0A-88BC-4CC77D955702}"/>
+                <a16:creationId xmlns:a16="http://schemas.microsoft.com/office/drawing/2014/main" id="{59F496E3-8167-4D0E-AB4B-A127DEC962B0}"/>
               </a:ext>
             </a:extLst>
           </p:cNvPr>
@@ -24390,7 +28788,7 @@
           <p:cNvPr id="3" name="">
             <a:extLst xmlns:a="http://schemas.openxmlformats.org/drawingml/2006/main">
               <a:ext uri="{FF2B5EF4-FFF2-40B4-BE49-F238E27FC236}">
-                <a16:creationId xmlns:a16="http://schemas.microsoft.com/office/drawing/2014/main" id="{0088B8F3-91E7-433F-9AF7-4C72B1958E9C}"/>
+                <a16:creationId xmlns:a16="http://schemas.microsoft.com/office/drawing/2014/main" id="{973172FA-F948-46A1-994A-9E4AFDE56560}"/>
               </a:ext>
             </a:extLst>
           </p:cNvPr>
@@ -24440,7 +28838,7 @@
           <p:cNvPr id="4" name="">
             <a:extLst xmlns:a="http://schemas.openxmlformats.org/drawingml/2006/main">
               <a:ext uri="{FF2B5EF4-FFF2-40B4-BE49-F238E27FC236}">
-                <a16:creationId xmlns:a16="http://schemas.microsoft.com/office/drawing/2014/main" id="{76C881D2-4FD8-4D51-BA70-ED62C1F205D3}"/>
+                <a16:creationId xmlns:a16="http://schemas.microsoft.com/office/drawing/2014/main" id="{AAEC88EB-0E84-4E52-A49A-BF8BC1F06BD0}"/>
               </a:ext>
             </a:extLst>
           </p:cNvPr>
@@ -24490,7 +28888,7 @@
           <p:cNvPr id="5" name="">
             <a:extLst xmlns:a="http://schemas.openxmlformats.org/drawingml/2006/main">
               <a:ext uri="{FF2B5EF4-FFF2-40B4-BE49-F238E27FC236}">
-                <a16:creationId xmlns:a16="http://schemas.microsoft.com/office/drawing/2014/main" id="{E290F17B-EA85-47D3-A616-5FFF18672A06}"/>
+                <a16:creationId xmlns:a16="http://schemas.microsoft.com/office/drawing/2014/main" id="{846312E5-306A-4AD2-86FD-A26ED1C86EB3}"/>
               </a:ext>
             </a:extLst>
           </p:cNvPr>
@@ -24538,7 +28936,7 @@
     </p:spTree>
     <p:extLst>
       <p:ext uri="{BB962C8B-B14F-4D97-AF65-F5344CB8AC3E}">
-        <p14:creationId xmlns:p14="http://schemas.microsoft.com/office/powerpoint/2010/main" val="1050842076"/>
+        <p14:creationId xmlns:p14="http://schemas.microsoft.com/office/powerpoint/2010/main" val="1811518110"/>
       </p:ext>
     </p:extLst>
   </p:cSld>
@@ -24569,7 +28967,7 @@
           <p:cNvPr id="17" name="">
             <a:extLst xmlns:a="http://schemas.openxmlformats.org/drawingml/2006/main">
               <a:ext uri="{FF2B5EF4-FFF2-40B4-BE49-F238E27FC236}">
-                <a16:creationId xmlns:a16="http://schemas.microsoft.com/office/drawing/2014/main" id="{29145604-B01D-4AC5-B9B5-02614D18EB63}"/>
+                <a16:creationId xmlns:a16="http://schemas.microsoft.com/office/drawing/2014/main" id="{F18F7420-C70C-4C3F-9C60-847D51DD7918}"/>
               </a:ext>
             </a:extLst>
           </p:cNvPr>
@@ -24619,7 +29017,7 @@
           <p:cNvPr id="2" name="">
             <a:extLst xmlns:a="http://schemas.openxmlformats.org/drawingml/2006/main">
               <a:ext uri="{FF2B5EF4-FFF2-40B4-BE49-F238E27FC236}">
-                <a16:creationId xmlns:a16="http://schemas.microsoft.com/office/drawing/2014/main" id="{0316A912-4F4A-47DF-8E56-7AF8C3F74E3E}"/>
+                <a16:creationId xmlns:a16="http://schemas.microsoft.com/office/drawing/2014/main" id="{C2F16EF9-219F-4982-8461-A03E16BAC32D}"/>
               </a:ext>
             </a:extLst>
           </p:cNvPr>
@@ -24669,7 +29067,7 @@
           <p:cNvPr id="3" name="">
             <a:extLst xmlns:a="http://schemas.openxmlformats.org/drawingml/2006/main">
               <a:ext uri="{FF2B5EF4-FFF2-40B4-BE49-F238E27FC236}">
-                <a16:creationId xmlns:a16="http://schemas.microsoft.com/office/drawing/2014/main" id="{44351605-53DD-4876-9604-8E945D130FED}"/>
+                <a16:creationId xmlns:a16="http://schemas.microsoft.com/office/drawing/2014/main" id="{F1799784-9D63-4F69-96D2-D1AE08D16A6E}"/>
               </a:ext>
             </a:extLst>
           </p:cNvPr>
@@ -24702,7 +29100,7 @@
           <p:cNvPr id="4" name="">
             <a:extLst xmlns:a="http://schemas.openxmlformats.org/drawingml/2006/main">
               <a:ext uri="{FF2B5EF4-FFF2-40B4-BE49-F238E27FC236}">
-                <a16:creationId xmlns:a16="http://schemas.microsoft.com/office/drawing/2014/main" id="{799A5D1C-DA80-4724-92BC-36C8A83CF98C}"/>
+                <a16:creationId xmlns:a16="http://schemas.microsoft.com/office/drawing/2014/main" id="{76AAAF4D-D017-457A-BF83-912C3AB98D21}"/>
               </a:ext>
             </a:extLst>
           </p:cNvPr>
@@ -24752,7 +29150,7 @@
           <p:cNvPr id="5" name="">
             <a:extLst xmlns:a="http://schemas.openxmlformats.org/drawingml/2006/main">
               <a:ext uri="{FF2B5EF4-FFF2-40B4-BE49-F238E27FC236}">
-                <a16:creationId xmlns:a16="http://schemas.microsoft.com/office/drawing/2014/main" id="{74EEF5D4-1D99-421C-9BB7-EAD72596B3BA}"/>
+                <a16:creationId xmlns:a16="http://schemas.microsoft.com/office/drawing/2014/main" id="{CE10BB38-3E56-4421-97D6-787D3DE7BDA3}"/>
               </a:ext>
             </a:extLst>
           </p:cNvPr>
@@ -24806,7 +29204,7 @@
           <p:nvPr/>
         </p:nvPicPr>
         <p:blipFill>
-          <a:blip xmlns:r="http://schemas.openxmlformats.org/officeDocument/2006/relationships" xmlns:a="http://schemas.openxmlformats.org/drawingml/2006/main" r:embed="Rf1b69fb9a750414d"/>
+          <a:blip xmlns:r="http://schemas.openxmlformats.org/officeDocument/2006/relationships" xmlns:a="http://schemas.openxmlformats.org/drawingml/2006/main" r:embed="Rb5cdb61652b74926"/>
           <a:stretch xmlns:a="http://schemas.openxmlformats.org/drawingml/2006/main"/>
         </p:blipFill>
         <p:spPr>
@@ -24824,7 +29222,7 @@
           <p:cNvPr id="7" name="">
             <a:extLst xmlns:a="http://schemas.openxmlformats.org/drawingml/2006/main">
               <a:ext uri="{FF2B5EF4-FFF2-40B4-BE49-F238E27FC236}">
-                <a16:creationId xmlns:a16="http://schemas.microsoft.com/office/drawing/2014/main" id="{1F5ABB59-087F-4A5E-996B-B9AE7DF0B57A}"/>
+                <a16:creationId xmlns:a16="http://schemas.microsoft.com/office/drawing/2014/main" id="{19EECD56-3EBB-4333-AF1E-9376F553CE01}"/>
               </a:ext>
             </a:extLst>
           </p:cNvPr>
@@ -24857,7 +29255,7 @@
           <p:cNvPr id="8" name="">
             <a:extLst xmlns:a="http://schemas.openxmlformats.org/drawingml/2006/main">
               <a:ext uri="{FF2B5EF4-FFF2-40B4-BE49-F238E27FC236}">
-                <a16:creationId xmlns:a16="http://schemas.microsoft.com/office/drawing/2014/main" id="{EF876495-3340-4BAA-B31A-85C735F89077}"/>
+                <a16:creationId xmlns:a16="http://schemas.microsoft.com/office/drawing/2014/main" id="{939FDBB1-7AEB-4B55-A45D-E94992A3232F}"/>
               </a:ext>
             </a:extLst>
           </p:cNvPr>
@@ -24907,7 +29305,7 @@
           <p:cNvPr id="9" name="">
             <a:extLst xmlns:a="http://schemas.openxmlformats.org/drawingml/2006/main">
               <a:ext uri="{FF2B5EF4-FFF2-40B4-BE49-F238E27FC236}">
-                <a16:creationId xmlns:a16="http://schemas.microsoft.com/office/drawing/2014/main" id="{3E997D6E-BD90-4F53-AC1D-8D1B530F2BF7}"/>
+                <a16:creationId xmlns:a16="http://schemas.microsoft.com/office/drawing/2014/main" id="{6EE55548-92C8-4481-8FF6-8A83F054749D}"/>
               </a:ext>
             </a:extLst>
           </p:cNvPr>
@@ -24957,7 +29355,7 @@
           <p:cNvPr id="10" name="">
             <a:extLst xmlns:a="http://schemas.openxmlformats.org/drawingml/2006/main">
               <a:ext uri="{FF2B5EF4-FFF2-40B4-BE49-F238E27FC236}">
-                <a16:creationId xmlns:a16="http://schemas.microsoft.com/office/drawing/2014/main" id="{7994FFF4-A7AA-496C-91EA-267A0BC865AB}"/>
+                <a16:creationId xmlns:a16="http://schemas.microsoft.com/office/drawing/2014/main" id="{0F256DE6-3C98-42B2-95B4-1026AAC3D5E9}"/>
               </a:ext>
             </a:extLst>
           </p:cNvPr>
@@ -25007,7 +29405,7 @@
           <p:cNvPr id="11" name="">
             <a:extLst xmlns:a="http://schemas.openxmlformats.org/drawingml/2006/main">
               <a:ext uri="{FF2B5EF4-FFF2-40B4-BE49-F238E27FC236}">
-                <a16:creationId xmlns:a16="http://schemas.microsoft.com/office/drawing/2014/main" id="{E2203168-A257-4207-AB24-71E94DD473E9}"/>
+                <a16:creationId xmlns:a16="http://schemas.microsoft.com/office/drawing/2014/main" id="{8E3770C8-A8C8-46A2-8EF4-5ED9B4AF838A}"/>
               </a:ext>
             </a:extLst>
           </p:cNvPr>
@@ -25040,7 +29438,7 @@
           <p:cNvPr id="12" name="">
             <a:extLst xmlns:a="http://schemas.openxmlformats.org/drawingml/2006/main">
               <a:ext uri="{FF2B5EF4-FFF2-40B4-BE49-F238E27FC236}">
-                <a16:creationId xmlns:a16="http://schemas.microsoft.com/office/drawing/2014/main" id="{210006E2-3B4F-4EE1-A34D-07CA91D10951}"/>
+                <a16:creationId xmlns:a16="http://schemas.microsoft.com/office/drawing/2014/main" id="{10D39132-1DC6-4EF6-86F0-51DA4E3D6C91}"/>
               </a:ext>
             </a:extLst>
           </p:cNvPr>
@@ -25090,7 +29488,7 @@
           <p:cNvPr id="13" name="">
             <a:extLst xmlns:a="http://schemas.openxmlformats.org/drawingml/2006/main">
               <a:ext uri="{FF2B5EF4-FFF2-40B4-BE49-F238E27FC236}">
-                <a16:creationId xmlns:a16="http://schemas.microsoft.com/office/drawing/2014/main" id="{DDDC187F-226E-484A-9523-C474976807CF}"/>
+                <a16:creationId xmlns:a16="http://schemas.microsoft.com/office/drawing/2014/main" id="{44AFC7AD-4E16-41CB-BFFC-B6600CC0C342}"/>
               </a:ext>
             </a:extLst>
           </p:cNvPr>
@@ -25123,7 +29521,7 @@
           <p:cNvPr id="14" name="">
             <a:extLst xmlns:a="http://schemas.openxmlformats.org/drawingml/2006/main">
               <a:ext uri="{FF2B5EF4-FFF2-40B4-BE49-F238E27FC236}">
-                <a16:creationId xmlns:a16="http://schemas.microsoft.com/office/drawing/2014/main" id="{66B15DC9-0472-4DC1-8F2B-444FF83E369F}"/>
+                <a16:creationId xmlns:a16="http://schemas.microsoft.com/office/drawing/2014/main" id="{108CF7E4-D47D-4DE1-AA85-4E157349499A}"/>
               </a:ext>
             </a:extLst>
           </p:cNvPr>
@@ -25173,7 +29571,7 @@
           <p:cNvPr id="15" name="">
             <a:extLst xmlns:a="http://schemas.openxmlformats.org/drawingml/2006/main">
               <a:ext uri="{FF2B5EF4-FFF2-40B4-BE49-F238E27FC236}">
-                <a16:creationId xmlns:a16="http://schemas.microsoft.com/office/drawing/2014/main" id="{9121AFD2-76DD-4A0B-8828-FF8B43D106D0}"/>
+                <a16:creationId xmlns:a16="http://schemas.microsoft.com/office/drawing/2014/main" id="{E1CCEF6E-934C-4E2A-A5A8-5D3148B6529E}"/>
               </a:ext>
             </a:extLst>
           </p:cNvPr>
@@ -25206,7 +29604,7 @@
           <p:cNvPr id="16" name="">
             <a:extLst xmlns:a="http://schemas.openxmlformats.org/drawingml/2006/main">
               <a:ext uri="{FF2B5EF4-FFF2-40B4-BE49-F238E27FC236}">
-                <a16:creationId xmlns:a16="http://schemas.microsoft.com/office/drawing/2014/main" id="{9F3966E5-D038-44FA-8222-C69104610FCE}"/>
+                <a16:creationId xmlns:a16="http://schemas.microsoft.com/office/drawing/2014/main" id="{78E615C3-770C-4D1C-BCAF-655E4BCB2DB5}"/>
               </a:ext>
             </a:extLst>
           </p:cNvPr>
@@ -25254,7 +29652,7 @@
     </p:spTree>
     <p:extLst>
       <p:ext uri="{BB962C8B-B14F-4D97-AF65-F5344CB8AC3E}">
-        <p14:creationId xmlns:p14="http://schemas.microsoft.com/office/powerpoint/2010/main" val="1690273608"/>
+        <p14:creationId xmlns:p14="http://schemas.microsoft.com/office/powerpoint/2010/main" val="794535421"/>
       </p:ext>
     </p:extLst>
   </p:cSld>
@@ -25285,7 +29683,7 @@
           <p:cNvPr id="16" name="">
             <a:extLst xmlns:a="http://schemas.openxmlformats.org/drawingml/2006/main">
               <a:ext uri="{FF2B5EF4-FFF2-40B4-BE49-F238E27FC236}">
-                <a16:creationId xmlns:a16="http://schemas.microsoft.com/office/drawing/2014/main" id="{57563795-C959-4E5F-8E56-0A442B72A9D6}"/>
+                <a16:creationId xmlns:a16="http://schemas.microsoft.com/office/drawing/2014/main" id="{A20FC6F7-41DC-4950-BDAC-C3771EACE349}"/>
               </a:ext>
             </a:extLst>
           </p:cNvPr>
@@ -25335,7 +29733,7 @@
           <p:cNvPr id="2" name="">
             <a:extLst xmlns:a="http://schemas.openxmlformats.org/drawingml/2006/main">
               <a:ext uri="{FF2B5EF4-FFF2-40B4-BE49-F238E27FC236}">
-                <a16:creationId xmlns:a16="http://schemas.microsoft.com/office/drawing/2014/main" id="{179508A8-66BE-4F58-9538-8FA973C546E1}"/>
+                <a16:creationId xmlns:a16="http://schemas.microsoft.com/office/drawing/2014/main" id="{35C01CF4-1A59-4D6A-AFEE-E7679E025A54}"/>
               </a:ext>
             </a:extLst>
           </p:cNvPr>
@@ -25385,7 +29783,7 @@
           <p:cNvPr id="3" name="">
             <a:extLst xmlns:a="http://schemas.openxmlformats.org/drawingml/2006/main">
               <a:ext uri="{FF2B5EF4-FFF2-40B4-BE49-F238E27FC236}">
-                <a16:creationId xmlns:a16="http://schemas.microsoft.com/office/drawing/2014/main" id="{88D4ADE2-367F-4C55-94EE-88B5646911AB}"/>
+                <a16:creationId xmlns:a16="http://schemas.microsoft.com/office/drawing/2014/main" id="{9414563C-FA4A-4093-B27F-ED9232B88A4F}"/>
               </a:ext>
             </a:extLst>
           </p:cNvPr>
@@ -25418,7 +29816,7 @@
           <p:cNvPr id="4" name="">
             <a:extLst xmlns:a="http://schemas.openxmlformats.org/drawingml/2006/main">
               <a:ext uri="{FF2B5EF4-FFF2-40B4-BE49-F238E27FC236}">
-                <a16:creationId xmlns:a16="http://schemas.microsoft.com/office/drawing/2014/main" id="{F0675854-4FD8-4D4B-A0C1-A097C5829747}"/>
+                <a16:creationId xmlns:a16="http://schemas.microsoft.com/office/drawing/2014/main" id="{0E1151A3-3648-4BA3-A85C-DB41D5F4E5E3}"/>
               </a:ext>
             </a:extLst>
           </p:cNvPr>
@@ -25468,7 +29866,7 @@
           <p:cNvPr id="5" name="">
             <a:extLst xmlns:a="http://schemas.openxmlformats.org/drawingml/2006/main">
               <a:ext uri="{FF2B5EF4-FFF2-40B4-BE49-F238E27FC236}">
-                <a16:creationId xmlns:a16="http://schemas.microsoft.com/office/drawing/2014/main" id="{DBE7FCDD-75C3-4234-B4F9-AAB3520434A3}"/>
+                <a16:creationId xmlns:a16="http://schemas.microsoft.com/office/drawing/2014/main" id="{0D225F53-99F7-4167-9A20-EC5F86C870B0}"/>
               </a:ext>
             </a:extLst>
           </p:cNvPr>
@@ -25522,7 +29920,7 @@
           <p:nvPr/>
         </p:nvPicPr>
         <p:blipFill>
-          <a:blip xmlns:r="http://schemas.openxmlformats.org/officeDocument/2006/relationships" xmlns:a="http://schemas.openxmlformats.org/drawingml/2006/main" r:embed="R25b90b851f224ff0"/>
+          <a:blip xmlns:r="http://schemas.openxmlformats.org/officeDocument/2006/relationships" xmlns:a="http://schemas.openxmlformats.org/drawingml/2006/main" r:embed="Re922cfc565ff4d1e"/>
           <a:stretch xmlns:a="http://schemas.openxmlformats.org/drawingml/2006/main"/>
         </p:blipFill>
         <p:spPr>
@@ -25540,7 +29938,7 @@
           <p:cNvPr id="7" name="">
             <a:extLst xmlns:a="http://schemas.openxmlformats.org/drawingml/2006/main">
               <a:ext uri="{FF2B5EF4-FFF2-40B4-BE49-F238E27FC236}">
-                <a16:creationId xmlns:a16="http://schemas.microsoft.com/office/drawing/2014/main" id="{F40A0093-0F6F-4255-94BA-F76058F6B71C}"/>
+                <a16:creationId xmlns:a16="http://schemas.microsoft.com/office/drawing/2014/main" id="{8241A11B-D30F-4ACD-8314-DC083316A1BF}"/>
               </a:ext>
             </a:extLst>
           </p:cNvPr>
@@ -25573,7 +29971,7 @@
           <p:cNvPr id="8" name="">
             <a:extLst xmlns:a="http://schemas.openxmlformats.org/drawingml/2006/main">
               <a:ext uri="{FF2B5EF4-FFF2-40B4-BE49-F238E27FC236}">
-                <a16:creationId xmlns:a16="http://schemas.microsoft.com/office/drawing/2014/main" id="{49C79496-C154-4DA9-83F8-416EE3C4CAA4}"/>
+                <a16:creationId xmlns:a16="http://schemas.microsoft.com/office/drawing/2014/main" id="{6D7E670A-2486-4756-B65E-D58DB7C9AD20}"/>
               </a:ext>
             </a:extLst>
           </p:cNvPr>
@@ -25623,7 +30021,7 @@
           <p:cNvPr id="9" name="">
             <a:extLst xmlns:a="http://schemas.openxmlformats.org/drawingml/2006/main">
               <a:ext uri="{FF2B5EF4-FFF2-40B4-BE49-F238E27FC236}">
-                <a16:creationId xmlns:a16="http://schemas.microsoft.com/office/drawing/2014/main" id="{7C83BC26-0641-4A4A-8304-99D45CF131CD}"/>
+                <a16:creationId xmlns:a16="http://schemas.microsoft.com/office/drawing/2014/main" id="{D58FDFCE-483E-4FD7-B96C-2B1ADA71729D}"/>
               </a:ext>
             </a:extLst>
           </p:cNvPr>
@@ -25656,7 +30054,7 @@
           <p:cNvPr id="10" name="">
             <a:extLst xmlns:a="http://schemas.openxmlformats.org/drawingml/2006/main">
               <a:ext uri="{FF2B5EF4-FFF2-40B4-BE49-F238E27FC236}">
-                <a16:creationId xmlns:a16="http://schemas.microsoft.com/office/drawing/2014/main" id="{B66AA8D9-1093-4B14-AAFD-C65AB7436863}"/>
+                <a16:creationId xmlns:a16="http://schemas.microsoft.com/office/drawing/2014/main" id="{DB97CA65-1BC0-4858-B825-8B16373ED514}"/>
               </a:ext>
             </a:extLst>
           </p:cNvPr>
@@ -25706,7 +30104,7 @@
           <p:cNvPr id="11" name="">
             <a:extLst xmlns:a="http://schemas.openxmlformats.org/drawingml/2006/main">
               <a:ext uri="{FF2B5EF4-FFF2-40B4-BE49-F238E27FC236}">
-                <a16:creationId xmlns:a16="http://schemas.microsoft.com/office/drawing/2014/main" id="{48E9888A-40F0-4D40-9CA1-20E22E2A36EC}"/>
+                <a16:creationId xmlns:a16="http://schemas.microsoft.com/office/drawing/2014/main" id="{8C3D8649-FC5E-4118-ADE8-B6B6E959554D}"/>
               </a:ext>
             </a:extLst>
           </p:cNvPr>
@@ -25739,7 +30137,7 @@
           <p:cNvPr id="12" name="">
             <a:extLst xmlns:a="http://schemas.openxmlformats.org/drawingml/2006/main">
               <a:ext uri="{FF2B5EF4-FFF2-40B4-BE49-F238E27FC236}">
-                <a16:creationId xmlns:a16="http://schemas.microsoft.com/office/drawing/2014/main" id="{66F45B90-5F41-47AE-B459-5E6FE91E287C}"/>
+                <a16:creationId xmlns:a16="http://schemas.microsoft.com/office/drawing/2014/main" id="{79D0BB7E-9098-4F83-B61B-FCCD67EA4831}"/>
               </a:ext>
             </a:extLst>
           </p:cNvPr>
@@ -25789,7 +30187,7 @@
           <p:cNvPr id="13" name="">
             <a:extLst xmlns:a="http://schemas.openxmlformats.org/drawingml/2006/main">
               <a:ext uri="{FF2B5EF4-FFF2-40B4-BE49-F238E27FC236}">
-                <a16:creationId xmlns:a16="http://schemas.microsoft.com/office/drawing/2014/main" id="{3E97A921-B287-48B3-8CBE-A4CEBDB0C3B2}"/>
+                <a16:creationId xmlns:a16="http://schemas.microsoft.com/office/drawing/2014/main" id="{747CA053-9590-47D8-A12C-F7E26E0FFD22}"/>
               </a:ext>
             </a:extLst>
           </p:cNvPr>
@@ -25822,7 +30220,7 @@
           <p:cNvPr id="14" name="">
             <a:extLst xmlns:a="http://schemas.openxmlformats.org/drawingml/2006/main">
               <a:ext uri="{FF2B5EF4-FFF2-40B4-BE49-F238E27FC236}">
-                <a16:creationId xmlns:a16="http://schemas.microsoft.com/office/drawing/2014/main" id="{9D0B01EF-8047-4C32-8FC2-238508F6CFC6}"/>
+                <a16:creationId xmlns:a16="http://schemas.microsoft.com/office/drawing/2014/main" id="{7E65CE2C-1F06-4AC2-9025-CEFCC364F4B1}"/>
               </a:ext>
             </a:extLst>
           </p:cNvPr>
@@ -25872,7 +30270,7 @@
           <p:cNvPr id="15" name="">
             <a:extLst xmlns:a="http://schemas.openxmlformats.org/drawingml/2006/main">
               <a:ext uri="{FF2B5EF4-FFF2-40B4-BE49-F238E27FC236}">
-                <a16:creationId xmlns:a16="http://schemas.microsoft.com/office/drawing/2014/main" id="{DA543368-C99D-4244-BFC7-3FD975D4F592}"/>
+                <a16:creationId xmlns:a16="http://schemas.microsoft.com/office/drawing/2014/main" id="{19C8EA8B-86F2-44FC-B5C2-6C26C86FE9CB}"/>
               </a:ext>
             </a:extLst>
           </p:cNvPr>
@@ -25920,7 +30318,7 @@
     </p:spTree>
     <p:extLst>
       <p:ext uri="{BB962C8B-B14F-4D97-AF65-F5344CB8AC3E}">
-        <p14:creationId xmlns:p14="http://schemas.microsoft.com/office/powerpoint/2010/main" val="1573846542"/>
+        <p14:creationId xmlns:p14="http://schemas.microsoft.com/office/powerpoint/2010/main" val="1562229810"/>
       </p:ext>
     </p:extLst>
   </p:cSld>
@@ -25951,7 +30349,7 @@
           <p:cNvPr id="16" name="">
             <a:extLst xmlns:a="http://schemas.openxmlformats.org/drawingml/2006/main">
               <a:ext uri="{FF2B5EF4-FFF2-40B4-BE49-F238E27FC236}">
-                <a16:creationId xmlns:a16="http://schemas.microsoft.com/office/drawing/2014/main" id="{0044B9E2-71C5-4896-9F6E-700756EAE4F8}"/>
+                <a16:creationId xmlns:a16="http://schemas.microsoft.com/office/drawing/2014/main" id="{7CF3296D-CC50-4AAD-BDFF-3CCB9390E662}"/>
               </a:ext>
             </a:extLst>
           </p:cNvPr>
@@ -26001,7 +30399,7 @@
           <p:cNvPr id="2" name="">
             <a:extLst xmlns:a="http://schemas.openxmlformats.org/drawingml/2006/main">
               <a:ext uri="{FF2B5EF4-FFF2-40B4-BE49-F238E27FC236}">
-                <a16:creationId xmlns:a16="http://schemas.microsoft.com/office/drawing/2014/main" id="{BC15C3DD-F00F-43AC-B84A-45A6FD9B3425}"/>
+                <a16:creationId xmlns:a16="http://schemas.microsoft.com/office/drawing/2014/main" id="{F61DBDC4-77AC-4C89-9652-DE7E0A7A9FA9}"/>
               </a:ext>
             </a:extLst>
           </p:cNvPr>
@@ -26051,7 +30449,7 @@
           <p:cNvPr id="3" name="">
             <a:extLst xmlns:a="http://schemas.openxmlformats.org/drawingml/2006/main">
               <a:ext uri="{FF2B5EF4-FFF2-40B4-BE49-F238E27FC236}">
-                <a16:creationId xmlns:a16="http://schemas.microsoft.com/office/drawing/2014/main" id="{25C88683-BD59-4973-85D7-F9915140367F}"/>
+                <a16:creationId xmlns:a16="http://schemas.microsoft.com/office/drawing/2014/main" id="{F98CC843-472D-41A0-8B03-E666CFA6F844}"/>
               </a:ext>
             </a:extLst>
           </p:cNvPr>
@@ -26084,7 +30482,7 @@
           <p:cNvPr id="4" name="">
             <a:extLst xmlns:a="http://schemas.openxmlformats.org/drawingml/2006/main">
               <a:ext uri="{FF2B5EF4-FFF2-40B4-BE49-F238E27FC236}">
-                <a16:creationId xmlns:a16="http://schemas.microsoft.com/office/drawing/2014/main" id="{B9C03ECF-9733-4DC3-BF99-647FA5A1A93A}"/>
+                <a16:creationId xmlns:a16="http://schemas.microsoft.com/office/drawing/2014/main" id="{0D43708E-00EC-48C2-8DC7-494510D82E39}"/>
               </a:ext>
             </a:extLst>
           </p:cNvPr>
@@ -26134,7 +30532,7 @@
           <p:cNvPr id="5" name="">
             <a:extLst xmlns:a="http://schemas.openxmlformats.org/drawingml/2006/main">
               <a:ext uri="{FF2B5EF4-FFF2-40B4-BE49-F238E27FC236}">
-                <a16:creationId xmlns:a16="http://schemas.microsoft.com/office/drawing/2014/main" id="{7267AA9D-7199-44D3-9A3D-1CC4E7E125F2}"/>
+                <a16:creationId xmlns:a16="http://schemas.microsoft.com/office/drawing/2014/main" id="{7C08889B-285D-45E4-A516-0A6D738DC62B}"/>
               </a:ext>
             </a:extLst>
           </p:cNvPr>
@@ -26188,7 +30586,7 @@
           <p:nvPr/>
         </p:nvPicPr>
         <p:blipFill>
-          <a:blip xmlns:r="http://schemas.openxmlformats.org/officeDocument/2006/relationships" xmlns:a="http://schemas.openxmlformats.org/drawingml/2006/main" r:embed="Rd8378ba788fd4aa3"/>
+          <a:blip xmlns:r="http://schemas.openxmlformats.org/officeDocument/2006/relationships" xmlns:a="http://schemas.openxmlformats.org/drawingml/2006/main" r:embed="Re4700eac8d7e460e"/>
           <a:stretch xmlns:a="http://schemas.openxmlformats.org/drawingml/2006/main"/>
         </p:blipFill>
         <p:spPr>
@@ -26206,7 +30604,7 @@
           <p:cNvPr id="7" name="">
             <a:extLst xmlns:a="http://schemas.openxmlformats.org/drawingml/2006/main">
               <a:ext uri="{FF2B5EF4-FFF2-40B4-BE49-F238E27FC236}">
-                <a16:creationId xmlns:a16="http://schemas.microsoft.com/office/drawing/2014/main" id="{813107E4-7743-4006-ABA6-C8911E9DD5E0}"/>
+                <a16:creationId xmlns:a16="http://schemas.microsoft.com/office/drawing/2014/main" id="{AA704655-9904-4DE5-9D73-B4F0AD51E987}"/>
               </a:ext>
             </a:extLst>
           </p:cNvPr>
@@ -26239,7 +30637,7 @@
           <p:cNvPr id="8" name="">
             <a:extLst xmlns:a="http://schemas.openxmlformats.org/drawingml/2006/main">
               <a:ext uri="{FF2B5EF4-FFF2-40B4-BE49-F238E27FC236}">
-                <a16:creationId xmlns:a16="http://schemas.microsoft.com/office/drawing/2014/main" id="{389B5D2C-EA57-4A84-8AFB-D7DB8AED0BA5}"/>
+                <a16:creationId xmlns:a16="http://schemas.microsoft.com/office/drawing/2014/main" id="{D9CDD7E4-35FC-4134-94AA-F286DB95D435}"/>
               </a:ext>
             </a:extLst>
           </p:cNvPr>
@@ -26289,7 +30687,7 @@
           <p:cNvPr id="9" name="">
             <a:extLst xmlns:a="http://schemas.openxmlformats.org/drawingml/2006/main">
               <a:ext uri="{FF2B5EF4-FFF2-40B4-BE49-F238E27FC236}">
-                <a16:creationId xmlns:a16="http://schemas.microsoft.com/office/drawing/2014/main" id="{F81F6C80-AEE8-44CF-BE78-2A1D4F41702A}"/>
+                <a16:creationId xmlns:a16="http://schemas.microsoft.com/office/drawing/2014/main" id="{189B12E8-E3C7-43E1-BC82-EA50127B803F}"/>
               </a:ext>
             </a:extLst>
           </p:cNvPr>
@@ -26322,7 +30720,7 @@
           <p:cNvPr id="10" name="">
             <a:extLst xmlns:a="http://schemas.openxmlformats.org/drawingml/2006/main">
               <a:ext uri="{FF2B5EF4-FFF2-40B4-BE49-F238E27FC236}">
-                <a16:creationId xmlns:a16="http://schemas.microsoft.com/office/drawing/2014/main" id="{10C21F77-24E1-4BC5-9CC7-8BD5E057B361}"/>
+                <a16:creationId xmlns:a16="http://schemas.microsoft.com/office/drawing/2014/main" id="{321A2F4C-064B-4141-97C4-1A7FCD7A6ED2}"/>
               </a:ext>
             </a:extLst>
           </p:cNvPr>
@@ -26372,7 +30770,7 @@
           <p:cNvPr id="11" name="">
             <a:extLst xmlns:a="http://schemas.openxmlformats.org/drawingml/2006/main">
               <a:ext uri="{FF2B5EF4-FFF2-40B4-BE49-F238E27FC236}">
-                <a16:creationId xmlns:a16="http://schemas.microsoft.com/office/drawing/2014/main" id="{DB521ACE-C766-4AF6-B29A-08F533C85E23}"/>
+                <a16:creationId xmlns:a16="http://schemas.microsoft.com/office/drawing/2014/main" id="{528DBC3A-4B06-4AA5-8633-2A4B7F9026F0}"/>
               </a:ext>
             </a:extLst>
           </p:cNvPr>
@@ -26405,7 +30803,7 @@
           <p:cNvPr id="12" name="">
             <a:extLst xmlns:a="http://schemas.openxmlformats.org/drawingml/2006/main">
               <a:ext uri="{FF2B5EF4-FFF2-40B4-BE49-F238E27FC236}">
-                <a16:creationId xmlns:a16="http://schemas.microsoft.com/office/drawing/2014/main" id="{03127ADF-02AD-4858-A444-30D7298901FC}"/>
+                <a16:creationId xmlns:a16="http://schemas.microsoft.com/office/drawing/2014/main" id="{D76F711A-7E3D-40DC-9C32-B1FFEBCACC0C}"/>
               </a:ext>
             </a:extLst>
           </p:cNvPr>
@@ -26455,7 +30853,7 @@
           <p:cNvPr id="13" name="">
             <a:extLst xmlns:a="http://schemas.openxmlformats.org/drawingml/2006/main">
               <a:ext uri="{FF2B5EF4-FFF2-40B4-BE49-F238E27FC236}">
-                <a16:creationId xmlns:a16="http://schemas.microsoft.com/office/drawing/2014/main" id="{66EAB33E-EC45-474D-A4F1-01DD2D5CDD8F}"/>
+                <a16:creationId xmlns:a16="http://schemas.microsoft.com/office/drawing/2014/main" id="{17DF830A-BFC4-4764-A6D3-D1C8473BDC8F}"/>
               </a:ext>
             </a:extLst>
           </p:cNvPr>
@@ -26488,7 +30886,7 @@
           <p:cNvPr id="14" name="">
             <a:extLst xmlns:a="http://schemas.openxmlformats.org/drawingml/2006/main">
               <a:ext uri="{FF2B5EF4-FFF2-40B4-BE49-F238E27FC236}">
-                <a16:creationId xmlns:a16="http://schemas.microsoft.com/office/drawing/2014/main" id="{296DF343-8283-47CE-A23E-43765A755D05}"/>
+                <a16:creationId xmlns:a16="http://schemas.microsoft.com/office/drawing/2014/main" id="{555DC20B-2451-4D3C-8D76-2353AFF9A95F}"/>
               </a:ext>
             </a:extLst>
           </p:cNvPr>
@@ -26538,7 +30936,7 @@
           <p:cNvPr id="15" name="">
             <a:extLst xmlns:a="http://schemas.openxmlformats.org/drawingml/2006/main">
               <a:ext uri="{FF2B5EF4-FFF2-40B4-BE49-F238E27FC236}">
-                <a16:creationId xmlns:a16="http://schemas.microsoft.com/office/drawing/2014/main" id="{A81C6B0D-A8E8-4975-BBE3-57B736FD0B6B}"/>
+                <a16:creationId xmlns:a16="http://schemas.microsoft.com/office/drawing/2014/main" id="{4DCD6AA0-0FC9-46E6-AEEB-1BCCF5EEAB25}"/>
               </a:ext>
             </a:extLst>
           </p:cNvPr>
@@ -26586,7 +30984,7 @@
     </p:spTree>
     <p:extLst>
       <p:ext uri="{BB962C8B-B14F-4D97-AF65-F5344CB8AC3E}">
-        <p14:creationId xmlns:p14="http://schemas.microsoft.com/office/powerpoint/2010/main" val="662374459"/>
+        <p14:creationId xmlns:p14="http://schemas.microsoft.com/office/powerpoint/2010/main" val="636671151"/>
       </p:ext>
     </p:extLst>
   </p:cSld>
@@ -26617,7 +31015,7 @@
           <p:cNvPr id="14" name="">
             <a:extLst xmlns:a="http://schemas.openxmlformats.org/drawingml/2006/main">
               <a:ext uri="{FF2B5EF4-FFF2-40B4-BE49-F238E27FC236}">
-                <a16:creationId xmlns:a16="http://schemas.microsoft.com/office/drawing/2014/main" id="{8CB0417A-BFEB-4643-92C3-E03031DE9F06}"/>
+                <a16:creationId xmlns:a16="http://schemas.microsoft.com/office/drawing/2014/main" id="{EF3E0DF1-7257-4CBF-B0DE-D7B22C06C139}"/>
               </a:ext>
             </a:extLst>
           </p:cNvPr>
@@ -26667,7 +31065,7 @@
           <p:cNvPr id="2" name="">
             <a:extLst xmlns:a="http://schemas.openxmlformats.org/drawingml/2006/main">
               <a:ext uri="{FF2B5EF4-FFF2-40B4-BE49-F238E27FC236}">
-                <a16:creationId xmlns:a16="http://schemas.microsoft.com/office/drawing/2014/main" id="{1D669593-8A4B-43C5-9F60-A9F2E98A1D2F}"/>
+                <a16:creationId xmlns:a16="http://schemas.microsoft.com/office/drawing/2014/main" id="{C2750073-63EE-4673-BD96-6F47C18151BE}"/>
               </a:ext>
             </a:extLst>
           </p:cNvPr>
@@ -26717,7 +31115,7 @@
           <p:cNvPr id="3" name="">
             <a:extLst xmlns:a="http://schemas.openxmlformats.org/drawingml/2006/main">
               <a:ext uri="{FF2B5EF4-FFF2-40B4-BE49-F238E27FC236}">
-                <a16:creationId xmlns:a16="http://schemas.microsoft.com/office/drawing/2014/main" id="{B7074F34-1590-45EA-BFCE-438193E9CAF4}"/>
+                <a16:creationId xmlns:a16="http://schemas.microsoft.com/office/drawing/2014/main" id="{D658472F-92A9-4EA0-AB54-A47E6299572D}"/>
               </a:ext>
             </a:extLst>
           </p:cNvPr>
@@ -26750,7 +31148,7 @@
           <p:cNvPr id="4" name="">
             <a:extLst xmlns:a="http://schemas.openxmlformats.org/drawingml/2006/main">
               <a:ext uri="{FF2B5EF4-FFF2-40B4-BE49-F238E27FC236}">
-                <a16:creationId xmlns:a16="http://schemas.microsoft.com/office/drawing/2014/main" id="{56195DD7-1084-43E0-B238-7A158E09BA17}"/>
+                <a16:creationId xmlns:a16="http://schemas.microsoft.com/office/drawing/2014/main" id="{6B103C0C-463C-43FC-BFF5-6C3601F2251B}"/>
               </a:ext>
             </a:extLst>
           </p:cNvPr>
@@ -26800,7 +31198,7 @@
           <p:cNvPr id="5" name="">
             <a:extLst xmlns:a="http://schemas.openxmlformats.org/drawingml/2006/main">
               <a:ext uri="{FF2B5EF4-FFF2-40B4-BE49-F238E27FC236}">
-                <a16:creationId xmlns:a16="http://schemas.microsoft.com/office/drawing/2014/main" id="{3449809B-3449-47D6-9B14-FDDE5B104D2D}"/>
+                <a16:creationId xmlns:a16="http://schemas.microsoft.com/office/drawing/2014/main" id="{010EB082-45F8-453C-836E-5E246F7C2EE3}"/>
               </a:ext>
             </a:extLst>
           </p:cNvPr>
@@ -26854,7 +31252,7 @@
           <p:nvPr/>
         </p:nvPicPr>
         <p:blipFill>
-          <a:blip xmlns:r="http://schemas.openxmlformats.org/officeDocument/2006/relationships" xmlns:a="http://schemas.openxmlformats.org/drawingml/2006/main" r:embed="Rc3afa726d70a4a77"/>
+          <a:blip xmlns:r="http://schemas.openxmlformats.org/officeDocument/2006/relationships" xmlns:a="http://schemas.openxmlformats.org/drawingml/2006/main" r:embed="R798a37a1d219420a"/>
           <a:stretch xmlns:a="http://schemas.openxmlformats.org/drawingml/2006/main"/>
         </p:blipFill>
         <p:spPr>
@@ -26872,7 +31270,7 @@
           <p:cNvPr id="7" name="">
             <a:extLst xmlns:a="http://schemas.openxmlformats.org/drawingml/2006/main">
               <a:ext uri="{FF2B5EF4-FFF2-40B4-BE49-F238E27FC236}">
-                <a16:creationId xmlns:a16="http://schemas.microsoft.com/office/drawing/2014/main" id="{D9C461F9-A3A2-4428-B058-62029A66F974}"/>
+                <a16:creationId xmlns:a16="http://schemas.microsoft.com/office/drawing/2014/main" id="{8B0D2995-4367-433F-8A2B-EEEA57819D50}"/>
               </a:ext>
             </a:extLst>
           </p:cNvPr>
@@ -26905,7 +31303,7 @@
           <p:cNvPr id="8" name="">
             <a:extLst xmlns:a="http://schemas.openxmlformats.org/drawingml/2006/main">
               <a:ext uri="{FF2B5EF4-FFF2-40B4-BE49-F238E27FC236}">
-                <a16:creationId xmlns:a16="http://schemas.microsoft.com/office/drawing/2014/main" id="{9D01177E-9192-425C-AA24-F3A8D90DC461}"/>
+                <a16:creationId xmlns:a16="http://schemas.microsoft.com/office/drawing/2014/main" id="{79C489FD-F583-4030-BEE3-0BA95A70FEF3}"/>
               </a:ext>
             </a:extLst>
           </p:cNvPr>
@@ -26955,7 +31353,7 @@
           <p:cNvPr id="9" name="">
             <a:extLst xmlns:a="http://schemas.openxmlformats.org/drawingml/2006/main">
               <a:ext uri="{FF2B5EF4-FFF2-40B4-BE49-F238E27FC236}">
-                <a16:creationId xmlns:a16="http://schemas.microsoft.com/office/drawing/2014/main" id="{FD92A052-CDD2-4C95-8D22-2E7D3147912E}"/>
+                <a16:creationId xmlns:a16="http://schemas.microsoft.com/office/drawing/2014/main" id="{C2DDDD41-5EA6-4016-8E75-FC7817EABB92}"/>
               </a:ext>
             </a:extLst>
           </p:cNvPr>
@@ -26988,7 +31386,7 @@
           <p:cNvPr id="10" name="">
             <a:extLst xmlns:a="http://schemas.openxmlformats.org/drawingml/2006/main">
               <a:ext uri="{FF2B5EF4-FFF2-40B4-BE49-F238E27FC236}">
-                <a16:creationId xmlns:a16="http://schemas.microsoft.com/office/drawing/2014/main" id="{F4D81C96-BA52-49A4-B82A-6AC9AA13F633}"/>
+                <a16:creationId xmlns:a16="http://schemas.microsoft.com/office/drawing/2014/main" id="{9D9571CF-A678-4B7E-8A75-07BE48FD8600}"/>
               </a:ext>
             </a:extLst>
           </p:cNvPr>
@@ -27038,7 +31436,7 @@
           <p:cNvPr id="11" name="">
             <a:extLst xmlns:a="http://schemas.openxmlformats.org/drawingml/2006/main">
               <a:ext uri="{FF2B5EF4-FFF2-40B4-BE49-F238E27FC236}">
-                <a16:creationId xmlns:a16="http://schemas.microsoft.com/office/drawing/2014/main" id="{14B45E62-CAF1-4B21-A6A0-0581A12CE151}"/>
+                <a16:creationId xmlns:a16="http://schemas.microsoft.com/office/drawing/2014/main" id="{AA48E051-5D04-4D4E-95D4-9617100B09C3}"/>
               </a:ext>
             </a:extLst>
           </p:cNvPr>
@@ -27071,7 +31469,7 @@
           <p:cNvPr id="12" name="">
             <a:extLst xmlns:a="http://schemas.openxmlformats.org/drawingml/2006/main">
               <a:ext uri="{FF2B5EF4-FFF2-40B4-BE49-F238E27FC236}">
-                <a16:creationId xmlns:a16="http://schemas.microsoft.com/office/drawing/2014/main" id="{6615C90A-37B8-4BEC-91F8-9A69C07A03A1}"/>
+                <a16:creationId xmlns:a16="http://schemas.microsoft.com/office/drawing/2014/main" id="{B60CFB8F-22CF-471B-9E92-ADDCD7ADAC19}"/>
               </a:ext>
             </a:extLst>
           </p:cNvPr>
@@ -27121,7 +31519,7 @@
           <p:cNvPr id="13" name="">
             <a:extLst xmlns:a="http://schemas.openxmlformats.org/drawingml/2006/main">
               <a:ext uri="{FF2B5EF4-FFF2-40B4-BE49-F238E27FC236}">
-                <a16:creationId xmlns:a16="http://schemas.microsoft.com/office/drawing/2014/main" id="{BFE2B7DE-1729-429E-ABA0-1F029882E2EE}"/>
+                <a16:creationId xmlns:a16="http://schemas.microsoft.com/office/drawing/2014/main" id="{FDD7E151-7CFC-4703-B222-E6CC1A44E56C}"/>
               </a:ext>
             </a:extLst>
           </p:cNvPr>
@@ -27169,7 +31567,7 @@
     </p:spTree>
     <p:extLst>
       <p:ext uri="{BB962C8B-B14F-4D97-AF65-F5344CB8AC3E}">
-        <p14:creationId xmlns:p14="http://schemas.microsoft.com/office/powerpoint/2010/main" val="1951463452"/>
+        <p14:creationId xmlns:p14="http://schemas.microsoft.com/office/powerpoint/2010/main" val="888228759"/>
       </p:ext>
     </p:extLst>
   </p:cSld>
